--- a/Doc/CK-AppIdentity.pptx
+++ b/Doc/CK-AppIdentity.pptx
@@ -9,7 +9,20 @@
     <p:sldId id="257" r:id="rId3"/>
     <p:sldId id="259" r:id="rId4"/>
     <p:sldId id="258" r:id="rId5"/>
-    <p:sldId id="260" r:id="rId6"/>
+    <p:sldId id="262" r:id="rId6"/>
+    <p:sldId id="264" r:id="rId7"/>
+    <p:sldId id="269" r:id="rId8"/>
+    <p:sldId id="265" r:id="rId9"/>
+    <p:sldId id="263" r:id="rId10"/>
+    <p:sldId id="266" r:id="rId11"/>
+    <p:sldId id="267" r:id="rId12"/>
+    <p:sldId id="268" r:id="rId13"/>
+    <p:sldId id="270" r:id="rId14"/>
+    <p:sldId id="271" r:id="rId15"/>
+    <p:sldId id="272" r:id="rId16"/>
+    <p:sldId id="273" r:id="rId17"/>
+    <p:sldId id="274" r:id="rId18"/>
+    <p:sldId id="275" r:id="rId19"/>
   </p:sldIdLst>
   <p:sldSz cx="12192000" cy="6858000"/>
   <p:notesSz cx="6858000" cy="9144000"/>
@@ -108,6 +121,11 @@
       </a:defRPr>
     </a:lvl9pPr>
   </p:defaultTextStyle>
+  <p:extLst>
+    <p:ext uri="{EFAFB233-063F-42B5-8137-9DF3F51BA10A}">
+      <p15:sldGuideLst xmlns:p15="http://schemas.microsoft.com/office/powerpoint/2012/main"/>
+    </p:ext>
+  </p:extLst>
 </p:presentation>
 </file>
 
@@ -258,7 +276,7 @@
           <a:p>
             <a:fld id="{7D1F2140-8D48-49AC-AD8D-683E6FF4DC34}" type="datetimeFigureOut">
               <a:rPr lang="en-US" smtClean="0"/>
-              <a:t>3/8/2023</a:t>
+              <a:t>3/11/2023</a:t>
             </a:fld>
             <a:endParaRPr lang="en-US"/>
           </a:p>
@@ -456,7 +474,7 @@
           <a:p>
             <a:fld id="{7D1F2140-8D48-49AC-AD8D-683E6FF4DC34}" type="datetimeFigureOut">
               <a:rPr lang="en-US" smtClean="0"/>
-              <a:t>3/8/2023</a:t>
+              <a:t>3/11/2023</a:t>
             </a:fld>
             <a:endParaRPr lang="en-US"/>
           </a:p>
@@ -664,7 +682,7 @@
           <a:p>
             <a:fld id="{7D1F2140-8D48-49AC-AD8D-683E6FF4DC34}" type="datetimeFigureOut">
               <a:rPr lang="en-US" smtClean="0"/>
-              <a:t>3/8/2023</a:t>
+              <a:t>3/11/2023</a:t>
             </a:fld>
             <a:endParaRPr lang="en-US"/>
           </a:p>
@@ -862,7 +880,7 @@
           <a:p>
             <a:fld id="{7D1F2140-8D48-49AC-AD8D-683E6FF4DC34}" type="datetimeFigureOut">
               <a:rPr lang="en-US" smtClean="0"/>
-              <a:t>3/8/2023</a:t>
+              <a:t>3/11/2023</a:t>
             </a:fld>
             <a:endParaRPr lang="en-US"/>
           </a:p>
@@ -1137,7 +1155,7 @@
           <a:p>
             <a:fld id="{7D1F2140-8D48-49AC-AD8D-683E6FF4DC34}" type="datetimeFigureOut">
               <a:rPr lang="en-US" smtClean="0"/>
-              <a:t>3/8/2023</a:t>
+              <a:t>3/11/2023</a:t>
             </a:fld>
             <a:endParaRPr lang="en-US"/>
           </a:p>
@@ -1402,7 +1420,7 @@
           <a:p>
             <a:fld id="{7D1F2140-8D48-49AC-AD8D-683E6FF4DC34}" type="datetimeFigureOut">
               <a:rPr lang="en-US" smtClean="0"/>
-              <a:t>3/8/2023</a:t>
+              <a:t>3/11/2023</a:t>
             </a:fld>
             <a:endParaRPr lang="en-US"/>
           </a:p>
@@ -1814,7 +1832,7 @@
           <a:p>
             <a:fld id="{7D1F2140-8D48-49AC-AD8D-683E6FF4DC34}" type="datetimeFigureOut">
               <a:rPr lang="en-US" smtClean="0"/>
-              <a:t>3/8/2023</a:t>
+              <a:t>3/11/2023</a:t>
             </a:fld>
             <a:endParaRPr lang="en-US"/>
           </a:p>
@@ -1955,7 +1973,7 @@
           <a:p>
             <a:fld id="{7D1F2140-8D48-49AC-AD8D-683E6FF4DC34}" type="datetimeFigureOut">
               <a:rPr lang="en-US" smtClean="0"/>
-              <a:t>3/8/2023</a:t>
+              <a:t>3/11/2023</a:t>
             </a:fld>
             <a:endParaRPr lang="en-US"/>
           </a:p>
@@ -2068,7 +2086,7 @@
           <a:p>
             <a:fld id="{7D1F2140-8D48-49AC-AD8D-683E6FF4DC34}" type="datetimeFigureOut">
               <a:rPr lang="en-US" smtClean="0"/>
-              <a:t>3/8/2023</a:t>
+              <a:t>3/11/2023</a:t>
             </a:fld>
             <a:endParaRPr lang="en-US"/>
           </a:p>
@@ -2379,7 +2397,7 @@
           <a:p>
             <a:fld id="{7D1F2140-8D48-49AC-AD8D-683E6FF4DC34}" type="datetimeFigureOut">
               <a:rPr lang="en-US" smtClean="0"/>
-              <a:t>3/8/2023</a:t>
+              <a:t>3/11/2023</a:t>
             </a:fld>
             <a:endParaRPr lang="en-US"/>
           </a:p>
@@ -2667,7 +2685,7 @@
           <a:p>
             <a:fld id="{7D1F2140-8D48-49AC-AD8D-683E6FF4DC34}" type="datetimeFigureOut">
               <a:rPr lang="en-US" smtClean="0"/>
-              <a:t>3/8/2023</a:t>
+              <a:t>3/11/2023</a:t>
             </a:fld>
             <a:endParaRPr lang="en-US"/>
           </a:p>
@@ -2908,7 +2926,7 @@
           <a:p>
             <a:fld id="{7D1F2140-8D48-49AC-AD8D-683E6FF4DC34}" type="datetimeFigureOut">
               <a:rPr lang="en-US" smtClean="0"/>
-              <a:t>3/8/2023</a:t>
+              <a:t>3/11/2023</a:t>
             </a:fld>
             <a:endParaRPr lang="en-US"/>
           </a:p>
@@ -3399,6 +3417,4797 @@
 </p:sld>
 </file>
 
+<file path=ppt/slides/slide10.xml><?xml version="1.0" encoding="utf-8"?>
+<p:sld xmlns:a="http://schemas.openxmlformats.org/drawingml/2006/main" xmlns:r="http://schemas.openxmlformats.org/officeDocument/2006/relationships" xmlns:p="http://schemas.openxmlformats.org/presentationml/2006/main">
+  <p:cSld>
+    <p:spTree>
+      <p:nvGrpSpPr>
+        <p:cNvPr id="1" name=""/>
+        <p:cNvGrpSpPr/>
+        <p:nvPr/>
+      </p:nvGrpSpPr>
+      <p:grpSpPr>
+        <a:xfrm>
+          <a:off x="0" y="0"/>
+          <a:ext cx="0" cy="0"/>
+          <a:chOff x="0" y="0"/>
+          <a:chExt cx="0" cy="0"/>
+        </a:xfrm>
+      </p:grpSpPr>
+      <p:sp>
+        <p:nvSpPr>
+          <p:cNvPr id="2" name="Title 1">
+            <a:extLst>
+              <a:ext uri="{FF2B5EF4-FFF2-40B4-BE49-F238E27FC236}">
+                <a16:creationId xmlns:a16="http://schemas.microsoft.com/office/drawing/2014/main" id="{5A4CA690-E7B9-FB17-D3F9-CD95B93175F5}"/>
+              </a:ext>
+            </a:extLst>
+          </p:cNvPr>
+          <p:cNvSpPr>
+            <a:spLocks noGrp="1"/>
+          </p:cNvSpPr>
+          <p:nvPr>
+            <p:ph type="title"/>
+          </p:nvPr>
+        </p:nvSpPr>
+        <p:spPr/>
+        <p:txBody>
+          <a:bodyPr/>
+          <a:lstStyle/>
+          <a:p>
+            <a:r>
+              <a:rPr lang="en-US" dirty="0" err="1"/>
+              <a:t>OneCS</a:t>
+            </a:r>
+            <a:r>
+              <a:rPr lang="en-US" dirty="0"/>
+              <a:t> (cannot reach the </a:t>
+            </a:r>
+            <a:r>
+              <a:rPr lang="en-US" dirty="0" err="1"/>
+              <a:t>SignatureBox</a:t>
+            </a:r>
+            <a:r>
+              <a:rPr lang="en-US" dirty="0"/>
+              <a:t>).</a:t>
+            </a:r>
+          </a:p>
+        </p:txBody>
+      </p:sp>
+      <p:sp>
+        <p:nvSpPr>
+          <p:cNvPr id="3" name="Content Placeholder 2">
+            <a:extLst>
+              <a:ext uri="{FF2B5EF4-FFF2-40B4-BE49-F238E27FC236}">
+                <a16:creationId xmlns:a16="http://schemas.microsoft.com/office/drawing/2014/main" id="{93E00EFF-DD86-3588-5686-FCEFF2B8B8B2}"/>
+              </a:ext>
+            </a:extLst>
+          </p:cNvPr>
+          <p:cNvSpPr>
+            <a:spLocks noGrp="1"/>
+          </p:cNvSpPr>
+          <p:nvPr>
+            <p:ph idx="1"/>
+          </p:nvPr>
+        </p:nvSpPr>
+        <p:spPr>
+          <a:xfrm>
+            <a:off x="838200" y="1690688"/>
+            <a:ext cx="5257800" cy="1143818"/>
+          </a:xfrm>
+        </p:spPr>
+        <p:txBody>
+          <a:bodyPr vert="horz" lIns="91440" tIns="45720" rIns="91440" bIns="45720" rtlCol="0">
+            <a:normAutofit/>
+          </a:bodyPr>
+          <a:lstStyle/>
+          <a:p>
+            <a:r>
+              <a:rPr lang="en-US" dirty="0"/>
+              <a:t>This may be the most common configuration pattern.</a:t>
+            </a:r>
+          </a:p>
+        </p:txBody>
+      </p:sp>
+      <p:sp>
+        <p:nvSpPr>
+          <p:cNvPr id="4" name="TextBox 3">
+            <a:extLst>
+              <a:ext uri="{FF2B5EF4-FFF2-40B4-BE49-F238E27FC236}">
+                <a16:creationId xmlns:a16="http://schemas.microsoft.com/office/drawing/2014/main" id="{1BEF56BE-36E9-9C16-0573-8234C8D9F689}"/>
+              </a:ext>
+            </a:extLst>
+          </p:cNvPr>
+          <p:cNvSpPr txBox="1"/>
+          <p:nvPr/>
+        </p:nvSpPr>
+        <p:spPr>
+          <a:xfrm>
+            <a:off x="7512996" y="1690688"/>
+            <a:ext cx="4113179" cy="4616648"/>
+          </a:xfrm>
+          <a:prstGeom prst="rect">
+            <a:avLst/>
+          </a:prstGeom>
+          <a:noFill/>
+        </p:spPr>
+        <p:txBody>
+          <a:bodyPr wrap="square" rtlCol="0">
+            <a:spAutoFit/>
+          </a:bodyPr>
+          <a:lstStyle/>
+          <a:p>
+            <a:r>
+              <a:rPr lang="en-US" sz="1400" dirty="0">
+                <a:latin typeface="Courier New" panose="02070309020205020404" pitchFamily="49" charset="0"/>
+                <a:cs typeface="Courier New" panose="02070309020205020404" pitchFamily="49" charset="0"/>
+              </a:rPr>
+              <a:t>{</a:t>
+            </a:r>
+          </a:p>
+          <a:p>
+            <a:r>
+              <a:rPr lang="en-US" sz="1400" dirty="0">
+                <a:latin typeface="Courier New" panose="02070309020205020404" pitchFamily="49" charset="0"/>
+                <a:cs typeface="Courier New" panose="02070309020205020404" pitchFamily="49" charset="0"/>
+              </a:rPr>
+              <a:t>  "</a:t>
+            </a:r>
+            <a:r>
+              <a:rPr lang="en-US" sz="1400" dirty="0" err="1">
+                <a:latin typeface="Courier New" panose="02070309020205020404" pitchFamily="49" charset="0"/>
+                <a:cs typeface="Courier New" panose="02070309020205020404" pitchFamily="49" charset="0"/>
+              </a:rPr>
+              <a:t>DomainName</a:t>
+            </a:r>
+            <a:r>
+              <a:rPr lang="en-US" sz="1400" dirty="0">
+                <a:latin typeface="Courier New" panose="02070309020205020404" pitchFamily="49" charset="0"/>
+                <a:cs typeface="Courier New" panose="02070309020205020404" pitchFamily="49" charset="0"/>
+              </a:rPr>
+              <a:t>": "</a:t>
+            </a:r>
+            <a:r>
+              <a:rPr lang="en-US" sz="1400" dirty="0" err="1">
+                <a:latin typeface="Courier New" panose="02070309020205020404" pitchFamily="49" charset="0"/>
+                <a:cs typeface="Courier New" panose="02070309020205020404" pitchFamily="49" charset="0"/>
+              </a:rPr>
+              <a:t>LaToulousaine</a:t>
+            </a:r>
+            <a:r>
+              <a:rPr lang="en-US" sz="1400" dirty="0">
+                <a:latin typeface="Courier New" panose="02070309020205020404" pitchFamily="49" charset="0"/>
+                <a:cs typeface="Courier New" panose="02070309020205020404" pitchFamily="49" charset="0"/>
+              </a:rPr>
+              <a:t>",</a:t>
+            </a:r>
+          </a:p>
+          <a:p>
+            <a:r>
+              <a:rPr lang="en-US" sz="1400" dirty="0">
+                <a:latin typeface="Courier New" panose="02070309020205020404" pitchFamily="49" charset="0"/>
+                <a:cs typeface="Courier New" panose="02070309020205020404" pitchFamily="49" charset="0"/>
+              </a:rPr>
+              <a:t>  "</a:t>
+            </a:r>
+            <a:r>
+              <a:rPr lang="en-US" sz="1400" dirty="0" err="1">
+                <a:latin typeface="Courier New" panose="02070309020205020404" pitchFamily="49" charset="0"/>
+                <a:cs typeface="Courier New" panose="02070309020205020404" pitchFamily="49" charset="0"/>
+              </a:rPr>
+              <a:t>EnvironmentName</a:t>
+            </a:r>
+            <a:r>
+              <a:rPr lang="en-US" sz="1400" dirty="0">
+                <a:latin typeface="Courier New" panose="02070309020205020404" pitchFamily="49" charset="0"/>
+                <a:cs typeface="Courier New" panose="02070309020205020404" pitchFamily="49" charset="0"/>
+              </a:rPr>
+              <a:t>": "Production",</a:t>
+            </a:r>
+          </a:p>
+          <a:p>
+            <a:r>
+              <a:rPr lang="en-US" sz="1400" dirty="0">
+                <a:latin typeface="Courier New" panose="02070309020205020404" pitchFamily="49" charset="0"/>
+                <a:cs typeface="Courier New" panose="02070309020205020404" pitchFamily="49" charset="0"/>
+              </a:rPr>
+              <a:t>  "Local": {</a:t>
+            </a:r>
+          </a:p>
+          <a:p>
+            <a:r>
+              <a:rPr lang="en-US" sz="1400" dirty="0">
+                <a:latin typeface="Courier New" panose="02070309020205020404" pitchFamily="49" charset="0"/>
+                <a:cs typeface="Courier New" panose="02070309020205020404" pitchFamily="49" charset="0"/>
+              </a:rPr>
+              <a:t>    "Name": "</a:t>
+            </a:r>
+            <a:r>
+              <a:rPr lang="en-US" sz="1400" dirty="0" err="1">
+                <a:latin typeface="Courier New" panose="02070309020205020404" pitchFamily="49" charset="0"/>
+                <a:cs typeface="Courier New" panose="02070309020205020404" pitchFamily="49" charset="0"/>
+              </a:rPr>
+              <a:t>SignatureBox</a:t>
+            </a:r>
+            <a:r>
+              <a:rPr lang="en-US" sz="1400" dirty="0">
+                <a:latin typeface="Courier New" panose="02070309020205020404" pitchFamily="49" charset="0"/>
+                <a:cs typeface="Courier New" panose="02070309020205020404" pitchFamily="49" charset="0"/>
+              </a:rPr>
+              <a:t>"</a:t>
+            </a:r>
+          </a:p>
+          <a:p>
+            <a:r>
+              <a:rPr lang="en-US" sz="1400" dirty="0">
+                <a:latin typeface="Courier New" panose="02070309020205020404" pitchFamily="49" charset="0"/>
+                <a:cs typeface="Courier New" panose="02070309020205020404" pitchFamily="49" charset="0"/>
+              </a:rPr>
+              <a:t>  },</a:t>
+            </a:r>
+          </a:p>
+          <a:p>
+            <a:r>
+              <a:rPr lang="en-US" sz="1400" dirty="0">
+                <a:latin typeface="Courier New" panose="02070309020205020404" pitchFamily="49" charset="0"/>
+                <a:cs typeface="Courier New" panose="02070309020205020404" pitchFamily="49" charset="0"/>
+              </a:rPr>
+              <a:t>  "Remotes": [</a:t>
+            </a:r>
+          </a:p>
+          <a:p>
+            <a:r>
+              <a:rPr lang="en-US" sz="1400" dirty="0">
+                <a:latin typeface="Courier New" panose="02070309020205020404" pitchFamily="49" charset="0"/>
+                <a:cs typeface="Courier New" panose="02070309020205020404" pitchFamily="49" charset="0"/>
+              </a:rPr>
+              <a:t>  {</a:t>
+            </a:r>
+          </a:p>
+          <a:p>
+            <a:r>
+              <a:rPr lang="en-US" sz="1400" dirty="0">
+                <a:latin typeface="Courier New" panose="02070309020205020404" pitchFamily="49" charset="0"/>
+                <a:cs typeface="Courier New" panose="02070309020205020404" pitchFamily="49" charset="0"/>
+              </a:rPr>
+              <a:t>    "Name": "Trolley1"</a:t>
+            </a:r>
+          </a:p>
+          <a:p>
+            <a:r>
+              <a:rPr lang="en-US" sz="1400" dirty="0">
+                <a:latin typeface="Courier New" panose="02070309020205020404" pitchFamily="49" charset="0"/>
+                <a:cs typeface="Courier New" panose="02070309020205020404" pitchFamily="49" charset="0"/>
+              </a:rPr>
+              <a:t>  },</a:t>
+            </a:r>
+          </a:p>
+          <a:p>
+            <a:r>
+              <a:rPr lang="en-US" sz="1400" dirty="0">
+                <a:latin typeface="Courier New" panose="02070309020205020404" pitchFamily="49" charset="0"/>
+                <a:cs typeface="Courier New" panose="02070309020205020404" pitchFamily="49" charset="0"/>
+              </a:rPr>
+              <a:t>  {</a:t>
+            </a:r>
+          </a:p>
+          <a:p>
+            <a:r>
+              <a:rPr lang="en-US" sz="1400" dirty="0">
+                <a:latin typeface="Courier New" panose="02070309020205020404" pitchFamily="49" charset="0"/>
+                <a:cs typeface="Courier New" panose="02070309020205020404" pitchFamily="49" charset="0"/>
+              </a:rPr>
+              <a:t>    "Name": "Trolley2"</a:t>
+            </a:r>
+          </a:p>
+          <a:p>
+            <a:r>
+              <a:rPr lang="en-US" sz="1400" dirty="0">
+                <a:latin typeface="Courier New" panose="02070309020205020404" pitchFamily="49" charset="0"/>
+                <a:cs typeface="Courier New" panose="02070309020205020404" pitchFamily="49" charset="0"/>
+              </a:rPr>
+              <a:t>  },</a:t>
+            </a:r>
+          </a:p>
+          <a:p>
+            <a:r>
+              <a:rPr lang="en-US" sz="1400" dirty="0">
+                <a:latin typeface="Courier New" panose="02070309020205020404" pitchFamily="49" charset="0"/>
+                <a:cs typeface="Courier New" panose="02070309020205020404" pitchFamily="49" charset="0"/>
+              </a:rPr>
+              <a:t>  {</a:t>
+            </a:r>
+          </a:p>
+          <a:p>
+            <a:r>
+              <a:rPr lang="en-US" sz="1400" dirty="0">
+                <a:latin typeface="Courier New" panose="02070309020205020404" pitchFamily="49" charset="0"/>
+                <a:cs typeface="Courier New" panose="02070309020205020404" pitchFamily="49" charset="0"/>
+              </a:rPr>
+              <a:t>    "Name": "</a:t>
+            </a:r>
+            <a:r>
+              <a:rPr lang="en-US" sz="1400" dirty="0" err="1">
+                <a:latin typeface="Courier New" panose="02070309020205020404" pitchFamily="49" charset="0"/>
+                <a:cs typeface="Courier New" panose="02070309020205020404" pitchFamily="49" charset="0"/>
+              </a:rPr>
+              <a:t>PickingStation</a:t>
+            </a:r>
+            <a:r>
+              <a:rPr lang="en-US" sz="1400" dirty="0">
+                <a:latin typeface="Courier New" panose="02070309020205020404" pitchFamily="49" charset="0"/>
+                <a:cs typeface="Courier New" panose="02070309020205020404" pitchFamily="49" charset="0"/>
+              </a:rPr>
+              <a:t>"</a:t>
+            </a:r>
+          </a:p>
+          <a:p>
+            <a:r>
+              <a:rPr lang="en-US" sz="1400" dirty="0">
+                <a:latin typeface="Courier New" panose="02070309020205020404" pitchFamily="49" charset="0"/>
+                <a:cs typeface="Courier New" panose="02070309020205020404" pitchFamily="49" charset="0"/>
+              </a:rPr>
+              <a:t>  },</a:t>
+            </a:r>
+          </a:p>
+          <a:p>
+            <a:r>
+              <a:rPr lang="en-US" sz="1400" dirty="0">
+                <a:latin typeface="Courier New" panose="02070309020205020404" pitchFamily="49" charset="0"/>
+                <a:cs typeface="Courier New" panose="02070309020205020404" pitchFamily="49" charset="0"/>
+              </a:rPr>
+              <a:t>  {</a:t>
+            </a:r>
+          </a:p>
+          <a:p>
+            <a:r>
+              <a:rPr lang="en-US" sz="1400" dirty="0">
+                <a:latin typeface="Courier New" panose="02070309020205020404" pitchFamily="49" charset="0"/>
+                <a:cs typeface="Courier New" panose="02070309020205020404" pitchFamily="49" charset="0"/>
+              </a:rPr>
+              <a:t>    </a:t>
+            </a:r>
+            <a:r>
+              <a:rPr lang="en-US" sz="1400" b="1" dirty="0">
+                <a:latin typeface="Courier New" panose="02070309020205020404" pitchFamily="49" charset="0"/>
+                <a:cs typeface="Courier New" panose="02070309020205020404" pitchFamily="49" charset="0"/>
+              </a:rPr>
+              <a:t>"Name": "</a:t>
+            </a:r>
+            <a:r>
+              <a:rPr lang="en-US" sz="1400" b="1" dirty="0" err="1">
+                <a:latin typeface="Courier New" panose="02070309020205020404" pitchFamily="49" charset="0"/>
+                <a:cs typeface="Courier New" panose="02070309020205020404" pitchFamily="49" charset="0"/>
+              </a:rPr>
+              <a:t>LaToulousaine</a:t>
+            </a:r>
+            <a:r>
+              <a:rPr lang="en-US" sz="1400" b="1" dirty="0">
+                <a:latin typeface="Courier New" panose="02070309020205020404" pitchFamily="49" charset="0"/>
+                <a:cs typeface="Courier New" panose="02070309020205020404" pitchFamily="49" charset="0"/>
+              </a:rPr>
+              <a:t>",</a:t>
+            </a:r>
+          </a:p>
+          <a:p>
+            <a:pPr lvl="1"/>
+            <a:r>
+              <a:rPr lang="en-US" sz="1400" b="1" dirty="0">
+                <a:latin typeface="Courier New" panose="02070309020205020404" pitchFamily="49" charset="0"/>
+                <a:cs typeface="Courier New" panose="02070309020205020404" pitchFamily="49" charset="0"/>
+              </a:rPr>
+              <a:t>"Address": "27.28.29.30"</a:t>
+            </a:r>
+          </a:p>
+          <a:p>
+            <a:r>
+              <a:rPr lang="en-US" sz="1400" dirty="0">
+                <a:latin typeface="Courier New" panose="02070309020205020404" pitchFamily="49" charset="0"/>
+                <a:cs typeface="Courier New" panose="02070309020205020404" pitchFamily="49" charset="0"/>
+              </a:rPr>
+              <a:t>  }]</a:t>
+            </a:r>
+          </a:p>
+          <a:p>
+            <a:r>
+              <a:rPr lang="en-US" sz="1400" dirty="0">
+                <a:latin typeface="Courier New" panose="02070309020205020404" pitchFamily="49" charset="0"/>
+                <a:cs typeface="Courier New" panose="02070309020205020404" pitchFamily="49" charset="0"/>
+              </a:rPr>
+              <a:t>}</a:t>
+            </a:r>
+          </a:p>
+        </p:txBody>
+      </p:sp>
+      <p:sp>
+        <p:nvSpPr>
+          <p:cNvPr id="6" name="TextBox 5">
+            <a:extLst>
+              <a:ext uri="{FF2B5EF4-FFF2-40B4-BE49-F238E27FC236}">
+                <a16:creationId xmlns:a16="http://schemas.microsoft.com/office/drawing/2014/main" id="{F0FAFD25-AA21-5283-15FC-B790EE62F46D}"/>
+              </a:ext>
+            </a:extLst>
+          </p:cNvPr>
+          <p:cNvSpPr txBox="1"/>
+          <p:nvPr/>
+        </p:nvSpPr>
+        <p:spPr>
+          <a:xfrm>
+            <a:off x="565825" y="3270414"/>
+            <a:ext cx="3928353" cy="2246769"/>
+          </a:xfrm>
+          <a:prstGeom prst="rect">
+            <a:avLst/>
+          </a:prstGeom>
+          <a:noFill/>
+        </p:spPr>
+        <p:txBody>
+          <a:bodyPr wrap="square" rtlCol="0">
+            <a:spAutoFit/>
+          </a:bodyPr>
+          <a:lstStyle>
+            <a:defPPr>
+              <a:defRPr lang="en-US"/>
+            </a:defPPr>
+            <a:lvl1pPr>
+              <a:defRPr sz="1400">
+                <a:latin typeface="Courier New" panose="02070309020205020404" pitchFamily="49" charset="0"/>
+                <a:cs typeface="Courier New" panose="02070309020205020404" pitchFamily="49" charset="0"/>
+              </a:defRPr>
+            </a:lvl1pPr>
+          </a:lstStyle>
+          <a:p>
+            <a:r>
+              <a:rPr lang="en-US" dirty="0"/>
+              <a:t>{</a:t>
+            </a:r>
+          </a:p>
+          <a:p>
+            <a:r>
+              <a:rPr lang="en-US" dirty="0"/>
+              <a:t>  "</a:t>
+            </a:r>
+            <a:r>
+              <a:rPr lang="en-US" dirty="0" err="1"/>
+              <a:t>DomainName</a:t>
+            </a:r>
+            <a:r>
+              <a:rPr lang="en-US" dirty="0"/>
+              <a:t>": "</a:t>
+            </a:r>
+            <a:r>
+              <a:rPr lang="en-US" dirty="0" err="1"/>
+              <a:t>LaToulousaine</a:t>
+            </a:r>
+            <a:r>
+              <a:rPr lang="en-US" dirty="0"/>
+              <a:t>",</a:t>
+            </a:r>
+          </a:p>
+          <a:p>
+            <a:r>
+              <a:rPr lang="en-US" dirty="0"/>
+              <a:t>  "Local": {</a:t>
+            </a:r>
+          </a:p>
+          <a:p>
+            <a:r>
+              <a:rPr lang="en-US" dirty="0"/>
+              <a:t>    "Name": "</a:t>
+            </a:r>
+            <a:r>
+              <a:rPr lang="en-US" b="1" dirty="0" err="1"/>
+              <a:t>LaToulousaine</a:t>
+            </a:r>
+            <a:r>
+              <a:rPr lang="en-US" dirty="0"/>
+              <a:t>"</a:t>
+            </a:r>
+          </a:p>
+          <a:p>
+            <a:r>
+              <a:rPr lang="en-US" dirty="0"/>
+              <a:t>  },</a:t>
+            </a:r>
+          </a:p>
+          <a:p>
+            <a:r>
+              <a:rPr lang="en-US" dirty="0"/>
+              <a:t>  "Remotes": [</a:t>
+            </a:r>
+          </a:p>
+          <a:p>
+            <a:r>
+              <a:rPr lang="en-US" dirty="0"/>
+              <a:t>  {</a:t>
+            </a:r>
+          </a:p>
+          <a:p>
+            <a:r>
+              <a:rPr lang="en-US" dirty="0"/>
+              <a:t>    "Name": "</a:t>
+            </a:r>
+            <a:r>
+              <a:rPr lang="en-US" dirty="0" err="1"/>
+              <a:t>SignatureBox</a:t>
+            </a:r>
+            <a:r>
+              <a:rPr lang="en-US" dirty="0"/>
+              <a:t>“</a:t>
+            </a:r>
+          </a:p>
+          <a:p>
+            <a:r>
+              <a:rPr lang="en-US" dirty="0"/>
+              <a:t>  }]</a:t>
+            </a:r>
+          </a:p>
+          <a:p>
+            <a:r>
+              <a:rPr lang="en-US" dirty="0"/>
+              <a:t>}</a:t>
+            </a:r>
+          </a:p>
+        </p:txBody>
+      </p:sp>
+      <p:sp>
+        <p:nvSpPr>
+          <p:cNvPr id="5" name="Arrow: Right 4">
+            <a:extLst>
+              <a:ext uri="{FF2B5EF4-FFF2-40B4-BE49-F238E27FC236}">
+                <a16:creationId xmlns:a16="http://schemas.microsoft.com/office/drawing/2014/main" id="{D35C4024-373F-D0A7-2707-CA2C02C6ED10}"/>
+              </a:ext>
+            </a:extLst>
+          </p:cNvPr>
+          <p:cNvSpPr/>
+          <p:nvPr/>
+        </p:nvSpPr>
+        <p:spPr>
+          <a:xfrm rot="10800000">
+            <a:off x="4709400" y="4116634"/>
+            <a:ext cx="2821426" cy="474819"/>
+          </a:xfrm>
+          <a:prstGeom prst="rightArrow">
+            <a:avLst/>
+          </a:prstGeom>
+          <a:solidFill>
+            <a:schemeClr val="bg1"/>
+          </a:solidFill>
+        </p:spPr>
+        <p:style>
+          <a:lnRef idx="2">
+            <a:schemeClr val="accent1">
+              <a:shade val="50000"/>
+            </a:schemeClr>
+          </a:lnRef>
+          <a:fillRef idx="1">
+            <a:schemeClr val="accent1"/>
+          </a:fillRef>
+          <a:effectRef idx="0">
+            <a:schemeClr val="accent1"/>
+          </a:effectRef>
+          <a:fontRef idx="minor">
+            <a:schemeClr val="lt1"/>
+          </a:fontRef>
+        </p:style>
+        <p:txBody>
+          <a:bodyPr rtlCol="0" anchor="ctr"/>
+          <a:lstStyle/>
+          <a:p>
+            <a:pPr algn="ctr"/>
+            <a:r>
+              <a:rPr lang="en-US" dirty="0">
+                <a:solidFill>
+                  <a:schemeClr val="tx1"/>
+                </a:solidFill>
+              </a:rPr>
+              <a:t>Initiate</a:t>
+            </a:r>
+          </a:p>
+        </p:txBody>
+      </p:sp>
+      <p:sp>
+        <p:nvSpPr>
+          <p:cNvPr id="7" name="Arrow: Left-Right 6">
+            <a:extLst>
+              <a:ext uri="{FF2B5EF4-FFF2-40B4-BE49-F238E27FC236}">
+                <a16:creationId xmlns:a16="http://schemas.microsoft.com/office/drawing/2014/main" id="{4A26B160-EE0D-09D3-3155-550502E8D3D1}"/>
+              </a:ext>
+            </a:extLst>
+          </p:cNvPr>
+          <p:cNvSpPr/>
+          <p:nvPr/>
+        </p:nvSpPr>
+        <p:spPr>
+          <a:xfrm>
+            <a:off x="4912468" y="4517578"/>
+            <a:ext cx="2485417" cy="474819"/>
+          </a:xfrm>
+          <a:prstGeom prst="leftRightArrow">
+            <a:avLst/>
+          </a:prstGeom>
+          <a:solidFill>
+            <a:schemeClr val="bg1"/>
+          </a:solidFill>
+        </p:spPr>
+        <p:style>
+          <a:lnRef idx="2">
+            <a:schemeClr val="accent1">
+              <a:shade val="50000"/>
+            </a:schemeClr>
+          </a:lnRef>
+          <a:fillRef idx="1">
+            <a:schemeClr val="accent1"/>
+          </a:fillRef>
+          <a:effectRef idx="0">
+            <a:schemeClr val="accent1"/>
+          </a:effectRef>
+          <a:fontRef idx="minor">
+            <a:schemeClr val="lt1"/>
+          </a:fontRef>
+        </p:style>
+        <p:txBody>
+          <a:bodyPr rtlCol="0" anchor="ctr"/>
+          <a:lstStyle/>
+          <a:p>
+            <a:pPr algn="ctr"/>
+            <a:r>
+              <a:rPr lang="en-US" dirty="0">
+                <a:solidFill>
+                  <a:schemeClr val="tx1"/>
+                </a:solidFill>
+              </a:rPr>
+              <a:t>2-ways exchange</a:t>
+            </a:r>
+          </a:p>
+        </p:txBody>
+      </p:sp>
+    </p:spTree>
+    <p:extLst>
+      <p:ext uri="{BB962C8B-B14F-4D97-AF65-F5344CB8AC3E}">
+        <p14:creationId xmlns:p14="http://schemas.microsoft.com/office/powerpoint/2010/main" val="512172991"/>
+      </p:ext>
+    </p:extLst>
+  </p:cSld>
+  <p:clrMapOvr>
+    <a:masterClrMapping/>
+  </p:clrMapOvr>
+</p:sld>
+</file>
+
+<file path=ppt/slides/slide11.xml><?xml version="1.0" encoding="utf-8"?>
+<p:sld xmlns:a="http://schemas.openxmlformats.org/drawingml/2006/main" xmlns:r="http://schemas.openxmlformats.org/officeDocument/2006/relationships" xmlns:p="http://schemas.openxmlformats.org/presentationml/2006/main">
+  <p:cSld>
+    <p:spTree>
+      <p:nvGrpSpPr>
+        <p:cNvPr id="1" name=""/>
+        <p:cNvGrpSpPr/>
+        <p:nvPr/>
+      </p:nvGrpSpPr>
+      <p:grpSpPr>
+        <a:xfrm>
+          <a:off x="0" y="0"/>
+          <a:ext cx="0" cy="0"/>
+          <a:chOff x="0" y="0"/>
+          <a:chExt cx="0" cy="0"/>
+        </a:xfrm>
+      </p:grpSpPr>
+      <p:sp>
+        <p:nvSpPr>
+          <p:cNvPr id="2" name="Title 1">
+            <a:extLst>
+              <a:ext uri="{FF2B5EF4-FFF2-40B4-BE49-F238E27FC236}">
+                <a16:creationId xmlns:a16="http://schemas.microsoft.com/office/drawing/2014/main" id="{5A4CA690-E7B9-FB17-D3F9-CD95B93175F5}"/>
+              </a:ext>
+            </a:extLst>
+          </p:cNvPr>
+          <p:cNvSpPr>
+            <a:spLocks noGrp="1"/>
+          </p:cNvSpPr>
+          <p:nvPr>
+            <p:ph type="title"/>
+          </p:nvPr>
+        </p:nvSpPr>
+        <p:spPr/>
+        <p:txBody>
+          <a:bodyPr/>
+          <a:lstStyle/>
+          <a:p>
+            <a:r>
+              <a:rPr lang="en-US" dirty="0" err="1"/>
+              <a:t>LaToulousaine</a:t>
+            </a:r>
+            <a:r>
+              <a:rPr lang="en-US" dirty="0"/>
+              <a:t> is actually a SaaS customer…</a:t>
+            </a:r>
+          </a:p>
+        </p:txBody>
+      </p:sp>
+      <p:sp>
+        <p:nvSpPr>
+          <p:cNvPr id="3" name="Content Placeholder 2">
+            <a:extLst>
+              <a:ext uri="{FF2B5EF4-FFF2-40B4-BE49-F238E27FC236}">
+                <a16:creationId xmlns:a16="http://schemas.microsoft.com/office/drawing/2014/main" id="{93E00EFF-DD86-3588-5686-FCEFF2B8B8B2}"/>
+              </a:ext>
+            </a:extLst>
+          </p:cNvPr>
+          <p:cNvSpPr>
+            <a:spLocks noGrp="1"/>
+          </p:cNvSpPr>
+          <p:nvPr>
+            <p:ph idx="1"/>
+          </p:nvPr>
+        </p:nvSpPr>
+        <p:spPr>
+          <a:xfrm>
+            <a:off x="838200" y="1690687"/>
+            <a:ext cx="10640438" cy="4802187"/>
+          </a:xfrm>
+        </p:spPr>
+        <p:txBody>
+          <a:bodyPr vert="horz" lIns="91440" tIns="45720" rIns="91440" bIns="45720" rtlCol="0">
+            <a:normAutofit/>
+          </a:bodyPr>
+          <a:lstStyle/>
+          <a:p>
+            <a:r>
+              <a:rPr lang="en-US" dirty="0"/>
+              <a:t>There is only one </a:t>
+            </a:r>
+            <a:r>
+              <a:rPr lang="en-US" dirty="0" err="1"/>
+              <a:t>OneCS</a:t>
+            </a:r>
+            <a:r>
+              <a:rPr lang="en-US" dirty="0"/>
+              <a:t> Application for multiple Domains. </a:t>
+            </a:r>
+            <a:r>
+              <a:rPr lang="en-US" dirty="0" err="1"/>
+              <a:t>LaToulousaine</a:t>
+            </a:r>
+            <a:r>
+              <a:rPr lang="en-US" dirty="0"/>
+              <a:t> is just one of them.</a:t>
+            </a:r>
+          </a:p>
+          <a:p>
+            <a:r>
+              <a:rPr lang="en-US" dirty="0"/>
+              <a:t>The SaaS offer scales horizontally:</a:t>
+            </a:r>
+          </a:p>
+          <a:p>
+            <a:pPr lvl="1"/>
+            <a:r>
+              <a:rPr lang="en-US" dirty="0"/>
+              <a:t>A set of servers: </a:t>
+            </a:r>
+          </a:p>
+          <a:p>
+            <a:pPr lvl="2"/>
+            <a:r>
+              <a:rPr lang="en-US" dirty="0"/>
+              <a:t>Parties are named “OneCS1”, “OneCS2”, “OneCS3”, etc. </a:t>
+            </a:r>
+          </a:p>
+          <a:p>
+            <a:pPr lvl="2"/>
+            <a:r>
+              <a:rPr lang="en-US" dirty="0"/>
+              <a:t>And share the same Domain: “</a:t>
+            </a:r>
+            <a:r>
+              <a:rPr lang="en-US" dirty="0" err="1"/>
+              <a:t>SaasOneCS</a:t>
+            </a:r>
+            <a:r>
+              <a:rPr lang="en-US" dirty="0"/>
+              <a:t>” </a:t>
+            </a:r>
+          </a:p>
+          <a:p>
+            <a:r>
+              <a:rPr lang="en-US" dirty="0"/>
+              <a:t>Each </a:t>
+            </a:r>
+            <a:r>
+              <a:rPr lang="en-US" dirty="0" err="1"/>
+              <a:t>OneCS</a:t>
+            </a:r>
+            <a:r>
+              <a:rPr lang="en-US" dirty="0"/>
+              <a:t> application contains and defines the Domains they handle.</a:t>
+            </a:r>
+          </a:p>
+        </p:txBody>
+      </p:sp>
+    </p:spTree>
+    <p:extLst>
+      <p:ext uri="{BB962C8B-B14F-4D97-AF65-F5344CB8AC3E}">
+        <p14:creationId xmlns:p14="http://schemas.microsoft.com/office/powerpoint/2010/main" val="2883707858"/>
+      </p:ext>
+    </p:extLst>
+  </p:cSld>
+  <p:clrMapOvr>
+    <a:masterClrMapping/>
+  </p:clrMapOvr>
+</p:sld>
+</file>
+
+<file path=ppt/slides/slide12.xml><?xml version="1.0" encoding="utf-8"?>
+<p:sld xmlns:a="http://schemas.openxmlformats.org/drawingml/2006/main" xmlns:r="http://schemas.openxmlformats.org/officeDocument/2006/relationships" xmlns:p="http://schemas.openxmlformats.org/presentationml/2006/main">
+  <p:cSld>
+    <p:spTree>
+      <p:nvGrpSpPr>
+        <p:cNvPr id="1" name=""/>
+        <p:cNvGrpSpPr/>
+        <p:nvPr/>
+      </p:nvGrpSpPr>
+      <p:grpSpPr>
+        <a:xfrm>
+          <a:off x="0" y="0"/>
+          <a:ext cx="0" cy="0"/>
+          <a:chOff x="0" y="0"/>
+          <a:chExt cx="0" cy="0"/>
+        </a:xfrm>
+      </p:grpSpPr>
+      <p:sp>
+        <p:nvSpPr>
+          <p:cNvPr id="2" name="Title 1">
+            <a:extLst>
+              <a:ext uri="{FF2B5EF4-FFF2-40B4-BE49-F238E27FC236}">
+                <a16:creationId xmlns:a16="http://schemas.microsoft.com/office/drawing/2014/main" id="{5A4CA690-E7B9-FB17-D3F9-CD95B93175F5}"/>
+              </a:ext>
+            </a:extLst>
+          </p:cNvPr>
+          <p:cNvSpPr>
+            <a:spLocks noGrp="1"/>
+          </p:cNvSpPr>
+          <p:nvPr>
+            <p:ph type="title"/>
+          </p:nvPr>
+        </p:nvSpPr>
+        <p:spPr/>
+        <p:txBody>
+          <a:bodyPr/>
+          <a:lstStyle/>
+          <a:p>
+            <a:r>
+              <a:rPr lang="en-US" dirty="0" err="1"/>
+              <a:t>LaToulousaine</a:t>
+            </a:r>
+            <a:r>
+              <a:rPr lang="en-US" dirty="0"/>
+              <a:t> in SaaS is hosted by OneCS1</a:t>
+            </a:r>
+          </a:p>
+        </p:txBody>
+      </p:sp>
+      <p:sp>
+        <p:nvSpPr>
+          <p:cNvPr id="3" name="Content Placeholder 2">
+            <a:extLst>
+              <a:ext uri="{FF2B5EF4-FFF2-40B4-BE49-F238E27FC236}">
+                <a16:creationId xmlns:a16="http://schemas.microsoft.com/office/drawing/2014/main" id="{93E00EFF-DD86-3588-5686-FCEFF2B8B8B2}"/>
+              </a:ext>
+            </a:extLst>
+          </p:cNvPr>
+          <p:cNvSpPr>
+            <a:spLocks noGrp="1"/>
+          </p:cNvSpPr>
+          <p:nvPr>
+            <p:ph idx="1"/>
+          </p:nvPr>
+        </p:nvSpPr>
+        <p:spPr>
+          <a:xfrm>
+            <a:off x="5253087" y="1825624"/>
+            <a:ext cx="6225551" cy="538197"/>
+          </a:xfrm>
+        </p:spPr>
+        <p:txBody>
+          <a:bodyPr vert="horz" lIns="91440" tIns="45720" rIns="91440" bIns="45720" rtlCol="0">
+            <a:normAutofit fontScale="77500" lnSpcReduction="20000"/>
+          </a:bodyPr>
+          <a:lstStyle/>
+          <a:p>
+            <a:r>
+              <a:rPr lang="en-US" dirty="0"/>
+              <a:t>The actual configuration of the Remote Party is:</a:t>
+            </a:r>
+          </a:p>
+        </p:txBody>
+      </p:sp>
+      <p:sp>
+        <p:nvSpPr>
+          <p:cNvPr id="4" name="TextBox 3">
+            <a:extLst>
+              <a:ext uri="{FF2B5EF4-FFF2-40B4-BE49-F238E27FC236}">
+                <a16:creationId xmlns:a16="http://schemas.microsoft.com/office/drawing/2014/main" id="{1BEF56BE-36E9-9C16-0573-8234C8D9F689}"/>
+              </a:ext>
+            </a:extLst>
+          </p:cNvPr>
+          <p:cNvSpPr txBox="1"/>
+          <p:nvPr/>
+        </p:nvSpPr>
+        <p:spPr>
+          <a:xfrm>
+            <a:off x="838201" y="1690688"/>
+            <a:ext cx="3782438" cy="4832092"/>
+          </a:xfrm>
+          <a:prstGeom prst="rect">
+            <a:avLst/>
+          </a:prstGeom>
+          <a:noFill/>
+        </p:spPr>
+        <p:txBody>
+          <a:bodyPr wrap="square" rtlCol="0">
+            <a:spAutoFit/>
+          </a:bodyPr>
+          <a:lstStyle/>
+          <a:p>
+            <a:r>
+              <a:rPr lang="en-US" sz="1400" dirty="0">
+                <a:latin typeface="Courier New" panose="02070309020205020404" pitchFamily="49" charset="0"/>
+                <a:cs typeface="Courier New" panose="02070309020205020404" pitchFamily="49" charset="0"/>
+              </a:rPr>
+              <a:t>{</a:t>
+            </a:r>
+          </a:p>
+          <a:p>
+            <a:r>
+              <a:rPr lang="en-US" sz="1400" dirty="0">
+                <a:latin typeface="Courier New" panose="02070309020205020404" pitchFamily="49" charset="0"/>
+                <a:cs typeface="Courier New" panose="02070309020205020404" pitchFamily="49" charset="0"/>
+              </a:rPr>
+              <a:t>  "</a:t>
+            </a:r>
+            <a:r>
+              <a:rPr lang="en-US" sz="1400" dirty="0" err="1">
+                <a:latin typeface="Courier New" panose="02070309020205020404" pitchFamily="49" charset="0"/>
+                <a:cs typeface="Courier New" panose="02070309020205020404" pitchFamily="49" charset="0"/>
+              </a:rPr>
+              <a:t>DomainName</a:t>
+            </a:r>
+            <a:r>
+              <a:rPr lang="en-US" sz="1400" dirty="0">
+                <a:latin typeface="Courier New" panose="02070309020205020404" pitchFamily="49" charset="0"/>
+                <a:cs typeface="Courier New" panose="02070309020205020404" pitchFamily="49" charset="0"/>
+              </a:rPr>
+              <a:t>": "</a:t>
+            </a:r>
+            <a:r>
+              <a:rPr lang="en-US" sz="1400" dirty="0" err="1">
+                <a:latin typeface="Courier New" panose="02070309020205020404" pitchFamily="49" charset="0"/>
+                <a:cs typeface="Courier New" panose="02070309020205020404" pitchFamily="49" charset="0"/>
+              </a:rPr>
+              <a:t>SaasOneCS</a:t>
+            </a:r>
+            <a:r>
+              <a:rPr lang="en-US" sz="1400" dirty="0">
+                <a:latin typeface="Courier New" panose="02070309020205020404" pitchFamily="49" charset="0"/>
+                <a:cs typeface="Courier New" panose="02070309020205020404" pitchFamily="49" charset="0"/>
+              </a:rPr>
+              <a:t>",</a:t>
+            </a:r>
+          </a:p>
+          <a:p>
+            <a:r>
+              <a:rPr lang="en-US" sz="1400" dirty="0">
+                <a:latin typeface="Courier New" panose="02070309020205020404" pitchFamily="49" charset="0"/>
+                <a:cs typeface="Courier New" panose="02070309020205020404" pitchFamily="49" charset="0"/>
+              </a:rPr>
+              <a:t>  "Local": {</a:t>
+            </a:r>
+          </a:p>
+          <a:p>
+            <a:r>
+              <a:rPr lang="en-US" sz="1400" dirty="0">
+                <a:latin typeface="Courier New" panose="02070309020205020404" pitchFamily="49" charset="0"/>
+                <a:cs typeface="Courier New" panose="02070309020205020404" pitchFamily="49" charset="0"/>
+              </a:rPr>
+              <a:t>    "Name": "OneCS1"</a:t>
+            </a:r>
+          </a:p>
+          <a:p>
+            <a:r>
+              <a:rPr lang="en-US" sz="1400" dirty="0">
+                <a:latin typeface="Courier New" panose="02070309020205020404" pitchFamily="49" charset="0"/>
+                <a:cs typeface="Courier New" panose="02070309020205020404" pitchFamily="49" charset="0"/>
+              </a:rPr>
+              <a:t>  },</a:t>
+            </a:r>
+            <a:br>
+              <a:rPr lang="en-US" sz="1400" dirty="0">
+                <a:latin typeface="Courier New" panose="02070309020205020404" pitchFamily="49" charset="0"/>
+                <a:cs typeface="Courier New" panose="02070309020205020404" pitchFamily="49" charset="0"/>
+              </a:rPr>
+            </a:br>
+            <a:r>
+              <a:rPr lang="en-US" sz="1400" dirty="0">
+                <a:latin typeface="Courier New" panose="02070309020205020404" pitchFamily="49" charset="0"/>
+                <a:cs typeface="Courier New" panose="02070309020205020404" pitchFamily="49" charset="0"/>
+              </a:rPr>
+              <a:t>  "Remotes": [</a:t>
+            </a:r>
+            <a:br>
+              <a:rPr lang="en-US" sz="1400" dirty="0">
+                <a:latin typeface="Courier New" panose="02070309020205020404" pitchFamily="49" charset="0"/>
+                <a:cs typeface="Courier New" panose="02070309020205020404" pitchFamily="49" charset="0"/>
+              </a:rPr>
+            </a:br>
+            <a:r>
+              <a:rPr lang="en-US" sz="1400" dirty="0">
+                <a:latin typeface="Courier New" panose="02070309020205020404" pitchFamily="49" charset="0"/>
+                <a:cs typeface="Courier New" panose="02070309020205020404" pitchFamily="49" charset="0"/>
+              </a:rPr>
+              <a:t>  {</a:t>
+            </a:r>
+          </a:p>
+          <a:p>
+            <a:r>
+              <a:rPr lang="en-US" sz="1400" dirty="0">
+                <a:latin typeface="Courier New" panose="02070309020205020404" pitchFamily="49" charset="0"/>
+                <a:cs typeface="Courier New" panose="02070309020205020404" pitchFamily="49" charset="0"/>
+              </a:rPr>
+              <a:t>    "Name": "</a:t>
+            </a:r>
+            <a:r>
+              <a:rPr lang="en-US" sz="1400" dirty="0" err="1">
+                <a:latin typeface="Courier New" panose="02070309020205020404" pitchFamily="49" charset="0"/>
+                <a:cs typeface="Courier New" panose="02070309020205020404" pitchFamily="49" charset="0"/>
+              </a:rPr>
+              <a:t>LaToulousaine</a:t>
+            </a:r>
+            <a:r>
+              <a:rPr lang="en-US" sz="1400" dirty="0">
+                <a:latin typeface="Courier New" panose="02070309020205020404" pitchFamily="49" charset="0"/>
+                <a:cs typeface="Courier New" panose="02070309020205020404" pitchFamily="49" charset="0"/>
+              </a:rPr>
+              <a:t>",</a:t>
+            </a:r>
+          </a:p>
+          <a:p>
+            <a:r>
+              <a:rPr lang="en-US" sz="1400" dirty="0">
+                <a:latin typeface="Courier New" panose="02070309020205020404" pitchFamily="49" charset="0"/>
+                <a:cs typeface="Courier New" panose="02070309020205020404" pitchFamily="49" charset="0"/>
+              </a:rPr>
+              <a:t>    "</a:t>
+            </a:r>
+            <a:r>
+              <a:rPr lang="en-US" sz="1400" b="1" dirty="0">
+                <a:solidFill>
+                  <a:srgbClr val="FF0000"/>
+                </a:solidFill>
+                <a:latin typeface="Courier New" panose="02070309020205020404" pitchFamily="49" charset="0"/>
+                <a:cs typeface="Courier New" panose="02070309020205020404" pitchFamily="49" charset="0"/>
+              </a:rPr>
+              <a:t>Domain</a:t>
+            </a:r>
+            <a:r>
+              <a:rPr lang="en-US" sz="1400" dirty="0">
+                <a:latin typeface="Courier New" panose="02070309020205020404" pitchFamily="49" charset="0"/>
+                <a:cs typeface="Courier New" panose="02070309020205020404" pitchFamily="49" charset="0"/>
+              </a:rPr>
+              <a:t>": {</a:t>
+            </a:r>
+          </a:p>
+          <a:p>
+            <a:r>
+              <a:rPr lang="en-US" sz="1400" dirty="0">
+                <a:latin typeface="Courier New" panose="02070309020205020404" pitchFamily="49" charset="0"/>
+                <a:cs typeface="Courier New" panose="02070309020205020404" pitchFamily="49" charset="0"/>
+              </a:rPr>
+              <a:t>      "Remotes": [</a:t>
+            </a:r>
+          </a:p>
+          <a:p>
+            <a:r>
+              <a:rPr lang="en-US" sz="1400" dirty="0">
+                <a:latin typeface="Courier New" panose="02070309020205020404" pitchFamily="49" charset="0"/>
+                <a:cs typeface="Courier New" panose="02070309020205020404" pitchFamily="49" charset="0"/>
+              </a:rPr>
+              <a:t>      {</a:t>
+            </a:r>
+          </a:p>
+          <a:p>
+            <a:r>
+              <a:rPr lang="en-US" sz="1400" dirty="0">
+                <a:latin typeface="Courier New" panose="02070309020205020404" pitchFamily="49" charset="0"/>
+                <a:cs typeface="Courier New" panose="02070309020205020404" pitchFamily="49" charset="0"/>
+              </a:rPr>
+              <a:t>        "Name": "Trolley1"</a:t>
+            </a:r>
+          </a:p>
+          <a:p>
+            <a:r>
+              <a:rPr lang="en-US" sz="1400" dirty="0">
+                <a:latin typeface="Courier New" panose="02070309020205020404" pitchFamily="49" charset="0"/>
+                <a:cs typeface="Courier New" panose="02070309020205020404" pitchFamily="49" charset="0"/>
+              </a:rPr>
+              <a:t>      },</a:t>
+            </a:r>
+          </a:p>
+          <a:p>
+            <a:r>
+              <a:rPr lang="en-US" sz="1400" dirty="0">
+                <a:latin typeface="Courier New" panose="02070309020205020404" pitchFamily="49" charset="0"/>
+                <a:cs typeface="Courier New" panose="02070309020205020404" pitchFamily="49" charset="0"/>
+              </a:rPr>
+              <a:t>      {</a:t>
+            </a:r>
+          </a:p>
+          <a:p>
+            <a:r>
+              <a:rPr lang="en-US" sz="1400" dirty="0">
+                <a:latin typeface="Courier New" panose="02070309020205020404" pitchFamily="49" charset="0"/>
+                <a:cs typeface="Courier New" panose="02070309020205020404" pitchFamily="49" charset="0"/>
+              </a:rPr>
+              <a:t>        "Name": "Trolley2"</a:t>
+            </a:r>
+          </a:p>
+          <a:p>
+            <a:r>
+              <a:rPr lang="en-US" sz="1400" dirty="0">
+                <a:latin typeface="Courier New" panose="02070309020205020404" pitchFamily="49" charset="0"/>
+                <a:cs typeface="Courier New" panose="02070309020205020404" pitchFamily="49" charset="0"/>
+              </a:rPr>
+              <a:t>      },</a:t>
+            </a:r>
+          </a:p>
+          <a:p>
+            <a:r>
+              <a:rPr lang="en-US" sz="1400" dirty="0">
+                <a:latin typeface="Courier New" panose="02070309020205020404" pitchFamily="49" charset="0"/>
+                <a:cs typeface="Courier New" panose="02070309020205020404" pitchFamily="49" charset="0"/>
+              </a:rPr>
+              <a:t>      {</a:t>
+            </a:r>
+          </a:p>
+          <a:p>
+            <a:r>
+              <a:rPr lang="en-US" sz="1400" dirty="0">
+                <a:latin typeface="Courier New" panose="02070309020205020404" pitchFamily="49" charset="0"/>
+                <a:cs typeface="Courier New" panose="02070309020205020404" pitchFamily="49" charset="0"/>
+              </a:rPr>
+              <a:t>        "Name": "</a:t>
+            </a:r>
+            <a:r>
+              <a:rPr lang="en-US" sz="1400" dirty="0" err="1">
+                <a:latin typeface="Courier New" panose="02070309020205020404" pitchFamily="49" charset="0"/>
+                <a:cs typeface="Courier New" panose="02070309020205020404" pitchFamily="49" charset="0"/>
+              </a:rPr>
+              <a:t>PickingStation</a:t>
+            </a:r>
+            <a:r>
+              <a:rPr lang="en-US" sz="1400" dirty="0">
+                <a:latin typeface="Courier New" panose="02070309020205020404" pitchFamily="49" charset="0"/>
+                <a:cs typeface="Courier New" panose="02070309020205020404" pitchFamily="49" charset="0"/>
+              </a:rPr>
+              <a:t>"</a:t>
+            </a:r>
+          </a:p>
+          <a:p>
+            <a:r>
+              <a:rPr lang="en-US" sz="1400" dirty="0">
+                <a:latin typeface="Courier New" panose="02070309020205020404" pitchFamily="49" charset="0"/>
+                <a:cs typeface="Courier New" panose="02070309020205020404" pitchFamily="49" charset="0"/>
+              </a:rPr>
+              <a:t>      }]</a:t>
+            </a:r>
+          </a:p>
+          <a:p>
+            <a:r>
+              <a:rPr lang="en-US" sz="1400" dirty="0">
+                <a:latin typeface="Courier New" panose="02070309020205020404" pitchFamily="49" charset="0"/>
+                <a:cs typeface="Courier New" panose="02070309020205020404" pitchFamily="49" charset="0"/>
+              </a:rPr>
+              <a:t>    }</a:t>
+            </a:r>
+          </a:p>
+          <a:p>
+            <a:r>
+              <a:rPr lang="en-US" sz="1400" dirty="0">
+                <a:latin typeface="Courier New" panose="02070309020205020404" pitchFamily="49" charset="0"/>
+                <a:cs typeface="Courier New" panose="02070309020205020404" pitchFamily="49" charset="0"/>
+              </a:rPr>
+              <a:t>  }]</a:t>
+            </a:r>
+          </a:p>
+          <a:p>
+            <a:r>
+              <a:rPr lang="en-US" sz="1400" dirty="0">
+                <a:latin typeface="Courier New" panose="02070309020205020404" pitchFamily="49" charset="0"/>
+                <a:cs typeface="Courier New" panose="02070309020205020404" pitchFamily="49" charset="0"/>
+              </a:rPr>
+              <a:t>}</a:t>
+            </a:r>
+          </a:p>
+        </p:txBody>
+      </p:sp>
+      <p:sp>
+        <p:nvSpPr>
+          <p:cNvPr id="6" name="TextBox 5">
+            <a:extLst>
+              <a:ext uri="{FF2B5EF4-FFF2-40B4-BE49-F238E27FC236}">
+                <a16:creationId xmlns:a16="http://schemas.microsoft.com/office/drawing/2014/main" id="{14AF6B14-89CD-7852-A417-173476AAD20D}"/>
+              </a:ext>
+            </a:extLst>
+          </p:cNvPr>
+          <p:cNvSpPr txBox="1"/>
+          <p:nvPr/>
+        </p:nvSpPr>
+        <p:spPr>
+          <a:xfrm>
+            <a:off x="5837707" y="2258475"/>
+            <a:ext cx="3870497" cy="4185761"/>
+          </a:xfrm>
+          <a:prstGeom prst="rect">
+            <a:avLst/>
+          </a:prstGeom>
+          <a:noFill/>
+        </p:spPr>
+        <p:txBody>
+          <a:bodyPr wrap="square">
+            <a:spAutoFit/>
+          </a:bodyPr>
+          <a:lstStyle/>
+          <a:p>
+            <a:r>
+              <a:rPr lang="en-US" sz="1400" dirty="0">
+                <a:latin typeface="Courier New" panose="02070309020205020404" pitchFamily="49" charset="0"/>
+                <a:cs typeface="Courier New" panose="02070309020205020404" pitchFamily="49" charset="0"/>
+              </a:rPr>
+              <a:t>{</a:t>
+            </a:r>
+            <a:br>
+              <a:rPr lang="en-US" sz="1400" dirty="0">
+                <a:latin typeface="Courier New" panose="02070309020205020404" pitchFamily="49" charset="0"/>
+                <a:cs typeface="Courier New" panose="02070309020205020404" pitchFamily="49" charset="0"/>
+              </a:rPr>
+            </a:br>
+            <a:r>
+              <a:rPr lang="en-US" sz="1400" dirty="0">
+                <a:latin typeface="Courier New" panose="02070309020205020404" pitchFamily="49" charset="0"/>
+                <a:cs typeface="Courier New" panose="02070309020205020404" pitchFamily="49" charset="0"/>
+              </a:rPr>
+              <a:t>  </a:t>
+            </a:r>
+            <a:r>
+              <a:rPr lang="en-US" sz="1400" b="1" dirty="0">
+                <a:latin typeface="Courier New" panose="02070309020205020404" pitchFamily="49" charset="0"/>
+                <a:cs typeface="Courier New" panose="02070309020205020404" pitchFamily="49" charset="0"/>
+              </a:rPr>
+              <a:t>"</a:t>
+            </a:r>
+            <a:r>
+              <a:rPr lang="en-US" sz="1400" b="1" dirty="0" err="1">
+                <a:latin typeface="Courier New" panose="02070309020205020404" pitchFamily="49" charset="0"/>
+                <a:cs typeface="Courier New" panose="02070309020205020404" pitchFamily="49" charset="0"/>
+              </a:rPr>
+              <a:t>DomainName</a:t>
+            </a:r>
+            <a:r>
+              <a:rPr lang="en-US" sz="1400" b="1" dirty="0">
+                <a:latin typeface="Courier New" panose="02070309020205020404" pitchFamily="49" charset="0"/>
+                <a:cs typeface="Courier New" panose="02070309020205020404" pitchFamily="49" charset="0"/>
+              </a:rPr>
+              <a:t>": "</a:t>
+            </a:r>
+            <a:r>
+              <a:rPr lang="en-US" sz="1400" b="1" dirty="0" err="1">
+                <a:latin typeface="Courier New" panose="02070309020205020404" pitchFamily="49" charset="0"/>
+                <a:cs typeface="Courier New" panose="02070309020205020404" pitchFamily="49" charset="0"/>
+              </a:rPr>
+              <a:t>SaasOneCS</a:t>
+            </a:r>
+            <a:r>
+              <a:rPr lang="en-US" sz="1400" b="1" dirty="0">
+                <a:latin typeface="Courier New" panose="02070309020205020404" pitchFamily="49" charset="0"/>
+                <a:cs typeface="Courier New" panose="02070309020205020404" pitchFamily="49" charset="0"/>
+              </a:rPr>
+              <a:t>"</a:t>
+            </a:r>
+            <a:r>
+              <a:rPr lang="en-US" sz="1400" dirty="0">
+                <a:latin typeface="Courier New" panose="02070309020205020404" pitchFamily="49" charset="0"/>
+                <a:cs typeface="Courier New" panose="02070309020205020404" pitchFamily="49" charset="0"/>
+              </a:rPr>
+              <a:t>,</a:t>
+            </a:r>
+          </a:p>
+          <a:p>
+            <a:r>
+              <a:rPr lang="en-US" sz="1400" dirty="0">
+                <a:latin typeface="Courier New" panose="02070309020205020404" pitchFamily="49" charset="0"/>
+                <a:cs typeface="Courier New" panose="02070309020205020404" pitchFamily="49" charset="0"/>
+              </a:rPr>
+              <a:t>  "Name": "</a:t>
+            </a:r>
+            <a:r>
+              <a:rPr lang="en-US" sz="1400" dirty="0" err="1">
+                <a:latin typeface="Courier New" panose="02070309020205020404" pitchFamily="49" charset="0"/>
+                <a:cs typeface="Courier New" panose="02070309020205020404" pitchFamily="49" charset="0"/>
+              </a:rPr>
+              <a:t>LaToulousaine</a:t>
+            </a:r>
+            <a:r>
+              <a:rPr lang="en-US" sz="1400" dirty="0">
+                <a:latin typeface="Courier New" panose="02070309020205020404" pitchFamily="49" charset="0"/>
+                <a:cs typeface="Courier New" panose="02070309020205020404" pitchFamily="49" charset="0"/>
+              </a:rPr>
+              <a:t>",</a:t>
+            </a:r>
+          </a:p>
+          <a:p>
+            <a:r>
+              <a:rPr lang="en-US" sz="1400" dirty="0">
+                <a:latin typeface="Courier New" panose="02070309020205020404" pitchFamily="49" charset="0"/>
+                <a:cs typeface="Courier New" panose="02070309020205020404" pitchFamily="49" charset="0"/>
+              </a:rPr>
+              <a:t>  "</a:t>
+            </a:r>
+            <a:r>
+              <a:rPr lang="en-US" sz="1400" b="1" dirty="0">
+                <a:solidFill>
+                  <a:srgbClr val="FF0000"/>
+                </a:solidFill>
+                <a:latin typeface="Courier New" panose="02070309020205020404" pitchFamily="49" charset="0"/>
+                <a:cs typeface="Courier New" panose="02070309020205020404" pitchFamily="49" charset="0"/>
+              </a:rPr>
+              <a:t>Domain</a:t>
+            </a:r>
+            <a:r>
+              <a:rPr lang="en-US" sz="1400" dirty="0">
+                <a:latin typeface="Courier New" panose="02070309020205020404" pitchFamily="49" charset="0"/>
+                <a:cs typeface="Courier New" panose="02070309020205020404" pitchFamily="49" charset="0"/>
+              </a:rPr>
+              <a:t>": {</a:t>
+            </a:r>
+            <a:br>
+              <a:rPr lang="en-US" sz="1400" dirty="0">
+                <a:latin typeface="Courier New" panose="02070309020205020404" pitchFamily="49" charset="0"/>
+                <a:cs typeface="Courier New" panose="02070309020205020404" pitchFamily="49" charset="0"/>
+              </a:rPr>
+            </a:br>
+            <a:r>
+              <a:rPr lang="en-US" sz="1400" dirty="0">
+                <a:latin typeface="Courier New" panose="02070309020205020404" pitchFamily="49" charset="0"/>
+                <a:cs typeface="Courier New" panose="02070309020205020404" pitchFamily="49" charset="0"/>
+              </a:rPr>
+              <a:t>    </a:t>
+            </a:r>
+            <a:r>
+              <a:rPr lang="en-US" sz="1400" b="1" dirty="0">
+                <a:latin typeface="Courier New" panose="02070309020205020404" pitchFamily="49" charset="0"/>
+                <a:cs typeface="Courier New" panose="02070309020205020404" pitchFamily="49" charset="0"/>
+              </a:rPr>
+              <a:t>"</a:t>
+            </a:r>
+            <a:r>
+              <a:rPr lang="en-US" sz="1400" b="1" dirty="0" err="1">
+                <a:latin typeface="Courier New" panose="02070309020205020404" pitchFamily="49" charset="0"/>
+                <a:cs typeface="Courier New" panose="02070309020205020404" pitchFamily="49" charset="0"/>
+              </a:rPr>
+              <a:t>DomainName</a:t>
+            </a:r>
+            <a:r>
+              <a:rPr lang="en-US" sz="1400" b="1" dirty="0">
+                <a:latin typeface="Courier New" panose="02070309020205020404" pitchFamily="49" charset="0"/>
+                <a:cs typeface="Courier New" panose="02070309020205020404" pitchFamily="49" charset="0"/>
+              </a:rPr>
+              <a:t>": "</a:t>
+            </a:r>
+            <a:r>
+              <a:rPr lang="en-US" sz="1400" b="1" dirty="0" err="1">
+                <a:latin typeface="Courier New" panose="02070309020205020404" pitchFamily="49" charset="0"/>
+                <a:cs typeface="Courier New" panose="02070309020205020404" pitchFamily="49" charset="0"/>
+              </a:rPr>
+              <a:t>LaToulousaine</a:t>
+            </a:r>
+            <a:r>
+              <a:rPr lang="en-US" sz="1400" b="1" dirty="0">
+                <a:latin typeface="Courier New" panose="02070309020205020404" pitchFamily="49" charset="0"/>
+                <a:cs typeface="Courier New" panose="02070309020205020404" pitchFamily="49" charset="0"/>
+              </a:rPr>
+              <a:t>"</a:t>
+            </a:r>
+            <a:r>
+              <a:rPr lang="en-US" sz="1400" dirty="0">
+                <a:latin typeface="Courier New" panose="02070309020205020404" pitchFamily="49" charset="0"/>
+                <a:cs typeface="Courier New" panose="02070309020205020404" pitchFamily="49" charset="0"/>
+              </a:rPr>
+              <a:t>,</a:t>
+            </a:r>
+          </a:p>
+          <a:p>
+            <a:r>
+              <a:rPr lang="en-US" sz="1400" dirty="0">
+                <a:latin typeface="Courier New" panose="02070309020205020404" pitchFamily="49" charset="0"/>
+                <a:cs typeface="Courier New" panose="02070309020205020404" pitchFamily="49" charset="0"/>
+              </a:rPr>
+              <a:t>    </a:t>
+            </a:r>
+            <a:r>
+              <a:rPr lang="en-US" sz="1400" b="1" dirty="0">
+                <a:latin typeface="Courier New" panose="02070309020205020404" pitchFamily="49" charset="0"/>
+                <a:cs typeface="Courier New" panose="02070309020205020404" pitchFamily="49" charset="0"/>
+              </a:rPr>
+              <a:t>"Local": {</a:t>
+            </a:r>
+          </a:p>
+          <a:p>
+            <a:r>
+              <a:rPr lang="en-US" sz="1400" b="1" dirty="0">
+                <a:latin typeface="Courier New" panose="02070309020205020404" pitchFamily="49" charset="0"/>
+                <a:cs typeface="Courier New" panose="02070309020205020404" pitchFamily="49" charset="0"/>
+              </a:rPr>
+              <a:t>      "Name": "</a:t>
+            </a:r>
+            <a:r>
+              <a:rPr lang="en-US" sz="1400" b="1" dirty="0" err="1">
+                <a:latin typeface="Courier New" panose="02070309020205020404" pitchFamily="49" charset="0"/>
+                <a:cs typeface="Courier New" panose="02070309020205020404" pitchFamily="49" charset="0"/>
+              </a:rPr>
+              <a:t>LaToulousaine</a:t>
+            </a:r>
+            <a:r>
+              <a:rPr lang="en-US" sz="1400" b="1" dirty="0">
+                <a:latin typeface="Courier New" panose="02070309020205020404" pitchFamily="49" charset="0"/>
+                <a:cs typeface="Courier New" panose="02070309020205020404" pitchFamily="49" charset="0"/>
+              </a:rPr>
+              <a:t>"</a:t>
+            </a:r>
+          </a:p>
+          <a:p>
+            <a:r>
+              <a:rPr lang="en-US" sz="1400" b="1" dirty="0">
+                <a:latin typeface="Courier New" panose="02070309020205020404" pitchFamily="49" charset="0"/>
+                <a:cs typeface="Courier New" panose="02070309020205020404" pitchFamily="49" charset="0"/>
+              </a:rPr>
+              <a:t>    }</a:t>
+            </a:r>
+            <a:r>
+              <a:rPr lang="en-US" sz="1400" dirty="0">
+                <a:latin typeface="Courier New" panose="02070309020205020404" pitchFamily="49" charset="0"/>
+                <a:cs typeface="Courier New" panose="02070309020205020404" pitchFamily="49" charset="0"/>
+              </a:rPr>
+              <a:t>,</a:t>
+            </a:r>
+          </a:p>
+          <a:p>
+            <a:r>
+              <a:rPr lang="en-US" sz="1400" dirty="0">
+                <a:latin typeface="Courier New" panose="02070309020205020404" pitchFamily="49" charset="0"/>
+                <a:cs typeface="Courier New" panose="02070309020205020404" pitchFamily="49" charset="0"/>
+              </a:rPr>
+              <a:t>    "Remotes": [</a:t>
+            </a:r>
+          </a:p>
+          <a:p>
+            <a:r>
+              <a:rPr lang="en-US" sz="1400" dirty="0">
+                <a:latin typeface="Courier New" panose="02070309020205020404" pitchFamily="49" charset="0"/>
+                <a:cs typeface="Courier New" panose="02070309020205020404" pitchFamily="49" charset="0"/>
+              </a:rPr>
+              <a:t>    {</a:t>
+            </a:r>
+          </a:p>
+          <a:p>
+            <a:r>
+              <a:rPr lang="en-US" sz="1400" dirty="0">
+                <a:latin typeface="Courier New" panose="02070309020205020404" pitchFamily="49" charset="0"/>
+                <a:cs typeface="Courier New" panose="02070309020205020404" pitchFamily="49" charset="0"/>
+              </a:rPr>
+              <a:t>      "Name": "Trolley1"</a:t>
+            </a:r>
+          </a:p>
+          <a:p>
+            <a:r>
+              <a:rPr lang="en-US" sz="1400" dirty="0">
+                <a:latin typeface="Courier New" panose="02070309020205020404" pitchFamily="49" charset="0"/>
+                <a:cs typeface="Courier New" panose="02070309020205020404" pitchFamily="49" charset="0"/>
+              </a:rPr>
+              <a:t>    },</a:t>
+            </a:r>
+          </a:p>
+          <a:p>
+            <a:r>
+              <a:rPr lang="en-US" sz="1400" dirty="0">
+                <a:latin typeface="Courier New" panose="02070309020205020404" pitchFamily="49" charset="0"/>
+                <a:cs typeface="Courier New" panose="02070309020205020404" pitchFamily="49" charset="0"/>
+              </a:rPr>
+              <a:t>    {</a:t>
+            </a:r>
+          </a:p>
+          <a:p>
+            <a:r>
+              <a:rPr lang="en-US" sz="1400" dirty="0">
+                <a:latin typeface="Courier New" panose="02070309020205020404" pitchFamily="49" charset="0"/>
+                <a:cs typeface="Courier New" panose="02070309020205020404" pitchFamily="49" charset="0"/>
+              </a:rPr>
+              <a:t>      "Name": "Trolley2"</a:t>
+            </a:r>
+          </a:p>
+          <a:p>
+            <a:r>
+              <a:rPr lang="en-US" sz="1400" dirty="0">
+                <a:latin typeface="Courier New" panose="02070309020205020404" pitchFamily="49" charset="0"/>
+                <a:cs typeface="Courier New" panose="02070309020205020404" pitchFamily="49" charset="0"/>
+              </a:rPr>
+              <a:t>    },</a:t>
+            </a:r>
+          </a:p>
+          <a:p>
+            <a:r>
+              <a:rPr lang="en-US" sz="1400" dirty="0">
+                <a:latin typeface="Courier New" panose="02070309020205020404" pitchFamily="49" charset="0"/>
+                <a:cs typeface="Courier New" panose="02070309020205020404" pitchFamily="49" charset="0"/>
+              </a:rPr>
+              <a:t>    {</a:t>
+            </a:r>
+          </a:p>
+          <a:p>
+            <a:r>
+              <a:rPr lang="en-US" sz="1400" dirty="0">
+                <a:latin typeface="Courier New" panose="02070309020205020404" pitchFamily="49" charset="0"/>
+                <a:cs typeface="Courier New" panose="02070309020205020404" pitchFamily="49" charset="0"/>
+              </a:rPr>
+              <a:t>      "Name": "</a:t>
+            </a:r>
+            <a:r>
+              <a:rPr lang="en-US" sz="1400" dirty="0" err="1">
+                <a:latin typeface="Courier New" panose="02070309020205020404" pitchFamily="49" charset="0"/>
+                <a:cs typeface="Courier New" panose="02070309020205020404" pitchFamily="49" charset="0"/>
+              </a:rPr>
+              <a:t>PickingStation</a:t>
+            </a:r>
+            <a:r>
+              <a:rPr lang="en-US" sz="1400" dirty="0">
+                <a:latin typeface="Courier New" panose="02070309020205020404" pitchFamily="49" charset="0"/>
+                <a:cs typeface="Courier New" panose="02070309020205020404" pitchFamily="49" charset="0"/>
+              </a:rPr>
+              <a:t>"</a:t>
+            </a:r>
+          </a:p>
+          <a:p>
+            <a:r>
+              <a:rPr lang="en-US" sz="1400" dirty="0">
+                <a:latin typeface="Courier New" panose="02070309020205020404" pitchFamily="49" charset="0"/>
+                <a:cs typeface="Courier New" panose="02070309020205020404" pitchFamily="49" charset="0"/>
+              </a:rPr>
+              <a:t>    }]</a:t>
+            </a:r>
+          </a:p>
+          <a:p>
+            <a:r>
+              <a:rPr lang="en-US" sz="1400" dirty="0">
+                <a:latin typeface="Courier New" panose="02070309020205020404" pitchFamily="49" charset="0"/>
+                <a:cs typeface="Courier New" panose="02070309020205020404" pitchFamily="49" charset="0"/>
+              </a:rPr>
+              <a:t>  }</a:t>
+            </a:r>
+          </a:p>
+        </p:txBody>
+      </p:sp>
+      <p:sp>
+        <p:nvSpPr>
+          <p:cNvPr id="7" name="Flowchart: Process 6">
+            <a:extLst>
+              <a:ext uri="{FF2B5EF4-FFF2-40B4-BE49-F238E27FC236}">
+                <a16:creationId xmlns:a16="http://schemas.microsoft.com/office/drawing/2014/main" id="{66D3FA9A-1ACF-0F0F-A825-F055FC6DDD64}"/>
+              </a:ext>
+            </a:extLst>
+          </p:cNvPr>
+          <p:cNvSpPr/>
+          <p:nvPr/>
+        </p:nvSpPr>
+        <p:spPr>
+          <a:xfrm>
+            <a:off x="1060315" y="3287949"/>
+            <a:ext cx="58366" cy="2607013"/>
+          </a:xfrm>
+          <a:prstGeom prst="flowChartProcess">
+            <a:avLst/>
+          </a:prstGeom>
+        </p:spPr>
+        <p:style>
+          <a:lnRef idx="2">
+            <a:schemeClr val="accent1">
+              <a:shade val="50000"/>
+            </a:schemeClr>
+          </a:lnRef>
+          <a:fillRef idx="1">
+            <a:schemeClr val="accent1"/>
+          </a:fillRef>
+          <a:effectRef idx="0">
+            <a:schemeClr val="accent1"/>
+          </a:effectRef>
+          <a:fontRef idx="minor">
+            <a:schemeClr val="lt1"/>
+          </a:fontRef>
+        </p:style>
+        <p:txBody>
+          <a:bodyPr rtlCol="0" anchor="ctr"/>
+          <a:lstStyle/>
+          <a:p>
+            <a:pPr algn="ctr"/>
+            <a:endParaRPr lang="en-US"/>
+          </a:p>
+        </p:txBody>
+      </p:sp>
+      <p:sp>
+        <p:nvSpPr>
+          <p:cNvPr id="8" name="Flowchart: Process 7">
+            <a:extLst>
+              <a:ext uri="{FF2B5EF4-FFF2-40B4-BE49-F238E27FC236}">
+                <a16:creationId xmlns:a16="http://schemas.microsoft.com/office/drawing/2014/main" id="{D7396A28-FA73-8D35-4321-6D645A98FA48}"/>
+              </a:ext>
+            </a:extLst>
+          </p:cNvPr>
+          <p:cNvSpPr/>
+          <p:nvPr/>
+        </p:nvSpPr>
+        <p:spPr>
+          <a:xfrm>
+            <a:off x="5837707" y="2597285"/>
+            <a:ext cx="58366" cy="3657600"/>
+          </a:xfrm>
+          <a:prstGeom prst="flowChartProcess">
+            <a:avLst/>
+          </a:prstGeom>
+        </p:spPr>
+        <p:style>
+          <a:lnRef idx="2">
+            <a:schemeClr val="accent1">
+              <a:shade val="50000"/>
+            </a:schemeClr>
+          </a:lnRef>
+          <a:fillRef idx="1">
+            <a:schemeClr val="accent1"/>
+          </a:fillRef>
+          <a:effectRef idx="0">
+            <a:schemeClr val="accent1"/>
+          </a:effectRef>
+          <a:fontRef idx="minor">
+            <a:schemeClr val="lt1"/>
+          </a:fontRef>
+        </p:style>
+        <p:txBody>
+          <a:bodyPr rtlCol="0" anchor="ctr"/>
+          <a:lstStyle/>
+          <a:p>
+            <a:pPr algn="ctr"/>
+            <a:endParaRPr lang="en-US"/>
+          </a:p>
+        </p:txBody>
+      </p:sp>
+      <p:sp>
+        <p:nvSpPr>
+          <p:cNvPr id="10" name="Right Brace 9">
+            <a:extLst>
+              <a:ext uri="{FF2B5EF4-FFF2-40B4-BE49-F238E27FC236}">
+                <a16:creationId xmlns:a16="http://schemas.microsoft.com/office/drawing/2014/main" id="{012D657E-3F85-7693-2306-7CDBA691D24C}"/>
+              </a:ext>
+            </a:extLst>
+          </p:cNvPr>
+          <p:cNvSpPr/>
+          <p:nvPr/>
+        </p:nvSpPr>
+        <p:spPr>
+          <a:xfrm>
+            <a:off x="9572017" y="3151761"/>
+            <a:ext cx="272374" cy="729575"/>
+          </a:xfrm>
+          <a:prstGeom prst="rightBrace">
+            <a:avLst/>
+          </a:prstGeom>
+          <a:ln w="28575"/>
+        </p:spPr>
+        <p:style>
+          <a:lnRef idx="1">
+            <a:schemeClr val="accent1"/>
+          </a:lnRef>
+          <a:fillRef idx="0">
+            <a:schemeClr val="accent1"/>
+          </a:fillRef>
+          <a:effectRef idx="0">
+            <a:schemeClr val="accent1"/>
+          </a:effectRef>
+          <a:fontRef idx="minor">
+            <a:schemeClr val="tx1"/>
+          </a:fontRef>
+        </p:style>
+        <p:txBody>
+          <a:bodyPr rtlCol="0" anchor="ctr"/>
+          <a:lstStyle/>
+          <a:p>
+            <a:pPr algn="ctr"/>
+            <a:endParaRPr lang="en-US" dirty="0"/>
+          </a:p>
+        </p:txBody>
+      </p:sp>
+      <p:sp>
+        <p:nvSpPr>
+          <p:cNvPr id="11" name="TextBox 10">
+            <a:extLst>
+              <a:ext uri="{FF2B5EF4-FFF2-40B4-BE49-F238E27FC236}">
+                <a16:creationId xmlns:a16="http://schemas.microsoft.com/office/drawing/2014/main" id="{CCA9A765-8C50-8FC6-1C65-47EDA54ED74A}"/>
+              </a:ext>
+            </a:extLst>
+          </p:cNvPr>
+          <p:cNvSpPr txBox="1"/>
+          <p:nvPr/>
+        </p:nvSpPr>
+        <p:spPr>
+          <a:xfrm>
+            <a:off x="9808723" y="3331882"/>
+            <a:ext cx="1913281" cy="369332"/>
+          </a:xfrm>
+          <a:prstGeom prst="rect">
+            <a:avLst/>
+          </a:prstGeom>
+          <a:noFill/>
+        </p:spPr>
+        <p:txBody>
+          <a:bodyPr wrap="none" rtlCol="0">
+            <a:spAutoFit/>
+          </a:bodyPr>
+          <a:lstStyle/>
+          <a:p>
+            <a:r>
+              <a:rPr lang="en-US" dirty="0"/>
+              <a:t>Domain Controller</a:t>
+            </a:r>
+          </a:p>
+        </p:txBody>
+      </p:sp>
+    </p:spTree>
+    <p:extLst>
+      <p:ext uri="{BB962C8B-B14F-4D97-AF65-F5344CB8AC3E}">
+        <p14:creationId xmlns:p14="http://schemas.microsoft.com/office/powerpoint/2010/main" val="2593653179"/>
+      </p:ext>
+    </p:extLst>
+  </p:cSld>
+  <p:clrMapOvr>
+    <a:masterClrMapping/>
+  </p:clrMapOvr>
+</p:sld>
+</file>
+
+<file path=ppt/slides/slide13.xml><?xml version="1.0" encoding="utf-8"?>
+<p:sld xmlns:a="http://schemas.openxmlformats.org/drawingml/2006/main" xmlns:r="http://schemas.openxmlformats.org/officeDocument/2006/relationships" xmlns:p="http://schemas.openxmlformats.org/presentationml/2006/main">
+  <p:cSld>
+    <p:spTree>
+      <p:nvGrpSpPr>
+        <p:cNvPr id="1" name=""/>
+        <p:cNvGrpSpPr/>
+        <p:nvPr/>
+      </p:nvGrpSpPr>
+      <p:grpSpPr>
+        <a:xfrm>
+          <a:off x="0" y="0"/>
+          <a:ext cx="0" cy="0"/>
+          <a:chOff x="0" y="0"/>
+          <a:chExt cx="0" cy="0"/>
+        </a:xfrm>
+      </p:grpSpPr>
+      <p:sp>
+        <p:nvSpPr>
+          <p:cNvPr id="2" name="Title 1">
+            <a:extLst>
+              <a:ext uri="{FF2B5EF4-FFF2-40B4-BE49-F238E27FC236}">
+                <a16:creationId xmlns:a16="http://schemas.microsoft.com/office/drawing/2014/main" id="{5A4CA690-E7B9-FB17-D3F9-CD95B93175F5}"/>
+              </a:ext>
+            </a:extLst>
+          </p:cNvPr>
+          <p:cNvSpPr>
+            <a:spLocks noGrp="1"/>
+          </p:cNvSpPr>
+          <p:nvPr>
+            <p:ph type="title"/>
+          </p:nvPr>
+        </p:nvSpPr>
+        <p:spPr>
+          <a:xfrm>
+            <a:off x="838199" y="365125"/>
+            <a:ext cx="10885251" cy="1325563"/>
+          </a:xfrm>
+        </p:spPr>
+        <p:txBody>
+          <a:bodyPr/>
+          <a:lstStyle/>
+          <a:p>
+            <a:r>
+              <a:rPr lang="en-US" dirty="0" err="1"/>
+              <a:t>Oups</a:t>
+            </a:r>
+            <a:r>
+              <a:rPr lang="en-US" dirty="0"/>
+              <a:t>! </a:t>
+            </a:r>
+            <a:r>
+              <a:rPr lang="en-US" dirty="0" err="1"/>
+              <a:t>LaToulousaine</a:t>
+            </a:r>
+            <a:r>
+              <a:rPr lang="en-US" dirty="0"/>
+              <a:t> is NOT in production yet!</a:t>
+            </a:r>
+          </a:p>
+        </p:txBody>
+      </p:sp>
+      <p:graphicFrame>
+        <p:nvGraphicFramePr>
+          <p:cNvPr id="14" name="Table 14">
+            <a:extLst>
+              <a:ext uri="{FF2B5EF4-FFF2-40B4-BE49-F238E27FC236}">
+                <a16:creationId xmlns:a16="http://schemas.microsoft.com/office/drawing/2014/main" id="{88298F33-3702-CB79-CA00-2B1B2EB3EE33}"/>
+              </a:ext>
+            </a:extLst>
+          </p:cNvPr>
+          <p:cNvGraphicFramePr>
+            <a:graphicFrameLocks noGrp="1"/>
+          </p:cNvGraphicFramePr>
+          <p:nvPr>
+            <p:ph idx="1"/>
+            <p:extLst>
+              <p:ext uri="{D42A27DB-BD31-4B8C-83A1-F6EECF244321}">
+                <p14:modId xmlns:p14="http://schemas.microsoft.com/office/powerpoint/2010/main" val="3912494569"/>
+              </p:ext>
+            </p:extLst>
+          </p:nvPr>
+        </p:nvGraphicFramePr>
+        <p:xfrm>
+          <a:off x="4620639" y="4387432"/>
+          <a:ext cx="7102812" cy="2164080"/>
+        </p:xfrm>
+        <a:graphic>
+          <a:graphicData uri="http://schemas.openxmlformats.org/drawingml/2006/table">
+            <a:tbl>
+              <a:tblPr firstRow="1" bandRow="1">
+                <a:tableStyleId>{5C22544A-7EE6-4342-B048-85BDC9FD1C3A}</a:tableStyleId>
+              </a:tblPr>
+              <a:tblGrid>
+                <a:gridCol w="3501957">
+                  <a:extLst>
+                    <a:ext uri="{9D8B030D-6E8A-4147-A177-3AD203B41FA5}">
+                      <a16:colId xmlns:a16="http://schemas.microsoft.com/office/drawing/2014/main" val="1002437713"/>
+                    </a:ext>
+                  </a:extLst>
+                </a:gridCol>
+                <a:gridCol w="3600855">
+                  <a:extLst>
+                    <a:ext uri="{9D8B030D-6E8A-4147-A177-3AD203B41FA5}">
+                      <a16:colId xmlns:a16="http://schemas.microsoft.com/office/drawing/2014/main" val="2669333865"/>
+                    </a:ext>
+                  </a:extLst>
+                </a:gridCol>
+              </a:tblGrid>
+              <a:tr h="263240">
+                <a:tc>
+                  <a:txBody>
+                    <a:bodyPr/>
+                    <a:lstStyle/>
+                    <a:p>
+                      <a:pPr algn="ctr"/>
+                      <a:r>
+                        <a:rPr lang="en-US" sz="1600" dirty="0"/>
+                        <a:t>Party Full Name</a:t>
+                      </a:r>
+                    </a:p>
+                  </a:txBody>
+                  <a:tcPr/>
+                </a:tc>
+                <a:tc>
+                  <a:txBody>
+                    <a:bodyPr/>
+                    <a:lstStyle/>
+                    <a:p>
+                      <a:pPr algn="ctr"/>
+                      <a:r>
+                        <a:rPr lang="en-US" sz="1600" dirty="0"/>
+                        <a:t>Description</a:t>
+                      </a:r>
+                    </a:p>
+                  </a:txBody>
+                  <a:tcPr/>
+                </a:tc>
+                <a:extLst>
+                  <a:ext uri="{0D108BD9-81ED-4DB2-BD59-A6C34878D82A}">
+                    <a16:rowId xmlns:a16="http://schemas.microsoft.com/office/drawing/2014/main" val="4012680113"/>
+                  </a:ext>
+                </a:extLst>
+              </a:tr>
+              <a:tr h="263240">
+                <a:tc>
+                  <a:txBody>
+                    <a:bodyPr/>
+                    <a:lstStyle/>
+                    <a:p>
+                      <a:r>
+                        <a:rPr lang="en-US" sz="1600" dirty="0" err="1"/>
+                        <a:t>SaasOneCS</a:t>
+                      </a:r>
+                      <a:r>
+                        <a:rPr lang="en-US" sz="1600" dirty="0"/>
+                        <a:t>/Production/OneCS1</a:t>
+                      </a:r>
+                    </a:p>
+                  </a:txBody>
+                  <a:tcPr/>
+                </a:tc>
+                <a:tc>
+                  <a:txBody>
+                    <a:bodyPr/>
+                    <a:lstStyle/>
+                    <a:p>
+                      <a:r>
+                        <a:rPr lang="en-US" sz="1600" dirty="0"/>
+                        <a:t>The server n°1 of the </a:t>
+                      </a:r>
+                      <a:r>
+                        <a:rPr lang="en-US" sz="1600" dirty="0" err="1"/>
+                        <a:t>SaasOffer</a:t>
+                      </a:r>
+                      <a:r>
+                        <a:rPr lang="en-US" sz="1600" dirty="0"/>
+                        <a:t>.</a:t>
+                      </a:r>
+                    </a:p>
+                  </a:txBody>
+                  <a:tcPr/>
+                </a:tc>
+                <a:extLst>
+                  <a:ext uri="{0D108BD9-81ED-4DB2-BD59-A6C34878D82A}">
+                    <a16:rowId xmlns:a16="http://schemas.microsoft.com/office/drawing/2014/main" val="200081413"/>
+                  </a:ext>
+                </a:extLst>
+              </a:tr>
+              <a:tr h="263240">
+                <a:tc>
+                  <a:txBody>
+                    <a:bodyPr/>
+                    <a:lstStyle/>
+                    <a:p>
+                      <a:r>
+                        <a:rPr lang="en-US" sz="1600" dirty="0" err="1"/>
+                        <a:t>SaasOneCS</a:t>
+                      </a:r>
+                      <a:r>
+                        <a:rPr lang="en-US" sz="1600" dirty="0"/>
+                        <a:t>/Staging/</a:t>
+                      </a:r>
+                      <a:r>
+                        <a:rPr lang="en-US" sz="1600" dirty="0" err="1"/>
+                        <a:t>LaToulousaine</a:t>
+                      </a:r>
+                      <a:endParaRPr lang="en-US" sz="1600" dirty="0"/>
+                    </a:p>
+                  </a:txBody>
+                  <a:tcPr/>
+                </a:tc>
+                <a:tc>
+                  <a:txBody>
+                    <a:bodyPr/>
+                    <a:lstStyle/>
+                    <a:p>
+                      <a:r>
+                        <a:rPr lang="en-US" sz="1600" dirty="0"/>
+                        <a:t>Host of the Domain in the </a:t>
+                      </a:r>
+                      <a:r>
+                        <a:rPr lang="en-US" sz="1600" dirty="0" err="1"/>
+                        <a:t>Saas</a:t>
+                      </a:r>
+                      <a:r>
+                        <a:rPr lang="en-US" sz="1600" dirty="0"/>
+                        <a:t> offer.</a:t>
+                      </a:r>
+                    </a:p>
+                  </a:txBody>
+                  <a:tcPr/>
+                </a:tc>
+                <a:extLst>
+                  <a:ext uri="{0D108BD9-81ED-4DB2-BD59-A6C34878D82A}">
+                    <a16:rowId xmlns:a16="http://schemas.microsoft.com/office/drawing/2014/main" val="968281902"/>
+                  </a:ext>
+                </a:extLst>
+              </a:tr>
+              <a:tr h="263240">
+                <a:tc>
+                  <a:txBody>
+                    <a:bodyPr/>
+                    <a:lstStyle/>
+                    <a:p>
+                      <a:r>
+                        <a:rPr lang="en-US" sz="1600" dirty="0" err="1"/>
+                        <a:t>LaToulousaine</a:t>
+                      </a:r>
+                      <a:r>
+                        <a:rPr lang="en-US" sz="1600" dirty="0"/>
+                        <a:t>/Staging/</a:t>
+                      </a:r>
+                      <a:r>
+                        <a:rPr lang="en-US" sz="1600" dirty="0" err="1"/>
+                        <a:t>LaToulousaine</a:t>
+                      </a:r>
+                      <a:endParaRPr lang="en-US" sz="1600" dirty="0"/>
+                    </a:p>
+                  </a:txBody>
+                  <a:tcPr/>
+                </a:tc>
+                <a:tc>
+                  <a:txBody>
+                    <a:bodyPr/>
+                    <a:lstStyle/>
+                    <a:p>
+                      <a:r>
+                        <a:rPr lang="en-US" sz="1600" dirty="0"/>
+                        <a:t>The controller of the customer domain.</a:t>
+                      </a:r>
+                    </a:p>
+                  </a:txBody>
+                  <a:tcPr/>
+                </a:tc>
+                <a:extLst>
+                  <a:ext uri="{0D108BD9-81ED-4DB2-BD59-A6C34878D82A}">
+                    <a16:rowId xmlns:a16="http://schemas.microsoft.com/office/drawing/2014/main" val="612232328"/>
+                  </a:ext>
+                </a:extLst>
+              </a:tr>
+              <a:tr h="757266">
+                <a:tc>
+                  <a:txBody>
+                    <a:bodyPr/>
+                    <a:lstStyle/>
+                    <a:p>
+                      <a:pPr marL="0" marR="0" lvl="0" indent="0" algn="l" defTabSz="914400" rtl="0" eaLnBrk="1" fontAlgn="auto" latinLnBrk="0" hangingPunct="1">
+                        <a:lnSpc>
+                          <a:spcPct val="100000"/>
+                        </a:lnSpc>
+                        <a:spcBef>
+                          <a:spcPts val="0"/>
+                        </a:spcBef>
+                        <a:spcAft>
+                          <a:spcPts val="0"/>
+                        </a:spcAft>
+                        <a:buClrTx/>
+                        <a:buSzTx/>
+                        <a:buFontTx/>
+                        <a:buNone/>
+                        <a:tabLst/>
+                        <a:defRPr/>
+                      </a:pPr>
+                      <a:r>
+                        <a:rPr lang="en-US" sz="1600" dirty="0" err="1"/>
+                        <a:t>LaToulousaine</a:t>
+                      </a:r>
+                      <a:r>
+                        <a:rPr lang="en-US" sz="1600" dirty="0"/>
+                        <a:t>/Staging/Trolley1</a:t>
+                      </a:r>
+                      <a:br>
+                        <a:rPr lang="en-US" sz="1600" dirty="0"/>
+                      </a:br>
+                      <a:r>
+                        <a:rPr lang="en-US" sz="1600" dirty="0" err="1"/>
+                        <a:t>LaToulousaine</a:t>
+                      </a:r>
+                      <a:r>
+                        <a:rPr lang="en-US" sz="1600" dirty="0"/>
+                        <a:t>/Staging/Trolley2</a:t>
+                      </a:r>
+                      <a:br>
+                        <a:rPr lang="en-US" sz="1600" dirty="0"/>
+                      </a:br>
+                      <a:r>
+                        <a:rPr lang="en-US" sz="1600" dirty="0"/>
+                        <a:t>etc.</a:t>
+                      </a:r>
+                    </a:p>
+                  </a:txBody>
+                  <a:tcPr/>
+                </a:tc>
+                <a:tc>
+                  <a:txBody>
+                    <a:bodyPr/>
+                    <a:lstStyle/>
+                    <a:p>
+                      <a:r>
+                        <a:rPr lang="en-US" sz="1600" dirty="0"/>
+                        <a:t>The customer’s agents.</a:t>
+                      </a:r>
+                    </a:p>
+                  </a:txBody>
+                  <a:tcPr/>
+                </a:tc>
+                <a:extLst>
+                  <a:ext uri="{0D108BD9-81ED-4DB2-BD59-A6C34878D82A}">
+                    <a16:rowId xmlns:a16="http://schemas.microsoft.com/office/drawing/2014/main" val="815501826"/>
+                  </a:ext>
+                </a:extLst>
+              </a:tr>
+            </a:tbl>
+          </a:graphicData>
+        </a:graphic>
+      </p:graphicFrame>
+      <p:sp>
+        <p:nvSpPr>
+          <p:cNvPr id="4" name="TextBox 3">
+            <a:extLst>
+              <a:ext uri="{FF2B5EF4-FFF2-40B4-BE49-F238E27FC236}">
+                <a16:creationId xmlns:a16="http://schemas.microsoft.com/office/drawing/2014/main" id="{1BEF56BE-36E9-9C16-0573-8234C8D9F689}"/>
+              </a:ext>
+            </a:extLst>
+          </p:cNvPr>
+          <p:cNvSpPr txBox="1"/>
+          <p:nvPr/>
+        </p:nvSpPr>
+        <p:spPr>
+          <a:xfrm>
+            <a:off x="838201" y="1544768"/>
+            <a:ext cx="3782438" cy="3323987"/>
+          </a:xfrm>
+          <a:prstGeom prst="rect">
+            <a:avLst/>
+          </a:prstGeom>
+          <a:noFill/>
+        </p:spPr>
+        <p:txBody>
+          <a:bodyPr wrap="square" rtlCol="0">
+            <a:spAutoFit/>
+          </a:bodyPr>
+          <a:lstStyle/>
+          <a:p>
+            <a:r>
+              <a:rPr lang="en-US" sz="1400" dirty="0">
+                <a:latin typeface="Courier New" panose="02070309020205020404" pitchFamily="49" charset="0"/>
+                <a:cs typeface="Courier New" panose="02070309020205020404" pitchFamily="49" charset="0"/>
+              </a:rPr>
+              <a:t>{</a:t>
+            </a:r>
+          </a:p>
+          <a:p>
+            <a:r>
+              <a:rPr lang="en-US" sz="1400" dirty="0">
+                <a:latin typeface="Courier New" panose="02070309020205020404" pitchFamily="49" charset="0"/>
+                <a:cs typeface="Courier New" panose="02070309020205020404" pitchFamily="49" charset="0"/>
+              </a:rPr>
+              <a:t>  "</a:t>
+            </a:r>
+            <a:r>
+              <a:rPr lang="en-US" sz="1400" dirty="0" err="1">
+                <a:latin typeface="Courier New" panose="02070309020205020404" pitchFamily="49" charset="0"/>
+                <a:cs typeface="Courier New" panose="02070309020205020404" pitchFamily="49" charset="0"/>
+              </a:rPr>
+              <a:t>DomainName</a:t>
+            </a:r>
+            <a:r>
+              <a:rPr lang="en-US" sz="1400" dirty="0">
+                <a:latin typeface="Courier New" panose="02070309020205020404" pitchFamily="49" charset="0"/>
+                <a:cs typeface="Courier New" panose="02070309020205020404" pitchFamily="49" charset="0"/>
+              </a:rPr>
+              <a:t>": "</a:t>
+            </a:r>
+            <a:r>
+              <a:rPr lang="en-US" sz="1400" dirty="0" err="1">
+                <a:latin typeface="Courier New" panose="02070309020205020404" pitchFamily="49" charset="0"/>
+                <a:cs typeface="Courier New" panose="02070309020205020404" pitchFamily="49" charset="0"/>
+              </a:rPr>
+              <a:t>SaasOneCS</a:t>
+            </a:r>
+            <a:r>
+              <a:rPr lang="en-US" sz="1400" dirty="0">
+                <a:latin typeface="Courier New" panose="02070309020205020404" pitchFamily="49" charset="0"/>
+                <a:cs typeface="Courier New" panose="02070309020205020404" pitchFamily="49" charset="0"/>
+              </a:rPr>
+              <a:t>",</a:t>
+            </a:r>
+          </a:p>
+          <a:p>
+            <a:r>
+              <a:rPr lang="en-US" sz="1400" dirty="0">
+                <a:latin typeface="Courier New" panose="02070309020205020404" pitchFamily="49" charset="0"/>
+                <a:cs typeface="Courier New" panose="02070309020205020404" pitchFamily="49" charset="0"/>
+              </a:rPr>
+              <a:t>  </a:t>
+            </a:r>
+            <a:r>
+              <a:rPr lang="en-US" sz="1400" b="1" dirty="0">
+                <a:latin typeface="Courier New" panose="02070309020205020404" pitchFamily="49" charset="0"/>
+                <a:cs typeface="Courier New" panose="02070309020205020404" pitchFamily="49" charset="0"/>
+              </a:rPr>
+              <a:t>"Environment": "Production"</a:t>
+            </a:r>
+            <a:r>
+              <a:rPr lang="en-US" sz="1400" dirty="0">
+                <a:latin typeface="Courier New" panose="02070309020205020404" pitchFamily="49" charset="0"/>
+                <a:cs typeface="Courier New" panose="02070309020205020404" pitchFamily="49" charset="0"/>
+              </a:rPr>
+              <a:t>,</a:t>
+            </a:r>
+          </a:p>
+          <a:p>
+            <a:r>
+              <a:rPr lang="en-US" sz="1400" dirty="0">
+                <a:latin typeface="Courier New" panose="02070309020205020404" pitchFamily="49" charset="0"/>
+                <a:cs typeface="Courier New" panose="02070309020205020404" pitchFamily="49" charset="0"/>
+              </a:rPr>
+              <a:t>  "Local": {</a:t>
+            </a:r>
+          </a:p>
+          <a:p>
+            <a:r>
+              <a:rPr lang="en-US" sz="1400" dirty="0">
+                <a:latin typeface="Courier New" panose="02070309020205020404" pitchFamily="49" charset="0"/>
+                <a:cs typeface="Courier New" panose="02070309020205020404" pitchFamily="49" charset="0"/>
+              </a:rPr>
+              <a:t>    "Name": "OneCS1"</a:t>
+            </a:r>
+          </a:p>
+          <a:p>
+            <a:r>
+              <a:rPr lang="en-US" sz="1400" dirty="0">
+                <a:latin typeface="Courier New" panose="02070309020205020404" pitchFamily="49" charset="0"/>
+                <a:cs typeface="Courier New" panose="02070309020205020404" pitchFamily="49" charset="0"/>
+              </a:rPr>
+              <a:t>  },</a:t>
+            </a:r>
+            <a:br>
+              <a:rPr lang="en-US" sz="1400" dirty="0">
+                <a:latin typeface="Courier New" panose="02070309020205020404" pitchFamily="49" charset="0"/>
+                <a:cs typeface="Courier New" panose="02070309020205020404" pitchFamily="49" charset="0"/>
+              </a:rPr>
+            </a:br>
+            <a:r>
+              <a:rPr lang="en-US" sz="1400" dirty="0">
+                <a:latin typeface="Courier New" panose="02070309020205020404" pitchFamily="49" charset="0"/>
+                <a:cs typeface="Courier New" panose="02070309020205020404" pitchFamily="49" charset="0"/>
+              </a:rPr>
+              <a:t>  "Remotes": [</a:t>
+            </a:r>
+            <a:br>
+              <a:rPr lang="en-US" sz="1400" dirty="0">
+                <a:latin typeface="Courier New" panose="02070309020205020404" pitchFamily="49" charset="0"/>
+                <a:cs typeface="Courier New" panose="02070309020205020404" pitchFamily="49" charset="0"/>
+              </a:rPr>
+            </a:br>
+            <a:r>
+              <a:rPr lang="en-US" sz="1400" dirty="0">
+                <a:latin typeface="Courier New" panose="02070309020205020404" pitchFamily="49" charset="0"/>
+                <a:cs typeface="Courier New" panose="02070309020205020404" pitchFamily="49" charset="0"/>
+              </a:rPr>
+              <a:t>  {</a:t>
+            </a:r>
+          </a:p>
+          <a:p>
+            <a:r>
+              <a:rPr lang="en-US" sz="1400" dirty="0">
+                <a:latin typeface="Courier New" panose="02070309020205020404" pitchFamily="49" charset="0"/>
+                <a:cs typeface="Courier New" panose="02070309020205020404" pitchFamily="49" charset="0"/>
+              </a:rPr>
+              <a:t>    "Name": "</a:t>
+            </a:r>
+            <a:r>
+              <a:rPr lang="en-US" sz="1400" dirty="0" err="1">
+                <a:latin typeface="Courier New" panose="02070309020205020404" pitchFamily="49" charset="0"/>
+                <a:cs typeface="Courier New" panose="02070309020205020404" pitchFamily="49" charset="0"/>
+              </a:rPr>
+              <a:t>LaToulousaine</a:t>
+            </a:r>
+            <a:r>
+              <a:rPr lang="en-US" sz="1400" dirty="0">
+                <a:latin typeface="Courier New" panose="02070309020205020404" pitchFamily="49" charset="0"/>
+                <a:cs typeface="Courier New" panose="02070309020205020404" pitchFamily="49" charset="0"/>
+              </a:rPr>
+              <a:t>",</a:t>
+            </a:r>
+          </a:p>
+          <a:p>
+            <a:r>
+              <a:rPr lang="en-US" sz="1400" dirty="0">
+                <a:latin typeface="Courier New" panose="02070309020205020404" pitchFamily="49" charset="0"/>
+                <a:cs typeface="Courier New" panose="02070309020205020404" pitchFamily="49" charset="0"/>
+              </a:rPr>
+              <a:t>    </a:t>
+            </a:r>
+            <a:r>
+              <a:rPr lang="en-US" sz="1400" b="1" dirty="0">
+                <a:latin typeface="Courier New" panose="02070309020205020404" pitchFamily="49" charset="0"/>
+                <a:cs typeface="Courier New" panose="02070309020205020404" pitchFamily="49" charset="0"/>
+              </a:rPr>
+              <a:t>"Environment": "Staging"</a:t>
+            </a:r>
+            <a:r>
+              <a:rPr lang="en-US" sz="1400" dirty="0">
+                <a:latin typeface="Courier New" panose="02070309020205020404" pitchFamily="49" charset="0"/>
+                <a:cs typeface="Courier New" panose="02070309020205020404" pitchFamily="49" charset="0"/>
+              </a:rPr>
+              <a:t>,</a:t>
+            </a:r>
+          </a:p>
+          <a:p>
+            <a:r>
+              <a:rPr lang="en-US" sz="1400" dirty="0">
+                <a:latin typeface="Courier New" panose="02070309020205020404" pitchFamily="49" charset="0"/>
+                <a:cs typeface="Courier New" panose="02070309020205020404" pitchFamily="49" charset="0"/>
+              </a:rPr>
+              <a:t>    "Domain": {</a:t>
+            </a:r>
+          </a:p>
+          <a:p>
+            <a:r>
+              <a:rPr lang="en-US" sz="1400" dirty="0">
+                <a:latin typeface="Courier New" panose="02070309020205020404" pitchFamily="49" charset="0"/>
+                <a:cs typeface="Courier New" panose="02070309020205020404" pitchFamily="49" charset="0"/>
+              </a:rPr>
+              <a:t>      "Remotes": [ … ]</a:t>
+            </a:r>
+          </a:p>
+          <a:p>
+            <a:r>
+              <a:rPr lang="en-US" sz="1400" dirty="0">
+                <a:latin typeface="Courier New" panose="02070309020205020404" pitchFamily="49" charset="0"/>
+                <a:cs typeface="Courier New" panose="02070309020205020404" pitchFamily="49" charset="0"/>
+              </a:rPr>
+              <a:t>    }</a:t>
+            </a:r>
+          </a:p>
+          <a:p>
+            <a:r>
+              <a:rPr lang="en-US" sz="1400" dirty="0">
+                <a:latin typeface="Courier New" panose="02070309020205020404" pitchFamily="49" charset="0"/>
+                <a:cs typeface="Courier New" panose="02070309020205020404" pitchFamily="49" charset="0"/>
+              </a:rPr>
+              <a:t>  }]</a:t>
+            </a:r>
+          </a:p>
+          <a:p>
+            <a:r>
+              <a:rPr lang="en-US" sz="1400" dirty="0">
+                <a:latin typeface="Courier New" panose="02070309020205020404" pitchFamily="49" charset="0"/>
+                <a:cs typeface="Courier New" panose="02070309020205020404" pitchFamily="49" charset="0"/>
+              </a:rPr>
+              <a:t>}</a:t>
+            </a:r>
+          </a:p>
+        </p:txBody>
+      </p:sp>
+      <p:sp>
+        <p:nvSpPr>
+          <p:cNvPr id="6" name="TextBox 5">
+            <a:extLst>
+              <a:ext uri="{FF2B5EF4-FFF2-40B4-BE49-F238E27FC236}">
+                <a16:creationId xmlns:a16="http://schemas.microsoft.com/office/drawing/2014/main" id="{14AF6B14-89CD-7852-A417-173476AAD20D}"/>
+              </a:ext>
+            </a:extLst>
+          </p:cNvPr>
+          <p:cNvSpPr txBox="1"/>
+          <p:nvPr/>
+        </p:nvSpPr>
+        <p:spPr>
+          <a:xfrm>
+            <a:off x="6096000" y="1544768"/>
+            <a:ext cx="3870497" cy="2677656"/>
+          </a:xfrm>
+          <a:prstGeom prst="rect">
+            <a:avLst/>
+          </a:prstGeom>
+          <a:noFill/>
+        </p:spPr>
+        <p:txBody>
+          <a:bodyPr wrap="square">
+            <a:spAutoFit/>
+          </a:bodyPr>
+          <a:lstStyle/>
+          <a:p>
+            <a:r>
+              <a:rPr lang="en-US" sz="1400" dirty="0">
+                <a:latin typeface="Courier New" panose="02070309020205020404" pitchFamily="49" charset="0"/>
+                <a:cs typeface="Courier New" panose="02070309020205020404" pitchFamily="49" charset="0"/>
+              </a:rPr>
+              <a:t>{</a:t>
+            </a:r>
+            <a:br>
+              <a:rPr lang="en-US" sz="1400" dirty="0">
+                <a:latin typeface="Courier New" panose="02070309020205020404" pitchFamily="49" charset="0"/>
+                <a:cs typeface="Courier New" panose="02070309020205020404" pitchFamily="49" charset="0"/>
+              </a:rPr>
+            </a:br>
+            <a:r>
+              <a:rPr lang="en-US" sz="1400" dirty="0">
+                <a:latin typeface="Courier New" panose="02070309020205020404" pitchFamily="49" charset="0"/>
+                <a:cs typeface="Courier New" panose="02070309020205020404" pitchFamily="49" charset="0"/>
+              </a:rPr>
+              <a:t>  </a:t>
+            </a:r>
+            <a:r>
+              <a:rPr lang="en-US" sz="1400" b="1" dirty="0">
+                <a:latin typeface="Courier New" panose="02070309020205020404" pitchFamily="49" charset="0"/>
+                <a:cs typeface="Courier New" panose="02070309020205020404" pitchFamily="49" charset="0"/>
+              </a:rPr>
+              <a:t>"</a:t>
+            </a:r>
+            <a:r>
+              <a:rPr lang="en-US" sz="1400" b="1" dirty="0" err="1">
+                <a:latin typeface="Courier New" panose="02070309020205020404" pitchFamily="49" charset="0"/>
+                <a:cs typeface="Courier New" panose="02070309020205020404" pitchFamily="49" charset="0"/>
+              </a:rPr>
+              <a:t>DomainName</a:t>
+            </a:r>
+            <a:r>
+              <a:rPr lang="en-US" sz="1400" b="1" dirty="0">
+                <a:latin typeface="Courier New" panose="02070309020205020404" pitchFamily="49" charset="0"/>
+                <a:cs typeface="Courier New" panose="02070309020205020404" pitchFamily="49" charset="0"/>
+              </a:rPr>
+              <a:t>": "</a:t>
+            </a:r>
+            <a:r>
+              <a:rPr lang="en-US" sz="1400" b="1" dirty="0" err="1">
+                <a:latin typeface="Courier New" panose="02070309020205020404" pitchFamily="49" charset="0"/>
+                <a:cs typeface="Courier New" panose="02070309020205020404" pitchFamily="49" charset="0"/>
+              </a:rPr>
+              <a:t>SaasOneCS</a:t>
+            </a:r>
+            <a:r>
+              <a:rPr lang="en-US" sz="1400" b="1" dirty="0">
+                <a:latin typeface="Courier New" panose="02070309020205020404" pitchFamily="49" charset="0"/>
+                <a:cs typeface="Courier New" panose="02070309020205020404" pitchFamily="49" charset="0"/>
+              </a:rPr>
+              <a:t>"</a:t>
+            </a:r>
+            <a:r>
+              <a:rPr lang="en-US" sz="1400" dirty="0">
+                <a:latin typeface="Courier New" panose="02070309020205020404" pitchFamily="49" charset="0"/>
+                <a:cs typeface="Courier New" panose="02070309020205020404" pitchFamily="49" charset="0"/>
+              </a:rPr>
+              <a:t>,</a:t>
+            </a:r>
+            <a:br>
+              <a:rPr lang="en-US" sz="1400" dirty="0">
+                <a:latin typeface="Courier New" panose="02070309020205020404" pitchFamily="49" charset="0"/>
+                <a:cs typeface="Courier New" panose="02070309020205020404" pitchFamily="49" charset="0"/>
+              </a:rPr>
+            </a:br>
+            <a:r>
+              <a:rPr lang="en-US" sz="1400" dirty="0">
+                <a:latin typeface="Courier New" panose="02070309020205020404" pitchFamily="49" charset="0"/>
+                <a:cs typeface="Courier New" panose="02070309020205020404" pitchFamily="49" charset="0"/>
+              </a:rPr>
+              <a:t>  </a:t>
+            </a:r>
+            <a:r>
+              <a:rPr lang="en-US" sz="1400" b="1" dirty="0">
+                <a:latin typeface="Courier New" panose="02070309020205020404" pitchFamily="49" charset="0"/>
+                <a:cs typeface="Courier New" panose="02070309020205020404" pitchFamily="49" charset="0"/>
+              </a:rPr>
+              <a:t>"Environment": "Staging"</a:t>
+            </a:r>
+            <a:r>
+              <a:rPr lang="en-US" sz="1400" dirty="0">
+                <a:latin typeface="Courier New" panose="02070309020205020404" pitchFamily="49" charset="0"/>
+                <a:cs typeface="Courier New" panose="02070309020205020404" pitchFamily="49" charset="0"/>
+              </a:rPr>
+              <a:t>,</a:t>
+            </a:r>
+          </a:p>
+          <a:p>
+            <a:r>
+              <a:rPr lang="en-US" sz="1400" dirty="0">
+                <a:latin typeface="Courier New" panose="02070309020205020404" pitchFamily="49" charset="0"/>
+                <a:cs typeface="Courier New" panose="02070309020205020404" pitchFamily="49" charset="0"/>
+              </a:rPr>
+              <a:t>  "Name": "</a:t>
+            </a:r>
+            <a:r>
+              <a:rPr lang="en-US" sz="1400" dirty="0" err="1">
+                <a:latin typeface="Courier New" panose="02070309020205020404" pitchFamily="49" charset="0"/>
+                <a:cs typeface="Courier New" panose="02070309020205020404" pitchFamily="49" charset="0"/>
+              </a:rPr>
+              <a:t>LaToulousaine</a:t>
+            </a:r>
+            <a:r>
+              <a:rPr lang="en-US" sz="1400" dirty="0">
+                <a:latin typeface="Courier New" panose="02070309020205020404" pitchFamily="49" charset="0"/>
+                <a:cs typeface="Courier New" panose="02070309020205020404" pitchFamily="49" charset="0"/>
+              </a:rPr>
+              <a:t>",</a:t>
+            </a:r>
+          </a:p>
+          <a:p>
+            <a:r>
+              <a:rPr lang="en-US" sz="1400" dirty="0">
+                <a:latin typeface="Courier New" panose="02070309020205020404" pitchFamily="49" charset="0"/>
+                <a:cs typeface="Courier New" panose="02070309020205020404" pitchFamily="49" charset="0"/>
+              </a:rPr>
+              <a:t>  "Domain": {</a:t>
+            </a:r>
+            <a:br>
+              <a:rPr lang="en-US" sz="1400" dirty="0">
+                <a:latin typeface="Courier New" panose="02070309020205020404" pitchFamily="49" charset="0"/>
+                <a:cs typeface="Courier New" panose="02070309020205020404" pitchFamily="49" charset="0"/>
+              </a:rPr>
+            </a:br>
+            <a:r>
+              <a:rPr lang="en-US" sz="1400" dirty="0">
+                <a:latin typeface="Courier New" panose="02070309020205020404" pitchFamily="49" charset="0"/>
+                <a:cs typeface="Courier New" panose="02070309020205020404" pitchFamily="49" charset="0"/>
+              </a:rPr>
+              <a:t>    </a:t>
+            </a:r>
+            <a:r>
+              <a:rPr lang="en-US" sz="1400" b="1" dirty="0">
+                <a:latin typeface="Courier New" panose="02070309020205020404" pitchFamily="49" charset="0"/>
+                <a:cs typeface="Courier New" panose="02070309020205020404" pitchFamily="49" charset="0"/>
+              </a:rPr>
+              <a:t>"</a:t>
+            </a:r>
+            <a:r>
+              <a:rPr lang="en-US" sz="1400" b="1" dirty="0" err="1">
+                <a:latin typeface="Courier New" panose="02070309020205020404" pitchFamily="49" charset="0"/>
+                <a:cs typeface="Courier New" panose="02070309020205020404" pitchFamily="49" charset="0"/>
+              </a:rPr>
+              <a:t>DomainName</a:t>
+            </a:r>
+            <a:r>
+              <a:rPr lang="en-US" sz="1400" b="1" dirty="0">
+                <a:latin typeface="Courier New" panose="02070309020205020404" pitchFamily="49" charset="0"/>
+                <a:cs typeface="Courier New" panose="02070309020205020404" pitchFamily="49" charset="0"/>
+              </a:rPr>
+              <a:t>": "</a:t>
+            </a:r>
+            <a:r>
+              <a:rPr lang="en-US" sz="1400" b="1" dirty="0" err="1">
+                <a:latin typeface="Courier New" panose="02070309020205020404" pitchFamily="49" charset="0"/>
+                <a:cs typeface="Courier New" panose="02070309020205020404" pitchFamily="49" charset="0"/>
+              </a:rPr>
+              <a:t>LaToulousaine</a:t>
+            </a:r>
+            <a:r>
+              <a:rPr lang="en-US" sz="1400" b="1" dirty="0">
+                <a:latin typeface="Courier New" panose="02070309020205020404" pitchFamily="49" charset="0"/>
+                <a:cs typeface="Courier New" panose="02070309020205020404" pitchFamily="49" charset="0"/>
+              </a:rPr>
+              <a:t>"</a:t>
+            </a:r>
+            <a:r>
+              <a:rPr lang="en-US" sz="1400" dirty="0">
+                <a:latin typeface="Courier New" panose="02070309020205020404" pitchFamily="49" charset="0"/>
+                <a:cs typeface="Courier New" panose="02070309020205020404" pitchFamily="49" charset="0"/>
+              </a:rPr>
+              <a:t>,</a:t>
+            </a:r>
+          </a:p>
+          <a:p>
+            <a:r>
+              <a:rPr lang="en-US" sz="1400" b="1" dirty="0">
+                <a:latin typeface="Courier New" panose="02070309020205020404" pitchFamily="49" charset="0"/>
+                <a:cs typeface="Courier New" panose="02070309020205020404" pitchFamily="49" charset="0"/>
+              </a:rPr>
+              <a:t>    "Environment": "Staging"</a:t>
+            </a:r>
+            <a:r>
+              <a:rPr lang="en-US" sz="1400" dirty="0">
+                <a:latin typeface="Courier New" panose="02070309020205020404" pitchFamily="49" charset="0"/>
+                <a:cs typeface="Courier New" panose="02070309020205020404" pitchFamily="49" charset="0"/>
+              </a:rPr>
+              <a:t>,</a:t>
+            </a:r>
+          </a:p>
+          <a:p>
+            <a:r>
+              <a:rPr lang="en-US" sz="1400" dirty="0">
+                <a:latin typeface="Courier New" panose="02070309020205020404" pitchFamily="49" charset="0"/>
+                <a:cs typeface="Courier New" panose="02070309020205020404" pitchFamily="49" charset="0"/>
+              </a:rPr>
+              <a:t>    </a:t>
+            </a:r>
+            <a:r>
+              <a:rPr lang="en-US" sz="1400" b="1" dirty="0">
+                <a:latin typeface="Courier New" panose="02070309020205020404" pitchFamily="49" charset="0"/>
+                <a:cs typeface="Courier New" panose="02070309020205020404" pitchFamily="49" charset="0"/>
+              </a:rPr>
+              <a:t>"Local": {</a:t>
+            </a:r>
+          </a:p>
+          <a:p>
+            <a:r>
+              <a:rPr lang="en-US" sz="1400" b="1" dirty="0">
+                <a:latin typeface="Courier New" panose="02070309020205020404" pitchFamily="49" charset="0"/>
+                <a:cs typeface="Courier New" panose="02070309020205020404" pitchFamily="49" charset="0"/>
+              </a:rPr>
+              <a:t>      "Name": "</a:t>
+            </a:r>
+            <a:r>
+              <a:rPr lang="en-US" sz="1400" b="1" dirty="0" err="1">
+                <a:latin typeface="Courier New" panose="02070309020205020404" pitchFamily="49" charset="0"/>
+                <a:cs typeface="Courier New" panose="02070309020205020404" pitchFamily="49" charset="0"/>
+              </a:rPr>
+              <a:t>LaToulousaine</a:t>
+            </a:r>
+            <a:r>
+              <a:rPr lang="en-US" sz="1400" b="1" dirty="0">
+                <a:latin typeface="Courier New" panose="02070309020205020404" pitchFamily="49" charset="0"/>
+                <a:cs typeface="Courier New" panose="02070309020205020404" pitchFamily="49" charset="0"/>
+              </a:rPr>
+              <a:t>"</a:t>
+            </a:r>
+          </a:p>
+          <a:p>
+            <a:r>
+              <a:rPr lang="en-US" sz="1400" b="1" dirty="0">
+                <a:latin typeface="Courier New" panose="02070309020205020404" pitchFamily="49" charset="0"/>
+                <a:cs typeface="Courier New" panose="02070309020205020404" pitchFamily="49" charset="0"/>
+              </a:rPr>
+              <a:t>    }</a:t>
+            </a:r>
+            <a:r>
+              <a:rPr lang="en-US" sz="1400" dirty="0">
+                <a:latin typeface="Courier New" panose="02070309020205020404" pitchFamily="49" charset="0"/>
+                <a:cs typeface="Courier New" panose="02070309020205020404" pitchFamily="49" charset="0"/>
+              </a:rPr>
+              <a:t>,</a:t>
+            </a:r>
+          </a:p>
+          <a:p>
+            <a:r>
+              <a:rPr lang="en-US" sz="1400" dirty="0">
+                <a:latin typeface="Courier New" panose="02070309020205020404" pitchFamily="49" charset="0"/>
+                <a:cs typeface="Courier New" panose="02070309020205020404" pitchFamily="49" charset="0"/>
+              </a:rPr>
+              <a:t>    "Remotes": [ … ]</a:t>
+            </a:r>
+          </a:p>
+          <a:p>
+            <a:r>
+              <a:rPr lang="en-US" sz="1400" dirty="0">
+                <a:latin typeface="Courier New" panose="02070309020205020404" pitchFamily="49" charset="0"/>
+                <a:cs typeface="Courier New" panose="02070309020205020404" pitchFamily="49" charset="0"/>
+              </a:rPr>
+              <a:t>  }</a:t>
+            </a:r>
+          </a:p>
+        </p:txBody>
+      </p:sp>
+      <p:sp>
+        <p:nvSpPr>
+          <p:cNvPr id="5" name="Right Brace 4">
+            <a:extLst>
+              <a:ext uri="{FF2B5EF4-FFF2-40B4-BE49-F238E27FC236}">
+                <a16:creationId xmlns:a16="http://schemas.microsoft.com/office/drawing/2014/main" id="{C4E13CAF-C52E-CDC4-F2EC-218FF7FDF560}"/>
+              </a:ext>
+            </a:extLst>
+          </p:cNvPr>
+          <p:cNvSpPr/>
+          <p:nvPr/>
+        </p:nvSpPr>
+        <p:spPr>
+          <a:xfrm>
+            <a:off x="3988340" y="3103117"/>
+            <a:ext cx="311286" cy="1128409"/>
+          </a:xfrm>
+          <a:prstGeom prst="rightBrace">
+            <a:avLst/>
+          </a:prstGeom>
+        </p:spPr>
+        <p:style>
+          <a:lnRef idx="1">
+            <a:schemeClr val="accent1"/>
+          </a:lnRef>
+          <a:fillRef idx="0">
+            <a:schemeClr val="accent1"/>
+          </a:fillRef>
+          <a:effectRef idx="0">
+            <a:schemeClr val="accent1"/>
+          </a:effectRef>
+          <a:fontRef idx="minor">
+            <a:schemeClr val="tx1"/>
+          </a:fontRef>
+        </p:style>
+        <p:txBody>
+          <a:bodyPr rtlCol="0" anchor="ctr"/>
+          <a:lstStyle/>
+          <a:p>
+            <a:pPr algn="ctr"/>
+            <a:endParaRPr lang="en-US"/>
+          </a:p>
+        </p:txBody>
+      </p:sp>
+      <p:sp>
+        <p:nvSpPr>
+          <p:cNvPr id="9" name="Right Brace 8">
+            <a:extLst>
+              <a:ext uri="{FF2B5EF4-FFF2-40B4-BE49-F238E27FC236}">
+                <a16:creationId xmlns:a16="http://schemas.microsoft.com/office/drawing/2014/main" id="{7CD21529-3AEE-6DC4-B3A4-36DD460C3AB7}"/>
+              </a:ext>
+            </a:extLst>
+          </p:cNvPr>
+          <p:cNvSpPr/>
+          <p:nvPr/>
+        </p:nvSpPr>
+        <p:spPr>
+          <a:xfrm rot="10800000">
+            <a:off x="5784714" y="1704229"/>
+            <a:ext cx="311286" cy="2323016"/>
+          </a:xfrm>
+          <a:prstGeom prst="rightBrace">
+            <a:avLst/>
+          </a:prstGeom>
+        </p:spPr>
+        <p:style>
+          <a:lnRef idx="1">
+            <a:schemeClr val="accent1"/>
+          </a:lnRef>
+          <a:fillRef idx="0">
+            <a:schemeClr val="accent1"/>
+          </a:fillRef>
+          <a:effectRef idx="0">
+            <a:schemeClr val="accent1"/>
+          </a:effectRef>
+          <a:fontRef idx="minor">
+            <a:schemeClr val="tx1"/>
+          </a:fontRef>
+        </p:style>
+        <p:txBody>
+          <a:bodyPr rtlCol="0" anchor="ctr"/>
+          <a:lstStyle/>
+          <a:p>
+            <a:pPr algn="ctr"/>
+            <a:endParaRPr lang="en-US"/>
+          </a:p>
+        </p:txBody>
+      </p:sp>
+      <p:cxnSp>
+        <p:nvCxnSpPr>
+          <p:cNvPr id="13" name="Straight Arrow Connector 12">
+            <a:extLst>
+              <a:ext uri="{FF2B5EF4-FFF2-40B4-BE49-F238E27FC236}">
+                <a16:creationId xmlns:a16="http://schemas.microsoft.com/office/drawing/2014/main" id="{9AC5BC6D-74F1-02F9-F999-C814C8A3B146}"/>
+              </a:ext>
+            </a:extLst>
+          </p:cNvPr>
+          <p:cNvCxnSpPr>
+            <a:stCxn id="5" idx="1"/>
+            <a:endCxn id="9" idx="1"/>
+          </p:cNvCxnSpPr>
+          <p:nvPr/>
+        </p:nvCxnSpPr>
+        <p:spPr>
+          <a:xfrm flipV="1">
+            <a:off x="4299626" y="2865737"/>
+            <a:ext cx="1485088" cy="801585"/>
+          </a:xfrm>
+          <a:prstGeom prst="straightConnector1">
+            <a:avLst/>
+          </a:prstGeom>
+          <a:ln>
+            <a:tailEnd type="triangle"/>
+          </a:ln>
+        </p:spPr>
+        <p:style>
+          <a:lnRef idx="1">
+            <a:schemeClr val="accent1"/>
+          </a:lnRef>
+          <a:fillRef idx="0">
+            <a:schemeClr val="accent1"/>
+          </a:fillRef>
+          <a:effectRef idx="0">
+            <a:schemeClr val="accent1"/>
+          </a:effectRef>
+          <a:fontRef idx="minor">
+            <a:schemeClr val="tx1"/>
+          </a:fontRef>
+        </p:style>
+      </p:cxnSp>
+    </p:spTree>
+    <p:extLst>
+      <p:ext uri="{BB962C8B-B14F-4D97-AF65-F5344CB8AC3E}">
+        <p14:creationId xmlns:p14="http://schemas.microsoft.com/office/powerpoint/2010/main" val="344724328"/>
+      </p:ext>
+    </p:extLst>
+  </p:cSld>
+  <p:clrMapOvr>
+    <a:masterClrMapping/>
+  </p:clrMapOvr>
+</p:sld>
+</file>
+
+<file path=ppt/slides/slide14.xml><?xml version="1.0" encoding="utf-8"?>
+<p:sld xmlns:a="http://schemas.openxmlformats.org/drawingml/2006/main" xmlns:r="http://schemas.openxmlformats.org/officeDocument/2006/relationships" xmlns:p="http://schemas.openxmlformats.org/presentationml/2006/main">
+  <p:cSld>
+    <p:spTree>
+      <p:nvGrpSpPr>
+        <p:cNvPr id="1" name=""/>
+        <p:cNvGrpSpPr/>
+        <p:nvPr/>
+      </p:nvGrpSpPr>
+      <p:grpSpPr>
+        <a:xfrm>
+          <a:off x="0" y="0"/>
+          <a:ext cx="0" cy="0"/>
+          <a:chOff x="0" y="0"/>
+          <a:chExt cx="0" cy="0"/>
+        </a:xfrm>
+      </p:grpSpPr>
+      <p:sp>
+        <p:nvSpPr>
+          <p:cNvPr id="2" name="Title 1">
+            <a:extLst>
+              <a:ext uri="{FF2B5EF4-FFF2-40B4-BE49-F238E27FC236}">
+                <a16:creationId xmlns:a16="http://schemas.microsoft.com/office/drawing/2014/main" id="{3902CAA5-AE8B-13AE-3860-23AA77D32840}"/>
+              </a:ext>
+            </a:extLst>
+          </p:cNvPr>
+          <p:cNvSpPr>
+            <a:spLocks noGrp="1"/>
+          </p:cNvSpPr>
+          <p:nvPr>
+            <p:ph type="title"/>
+          </p:nvPr>
+        </p:nvSpPr>
+        <p:spPr/>
+        <p:txBody>
+          <a:bodyPr/>
+          <a:lstStyle/>
+          <a:p>
+            <a:r>
+              <a:rPr lang="en-US" dirty="0" err="1"/>
+              <a:t>LaToulousaine</a:t>
+            </a:r>
+            <a:r>
+              <a:rPr lang="en-US" dirty="0"/>
+              <a:t> goes to London</a:t>
+            </a:r>
+          </a:p>
+        </p:txBody>
+      </p:sp>
+      <p:sp>
+        <p:nvSpPr>
+          <p:cNvPr id="3" name="Content Placeholder 2">
+            <a:extLst>
+              <a:ext uri="{FF2B5EF4-FFF2-40B4-BE49-F238E27FC236}">
+                <a16:creationId xmlns:a16="http://schemas.microsoft.com/office/drawing/2014/main" id="{56BE14D5-3E2D-7E2E-F06E-5A1F413D3A9A}"/>
+              </a:ext>
+            </a:extLst>
+          </p:cNvPr>
+          <p:cNvSpPr>
+            <a:spLocks noGrp="1"/>
+          </p:cNvSpPr>
+          <p:nvPr>
+            <p:ph idx="1"/>
+          </p:nvPr>
+        </p:nvSpPr>
+        <p:spPr/>
+        <p:txBody>
+          <a:bodyPr>
+            <a:normAutofit lnSpcReduction="10000"/>
+          </a:bodyPr>
+          <a:lstStyle/>
+          <a:p>
+            <a:r>
+              <a:rPr lang="en-US" dirty="0"/>
+              <a:t>We may keep the single </a:t>
+            </a:r>
+            <a:r>
+              <a:rPr lang="en-US" dirty="0" err="1"/>
+              <a:t>LaToulousaine</a:t>
+            </a:r>
+            <a:r>
+              <a:rPr lang="en-US" dirty="0"/>
+              <a:t> domain and define the English Agents in them… </a:t>
+            </a:r>
+          </a:p>
+          <a:p>
+            <a:pPr lvl="1"/>
+            <a:r>
+              <a:rPr lang="en-US" dirty="0"/>
+              <a:t>… and deal with “Trolley1” and “London_Trolley1”.</a:t>
+            </a:r>
+          </a:p>
+          <a:p>
+            <a:pPr lvl="1">
+              <a:buFont typeface="Wingdings" panose="05000000000000000000" pitchFamily="2" charset="2"/>
+              <a:buChar char="è"/>
+            </a:pPr>
+            <a:r>
+              <a:rPr lang="en-US" dirty="0">
+                <a:sym typeface="Wingdings" panose="05000000000000000000" pitchFamily="2" charset="2"/>
+              </a:rPr>
+              <a:t>This less than ideal!</a:t>
+            </a:r>
+          </a:p>
+          <a:p>
+            <a:pPr marL="0" indent="0">
+              <a:buNone/>
+            </a:pPr>
+            <a:endParaRPr lang="en-US" dirty="0"/>
+          </a:p>
+          <a:p>
+            <a:r>
+              <a:rPr lang="en-US" dirty="0"/>
+              <a:t>We can do better but this requires a small adjustment to the Domain notion.</a:t>
+            </a:r>
+          </a:p>
+          <a:p>
+            <a:pPr lvl="1"/>
+            <a:r>
+              <a:rPr lang="en-US" dirty="0" err="1"/>
+              <a:t>LaToulousaine</a:t>
+            </a:r>
+            <a:r>
+              <a:rPr lang="en-US" dirty="0"/>
+              <a:t> domain must continue to exists: its logs are grouped under this root key, a repository exists for “</a:t>
+            </a:r>
+            <a:r>
+              <a:rPr lang="en-US" dirty="0" err="1"/>
+              <a:t>LaToulousaine</a:t>
+            </a:r>
+            <a:r>
+              <a:rPr lang="en-US" dirty="0"/>
+              <a:t>” (and may be a Stack), we earn money from “</a:t>
+            </a:r>
+            <a:r>
+              <a:rPr lang="en-US" dirty="0" err="1"/>
+              <a:t>LaToulousaine</a:t>
+            </a:r>
+            <a:r>
+              <a:rPr lang="en-US" dirty="0"/>
+              <a:t>”, </a:t>
+            </a:r>
+            <a:r>
+              <a:rPr lang="en-US" dirty="0" err="1"/>
+              <a:t>OneCS</a:t>
+            </a:r>
+            <a:r>
+              <a:rPr lang="en-US" dirty="0"/>
+              <a:t> must continue to have a “</a:t>
+            </a:r>
+            <a:r>
+              <a:rPr lang="en-US" dirty="0" err="1"/>
+              <a:t>LaToulousaine</a:t>
+            </a:r>
+            <a:r>
+              <a:rPr lang="en-US" dirty="0"/>
+              <a:t>” landing page with its users (no matter how much warehouses there are and where they are).</a:t>
+            </a:r>
+          </a:p>
+        </p:txBody>
+      </p:sp>
+    </p:spTree>
+    <p:extLst>
+      <p:ext uri="{BB962C8B-B14F-4D97-AF65-F5344CB8AC3E}">
+        <p14:creationId xmlns:p14="http://schemas.microsoft.com/office/powerpoint/2010/main" val="2438403987"/>
+      </p:ext>
+    </p:extLst>
+  </p:cSld>
+  <p:clrMapOvr>
+    <a:masterClrMapping/>
+  </p:clrMapOvr>
+</p:sld>
+</file>
+
+<file path=ppt/slides/slide15.xml><?xml version="1.0" encoding="utf-8"?>
+<p:sld xmlns:a="http://schemas.openxmlformats.org/drawingml/2006/main" xmlns:r="http://schemas.openxmlformats.org/officeDocument/2006/relationships" xmlns:p="http://schemas.openxmlformats.org/presentationml/2006/main">
+  <p:cSld>
+    <p:spTree>
+      <p:nvGrpSpPr>
+        <p:cNvPr id="1" name=""/>
+        <p:cNvGrpSpPr/>
+        <p:nvPr/>
+      </p:nvGrpSpPr>
+      <p:grpSpPr>
+        <a:xfrm>
+          <a:off x="0" y="0"/>
+          <a:ext cx="0" cy="0"/>
+          <a:chOff x="0" y="0"/>
+          <a:chExt cx="0" cy="0"/>
+        </a:xfrm>
+      </p:grpSpPr>
+      <p:sp>
+        <p:nvSpPr>
+          <p:cNvPr id="2" name="Title 1">
+            <a:extLst>
+              <a:ext uri="{FF2B5EF4-FFF2-40B4-BE49-F238E27FC236}">
+                <a16:creationId xmlns:a16="http://schemas.microsoft.com/office/drawing/2014/main" id="{07372F0F-8616-38EC-EDA0-4EBA926032D8}"/>
+              </a:ext>
+            </a:extLst>
+          </p:cNvPr>
+          <p:cNvSpPr>
+            <a:spLocks noGrp="1"/>
+          </p:cNvSpPr>
+          <p:nvPr>
+            <p:ph type="title"/>
+          </p:nvPr>
+        </p:nvSpPr>
+        <p:spPr/>
+        <p:txBody>
+          <a:bodyPr/>
+          <a:lstStyle/>
+          <a:p>
+            <a:r>
+              <a:rPr lang="en-US" dirty="0"/>
+              <a:t>The “Extended Domain Name”</a:t>
+            </a:r>
+          </a:p>
+        </p:txBody>
+      </p:sp>
+      <p:sp>
+        <p:nvSpPr>
+          <p:cNvPr id="3" name="Content Placeholder 2">
+            <a:extLst>
+              <a:ext uri="{FF2B5EF4-FFF2-40B4-BE49-F238E27FC236}">
+                <a16:creationId xmlns:a16="http://schemas.microsoft.com/office/drawing/2014/main" id="{D7E53221-6DCC-F2B1-538E-49199CB44626}"/>
+              </a:ext>
+            </a:extLst>
+          </p:cNvPr>
+          <p:cNvSpPr>
+            <a:spLocks noGrp="1"/>
+          </p:cNvSpPr>
+          <p:nvPr>
+            <p:ph idx="1"/>
+          </p:nvPr>
+        </p:nvSpPr>
+        <p:spPr/>
+        <p:txBody>
+          <a:bodyPr/>
+          <a:lstStyle/>
+          <a:p>
+            <a:r>
+              <a:rPr lang="en-US" dirty="0"/>
+              <a:t>We allow the </a:t>
+            </a:r>
+            <a:r>
+              <a:rPr lang="en-US" dirty="0" err="1"/>
+              <a:t>DomainName</a:t>
+            </a:r>
+            <a:r>
+              <a:rPr lang="en-US" dirty="0"/>
+              <a:t> to contain “/”.</a:t>
+            </a:r>
+          </a:p>
+          <a:p>
+            <a:r>
+              <a:rPr lang="en-US" dirty="0"/>
+              <a:t>“</a:t>
+            </a:r>
+            <a:r>
+              <a:rPr lang="en-US" dirty="0" err="1"/>
+              <a:t>LaToulousaine</a:t>
+            </a:r>
+            <a:r>
+              <a:rPr lang="en-US" dirty="0"/>
+              <a:t>/London” and “</a:t>
+            </a:r>
+            <a:r>
+              <a:rPr lang="en-US" dirty="0" err="1"/>
+              <a:t>LaToulousaine</a:t>
+            </a:r>
+            <a:r>
+              <a:rPr lang="en-US" dirty="0"/>
+              <a:t>/France/Toulouse” are valid domain names.</a:t>
+            </a:r>
+          </a:p>
+          <a:p>
+            <a:r>
+              <a:rPr lang="en-US" dirty="0"/>
+              <a:t>Everything that has been said about the fundamental triple Domain/Environment/Party is still true.</a:t>
+            </a:r>
+          </a:p>
+          <a:p>
+            <a:pPr lvl="1"/>
+            <a:r>
+              <a:rPr lang="en-US" dirty="0"/>
+              <a:t>We don’t manage a tree of resources.</a:t>
+            </a:r>
+          </a:p>
+          <a:p>
+            <a:pPr lvl="1"/>
+            <a:r>
+              <a:rPr lang="en-US" dirty="0"/>
+              <a:t>The 2-levels only architecture of the Application Identity is unchanged.</a:t>
+            </a:r>
+          </a:p>
+          <a:p>
+            <a:r>
+              <a:rPr lang="en-US" dirty="0"/>
+              <a:t>Only the “Full Path” of a Party must be redesigned:</a:t>
+            </a:r>
+          </a:p>
+          <a:p>
+            <a:pPr lvl="1"/>
+            <a:r>
+              <a:rPr lang="en-US" dirty="0"/>
+              <a:t>The </a:t>
+            </a:r>
+            <a:r>
+              <a:rPr lang="en-US" i="1" dirty="0"/>
+              <a:t>Environment</a:t>
+            </a:r>
+            <a:r>
+              <a:rPr lang="en-US" dirty="0"/>
+              <a:t> is injected after the first part of the domain name.</a:t>
+            </a:r>
+          </a:p>
+        </p:txBody>
+      </p:sp>
+    </p:spTree>
+    <p:extLst>
+      <p:ext uri="{BB962C8B-B14F-4D97-AF65-F5344CB8AC3E}">
+        <p14:creationId xmlns:p14="http://schemas.microsoft.com/office/powerpoint/2010/main" val="1320783556"/>
+      </p:ext>
+    </p:extLst>
+  </p:cSld>
+  <p:clrMapOvr>
+    <a:masterClrMapping/>
+  </p:clrMapOvr>
+</p:sld>
+</file>
+
+<file path=ppt/slides/slide16.xml><?xml version="1.0" encoding="utf-8"?>
+<p:sld xmlns:a="http://schemas.openxmlformats.org/drawingml/2006/main" xmlns:r="http://schemas.openxmlformats.org/officeDocument/2006/relationships" xmlns:p="http://schemas.openxmlformats.org/presentationml/2006/main">
+  <p:cSld>
+    <p:spTree>
+      <p:nvGrpSpPr>
+        <p:cNvPr id="1" name=""/>
+        <p:cNvGrpSpPr/>
+        <p:nvPr/>
+      </p:nvGrpSpPr>
+      <p:grpSpPr>
+        <a:xfrm>
+          <a:off x="0" y="0"/>
+          <a:ext cx="0" cy="0"/>
+          <a:chOff x="0" y="0"/>
+          <a:chExt cx="0" cy="0"/>
+        </a:xfrm>
+      </p:grpSpPr>
+      <p:sp>
+        <p:nvSpPr>
+          <p:cNvPr id="2" name="Title 1">
+            <a:extLst>
+              <a:ext uri="{FF2B5EF4-FFF2-40B4-BE49-F238E27FC236}">
+                <a16:creationId xmlns:a16="http://schemas.microsoft.com/office/drawing/2014/main" id="{10B34E8B-9831-25D5-4048-520F1F267CE6}"/>
+              </a:ext>
+            </a:extLst>
+          </p:cNvPr>
+          <p:cNvSpPr>
+            <a:spLocks noGrp="1"/>
+          </p:cNvSpPr>
+          <p:nvPr>
+            <p:ph type="title"/>
+          </p:nvPr>
+        </p:nvSpPr>
+        <p:spPr/>
+        <p:txBody>
+          <a:bodyPr/>
+          <a:lstStyle/>
+          <a:p>
+            <a:r>
+              <a:rPr lang="en-US" dirty="0"/>
+              <a:t>The final D/E/P Party identity</a:t>
+            </a:r>
+          </a:p>
+        </p:txBody>
+      </p:sp>
+      <p:sp>
+        <p:nvSpPr>
+          <p:cNvPr id="3" name="Content Placeholder 2">
+            <a:extLst>
+              <a:ext uri="{FF2B5EF4-FFF2-40B4-BE49-F238E27FC236}">
+                <a16:creationId xmlns:a16="http://schemas.microsoft.com/office/drawing/2014/main" id="{DF5FFBCC-C4FE-178F-C6A4-F5F4B3B0EAA1}"/>
+              </a:ext>
+            </a:extLst>
+          </p:cNvPr>
+          <p:cNvSpPr>
+            <a:spLocks noGrp="1"/>
+          </p:cNvSpPr>
+          <p:nvPr>
+            <p:ph idx="1"/>
+          </p:nvPr>
+        </p:nvSpPr>
+        <p:spPr>
+          <a:xfrm>
+            <a:off x="838200" y="1825624"/>
+            <a:ext cx="10515600" cy="4857979"/>
+          </a:xfrm>
+        </p:spPr>
+        <p:txBody>
+          <a:bodyPr>
+            <a:normAutofit/>
+          </a:bodyPr>
+          <a:lstStyle/>
+          <a:p>
+            <a:r>
+              <a:rPr lang="en-US" dirty="0"/>
+              <a:t>The logical identity is a triple of string “</a:t>
+            </a:r>
+            <a:r>
+              <a:rPr lang="en-US" dirty="0" err="1"/>
+              <a:t>DomainName</a:t>
+            </a:r>
+            <a:r>
+              <a:rPr lang="en-US" dirty="0"/>
+              <a:t>”, ”</a:t>
+            </a:r>
+            <a:r>
+              <a:rPr lang="en-US" dirty="0" err="1"/>
+              <a:t>EnvironmentName</a:t>
+            </a:r>
+            <a:r>
+              <a:rPr lang="en-US" dirty="0"/>
+              <a:t>”, “</a:t>
+            </a:r>
+            <a:r>
+              <a:rPr lang="en-US" dirty="0" err="1"/>
+              <a:t>PartyName</a:t>
+            </a:r>
+            <a:r>
+              <a:rPr lang="en-US" dirty="0"/>
+              <a:t>”.</a:t>
+            </a:r>
+          </a:p>
+          <a:p>
+            <a:r>
+              <a:rPr lang="en-US" dirty="0"/>
+              <a:t>Its full name is a </a:t>
+            </a:r>
+            <a:r>
+              <a:rPr lang="en-US" dirty="0" err="1"/>
+              <a:t>NormalizedPath</a:t>
+            </a:r>
+            <a:r>
+              <a:rPr lang="en-US" dirty="0"/>
+              <a:t>.</a:t>
+            </a:r>
+          </a:p>
+          <a:p>
+            <a:endParaRPr lang="en-US" dirty="0"/>
+          </a:p>
+          <a:p>
+            <a:endParaRPr lang="en-US" dirty="0"/>
+          </a:p>
+          <a:p>
+            <a:endParaRPr lang="en-US" dirty="0"/>
+          </a:p>
+          <a:p>
+            <a:endParaRPr lang="en-US" dirty="0"/>
+          </a:p>
+          <a:p>
+            <a:endParaRPr lang="en-US" dirty="0"/>
+          </a:p>
+          <a:p>
+            <a:r>
+              <a:rPr lang="en-US" dirty="0"/>
+              <a:t>It ultimately defaults to “</a:t>
+            </a:r>
+            <a:r>
+              <a:rPr lang="en-US" b="0" i="0" dirty="0">
+                <a:solidFill>
+                  <a:srgbClr val="222222"/>
+                </a:solidFill>
+                <a:effectLst/>
+                <a:latin typeface="Segoe UI" panose="020B0502040204020203" pitchFamily="34" charset="0"/>
+              </a:rPr>
+              <a:t>Undefined/Development/Unknown”.</a:t>
+            </a:r>
+            <a:endParaRPr lang="en-US" dirty="0"/>
+          </a:p>
+          <a:p>
+            <a:endParaRPr lang="en-US" dirty="0"/>
+          </a:p>
+        </p:txBody>
+      </p:sp>
+      <p:graphicFrame>
+        <p:nvGraphicFramePr>
+          <p:cNvPr id="4" name="Table 4">
+            <a:extLst>
+              <a:ext uri="{FF2B5EF4-FFF2-40B4-BE49-F238E27FC236}">
+                <a16:creationId xmlns:a16="http://schemas.microsoft.com/office/drawing/2014/main" id="{30142BB9-7E7C-5474-04FE-CD0469B97CE8}"/>
+              </a:ext>
+            </a:extLst>
+          </p:cNvPr>
+          <p:cNvGraphicFramePr>
+            <a:graphicFrameLocks noGrp="1"/>
+          </p:cNvGraphicFramePr>
+          <p:nvPr>
+            <p:extLst>
+              <p:ext uri="{D42A27DB-BD31-4B8C-83A1-F6EECF244321}">
+                <p14:modId xmlns:p14="http://schemas.microsoft.com/office/powerpoint/2010/main" val="2771560791"/>
+              </p:ext>
+            </p:extLst>
+          </p:nvPr>
+        </p:nvGraphicFramePr>
+        <p:xfrm>
+          <a:off x="1198125" y="3239311"/>
+          <a:ext cx="8977007" cy="2216417"/>
+        </p:xfrm>
+        <a:graphic>
+          <a:graphicData uri="http://schemas.openxmlformats.org/drawingml/2006/table">
+            <a:tbl>
+              <a:tblPr firstRow="1" bandRow="1">
+                <a:tableStyleId>{5C22544A-7EE6-4342-B048-85BDC9FD1C3A}</a:tableStyleId>
+              </a:tblPr>
+              <a:tblGrid>
+                <a:gridCol w="3558701">
+                  <a:extLst>
+                    <a:ext uri="{9D8B030D-6E8A-4147-A177-3AD203B41FA5}">
+                      <a16:colId xmlns:a16="http://schemas.microsoft.com/office/drawing/2014/main" val="883587408"/>
+                    </a:ext>
+                  </a:extLst>
+                </a:gridCol>
+                <a:gridCol w="5418306">
+                  <a:extLst>
+                    <a:ext uri="{9D8B030D-6E8A-4147-A177-3AD203B41FA5}">
+                      <a16:colId xmlns:a16="http://schemas.microsoft.com/office/drawing/2014/main" val="517308239"/>
+                    </a:ext>
+                  </a:extLst>
+                </a:gridCol>
+              </a:tblGrid>
+              <a:tr h="298805">
+                <a:tc>
+                  <a:txBody>
+                    <a:bodyPr/>
+                    <a:lstStyle/>
+                    <a:p>
+                      <a:pPr algn="ctr"/>
+                      <a:r>
+                        <a:rPr lang="en-US" dirty="0"/>
+                        <a:t>DEP</a:t>
+                      </a:r>
+                    </a:p>
+                  </a:txBody>
+                  <a:tcPr/>
+                </a:tc>
+                <a:tc>
+                  <a:txBody>
+                    <a:bodyPr/>
+                    <a:lstStyle/>
+                    <a:p>
+                      <a:pPr algn="ctr"/>
+                      <a:r>
+                        <a:rPr lang="en-US" dirty="0"/>
+                        <a:t>Path</a:t>
+                      </a:r>
+                    </a:p>
+                  </a:txBody>
+                  <a:tcPr/>
+                </a:tc>
+                <a:extLst>
+                  <a:ext uri="{0D108BD9-81ED-4DB2-BD59-A6C34878D82A}">
+                    <a16:rowId xmlns:a16="http://schemas.microsoft.com/office/drawing/2014/main" val="915917829"/>
+                  </a:ext>
+                </a:extLst>
+              </a:tr>
+              <a:tr h="720197">
+                <a:tc>
+                  <a:txBody>
+                    <a:bodyPr/>
+                    <a:lstStyle/>
+                    <a:p>
+                      <a:r>
+                        <a:rPr lang="en-US" dirty="0"/>
+                        <a:t>D: </a:t>
+                      </a:r>
+                      <a:r>
+                        <a:rPr lang="en-US" dirty="0" err="1"/>
+                        <a:t>LaToulousaine</a:t>
+                      </a:r>
+                      <a:r>
+                        <a:rPr lang="en-US" dirty="0"/>
+                        <a:t>/France/Toulouse</a:t>
+                      </a:r>
+                    </a:p>
+                    <a:p>
+                      <a:r>
+                        <a:rPr lang="en-US" dirty="0"/>
+                        <a:t>E: Production</a:t>
+                      </a:r>
+                    </a:p>
+                    <a:p>
+                      <a:r>
+                        <a:rPr lang="en-US" dirty="0"/>
+                        <a:t>P: Trolley45</a:t>
+                      </a:r>
+                    </a:p>
+                  </a:txBody>
+                  <a:tcPr/>
+                </a:tc>
+                <a:tc>
+                  <a:txBody>
+                    <a:bodyPr/>
+                    <a:lstStyle/>
+                    <a:p>
+                      <a:pPr marL="0" marR="0" lvl="0" indent="0" algn="l" defTabSz="914400" rtl="0" eaLnBrk="1" fontAlgn="auto" latinLnBrk="0" hangingPunct="1">
+                        <a:lnSpc>
+                          <a:spcPct val="100000"/>
+                        </a:lnSpc>
+                        <a:spcBef>
+                          <a:spcPts val="0"/>
+                        </a:spcBef>
+                        <a:spcAft>
+                          <a:spcPts val="0"/>
+                        </a:spcAft>
+                        <a:buClrTx/>
+                        <a:buSzTx/>
+                        <a:buFontTx/>
+                        <a:buNone/>
+                        <a:tabLst/>
+                        <a:defRPr/>
+                      </a:pPr>
+                      <a:r>
+                        <a:rPr lang="en-US" dirty="0" err="1"/>
+                        <a:t>LaToulousaine</a:t>
+                      </a:r>
+                      <a:r>
+                        <a:rPr lang="en-US" dirty="0"/>
+                        <a:t>/Production/France/Toulouse/Trolley45</a:t>
+                      </a:r>
+                    </a:p>
+                    <a:p>
+                      <a:endParaRPr lang="en-US" dirty="0"/>
+                    </a:p>
+                  </a:txBody>
+                  <a:tcPr/>
+                </a:tc>
+                <a:extLst>
+                  <a:ext uri="{0D108BD9-81ED-4DB2-BD59-A6C34878D82A}">
+                    <a16:rowId xmlns:a16="http://schemas.microsoft.com/office/drawing/2014/main" val="4270824639"/>
+                  </a:ext>
+                </a:extLst>
+              </a:tr>
+              <a:tr h="936257">
+                <a:tc>
+                  <a:txBody>
+                    <a:bodyPr/>
+                    <a:lstStyle/>
+                    <a:p>
+                      <a:r>
+                        <a:rPr lang="en-US" dirty="0"/>
+                        <a:t>D: </a:t>
+                      </a:r>
+                      <a:r>
+                        <a:rPr lang="en-US" dirty="0" err="1"/>
+                        <a:t>LaToulousaine</a:t>
+                      </a:r>
+                      <a:r>
+                        <a:rPr lang="en-US" dirty="0"/>
+                        <a:t>/London</a:t>
+                      </a:r>
+                    </a:p>
+                    <a:p>
+                      <a:r>
+                        <a:rPr lang="en-US" dirty="0"/>
+                        <a:t>E: Development</a:t>
+                      </a:r>
+                    </a:p>
+                    <a:p>
+                      <a:r>
+                        <a:rPr lang="en-US" dirty="0"/>
+                        <a:t>P: </a:t>
+                      </a:r>
+                      <a:r>
+                        <a:rPr lang="en-US" dirty="0" err="1"/>
+                        <a:t>RobotTrolley</a:t>
+                      </a:r>
+                      <a:endParaRPr lang="en-US" dirty="0"/>
+                    </a:p>
+                  </a:txBody>
+                  <a:tcPr/>
+                </a:tc>
+                <a:tc>
+                  <a:txBody>
+                    <a:bodyPr/>
+                    <a:lstStyle/>
+                    <a:p>
+                      <a:pPr marL="0" marR="0" lvl="0" indent="0" algn="l" defTabSz="914400" rtl="0" eaLnBrk="1" fontAlgn="auto" latinLnBrk="0" hangingPunct="1">
+                        <a:lnSpc>
+                          <a:spcPct val="100000"/>
+                        </a:lnSpc>
+                        <a:spcBef>
+                          <a:spcPts val="0"/>
+                        </a:spcBef>
+                        <a:spcAft>
+                          <a:spcPts val="0"/>
+                        </a:spcAft>
+                        <a:buClrTx/>
+                        <a:buSzTx/>
+                        <a:buFontTx/>
+                        <a:buNone/>
+                        <a:tabLst/>
+                        <a:defRPr/>
+                      </a:pPr>
+                      <a:r>
+                        <a:rPr lang="en-US" dirty="0" err="1"/>
+                        <a:t>LaToulousaine</a:t>
+                      </a:r>
+                      <a:r>
+                        <a:rPr lang="en-US" dirty="0"/>
+                        <a:t>/Development/London/</a:t>
+                      </a:r>
+                      <a:r>
+                        <a:rPr lang="en-US" dirty="0" err="1"/>
+                        <a:t>RobotTrolley</a:t>
+                      </a:r>
+                      <a:endParaRPr lang="en-US" dirty="0"/>
+                    </a:p>
+                    <a:p>
+                      <a:endParaRPr lang="en-US" dirty="0"/>
+                    </a:p>
+                  </a:txBody>
+                  <a:tcPr/>
+                </a:tc>
+                <a:extLst>
+                  <a:ext uri="{0D108BD9-81ED-4DB2-BD59-A6C34878D82A}">
+                    <a16:rowId xmlns:a16="http://schemas.microsoft.com/office/drawing/2014/main" val="2408469356"/>
+                  </a:ext>
+                </a:extLst>
+              </a:tr>
+            </a:tbl>
+          </a:graphicData>
+        </a:graphic>
+      </p:graphicFrame>
+    </p:spTree>
+    <p:extLst>
+      <p:ext uri="{BB962C8B-B14F-4D97-AF65-F5344CB8AC3E}">
+        <p14:creationId xmlns:p14="http://schemas.microsoft.com/office/powerpoint/2010/main" val="1695337708"/>
+      </p:ext>
+    </p:extLst>
+  </p:cSld>
+  <p:clrMapOvr>
+    <a:masterClrMapping/>
+  </p:clrMapOvr>
+</p:sld>
+</file>
+
+<file path=ppt/slides/slide17.xml><?xml version="1.0" encoding="utf-8"?>
+<p:sld xmlns:a="http://schemas.openxmlformats.org/drawingml/2006/main" xmlns:r="http://schemas.openxmlformats.org/officeDocument/2006/relationships" xmlns:p="http://schemas.openxmlformats.org/presentationml/2006/main">
+  <p:cSld>
+    <p:spTree>
+      <p:nvGrpSpPr>
+        <p:cNvPr id="1" name=""/>
+        <p:cNvGrpSpPr/>
+        <p:nvPr/>
+      </p:nvGrpSpPr>
+      <p:grpSpPr>
+        <a:xfrm>
+          <a:off x="0" y="0"/>
+          <a:ext cx="0" cy="0"/>
+          <a:chOff x="0" y="0"/>
+          <a:chExt cx="0" cy="0"/>
+        </a:xfrm>
+      </p:grpSpPr>
+      <p:sp>
+        <p:nvSpPr>
+          <p:cNvPr id="2" name="Title 1">
+            <a:extLst>
+              <a:ext uri="{FF2B5EF4-FFF2-40B4-BE49-F238E27FC236}">
+                <a16:creationId xmlns:a16="http://schemas.microsoft.com/office/drawing/2014/main" id="{F0ABB2F6-6A3B-0600-9CA6-236A6AB60DE2}"/>
+              </a:ext>
+            </a:extLst>
+          </p:cNvPr>
+          <p:cNvSpPr>
+            <a:spLocks noGrp="1"/>
+          </p:cNvSpPr>
+          <p:nvPr>
+            <p:ph type="title"/>
+          </p:nvPr>
+        </p:nvSpPr>
+        <p:spPr/>
+        <p:txBody>
+          <a:bodyPr/>
+          <a:lstStyle/>
+          <a:p>
+            <a:r>
+              <a:rPr lang="en-US" dirty="0"/>
+              <a:t>Security and privacy</a:t>
+            </a:r>
+          </a:p>
+        </p:txBody>
+      </p:sp>
+      <p:sp>
+        <p:nvSpPr>
+          <p:cNvPr id="3" name="Content Placeholder 2">
+            <a:extLst>
+              <a:ext uri="{FF2B5EF4-FFF2-40B4-BE49-F238E27FC236}">
+                <a16:creationId xmlns:a16="http://schemas.microsoft.com/office/drawing/2014/main" id="{05AD752E-3F69-B30A-607A-3285A0B1B362}"/>
+              </a:ext>
+            </a:extLst>
+          </p:cNvPr>
+          <p:cNvSpPr>
+            <a:spLocks noGrp="1"/>
+          </p:cNvSpPr>
+          <p:nvPr>
+            <p:ph idx="1"/>
+          </p:nvPr>
+        </p:nvSpPr>
+        <p:spPr/>
+        <p:txBody>
+          <a:bodyPr/>
+          <a:lstStyle/>
+          <a:p>
+            <a:r>
+              <a:rPr lang="en-US" dirty="0"/>
+              <a:t>No keys appear in the configuration.</a:t>
+            </a:r>
+          </a:p>
+          <a:p>
+            <a:r>
+              <a:rPr lang="en-US" dirty="0"/>
+              <a:t>At least one X509 certificate must be available per Party.</a:t>
+            </a:r>
+          </a:p>
+          <a:p>
+            <a:pPr lvl="1"/>
+            <a:r>
+              <a:rPr lang="en-US" dirty="0" err="1"/>
+              <a:t>SaasOneCS</a:t>
+            </a:r>
+            <a:r>
+              <a:rPr lang="en-US" dirty="0"/>
+              <a:t>/Production/OneCS1 can work with a single certificate.</a:t>
+            </a:r>
+          </a:p>
+          <a:p>
+            <a:r>
+              <a:rPr lang="en-US" dirty="0"/>
+              <a:t>Keys are managed “by design” in a store by </a:t>
+            </a:r>
+            <a:r>
+              <a:rPr lang="en-US" dirty="0" err="1"/>
+              <a:t>CK.AppIdentity</a:t>
+            </a:r>
+            <a:r>
+              <a:rPr lang="en-US" dirty="0"/>
+              <a:t>.</a:t>
+            </a:r>
+          </a:p>
+          <a:p>
+            <a:pPr lvl="1"/>
+            <a:r>
+              <a:rPr lang="en-US" dirty="0"/>
+              <a:t>The simplest store is a folder with folders and/or files that contain the certificate files.</a:t>
+            </a:r>
+          </a:p>
+          <a:p>
+            <a:pPr lvl="1"/>
+            <a:r>
+              <a:rPr lang="en-US" dirty="0"/>
+              <a:t>Stronger key store may be implemented later.</a:t>
+            </a:r>
+          </a:p>
+          <a:p>
+            <a:r>
+              <a:rPr lang="en-US" dirty="0"/>
+              <a:t>Any relationship between 2 parties can be protected with a dedicated pair of keys.</a:t>
+            </a:r>
+          </a:p>
+        </p:txBody>
+      </p:sp>
+    </p:spTree>
+    <p:extLst>
+      <p:ext uri="{BB962C8B-B14F-4D97-AF65-F5344CB8AC3E}">
+        <p14:creationId xmlns:p14="http://schemas.microsoft.com/office/powerpoint/2010/main" val="2945111844"/>
+      </p:ext>
+    </p:extLst>
+  </p:cSld>
+  <p:clrMapOvr>
+    <a:masterClrMapping/>
+  </p:clrMapOvr>
+</p:sld>
+</file>
+
+<file path=ppt/slides/slide18.xml><?xml version="1.0" encoding="utf-8"?>
+<p:sld xmlns:a="http://schemas.openxmlformats.org/drawingml/2006/main" xmlns:r="http://schemas.openxmlformats.org/officeDocument/2006/relationships" xmlns:p="http://schemas.openxmlformats.org/presentationml/2006/main">
+  <p:cSld>
+    <p:spTree>
+      <p:nvGrpSpPr>
+        <p:cNvPr id="1" name=""/>
+        <p:cNvGrpSpPr/>
+        <p:nvPr/>
+      </p:nvGrpSpPr>
+      <p:grpSpPr>
+        <a:xfrm>
+          <a:off x="0" y="0"/>
+          <a:ext cx="0" cy="0"/>
+          <a:chOff x="0" y="0"/>
+          <a:chExt cx="0" cy="0"/>
+        </a:xfrm>
+      </p:grpSpPr>
+      <p:sp>
+        <p:nvSpPr>
+          <p:cNvPr id="2" name="Title 1">
+            <a:extLst>
+              <a:ext uri="{FF2B5EF4-FFF2-40B4-BE49-F238E27FC236}">
+                <a16:creationId xmlns:a16="http://schemas.microsoft.com/office/drawing/2014/main" id="{1B7F35EA-9815-CA8C-A80D-1857A5FDB005}"/>
+              </a:ext>
+            </a:extLst>
+          </p:cNvPr>
+          <p:cNvSpPr>
+            <a:spLocks noGrp="1"/>
+          </p:cNvSpPr>
+          <p:nvPr>
+            <p:ph type="title"/>
+          </p:nvPr>
+        </p:nvSpPr>
+        <p:spPr/>
+        <p:txBody>
+          <a:bodyPr/>
+          <a:lstStyle/>
+          <a:p>
+            <a:r>
+              <a:rPr lang="en-US" dirty="0"/>
+              <a:t>Other uses…</a:t>
+            </a:r>
+          </a:p>
+        </p:txBody>
+      </p:sp>
+      <p:sp>
+        <p:nvSpPr>
+          <p:cNvPr id="3" name="Content Placeholder 2">
+            <a:extLst>
+              <a:ext uri="{FF2B5EF4-FFF2-40B4-BE49-F238E27FC236}">
+                <a16:creationId xmlns:a16="http://schemas.microsoft.com/office/drawing/2014/main" id="{4DFA97AC-5D6A-7874-9EEB-5565D4A19027}"/>
+              </a:ext>
+            </a:extLst>
+          </p:cNvPr>
+          <p:cNvSpPr>
+            <a:spLocks noGrp="1"/>
+          </p:cNvSpPr>
+          <p:nvPr>
+            <p:ph idx="1"/>
+          </p:nvPr>
+        </p:nvSpPr>
+        <p:spPr>
+          <a:xfrm>
+            <a:off x="838200" y="1825625"/>
+            <a:ext cx="10515600" cy="888392"/>
+          </a:xfrm>
+        </p:spPr>
+        <p:txBody>
+          <a:bodyPr/>
+          <a:lstStyle/>
+          <a:p>
+            <a:r>
+              <a:rPr lang="en-US" dirty="0"/>
+              <a:t>Describing and configuring external services.</a:t>
+            </a:r>
+          </a:p>
+          <a:p>
+            <a:pPr lvl="1"/>
+            <a:r>
+              <a:rPr lang="en-US" dirty="0"/>
+              <a:t>Package First…</a:t>
+            </a:r>
+          </a:p>
+        </p:txBody>
+      </p:sp>
+      <p:sp>
+        <p:nvSpPr>
+          <p:cNvPr id="4" name="Content Placeholder 2">
+            <a:extLst>
+              <a:ext uri="{FF2B5EF4-FFF2-40B4-BE49-F238E27FC236}">
+                <a16:creationId xmlns:a16="http://schemas.microsoft.com/office/drawing/2014/main" id="{62D17C1F-A51E-C522-33E4-E7D2F26CB586}"/>
+              </a:ext>
+            </a:extLst>
+          </p:cNvPr>
+          <p:cNvSpPr txBox="1">
+            <a:spLocks/>
+          </p:cNvSpPr>
+          <p:nvPr/>
+        </p:nvSpPr>
+        <p:spPr>
+          <a:xfrm>
+            <a:off x="838200" y="2714017"/>
+            <a:ext cx="6749374" cy="3778857"/>
+          </a:xfrm>
+          <a:prstGeom prst="rect">
+            <a:avLst/>
+          </a:prstGeom>
+        </p:spPr>
+        <p:txBody>
+          <a:bodyPr vert="horz" lIns="91440" tIns="45720" rIns="91440" bIns="45720" rtlCol="0">
+            <a:normAutofit fontScale="85000" lnSpcReduction="20000"/>
+          </a:bodyPr>
+          <a:lstStyle>
+            <a:lvl1pPr marL="228600" indent="-228600" algn="l" defTabSz="914400" rtl="0" eaLnBrk="1" latinLnBrk="0" hangingPunct="1">
+              <a:lnSpc>
+                <a:spcPct val="90000"/>
+              </a:lnSpc>
+              <a:spcBef>
+                <a:spcPts val="1000"/>
+              </a:spcBef>
+              <a:buFont typeface="Arial" panose="020B0604020202020204" pitchFamily="34" charset="0"/>
+              <a:buChar char="•"/>
+              <a:defRPr sz="2800" kern="1200">
+                <a:solidFill>
+                  <a:schemeClr val="tx1"/>
+                </a:solidFill>
+                <a:latin typeface="+mn-lt"/>
+                <a:ea typeface="+mn-ea"/>
+                <a:cs typeface="+mn-cs"/>
+              </a:defRPr>
+            </a:lvl1pPr>
+            <a:lvl2pPr marL="685800" indent="-228600" algn="l" defTabSz="914400" rtl="0" eaLnBrk="1" latinLnBrk="0" hangingPunct="1">
+              <a:lnSpc>
+                <a:spcPct val="90000"/>
+              </a:lnSpc>
+              <a:spcBef>
+                <a:spcPts val="500"/>
+              </a:spcBef>
+              <a:buFont typeface="Arial" panose="020B0604020202020204" pitchFamily="34" charset="0"/>
+              <a:buChar char="•"/>
+              <a:defRPr sz="2400" kern="1200">
+                <a:solidFill>
+                  <a:schemeClr val="tx1"/>
+                </a:solidFill>
+                <a:latin typeface="+mn-lt"/>
+                <a:ea typeface="+mn-ea"/>
+                <a:cs typeface="+mn-cs"/>
+              </a:defRPr>
+            </a:lvl2pPr>
+            <a:lvl3pPr marL="1143000" indent="-228600" algn="l" defTabSz="914400" rtl="0" eaLnBrk="1" latinLnBrk="0" hangingPunct="1">
+              <a:lnSpc>
+                <a:spcPct val="90000"/>
+              </a:lnSpc>
+              <a:spcBef>
+                <a:spcPts val="500"/>
+              </a:spcBef>
+              <a:buFont typeface="Arial" panose="020B0604020202020204" pitchFamily="34" charset="0"/>
+              <a:buChar char="•"/>
+              <a:defRPr sz="2000" kern="1200">
+                <a:solidFill>
+                  <a:schemeClr val="tx1"/>
+                </a:solidFill>
+                <a:latin typeface="+mn-lt"/>
+                <a:ea typeface="+mn-ea"/>
+                <a:cs typeface="+mn-cs"/>
+              </a:defRPr>
+            </a:lvl3pPr>
+            <a:lvl4pPr marL="1600200" indent="-228600" algn="l" defTabSz="914400" rtl="0" eaLnBrk="1" latinLnBrk="0" hangingPunct="1">
+              <a:lnSpc>
+                <a:spcPct val="90000"/>
+              </a:lnSpc>
+              <a:spcBef>
+                <a:spcPts val="500"/>
+              </a:spcBef>
+              <a:buFont typeface="Arial" panose="020B0604020202020204" pitchFamily="34" charset="0"/>
+              <a:buChar char="•"/>
+              <a:defRPr sz="1800" kern="1200">
+                <a:solidFill>
+                  <a:schemeClr val="tx1"/>
+                </a:solidFill>
+                <a:latin typeface="+mn-lt"/>
+                <a:ea typeface="+mn-ea"/>
+                <a:cs typeface="+mn-cs"/>
+              </a:defRPr>
+            </a:lvl4pPr>
+            <a:lvl5pPr marL="2057400" indent="-228600" algn="l" defTabSz="914400" rtl="0" eaLnBrk="1" latinLnBrk="0" hangingPunct="1">
+              <a:lnSpc>
+                <a:spcPct val="90000"/>
+              </a:lnSpc>
+              <a:spcBef>
+                <a:spcPts val="500"/>
+              </a:spcBef>
+              <a:buFont typeface="Arial" panose="020B0604020202020204" pitchFamily="34" charset="0"/>
+              <a:buChar char="•"/>
+              <a:defRPr sz="1800" kern="1200">
+                <a:solidFill>
+                  <a:schemeClr val="tx1"/>
+                </a:solidFill>
+                <a:latin typeface="+mn-lt"/>
+                <a:ea typeface="+mn-ea"/>
+                <a:cs typeface="+mn-cs"/>
+              </a:defRPr>
+            </a:lvl5pPr>
+            <a:lvl6pPr marL="2514600" indent="-228600" algn="l" defTabSz="914400" rtl="0" eaLnBrk="1" latinLnBrk="0" hangingPunct="1">
+              <a:lnSpc>
+                <a:spcPct val="90000"/>
+              </a:lnSpc>
+              <a:spcBef>
+                <a:spcPts val="500"/>
+              </a:spcBef>
+              <a:buFont typeface="Arial" panose="020B0604020202020204" pitchFamily="34" charset="0"/>
+              <a:buChar char="•"/>
+              <a:defRPr sz="1800" kern="1200">
+                <a:solidFill>
+                  <a:schemeClr val="tx1"/>
+                </a:solidFill>
+                <a:latin typeface="+mn-lt"/>
+                <a:ea typeface="+mn-ea"/>
+                <a:cs typeface="+mn-cs"/>
+              </a:defRPr>
+            </a:lvl6pPr>
+            <a:lvl7pPr marL="2971800" indent="-228600" algn="l" defTabSz="914400" rtl="0" eaLnBrk="1" latinLnBrk="0" hangingPunct="1">
+              <a:lnSpc>
+                <a:spcPct val="90000"/>
+              </a:lnSpc>
+              <a:spcBef>
+                <a:spcPts val="500"/>
+              </a:spcBef>
+              <a:buFont typeface="Arial" panose="020B0604020202020204" pitchFamily="34" charset="0"/>
+              <a:buChar char="•"/>
+              <a:defRPr sz="1800" kern="1200">
+                <a:solidFill>
+                  <a:schemeClr val="tx1"/>
+                </a:solidFill>
+                <a:latin typeface="+mn-lt"/>
+                <a:ea typeface="+mn-ea"/>
+                <a:cs typeface="+mn-cs"/>
+              </a:defRPr>
+            </a:lvl7pPr>
+            <a:lvl8pPr marL="3429000" indent="-228600" algn="l" defTabSz="914400" rtl="0" eaLnBrk="1" latinLnBrk="0" hangingPunct="1">
+              <a:lnSpc>
+                <a:spcPct val="90000"/>
+              </a:lnSpc>
+              <a:spcBef>
+                <a:spcPts val="500"/>
+              </a:spcBef>
+              <a:buFont typeface="Arial" panose="020B0604020202020204" pitchFamily="34" charset="0"/>
+              <a:buChar char="•"/>
+              <a:defRPr sz="1800" kern="1200">
+                <a:solidFill>
+                  <a:schemeClr val="tx1"/>
+                </a:solidFill>
+                <a:latin typeface="+mn-lt"/>
+                <a:ea typeface="+mn-ea"/>
+                <a:cs typeface="+mn-cs"/>
+              </a:defRPr>
+            </a:lvl8pPr>
+            <a:lvl9pPr marL="3886200" indent="-228600" algn="l" defTabSz="914400" rtl="0" eaLnBrk="1" latinLnBrk="0" hangingPunct="1">
+              <a:lnSpc>
+                <a:spcPct val="90000"/>
+              </a:lnSpc>
+              <a:spcBef>
+                <a:spcPts val="500"/>
+              </a:spcBef>
+              <a:buFont typeface="Arial" panose="020B0604020202020204" pitchFamily="34" charset="0"/>
+              <a:buChar char="•"/>
+              <a:defRPr sz="1800" kern="1200">
+                <a:solidFill>
+                  <a:schemeClr val="tx1"/>
+                </a:solidFill>
+                <a:latin typeface="+mn-lt"/>
+                <a:ea typeface="+mn-ea"/>
+                <a:cs typeface="+mn-cs"/>
+              </a:defRPr>
+            </a:lvl9pPr>
+          </a:lstStyle>
+          <a:p>
+            <a:pPr marL="0" indent="0">
+              <a:lnSpc>
+                <a:spcPct val="100000"/>
+              </a:lnSpc>
+              <a:spcBef>
+                <a:spcPts val="0"/>
+              </a:spcBef>
+              <a:buFont typeface="Arial" panose="020B0604020202020204" pitchFamily="34" charset="0"/>
+              <a:buNone/>
+            </a:pPr>
+            <a:r>
+              <a:rPr lang="en-US" sz="1400" dirty="0">
+                <a:latin typeface="Courier New" panose="02070309020205020404" pitchFamily="49" charset="0"/>
+                <a:cs typeface="Courier New" panose="02070309020205020404" pitchFamily="49" charset="0"/>
+              </a:rPr>
+              <a:t>{ </a:t>
+            </a:r>
+          </a:p>
+          <a:p>
+            <a:pPr marL="0" indent="0">
+              <a:lnSpc>
+                <a:spcPct val="100000"/>
+              </a:lnSpc>
+              <a:spcBef>
+                <a:spcPts val="0"/>
+              </a:spcBef>
+              <a:buFont typeface="Arial" panose="020B0604020202020204" pitchFamily="34" charset="0"/>
+              <a:buNone/>
+            </a:pPr>
+            <a:r>
+              <a:rPr lang="en-US" sz="1400" dirty="0">
+                <a:latin typeface="Courier New" panose="02070309020205020404" pitchFamily="49" charset="0"/>
+                <a:cs typeface="Courier New" panose="02070309020205020404" pitchFamily="49" charset="0"/>
+              </a:rPr>
+              <a:t>  "</a:t>
+            </a:r>
+            <a:r>
+              <a:rPr lang="en-US" sz="1400" dirty="0" err="1">
+                <a:latin typeface="Courier New" panose="02070309020205020404" pitchFamily="49" charset="0"/>
+                <a:cs typeface="Courier New" panose="02070309020205020404" pitchFamily="49" charset="0"/>
+              </a:rPr>
+              <a:t>DomainName</a:t>
+            </a:r>
+            <a:r>
+              <a:rPr lang="en-US" sz="1400" dirty="0">
+                <a:latin typeface="Courier New" panose="02070309020205020404" pitchFamily="49" charset="0"/>
+                <a:cs typeface="Courier New" panose="02070309020205020404" pitchFamily="49" charset="0"/>
+              </a:rPr>
+              <a:t>": "Signature",</a:t>
+            </a:r>
+          </a:p>
+          <a:p>
+            <a:pPr marL="0" indent="0">
+              <a:lnSpc>
+                <a:spcPct val="100000"/>
+              </a:lnSpc>
+              <a:spcBef>
+                <a:spcPts val="0"/>
+              </a:spcBef>
+              <a:buFont typeface="Arial" panose="020B0604020202020204" pitchFamily="34" charset="0"/>
+              <a:buNone/>
+            </a:pPr>
+            <a:r>
+              <a:rPr lang="en-US" sz="1400" dirty="0">
+                <a:latin typeface="Courier New" panose="02070309020205020404" pitchFamily="49" charset="0"/>
+                <a:cs typeface="Courier New" panose="02070309020205020404" pitchFamily="49" charset="0"/>
+              </a:rPr>
+              <a:t>  "</a:t>
+            </a:r>
+            <a:r>
+              <a:rPr lang="en-US" sz="1400" dirty="0" err="1">
+                <a:latin typeface="Courier New" panose="02070309020205020404" pitchFamily="49" charset="0"/>
+                <a:cs typeface="Courier New" panose="02070309020205020404" pitchFamily="49" charset="0"/>
+              </a:rPr>
+              <a:t>EnvironmentName</a:t>
+            </a:r>
+            <a:r>
+              <a:rPr lang="en-US" sz="1400" dirty="0">
+                <a:latin typeface="Courier New" panose="02070309020205020404" pitchFamily="49" charset="0"/>
+                <a:cs typeface="Courier New" panose="02070309020205020404" pitchFamily="49" charset="0"/>
+              </a:rPr>
+              <a:t>": "Production",</a:t>
+            </a:r>
+          </a:p>
+          <a:p>
+            <a:pPr marL="0" indent="0">
+              <a:lnSpc>
+                <a:spcPct val="100000"/>
+              </a:lnSpc>
+              <a:spcBef>
+                <a:spcPts val="0"/>
+              </a:spcBef>
+              <a:buFont typeface="Arial" panose="020B0604020202020204" pitchFamily="34" charset="0"/>
+              <a:buNone/>
+            </a:pPr>
+            <a:r>
+              <a:rPr lang="en-US" sz="1400" dirty="0">
+                <a:latin typeface="Courier New" panose="02070309020205020404" pitchFamily="49" charset="0"/>
+                <a:cs typeface="Courier New" panose="02070309020205020404" pitchFamily="49" charset="0"/>
+              </a:rPr>
+              <a:t>  "Local": {</a:t>
+            </a:r>
+          </a:p>
+          <a:p>
+            <a:pPr marL="0" indent="0">
+              <a:lnSpc>
+                <a:spcPct val="100000"/>
+              </a:lnSpc>
+              <a:spcBef>
+                <a:spcPts val="0"/>
+              </a:spcBef>
+              <a:buFont typeface="Arial" panose="020B0604020202020204" pitchFamily="34" charset="0"/>
+              <a:buNone/>
+            </a:pPr>
+            <a:r>
+              <a:rPr lang="en-US" sz="1400" dirty="0">
+                <a:latin typeface="Courier New" panose="02070309020205020404" pitchFamily="49" charset="0"/>
+                <a:cs typeface="Courier New" panose="02070309020205020404" pitchFamily="49" charset="0"/>
+              </a:rPr>
+              <a:t>    "Name": "</a:t>
+            </a:r>
+            <a:r>
+              <a:rPr lang="en-US" sz="1400" dirty="0" err="1">
+                <a:latin typeface="Courier New" panose="02070309020205020404" pitchFamily="49" charset="0"/>
+                <a:cs typeface="Courier New" panose="02070309020205020404" pitchFamily="49" charset="0"/>
+              </a:rPr>
+              <a:t>CodeCenter</a:t>
+            </a:r>
+            <a:r>
+              <a:rPr lang="en-US" sz="1400" dirty="0">
+                <a:latin typeface="Courier New" panose="02070309020205020404" pitchFamily="49" charset="0"/>
+                <a:cs typeface="Courier New" panose="02070309020205020404" pitchFamily="49" charset="0"/>
+              </a:rPr>
+              <a:t>"</a:t>
+            </a:r>
+          </a:p>
+          <a:p>
+            <a:pPr marL="0" indent="0">
+              <a:lnSpc>
+                <a:spcPct val="100000"/>
+              </a:lnSpc>
+              <a:spcBef>
+                <a:spcPts val="0"/>
+              </a:spcBef>
+              <a:buFont typeface="Arial" panose="020B0604020202020204" pitchFamily="34" charset="0"/>
+              <a:buNone/>
+            </a:pPr>
+            <a:r>
+              <a:rPr lang="en-US" sz="1400" dirty="0">
+                <a:latin typeface="Courier New" panose="02070309020205020404" pitchFamily="49" charset="0"/>
+                <a:cs typeface="Courier New" panose="02070309020205020404" pitchFamily="49" charset="0"/>
+              </a:rPr>
+              <a:t>  },</a:t>
+            </a:r>
+          </a:p>
+          <a:p>
+            <a:pPr marL="0" indent="0">
+              <a:lnSpc>
+                <a:spcPct val="100000"/>
+              </a:lnSpc>
+              <a:spcBef>
+                <a:spcPts val="0"/>
+              </a:spcBef>
+              <a:buFont typeface="Arial" panose="020B0604020202020204" pitchFamily="34" charset="0"/>
+              <a:buNone/>
+            </a:pPr>
+            <a:r>
+              <a:rPr lang="en-US" sz="1400" dirty="0">
+                <a:latin typeface="Courier New" panose="02070309020205020404" pitchFamily="49" charset="0"/>
+                <a:cs typeface="Courier New" panose="02070309020205020404" pitchFamily="49" charset="0"/>
+              </a:rPr>
+              <a:t>  "Remotes": [</a:t>
+            </a:r>
+            <a:br>
+              <a:rPr lang="en-US" sz="1400" dirty="0">
+                <a:latin typeface="Courier New" panose="02070309020205020404" pitchFamily="49" charset="0"/>
+                <a:cs typeface="Courier New" panose="02070309020205020404" pitchFamily="49" charset="0"/>
+              </a:rPr>
+            </a:br>
+            <a:r>
+              <a:rPr lang="en-US" sz="1400" dirty="0">
+                <a:latin typeface="Courier New" panose="02070309020205020404" pitchFamily="49" charset="0"/>
+                <a:cs typeface="Courier New" panose="02070309020205020404" pitchFamily="49" charset="0"/>
+              </a:rPr>
+              <a:t>  {</a:t>
+            </a:r>
+          </a:p>
+          <a:p>
+            <a:pPr marL="0" indent="0">
+              <a:lnSpc>
+                <a:spcPct val="100000"/>
+              </a:lnSpc>
+              <a:spcBef>
+                <a:spcPts val="0"/>
+              </a:spcBef>
+              <a:buFont typeface="Arial" panose="020B0604020202020204" pitchFamily="34" charset="0"/>
+              <a:buNone/>
+            </a:pPr>
+            <a:r>
+              <a:rPr lang="en-US" sz="1400" dirty="0">
+                <a:latin typeface="Courier New" panose="02070309020205020404" pitchFamily="49" charset="0"/>
+                <a:cs typeface="Courier New" panose="02070309020205020404" pitchFamily="49" charset="0"/>
+              </a:rPr>
+              <a:t>    </a:t>
+            </a:r>
+            <a:r>
+              <a:rPr lang="en-US" sz="1400" b="1" dirty="0">
+                <a:latin typeface="Courier New" panose="02070309020205020404" pitchFamily="49" charset="0"/>
+                <a:cs typeface="Courier New" panose="02070309020205020404" pitchFamily="49" charset="0"/>
+              </a:rPr>
+              <a:t>"</a:t>
+            </a:r>
+            <a:r>
+              <a:rPr lang="en-US" sz="1400" b="1" dirty="0" err="1">
+                <a:latin typeface="Courier New" panose="02070309020205020404" pitchFamily="49" charset="0"/>
+                <a:cs typeface="Courier New" panose="02070309020205020404" pitchFamily="49" charset="0"/>
+              </a:rPr>
+              <a:t>DomainName</a:t>
+            </a:r>
+            <a:r>
+              <a:rPr lang="en-US" sz="1400" b="1" dirty="0">
+                <a:latin typeface="Courier New" panose="02070309020205020404" pitchFamily="49" charset="0"/>
+                <a:cs typeface="Courier New" panose="02070309020205020404" pitchFamily="49" charset="0"/>
+              </a:rPr>
+              <a:t>": "Undefined"</a:t>
+            </a:r>
+            <a:r>
+              <a:rPr lang="en-US" sz="1400" dirty="0">
+                <a:latin typeface="Courier New" panose="02070309020205020404" pitchFamily="49" charset="0"/>
+                <a:cs typeface="Courier New" panose="02070309020205020404" pitchFamily="49" charset="0"/>
+              </a:rPr>
+              <a:t>,</a:t>
+            </a:r>
+          </a:p>
+          <a:p>
+            <a:pPr marL="0" indent="0">
+              <a:lnSpc>
+                <a:spcPct val="100000"/>
+              </a:lnSpc>
+              <a:spcBef>
+                <a:spcPts val="0"/>
+              </a:spcBef>
+              <a:buFont typeface="Arial" panose="020B0604020202020204" pitchFamily="34" charset="0"/>
+              <a:buNone/>
+            </a:pPr>
+            <a:r>
+              <a:rPr lang="en-US" sz="1400" dirty="0">
+                <a:latin typeface="Courier New" panose="02070309020205020404" pitchFamily="49" charset="0"/>
+                <a:cs typeface="Courier New" panose="02070309020205020404" pitchFamily="49" charset="0"/>
+              </a:rPr>
+              <a:t>    "Name": "</a:t>
+            </a:r>
+            <a:r>
+              <a:rPr lang="en-US" sz="1400" dirty="0" err="1">
+                <a:latin typeface="Courier New" panose="02070309020205020404" pitchFamily="49" charset="0"/>
+                <a:cs typeface="Courier New" panose="02070309020205020404" pitchFamily="49" charset="0"/>
+              </a:rPr>
+              <a:t>GitOpenSource</a:t>
+            </a:r>
+            <a:r>
+              <a:rPr lang="en-US" sz="1400" dirty="0">
+                <a:latin typeface="Courier New" panose="02070309020205020404" pitchFamily="49" charset="0"/>
+                <a:cs typeface="Courier New" panose="02070309020205020404" pitchFamily="49" charset="0"/>
+              </a:rPr>
+              <a:t>",</a:t>
+            </a:r>
+            <a:br>
+              <a:rPr lang="en-US" sz="1400" dirty="0">
+                <a:latin typeface="Courier New" panose="02070309020205020404" pitchFamily="49" charset="0"/>
+                <a:cs typeface="Courier New" panose="02070309020205020404" pitchFamily="49" charset="0"/>
+              </a:rPr>
+            </a:br>
+            <a:r>
+              <a:rPr lang="en-US" sz="1400" dirty="0">
+                <a:latin typeface="Courier New" panose="02070309020205020404" pitchFamily="49" charset="0"/>
+                <a:cs typeface="Courier New" panose="02070309020205020404" pitchFamily="49" charset="0"/>
+              </a:rPr>
+              <a:t>    "GitHub": {</a:t>
+            </a:r>
+            <a:br>
+              <a:rPr lang="en-US" sz="1400" dirty="0">
+                <a:latin typeface="Courier New" panose="02070309020205020404" pitchFamily="49" charset="0"/>
+                <a:cs typeface="Courier New" panose="02070309020205020404" pitchFamily="49" charset="0"/>
+              </a:rPr>
+            </a:br>
+            <a:r>
+              <a:rPr lang="en-US" sz="1400" dirty="0">
+                <a:latin typeface="Courier New" panose="02070309020205020404" pitchFamily="49" charset="0"/>
+                <a:cs typeface="Courier New" panose="02070309020205020404" pitchFamily="49" charset="0"/>
+              </a:rPr>
+              <a:t>      "Organization": "Signature-</a:t>
+            </a:r>
+            <a:r>
+              <a:rPr lang="en-US" sz="1400" dirty="0" err="1">
+                <a:latin typeface="Courier New" panose="02070309020205020404" pitchFamily="49" charset="0"/>
+                <a:cs typeface="Courier New" panose="02070309020205020404" pitchFamily="49" charset="0"/>
+              </a:rPr>
+              <a:t>OpenSource</a:t>
+            </a:r>
+            <a:r>
+              <a:rPr lang="en-US" sz="1400" dirty="0">
+                <a:latin typeface="Courier New" panose="02070309020205020404" pitchFamily="49" charset="0"/>
+                <a:cs typeface="Courier New" panose="02070309020205020404" pitchFamily="49" charset="0"/>
+              </a:rPr>
+              <a:t>",</a:t>
+            </a:r>
+          </a:p>
+          <a:p>
+            <a:pPr marL="0" indent="0">
+              <a:lnSpc>
+                <a:spcPct val="100000"/>
+              </a:lnSpc>
+              <a:spcBef>
+                <a:spcPts val="0"/>
+              </a:spcBef>
+              <a:buFont typeface="Arial" panose="020B0604020202020204" pitchFamily="34" charset="0"/>
+              <a:buNone/>
+            </a:pPr>
+            <a:r>
+              <a:rPr lang="en-US" sz="1400" dirty="0">
+                <a:latin typeface="Courier New" panose="02070309020205020404" pitchFamily="49" charset="0"/>
+                <a:cs typeface="Courier New" panose="02070309020205020404" pitchFamily="49" charset="0"/>
+              </a:rPr>
+              <a:t>      "</a:t>
+            </a:r>
+            <a:r>
+              <a:rPr lang="en-US" sz="1400" dirty="0" err="1">
+                <a:latin typeface="Courier New" panose="02070309020205020404" pitchFamily="49" charset="0"/>
+                <a:cs typeface="Courier New" panose="02070309020205020404" pitchFamily="49" charset="0"/>
+              </a:rPr>
+              <a:t>SecretToken</a:t>
+            </a:r>
+            <a:r>
+              <a:rPr lang="en-US" sz="1400" dirty="0">
+                <a:latin typeface="Courier New" panose="02070309020205020404" pitchFamily="49" charset="0"/>
+                <a:cs typeface="Courier New" panose="02070309020205020404" pitchFamily="49" charset="0"/>
+              </a:rPr>
+              <a:t>": "45kKJDHldf57dsj87f6fefAsdjhfsdfzr654ZEd5zf"</a:t>
+            </a:r>
+          </a:p>
+          <a:p>
+            <a:pPr marL="0" indent="0">
+              <a:lnSpc>
+                <a:spcPct val="100000"/>
+              </a:lnSpc>
+              <a:spcBef>
+                <a:spcPts val="0"/>
+              </a:spcBef>
+              <a:buFont typeface="Arial" panose="020B0604020202020204" pitchFamily="34" charset="0"/>
+              <a:buNone/>
+            </a:pPr>
+            <a:r>
+              <a:rPr lang="en-US" sz="1400" dirty="0">
+                <a:latin typeface="Courier New" panose="02070309020205020404" pitchFamily="49" charset="0"/>
+                <a:cs typeface="Courier New" panose="02070309020205020404" pitchFamily="49" charset="0"/>
+              </a:rPr>
+              <a:t>    }</a:t>
+            </a:r>
+          </a:p>
+          <a:p>
+            <a:pPr marL="0" indent="0">
+              <a:lnSpc>
+                <a:spcPct val="100000"/>
+              </a:lnSpc>
+              <a:spcBef>
+                <a:spcPts val="0"/>
+              </a:spcBef>
+              <a:buFont typeface="Arial" panose="020B0604020202020204" pitchFamily="34" charset="0"/>
+              <a:buNone/>
+            </a:pPr>
+            <a:r>
+              <a:rPr lang="en-US" sz="1400" dirty="0">
+                <a:latin typeface="Courier New" panose="02070309020205020404" pitchFamily="49" charset="0"/>
+                <a:cs typeface="Courier New" panose="02070309020205020404" pitchFamily="49" charset="0"/>
+              </a:rPr>
+              <a:t>  },</a:t>
+            </a:r>
+          </a:p>
+          <a:p>
+            <a:pPr marL="0" indent="0">
+              <a:lnSpc>
+                <a:spcPct val="100000"/>
+              </a:lnSpc>
+              <a:spcBef>
+                <a:spcPts val="0"/>
+              </a:spcBef>
+              <a:buFont typeface="Arial" panose="020B0604020202020204" pitchFamily="34" charset="0"/>
+              <a:buNone/>
+            </a:pPr>
+            <a:r>
+              <a:rPr lang="en-US" sz="1400" dirty="0">
+                <a:latin typeface="Courier New" panose="02070309020205020404" pitchFamily="49" charset="0"/>
+                <a:cs typeface="Courier New" panose="02070309020205020404" pitchFamily="49" charset="0"/>
+              </a:rPr>
+              <a:t>  {</a:t>
+            </a:r>
+          </a:p>
+          <a:p>
+            <a:pPr marL="0" indent="0">
+              <a:lnSpc>
+                <a:spcPct val="100000"/>
+              </a:lnSpc>
+              <a:spcBef>
+                <a:spcPts val="0"/>
+              </a:spcBef>
+              <a:buFont typeface="Arial" panose="020B0604020202020204" pitchFamily="34" charset="0"/>
+              <a:buNone/>
+            </a:pPr>
+            <a:r>
+              <a:rPr lang="en-US" sz="1400" dirty="0">
+                <a:latin typeface="Courier New" panose="02070309020205020404" pitchFamily="49" charset="0"/>
+                <a:cs typeface="Courier New" panose="02070309020205020404" pitchFamily="49" charset="0"/>
+              </a:rPr>
+              <a:t>    "</a:t>
+            </a:r>
+            <a:r>
+              <a:rPr lang="en-US" sz="1400" dirty="0" err="1">
+                <a:latin typeface="Courier New" panose="02070309020205020404" pitchFamily="49" charset="0"/>
+                <a:cs typeface="Courier New" panose="02070309020205020404" pitchFamily="49" charset="0"/>
+              </a:rPr>
+              <a:t>DomainName</a:t>
+            </a:r>
+            <a:r>
+              <a:rPr lang="en-US" sz="1400" dirty="0">
+                <a:latin typeface="Courier New" panose="02070309020205020404" pitchFamily="49" charset="0"/>
+                <a:cs typeface="Courier New" panose="02070309020205020404" pitchFamily="49" charset="0"/>
+              </a:rPr>
+              <a:t>": "Undefined",</a:t>
+            </a:r>
+          </a:p>
+          <a:p>
+            <a:pPr marL="0" indent="0">
+              <a:lnSpc>
+                <a:spcPct val="100000"/>
+              </a:lnSpc>
+              <a:spcBef>
+                <a:spcPts val="0"/>
+              </a:spcBef>
+              <a:buFont typeface="Arial" panose="020B0604020202020204" pitchFamily="34" charset="0"/>
+              <a:buNone/>
+            </a:pPr>
+            <a:r>
+              <a:rPr lang="en-US" sz="1400" dirty="0">
+                <a:latin typeface="Courier New" panose="02070309020205020404" pitchFamily="49" charset="0"/>
+                <a:cs typeface="Courier New" panose="02070309020205020404" pitchFamily="49" charset="0"/>
+              </a:rPr>
+              <a:t>    "Name": "</a:t>
+            </a:r>
+            <a:r>
+              <a:rPr lang="en-US" sz="1400" dirty="0" err="1">
+                <a:latin typeface="Courier New" panose="02070309020205020404" pitchFamily="49" charset="0"/>
+                <a:cs typeface="Courier New" panose="02070309020205020404" pitchFamily="49" charset="0"/>
+              </a:rPr>
+              <a:t>GitSource</a:t>
+            </a:r>
+            <a:r>
+              <a:rPr lang="en-US" sz="1400" dirty="0">
+                <a:latin typeface="Courier New" panose="02070309020205020404" pitchFamily="49" charset="0"/>
+                <a:cs typeface="Courier New" panose="02070309020205020404" pitchFamily="49" charset="0"/>
+              </a:rPr>
+              <a:t>",</a:t>
+            </a:r>
+            <a:br>
+              <a:rPr lang="en-US" sz="1400" dirty="0">
+                <a:latin typeface="Courier New" panose="02070309020205020404" pitchFamily="49" charset="0"/>
+                <a:cs typeface="Courier New" panose="02070309020205020404" pitchFamily="49" charset="0"/>
+              </a:rPr>
+            </a:br>
+            <a:r>
+              <a:rPr lang="en-US" sz="1400" dirty="0">
+                <a:latin typeface="Courier New" panose="02070309020205020404" pitchFamily="49" charset="0"/>
+                <a:cs typeface="Courier New" panose="02070309020205020404" pitchFamily="49" charset="0"/>
+              </a:rPr>
+              <a:t>    "GitHub": {</a:t>
+            </a:r>
+            <a:br>
+              <a:rPr lang="en-US" sz="1400" dirty="0">
+                <a:latin typeface="Courier New" panose="02070309020205020404" pitchFamily="49" charset="0"/>
+                <a:cs typeface="Courier New" panose="02070309020205020404" pitchFamily="49" charset="0"/>
+              </a:rPr>
+            </a:br>
+            <a:r>
+              <a:rPr lang="en-US" sz="1400" dirty="0">
+                <a:latin typeface="Courier New" panose="02070309020205020404" pitchFamily="49" charset="0"/>
+                <a:cs typeface="Courier New" panose="02070309020205020404" pitchFamily="49" charset="0"/>
+              </a:rPr>
+              <a:t>      "Organization": "Signature-Code",</a:t>
+            </a:r>
+          </a:p>
+          <a:p>
+            <a:pPr marL="0" indent="0">
+              <a:lnSpc>
+                <a:spcPct val="100000"/>
+              </a:lnSpc>
+              <a:spcBef>
+                <a:spcPts val="0"/>
+              </a:spcBef>
+              <a:buFont typeface="Arial" panose="020B0604020202020204" pitchFamily="34" charset="0"/>
+              <a:buNone/>
+            </a:pPr>
+            <a:r>
+              <a:rPr lang="en-US" sz="1400" dirty="0">
+                <a:latin typeface="Courier New" panose="02070309020205020404" pitchFamily="49" charset="0"/>
+                <a:cs typeface="Courier New" panose="02070309020205020404" pitchFamily="49" charset="0"/>
+              </a:rPr>
+              <a:t>      "</a:t>
+            </a:r>
+            <a:r>
+              <a:rPr lang="en-US" sz="1400" dirty="0" err="1">
+                <a:latin typeface="Courier New" panose="02070309020205020404" pitchFamily="49" charset="0"/>
+                <a:cs typeface="Courier New" panose="02070309020205020404" pitchFamily="49" charset="0"/>
+              </a:rPr>
+              <a:t>SecretToken</a:t>
+            </a:r>
+            <a:r>
+              <a:rPr lang="en-US" sz="1400" dirty="0">
+                <a:latin typeface="Courier New" panose="02070309020205020404" pitchFamily="49" charset="0"/>
+                <a:cs typeface="Courier New" panose="02070309020205020404" pitchFamily="49" charset="0"/>
+              </a:rPr>
+              <a:t>": “Lkjdchbej236ecec6876edc3evqwx57d2455zefdaa"</a:t>
+            </a:r>
+          </a:p>
+          <a:p>
+            <a:pPr marL="0" indent="0">
+              <a:lnSpc>
+                <a:spcPct val="100000"/>
+              </a:lnSpc>
+              <a:spcBef>
+                <a:spcPts val="0"/>
+              </a:spcBef>
+              <a:buFont typeface="Arial" panose="020B0604020202020204" pitchFamily="34" charset="0"/>
+              <a:buNone/>
+            </a:pPr>
+            <a:r>
+              <a:rPr lang="en-US" sz="1400" dirty="0">
+                <a:latin typeface="Courier New" panose="02070309020205020404" pitchFamily="49" charset="0"/>
+                <a:cs typeface="Courier New" panose="02070309020205020404" pitchFamily="49" charset="0"/>
+              </a:rPr>
+              <a:t>    }</a:t>
+            </a:r>
+            <a:br>
+              <a:rPr lang="en-US" sz="1400" dirty="0">
+                <a:latin typeface="Courier New" panose="02070309020205020404" pitchFamily="49" charset="0"/>
+                <a:cs typeface="Courier New" panose="02070309020205020404" pitchFamily="49" charset="0"/>
+              </a:rPr>
+            </a:br>
+            <a:r>
+              <a:rPr lang="en-US" sz="1400" dirty="0">
+                <a:latin typeface="Courier New" panose="02070309020205020404" pitchFamily="49" charset="0"/>
+                <a:cs typeface="Courier New" panose="02070309020205020404" pitchFamily="49" charset="0"/>
+              </a:rPr>
+              <a:t>  }]</a:t>
+            </a:r>
+          </a:p>
+          <a:p>
+            <a:pPr marL="0" indent="0">
+              <a:lnSpc>
+                <a:spcPct val="100000"/>
+              </a:lnSpc>
+              <a:spcBef>
+                <a:spcPts val="0"/>
+              </a:spcBef>
+              <a:buFont typeface="Arial" panose="020B0604020202020204" pitchFamily="34" charset="0"/>
+              <a:buNone/>
+            </a:pPr>
+            <a:r>
+              <a:rPr lang="en-US" sz="1400" dirty="0">
+                <a:latin typeface="Courier New" panose="02070309020205020404" pitchFamily="49" charset="0"/>
+                <a:cs typeface="Courier New" panose="02070309020205020404" pitchFamily="49" charset="0"/>
+              </a:rPr>
+              <a:t>}</a:t>
+            </a:r>
+          </a:p>
+          <a:p>
+            <a:pPr marL="0" indent="0">
+              <a:lnSpc>
+                <a:spcPct val="100000"/>
+              </a:lnSpc>
+              <a:spcBef>
+                <a:spcPts val="0"/>
+              </a:spcBef>
+              <a:buFont typeface="Arial" panose="020B0604020202020204" pitchFamily="34" charset="0"/>
+              <a:buNone/>
+            </a:pPr>
+            <a:endParaRPr lang="en-US" sz="1400" dirty="0">
+              <a:latin typeface="Courier New" panose="02070309020205020404" pitchFamily="49" charset="0"/>
+              <a:cs typeface="Courier New" panose="02070309020205020404" pitchFamily="49" charset="0"/>
+            </a:endParaRPr>
+          </a:p>
+        </p:txBody>
+      </p:sp>
+      <p:sp>
+        <p:nvSpPr>
+          <p:cNvPr id="5" name="Content Placeholder 2">
+            <a:extLst>
+              <a:ext uri="{FF2B5EF4-FFF2-40B4-BE49-F238E27FC236}">
+                <a16:creationId xmlns:a16="http://schemas.microsoft.com/office/drawing/2014/main" id="{83D65CE2-9D81-5111-5961-A05FE0BFA74C}"/>
+              </a:ext>
+            </a:extLst>
+          </p:cNvPr>
+          <p:cNvSpPr txBox="1">
+            <a:spLocks/>
+          </p:cNvSpPr>
+          <p:nvPr/>
+        </p:nvSpPr>
+        <p:spPr>
+          <a:xfrm>
+            <a:off x="7511374" y="3122579"/>
+            <a:ext cx="4206144" cy="2529191"/>
+          </a:xfrm>
+          <a:prstGeom prst="rect">
+            <a:avLst/>
+          </a:prstGeom>
+        </p:spPr>
+        <p:txBody>
+          <a:bodyPr vert="horz" lIns="91440" tIns="45720" rIns="91440" bIns="45720" rtlCol="0">
+            <a:normAutofit fontScale="70000" lnSpcReduction="20000"/>
+          </a:bodyPr>
+          <a:lstStyle>
+            <a:lvl1pPr marL="228600" indent="-228600" algn="l" defTabSz="914400" rtl="0" eaLnBrk="1" latinLnBrk="0" hangingPunct="1">
+              <a:lnSpc>
+                <a:spcPct val="90000"/>
+              </a:lnSpc>
+              <a:spcBef>
+                <a:spcPts val="1000"/>
+              </a:spcBef>
+              <a:buFont typeface="Arial" panose="020B0604020202020204" pitchFamily="34" charset="0"/>
+              <a:buChar char="•"/>
+              <a:defRPr sz="2800" kern="1200">
+                <a:solidFill>
+                  <a:schemeClr val="tx1"/>
+                </a:solidFill>
+                <a:latin typeface="+mn-lt"/>
+                <a:ea typeface="+mn-ea"/>
+                <a:cs typeface="+mn-cs"/>
+              </a:defRPr>
+            </a:lvl1pPr>
+            <a:lvl2pPr marL="685800" indent="-228600" algn="l" defTabSz="914400" rtl="0" eaLnBrk="1" latinLnBrk="0" hangingPunct="1">
+              <a:lnSpc>
+                <a:spcPct val="90000"/>
+              </a:lnSpc>
+              <a:spcBef>
+                <a:spcPts val="500"/>
+              </a:spcBef>
+              <a:buFont typeface="Arial" panose="020B0604020202020204" pitchFamily="34" charset="0"/>
+              <a:buChar char="•"/>
+              <a:defRPr sz="2400" kern="1200">
+                <a:solidFill>
+                  <a:schemeClr val="tx1"/>
+                </a:solidFill>
+                <a:latin typeface="+mn-lt"/>
+                <a:ea typeface="+mn-ea"/>
+                <a:cs typeface="+mn-cs"/>
+              </a:defRPr>
+            </a:lvl2pPr>
+            <a:lvl3pPr marL="1143000" indent="-228600" algn="l" defTabSz="914400" rtl="0" eaLnBrk="1" latinLnBrk="0" hangingPunct="1">
+              <a:lnSpc>
+                <a:spcPct val="90000"/>
+              </a:lnSpc>
+              <a:spcBef>
+                <a:spcPts val="500"/>
+              </a:spcBef>
+              <a:buFont typeface="Arial" panose="020B0604020202020204" pitchFamily="34" charset="0"/>
+              <a:buChar char="•"/>
+              <a:defRPr sz="2000" kern="1200">
+                <a:solidFill>
+                  <a:schemeClr val="tx1"/>
+                </a:solidFill>
+                <a:latin typeface="+mn-lt"/>
+                <a:ea typeface="+mn-ea"/>
+                <a:cs typeface="+mn-cs"/>
+              </a:defRPr>
+            </a:lvl3pPr>
+            <a:lvl4pPr marL="1600200" indent="-228600" algn="l" defTabSz="914400" rtl="0" eaLnBrk="1" latinLnBrk="0" hangingPunct="1">
+              <a:lnSpc>
+                <a:spcPct val="90000"/>
+              </a:lnSpc>
+              <a:spcBef>
+                <a:spcPts val="500"/>
+              </a:spcBef>
+              <a:buFont typeface="Arial" panose="020B0604020202020204" pitchFamily="34" charset="0"/>
+              <a:buChar char="•"/>
+              <a:defRPr sz="1800" kern="1200">
+                <a:solidFill>
+                  <a:schemeClr val="tx1"/>
+                </a:solidFill>
+                <a:latin typeface="+mn-lt"/>
+                <a:ea typeface="+mn-ea"/>
+                <a:cs typeface="+mn-cs"/>
+              </a:defRPr>
+            </a:lvl4pPr>
+            <a:lvl5pPr marL="2057400" indent="-228600" algn="l" defTabSz="914400" rtl="0" eaLnBrk="1" latinLnBrk="0" hangingPunct="1">
+              <a:lnSpc>
+                <a:spcPct val="90000"/>
+              </a:lnSpc>
+              <a:spcBef>
+                <a:spcPts val="500"/>
+              </a:spcBef>
+              <a:buFont typeface="Arial" panose="020B0604020202020204" pitchFamily="34" charset="0"/>
+              <a:buChar char="•"/>
+              <a:defRPr sz="1800" kern="1200">
+                <a:solidFill>
+                  <a:schemeClr val="tx1"/>
+                </a:solidFill>
+                <a:latin typeface="+mn-lt"/>
+                <a:ea typeface="+mn-ea"/>
+                <a:cs typeface="+mn-cs"/>
+              </a:defRPr>
+            </a:lvl5pPr>
+            <a:lvl6pPr marL="2514600" indent="-228600" algn="l" defTabSz="914400" rtl="0" eaLnBrk="1" latinLnBrk="0" hangingPunct="1">
+              <a:lnSpc>
+                <a:spcPct val="90000"/>
+              </a:lnSpc>
+              <a:spcBef>
+                <a:spcPts val="500"/>
+              </a:spcBef>
+              <a:buFont typeface="Arial" panose="020B0604020202020204" pitchFamily="34" charset="0"/>
+              <a:buChar char="•"/>
+              <a:defRPr sz="1800" kern="1200">
+                <a:solidFill>
+                  <a:schemeClr val="tx1"/>
+                </a:solidFill>
+                <a:latin typeface="+mn-lt"/>
+                <a:ea typeface="+mn-ea"/>
+                <a:cs typeface="+mn-cs"/>
+              </a:defRPr>
+            </a:lvl6pPr>
+            <a:lvl7pPr marL="2971800" indent="-228600" algn="l" defTabSz="914400" rtl="0" eaLnBrk="1" latinLnBrk="0" hangingPunct="1">
+              <a:lnSpc>
+                <a:spcPct val="90000"/>
+              </a:lnSpc>
+              <a:spcBef>
+                <a:spcPts val="500"/>
+              </a:spcBef>
+              <a:buFont typeface="Arial" panose="020B0604020202020204" pitchFamily="34" charset="0"/>
+              <a:buChar char="•"/>
+              <a:defRPr sz="1800" kern="1200">
+                <a:solidFill>
+                  <a:schemeClr val="tx1"/>
+                </a:solidFill>
+                <a:latin typeface="+mn-lt"/>
+                <a:ea typeface="+mn-ea"/>
+                <a:cs typeface="+mn-cs"/>
+              </a:defRPr>
+            </a:lvl7pPr>
+            <a:lvl8pPr marL="3429000" indent="-228600" algn="l" defTabSz="914400" rtl="0" eaLnBrk="1" latinLnBrk="0" hangingPunct="1">
+              <a:lnSpc>
+                <a:spcPct val="90000"/>
+              </a:lnSpc>
+              <a:spcBef>
+                <a:spcPts val="500"/>
+              </a:spcBef>
+              <a:buFont typeface="Arial" panose="020B0604020202020204" pitchFamily="34" charset="0"/>
+              <a:buChar char="•"/>
+              <a:defRPr sz="1800" kern="1200">
+                <a:solidFill>
+                  <a:schemeClr val="tx1"/>
+                </a:solidFill>
+                <a:latin typeface="+mn-lt"/>
+                <a:ea typeface="+mn-ea"/>
+                <a:cs typeface="+mn-cs"/>
+              </a:defRPr>
+            </a:lvl8pPr>
+            <a:lvl9pPr marL="3886200" indent="-228600" algn="l" defTabSz="914400" rtl="0" eaLnBrk="1" latinLnBrk="0" hangingPunct="1">
+              <a:lnSpc>
+                <a:spcPct val="90000"/>
+              </a:lnSpc>
+              <a:spcBef>
+                <a:spcPts val="500"/>
+              </a:spcBef>
+              <a:buFont typeface="Arial" panose="020B0604020202020204" pitchFamily="34" charset="0"/>
+              <a:buChar char="•"/>
+              <a:defRPr sz="1800" kern="1200">
+                <a:solidFill>
+                  <a:schemeClr val="tx1"/>
+                </a:solidFill>
+                <a:latin typeface="+mn-lt"/>
+                <a:ea typeface="+mn-ea"/>
+                <a:cs typeface="+mn-cs"/>
+              </a:defRPr>
+            </a:lvl9pPr>
+          </a:lstStyle>
+          <a:p>
+            <a:r>
+              <a:rPr lang="en-US" dirty="0"/>
+              <a:t>“Undefined” is the reserved Domain name that means “external to the System”</a:t>
+            </a:r>
+          </a:p>
+          <a:p>
+            <a:r>
+              <a:rPr lang="en-US" dirty="0"/>
+              <a:t>We don’t need an “Address”: this remote is a </a:t>
+            </a:r>
+            <a:r>
+              <a:rPr lang="en-US" dirty="0" err="1"/>
+              <a:t>GitHubApp</a:t>
+            </a:r>
+            <a:r>
+              <a:rPr lang="en-US" dirty="0"/>
+              <a:t> because of the “GitHub” configuration key. </a:t>
+            </a:r>
+          </a:p>
+          <a:p>
+            <a:r>
+              <a:rPr lang="en-US" dirty="0"/>
+              <a:t>The package </a:t>
+            </a:r>
+            <a:r>
+              <a:rPr lang="en-US" dirty="0" err="1"/>
+              <a:t>CK.AppIdentity.GitHubApp</a:t>
+            </a:r>
+            <a:r>
+              <a:rPr lang="en-US" dirty="0"/>
+              <a:t> handles this automatically.</a:t>
+            </a:r>
+          </a:p>
+        </p:txBody>
+      </p:sp>
+    </p:spTree>
+    <p:extLst>
+      <p:ext uri="{BB962C8B-B14F-4D97-AF65-F5344CB8AC3E}">
+        <p14:creationId xmlns:p14="http://schemas.microsoft.com/office/powerpoint/2010/main" val="2343656113"/>
+      </p:ext>
+    </p:extLst>
+  </p:cSld>
+  <p:clrMapOvr>
+    <a:masterClrMapping/>
+  </p:clrMapOvr>
+</p:sld>
+</file>
+
 <file path=ppt/slides/slide2.xml><?xml version="1.0" encoding="utf-8"?>
 <p:sld xmlns:a="http://schemas.openxmlformats.org/drawingml/2006/main" xmlns:r="http://schemas.openxmlformats.org/officeDocument/2006/relationships" xmlns:p="http://schemas.openxmlformats.org/presentationml/2006/main">
   <p:cSld>
@@ -3460,9 +8269,16 @@
             <p:ph idx="1"/>
           </p:nvPr>
         </p:nvSpPr>
-        <p:spPr/>
-        <p:txBody>
-          <a:bodyPr/>
+        <p:spPr>
+          <a:xfrm>
+            <a:off x="838200" y="1825624"/>
+            <a:ext cx="10515600" cy="4575175"/>
+          </a:xfrm>
+        </p:spPr>
+        <p:txBody>
+          <a:bodyPr>
+            <a:normAutofit fontScale="92500" lnSpcReduction="10000"/>
+          </a:bodyPr>
           <a:lstStyle/>
           <a:p>
             <a:r>
@@ -3480,7 +8296,7 @@
             <a:pPr lvl="1"/>
             <a:r>
               <a:rPr lang="en-US" dirty="0"/>
-              <a:t>Configured identities are immutable during a run.</a:t>
+              <a:t>Configured identity related information are immutable during a run.</a:t>
             </a:r>
           </a:p>
           <a:p>
@@ -3493,7 +8309,28 @@
           <a:p>
             <a:r>
               <a:rPr lang="en-US" dirty="0"/>
-              <a:t>Enables centralized as well as decentralized topologies.</a:t>
+              <a:t>Supports different topologies</a:t>
+            </a:r>
+          </a:p>
+          <a:p>
+            <a:pPr lvl="1"/>
+            <a:r>
+              <a:rPr lang="en-US" dirty="0"/>
+              <a:t>Centralized with a shared, central, directory of all the parties. </a:t>
+            </a:r>
+          </a:p>
+          <a:p>
+            <a:pPr lvl="1"/>
+            <a:r>
+              <a:rPr lang="en-US" dirty="0"/>
+              <a:t>Decentralized where parties only sees peers.</a:t>
+            </a:r>
+          </a:p>
+          <a:p>
+            <a:pPr lvl="1"/>
+            <a:r>
+              <a:rPr lang="en-US" dirty="0"/>
+              <a:t>With and/or without Message Bus.</a:t>
             </a:r>
           </a:p>
           <a:p>
@@ -3657,14 +8494,30 @@
             <a:pPr lvl="1"/>
             <a:r>
               <a:rPr lang="en-US" dirty="0"/>
-              <a:t>Transport layers</a:t>
+              <a:t>Transport layers (TCP/IP, </a:t>
+            </a:r>
+            <a:r>
+              <a:rPr lang="en-US" dirty="0" err="1"/>
+              <a:t>quic</a:t>
+            </a:r>
+            <a:r>
+              <a:rPr lang="en-US" dirty="0"/>
+              <a:t>, </a:t>
+            </a:r>
+            <a:r>
+              <a:rPr lang="en-US" dirty="0" err="1"/>
+              <a:t>mqtt</a:t>
+            </a:r>
+            <a:r>
+              <a:rPr lang="en-US" dirty="0"/>
+              <a:t>, etc.)</a:t>
             </a:r>
           </a:p>
           <a:p>
             <a:pPr lvl="1"/>
             <a:r>
               <a:rPr lang="en-US" dirty="0"/>
-              <a:t>VLAN, WAN</a:t>
+              <a:t>VLAN and/or WAN</a:t>
             </a:r>
           </a:p>
         </p:txBody>
@@ -3763,11 +8616,13 @@
         <p:spPr>
           <a:xfrm>
             <a:off x="838200" y="1825625"/>
-            <a:ext cx="10515600" cy="1822548"/>
+            <a:ext cx="10515600" cy="1813122"/>
           </a:xfrm>
         </p:spPr>
         <p:txBody>
-          <a:bodyPr/>
+          <a:bodyPr>
+            <a:normAutofit/>
+          </a:bodyPr>
           <a:lstStyle/>
           <a:p>
             <a:r>
@@ -3792,8 +8647,31 @@
             <a:pPr lvl="1"/>
             <a:r>
               <a:rPr lang="en-US" dirty="0"/>
-              <a:t>Any Event Source is identified by this triple.</a:t>
-            </a:r>
+              <a:t>Any “Event Source” (whatever the </a:t>
+            </a:r>
+            <a:r>
+              <a:rPr lang="en-US" i="1" dirty="0"/>
+              <a:t>event</a:t>
+            </a:r>
+            <a:r>
+              <a:rPr lang="en-US" dirty="0"/>
+              <a:t> is) is identified by this triple.</a:t>
+            </a:r>
+          </a:p>
+          <a:p>
+            <a:pPr lvl="1"/>
+            <a:endParaRPr lang="en-US" dirty="0"/>
+          </a:p>
+          <a:p>
+            <a:pPr lvl="1"/>
+            <a:endParaRPr lang="en-US" dirty="0"/>
+          </a:p>
+          <a:p>
+            <a:pPr lvl="1"/>
+            <a:endParaRPr lang="en-US" dirty="0"/>
+          </a:p>
+          <a:p>
+            <a:endParaRPr lang="en-US" dirty="0"/>
           </a:p>
           <a:p>
             <a:endParaRPr lang="en-US" dirty="0"/>
@@ -3814,7 +8692,7 @@
         </p:nvSpPr>
         <p:spPr>
           <a:xfrm>
-            <a:off x="735290" y="5373278"/>
+            <a:off x="527168" y="3773684"/>
             <a:ext cx="11137664" cy="646331"/>
           </a:xfrm>
           <a:prstGeom prst="rect">
@@ -3829,9 +8707,167 @@
           <a:lstStyle/>
           <a:p>
             <a:r>
-              <a:rPr lang="en-US" sz="3600" dirty="0"/>
+              <a:rPr lang="en-US" sz="3600" b="1" dirty="0"/>
               <a:t>How can a simple model like this one cover all our needs?</a:t>
             </a:r>
+          </a:p>
+        </p:txBody>
+      </p:sp>
+      <p:sp>
+        <p:nvSpPr>
+          <p:cNvPr id="5" name="TextBox 4">
+            <a:extLst>
+              <a:ext uri="{FF2B5EF4-FFF2-40B4-BE49-F238E27FC236}">
+                <a16:creationId xmlns:a16="http://schemas.microsoft.com/office/drawing/2014/main" id="{087FBD75-5C03-AE36-5F3B-9EC6B24A4DA1}"/>
+              </a:ext>
+            </a:extLst>
+          </p:cNvPr>
+          <p:cNvSpPr txBox="1"/>
+          <p:nvPr/>
+        </p:nvSpPr>
+        <p:spPr>
+          <a:xfrm>
+            <a:off x="838200" y="4713402"/>
+            <a:ext cx="10515600" cy="1200329"/>
+          </a:xfrm>
+          <a:prstGeom prst="rect">
+            <a:avLst/>
+          </a:prstGeom>
+        </p:spPr>
+        <p:txBody>
+          <a:bodyPr vert="horz" lIns="91440" tIns="45720" rIns="91440" bIns="45720" rtlCol="0">
+            <a:normAutofit fontScale="62500" lnSpcReduction="20000"/>
+          </a:bodyPr>
+          <a:lstStyle>
+            <a:lvl1pPr marL="228600" indent="-228600">
+              <a:lnSpc>
+                <a:spcPct val="90000"/>
+              </a:lnSpc>
+              <a:spcBef>
+                <a:spcPts val="1000"/>
+              </a:spcBef>
+              <a:buFont typeface="Arial" panose="020B0604020202020204" pitchFamily="34" charset="0"/>
+              <a:buChar char="•"/>
+              <a:defRPr sz="2800"/>
+            </a:lvl1pPr>
+            <a:lvl2pPr marL="685800" lvl="1" indent="-228600">
+              <a:lnSpc>
+                <a:spcPct val="90000"/>
+              </a:lnSpc>
+              <a:spcBef>
+                <a:spcPts val="500"/>
+              </a:spcBef>
+              <a:buFont typeface="Arial" panose="020B0604020202020204" pitchFamily="34" charset="0"/>
+              <a:buChar char="•"/>
+              <a:defRPr sz="2400"/>
+            </a:lvl2pPr>
+            <a:lvl3pPr marL="1143000" indent="-228600">
+              <a:lnSpc>
+                <a:spcPct val="90000"/>
+              </a:lnSpc>
+              <a:spcBef>
+                <a:spcPts val="500"/>
+              </a:spcBef>
+              <a:buFont typeface="Arial" panose="020B0604020202020204" pitchFamily="34" charset="0"/>
+              <a:buChar char="•"/>
+              <a:defRPr sz="2000"/>
+            </a:lvl3pPr>
+            <a:lvl4pPr marL="1600200" indent="-228600">
+              <a:lnSpc>
+                <a:spcPct val="90000"/>
+              </a:lnSpc>
+              <a:spcBef>
+                <a:spcPts val="500"/>
+              </a:spcBef>
+              <a:buFont typeface="Arial" panose="020B0604020202020204" pitchFamily="34" charset="0"/>
+              <a:buChar char="•"/>
+            </a:lvl4pPr>
+            <a:lvl5pPr marL="2057400" indent="-228600">
+              <a:lnSpc>
+                <a:spcPct val="90000"/>
+              </a:lnSpc>
+              <a:spcBef>
+                <a:spcPts val="500"/>
+              </a:spcBef>
+              <a:buFont typeface="Arial" panose="020B0604020202020204" pitchFamily="34" charset="0"/>
+              <a:buChar char="•"/>
+            </a:lvl5pPr>
+            <a:lvl6pPr marL="2514600" indent="-228600">
+              <a:lnSpc>
+                <a:spcPct val="90000"/>
+              </a:lnSpc>
+              <a:spcBef>
+                <a:spcPts val="500"/>
+              </a:spcBef>
+              <a:buFont typeface="Arial" panose="020B0604020202020204" pitchFamily="34" charset="0"/>
+              <a:buChar char="•"/>
+            </a:lvl6pPr>
+            <a:lvl7pPr marL="2971800" indent="-228600">
+              <a:lnSpc>
+                <a:spcPct val="90000"/>
+              </a:lnSpc>
+              <a:spcBef>
+                <a:spcPts val="500"/>
+              </a:spcBef>
+              <a:buFont typeface="Arial" panose="020B0604020202020204" pitchFamily="34" charset="0"/>
+              <a:buChar char="•"/>
+            </a:lvl7pPr>
+            <a:lvl8pPr marL="3429000" indent="-228600">
+              <a:lnSpc>
+                <a:spcPct val="90000"/>
+              </a:lnSpc>
+              <a:spcBef>
+                <a:spcPts val="500"/>
+              </a:spcBef>
+              <a:buFont typeface="Arial" panose="020B0604020202020204" pitchFamily="34" charset="0"/>
+              <a:buChar char="•"/>
+            </a:lvl8pPr>
+            <a:lvl9pPr marL="3886200" indent="-228600">
+              <a:lnSpc>
+                <a:spcPct val="90000"/>
+              </a:lnSpc>
+              <a:spcBef>
+                <a:spcPts val="500"/>
+              </a:spcBef>
+              <a:buFont typeface="Arial" panose="020B0604020202020204" pitchFamily="34" charset="0"/>
+              <a:buChar char="•"/>
+            </a:lvl9pPr>
+          </a:lstStyle>
+          <a:p>
+            <a:r>
+              <a:rPr lang="en-US" sz="2400" dirty="0"/>
+              <a:t>We’ll now present different static configurations.</a:t>
+            </a:r>
+          </a:p>
+          <a:p>
+            <a:pPr lvl="1"/>
+            <a:r>
+              <a:rPr lang="en-US" sz="2000" dirty="0"/>
+              <a:t>Starting with a simple Agent up to a multi-tenant site that drives multiple domains.</a:t>
+            </a:r>
+          </a:p>
+          <a:p>
+            <a:pPr lvl="1"/>
+            <a:r>
+              <a:rPr lang="en-US" sz="2000" dirty="0"/>
+              <a:t>This will define the dream.</a:t>
+            </a:r>
+          </a:p>
+          <a:p>
+            <a:r>
+              <a:rPr lang="en-US" sz="2400" dirty="0"/>
+              <a:t>Then we’ll see the “dynamic” aspect, and some required “magic”…</a:t>
+            </a:r>
+          </a:p>
+          <a:p>
+            <a:pPr lvl="1"/>
+            <a:r>
+              <a:rPr lang="en-US" sz="2000" dirty="0"/>
+              <a:t>…to make this the reality.</a:t>
+            </a:r>
+          </a:p>
+          <a:p>
+            <a:endParaRPr lang="en-US" sz="2400" dirty="0"/>
           </a:p>
         </p:txBody>
       </p:sp>
@@ -3845,6 +8881,275 @@
   <p:clrMapOvr>
     <a:masterClrMapping/>
   </p:clrMapOvr>
+  <p:timing>
+    <p:tnLst>
+      <p:par>
+        <p:cTn id="1" dur="indefinite" restart="never" nodeType="tmRoot">
+          <p:childTnLst>
+            <p:seq concurrent="1" nextAc="seek">
+              <p:cTn id="2" dur="indefinite" nodeType="mainSeq">
+                <p:childTnLst>
+                  <p:par>
+                    <p:cTn id="3" fill="hold">
+                      <p:stCondLst>
+                        <p:cond delay="indefinite"/>
+                      </p:stCondLst>
+                      <p:childTnLst>
+                        <p:par>
+                          <p:cTn id="4" fill="hold">
+                            <p:stCondLst>
+                              <p:cond delay="0"/>
+                            </p:stCondLst>
+                            <p:childTnLst>
+                              <p:par>
+                                <p:cTn id="5" presetID="1" presetClass="entr" presetSubtype="0" fill="hold" grpId="0" nodeType="clickEffect">
+                                  <p:stCondLst>
+                                    <p:cond delay="0"/>
+                                  </p:stCondLst>
+                                  <p:childTnLst>
+                                    <p:set>
+                                      <p:cBhvr>
+                                        <p:cTn id="6" dur="1" fill="hold">
+                                          <p:stCondLst>
+                                            <p:cond delay="0"/>
+                                          </p:stCondLst>
+                                        </p:cTn>
+                                        <p:tgtEl>
+                                          <p:spTgt spid="4"/>
+                                        </p:tgtEl>
+                                        <p:attrNameLst>
+                                          <p:attrName>style.visibility</p:attrName>
+                                        </p:attrNameLst>
+                                      </p:cBhvr>
+                                      <p:to>
+                                        <p:strVal val="visible"/>
+                                      </p:to>
+                                    </p:set>
+                                  </p:childTnLst>
+                                </p:cTn>
+                              </p:par>
+                            </p:childTnLst>
+                          </p:cTn>
+                        </p:par>
+                      </p:childTnLst>
+                    </p:cTn>
+                  </p:par>
+                  <p:par>
+                    <p:cTn id="7" fill="hold">
+                      <p:stCondLst>
+                        <p:cond delay="indefinite"/>
+                      </p:stCondLst>
+                      <p:childTnLst>
+                        <p:par>
+                          <p:cTn id="8" fill="hold">
+                            <p:stCondLst>
+                              <p:cond delay="0"/>
+                            </p:stCondLst>
+                            <p:childTnLst>
+                              <p:par>
+                                <p:cTn id="9" presetID="1" presetClass="entr" presetSubtype="0" fill="hold" nodeType="clickEffect">
+                                  <p:stCondLst>
+                                    <p:cond delay="0"/>
+                                  </p:stCondLst>
+                                  <p:childTnLst>
+                                    <p:set>
+                                      <p:cBhvr>
+                                        <p:cTn id="10" dur="1" fill="hold">
+                                          <p:stCondLst>
+                                            <p:cond delay="0"/>
+                                          </p:stCondLst>
+                                        </p:cTn>
+                                        <p:tgtEl>
+                                          <p:spTgt spid="5">
+                                            <p:txEl>
+                                              <p:pRg st="0" end="0"/>
+                                            </p:txEl>
+                                          </p:spTgt>
+                                        </p:tgtEl>
+                                        <p:attrNameLst>
+                                          <p:attrName>style.visibility</p:attrName>
+                                        </p:attrNameLst>
+                                      </p:cBhvr>
+                                      <p:to>
+                                        <p:strVal val="visible"/>
+                                      </p:to>
+                                    </p:set>
+                                  </p:childTnLst>
+                                </p:cTn>
+                              </p:par>
+                              <p:par>
+                                <p:cTn id="11" presetID="1" presetClass="entr" presetSubtype="0" fill="hold" nodeType="withEffect">
+                                  <p:stCondLst>
+                                    <p:cond delay="0"/>
+                                  </p:stCondLst>
+                                  <p:childTnLst>
+                                    <p:set>
+                                      <p:cBhvr>
+                                        <p:cTn id="12" dur="1" fill="hold">
+                                          <p:stCondLst>
+                                            <p:cond delay="0"/>
+                                          </p:stCondLst>
+                                        </p:cTn>
+                                        <p:tgtEl>
+                                          <p:spTgt spid="5">
+                                            <p:txEl>
+                                              <p:pRg st="1" end="1"/>
+                                            </p:txEl>
+                                          </p:spTgt>
+                                        </p:tgtEl>
+                                        <p:attrNameLst>
+                                          <p:attrName>style.visibility</p:attrName>
+                                        </p:attrNameLst>
+                                      </p:cBhvr>
+                                      <p:to>
+                                        <p:strVal val="visible"/>
+                                      </p:to>
+                                    </p:set>
+                                  </p:childTnLst>
+                                </p:cTn>
+                              </p:par>
+                              <p:par>
+                                <p:cTn id="13" presetID="1" presetClass="entr" presetSubtype="0" fill="hold" nodeType="withEffect">
+                                  <p:stCondLst>
+                                    <p:cond delay="0"/>
+                                  </p:stCondLst>
+                                  <p:childTnLst>
+                                    <p:set>
+                                      <p:cBhvr>
+                                        <p:cTn id="14" dur="1" fill="hold">
+                                          <p:stCondLst>
+                                            <p:cond delay="0"/>
+                                          </p:stCondLst>
+                                        </p:cTn>
+                                        <p:tgtEl>
+                                          <p:spTgt spid="5">
+                                            <p:txEl>
+                                              <p:pRg st="2" end="2"/>
+                                            </p:txEl>
+                                          </p:spTgt>
+                                        </p:tgtEl>
+                                        <p:attrNameLst>
+                                          <p:attrName>style.visibility</p:attrName>
+                                        </p:attrNameLst>
+                                      </p:cBhvr>
+                                      <p:to>
+                                        <p:strVal val="visible"/>
+                                      </p:to>
+                                    </p:set>
+                                  </p:childTnLst>
+                                </p:cTn>
+                              </p:par>
+                            </p:childTnLst>
+                          </p:cTn>
+                        </p:par>
+                      </p:childTnLst>
+                    </p:cTn>
+                  </p:par>
+                  <p:par>
+                    <p:cTn id="15" fill="hold">
+                      <p:stCondLst>
+                        <p:cond delay="indefinite"/>
+                      </p:stCondLst>
+                      <p:childTnLst>
+                        <p:par>
+                          <p:cTn id="16" fill="hold">
+                            <p:stCondLst>
+                              <p:cond delay="0"/>
+                            </p:stCondLst>
+                            <p:childTnLst>
+                              <p:par>
+                                <p:cTn id="17" presetID="1" presetClass="entr" presetSubtype="0" fill="hold" nodeType="clickEffect">
+                                  <p:stCondLst>
+                                    <p:cond delay="0"/>
+                                  </p:stCondLst>
+                                  <p:childTnLst>
+                                    <p:set>
+                                      <p:cBhvr>
+                                        <p:cTn id="18" dur="1" fill="hold">
+                                          <p:stCondLst>
+                                            <p:cond delay="0"/>
+                                          </p:stCondLst>
+                                        </p:cTn>
+                                        <p:tgtEl>
+                                          <p:spTgt spid="5">
+                                            <p:txEl>
+                                              <p:pRg st="3" end="3"/>
+                                            </p:txEl>
+                                          </p:spTgt>
+                                        </p:tgtEl>
+                                        <p:attrNameLst>
+                                          <p:attrName>style.visibility</p:attrName>
+                                        </p:attrNameLst>
+                                      </p:cBhvr>
+                                      <p:to>
+                                        <p:strVal val="visible"/>
+                                      </p:to>
+                                    </p:set>
+                                  </p:childTnLst>
+                                </p:cTn>
+                              </p:par>
+                              <p:par>
+                                <p:cTn id="19" presetID="1" presetClass="entr" presetSubtype="0" fill="hold" nodeType="withEffect">
+                                  <p:stCondLst>
+                                    <p:cond delay="0"/>
+                                  </p:stCondLst>
+                                  <p:childTnLst>
+                                    <p:set>
+                                      <p:cBhvr>
+                                        <p:cTn id="20" dur="1" fill="hold">
+                                          <p:stCondLst>
+                                            <p:cond delay="0"/>
+                                          </p:stCondLst>
+                                        </p:cTn>
+                                        <p:tgtEl>
+                                          <p:spTgt spid="5">
+                                            <p:txEl>
+                                              <p:pRg st="4" end="4"/>
+                                            </p:txEl>
+                                          </p:spTgt>
+                                        </p:tgtEl>
+                                        <p:attrNameLst>
+                                          <p:attrName>style.visibility</p:attrName>
+                                        </p:attrNameLst>
+                                      </p:cBhvr>
+                                      <p:to>
+                                        <p:strVal val="visible"/>
+                                      </p:to>
+                                    </p:set>
+                                  </p:childTnLst>
+                                </p:cTn>
+                              </p:par>
+                            </p:childTnLst>
+                          </p:cTn>
+                        </p:par>
+                      </p:childTnLst>
+                    </p:cTn>
+                  </p:par>
+                </p:childTnLst>
+              </p:cTn>
+              <p:prevCondLst>
+                <p:cond evt="onPrev" delay="0">
+                  <p:tgtEl>
+                    <p:sldTgt/>
+                  </p:tgtEl>
+                </p:cond>
+              </p:prevCondLst>
+              <p:nextCondLst>
+                <p:cond evt="onNext" delay="0">
+                  <p:tgtEl>
+                    <p:sldTgt/>
+                  </p:tgtEl>
+                </p:cond>
+              </p:nextCondLst>
+            </p:seq>
+          </p:childTnLst>
+        </p:cTn>
+      </p:par>
+    </p:tnLst>
+    <p:bldLst>
+      <p:bldP spid="4" grpId="0"/>
+    </p:bldLst>
+  </p:timing>
 </p:sld>
 </file>
 
@@ -3888,15 +9193,7 @@
           <a:p>
             <a:r>
               <a:rPr lang="en-US" dirty="0"/>
-              <a:t>A </a:t>
-            </a:r>
-            <a:r>
-              <a:rPr lang="en-US" dirty="0" err="1"/>
-              <a:t>CodeCenter</a:t>
-            </a:r>
-            <a:r>
-              <a:rPr lang="en-US" dirty="0"/>
-              <a:t>-like application</a:t>
+              <a:t>A simple Agent.</a:t>
             </a:r>
           </a:p>
         </p:txBody>
@@ -3917,88 +9214,2522 @@
             <p:ph idx="1"/>
           </p:nvPr>
         </p:nvSpPr>
-        <p:spPr/>
-        <p:txBody>
-          <a:bodyPr/>
+        <p:spPr>
+          <a:xfrm>
+            <a:off x="838200" y="1825625"/>
+            <a:ext cx="10515600" cy="851587"/>
+          </a:xfrm>
+        </p:spPr>
+        <p:txBody>
+          <a:bodyPr vert="horz" lIns="91440" tIns="45720" rIns="91440" bIns="45720" rtlCol="0">
+            <a:normAutofit lnSpcReduction="10000"/>
+          </a:bodyPr>
           <a:lstStyle/>
           <a:p>
             <a:r>
               <a:rPr lang="en-US" dirty="0"/>
-              <a:t>“Signature”</a:t>
-            </a:r>
-          </a:p>
-          <a:p>
-            <a:r>
-              <a:rPr lang="en-US" dirty="0"/>
-              <a:t>“Production”</a:t>
-            </a:r>
-          </a:p>
-          <a:p>
-            <a:r>
-              <a:rPr lang="en-US" dirty="0"/>
-              <a:t>Local</a:t>
+              <a:t>One should be able to understand the interactions of any Party by looking at its Application Identity configuration</a:t>
+            </a:r>
+          </a:p>
+        </p:txBody>
+      </p:sp>
+      <p:sp>
+        <p:nvSpPr>
+          <p:cNvPr id="4" name="TextBox 3">
+            <a:extLst>
+              <a:ext uri="{FF2B5EF4-FFF2-40B4-BE49-F238E27FC236}">
+                <a16:creationId xmlns:a16="http://schemas.microsoft.com/office/drawing/2014/main" id="{1BEF56BE-36E9-9C16-0573-8234C8D9F689}"/>
+              </a:ext>
+            </a:extLst>
+          </p:cNvPr>
+          <p:cNvSpPr txBox="1"/>
+          <p:nvPr/>
+        </p:nvSpPr>
+        <p:spPr>
+          <a:xfrm>
+            <a:off x="769855" y="2812149"/>
+            <a:ext cx="4414887" cy="3539430"/>
+          </a:xfrm>
+          <a:prstGeom prst="rect">
+            <a:avLst/>
+          </a:prstGeom>
+          <a:noFill/>
+        </p:spPr>
+        <p:txBody>
+          <a:bodyPr wrap="square" rtlCol="0">
+            <a:spAutoFit/>
+          </a:bodyPr>
+          <a:lstStyle/>
+          <a:p>
+            <a:r>
+              <a:rPr lang="en-US" sz="1400" dirty="0">
+                <a:latin typeface="Courier New" panose="02070309020205020404" pitchFamily="49" charset="0"/>
+                <a:cs typeface="Courier New" panose="02070309020205020404" pitchFamily="49" charset="0"/>
+              </a:rPr>
+              <a:t>{</a:t>
+            </a:r>
+          </a:p>
+          <a:p>
+            <a:r>
+              <a:rPr lang="en-US" sz="1400" dirty="0">
+                <a:latin typeface="Courier New" panose="02070309020205020404" pitchFamily="49" charset="0"/>
+                <a:cs typeface="Courier New" panose="02070309020205020404" pitchFamily="49" charset="0"/>
+              </a:rPr>
+              <a:t>  "</a:t>
+            </a:r>
+            <a:r>
+              <a:rPr lang="en-US" sz="1400" dirty="0" err="1">
+                <a:latin typeface="Courier New" panose="02070309020205020404" pitchFamily="49" charset="0"/>
+                <a:cs typeface="Courier New" panose="02070309020205020404" pitchFamily="49" charset="0"/>
+              </a:rPr>
+              <a:t>DomainName</a:t>
+            </a:r>
+            <a:r>
+              <a:rPr lang="en-US" sz="1400" dirty="0">
+                <a:latin typeface="Courier New" panose="02070309020205020404" pitchFamily="49" charset="0"/>
+                <a:cs typeface="Courier New" panose="02070309020205020404" pitchFamily="49" charset="0"/>
+              </a:rPr>
+              <a:t>": "</a:t>
+            </a:r>
+            <a:r>
+              <a:rPr lang="en-US" sz="1400" dirty="0" err="1">
+                <a:latin typeface="Courier New" panose="02070309020205020404" pitchFamily="49" charset="0"/>
+                <a:cs typeface="Courier New" panose="02070309020205020404" pitchFamily="49" charset="0"/>
+              </a:rPr>
+              <a:t>LaToulousaine</a:t>
+            </a:r>
+            <a:r>
+              <a:rPr lang="en-US" sz="1400" dirty="0">
+                <a:latin typeface="Courier New" panose="02070309020205020404" pitchFamily="49" charset="0"/>
+                <a:cs typeface="Courier New" panose="02070309020205020404" pitchFamily="49" charset="0"/>
+              </a:rPr>
+              <a:t>",</a:t>
+            </a:r>
+          </a:p>
+          <a:p>
+            <a:r>
+              <a:rPr lang="en-US" sz="1400" dirty="0">
+                <a:latin typeface="Courier New" panose="02070309020205020404" pitchFamily="49" charset="0"/>
+                <a:cs typeface="Courier New" panose="02070309020205020404" pitchFamily="49" charset="0"/>
+              </a:rPr>
+              <a:t>  "</a:t>
+            </a:r>
+            <a:r>
+              <a:rPr lang="en-US" sz="1400" dirty="0" err="1">
+                <a:latin typeface="Courier New" panose="02070309020205020404" pitchFamily="49" charset="0"/>
+                <a:cs typeface="Courier New" panose="02070309020205020404" pitchFamily="49" charset="0"/>
+              </a:rPr>
+              <a:t>EnvironmentName</a:t>
+            </a:r>
+            <a:r>
+              <a:rPr lang="en-US" sz="1400" dirty="0">
+                <a:latin typeface="Courier New" panose="02070309020205020404" pitchFamily="49" charset="0"/>
+                <a:cs typeface="Courier New" panose="02070309020205020404" pitchFamily="49" charset="0"/>
+              </a:rPr>
+              <a:t>": "Production",</a:t>
+            </a:r>
+          </a:p>
+          <a:p>
+            <a:r>
+              <a:rPr lang="en-US" sz="1400" dirty="0">
+                <a:latin typeface="Courier New" panose="02070309020205020404" pitchFamily="49" charset="0"/>
+                <a:cs typeface="Courier New" panose="02070309020205020404" pitchFamily="49" charset="0"/>
+              </a:rPr>
+              <a:t>  "Local": {</a:t>
+            </a:r>
+          </a:p>
+          <a:p>
+            <a:r>
+              <a:rPr lang="en-US" sz="1400" dirty="0">
+                <a:latin typeface="Courier New" panose="02070309020205020404" pitchFamily="49" charset="0"/>
+                <a:cs typeface="Courier New" panose="02070309020205020404" pitchFamily="49" charset="0"/>
+              </a:rPr>
+              <a:t>    "Name": "Trolley1"</a:t>
+            </a:r>
+          </a:p>
+          <a:p>
+            <a:r>
+              <a:rPr lang="en-US" sz="1400" dirty="0">
+                <a:latin typeface="Courier New" panose="02070309020205020404" pitchFamily="49" charset="0"/>
+                <a:cs typeface="Courier New" panose="02070309020205020404" pitchFamily="49" charset="0"/>
+              </a:rPr>
+              <a:t>   },</a:t>
+            </a:r>
+          </a:p>
+          <a:p>
+            <a:r>
+              <a:rPr lang="en-US" sz="1400" dirty="0">
+                <a:latin typeface="Courier New" panose="02070309020205020404" pitchFamily="49" charset="0"/>
+                <a:cs typeface="Courier New" panose="02070309020205020404" pitchFamily="49" charset="0"/>
+              </a:rPr>
+              <a:t>  "Remotes": [</a:t>
+            </a:r>
+          </a:p>
+          <a:p>
+            <a:r>
+              <a:rPr lang="en-US" sz="1400" dirty="0">
+                <a:latin typeface="Courier New" panose="02070309020205020404" pitchFamily="49" charset="0"/>
+                <a:cs typeface="Courier New" panose="02070309020205020404" pitchFamily="49" charset="0"/>
+              </a:rPr>
+              <a:t>   {</a:t>
+            </a:r>
+          </a:p>
+          <a:p>
+            <a:r>
+              <a:rPr lang="en-US" sz="1400" dirty="0">
+                <a:latin typeface="Courier New" panose="02070309020205020404" pitchFamily="49" charset="0"/>
+                <a:cs typeface="Courier New" panose="02070309020205020404" pitchFamily="49" charset="0"/>
+              </a:rPr>
+              <a:t>     "Name": "</a:t>
+            </a:r>
+            <a:r>
+              <a:rPr lang="en-US" sz="1400" dirty="0" err="1">
+                <a:latin typeface="Courier New" panose="02070309020205020404" pitchFamily="49" charset="0"/>
+                <a:cs typeface="Courier New" panose="02070309020205020404" pitchFamily="49" charset="0"/>
+              </a:rPr>
+              <a:t>LogTower</a:t>
+            </a:r>
+            <a:r>
+              <a:rPr lang="en-US" sz="1400" dirty="0">
+                <a:latin typeface="Courier New" panose="02070309020205020404" pitchFamily="49" charset="0"/>
+                <a:cs typeface="Courier New" panose="02070309020205020404" pitchFamily="49" charset="0"/>
+              </a:rPr>
+              <a:t>",</a:t>
+            </a:r>
+          </a:p>
+          <a:p>
+            <a:r>
+              <a:rPr lang="en-US" sz="1400" dirty="0">
+                <a:latin typeface="Courier New" panose="02070309020205020404" pitchFamily="49" charset="0"/>
+                <a:cs typeface="Courier New" panose="02070309020205020404" pitchFamily="49" charset="0"/>
+              </a:rPr>
+              <a:t>     "Address": "148.54.11.18:3712"</a:t>
+            </a:r>
+          </a:p>
+          <a:p>
+            <a:r>
+              <a:rPr lang="en-US" sz="1400" dirty="0">
+                <a:latin typeface="Courier New" panose="02070309020205020404" pitchFamily="49" charset="0"/>
+                <a:cs typeface="Courier New" panose="02070309020205020404" pitchFamily="49" charset="0"/>
+              </a:rPr>
+              <a:t>   },</a:t>
+            </a:r>
+          </a:p>
+          <a:p>
+            <a:r>
+              <a:rPr lang="en-US" sz="1400" dirty="0">
+                <a:latin typeface="Courier New" panose="02070309020205020404" pitchFamily="49" charset="0"/>
+                <a:cs typeface="Courier New" panose="02070309020205020404" pitchFamily="49" charset="0"/>
+              </a:rPr>
+              <a:t>   {</a:t>
+            </a:r>
+          </a:p>
+          <a:p>
+            <a:r>
+              <a:rPr lang="en-US" sz="1400" dirty="0">
+                <a:latin typeface="Courier New" panose="02070309020205020404" pitchFamily="49" charset="0"/>
+                <a:cs typeface="Courier New" panose="02070309020205020404" pitchFamily="49" charset="0"/>
+              </a:rPr>
+              <a:t>     "Name": "</a:t>
+            </a:r>
+            <a:r>
+              <a:rPr lang="en-US" sz="1400" dirty="0" err="1">
+                <a:latin typeface="Courier New" panose="02070309020205020404" pitchFamily="49" charset="0"/>
+                <a:cs typeface="Courier New" panose="02070309020205020404" pitchFamily="49" charset="0"/>
+              </a:rPr>
+              <a:t>SignatureBox</a:t>
+            </a:r>
+            <a:r>
+              <a:rPr lang="en-US" sz="1400" dirty="0">
+                <a:latin typeface="Courier New" panose="02070309020205020404" pitchFamily="49" charset="0"/>
+                <a:cs typeface="Courier New" panose="02070309020205020404" pitchFamily="49" charset="0"/>
+              </a:rPr>
+              <a:t>",</a:t>
+            </a:r>
+          </a:p>
+          <a:p>
+            <a:r>
+              <a:rPr lang="en-US" sz="1400" dirty="0">
+                <a:latin typeface="Courier New" panose="02070309020205020404" pitchFamily="49" charset="0"/>
+                <a:cs typeface="Courier New" panose="02070309020205020404" pitchFamily="49" charset="0"/>
+              </a:rPr>
+              <a:t>     "Address": "155.88.22.22"</a:t>
+            </a:r>
+          </a:p>
+          <a:p>
+            <a:r>
+              <a:rPr lang="en-US" sz="1400" dirty="0">
+                <a:latin typeface="Courier New" panose="02070309020205020404" pitchFamily="49" charset="0"/>
+                <a:cs typeface="Courier New" panose="02070309020205020404" pitchFamily="49" charset="0"/>
+              </a:rPr>
+              <a:t>   }]</a:t>
+            </a:r>
+            <a:br>
+              <a:rPr lang="en-US" sz="1400" dirty="0">
+                <a:latin typeface="Courier New" panose="02070309020205020404" pitchFamily="49" charset="0"/>
+                <a:cs typeface="Courier New" panose="02070309020205020404" pitchFamily="49" charset="0"/>
+              </a:rPr>
+            </a:br>
+            <a:r>
+              <a:rPr lang="en-US" sz="1400" dirty="0">
+                <a:latin typeface="Courier New" panose="02070309020205020404" pitchFamily="49" charset="0"/>
+                <a:cs typeface="Courier New" panose="02070309020205020404" pitchFamily="49" charset="0"/>
+              </a:rPr>
+              <a:t>}</a:t>
+            </a:r>
+          </a:p>
+        </p:txBody>
+      </p:sp>
+      <p:sp>
+        <p:nvSpPr>
+          <p:cNvPr id="8" name="TextBox 7">
+            <a:extLst>
+              <a:ext uri="{FF2B5EF4-FFF2-40B4-BE49-F238E27FC236}">
+                <a16:creationId xmlns:a16="http://schemas.microsoft.com/office/drawing/2014/main" id="{CE69884F-EC60-0B31-9E5D-FA31BD845EA1}"/>
+              </a:ext>
+            </a:extLst>
+          </p:cNvPr>
+          <p:cNvSpPr txBox="1"/>
+          <p:nvPr/>
+        </p:nvSpPr>
+        <p:spPr>
+          <a:xfrm>
+            <a:off x="5184742" y="2924742"/>
+            <a:ext cx="5857974" cy="2033758"/>
+          </a:xfrm>
+          <a:prstGeom prst="rect">
+            <a:avLst/>
+          </a:prstGeom>
+        </p:spPr>
+        <p:txBody>
+          <a:bodyPr vert="horz" lIns="91440" tIns="45720" rIns="91440" bIns="45720" rtlCol="0">
+            <a:normAutofit fontScale="85000" lnSpcReduction="10000"/>
+          </a:bodyPr>
+          <a:lstStyle>
+            <a:lvl1pPr marL="228600" indent="-228600">
+              <a:lnSpc>
+                <a:spcPct val="90000"/>
+              </a:lnSpc>
+              <a:spcBef>
+                <a:spcPts val="1000"/>
+              </a:spcBef>
+              <a:buFont typeface="Arial" panose="020B0604020202020204" pitchFamily="34" charset="0"/>
+              <a:buChar char="•"/>
+              <a:defRPr sz="2800"/>
+            </a:lvl1pPr>
+            <a:lvl2pPr marL="685800" indent="-228600">
+              <a:lnSpc>
+                <a:spcPct val="90000"/>
+              </a:lnSpc>
+              <a:spcBef>
+                <a:spcPts val="500"/>
+              </a:spcBef>
+              <a:buFont typeface="Arial" panose="020B0604020202020204" pitchFamily="34" charset="0"/>
+              <a:buChar char="•"/>
+              <a:defRPr sz="2400"/>
+            </a:lvl2pPr>
+            <a:lvl3pPr marL="1143000" indent="-228600">
+              <a:lnSpc>
+                <a:spcPct val="90000"/>
+              </a:lnSpc>
+              <a:spcBef>
+                <a:spcPts val="500"/>
+              </a:spcBef>
+              <a:buFont typeface="Arial" panose="020B0604020202020204" pitchFamily="34" charset="0"/>
+              <a:buChar char="•"/>
+              <a:defRPr sz="2000"/>
+            </a:lvl3pPr>
+            <a:lvl4pPr marL="1600200" indent="-228600">
+              <a:lnSpc>
+                <a:spcPct val="90000"/>
+              </a:lnSpc>
+              <a:spcBef>
+                <a:spcPts val="500"/>
+              </a:spcBef>
+              <a:buFont typeface="Arial" panose="020B0604020202020204" pitchFamily="34" charset="0"/>
+              <a:buChar char="•"/>
+            </a:lvl4pPr>
+            <a:lvl5pPr marL="2057400" indent="-228600">
+              <a:lnSpc>
+                <a:spcPct val="90000"/>
+              </a:lnSpc>
+              <a:spcBef>
+                <a:spcPts val="500"/>
+              </a:spcBef>
+              <a:buFont typeface="Arial" panose="020B0604020202020204" pitchFamily="34" charset="0"/>
+              <a:buChar char="•"/>
+            </a:lvl5pPr>
+            <a:lvl6pPr marL="2514600" indent="-228600">
+              <a:lnSpc>
+                <a:spcPct val="90000"/>
+              </a:lnSpc>
+              <a:spcBef>
+                <a:spcPts val="500"/>
+              </a:spcBef>
+              <a:buFont typeface="Arial" panose="020B0604020202020204" pitchFamily="34" charset="0"/>
+              <a:buChar char="•"/>
+            </a:lvl6pPr>
+            <a:lvl7pPr marL="2971800" indent="-228600">
+              <a:lnSpc>
+                <a:spcPct val="90000"/>
+              </a:lnSpc>
+              <a:spcBef>
+                <a:spcPts val="500"/>
+              </a:spcBef>
+              <a:buFont typeface="Arial" panose="020B0604020202020204" pitchFamily="34" charset="0"/>
+              <a:buChar char="•"/>
+            </a:lvl7pPr>
+            <a:lvl8pPr marL="3429000" indent="-228600">
+              <a:lnSpc>
+                <a:spcPct val="90000"/>
+              </a:lnSpc>
+              <a:spcBef>
+                <a:spcPts val="500"/>
+              </a:spcBef>
+              <a:buFont typeface="Arial" panose="020B0604020202020204" pitchFamily="34" charset="0"/>
+              <a:buChar char="•"/>
+            </a:lvl8pPr>
+            <a:lvl9pPr marL="3886200" indent="-228600">
+              <a:lnSpc>
+                <a:spcPct val="90000"/>
+              </a:lnSpc>
+              <a:spcBef>
+                <a:spcPts val="500"/>
+              </a:spcBef>
+              <a:buFont typeface="Arial" panose="020B0604020202020204" pitchFamily="34" charset="0"/>
+              <a:buChar char="•"/>
+            </a:lvl9pPr>
+          </a:lstStyle>
+          <a:p>
+            <a:r>
+              <a:rPr lang="en-US" sz="2400" dirty="0"/>
+              <a:t>There should be no more than that for our Trolley1:</a:t>
             </a:r>
           </a:p>
           <a:p>
             <a:pPr lvl="1"/>
             <a:r>
-              <a:rPr lang="en-US" dirty="0"/>
-              <a:t>“</a:t>
-            </a:r>
-            <a:r>
-              <a:rPr lang="en-US" dirty="0" err="1"/>
-              <a:t>CodeCenter</a:t>
-            </a:r>
-            <a:r>
-              <a:rPr lang="en-US" dirty="0"/>
-              <a:t>”</a:t>
-            </a:r>
-          </a:p>
-          <a:p>
-            <a:r>
-              <a:rPr lang="en-US" dirty="0"/>
-              <a:t>Remotes</a:t>
+              <a:rPr lang="en-US" sz="2000" dirty="0"/>
+              <a:t>Sends its logs to a “</a:t>
+            </a:r>
+            <a:r>
+              <a:rPr lang="en-US" sz="2000" dirty="0" err="1"/>
+              <a:t>LogTower</a:t>
+            </a:r>
+            <a:r>
+              <a:rPr lang="en-US" sz="2000" dirty="0"/>
+              <a:t>” party.</a:t>
             </a:r>
           </a:p>
           <a:p>
             <a:pPr lvl="1"/>
             <a:r>
-              <a:rPr lang="en-US" dirty="0"/>
-              <a:t>“GitHub”</a:t>
-            </a:r>
-          </a:p>
-          <a:p>
-            <a:pPr lvl="2"/>
-            <a:r>
-              <a:rPr lang="en-US" dirty="0"/>
-              <a:t>“45kKJDHldf57dsj87f6fefAsdjhfyefsdfzrsdffgbddcsdc”</a:t>
+              <a:rPr lang="en-US" sz="2000" dirty="0"/>
+              <a:t>Can initiate communications with the “</a:t>
+            </a:r>
+            <a:r>
+              <a:rPr lang="en-US" sz="2000" dirty="0" err="1"/>
+              <a:t>SignatureBox</a:t>
+            </a:r>
+            <a:r>
+              <a:rPr lang="en-US" sz="2000" dirty="0"/>
+              <a:t>” party.</a:t>
+            </a:r>
+          </a:p>
+          <a:p>
+            <a:r>
+              <a:rPr lang="en-US" sz="2400" dirty="0"/>
+              <a:t>The “Address” is not a URI or URL. </a:t>
             </a:r>
           </a:p>
           <a:p>
             <a:pPr lvl="1"/>
             <a:r>
-              <a:rPr lang="en-US" dirty="0"/>
-              <a:t>“</a:t>
-            </a:r>
-            <a:r>
-              <a:rPr lang="en-US" dirty="0" err="1"/>
-              <a:t>LogTower</a:t>
-            </a:r>
-            <a:r>
-              <a:rPr lang="en-US"/>
-              <a:t>”</a:t>
-            </a:r>
-          </a:p>
-          <a:p>
-            <a:pPr lvl="2"/>
-            <a:endParaRPr lang="en-US" dirty="0"/>
+              <a:rPr lang="en-US" sz="2000" dirty="0"/>
+              <a:t>It can be any string that makes the </a:t>
+            </a:r>
+            <a:r>
+              <a:rPr lang="en-US" sz="2000" i="1" dirty="0"/>
+              <a:t>remote reachable from this party</a:t>
+            </a:r>
+            <a:r>
+              <a:rPr lang="en-US" sz="2000" dirty="0"/>
+              <a:t>.</a:t>
+            </a:r>
+          </a:p>
+          <a:p>
+            <a:endParaRPr lang="en-US" sz="2400" dirty="0"/>
           </a:p>
         </p:txBody>
       </p:sp>
     </p:spTree>
     <p:extLst>
       <p:ext uri="{BB962C8B-B14F-4D97-AF65-F5344CB8AC3E}">
-        <p14:creationId xmlns:p14="http://schemas.microsoft.com/office/powerpoint/2010/main" val="1680907381"/>
+        <p14:creationId xmlns:p14="http://schemas.microsoft.com/office/powerpoint/2010/main" val="910232865"/>
+      </p:ext>
+    </p:extLst>
+  </p:cSld>
+  <p:clrMapOvr>
+    <a:masterClrMapping/>
+  </p:clrMapOvr>
+</p:sld>
+</file>
+
+<file path=ppt/slides/slide6.xml><?xml version="1.0" encoding="utf-8"?>
+<p:sld xmlns:a="http://schemas.openxmlformats.org/drawingml/2006/main" xmlns:r="http://schemas.openxmlformats.org/officeDocument/2006/relationships" xmlns:p="http://schemas.openxmlformats.org/presentationml/2006/main">
+  <p:cSld>
+    <p:spTree>
+      <p:nvGrpSpPr>
+        <p:cNvPr id="1" name=""/>
+        <p:cNvGrpSpPr/>
+        <p:nvPr/>
+      </p:nvGrpSpPr>
+      <p:grpSpPr>
+        <a:xfrm>
+          <a:off x="0" y="0"/>
+          <a:ext cx="0" cy="0"/>
+          <a:chOff x="0" y="0"/>
+          <a:chExt cx="0" cy="0"/>
+        </a:xfrm>
+      </p:grpSpPr>
+      <p:sp>
+        <p:nvSpPr>
+          <p:cNvPr id="2" name="Title 1">
+            <a:extLst>
+              <a:ext uri="{FF2B5EF4-FFF2-40B4-BE49-F238E27FC236}">
+                <a16:creationId xmlns:a16="http://schemas.microsoft.com/office/drawing/2014/main" id="{5A4CA690-E7B9-FB17-D3F9-CD95B93175F5}"/>
+              </a:ext>
+            </a:extLst>
+          </p:cNvPr>
+          <p:cNvSpPr>
+            <a:spLocks noGrp="1"/>
+          </p:cNvSpPr>
+          <p:nvPr>
+            <p:ph type="title"/>
+          </p:nvPr>
+        </p:nvSpPr>
+        <p:spPr/>
+        <p:txBody>
+          <a:bodyPr/>
+          <a:lstStyle/>
+          <a:p>
+            <a:r>
+              <a:rPr lang="en-US" dirty="0"/>
+              <a:t>The </a:t>
+            </a:r>
+            <a:r>
+              <a:rPr lang="en-US" dirty="0" err="1"/>
+              <a:t>SignatureBox</a:t>
+            </a:r>
+            <a:r>
+              <a:rPr lang="en-US" dirty="0"/>
+              <a:t>.</a:t>
+            </a:r>
+          </a:p>
+        </p:txBody>
+      </p:sp>
+      <p:sp>
+        <p:nvSpPr>
+          <p:cNvPr id="3" name="Content Placeholder 2">
+            <a:extLst>
+              <a:ext uri="{FF2B5EF4-FFF2-40B4-BE49-F238E27FC236}">
+                <a16:creationId xmlns:a16="http://schemas.microsoft.com/office/drawing/2014/main" id="{93E00EFF-DD86-3588-5686-FCEFF2B8B8B2}"/>
+              </a:ext>
+            </a:extLst>
+          </p:cNvPr>
+          <p:cNvSpPr>
+            <a:spLocks noGrp="1"/>
+          </p:cNvSpPr>
+          <p:nvPr>
+            <p:ph idx="1"/>
+          </p:nvPr>
+        </p:nvSpPr>
+        <p:spPr>
+          <a:xfrm>
+            <a:off x="5253087" y="1825624"/>
+            <a:ext cx="6100713" cy="4113263"/>
+          </a:xfrm>
+        </p:spPr>
+        <p:txBody>
+          <a:bodyPr vert="horz" lIns="91440" tIns="45720" rIns="91440" bIns="45720" rtlCol="0">
+            <a:normAutofit/>
+          </a:bodyPr>
+          <a:lstStyle/>
+          <a:p>
+            <a:r>
+              <a:rPr lang="en-US" dirty="0"/>
+              <a:t>The </a:t>
+            </a:r>
+            <a:r>
+              <a:rPr lang="en-US" dirty="0" err="1"/>
+              <a:t>SignatureBox</a:t>
+            </a:r>
+            <a:r>
+              <a:rPr lang="en-US" dirty="0"/>
+              <a:t> also sends its logs to the same </a:t>
+            </a:r>
+            <a:r>
+              <a:rPr lang="en-US" dirty="0" err="1"/>
+              <a:t>LogTower</a:t>
+            </a:r>
+            <a:r>
+              <a:rPr lang="en-US" dirty="0"/>
+              <a:t> and knows the Trolley1 but also the Trolley2 and a </a:t>
+            </a:r>
+            <a:r>
+              <a:rPr lang="en-US" dirty="0" err="1"/>
+              <a:t>PickingStation</a:t>
+            </a:r>
+            <a:r>
+              <a:rPr lang="en-US" dirty="0"/>
+              <a:t>.</a:t>
+            </a:r>
+          </a:p>
+          <a:p>
+            <a:endParaRPr lang="en-US" dirty="0"/>
+          </a:p>
+          <a:p>
+            <a:r>
+              <a:rPr lang="en-US" dirty="0"/>
+              <a:t>These 3 remotes have no Address.</a:t>
+            </a:r>
+          </a:p>
+          <a:p>
+            <a:pPr lvl="1"/>
+            <a:r>
+              <a:rPr lang="en-US" dirty="0"/>
+              <a:t>"</a:t>
+            </a:r>
+            <a:r>
+              <a:rPr lang="en-US" dirty="0" err="1"/>
+              <a:t>LaToulousaine</a:t>
+            </a:r>
+            <a:r>
+              <a:rPr lang="en-US" dirty="0"/>
+              <a:t>/Production/</a:t>
+            </a:r>
+            <a:r>
+              <a:rPr lang="en-US" dirty="0" err="1"/>
+              <a:t>SignatureBox</a:t>
+            </a:r>
+            <a:r>
+              <a:rPr lang="en-US" dirty="0"/>
+              <a:t>" is a server for them.</a:t>
+            </a:r>
+          </a:p>
+          <a:p>
+            <a:pPr lvl="1"/>
+            <a:r>
+              <a:rPr lang="en-US" dirty="0"/>
+              <a:t>This is enough for the warehouse to do its work.</a:t>
+            </a:r>
+          </a:p>
+          <a:p>
+            <a:endParaRPr lang="en-US" dirty="0"/>
+          </a:p>
+        </p:txBody>
+      </p:sp>
+      <p:sp>
+        <p:nvSpPr>
+          <p:cNvPr id="4" name="TextBox 3">
+            <a:extLst>
+              <a:ext uri="{FF2B5EF4-FFF2-40B4-BE49-F238E27FC236}">
+                <a16:creationId xmlns:a16="http://schemas.microsoft.com/office/drawing/2014/main" id="{1BEF56BE-36E9-9C16-0573-8234C8D9F689}"/>
+              </a:ext>
+            </a:extLst>
+          </p:cNvPr>
+          <p:cNvSpPr txBox="1"/>
+          <p:nvPr/>
+        </p:nvSpPr>
+        <p:spPr>
+          <a:xfrm>
+            <a:off x="838200" y="1690688"/>
+            <a:ext cx="4414887" cy="4616648"/>
+          </a:xfrm>
+          <a:prstGeom prst="rect">
+            <a:avLst/>
+          </a:prstGeom>
+          <a:noFill/>
+        </p:spPr>
+        <p:txBody>
+          <a:bodyPr wrap="square" rtlCol="0">
+            <a:spAutoFit/>
+          </a:bodyPr>
+          <a:lstStyle/>
+          <a:p>
+            <a:r>
+              <a:rPr lang="en-US" sz="1400" dirty="0">
+                <a:latin typeface="Courier New" panose="02070309020205020404" pitchFamily="49" charset="0"/>
+                <a:cs typeface="Courier New" panose="02070309020205020404" pitchFamily="49" charset="0"/>
+              </a:rPr>
+              <a:t>{</a:t>
+            </a:r>
+          </a:p>
+          <a:p>
+            <a:r>
+              <a:rPr lang="en-US" sz="1400" dirty="0">
+                <a:latin typeface="Courier New" panose="02070309020205020404" pitchFamily="49" charset="0"/>
+                <a:cs typeface="Courier New" panose="02070309020205020404" pitchFamily="49" charset="0"/>
+              </a:rPr>
+              <a:t>  "</a:t>
+            </a:r>
+            <a:r>
+              <a:rPr lang="en-US" sz="1400" dirty="0" err="1">
+                <a:latin typeface="Courier New" panose="02070309020205020404" pitchFamily="49" charset="0"/>
+                <a:cs typeface="Courier New" panose="02070309020205020404" pitchFamily="49" charset="0"/>
+              </a:rPr>
+              <a:t>DomainName</a:t>
+            </a:r>
+            <a:r>
+              <a:rPr lang="en-US" sz="1400" dirty="0">
+                <a:latin typeface="Courier New" panose="02070309020205020404" pitchFamily="49" charset="0"/>
+                <a:cs typeface="Courier New" panose="02070309020205020404" pitchFamily="49" charset="0"/>
+              </a:rPr>
+              <a:t>": "</a:t>
+            </a:r>
+            <a:r>
+              <a:rPr lang="en-US" sz="1400" dirty="0" err="1">
+                <a:latin typeface="Courier New" panose="02070309020205020404" pitchFamily="49" charset="0"/>
+                <a:cs typeface="Courier New" panose="02070309020205020404" pitchFamily="49" charset="0"/>
+              </a:rPr>
+              <a:t>LaToulousaine</a:t>
+            </a:r>
+            <a:r>
+              <a:rPr lang="en-US" sz="1400" dirty="0">
+                <a:latin typeface="Courier New" panose="02070309020205020404" pitchFamily="49" charset="0"/>
+                <a:cs typeface="Courier New" panose="02070309020205020404" pitchFamily="49" charset="0"/>
+              </a:rPr>
+              <a:t>",</a:t>
+            </a:r>
+          </a:p>
+          <a:p>
+            <a:r>
+              <a:rPr lang="en-US" sz="1400" dirty="0">
+                <a:latin typeface="Courier New" panose="02070309020205020404" pitchFamily="49" charset="0"/>
+                <a:cs typeface="Courier New" panose="02070309020205020404" pitchFamily="49" charset="0"/>
+              </a:rPr>
+              <a:t>  "</a:t>
+            </a:r>
+            <a:r>
+              <a:rPr lang="en-US" sz="1400" dirty="0" err="1">
+                <a:latin typeface="Courier New" panose="02070309020205020404" pitchFamily="49" charset="0"/>
+                <a:cs typeface="Courier New" panose="02070309020205020404" pitchFamily="49" charset="0"/>
+              </a:rPr>
+              <a:t>EnvironmentName</a:t>
+            </a:r>
+            <a:r>
+              <a:rPr lang="en-US" sz="1400" dirty="0">
+                <a:latin typeface="Courier New" panose="02070309020205020404" pitchFamily="49" charset="0"/>
+                <a:cs typeface="Courier New" panose="02070309020205020404" pitchFamily="49" charset="0"/>
+              </a:rPr>
+              <a:t>": "Production",</a:t>
+            </a:r>
+          </a:p>
+          <a:p>
+            <a:r>
+              <a:rPr lang="en-US" sz="1400" dirty="0">
+                <a:latin typeface="Courier New" panose="02070309020205020404" pitchFamily="49" charset="0"/>
+                <a:cs typeface="Courier New" panose="02070309020205020404" pitchFamily="49" charset="0"/>
+              </a:rPr>
+              <a:t>  "Local": {</a:t>
+            </a:r>
+          </a:p>
+          <a:p>
+            <a:r>
+              <a:rPr lang="en-US" sz="1400" dirty="0">
+                <a:latin typeface="Courier New" panose="02070309020205020404" pitchFamily="49" charset="0"/>
+                <a:cs typeface="Courier New" panose="02070309020205020404" pitchFamily="49" charset="0"/>
+              </a:rPr>
+              <a:t>    "Name": "</a:t>
+            </a:r>
+            <a:r>
+              <a:rPr lang="en-US" sz="1400" dirty="0" err="1">
+                <a:latin typeface="Courier New" panose="02070309020205020404" pitchFamily="49" charset="0"/>
+                <a:cs typeface="Courier New" panose="02070309020205020404" pitchFamily="49" charset="0"/>
+              </a:rPr>
+              <a:t>SignatureBox</a:t>
+            </a:r>
+            <a:r>
+              <a:rPr lang="en-US" sz="1400" dirty="0">
+                <a:latin typeface="Courier New" panose="02070309020205020404" pitchFamily="49" charset="0"/>
+                <a:cs typeface="Courier New" panose="02070309020205020404" pitchFamily="49" charset="0"/>
+              </a:rPr>
+              <a:t>"</a:t>
+            </a:r>
+          </a:p>
+          <a:p>
+            <a:r>
+              <a:rPr lang="en-US" sz="1400" dirty="0">
+                <a:latin typeface="Courier New" panose="02070309020205020404" pitchFamily="49" charset="0"/>
+                <a:cs typeface="Courier New" panose="02070309020205020404" pitchFamily="49" charset="0"/>
+              </a:rPr>
+              <a:t>  },</a:t>
+            </a:r>
+          </a:p>
+          <a:p>
+            <a:r>
+              <a:rPr lang="en-US" sz="1400" dirty="0">
+                <a:latin typeface="Courier New" panose="02070309020205020404" pitchFamily="49" charset="0"/>
+                <a:cs typeface="Courier New" panose="02070309020205020404" pitchFamily="49" charset="0"/>
+              </a:rPr>
+              <a:t>  "Remotes": [</a:t>
+            </a:r>
+          </a:p>
+          <a:p>
+            <a:r>
+              <a:rPr lang="en-US" sz="1400" dirty="0">
+                <a:latin typeface="Courier New" panose="02070309020205020404" pitchFamily="49" charset="0"/>
+                <a:cs typeface="Courier New" panose="02070309020205020404" pitchFamily="49" charset="0"/>
+              </a:rPr>
+              <a:t>  {</a:t>
+            </a:r>
+          </a:p>
+          <a:p>
+            <a:r>
+              <a:rPr lang="en-US" sz="1400" dirty="0">
+                <a:latin typeface="Courier New" panose="02070309020205020404" pitchFamily="49" charset="0"/>
+                <a:cs typeface="Courier New" panose="02070309020205020404" pitchFamily="49" charset="0"/>
+              </a:rPr>
+              <a:t>    "Name": "</a:t>
+            </a:r>
+            <a:r>
+              <a:rPr lang="en-US" sz="1400" dirty="0" err="1">
+                <a:latin typeface="Courier New" panose="02070309020205020404" pitchFamily="49" charset="0"/>
+                <a:cs typeface="Courier New" panose="02070309020205020404" pitchFamily="49" charset="0"/>
+              </a:rPr>
+              <a:t>LogTower</a:t>
+            </a:r>
+            <a:r>
+              <a:rPr lang="en-US" sz="1400" dirty="0">
+                <a:latin typeface="Courier New" panose="02070309020205020404" pitchFamily="49" charset="0"/>
+                <a:cs typeface="Courier New" panose="02070309020205020404" pitchFamily="49" charset="0"/>
+              </a:rPr>
+              <a:t>",</a:t>
+            </a:r>
+          </a:p>
+          <a:p>
+            <a:r>
+              <a:rPr lang="en-US" sz="1400" dirty="0">
+                <a:latin typeface="Courier New" panose="02070309020205020404" pitchFamily="49" charset="0"/>
+                <a:cs typeface="Courier New" panose="02070309020205020404" pitchFamily="49" charset="0"/>
+              </a:rPr>
+              <a:t>    "Address": "148.54.11.18:3712"</a:t>
+            </a:r>
+          </a:p>
+          <a:p>
+            <a:r>
+              <a:rPr lang="en-US" sz="1400" dirty="0">
+                <a:latin typeface="Courier New" panose="02070309020205020404" pitchFamily="49" charset="0"/>
+                <a:cs typeface="Courier New" panose="02070309020205020404" pitchFamily="49" charset="0"/>
+              </a:rPr>
+              <a:t>  },</a:t>
+            </a:r>
+          </a:p>
+          <a:p>
+            <a:r>
+              <a:rPr lang="en-US" sz="1400" dirty="0">
+                <a:latin typeface="Courier New" panose="02070309020205020404" pitchFamily="49" charset="0"/>
+                <a:cs typeface="Courier New" panose="02070309020205020404" pitchFamily="49" charset="0"/>
+              </a:rPr>
+              <a:t>  {</a:t>
+            </a:r>
+          </a:p>
+          <a:p>
+            <a:r>
+              <a:rPr lang="en-US" sz="1400" dirty="0">
+                <a:latin typeface="Courier New" panose="02070309020205020404" pitchFamily="49" charset="0"/>
+                <a:cs typeface="Courier New" panose="02070309020205020404" pitchFamily="49" charset="0"/>
+              </a:rPr>
+              <a:t>    "Name": "Trolley1"</a:t>
+            </a:r>
+          </a:p>
+          <a:p>
+            <a:r>
+              <a:rPr lang="en-US" sz="1400" dirty="0">
+                <a:latin typeface="Courier New" panose="02070309020205020404" pitchFamily="49" charset="0"/>
+                <a:cs typeface="Courier New" panose="02070309020205020404" pitchFamily="49" charset="0"/>
+              </a:rPr>
+              <a:t>  },</a:t>
+            </a:r>
+          </a:p>
+          <a:p>
+            <a:r>
+              <a:rPr lang="en-US" sz="1400" dirty="0">
+                <a:latin typeface="Courier New" panose="02070309020205020404" pitchFamily="49" charset="0"/>
+                <a:cs typeface="Courier New" panose="02070309020205020404" pitchFamily="49" charset="0"/>
+              </a:rPr>
+              <a:t>  {</a:t>
+            </a:r>
+          </a:p>
+          <a:p>
+            <a:r>
+              <a:rPr lang="en-US" sz="1400" dirty="0">
+                <a:latin typeface="Courier New" panose="02070309020205020404" pitchFamily="49" charset="0"/>
+                <a:cs typeface="Courier New" panose="02070309020205020404" pitchFamily="49" charset="0"/>
+              </a:rPr>
+              <a:t>    "Name": "Trolley2"</a:t>
+            </a:r>
+          </a:p>
+          <a:p>
+            <a:r>
+              <a:rPr lang="en-US" sz="1400" dirty="0">
+                <a:latin typeface="Courier New" panose="02070309020205020404" pitchFamily="49" charset="0"/>
+                <a:cs typeface="Courier New" panose="02070309020205020404" pitchFamily="49" charset="0"/>
+              </a:rPr>
+              <a:t>  },</a:t>
+            </a:r>
+          </a:p>
+          <a:p>
+            <a:r>
+              <a:rPr lang="en-US" sz="1400" dirty="0">
+                <a:latin typeface="Courier New" panose="02070309020205020404" pitchFamily="49" charset="0"/>
+                <a:cs typeface="Courier New" panose="02070309020205020404" pitchFamily="49" charset="0"/>
+              </a:rPr>
+              <a:t>  {</a:t>
+            </a:r>
+          </a:p>
+          <a:p>
+            <a:r>
+              <a:rPr lang="en-US" sz="1400" dirty="0">
+                <a:latin typeface="Courier New" panose="02070309020205020404" pitchFamily="49" charset="0"/>
+                <a:cs typeface="Courier New" panose="02070309020205020404" pitchFamily="49" charset="0"/>
+              </a:rPr>
+              <a:t>    "Name": "</a:t>
+            </a:r>
+            <a:r>
+              <a:rPr lang="en-US" sz="1400" dirty="0" err="1">
+                <a:latin typeface="Courier New" panose="02070309020205020404" pitchFamily="49" charset="0"/>
+                <a:cs typeface="Courier New" panose="02070309020205020404" pitchFamily="49" charset="0"/>
+              </a:rPr>
+              <a:t>PickingStation</a:t>
+            </a:r>
+            <a:r>
+              <a:rPr lang="en-US" sz="1400" dirty="0">
+                <a:latin typeface="Courier New" panose="02070309020205020404" pitchFamily="49" charset="0"/>
+                <a:cs typeface="Courier New" panose="02070309020205020404" pitchFamily="49" charset="0"/>
+              </a:rPr>
+              <a:t>"</a:t>
+            </a:r>
+          </a:p>
+          <a:p>
+            <a:r>
+              <a:rPr lang="en-US" sz="1400" dirty="0">
+                <a:latin typeface="Courier New" panose="02070309020205020404" pitchFamily="49" charset="0"/>
+                <a:cs typeface="Courier New" panose="02070309020205020404" pitchFamily="49" charset="0"/>
+              </a:rPr>
+              <a:t>  }]</a:t>
+            </a:r>
+          </a:p>
+          <a:p>
+            <a:r>
+              <a:rPr lang="en-US" sz="1400" dirty="0">
+                <a:latin typeface="Courier New" panose="02070309020205020404" pitchFamily="49" charset="0"/>
+                <a:cs typeface="Courier New" panose="02070309020205020404" pitchFamily="49" charset="0"/>
+              </a:rPr>
+              <a:t>}</a:t>
+            </a:r>
+          </a:p>
+        </p:txBody>
+      </p:sp>
+    </p:spTree>
+    <p:extLst>
+      <p:ext uri="{BB962C8B-B14F-4D97-AF65-F5344CB8AC3E}">
+        <p14:creationId xmlns:p14="http://schemas.microsoft.com/office/powerpoint/2010/main" val="2364448971"/>
+      </p:ext>
+    </p:extLst>
+  </p:cSld>
+  <p:clrMapOvr>
+    <a:masterClrMapping/>
+  </p:clrMapOvr>
+</p:sld>
+</file>
+
+<file path=ppt/slides/slide7.xml><?xml version="1.0" encoding="utf-8"?>
+<p:sld xmlns:a="http://schemas.openxmlformats.org/drawingml/2006/main" xmlns:r="http://schemas.openxmlformats.org/officeDocument/2006/relationships" xmlns:p="http://schemas.openxmlformats.org/presentationml/2006/main">
+  <p:cSld>
+    <p:spTree>
+      <p:nvGrpSpPr>
+        <p:cNvPr id="1" name=""/>
+        <p:cNvGrpSpPr/>
+        <p:nvPr/>
+      </p:nvGrpSpPr>
+      <p:grpSpPr>
+        <a:xfrm>
+          <a:off x="0" y="0"/>
+          <a:ext cx="0" cy="0"/>
+          <a:chOff x="0" y="0"/>
+          <a:chExt cx="0" cy="0"/>
+        </a:xfrm>
+      </p:grpSpPr>
+      <p:sp>
+        <p:nvSpPr>
+          <p:cNvPr id="2" name="Title 1">
+            <a:extLst>
+              <a:ext uri="{FF2B5EF4-FFF2-40B4-BE49-F238E27FC236}">
+                <a16:creationId xmlns:a16="http://schemas.microsoft.com/office/drawing/2014/main" id="{79091DDF-5F8E-30C5-91C2-873531F01582}"/>
+              </a:ext>
+            </a:extLst>
+          </p:cNvPr>
+          <p:cNvSpPr>
+            <a:spLocks noGrp="1"/>
+          </p:cNvSpPr>
+          <p:nvPr>
+            <p:ph type="title"/>
+          </p:nvPr>
+        </p:nvSpPr>
+        <p:spPr/>
+        <p:txBody>
+          <a:bodyPr/>
+          <a:lstStyle/>
+          <a:p>
+            <a:r>
+              <a:rPr lang="en-US" dirty="0"/>
+              <a:t>Simplifications</a:t>
+            </a:r>
+          </a:p>
+        </p:txBody>
+      </p:sp>
+      <p:sp>
+        <p:nvSpPr>
+          <p:cNvPr id="4" name="Content Placeholder 3">
+            <a:extLst>
+              <a:ext uri="{FF2B5EF4-FFF2-40B4-BE49-F238E27FC236}">
+                <a16:creationId xmlns:a16="http://schemas.microsoft.com/office/drawing/2014/main" id="{E3D2D054-8D5E-BDF9-CD5B-68A728974738}"/>
+              </a:ext>
+            </a:extLst>
+          </p:cNvPr>
+          <p:cNvSpPr>
+            <a:spLocks noGrp="1"/>
+          </p:cNvSpPr>
+          <p:nvPr>
+            <p:ph idx="1"/>
+          </p:nvPr>
+        </p:nvSpPr>
+        <p:spPr/>
+        <p:txBody>
+          <a:bodyPr/>
+          <a:lstStyle/>
+          <a:p>
+            <a:r>
+              <a:rPr lang="en-US" dirty="0"/>
+              <a:t>From now on, we don't show the </a:t>
+            </a:r>
+            <a:r>
+              <a:rPr lang="en-US" dirty="0" err="1"/>
+              <a:t>LogTower</a:t>
+            </a:r>
+            <a:r>
+              <a:rPr lang="en-US" dirty="0"/>
+              <a:t> configuration	.</a:t>
+            </a:r>
+          </a:p>
+          <a:p>
+            <a:pPr lvl="1"/>
+            <a:r>
+              <a:rPr lang="en-US" dirty="0"/>
+              <a:t>This is the same for every party (if we want to target the same </a:t>
+            </a:r>
+            <a:r>
+              <a:rPr lang="en-US" dirty="0" err="1"/>
+              <a:t>LogTower</a:t>
+            </a:r>
+            <a:r>
+              <a:rPr lang="en-US" dirty="0"/>
+              <a:t>).</a:t>
+            </a:r>
+          </a:p>
+          <a:p>
+            <a:r>
+              <a:rPr lang="en-US" dirty="0"/>
+              <a:t>We also don’t specify the “</a:t>
+            </a:r>
+            <a:r>
+              <a:rPr lang="en-US" dirty="0" err="1"/>
+              <a:t>EnvironmentName</a:t>
+            </a:r>
+            <a:r>
+              <a:rPr lang="en-US" dirty="0"/>
+              <a:t>” anymore.</a:t>
+            </a:r>
+          </a:p>
+          <a:p>
+            <a:pPr lvl="1"/>
+            <a:r>
+              <a:rPr lang="en-US" dirty="0"/>
+              <a:t>This defaults to the </a:t>
+            </a:r>
+            <a:r>
+              <a:rPr lang="en-US" dirty="0" err="1"/>
+              <a:t>IHostEnvironment.EnvironmentName</a:t>
+            </a:r>
+            <a:r>
+              <a:rPr lang="en-US" dirty="0"/>
+              <a:t> (that defaults to “Development”)</a:t>
+            </a:r>
+          </a:p>
+          <a:p>
+            <a:r>
+              <a:rPr lang="en-US" dirty="0"/>
+              <a:t>Domain and Environment names configuration </a:t>
+            </a:r>
+            <a:r>
+              <a:rPr lang="en-US" b="1" dirty="0"/>
+              <a:t>inherit</a:t>
+            </a:r>
+            <a:r>
+              <a:rPr lang="en-US" dirty="0"/>
+              <a:t> from the root to the Remotes.</a:t>
+            </a:r>
+          </a:p>
+          <a:p>
+            <a:pPr lvl="1"/>
+            <a:r>
+              <a:rPr lang="en-US" dirty="0"/>
+              <a:t>Inheriting is the default behavior.</a:t>
+            </a:r>
+          </a:p>
+          <a:p>
+            <a:pPr lvl="1"/>
+            <a:r>
+              <a:rPr lang="en-US" dirty="0"/>
+              <a:t>Overriding the Domain and Environment names is possible: a Remote can be in another Domain and another Environment.</a:t>
+            </a:r>
+          </a:p>
+          <a:p>
+            <a:pPr lvl="1"/>
+            <a:endParaRPr lang="en-US" dirty="0"/>
+          </a:p>
+        </p:txBody>
+      </p:sp>
+    </p:spTree>
+    <p:extLst>
+      <p:ext uri="{BB962C8B-B14F-4D97-AF65-F5344CB8AC3E}">
+        <p14:creationId xmlns:p14="http://schemas.microsoft.com/office/powerpoint/2010/main" val="1593018575"/>
+      </p:ext>
+    </p:extLst>
+  </p:cSld>
+  <p:clrMapOvr>
+    <a:masterClrMapping/>
+  </p:clrMapOvr>
+</p:sld>
+</file>
+
+<file path=ppt/slides/slide8.xml><?xml version="1.0" encoding="utf-8"?>
+<p:sld xmlns:a="http://schemas.openxmlformats.org/drawingml/2006/main" xmlns:r="http://schemas.openxmlformats.org/officeDocument/2006/relationships" xmlns:p="http://schemas.openxmlformats.org/presentationml/2006/main">
+  <p:cSld>
+    <p:spTree>
+      <p:nvGrpSpPr>
+        <p:cNvPr id="1" name=""/>
+        <p:cNvGrpSpPr/>
+        <p:nvPr/>
+      </p:nvGrpSpPr>
+      <p:grpSpPr>
+        <a:xfrm>
+          <a:off x="0" y="0"/>
+          <a:ext cx="0" cy="0"/>
+          <a:chOff x="0" y="0"/>
+          <a:chExt cx="0" cy="0"/>
+        </a:xfrm>
+      </p:grpSpPr>
+      <p:sp>
+        <p:nvSpPr>
+          <p:cNvPr id="2" name="Title 1">
+            <a:extLst>
+              <a:ext uri="{FF2B5EF4-FFF2-40B4-BE49-F238E27FC236}">
+                <a16:creationId xmlns:a16="http://schemas.microsoft.com/office/drawing/2014/main" id="{79091DDF-5F8E-30C5-91C2-873531F01582}"/>
+              </a:ext>
+            </a:extLst>
+          </p:cNvPr>
+          <p:cNvSpPr>
+            <a:spLocks noGrp="1"/>
+          </p:cNvSpPr>
+          <p:nvPr>
+            <p:ph type="title"/>
+          </p:nvPr>
+        </p:nvSpPr>
+        <p:spPr/>
+        <p:txBody>
+          <a:bodyPr/>
+          <a:lstStyle/>
+          <a:p>
+            <a:r>
+              <a:rPr lang="en-US" dirty="0"/>
+              <a:t>What we have so far: a warehouse.</a:t>
+            </a:r>
+          </a:p>
+        </p:txBody>
+      </p:sp>
+      <p:pic>
+        <p:nvPicPr>
+          <p:cNvPr id="5" name="Content Placeholder 4" descr="Computer outline">
+            <a:extLst>
+              <a:ext uri="{FF2B5EF4-FFF2-40B4-BE49-F238E27FC236}">
+                <a16:creationId xmlns:a16="http://schemas.microsoft.com/office/drawing/2014/main" id="{1F205C4E-1A30-7CEB-C70F-7863D2DBCF21}"/>
+              </a:ext>
+            </a:extLst>
+          </p:cNvPr>
+          <p:cNvPicPr>
+            <a:picLocks noGrp="1" noChangeAspect="1"/>
+          </p:cNvPicPr>
+          <p:nvPr>
+            <p:ph idx="1"/>
+          </p:nvPr>
+        </p:nvPicPr>
+        <p:blipFill>
+          <a:blip r:embed="rId2">
+            <a:extLst>
+              <a:ext uri="{28A0092B-C50C-407E-A947-70E740481C1C}">
+                <a14:useLocalDpi xmlns:a14="http://schemas.microsoft.com/office/drawing/2010/main" val="0"/>
+              </a:ext>
+              <a:ext uri="{96DAC541-7B7A-43D3-8B79-37D633B846F1}">
+                <asvg:svgBlip xmlns:asvg="http://schemas.microsoft.com/office/drawing/2016/SVG/main" r:embed="rId3"/>
+              </a:ext>
+            </a:extLst>
+          </a:blip>
+          <a:stretch>
+            <a:fillRect/>
+          </a:stretch>
+        </p:blipFill>
+        <p:spPr>
+          <a:xfrm>
+            <a:off x="7195226" y="1765570"/>
+            <a:ext cx="914400" cy="914400"/>
+          </a:xfrm>
+        </p:spPr>
+      </p:pic>
+      <p:pic>
+        <p:nvPicPr>
+          <p:cNvPr id="7" name="Graphic 6" descr="Scale outline">
+            <a:extLst>
+              <a:ext uri="{FF2B5EF4-FFF2-40B4-BE49-F238E27FC236}">
+                <a16:creationId xmlns:a16="http://schemas.microsoft.com/office/drawing/2014/main" id="{1926719C-988C-88D9-70C0-87A09285D96F}"/>
+              </a:ext>
+            </a:extLst>
+          </p:cNvPr>
+          <p:cNvPicPr>
+            <a:picLocks noChangeAspect="1"/>
+          </p:cNvPicPr>
+          <p:nvPr/>
+        </p:nvPicPr>
+        <p:blipFill>
+          <a:blip r:embed="rId4">
+            <a:extLst>
+              <a:ext uri="{28A0092B-C50C-407E-A947-70E740481C1C}">
+                <a14:useLocalDpi xmlns:a14="http://schemas.microsoft.com/office/drawing/2010/main" val="0"/>
+              </a:ext>
+              <a:ext uri="{96DAC541-7B7A-43D3-8B79-37D633B846F1}">
+                <asvg:svgBlip xmlns:asvg="http://schemas.microsoft.com/office/drawing/2016/SVG/main" r:embed="rId5"/>
+              </a:ext>
+            </a:extLst>
+          </a:blip>
+          <a:stretch>
+            <a:fillRect/>
+          </a:stretch>
+        </p:blipFill>
+        <p:spPr>
+          <a:xfrm>
+            <a:off x="10264302" y="4927059"/>
+            <a:ext cx="914400" cy="914400"/>
+          </a:xfrm>
+          <a:prstGeom prst="rect">
+            <a:avLst/>
+          </a:prstGeom>
+        </p:spPr>
+      </p:pic>
+      <p:pic>
+        <p:nvPicPr>
+          <p:cNvPr id="9" name="Graphic 8" descr="Box trolley with solid fill">
+            <a:extLst>
+              <a:ext uri="{FF2B5EF4-FFF2-40B4-BE49-F238E27FC236}">
+                <a16:creationId xmlns:a16="http://schemas.microsoft.com/office/drawing/2014/main" id="{EB137CF6-1985-8779-1B20-CD73FFAC2456}"/>
+              </a:ext>
+            </a:extLst>
+          </p:cNvPr>
+          <p:cNvPicPr>
+            <a:picLocks noChangeAspect="1"/>
+          </p:cNvPicPr>
+          <p:nvPr/>
+        </p:nvPicPr>
+        <p:blipFill>
+          <a:blip r:embed="rId6">
+            <a:extLst>
+              <a:ext uri="{28A0092B-C50C-407E-A947-70E740481C1C}">
+                <a14:useLocalDpi xmlns:a14="http://schemas.microsoft.com/office/drawing/2010/main" val="0"/>
+              </a:ext>
+              <a:ext uri="{96DAC541-7B7A-43D3-8B79-37D633B846F1}">
+                <asvg:svgBlip xmlns:asvg="http://schemas.microsoft.com/office/drawing/2016/SVG/main" r:embed="rId7"/>
+              </a:ext>
+            </a:extLst>
+          </a:blip>
+          <a:stretch>
+            <a:fillRect/>
+          </a:stretch>
+        </p:blipFill>
+        <p:spPr>
+          <a:xfrm>
+            <a:off x="9597957" y="1895991"/>
+            <a:ext cx="914400" cy="914400"/>
+          </a:xfrm>
+          <a:prstGeom prst="rect">
+            <a:avLst/>
+          </a:prstGeom>
+        </p:spPr>
+      </p:pic>
+      <p:pic>
+        <p:nvPicPr>
+          <p:cNvPr id="10" name="Content Placeholder 4" descr="Computer outline">
+            <a:extLst>
+              <a:ext uri="{FF2B5EF4-FFF2-40B4-BE49-F238E27FC236}">
+                <a16:creationId xmlns:a16="http://schemas.microsoft.com/office/drawing/2014/main" id="{85596109-C7DB-6ED7-C24B-E95039416058}"/>
+              </a:ext>
+            </a:extLst>
+          </p:cNvPr>
+          <p:cNvPicPr>
+            <a:picLocks noChangeAspect="1"/>
+          </p:cNvPicPr>
+          <p:nvPr/>
+        </p:nvPicPr>
+        <p:blipFill>
+          <a:blip r:embed="rId2">
+            <a:extLst>
+              <a:ext uri="{28A0092B-C50C-407E-A947-70E740481C1C}">
+                <a14:useLocalDpi xmlns:a14="http://schemas.microsoft.com/office/drawing/2010/main" val="0"/>
+              </a:ext>
+              <a:ext uri="{96DAC541-7B7A-43D3-8B79-37D633B846F1}">
+                <asvg:svgBlip xmlns:asvg="http://schemas.microsoft.com/office/drawing/2016/SVG/main" r:embed="rId3"/>
+              </a:ext>
+            </a:extLst>
+          </a:blip>
+          <a:stretch>
+            <a:fillRect/>
+          </a:stretch>
+        </p:blipFill>
+        <p:spPr>
+          <a:xfrm>
+            <a:off x="9140757" y="4227671"/>
+            <a:ext cx="914400" cy="914400"/>
+          </a:xfrm>
+          <a:prstGeom prst="rect">
+            <a:avLst/>
+          </a:prstGeom>
+        </p:spPr>
+      </p:pic>
+      <p:pic>
+        <p:nvPicPr>
+          <p:cNvPr id="12" name="Graphic 11" descr="Books on shelf outline">
+            <a:extLst>
+              <a:ext uri="{FF2B5EF4-FFF2-40B4-BE49-F238E27FC236}">
+                <a16:creationId xmlns:a16="http://schemas.microsoft.com/office/drawing/2014/main" id="{DDC40D12-A2D5-AA8B-052F-8F1043AD1907}"/>
+              </a:ext>
+            </a:extLst>
+          </p:cNvPr>
+          <p:cNvPicPr>
+            <a:picLocks noChangeAspect="1"/>
+          </p:cNvPicPr>
+          <p:nvPr/>
+        </p:nvPicPr>
+        <p:blipFill>
+          <a:blip r:embed="rId8">
+            <a:extLst>
+              <a:ext uri="{28A0092B-C50C-407E-A947-70E740481C1C}">
+                <a14:useLocalDpi xmlns:a14="http://schemas.microsoft.com/office/drawing/2010/main" val="0"/>
+              </a:ext>
+              <a:ext uri="{96DAC541-7B7A-43D3-8B79-37D633B846F1}">
+                <asvg:svgBlip xmlns:asvg="http://schemas.microsoft.com/office/drawing/2016/SVG/main" r:embed="rId9"/>
+              </a:ext>
+            </a:extLst>
+          </a:blip>
+          <a:stretch>
+            <a:fillRect/>
+          </a:stretch>
+        </p:blipFill>
+        <p:spPr>
+          <a:xfrm>
+            <a:off x="10264302" y="4227671"/>
+            <a:ext cx="914400" cy="914400"/>
+          </a:xfrm>
+          <a:prstGeom prst="rect">
+            <a:avLst/>
+          </a:prstGeom>
+        </p:spPr>
+      </p:pic>
+      <p:pic>
+        <p:nvPicPr>
+          <p:cNvPr id="13" name="Graphic 12" descr="Box trolley with solid fill">
+            <a:extLst>
+              <a:ext uri="{FF2B5EF4-FFF2-40B4-BE49-F238E27FC236}">
+                <a16:creationId xmlns:a16="http://schemas.microsoft.com/office/drawing/2014/main" id="{E6BC6827-E41E-DB85-90B3-9496EFF90B73}"/>
+              </a:ext>
+            </a:extLst>
+          </p:cNvPr>
+          <p:cNvPicPr>
+            <a:picLocks noChangeAspect="1"/>
+          </p:cNvPicPr>
+          <p:nvPr/>
+        </p:nvPicPr>
+        <p:blipFill>
+          <a:blip r:embed="rId6">
+            <a:extLst>
+              <a:ext uri="{28A0092B-C50C-407E-A947-70E740481C1C}">
+                <a14:useLocalDpi xmlns:a14="http://schemas.microsoft.com/office/drawing/2010/main" val="0"/>
+              </a:ext>
+              <a:ext uri="{96DAC541-7B7A-43D3-8B79-37D633B846F1}">
+                <asvg:svgBlip xmlns:asvg="http://schemas.microsoft.com/office/drawing/2016/SVG/main" r:embed="rId7"/>
+              </a:ext>
+            </a:extLst>
+          </a:blip>
+          <a:stretch>
+            <a:fillRect/>
+          </a:stretch>
+        </p:blipFill>
+        <p:spPr>
+          <a:xfrm>
+            <a:off x="8174225" y="3065203"/>
+            <a:ext cx="914400" cy="914400"/>
+          </a:xfrm>
+          <a:prstGeom prst="rect">
+            <a:avLst/>
+          </a:prstGeom>
+        </p:spPr>
+      </p:pic>
+      <p:sp>
+        <p:nvSpPr>
+          <p:cNvPr id="14" name="TextBox 13">
+            <a:extLst>
+              <a:ext uri="{FF2B5EF4-FFF2-40B4-BE49-F238E27FC236}">
+                <a16:creationId xmlns:a16="http://schemas.microsoft.com/office/drawing/2014/main" id="{ADD276AA-5FA8-98EC-0CD5-C2C5D44D7B5D}"/>
+              </a:ext>
+            </a:extLst>
+          </p:cNvPr>
+          <p:cNvSpPr txBox="1"/>
+          <p:nvPr/>
+        </p:nvSpPr>
+        <p:spPr>
+          <a:xfrm>
+            <a:off x="6944540" y="2495304"/>
+            <a:ext cx="1415772" cy="369332"/>
+          </a:xfrm>
+          <a:prstGeom prst="rect">
+            <a:avLst/>
+          </a:prstGeom>
+          <a:noFill/>
+        </p:spPr>
+        <p:txBody>
+          <a:bodyPr wrap="none" rtlCol="0">
+            <a:spAutoFit/>
+          </a:bodyPr>
+          <a:lstStyle/>
+          <a:p>
+            <a:r>
+              <a:rPr lang="en-US" dirty="0" err="1"/>
+              <a:t>SignatureBox</a:t>
+            </a:r>
+            <a:endParaRPr lang="en-US" dirty="0"/>
+          </a:p>
+        </p:txBody>
+      </p:sp>
+      <p:sp>
+        <p:nvSpPr>
+          <p:cNvPr id="15" name="TextBox 14">
+            <a:extLst>
+              <a:ext uri="{FF2B5EF4-FFF2-40B4-BE49-F238E27FC236}">
+                <a16:creationId xmlns:a16="http://schemas.microsoft.com/office/drawing/2014/main" id="{844C1609-847A-56B1-19A8-DEB802EB14FA}"/>
+              </a:ext>
+            </a:extLst>
+          </p:cNvPr>
+          <p:cNvSpPr txBox="1"/>
+          <p:nvPr/>
+        </p:nvSpPr>
+        <p:spPr>
+          <a:xfrm>
+            <a:off x="9682798" y="2646827"/>
+            <a:ext cx="921791" cy="369332"/>
+          </a:xfrm>
+          <a:prstGeom prst="rect">
+            <a:avLst/>
+          </a:prstGeom>
+          <a:noFill/>
+        </p:spPr>
+        <p:txBody>
+          <a:bodyPr wrap="none" rtlCol="0">
+            <a:spAutoFit/>
+          </a:bodyPr>
+          <a:lstStyle/>
+          <a:p>
+            <a:r>
+              <a:rPr lang="en-US" dirty="0"/>
+              <a:t>Trolley1</a:t>
+            </a:r>
+          </a:p>
+        </p:txBody>
+      </p:sp>
+      <p:sp>
+        <p:nvSpPr>
+          <p:cNvPr id="17" name="TextBox 16">
+            <a:extLst>
+              <a:ext uri="{FF2B5EF4-FFF2-40B4-BE49-F238E27FC236}">
+                <a16:creationId xmlns:a16="http://schemas.microsoft.com/office/drawing/2014/main" id="{08D30309-30D1-8CF8-5DBA-C5FF7DF15E2A}"/>
+              </a:ext>
+            </a:extLst>
+          </p:cNvPr>
+          <p:cNvSpPr txBox="1"/>
+          <p:nvPr/>
+        </p:nvSpPr>
+        <p:spPr>
+          <a:xfrm>
+            <a:off x="8257859" y="3815494"/>
+            <a:ext cx="921791" cy="369332"/>
+          </a:xfrm>
+          <a:prstGeom prst="rect">
+            <a:avLst/>
+          </a:prstGeom>
+          <a:noFill/>
+        </p:spPr>
+        <p:txBody>
+          <a:bodyPr wrap="none" rtlCol="0">
+            <a:spAutoFit/>
+          </a:bodyPr>
+          <a:lstStyle/>
+          <a:p>
+            <a:r>
+              <a:rPr lang="en-US" dirty="0"/>
+              <a:t>Trolley2</a:t>
+            </a:r>
+          </a:p>
+        </p:txBody>
+      </p:sp>
+      <p:sp>
+        <p:nvSpPr>
+          <p:cNvPr id="18" name="TextBox 17">
+            <a:extLst>
+              <a:ext uri="{FF2B5EF4-FFF2-40B4-BE49-F238E27FC236}">
+                <a16:creationId xmlns:a16="http://schemas.microsoft.com/office/drawing/2014/main" id="{649DCBB5-73EB-5131-D02A-00CAC9CFBF41}"/>
+              </a:ext>
+            </a:extLst>
+          </p:cNvPr>
+          <p:cNvSpPr txBox="1"/>
+          <p:nvPr/>
+        </p:nvSpPr>
+        <p:spPr>
+          <a:xfrm>
+            <a:off x="8931612" y="4927059"/>
+            <a:ext cx="1503810" cy="369332"/>
+          </a:xfrm>
+          <a:prstGeom prst="rect">
+            <a:avLst/>
+          </a:prstGeom>
+          <a:noFill/>
+        </p:spPr>
+        <p:txBody>
+          <a:bodyPr wrap="none" rtlCol="0">
+            <a:spAutoFit/>
+          </a:bodyPr>
+          <a:lstStyle/>
+          <a:p>
+            <a:r>
+              <a:rPr lang="en-US" dirty="0" err="1"/>
+              <a:t>PickingStation</a:t>
+            </a:r>
+            <a:endParaRPr lang="en-US" dirty="0"/>
+          </a:p>
+        </p:txBody>
+      </p:sp>
+      <p:sp>
+        <p:nvSpPr>
+          <p:cNvPr id="21" name="Speech Bubble: Oval 20">
+            <a:extLst>
+              <a:ext uri="{FF2B5EF4-FFF2-40B4-BE49-F238E27FC236}">
+                <a16:creationId xmlns:a16="http://schemas.microsoft.com/office/drawing/2014/main" id="{6647B478-F3FF-650F-E6CD-207EC080B2C1}"/>
+              </a:ext>
+            </a:extLst>
+          </p:cNvPr>
+          <p:cNvSpPr/>
+          <p:nvPr/>
+        </p:nvSpPr>
+        <p:spPr>
+          <a:xfrm>
+            <a:off x="9285402" y="5686774"/>
+            <a:ext cx="1045112" cy="618009"/>
+          </a:xfrm>
+          <a:custGeom>
+            <a:avLst/>
+            <a:gdLst>
+              <a:gd name="connsiteX0" fmla="*/ 1029603 w 1045112"/>
+              <a:gd name="connsiteY0" fmla="*/ -220543 h 618009"/>
+              <a:gd name="connsiteX1" fmla="*/ 862060 w 1045112"/>
+              <a:gd name="connsiteY1" fmla="*/ 74102 h 618009"/>
+              <a:gd name="connsiteX2" fmla="*/ 762303 w 1045112"/>
+              <a:gd name="connsiteY2" fmla="*/ 583569 h 618009"/>
+              <a:gd name="connsiteX3" fmla="*/ 274109 w 1045112"/>
+              <a:gd name="connsiteY3" fmla="*/ 580851 h 618009"/>
+              <a:gd name="connsiteX4" fmla="*/ 192528 w 1045112"/>
+              <a:gd name="connsiteY4" fmla="*/ 69427 h 618009"/>
+              <a:gd name="connsiteX5" fmla="*/ 688528 w 1045112"/>
+              <a:gd name="connsiteY5" fmla="*/ 16001 h 618009"/>
+              <a:gd name="connsiteX6" fmla="*/ 1029603 w 1045112"/>
+              <a:gd name="connsiteY6" fmla="*/ -220543 h 618009"/>
+            </a:gdLst>
+            <a:ahLst/>
+            <a:cxnLst>
+              <a:cxn ang="0">
+                <a:pos x="connsiteX0" y="connsiteY0"/>
+              </a:cxn>
+              <a:cxn ang="0">
+                <a:pos x="connsiteX1" y="connsiteY1"/>
+              </a:cxn>
+              <a:cxn ang="0">
+                <a:pos x="connsiteX2" y="connsiteY2"/>
+              </a:cxn>
+              <a:cxn ang="0">
+                <a:pos x="connsiteX3" y="connsiteY3"/>
+              </a:cxn>
+              <a:cxn ang="0">
+                <a:pos x="connsiteX4" y="connsiteY4"/>
+              </a:cxn>
+              <a:cxn ang="0">
+                <a:pos x="connsiteX5" y="connsiteY5"/>
+              </a:cxn>
+              <a:cxn ang="0">
+                <a:pos x="connsiteX6" y="connsiteY6"/>
+              </a:cxn>
+            </a:cxnLst>
+            <a:rect l="l" t="t" r="r" b="b"/>
+            <a:pathLst>
+              <a:path w="1045112" h="618009" extrusionOk="0">
+                <a:moveTo>
+                  <a:pt x="1029603" y="-220543"/>
+                </a:moveTo>
+                <a:cubicBezTo>
+                  <a:pt x="991918" y="-88520"/>
+                  <a:pt x="927629" y="-62010"/>
+                  <a:pt x="862060" y="74102"/>
+                </a:cubicBezTo>
+                <a:cubicBezTo>
+                  <a:pt x="1164307" y="220667"/>
+                  <a:pt x="1076787" y="417345"/>
+                  <a:pt x="762303" y="583569"/>
+                </a:cubicBezTo>
+                <a:cubicBezTo>
+                  <a:pt x="598357" y="622480"/>
+                  <a:pt x="420203" y="641476"/>
+                  <a:pt x="274109" y="580851"/>
+                </a:cubicBezTo>
+                <a:cubicBezTo>
+                  <a:pt x="-52977" y="504404"/>
+                  <a:pt x="-109451" y="165270"/>
+                  <a:pt x="192528" y="69427"/>
+                </a:cubicBezTo>
+                <a:cubicBezTo>
+                  <a:pt x="339789" y="-28383"/>
+                  <a:pt x="482241" y="-41515"/>
+                  <a:pt x="688528" y="16001"/>
+                </a:cubicBezTo>
+                <a:cubicBezTo>
+                  <a:pt x="804924" y="-104642"/>
+                  <a:pt x="964015" y="-149111"/>
+                  <a:pt x="1029603" y="-220543"/>
+                </a:cubicBezTo>
+                <a:close/>
+              </a:path>
+            </a:pathLst>
+          </a:custGeom>
+          <a:noFill/>
+          <a:ln>
+            <a:prstDash val="sysDash"/>
+            <a:extLst>
+              <a:ext uri="{C807C97D-BFC1-408E-A445-0C87EB9F89A2}">
+                <ask:lineSketchStyleProps xmlns:ask="http://schemas.microsoft.com/office/drawing/2018/sketchyshapes" sd="1219033472">
+                  <a:prstGeom prst="wedgeEllipseCallout">
+                    <a:avLst>
+                      <a:gd name="adj1" fmla="val 48516"/>
+                      <a:gd name="adj2" fmla="val -85686"/>
+                    </a:avLst>
+                  </a:prstGeom>
+                  <ask:type>
+                    <ask:lineSketchScribble/>
+                  </ask:type>
+                </ask:lineSketchStyleProps>
+              </a:ext>
+            </a:extLst>
+          </a:ln>
+        </p:spPr>
+        <p:style>
+          <a:lnRef idx="2">
+            <a:schemeClr val="accent1">
+              <a:shade val="50000"/>
+            </a:schemeClr>
+          </a:lnRef>
+          <a:fillRef idx="1">
+            <a:schemeClr val="accent1"/>
+          </a:fillRef>
+          <a:effectRef idx="0">
+            <a:schemeClr val="accent1"/>
+          </a:effectRef>
+          <a:fontRef idx="minor">
+            <a:schemeClr val="lt1"/>
+          </a:fontRef>
+        </p:style>
+        <p:txBody>
+          <a:bodyPr rtlCol="0" anchor="ctr"/>
+          <a:lstStyle/>
+          <a:p>
+            <a:pPr algn="ctr"/>
+            <a:r>
+              <a:rPr lang="en-US" sz="1400" dirty="0">
+                <a:solidFill>
+                  <a:schemeClr val="tx1"/>
+                </a:solidFill>
+              </a:rPr>
+              <a:t>Devices</a:t>
+            </a:r>
+          </a:p>
+        </p:txBody>
+      </p:sp>
+      <p:sp>
+        <p:nvSpPr>
+          <p:cNvPr id="23" name="TextBox 22">
+            <a:extLst>
+              <a:ext uri="{FF2B5EF4-FFF2-40B4-BE49-F238E27FC236}">
+                <a16:creationId xmlns:a16="http://schemas.microsoft.com/office/drawing/2014/main" id="{28007A46-8ED0-90FC-9FDE-366CF044CB4E}"/>
+              </a:ext>
+            </a:extLst>
+          </p:cNvPr>
+          <p:cNvSpPr txBox="1"/>
+          <p:nvPr/>
+        </p:nvSpPr>
+        <p:spPr>
+          <a:xfrm>
+            <a:off x="647502" y="1787738"/>
+            <a:ext cx="6094378" cy="3139321"/>
+          </a:xfrm>
+          <a:prstGeom prst="rect">
+            <a:avLst/>
+          </a:prstGeom>
+        </p:spPr>
+        <p:txBody>
+          <a:bodyPr vert="horz" lIns="91440" tIns="45720" rIns="91440" bIns="45720" rtlCol="0">
+            <a:normAutofit fontScale="92500" lnSpcReduction="10000"/>
+          </a:bodyPr>
+          <a:lstStyle>
+            <a:lvl1pPr marL="228600" indent="-228600">
+              <a:lnSpc>
+                <a:spcPct val="90000"/>
+              </a:lnSpc>
+              <a:spcBef>
+                <a:spcPts val="1000"/>
+              </a:spcBef>
+              <a:buFont typeface="Arial" panose="020B0604020202020204" pitchFamily="34" charset="0"/>
+              <a:buChar char="•"/>
+              <a:defRPr sz="2800"/>
+            </a:lvl1pPr>
+            <a:lvl2pPr marL="685800" indent="-228600">
+              <a:lnSpc>
+                <a:spcPct val="90000"/>
+              </a:lnSpc>
+              <a:spcBef>
+                <a:spcPts val="500"/>
+              </a:spcBef>
+              <a:buFont typeface="Arial" panose="020B0604020202020204" pitchFamily="34" charset="0"/>
+              <a:buChar char="•"/>
+              <a:defRPr sz="2400"/>
+            </a:lvl2pPr>
+            <a:lvl3pPr marL="1143000" indent="-228600">
+              <a:lnSpc>
+                <a:spcPct val="90000"/>
+              </a:lnSpc>
+              <a:spcBef>
+                <a:spcPts val="500"/>
+              </a:spcBef>
+              <a:buFont typeface="Arial" panose="020B0604020202020204" pitchFamily="34" charset="0"/>
+              <a:buChar char="•"/>
+              <a:defRPr sz="2000"/>
+            </a:lvl3pPr>
+            <a:lvl4pPr marL="1600200" indent="-228600">
+              <a:lnSpc>
+                <a:spcPct val="90000"/>
+              </a:lnSpc>
+              <a:spcBef>
+                <a:spcPts val="500"/>
+              </a:spcBef>
+              <a:buFont typeface="Arial" panose="020B0604020202020204" pitchFamily="34" charset="0"/>
+              <a:buChar char="•"/>
+            </a:lvl4pPr>
+            <a:lvl5pPr marL="2057400" indent="-228600">
+              <a:lnSpc>
+                <a:spcPct val="90000"/>
+              </a:lnSpc>
+              <a:spcBef>
+                <a:spcPts val="500"/>
+              </a:spcBef>
+              <a:buFont typeface="Arial" panose="020B0604020202020204" pitchFamily="34" charset="0"/>
+              <a:buChar char="•"/>
+            </a:lvl5pPr>
+            <a:lvl6pPr marL="2514600" indent="-228600">
+              <a:lnSpc>
+                <a:spcPct val="90000"/>
+              </a:lnSpc>
+              <a:spcBef>
+                <a:spcPts val="500"/>
+              </a:spcBef>
+              <a:buFont typeface="Arial" panose="020B0604020202020204" pitchFamily="34" charset="0"/>
+              <a:buChar char="•"/>
+            </a:lvl6pPr>
+            <a:lvl7pPr marL="2971800" indent="-228600">
+              <a:lnSpc>
+                <a:spcPct val="90000"/>
+              </a:lnSpc>
+              <a:spcBef>
+                <a:spcPts val="500"/>
+              </a:spcBef>
+              <a:buFont typeface="Arial" panose="020B0604020202020204" pitchFamily="34" charset="0"/>
+              <a:buChar char="•"/>
+            </a:lvl7pPr>
+            <a:lvl8pPr marL="3429000" indent="-228600">
+              <a:lnSpc>
+                <a:spcPct val="90000"/>
+              </a:lnSpc>
+              <a:spcBef>
+                <a:spcPts val="500"/>
+              </a:spcBef>
+              <a:buFont typeface="Arial" panose="020B0604020202020204" pitchFamily="34" charset="0"/>
+              <a:buChar char="•"/>
+            </a:lvl8pPr>
+            <a:lvl9pPr marL="3886200" indent="-228600">
+              <a:lnSpc>
+                <a:spcPct val="90000"/>
+              </a:lnSpc>
+              <a:spcBef>
+                <a:spcPts val="500"/>
+              </a:spcBef>
+              <a:buFont typeface="Arial" panose="020B0604020202020204" pitchFamily="34" charset="0"/>
+              <a:buChar char="•"/>
+            </a:lvl9pPr>
+          </a:lstStyle>
+          <a:p>
+            <a:r>
+              <a:rPr lang="en-US" dirty="0"/>
+              <a:t>Now we want the </a:t>
+            </a:r>
+            <a:r>
+              <a:rPr lang="en-US" dirty="0" err="1"/>
+              <a:t>SignatureBox</a:t>
+            </a:r>
+            <a:r>
+              <a:rPr lang="en-US" dirty="0"/>
+              <a:t> to interact with a </a:t>
+            </a:r>
+            <a:r>
+              <a:rPr lang="en-US" dirty="0" err="1"/>
+              <a:t>OneCS</a:t>
+            </a:r>
+            <a:r>
+              <a:rPr lang="en-US" dirty="0"/>
+              <a:t> application (the supervision and operation portal).</a:t>
+            </a:r>
+          </a:p>
+          <a:p>
+            <a:r>
+              <a:rPr lang="en-US" dirty="0"/>
+              <a:t>The </a:t>
+            </a:r>
+            <a:r>
+              <a:rPr lang="en-US" dirty="0" err="1"/>
+              <a:t>OneCS</a:t>
+            </a:r>
+            <a:r>
+              <a:rPr lang="en-US" dirty="0"/>
+              <a:t> application typically lives in the cloud. </a:t>
+            </a:r>
+          </a:p>
+          <a:p>
+            <a:r>
+              <a:rPr lang="en-US" b="1" dirty="0"/>
+              <a:t>If</a:t>
+            </a:r>
+            <a:r>
+              <a:rPr lang="en-US" dirty="0"/>
+              <a:t> the </a:t>
+            </a:r>
+            <a:r>
+              <a:rPr lang="en-US" dirty="0" err="1"/>
+              <a:t>SignatureBox</a:t>
+            </a:r>
+            <a:r>
+              <a:rPr lang="en-US" dirty="0"/>
+              <a:t> can be reached from the outside, we just need to declare the new </a:t>
+            </a:r>
+            <a:r>
+              <a:rPr lang="en-US" dirty="0" err="1"/>
+              <a:t>OneCS</a:t>
+            </a:r>
+            <a:r>
+              <a:rPr lang="en-US" dirty="0"/>
+              <a:t> remote on the </a:t>
+            </a:r>
+            <a:r>
+              <a:rPr lang="en-US" dirty="0" err="1"/>
+              <a:t>SignatureBox</a:t>
+            </a:r>
+            <a:r>
+              <a:rPr lang="en-US" dirty="0"/>
+              <a:t>.</a:t>
+            </a:r>
+          </a:p>
+          <a:p>
+            <a:pPr marL="0" indent="0">
+              <a:buNone/>
+            </a:pPr>
+            <a:endParaRPr lang="en-US" dirty="0"/>
+          </a:p>
+        </p:txBody>
+      </p:sp>
+    </p:spTree>
+    <p:extLst>
+      <p:ext uri="{BB962C8B-B14F-4D97-AF65-F5344CB8AC3E}">
+        <p14:creationId xmlns:p14="http://schemas.microsoft.com/office/powerpoint/2010/main" val="1551126541"/>
+      </p:ext>
+    </p:extLst>
+  </p:cSld>
+  <p:clrMapOvr>
+    <a:masterClrMapping/>
+  </p:clrMapOvr>
+</p:sld>
+</file>
+
+<file path=ppt/slides/slide9.xml><?xml version="1.0" encoding="utf-8"?>
+<p:sld xmlns:a="http://schemas.openxmlformats.org/drawingml/2006/main" xmlns:r="http://schemas.openxmlformats.org/officeDocument/2006/relationships" xmlns:p="http://schemas.openxmlformats.org/presentationml/2006/main">
+  <p:cSld>
+    <p:spTree>
+      <p:nvGrpSpPr>
+        <p:cNvPr id="1" name=""/>
+        <p:cNvGrpSpPr/>
+        <p:nvPr/>
+      </p:nvGrpSpPr>
+      <p:grpSpPr>
+        <a:xfrm>
+          <a:off x="0" y="0"/>
+          <a:ext cx="0" cy="0"/>
+          <a:chOff x="0" y="0"/>
+          <a:chExt cx="0" cy="0"/>
+        </a:xfrm>
+      </p:grpSpPr>
+      <p:sp>
+        <p:nvSpPr>
+          <p:cNvPr id="2" name="Title 1">
+            <a:extLst>
+              <a:ext uri="{FF2B5EF4-FFF2-40B4-BE49-F238E27FC236}">
+                <a16:creationId xmlns:a16="http://schemas.microsoft.com/office/drawing/2014/main" id="{5A4CA690-E7B9-FB17-D3F9-CD95B93175F5}"/>
+              </a:ext>
+            </a:extLst>
+          </p:cNvPr>
+          <p:cNvSpPr>
+            <a:spLocks noGrp="1"/>
+          </p:cNvSpPr>
+          <p:nvPr>
+            <p:ph type="title"/>
+          </p:nvPr>
+        </p:nvSpPr>
+        <p:spPr/>
+        <p:txBody>
+          <a:bodyPr/>
+          <a:lstStyle/>
+          <a:p>
+            <a:r>
+              <a:rPr lang="en-US" dirty="0" err="1"/>
+              <a:t>OneCS</a:t>
+            </a:r>
+            <a:r>
+              <a:rPr lang="en-US" dirty="0"/>
+              <a:t> (can reach the </a:t>
+            </a:r>
+            <a:r>
+              <a:rPr lang="en-US" dirty="0" err="1"/>
+              <a:t>SignatureBox</a:t>
+            </a:r>
+            <a:r>
+              <a:rPr lang="en-US" dirty="0"/>
+              <a:t>).</a:t>
+            </a:r>
+          </a:p>
+        </p:txBody>
+      </p:sp>
+      <p:sp>
+        <p:nvSpPr>
+          <p:cNvPr id="3" name="Content Placeholder 2">
+            <a:extLst>
+              <a:ext uri="{FF2B5EF4-FFF2-40B4-BE49-F238E27FC236}">
+                <a16:creationId xmlns:a16="http://schemas.microsoft.com/office/drawing/2014/main" id="{93E00EFF-DD86-3588-5686-FCEFF2B8B8B2}"/>
+              </a:ext>
+            </a:extLst>
+          </p:cNvPr>
+          <p:cNvSpPr>
+            <a:spLocks noGrp="1"/>
+          </p:cNvSpPr>
+          <p:nvPr>
+            <p:ph idx="1"/>
+          </p:nvPr>
+        </p:nvSpPr>
+        <p:spPr>
+          <a:xfrm>
+            <a:off x="838200" y="1690688"/>
+            <a:ext cx="6033940" cy="1143818"/>
+          </a:xfrm>
+        </p:spPr>
+        <p:txBody>
+          <a:bodyPr vert="horz" lIns="91440" tIns="45720" rIns="91440" bIns="45720" rtlCol="0">
+            <a:normAutofit fontScale="92500" lnSpcReduction="10000"/>
+          </a:bodyPr>
+          <a:lstStyle/>
+          <a:p>
+            <a:r>
+              <a:rPr lang="en-US" dirty="0"/>
+              <a:t>The name of this new Party is the same as the </a:t>
+            </a:r>
+            <a:r>
+              <a:rPr lang="en-US" dirty="0" err="1"/>
+              <a:t>DomainName</a:t>
+            </a:r>
+            <a:r>
+              <a:rPr lang="en-US" dirty="0"/>
+              <a:t>: this Party is the "domain controller"</a:t>
+            </a:r>
+          </a:p>
+        </p:txBody>
+      </p:sp>
+      <p:sp>
+        <p:nvSpPr>
+          <p:cNvPr id="4" name="TextBox 3">
+            <a:extLst>
+              <a:ext uri="{FF2B5EF4-FFF2-40B4-BE49-F238E27FC236}">
+                <a16:creationId xmlns:a16="http://schemas.microsoft.com/office/drawing/2014/main" id="{1BEF56BE-36E9-9C16-0573-8234C8D9F689}"/>
+              </a:ext>
+            </a:extLst>
+          </p:cNvPr>
+          <p:cNvSpPr txBox="1"/>
+          <p:nvPr/>
+        </p:nvSpPr>
+        <p:spPr>
+          <a:xfrm>
+            <a:off x="7628106" y="1833428"/>
+            <a:ext cx="4414887" cy="4185761"/>
+          </a:xfrm>
+          <a:prstGeom prst="rect">
+            <a:avLst/>
+          </a:prstGeom>
+          <a:noFill/>
+        </p:spPr>
+        <p:txBody>
+          <a:bodyPr wrap="square" rtlCol="0">
+            <a:spAutoFit/>
+          </a:bodyPr>
+          <a:lstStyle/>
+          <a:p>
+            <a:r>
+              <a:rPr lang="en-US" sz="1400" dirty="0">
+                <a:latin typeface="Courier New" panose="02070309020205020404" pitchFamily="49" charset="0"/>
+                <a:cs typeface="Courier New" panose="02070309020205020404" pitchFamily="49" charset="0"/>
+              </a:rPr>
+              <a:t>{</a:t>
+            </a:r>
+          </a:p>
+          <a:p>
+            <a:r>
+              <a:rPr lang="en-US" sz="1400" dirty="0">
+                <a:latin typeface="Courier New" panose="02070309020205020404" pitchFamily="49" charset="0"/>
+                <a:cs typeface="Courier New" panose="02070309020205020404" pitchFamily="49" charset="0"/>
+              </a:rPr>
+              <a:t>  "</a:t>
+            </a:r>
+            <a:r>
+              <a:rPr lang="en-US" sz="1400" dirty="0" err="1">
+                <a:latin typeface="Courier New" panose="02070309020205020404" pitchFamily="49" charset="0"/>
+                <a:cs typeface="Courier New" panose="02070309020205020404" pitchFamily="49" charset="0"/>
+              </a:rPr>
+              <a:t>DomainName</a:t>
+            </a:r>
+            <a:r>
+              <a:rPr lang="en-US" sz="1400" dirty="0">
+                <a:latin typeface="Courier New" panose="02070309020205020404" pitchFamily="49" charset="0"/>
+                <a:cs typeface="Courier New" panose="02070309020205020404" pitchFamily="49" charset="0"/>
+              </a:rPr>
+              <a:t>": "</a:t>
+            </a:r>
+            <a:r>
+              <a:rPr lang="en-US" sz="1400" dirty="0" err="1">
+                <a:latin typeface="Courier New" panose="02070309020205020404" pitchFamily="49" charset="0"/>
+                <a:cs typeface="Courier New" panose="02070309020205020404" pitchFamily="49" charset="0"/>
+              </a:rPr>
+              <a:t>LaToulousaine</a:t>
+            </a:r>
+            <a:r>
+              <a:rPr lang="en-US" sz="1400" dirty="0">
+                <a:latin typeface="Courier New" panose="02070309020205020404" pitchFamily="49" charset="0"/>
+                <a:cs typeface="Courier New" panose="02070309020205020404" pitchFamily="49" charset="0"/>
+              </a:rPr>
+              <a:t>",</a:t>
+            </a:r>
+          </a:p>
+          <a:p>
+            <a:r>
+              <a:rPr lang="en-US" sz="1400" dirty="0">
+                <a:latin typeface="Courier New" panose="02070309020205020404" pitchFamily="49" charset="0"/>
+                <a:cs typeface="Courier New" panose="02070309020205020404" pitchFamily="49" charset="0"/>
+              </a:rPr>
+              <a:t>  "Local": {</a:t>
+            </a:r>
+          </a:p>
+          <a:p>
+            <a:r>
+              <a:rPr lang="en-US" sz="1400" dirty="0">
+                <a:latin typeface="Courier New" panose="02070309020205020404" pitchFamily="49" charset="0"/>
+                <a:cs typeface="Courier New" panose="02070309020205020404" pitchFamily="49" charset="0"/>
+              </a:rPr>
+              <a:t>    "Name": "</a:t>
+            </a:r>
+            <a:r>
+              <a:rPr lang="en-US" sz="1400" dirty="0" err="1">
+                <a:latin typeface="Courier New" panose="02070309020205020404" pitchFamily="49" charset="0"/>
+                <a:cs typeface="Courier New" panose="02070309020205020404" pitchFamily="49" charset="0"/>
+              </a:rPr>
+              <a:t>SignatureBox</a:t>
+            </a:r>
+            <a:r>
+              <a:rPr lang="en-US" sz="1400" dirty="0">
+                <a:latin typeface="Courier New" panose="02070309020205020404" pitchFamily="49" charset="0"/>
+                <a:cs typeface="Courier New" panose="02070309020205020404" pitchFamily="49" charset="0"/>
+              </a:rPr>
+              <a:t>"</a:t>
+            </a:r>
+          </a:p>
+          <a:p>
+            <a:r>
+              <a:rPr lang="en-US" sz="1400" dirty="0">
+                <a:latin typeface="Courier New" panose="02070309020205020404" pitchFamily="49" charset="0"/>
+                <a:cs typeface="Courier New" panose="02070309020205020404" pitchFamily="49" charset="0"/>
+              </a:rPr>
+              <a:t>  },</a:t>
+            </a:r>
+          </a:p>
+          <a:p>
+            <a:r>
+              <a:rPr lang="en-US" sz="1400" dirty="0">
+                <a:latin typeface="Courier New" panose="02070309020205020404" pitchFamily="49" charset="0"/>
+                <a:cs typeface="Courier New" panose="02070309020205020404" pitchFamily="49" charset="0"/>
+              </a:rPr>
+              <a:t>  "Remotes": [</a:t>
+            </a:r>
+          </a:p>
+          <a:p>
+            <a:r>
+              <a:rPr lang="en-US" sz="1400" dirty="0">
+                <a:latin typeface="Courier New" panose="02070309020205020404" pitchFamily="49" charset="0"/>
+                <a:cs typeface="Courier New" panose="02070309020205020404" pitchFamily="49" charset="0"/>
+              </a:rPr>
+              <a:t>  {</a:t>
+            </a:r>
+          </a:p>
+          <a:p>
+            <a:r>
+              <a:rPr lang="en-US" sz="1400" dirty="0">
+                <a:latin typeface="Courier New" panose="02070309020205020404" pitchFamily="49" charset="0"/>
+                <a:cs typeface="Courier New" panose="02070309020205020404" pitchFamily="49" charset="0"/>
+              </a:rPr>
+              <a:t>    "Name": "Trolley1"</a:t>
+            </a:r>
+          </a:p>
+          <a:p>
+            <a:r>
+              <a:rPr lang="en-US" sz="1400" dirty="0">
+                <a:latin typeface="Courier New" panose="02070309020205020404" pitchFamily="49" charset="0"/>
+                <a:cs typeface="Courier New" panose="02070309020205020404" pitchFamily="49" charset="0"/>
+              </a:rPr>
+              <a:t>  },</a:t>
+            </a:r>
+          </a:p>
+          <a:p>
+            <a:r>
+              <a:rPr lang="en-US" sz="1400" dirty="0">
+                <a:latin typeface="Courier New" panose="02070309020205020404" pitchFamily="49" charset="0"/>
+                <a:cs typeface="Courier New" panose="02070309020205020404" pitchFamily="49" charset="0"/>
+              </a:rPr>
+              <a:t>  {</a:t>
+            </a:r>
+          </a:p>
+          <a:p>
+            <a:r>
+              <a:rPr lang="en-US" sz="1400" dirty="0">
+                <a:latin typeface="Courier New" panose="02070309020205020404" pitchFamily="49" charset="0"/>
+                <a:cs typeface="Courier New" panose="02070309020205020404" pitchFamily="49" charset="0"/>
+              </a:rPr>
+              <a:t>    "Name": "Trolley2"</a:t>
+            </a:r>
+          </a:p>
+          <a:p>
+            <a:r>
+              <a:rPr lang="en-US" sz="1400" dirty="0">
+                <a:latin typeface="Courier New" panose="02070309020205020404" pitchFamily="49" charset="0"/>
+                <a:cs typeface="Courier New" panose="02070309020205020404" pitchFamily="49" charset="0"/>
+              </a:rPr>
+              <a:t>  },</a:t>
+            </a:r>
+          </a:p>
+          <a:p>
+            <a:r>
+              <a:rPr lang="en-US" sz="1400" dirty="0">
+                <a:latin typeface="Courier New" panose="02070309020205020404" pitchFamily="49" charset="0"/>
+                <a:cs typeface="Courier New" panose="02070309020205020404" pitchFamily="49" charset="0"/>
+              </a:rPr>
+              <a:t>  {</a:t>
+            </a:r>
+          </a:p>
+          <a:p>
+            <a:r>
+              <a:rPr lang="en-US" sz="1400" dirty="0">
+                <a:latin typeface="Courier New" panose="02070309020205020404" pitchFamily="49" charset="0"/>
+                <a:cs typeface="Courier New" panose="02070309020205020404" pitchFamily="49" charset="0"/>
+              </a:rPr>
+              <a:t>    "Name": "</a:t>
+            </a:r>
+            <a:r>
+              <a:rPr lang="en-US" sz="1400" dirty="0" err="1">
+                <a:latin typeface="Courier New" panose="02070309020205020404" pitchFamily="49" charset="0"/>
+                <a:cs typeface="Courier New" panose="02070309020205020404" pitchFamily="49" charset="0"/>
+              </a:rPr>
+              <a:t>PickingStation</a:t>
+            </a:r>
+            <a:r>
+              <a:rPr lang="en-US" sz="1400" dirty="0">
+                <a:latin typeface="Courier New" panose="02070309020205020404" pitchFamily="49" charset="0"/>
+                <a:cs typeface="Courier New" panose="02070309020205020404" pitchFamily="49" charset="0"/>
+              </a:rPr>
+              <a:t>"</a:t>
+            </a:r>
+          </a:p>
+          <a:p>
+            <a:r>
+              <a:rPr lang="en-US" sz="1400" dirty="0">
+                <a:latin typeface="Courier New" panose="02070309020205020404" pitchFamily="49" charset="0"/>
+                <a:cs typeface="Courier New" panose="02070309020205020404" pitchFamily="49" charset="0"/>
+              </a:rPr>
+              <a:t>  },</a:t>
+            </a:r>
+          </a:p>
+          <a:p>
+            <a:r>
+              <a:rPr lang="en-US" sz="1400" dirty="0">
+                <a:latin typeface="Courier New" panose="02070309020205020404" pitchFamily="49" charset="0"/>
+                <a:cs typeface="Courier New" panose="02070309020205020404" pitchFamily="49" charset="0"/>
+              </a:rPr>
+              <a:t>  {</a:t>
+            </a:r>
+          </a:p>
+          <a:p>
+            <a:r>
+              <a:rPr lang="en-US" sz="1400" dirty="0">
+                <a:latin typeface="Courier New" panose="02070309020205020404" pitchFamily="49" charset="0"/>
+                <a:cs typeface="Courier New" panose="02070309020205020404" pitchFamily="49" charset="0"/>
+              </a:rPr>
+              <a:t>    </a:t>
+            </a:r>
+            <a:r>
+              <a:rPr lang="en-US" sz="1400" b="1" dirty="0">
+                <a:latin typeface="Courier New" panose="02070309020205020404" pitchFamily="49" charset="0"/>
+                <a:cs typeface="Courier New" panose="02070309020205020404" pitchFamily="49" charset="0"/>
+              </a:rPr>
+              <a:t>"Name": "</a:t>
+            </a:r>
+            <a:r>
+              <a:rPr lang="en-US" sz="1400" b="1" dirty="0" err="1">
+                <a:latin typeface="Courier New" panose="02070309020205020404" pitchFamily="49" charset="0"/>
+                <a:cs typeface="Courier New" panose="02070309020205020404" pitchFamily="49" charset="0"/>
+              </a:rPr>
+              <a:t>LaToulousaine</a:t>
+            </a:r>
+            <a:r>
+              <a:rPr lang="en-US" sz="1400" b="1" dirty="0">
+                <a:latin typeface="Courier New" panose="02070309020205020404" pitchFamily="49" charset="0"/>
+                <a:cs typeface="Courier New" panose="02070309020205020404" pitchFamily="49" charset="0"/>
+              </a:rPr>
+              <a:t>"</a:t>
+            </a:r>
+          </a:p>
+          <a:p>
+            <a:r>
+              <a:rPr lang="en-US" sz="1400" dirty="0">
+                <a:latin typeface="Courier New" panose="02070309020205020404" pitchFamily="49" charset="0"/>
+                <a:cs typeface="Courier New" panose="02070309020205020404" pitchFamily="49" charset="0"/>
+              </a:rPr>
+              <a:t>  }]</a:t>
+            </a:r>
+          </a:p>
+          <a:p>
+            <a:r>
+              <a:rPr lang="en-US" sz="1400" dirty="0">
+                <a:latin typeface="Courier New" panose="02070309020205020404" pitchFamily="49" charset="0"/>
+                <a:cs typeface="Courier New" panose="02070309020205020404" pitchFamily="49" charset="0"/>
+              </a:rPr>
+              <a:t>}</a:t>
+            </a:r>
+          </a:p>
+        </p:txBody>
+      </p:sp>
+      <p:sp>
+        <p:nvSpPr>
+          <p:cNvPr id="6" name="TextBox 5">
+            <a:extLst>
+              <a:ext uri="{FF2B5EF4-FFF2-40B4-BE49-F238E27FC236}">
+                <a16:creationId xmlns:a16="http://schemas.microsoft.com/office/drawing/2014/main" id="{F0FAFD25-AA21-5283-15FC-B790EE62F46D}"/>
+              </a:ext>
+            </a:extLst>
+          </p:cNvPr>
+          <p:cNvSpPr txBox="1"/>
+          <p:nvPr/>
+        </p:nvSpPr>
+        <p:spPr>
+          <a:xfrm>
+            <a:off x="838201" y="2949401"/>
+            <a:ext cx="3968479" cy="2462213"/>
+          </a:xfrm>
+          <a:prstGeom prst="rect">
+            <a:avLst/>
+          </a:prstGeom>
+          <a:noFill/>
+        </p:spPr>
+        <p:txBody>
+          <a:bodyPr wrap="square" rtlCol="0">
+            <a:spAutoFit/>
+          </a:bodyPr>
+          <a:lstStyle>
+            <a:defPPr>
+              <a:defRPr lang="en-US"/>
+            </a:defPPr>
+            <a:lvl1pPr>
+              <a:defRPr sz="1400">
+                <a:latin typeface="Courier New" panose="02070309020205020404" pitchFamily="49" charset="0"/>
+                <a:cs typeface="Courier New" panose="02070309020205020404" pitchFamily="49" charset="0"/>
+              </a:defRPr>
+            </a:lvl1pPr>
+          </a:lstStyle>
+          <a:p>
+            <a:r>
+              <a:rPr lang="en-US" dirty="0"/>
+              <a:t>{</a:t>
+            </a:r>
+          </a:p>
+          <a:p>
+            <a:r>
+              <a:rPr lang="en-US" dirty="0"/>
+              <a:t>  "</a:t>
+            </a:r>
+            <a:r>
+              <a:rPr lang="en-US" dirty="0" err="1"/>
+              <a:t>DomainName</a:t>
+            </a:r>
+            <a:r>
+              <a:rPr lang="en-US" dirty="0"/>
+              <a:t>": "</a:t>
+            </a:r>
+            <a:r>
+              <a:rPr lang="en-US" dirty="0" err="1"/>
+              <a:t>LaToulousaine</a:t>
+            </a:r>
+            <a:r>
+              <a:rPr lang="en-US" dirty="0"/>
+              <a:t>",</a:t>
+            </a:r>
+          </a:p>
+          <a:p>
+            <a:r>
+              <a:rPr lang="en-US" dirty="0"/>
+              <a:t>   "Local": {</a:t>
+            </a:r>
+          </a:p>
+          <a:p>
+            <a:r>
+              <a:rPr lang="en-US" dirty="0"/>
+              <a:t>    "Name": "</a:t>
+            </a:r>
+            <a:r>
+              <a:rPr lang="en-US" b="1" dirty="0" err="1"/>
+              <a:t>LaToulousaine</a:t>
+            </a:r>
+            <a:r>
+              <a:rPr lang="en-US" dirty="0"/>
+              <a:t>"</a:t>
+            </a:r>
+          </a:p>
+          <a:p>
+            <a:r>
+              <a:rPr lang="en-US" dirty="0"/>
+              <a:t>  },</a:t>
+            </a:r>
+          </a:p>
+          <a:p>
+            <a:r>
+              <a:rPr lang="en-US" dirty="0"/>
+              <a:t>  "Remotes": [</a:t>
+            </a:r>
+          </a:p>
+          <a:p>
+            <a:r>
+              <a:rPr lang="en-US" dirty="0"/>
+              <a:t>  {</a:t>
+            </a:r>
+          </a:p>
+          <a:p>
+            <a:r>
+              <a:rPr lang="en-US" dirty="0"/>
+              <a:t>    "Name": "</a:t>
+            </a:r>
+            <a:r>
+              <a:rPr lang="en-US" b="1" dirty="0" err="1"/>
+              <a:t>SignatureBox</a:t>
+            </a:r>
+            <a:r>
+              <a:rPr lang="en-US" dirty="0"/>
+              <a:t>",</a:t>
+            </a:r>
+          </a:p>
+          <a:p>
+            <a:r>
+              <a:rPr lang="en-US" dirty="0"/>
+              <a:t>    </a:t>
+            </a:r>
+            <a:r>
+              <a:rPr lang="en-US" b="1" dirty="0"/>
+              <a:t>"Address": "65.12.13.14"</a:t>
+            </a:r>
+          </a:p>
+          <a:p>
+            <a:r>
+              <a:rPr lang="en-US" dirty="0"/>
+              <a:t>  }]</a:t>
+            </a:r>
+          </a:p>
+          <a:p>
+            <a:r>
+              <a:rPr lang="en-US" dirty="0"/>
+              <a:t>}</a:t>
+            </a:r>
+          </a:p>
+        </p:txBody>
+      </p:sp>
+      <p:sp>
+        <p:nvSpPr>
+          <p:cNvPr id="7" name="Arrow: Right 6">
+            <a:extLst>
+              <a:ext uri="{FF2B5EF4-FFF2-40B4-BE49-F238E27FC236}">
+                <a16:creationId xmlns:a16="http://schemas.microsoft.com/office/drawing/2014/main" id="{5E17AC8F-FBF4-B06F-0002-2452720D9DA0}"/>
+              </a:ext>
+            </a:extLst>
+          </p:cNvPr>
+          <p:cNvSpPr/>
+          <p:nvPr/>
+        </p:nvSpPr>
+        <p:spPr>
+          <a:xfrm>
+            <a:off x="4806680" y="4165274"/>
+            <a:ext cx="2821426" cy="474819"/>
+          </a:xfrm>
+          <a:prstGeom prst="rightArrow">
+            <a:avLst/>
+          </a:prstGeom>
+          <a:solidFill>
+            <a:schemeClr val="bg1"/>
+          </a:solidFill>
+        </p:spPr>
+        <p:style>
+          <a:lnRef idx="2">
+            <a:schemeClr val="accent1">
+              <a:shade val="50000"/>
+            </a:schemeClr>
+          </a:lnRef>
+          <a:fillRef idx="1">
+            <a:schemeClr val="accent1"/>
+          </a:fillRef>
+          <a:effectRef idx="0">
+            <a:schemeClr val="accent1"/>
+          </a:effectRef>
+          <a:fontRef idx="minor">
+            <a:schemeClr val="lt1"/>
+          </a:fontRef>
+        </p:style>
+        <p:txBody>
+          <a:bodyPr rtlCol="0" anchor="ctr"/>
+          <a:lstStyle/>
+          <a:p>
+            <a:pPr algn="ctr"/>
+            <a:r>
+              <a:rPr lang="en-US" dirty="0">
+                <a:solidFill>
+                  <a:schemeClr val="tx1"/>
+                </a:solidFill>
+              </a:rPr>
+              <a:t>Initiate</a:t>
+            </a:r>
+          </a:p>
+        </p:txBody>
+      </p:sp>
+      <p:sp>
+        <p:nvSpPr>
+          <p:cNvPr id="9" name="Arrow: Left-Right 8">
+            <a:extLst>
+              <a:ext uri="{FF2B5EF4-FFF2-40B4-BE49-F238E27FC236}">
+                <a16:creationId xmlns:a16="http://schemas.microsoft.com/office/drawing/2014/main" id="{31EAFA31-65C4-FFEF-4B78-407CABE4FBDC}"/>
+              </a:ext>
+            </a:extLst>
+          </p:cNvPr>
+          <p:cNvSpPr/>
+          <p:nvPr/>
+        </p:nvSpPr>
+        <p:spPr>
+          <a:xfrm>
+            <a:off x="4912468" y="4517578"/>
+            <a:ext cx="2485417" cy="474819"/>
+          </a:xfrm>
+          <a:prstGeom prst="leftRightArrow">
+            <a:avLst/>
+          </a:prstGeom>
+          <a:solidFill>
+            <a:schemeClr val="bg1"/>
+          </a:solidFill>
+        </p:spPr>
+        <p:style>
+          <a:lnRef idx="2">
+            <a:schemeClr val="accent1">
+              <a:shade val="50000"/>
+            </a:schemeClr>
+          </a:lnRef>
+          <a:fillRef idx="1">
+            <a:schemeClr val="accent1"/>
+          </a:fillRef>
+          <a:effectRef idx="0">
+            <a:schemeClr val="accent1"/>
+          </a:effectRef>
+          <a:fontRef idx="minor">
+            <a:schemeClr val="lt1"/>
+          </a:fontRef>
+        </p:style>
+        <p:txBody>
+          <a:bodyPr rtlCol="0" anchor="ctr"/>
+          <a:lstStyle/>
+          <a:p>
+            <a:pPr algn="ctr"/>
+            <a:r>
+              <a:rPr lang="en-US" dirty="0">
+                <a:solidFill>
+                  <a:schemeClr val="tx1"/>
+                </a:solidFill>
+              </a:rPr>
+              <a:t>2-ways exchange</a:t>
+            </a:r>
+          </a:p>
+        </p:txBody>
+      </p:sp>
+    </p:spTree>
+    <p:extLst>
+      <p:ext uri="{BB962C8B-B14F-4D97-AF65-F5344CB8AC3E}">
+        <p14:creationId xmlns:p14="http://schemas.microsoft.com/office/powerpoint/2010/main" val="1088372859"/>
       </p:ext>
     </p:extLst>
   </p:cSld>

--- a/Doc/CK-AppIdentity.pptx
+++ b/Doc/CK-AppIdentity.pptx
@@ -4,6 +4,9 @@
   <p:sldMasterIdLst>
     <p:sldMasterId id="2147483648" r:id="rId1"/>
   </p:sldMasterIdLst>
+  <p:notesMasterIdLst>
+    <p:notesMasterId r:id="rId20"/>
+  </p:notesMasterIdLst>
   <p:sldIdLst>
     <p:sldId id="256" r:id="rId2"/>
     <p:sldId id="257" r:id="rId3"/>
@@ -127,6 +130,495 @@
     </p:ext>
   </p:extLst>
 </p:presentation>
+</file>
+
+<file path=ppt/notesMasters/notesMaster1.xml><?xml version="1.0" encoding="utf-8"?>
+<p:notesMaster xmlns:a="http://schemas.openxmlformats.org/drawingml/2006/main" xmlns:r="http://schemas.openxmlformats.org/officeDocument/2006/relationships" xmlns:p="http://schemas.openxmlformats.org/presentationml/2006/main">
+  <p:cSld>
+    <p:bg>
+      <p:bgRef idx="1001">
+        <a:schemeClr val="bg1"/>
+      </p:bgRef>
+    </p:bg>
+    <p:spTree>
+      <p:nvGrpSpPr>
+        <p:cNvPr id="1" name=""/>
+        <p:cNvGrpSpPr/>
+        <p:nvPr/>
+      </p:nvGrpSpPr>
+      <p:grpSpPr>
+        <a:xfrm>
+          <a:off x="0" y="0"/>
+          <a:ext cx="0" cy="0"/>
+          <a:chOff x="0" y="0"/>
+          <a:chExt cx="0" cy="0"/>
+        </a:xfrm>
+      </p:grpSpPr>
+      <p:sp>
+        <p:nvSpPr>
+          <p:cNvPr id="2" name="Header Placeholder 1"/>
+          <p:cNvSpPr>
+            <a:spLocks noGrp="1"/>
+          </p:cNvSpPr>
+          <p:nvPr>
+            <p:ph type="hdr" sz="quarter"/>
+          </p:nvPr>
+        </p:nvSpPr>
+        <p:spPr>
+          <a:xfrm>
+            <a:off x="0" y="0"/>
+            <a:ext cx="2971800" cy="458788"/>
+          </a:xfrm>
+          <a:prstGeom prst="rect">
+            <a:avLst/>
+          </a:prstGeom>
+        </p:spPr>
+        <p:txBody>
+          <a:bodyPr vert="horz" lIns="91440" tIns="45720" rIns="91440" bIns="45720" rtlCol="0"/>
+          <a:lstStyle>
+            <a:lvl1pPr algn="l">
+              <a:defRPr sz="1200"/>
+            </a:lvl1pPr>
+          </a:lstStyle>
+          <a:p>
+            <a:endParaRPr lang="en-US"/>
+          </a:p>
+        </p:txBody>
+      </p:sp>
+      <p:sp>
+        <p:nvSpPr>
+          <p:cNvPr id="3" name="Date Placeholder 2"/>
+          <p:cNvSpPr>
+            <a:spLocks noGrp="1"/>
+          </p:cNvSpPr>
+          <p:nvPr>
+            <p:ph type="dt" idx="1"/>
+          </p:nvPr>
+        </p:nvSpPr>
+        <p:spPr>
+          <a:xfrm>
+            <a:off x="3884613" y="0"/>
+            <a:ext cx="2971800" cy="458788"/>
+          </a:xfrm>
+          <a:prstGeom prst="rect">
+            <a:avLst/>
+          </a:prstGeom>
+        </p:spPr>
+        <p:txBody>
+          <a:bodyPr vert="horz" lIns="91440" tIns="45720" rIns="91440" bIns="45720" rtlCol="0"/>
+          <a:lstStyle>
+            <a:lvl1pPr algn="r">
+              <a:defRPr sz="1200"/>
+            </a:lvl1pPr>
+          </a:lstStyle>
+          <a:p>
+            <a:fld id="{7EBA75D8-A9A5-4FAF-B563-7A079B630A7E}" type="datetimeFigureOut">
+              <a:rPr lang="en-US" smtClean="0"/>
+              <a:t>3/12/2023</a:t>
+            </a:fld>
+            <a:endParaRPr lang="en-US"/>
+          </a:p>
+        </p:txBody>
+      </p:sp>
+      <p:sp>
+        <p:nvSpPr>
+          <p:cNvPr id="4" name="Slide Image Placeholder 3"/>
+          <p:cNvSpPr>
+            <a:spLocks noGrp="1" noRot="1" noChangeAspect="1"/>
+          </p:cNvSpPr>
+          <p:nvPr>
+            <p:ph type="sldImg" idx="2"/>
+          </p:nvPr>
+        </p:nvSpPr>
+        <p:spPr>
+          <a:xfrm>
+            <a:off x="685800" y="1143000"/>
+            <a:ext cx="5486400" cy="3086100"/>
+          </a:xfrm>
+          <a:prstGeom prst="rect">
+            <a:avLst/>
+          </a:prstGeom>
+          <a:noFill/>
+          <a:ln w="12700">
+            <a:solidFill>
+              <a:prstClr val="black"/>
+            </a:solidFill>
+          </a:ln>
+        </p:spPr>
+        <p:txBody>
+          <a:bodyPr vert="horz" lIns="91440" tIns="45720" rIns="91440" bIns="45720" rtlCol="0" anchor="ctr"/>
+          <a:lstStyle/>
+          <a:p>
+            <a:endParaRPr lang="en-US"/>
+          </a:p>
+        </p:txBody>
+      </p:sp>
+      <p:sp>
+        <p:nvSpPr>
+          <p:cNvPr id="5" name="Notes Placeholder 4"/>
+          <p:cNvSpPr>
+            <a:spLocks noGrp="1"/>
+          </p:cNvSpPr>
+          <p:nvPr>
+            <p:ph type="body" sz="quarter" idx="3"/>
+          </p:nvPr>
+        </p:nvSpPr>
+        <p:spPr>
+          <a:xfrm>
+            <a:off x="685800" y="4400550"/>
+            <a:ext cx="5486400" cy="3600450"/>
+          </a:xfrm>
+          <a:prstGeom prst="rect">
+            <a:avLst/>
+          </a:prstGeom>
+        </p:spPr>
+        <p:txBody>
+          <a:bodyPr vert="horz" lIns="91440" tIns="45720" rIns="91440" bIns="45720" rtlCol="0"/>
+          <a:lstStyle/>
+          <a:p>
+            <a:pPr lvl="0"/>
+            <a:r>
+              <a:rPr lang="en-US"/>
+              <a:t>Click to edit Master text styles</a:t>
+            </a:r>
+          </a:p>
+          <a:p>
+            <a:pPr lvl="1"/>
+            <a:r>
+              <a:rPr lang="en-US"/>
+              <a:t>Second level</a:t>
+            </a:r>
+          </a:p>
+          <a:p>
+            <a:pPr lvl="2"/>
+            <a:r>
+              <a:rPr lang="en-US"/>
+              <a:t>Third level</a:t>
+            </a:r>
+          </a:p>
+          <a:p>
+            <a:pPr lvl="3"/>
+            <a:r>
+              <a:rPr lang="en-US"/>
+              <a:t>Fourth level</a:t>
+            </a:r>
+          </a:p>
+          <a:p>
+            <a:pPr lvl="4"/>
+            <a:r>
+              <a:rPr lang="en-US"/>
+              <a:t>Fifth level</a:t>
+            </a:r>
+          </a:p>
+        </p:txBody>
+      </p:sp>
+      <p:sp>
+        <p:nvSpPr>
+          <p:cNvPr id="6" name="Footer Placeholder 5"/>
+          <p:cNvSpPr>
+            <a:spLocks noGrp="1"/>
+          </p:cNvSpPr>
+          <p:nvPr>
+            <p:ph type="ftr" sz="quarter" idx="4"/>
+          </p:nvPr>
+        </p:nvSpPr>
+        <p:spPr>
+          <a:xfrm>
+            <a:off x="0" y="8685213"/>
+            <a:ext cx="2971800" cy="458787"/>
+          </a:xfrm>
+          <a:prstGeom prst="rect">
+            <a:avLst/>
+          </a:prstGeom>
+        </p:spPr>
+        <p:txBody>
+          <a:bodyPr vert="horz" lIns="91440" tIns="45720" rIns="91440" bIns="45720" rtlCol="0" anchor="b"/>
+          <a:lstStyle>
+            <a:lvl1pPr algn="l">
+              <a:defRPr sz="1200"/>
+            </a:lvl1pPr>
+          </a:lstStyle>
+          <a:p>
+            <a:endParaRPr lang="en-US"/>
+          </a:p>
+        </p:txBody>
+      </p:sp>
+      <p:sp>
+        <p:nvSpPr>
+          <p:cNvPr id="7" name="Slide Number Placeholder 6"/>
+          <p:cNvSpPr>
+            <a:spLocks noGrp="1"/>
+          </p:cNvSpPr>
+          <p:nvPr>
+            <p:ph type="sldNum" sz="quarter" idx="5"/>
+          </p:nvPr>
+        </p:nvSpPr>
+        <p:spPr>
+          <a:xfrm>
+            <a:off x="3884613" y="8685213"/>
+            <a:ext cx="2971800" cy="458787"/>
+          </a:xfrm>
+          <a:prstGeom prst="rect">
+            <a:avLst/>
+          </a:prstGeom>
+        </p:spPr>
+        <p:txBody>
+          <a:bodyPr vert="horz" lIns="91440" tIns="45720" rIns="91440" bIns="45720" rtlCol="0" anchor="b"/>
+          <a:lstStyle>
+            <a:lvl1pPr algn="r">
+              <a:defRPr sz="1200"/>
+            </a:lvl1pPr>
+          </a:lstStyle>
+          <a:p>
+            <a:fld id="{E05EDB92-2FE2-4164-AA27-D03258A20DF4}" type="slidenum">
+              <a:rPr lang="en-US" smtClean="0"/>
+              <a:t>‹#›</a:t>
+            </a:fld>
+            <a:endParaRPr lang="en-US"/>
+          </a:p>
+        </p:txBody>
+      </p:sp>
+    </p:spTree>
+    <p:extLst>
+      <p:ext uri="{BB962C8B-B14F-4D97-AF65-F5344CB8AC3E}">
+        <p14:creationId xmlns:p14="http://schemas.microsoft.com/office/powerpoint/2010/main" val="469045227"/>
+      </p:ext>
+    </p:extLst>
+  </p:cSld>
+  <p:clrMap bg1="lt1" tx1="dk1" bg2="lt2" tx2="dk2" accent1="accent1" accent2="accent2" accent3="accent3" accent4="accent4" accent5="accent5" accent6="accent6" hlink="hlink" folHlink="folHlink"/>
+  <p:notesStyle>
+    <a:lvl1pPr marL="0" algn="l" defTabSz="914400" rtl="0" eaLnBrk="1" latinLnBrk="0" hangingPunct="1">
+      <a:defRPr sz="1200" kern="1200">
+        <a:solidFill>
+          <a:schemeClr val="tx1"/>
+        </a:solidFill>
+        <a:latin typeface="+mn-lt"/>
+        <a:ea typeface="+mn-ea"/>
+        <a:cs typeface="+mn-cs"/>
+      </a:defRPr>
+    </a:lvl1pPr>
+    <a:lvl2pPr marL="457200" algn="l" defTabSz="914400" rtl="0" eaLnBrk="1" latinLnBrk="0" hangingPunct="1">
+      <a:defRPr sz="1200" kern="1200">
+        <a:solidFill>
+          <a:schemeClr val="tx1"/>
+        </a:solidFill>
+        <a:latin typeface="+mn-lt"/>
+        <a:ea typeface="+mn-ea"/>
+        <a:cs typeface="+mn-cs"/>
+      </a:defRPr>
+    </a:lvl2pPr>
+    <a:lvl3pPr marL="914400" algn="l" defTabSz="914400" rtl="0" eaLnBrk="1" latinLnBrk="0" hangingPunct="1">
+      <a:defRPr sz="1200" kern="1200">
+        <a:solidFill>
+          <a:schemeClr val="tx1"/>
+        </a:solidFill>
+        <a:latin typeface="+mn-lt"/>
+        <a:ea typeface="+mn-ea"/>
+        <a:cs typeface="+mn-cs"/>
+      </a:defRPr>
+    </a:lvl3pPr>
+    <a:lvl4pPr marL="1371600" algn="l" defTabSz="914400" rtl="0" eaLnBrk="1" latinLnBrk="0" hangingPunct="1">
+      <a:defRPr sz="1200" kern="1200">
+        <a:solidFill>
+          <a:schemeClr val="tx1"/>
+        </a:solidFill>
+        <a:latin typeface="+mn-lt"/>
+        <a:ea typeface="+mn-ea"/>
+        <a:cs typeface="+mn-cs"/>
+      </a:defRPr>
+    </a:lvl4pPr>
+    <a:lvl5pPr marL="1828800" algn="l" defTabSz="914400" rtl="0" eaLnBrk="1" latinLnBrk="0" hangingPunct="1">
+      <a:defRPr sz="1200" kern="1200">
+        <a:solidFill>
+          <a:schemeClr val="tx1"/>
+        </a:solidFill>
+        <a:latin typeface="+mn-lt"/>
+        <a:ea typeface="+mn-ea"/>
+        <a:cs typeface="+mn-cs"/>
+      </a:defRPr>
+    </a:lvl5pPr>
+    <a:lvl6pPr marL="2286000" algn="l" defTabSz="914400" rtl="0" eaLnBrk="1" latinLnBrk="0" hangingPunct="1">
+      <a:defRPr sz="1200" kern="1200">
+        <a:solidFill>
+          <a:schemeClr val="tx1"/>
+        </a:solidFill>
+        <a:latin typeface="+mn-lt"/>
+        <a:ea typeface="+mn-ea"/>
+        <a:cs typeface="+mn-cs"/>
+      </a:defRPr>
+    </a:lvl6pPr>
+    <a:lvl7pPr marL="2743200" algn="l" defTabSz="914400" rtl="0" eaLnBrk="1" latinLnBrk="0" hangingPunct="1">
+      <a:defRPr sz="1200" kern="1200">
+        <a:solidFill>
+          <a:schemeClr val="tx1"/>
+        </a:solidFill>
+        <a:latin typeface="+mn-lt"/>
+        <a:ea typeface="+mn-ea"/>
+        <a:cs typeface="+mn-cs"/>
+      </a:defRPr>
+    </a:lvl7pPr>
+    <a:lvl8pPr marL="3200400" algn="l" defTabSz="914400" rtl="0" eaLnBrk="1" latinLnBrk="0" hangingPunct="1">
+      <a:defRPr sz="1200" kern="1200">
+        <a:solidFill>
+          <a:schemeClr val="tx1"/>
+        </a:solidFill>
+        <a:latin typeface="+mn-lt"/>
+        <a:ea typeface="+mn-ea"/>
+        <a:cs typeface="+mn-cs"/>
+      </a:defRPr>
+    </a:lvl8pPr>
+    <a:lvl9pPr marL="3657600" algn="l" defTabSz="914400" rtl="0" eaLnBrk="1" latinLnBrk="0" hangingPunct="1">
+      <a:defRPr sz="1200" kern="1200">
+        <a:solidFill>
+          <a:schemeClr val="tx1"/>
+        </a:solidFill>
+        <a:latin typeface="+mn-lt"/>
+        <a:ea typeface="+mn-ea"/>
+        <a:cs typeface="+mn-cs"/>
+      </a:defRPr>
+    </a:lvl9pPr>
+  </p:notesStyle>
+</p:notesMaster>
+</file>
+
+<file path=ppt/notesSlides/notesSlide1.xml><?xml version="1.0" encoding="utf-8"?>
+<p:notes xmlns:a="http://schemas.openxmlformats.org/drawingml/2006/main" xmlns:r="http://schemas.openxmlformats.org/officeDocument/2006/relationships" xmlns:p="http://schemas.openxmlformats.org/presentationml/2006/main">
+  <p:cSld>
+    <p:spTree>
+      <p:nvGrpSpPr>
+        <p:cNvPr id="1" name=""/>
+        <p:cNvGrpSpPr/>
+        <p:nvPr/>
+      </p:nvGrpSpPr>
+      <p:grpSpPr>
+        <a:xfrm>
+          <a:off x="0" y="0"/>
+          <a:ext cx="0" cy="0"/>
+          <a:chOff x="0" y="0"/>
+          <a:chExt cx="0" cy="0"/>
+        </a:xfrm>
+      </p:grpSpPr>
+      <p:sp>
+        <p:nvSpPr>
+          <p:cNvPr id="2" name="Slide Image Placeholder 1"/>
+          <p:cNvSpPr>
+            <a:spLocks noGrp="1" noRot="1" noChangeAspect="1"/>
+          </p:cNvSpPr>
+          <p:nvPr>
+            <p:ph type="sldImg"/>
+          </p:nvPr>
+        </p:nvSpPr>
+        <p:spPr/>
+      </p:sp>
+      <p:sp>
+        <p:nvSpPr>
+          <p:cNvPr id="3" name="Notes Placeholder 2"/>
+          <p:cNvSpPr>
+            <a:spLocks noGrp="1"/>
+          </p:cNvSpPr>
+          <p:nvPr>
+            <p:ph type="body" idx="1"/>
+          </p:nvPr>
+        </p:nvSpPr>
+        <p:spPr/>
+        <p:txBody>
+          <a:bodyPr/>
+          <a:lstStyle/>
+          <a:p>
+            <a:pPr marL="0" marR="0" lvl="0" indent="0" algn="l" defTabSz="914400" rtl="0" eaLnBrk="1" fontAlgn="auto" latinLnBrk="0" hangingPunct="1">
+              <a:lnSpc>
+                <a:spcPct val="100000"/>
+              </a:lnSpc>
+              <a:spcBef>
+                <a:spcPts val="0"/>
+              </a:spcBef>
+              <a:spcAft>
+                <a:spcPts val="0"/>
+              </a:spcAft>
+              <a:buClrTx/>
+              <a:buSzTx/>
+              <a:buFontTx/>
+              <a:buNone/>
+              <a:tabLst/>
+              <a:defRPr/>
+            </a:pPr>
+            <a:r>
+              <a:rPr lang="en-US" dirty="0"/>
+              <a:t>We are NOT going to use any relay </a:t>
+            </a:r>
+            <a:r>
+              <a:rPr lang="en-US" b="0" dirty="0"/>
+              <a:t>or </a:t>
+            </a:r>
+            <a:r>
+              <a:rPr lang="en-US" b="0" i="0" dirty="0">
+                <a:solidFill>
+                  <a:srgbClr val="000000"/>
+                </a:solidFill>
+                <a:effectLst/>
+                <a:latin typeface="Times New Roman" panose="02020603050405020304" pitchFamily="18" charset="0"/>
+              </a:rPr>
+              <a:t>hole punching strategies here. We require that A can reach B OR B can reach A directly, if both A and B are behind NAT this doesn’t work and that’s it. </a:t>
+            </a:r>
+            <a:br>
+              <a:rPr lang="en-US" b="0" i="0" dirty="0">
+                <a:solidFill>
+                  <a:srgbClr val="000000"/>
+                </a:solidFill>
+                <a:effectLst/>
+                <a:latin typeface="Times New Roman" panose="02020603050405020304" pitchFamily="18" charset="0"/>
+              </a:rPr>
+            </a:br>
+            <a:r>
+              <a:rPr lang="en-US" b="0" i="0" dirty="0">
+                <a:solidFill>
+                  <a:srgbClr val="000000"/>
+                </a:solidFill>
+                <a:effectLst/>
+                <a:latin typeface="Times New Roman" panose="02020603050405020304" pitchFamily="18" charset="0"/>
+              </a:rPr>
+              <a:t>See https://bford.info/pub/net/p2pnat/index.html for a detailed discussion about NAT traversing.</a:t>
+            </a:r>
+          </a:p>
+          <a:p>
+            <a:endParaRPr lang="en-US" dirty="0"/>
+          </a:p>
+        </p:txBody>
+      </p:sp>
+      <p:sp>
+        <p:nvSpPr>
+          <p:cNvPr id="4" name="Slide Number Placeholder 3"/>
+          <p:cNvSpPr>
+            <a:spLocks noGrp="1"/>
+          </p:cNvSpPr>
+          <p:nvPr>
+            <p:ph type="sldNum" sz="quarter" idx="5"/>
+          </p:nvPr>
+        </p:nvSpPr>
+        <p:spPr/>
+        <p:txBody>
+          <a:bodyPr/>
+          <a:lstStyle/>
+          <a:p>
+            <a:fld id="{E05EDB92-2FE2-4164-AA27-D03258A20DF4}" type="slidenum">
+              <a:rPr lang="en-US" smtClean="0"/>
+              <a:t>10</a:t>
+            </a:fld>
+            <a:endParaRPr lang="en-US"/>
+          </a:p>
+        </p:txBody>
+      </p:sp>
+    </p:spTree>
+    <p:extLst>
+      <p:ext uri="{BB962C8B-B14F-4D97-AF65-F5344CB8AC3E}">
+        <p14:creationId xmlns:p14="http://schemas.microsoft.com/office/powerpoint/2010/main" val="4095820918"/>
+      </p:ext>
+    </p:extLst>
+  </p:cSld>
+  <p:clrMapOvr>
+    <a:masterClrMapping/>
+  </p:clrMapOvr>
+</p:notes>
 </file>
 
 <file path=ppt/slideLayouts/slideLayout1.xml><?xml version="1.0" encoding="utf-8"?>
@@ -3796,7 +4288,7 @@
                 <a:latin typeface="Courier New" panose="02070309020205020404" pitchFamily="49" charset="0"/>
                 <a:cs typeface="Courier New" panose="02070309020205020404" pitchFamily="49" charset="0"/>
               </a:rPr>
-              <a:t>"Address": "27.28.29.30"</a:t>
+              <a:t>"Address": "27.28.29.30:3712"</a:t>
             </a:r>
           </a:p>
           <a:p>
@@ -4304,8 +4796,8 @@
         </p:nvSpPr>
         <p:spPr>
           <a:xfrm>
-            <a:off x="5253087" y="1825624"/>
-            <a:ext cx="6225551" cy="538197"/>
+            <a:off x="5311611" y="1511180"/>
+            <a:ext cx="6225551" cy="539139"/>
           </a:xfrm>
         </p:spPr>
         <p:txBody>
@@ -4643,7 +5135,7 @@
         </p:nvSpPr>
         <p:spPr>
           <a:xfrm>
-            <a:off x="5837707" y="2258475"/>
+            <a:off x="5253245" y="1758853"/>
             <a:ext cx="3870497" cy="4185761"/>
           </a:xfrm>
           <a:prstGeom prst="rect">
@@ -5054,7 +5546,7 @@
         </p:nvSpPr>
         <p:spPr>
           <a:xfrm>
-            <a:off x="5837707" y="2597285"/>
+            <a:off x="5253245" y="2097663"/>
             <a:ext cx="58366" cy="3657600"/>
           </a:xfrm>
           <a:prstGeom prst="flowChartProcess">
@@ -5100,7 +5592,7 @@
         </p:nvSpPr>
         <p:spPr>
           <a:xfrm>
-            <a:off x="9572017" y="3151761"/>
+            <a:off x="8987555" y="2652139"/>
             <a:ext cx="272374" cy="729575"/>
           </a:xfrm>
           <a:prstGeom prst="rightBrace">
@@ -5145,7 +5637,7 @@
         </p:nvSpPr>
         <p:spPr>
           <a:xfrm>
-            <a:off x="9808723" y="3331882"/>
+            <a:off x="9224261" y="2832260"/>
             <a:ext cx="1913281" cy="369332"/>
           </a:xfrm>
           <a:prstGeom prst="rect">
@@ -5163,6 +5655,219 @@
               <a:rPr lang="en-US" dirty="0"/>
               <a:t>Domain Controller</a:t>
             </a:r>
+          </a:p>
+        </p:txBody>
+      </p:sp>
+      <p:sp>
+        <p:nvSpPr>
+          <p:cNvPr id="5" name="Content Placeholder 2">
+            <a:extLst>
+              <a:ext uri="{FF2B5EF4-FFF2-40B4-BE49-F238E27FC236}">
+                <a16:creationId xmlns:a16="http://schemas.microsoft.com/office/drawing/2014/main" id="{0CD1D9BD-FC2F-C5A4-41E3-48156C379A9A}"/>
+              </a:ext>
+            </a:extLst>
+          </p:cNvPr>
+          <p:cNvSpPr txBox="1">
+            <a:spLocks/>
+          </p:cNvSpPr>
+          <p:nvPr/>
+        </p:nvSpPr>
+        <p:spPr>
+          <a:xfrm>
+            <a:off x="5311612" y="5944614"/>
+            <a:ext cx="5670616" cy="539139"/>
+          </a:xfrm>
+          <a:prstGeom prst="rect">
+            <a:avLst/>
+          </a:prstGeom>
+        </p:spPr>
+        <p:txBody>
+          <a:bodyPr vert="horz" lIns="91440" tIns="45720" rIns="91440" bIns="45720" rtlCol="0">
+            <a:normAutofit fontScale="70000" lnSpcReduction="20000"/>
+          </a:bodyPr>
+          <a:lstStyle>
+            <a:lvl1pPr marL="228600" indent="-228600" algn="l" defTabSz="914400" rtl="0" eaLnBrk="1" latinLnBrk="0" hangingPunct="1">
+              <a:lnSpc>
+                <a:spcPct val="90000"/>
+              </a:lnSpc>
+              <a:spcBef>
+                <a:spcPts val="1000"/>
+              </a:spcBef>
+              <a:buFont typeface="Arial" panose="020B0604020202020204" pitchFamily="34" charset="0"/>
+              <a:buChar char="•"/>
+              <a:defRPr sz="2800" kern="1200">
+                <a:solidFill>
+                  <a:schemeClr val="tx1"/>
+                </a:solidFill>
+                <a:latin typeface="+mn-lt"/>
+                <a:ea typeface="+mn-ea"/>
+                <a:cs typeface="+mn-cs"/>
+              </a:defRPr>
+            </a:lvl1pPr>
+            <a:lvl2pPr marL="685800" indent="-228600" algn="l" defTabSz="914400" rtl="0" eaLnBrk="1" latinLnBrk="0" hangingPunct="1">
+              <a:lnSpc>
+                <a:spcPct val="90000"/>
+              </a:lnSpc>
+              <a:spcBef>
+                <a:spcPts val="500"/>
+              </a:spcBef>
+              <a:buFont typeface="Arial" panose="020B0604020202020204" pitchFamily="34" charset="0"/>
+              <a:buChar char="•"/>
+              <a:defRPr sz="2400" kern="1200">
+                <a:solidFill>
+                  <a:schemeClr val="tx1"/>
+                </a:solidFill>
+                <a:latin typeface="+mn-lt"/>
+                <a:ea typeface="+mn-ea"/>
+                <a:cs typeface="+mn-cs"/>
+              </a:defRPr>
+            </a:lvl2pPr>
+            <a:lvl3pPr marL="1143000" indent="-228600" algn="l" defTabSz="914400" rtl="0" eaLnBrk="1" latinLnBrk="0" hangingPunct="1">
+              <a:lnSpc>
+                <a:spcPct val="90000"/>
+              </a:lnSpc>
+              <a:spcBef>
+                <a:spcPts val="500"/>
+              </a:spcBef>
+              <a:buFont typeface="Arial" panose="020B0604020202020204" pitchFamily="34" charset="0"/>
+              <a:buChar char="•"/>
+              <a:defRPr sz="2000" kern="1200">
+                <a:solidFill>
+                  <a:schemeClr val="tx1"/>
+                </a:solidFill>
+                <a:latin typeface="+mn-lt"/>
+                <a:ea typeface="+mn-ea"/>
+                <a:cs typeface="+mn-cs"/>
+              </a:defRPr>
+            </a:lvl3pPr>
+            <a:lvl4pPr marL="1600200" indent="-228600" algn="l" defTabSz="914400" rtl="0" eaLnBrk="1" latinLnBrk="0" hangingPunct="1">
+              <a:lnSpc>
+                <a:spcPct val="90000"/>
+              </a:lnSpc>
+              <a:spcBef>
+                <a:spcPts val="500"/>
+              </a:spcBef>
+              <a:buFont typeface="Arial" panose="020B0604020202020204" pitchFamily="34" charset="0"/>
+              <a:buChar char="•"/>
+              <a:defRPr sz="1800" kern="1200">
+                <a:solidFill>
+                  <a:schemeClr val="tx1"/>
+                </a:solidFill>
+                <a:latin typeface="+mn-lt"/>
+                <a:ea typeface="+mn-ea"/>
+                <a:cs typeface="+mn-cs"/>
+              </a:defRPr>
+            </a:lvl4pPr>
+            <a:lvl5pPr marL="2057400" indent="-228600" algn="l" defTabSz="914400" rtl="0" eaLnBrk="1" latinLnBrk="0" hangingPunct="1">
+              <a:lnSpc>
+                <a:spcPct val="90000"/>
+              </a:lnSpc>
+              <a:spcBef>
+                <a:spcPts val="500"/>
+              </a:spcBef>
+              <a:buFont typeface="Arial" panose="020B0604020202020204" pitchFamily="34" charset="0"/>
+              <a:buChar char="•"/>
+              <a:defRPr sz="1800" kern="1200">
+                <a:solidFill>
+                  <a:schemeClr val="tx1"/>
+                </a:solidFill>
+                <a:latin typeface="+mn-lt"/>
+                <a:ea typeface="+mn-ea"/>
+                <a:cs typeface="+mn-cs"/>
+              </a:defRPr>
+            </a:lvl5pPr>
+            <a:lvl6pPr marL="2514600" indent="-228600" algn="l" defTabSz="914400" rtl="0" eaLnBrk="1" latinLnBrk="0" hangingPunct="1">
+              <a:lnSpc>
+                <a:spcPct val="90000"/>
+              </a:lnSpc>
+              <a:spcBef>
+                <a:spcPts val="500"/>
+              </a:spcBef>
+              <a:buFont typeface="Arial" panose="020B0604020202020204" pitchFamily="34" charset="0"/>
+              <a:buChar char="•"/>
+              <a:defRPr sz="1800" kern="1200">
+                <a:solidFill>
+                  <a:schemeClr val="tx1"/>
+                </a:solidFill>
+                <a:latin typeface="+mn-lt"/>
+                <a:ea typeface="+mn-ea"/>
+                <a:cs typeface="+mn-cs"/>
+              </a:defRPr>
+            </a:lvl6pPr>
+            <a:lvl7pPr marL="2971800" indent="-228600" algn="l" defTabSz="914400" rtl="0" eaLnBrk="1" latinLnBrk="0" hangingPunct="1">
+              <a:lnSpc>
+                <a:spcPct val="90000"/>
+              </a:lnSpc>
+              <a:spcBef>
+                <a:spcPts val="500"/>
+              </a:spcBef>
+              <a:buFont typeface="Arial" panose="020B0604020202020204" pitchFamily="34" charset="0"/>
+              <a:buChar char="•"/>
+              <a:defRPr sz="1800" kern="1200">
+                <a:solidFill>
+                  <a:schemeClr val="tx1"/>
+                </a:solidFill>
+                <a:latin typeface="+mn-lt"/>
+                <a:ea typeface="+mn-ea"/>
+                <a:cs typeface="+mn-cs"/>
+              </a:defRPr>
+            </a:lvl7pPr>
+            <a:lvl8pPr marL="3429000" indent="-228600" algn="l" defTabSz="914400" rtl="0" eaLnBrk="1" latinLnBrk="0" hangingPunct="1">
+              <a:lnSpc>
+                <a:spcPct val="90000"/>
+              </a:lnSpc>
+              <a:spcBef>
+                <a:spcPts val="500"/>
+              </a:spcBef>
+              <a:buFont typeface="Arial" panose="020B0604020202020204" pitchFamily="34" charset="0"/>
+              <a:buChar char="•"/>
+              <a:defRPr sz="1800" kern="1200">
+                <a:solidFill>
+                  <a:schemeClr val="tx1"/>
+                </a:solidFill>
+                <a:latin typeface="+mn-lt"/>
+                <a:ea typeface="+mn-ea"/>
+                <a:cs typeface="+mn-cs"/>
+              </a:defRPr>
+            </a:lvl8pPr>
+            <a:lvl9pPr marL="3886200" indent="-228600" algn="l" defTabSz="914400" rtl="0" eaLnBrk="1" latinLnBrk="0" hangingPunct="1">
+              <a:lnSpc>
+                <a:spcPct val="90000"/>
+              </a:lnSpc>
+              <a:spcBef>
+                <a:spcPts val="500"/>
+              </a:spcBef>
+              <a:buFont typeface="Arial" panose="020B0604020202020204" pitchFamily="34" charset="0"/>
+              <a:buChar char="•"/>
+              <a:defRPr sz="1800" kern="1200">
+                <a:solidFill>
+                  <a:schemeClr val="tx1"/>
+                </a:solidFill>
+                <a:latin typeface="+mn-lt"/>
+                <a:ea typeface="+mn-ea"/>
+                <a:cs typeface="+mn-cs"/>
+              </a:defRPr>
+            </a:lvl9pPr>
+          </a:lstStyle>
+          <a:p>
+            <a:r>
+              <a:rPr lang="en-US" dirty="0"/>
+              <a:t>"</a:t>
+            </a:r>
+            <a:r>
+              <a:rPr lang="en-US" dirty="0" err="1"/>
+              <a:t>EnvironmentName</a:t>
+            </a:r>
+            <a:r>
+              <a:rPr lang="en-US" dirty="0"/>
+              <a:t>" is also under control of the Remote definition.</a:t>
+            </a:r>
+          </a:p>
+          <a:p>
+            <a:pPr marL="0" indent="0">
+              <a:buNone/>
+            </a:pPr>
+            <a:endParaRPr lang="en-US" dirty="0"/>
           </a:p>
         </p:txBody>
       </p:sp>
@@ -12032,4 +12737,299 @@
     </a:ext>
   </a:extLst>
 </a:theme>
+</file>
+
+<file path=ppt/theme/theme2.xml><?xml version="1.0" encoding="utf-8"?>
+<a:theme xmlns:a="http://schemas.openxmlformats.org/drawingml/2006/main" name="Office Theme">
+  <a:themeElements>
+    <a:clrScheme name="Office">
+      <a:dk1>
+        <a:sysClr val="windowText" lastClr="000000"/>
+      </a:dk1>
+      <a:lt1>
+        <a:sysClr val="window" lastClr="FFFFFF"/>
+      </a:lt1>
+      <a:dk2>
+        <a:srgbClr val="44546A"/>
+      </a:dk2>
+      <a:lt2>
+        <a:srgbClr val="E7E6E6"/>
+      </a:lt2>
+      <a:accent1>
+        <a:srgbClr val="4472C4"/>
+      </a:accent1>
+      <a:accent2>
+        <a:srgbClr val="ED7D31"/>
+      </a:accent2>
+      <a:accent3>
+        <a:srgbClr val="A5A5A5"/>
+      </a:accent3>
+      <a:accent4>
+        <a:srgbClr val="FFC000"/>
+      </a:accent4>
+      <a:accent5>
+        <a:srgbClr val="5B9BD5"/>
+      </a:accent5>
+      <a:accent6>
+        <a:srgbClr val="70AD47"/>
+      </a:accent6>
+      <a:hlink>
+        <a:srgbClr val="0563C1"/>
+      </a:hlink>
+      <a:folHlink>
+        <a:srgbClr val="954F72"/>
+      </a:folHlink>
+    </a:clrScheme>
+    <a:fontScheme name="Office">
+      <a:majorFont>
+        <a:latin typeface="Calibri Light" panose="020F0302020204030204"/>
+        <a:ea typeface=""/>
+        <a:cs typeface=""/>
+        <a:font script="Jpan" typeface="游ゴシック Light"/>
+        <a:font script="Hang" typeface="맑은 고딕"/>
+        <a:font script="Hans" typeface="等线 Light"/>
+        <a:font script="Hant" typeface="新細明體"/>
+        <a:font script="Arab" typeface="Times New Roman"/>
+        <a:font script="Hebr" typeface="Times New Roman"/>
+        <a:font script="Thai" typeface="Angsana New"/>
+        <a:font script="Ethi" typeface="Nyala"/>
+        <a:font script="Beng" typeface="Vrinda"/>
+        <a:font script="Gujr" typeface="Shruti"/>
+        <a:font script="Khmr" typeface="MoolBoran"/>
+        <a:font script="Knda" typeface="Tunga"/>
+        <a:font script="Guru" typeface="Raavi"/>
+        <a:font script="Cans" typeface="Euphemia"/>
+        <a:font script="Cher" typeface="Plantagenet Cherokee"/>
+        <a:font script="Yiii" typeface="Microsoft Yi Baiti"/>
+        <a:font script="Tibt" typeface="Microsoft Himalaya"/>
+        <a:font script="Thaa" typeface="MV Boli"/>
+        <a:font script="Deva" typeface="Mangal"/>
+        <a:font script="Telu" typeface="Gautami"/>
+        <a:font script="Taml" typeface="Latha"/>
+        <a:font script="Syrc" typeface="Estrangelo Edessa"/>
+        <a:font script="Orya" typeface="Kalinga"/>
+        <a:font script="Mlym" typeface="Kartika"/>
+        <a:font script="Laoo" typeface="DokChampa"/>
+        <a:font script="Sinh" typeface="Iskoola Pota"/>
+        <a:font script="Mong" typeface="Mongolian Baiti"/>
+        <a:font script="Viet" typeface="Times New Roman"/>
+        <a:font script="Uigh" typeface="Microsoft Uighur"/>
+        <a:font script="Geor" typeface="Sylfaen"/>
+        <a:font script="Armn" typeface="Arial"/>
+        <a:font script="Bugi" typeface="Leelawadee UI"/>
+        <a:font script="Bopo" typeface="Microsoft JhengHei"/>
+        <a:font script="Java" typeface="Javanese Text"/>
+        <a:font script="Lisu" typeface="Segoe UI"/>
+        <a:font script="Mymr" typeface="Myanmar Text"/>
+        <a:font script="Nkoo" typeface="Ebrima"/>
+        <a:font script="Olck" typeface="Nirmala UI"/>
+        <a:font script="Osma" typeface="Ebrima"/>
+        <a:font script="Phag" typeface="Phagspa"/>
+        <a:font script="Syrn" typeface="Estrangelo Edessa"/>
+        <a:font script="Syrj" typeface="Estrangelo Edessa"/>
+        <a:font script="Syre" typeface="Estrangelo Edessa"/>
+        <a:font script="Sora" typeface="Nirmala UI"/>
+        <a:font script="Tale" typeface="Microsoft Tai Le"/>
+        <a:font script="Talu" typeface="Microsoft New Tai Lue"/>
+        <a:font script="Tfng" typeface="Ebrima"/>
+      </a:majorFont>
+      <a:minorFont>
+        <a:latin typeface="Calibri" panose="020F0502020204030204"/>
+        <a:ea typeface=""/>
+        <a:cs typeface=""/>
+        <a:font script="Jpan" typeface="游ゴシック"/>
+        <a:font script="Hang" typeface="맑은 고딕"/>
+        <a:font script="Hans" typeface="等线"/>
+        <a:font script="Hant" typeface="新細明體"/>
+        <a:font script="Arab" typeface="Arial"/>
+        <a:font script="Hebr" typeface="Arial"/>
+        <a:font script="Thai" typeface="Cordia New"/>
+        <a:font script="Ethi" typeface="Nyala"/>
+        <a:font script="Beng" typeface="Vrinda"/>
+        <a:font script="Gujr" typeface="Shruti"/>
+        <a:font script="Khmr" typeface="DaunPenh"/>
+        <a:font script="Knda" typeface="Tunga"/>
+        <a:font script="Guru" typeface="Raavi"/>
+        <a:font script="Cans" typeface="Euphemia"/>
+        <a:font script="Cher" typeface="Plantagenet Cherokee"/>
+        <a:font script="Yiii" typeface="Microsoft Yi Baiti"/>
+        <a:font script="Tibt" typeface="Microsoft Himalaya"/>
+        <a:font script="Thaa" typeface="MV Boli"/>
+        <a:font script="Deva" typeface="Mangal"/>
+        <a:font script="Telu" typeface="Gautami"/>
+        <a:font script="Taml" typeface="Latha"/>
+        <a:font script="Syrc" typeface="Estrangelo Edessa"/>
+        <a:font script="Orya" typeface="Kalinga"/>
+        <a:font script="Mlym" typeface="Kartika"/>
+        <a:font script="Laoo" typeface="DokChampa"/>
+        <a:font script="Sinh" typeface="Iskoola Pota"/>
+        <a:font script="Mong" typeface="Mongolian Baiti"/>
+        <a:font script="Viet" typeface="Arial"/>
+        <a:font script="Uigh" typeface="Microsoft Uighur"/>
+        <a:font script="Geor" typeface="Sylfaen"/>
+        <a:font script="Armn" typeface="Arial"/>
+        <a:font script="Bugi" typeface="Leelawadee UI"/>
+        <a:font script="Bopo" typeface="Microsoft JhengHei"/>
+        <a:font script="Java" typeface="Javanese Text"/>
+        <a:font script="Lisu" typeface="Segoe UI"/>
+        <a:font script="Mymr" typeface="Myanmar Text"/>
+        <a:font script="Nkoo" typeface="Ebrima"/>
+        <a:font script="Olck" typeface="Nirmala UI"/>
+        <a:font script="Osma" typeface="Ebrima"/>
+        <a:font script="Phag" typeface="Phagspa"/>
+        <a:font script="Syrn" typeface="Estrangelo Edessa"/>
+        <a:font script="Syrj" typeface="Estrangelo Edessa"/>
+        <a:font script="Syre" typeface="Estrangelo Edessa"/>
+        <a:font script="Sora" typeface="Nirmala UI"/>
+        <a:font script="Tale" typeface="Microsoft Tai Le"/>
+        <a:font script="Talu" typeface="Microsoft New Tai Lue"/>
+        <a:font script="Tfng" typeface="Ebrima"/>
+      </a:minorFont>
+    </a:fontScheme>
+    <a:fmtScheme name="Office">
+      <a:fillStyleLst>
+        <a:solidFill>
+          <a:schemeClr val="phClr"/>
+        </a:solidFill>
+        <a:gradFill rotWithShape="1">
+          <a:gsLst>
+            <a:gs pos="0">
+              <a:schemeClr val="phClr">
+                <a:lumMod val="110000"/>
+                <a:satMod val="105000"/>
+                <a:tint val="67000"/>
+              </a:schemeClr>
+            </a:gs>
+            <a:gs pos="50000">
+              <a:schemeClr val="phClr">
+                <a:lumMod val="105000"/>
+                <a:satMod val="103000"/>
+                <a:tint val="73000"/>
+              </a:schemeClr>
+            </a:gs>
+            <a:gs pos="100000">
+              <a:schemeClr val="phClr">
+                <a:lumMod val="105000"/>
+                <a:satMod val="109000"/>
+                <a:tint val="81000"/>
+              </a:schemeClr>
+            </a:gs>
+          </a:gsLst>
+          <a:lin ang="5400000" scaled="0"/>
+        </a:gradFill>
+        <a:gradFill rotWithShape="1">
+          <a:gsLst>
+            <a:gs pos="0">
+              <a:schemeClr val="phClr">
+                <a:satMod val="103000"/>
+                <a:lumMod val="102000"/>
+                <a:tint val="94000"/>
+              </a:schemeClr>
+            </a:gs>
+            <a:gs pos="50000">
+              <a:schemeClr val="phClr">
+                <a:satMod val="110000"/>
+                <a:lumMod val="100000"/>
+                <a:shade val="100000"/>
+              </a:schemeClr>
+            </a:gs>
+            <a:gs pos="100000">
+              <a:schemeClr val="phClr">
+                <a:lumMod val="99000"/>
+                <a:satMod val="120000"/>
+                <a:shade val="78000"/>
+              </a:schemeClr>
+            </a:gs>
+          </a:gsLst>
+          <a:lin ang="5400000" scaled="0"/>
+        </a:gradFill>
+      </a:fillStyleLst>
+      <a:lnStyleLst>
+        <a:ln w="6350" cap="flat" cmpd="sng" algn="ctr">
+          <a:solidFill>
+            <a:schemeClr val="phClr"/>
+          </a:solidFill>
+          <a:prstDash val="solid"/>
+          <a:miter lim="800000"/>
+        </a:ln>
+        <a:ln w="12700" cap="flat" cmpd="sng" algn="ctr">
+          <a:solidFill>
+            <a:schemeClr val="phClr"/>
+          </a:solidFill>
+          <a:prstDash val="solid"/>
+          <a:miter lim="800000"/>
+        </a:ln>
+        <a:ln w="19050" cap="flat" cmpd="sng" algn="ctr">
+          <a:solidFill>
+            <a:schemeClr val="phClr"/>
+          </a:solidFill>
+          <a:prstDash val="solid"/>
+          <a:miter lim="800000"/>
+        </a:ln>
+      </a:lnStyleLst>
+      <a:effectStyleLst>
+        <a:effectStyle>
+          <a:effectLst/>
+        </a:effectStyle>
+        <a:effectStyle>
+          <a:effectLst/>
+        </a:effectStyle>
+        <a:effectStyle>
+          <a:effectLst>
+            <a:outerShdw blurRad="57150" dist="19050" dir="5400000" algn="ctr" rotWithShape="0">
+              <a:srgbClr val="000000">
+                <a:alpha val="63000"/>
+              </a:srgbClr>
+            </a:outerShdw>
+          </a:effectLst>
+        </a:effectStyle>
+      </a:effectStyleLst>
+      <a:bgFillStyleLst>
+        <a:solidFill>
+          <a:schemeClr val="phClr"/>
+        </a:solidFill>
+        <a:solidFill>
+          <a:schemeClr val="phClr">
+            <a:tint val="95000"/>
+            <a:satMod val="170000"/>
+          </a:schemeClr>
+        </a:solidFill>
+        <a:gradFill rotWithShape="1">
+          <a:gsLst>
+            <a:gs pos="0">
+              <a:schemeClr val="phClr">
+                <a:tint val="93000"/>
+                <a:satMod val="150000"/>
+                <a:shade val="98000"/>
+                <a:lumMod val="102000"/>
+              </a:schemeClr>
+            </a:gs>
+            <a:gs pos="50000">
+              <a:schemeClr val="phClr">
+                <a:tint val="98000"/>
+                <a:satMod val="130000"/>
+                <a:shade val="90000"/>
+                <a:lumMod val="103000"/>
+              </a:schemeClr>
+            </a:gs>
+            <a:gs pos="100000">
+              <a:schemeClr val="phClr">
+                <a:shade val="63000"/>
+                <a:satMod val="120000"/>
+              </a:schemeClr>
+            </a:gs>
+          </a:gsLst>
+          <a:lin ang="5400000" scaled="0"/>
+        </a:gradFill>
+      </a:bgFillStyleLst>
+    </a:fmtScheme>
+  </a:themeElements>
+  <a:objectDefaults/>
+  <a:extraClrSchemeLst/>
+  <a:extLst>
+    <a:ext uri="{05A4C25C-085E-4340-85A3-A5531E510DB2}">
+      <thm15:themeFamily xmlns:thm15="http://schemas.microsoft.com/office/thememl/2012/main" name="Office Theme" id="{62F939B6-93AF-4DB8-9C6B-D6C7DFDC589F}" vid="{4A3C46E8-61CC-4603-A589-7422A47A8E4A}"/>
+    </a:ext>
+  </a:extLst>
+</a:theme>
 </file>
--- a/Doc/CK-AppIdentity.pptx
+++ b/Doc/CK-AppIdentity.pptx
@@ -5,7 +5,7 @@
     <p:sldMasterId id="2147483648" r:id="rId1"/>
   </p:sldMasterIdLst>
   <p:notesMasterIdLst>
-    <p:notesMasterId r:id="rId20"/>
+    <p:notesMasterId r:id="rId31"/>
   </p:notesMasterIdLst>
   <p:sldIdLst>
     <p:sldId id="256" r:id="rId2"/>
@@ -26,6 +26,17 @@
     <p:sldId id="273" r:id="rId17"/>
     <p:sldId id="274" r:id="rId18"/>
     <p:sldId id="275" r:id="rId19"/>
+    <p:sldId id="276" r:id="rId20"/>
+    <p:sldId id="277" r:id="rId21"/>
+    <p:sldId id="278" r:id="rId22"/>
+    <p:sldId id="279" r:id="rId23"/>
+    <p:sldId id="280" r:id="rId24"/>
+    <p:sldId id="282" r:id="rId25"/>
+    <p:sldId id="281" r:id="rId26"/>
+    <p:sldId id="283" r:id="rId27"/>
+    <p:sldId id="284" r:id="rId28"/>
+    <p:sldId id="285" r:id="rId29"/>
+    <p:sldId id="286" r:id="rId30"/>
   </p:sldIdLst>
   <p:sldSz cx="12192000" cy="6858000"/>
   <p:notesSz cx="6858000" cy="9144000"/>
@@ -214,7 +225,7 @@
           <a:p>
             <a:fld id="{7EBA75D8-A9A5-4FAF-B563-7A079B630A7E}" type="datetimeFigureOut">
               <a:rPr lang="en-US" smtClean="0"/>
-              <a:t>3/12/2023</a:t>
+              <a:t>4/22/2023</a:t>
             </a:fld>
             <a:endParaRPr lang="en-US"/>
           </a:p>
@@ -621,6 +632,1070 @@
 </p:notes>
 </file>
 
+<file path=ppt/notesSlides/notesSlide2.xml><?xml version="1.0" encoding="utf-8"?>
+<p:notes xmlns:a="http://schemas.openxmlformats.org/drawingml/2006/main" xmlns:r="http://schemas.openxmlformats.org/officeDocument/2006/relationships" xmlns:p="http://schemas.openxmlformats.org/presentationml/2006/main">
+  <p:cSld>
+    <p:spTree>
+      <p:nvGrpSpPr>
+        <p:cNvPr id="1" name=""/>
+        <p:cNvGrpSpPr/>
+        <p:nvPr/>
+      </p:nvGrpSpPr>
+      <p:grpSpPr>
+        <a:xfrm>
+          <a:off x="0" y="0"/>
+          <a:ext cx="0" cy="0"/>
+          <a:chOff x="0" y="0"/>
+          <a:chExt cx="0" cy="0"/>
+        </a:xfrm>
+      </p:grpSpPr>
+      <p:sp>
+        <p:nvSpPr>
+          <p:cNvPr id="2" name="Slide Image Placeholder 1"/>
+          <p:cNvSpPr>
+            <a:spLocks noGrp="1" noRot="1" noChangeAspect="1"/>
+          </p:cNvSpPr>
+          <p:nvPr>
+            <p:ph type="sldImg"/>
+          </p:nvPr>
+        </p:nvSpPr>
+        <p:spPr/>
+      </p:sp>
+      <p:sp>
+        <p:nvSpPr>
+          <p:cNvPr id="3" name="Notes Placeholder 2"/>
+          <p:cNvSpPr>
+            <a:spLocks noGrp="1"/>
+          </p:cNvSpPr>
+          <p:nvPr>
+            <p:ph type="body" idx="1"/>
+          </p:nvPr>
+        </p:nvSpPr>
+        <p:spPr/>
+        <p:txBody>
+          <a:bodyPr/>
+          <a:lstStyle/>
+          <a:p>
+            <a:endParaRPr lang="en-US" dirty="0"/>
+          </a:p>
+        </p:txBody>
+      </p:sp>
+      <p:sp>
+        <p:nvSpPr>
+          <p:cNvPr id="4" name="Slide Number Placeholder 3"/>
+          <p:cNvSpPr>
+            <a:spLocks noGrp="1"/>
+          </p:cNvSpPr>
+          <p:nvPr>
+            <p:ph type="sldNum" sz="quarter" idx="5"/>
+          </p:nvPr>
+        </p:nvSpPr>
+        <p:spPr/>
+        <p:txBody>
+          <a:bodyPr/>
+          <a:lstStyle/>
+          <a:p>
+            <a:fld id="{E05EDB92-2FE2-4164-AA27-D03258A20DF4}" type="slidenum">
+              <a:rPr lang="en-US" smtClean="0"/>
+              <a:t>20</a:t>
+            </a:fld>
+            <a:endParaRPr lang="en-US"/>
+          </a:p>
+        </p:txBody>
+      </p:sp>
+    </p:spTree>
+    <p:extLst>
+      <p:ext uri="{BB962C8B-B14F-4D97-AF65-F5344CB8AC3E}">
+        <p14:creationId xmlns:p14="http://schemas.microsoft.com/office/powerpoint/2010/main" val="3471580468"/>
+      </p:ext>
+    </p:extLst>
+  </p:cSld>
+  <p:clrMapOvr>
+    <a:masterClrMapping/>
+  </p:clrMapOvr>
+</p:notes>
+</file>
+
+<file path=ppt/notesSlides/notesSlide3.xml><?xml version="1.0" encoding="utf-8"?>
+<p:notes xmlns:a="http://schemas.openxmlformats.org/drawingml/2006/main" xmlns:r="http://schemas.openxmlformats.org/officeDocument/2006/relationships" xmlns:p="http://schemas.openxmlformats.org/presentationml/2006/main">
+  <p:cSld>
+    <p:spTree>
+      <p:nvGrpSpPr>
+        <p:cNvPr id="1" name=""/>
+        <p:cNvGrpSpPr/>
+        <p:nvPr/>
+      </p:nvGrpSpPr>
+      <p:grpSpPr>
+        <a:xfrm>
+          <a:off x="0" y="0"/>
+          <a:ext cx="0" cy="0"/>
+          <a:chOff x="0" y="0"/>
+          <a:chExt cx="0" cy="0"/>
+        </a:xfrm>
+      </p:grpSpPr>
+      <p:sp>
+        <p:nvSpPr>
+          <p:cNvPr id="2" name="Slide Image Placeholder 1"/>
+          <p:cNvSpPr>
+            <a:spLocks noGrp="1" noRot="1" noChangeAspect="1"/>
+          </p:cNvSpPr>
+          <p:nvPr>
+            <p:ph type="sldImg"/>
+          </p:nvPr>
+        </p:nvSpPr>
+        <p:spPr/>
+      </p:sp>
+      <p:sp>
+        <p:nvSpPr>
+          <p:cNvPr id="3" name="Notes Placeholder 2"/>
+          <p:cNvSpPr>
+            <a:spLocks noGrp="1"/>
+          </p:cNvSpPr>
+          <p:nvPr>
+            <p:ph type="body" idx="1"/>
+          </p:nvPr>
+        </p:nvSpPr>
+        <p:spPr/>
+        <p:txBody>
+          <a:bodyPr/>
+          <a:lstStyle/>
+          <a:p>
+            <a:endParaRPr lang="en-US" dirty="0"/>
+          </a:p>
+        </p:txBody>
+      </p:sp>
+      <p:sp>
+        <p:nvSpPr>
+          <p:cNvPr id="4" name="Slide Number Placeholder 3"/>
+          <p:cNvSpPr>
+            <a:spLocks noGrp="1"/>
+          </p:cNvSpPr>
+          <p:nvPr>
+            <p:ph type="sldNum" sz="quarter" idx="5"/>
+          </p:nvPr>
+        </p:nvSpPr>
+        <p:spPr/>
+        <p:txBody>
+          <a:bodyPr/>
+          <a:lstStyle/>
+          <a:p>
+            <a:fld id="{E05EDB92-2FE2-4164-AA27-D03258A20DF4}" type="slidenum">
+              <a:rPr lang="en-US" smtClean="0"/>
+              <a:t>21</a:t>
+            </a:fld>
+            <a:endParaRPr lang="en-US"/>
+          </a:p>
+        </p:txBody>
+      </p:sp>
+    </p:spTree>
+    <p:extLst>
+      <p:ext uri="{BB962C8B-B14F-4D97-AF65-F5344CB8AC3E}">
+        <p14:creationId xmlns:p14="http://schemas.microsoft.com/office/powerpoint/2010/main" val="1461454158"/>
+      </p:ext>
+    </p:extLst>
+  </p:cSld>
+  <p:clrMapOvr>
+    <a:masterClrMapping/>
+  </p:clrMapOvr>
+</p:notes>
+</file>
+
+<file path=ppt/notesSlides/notesSlide4.xml><?xml version="1.0" encoding="utf-8"?>
+<p:notes xmlns:a="http://schemas.openxmlformats.org/drawingml/2006/main" xmlns:r="http://schemas.openxmlformats.org/officeDocument/2006/relationships" xmlns:p="http://schemas.openxmlformats.org/presentationml/2006/main">
+  <p:cSld>
+    <p:spTree>
+      <p:nvGrpSpPr>
+        <p:cNvPr id="1" name=""/>
+        <p:cNvGrpSpPr/>
+        <p:nvPr/>
+      </p:nvGrpSpPr>
+      <p:grpSpPr>
+        <a:xfrm>
+          <a:off x="0" y="0"/>
+          <a:ext cx="0" cy="0"/>
+          <a:chOff x="0" y="0"/>
+          <a:chExt cx="0" cy="0"/>
+        </a:xfrm>
+      </p:grpSpPr>
+      <p:sp>
+        <p:nvSpPr>
+          <p:cNvPr id="2" name="Slide Image Placeholder 1"/>
+          <p:cNvSpPr>
+            <a:spLocks noGrp="1" noRot="1" noChangeAspect="1"/>
+          </p:cNvSpPr>
+          <p:nvPr>
+            <p:ph type="sldImg"/>
+          </p:nvPr>
+        </p:nvSpPr>
+        <p:spPr/>
+      </p:sp>
+      <p:sp>
+        <p:nvSpPr>
+          <p:cNvPr id="3" name="Notes Placeholder 2"/>
+          <p:cNvSpPr>
+            <a:spLocks noGrp="1"/>
+          </p:cNvSpPr>
+          <p:nvPr>
+            <p:ph type="body" idx="1"/>
+          </p:nvPr>
+        </p:nvSpPr>
+        <p:spPr/>
+        <p:txBody>
+          <a:bodyPr/>
+          <a:lstStyle/>
+          <a:p>
+            <a:r>
+              <a:rPr lang="en-US" dirty="0"/>
+              <a:t>Allow/</a:t>
+            </a:r>
+            <a:r>
+              <a:rPr lang="en-US" dirty="0" err="1"/>
+              <a:t>DisallowFeatures</a:t>
+            </a:r>
+            <a:r>
+              <a:rPr lang="en-US" dirty="0"/>
+              <a:t> can be a string or an array of strings.</a:t>
+            </a:r>
+          </a:p>
+          <a:p>
+            <a:endParaRPr lang="en-US" dirty="0"/>
+          </a:p>
+        </p:txBody>
+      </p:sp>
+      <p:sp>
+        <p:nvSpPr>
+          <p:cNvPr id="4" name="Slide Number Placeholder 3"/>
+          <p:cNvSpPr>
+            <a:spLocks noGrp="1"/>
+          </p:cNvSpPr>
+          <p:nvPr>
+            <p:ph type="sldNum" sz="quarter" idx="5"/>
+          </p:nvPr>
+        </p:nvSpPr>
+        <p:spPr/>
+        <p:txBody>
+          <a:bodyPr/>
+          <a:lstStyle/>
+          <a:p>
+            <a:fld id="{E05EDB92-2FE2-4164-AA27-D03258A20DF4}" type="slidenum">
+              <a:rPr lang="en-US" smtClean="0"/>
+              <a:t>24</a:t>
+            </a:fld>
+            <a:endParaRPr lang="en-US"/>
+          </a:p>
+        </p:txBody>
+      </p:sp>
+    </p:spTree>
+    <p:extLst>
+      <p:ext uri="{BB962C8B-B14F-4D97-AF65-F5344CB8AC3E}">
+        <p14:creationId xmlns:p14="http://schemas.microsoft.com/office/powerpoint/2010/main" val="1551059755"/>
+      </p:ext>
+    </p:extLst>
+  </p:cSld>
+  <p:clrMapOvr>
+    <a:masterClrMapping/>
+  </p:clrMapOvr>
+</p:notes>
+</file>
+
+<file path=ppt/notesSlides/notesSlide5.xml><?xml version="1.0" encoding="utf-8"?>
+<p:notes xmlns:a="http://schemas.openxmlformats.org/drawingml/2006/main" xmlns:r="http://schemas.openxmlformats.org/officeDocument/2006/relationships" xmlns:p="http://schemas.openxmlformats.org/presentationml/2006/main">
+  <p:cSld>
+    <p:spTree>
+      <p:nvGrpSpPr>
+        <p:cNvPr id="1" name=""/>
+        <p:cNvGrpSpPr/>
+        <p:nvPr/>
+      </p:nvGrpSpPr>
+      <p:grpSpPr>
+        <a:xfrm>
+          <a:off x="0" y="0"/>
+          <a:ext cx="0" cy="0"/>
+          <a:chOff x="0" y="0"/>
+          <a:chExt cx="0" cy="0"/>
+        </a:xfrm>
+      </p:grpSpPr>
+      <p:sp>
+        <p:nvSpPr>
+          <p:cNvPr id="2" name="Slide Image Placeholder 1"/>
+          <p:cNvSpPr>
+            <a:spLocks noGrp="1" noRot="1" noChangeAspect="1"/>
+          </p:cNvSpPr>
+          <p:nvPr>
+            <p:ph type="sldImg"/>
+          </p:nvPr>
+        </p:nvSpPr>
+        <p:spPr/>
+      </p:sp>
+      <p:sp>
+        <p:nvSpPr>
+          <p:cNvPr id="3" name="Notes Placeholder 2"/>
+          <p:cNvSpPr>
+            <a:spLocks noGrp="1"/>
+          </p:cNvSpPr>
+          <p:nvPr>
+            <p:ph type="body" idx="1"/>
+          </p:nvPr>
+        </p:nvSpPr>
+        <p:spPr/>
+        <p:txBody>
+          <a:bodyPr/>
+          <a:lstStyle/>
+          <a:p>
+            <a:r>
+              <a:rPr lang="en-US" dirty="0"/>
+              <a:t>Before detailing the Channels, we need to cover the </a:t>
+            </a:r>
+            <a:r>
+              <a:rPr lang="en-US" dirty="0" err="1"/>
+              <a:t>TransportMessage</a:t>
+            </a:r>
+            <a:r>
+              <a:rPr lang="en-US" dirty="0"/>
+              <a:t> and its Factories and the Transport and </a:t>
+            </a:r>
+            <a:r>
+              <a:rPr lang="en-US" dirty="0" err="1"/>
+              <a:t>TransportType</a:t>
+            </a:r>
+            <a:r>
+              <a:rPr lang="en-US"/>
+              <a:t> model.</a:t>
+            </a:r>
+          </a:p>
+          <a:p>
+            <a:endParaRPr lang="en-US" dirty="0"/>
+          </a:p>
+        </p:txBody>
+      </p:sp>
+      <p:sp>
+        <p:nvSpPr>
+          <p:cNvPr id="4" name="Slide Number Placeholder 3"/>
+          <p:cNvSpPr>
+            <a:spLocks noGrp="1"/>
+          </p:cNvSpPr>
+          <p:nvPr>
+            <p:ph type="sldNum" sz="quarter" idx="5"/>
+          </p:nvPr>
+        </p:nvSpPr>
+        <p:spPr/>
+        <p:txBody>
+          <a:bodyPr/>
+          <a:lstStyle/>
+          <a:p>
+            <a:fld id="{E05EDB92-2FE2-4164-AA27-D03258A20DF4}" type="slidenum">
+              <a:rPr lang="en-US" smtClean="0"/>
+              <a:t>26</a:t>
+            </a:fld>
+            <a:endParaRPr lang="en-US"/>
+          </a:p>
+        </p:txBody>
+      </p:sp>
+    </p:spTree>
+    <p:extLst>
+      <p:ext uri="{BB962C8B-B14F-4D97-AF65-F5344CB8AC3E}">
+        <p14:creationId xmlns:p14="http://schemas.microsoft.com/office/powerpoint/2010/main" val="1107907762"/>
+      </p:ext>
+    </p:extLst>
+  </p:cSld>
+  <p:clrMapOvr>
+    <a:masterClrMapping/>
+  </p:clrMapOvr>
+</p:notes>
+</file>
+
+<file path=ppt/notesSlides/notesSlide6.xml><?xml version="1.0" encoding="utf-8"?>
+<p:notes xmlns:a="http://schemas.openxmlformats.org/drawingml/2006/main" xmlns:r="http://schemas.openxmlformats.org/officeDocument/2006/relationships" xmlns:p="http://schemas.openxmlformats.org/presentationml/2006/main">
+  <p:cSld>
+    <p:spTree>
+      <p:nvGrpSpPr>
+        <p:cNvPr id="1" name=""/>
+        <p:cNvGrpSpPr/>
+        <p:nvPr/>
+      </p:nvGrpSpPr>
+      <p:grpSpPr>
+        <a:xfrm>
+          <a:off x="0" y="0"/>
+          <a:ext cx="0" cy="0"/>
+          <a:chOff x="0" y="0"/>
+          <a:chExt cx="0" cy="0"/>
+        </a:xfrm>
+      </p:grpSpPr>
+      <p:sp>
+        <p:nvSpPr>
+          <p:cNvPr id="2" name="Slide Image Placeholder 1"/>
+          <p:cNvSpPr>
+            <a:spLocks noGrp="1" noRot="1" noChangeAspect="1"/>
+          </p:cNvSpPr>
+          <p:nvPr>
+            <p:ph type="sldImg"/>
+          </p:nvPr>
+        </p:nvSpPr>
+        <p:spPr/>
+      </p:sp>
+      <p:sp>
+        <p:nvSpPr>
+          <p:cNvPr id="3" name="Notes Placeholder 2"/>
+          <p:cNvSpPr>
+            <a:spLocks noGrp="1"/>
+          </p:cNvSpPr>
+          <p:nvPr>
+            <p:ph type="body" idx="1"/>
+          </p:nvPr>
+        </p:nvSpPr>
+        <p:spPr/>
+        <p:txBody>
+          <a:bodyPr/>
+          <a:lstStyle/>
+          <a:p>
+            <a:r>
+              <a:rPr lang="en-US" sz="1800" dirty="0">
+                <a:solidFill>
+                  <a:srgbClr val="000000"/>
+                </a:solidFill>
+                <a:latin typeface="Consolas" panose="020B0609020204030204" pitchFamily="49" charset="0"/>
+              </a:rPr>
+              <a:t>All messages exchanged by the Transport layer are prefixed by the message's protocol and length.</a:t>
+            </a:r>
+          </a:p>
+          <a:p>
+            <a:r>
+              <a:rPr lang="en-US" sz="1800" dirty="0">
+                <a:solidFill>
+                  <a:srgbClr val="000000"/>
+                </a:solidFill>
+                <a:latin typeface="Consolas" panose="020B0609020204030204" pitchFamily="49" charset="0"/>
+              </a:rPr>
+              <a:t>- The prefix starts with a first byte: </a:t>
+            </a:r>
+            <a:r>
+              <a:rPr lang="en-US" sz="1800" dirty="0">
+                <a:solidFill>
+                  <a:srgbClr val="0000FF"/>
+                </a:solidFill>
+                <a:latin typeface="Consolas" panose="020B0609020204030204" pitchFamily="49" charset="0"/>
+              </a:rPr>
+              <a:t>`|L0|L1|CD|R0|R1|P0|P1|P2|`</a:t>
+            </a:r>
+            <a:r>
+              <a:rPr lang="en-US" sz="1800" dirty="0">
+                <a:solidFill>
+                  <a:srgbClr val="000000"/>
+                </a:solidFill>
+                <a:latin typeface="Consolas" panose="020B0609020204030204" pitchFamily="49" charset="0"/>
+              </a:rPr>
+              <a:t>.</a:t>
+            </a:r>
+          </a:p>
+          <a:p>
+            <a:r>
+              <a:rPr lang="en-US" sz="1800" dirty="0">
+                <a:solidFill>
+                  <a:srgbClr val="000000"/>
+                </a:solidFill>
+                <a:latin typeface="Consolas" panose="020B0609020204030204" pitchFamily="49" charset="0"/>
+              </a:rPr>
+              <a:t>  - The 2 MSB (L0-L1) gives us the number of bytes of the message length:</a:t>
+            </a:r>
+          </a:p>
+          <a:p>
+            <a:r>
+              <a:rPr lang="en-US" sz="1800" dirty="0">
+                <a:solidFill>
+                  <a:srgbClr val="000000"/>
+                </a:solidFill>
+                <a:latin typeface="Consolas" panose="020B0609020204030204" pitchFamily="49" charset="0"/>
+              </a:rPr>
+              <a:t>    - </a:t>
+            </a:r>
+            <a:r>
+              <a:rPr lang="en-US" sz="1800" dirty="0">
+                <a:solidFill>
+                  <a:srgbClr val="0000FF"/>
+                </a:solidFill>
+                <a:latin typeface="Consolas" panose="020B0609020204030204" pitchFamily="49" charset="0"/>
+              </a:rPr>
+              <a:t>`00`</a:t>
+            </a:r>
+            <a:r>
+              <a:rPr lang="en-US" sz="1800" dirty="0">
+                <a:solidFill>
+                  <a:srgbClr val="000000"/>
+                </a:solidFill>
+                <a:latin typeface="Consolas" panose="020B0609020204030204" pitchFamily="49" charset="0"/>
+              </a:rPr>
+              <a:t> 1 byte, the message length is between 0 and 255 bytes.</a:t>
+            </a:r>
+          </a:p>
+          <a:p>
+            <a:r>
+              <a:rPr lang="en-US" sz="1800" dirty="0">
+                <a:solidFill>
+                  <a:srgbClr val="000000"/>
+                </a:solidFill>
+                <a:latin typeface="Consolas" panose="020B0609020204030204" pitchFamily="49" charset="0"/>
+              </a:rPr>
+              <a:t>    - </a:t>
+            </a:r>
+            <a:r>
+              <a:rPr lang="en-US" sz="1800" dirty="0">
+                <a:solidFill>
+                  <a:srgbClr val="0000FF"/>
+                </a:solidFill>
+                <a:latin typeface="Consolas" panose="020B0609020204030204" pitchFamily="49" charset="0"/>
+              </a:rPr>
+              <a:t>`01`</a:t>
+            </a:r>
+            <a:r>
+              <a:rPr lang="en-US" sz="1800" dirty="0">
+                <a:solidFill>
+                  <a:srgbClr val="000000"/>
+                </a:solidFill>
+                <a:latin typeface="Consolas" panose="020B0609020204030204" pitchFamily="49" charset="0"/>
+              </a:rPr>
+              <a:t> 2 bytes, the message length is between 256 and 65535 bytes.</a:t>
+            </a:r>
+          </a:p>
+          <a:p>
+            <a:r>
+              <a:rPr lang="en-US" sz="1800" dirty="0">
+                <a:solidFill>
+                  <a:srgbClr val="000000"/>
+                </a:solidFill>
+                <a:latin typeface="Consolas" panose="020B0609020204030204" pitchFamily="49" charset="0"/>
+              </a:rPr>
+              <a:t>    - </a:t>
+            </a:r>
+            <a:r>
+              <a:rPr lang="en-US" sz="1800" dirty="0">
+                <a:solidFill>
+                  <a:srgbClr val="0000FF"/>
+                </a:solidFill>
+                <a:latin typeface="Consolas" panose="020B0609020204030204" pitchFamily="49" charset="0"/>
+              </a:rPr>
+              <a:t>`10`</a:t>
+            </a:r>
+            <a:r>
+              <a:rPr lang="en-US" sz="1800" dirty="0">
+                <a:solidFill>
+                  <a:srgbClr val="000000"/>
+                </a:solidFill>
+                <a:latin typeface="Consolas" panose="020B0609020204030204" pitchFamily="49" charset="0"/>
+              </a:rPr>
+              <a:t> 3 bytes, the message length is between 65536 and 16 777 215 bytes.</a:t>
+            </a:r>
+          </a:p>
+          <a:p>
+            <a:r>
+              <a:rPr lang="en-US" sz="1800" dirty="0">
+                <a:solidFill>
+                  <a:srgbClr val="000000"/>
+                </a:solidFill>
+                <a:latin typeface="Consolas" panose="020B0609020204030204" pitchFamily="49" charset="0"/>
+              </a:rPr>
+              <a:t>    - </a:t>
+            </a:r>
+            <a:r>
+              <a:rPr lang="en-US" sz="1800" dirty="0">
+                <a:solidFill>
+                  <a:srgbClr val="0000FF"/>
+                </a:solidFill>
+                <a:latin typeface="Consolas" panose="020B0609020204030204" pitchFamily="49" charset="0"/>
+              </a:rPr>
+              <a:t>`11`</a:t>
+            </a:r>
+            <a:r>
+              <a:rPr lang="en-US" sz="1800" dirty="0">
+                <a:solidFill>
+                  <a:srgbClr val="000000"/>
+                </a:solidFill>
+                <a:latin typeface="Consolas" panose="020B0609020204030204" pitchFamily="49" charset="0"/>
+              </a:rPr>
+              <a:t> 4 bytes, the message length is between 16 777 216 and 2 147 483 648 bytes (2 Gib).</a:t>
+            </a:r>
+          </a:p>
+          <a:p>
+            <a:r>
+              <a:rPr lang="en-US" sz="1800" dirty="0">
+                <a:solidFill>
+                  <a:srgbClr val="000000"/>
+                </a:solidFill>
+                <a:latin typeface="Consolas" panose="020B0609020204030204" pitchFamily="49" charset="0"/>
+              </a:rPr>
+              <a:t>  - The </a:t>
+            </a:r>
+            <a:r>
+              <a:rPr lang="en-US" sz="1800" dirty="0">
+                <a:solidFill>
+                  <a:srgbClr val="0000FF"/>
+                </a:solidFill>
+                <a:latin typeface="Consolas" panose="020B0609020204030204" pitchFamily="49" charset="0"/>
+              </a:rPr>
+              <a:t>`CD`</a:t>
+            </a:r>
+            <a:r>
+              <a:rPr lang="en-US" sz="1800" dirty="0">
+                <a:solidFill>
+                  <a:srgbClr val="000000"/>
+                </a:solidFill>
+                <a:latin typeface="Consolas" panose="020B0609020204030204" pitchFamily="49" charset="0"/>
+              </a:rPr>
+              <a:t> bit is the "Control vs. Data" bit. This is a convenient bit that can be used by protocols</a:t>
+            </a:r>
+          </a:p>
+          <a:p>
+            <a:r>
+              <a:rPr lang="en-US" sz="1800" dirty="0">
+                <a:solidFill>
+                  <a:srgbClr val="000000"/>
+                </a:solidFill>
+                <a:latin typeface="Consolas" panose="020B0609020204030204" pitchFamily="49" charset="0"/>
+              </a:rPr>
+              <a:t>    as a one bit discriminator, typically between a regular data message and one (or more) control message.</a:t>
+            </a:r>
+          </a:p>
+          <a:p>
+            <a:r>
+              <a:rPr lang="en-US" sz="1800" dirty="0">
+                <a:solidFill>
+                  <a:srgbClr val="000000"/>
+                </a:solidFill>
+                <a:latin typeface="Consolas" panose="020B0609020204030204" pitchFamily="49" charset="0"/>
+              </a:rPr>
+              <a:t>  - </a:t>
+            </a:r>
+            <a:r>
+              <a:rPr lang="en-US" sz="1800" dirty="0">
+                <a:solidFill>
+                  <a:srgbClr val="0000FF"/>
+                </a:solidFill>
+                <a:latin typeface="Consolas" panose="020B0609020204030204" pitchFamily="49" charset="0"/>
+              </a:rPr>
+              <a:t>`R0`</a:t>
+            </a:r>
+            <a:r>
+              <a:rPr lang="en-US" sz="1800" dirty="0">
+                <a:solidFill>
+                  <a:srgbClr val="000000"/>
+                </a:solidFill>
+                <a:latin typeface="Consolas" panose="020B0609020204030204" pitchFamily="49" charset="0"/>
+              </a:rPr>
+              <a:t> and </a:t>
+            </a:r>
+            <a:r>
+              <a:rPr lang="en-US" sz="1800" dirty="0">
+                <a:solidFill>
+                  <a:srgbClr val="0000FF"/>
+                </a:solidFill>
+                <a:latin typeface="Consolas" panose="020B0609020204030204" pitchFamily="49" charset="0"/>
+              </a:rPr>
+              <a:t>`R1`</a:t>
+            </a:r>
+            <a:r>
+              <a:rPr lang="en-US" sz="1800" dirty="0">
+                <a:solidFill>
+                  <a:srgbClr val="000000"/>
+                </a:solidFill>
+                <a:latin typeface="Consolas" panose="020B0609020204030204" pitchFamily="49" charset="0"/>
+              </a:rPr>
+              <a:t> bit are reserved for future use.</a:t>
+            </a:r>
+          </a:p>
+          <a:p>
+            <a:r>
+              <a:rPr lang="en-US" sz="1800" dirty="0">
+                <a:solidFill>
+                  <a:srgbClr val="000000"/>
+                </a:solidFill>
+                <a:latin typeface="Consolas" panose="020B0609020204030204" pitchFamily="49" charset="0"/>
+              </a:rPr>
+              <a:t>  - P0-P2 bits is the Protocol, a number between 0 and 7. This number defines the "type" of the</a:t>
+            </a:r>
+          </a:p>
+          <a:p>
+            <a:r>
+              <a:rPr lang="en-US" sz="1800" dirty="0">
+                <a:solidFill>
+                  <a:srgbClr val="000000"/>
+                </a:solidFill>
+                <a:latin typeface="Consolas" panose="020B0609020204030204" pitchFamily="49" charset="0"/>
+              </a:rPr>
+              <a:t>  message: the writer or serializer that has been used to write the payload and the reader or "</a:t>
+            </a:r>
+            <a:r>
+              <a:rPr lang="en-US" sz="1800" dirty="0" err="1">
+                <a:solidFill>
+                  <a:srgbClr val="000000"/>
+                </a:solidFill>
+                <a:latin typeface="Consolas" panose="020B0609020204030204" pitchFamily="49" charset="0"/>
+              </a:rPr>
+              <a:t>deserializer</a:t>
+            </a:r>
+            <a:r>
+              <a:rPr lang="en-US" sz="1800" dirty="0">
+                <a:solidFill>
+                  <a:srgbClr val="000000"/>
+                </a:solidFill>
+                <a:latin typeface="Consolas" panose="020B0609020204030204" pitchFamily="49" charset="0"/>
+              </a:rPr>
+              <a:t>"</a:t>
+            </a:r>
+          </a:p>
+          <a:p>
+            <a:r>
+              <a:rPr lang="en-US" sz="1800" dirty="0">
+                <a:solidFill>
+                  <a:srgbClr val="000000"/>
+                </a:solidFill>
+                <a:latin typeface="Consolas" panose="020B0609020204030204" pitchFamily="49" charset="0"/>
+              </a:rPr>
+              <a:t>  that must be used to read it back.</a:t>
+            </a:r>
+          </a:p>
+          <a:p>
+            <a:r>
+              <a:rPr lang="en-US" sz="1800" dirty="0">
+                <a:solidFill>
+                  <a:srgbClr val="000000"/>
+                </a:solidFill>
+                <a:latin typeface="Consolas" panose="020B0609020204030204" pitchFamily="49" charset="0"/>
+              </a:rPr>
+              <a:t>- Then comes the message length itself (1 to 4 bytes)</a:t>
+            </a:r>
+          </a:p>
+          <a:p>
+            <a:r>
+              <a:rPr lang="en-US" sz="1800" dirty="0">
+                <a:solidFill>
+                  <a:srgbClr val="000000"/>
+                </a:solidFill>
+                <a:latin typeface="Consolas" panose="020B0609020204030204" pitchFamily="49" charset="0"/>
+              </a:rPr>
+              <a:t>- Then the message payload itself.</a:t>
+            </a:r>
+          </a:p>
+          <a:p>
+            <a:endParaRPr lang="en-US" sz="1800" dirty="0">
+              <a:solidFill>
+                <a:srgbClr val="000000"/>
+              </a:solidFill>
+              <a:latin typeface="Consolas" panose="020B0609020204030204" pitchFamily="49" charset="0"/>
+            </a:endParaRPr>
+          </a:p>
+          <a:p>
+            <a:r>
+              <a:rPr lang="en-US" sz="1800" dirty="0">
+                <a:solidFill>
+                  <a:srgbClr val="000000"/>
+                </a:solidFill>
+                <a:latin typeface="Consolas" panose="020B0609020204030204" pitchFamily="49" charset="0"/>
+              </a:rPr>
+              <a:t>At a higher level </a:t>
+            </a:r>
+            <a:r>
+              <a:rPr lang="en-US" sz="1800" dirty="0">
+                <a:solidFill>
+                  <a:srgbClr val="A31515"/>
+                </a:solidFill>
+                <a:latin typeface="Consolas" panose="020B0609020204030204" pitchFamily="49" charset="0"/>
+              </a:rPr>
+              <a:t>"</a:t>
+            </a:r>
+            <a:r>
+              <a:rPr lang="en-US" sz="1800" dirty="0" err="1">
+                <a:solidFill>
+                  <a:srgbClr val="000000"/>
+                </a:solidFill>
+                <a:latin typeface="Consolas" panose="020B0609020204030204" pitchFamily="49" charset="0"/>
+              </a:rPr>
+              <a:t>MessageProtocol</a:t>
+            </a:r>
+            <a:r>
+              <a:rPr lang="en-US" sz="1800" dirty="0">
+                <a:solidFill>
+                  <a:srgbClr val="000000"/>
+                </a:solidFill>
+                <a:latin typeface="Consolas" panose="020B0609020204030204" pitchFamily="49" charset="0"/>
+              </a:rPr>
+              <a:t>” are identified by a string (its unique name).</a:t>
+            </a:r>
+          </a:p>
+          <a:p>
+            <a:r>
+              <a:rPr lang="en-US" sz="1800" dirty="0">
+                <a:solidFill>
+                  <a:srgbClr val="000000"/>
+                </a:solidFill>
+                <a:latin typeface="Consolas" panose="020B0609020204030204" pitchFamily="49" charset="0"/>
+              </a:rPr>
+              <a:t>A protocol defines how the message is encoded and how they are exchanged: by merging these 2 concepts here,</a:t>
+            </a:r>
+          </a:p>
+          <a:p>
+            <a:r>
+              <a:rPr lang="en-US" sz="1800" dirty="0">
+                <a:solidFill>
+                  <a:srgbClr val="000000"/>
+                </a:solidFill>
+                <a:latin typeface="Consolas" panose="020B0609020204030204" pitchFamily="49" charset="0"/>
+              </a:rPr>
+              <a:t>we greatly simplify the implementation and the understandability of the Transport layer. The protocol simply</a:t>
+            </a:r>
+          </a:p>
+          <a:p>
+            <a:r>
+              <a:rPr lang="en-US" sz="1800" dirty="0">
+                <a:solidFill>
+                  <a:srgbClr val="000000"/>
+                </a:solidFill>
+                <a:latin typeface="Consolas" panose="020B0609020204030204" pitchFamily="49" charset="0"/>
+              </a:rPr>
+              <a:t>defines the encoding it uses.</a:t>
+            </a:r>
+          </a:p>
+        </p:txBody>
+      </p:sp>
+      <p:sp>
+        <p:nvSpPr>
+          <p:cNvPr id="4" name="Slide Number Placeholder 3"/>
+          <p:cNvSpPr>
+            <a:spLocks noGrp="1"/>
+          </p:cNvSpPr>
+          <p:nvPr>
+            <p:ph type="sldNum" sz="quarter" idx="5"/>
+          </p:nvPr>
+        </p:nvSpPr>
+        <p:spPr/>
+        <p:txBody>
+          <a:bodyPr/>
+          <a:lstStyle/>
+          <a:p>
+            <a:fld id="{E05EDB92-2FE2-4164-AA27-D03258A20DF4}" type="slidenum">
+              <a:rPr lang="en-US" smtClean="0"/>
+              <a:t>27</a:t>
+            </a:fld>
+            <a:endParaRPr lang="en-US"/>
+          </a:p>
+        </p:txBody>
+      </p:sp>
+    </p:spTree>
+    <p:extLst>
+      <p:ext uri="{BB962C8B-B14F-4D97-AF65-F5344CB8AC3E}">
+        <p14:creationId xmlns:p14="http://schemas.microsoft.com/office/powerpoint/2010/main" val="4115452317"/>
+      </p:ext>
+    </p:extLst>
+  </p:cSld>
+  <p:clrMapOvr>
+    <a:masterClrMapping/>
+  </p:clrMapOvr>
+</p:notes>
+</file>
+
+<file path=ppt/notesSlides/notesSlide7.xml><?xml version="1.0" encoding="utf-8"?>
+<p:notes xmlns:a="http://schemas.openxmlformats.org/drawingml/2006/main" xmlns:r="http://schemas.openxmlformats.org/officeDocument/2006/relationships" xmlns:p="http://schemas.openxmlformats.org/presentationml/2006/main">
+  <p:cSld>
+    <p:spTree>
+      <p:nvGrpSpPr>
+        <p:cNvPr id="1" name=""/>
+        <p:cNvGrpSpPr/>
+        <p:nvPr/>
+      </p:nvGrpSpPr>
+      <p:grpSpPr>
+        <a:xfrm>
+          <a:off x="0" y="0"/>
+          <a:ext cx="0" cy="0"/>
+          <a:chOff x="0" y="0"/>
+          <a:chExt cx="0" cy="0"/>
+        </a:xfrm>
+      </p:grpSpPr>
+      <p:sp>
+        <p:nvSpPr>
+          <p:cNvPr id="2" name="Slide Image Placeholder 1"/>
+          <p:cNvSpPr>
+            <a:spLocks noGrp="1" noRot="1" noChangeAspect="1"/>
+          </p:cNvSpPr>
+          <p:nvPr>
+            <p:ph type="sldImg"/>
+          </p:nvPr>
+        </p:nvSpPr>
+        <p:spPr/>
+      </p:sp>
+      <p:sp>
+        <p:nvSpPr>
+          <p:cNvPr id="3" name="Notes Placeholder 2"/>
+          <p:cNvSpPr>
+            <a:spLocks noGrp="1"/>
+          </p:cNvSpPr>
+          <p:nvPr>
+            <p:ph type="body" idx="1"/>
+          </p:nvPr>
+        </p:nvSpPr>
+        <p:spPr/>
+        <p:txBody>
+          <a:bodyPr/>
+          <a:lstStyle/>
+          <a:p>
+            <a:r>
+              <a:rPr lang="en-US" sz="1800" dirty="0">
+                <a:solidFill>
+                  <a:srgbClr val="000000"/>
+                </a:solidFill>
+                <a:latin typeface="Consolas" panose="020B0609020204030204" pitchFamily="49" charset="0"/>
+              </a:rPr>
+              <a:t>The </a:t>
+            </a:r>
+            <a:r>
+              <a:rPr lang="en-US" sz="1800" dirty="0">
+                <a:solidFill>
+                  <a:srgbClr val="0000FF"/>
+                </a:solidFill>
+                <a:latin typeface="Consolas" panose="020B0609020204030204" pitchFamily="49" charset="0"/>
+              </a:rPr>
+              <a:t>`"0 Protocol"`</a:t>
+            </a:r>
+            <a:r>
+              <a:rPr lang="en-US" sz="1800" dirty="0">
+                <a:solidFill>
+                  <a:srgbClr val="000000"/>
+                </a:solidFill>
+                <a:latin typeface="Consolas" panose="020B0609020204030204" pitchFamily="49" charset="0"/>
+              </a:rPr>
+              <a:t> protocol name is reserved: this is the protocol of </a:t>
+            </a:r>
+            <a:r>
+              <a:rPr lang="en-US" sz="1800" dirty="0" err="1">
+                <a:solidFill>
+                  <a:srgbClr val="000000"/>
+                </a:solidFill>
+                <a:latin typeface="Consolas" panose="020B0609020204030204" pitchFamily="49" charset="0"/>
+              </a:rPr>
+              <a:t>CK.AppIdentity.TransportLayer</a:t>
+            </a:r>
+            <a:r>
+              <a:rPr lang="en-US" sz="1800" dirty="0">
+                <a:solidFill>
+                  <a:srgbClr val="000000"/>
+                </a:solidFill>
+                <a:latin typeface="Consolas" panose="020B0609020204030204" pitchFamily="49" charset="0"/>
+              </a:rPr>
+              <a:t> itself that handles</a:t>
+            </a:r>
+          </a:p>
+          <a:p>
+            <a:r>
+              <a:rPr lang="en-US" sz="1800" dirty="0">
+                <a:solidFill>
+                  <a:srgbClr val="000000"/>
+                </a:solidFill>
+                <a:latin typeface="Consolas" panose="020B0609020204030204" pitchFamily="49" charset="0"/>
+              </a:rPr>
+              <a:t>special messages used to negotiate, accept, reject incoming parties and outgoing connections.</a:t>
+            </a:r>
+          </a:p>
+          <a:p>
+            <a:r>
+              <a:rPr lang="en-US" sz="1800" dirty="0">
+                <a:solidFill>
+                  <a:srgbClr val="000000"/>
+                </a:solidFill>
+                <a:latin typeface="Consolas" panose="020B0609020204030204" pitchFamily="49" charset="0"/>
+              </a:rPr>
+              <a:t>This lets 7 possible protocols. This may seem a limitation however this limit applies to a Remote party pair: there</a:t>
+            </a:r>
+          </a:p>
+          <a:p>
+            <a:r>
+              <a:rPr lang="en-US" sz="1800" dirty="0">
+                <a:solidFill>
+                  <a:srgbClr val="000000"/>
+                </a:solidFill>
+                <a:latin typeface="Consolas" panose="020B0609020204030204" pitchFamily="49" charset="0"/>
+              </a:rPr>
+              <a:t>can be any number of possible protocols in an application, among them 2 parties that start to interact initially</a:t>
+            </a:r>
+          </a:p>
+          <a:p>
+            <a:r>
+              <a:rPr lang="en-US" sz="1800" dirty="0">
+                <a:solidFill>
+                  <a:srgbClr val="000000"/>
+                </a:solidFill>
+                <a:latin typeface="Consolas" panose="020B0609020204030204" pitchFamily="49" charset="0"/>
+              </a:rPr>
+              <a:t>negotiate the ones they can and want to use. Any Transport between 2 parties can support up to 7 different protocols.</a:t>
+            </a:r>
+          </a:p>
+          <a:p>
+            <a:endParaRPr lang="en-US" sz="1800" dirty="0">
+              <a:solidFill>
+                <a:srgbClr val="000000"/>
+              </a:solidFill>
+              <a:latin typeface="Consolas" panose="020B0609020204030204" pitchFamily="49" charset="0"/>
+            </a:endParaRPr>
+          </a:p>
+          <a:p>
+            <a:r>
+              <a:rPr lang="en-US" sz="1800" dirty="0">
+                <a:solidFill>
+                  <a:srgbClr val="000000"/>
+                </a:solidFill>
+                <a:latin typeface="Consolas" panose="020B0609020204030204" pitchFamily="49" charset="0"/>
+              </a:rPr>
+              <a:t>The final length of a message on the wire is between 2 bytes (the special Empty message, see below) and 2 Gib.</a:t>
+            </a:r>
+          </a:p>
+          <a:p>
+            <a:r>
+              <a:rPr lang="en-US" sz="1800" dirty="0">
+                <a:solidFill>
+                  <a:srgbClr val="000000"/>
+                </a:solidFill>
+                <a:latin typeface="Consolas" panose="020B0609020204030204" pitchFamily="49" charset="0"/>
+              </a:rPr>
+              <a:t>A minimal 1 byte message requires 3 bytes (in any of the 7 available protocols). </a:t>
+            </a:r>
+          </a:p>
+          <a:p>
+            <a:endParaRPr lang="en-US" dirty="0"/>
+          </a:p>
+        </p:txBody>
+      </p:sp>
+      <p:sp>
+        <p:nvSpPr>
+          <p:cNvPr id="4" name="Slide Number Placeholder 3"/>
+          <p:cNvSpPr>
+            <a:spLocks noGrp="1"/>
+          </p:cNvSpPr>
+          <p:nvPr>
+            <p:ph type="sldNum" sz="quarter" idx="5"/>
+          </p:nvPr>
+        </p:nvSpPr>
+        <p:spPr/>
+        <p:txBody>
+          <a:bodyPr/>
+          <a:lstStyle/>
+          <a:p>
+            <a:fld id="{E05EDB92-2FE2-4164-AA27-D03258A20DF4}" type="slidenum">
+              <a:rPr lang="en-US" smtClean="0"/>
+              <a:t>28</a:t>
+            </a:fld>
+            <a:endParaRPr lang="en-US"/>
+          </a:p>
+        </p:txBody>
+      </p:sp>
+    </p:spTree>
+    <p:extLst>
+      <p:ext uri="{BB962C8B-B14F-4D97-AF65-F5344CB8AC3E}">
+        <p14:creationId xmlns:p14="http://schemas.microsoft.com/office/powerpoint/2010/main" val="1132549190"/>
+      </p:ext>
+    </p:extLst>
+  </p:cSld>
+  <p:clrMapOvr>
+    <a:masterClrMapping/>
+  </p:clrMapOvr>
+</p:notes>
+</file>
+
 <file path=ppt/slideLayouts/slideLayout1.xml><?xml version="1.0" encoding="utf-8"?>
 <p:sldLayout xmlns:a="http://schemas.openxmlformats.org/drawingml/2006/main" xmlns:r="http://schemas.openxmlformats.org/officeDocument/2006/relationships" xmlns:p="http://schemas.openxmlformats.org/presentationml/2006/main" type="title" preserve="1">
   <p:cSld name="Title Slide">
@@ -768,7 +1843,7 @@
           <a:p>
             <a:fld id="{7D1F2140-8D48-49AC-AD8D-683E6FF4DC34}" type="datetimeFigureOut">
               <a:rPr lang="en-US" smtClean="0"/>
-              <a:t>3/11/2023</a:t>
+              <a:t>4/22/2023</a:t>
             </a:fld>
             <a:endParaRPr lang="en-US"/>
           </a:p>
@@ -966,7 +2041,7 @@
           <a:p>
             <a:fld id="{7D1F2140-8D48-49AC-AD8D-683E6FF4DC34}" type="datetimeFigureOut">
               <a:rPr lang="en-US" smtClean="0"/>
-              <a:t>3/11/2023</a:t>
+              <a:t>4/22/2023</a:t>
             </a:fld>
             <a:endParaRPr lang="en-US"/>
           </a:p>
@@ -1174,7 +2249,7 @@
           <a:p>
             <a:fld id="{7D1F2140-8D48-49AC-AD8D-683E6FF4DC34}" type="datetimeFigureOut">
               <a:rPr lang="en-US" smtClean="0"/>
-              <a:t>3/11/2023</a:t>
+              <a:t>4/22/2023</a:t>
             </a:fld>
             <a:endParaRPr lang="en-US"/>
           </a:p>
@@ -1372,7 +2447,7 @@
           <a:p>
             <a:fld id="{7D1F2140-8D48-49AC-AD8D-683E6FF4DC34}" type="datetimeFigureOut">
               <a:rPr lang="en-US" smtClean="0"/>
-              <a:t>3/11/2023</a:t>
+              <a:t>4/22/2023</a:t>
             </a:fld>
             <a:endParaRPr lang="en-US"/>
           </a:p>
@@ -1647,7 +2722,7 @@
           <a:p>
             <a:fld id="{7D1F2140-8D48-49AC-AD8D-683E6FF4DC34}" type="datetimeFigureOut">
               <a:rPr lang="en-US" smtClean="0"/>
-              <a:t>3/11/2023</a:t>
+              <a:t>4/22/2023</a:t>
             </a:fld>
             <a:endParaRPr lang="en-US"/>
           </a:p>
@@ -1912,7 +2987,7 @@
           <a:p>
             <a:fld id="{7D1F2140-8D48-49AC-AD8D-683E6FF4DC34}" type="datetimeFigureOut">
               <a:rPr lang="en-US" smtClean="0"/>
-              <a:t>3/11/2023</a:t>
+              <a:t>4/22/2023</a:t>
             </a:fld>
             <a:endParaRPr lang="en-US"/>
           </a:p>
@@ -2324,7 +3399,7 @@
           <a:p>
             <a:fld id="{7D1F2140-8D48-49AC-AD8D-683E6FF4DC34}" type="datetimeFigureOut">
               <a:rPr lang="en-US" smtClean="0"/>
-              <a:t>3/11/2023</a:t>
+              <a:t>4/22/2023</a:t>
             </a:fld>
             <a:endParaRPr lang="en-US"/>
           </a:p>
@@ -2465,7 +3540,7 @@
           <a:p>
             <a:fld id="{7D1F2140-8D48-49AC-AD8D-683E6FF4DC34}" type="datetimeFigureOut">
               <a:rPr lang="en-US" smtClean="0"/>
-              <a:t>3/11/2023</a:t>
+              <a:t>4/22/2023</a:t>
             </a:fld>
             <a:endParaRPr lang="en-US"/>
           </a:p>
@@ -2578,7 +3653,7 @@
           <a:p>
             <a:fld id="{7D1F2140-8D48-49AC-AD8D-683E6FF4DC34}" type="datetimeFigureOut">
               <a:rPr lang="en-US" smtClean="0"/>
-              <a:t>3/11/2023</a:t>
+              <a:t>4/22/2023</a:t>
             </a:fld>
             <a:endParaRPr lang="en-US"/>
           </a:p>
@@ -2889,7 +3964,7 @@
           <a:p>
             <a:fld id="{7D1F2140-8D48-49AC-AD8D-683E6FF4DC34}" type="datetimeFigureOut">
               <a:rPr lang="en-US" smtClean="0"/>
-              <a:t>3/11/2023</a:t>
+              <a:t>4/22/2023</a:t>
             </a:fld>
             <a:endParaRPr lang="en-US"/>
           </a:p>
@@ -3177,7 +4252,7 @@
           <a:p>
             <a:fld id="{7D1F2140-8D48-49AC-AD8D-683E6FF4DC34}" type="datetimeFigureOut">
               <a:rPr lang="en-US" smtClean="0"/>
-              <a:t>3/11/2023</a:t>
+              <a:t>4/22/2023</a:t>
             </a:fld>
             <a:endParaRPr lang="en-US"/>
           </a:p>
@@ -3418,7 +4493,7 @@
           <a:p>
             <a:fld id="{7D1F2140-8D48-49AC-AD8D-683E6FF4DC34}" type="datetimeFigureOut">
               <a:rPr lang="en-US" smtClean="0"/>
-              <a:t>3/11/2023</a:t>
+              <a:t>4/22/2023</a:t>
             </a:fld>
             <a:endParaRPr lang="en-US"/>
           </a:p>
@@ -8913,6 +9988,99 @@
 </p:sld>
 </file>
 
+<file path=ppt/slides/slide19.xml><?xml version="1.0" encoding="utf-8"?>
+<p:sld xmlns:a="http://schemas.openxmlformats.org/drawingml/2006/main" xmlns:r="http://schemas.openxmlformats.org/officeDocument/2006/relationships" xmlns:p="http://schemas.openxmlformats.org/presentationml/2006/main">
+  <p:cSld>
+    <p:spTree>
+      <p:nvGrpSpPr>
+        <p:cNvPr id="1" name=""/>
+        <p:cNvGrpSpPr/>
+        <p:nvPr/>
+      </p:nvGrpSpPr>
+      <p:grpSpPr>
+        <a:xfrm>
+          <a:off x="0" y="0"/>
+          <a:ext cx="0" cy="0"/>
+          <a:chOff x="0" y="0"/>
+          <a:chExt cx="0" cy="0"/>
+        </a:xfrm>
+      </p:grpSpPr>
+      <p:sp>
+        <p:nvSpPr>
+          <p:cNvPr id="2" name="Title 1">
+            <a:extLst>
+              <a:ext uri="{FF2B5EF4-FFF2-40B4-BE49-F238E27FC236}">
+                <a16:creationId xmlns:a16="http://schemas.microsoft.com/office/drawing/2014/main" id="{A798245F-DD26-ADCC-6CD2-D5ED5F5598A9}"/>
+              </a:ext>
+            </a:extLst>
+          </p:cNvPr>
+          <p:cNvSpPr>
+            <a:spLocks noGrp="1"/>
+          </p:cNvSpPr>
+          <p:nvPr>
+            <p:ph type="title"/>
+          </p:nvPr>
+        </p:nvSpPr>
+        <p:spPr/>
+        <p:txBody>
+          <a:bodyPr/>
+          <a:lstStyle/>
+          <a:p>
+            <a:r>
+              <a:rPr lang="en-US" dirty="0"/>
+              <a:t>A simple Configuration Model</a:t>
+            </a:r>
+          </a:p>
+        </p:txBody>
+      </p:sp>
+      <p:pic>
+        <p:nvPicPr>
+          <p:cNvPr id="9" name="Content Placeholder 8" descr="Class diagram.">
+            <a:extLst>
+              <a:ext uri="{FF2B5EF4-FFF2-40B4-BE49-F238E27FC236}">
+                <a16:creationId xmlns:a16="http://schemas.microsoft.com/office/drawing/2014/main" id="{EB82A400-7337-4C1F-868E-D34B84F5DF2F}"/>
+              </a:ext>
+            </a:extLst>
+          </p:cNvPr>
+          <p:cNvPicPr>
+            <a:picLocks noGrp="1" noChangeAspect="1"/>
+          </p:cNvPicPr>
+          <p:nvPr>
+            <p:ph idx="1"/>
+          </p:nvPr>
+        </p:nvPicPr>
+        <p:blipFill>
+          <a:blip r:embed="rId2">
+            <a:extLst>
+              <a:ext uri="{28A0092B-C50C-407E-A947-70E740481C1C}">
+                <a14:useLocalDpi xmlns:a14="http://schemas.microsoft.com/office/drawing/2010/main" val="0"/>
+              </a:ext>
+            </a:extLst>
+          </a:blip>
+          <a:stretch>
+            <a:fillRect/>
+          </a:stretch>
+        </p:blipFill>
+        <p:spPr>
+          <a:xfrm>
+            <a:off x="292025" y="1585180"/>
+            <a:ext cx="11794531" cy="4802187"/>
+          </a:xfrm>
+        </p:spPr>
+      </p:pic>
+    </p:spTree>
+    <p:extLst>
+      <p:ext uri="{BB962C8B-B14F-4D97-AF65-F5344CB8AC3E}">
+        <p14:creationId xmlns:p14="http://schemas.microsoft.com/office/powerpoint/2010/main" val="2483408436"/>
+      </p:ext>
+    </p:extLst>
+  </p:cSld>
+  <p:clrMapOvr>
+    <a:masterClrMapping/>
+  </p:clrMapOvr>
+</p:sld>
+</file>
+
 <file path=ppt/slides/slide2.xml><?xml version="1.0" encoding="utf-8"?>
 <p:sld xmlns:a="http://schemas.openxmlformats.org/drawingml/2006/main" xmlns:r="http://schemas.openxmlformats.org/officeDocument/2006/relationships" xmlns:p="http://schemas.openxmlformats.org/presentationml/2006/main">
   <p:cSld>
@@ -9076,6 +10244,3715 @@
     <p:extLst>
       <p:ext uri="{BB962C8B-B14F-4D97-AF65-F5344CB8AC3E}">
         <p14:creationId xmlns:p14="http://schemas.microsoft.com/office/powerpoint/2010/main" val="3650337766"/>
+      </p:ext>
+    </p:extLst>
+  </p:cSld>
+  <p:clrMapOvr>
+    <a:masterClrMapping/>
+  </p:clrMapOvr>
+</p:sld>
+</file>
+
+<file path=ppt/slides/slide20.xml><?xml version="1.0" encoding="utf-8"?>
+<p:sld xmlns:a="http://schemas.openxmlformats.org/drawingml/2006/main" xmlns:r="http://schemas.openxmlformats.org/officeDocument/2006/relationships" xmlns:p="http://schemas.openxmlformats.org/presentationml/2006/main">
+  <p:cSld>
+    <p:spTree>
+      <p:nvGrpSpPr>
+        <p:cNvPr id="1" name=""/>
+        <p:cNvGrpSpPr/>
+        <p:nvPr/>
+      </p:nvGrpSpPr>
+      <p:grpSpPr>
+        <a:xfrm>
+          <a:off x="0" y="0"/>
+          <a:ext cx="0" cy="0"/>
+          <a:chOff x="0" y="0"/>
+          <a:chExt cx="0" cy="0"/>
+        </a:xfrm>
+      </p:grpSpPr>
+      <p:sp>
+        <p:nvSpPr>
+          <p:cNvPr id="2" name="Title 1">
+            <a:extLst>
+              <a:ext uri="{FF2B5EF4-FFF2-40B4-BE49-F238E27FC236}">
+                <a16:creationId xmlns:a16="http://schemas.microsoft.com/office/drawing/2014/main" id="{0023BC01-7B97-621A-1FC3-D810DD84552B}"/>
+              </a:ext>
+            </a:extLst>
+          </p:cNvPr>
+          <p:cNvSpPr>
+            <a:spLocks noGrp="1"/>
+          </p:cNvSpPr>
+          <p:nvPr>
+            <p:ph type="title"/>
+          </p:nvPr>
+        </p:nvSpPr>
+        <p:spPr/>
+        <p:txBody>
+          <a:bodyPr/>
+          <a:lstStyle/>
+          <a:p>
+            <a:r>
+              <a:rPr lang="en-US"/>
+              <a:t>Exploit the .Net Configuration model</a:t>
+            </a:r>
+            <a:endParaRPr lang="en-US" dirty="0"/>
+          </a:p>
+        </p:txBody>
+      </p:sp>
+      <p:sp>
+        <p:nvSpPr>
+          <p:cNvPr id="3" name="Content Placeholder 2">
+            <a:extLst>
+              <a:ext uri="{FF2B5EF4-FFF2-40B4-BE49-F238E27FC236}">
+                <a16:creationId xmlns:a16="http://schemas.microsoft.com/office/drawing/2014/main" id="{71674851-0267-8A9E-EE42-41E103A0A22E}"/>
+              </a:ext>
+            </a:extLst>
+          </p:cNvPr>
+          <p:cNvSpPr>
+            <a:spLocks noGrp="1"/>
+          </p:cNvSpPr>
+          <p:nvPr>
+            <p:ph idx="1"/>
+          </p:nvPr>
+        </p:nvSpPr>
+        <p:spPr>
+          <a:xfrm>
+            <a:off x="838200" y="1825624"/>
+            <a:ext cx="10515600" cy="4879976"/>
+          </a:xfrm>
+        </p:spPr>
+        <p:txBody>
+          <a:bodyPr/>
+          <a:lstStyle/>
+          <a:p>
+            <a:r>
+              <a:rPr lang="en-US" sz="2800">
+                <a:solidFill>
+                  <a:srgbClr val="000000"/>
+                </a:solidFill>
+                <a:latin typeface="Consolas" panose="020B0609020204030204" pitchFamily="49" charset="0"/>
+              </a:rPr>
+              <a:t>ApplicationIdentityConfiguration </a:t>
+            </a:r>
+            <a:r>
+              <a:rPr lang="en-US"/>
+              <a:t>supports any .Net Configuration source.</a:t>
+            </a:r>
+            <a:br>
+              <a:rPr lang="en-US"/>
+            </a:br>
+            <a:endParaRPr lang="en-US" sz="1400"/>
+          </a:p>
+          <a:p>
+            <a:endParaRPr lang="en-US"/>
+          </a:p>
+          <a:p>
+            <a:endParaRPr lang="en-US"/>
+          </a:p>
+          <a:p>
+            <a:r>
+              <a:rPr lang="en-US"/>
+              <a:t>Provides 2 helpers and MutableConfigurationSection and ImmutableConfigurationSection to support direct manipulation code</a:t>
+            </a:r>
+            <a:endParaRPr lang="en-US" dirty="0"/>
+          </a:p>
+        </p:txBody>
+      </p:sp>
+      <p:sp>
+        <p:nvSpPr>
+          <p:cNvPr id="5" name="TextBox 4">
+            <a:extLst>
+              <a:ext uri="{FF2B5EF4-FFF2-40B4-BE49-F238E27FC236}">
+                <a16:creationId xmlns:a16="http://schemas.microsoft.com/office/drawing/2014/main" id="{D8A48426-17BB-0C9E-781D-10055513B8B9}"/>
+              </a:ext>
+            </a:extLst>
+          </p:cNvPr>
+          <p:cNvSpPr txBox="1"/>
+          <p:nvPr/>
+        </p:nvSpPr>
+        <p:spPr>
+          <a:xfrm>
+            <a:off x="1066803" y="4760763"/>
+            <a:ext cx="10609382" cy="1815882"/>
+          </a:xfrm>
+          <a:prstGeom prst="rect">
+            <a:avLst/>
+          </a:prstGeom>
+          <a:noFill/>
+        </p:spPr>
+        <p:txBody>
+          <a:bodyPr wrap="square">
+            <a:spAutoFit/>
+          </a:bodyPr>
+          <a:lstStyle/>
+          <a:p>
+            <a:r>
+              <a:rPr lang="en-US" sz="1600">
+                <a:solidFill>
+                  <a:srgbClr val="0000FF"/>
+                </a:solidFill>
+                <a:latin typeface="Consolas" panose="020B0609020204030204" pitchFamily="49" charset="0"/>
+              </a:rPr>
+              <a:t>var</a:t>
+            </a:r>
+            <a:r>
+              <a:rPr lang="en-US" sz="1600">
+                <a:solidFill>
+                  <a:srgbClr val="000000"/>
+                </a:solidFill>
+                <a:latin typeface="Consolas" panose="020B0609020204030204" pitchFamily="49" charset="0"/>
+              </a:rPr>
+              <a:t> configuration = ApplicationIdentityConfiguration.Create( monitor, c =&gt;</a:t>
+            </a:r>
+          </a:p>
+          <a:p>
+            <a:r>
+              <a:rPr lang="en-US" sz="1600">
+                <a:solidFill>
+                  <a:srgbClr val="000000"/>
+                </a:solidFill>
+                <a:latin typeface="Consolas" panose="020B0609020204030204" pitchFamily="49" charset="0"/>
+              </a:rPr>
+              <a:t>{</a:t>
+            </a:r>
+          </a:p>
+          <a:p>
+            <a:r>
+              <a:rPr lang="en-US" sz="1600">
+                <a:solidFill>
+                  <a:srgbClr val="000000"/>
+                </a:solidFill>
+                <a:latin typeface="Consolas" panose="020B0609020204030204" pitchFamily="49" charset="0"/>
+              </a:rPr>
+              <a:t>  c[</a:t>
+            </a:r>
+            <a:r>
+              <a:rPr lang="en-US" sz="1600">
+                <a:solidFill>
+                  <a:srgbClr val="A31515"/>
+                </a:solidFill>
+                <a:latin typeface="Consolas" panose="020B0609020204030204" pitchFamily="49" charset="0"/>
+              </a:rPr>
+              <a:t>"DomainName"</a:t>
+            </a:r>
+            <a:r>
+              <a:rPr lang="en-US" sz="1600">
+                <a:solidFill>
+                  <a:srgbClr val="000000"/>
+                </a:solidFill>
+                <a:latin typeface="Consolas" panose="020B0609020204030204" pitchFamily="49" charset="0"/>
+              </a:rPr>
+              <a:t>] = </a:t>
+            </a:r>
+            <a:r>
+              <a:rPr lang="en-US" sz="1600">
+                <a:solidFill>
+                  <a:srgbClr val="A31515"/>
+                </a:solidFill>
+                <a:latin typeface="Consolas" panose="020B0609020204030204" pitchFamily="49" charset="0"/>
+              </a:rPr>
+              <a:t>"Test"</a:t>
+            </a:r>
+            <a:r>
+              <a:rPr lang="en-US" sz="1600">
+                <a:solidFill>
+                  <a:srgbClr val="000000"/>
+                </a:solidFill>
+                <a:latin typeface="Consolas" panose="020B0609020204030204" pitchFamily="49" charset="0"/>
+              </a:rPr>
+              <a:t>;</a:t>
+            </a:r>
+          </a:p>
+          <a:p>
+            <a:r>
+              <a:rPr lang="en-US" sz="1600">
+                <a:solidFill>
+                  <a:srgbClr val="000000"/>
+                </a:solidFill>
+                <a:latin typeface="Consolas" panose="020B0609020204030204" pitchFamily="49" charset="0"/>
+              </a:rPr>
+              <a:t>  c[</a:t>
+            </a:r>
+            <a:r>
+              <a:rPr lang="en-US" sz="1600">
+                <a:solidFill>
+                  <a:srgbClr val="A31515"/>
+                </a:solidFill>
+                <a:latin typeface="Consolas" panose="020B0609020204030204" pitchFamily="49" charset="0"/>
+              </a:rPr>
+              <a:t>"Local:Name"</a:t>
+            </a:r>
+            <a:r>
+              <a:rPr lang="en-US" sz="1600">
+                <a:solidFill>
+                  <a:srgbClr val="000000"/>
+                </a:solidFill>
+                <a:latin typeface="Consolas" panose="020B0609020204030204" pitchFamily="49" charset="0"/>
+              </a:rPr>
+              <a:t>] = </a:t>
+            </a:r>
+            <a:r>
+              <a:rPr lang="en-US" sz="1600">
+                <a:solidFill>
+                  <a:srgbClr val="A31515"/>
+                </a:solidFill>
+                <a:latin typeface="Consolas" panose="020B0609020204030204" pitchFamily="49" charset="0"/>
+              </a:rPr>
+              <a:t>"Listener"</a:t>
+            </a:r>
+            <a:r>
+              <a:rPr lang="en-US" sz="1600">
+                <a:solidFill>
+                  <a:srgbClr val="000000"/>
+                </a:solidFill>
+                <a:latin typeface="Consolas" panose="020B0609020204030204" pitchFamily="49" charset="0"/>
+              </a:rPr>
+              <a:t>;</a:t>
+            </a:r>
+          </a:p>
+          <a:p>
+            <a:r>
+              <a:rPr lang="en-US" sz="1600">
+                <a:solidFill>
+                  <a:srgbClr val="000000"/>
+                </a:solidFill>
+                <a:latin typeface="Consolas" panose="020B0609020204030204" pitchFamily="49" charset="0"/>
+              </a:rPr>
+              <a:t>  c[</a:t>
+            </a:r>
+            <a:r>
+              <a:rPr lang="en-US" sz="1600">
+                <a:solidFill>
+                  <a:srgbClr val="A31515"/>
+                </a:solidFill>
+                <a:latin typeface="Consolas" panose="020B0609020204030204" pitchFamily="49" charset="0"/>
+              </a:rPr>
+              <a:t>"Remotes:0:Name"</a:t>
+            </a:r>
+            <a:r>
+              <a:rPr lang="en-US" sz="1600">
+                <a:solidFill>
+                  <a:srgbClr val="000000"/>
+                </a:solidFill>
+                <a:latin typeface="Consolas" panose="020B0609020204030204" pitchFamily="49" charset="0"/>
+              </a:rPr>
+              <a:t>] = </a:t>
+            </a:r>
+            <a:r>
+              <a:rPr lang="en-US" sz="1600">
+                <a:solidFill>
+                  <a:srgbClr val="A31515"/>
+                </a:solidFill>
+                <a:latin typeface="Consolas" panose="020B0609020204030204" pitchFamily="49" charset="0"/>
+              </a:rPr>
+              <a:t>"Sender"</a:t>
+            </a:r>
+            <a:r>
+              <a:rPr lang="en-US" sz="1600">
+                <a:solidFill>
+                  <a:srgbClr val="000000"/>
+                </a:solidFill>
+                <a:latin typeface="Consolas" panose="020B0609020204030204" pitchFamily="49" charset="0"/>
+              </a:rPr>
+              <a:t>;</a:t>
+            </a:r>
+          </a:p>
+          <a:p>
+            <a:r>
+              <a:rPr lang="en-US" sz="1600">
+                <a:solidFill>
+                  <a:srgbClr val="000000"/>
+                </a:solidFill>
+                <a:latin typeface="Consolas" panose="020B0609020204030204" pitchFamily="49" charset="0"/>
+              </a:rPr>
+              <a:t>  c[</a:t>
+            </a:r>
+            <a:r>
+              <a:rPr lang="en-US" sz="1600">
+                <a:solidFill>
+                  <a:srgbClr val="A31515"/>
+                </a:solidFill>
+                <a:latin typeface="Consolas" panose="020B0609020204030204" pitchFamily="49" charset="0"/>
+              </a:rPr>
+              <a:t>"AllowFeatures"</a:t>
+            </a:r>
+            <a:r>
+              <a:rPr lang="en-US" sz="1600">
+                <a:solidFill>
+                  <a:srgbClr val="000000"/>
+                </a:solidFill>
+                <a:latin typeface="Consolas" panose="020B0609020204030204" pitchFamily="49" charset="0"/>
+              </a:rPr>
+              <a:t>] = </a:t>
+            </a:r>
+            <a:r>
+              <a:rPr lang="en-US" sz="1600">
+                <a:solidFill>
+                  <a:srgbClr val="A31515"/>
+                </a:solidFill>
+                <a:latin typeface="Consolas" panose="020B0609020204030204" pitchFamily="49" charset="0"/>
+              </a:rPr>
+              <a:t>"BlobChannel"</a:t>
+            </a:r>
+            <a:r>
+              <a:rPr lang="en-US" sz="1600">
+                <a:solidFill>
+                  <a:srgbClr val="000000"/>
+                </a:solidFill>
+                <a:latin typeface="Consolas" panose="020B0609020204030204" pitchFamily="49" charset="0"/>
+              </a:rPr>
+              <a:t>;</a:t>
+            </a:r>
+          </a:p>
+          <a:p>
+            <a:r>
+              <a:rPr lang="en-US" sz="1600">
+                <a:solidFill>
+                  <a:srgbClr val="000000"/>
+                </a:solidFill>
+                <a:latin typeface="Consolas" panose="020B0609020204030204" pitchFamily="49" charset="0"/>
+              </a:rPr>
+              <a:t>} );</a:t>
+            </a:r>
+            <a:endParaRPr lang="en-US" sz="1600" dirty="0"/>
+          </a:p>
+        </p:txBody>
+      </p:sp>
+      <p:sp>
+        <p:nvSpPr>
+          <p:cNvPr id="8" name="TextBox 7">
+            <a:extLst>
+              <a:ext uri="{FF2B5EF4-FFF2-40B4-BE49-F238E27FC236}">
+                <a16:creationId xmlns:a16="http://schemas.microsoft.com/office/drawing/2014/main" id="{C00B2343-7BBF-FDBA-3857-E5364B963659}"/>
+              </a:ext>
+            </a:extLst>
+          </p:cNvPr>
+          <p:cNvSpPr txBox="1"/>
+          <p:nvPr/>
+        </p:nvSpPr>
+        <p:spPr>
+          <a:xfrm>
+            <a:off x="644770" y="2754585"/>
+            <a:ext cx="11183815" cy="1077218"/>
+          </a:xfrm>
+          <a:prstGeom prst="rect">
+            <a:avLst/>
+          </a:prstGeom>
+          <a:noFill/>
+        </p:spPr>
+        <p:txBody>
+          <a:bodyPr wrap="square">
+            <a:spAutoFit/>
+          </a:bodyPr>
+          <a:lstStyle/>
+          <a:p>
+            <a:r>
+              <a:rPr lang="en-US" sz="1600">
+                <a:solidFill>
+                  <a:srgbClr val="0000FF"/>
+                </a:solidFill>
+                <a:latin typeface="Consolas" panose="020B0609020204030204" pitchFamily="49" charset="0"/>
+              </a:rPr>
+              <a:t>static</a:t>
+            </a:r>
+            <a:r>
+              <a:rPr lang="en-US" sz="1600">
+                <a:solidFill>
+                  <a:srgbClr val="000000"/>
+                </a:solidFill>
+                <a:latin typeface="Consolas" panose="020B0609020204030204" pitchFamily="49" charset="0"/>
+              </a:rPr>
+              <a:t> ApplicationIdentityConfiguration? Create( IActivityMonitor monitor,</a:t>
+            </a:r>
+          </a:p>
+          <a:p>
+            <a:r>
+              <a:rPr lang="en-US" sz="1600">
+                <a:solidFill>
+                  <a:srgbClr val="000000"/>
+                </a:solidFill>
+                <a:latin typeface="Consolas" panose="020B0609020204030204" pitchFamily="49" charset="0"/>
+              </a:rPr>
+              <a:t>						IConfigurationSection configuration,</a:t>
+            </a:r>
+          </a:p>
+          <a:p>
+            <a:r>
+              <a:rPr lang="en-US" sz="1600">
+                <a:solidFill>
+                  <a:srgbClr val="0000FF"/>
+                </a:solidFill>
+                <a:latin typeface="Consolas" panose="020B0609020204030204" pitchFamily="49" charset="0"/>
+              </a:rPr>
+              <a:t>						string</a:t>
+            </a:r>
+            <a:r>
+              <a:rPr lang="en-US" sz="1600">
+                <a:solidFill>
+                  <a:srgbClr val="000000"/>
+                </a:solidFill>
+                <a:latin typeface="Consolas" panose="020B0609020204030204" pitchFamily="49" charset="0"/>
+              </a:rPr>
+              <a:t>? defaultLocalName = </a:t>
+            </a:r>
+            <a:r>
+              <a:rPr lang="en-US" sz="1600">
+                <a:solidFill>
+                  <a:srgbClr val="0000FF"/>
+                </a:solidFill>
+                <a:latin typeface="Consolas" panose="020B0609020204030204" pitchFamily="49" charset="0"/>
+              </a:rPr>
+              <a:t>null</a:t>
+            </a:r>
+            <a:r>
+              <a:rPr lang="en-US" sz="1600">
+                <a:solidFill>
+                  <a:srgbClr val="000000"/>
+                </a:solidFill>
+                <a:latin typeface="Consolas" panose="020B0609020204030204" pitchFamily="49" charset="0"/>
+              </a:rPr>
+              <a:t>,</a:t>
+            </a:r>
+          </a:p>
+          <a:p>
+            <a:r>
+              <a:rPr lang="en-US" sz="1600">
+                <a:solidFill>
+                  <a:srgbClr val="0000FF"/>
+                </a:solidFill>
+                <a:latin typeface="Consolas" panose="020B0609020204030204" pitchFamily="49" charset="0"/>
+              </a:rPr>
+              <a:t>						string</a:t>
+            </a:r>
+            <a:r>
+              <a:rPr lang="en-US" sz="1600">
+                <a:solidFill>
+                  <a:srgbClr val="000000"/>
+                </a:solidFill>
+                <a:latin typeface="Consolas" panose="020B0609020204030204" pitchFamily="49" charset="0"/>
+              </a:rPr>
+              <a:t>? defaultEnvironmentName = </a:t>
+            </a:r>
+            <a:r>
+              <a:rPr lang="en-US" sz="1600">
+                <a:solidFill>
+                  <a:srgbClr val="A31515"/>
+                </a:solidFill>
+                <a:latin typeface="Consolas" panose="020B0609020204030204" pitchFamily="49" charset="0"/>
+              </a:rPr>
+              <a:t>"Development"</a:t>
+            </a:r>
+            <a:r>
+              <a:rPr lang="en-US" sz="1600">
+                <a:solidFill>
+                  <a:srgbClr val="000000"/>
+                </a:solidFill>
+                <a:latin typeface="Consolas" panose="020B0609020204030204" pitchFamily="49" charset="0"/>
+              </a:rPr>
+              <a:t> )</a:t>
+            </a:r>
+            <a:endParaRPr lang="en-US" sz="1600" dirty="0"/>
+          </a:p>
+        </p:txBody>
+      </p:sp>
+    </p:spTree>
+    <p:extLst>
+      <p:ext uri="{BB962C8B-B14F-4D97-AF65-F5344CB8AC3E}">
+        <p14:creationId xmlns:p14="http://schemas.microsoft.com/office/powerpoint/2010/main" val="2135786393"/>
+      </p:ext>
+    </p:extLst>
+  </p:cSld>
+  <p:clrMapOvr>
+    <a:masterClrMapping/>
+  </p:clrMapOvr>
+</p:sld>
+</file>
+
+<file path=ppt/slides/slide21.xml><?xml version="1.0" encoding="utf-8"?>
+<p:sld xmlns:a="http://schemas.openxmlformats.org/drawingml/2006/main" xmlns:r="http://schemas.openxmlformats.org/officeDocument/2006/relationships" xmlns:p="http://schemas.openxmlformats.org/presentationml/2006/main">
+  <p:cSld>
+    <p:spTree>
+      <p:nvGrpSpPr>
+        <p:cNvPr id="1" name=""/>
+        <p:cNvGrpSpPr/>
+        <p:nvPr/>
+      </p:nvGrpSpPr>
+      <p:grpSpPr>
+        <a:xfrm>
+          <a:off x="0" y="0"/>
+          <a:ext cx="0" cy="0"/>
+          <a:chOff x="0" y="0"/>
+          <a:chExt cx="0" cy="0"/>
+        </a:xfrm>
+      </p:grpSpPr>
+      <p:sp>
+        <p:nvSpPr>
+          <p:cNvPr id="2" name="Title 1">
+            <a:extLst>
+              <a:ext uri="{FF2B5EF4-FFF2-40B4-BE49-F238E27FC236}">
+                <a16:creationId xmlns:a16="http://schemas.microsoft.com/office/drawing/2014/main" id="{D789E005-AE23-CC8A-D9FD-5DE8B5239378}"/>
+              </a:ext>
+            </a:extLst>
+          </p:cNvPr>
+          <p:cNvSpPr>
+            <a:spLocks noGrp="1"/>
+          </p:cNvSpPr>
+          <p:nvPr>
+            <p:ph type="title"/>
+          </p:nvPr>
+        </p:nvSpPr>
+        <p:spPr/>
+        <p:txBody>
+          <a:bodyPr/>
+          <a:lstStyle/>
+          <a:p>
+            <a:r>
+              <a:rPr lang="en-US"/>
+              <a:t>Runtime Model</a:t>
+            </a:r>
+            <a:endParaRPr lang="en-US" dirty="0"/>
+          </a:p>
+        </p:txBody>
+      </p:sp>
+      <p:pic>
+        <p:nvPicPr>
+          <p:cNvPr id="10" name="Content Placeholder 9" descr="Diagram&#10;&#10;Description automatically generated">
+            <a:extLst>
+              <a:ext uri="{FF2B5EF4-FFF2-40B4-BE49-F238E27FC236}">
+                <a16:creationId xmlns:a16="http://schemas.microsoft.com/office/drawing/2014/main" id="{C7A97C5F-BEC2-106C-7C1F-260735E04677}"/>
+              </a:ext>
+            </a:extLst>
+          </p:cNvPr>
+          <p:cNvPicPr>
+            <a:picLocks noGrp="1" noChangeAspect="1"/>
+          </p:cNvPicPr>
+          <p:nvPr>
+            <p:ph idx="1"/>
+          </p:nvPr>
+        </p:nvPicPr>
+        <p:blipFill>
+          <a:blip r:embed="rId3">
+            <a:extLst>
+              <a:ext uri="{28A0092B-C50C-407E-A947-70E740481C1C}">
+                <a14:useLocalDpi xmlns:a14="http://schemas.microsoft.com/office/drawing/2010/main" val="0"/>
+              </a:ext>
+            </a:extLst>
+          </a:blip>
+          <a:stretch>
+            <a:fillRect/>
+          </a:stretch>
+        </p:blipFill>
+        <p:spPr>
+          <a:xfrm>
+            <a:off x="6845938" y="269631"/>
+            <a:ext cx="4963777" cy="6223244"/>
+          </a:xfrm>
+        </p:spPr>
+      </p:pic>
+      <p:sp>
+        <p:nvSpPr>
+          <p:cNvPr id="11" name="Content Placeholder 2">
+            <a:extLst>
+              <a:ext uri="{FF2B5EF4-FFF2-40B4-BE49-F238E27FC236}">
+                <a16:creationId xmlns:a16="http://schemas.microsoft.com/office/drawing/2014/main" id="{8C3E3FC0-3C38-85FF-9917-A63D6C4B2A74}"/>
+              </a:ext>
+            </a:extLst>
+          </p:cNvPr>
+          <p:cNvSpPr txBox="1">
+            <a:spLocks/>
+          </p:cNvSpPr>
+          <p:nvPr/>
+        </p:nvSpPr>
+        <p:spPr>
+          <a:xfrm>
+            <a:off x="117232" y="1825624"/>
+            <a:ext cx="6541476" cy="4667251"/>
+          </a:xfrm>
+          <a:prstGeom prst="rect">
+            <a:avLst/>
+          </a:prstGeom>
+        </p:spPr>
+        <p:txBody>
+          <a:bodyPr vert="horz" lIns="91440" tIns="45720" rIns="91440" bIns="45720" rtlCol="0">
+            <a:normAutofit lnSpcReduction="10000"/>
+          </a:bodyPr>
+          <a:lstStyle>
+            <a:lvl1pPr marL="228600" indent="-228600" algn="l" defTabSz="914400" rtl="0" eaLnBrk="1" latinLnBrk="0" hangingPunct="1">
+              <a:lnSpc>
+                <a:spcPct val="90000"/>
+              </a:lnSpc>
+              <a:spcBef>
+                <a:spcPts val="1000"/>
+              </a:spcBef>
+              <a:buFont typeface="Arial" panose="020B0604020202020204" pitchFamily="34" charset="0"/>
+              <a:buChar char="•"/>
+              <a:defRPr sz="2800" kern="1200">
+                <a:solidFill>
+                  <a:schemeClr val="tx1"/>
+                </a:solidFill>
+                <a:latin typeface="+mn-lt"/>
+                <a:ea typeface="+mn-ea"/>
+                <a:cs typeface="+mn-cs"/>
+              </a:defRPr>
+            </a:lvl1pPr>
+            <a:lvl2pPr marL="685800" indent="-228600" algn="l" defTabSz="914400" rtl="0" eaLnBrk="1" latinLnBrk="0" hangingPunct="1">
+              <a:lnSpc>
+                <a:spcPct val="90000"/>
+              </a:lnSpc>
+              <a:spcBef>
+                <a:spcPts val="500"/>
+              </a:spcBef>
+              <a:buFont typeface="Arial" panose="020B0604020202020204" pitchFamily="34" charset="0"/>
+              <a:buChar char="•"/>
+              <a:defRPr sz="2400" kern="1200">
+                <a:solidFill>
+                  <a:schemeClr val="tx1"/>
+                </a:solidFill>
+                <a:latin typeface="+mn-lt"/>
+                <a:ea typeface="+mn-ea"/>
+                <a:cs typeface="+mn-cs"/>
+              </a:defRPr>
+            </a:lvl2pPr>
+            <a:lvl3pPr marL="1143000" indent="-228600" algn="l" defTabSz="914400" rtl="0" eaLnBrk="1" latinLnBrk="0" hangingPunct="1">
+              <a:lnSpc>
+                <a:spcPct val="90000"/>
+              </a:lnSpc>
+              <a:spcBef>
+                <a:spcPts val="500"/>
+              </a:spcBef>
+              <a:buFont typeface="Arial" panose="020B0604020202020204" pitchFamily="34" charset="0"/>
+              <a:buChar char="•"/>
+              <a:defRPr sz="2000" kern="1200">
+                <a:solidFill>
+                  <a:schemeClr val="tx1"/>
+                </a:solidFill>
+                <a:latin typeface="+mn-lt"/>
+                <a:ea typeface="+mn-ea"/>
+                <a:cs typeface="+mn-cs"/>
+              </a:defRPr>
+            </a:lvl3pPr>
+            <a:lvl4pPr marL="1600200" indent="-228600" algn="l" defTabSz="914400" rtl="0" eaLnBrk="1" latinLnBrk="0" hangingPunct="1">
+              <a:lnSpc>
+                <a:spcPct val="90000"/>
+              </a:lnSpc>
+              <a:spcBef>
+                <a:spcPts val="500"/>
+              </a:spcBef>
+              <a:buFont typeface="Arial" panose="020B0604020202020204" pitchFamily="34" charset="0"/>
+              <a:buChar char="•"/>
+              <a:defRPr sz="1800" kern="1200">
+                <a:solidFill>
+                  <a:schemeClr val="tx1"/>
+                </a:solidFill>
+                <a:latin typeface="+mn-lt"/>
+                <a:ea typeface="+mn-ea"/>
+                <a:cs typeface="+mn-cs"/>
+              </a:defRPr>
+            </a:lvl4pPr>
+            <a:lvl5pPr marL="2057400" indent="-228600" algn="l" defTabSz="914400" rtl="0" eaLnBrk="1" latinLnBrk="0" hangingPunct="1">
+              <a:lnSpc>
+                <a:spcPct val="90000"/>
+              </a:lnSpc>
+              <a:spcBef>
+                <a:spcPts val="500"/>
+              </a:spcBef>
+              <a:buFont typeface="Arial" panose="020B0604020202020204" pitchFamily="34" charset="0"/>
+              <a:buChar char="•"/>
+              <a:defRPr sz="1800" kern="1200">
+                <a:solidFill>
+                  <a:schemeClr val="tx1"/>
+                </a:solidFill>
+                <a:latin typeface="+mn-lt"/>
+                <a:ea typeface="+mn-ea"/>
+                <a:cs typeface="+mn-cs"/>
+              </a:defRPr>
+            </a:lvl5pPr>
+            <a:lvl6pPr marL="2514600" indent="-228600" algn="l" defTabSz="914400" rtl="0" eaLnBrk="1" latinLnBrk="0" hangingPunct="1">
+              <a:lnSpc>
+                <a:spcPct val="90000"/>
+              </a:lnSpc>
+              <a:spcBef>
+                <a:spcPts val="500"/>
+              </a:spcBef>
+              <a:buFont typeface="Arial" panose="020B0604020202020204" pitchFamily="34" charset="0"/>
+              <a:buChar char="•"/>
+              <a:defRPr sz="1800" kern="1200">
+                <a:solidFill>
+                  <a:schemeClr val="tx1"/>
+                </a:solidFill>
+                <a:latin typeface="+mn-lt"/>
+                <a:ea typeface="+mn-ea"/>
+                <a:cs typeface="+mn-cs"/>
+              </a:defRPr>
+            </a:lvl6pPr>
+            <a:lvl7pPr marL="2971800" indent="-228600" algn="l" defTabSz="914400" rtl="0" eaLnBrk="1" latinLnBrk="0" hangingPunct="1">
+              <a:lnSpc>
+                <a:spcPct val="90000"/>
+              </a:lnSpc>
+              <a:spcBef>
+                <a:spcPts val="500"/>
+              </a:spcBef>
+              <a:buFont typeface="Arial" panose="020B0604020202020204" pitchFamily="34" charset="0"/>
+              <a:buChar char="•"/>
+              <a:defRPr sz="1800" kern="1200">
+                <a:solidFill>
+                  <a:schemeClr val="tx1"/>
+                </a:solidFill>
+                <a:latin typeface="+mn-lt"/>
+                <a:ea typeface="+mn-ea"/>
+                <a:cs typeface="+mn-cs"/>
+              </a:defRPr>
+            </a:lvl7pPr>
+            <a:lvl8pPr marL="3429000" indent="-228600" algn="l" defTabSz="914400" rtl="0" eaLnBrk="1" latinLnBrk="0" hangingPunct="1">
+              <a:lnSpc>
+                <a:spcPct val="90000"/>
+              </a:lnSpc>
+              <a:spcBef>
+                <a:spcPts val="500"/>
+              </a:spcBef>
+              <a:buFont typeface="Arial" panose="020B0604020202020204" pitchFamily="34" charset="0"/>
+              <a:buChar char="•"/>
+              <a:defRPr sz="1800" kern="1200">
+                <a:solidFill>
+                  <a:schemeClr val="tx1"/>
+                </a:solidFill>
+                <a:latin typeface="+mn-lt"/>
+                <a:ea typeface="+mn-ea"/>
+                <a:cs typeface="+mn-cs"/>
+              </a:defRPr>
+            </a:lvl8pPr>
+            <a:lvl9pPr marL="3886200" indent="-228600" algn="l" defTabSz="914400" rtl="0" eaLnBrk="1" latinLnBrk="0" hangingPunct="1">
+              <a:lnSpc>
+                <a:spcPct val="90000"/>
+              </a:lnSpc>
+              <a:spcBef>
+                <a:spcPts val="500"/>
+              </a:spcBef>
+              <a:buFont typeface="Arial" panose="020B0604020202020204" pitchFamily="34" charset="0"/>
+              <a:buChar char="•"/>
+              <a:defRPr sz="1800" kern="1200">
+                <a:solidFill>
+                  <a:schemeClr val="tx1"/>
+                </a:solidFill>
+                <a:latin typeface="+mn-lt"/>
+                <a:ea typeface="+mn-ea"/>
+                <a:cs typeface="+mn-cs"/>
+              </a:defRPr>
+            </a:lvl9pPr>
+          </a:lstStyle>
+          <a:p>
+            <a:r>
+              <a:rPr lang="en-US" dirty="0"/>
+              <a:t>Root </a:t>
+            </a:r>
+            <a:r>
+              <a:rPr lang="en-US" sz="2000" dirty="0" err="1">
+                <a:latin typeface="Consolas" panose="020B0609020204030204" pitchFamily="49" charset="0"/>
+                <a:cs typeface="Courier New" panose="02070309020205020404" pitchFamily="49" charset="0"/>
+              </a:rPr>
+              <a:t>ApplicationIdentityService</a:t>
+            </a:r>
+            <a:r>
+              <a:rPr lang="en-US" dirty="0"/>
+              <a:t> is an automatic hosted service singleton.</a:t>
+            </a:r>
+          </a:p>
+          <a:p>
+            <a:r>
+              <a:rPr lang="en-US" dirty="0"/>
+              <a:t>A Remote can define a Domain.</a:t>
+            </a:r>
+          </a:p>
+          <a:p>
+            <a:r>
+              <a:rPr lang="en-US" dirty="0"/>
+              <a:t>New Remotes can be added dynamically (</a:t>
+            </a:r>
+            <a:r>
+              <a:rPr lang="en-US" sz="2000" dirty="0" err="1">
+                <a:latin typeface="Consolas" panose="020B0609020204030204" pitchFamily="49" charset="0"/>
+                <a:cs typeface="Courier New" panose="02070309020205020404" pitchFamily="49" charset="0"/>
+              </a:rPr>
+              <a:t>AddDynamicRemoteAsync</a:t>
+            </a:r>
+            <a:r>
+              <a:rPr lang="en-US" dirty="0"/>
+              <a:t>).</a:t>
+            </a:r>
+          </a:p>
+          <a:p>
+            <a:r>
+              <a:rPr lang="en-US" dirty="0"/>
+              <a:t>Only dynamic Remotes can be destroyed (</a:t>
+            </a:r>
+            <a:r>
+              <a:rPr lang="en-US" sz="2000" dirty="0" err="1">
+                <a:latin typeface="Consolas" panose="020B0609020204030204" pitchFamily="49" charset="0"/>
+                <a:cs typeface="Courier New" panose="02070309020205020404" pitchFamily="49" charset="0"/>
+              </a:rPr>
+              <a:t>SetDestroyed</a:t>
+            </a:r>
+            <a:r>
+              <a:rPr lang="en-US" dirty="0"/>
+              <a:t> or </a:t>
+            </a:r>
+            <a:r>
+              <a:rPr lang="en-US" sz="2000" dirty="0" err="1">
+                <a:latin typeface="Consolas" panose="020B0609020204030204" pitchFamily="49" charset="0"/>
+                <a:cs typeface="Courier New" panose="02070309020205020404" pitchFamily="49" charset="0"/>
+              </a:rPr>
+              <a:t>DestroyAsync</a:t>
+            </a:r>
+            <a:r>
+              <a:rPr lang="en-US" dirty="0"/>
+              <a:t>).</a:t>
+            </a:r>
+          </a:p>
+          <a:p>
+            <a:r>
+              <a:rPr lang="en-US" dirty="0"/>
+              <a:t>Thread safety</a:t>
+            </a:r>
+          </a:p>
+          <a:p>
+            <a:pPr lvl="1"/>
+            <a:r>
+              <a:rPr lang="en-US" dirty="0"/>
+              <a:t>Once </a:t>
+            </a:r>
+            <a:r>
+              <a:rPr lang="en-US" sz="2000" dirty="0" err="1">
+                <a:latin typeface="Consolas" panose="020B0609020204030204" pitchFamily="49" charset="0"/>
+                <a:cs typeface="Courier New" panose="02070309020205020404" pitchFamily="49" charset="0"/>
+              </a:rPr>
+              <a:t>InitializationTask</a:t>
+            </a:r>
+            <a:r>
+              <a:rPr lang="en-US" dirty="0"/>
+              <a:t> is resolved, everything is stable.</a:t>
+            </a:r>
+          </a:p>
+          <a:p>
+            <a:pPr lvl="1"/>
+            <a:r>
+              <a:rPr lang="en-US" dirty="0"/>
+              <a:t>A background micro agent handles the dynamic Remotes mutations.</a:t>
+            </a:r>
+          </a:p>
+          <a:p>
+            <a:pPr lvl="1"/>
+            <a:endParaRPr lang="en-US" dirty="0"/>
+          </a:p>
+          <a:p>
+            <a:pPr lvl="1"/>
+            <a:endParaRPr lang="en-US" dirty="0"/>
+          </a:p>
+        </p:txBody>
+      </p:sp>
+    </p:spTree>
+    <p:extLst>
+      <p:ext uri="{BB962C8B-B14F-4D97-AF65-F5344CB8AC3E}">
+        <p14:creationId xmlns:p14="http://schemas.microsoft.com/office/powerpoint/2010/main" val="797297402"/>
+      </p:ext>
+    </p:extLst>
+  </p:cSld>
+  <p:clrMapOvr>
+    <a:masterClrMapping/>
+  </p:clrMapOvr>
+</p:sld>
+</file>
+
+<file path=ppt/slides/slide22.xml><?xml version="1.0" encoding="utf-8"?>
+<p:sld xmlns:a="http://schemas.openxmlformats.org/drawingml/2006/main" xmlns:r="http://schemas.openxmlformats.org/officeDocument/2006/relationships" xmlns:p="http://schemas.openxmlformats.org/presentationml/2006/main">
+  <p:cSld>
+    <p:spTree>
+      <p:nvGrpSpPr>
+        <p:cNvPr id="1" name=""/>
+        <p:cNvGrpSpPr/>
+        <p:nvPr/>
+      </p:nvGrpSpPr>
+      <p:grpSpPr>
+        <a:xfrm>
+          <a:off x="0" y="0"/>
+          <a:ext cx="0" cy="0"/>
+          <a:chOff x="0" y="0"/>
+          <a:chExt cx="0" cy="0"/>
+        </a:xfrm>
+      </p:grpSpPr>
+      <p:sp>
+        <p:nvSpPr>
+          <p:cNvPr id="2" name="Title 1">
+            <a:extLst>
+              <a:ext uri="{FF2B5EF4-FFF2-40B4-BE49-F238E27FC236}">
+                <a16:creationId xmlns:a16="http://schemas.microsoft.com/office/drawing/2014/main" id="{F9C7CD06-D47B-E95B-1EEA-8DBB232E4358}"/>
+              </a:ext>
+            </a:extLst>
+          </p:cNvPr>
+          <p:cNvSpPr>
+            <a:spLocks noGrp="1"/>
+          </p:cNvSpPr>
+          <p:nvPr>
+            <p:ph type="title"/>
+          </p:nvPr>
+        </p:nvSpPr>
+        <p:spPr/>
+        <p:txBody>
+          <a:bodyPr/>
+          <a:lstStyle/>
+          <a:p>
+            <a:r>
+              <a:rPr lang="en-US" dirty="0"/>
+              <a:t>The “Features”</a:t>
+            </a:r>
+          </a:p>
+        </p:txBody>
+      </p:sp>
+      <p:sp>
+        <p:nvSpPr>
+          <p:cNvPr id="3" name="Content Placeholder 2">
+            <a:extLst>
+              <a:ext uri="{FF2B5EF4-FFF2-40B4-BE49-F238E27FC236}">
+                <a16:creationId xmlns:a16="http://schemas.microsoft.com/office/drawing/2014/main" id="{7A33983B-5F64-FFC1-70BD-79B40405F7CA}"/>
+              </a:ext>
+            </a:extLst>
+          </p:cNvPr>
+          <p:cNvSpPr>
+            <a:spLocks noGrp="1"/>
+          </p:cNvSpPr>
+          <p:nvPr>
+            <p:ph idx="1"/>
+          </p:nvPr>
+        </p:nvSpPr>
+        <p:spPr/>
+        <p:txBody>
+          <a:bodyPr/>
+          <a:lstStyle/>
+          <a:p>
+            <a:r>
+              <a:rPr lang="en-US" dirty="0" err="1"/>
+              <a:t>ApplicationIdentity</a:t>
+            </a:r>
+            <a:r>
+              <a:rPr lang="en-US" dirty="0"/>
+              <a:t> model exists to expose Features.</a:t>
+            </a:r>
+          </a:p>
+          <a:p>
+            <a:r>
+              <a:rPr lang="en-US" dirty="0"/>
+              <a:t>Features are </a:t>
+            </a:r>
+            <a:r>
+              <a:rPr lang="en-US" sz="2000" dirty="0" err="1">
+                <a:solidFill>
+                  <a:srgbClr val="000000"/>
+                </a:solidFill>
+                <a:latin typeface="Consolas" panose="020B0609020204030204" pitchFamily="49" charset="0"/>
+              </a:rPr>
+              <a:t>IEnumerable</a:t>
+            </a:r>
+            <a:r>
+              <a:rPr lang="en-US" sz="2000" dirty="0">
+                <a:solidFill>
+                  <a:srgbClr val="000000"/>
+                </a:solidFill>
+                <a:latin typeface="Consolas" panose="020B0609020204030204" pitchFamily="49" charset="0"/>
+              </a:rPr>
+              <a:t>&lt;</a:t>
+            </a:r>
+            <a:r>
+              <a:rPr lang="en-US" sz="2000" dirty="0">
+                <a:solidFill>
+                  <a:srgbClr val="0000FF"/>
+                </a:solidFill>
+                <a:latin typeface="Consolas" panose="020B0609020204030204" pitchFamily="49" charset="0"/>
+              </a:rPr>
+              <a:t>object</a:t>
+            </a:r>
+            <a:r>
+              <a:rPr lang="en-US" sz="2000" dirty="0">
+                <a:solidFill>
+                  <a:srgbClr val="000000"/>
+                </a:solidFill>
+                <a:latin typeface="Consolas" panose="020B0609020204030204" pitchFamily="49" charset="0"/>
+              </a:rPr>
+              <a:t>&gt;</a:t>
+            </a:r>
+            <a:r>
+              <a:rPr lang="en-US" dirty="0"/>
+              <a:t> available on:</a:t>
+            </a:r>
+          </a:p>
+          <a:p>
+            <a:pPr lvl="1"/>
+            <a:r>
+              <a:rPr lang="en-US" dirty="0"/>
+              <a:t>The root </a:t>
+            </a:r>
+            <a:r>
+              <a:rPr lang="en-US" sz="2000" dirty="0" err="1">
+                <a:latin typeface="Consolas" panose="020B0609020204030204" pitchFamily="49" charset="0"/>
+                <a:cs typeface="Courier New" panose="02070309020205020404" pitchFamily="49" charset="0"/>
+              </a:rPr>
+              <a:t>ApplicationIdentityService</a:t>
+            </a:r>
+            <a:endParaRPr lang="en-US" sz="2000" dirty="0">
+              <a:latin typeface="Consolas" panose="020B0609020204030204" pitchFamily="49" charset="0"/>
+              <a:cs typeface="Courier New" panose="02070309020205020404" pitchFamily="49" charset="0"/>
+            </a:endParaRPr>
+          </a:p>
+          <a:p>
+            <a:pPr lvl="1"/>
+            <a:r>
+              <a:rPr lang="en-US" dirty="0"/>
+              <a:t>Local and Remote parties (but not on the </a:t>
+            </a:r>
+            <a:r>
+              <a:rPr lang="en-US" sz="2000" dirty="0" err="1">
+                <a:latin typeface="Consolas" panose="020B0609020204030204" pitchFamily="49" charset="0"/>
+                <a:cs typeface="Courier New" panose="02070309020205020404" pitchFamily="49" charset="0"/>
+              </a:rPr>
+              <a:t>DomainApplicationIdentity</a:t>
+            </a:r>
+            <a:r>
+              <a:rPr lang="en-US" dirty="0"/>
+              <a:t>).</a:t>
+            </a:r>
+          </a:p>
+          <a:p>
+            <a:r>
+              <a:rPr lang="en-US" dirty="0"/>
+              <a:t>Only </a:t>
+            </a:r>
+            <a:r>
+              <a:rPr lang="en-US" sz="2000" dirty="0">
+                <a:solidFill>
+                  <a:srgbClr val="0000FF"/>
+                </a:solidFill>
+                <a:latin typeface="Consolas" panose="020B0609020204030204" pitchFamily="49" charset="0"/>
+              </a:rPr>
+              <a:t>void</a:t>
+            </a:r>
+            <a:r>
+              <a:rPr lang="en-US" sz="2000" dirty="0">
+                <a:solidFill>
+                  <a:srgbClr val="000000"/>
+                </a:solidFill>
+                <a:latin typeface="Consolas" panose="020B0609020204030204" pitchFamily="49" charset="0"/>
+              </a:rPr>
+              <a:t> </a:t>
+            </a:r>
+            <a:r>
+              <a:rPr lang="en-US" sz="2000" dirty="0" err="1">
+                <a:solidFill>
+                  <a:srgbClr val="000000"/>
+                </a:solidFill>
+                <a:latin typeface="Consolas" panose="020B0609020204030204" pitchFamily="49" charset="0"/>
+              </a:rPr>
+              <a:t>AddFeature</a:t>
+            </a:r>
+            <a:r>
+              <a:rPr lang="en-US" sz="2000" dirty="0">
+                <a:solidFill>
+                  <a:srgbClr val="000000"/>
+                </a:solidFill>
+                <a:latin typeface="Consolas" panose="020B0609020204030204" pitchFamily="49" charset="0"/>
+              </a:rPr>
+              <a:t>( </a:t>
+            </a:r>
+            <a:r>
+              <a:rPr lang="en-US" sz="2000" dirty="0">
+                <a:solidFill>
+                  <a:srgbClr val="0000FF"/>
+                </a:solidFill>
+                <a:latin typeface="Consolas" panose="020B0609020204030204" pitchFamily="49" charset="0"/>
+              </a:rPr>
+              <a:t>object</a:t>
+            </a:r>
+            <a:r>
+              <a:rPr lang="en-US" sz="2000" dirty="0">
+                <a:solidFill>
+                  <a:srgbClr val="000000"/>
+                </a:solidFill>
+                <a:latin typeface="Consolas" panose="020B0609020204030204" pitchFamily="49" charset="0"/>
+              </a:rPr>
+              <a:t> feature )</a:t>
+            </a:r>
+            <a:r>
+              <a:rPr lang="en-US" dirty="0"/>
+              <a:t> exists</a:t>
+            </a:r>
+          </a:p>
+          <a:p>
+            <a:pPr lvl="1"/>
+            <a:r>
+              <a:rPr lang="en-US" dirty="0"/>
+              <a:t>Features can only be added.</a:t>
+            </a:r>
+          </a:p>
+          <a:p>
+            <a:r>
+              <a:rPr lang="en-US" dirty="0"/>
+              <a:t>Even if one can add a Feature “from the outside”, Feature are automatically instantiated, configured and added to the relevant parties thanks to specialized </a:t>
+            </a:r>
+            <a:r>
+              <a:rPr lang="en-US" sz="2000" dirty="0" err="1">
+                <a:solidFill>
+                  <a:srgbClr val="000000"/>
+                </a:solidFill>
+                <a:latin typeface="Consolas" panose="020B0609020204030204" pitchFamily="49" charset="0"/>
+              </a:rPr>
+              <a:t>ApplicationIdentityFeatureDriver</a:t>
+            </a:r>
+            <a:r>
+              <a:rPr lang="en-US" dirty="0"/>
+              <a:t> services</a:t>
+            </a:r>
+            <a:r>
+              <a:rPr lang="en-US" sz="1800" dirty="0">
+                <a:solidFill>
+                  <a:srgbClr val="2B91AF"/>
+                </a:solidFill>
+                <a:latin typeface="Consolas" panose="020B0609020204030204" pitchFamily="49" charset="0"/>
+              </a:rPr>
+              <a:t>.</a:t>
+            </a:r>
+            <a:endParaRPr lang="en-US" dirty="0"/>
+          </a:p>
+        </p:txBody>
+      </p:sp>
+    </p:spTree>
+    <p:extLst>
+      <p:ext uri="{BB962C8B-B14F-4D97-AF65-F5344CB8AC3E}">
+        <p14:creationId xmlns:p14="http://schemas.microsoft.com/office/powerpoint/2010/main" val="1711543968"/>
+      </p:ext>
+    </p:extLst>
+  </p:cSld>
+  <p:clrMapOvr>
+    <a:masterClrMapping/>
+  </p:clrMapOvr>
+</p:sld>
+</file>
+
+<file path=ppt/slides/slide23.xml><?xml version="1.0" encoding="utf-8"?>
+<p:sld xmlns:a="http://schemas.openxmlformats.org/drawingml/2006/main" xmlns:r="http://schemas.openxmlformats.org/officeDocument/2006/relationships" xmlns:p="http://schemas.openxmlformats.org/presentationml/2006/main">
+  <p:cSld>
+    <p:spTree>
+      <p:nvGrpSpPr>
+        <p:cNvPr id="1" name=""/>
+        <p:cNvGrpSpPr/>
+        <p:nvPr/>
+      </p:nvGrpSpPr>
+      <p:grpSpPr>
+        <a:xfrm>
+          <a:off x="0" y="0"/>
+          <a:ext cx="0" cy="0"/>
+          <a:chOff x="0" y="0"/>
+          <a:chExt cx="0" cy="0"/>
+        </a:xfrm>
+      </p:grpSpPr>
+      <p:sp>
+        <p:nvSpPr>
+          <p:cNvPr id="2" name="Title 1">
+            <a:extLst>
+              <a:ext uri="{FF2B5EF4-FFF2-40B4-BE49-F238E27FC236}">
+                <a16:creationId xmlns:a16="http://schemas.microsoft.com/office/drawing/2014/main" id="{58BEB0FE-B752-52E9-DFC1-C32DC2286E1C}"/>
+              </a:ext>
+            </a:extLst>
+          </p:cNvPr>
+          <p:cNvSpPr>
+            <a:spLocks noGrp="1"/>
+          </p:cNvSpPr>
+          <p:nvPr>
+            <p:ph type="title"/>
+          </p:nvPr>
+        </p:nvSpPr>
+        <p:spPr/>
+        <p:txBody>
+          <a:bodyPr/>
+          <a:lstStyle/>
+          <a:p>
+            <a:r>
+              <a:rPr lang="en-US" dirty="0"/>
+              <a:t>Feature Driver</a:t>
+            </a:r>
+          </a:p>
+        </p:txBody>
+      </p:sp>
+      <p:pic>
+        <p:nvPicPr>
+          <p:cNvPr id="9" name="Content Placeholder 8" descr="Graphical user interface, text">
+            <a:extLst>
+              <a:ext uri="{FF2B5EF4-FFF2-40B4-BE49-F238E27FC236}">
+                <a16:creationId xmlns:a16="http://schemas.microsoft.com/office/drawing/2014/main" id="{3CFA42ED-F5B9-C118-B2B2-15CE4E6B30CF}"/>
+              </a:ext>
+            </a:extLst>
+          </p:cNvPr>
+          <p:cNvPicPr>
+            <a:picLocks noGrp="1" noChangeAspect="1"/>
+          </p:cNvPicPr>
+          <p:nvPr>
+            <p:ph idx="1"/>
+          </p:nvPr>
+        </p:nvPicPr>
+        <p:blipFill>
+          <a:blip r:embed="rId2">
+            <a:extLst>
+              <a:ext uri="{28A0092B-C50C-407E-A947-70E740481C1C}">
+                <a14:useLocalDpi xmlns:a14="http://schemas.microsoft.com/office/drawing/2010/main" val="0"/>
+              </a:ext>
+            </a:extLst>
+          </a:blip>
+          <a:stretch>
+            <a:fillRect/>
+          </a:stretch>
+        </p:blipFill>
+        <p:spPr>
+          <a:xfrm>
+            <a:off x="4620973" y="156674"/>
+            <a:ext cx="7399243" cy="6544652"/>
+          </a:xfrm>
+        </p:spPr>
+      </p:pic>
+      <p:sp>
+        <p:nvSpPr>
+          <p:cNvPr id="10" name="Content Placeholder 2">
+            <a:extLst>
+              <a:ext uri="{FF2B5EF4-FFF2-40B4-BE49-F238E27FC236}">
+                <a16:creationId xmlns:a16="http://schemas.microsoft.com/office/drawing/2014/main" id="{777EFC9A-B42F-2335-F286-66BC9143F1D7}"/>
+              </a:ext>
+            </a:extLst>
+          </p:cNvPr>
+          <p:cNvSpPr txBox="1">
+            <a:spLocks/>
+          </p:cNvSpPr>
+          <p:nvPr/>
+        </p:nvSpPr>
+        <p:spPr>
+          <a:xfrm>
+            <a:off x="117232" y="1825624"/>
+            <a:ext cx="4607168" cy="4667251"/>
+          </a:xfrm>
+          <a:prstGeom prst="rect">
+            <a:avLst/>
+          </a:prstGeom>
+        </p:spPr>
+        <p:txBody>
+          <a:bodyPr vert="horz" lIns="91440" tIns="45720" rIns="91440" bIns="45720" rtlCol="0">
+            <a:normAutofit/>
+          </a:bodyPr>
+          <a:lstStyle>
+            <a:lvl1pPr marL="228600" indent="-228600" algn="l" defTabSz="914400" rtl="0" eaLnBrk="1" latinLnBrk="0" hangingPunct="1">
+              <a:lnSpc>
+                <a:spcPct val="90000"/>
+              </a:lnSpc>
+              <a:spcBef>
+                <a:spcPts val="1000"/>
+              </a:spcBef>
+              <a:buFont typeface="Arial" panose="020B0604020202020204" pitchFamily="34" charset="0"/>
+              <a:buChar char="•"/>
+              <a:defRPr sz="2800" kern="1200">
+                <a:solidFill>
+                  <a:schemeClr val="tx1"/>
+                </a:solidFill>
+                <a:latin typeface="+mn-lt"/>
+                <a:ea typeface="+mn-ea"/>
+                <a:cs typeface="+mn-cs"/>
+              </a:defRPr>
+            </a:lvl1pPr>
+            <a:lvl2pPr marL="685800" indent="-228600" algn="l" defTabSz="914400" rtl="0" eaLnBrk="1" latinLnBrk="0" hangingPunct="1">
+              <a:lnSpc>
+                <a:spcPct val="90000"/>
+              </a:lnSpc>
+              <a:spcBef>
+                <a:spcPts val="500"/>
+              </a:spcBef>
+              <a:buFont typeface="Arial" panose="020B0604020202020204" pitchFamily="34" charset="0"/>
+              <a:buChar char="•"/>
+              <a:defRPr sz="2400" kern="1200">
+                <a:solidFill>
+                  <a:schemeClr val="tx1"/>
+                </a:solidFill>
+                <a:latin typeface="+mn-lt"/>
+                <a:ea typeface="+mn-ea"/>
+                <a:cs typeface="+mn-cs"/>
+              </a:defRPr>
+            </a:lvl2pPr>
+            <a:lvl3pPr marL="1143000" indent="-228600" algn="l" defTabSz="914400" rtl="0" eaLnBrk="1" latinLnBrk="0" hangingPunct="1">
+              <a:lnSpc>
+                <a:spcPct val="90000"/>
+              </a:lnSpc>
+              <a:spcBef>
+                <a:spcPts val="500"/>
+              </a:spcBef>
+              <a:buFont typeface="Arial" panose="020B0604020202020204" pitchFamily="34" charset="0"/>
+              <a:buChar char="•"/>
+              <a:defRPr sz="2000" kern="1200">
+                <a:solidFill>
+                  <a:schemeClr val="tx1"/>
+                </a:solidFill>
+                <a:latin typeface="+mn-lt"/>
+                <a:ea typeface="+mn-ea"/>
+                <a:cs typeface="+mn-cs"/>
+              </a:defRPr>
+            </a:lvl3pPr>
+            <a:lvl4pPr marL="1600200" indent="-228600" algn="l" defTabSz="914400" rtl="0" eaLnBrk="1" latinLnBrk="0" hangingPunct="1">
+              <a:lnSpc>
+                <a:spcPct val="90000"/>
+              </a:lnSpc>
+              <a:spcBef>
+                <a:spcPts val="500"/>
+              </a:spcBef>
+              <a:buFont typeface="Arial" panose="020B0604020202020204" pitchFamily="34" charset="0"/>
+              <a:buChar char="•"/>
+              <a:defRPr sz="1800" kern="1200">
+                <a:solidFill>
+                  <a:schemeClr val="tx1"/>
+                </a:solidFill>
+                <a:latin typeface="+mn-lt"/>
+                <a:ea typeface="+mn-ea"/>
+                <a:cs typeface="+mn-cs"/>
+              </a:defRPr>
+            </a:lvl4pPr>
+            <a:lvl5pPr marL="2057400" indent="-228600" algn="l" defTabSz="914400" rtl="0" eaLnBrk="1" latinLnBrk="0" hangingPunct="1">
+              <a:lnSpc>
+                <a:spcPct val="90000"/>
+              </a:lnSpc>
+              <a:spcBef>
+                <a:spcPts val="500"/>
+              </a:spcBef>
+              <a:buFont typeface="Arial" panose="020B0604020202020204" pitchFamily="34" charset="0"/>
+              <a:buChar char="•"/>
+              <a:defRPr sz="1800" kern="1200">
+                <a:solidFill>
+                  <a:schemeClr val="tx1"/>
+                </a:solidFill>
+                <a:latin typeface="+mn-lt"/>
+                <a:ea typeface="+mn-ea"/>
+                <a:cs typeface="+mn-cs"/>
+              </a:defRPr>
+            </a:lvl5pPr>
+            <a:lvl6pPr marL="2514600" indent="-228600" algn="l" defTabSz="914400" rtl="0" eaLnBrk="1" latinLnBrk="0" hangingPunct="1">
+              <a:lnSpc>
+                <a:spcPct val="90000"/>
+              </a:lnSpc>
+              <a:spcBef>
+                <a:spcPts val="500"/>
+              </a:spcBef>
+              <a:buFont typeface="Arial" panose="020B0604020202020204" pitchFamily="34" charset="0"/>
+              <a:buChar char="•"/>
+              <a:defRPr sz="1800" kern="1200">
+                <a:solidFill>
+                  <a:schemeClr val="tx1"/>
+                </a:solidFill>
+                <a:latin typeface="+mn-lt"/>
+                <a:ea typeface="+mn-ea"/>
+                <a:cs typeface="+mn-cs"/>
+              </a:defRPr>
+            </a:lvl6pPr>
+            <a:lvl7pPr marL="2971800" indent="-228600" algn="l" defTabSz="914400" rtl="0" eaLnBrk="1" latinLnBrk="0" hangingPunct="1">
+              <a:lnSpc>
+                <a:spcPct val="90000"/>
+              </a:lnSpc>
+              <a:spcBef>
+                <a:spcPts val="500"/>
+              </a:spcBef>
+              <a:buFont typeface="Arial" panose="020B0604020202020204" pitchFamily="34" charset="0"/>
+              <a:buChar char="•"/>
+              <a:defRPr sz="1800" kern="1200">
+                <a:solidFill>
+                  <a:schemeClr val="tx1"/>
+                </a:solidFill>
+                <a:latin typeface="+mn-lt"/>
+                <a:ea typeface="+mn-ea"/>
+                <a:cs typeface="+mn-cs"/>
+              </a:defRPr>
+            </a:lvl7pPr>
+            <a:lvl8pPr marL="3429000" indent="-228600" algn="l" defTabSz="914400" rtl="0" eaLnBrk="1" latinLnBrk="0" hangingPunct="1">
+              <a:lnSpc>
+                <a:spcPct val="90000"/>
+              </a:lnSpc>
+              <a:spcBef>
+                <a:spcPts val="500"/>
+              </a:spcBef>
+              <a:buFont typeface="Arial" panose="020B0604020202020204" pitchFamily="34" charset="0"/>
+              <a:buChar char="•"/>
+              <a:defRPr sz="1800" kern="1200">
+                <a:solidFill>
+                  <a:schemeClr val="tx1"/>
+                </a:solidFill>
+                <a:latin typeface="+mn-lt"/>
+                <a:ea typeface="+mn-ea"/>
+                <a:cs typeface="+mn-cs"/>
+              </a:defRPr>
+            </a:lvl8pPr>
+            <a:lvl9pPr marL="3886200" indent="-228600" algn="l" defTabSz="914400" rtl="0" eaLnBrk="1" latinLnBrk="0" hangingPunct="1">
+              <a:lnSpc>
+                <a:spcPct val="90000"/>
+              </a:lnSpc>
+              <a:spcBef>
+                <a:spcPts val="500"/>
+              </a:spcBef>
+              <a:buFont typeface="Arial" panose="020B0604020202020204" pitchFamily="34" charset="0"/>
+              <a:buChar char="•"/>
+              <a:defRPr sz="1800" kern="1200">
+                <a:solidFill>
+                  <a:schemeClr val="tx1"/>
+                </a:solidFill>
+                <a:latin typeface="+mn-lt"/>
+                <a:ea typeface="+mn-ea"/>
+                <a:cs typeface="+mn-cs"/>
+              </a:defRPr>
+            </a:lvl9pPr>
+          </a:lstStyle>
+          <a:p>
+            <a:r>
+              <a:rPr lang="en-US" dirty="0"/>
+              <a:t>Setup the whole service.</a:t>
+            </a:r>
+          </a:p>
+          <a:p>
+            <a:r>
+              <a:rPr lang="en-US" sz="2400" dirty="0"/>
+              <a:t>Setup new dynamic Remotes.</a:t>
+            </a:r>
+          </a:p>
+          <a:p>
+            <a:r>
+              <a:rPr lang="en-US" sz="2400" dirty="0"/>
+              <a:t>Teardown destroyed Remotes.</a:t>
+            </a:r>
+          </a:p>
+          <a:p>
+            <a:r>
+              <a:rPr lang="en-US" dirty="0"/>
+              <a:t>Teardown the whole service.</a:t>
+            </a:r>
+          </a:p>
+          <a:p>
+            <a:endParaRPr lang="en-US" dirty="0"/>
+          </a:p>
+          <a:p>
+            <a:endParaRPr lang="en-US" dirty="0"/>
+          </a:p>
+          <a:p>
+            <a:r>
+              <a:rPr lang="en-US" dirty="0"/>
+              <a:t>A feature driver type name MUST be suffixed with '</a:t>
+            </a:r>
+            <a:r>
+              <a:rPr lang="en-US" dirty="0" err="1"/>
+              <a:t>FeatureDriver</a:t>
+            </a:r>
+            <a:r>
+              <a:rPr lang="en-US" dirty="0"/>
+              <a:t>'</a:t>
+            </a:r>
+          </a:p>
+          <a:p>
+            <a:pPr lvl="1"/>
+            <a:endParaRPr lang="en-US" dirty="0"/>
+          </a:p>
+        </p:txBody>
+      </p:sp>
+    </p:spTree>
+    <p:extLst>
+      <p:ext uri="{BB962C8B-B14F-4D97-AF65-F5344CB8AC3E}">
+        <p14:creationId xmlns:p14="http://schemas.microsoft.com/office/powerpoint/2010/main" val="2726498136"/>
+      </p:ext>
+    </p:extLst>
+  </p:cSld>
+  <p:clrMapOvr>
+    <a:masterClrMapping/>
+  </p:clrMapOvr>
+</p:sld>
+</file>
+
+<file path=ppt/slides/slide24.xml><?xml version="1.0" encoding="utf-8"?>
+<p:sld xmlns:a="http://schemas.openxmlformats.org/drawingml/2006/main" xmlns:r="http://schemas.openxmlformats.org/officeDocument/2006/relationships" xmlns:p="http://schemas.openxmlformats.org/presentationml/2006/main">
+  <p:cSld>
+    <p:spTree>
+      <p:nvGrpSpPr>
+        <p:cNvPr id="1" name=""/>
+        <p:cNvGrpSpPr/>
+        <p:nvPr/>
+      </p:nvGrpSpPr>
+      <p:grpSpPr>
+        <a:xfrm>
+          <a:off x="0" y="0"/>
+          <a:ext cx="0" cy="0"/>
+          <a:chOff x="0" y="0"/>
+          <a:chExt cx="0" cy="0"/>
+        </a:xfrm>
+      </p:grpSpPr>
+      <p:sp>
+        <p:nvSpPr>
+          <p:cNvPr id="2" name="Title 1">
+            <a:extLst>
+              <a:ext uri="{FF2B5EF4-FFF2-40B4-BE49-F238E27FC236}">
+                <a16:creationId xmlns:a16="http://schemas.microsoft.com/office/drawing/2014/main" id="{AC62F962-D950-EB5B-C8CD-82EC873A97DA}"/>
+              </a:ext>
+            </a:extLst>
+          </p:cNvPr>
+          <p:cNvSpPr>
+            <a:spLocks noGrp="1"/>
+          </p:cNvSpPr>
+          <p:nvPr>
+            <p:ph type="title"/>
+          </p:nvPr>
+        </p:nvSpPr>
+        <p:spPr/>
+        <p:txBody>
+          <a:bodyPr/>
+          <a:lstStyle/>
+          <a:p>
+            <a:r>
+              <a:rPr lang="en-US" dirty="0"/>
+              <a:t>Opt-In/Out and Allow/</a:t>
+            </a:r>
+            <a:r>
+              <a:rPr lang="en-US" dirty="0" err="1"/>
+              <a:t>DisallowFeatures</a:t>
+            </a:r>
+            <a:endParaRPr lang="en-US" dirty="0"/>
+          </a:p>
+        </p:txBody>
+      </p:sp>
+      <p:sp>
+        <p:nvSpPr>
+          <p:cNvPr id="3" name="Content Placeholder 2">
+            <a:extLst>
+              <a:ext uri="{FF2B5EF4-FFF2-40B4-BE49-F238E27FC236}">
+                <a16:creationId xmlns:a16="http://schemas.microsoft.com/office/drawing/2014/main" id="{58830683-E16F-BEF2-A1A6-603A2557DC8A}"/>
+              </a:ext>
+            </a:extLst>
+          </p:cNvPr>
+          <p:cNvSpPr>
+            <a:spLocks noGrp="1"/>
+          </p:cNvSpPr>
+          <p:nvPr>
+            <p:ph idx="1"/>
+          </p:nvPr>
+        </p:nvSpPr>
+        <p:spPr>
+          <a:xfrm>
+            <a:off x="838200" y="1690688"/>
+            <a:ext cx="10515600" cy="5014911"/>
+          </a:xfrm>
+        </p:spPr>
+        <p:txBody>
+          <a:bodyPr/>
+          <a:lstStyle/>
+          <a:p>
+            <a:r>
+              <a:rPr lang="en-US" dirty="0"/>
+              <a:t>Features can be opt-in or opt-out.</a:t>
+            </a:r>
+          </a:p>
+          <a:p>
+            <a:pPr lvl="1"/>
+            <a:r>
+              <a:rPr lang="en-US" dirty="0"/>
+              <a:t>This is provided when calling the base </a:t>
+            </a:r>
+            <a:r>
+              <a:rPr lang="en-US" sz="1800" dirty="0" err="1">
+                <a:latin typeface="Consolas" panose="020B0609020204030204" pitchFamily="49" charset="0"/>
+              </a:rPr>
+              <a:t>ApplicationIdentityFeatureDriver</a:t>
+            </a:r>
+            <a:r>
+              <a:rPr lang="en-US" sz="2400" dirty="0">
+                <a:solidFill>
+                  <a:srgbClr val="2B91AF"/>
+                </a:solidFill>
+                <a:latin typeface="Consolas" panose="020B0609020204030204" pitchFamily="49" charset="0"/>
+              </a:rPr>
+              <a:t> </a:t>
+            </a:r>
+            <a:r>
+              <a:rPr lang="en-US" dirty="0"/>
+              <a:t>constructor</a:t>
+            </a:r>
+            <a:r>
+              <a:rPr lang="en-US" sz="2400" dirty="0">
+                <a:solidFill>
+                  <a:srgbClr val="2B91AF"/>
+                </a:solidFill>
+                <a:latin typeface="Consolas" panose="020B0609020204030204" pitchFamily="49" charset="0"/>
+              </a:rPr>
+              <a:t>.</a:t>
+            </a:r>
+          </a:p>
+          <a:p>
+            <a:pPr lvl="1"/>
+            <a:endParaRPr lang="en-US" sz="2400" dirty="0">
+              <a:solidFill>
+                <a:srgbClr val="2B91AF"/>
+              </a:solidFill>
+              <a:latin typeface="Consolas" panose="020B0609020204030204" pitchFamily="49" charset="0"/>
+            </a:endParaRPr>
+          </a:p>
+          <a:p>
+            <a:pPr lvl="1"/>
+            <a:endParaRPr lang="en-US" dirty="0">
+              <a:solidFill>
+                <a:srgbClr val="2B91AF"/>
+              </a:solidFill>
+              <a:latin typeface="Consolas" panose="020B0609020204030204" pitchFamily="49" charset="0"/>
+            </a:endParaRPr>
+          </a:p>
+          <a:p>
+            <a:r>
+              <a:rPr lang="en-US" dirty="0"/>
+              <a:t>Features can then be allowed or disallowed by the configuration.</a:t>
+            </a:r>
+          </a:p>
+          <a:p>
+            <a:pPr lvl="1"/>
+            <a:r>
+              <a:rPr lang="en-US" dirty="0"/>
+              <a:t>The </a:t>
+            </a:r>
+            <a:r>
+              <a:rPr lang="en-US" dirty="0" err="1"/>
+              <a:t>BlobChannel</a:t>
+            </a:r>
+            <a:r>
+              <a:rPr lang="en-US" dirty="0"/>
+              <a:t> is an opt-in feature. To exchange </a:t>
+            </a:r>
+            <a:r>
+              <a:rPr lang="en-US" sz="1800" dirty="0">
+                <a:solidFill>
+                  <a:srgbClr val="000000"/>
+                </a:solidFill>
+                <a:latin typeface="Consolas" panose="020B0609020204030204" pitchFamily="49" charset="0"/>
+              </a:rPr>
+              <a:t>byte[]</a:t>
+            </a:r>
+            <a:r>
+              <a:rPr lang="en-US" dirty="0"/>
+              <a:t> it must be allowed.</a:t>
+            </a:r>
+          </a:p>
+        </p:txBody>
+      </p:sp>
+      <p:sp>
+        <p:nvSpPr>
+          <p:cNvPr id="5" name="TextBox 4">
+            <a:extLst>
+              <a:ext uri="{FF2B5EF4-FFF2-40B4-BE49-F238E27FC236}">
+                <a16:creationId xmlns:a16="http://schemas.microsoft.com/office/drawing/2014/main" id="{8EF786D5-8D89-BF31-3133-9EF6545D8B9B}"/>
+              </a:ext>
+            </a:extLst>
+          </p:cNvPr>
+          <p:cNvSpPr txBox="1"/>
+          <p:nvPr/>
+        </p:nvSpPr>
+        <p:spPr>
+          <a:xfrm>
+            <a:off x="1521655" y="2961041"/>
+            <a:ext cx="8412480" cy="584775"/>
+          </a:xfrm>
+          <a:prstGeom prst="rect">
+            <a:avLst/>
+          </a:prstGeom>
+          <a:noFill/>
+        </p:spPr>
+        <p:txBody>
+          <a:bodyPr wrap="square">
+            <a:spAutoFit/>
+          </a:bodyPr>
+          <a:lstStyle/>
+          <a:p>
+            <a:r>
+              <a:rPr lang="en-US" sz="1600" dirty="0">
+                <a:solidFill>
+                  <a:srgbClr val="0000FF"/>
+                </a:solidFill>
+                <a:latin typeface="Consolas" panose="020B0609020204030204" pitchFamily="49" charset="0"/>
+              </a:rPr>
+              <a:t>protected</a:t>
+            </a:r>
+            <a:r>
+              <a:rPr lang="en-US" sz="1600" dirty="0">
+                <a:solidFill>
+                  <a:srgbClr val="000000"/>
+                </a:solidFill>
+                <a:latin typeface="Consolas" panose="020B0609020204030204" pitchFamily="49" charset="0"/>
+              </a:rPr>
+              <a:t> </a:t>
+            </a:r>
+            <a:r>
+              <a:rPr lang="en-US" sz="1600" dirty="0" err="1">
+                <a:solidFill>
+                  <a:srgbClr val="2B91AF"/>
+                </a:solidFill>
+                <a:latin typeface="Consolas" panose="020B0609020204030204" pitchFamily="49" charset="0"/>
+              </a:rPr>
+              <a:t>ApplicationIdentityFeatureDriver</a:t>
+            </a:r>
+            <a:r>
+              <a:rPr lang="en-US" sz="1600" dirty="0">
+                <a:solidFill>
+                  <a:srgbClr val="000000"/>
+                </a:solidFill>
+                <a:latin typeface="Consolas" panose="020B0609020204030204" pitchFamily="49" charset="0"/>
+              </a:rPr>
+              <a:t>( </a:t>
+            </a:r>
+            <a:r>
+              <a:rPr lang="en-US" sz="1600" dirty="0" err="1">
+                <a:solidFill>
+                  <a:srgbClr val="000000"/>
+                </a:solidFill>
+                <a:latin typeface="Consolas" panose="020B0609020204030204" pitchFamily="49" charset="0"/>
+              </a:rPr>
+              <a:t>ApplicationIdentityService</a:t>
+            </a:r>
+            <a:r>
+              <a:rPr lang="en-US" sz="1600" dirty="0">
+                <a:solidFill>
+                  <a:srgbClr val="000000"/>
+                </a:solidFill>
+                <a:latin typeface="Consolas" panose="020B0609020204030204" pitchFamily="49" charset="0"/>
+              </a:rPr>
+              <a:t> s, </a:t>
+            </a:r>
+            <a:br>
+              <a:rPr lang="en-US" sz="1600" dirty="0">
+                <a:solidFill>
+                  <a:srgbClr val="000000"/>
+                </a:solidFill>
+                <a:latin typeface="Consolas" panose="020B0609020204030204" pitchFamily="49" charset="0"/>
+              </a:rPr>
+            </a:br>
+            <a:r>
+              <a:rPr lang="en-US" sz="1600" dirty="0">
+                <a:solidFill>
+                  <a:srgbClr val="000000"/>
+                </a:solidFill>
+                <a:latin typeface="Consolas" panose="020B0609020204030204" pitchFamily="49" charset="0"/>
+              </a:rPr>
+              <a:t>                                            </a:t>
+            </a:r>
+            <a:r>
+              <a:rPr lang="en-US" sz="1600" dirty="0">
+                <a:solidFill>
+                  <a:srgbClr val="0000FF"/>
+                </a:solidFill>
+                <a:latin typeface="Consolas" panose="020B0609020204030204" pitchFamily="49" charset="0"/>
+              </a:rPr>
+              <a:t>bool</a:t>
+            </a:r>
+            <a:r>
+              <a:rPr lang="en-US" sz="1600" dirty="0">
+                <a:solidFill>
+                  <a:srgbClr val="000000"/>
+                </a:solidFill>
+                <a:latin typeface="Consolas" panose="020B0609020204030204" pitchFamily="49" charset="0"/>
+              </a:rPr>
+              <a:t> </a:t>
+            </a:r>
+            <a:r>
+              <a:rPr lang="en-US" sz="1600" dirty="0" err="1">
+                <a:solidFill>
+                  <a:srgbClr val="000000"/>
+                </a:solidFill>
+                <a:latin typeface="Consolas" panose="020B0609020204030204" pitchFamily="49" charset="0"/>
+              </a:rPr>
+              <a:t>isAllowedByDefault</a:t>
+            </a:r>
+            <a:r>
+              <a:rPr lang="en-US" sz="1600" dirty="0">
+                <a:solidFill>
+                  <a:srgbClr val="000000"/>
+                </a:solidFill>
+                <a:latin typeface="Consolas" panose="020B0609020204030204" pitchFamily="49" charset="0"/>
+              </a:rPr>
+              <a:t> )</a:t>
+            </a:r>
+            <a:endParaRPr lang="en-US" sz="1600" dirty="0"/>
+          </a:p>
+        </p:txBody>
+      </p:sp>
+      <p:sp>
+        <p:nvSpPr>
+          <p:cNvPr id="8" name="Content Placeholder 2">
+            <a:extLst>
+              <a:ext uri="{FF2B5EF4-FFF2-40B4-BE49-F238E27FC236}">
+                <a16:creationId xmlns:a16="http://schemas.microsoft.com/office/drawing/2014/main" id="{7D8761A4-78FC-CB22-E1A6-B3ED78F917D8}"/>
+              </a:ext>
+            </a:extLst>
+          </p:cNvPr>
+          <p:cNvSpPr txBox="1">
+            <a:spLocks/>
+          </p:cNvSpPr>
+          <p:nvPr/>
+        </p:nvSpPr>
+        <p:spPr>
+          <a:xfrm>
+            <a:off x="720968" y="4682479"/>
+            <a:ext cx="3897924" cy="2198966"/>
+          </a:xfrm>
+          <a:prstGeom prst="rect">
+            <a:avLst/>
+          </a:prstGeom>
+        </p:spPr>
+        <p:txBody>
+          <a:bodyPr vert="horz" lIns="91440" tIns="45720" rIns="91440" bIns="45720" rtlCol="0">
+            <a:normAutofit lnSpcReduction="10000"/>
+          </a:bodyPr>
+          <a:lstStyle>
+            <a:lvl1pPr marL="228600" indent="-228600" algn="l" defTabSz="914400" rtl="0" eaLnBrk="1" latinLnBrk="0" hangingPunct="1">
+              <a:lnSpc>
+                <a:spcPct val="90000"/>
+              </a:lnSpc>
+              <a:spcBef>
+                <a:spcPts val="1000"/>
+              </a:spcBef>
+              <a:buFont typeface="Arial" panose="020B0604020202020204" pitchFamily="34" charset="0"/>
+              <a:buChar char="•"/>
+              <a:defRPr sz="2800" kern="1200">
+                <a:solidFill>
+                  <a:schemeClr val="tx1"/>
+                </a:solidFill>
+                <a:latin typeface="+mn-lt"/>
+                <a:ea typeface="+mn-ea"/>
+                <a:cs typeface="+mn-cs"/>
+              </a:defRPr>
+            </a:lvl1pPr>
+            <a:lvl2pPr marL="685800" indent="-228600" algn="l" defTabSz="914400" rtl="0" eaLnBrk="1" latinLnBrk="0" hangingPunct="1">
+              <a:lnSpc>
+                <a:spcPct val="90000"/>
+              </a:lnSpc>
+              <a:spcBef>
+                <a:spcPts val="500"/>
+              </a:spcBef>
+              <a:buFont typeface="Arial" panose="020B0604020202020204" pitchFamily="34" charset="0"/>
+              <a:buChar char="•"/>
+              <a:defRPr sz="2400" kern="1200">
+                <a:solidFill>
+                  <a:schemeClr val="tx1"/>
+                </a:solidFill>
+                <a:latin typeface="+mn-lt"/>
+                <a:ea typeface="+mn-ea"/>
+                <a:cs typeface="+mn-cs"/>
+              </a:defRPr>
+            </a:lvl2pPr>
+            <a:lvl3pPr marL="1143000" indent="-228600" algn="l" defTabSz="914400" rtl="0" eaLnBrk="1" latinLnBrk="0" hangingPunct="1">
+              <a:lnSpc>
+                <a:spcPct val="90000"/>
+              </a:lnSpc>
+              <a:spcBef>
+                <a:spcPts val="500"/>
+              </a:spcBef>
+              <a:buFont typeface="Arial" panose="020B0604020202020204" pitchFamily="34" charset="0"/>
+              <a:buChar char="•"/>
+              <a:defRPr sz="2000" kern="1200">
+                <a:solidFill>
+                  <a:schemeClr val="tx1"/>
+                </a:solidFill>
+                <a:latin typeface="+mn-lt"/>
+                <a:ea typeface="+mn-ea"/>
+                <a:cs typeface="+mn-cs"/>
+              </a:defRPr>
+            </a:lvl3pPr>
+            <a:lvl4pPr marL="1600200" indent="-228600" algn="l" defTabSz="914400" rtl="0" eaLnBrk="1" latinLnBrk="0" hangingPunct="1">
+              <a:lnSpc>
+                <a:spcPct val="90000"/>
+              </a:lnSpc>
+              <a:spcBef>
+                <a:spcPts val="500"/>
+              </a:spcBef>
+              <a:buFont typeface="Arial" panose="020B0604020202020204" pitchFamily="34" charset="0"/>
+              <a:buChar char="•"/>
+              <a:defRPr sz="1800" kern="1200">
+                <a:solidFill>
+                  <a:schemeClr val="tx1"/>
+                </a:solidFill>
+                <a:latin typeface="+mn-lt"/>
+                <a:ea typeface="+mn-ea"/>
+                <a:cs typeface="+mn-cs"/>
+              </a:defRPr>
+            </a:lvl4pPr>
+            <a:lvl5pPr marL="2057400" indent="-228600" algn="l" defTabSz="914400" rtl="0" eaLnBrk="1" latinLnBrk="0" hangingPunct="1">
+              <a:lnSpc>
+                <a:spcPct val="90000"/>
+              </a:lnSpc>
+              <a:spcBef>
+                <a:spcPts val="500"/>
+              </a:spcBef>
+              <a:buFont typeface="Arial" panose="020B0604020202020204" pitchFamily="34" charset="0"/>
+              <a:buChar char="•"/>
+              <a:defRPr sz="1800" kern="1200">
+                <a:solidFill>
+                  <a:schemeClr val="tx1"/>
+                </a:solidFill>
+                <a:latin typeface="+mn-lt"/>
+                <a:ea typeface="+mn-ea"/>
+                <a:cs typeface="+mn-cs"/>
+              </a:defRPr>
+            </a:lvl5pPr>
+            <a:lvl6pPr marL="2514600" indent="-228600" algn="l" defTabSz="914400" rtl="0" eaLnBrk="1" latinLnBrk="0" hangingPunct="1">
+              <a:lnSpc>
+                <a:spcPct val="90000"/>
+              </a:lnSpc>
+              <a:spcBef>
+                <a:spcPts val="500"/>
+              </a:spcBef>
+              <a:buFont typeface="Arial" panose="020B0604020202020204" pitchFamily="34" charset="0"/>
+              <a:buChar char="•"/>
+              <a:defRPr sz="1800" kern="1200">
+                <a:solidFill>
+                  <a:schemeClr val="tx1"/>
+                </a:solidFill>
+                <a:latin typeface="+mn-lt"/>
+                <a:ea typeface="+mn-ea"/>
+                <a:cs typeface="+mn-cs"/>
+              </a:defRPr>
+            </a:lvl6pPr>
+            <a:lvl7pPr marL="2971800" indent="-228600" algn="l" defTabSz="914400" rtl="0" eaLnBrk="1" latinLnBrk="0" hangingPunct="1">
+              <a:lnSpc>
+                <a:spcPct val="90000"/>
+              </a:lnSpc>
+              <a:spcBef>
+                <a:spcPts val="500"/>
+              </a:spcBef>
+              <a:buFont typeface="Arial" panose="020B0604020202020204" pitchFamily="34" charset="0"/>
+              <a:buChar char="•"/>
+              <a:defRPr sz="1800" kern="1200">
+                <a:solidFill>
+                  <a:schemeClr val="tx1"/>
+                </a:solidFill>
+                <a:latin typeface="+mn-lt"/>
+                <a:ea typeface="+mn-ea"/>
+                <a:cs typeface="+mn-cs"/>
+              </a:defRPr>
+            </a:lvl7pPr>
+            <a:lvl8pPr marL="3429000" indent="-228600" algn="l" defTabSz="914400" rtl="0" eaLnBrk="1" latinLnBrk="0" hangingPunct="1">
+              <a:lnSpc>
+                <a:spcPct val="90000"/>
+              </a:lnSpc>
+              <a:spcBef>
+                <a:spcPts val="500"/>
+              </a:spcBef>
+              <a:buFont typeface="Arial" panose="020B0604020202020204" pitchFamily="34" charset="0"/>
+              <a:buChar char="•"/>
+              <a:defRPr sz="1800" kern="1200">
+                <a:solidFill>
+                  <a:schemeClr val="tx1"/>
+                </a:solidFill>
+                <a:latin typeface="+mn-lt"/>
+                <a:ea typeface="+mn-ea"/>
+                <a:cs typeface="+mn-cs"/>
+              </a:defRPr>
+            </a:lvl8pPr>
+            <a:lvl9pPr marL="3886200" indent="-228600" algn="l" defTabSz="914400" rtl="0" eaLnBrk="1" latinLnBrk="0" hangingPunct="1">
+              <a:lnSpc>
+                <a:spcPct val="90000"/>
+              </a:lnSpc>
+              <a:spcBef>
+                <a:spcPts val="500"/>
+              </a:spcBef>
+              <a:buFont typeface="Arial" panose="020B0604020202020204" pitchFamily="34" charset="0"/>
+              <a:buChar char="•"/>
+              <a:defRPr sz="1800" kern="1200">
+                <a:solidFill>
+                  <a:schemeClr val="tx1"/>
+                </a:solidFill>
+                <a:latin typeface="+mn-lt"/>
+                <a:ea typeface="+mn-ea"/>
+                <a:cs typeface="+mn-cs"/>
+              </a:defRPr>
+            </a:lvl9pPr>
+          </a:lstStyle>
+          <a:p>
+            <a:pPr marL="0" indent="0">
+              <a:lnSpc>
+                <a:spcPct val="100000"/>
+              </a:lnSpc>
+              <a:spcBef>
+                <a:spcPts val="0"/>
+              </a:spcBef>
+              <a:buFont typeface="Arial" panose="020B0604020202020204" pitchFamily="34" charset="0"/>
+              <a:buNone/>
+            </a:pPr>
+            <a:r>
+              <a:rPr lang="en-US" sz="1400" dirty="0">
+                <a:latin typeface="Courier New" panose="02070309020205020404" pitchFamily="49" charset="0"/>
+                <a:cs typeface="Courier New" panose="02070309020205020404" pitchFamily="49" charset="0"/>
+              </a:rPr>
+              <a:t>{ </a:t>
+            </a:r>
+          </a:p>
+          <a:p>
+            <a:pPr marL="0" indent="0">
+              <a:lnSpc>
+                <a:spcPct val="100000"/>
+              </a:lnSpc>
+              <a:spcBef>
+                <a:spcPts val="0"/>
+              </a:spcBef>
+              <a:buFont typeface="Arial" panose="020B0604020202020204" pitchFamily="34" charset="0"/>
+              <a:buNone/>
+            </a:pPr>
+            <a:r>
+              <a:rPr lang="en-US" sz="1400" dirty="0">
+                <a:latin typeface="Courier New" panose="02070309020205020404" pitchFamily="49" charset="0"/>
+                <a:cs typeface="Courier New" panose="02070309020205020404" pitchFamily="49" charset="0"/>
+              </a:rPr>
+              <a:t>  "</a:t>
+            </a:r>
+            <a:r>
+              <a:rPr lang="en-US" sz="1400" dirty="0" err="1">
+                <a:latin typeface="Courier New" panose="02070309020205020404" pitchFamily="49" charset="0"/>
+                <a:cs typeface="Courier New" panose="02070309020205020404" pitchFamily="49" charset="0"/>
+              </a:rPr>
+              <a:t>DomainName</a:t>
+            </a:r>
+            <a:r>
+              <a:rPr lang="en-US" sz="1400" dirty="0">
+                <a:latin typeface="Courier New" panose="02070309020205020404" pitchFamily="49" charset="0"/>
+                <a:cs typeface="Courier New" panose="02070309020205020404" pitchFamily="49" charset="0"/>
+              </a:rPr>
+              <a:t>": "Test",</a:t>
+            </a:r>
+          </a:p>
+          <a:p>
+            <a:pPr marL="0" indent="0">
+              <a:lnSpc>
+                <a:spcPct val="100000"/>
+              </a:lnSpc>
+              <a:spcBef>
+                <a:spcPts val="0"/>
+              </a:spcBef>
+              <a:buFont typeface="Arial" panose="020B0604020202020204" pitchFamily="34" charset="0"/>
+              <a:buNone/>
+            </a:pPr>
+            <a:r>
+              <a:rPr lang="en-US" sz="1400" dirty="0">
+                <a:latin typeface="Courier New" panose="02070309020205020404" pitchFamily="49" charset="0"/>
+                <a:cs typeface="Courier New" panose="02070309020205020404" pitchFamily="49" charset="0"/>
+              </a:rPr>
+              <a:t>  "Local": { "Name": "Sender" },</a:t>
+            </a:r>
+            <a:br>
+              <a:rPr lang="en-US" sz="1400" dirty="0">
+                <a:latin typeface="Courier New" panose="02070309020205020404" pitchFamily="49" charset="0"/>
+                <a:cs typeface="Courier New" panose="02070309020205020404" pitchFamily="49" charset="0"/>
+              </a:rPr>
+            </a:br>
+            <a:r>
+              <a:rPr lang="en-US" sz="1400" dirty="0">
+                <a:latin typeface="Courier New" panose="02070309020205020404" pitchFamily="49" charset="0"/>
+                <a:cs typeface="Courier New" panose="02070309020205020404" pitchFamily="49" charset="0"/>
+              </a:rPr>
+              <a:t>  </a:t>
+            </a:r>
+            <a:r>
+              <a:rPr lang="en-US" sz="1400" b="1" dirty="0">
+                <a:latin typeface="Courier New" panose="02070309020205020404" pitchFamily="49" charset="0"/>
+                <a:cs typeface="Courier New" panose="02070309020205020404" pitchFamily="49" charset="0"/>
+              </a:rPr>
+              <a:t>"</a:t>
+            </a:r>
+            <a:r>
+              <a:rPr lang="en-US" sz="1400" b="1" dirty="0" err="1">
+                <a:latin typeface="Courier New" panose="02070309020205020404" pitchFamily="49" charset="0"/>
+                <a:cs typeface="Courier New" panose="02070309020205020404" pitchFamily="49" charset="0"/>
+              </a:rPr>
+              <a:t>AllowFeatures</a:t>
+            </a:r>
+            <a:r>
+              <a:rPr lang="en-US" sz="1400" b="1" dirty="0">
+                <a:latin typeface="Courier New" panose="02070309020205020404" pitchFamily="49" charset="0"/>
+                <a:cs typeface="Courier New" panose="02070309020205020404" pitchFamily="49" charset="0"/>
+              </a:rPr>
+              <a:t>": "</a:t>
+            </a:r>
+            <a:r>
+              <a:rPr lang="en-US" sz="1400" b="1" dirty="0" err="1">
+                <a:latin typeface="Courier New" panose="02070309020205020404" pitchFamily="49" charset="0"/>
+                <a:cs typeface="Courier New" panose="02070309020205020404" pitchFamily="49" charset="0"/>
+              </a:rPr>
+              <a:t>BlobChannel</a:t>
+            </a:r>
+            <a:r>
+              <a:rPr lang="en-US" sz="1400" b="1" dirty="0">
+                <a:latin typeface="Courier New" panose="02070309020205020404" pitchFamily="49" charset="0"/>
+                <a:cs typeface="Courier New" panose="02070309020205020404" pitchFamily="49" charset="0"/>
+              </a:rPr>
+              <a:t>"</a:t>
+            </a:r>
+          </a:p>
+          <a:p>
+            <a:pPr marL="0" indent="0">
+              <a:lnSpc>
+                <a:spcPct val="100000"/>
+              </a:lnSpc>
+              <a:spcBef>
+                <a:spcPts val="0"/>
+              </a:spcBef>
+              <a:buFont typeface="Arial" panose="020B0604020202020204" pitchFamily="34" charset="0"/>
+              <a:buNone/>
+            </a:pPr>
+            <a:r>
+              <a:rPr lang="en-US" sz="1400" dirty="0">
+                <a:latin typeface="Courier New" panose="02070309020205020404" pitchFamily="49" charset="0"/>
+                <a:cs typeface="Courier New" panose="02070309020205020404" pitchFamily="49" charset="0"/>
+              </a:rPr>
+              <a:t>  "Remotes": [</a:t>
+            </a:r>
+            <a:br>
+              <a:rPr lang="en-US" sz="1400" dirty="0">
+                <a:latin typeface="Courier New" panose="02070309020205020404" pitchFamily="49" charset="0"/>
+                <a:cs typeface="Courier New" panose="02070309020205020404" pitchFamily="49" charset="0"/>
+              </a:rPr>
+            </a:br>
+            <a:r>
+              <a:rPr lang="en-US" sz="1400" dirty="0">
+                <a:latin typeface="Courier New" panose="02070309020205020404" pitchFamily="49" charset="0"/>
+                <a:cs typeface="Courier New" panose="02070309020205020404" pitchFamily="49" charset="0"/>
+              </a:rPr>
+              <a:t>  {</a:t>
+            </a:r>
+          </a:p>
+          <a:p>
+            <a:pPr marL="0" indent="0">
+              <a:lnSpc>
+                <a:spcPct val="100000"/>
+              </a:lnSpc>
+              <a:spcBef>
+                <a:spcPts val="0"/>
+              </a:spcBef>
+              <a:buFont typeface="Arial" panose="020B0604020202020204" pitchFamily="34" charset="0"/>
+              <a:buNone/>
+            </a:pPr>
+            <a:r>
+              <a:rPr lang="en-US" sz="1400" dirty="0">
+                <a:latin typeface="Courier New" panose="02070309020205020404" pitchFamily="49" charset="0"/>
+                <a:cs typeface="Courier New" panose="02070309020205020404" pitchFamily="49" charset="0"/>
+              </a:rPr>
+              <a:t>    "Name": "Target",</a:t>
+            </a:r>
+            <a:br>
+              <a:rPr lang="en-US" sz="1400" dirty="0">
+                <a:latin typeface="Courier New" panose="02070309020205020404" pitchFamily="49" charset="0"/>
+                <a:cs typeface="Courier New" panose="02070309020205020404" pitchFamily="49" charset="0"/>
+              </a:rPr>
+            </a:br>
+            <a:r>
+              <a:rPr lang="en-US" sz="1400" dirty="0">
+                <a:latin typeface="Courier New" panose="02070309020205020404" pitchFamily="49" charset="0"/>
+                <a:cs typeface="Courier New" panose="02070309020205020404" pitchFamily="49" charset="0"/>
+              </a:rPr>
+              <a:t>    "Address": "tcp:127.0.0.1“</a:t>
+            </a:r>
+            <a:br>
+              <a:rPr lang="en-US" sz="1400" dirty="0">
+                <a:latin typeface="Courier New" panose="02070309020205020404" pitchFamily="49" charset="0"/>
+                <a:cs typeface="Courier New" panose="02070309020205020404" pitchFamily="49" charset="0"/>
+              </a:rPr>
+            </a:br>
+            <a:r>
+              <a:rPr lang="en-US" sz="1400" dirty="0">
+                <a:latin typeface="Courier New" panose="02070309020205020404" pitchFamily="49" charset="0"/>
+                <a:cs typeface="Courier New" panose="02070309020205020404" pitchFamily="49" charset="0"/>
+              </a:rPr>
+              <a:t>  }]</a:t>
+            </a:r>
+          </a:p>
+          <a:p>
+            <a:pPr marL="0" indent="0">
+              <a:lnSpc>
+                <a:spcPct val="100000"/>
+              </a:lnSpc>
+              <a:spcBef>
+                <a:spcPts val="0"/>
+              </a:spcBef>
+              <a:buFont typeface="Arial" panose="020B0604020202020204" pitchFamily="34" charset="0"/>
+              <a:buNone/>
+            </a:pPr>
+            <a:r>
+              <a:rPr lang="en-US" sz="1400" dirty="0">
+                <a:latin typeface="Courier New" panose="02070309020205020404" pitchFamily="49" charset="0"/>
+                <a:cs typeface="Courier New" panose="02070309020205020404" pitchFamily="49" charset="0"/>
+              </a:rPr>
+              <a:t>}</a:t>
+            </a:r>
+          </a:p>
+          <a:p>
+            <a:pPr marL="0" indent="0">
+              <a:lnSpc>
+                <a:spcPct val="100000"/>
+              </a:lnSpc>
+              <a:spcBef>
+                <a:spcPts val="0"/>
+              </a:spcBef>
+              <a:buFont typeface="Arial" panose="020B0604020202020204" pitchFamily="34" charset="0"/>
+              <a:buNone/>
+            </a:pPr>
+            <a:endParaRPr lang="en-US" sz="1400" dirty="0">
+              <a:latin typeface="Courier New" panose="02070309020205020404" pitchFamily="49" charset="0"/>
+              <a:cs typeface="Courier New" panose="02070309020205020404" pitchFamily="49" charset="0"/>
+            </a:endParaRPr>
+          </a:p>
+        </p:txBody>
+      </p:sp>
+      <p:sp>
+        <p:nvSpPr>
+          <p:cNvPr id="9" name="Content Placeholder 2">
+            <a:extLst>
+              <a:ext uri="{FF2B5EF4-FFF2-40B4-BE49-F238E27FC236}">
+                <a16:creationId xmlns:a16="http://schemas.microsoft.com/office/drawing/2014/main" id="{6B6BF118-345A-7326-4BCF-5CE27028026A}"/>
+              </a:ext>
+            </a:extLst>
+          </p:cNvPr>
+          <p:cNvSpPr txBox="1">
+            <a:spLocks/>
+          </p:cNvSpPr>
+          <p:nvPr/>
+        </p:nvSpPr>
+        <p:spPr>
+          <a:xfrm>
+            <a:off x="6441829" y="4687451"/>
+            <a:ext cx="4226170" cy="2198966"/>
+          </a:xfrm>
+          <a:prstGeom prst="rect">
+            <a:avLst/>
+          </a:prstGeom>
+        </p:spPr>
+        <p:txBody>
+          <a:bodyPr vert="horz" lIns="91440" tIns="45720" rIns="91440" bIns="45720" rtlCol="0">
+            <a:normAutofit/>
+          </a:bodyPr>
+          <a:lstStyle>
+            <a:lvl1pPr marL="228600" indent="-228600" algn="l" defTabSz="914400" rtl="0" eaLnBrk="1" latinLnBrk="0" hangingPunct="1">
+              <a:lnSpc>
+                <a:spcPct val="90000"/>
+              </a:lnSpc>
+              <a:spcBef>
+                <a:spcPts val="1000"/>
+              </a:spcBef>
+              <a:buFont typeface="Arial" panose="020B0604020202020204" pitchFamily="34" charset="0"/>
+              <a:buChar char="•"/>
+              <a:defRPr sz="2800" kern="1200">
+                <a:solidFill>
+                  <a:schemeClr val="tx1"/>
+                </a:solidFill>
+                <a:latin typeface="+mn-lt"/>
+                <a:ea typeface="+mn-ea"/>
+                <a:cs typeface="+mn-cs"/>
+              </a:defRPr>
+            </a:lvl1pPr>
+            <a:lvl2pPr marL="685800" indent="-228600" algn="l" defTabSz="914400" rtl="0" eaLnBrk="1" latinLnBrk="0" hangingPunct="1">
+              <a:lnSpc>
+                <a:spcPct val="90000"/>
+              </a:lnSpc>
+              <a:spcBef>
+                <a:spcPts val="500"/>
+              </a:spcBef>
+              <a:buFont typeface="Arial" panose="020B0604020202020204" pitchFamily="34" charset="0"/>
+              <a:buChar char="•"/>
+              <a:defRPr sz="2400" kern="1200">
+                <a:solidFill>
+                  <a:schemeClr val="tx1"/>
+                </a:solidFill>
+                <a:latin typeface="+mn-lt"/>
+                <a:ea typeface="+mn-ea"/>
+                <a:cs typeface="+mn-cs"/>
+              </a:defRPr>
+            </a:lvl2pPr>
+            <a:lvl3pPr marL="1143000" indent="-228600" algn="l" defTabSz="914400" rtl="0" eaLnBrk="1" latinLnBrk="0" hangingPunct="1">
+              <a:lnSpc>
+                <a:spcPct val="90000"/>
+              </a:lnSpc>
+              <a:spcBef>
+                <a:spcPts val="500"/>
+              </a:spcBef>
+              <a:buFont typeface="Arial" panose="020B0604020202020204" pitchFamily="34" charset="0"/>
+              <a:buChar char="•"/>
+              <a:defRPr sz="2000" kern="1200">
+                <a:solidFill>
+                  <a:schemeClr val="tx1"/>
+                </a:solidFill>
+                <a:latin typeface="+mn-lt"/>
+                <a:ea typeface="+mn-ea"/>
+                <a:cs typeface="+mn-cs"/>
+              </a:defRPr>
+            </a:lvl3pPr>
+            <a:lvl4pPr marL="1600200" indent="-228600" algn="l" defTabSz="914400" rtl="0" eaLnBrk="1" latinLnBrk="0" hangingPunct="1">
+              <a:lnSpc>
+                <a:spcPct val="90000"/>
+              </a:lnSpc>
+              <a:spcBef>
+                <a:spcPts val="500"/>
+              </a:spcBef>
+              <a:buFont typeface="Arial" panose="020B0604020202020204" pitchFamily="34" charset="0"/>
+              <a:buChar char="•"/>
+              <a:defRPr sz="1800" kern="1200">
+                <a:solidFill>
+                  <a:schemeClr val="tx1"/>
+                </a:solidFill>
+                <a:latin typeface="+mn-lt"/>
+                <a:ea typeface="+mn-ea"/>
+                <a:cs typeface="+mn-cs"/>
+              </a:defRPr>
+            </a:lvl4pPr>
+            <a:lvl5pPr marL="2057400" indent="-228600" algn="l" defTabSz="914400" rtl="0" eaLnBrk="1" latinLnBrk="0" hangingPunct="1">
+              <a:lnSpc>
+                <a:spcPct val="90000"/>
+              </a:lnSpc>
+              <a:spcBef>
+                <a:spcPts val="500"/>
+              </a:spcBef>
+              <a:buFont typeface="Arial" panose="020B0604020202020204" pitchFamily="34" charset="0"/>
+              <a:buChar char="•"/>
+              <a:defRPr sz="1800" kern="1200">
+                <a:solidFill>
+                  <a:schemeClr val="tx1"/>
+                </a:solidFill>
+                <a:latin typeface="+mn-lt"/>
+                <a:ea typeface="+mn-ea"/>
+                <a:cs typeface="+mn-cs"/>
+              </a:defRPr>
+            </a:lvl5pPr>
+            <a:lvl6pPr marL="2514600" indent="-228600" algn="l" defTabSz="914400" rtl="0" eaLnBrk="1" latinLnBrk="0" hangingPunct="1">
+              <a:lnSpc>
+                <a:spcPct val="90000"/>
+              </a:lnSpc>
+              <a:spcBef>
+                <a:spcPts val="500"/>
+              </a:spcBef>
+              <a:buFont typeface="Arial" panose="020B0604020202020204" pitchFamily="34" charset="0"/>
+              <a:buChar char="•"/>
+              <a:defRPr sz="1800" kern="1200">
+                <a:solidFill>
+                  <a:schemeClr val="tx1"/>
+                </a:solidFill>
+                <a:latin typeface="+mn-lt"/>
+                <a:ea typeface="+mn-ea"/>
+                <a:cs typeface="+mn-cs"/>
+              </a:defRPr>
+            </a:lvl6pPr>
+            <a:lvl7pPr marL="2971800" indent="-228600" algn="l" defTabSz="914400" rtl="0" eaLnBrk="1" latinLnBrk="0" hangingPunct="1">
+              <a:lnSpc>
+                <a:spcPct val="90000"/>
+              </a:lnSpc>
+              <a:spcBef>
+                <a:spcPts val="500"/>
+              </a:spcBef>
+              <a:buFont typeface="Arial" panose="020B0604020202020204" pitchFamily="34" charset="0"/>
+              <a:buChar char="•"/>
+              <a:defRPr sz="1800" kern="1200">
+                <a:solidFill>
+                  <a:schemeClr val="tx1"/>
+                </a:solidFill>
+                <a:latin typeface="+mn-lt"/>
+                <a:ea typeface="+mn-ea"/>
+                <a:cs typeface="+mn-cs"/>
+              </a:defRPr>
+            </a:lvl7pPr>
+            <a:lvl8pPr marL="3429000" indent="-228600" algn="l" defTabSz="914400" rtl="0" eaLnBrk="1" latinLnBrk="0" hangingPunct="1">
+              <a:lnSpc>
+                <a:spcPct val="90000"/>
+              </a:lnSpc>
+              <a:spcBef>
+                <a:spcPts val="500"/>
+              </a:spcBef>
+              <a:buFont typeface="Arial" panose="020B0604020202020204" pitchFamily="34" charset="0"/>
+              <a:buChar char="•"/>
+              <a:defRPr sz="1800" kern="1200">
+                <a:solidFill>
+                  <a:schemeClr val="tx1"/>
+                </a:solidFill>
+                <a:latin typeface="+mn-lt"/>
+                <a:ea typeface="+mn-ea"/>
+                <a:cs typeface="+mn-cs"/>
+              </a:defRPr>
+            </a:lvl8pPr>
+            <a:lvl9pPr marL="3886200" indent="-228600" algn="l" defTabSz="914400" rtl="0" eaLnBrk="1" latinLnBrk="0" hangingPunct="1">
+              <a:lnSpc>
+                <a:spcPct val="90000"/>
+              </a:lnSpc>
+              <a:spcBef>
+                <a:spcPts val="500"/>
+              </a:spcBef>
+              <a:buFont typeface="Arial" panose="020B0604020202020204" pitchFamily="34" charset="0"/>
+              <a:buChar char="•"/>
+              <a:defRPr sz="1800" kern="1200">
+                <a:solidFill>
+                  <a:schemeClr val="tx1"/>
+                </a:solidFill>
+                <a:latin typeface="+mn-lt"/>
+                <a:ea typeface="+mn-ea"/>
+                <a:cs typeface="+mn-cs"/>
+              </a:defRPr>
+            </a:lvl9pPr>
+          </a:lstStyle>
+          <a:p>
+            <a:pPr marL="0" indent="0">
+              <a:lnSpc>
+                <a:spcPct val="100000"/>
+              </a:lnSpc>
+              <a:spcBef>
+                <a:spcPts val="0"/>
+              </a:spcBef>
+              <a:buFont typeface="Arial" panose="020B0604020202020204" pitchFamily="34" charset="0"/>
+              <a:buNone/>
+            </a:pPr>
+            <a:r>
+              <a:rPr lang="en-US" sz="1400" dirty="0">
+                <a:latin typeface="Courier New" panose="02070309020205020404" pitchFamily="49" charset="0"/>
+                <a:cs typeface="Courier New" panose="02070309020205020404" pitchFamily="49" charset="0"/>
+              </a:rPr>
+              <a:t>{ </a:t>
+            </a:r>
+          </a:p>
+          <a:p>
+            <a:pPr marL="0" indent="0">
+              <a:lnSpc>
+                <a:spcPct val="100000"/>
+              </a:lnSpc>
+              <a:spcBef>
+                <a:spcPts val="0"/>
+              </a:spcBef>
+              <a:buFont typeface="Arial" panose="020B0604020202020204" pitchFamily="34" charset="0"/>
+              <a:buNone/>
+            </a:pPr>
+            <a:r>
+              <a:rPr lang="en-US" sz="1400" dirty="0">
+                <a:latin typeface="Courier New" panose="02070309020205020404" pitchFamily="49" charset="0"/>
+                <a:cs typeface="Courier New" panose="02070309020205020404" pitchFamily="49" charset="0"/>
+              </a:rPr>
+              <a:t>  "</a:t>
+            </a:r>
+            <a:r>
+              <a:rPr lang="en-US" sz="1400" dirty="0" err="1">
+                <a:latin typeface="Courier New" panose="02070309020205020404" pitchFamily="49" charset="0"/>
+                <a:cs typeface="Courier New" panose="02070309020205020404" pitchFamily="49" charset="0"/>
+              </a:rPr>
+              <a:t>DomainName</a:t>
+            </a:r>
+            <a:r>
+              <a:rPr lang="en-US" sz="1400" dirty="0">
+                <a:latin typeface="Courier New" panose="02070309020205020404" pitchFamily="49" charset="0"/>
+                <a:cs typeface="Courier New" panose="02070309020205020404" pitchFamily="49" charset="0"/>
+              </a:rPr>
+              <a:t>": "Test",</a:t>
+            </a:r>
+          </a:p>
+          <a:p>
+            <a:pPr marL="0" indent="0">
+              <a:lnSpc>
+                <a:spcPct val="100000"/>
+              </a:lnSpc>
+              <a:spcBef>
+                <a:spcPts val="0"/>
+              </a:spcBef>
+              <a:buFont typeface="Arial" panose="020B0604020202020204" pitchFamily="34" charset="0"/>
+              <a:buNone/>
+            </a:pPr>
+            <a:r>
+              <a:rPr lang="en-US" sz="1400" dirty="0">
+                <a:latin typeface="Courier New" panose="02070309020205020404" pitchFamily="49" charset="0"/>
+                <a:cs typeface="Courier New" panose="02070309020205020404" pitchFamily="49" charset="0"/>
+              </a:rPr>
+              <a:t>  "Local": { "Name": “Target" },</a:t>
+            </a:r>
+            <a:br>
+              <a:rPr lang="en-US" sz="1400" dirty="0">
+                <a:latin typeface="Courier New" panose="02070309020205020404" pitchFamily="49" charset="0"/>
+                <a:cs typeface="Courier New" panose="02070309020205020404" pitchFamily="49" charset="0"/>
+              </a:rPr>
+            </a:br>
+            <a:r>
+              <a:rPr lang="en-US" sz="1400" dirty="0">
+                <a:latin typeface="Courier New" panose="02070309020205020404" pitchFamily="49" charset="0"/>
+                <a:cs typeface="Courier New" panose="02070309020205020404" pitchFamily="49" charset="0"/>
+              </a:rPr>
+              <a:t>  "Remotes": [</a:t>
+            </a:r>
+            <a:br>
+              <a:rPr lang="en-US" sz="1400" dirty="0">
+                <a:latin typeface="Courier New" panose="02070309020205020404" pitchFamily="49" charset="0"/>
+                <a:cs typeface="Courier New" panose="02070309020205020404" pitchFamily="49" charset="0"/>
+              </a:rPr>
+            </a:br>
+            <a:r>
+              <a:rPr lang="en-US" sz="1400" dirty="0">
+                <a:latin typeface="Courier New" panose="02070309020205020404" pitchFamily="49" charset="0"/>
+                <a:cs typeface="Courier New" panose="02070309020205020404" pitchFamily="49" charset="0"/>
+              </a:rPr>
+              <a:t>  {</a:t>
+            </a:r>
+          </a:p>
+          <a:p>
+            <a:pPr marL="0" indent="0">
+              <a:lnSpc>
+                <a:spcPct val="100000"/>
+              </a:lnSpc>
+              <a:spcBef>
+                <a:spcPts val="0"/>
+              </a:spcBef>
+              <a:buFont typeface="Arial" panose="020B0604020202020204" pitchFamily="34" charset="0"/>
+              <a:buNone/>
+            </a:pPr>
+            <a:r>
+              <a:rPr lang="en-US" sz="1400" dirty="0">
+                <a:latin typeface="Courier New" panose="02070309020205020404" pitchFamily="49" charset="0"/>
+                <a:cs typeface="Courier New" panose="02070309020205020404" pitchFamily="49" charset="0"/>
+              </a:rPr>
+              <a:t>    "Name": "Sender",</a:t>
+            </a:r>
+            <a:br>
+              <a:rPr lang="en-US" sz="1400" dirty="0">
+                <a:latin typeface="Courier New" panose="02070309020205020404" pitchFamily="49" charset="0"/>
+                <a:cs typeface="Courier New" panose="02070309020205020404" pitchFamily="49" charset="0"/>
+              </a:rPr>
+            </a:br>
+            <a:r>
+              <a:rPr lang="en-US" sz="1400" dirty="0">
+                <a:latin typeface="Courier New" panose="02070309020205020404" pitchFamily="49" charset="0"/>
+                <a:cs typeface="Courier New" panose="02070309020205020404" pitchFamily="49" charset="0"/>
+              </a:rPr>
+              <a:t>    </a:t>
+            </a:r>
+            <a:r>
+              <a:rPr lang="en-US" sz="1400" b="1" dirty="0">
+                <a:latin typeface="Courier New" panose="02070309020205020404" pitchFamily="49" charset="0"/>
+                <a:cs typeface="Courier New" panose="02070309020205020404" pitchFamily="49" charset="0"/>
+              </a:rPr>
+              <a:t>"</a:t>
+            </a:r>
+            <a:r>
+              <a:rPr lang="en-US" sz="1400" b="1" dirty="0" err="1">
+                <a:latin typeface="Courier New" panose="02070309020205020404" pitchFamily="49" charset="0"/>
+                <a:cs typeface="Courier New" panose="02070309020205020404" pitchFamily="49" charset="0"/>
+              </a:rPr>
+              <a:t>AllowFeatures</a:t>
+            </a:r>
+            <a:r>
+              <a:rPr lang="en-US" sz="1400" b="1" dirty="0">
+                <a:latin typeface="Courier New" panose="02070309020205020404" pitchFamily="49" charset="0"/>
+                <a:cs typeface="Courier New" panose="02070309020205020404" pitchFamily="49" charset="0"/>
+              </a:rPr>
+              <a:t>": ["</a:t>
+            </a:r>
+            <a:r>
+              <a:rPr lang="en-US" sz="1400" b="1" dirty="0" err="1">
+                <a:latin typeface="Courier New" panose="02070309020205020404" pitchFamily="49" charset="0"/>
+                <a:cs typeface="Courier New" panose="02070309020205020404" pitchFamily="49" charset="0"/>
+              </a:rPr>
+              <a:t>BlobChannel</a:t>
+            </a:r>
+            <a:r>
+              <a:rPr lang="en-US" sz="1400" b="1" dirty="0">
+                <a:latin typeface="Courier New" panose="02070309020205020404" pitchFamily="49" charset="0"/>
+                <a:cs typeface="Courier New" panose="02070309020205020404" pitchFamily="49" charset="0"/>
+              </a:rPr>
+              <a:t>"]</a:t>
+            </a:r>
+            <a:br>
+              <a:rPr lang="en-US" sz="1400" dirty="0">
+                <a:latin typeface="Courier New" panose="02070309020205020404" pitchFamily="49" charset="0"/>
+                <a:cs typeface="Courier New" panose="02070309020205020404" pitchFamily="49" charset="0"/>
+              </a:rPr>
+            </a:br>
+            <a:r>
+              <a:rPr lang="en-US" sz="1400" dirty="0">
+                <a:latin typeface="Courier New" panose="02070309020205020404" pitchFamily="49" charset="0"/>
+                <a:cs typeface="Courier New" panose="02070309020205020404" pitchFamily="49" charset="0"/>
+              </a:rPr>
+              <a:t>  }]</a:t>
+            </a:r>
+          </a:p>
+          <a:p>
+            <a:pPr marL="0" indent="0">
+              <a:lnSpc>
+                <a:spcPct val="100000"/>
+              </a:lnSpc>
+              <a:spcBef>
+                <a:spcPts val="0"/>
+              </a:spcBef>
+              <a:buFont typeface="Arial" panose="020B0604020202020204" pitchFamily="34" charset="0"/>
+              <a:buNone/>
+            </a:pPr>
+            <a:r>
+              <a:rPr lang="en-US" sz="1400" dirty="0">
+                <a:latin typeface="Courier New" panose="02070309020205020404" pitchFamily="49" charset="0"/>
+                <a:cs typeface="Courier New" panose="02070309020205020404" pitchFamily="49" charset="0"/>
+              </a:rPr>
+              <a:t>}</a:t>
+            </a:r>
+          </a:p>
+          <a:p>
+            <a:pPr marL="0" indent="0">
+              <a:lnSpc>
+                <a:spcPct val="100000"/>
+              </a:lnSpc>
+              <a:spcBef>
+                <a:spcPts val="0"/>
+              </a:spcBef>
+              <a:buFont typeface="Arial" panose="020B0604020202020204" pitchFamily="34" charset="0"/>
+              <a:buNone/>
+            </a:pPr>
+            <a:endParaRPr lang="en-US" sz="1400" dirty="0">
+              <a:latin typeface="Courier New" panose="02070309020205020404" pitchFamily="49" charset="0"/>
+              <a:cs typeface="Courier New" panose="02070309020205020404" pitchFamily="49" charset="0"/>
+            </a:endParaRPr>
+          </a:p>
+        </p:txBody>
+      </p:sp>
+    </p:spTree>
+    <p:extLst>
+      <p:ext uri="{BB962C8B-B14F-4D97-AF65-F5344CB8AC3E}">
+        <p14:creationId xmlns:p14="http://schemas.microsoft.com/office/powerpoint/2010/main" val="1213413380"/>
+      </p:ext>
+    </p:extLst>
+  </p:cSld>
+  <p:clrMapOvr>
+    <a:masterClrMapping/>
+  </p:clrMapOvr>
+</p:sld>
+</file>
+
+<file path=ppt/slides/slide25.xml><?xml version="1.0" encoding="utf-8"?>
+<p:sld xmlns:a="http://schemas.openxmlformats.org/drawingml/2006/main" xmlns:r="http://schemas.openxmlformats.org/officeDocument/2006/relationships" xmlns:p="http://schemas.openxmlformats.org/presentationml/2006/main">
+  <p:cSld>
+    <p:spTree>
+      <p:nvGrpSpPr>
+        <p:cNvPr id="1" name=""/>
+        <p:cNvGrpSpPr/>
+        <p:nvPr/>
+      </p:nvGrpSpPr>
+      <p:grpSpPr>
+        <a:xfrm>
+          <a:off x="0" y="0"/>
+          <a:ext cx="0" cy="0"/>
+          <a:chOff x="0" y="0"/>
+          <a:chExt cx="0" cy="0"/>
+        </a:xfrm>
+      </p:grpSpPr>
+      <p:sp>
+        <p:nvSpPr>
+          <p:cNvPr id="2" name="Title 1">
+            <a:extLst>
+              <a:ext uri="{FF2B5EF4-FFF2-40B4-BE49-F238E27FC236}">
+                <a16:creationId xmlns:a16="http://schemas.microsoft.com/office/drawing/2014/main" id="{AB1D9BD9-E7B8-0308-F846-C5AE6E739C5F}"/>
+              </a:ext>
+            </a:extLst>
+          </p:cNvPr>
+          <p:cNvSpPr>
+            <a:spLocks noGrp="1"/>
+          </p:cNvSpPr>
+          <p:nvPr>
+            <p:ph type="title"/>
+          </p:nvPr>
+        </p:nvSpPr>
+        <p:spPr/>
+        <p:txBody>
+          <a:bodyPr/>
+          <a:lstStyle/>
+          <a:p>
+            <a:r>
+              <a:rPr lang="en-US" dirty="0"/>
+              <a:t>The </a:t>
+            </a:r>
+            <a:r>
+              <a:rPr lang="en-US" dirty="0" err="1"/>
+              <a:t>TransportFeature</a:t>
+            </a:r>
+            <a:endParaRPr lang="en-US" dirty="0"/>
+          </a:p>
+        </p:txBody>
+      </p:sp>
+      <p:sp>
+        <p:nvSpPr>
+          <p:cNvPr id="3" name="Content Placeholder 2">
+            <a:extLst>
+              <a:ext uri="{FF2B5EF4-FFF2-40B4-BE49-F238E27FC236}">
+                <a16:creationId xmlns:a16="http://schemas.microsoft.com/office/drawing/2014/main" id="{8C60C7C5-6DBE-8D49-F647-8952029E2ADB}"/>
+              </a:ext>
+            </a:extLst>
+          </p:cNvPr>
+          <p:cNvSpPr>
+            <a:spLocks noGrp="1"/>
+          </p:cNvSpPr>
+          <p:nvPr>
+            <p:ph idx="1"/>
+          </p:nvPr>
+        </p:nvSpPr>
+        <p:spPr>
+          <a:xfrm>
+            <a:off x="838200" y="1825625"/>
+            <a:ext cx="5081954" cy="2833921"/>
+          </a:xfrm>
+        </p:spPr>
+        <p:txBody>
+          <a:bodyPr>
+            <a:normAutofit/>
+          </a:bodyPr>
+          <a:lstStyle/>
+          <a:p>
+            <a:r>
+              <a:rPr lang="en-US" dirty="0"/>
+              <a:t>Opt-in feature: available by default on all Remotes that are not in the domain “Undefined”</a:t>
+            </a:r>
+          </a:p>
+          <a:p>
+            <a:pPr lvl="1"/>
+            <a:r>
+              <a:rPr lang="en-US" dirty="0"/>
+              <a:t>To remove it: </a:t>
+            </a:r>
+            <a:br>
+              <a:rPr lang="en-US" dirty="0"/>
+            </a:br>
+            <a:r>
+              <a:rPr lang="en-US" sz="1600" b="1" dirty="0">
+                <a:latin typeface="Courier New" panose="02070309020205020404" pitchFamily="49" charset="0"/>
+                <a:cs typeface="Courier New" panose="02070309020205020404" pitchFamily="49" charset="0"/>
+              </a:rPr>
+              <a:t>"</a:t>
+            </a:r>
+            <a:r>
+              <a:rPr lang="en-US" sz="1600" b="1" dirty="0" err="1">
+                <a:latin typeface="Courier New" panose="02070309020205020404" pitchFamily="49" charset="0"/>
+                <a:cs typeface="Courier New" panose="02070309020205020404" pitchFamily="49" charset="0"/>
+              </a:rPr>
+              <a:t>DisallowFeatures</a:t>
+            </a:r>
+            <a:r>
+              <a:rPr lang="en-US" sz="1600" b="1" dirty="0">
+                <a:latin typeface="Courier New" panose="02070309020205020404" pitchFamily="49" charset="0"/>
+                <a:cs typeface="Courier New" panose="02070309020205020404" pitchFamily="49" charset="0"/>
+              </a:rPr>
+              <a:t>": "Transport“</a:t>
+            </a:r>
+          </a:p>
+          <a:p>
+            <a:r>
+              <a:rPr lang="en-US" dirty="0"/>
+              <a:t>Transport is “on” by default but can be </a:t>
+            </a:r>
+            <a:r>
+              <a:rPr lang="en-US" sz="2000" dirty="0" err="1">
+                <a:latin typeface="Consolas" panose="020B0609020204030204" pitchFamily="49" charset="0"/>
+                <a:cs typeface="Courier New" panose="02070309020205020404" pitchFamily="49" charset="0"/>
+              </a:rPr>
+              <a:t>SwithOff</a:t>
+            </a:r>
+            <a:r>
+              <a:rPr lang="en-US" dirty="0"/>
+              <a:t>/</a:t>
+            </a:r>
+            <a:r>
+              <a:rPr lang="en-US" sz="2000" dirty="0" err="1">
+                <a:latin typeface="Consolas" panose="020B0609020204030204" pitchFamily="49" charset="0"/>
+                <a:cs typeface="Courier New" panose="02070309020205020404" pitchFamily="49" charset="0"/>
+              </a:rPr>
+              <a:t>SwitchOn</a:t>
+            </a:r>
+            <a:endParaRPr lang="en-US" sz="2000" dirty="0">
+              <a:latin typeface="Consolas" panose="020B0609020204030204" pitchFamily="49" charset="0"/>
+              <a:cs typeface="Courier New" panose="02070309020205020404" pitchFamily="49" charset="0"/>
+            </a:endParaRPr>
+          </a:p>
+        </p:txBody>
+      </p:sp>
+      <p:pic>
+        <p:nvPicPr>
+          <p:cNvPr id="7" name="Picture 6" descr="Graphical user interface, diagram&#10;&#10;Description automatically generated">
+            <a:extLst>
+              <a:ext uri="{FF2B5EF4-FFF2-40B4-BE49-F238E27FC236}">
+                <a16:creationId xmlns:a16="http://schemas.microsoft.com/office/drawing/2014/main" id="{145D6F04-76EB-0D08-22E0-99122639C349}"/>
+              </a:ext>
+            </a:extLst>
+          </p:cNvPr>
+          <p:cNvPicPr>
+            <a:picLocks noChangeAspect="1"/>
+          </p:cNvPicPr>
+          <p:nvPr/>
+        </p:nvPicPr>
+        <p:blipFill>
+          <a:blip r:embed="rId2">
+            <a:extLst>
+              <a:ext uri="{28A0092B-C50C-407E-A947-70E740481C1C}">
+                <a14:useLocalDpi xmlns:a14="http://schemas.microsoft.com/office/drawing/2010/main" val="0"/>
+              </a:ext>
+            </a:extLst>
+          </a:blip>
+          <a:stretch>
+            <a:fillRect/>
+          </a:stretch>
+        </p:blipFill>
+        <p:spPr>
+          <a:xfrm>
+            <a:off x="5920154" y="194454"/>
+            <a:ext cx="6164199" cy="4465092"/>
+          </a:xfrm>
+          <a:prstGeom prst="rect">
+            <a:avLst/>
+          </a:prstGeom>
+        </p:spPr>
+      </p:pic>
+      <p:sp>
+        <p:nvSpPr>
+          <p:cNvPr id="9" name="TextBox 8">
+            <a:extLst>
+              <a:ext uri="{FF2B5EF4-FFF2-40B4-BE49-F238E27FC236}">
+                <a16:creationId xmlns:a16="http://schemas.microsoft.com/office/drawing/2014/main" id="{71690184-9A00-DA38-F75D-7518FDA3E2C3}"/>
+              </a:ext>
+            </a:extLst>
+          </p:cNvPr>
+          <p:cNvSpPr txBox="1"/>
+          <p:nvPr/>
+        </p:nvSpPr>
+        <p:spPr>
+          <a:xfrm>
+            <a:off x="838200" y="4830217"/>
+            <a:ext cx="9419492" cy="996170"/>
+          </a:xfrm>
+          <a:prstGeom prst="rect">
+            <a:avLst/>
+          </a:prstGeom>
+          <a:noFill/>
+        </p:spPr>
+        <p:txBody>
+          <a:bodyPr wrap="square">
+            <a:spAutoFit/>
+          </a:bodyPr>
+          <a:lstStyle/>
+          <a:p>
+            <a:pPr marL="228600" indent="-228600">
+              <a:lnSpc>
+                <a:spcPct val="90000"/>
+              </a:lnSpc>
+              <a:spcBef>
+                <a:spcPts val="1000"/>
+              </a:spcBef>
+              <a:buFont typeface="Arial" panose="020B0604020202020204" pitchFamily="34" charset="0"/>
+              <a:buChar char="•"/>
+            </a:pPr>
+            <a:r>
+              <a:rPr lang="en-US" sz="2800" dirty="0" err="1"/>
+              <a:t>DisallowEviction</a:t>
+            </a:r>
+            <a:r>
+              <a:rPr lang="en-US" sz="2800" dirty="0"/>
+              <a:t> is false by default (like MQTT).</a:t>
+            </a:r>
+          </a:p>
+          <a:p>
+            <a:pPr marL="228600" indent="-228600">
+              <a:lnSpc>
+                <a:spcPct val="90000"/>
+              </a:lnSpc>
+              <a:spcBef>
+                <a:spcPts val="1000"/>
+              </a:spcBef>
+              <a:buFont typeface="Arial" panose="020B0604020202020204" pitchFamily="34" charset="0"/>
+              <a:buChar char="•"/>
+            </a:pPr>
+            <a:r>
+              <a:rPr lang="en-US" sz="2800" dirty="0"/>
+              <a:t>The </a:t>
+            </a:r>
+            <a:r>
+              <a:rPr lang="en-US" sz="2800" dirty="0" err="1"/>
+              <a:t>ReadyTask</a:t>
+            </a:r>
+            <a:r>
+              <a:rPr lang="en-US" sz="2800" dirty="0"/>
+              <a:t> can be awaited before using the Transport.</a:t>
+            </a:r>
+          </a:p>
+        </p:txBody>
+      </p:sp>
+    </p:spTree>
+    <p:extLst>
+      <p:ext uri="{BB962C8B-B14F-4D97-AF65-F5344CB8AC3E}">
+        <p14:creationId xmlns:p14="http://schemas.microsoft.com/office/powerpoint/2010/main" val="3935174584"/>
+      </p:ext>
+    </p:extLst>
+  </p:cSld>
+  <p:clrMapOvr>
+    <a:masterClrMapping/>
+  </p:clrMapOvr>
+</p:sld>
+</file>
+
+<file path=ppt/slides/slide26.xml><?xml version="1.0" encoding="utf-8"?>
+<p:sld xmlns:a="http://schemas.openxmlformats.org/drawingml/2006/main" xmlns:r="http://schemas.openxmlformats.org/officeDocument/2006/relationships" xmlns:p="http://schemas.openxmlformats.org/presentationml/2006/main">
+  <p:cSld>
+    <p:spTree>
+      <p:nvGrpSpPr>
+        <p:cNvPr id="1" name=""/>
+        <p:cNvGrpSpPr/>
+        <p:nvPr/>
+      </p:nvGrpSpPr>
+      <p:grpSpPr>
+        <a:xfrm>
+          <a:off x="0" y="0"/>
+          <a:ext cx="0" cy="0"/>
+          <a:chOff x="0" y="0"/>
+          <a:chExt cx="0" cy="0"/>
+        </a:xfrm>
+      </p:grpSpPr>
+      <p:sp>
+        <p:nvSpPr>
+          <p:cNvPr id="2" name="Title 1">
+            <a:extLst>
+              <a:ext uri="{FF2B5EF4-FFF2-40B4-BE49-F238E27FC236}">
+                <a16:creationId xmlns:a16="http://schemas.microsoft.com/office/drawing/2014/main" id="{E28F16C2-5FE3-B18B-1F5B-429CD7308A94}"/>
+              </a:ext>
+            </a:extLst>
+          </p:cNvPr>
+          <p:cNvSpPr>
+            <a:spLocks noGrp="1"/>
+          </p:cNvSpPr>
+          <p:nvPr>
+            <p:ph type="title"/>
+          </p:nvPr>
+        </p:nvSpPr>
+        <p:spPr/>
+        <p:txBody>
+          <a:bodyPr/>
+          <a:lstStyle/>
+          <a:p>
+            <a:r>
+              <a:rPr lang="en-US" dirty="0"/>
+              <a:t>The exchange Channels</a:t>
+            </a:r>
+          </a:p>
+        </p:txBody>
+      </p:sp>
+      <p:sp>
+        <p:nvSpPr>
+          <p:cNvPr id="3" name="Content Placeholder 2">
+            <a:extLst>
+              <a:ext uri="{FF2B5EF4-FFF2-40B4-BE49-F238E27FC236}">
+                <a16:creationId xmlns:a16="http://schemas.microsoft.com/office/drawing/2014/main" id="{1819622E-A74C-BCB9-B3FA-CB06EC5A3192}"/>
+              </a:ext>
+            </a:extLst>
+          </p:cNvPr>
+          <p:cNvSpPr>
+            <a:spLocks noGrp="1"/>
+          </p:cNvSpPr>
+          <p:nvPr>
+            <p:ph idx="1"/>
+          </p:nvPr>
+        </p:nvSpPr>
+        <p:spPr>
+          <a:xfrm>
+            <a:off x="838199" y="1825625"/>
+            <a:ext cx="10732477" cy="4351338"/>
+          </a:xfrm>
+        </p:spPr>
+        <p:txBody>
+          <a:bodyPr/>
+          <a:lstStyle/>
+          <a:p>
+            <a:r>
+              <a:rPr lang="en-US" dirty="0"/>
+              <a:t>A Remote’s </a:t>
+            </a:r>
+            <a:r>
+              <a:rPr lang="en-US" dirty="0" err="1"/>
+              <a:t>TransportFeature</a:t>
+            </a:r>
+            <a:r>
+              <a:rPr lang="en-US" dirty="0"/>
+              <a:t> handles the transport to the other side.</a:t>
+            </a:r>
+          </a:p>
+          <a:p>
+            <a:pPr lvl="1"/>
+            <a:r>
+              <a:rPr lang="en-US" dirty="0"/>
+              <a:t>Listener vs. Sender is automatically handled based on the configuration.</a:t>
+            </a:r>
+          </a:p>
+          <a:p>
+            <a:pPr lvl="1"/>
+            <a:r>
+              <a:rPr lang="en-US" dirty="0"/>
+              <a:t>The transport technology can be specified. The default is “</a:t>
+            </a:r>
+            <a:r>
+              <a:rPr lang="en-US" dirty="0" err="1"/>
+              <a:t>tcp</a:t>
+            </a:r>
+            <a:r>
+              <a:rPr lang="en-US" dirty="0"/>
+              <a:t>”.</a:t>
+            </a:r>
+          </a:p>
+          <a:p>
+            <a:r>
+              <a:rPr lang="en-US" dirty="0"/>
+              <a:t>The </a:t>
+            </a:r>
+            <a:r>
+              <a:rPr lang="en-US" dirty="0" err="1"/>
+              <a:t>TransportFeatures</a:t>
+            </a:r>
+            <a:r>
+              <a:rPr lang="en-US" dirty="0"/>
+              <a:t> exposes the properties relevant to the communication but is not itself in charge of exchanging data.</a:t>
+            </a:r>
+          </a:p>
+          <a:p>
+            <a:r>
+              <a:rPr lang="en-US" dirty="0"/>
+              <a:t>Channels are Features that implements a protocol and exposes it to the developer.</a:t>
+            </a:r>
+          </a:p>
+          <a:p>
+            <a:r>
+              <a:rPr lang="en-US" dirty="0"/>
+              <a:t>Channels implementation provides:</a:t>
+            </a:r>
+          </a:p>
+          <a:p>
+            <a:pPr lvl="1"/>
+            <a:r>
+              <a:rPr lang="en-US" dirty="0"/>
+              <a:t>A Protocol that can be in multiple versions.</a:t>
+            </a:r>
+          </a:p>
+          <a:p>
+            <a:pPr lvl="1"/>
+            <a:r>
+              <a:rPr lang="en-US" dirty="0"/>
+              <a:t>A way to build and send, receive and parse </a:t>
+            </a:r>
+            <a:r>
+              <a:rPr lang="en-US" dirty="0" err="1"/>
+              <a:t>TransportMessage</a:t>
+            </a:r>
+            <a:r>
+              <a:rPr lang="en-US" dirty="0"/>
+              <a:t> objects.</a:t>
+            </a:r>
+          </a:p>
+        </p:txBody>
+      </p:sp>
+    </p:spTree>
+    <p:extLst>
+      <p:ext uri="{BB962C8B-B14F-4D97-AF65-F5344CB8AC3E}">
+        <p14:creationId xmlns:p14="http://schemas.microsoft.com/office/powerpoint/2010/main" val="857479250"/>
+      </p:ext>
+    </p:extLst>
+  </p:cSld>
+  <p:clrMapOvr>
+    <a:masterClrMapping/>
+  </p:clrMapOvr>
+</p:sld>
+</file>
+
+<file path=ppt/slides/slide27.xml><?xml version="1.0" encoding="utf-8"?>
+<p:sld xmlns:a="http://schemas.openxmlformats.org/drawingml/2006/main" xmlns:r="http://schemas.openxmlformats.org/officeDocument/2006/relationships" xmlns:p="http://schemas.openxmlformats.org/presentationml/2006/main">
+  <p:cSld>
+    <p:spTree>
+      <p:nvGrpSpPr>
+        <p:cNvPr id="1" name=""/>
+        <p:cNvGrpSpPr/>
+        <p:nvPr/>
+      </p:nvGrpSpPr>
+      <p:grpSpPr>
+        <a:xfrm>
+          <a:off x="0" y="0"/>
+          <a:ext cx="0" cy="0"/>
+          <a:chOff x="0" y="0"/>
+          <a:chExt cx="0" cy="0"/>
+        </a:xfrm>
+      </p:grpSpPr>
+      <p:sp>
+        <p:nvSpPr>
+          <p:cNvPr id="2" name="Title 1">
+            <a:extLst>
+              <a:ext uri="{FF2B5EF4-FFF2-40B4-BE49-F238E27FC236}">
+                <a16:creationId xmlns:a16="http://schemas.microsoft.com/office/drawing/2014/main" id="{D234F961-5C07-CC54-4D89-C39917A7A683}"/>
+              </a:ext>
+            </a:extLst>
+          </p:cNvPr>
+          <p:cNvSpPr>
+            <a:spLocks noGrp="1"/>
+          </p:cNvSpPr>
+          <p:nvPr>
+            <p:ph type="title"/>
+          </p:nvPr>
+        </p:nvSpPr>
+        <p:spPr/>
+        <p:txBody>
+          <a:bodyPr/>
+          <a:lstStyle/>
+          <a:p>
+            <a:r>
+              <a:rPr lang="en-US" dirty="0" err="1"/>
+              <a:t>TransportMessage</a:t>
+            </a:r>
+            <a:endParaRPr lang="en-US" dirty="0"/>
+          </a:p>
+        </p:txBody>
+      </p:sp>
+      <p:pic>
+        <p:nvPicPr>
+          <p:cNvPr id="9" name="Content Placeholder 8" descr="Graphical user interface">
+            <a:extLst>
+              <a:ext uri="{FF2B5EF4-FFF2-40B4-BE49-F238E27FC236}">
+                <a16:creationId xmlns:a16="http://schemas.microsoft.com/office/drawing/2014/main" id="{8F2564D2-6F15-2301-1548-C78BCB93926C}"/>
+              </a:ext>
+            </a:extLst>
+          </p:cNvPr>
+          <p:cNvPicPr>
+            <a:picLocks noGrp="1" noChangeAspect="1"/>
+          </p:cNvPicPr>
+          <p:nvPr>
+            <p:ph idx="1"/>
+          </p:nvPr>
+        </p:nvPicPr>
+        <p:blipFill>
+          <a:blip r:embed="rId3">
+            <a:extLst>
+              <a:ext uri="{28A0092B-C50C-407E-A947-70E740481C1C}">
+                <a14:useLocalDpi xmlns:a14="http://schemas.microsoft.com/office/drawing/2010/main" val="0"/>
+              </a:ext>
+            </a:extLst>
+          </a:blip>
+          <a:stretch>
+            <a:fillRect/>
+          </a:stretch>
+        </p:blipFill>
+        <p:spPr>
+          <a:xfrm>
+            <a:off x="5323851" y="127222"/>
+            <a:ext cx="6684324" cy="5335732"/>
+          </a:xfrm>
+        </p:spPr>
+      </p:pic>
+      <p:sp>
+        <p:nvSpPr>
+          <p:cNvPr id="10" name="Content Placeholder 2">
+            <a:extLst>
+              <a:ext uri="{FF2B5EF4-FFF2-40B4-BE49-F238E27FC236}">
+                <a16:creationId xmlns:a16="http://schemas.microsoft.com/office/drawing/2014/main" id="{D166F694-1BE5-D7EE-ACC5-2723D274C19E}"/>
+              </a:ext>
+            </a:extLst>
+          </p:cNvPr>
+          <p:cNvSpPr txBox="1">
+            <a:spLocks/>
+          </p:cNvSpPr>
+          <p:nvPr/>
+        </p:nvSpPr>
+        <p:spPr>
+          <a:xfrm>
+            <a:off x="838199" y="1825625"/>
+            <a:ext cx="10732477" cy="4667250"/>
+          </a:xfrm>
+          <a:prstGeom prst="rect">
+            <a:avLst/>
+          </a:prstGeom>
+        </p:spPr>
+        <p:txBody>
+          <a:bodyPr vert="horz" lIns="91440" tIns="45720" rIns="91440" bIns="45720" rtlCol="0">
+            <a:normAutofit fontScale="92500" lnSpcReduction="20000"/>
+          </a:bodyPr>
+          <a:lstStyle>
+            <a:lvl1pPr marL="228600" indent="-228600" algn="l" defTabSz="914400" rtl="0" eaLnBrk="1" latinLnBrk="0" hangingPunct="1">
+              <a:lnSpc>
+                <a:spcPct val="90000"/>
+              </a:lnSpc>
+              <a:spcBef>
+                <a:spcPts val="1000"/>
+              </a:spcBef>
+              <a:buFont typeface="Arial" panose="020B0604020202020204" pitchFamily="34" charset="0"/>
+              <a:buChar char="•"/>
+              <a:defRPr sz="2800" kern="1200">
+                <a:solidFill>
+                  <a:schemeClr val="tx1"/>
+                </a:solidFill>
+                <a:latin typeface="+mn-lt"/>
+                <a:ea typeface="+mn-ea"/>
+                <a:cs typeface="+mn-cs"/>
+              </a:defRPr>
+            </a:lvl1pPr>
+            <a:lvl2pPr marL="685800" indent="-228600" algn="l" defTabSz="914400" rtl="0" eaLnBrk="1" latinLnBrk="0" hangingPunct="1">
+              <a:lnSpc>
+                <a:spcPct val="90000"/>
+              </a:lnSpc>
+              <a:spcBef>
+                <a:spcPts val="500"/>
+              </a:spcBef>
+              <a:buFont typeface="Arial" panose="020B0604020202020204" pitchFamily="34" charset="0"/>
+              <a:buChar char="•"/>
+              <a:defRPr sz="2400" kern="1200">
+                <a:solidFill>
+                  <a:schemeClr val="tx1"/>
+                </a:solidFill>
+                <a:latin typeface="+mn-lt"/>
+                <a:ea typeface="+mn-ea"/>
+                <a:cs typeface="+mn-cs"/>
+              </a:defRPr>
+            </a:lvl2pPr>
+            <a:lvl3pPr marL="1143000" indent="-228600" algn="l" defTabSz="914400" rtl="0" eaLnBrk="1" latinLnBrk="0" hangingPunct="1">
+              <a:lnSpc>
+                <a:spcPct val="90000"/>
+              </a:lnSpc>
+              <a:spcBef>
+                <a:spcPts val="500"/>
+              </a:spcBef>
+              <a:buFont typeface="Arial" panose="020B0604020202020204" pitchFamily="34" charset="0"/>
+              <a:buChar char="•"/>
+              <a:defRPr sz="2000" kern="1200">
+                <a:solidFill>
+                  <a:schemeClr val="tx1"/>
+                </a:solidFill>
+                <a:latin typeface="+mn-lt"/>
+                <a:ea typeface="+mn-ea"/>
+                <a:cs typeface="+mn-cs"/>
+              </a:defRPr>
+            </a:lvl3pPr>
+            <a:lvl4pPr marL="1600200" indent="-228600" algn="l" defTabSz="914400" rtl="0" eaLnBrk="1" latinLnBrk="0" hangingPunct="1">
+              <a:lnSpc>
+                <a:spcPct val="90000"/>
+              </a:lnSpc>
+              <a:spcBef>
+                <a:spcPts val="500"/>
+              </a:spcBef>
+              <a:buFont typeface="Arial" panose="020B0604020202020204" pitchFamily="34" charset="0"/>
+              <a:buChar char="•"/>
+              <a:defRPr sz="1800" kern="1200">
+                <a:solidFill>
+                  <a:schemeClr val="tx1"/>
+                </a:solidFill>
+                <a:latin typeface="+mn-lt"/>
+                <a:ea typeface="+mn-ea"/>
+                <a:cs typeface="+mn-cs"/>
+              </a:defRPr>
+            </a:lvl4pPr>
+            <a:lvl5pPr marL="2057400" indent="-228600" algn="l" defTabSz="914400" rtl="0" eaLnBrk="1" latinLnBrk="0" hangingPunct="1">
+              <a:lnSpc>
+                <a:spcPct val="90000"/>
+              </a:lnSpc>
+              <a:spcBef>
+                <a:spcPts val="500"/>
+              </a:spcBef>
+              <a:buFont typeface="Arial" panose="020B0604020202020204" pitchFamily="34" charset="0"/>
+              <a:buChar char="•"/>
+              <a:defRPr sz="1800" kern="1200">
+                <a:solidFill>
+                  <a:schemeClr val="tx1"/>
+                </a:solidFill>
+                <a:latin typeface="+mn-lt"/>
+                <a:ea typeface="+mn-ea"/>
+                <a:cs typeface="+mn-cs"/>
+              </a:defRPr>
+            </a:lvl5pPr>
+            <a:lvl6pPr marL="2514600" indent="-228600" algn="l" defTabSz="914400" rtl="0" eaLnBrk="1" latinLnBrk="0" hangingPunct="1">
+              <a:lnSpc>
+                <a:spcPct val="90000"/>
+              </a:lnSpc>
+              <a:spcBef>
+                <a:spcPts val="500"/>
+              </a:spcBef>
+              <a:buFont typeface="Arial" panose="020B0604020202020204" pitchFamily="34" charset="0"/>
+              <a:buChar char="•"/>
+              <a:defRPr sz="1800" kern="1200">
+                <a:solidFill>
+                  <a:schemeClr val="tx1"/>
+                </a:solidFill>
+                <a:latin typeface="+mn-lt"/>
+                <a:ea typeface="+mn-ea"/>
+                <a:cs typeface="+mn-cs"/>
+              </a:defRPr>
+            </a:lvl6pPr>
+            <a:lvl7pPr marL="2971800" indent="-228600" algn="l" defTabSz="914400" rtl="0" eaLnBrk="1" latinLnBrk="0" hangingPunct="1">
+              <a:lnSpc>
+                <a:spcPct val="90000"/>
+              </a:lnSpc>
+              <a:spcBef>
+                <a:spcPts val="500"/>
+              </a:spcBef>
+              <a:buFont typeface="Arial" panose="020B0604020202020204" pitchFamily="34" charset="0"/>
+              <a:buChar char="•"/>
+              <a:defRPr sz="1800" kern="1200">
+                <a:solidFill>
+                  <a:schemeClr val="tx1"/>
+                </a:solidFill>
+                <a:latin typeface="+mn-lt"/>
+                <a:ea typeface="+mn-ea"/>
+                <a:cs typeface="+mn-cs"/>
+              </a:defRPr>
+            </a:lvl7pPr>
+            <a:lvl8pPr marL="3429000" indent="-228600" algn="l" defTabSz="914400" rtl="0" eaLnBrk="1" latinLnBrk="0" hangingPunct="1">
+              <a:lnSpc>
+                <a:spcPct val="90000"/>
+              </a:lnSpc>
+              <a:spcBef>
+                <a:spcPts val="500"/>
+              </a:spcBef>
+              <a:buFont typeface="Arial" panose="020B0604020202020204" pitchFamily="34" charset="0"/>
+              <a:buChar char="•"/>
+              <a:defRPr sz="1800" kern="1200">
+                <a:solidFill>
+                  <a:schemeClr val="tx1"/>
+                </a:solidFill>
+                <a:latin typeface="+mn-lt"/>
+                <a:ea typeface="+mn-ea"/>
+                <a:cs typeface="+mn-cs"/>
+              </a:defRPr>
+            </a:lvl8pPr>
+            <a:lvl9pPr marL="3886200" indent="-228600" algn="l" defTabSz="914400" rtl="0" eaLnBrk="1" latinLnBrk="0" hangingPunct="1">
+              <a:lnSpc>
+                <a:spcPct val="90000"/>
+              </a:lnSpc>
+              <a:spcBef>
+                <a:spcPts val="500"/>
+              </a:spcBef>
+              <a:buFont typeface="Arial" panose="020B0604020202020204" pitchFamily="34" charset="0"/>
+              <a:buChar char="•"/>
+              <a:defRPr sz="1800" kern="1200">
+                <a:solidFill>
+                  <a:schemeClr val="tx1"/>
+                </a:solidFill>
+                <a:latin typeface="+mn-lt"/>
+                <a:ea typeface="+mn-ea"/>
+                <a:cs typeface="+mn-cs"/>
+              </a:defRPr>
+            </a:lvl9pPr>
+          </a:lstStyle>
+          <a:p>
+            <a:r>
+              <a:rPr lang="en-US" dirty="0"/>
+              <a:t>Prefix-Length encoding</a:t>
+            </a:r>
+          </a:p>
+          <a:p>
+            <a:pPr lvl="1"/>
+            <a:r>
+              <a:rPr lang="en-US" dirty="0"/>
+              <a:t>Single header byte</a:t>
+            </a:r>
+          </a:p>
+          <a:p>
+            <a:pPr lvl="1"/>
+            <a:r>
+              <a:rPr lang="en-US" dirty="0" err="1"/>
+              <a:t>MessageLength</a:t>
+            </a:r>
+            <a:r>
+              <a:rPr lang="en-US" dirty="0"/>
+              <a:t> (0 to 4 bytes)</a:t>
+            </a:r>
+          </a:p>
+          <a:p>
+            <a:pPr lvl="1"/>
+            <a:r>
+              <a:rPr lang="en-US" dirty="0"/>
+              <a:t>Payload (up to 2 GiB)</a:t>
+            </a:r>
+          </a:p>
+          <a:p>
+            <a:endParaRPr lang="en-US" dirty="0"/>
+          </a:p>
+          <a:p>
+            <a:r>
+              <a:rPr lang="en-US" dirty="0"/>
+              <a:t>Header byte: </a:t>
+            </a:r>
+            <a:r>
+              <a:rPr lang="en-US" sz="2400" dirty="0">
+                <a:latin typeface="Courier New" panose="02070309020205020404" pitchFamily="49" charset="0"/>
+                <a:cs typeface="Courier New" panose="02070309020205020404" pitchFamily="49" charset="0"/>
+              </a:rPr>
+              <a:t>L0|L1|CD|R0|R1|P0|P1|P2</a:t>
+            </a:r>
+            <a:endParaRPr lang="en-US" dirty="0">
+              <a:latin typeface="Courier New" panose="02070309020205020404" pitchFamily="49" charset="0"/>
+              <a:cs typeface="Courier New" panose="02070309020205020404" pitchFamily="49" charset="0"/>
+            </a:endParaRPr>
+          </a:p>
+          <a:p>
+            <a:pPr lvl="1"/>
+            <a:r>
+              <a:rPr lang="en-US" dirty="0"/>
+              <a:t>L0-L1: number of bytes of the message length.</a:t>
+            </a:r>
+          </a:p>
+          <a:p>
+            <a:pPr lvl="1"/>
+            <a:r>
+              <a:rPr lang="en-US" dirty="0"/>
+              <a:t>CD: “Control/ Data” bit.</a:t>
+            </a:r>
+          </a:p>
+          <a:p>
+            <a:pPr lvl="1"/>
+            <a:r>
+              <a:rPr lang="en-US" dirty="0"/>
+              <a:t>R0-R1: Reserved for future use.</a:t>
+            </a:r>
+          </a:p>
+          <a:p>
+            <a:pPr lvl="1"/>
+            <a:r>
+              <a:rPr lang="en-US" dirty="0"/>
+              <a:t>P0-P2: Protocol number (0 to 7).</a:t>
+            </a:r>
+          </a:p>
+          <a:p>
+            <a:endParaRPr lang="en-US" dirty="0"/>
+          </a:p>
+          <a:p>
+            <a:r>
+              <a:rPr lang="en-US" dirty="0"/>
+              <a:t>The Protocol Number defines the "type" of the message: the writer/serializer that has been used to write the payload and the reader/</a:t>
+            </a:r>
+            <a:r>
+              <a:rPr lang="en-US" dirty="0" err="1"/>
+              <a:t>deserializer</a:t>
+            </a:r>
+            <a:r>
+              <a:rPr lang="en-US" dirty="0"/>
+              <a:t> that must be used to read it back.</a:t>
+            </a:r>
+          </a:p>
+        </p:txBody>
+      </p:sp>
+    </p:spTree>
+    <p:extLst>
+      <p:ext uri="{BB962C8B-B14F-4D97-AF65-F5344CB8AC3E}">
+        <p14:creationId xmlns:p14="http://schemas.microsoft.com/office/powerpoint/2010/main" val="200001624"/>
+      </p:ext>
+    </p:extLst>
+  </p:cSld>
+  <p:clrMapOvr>
+    <a:masterClrMapping/>
+  </p:clrMapOvr>
+</p:sld>
+</file>
+
+<file path=ppt/slides/slide28.xml><?xml version="1.0" encoding="utf-8"?>
+<p:sld xmlns:a="http://schemas.openxmlformats.org/drawingml/2006/main" xmlns:r="http://schemas.openxmlformats.org/officeDocument/2006/relationships" xmlns:p="http://schemas.openxmlformats.org/presentationml/2006/main">
+  <p:cSld>
+    <p:spTree>
+      <p:nvGrpSpPr>
+        <p:cNvPr id="1" name=""/>
+        <p:cNvGrpSpPr/>
+        <p:nvPr/>
+      </p:nvGrpSpPr>
+      <p:grpSpPr>
+        <a:xfrm>
+          <a:off x="0" y="0"/>
+          <a:ext cx="0" cy="0"/>
+          <a:chOff x="0" y="0"/>
+          <a:chExt cx="0" cy="0"/>
+        </a:xfrm>
+      </p:grpSpPr>
+      <p:sp>
+        <p:nvSpPr>
+          <p:cNvPr id="2" name="Title 1">
+            <a:extLst>
+              <a:ext uri="{FF2B5EF4-FFF2-40B4-BE49-F238E27FC236}">
+                <a16:creationId xmlns:a16="http://schemas.microsoft.com/office/drawing/2014/main" id="{BCFC278E-8E30-3459-41D7-7185BA86296A}"/>
+              </a:ext>
+            </a:extLst>
+          </p:cNvPr>
+          <p:cNvSpPr>
+            <a:spLocks noGrp="1"/>
+          </p:cNvSpPr>
+          <p:nvPr>
+            <p:ph type="title"/>
+          </p:nvPr>
+        </p:nvSpPr>
+        <p:spPr/>
+        <p:txBody>
+          <a:bodyPr/>
+          <a:lstStyle/>
+          <a:p>
+            <a:r>
+              <a:rPr lang="en-US" dirty="0"/>
+              <a:t>The 8 protocols maximal count</a:t>
+            </a:r>
+          </a:p>
+        </p:txBody>
+      </p:sp>
+      <p:sp>
+        <p:nvSpPr>
+          <p:cNvPr id="3" name="Content Placeholder 2">
+            <a:extLst>
+              <a:ext uri="{FF2B5EF4-FFF2-40B4-BE49-F238E27FC236}">
+                <a16:creationId xmlns:a16="http://schemas.microsoft.com/office/drawing/2014/main" id="{AC71B80D-91E5-6DC7-AB87-2CFAAF04179A}"/>
+              </a:ext>
+            </a:extLst>
+          </p:cNvPr>
+          <p:cNvSpPr>
+            <a:spLocks noGrp="1"/>
+          </p:cNvSpPr>
+          <p:nvPr>
+            <p:ph idx="1"/>
+          </p:nvPr>
+        </p:nvSpPr>
+        <p:spPr>
+          <a:xfrm>
+            <a:off x="838200" y="1825625"/>
+            <a:ext cx="10515600" cy="4516560"/>
+          </a:xfrm>
+        </p:spPr>
+        <p:txBody>
+          <a:bodyPr>
+            <a:normAutofit lnSpcReduction="10000"/>
+          </a:bodyPr>
+          <a:lstStyle/>
+          <a:p>
+            <a:r>
+              <a:rPr lang="en-US" dirty="0"/>
+              <a:t>Only 8 protocols can be expressed.</a:t>
+            </a:r>
+          </a:p>
+          <a:p>
+            <a:pPr lvl="1"/>
+            <a:r>
+              <a:rPr lang="en-US" dirty="0"/>
+              <a:t>The “0 Protocol” protocol is reserved: this is the protocol of </a:t>
+            </a:r>
+            <a:r>
+              <a:rPr lang="en-US" dirty="0" err="1"/>
+              <a:t>CK.AppIdentity.TransportLayer</a:t>
+            </a:r>
+            <a:r>
+              <a:rPr lang="en-US" dirty="0"/>
+              <a:t> itself that handles special messages used to negotiate, accept, reject incoming parties and outgoing connections.</a:t>
+            </a:r>
+          </a:p>
+          <a:p>
+            <a:pPr lvl="1"/>
+            <a:r>
+              <a:rPr lang="en-US" dirty="0"/>
+              <a:t>This lets 7 possible protocols. </a:t>
+            </a:r>
+          </a:p>
+          <a:p>
+            <a:pPr lvl="1"/>
+            <a:endParaRPr lang="en-US" dirty="0"/>
+          </a:p>
+          <a:p>
+            <a:r>
+              <a:rPr lang="en-US" dirty="0"/>
+              <a:t>This limit applies to a Remote party pair: </a:t>
+            </a:r>
+          </a:p>
+          <a:p>
+            <a:pPr lvl="1"/>
+            <a:r>
+              <a:rPr lang="en-US" dirty="0"/>
+              <a:t>There can be any number of possible protocols in an application</a:t>
+            </a:r>
+          </a:p>
+          <a:p>
+            <a:pPr lvl="1"/>
+            <a:r>
+              <a:rPr lang="en-US" dirty="0"/>
+              <a:t>2 parties that start to interact initially negotiate the ones they can and want to use. </a:t>
+            </a:r>
+          </a:p>
+          <a:p>
+            <a:r>
+              <a:rPr lang="en-US" dirty="0"/>
+              <a:t>Any Transport between 2 parties can simultaneously support up to 7 different protocols.</a:t>
+            </a:r>
+          </a:p>
+        </p:txBody>
+      </p:sp>
+    </p:spTree>
+    <p:extLst>
+      <p:ext uri="{BB962C8B-B14F-4D97-AF65-F5344CB8AC3E}">
+        <p14:creationId xmlns:p14="http://schemas.microsoft.com/office/powerpoint/2010/main" val="1820346205"/>
+      </p:ext>
+    </p:extLst>
+  </p:cSld>
+  <p:clrMapOvr>
+    <a:masterClrMapping/>
+  </p:clrMapOvr>
+</p:sld>
+</file>
+
+<file path=ppt/slides/slide29.xml><?xml version="1.0" encoding="utf-8"?>
+<p:sld xmlns:a="http://schemas.openxmlformats.org/drawingml/2006/main" xmlns:r="http://schemas.openxmlformats.org/officeDocument/2006/relationships" xmlns:p="http://schemas.openxmlformats.org/presentationml/2006/main">
+  <p:cSld>
+    <p:spTree>
+      <p:nvGrpSpPr>
+        <p:cNvPr id="1" name=""/>
+        <p:cNvGrpSpPr/>
+        <p:nvPr/>
+      </p:nvGrpSpPr>
+      <p:grpSpPr>
+        <a:xfrm>
+          <a:off x="0" y="0"/>
+          <a:ext cx="0" cy="0"/>
+          <a:chOff x="0" y="0"/>
+          <a:chExt cx="0" cy="0"/>
+        </a:xfrm>
+      </p:grpSpPr>
+      <p:sp>
+        <p:nvSpPr>
+          <p:cNvPr id="2" name="Title 1">
+            <a:extLst>
+              <a:ext uri="{FF2B5EF4-FFF2-40B4-BE49-F238E27FC236}">
+                <a16:creationId xmlns:a16="http://schemas.microsoft.com/office/drawing/2014/main" id="{7CF456EA-A507-E17F-1FF5-0DDC0C51BBFF}"/>
+              </a:ext>
+            </a:extLst>
+          </p:cNvPr>
+          <p:cNvSpPr>
+            <a:spLocks noGrp="1"/>
+          </p:cNvSpPr>
+          <p:nvPr>
+            <p:ph type="title"/>
+          </p:nvPr>
+        </p:nvSpPr>
+        <p:spPr/>
+        <p:txBody>
+          <a:bodyPr/>
+          <a:lstStyle/>
+          <a:p>
+            <a:endParaRPr lang="en-US" dirty="0"/>
+          </a:p>
+        </p:txBody>
+      </p:sp>
+      <p:sp>
+        <p:nvSpPr>
+          <p:cNvPr id="3" name="Content Placeholder 2">
+            <a:extLst>
+              <a:ext uri="{FF2B5EF4-FFF2-40B4-BE49-F238E27FC236}">
+                <a16:creationId xmlns:a16="http://schemas.microsoft.com/office/drawing/2014/main" id="{7520F365-7A16-563B-2B49-2EDE70A00237}"/>
+              </a:ext>
+            </a:extLst>
+          </p:cNvPr>
+          <p:cNvSpPr>
+            <a:spLocks noGrp="1"/>
+          </p:cNvSpPr>
+          <p:nvPr>
+            <p:ph idx="1"/>
+          </p:nvPr>
+        </p:nvSpPr>
+        <p:spPr/>
+        <p:txBody>
+          <a:bodyPr/>
+          <a:lstStyle/>
+          <a:p>
+            <a:endParaRPr lang="en-US"/>
+          </a:p>
+        </p:txBody>
+      </p:sp>
+    </p:spTree>
+    <p:extLst>
+      <p:ext uri="{BB962C8B-B14F-4D97-AF65-F5344CB8AC3E}">
+        <p14:creationId xmlns:p14="http://schemas.microsoft.com/office/powerpoint/2010/main" val="3573920614"/>
       </p:ext>
     </p:extLst>
   </p:cSld>

--- a/Doc/CK-AppIdentity.pptx
+++ b/Doc/CK-AppIdentity.pptx
@@ -5,7 +5,7 @@
     <p:sldMasterId id="2147483648" r:id="rId1"/>
   </p:sldMasterIdLst>
   <p:notesMasterIdLst>
-    <p:notesMasterId r:id="rId31"/>
+    <p:notesMasterId r:id="rId33"/>
   </p:notesMasterIdLst>
   <p:sldIdLst>
     <p:sldId id="256" r:id="rId2"/>
@@ -37,6 +37,8 @@
     <p:sldId id="284" r:id="rId28"/>
     <p:sldId id="285" r:id="rId29"/>
     <p:sldId id="286" r:id="rId30"/>
+    <p:sldId id="287" r:id="rId31"/>
+    <p:sldId id="288" r:id="rId32"/>
   </p:sldIdLst>
   <p:sldSz cx="12192000" cy="6858000"/>
   <p:notesSz cx="6858000" cy="9144000"/>
@@ -959,7 +961,7 @@
               <a:t>TransportType</a:t>
             </a:r>
             <a:r>
-              <a:rPr lang="en-US"/>
+              <a:rPr lang="en-US" dirty="0"/>
               <a:t> model.</a:t>
             </a:r>
           </a:p>
@@ -1687,6 +1689,174 @@
     <p:extLst>
       <p:ext uri="{BB962C8B-B14F-4D97-AF65-F5344CB8AC3E}">
         <p14:creationId xmlns:p14="http://schemas.microsoft.com/office/powerpoint/2010/main" val="1132549190"/>
+      </p:ext>
+    </p:extLst>
+  </p:cSld>
+  <p:clrMapOvr>
+    <a:masterClrMapping/>
+  </p:clrMapOvr>
+</p:notes>
+</file>
+
+<file path=ppt/notesSlides/notesSlide8.xml><?xml version="1.0" encoding="utf-8"?>
+<p:notes xmlns:a="http://schemas.openxmlformats.org/drawingml/2006/main" xmlns:r="http://schemas.openxmlformats.org/officeDocument/2006/relationships" xmlns:p="http://schemas.openxmlformats.org/presentationml/2006/main">
+  <p:cSld>
+    <p:spTree>
+      <p:nvGrpSpPr>
+        <p:cNvPr id="1" name=""/>
+        <p:cNvGrpSpPr/>
+        <p:nvPr/>
+      </p:nvGrpSpPr>
+      <p:grpSpPr>
+        <a:xfrm>
+          <a:off x="0" y="0"/>
+          <a:ext cx="0" cy="0"/>
+          <a:chOff x="0" y="0"/>
+          <a:chExt cx="0" cy="0"/>
+        </a:xfrm>
+      </p:grpSpPr>
+      <p:sp>
+        <p:nvSpPr>
+          <p:cNvPr id="2" name="Slide Image Placeholder 1"/>
+          <p:cNvSpPr>
+            <a:spLocks noGrp="1" noRot="1" noChangeAspect="1"/>
+          </p:cNvSpPr>
+          <p:nvPr>
+            <p:ph type="sldImg"/>
+          </p:nvPr>
+        </p:nvSpPr>
+        <p:spPr/>
+      </p:sp>
+      <p:sp>
+        <p:nvSpPr>
+          <p:cNvPr id="3" name="Notes Placeholder 2"/>
+          <p:cNvSpPr>
+            <a:spLocks noGrp="1"/>
+          </p:cNvSpPr>
+          <p:nvPr>
+            <p:ph type="body" idx="1"/>
+          </p:nvPr>
+        </p:nvSpPr>
+        <p:spPr/>
+        <p:txBody>
+          <a:bodyPr/>
+          <a:lstStyle/>
+          <a:p>
+            <a:endParaRPr lang="en-US" dirty="0"/>
+          </a:p>
+        </p:txBody>
+      </p:sp>
+      <p:sp>
+        <p:nvSpPr>
+          <p:cNvPr id="4" name="Slide Number Placeholder 3"/>
+          <p:cNvSpPr>
+            <a:spLocks noGrp="1"/>
+          </p:cNvSpPr>
+          <p:nvPr>
+            <p:ph type="sldNum" sz="quarter" idx="5"/>
+          </p:nvPr>
+        </p:nvSpPr>
+        <p:spPr/>
+        <p:txBody>
+          <a:bodyPr/>
+          <a:lstStyle/>
+          <a:p>
+            <a:fld id="{E05EDB92-2FE2-4164-AA27-D03258A20DF4}" type="slidenum">
+              <a:rPr lang="en-US" smtClean="0"/>
+              <a:t>30</a:t>
+            </a:fld>
+            <a:endParaRPr lang="en-US"/>
+          </a:p>
+        </p:txBody>
+      </p:sp>
+    </p:spTree>
+    <p:extLst>
+      <p:ext uri="{BB962C8B-B14F-4D97-AF65-F5344CB8AC3E}">
+        <p14:creationId xmlns:p14="http://schemas.microsoft.com/office/powerpoint/2010/main" val="213048778"/>
+      </p:ext>
+    </p:extLst>
+  </p:cSld>
+  <p:clrMapOvr>
+    <a:masterClrMapping/>
+  </p:clrMapOvr>
+</p:notes>
+</file>
+
+<file path=ppt/notesSlides/notesSlide9.xml><?xml version="1.0" encoding="utf-8"?>
+<p:notes xmlns:a="http://schemas.openxmlformats.org/drawingml/2006/main" xmlns:r="http://schemas.openxmlformats.org/officeDocument/2006/relationships" xmlns:p="http://schemas.openxmlformats.org/presentationml/2006/main">
+  <p:cSld>
+    <p:spTree>
+      <p:nvGrpSpPr>
+        <p:cNvPr id="1" name=""/>
+        <p:cNvGrpSpPr/>
+        <p:nvPr/>
+      </p:nvGrpSpPr>
+      <p:grpSpPr>
+        <a:xfrm>
+          <a:off x="0" y="0"/>
+          <a:ext cx="0" cy="0"/>
+          <a:chOff x="0" y="0"/>
+          <a:chExt cx="0" cy="0"/>
+        </a:xfrm>
+      </p:grpSpPr>
+      <p:sp>
+        <p:nvSpPr>
+          <p:cNvPr id="2" name="Slide Image Placeholder 1"/>
+          <p:cNvSpPr>
+            <a:spLocks noGrp="1" noRot="1" noChangeAspect="1"/>
+          </p:cNvSpPr>
+          <p:nvPr>
+            <p:ph type="sldImg"/>
+          </p:nvPr>
+        </p:nvSpPr>
+        <p:spPr/>
+      </p:sp>
+      <p:sp>
+        <p:nvSpPr>
+          <p:cNvPr id="3" name="Notes Placeholder 2"/>
+          <p:cNvSpPr>
+            <a:spLocks noGrp="1"/>
+          </p:cNvSpPr>
+          <p:nvPr>
+            <p:ph type="body" idx="1"/>
+          </p:nvPr>
+        </p:nvSpPr>
+        <p:spPr/>
+        <p:txBody>
+          <a:bodyPr/>
+          <a:lstStyle/>
+          <a:p>
+            <a:endParaRPr lang="en-US" dirty="0"/>
+          </a:p>
+        </p:txBody>
+      </p:sp>
+      <p:sp>
+        <p:nvSpPr>
+          <p:cNvPr id="4" name="Slide Number Placeholder 3"/>
+          <p:cNvSpPr>
+            <a:spLocks noGrp="1"/>
+          </p:cNvSpPr>
+          <p:nvPr>
+            <p:ph type="sldNum" sz="quarter" idx="5"/>
+          </p:nvPr>
+        </p:nvSpPr>
+        <p:spPr/>
+        <p:txBody>
+          <a:bodyPr/>
+          <a:lstStyle/>
+          <a:p>
+            <a:fld id="{E05EDB92-2FE2-4164-AA27-D03258A20DF4}" type="slidenum">
+              <a:rPr lang="en-US" smtClean="0"/>
+              <a:t>31</a:t>
+            </a:fld>
+            <a:endParaRPr lang="en-US"/>
+          </a:p>
+        </p:txBody>
+      </p:sp>
+    </p:spTree>
+    <p:extLst>
+      <p:ext uri="{BB962C8B-B14F-4D97-AF65-F5344CB8AC3E}">
+        <p14:creationId xmlns:p14="http://schemas.microsoft.com/office/powerpoint/2010/main" val="1570586495"/>
       </p:ext>
     </p:extLst>
   </p:cSld>
@@ -13920,35 +14090,625 @@
           <a:bodyPr/>
           <a:lstStyle/>
           <a:p>
-            <a:endParaRPr lang="en-US" dirty="0"/>
+            <a:r>
+              <a:rPr lang="en-US" dirty="0"/>
+              <a:t>Creating new messages</a:t>
+            </a:r>
           </a:p>
         </p:txBody>
       </p:sp>
       <p:sp>
         <p:nvSpPr>
-          <p:cNvPr id="3" name="Content Placeholder 2">
+          <p:cNvPr id="10" name="Content Placeholder 2">
             <a:extLst>
               <a:ext uri="{FF2B5EF4-FFF2-40B4-BE49-F238E27FC236}">
-                <a16:creationId xmlns:a16="http://schemas.microsoft.com/office/drawing/2014/main" id="{7520F365-7A16-563B-2B49-2EDE70A00237}"/>
+                <a16:creationId xmlns:a16="http://schemas.microsoft.com/office/drawing/2014/main" id="{1CC84568-F688-2F94-8756-D5862C7EDE27}"/>
               </a:ext>
             </a:extLst>
           </p:cNvPr>
-          <p:cNvSpPr>
-            <a:spLocks noGrp="1"/>
+          <p:cNvSpPr txBox="1">
+            <a:spLocks/>
           </p:cNvSpPr>
+          <p:nvPr/>
+        </p:nvSpPr>
+        <p:spPr>
+          <a:xfrm>
+            <a:off x="838200" y="1825625"/>
+            <a:ext cx="10515600" cy="4516560"/>
+          </a:xfrm>
+          <a:prstGeom prst="rect">
+            <a:avLst/>
+          </a:prstGeom>
+        </p:spPr>
+        <p:txBody>
+          <a:bodyPr vert="horz" lIns="91440" tIns="45720" rIns="91440" bIns="45720" rtlCol="0">
+            <a:normAutofit lnSpcReduction="10000"/>
+          </a:bodyPr>
+          <a:lstStyle>
+            <a:lvl1pPr marL="228600" indent="-228600" algn="l" defTabSz="914400" rtl="0" eaLnBrk="1" latinLnBrk="0" hangingPunct="1">
+              <a:lnSpc>
+                <a:spcPct val="90000"/>
+              </a:lnSpc>
+              <a:spcBef>
+                <a:spcPts val="1000"/>
+              </a:spcBef>
+              <a:buFont typeface="Arial" panose="020B0604020202020204" pitchFamily="34" charset="0"/>
+              <a:buChar char="•"/>
+              <a:defRPr sz="2800" kern="1200">
+                <a:solidFill>
+                  <a:schemeClr val="tx1"/>
+                </a:solidFill>
+                <a:latin typeface="+mn-lt"/>
+                <a:ea typeface="+mn-ea"/>
+                <a:cs typeface="+mn-cs"/>
+              </a:defRPr>
+            </a:lvl1pPr>
+            <a:lvl2pPr marL="685800" indent="-228600" algn="l" defTabSz="914400" rtl="0" eaLnBrk="1" latinLnBrk="0" hangingPunct="1">
+              <a:lnSpc>
+                <a:spcPct val="90000"/>
+              </a:lnSpc>
+              <a:spcBef>
+                <a:spcPts val="500"/>
+              </a:spcBef>
+              <a:buFont typeface="Arial" panose="020B0604020202020204" pitchFamily="34" charset="0"/>
+              <a:buChar char="•"/>
+              <a:defRPr sz="2400" kern="1200">
+                <a:solidFill>
+                  <a:schemeClr val="tx1"/>
+                </a:solidFill>
+                <a:latin typeface="+mn-lt"/>
+                <a:ea typeface="+mn-ea"/>
+                <a:cs typeface="+mn-cs"/>
+              </a:defRPr>
+            </a:lvl2pPr>
+            <a:lvl3pPr marL="1143000" indent="-228600" algn="l" defTabSz="914400" rtl="0" eaLnBrk="1" latinLnBrk="0" hangingPunct="1">
+              <a:lnSpc>
+                <a:spcPct val="90000"/>
+              </a:lnSpc>
+              <a:spcBef>
+                <a:spcPts val="500"/>
+              </a:spcBef>
+              <a:buFont typeface="Arial" panose="020B0604020202020204" pitchFamily="34" charset="0"/>
+              <a:buChar char="•"/>
+              <a:defRPr sz="2000" kern="1200">
+                <a:solidFill>
+                  <a:schemeClr val="tx1"/>
+                </a:solidFill>
+                <a:latin typeface="+mn-lt"/>
+                <a:ea typeface="+mn-ea"/>
+                <a:cs typeface="+mn-cs"/>
+              </a:defRPr>
+            </a:lvl3pPr>
+            <a:lvl4pPr marL="1600200" indent="-228600" algn="l" defTabSz="914400" rtl="0" eaLnBrk="1" latinLnBrk="0" hangingPunct="1">
+              <a:lnSpc>
+                <a:spcPct val="90000"/>
+              </a:lnSpc>
+              <a:spcBef>
+                <a:spcPts val="500"/>
+              </a:spcBef>
+              <a:buFont typeface="Arial" panose="020B0604020202020204" pitchFamily="34" charset="0"/>
+              <a:buChar char="•"/>
+              <a:defRPr sz="1800" kern="1200">
+                <a:solidFill>
+                  <a:schemeClr val="tx1"/>
+                </a:solidFill>
+                <a:latin typeface="+mn-lt"/>
+                <a:ea typeface="+mn-ea"/>
+                <a:cs typeface="+mn-cs"/>
+              </a:defRPr>
+            </a:lvl4pPr>
+            <a:lvl5pPr marL="2057400" indent="-228600" algn="l" defTabSz="914400" rtl="0" eaLnBrk="1" latinLnBrk="0" hangingPunct="1">
+              <a:lnSpc>
+                <a:spcPct val="90000"/>
+              </a:lnSpc>
+              <a:spcBef>
+                <a:spcPts val="500"/>
+              </a:spcBef>
+              <a:buFont typeface="Arial" panose="020B0604020202020204" pitchFamily="34" charset="0"/>
+              <a:buChar char="•"/>
+              <a:defRPr sz="1800" kern="1200">
+                <a:solidFill>
+                  <a:schemeClr val="tx1"/>
+                </a:solidFill>
+                <a:latin typeface="+mn-lt"/>
+                <a:ea typeface="+mn-ea"/>
+                <a:cs typeface="+mn-cs"/>
+              </a:defRPr>
+            </a:lvl5pPr>
+            <a:lvl6pPr marL="2514600" indent="-228600" algn="l" defTabSz="914400" rtl="0" eaLnBrk="1" latinLnBrk="0" hangingPunct="1">
+              <a:lnSpc>
+                <a:spcPct val="90000"/>
+              </a:lnSpc>
+              <a:spcBef>
+                <a:spcPts val="500"/>
+              </a:spcBef>
+              <a:buFont typeface="Arial" panose="020B0604020202020204" pitchFamily="34" charset="0"/>
+              <a:buChar char="•"/>
+              <a:defRPr sz="1800" kern="1200">
+                <a:solidFill>
+                  <a:schemeClr val="tx1"/>
+                </a:solidFill>
+                <a:latin typeface="+mn-lt"/>
+                <a:ea typeface="+mn-ea"/>
+                <a:cs typeface="+mn-cs"/>
+              </a:defRPr>
+            </a:lvl6pPr>
+            <a:lvl7pPr marL="2971800" indent="-228600" algn="l" defTabSz="914400" rtl="0" eaLnBrk="1" latinLnBrk="0" hangingPunct="1">
+              <a:lnSpc>
+                <a:spcPct val="90000"/>
+              </a:lnSpc>
+              <a:spcBef>
+                <a:spcPts val="500"/>
+              </a:spcBef>
+              <a:buFont typeface="Arial" panose="020B0604020202020204" pitchFamily="34" charset="0"/>
+              <a:buChar char="•"/>
+              <a:defRPr sz="1800" kern="1200">
+                <a:solidFill>
+                  <a:schemeClr val="tx1"/>
+                </a:solidFill>
+                <a:latin typeface="+mn-lt"/>
+                <a:ea typeface="+mn-ea"/>
+                <a:cs typeface="+mn-cs"/>
+              </a:defRPr>
+            </a:lvl7pPr>
+            <a:lvl8pPr marL="3429000" indent="-228600" algn="l" defTabSz="914400" rtl="0" eaLnBrk="1" latinLnBrk="0" hangingPunct="1">
+              <a:lnSpc>
+                <a:spcPct val="90000"/>
+              </a:lnSpc>
+              <a:spcBef>
+                <a:spcPts val="500"/>
+              </a:spcBef>
+              <a:buFont typeface="Arial" panose="020B0604020202020204" pitchFamily="34" charset="0"/>
+              <a:buChar char="•"/>
+              <a:defRPr sz="1800" kern="1200">
+                <a:solidFill>
+                  <a:schemeClr val="tx1"/>
+                </a:solidFill>
+                <a:latin typeface="+mn-lt"/>
+                <a:ea typeface="+mn-ea"/>
+                <a:cs typeface="+mn-cs"/>
+              </a:defRPr>
+            </a:lvl8pPr>
+            <a:lvl9pPr marL="3886200" indent="-228600" algn="l" defTabSz="914400" rtl="0" eaLnBrk="1" latinLnBrk="0" hangingPunct="1">
+              <a:lnSpc>
+                <a:spcPct val="90000"/>
+              </a:lnSpc>
+              <a:spcBef>
+                <a:spcPts val="500"/>
+              </a:spcBef>
+              <a:buFont typeface="Arial" panose="020B0604020202020204" pitchFamily="34" charset="0"/>
+              <a:buChar char="•"/>
+              <a:defRPr sz="1800" kern="1200">
+                <a:solidFill>
+                  <a:schemeClr val="tx1"/>
+                </a:solidFill>
+                <a:latin typeface="+mn-lt"/>
+                <a:ea typeface="+mn-ea"/>
+                <a:cs typeface="+mn-cs"/>
+              </a:defRPr>
+            </a:lvl9pPr>
+          </a:lstStyle>
+          <a:p>
+            <a:r>
+              <a:rPr lang="en-US" dirty="0"/>
+              <a:t>Only an </a:t>
+            </a:r>
+            <a:r>
+              <a:rPr lang="en-US" sz="2000" dirty="0" err="1">
+                <a:latin typeface="Consolas" panose="020B0609020204030204" pitchFamily="49" charset="0"/>
+                <a:cs typeface="Courier New" panose="02070309020205020404" pitchFamily="49" charset="0"/>
+              </a:rPr>
+              <a:t>OutgoingMessageFactory</a:t>
+            </a:r>
+            <a:r>
+              <a:rPr lang="en-US" dirty="0"/>
+              <a:t> can </a:t>
+            </a:r>
+            <a:br>
+              <a:rPr lang="en-US" dirty="0"/>
+            </a:br>
+            <a:r>
+              <a:rPr lang="en-US" dirty="0"/>
+              <a:t>create new messages:</a:t>
+            </a:r>
+          </a:p>
+          <a:p>
+            <a:endParaRPr lang="en-US" dirty="0"/>
+          </a:p>
+          <a:p>
+            <a:endParaRPr lang="en-US" dirty="0"/>
+          </a:p>
+          <a:p>
+            <a:endParaRPr lang="en-US" dirty="0"/>
+          </a:p>
+          <a:p>
+            <a:r>
+              <a:rPr lang="en-US" dirty="0"/>
+              <a:t>Messages must be disposed once done with them</a:t>
+            </a:r>
+          </a:p>
+          <a:p>
+            <a:pPr lvl="1"/>
+            <a:r>
+              <a:rPr lang="en-US" dirty="0"/>
+              <a:t>Allocated memory is reused.</a:t>
+            </a:r>
+          </a:p>
+          <a:p>
+            <a:r>
+              <a:rPr lang="en-US" dirty="0"/>
+              <a:t>Messages can be “Retained” when needed (reference counting)</a:t>
+            </a:r>
+          </a:p>
+          <a:p>
+            <a:r>
+              <a:rPr lang="en-US" dirty="0" err="1"/>
+              <a:t>CreateStatic</a:t>
+            </a:r>
+            <a:r>
+              <a:rPr lang="en-US" dirty="0"/>
+              <a:t> returns messages don’t need to be disposed.</a:t>
+            </a:r>
+          </a:p>
+          <a:p>
+            <a:pPr lvl="1"/>
+            <a:r>
+              <a:rPr lang="en-US" dirty="0"/>
+              <a:t>Dispose()/Retain() calls are ignored.</a:t>
+            </a:r>
+          </a:p>
+        </p:txBody>
+      </p:sp>
+      <p:sp>
+        <p:nvSpPr>
+          <p:cNvPr id="12" name="TextBox 11">
+            <a:extLst>
+              <a:ext uri="{FF2B5EF4-FFF2-40B4-BE49-F238E27FC236}">
+                <a16:creationId xmlns:a16="http://schemas.microsoft.com/office/drawing/2014/main" id="{B101A3D9-3364-B380-BE27-B3376CE6CD06}"/>
+              </a:ext>
+            </a:extLst>
+          </p:cNvPr>
+          <p:cNvSpPr txBox="1"/>
+          <p:nvPr/>
+        </p:nvSpPr>
+        <p:spPr>
+          <a:xfrm>
+            <a:off x="1078524" y="2715481"/>
+            <a:ext cx="9448800" cy="1477328"/>
+          </a:xfrm>
+          <a:prstGeom prst="rect">
+            <a:avLst/>
+          </a:prstGeom>
+          <a:noFill/>
+        </p:spPr>
+        <p:txBody>
+          <a:bodyPr wrap="square">
+            <a:spAutoFit/>
+          </a:bodyPr>
+          <a:lstStyle/>
+          <a:p>
+            <a:r>
+              <a:rPr lang="en-US" sz="1800" dirty="0">
+                <a:solidFill>
+                  <a:srgbClr val="0000FF"/>
+                </a:solidFill>
+                <a:latin typeface="Consolas" panose="020B0609020204030204" pitchFamily="49" charset="0"/>
+              </a:rPr>
+              <a:t>public</a:t>
+            </a:r>
+            <a:r>
+              <a:rPr lang="en-US" sz="1800" dirty="0">
+                <a:solidFill>
+                  <a:srgbClr val="000000"/>
+                </a:solidFill>
+                <a:latin typeface="Consolas" panose="020B0609020204030204" pitchFamily="49" charset="0"/>
+              </a:rPr>
+              <a:t> </a:t>
+            </a:r>
+            <a:r>
+              <a:rPr lang="en-US" sz="1800" dirty="0" err="1">
+                <a:solidFill>
+                  <a:srgbClr val="000000"/>
+                </a:solidFill>
+                <a:latin typeface="Consolas" panose="020B0609020204030204" pitchFamily="49" charset="0"/>
+              </a:rPr>
+              <a:t>TransportMessage</a:t>
+            </a:r>
+            <a:r>
+              <a:rPr lang="en-US" sz="1800" dirty="0">
+                <a:solidFill>
+                  <a:srgbClr val="000000"/>
+                </a:solidFill>
+                <a:latin typeface="Consolas" panose="020B0609020204030204" pitchFamily="49" charset="0"/>
+              </a:rPr>
+              <a:t> Create( Action&lt;</a:t>
+            </a:r>
+            <a:r>
+              <a:rPr lang="en-US" sz="1800" dirty="0" err="1">
+                <a:solidFill>
+                  <a:srgbClr val="000000"/>
+                </a:solidFill>
+                <a:latin typeface="Consolas" panose="020B0609020204030204" pitchFamily="49" charset="0"/>
+              </a:rPr>
+              <a:t>IBufferWriter</a:t>
+            </a:r>
+            <a:r>
+              <a:rPr lang="en-US" sz="1800" dirty="0">
+                <a:solidFill>
+                  <a:srgbClr val="000000"/>
+                </a:solidFill>
+                <a:latin typeface="Consolas" panose="020B0609020204030204" pitchFamily="49" charset="0"/>
+              </a:rPr>
+              <a:t>&lt;</a:t>
+            </a:r>
+            <a:r>
+              <a:rPr lang="en-US" sz="1800" dirty="0">
+                <a:solidFill>
+                  <a:srgbClr val="0000FF"/>
+                </a:solidFill>
+                <a:latin typeface="Consolas" panose="020B0609020204030204" pitchFamily="49" charset="0"/>
+              </a:rPr>
+              <a:t>byte</a:t>
+            </a:r>
+            <a:r>
+              <a:rPr lang="en-US" sz="1800" dirty="0">
+                <a:solidFill>
+                  <a:srgbClr val="000000"/>
+                </a:solidFill>
+                <a:latin typeface="Consolas" panose="020B0609020204030204" pitchFamily="49" charset="0"/>
+              </a:rPr>
+              <a:t>&gt;&gt; writer,</a:t>
+            </a:r>
+          </a:p>
+          <a:p>
+            <a:r>
+              <a:rPr lang="en-US" sz="1800" dirty="0">
+                <a:solidFill>
+                  <a:srgbClr val="000000"/>
+                </a:solidFill>
+                <a:latin typeface="Consolas" panose="020B0609020204030204" pitchFamily="49" charset="0"/>
+              </a:rPr>
+              <a:t>                                </a:t>
+            </a:r>
+            <a:r>
+              <a:rPr lang="en-US" sz="1800" dirty="0">
+                <a:solidFill>
+                  <a:srgbClr val="0000FF"/>
+                </a:solidFill>
+                <a:latin typeface="Consolas" panose="020B0609020204030204" pitchFamily="49" charset="0"/>
+              </a:rPr>
+              <a:t>bool</a:t>
+            </a:r>
+            <a:r>
+              <a:rPr lang="en-US" sz="1800" dirty="0">
+                <a:solidFill>
+                  <a:srgbClr val="000000"/>
+                </a:solidFill>
+                <a:latin typeface="Consolas" panose="020B0609020204030204" pitchFamily="49" charset="0"/>
+              </a:rPr>
+              <a:t> </a:t>
+            </a:r>
+            <a:r>
+              <a:rPr lang="en-US" sz="1800" dirty="0" err="1">
+                <a:solidFill>
+                  <a:srgbClr val="000000"/>
+                </a:solidFill>
+                <a:latin typeface="Consolas" panose="020B0609020204030204" pitchFamily="49" charset="0"/>
+              </a:rPr>
+              <a:t>isControl</a:t>
+            </a:r>
+            <a:r>
+              <a:rPr lang="en-US" sz="1800" dirty="0">
+                <a:solidFill>
+                  <a:srgbClr val="000000"/>
+                </a:solidFill>
+                <a:latin typeface="Consolas" panose="020B0609020204030204" pitchFamily="49" charset="0"/>
+              </a:rPr>
+              <a:t> = </a:t>
+            </a:r>
+            <a:r>
+              <a:rPr lang="en-US" sz="1800" dirty="0">
+                <a:solidFill>
+                  <a:srgbClr val="0000FF"/>
+                </a:solidFill>
+                <a:latin typeface="Consolas" panose="020B0609020204030204" pitchFamily="49" charset="0"/>
+              </a:rPr>
+              <a:t>false </a:t>
+            </a:r>
+            <a:r>
+              <a:rPr lang="en-US" sz="1800" dirty="0">
+                <a:solidFill>
+                  <a:srgbClr val="000000"/>
+                </a:solidFill>
+                <a:latin typeface="Consolas" panose="020B0609020204030204" pitchFamily="49" charset="0"/>
+              </a:rPr>
+              <a:t>);</a:t>
+            </a:r>
+          </a:p>
+          <a:p>
+            <a:r>
+              <a:rPr lang="en-US" sz="1800" dirty="0">
+                <a:solidFill>
+                  <a:srgbClr val="0000FF"/>
+                </a:solidFill>
+                <a:latin typeface="Consolas" panose="020B0609020204030204" pitchFamily="49" charset="0"/>
+              </a:rPr>
+              <a:t>public</a:t>
+            </a:r>
+            <a:r>
+              <a:rPr lang="en-US" sz="1800" dirty="0">
+                <a:solidFill>
+                  <a:srgbClr val="000000"/>
+                </a:solidFill>
+                <a:latin typeface="Consolas" panose="020B0609020204030204" pitchFamily="49" charset="0"/>
+              </a:rPr>
+              <a:t> </a:t>
+            </a:r>
+            <a:r>
+              <a:rPr lang="en-US" sz="1800" dirty="0" err="1">
+                <a:solidFill>
+                  <a:srgbClr val="000000"/>
+                </a:solidFill>
+                <a:latin typeface="Consolas" panose="020B0609020204030204" pitchFamily="49" charset="0"/>
+              </a:rPr>
+              <a:t>TransportMessage</a:t>
+            </a:r>
+            <a:r>
+              <a:rPr lang="en-US" sz="1800" dirty="0">
+                <a:solidFill>
+                  <a:srgbClr val="000000"/>
+                </a:solidFill>
+                <a:latin typeface="Consolas" panose="020B0609020204030204" pitchFamily="49" charset="0"/>
+              </a:rPr>
+              <a:t> Create( Action&lt;</a:t>
+            </a:r>
+            <a:r>
+              <a:rPr lang="en-US" sz="1800" dirty="0" err="1">
+                <a:solidFill>
+                  <a:srgbClr val="000000"/>
+                </a:solidFill>
+                <a:latin typeface="Consolas" panose="020B0609020204030204" pitchFamily="49" charset="0"/>
+              </a:rPr>
+              <a:t>MutableSequence</a:t>
+            </a:r>
+            <a:r>
+              <a:rPr lang="en-US" sz="1800" dirty="0">
+                <a:solidFill>
+                  <a:srgbClr val="000000"/>
+                </a:solidFill>
+                <a:latin typeface="Consolas" panose="020B0609020204030204" pitchFamily="49" charset="0"/>
+              </a:rPr>
+              <a:t>&lt;</a:t>
+            </a:r>
+            <a:r>
+              <a:rPr lang="en-US" sz="1800" dirty="0">
+                <a:solidFill>
+                  <a:srgbClr val="0000FF"/>
+                </a:solidFill>
+                <a:latin typeface="Consolas" panose="020B0609020204030204" pitchFamily="49" charset="0"/>
+              </a:rPr>
+              <a:t>byte</a:t>
+            </a:r>
+            <a:r>
+              <a:rPr lang="en-US" sz="1800" dirty="0">
+                <a:solidFill>
+                  <a:srgbClr val="000000"/>
+                </a:solidFill>
+                <a:latin typeface="Consolas" panose="020B0609020204030204" pitchFamily="49" charset="0"/>
+              </a:rPr>
+              <a:t>&gt;&gt; writer,</a:t>
+            </a:r>
+          </a:p>
+          <a:p>
+            <a:r>
+              <a:rPr lang="en-US" sz="1800" dirty="0">
+                <a:solidFill>
+                  <a:srgbClr val="000000"/>
+                </a:solidFill>
+                <a:latin typeface="Consolas" panose="020B0609020204030204" pitchFamily="49" charset="0"/>
+              </a:rPr>
+              <a:t>                                </a:t>
+            </a:r>
+            <a:r>
+              <a:rPr lang="en-US" sz="1800" dirty="0">
+                <a:solidFill>
+                  <a:srgbClr val="0000FF"/>
+                </a:solidFill>
+                <a:latin typeface="Consolas" panose="020B0609020204030204" pitchFamily="49" charset="0"/>
+              </a:rPr>
+              <a:t>bool</a:t>
+            </a:r>
+            <a:r>
+              <a:rPr lang="en-US" sz="1800" dirty="0">
+                <a:solidFill>
+                  <a:srgbClr val="000000"/>
+                </a:solidFill>
+                <a:latin typeface="Consolas" panose="020B0609020204030204" pitchFamily="49" charset="0"/>
+              </a:rPr>
+              <a:t> </a:t>
+            </a:r>
+            <a:r>
+              <a:rPr lang="en-US" sz="1800" dirty="0" err="1">
+                <a:solidFill>
+                  <a:srgbClr val="000000"/>
+                </a:solidFill>
+                <a:latin typeface="Consolas" panose="020B0609020204030204" pitchFamily="49" charset="0"/>
+              </a:rPr>
+              <a:t>isControl</a:t>
+            </a:r>
+            <a:r>
+              <a:rPr lang="en-US" sz="1800" dirty="0">
+                <a:solidFill>
+                  <a:srgbClr val="000000"/>
+                </a:solidFill>
+                <a:latin typeface="Consolas" panose="020B0609020204030204" pitchFamily="49" charset="0"/>
+              </a:rPr>
+              <a:t> = </a:t>
+            </a:r>
+            <a:r>
+              <a:rPr lang="en-US" sz="1800" dirty="0">
+                <a:solidFill>
+                  <a:srgbClr val="0000FF"/>
+                </a:solidFill>
+                <a:latin typeface="Consolas" panose="020B0609020204030204" pitchFamily="49" charset="0"/>
+              </a:rPr>
+              <a:t>false </a:t>
+            </a:r>
+            <a:r>
+              <a:rPr lang="en-US" sz="1800" dirty="0">
+                <a:solidFill>
+                  <a:srgbClr val="000000"/>
+                </a:solidFill>
+                <a:latin typeface="Consolas" panose="020B0609020204030204" pitchFamily="49" charset="0"/>
+              </a:rPr>
+              <a:t>);</a:t>
+            </a:r>
+          </a:p>
+          <a:p>
+            <a:endParaRPr lang="en-US" sz="1800" dirty="0">
+              <a:solidFill>
+                <a:srgbClr val="000000"/>
+              </a:solidFill>
+              <a:latin typeface="Consolas" panose="020B0609020204030204" pitchFamily="49" charset="0"/>
+            </a:endParaRPr>
+          </a:p>
+        </p:txBody>
+      </p:sp>
+      <p:pic>
+        <p:nvPicPr>
+          <p:cNvPr id="16" name="Content Placeholder 15" descr="Graphical user interface, text, application, chat or text message&#10;&#10;Description automatically generated">
+            <a:extLst>
+              <a:ext uri="{FF2B5EF4-FFF2-40B4-BE49-F238E27FC236}">
+                <a16:creationId xmlns:a16="http://schemas.microsoft.com/office/drawing/2014/main" id="{B9C368B7-B971-1A32-863D-EFEC2CD1A66D}"/>
+              </a:ext>
+            </a:extLst>
+          </p:cNvPr>
+          <p:cNvPicPr>
+            <a:picLocks noGrp="1" noChangeAspect="1"/>
+          </p:cNvPicPr>
           <p:nvPr>
             <p:ph idx="1"/>
           </p:nvPr>
-        </p:nvSpPr>
-        <p:spPr/>
-        <p:txBody>
-          <a:bodyPr/>
-          <a:lstStyle/>
-          <a:p>
-            <a:endParaRPr lang="en-US"/>
-          </a:p>
-        </p:txBody>
-      </p:sp>
+        </p:nvPicPr>
+        <p:blipFill>
+          <a:blip r:embed="rId2">
+            <a:extLst>
+              <a:ext uri="{28A0092B-C50C-407E-A947-70E740481C1C}">
+                <a14:useLocalDpi xmlns:a14="http://schemas.microsoft.com/office/drawing/2010/main" val="0"/>
+              </a:ext>
+            </a:extLst>
+          </a:blip>
+          <a:stretch>
+            <a:fillRect/>
+          </a:stretch>
+        </p:blipFill>
+        <p:spPr>
+          <a:xfrm>
+            <a:off x="6365630" y="515815"/>
+            <a:ext cx="5716130" cy="2047266"/>
+          </a:xfrm>
+        </p:spPr>
+      </p:pic>
     </p:spTree>
     <p:extLst>
       <p:ext uri="{BB962C8B-B14F-4D97-AF65-F5344CB8AC3E}">
@@ -14108,6 +14868,884 @@
     <p:extLst>
       <p:ext uri="{BB962C8B-B14F-4D97-AF65-F5344CB8AC3E}">
         <p14:creationId xmlns:p14="http://schemas.microsoft.com/office/powerpoint/2010/main" val="1297341357"/>
+      </p:ext>
+    </p:extLst>
+  </p:cSld>
+  <p:clrMapOvr>
+    <a:masterClrMapping/>
+  </p:clrMapOvr>
+</p:sld>
+</file>
+
+<file path=ppt/slides/slide30.xml><?xml version="1.0" encoding="utf-8"?>
+<p:sld xmlns:a="http://schemas.openxmlformats.org/drawingml/2006/main" xmlns:r="http://schemas.openxmlformats.org/officeDocument/2006/relationships" xmlns:p="http://schemas.openxmlformats.org/presentationml/2006/main">
+  <p:cSld>
+    <p:spTree>
+      <p:nvGrpSpPr>
+        <p:cNvPr id="1" name=""/>
+        <p:cNvGrpSpPr/>
+        <p:nvPr/>
+      </p:nvGrpSpPr>
+      <p:grpSpPr>
+        <a:xfrm>
+          <a:off x="0" y="0"/>
+          <a:ext cx="0" cy="0"/>
+          <a:chOff x="0" y="0"/>
+          <a:chExt cx="0" cy="0"/>
+        </a:xfrm>
+      </p:grpSpPr>
+      <p:sp>
+        <p:nvSpPr>
+          <p:cNvPr id="8" name="Content Placeholder 2">
+            <a:extLst>
+              <a:ext uri="{FF2B5EF4-FFF2-40B4-BE49-F238E27FC236}">
+                <a16:creationId xmlns:a16="http://schemas.microsoft.com/office/drawing/2014/main" id="{028A174E-C40C-EE9F-57EC-1C6C06A73727}"/>
+              </a:ext>
+            </a:extLst>
+          </p:cNvPr>
+          <p:cNvSpPr txBox="1">
+            <a:spLocks/>
+          </p:cNvSpPr>
+          <p:nvPr/>
+        </p:nvSpPr>
+        <p:spPr>
+          <a:xfrm>
+            <a:off x="838200" y="1825625"/>
+            <a:ext cx="8607669" cy="4516560"/>
+          </a:xfrm>
+          <a:prstGeom prst="rect">
+            <a:avLst/>
+          </a:prstGeom>
+        </p:spPr>
+        <p:txBody>
+          <a:bodyPr vert="horz" lIns="91440" tIns="45720" rIns="91440" bIns="45720" rtlCol="0">
+            <a:normAutofit fontScale="92500" lnSpcReduction="10000"/>
+          </a:bodyPr>
+          <a:lstStyle>
+            <a:lvl1pPr marL="228600" indent="-228600" algn="l" defTabSz="914400" rtl="0" eaLnBrk="1" latinLnBrk="0" hangingPunct="1">
+              <a:lnSpc>
+                <a:spcPct val="90000"/>
+              </a:lnSpc>
+              <a:spcBef>
+                <a:spcPts val="1000"/>
+              </a:spcBef>
+              <a:buFont typeface="Arial" panose="020B0604020202020204" pitchFamily="34" charset="0"/>
+              <a:buChar char="•"/>
+              <a:defRPr sz="2800" kern="1200">
+                <a:solidFill>
+                  <a:schemeClr val="tx1"/>
+                </a:solidFill>
+                <a:latin typeface="+mn-lt"/>
+                <a:ea typeface="+mn-ea"/>
+                <a:cs typeface="+mn-cs"/>
+              </a:defRPr>
+            </a:lvl1pPr>
+            <a:lvl2pPr marL="685800" indent="-228600" algn="l" defTabSz="914400" rtl="0" eaLnBrk="1" latinLnBrk="0" hangingPunct="1">
+              <a:lnSpc>
+                <a:spcPct val="90000"/>
+              </a:lnSpc>
+              <a:spcBef>
+                <a:spcPts val="500"/>
+              </a:spcBef>
+              <a:buFont typeface="Arial" panose="020B0604020202020204" pitchFamily="34" charset="0"/>
+              <a:buChar char="•"/>
+              <a:defRPr sz="2400" kern="1200">
+                <a:solidFill>
+                  <a:schemeClr val="tx1"/>
+                </a:solidFill>
+                <a:latin typeface="+mn-lt"/>
+                <a:ea typeface="+mn-ea"/>
+                <a:cs typeface="+mn-cs"/>
+              </a:defRPr>
+            </a:lvl2pPr>
+            <a:lvl3pPr marL="1143000" indent="-228600" algn="l" defTabSz="914400" rtl="0" eaLnBrk="1" latinLnBrk="0" hangingPunct="1">
+              <a:lnSpc>
+                <a:spcPct val="90000"/>
+              </a:lnSpc>
+              <a:spcBef>
+                <a:spcPts val="500"/>
+              </a:spcBef>
+              <a:buFont typeface="Arial" panose="020B0604020202020204" pitchFamily="34" charset="0"/>
+              <a:buChar char="•"/>
+              <a:defRPr sz="2000" kern="1200">
+                <a:solidFill>
+                  <a:schemeClr val="tx1"/>
+                </a:solidFill>
+                <a:latin typeface="+mn-lt"/>
+                <a:ea typeface="+mn-ea"/>
+                <a:cs typeface="+mn-cs"/>
+              </a:defRPr>
+            </a:lvl3pPr>
+            <a:lvl4pPr marL="1600200" indent="-228600" algn="l" defTabSz="914400" rtl="0" eaLnBrk="1" latinLnBrk="0" hangingPunct="1">
+              <a:lnSpc>
+                <a:spcPct val="90000"/>
+              </a:lnSpc>
+              <a:spcBef>
+                <a:spcPts val="500"/>
+              </a:spcBef>
+              <a:buFont typeface="Arial" panose="020B0604020202020204" pitchFamily="34" charset="0"/>
+              <a:buChar char="•"/>
+              <a:defRPr sz="1800" kern="1200">
+                <a:solidFill>
+                  <a:schemeClr val="tx1"/>
+                </a:solidFill>
+                <a:latin typeface="+mn-lt"/>
+                <a:ea typeface="+mn-ea"/>
+                <a:cs typeface="+mn-cs"/>
+              </a:defRPr>
+            </a:lvl4pPr>
+            <a:lvl5pPr marL="2057400" indent="-228600" algn="l" defTabSz="914400" rtl="0" eaLnBrk="1" latinLnBrk="0" hangingPunct="1">
+              <a:lnSpc>
+                <a:spcPct val="90000"/>
+              </a:lnSpc>
+              <a:spcBef>
+                <a:spcPts val="500"/>
+              </a:spcBef>
+              <a:buFont typeface="Arial" panose="020B0604020202020204" pitchFamily="34" charset="0"/>
+              <a:buChar char="•"/>
+              <a:defRPr sz="1800" kern="1200">
+                <a:solidFill>
+                  <a:schemeClr val="tx1"/>
+                </a:solidFill>
+                <a:latin typeface="+mn-lt"/>
+                <a:ea typeface="+mn-ea"/>
+                <a:cs typeface="+mn-cs"/>
+              </a:defRPr>
+            </a:lvl5pPr>
+            <a:lvl6pPr marL="2514600" indent="-228600" algn="l" defTabSz="914400" rtl="0" eaLnBrk="1" latinLnBrk="0" hangingPunct="1">
+              <a:lnSpc>
+                <a:spcPct val="90000"/>
+              </a:lnSpc>
+              <a:spcBef>
+                <a:spcPts val="500"/>
+              </a:spcBef>
+              <a:buFont typeface="Arial" panose="020B0604020202020204" pitchFamily="34" charset="0"/>
+              <a:buChar char="•"/>
+              <a:defRPr sz="1800" kern="1200">
+                <a:solidFill>
+                  <a:schemeClr val="tx1"/>
+                </a:solidFill>
+                <a:latin typeface="+mn-lt"/>
+                <a:ea typeface="+mn-ea"/>
+                <a:cs typeface="+mn-cs"/>
+              </a:defRPr>
+            </a:lvl6pPr>
+            <a:lvl7pPr marL="2971800" indent="-228600" algn="l" defTabSz="914400" rtl="0" eaLnBrk="1" latinLnBrk="0" hangingPunct="1">
+              <a:lnSpc>
+                <a:spcPct val="90000"/>
+              </a:lnSpc>
+              <a:spcBef>
+                <a:spcPts val="500"/>
+              </a:spcBef>
+              <a:buFont typeface="Arial" panose="020B0604020202020204" pitchFamily="34" charset="0"/>
+              <a:buChar char="•"/>
+              <a:defRPr sz="1800" kern="1200">
+                <a:solidFill>
+                  <a:schemeClr val="tx1"/>
+                </a:solidFill>
+                <a:latin typeface="+mn-lt"/>
+                <a:ea typeface="+mn-ea"/>
+                <a:cs typeface="+mn-cs"/>
+              </a:defRPr>
+            </a:lvl7pPr>
+            <a:lvl8pPr marL="3429000" indent="-228600" algn="l" defTabSz="914400" rtl="0" eaLnBrk="1" latinLnBrk="0" hangingPunct="1">
+              <a:lnSpc>
+                <a:spcPct val="90000"/>
+              </a:lnSpc>
+              <a:spcBef>
+                <a:spcPts val="500"/>
+              </a:spcBef>
+              <a:buFont typeface="Arial" panose="020B0604020202020204" pitchFamily="34" charset="0"/>
+              <a:buChar char="•"/>
+              <a:defRPr sz="1800" kern="1200">
+                <a:solidFill>
+                  <a:schemeClr val="tx1"/>
+                </a:solidFill>
+                <a:latin typeface="+mn-lt"/>
+                <a:ea typeface="+mn-ea"/>
+                <a:cs typeface="+mn-cs"/>
+              </a:defRPr>
+            </a:lvl8pPr>
+            <a:lvl9pPr marL="3886200" indent="-228600" algn="l" defTabSz="914400" rtl="0" eaLnBrk="1" latinLnBrk="0" hangingPunct="1">
+              <a:lnSpc>
+                <a:spcPct val="90000"/>
+              </a:lnSpc>
+              <a:spcBef>
+                <a:spcPts val="500"/>
+              </a:spcBef>
+              <a:buFont typeface="Arial" panose="020B0604020202020204" pitchFamily="34" charset="0"/>
+              <a:buChar char="•"/>
+              <a:defRPr sz="1800" kern="1200">
+                <a:solidFill>
+                  <a:schemeClr val="tx1"/>
+                </a:solidFill>
+                <a:latin typeface="+mn-lt"/>
+                <a:ea typeface="+mn-ea"/>
+                <a:cs typeface="+mn-cs"/>
+              </a:defRPr>
+            </a:lvl9pPr>
+          </a:lstStyle>
+          <a:p>
+            <a:r>
+              <a:rPr lang="en-US" dirty="0"/>
+              <a:t>Only an </a:t>
+            </a:r>
+            <a:r>
+              <a:rPr lang="en-US" sz="2000" dirty="0" err="1">
+                <a:latin typeface="Consolas" panose="020B0609020204030204" pitchFamily="49" charset="0"/>
+                <a:cs typeface="Courier New" panose="02070309020205020404" pitchFamily="49" charset="0"/>
+              </a:rPr>
+              <a:t>IncomingMessageFactory</a:t>
+            </a:r>
+            <a:r>
+              <a:rPr lang="en-US" dirty="0"/>
+              <a:t> can read messages:</a:t>
+            </a:r>
+          </a:p>
+          <a:p>
+            <a:endParaRPr lang="en-US" dirty="0"/>
+          </a:p>
+          <a:p>
+            <a:endParaRPr lang="en-US" dirty="0"/>
+          </a:p>
+          <a:p>
+            <a:endParaRPr lang="en-US" dirty="0"/>
+          </a:p>
+          <a:p>
+            <a:endParaRPr lang="en-US" dirty="0"/>
+          </a:p>
+          <a:p>
+            <a:r>
+              <a:rPr lang="en-US" dirty="0"/>
+              <a:t>From any asynchronous function that can fill a buffer with an exact count of bytes.</a:t>
+            </a:r>
+          </a:p>
+          <a:p>
+            <a:r>
+              <a:rPr lang="en-US" dirty="0"/>
+              <a:t>The developer never interacts directly with an </a:t>
+            </a:r>
+            <a:r>
+              <a:rPr lang="en-US" dirty="0" err="1"/>
+              <a:t>IncomingMessageFactory</a:t>
+            </a:r>
+            <a:r>
+              <a:rPr lang="en-US" dirty="0"/>
+              <a:t>.</a:t>
+            </a:r>
+          </a:p>
+          <a:p>
+            <a:r>
+              <a:rPr lang="en-US" dirty="0"/>
+              <a:t>Concrete Transport implementations provide the </a:t>
+            </a:r>
+            <a:r>
+              <a:rPr lang="en-US" sz="2200" dirty="0" err="1">
+                <a:solidFill>
+                  <a:srgbClr val="000000"/>
+                </a:solidFill>
+                <a:latin typeface="Consolas" panose="020B0609020204030204" pitchFamily="49" charset="0"/>
+              </a:rPr>
+              <a:t>exactReader</a:t>
+            </a:r>
+            <a:r>
+              <a:rPr lang="en-US" dirty="0"/>
+              <a:t> function.</a:t>
+            </a:r>
+          </a:p>
+        </p:txBody>
+      </p:sp>
+      <p:sp>
+        <p:nvSpPr>
+          <p:cNvPr id="2" name="Title 1">
+            <a:extLst>
+              <a:ext uri="{FF2B5EF4-FFF2-40B4-BE49-F238E27FC236}">
+                <a16:creationId xmlns:a16="http://schemas.microsoft.com/office/drawing/2014/main" id="{70FD56D0-2F2C-42C4-3EEA-E4CCE70C904F}"/>
+              </a:ext>
+            </a:extLst>
+          </p:cNvPr>
+          <p:cNvSpPr>
+            <a:spLocks noGrp="1"/>
+          </p:cNvSpPr>
+          <p:nvPr>
+            <p:ph type="title"/>
+          </p:nvPr>
+        </p:nvSpPr>
+        <p:spPr/>
+        <p:txBody>
+          <a:bodyPr/>
+          <a:lstStyle/>
+          <a:p>
+            <a:r>
+              <a:rPr lang="en-US" dirty="0"/>
+              <a:t>Reading incoming messages</a:t>
+            </a:r>
+          </a:p>
+        </p:txBody>
+      </p:sp>
+      <p:pic>
+        <p:nvPicPr>
+          <p:cNvPr id="5" name="Content Placeholder 4" descr="Graphical user interface, application&#10;&#10;Description automatically generated">
+            <a:extLst>
+              <a:ext uri="{FF2B5EF4-FFF2-40B4-BE49-F238E27FC236}">
+                <a16:creationId xmlns:a16="http://schemas.microsoft.com/office/drawing/2014/main" id="{CD2D2A67-F26C-B52C-0846-6487A7DF0B10}"/>
+              </a:ext>
+            </a:extLst>
+          </p:cNvPr>
+          <p:cNvPicPr>
+            <a:picLocks noGrp="1" noChangeAspect="1"/>
+          </p:cNvPicPr>
+          <p:nvPr>
+            <p:ph idx="1"/>
+          </p:nvPr>
+        </p:nvPicPr>
+        <p:blipFill>
+          <a:blip r:embed="rId3">
+            <a:extLst>
+              <a:ext uri="{28A0092B-C50C-407E-A947-70E740481C1C}">
+                <a14:useLocalDpi xmlns:a14="http://schemas.microsoft.com/office/drawing/2010/main" val="0"/>
+              </a:ext>
+            </a:extLst>
+          </a:blip>
+          <a:stretch>
+            <a:fillRect/>
+          </a:stretch>
+        </p:blipFill>
+        <p:spPr>
+          <a:xfrm>
+            <a:off x="9601200" y="146641"/>
+            <a:ext cx="2454795" cy="6564718"/>
+          </a:xfrm>
+        </p:spPr>
+      </p:pic>
+      <p:sp>
+        <p:nvSpPr>
+          <p:cNvPr id="7" name="TextBox 6">
+            <a:extLst>
+              <a:ext uri="{FF2B5EF4-FFF2-40B4-BE49-F238E27FC236}">
+                <a16:creationId xmlns:a16="http://schemas.microsoft.com/office/drawing/2014/main" id="{ADFAAF37-5FFB-5FCF-739F-A7F6192E67D4}"/>
+              </a:ext>
+            </a:extLst>
+          </p:cNvPr>
+          <p:cNvSpPr txBox="1"/>
+          <p:nvPr/>
+        </p:nvSpPr>
+        <p:spPr>
+          <a:xfrm>
+            <a:off x="993531" y="2329579"/>
+            <a:ext cx="8452338" cy="1754326"/>
+          </a:xfrm>
+          <a:prstGeom prst="rect">
+            <a:avLst/>
+          </a:prstGeom>
+          <a:noFill/>
+        </p:spPr>
+        <p:txBody>
+          <a:bodyPr wrap="square">
+            <a:spAutoFit/>
+          </a:bodyPr>
+          <a:lstStyle/>
+          <a:p>
+            <a:r>
+              <a:rPr lang="en-US" sz="1800" dirty="0">
+                <a:solidFill>
+                  <a:srgbClr val="0000FF"/>
+                </a:solidFill>
+                <a:latin typeface="Consolas" panose="020B0609020204030204" pitchFamily="49" charset="0"/>
+              </a:rPr>
+              <a:t>public</a:t>
+            </a:r>
+            <a:r>
+              <a:rPr lang="en-US" sz="1800" dirty="0">
+                <a:solidFill>
+                  <a:srgbClr val="000000"/>
+                </a:solidFill>
+                <a:latin typeface="Consolas" panose="020B0609020204030204" pitchFamily="49" charset="0"/>
+              </a:rPr>
+              <a:t> Task&lt;</a:t>
+            </a:r>
+            <a:r>
+              <a:rPr lang="en-US" sz="1800" dirty="0" err="1">
+                <a:solidFill>
+                  <a:srgbClr val="000000"/>
+                </a:solidFill>
+                <a:latin typeface="Consolas" panose="020B0609020204030204" pitchFamily="49" charset="0"/>
+              </a:rPr>
+              <a:t>TransportMessage</a:t>
+            </a:r>
+            <a:r>
+              <a:rPr lang="en-US" sz="1800" dirty="0">
+                <a:solidFill>
+                  <a:srgbClr val="000000"/>
+                </a:solidFill>
+                <a:latin typeface="Consolas" panose="020B0609020204030204" pitchFamily="49" charset="0"/>
+              </a:rPr>
+              <a:t>&gt; </a:t>
+            </a:r>
+            <a:r>
+              <a:rPr lang="en-US" sz="1800" dirty="0" err="1">
+                <a:solidFill>
+                  <a:srgbClr val="000000"/>
+                </a:solidFill>
+                <a:latin typeface="Consolas" panose="020B0609020204030204" pitchFamily="49" charset="0"/>
+              </a:rPr>
+              <a:t>ReadAsync</a:t>
+            </a:r>
+            <a:endParaRPr lang="en-US" sz="1800" dirty="0">
+              <a:solidFill>
+                <a:srgbClr val="000000"/>
+              </a:solidFill>
+              <a:latin typeface="Consolas" panose="020B0609020204030204" pitchFamily="49" charset="0"/>
+            </a:endParaRPr>
+          </a:p>
+          <a:p>
+            <a:r>
+              <a:rPr lang="en-US" sz="1800" dirty="0">
+                <a:solidFill>
+                  <a:srgbClr val="000000"/>
+                </a:solidFill>
+                <a:latin typeface="Consolas" panose="020B0609020204030204" pitchFamily="49" charset="0"/>
+              </a:rPr>
+              <a:t>( </a:t>
+            </a:r>
+          </a:p>
+          <a:p>
+            <a:r>
+              <a:rPr lang="en-US" dirty="0">
+                <a:solidFill>
+                  <a:srgbClr val="000000"/>
+                </a:solidFill>
+                <a:latin typeface="Consolas" panose="020B0609020204030204" pitchFamily="49" charset="0"/>
+              </a:rPr>
+              <a:t>    </a:t>
+            </a:r>
+            <a:r>
+              <a:rPr lang="en-US" sz="1800" dirty="0" err="1">
+                <a:solidFill>
+                  <a:srgbClr val="000000"/>
+                </a:solidFill>
+                <a:latin typeface="Consolas" panose="020B0609020204030204" pitchFamily="49" charset="0"/>
+              </a:rPr>
+              <a:t>Func</a:t>
+            </a:r>
+            <a:r>
+              <a:rPr lang="en-US" sz="1800" dirty="0">
+                <a:solidFill>
+                  <a:srgbClr val="000000"/>
+                </a:solidFill>
+                <a:latin typeface="Consolas" panose="020B0609020204030204" pitchFamily="49" charset="0"/>
+              </a:rPr>
+              <a:t>&lt;Memory&lt;</a:t>
+            </a:r>
+            <a:r>
+              <a:rPr lang="en-US" sz="1800" dirty="0">
+                <a:solidFill>
+                  <a:srgbClr val="0000FF"/>
+                </a:solidFill>
+                <a:latin typeface="Consolas" panose="020B0609020204030204" pitchFamily="49" charset="0"/>
+              </a:rPr>
+              <a:t>byte</a:t>
+            </a:r>
+            <a:r>
+              <a:rPr lang="en-US" sz="1800" dirty="0">
+                <a:solidFill>
+                  <a:srgbClr val="000000"/>
+                </a:solidFill>
+                <a:latin typeface="Consolas" panose="020B0609020204030204" pitchFamily="49" charset="0"/>
+              </a:rPr>
+              <a:t>&gt;, </a:t>
+            </a:r>
+            <a:r>
+              <a:rPr lang="en-US" sz="1800" dirty="0" err="1">
+                <a:solidFill>
+                  <a:srgbClr val="000000"/>
+                </a:solidFill>
+                <a:latin typeface="Consolas" panose="020B0609020204030204" pitchFamily="49" charset="0"/>
+              </a:rPr>
+              <a:t>CancellationToken</a:t>
+            </a:r>
+            <a:r>
+              <a:rPr lang="en-US" sz="1800" dirty="0">
+                <a:solidFill>
+                  <a:srgbClr val="000000"/>
+                </a:solidFill>
+                <a:latin typeface="Consolas" panose="020B0609020204030204" pitchFamily="49" charset="0"/>
+              </a:rPr>
+              <a:t>, </a:t>
+            </a:r>
+            <a:r>
+              <a:rPr lang="en-US" sz="1800" dirty="0" err="1">
+                <a:solidFill>
+                  <a:srgbClr val="000000"/>
+                </a:solidFill>
+                <a:latin typeface="Consolas" panose="020B0609020204030204" pitchFamily="49" charset="0"/>
+              </a:rPr>
+              <a:t>ValueTask</a:t>
+            </a:r>
+            <a:r>
+              <a:rPr lang="en-US" sz="1800" dirty="0">
+                <a:solidFill>
+                  <a:srgbClr val="000000"/>
+                </a:solidFill>
+                <a:latin typeface="Consolas" panose="020B0609020204030204" pitchFamily="49" charset="0"/>
+              </a:rPr>
+              <a:t>&gt; </a:t>
+            </a:r>
+            <a:r>
+              <a:rPr lang="en-US" sz="1800" dirty="0" err="1">
+                <a:solidFill>
+                  <a:srgbClr val="000000"/>
+                </a:solidFill>
+                <a:latin typeface="Consolas" panose="020B0609020204030204" pitchFamily="49" charset="0"/>
+              </a:rPr>
+              <a:t>exactReader</a:t>
+            </a:r>
+            <a:r>
+              <a:rPr lang="en-US" sz="1800" dirty="0">
+                <a:solidFill>
+                  <a:srgbClr val="000000"/>
+                </a:solidFill>
+                <a:latin typeface="Consolas" panose="020B0609020204030204" pitchFamily="49" charset="0"/>
+              </a:rPr>
+              <a:t>,</a:t>
+            </a:r>
+          </a:p>
+          <a:p>
+            <a:r>
+              <a:rPr lang="en-US" sz="1800" dirty="0">
+                <a:solidFill>
+                  <a:srgbClr val="0000FF"/>
+                </a:solidFill>
+                <a:latin typeface="Consolas" panose="020B0609020204030204" pitchFamily="49" charset="0"/>
+              </a:rPr>
+              <a:t>    int</a:t>
+            </a:r>
+            <a:r>
+              <a:rPr lang="en-US" sz="1800" dirty="0">
+                <a:solidFill>
+                  <a:srgbClr val="000000"/>
+                </a:solidFill>
+                <a:latin typeface="Consolas" panose="020B0609020204030204" pitchFamily="49" charset="0"/>
+              </a:rPr>
+              <a:t> </a:t>
+            </a:r>
+            <a:r>
+              <a:rPr lang="en-US" sz="1800" dirty="0" err="1">
+                <a:solidFill>
+                  <a:srgbClr val="000000"/>
+                </a:solidFill>
+                <a:latin typeface="Consolas" panose="020B0609020204030204" pitchFamily="49" charset="0"/>
+              </a:rPr>
+              <a:t>maxMessageLength</a:t>
+            </a:r>
+            <a:r>
+              <a:rPr lang="en-US" sz="1800" dirty="0">
+                <a:solidFill>
+                  <a:srgbClr val="000000"/>
+                </a:solidFill>
+                <a:latin typeface="Consolas" panose="020B0609020204030204" pitchFamily="49" charset="0"/>
+              </a:rPr>
+              <a:t> = </a:t>
+            </a:r>
+            <a:r>
+              <a:rPr lang="en-US" sz="1800" dirty="0" err="1">
+                <a:solidFill>
+                  <a:srgbClr val="0000FF"/>
+                </a:solidFill>
+                <a:latin typeface="Consolas" panose="020B0609020204030204" pitchFamily="49" charset="0"/>
+              </a:rPr>
+              <a:t>int</a:t>
+            </a:r>
+            <a:r>
+              <a:rPr lang="en-US" sz="1800" dirty="0" err="1">
+                <a:solidFill>
+                  <a:srgbClr val="000000"/>
+                </a:solidFill>
+                <a:latin typeface="Consolas" panose="020B0609020204030204" pitchFamily="49" charset="0"/>
+              </a:rPr>
+              <a:t>.MaxValue</a:t>
+            </a:r>
+            <a:r>
+              <a:rPr lang="en-US" sz="1800" dirty="0">
+                <a:solidFill>
+                  <a:srgbClr val="000000"/>
+                </a:solidFill>
+                <a:latin typeface="Consolas" panose="020B0609020204030204" pitchFamily="49" charset="0"/>
+              </a:rPr>
+              <a:t>,</a:t>
+            </a:r>
+          </a:p>
+          <a:p>
+            <a:r>
+              <a:rPr lang="en-US" sz="1800" dirty="0">
+                <a:solidFill>
+                  <a:srgbClr val="000000"/>
+                </a:solidFill>
+                <a:latin typeface="Consolas" panose="020B0609020204030204" pitchFamily="49" charset="0"/>
+              </a:rPr>
+              <a:t>    </a:t>
+            </a:r>
+            <a:r>
+              <a:rPr lang="en-US" sz="1800" dirty="0" err="1">
+                <a:solidFill>
+                  <a:srgbClr val="000000"/>
+                </a:solidFill>
+                <a:latin typeface="Consolas" panose="020B0609020204030204" pitchFamily="49" charset="0"/>
+              </a:rPr>
+              <a:t>CancellationToken</a:t>
+            </a:r>
+            <a:r>
+              <a:rPr lang="en-US" sz="1800" dirty="0">
+                <a:solidFill>
+                  <a:srgbClr val="000000"/>
+                </a:solidFill>
+                <a:latin typeface="Consolas" panose="020B0609020204030204" pitchFamily="49" charset="0"/>
+              </a:rPr>
+              <a:t> cancellation = </a:t>
+            </a:r>
+            <a:r>
+              <a:rPr lang="en-US" sz="1800" dirty="0">
+                <a:solidFill>
+                  <a:srgbClr val="0000FF"/>
+                </a:solidFill>
+                <a:latin typeface="Consolas" panose="020B0609020204030204" pitchFamily="49" charset="0"/>
+              </a:rPr>
+              <a:t>default</a:t>
+            </a:r>
+            <a:r>
+              <a:rPr lang="en-US" sz="1800" dirty="0">
+                <a:solidFill>
+                  <a:srgbClr val="000000"/>
+                </a:solidFill>
+                <a:latin typeface="Consolas" panose="020B0609020204030204" pitchFamily="49" charset="0"/>
+              </a:rPr>
+              <a:t> </a:t>
+            </a:r>
+          </a:p>
+          <a:p>
+            <a:r>
+              <a:rPr lang="en-US" sz="1800" dirty="0">
+                <a:solidFill>
+                  <a:srgbClr val="000000"/>
+                </a:solidFill>
+                <a:latin typeface="Consolas" panose="020B0609020204030204" pitchFamily="49" charset="0"/>
+              </a:rPr>
+              <a:t>)</a:t>
+            </a:r>
+            <a:endParaRPr lang="en-US" dirty="0"/>
+          </a:p>
+        </p:txBody>
+      </p:sp>
+    </p:spTree>
+    <p:extLst>
+      <p:ext uri="{BB962C8B-B14F-4D97-AF65-F5344CB8AC3E}">
+        <p14:creationId xmlns:p14="http://schemas.microsoft.com/office/powerpoint/2010/main" val="1074243622"/>
+      </p:ext>
+    </p:extLst>
+  </p:cSld>
+  <p:clrMapOvr>
+    <a:masterClrMapping/>
+  </p:clrMapOvr>
+</p:sld>
+</file>
+
+<file path=ppt/slides/slide31.xml><?xml version="1.0" encoding="utf-8"?>
+<p:sld xmlns:a="http://schemas.openxmlformats.org/drawingml/2006/main" xmlns:r="http://schemas.openxmlformats.org/officeDocument/2006/relationships" xmlns:p="http://schemas.openxmlformats.org/presentationml/2006/main">
+  <p:cSld>
+    <p:bg>
+      <p:bgPr>
+        <a:solidFill>
+          <a:schemeClr val="bg1"/>
+        </a:solidFill>
+        <a:effectLst/>
+      </p:bgPr>
+    </p:bg>
+    <p:spTree>
+      <p:nvGrpSpPr>
+        <p:cNvPr id="1" name=""/>
+        <p:cNvGrpSpPr/>
+        <p:nvPr/>
+      </p:nvGrpSpPr>
+      <p:grpSpPr>
+        <a:xfrm>
+          <a:off x="0" y="0"/>
+          <a:ext cx="0" cy="0"/>
+          <a:chOff x="0" y="0"/>
+          <a:chExt cx="0" cy="0"/>
+        </a:xfrm>
+      </p:grpSpPr>
+      <p:sp>
+        <p:nvSpPr>
+          <p:cNvPr id="2" name="Title 1">
+            <a:extLst>
+              <a:ext uri="{FF2B5EF4-FFF2-40B4-BE49-F238E27FC236}">
+                <a16:creationId xmlns:a16="http://schemas.microsoft.com/office/drawing/2014/main" id="{6D8CEF7E-C184-9ED5-678F-E522EE7861ED}"/>
+              </a:ext>
+            </a:extLst>
+          </p:cNvPr>
+          <p:cNvSpPr>
+            <a:spLocks noGrp="1"/>
+          </p:cNvSpPr>
+          <p:nvPr>
+            <p:ph type="title"/>
+          </p:nvPr>
+        </p:nvSpPr>
+        <p:spPr/>
+        <p:txBody>
+          <a:bodyPr/>
+          <a:lstStyle/>
+          <a:p>
+            <a:r>
+              <a:rPr lang="en-US" dirty="0"/>
+              <a:t>Implementing</a:t>
+            </a:r>
+            <a:br>
+              <a:rPr lang="en-US" dirty="0"/>
+            </a:br>
+            <a:r>
+              <a:rPr lang="en-US" dirty="0"/>
+              <a:t>Transports</a:t>
+            </a:r>
+          </a:p>
+        </p:txBody>
+      </p:sp>
+      <p:sp>
+        <p:nvSpPr>
+          <p:cNvPr id="9" name="Content Placeholder 8">
+            <a:extLst>
+              <a:ext uri="{FF2B5EF4-FFF2-40B4-BE49-F238E27FC236}">
+                <a16:creationId xmlns:a16="http://schemas.microsoft.com/office/drawing/2014/main" id="{9F56818D-148F-7DD5-0B72-C665916F8DDC}"/>
+              </a:ext>
+            </a:extLst>
+          </p:cNvPr>
+          <p:cNvSpPr>
+            <a:spLocks noGrp="1"/>
+          </p:cNvSpPr>
+          <p:nvPr>
+            <p:ph idx="1"/>
+          </p:nvPr>
+        </p:nvSpPr>
+        <p:spPr>
+          <a:xfrm>
+            <a:off x="685800" y="1825624"/>
+            <a:ext cx="4446248" cy="4843531"/>
+          </a:xfrm>
+        </p:spPr>
+        <p:txBody>
+          <a:bodyPr>
+            <a:normAutofit/>
+          </a:bodyPr>
+          <a:lstStyle/>
+          <a:p>
+            <a:r>
+              <a:rPr lang="en-US" dirty="0"/>
+              <a:t>3 classes to specialize.</a:t>
+            </a:r>
+          </a:p>
+          <a:p>
+            <a:r>
+              <a:rPr lang="en-US" dirty="0"/>
+              <a:t>Straight wrappers, no error management required.</a:t>
+            </a:r>
+          </a:p>
+          <a:p>
+            <a:r>
+              <a:rPr lang="en-US" dirty="0"/>
+              <a:t>Package First</a:t>
+            </a:r>
+          </a:p>
+          <a:p>
+            <a:endParaRPr lang="en-US" dirty="0"/>
+          </a:p>
+          <a:p>
+            <a:r>
+              <a:rPr lang="en-US" dirty="0"/>
+              <a:t>Example of </a:t>
+            </a:r>
+            <a:r>
+              <a:rPr lang="en-US" dirty="0" err="1"/>
+              <a:t>TCPSocket</a:t>
+            </a:r>
+            <a:endParaRPr lang="en-US" dirty="0"/>
+          </a:p>
+          <a:p>
+            <a:pPr lvl="1"/>
+            <a:r>
+              <a:rPr lang="en-US" dirty="0" err="1"/>
+              <a:t>AddressProtocolName</a:t>
+            </a:r>
+            <a:r>
+              <a:rPr lang="en-US" dirty="0"/>
+              <a:t>: “</a:t>
+            </a:r>
+            <a:r>
+              <a:rPr lang="en-US" dirty="0" err="1"/>
+              <a:t>tcp</a:t>
+            </a:r>
+            <a:r>
+              <a:rPr lang="en-US" dirty="0"/>
+              <a:t>”</a:t>
+            </a:r>
+          </a:p>
+          <a:p>
+            <a:endParaRPr lang="en-US" dirty="0"/>
+          </a:p>
+          <a:p>
+            <a:r>
+              <a:rPr lang="en-US" dirty="0"/>
+              <a:t>Developers don’t interact with Transports layer.</a:t>
+            </a:r>
+          </a:p>
+          <a:p>
+            <a:pPr lvl="1"/>
+            <a:endParaRPr lang="en-US" dirty="0"/>
+          </a:p>
+          <a:p>
+            <a:pPr lvl="1"/>
+            <a:endParaRPr lang="en-US" dirty="0"/>
+          </a:p>
+        </p:txBody>
+      </p:sp>
+      <p:pic>
+        <p:nvPicPr>
+          <p:cNvPr id="13" name="Picture 12" descr="Diagram&#10;&#10;Description automatically generated">
+            <a:extLst>
+              <a:ext uri="{FF2B5EF4-FFF2-40B4-BE49-F238E27FC236}">
+                <a16:creationId xmlns:a16="http://schemas.microsoft.com/office/drawing/2014/main" id="{5B7E97A0-34C4-CC0C-12FC-6AFA8966FE23}"/>
+              </a:ext>
+            </a:extLst>
+          </p:cNvPr>
+          <p:cNvPicPr>
+            <a:picLocks noChangeAspect="1"/>
+          </p:cNvPicPr>
+          <p:nvPr/>
+        </p:nvPicPr>
+        <p:blipFill>
+          <a:blip r:embed="rId3">
+            <a:extLst>
+              <a:ext uri="{28A0092B-C50C-407E-A947-70E740481C1C}">
+                <a14:useLocalDpi xmlns:a14="http://schemas.microsoft.com/office/drawing/2010/main" val="0"/>
+              </a:ext>
+            </a:extLst>
+          </a:blip>
+          <a:stretch>
+            <a:fillRect/>
+          </a:stretch>
+        </p:blipFill>
+        <p:spPr>
+          <a:xfrm>
+            <a:off x="5204165" y="90854"/>
+            <a:ext cx="6812870" cy="6767146"/>
+          </a:xfrm>
+          <a:prstGeom prst="rect">
+            <a:avLst/>
+          </a:prstGeom>
+        </p:spPr>
+      </p:pic>
+    </p:spTree>
+    <p:extLst>
+      <p:ext uri="{BB962C8B-B14F-4D97-AF65-F5344CB8AC3E}">
+        <p14:creationId xmlns:p14="http://schemas.microsoft.com/office/powerpoint/2010/main" val="2227821959"/>
       </p:ext>
     </p:extLst>
   </p:cSld>

--- a/Doc/CK-AppIdentity.pptx
+++ b/Doc/CK-AppIdentity.pptx
@@ -5,7 +5,7 @@
     <p:sldMasterId id="2147483648" r:id="rId1"/>
   </p:sldMasterIdLst>
   <p:notesMasterIdLst>
-    <p:notesMasterId r:id="rId33"/>
+    <p:notesMasterId r:id="rId35"/>
   </p:notesMasterIdLst>
   <p:sldIdLst>
     <p:sldId id="256" r:id="rId2"/>
@@ -39,6 +39,8 @@
     <p:sldId id="286" r:id="rId30"/>
     <p:sldId id="287" r:id="rId31"/>
     <p:sldId id="288" r:id="rId32"/>
+    <p:sldId id="289" r:id="rId33"/>
+    <p:sldId id="290" r:id="rId34"/>
   </p:sldIdLst>
   <p:sldSz cx="12192000" cy="6858000"/>
   <p:notesSz cx="6858000" cy="9144000"/>
@@ -143,6 +145,35 @@
     </p:ext>
   </p:extLst>
 </p:presentation>
+</file>
+
+<file path=ppt/ink/ink1.xml><?xml version="1.0" encoding="utf-8"?>
+<inkml:ink xmlns:inkml="http://www.w3.org/2003/InkML">
+  <inkml:definitions>
+    <inkml:context xml:id="ctx0">
+      <inkml:inkSource xml:id="inkSrc0">
+        <inkml:traceFormat>
+          <inkml:channel name="X" type="integer" min="-2.14748E9" max="2.14748E9" units="cm"/>
+          <inkml:channel name="Y" type="integer" min="-2.14748E9" max="2.14748E9" units="cm"/>
+        </inkml:traceFormat>
+        <inkml:channelProperties>
+          <inkml:channelProperty channel="X" name="resolution" value="1000" units="1/cm"/>
+          <inkml:channelProperty channel="Y" name="resolution" value="1000" units="1/cm"/>
+        </inkml:channelProperties>
+      </inkml:inkSource>
+      <inkml:timestamp xml:id="ts0" timeString="2023-04-23T09:50:11.223"/>
+    </inkml:context>
+    <inkml:brush xml:id="br0">
+      <inkml:brushProperty name="width" value="0.3" units="cm"/>
+      <inkml:brushProperty name="height" value="0.6" units="cm"/>
+      <inkml:brushProperty name="color" value="#FFFC00"/>
+      <inkml:brushProperty name="tip" value="rectangle"/>
+      <inkml:brushProperty name="rasterOp" value="maskPen"/>
+      <inkml:brushProperty name="ignorePressure" value="1"/>
+    </inkml:brush>
+  </inkml:definitions>
+  <inkml:trace contextRef="#ctx0" brushRef="#br0">0 130,'17'-1,"0"-1,-1 0,1-1,26-9,6-1,416-47,-296 44,-101 6,-46 6,0 1,26-1,-40 4,1 1,0 0,-1 0,1 1,-1 0,1 0,-1 1,0 0,8 5,35 22,-43-23,1-1,0-1,0 0,1 0,0 0,-1-1,1-1,1 0,18 3,21-3,62-5,39 2,-103 6,48 13,-50-9,54 4,340-7,-261-9,-157 1,0-1,41-11,-4 2,-42 7,0-1,0 0,20-9,-23 8,0 1,1 0,-1 1,1 0,18-1,20 4,-29 1</inkml:trace>
+</inkml:ink>
 </file>
 
 <file path=ppt/notesMasters/notesMaster1.xml><?xml version="1.0" encoding="utf-8"?>
@@ -15627,8 +15658,8 @@
         </p:nvSpPr>
         <p:spPr>
           <a:xfrm>
-            <a:off x="685800" y="1825624"/>
-            <a:ext cx="4446248" cy="4843531"/>
+            <a:off x="685800" y="2395330"/>
+            <a:ext cx="4446248" cy="4273825"/>
           </a:xfrm>
         </p:spPr>
         <p:txBody>
@@ -15638,71 +15669,71 @@
           <a:lstStyle/>
           <a:p>
             <a:r>
-              <a:rPr lang="en-US" dirty="0"/>
+              <a:rPr lang="en-US" sz="2400" dirty="0"/>
               <a:t>3 classes to specialize.</a:t>
             </a:r>
           </a:p>
           <a:p>
             <a:r>
-              <a:rPr lang="en-US" dirty="0"/>
+              <a:rPr lang="en-US" sz="2400" dirty="0"/>
               <a:t>Straight wrappers, no error management required.</a:t>
             </a:r>
           </a:p>
           <a:p>
             <a:r>
-              <a:rPr lang="en-US" dirty="0"/>
+              <a:rPr lang="en-US" sz="2400" dirty="0"/>
               <a:t>Package First</a:t>
             </a:r>
           </a:p>
           <a:p>
-            <a:endParaRPr lang="en-US" dirty="0"/>
-          </a:p>
-          <a:p>
-            <a:r>
-              <a:rPr lang="en-US" dirty="0"/>
+            <a:endParaRPr lang="en-US" sz="2400" dirty="0"/>
+          </a:p>
+          <a:p>
+            <a:r>
+              <a:rPr lang="en-US" sz="2400" dirty="0"/>
               <a:t>Example of </a:t>
             </a:r>
             <a:r>
-              <a:rPr lang="en-US" dirty="0" err="1"/>
+              <a:rPr lang="en-US" sz="2400" dirty="0" err="1"/>
               <a:t>TCPSocket</a:t>
             </a:r>
-            <a:endParaRPr lang="en-US" dirty="0"/>
+            <a:endParaRPr lang="en-US" sz="2400" dirty="0"/>
           </a:p>
           <a:p>
             <a:pPr lvl="1"/>
             <a:r>
-              <a:rPr lang="en-US" dirty="0" err="1"/>
+              <a:rPr lang="en-US" sz="2000" dirty="0" err="1"/>
               <a:t>AddressProtocolName</a:t>
             </a:r>
             <a:r>
-              <a:rPr lang="en-US" dirty="0"/>
+              <a:rPr lang="en-US" sz="2000" dirty="0"/>
               <a:t>: “</a:t>
             </a:r>
             <a:r>
-              <a:rPr lang="en-US" dirty="0" err="1"/>
+              <a:rPr lang="en-US" sz="2000" dirty="0" err="1"/>
               <a:t>tcp</a:t>
             </a:r>
             <a:r>
-              <a:rPr lang="en-US" dirty="0"/>
+              <a:rPr lang="en-US" sz="2000" dirty="0"/>
               <a:t>”</a:t>
             </a:r>
           </a:p>
           <a:p>
-            <a:endParaRPr lang="en-US" dirty="0"/>
-          </a:p>
-          <a:p>
-            <a:r>
-              <a:rPr lang="en-US" dirty="0"/>
+            <a:endParaRPr lang="en-US" sz="2400" dirty="0"/>
+          </a:p>
+          <a:p>
+            <a:r>
+              <a:rPr lang="en-US" sz="2400" dirty="0"/>
               <a:t>Developers don’t interact with Transports layer.</a:t>
             </a:r>
           </a:p>
           <a:p>
             <a:pPr lvl="1"/>
-            <a:endParaRPr lang="en-US" dirty="0"/>
+            <a:endParaRPr lang="en-US" sz="2000" dirty="0"/>
           </a:p>
           <a:p>
             <a:pPr lvl="1"/>
-            <a:endParaRPr lang="en-US" dirty="0"/>
+            <a:endParaRPr lang="en-US" sz="2000" dirty="0"/>
           </a:p>
         </p:txBody>
       </p:sp>
@@ -15742,10 +15773,550 @@
           </a:prstGeom>
         </p:spPr>
       </p:pic>
+      <mc:AlternateContent xmlns:mc="http://schemas.openxmlformats.org/markup-compatibility/2006">
+        <mc:Choice xmlns:p14="http://schemas.microsoft.com/office/powerpoint/2010/main" Requires="p14">
+          <p:contentPart p14:bwMode="auto" r:id="rId4">
+            <p14:nvContentPartPr>
+              <p14:cNvPr id="16" name="Ink 15">
+                <a:extLst>
+                  <a:ext uri="{FF2B5EF4-FFF2-40B4-BE49-F238E27FC236}">
+                    <a16:creationId xmlns:a16="http://schemas.microsoft.com/office/drawing/2014/main" id="{50624A14-49A3-0F8D-AD90-36507C62CCDD}"/>
+                  </a:ext>
+                </a:extLst>
+              </p14:cNvPr>
+              <p14:cNvContentPartPr/>
+              <p14:nvPr/>
+            </p14:nvContentPartPr>
+            <p14:xfrm>
+              <a:off x="8249071" y="2795776"/>
+              <a:ext cx="1032840" cy="57600"/>
+            </p14:xfrm>
+          </p:contentPart>
+        </mc:Choice>
+        <mc:Fallback>
+          <p:pic>
+            <p:nvPicPr>
+              <p:cNvPr id="16" name="Ink 15">
+                <a:extLst>
+                  <a:ext uri="{FF2B5EF4-FFF2-40B4-BE49-F238E27FC236}">
+                    <a16:creationId xmlns:a16="http://schemas.microsoft.com/office/drawing/2014/main" id="{50624A14-49A3-0F8D-AD90-36507C62CCDD}"/>
+                  </a:ext>
+                </a:extLst>
+              </p:cNvPr>
+              <p:cNvPicPr/>
+              <p:nvPr/>
+            </p:nvPicPr>
+            <p:blipFill>
+              <a:blip r:embed="rId5"/>
+              <a:stretch>
+                <a:fillRect/>
+              </a:stretch>
+            </p:blipFill>
+            <p:spPr>
+              <a:xfrm>
+                <a:off x="8195071" y="2687776"/>
+                <a:ext cx="1140480" cy="273240"/>
+              </a:xfrm>
+              <a:prstGeom prst="rect">
+                <a:avLst/>
+              </a:prstGeom>
+            </p:spPr>
+          </p:pic>
+        </mc:Fallback>
+      </mc:AlternateContent>
     </p:spTree>
     <p:extLst>
       <p:ext uri="{BB962C8B-B14F-4D97-AF65-F5344CB8AC3E}">
         <p14:creationId xmlns:p14="http://schemas.microsoft.com/office/powerpoint/2010/main" val="2227821959"/>
+      </p:ext>
+    </p:extLst>
+  </p:cSld>
+  <p:clrMapOvr>
+    <a:masterClrMapping/>
+  </p:clrMapOvr>
+</p:sld>
+</file>
+
+<file path=ppt/slides/slide32.xml><?xml version="1.0" encoding="utf-8"?>
+<p:sld xmlns:a="http://schemas.openxmlformats.org/drawingml/2006/main" xmlns:r="http://schemas.openxmlformats.org/officeDocument/2006/relationships" xmlns:p="http://schemas.openxmlformats.org/presentationml/2006/main">
+  <p:cSld>
+    <p:spTree>
+      <p:nvGrpSpPr>
+        <p:cNvPr id="1" name=""/>
+        <p:cNvGrpSpPr/>
+        <p:nvPr/>
+      </p:nvGrpSpPr>
+      <p:grpSpPr>
+        <a:xfrm>
+          <a:off x="0" y="0"/>
+          <a:ext cx="0" cy="0"/>
+          <a:chOff x="0" y="0"/>
+          <a:chExt cx="0" cy="0"/>
+        </a:xfrm>
+      </p:grpSpPr>
+      <p:sp>
+        <p:nvSpPr>
+          <p:cNvPr id="2" name="Title 1">
+            <a:extLst>
+              <a:ext uri="{FF2B5EF4-FFF2-40B4-BE49-F238E27FC236}">
+                <a16:creationId xmlns:a16="http://schemas.microsoft.com/office/drawing/2014/main" id="{CE512CBA-34FC-5769-694A-E657A80519BB}"/>
+              </a:ext>
+            </a:extLst>
+          </p:cNvPr>
+          <p:cNvSpPr>
+            <a:spLocks noGrp="1"/>
+          </p:cNvSpPr>
+          <p:nvPr>
+            <p:ph type="title"/>
+          </p:nvPr>
+        </p:nvSpPr>
+        <p:spPr/>
+        <p:txBody>
+          <a:bodyPr/>
+          <a:lstStyle/>
+          <a:p>
+            <a:r>
+              <a:rPr lang="en-US" dirty="0"/>
+              <a:t>Channel Feature</a:t>
+            </a:r>
+          </a:p>
+        </p:txBody>
+      </p:sp>
+      <p:sp>
+        <p:nvSpPr>
+          <p:cNvPr id="6" name="Content Placeholder 8">
+            <a:extLst>
+              <a:ext uri="{FF2B5EF4-FFF2-40B4-BE49-F238E27FC236}">
+                <a16:creationId xmlns:a16="http://schemas.microsoft.com/office/drawing/2014/main" id="{AACCB99C-C551-6BC4-005D-BC5314B48110}"/>
+              </a:ext>
+            </a:extLst>
+          </p:cNvPr>
+          <p:cNvSpPr txBox="1">
+            <a:spLocks/>
+          </p:cNvSpPr>
+          <p:nvPr/>
+        </p:nvSpPr>
+        <p:spPr>
+          <a:xfrm>
+            <a:off x="556592" y="1890023"/>
+            <a:ext cx="5165782" cy="4421323"/>
+          </a:xfrm>
+          <a:prstGeom prst="rect">
+            <a:avLst/>
+          </a:prstGeom>
+        </p:spPr>
+        <p:txBody>
+          <a:bodyPr vert="horz" lIns="91440" tIns="45720" rIns="91440" bIns="45720" rtlCol="0">
+            <a:normAutofit/>
+          </a:bodyPr>
+          <a:lstStyle>
+            <a:lvl1pPr marL="228600" indent="-228600" algn="l" defTabSz="914400" rtl="0" eaLnBrk="1" latinLnBrk="0" hangingPunct="1">
+              <a:lnSpc>
+                <a:spcPct val="90000"/>
+              </a:lnSpc>
+              <a:spcBef>
+                <a:spcPts val="1000"/>
+              </a:spcBef>
+              <a:buFont typeface="Arial" panose="020B0604020202020204" pitchFamily="34" charset="0"/>
+              <a:buChar char="•"/>
+              <a:defRPr sz="2800" kern="1200">
+                <a:solidFill>
+                  <a:schemeClr val="tx1"/>
+                </a:solidFill>
+                <a:latin typeface="+mn-lt"/>
+                <a:ea typeface="+mn-ea"/>
+                <a:cs typeface="+mn-cs"/>
+              </a:defRPr>
+            </a:lvl1pPr>
+            <a:lvl2pPr marL="685800" indent="-228600" algn="l" defTabSz="914400" rtl="0" eaLnBrk="1" latinLnBrk="0" hangingPunct="1">
+              <a:lnSpc>
+                <a:spcPct val="90000"/>
+              </a:lnSpc>
+              <a:spcBef>
+                <a:spcPts val="500"/>
+              </a:spcBef>
+              <a:buFont typeface="Arial" panose="020B0604020202020204" pitchFamily="34" charset="0"/>
+              <a:buChar char="•"/>
+              <a:defRPr sz="2400" kern="1200">
+                <a:solidFill>
+                  <a:schemeClr val="tx1"/>
+                </a:solidFill>
+                <a:latin typeface="+mn-lt"/>
+                <a:ea typeface="+mn-ea"/>
+                <a:cs typeface="+mn-cs"/>
+              </a:defRPr>
+            </a:lvl2pPr>
+            <a:lvl3pPr marL="1143000" indent="-228600" algn="l" defTabSz="914400" rtl="0" eaLnBrk="1" latinLnBrk="0" hangingPunct="1">
+              <a:lnSpc>
+                <a:spcPct val="90000"/>
+              </a:lnSpc>
+              <a:spcBef>
+                <a:spcPts val="500"/>
+              </a:spcBef>
+              <a:buFont typeface="Arial" panose="020B0604020202020204" pitchFamily="34" charset="0"/>
+              <a:buChar char="•"/>
+              <a:defRPr sz="2000" kern="1200">
+                <a:solidFill>
+                  <a:schemeClr val="tx1"/>
+                </a:solidFill>
+                <a:latin typeface="+mn-lt"/>
+                <a:ea typeface="+mn-ea"/>
+                <a:cs typeface="+mn-cs"/>
+              </a:defRPr>
+            </a:lvl3pPr>
+            <a:lvl4pPr marL="1600200" indent="-228600" algn="l" defTabSz="914400" rtl="0" eaLnBrk="1" latinLnBrk="0" hangingPunct="1">
+              <a:lnSpc>
+                <a:spcPct val="90000"/>
+              </a:lnSpc>
+              <a:spcBef>
+                <a:spcPts val="500"/>
+              </a:spcBef>
+              <a:buFont typeface="Arial" panose="020B0604020202020204" pitchFamily="34" charset="0"/>
+              <a:buChar char="•"/>
+              <a:defRPr sz="1800" kern="1200">
+                <a:solidFill>
+                  <a:schemeClr val="tx1"/>
+                </a:solidFill>
+                <a:latin typeface="+mn-lt"/>
+                <a:ea typeface="+mn-ea"/>
+                <a:cs typeface="+mn-cs"/>
+              </a:defRPr>
+            </a:lvl4pPr>
+            <a:lvl5pPr marL="2057400" indent="-228600" algn="l" defTabSz="914400" rtl="0" eaLnBrk="1" latinLnBrk="0" hangingPunct="1">
+              <a:lnSpc>
+                <a:spcPct val="90000"/>
+              </a:lnSpc>
+              <a:spcBef>
+                <a:spcPts val="500"/>
+              </a:spcBef>
+              <a:buFont typeface="Arial" panose="020B0604020202020204" pitchFamily="34" charset="0"/>
+              <a:buChar char="•"/>
+              <a:defRPr sz="1800" kern="1200">
+                <a:solidFill>
+                  <a:schemeClr val="tx1"/>
+                </a:solidFill>
+                <a:latin typeface="+mn-lt"/>
+                <a:ea typeface="+mn-ea"/>
+                <a:cs typeface="+mn-cs"/>
+              </a:defRPr>
+            </a:lvl5pPr>
+            <a:lvl6pPr marL="2514600" indent="-228600" algn="l" defTabSz="914400" rtl="0" eaLnBrk="1" latinLnBrk="0" hangingPunct="1">
+              <a:lnSpc>
+                <a:spcPct val="90000"/>
+              </a:lnSpc>
+              <a:spcBef>
+                <a:spcPts val="500"/>
+              </a:spcBef>
+              <a:buFont typeface="Arial" panose="020B0604020202020204" pitchFamily="34" charset="0"/>
+              <a:buChar char="•"/>
+              <a:defRPr sz="1800" kern="1200">
+                <a:solidFill>
+                  <a:schemeClr val="tx1"/>
+                </a:solidFill>
+                <a:latin typeface="+mn-lt"/>
+                <a:ea typeface="+mn-ea"/>
+                <a:cs typeface="+mn-cs"/>
+              </a:defRPr>
+            </a:lvl6pPr>
+            <a:lvl7pPr marL="2971800" indent="-228600" algn="l" defTabSz="914400" rtl="0" eaLnBrk="1" latinLnBrk="0" hangingPunct="1">
+              <a:lnSpc>
+                <a:spcPct val="90000"/>
+              </a:lnSpc>
+              <a:spcBef>
+                <a:spcPts val="500"/>
+              </a:spcBef>
+              <a:buFont typeface="Arial" panose="020B0604020202020204" pitchFamily="34" charset="0"/>
+              <a:buChar char="•"/>
+              <a:defRPr sz="1800" kern="1200">
+                <a:solidFill>
+                  <a:schemeClr val="tx1"/>
+                </a:solidFill>
+                <a:latin typeface="+mn-lt"/>
+                <a:ea typeface="+mn-ea"/>
+                <a:cs typeface="+mn-cs"/>
+              </a:defRPr>
+            </a:lvl7pPr>
+            <a:lvl8pPr marL="3429000" indent="-228600" algn="l" defTabSz="914400" rtl="0" eaLnBrk="1" latinLnBrk="0" hangingPunct="1">
+              <a:lnSpc>
+                <a:spcPct val="90000"/>
+              </a:lnSpc>
+              <a:spcBef>
+                <a:spcPts val="500"/>
+              </a:spcBef>
+              <a:buFont typeface="Arial" panose="020B0604020202020204" pitchFamily="34" charset="0"/>
+              <a:buChar char="•"/>
+              <a:defRPr sz="1800" kern="1200">
+                <a:solidFill>
+                  <a:schemeClr val="tx1"/>
+                </a:solidFill>
+                <a:latin typeface="+mn-lt"/>
+                <a:ea typeface="+mn-ea"/>
+                <a:cs typeface="+mn-cs"/>
+              </a:defRPr>
+            </a:lvl8pPr>
+            <a:lvl9pPr marL="3886200" indent="-228600" algn="l" defTabSz="914400" rtl="0" eaLnBrk="1" latinLnBrk="0" hangingPunct="1">
+              <a:lnSpc>
+                <a:spcPct val="90000"/>
+              </a:lnSpc>
+              <a:spcBef>
+                <a:spcPts val="500"/>
+              </a:spcBef>
+              <a:buFont typeface="Arial" panose="020B0604020202020204" pitchFamily="34" charset="0"/>
+              <a:buChar char="•"/>
+              <a:defRPr sz="1800" kern="1200">
+                <a:solidFill>
+                  <a:schemeClr val="tx1"/>
+                </a:solidFill>
+                <a:latin typeface="+mn-lt"/>
+                <a:ea typeface="+mn-ea"/>
+                <a:cs typeface="+mn-cs"/>
+              </a:defRPr>
+            </a:lvl9pPr>
+          </a:lstStyle>
+          <a:p>
+            <a:r>
+              <a:rPr lang="en-US" sz="2400" dirty="0"/>
+              <a:t>3 classes to specialize.</a:t>
+            </a:r>
+          </a:p>
+          <a:p>
+            <a:pPr lvl="1"/>
+            <a:r>
+              <a:rPr lang="en-US" sz="2000" dirty="0"/>
+              <a:t>3 abstract methods.</a:t>
+            </a:r>
+          </a:p>
+          <a:p>
+            <a:pPr lvl="1"/>
+            <a:endParaRPr lang="en-US" sz="2000" dirty="0"/>
+          </a:p>
+          <a:p>
+            <a:r>
+              <a:rPr lang="en-US" sz="2400" dirty="0"/>
+              <a:t>Protocols can optionally be versioned.</a:t>
+            </a:r>
+          </a:p>
+          <a:p>
+            <a:pPr lvl="1"/>
+            <a:r>
+              <a:rPr lang="en-US" sz="2000" dirty="0"/>
+              <a:t>Negotiation is automatic.</a:t>
+            </a:r>
+          </a:p>
+          <a:p>
+            <a:pPr lvl="1"/>
+            <a:endParaRPr lang="en-US" sz="2000" dirty="0"/>
+          </a:p>
+          <a:p>
+            <a:r>
+              <a:rPr lang="en-US" sz="2400" dirty="0"/>
+              <a:t>Driver’s type name must be suffixed by  "</a:t>
+            </a:r>
+            <a:r>
+              <a:rPr lang="en-US" sz="2400" dirty="0" err="1"/>
+              <a:t>ChannelFeatureDriver</a:t>
+            </a:r>
+            <a:r>
+              <a:rPr lang="en-US" sz="2400" dirty="0"/>
+              <a:t>“.</a:t>
+            </a:r>
+          </a:p>
+        </p:txBody>
+      </p:sp>
+      <p:pic>
+        <p:nvPicPr>
+          <p:cNvPr id="10" name="Content Placeholder 9" descr="Diagram">
+            <a:extLst>
+              <a:ext uri="{FF2B5EF4-FFF2-40B4-BE49-F238E27FC236}">
+                <a16:creationId xmlns:a16="http://schemas.microsoft.com/office/drawing/2014/main" id="{B9505869-E6FE-3131-7CB2-E37EF0D5904B}"/>
+              </a:ext>
+            </a:extLst>
+          </p:cNvPr>
+          <p:cNvPicPr>
+            <a:picLocks noGrp="1" noChangeAspect="1"/>
+          </p:cNvPicPr>
+          <p:nvPr>
+            <p:ph idx="1"/>
+          </p:nvPr>
+        </p:nvPicPr>
+        <p:blipFill>
+          <a:blip r:embed="rId2">
+            <a:extLst>
+              <a:ext uri="{28A0092B-C50C-407E-A947-70E740481C1C}">
+                <a14:useLocalDpi xmlns:a14="http://schemas.microsoft.com/office/drawing/2010/main" val="0"/>
+              </a:ext>
+            </a:extLst>
+          </a:blip>
+          <a:stretch>
+            <a:fillRect/>
+          </a:stretch>
+        </p:blipFill>
+        <p:spPr>
+          <a:xfrm>
+            <a:off x="5808322" y="75482"/>
+            <a:ext cx="6302438" cy="5410917"/>
+          </a:xfrm>
+        </p:spPr>
+      </p:pic>
+    </p:spTree>
+    <p:extLst>
+      <p:ext uri="{BB962C8B-B14F-4D97-AF65-F5344CB8AC3E}">
+        <p14:creationId xmlns:p14="http://schemas.microsoft.com/office/powerpoint/2010/main" val="1174634535"/>
+      </p:ext>
+    </p:extLst>
+  </p:cSld>
+  <p:clrMapOvr>
+    <a:masterClrMapping/>
+  </p:clrMapOvr>
+</p:sld>
+</file>
+
+<file path=ppt/slides/slide33.xml><?xml version="1.0" encoding="utf-8"?>
+<p:sld xmlns:a="http://schemas.openxmlformats.org/drawingml/2006/main" xmlns:r="http://schemas.openxmlformats.org/officeDocument/2006/relationships" xmlns:p="http://schemas.openxmlformats.org/presentationml/2006/main">
+  <p:cSld>
+    <p:spTree>
+      <p:nvGrpSpPr>
+        <p:cNvPr id="1" name=""/>
+        <p:cNvGrpSpPr/>
+        <p:nvPr/>
+      </p:nvGrpSpPr>
+      <p:grpSpPr>
+        <a:xfrm>
+          <a:off x="0" y="0"/>
+          <a:ext cx="0" cy="0"/>
+          <a:chOff x="0" y="0"/>
+          <a:chExt cx="0" cy="0"/>
+        </a:xfrm>
+      </p:grpSpPr>
+      <p:sp>
+        <p:nvSpPr>
+          <p:cNvPr id="2" name="Title 1">
+            <a:extLst>
+              <a:ext uri="{FF2B5EF4-FFF2-40B4-BE49-F238E27FC236}">
+                <a16:creationId xmlns:a16="http://schemas.microsoft.com/office/drawing/2014/main" id="{B0ABD18F-1304-001E-4845-8CF4F7B6EF38}"/>
+              </a:ext>
+            </a:extLst>
+          </p:cNvPr>
+          <p:cNvSpPr>
+            <a:spLocks noGrp="1"/>
+          </p:cNvSpPr>
+          <p:nvPr>
+            <p:ph type="title"/>
+          </p:nvPr>
+        </p:nvSpPr>
+        <p:spPr/>
+        <p:txBody>
+          <a:bodyPr/>
+          <a:lstStyle/>
+          <a:p>
+            <a:r>
+              <a:rPr lang="en-US" dirty="0"/>
+              <a:t>The </a:t>
+            </a:r>
+            <a:r>
+              <a:rPr lang="en-US" dirty="0" err="1"/>
+              <a:t>BlobChannel</a:t>
+            </a:r>
+            <a:endParaRPr lang="en-US" dirty="0"/>
+          </a:p>
+        </p:txBody>
+      </p:sp>
+      <p:sp>
+        <p:nvSpPr>
+          <p:cNvPr id="3" name="Content Placeholder 2">
+            <a:extLst>
+              <a:ext uri="{FF2B5EF4-FFF2-40B4-BE49-F238E27FC236}">
+                <a16:creationId xmlns:a16="http://schemas.microsoft.com/office/drawing/2014/main" id="{455CEFAF-0B14-02E7-656C-CF64B5F5FAD6}"/>
+              </a:ext>
+            </a:extLst>
+          </p:cNvPr>
+          <p:cNvSpPr>
+            <a:spLocks noGrp="1"/>
+          </p:cNvSpPr>
+          <p:nvPr>
+            <p:ph idx="1"/>
+          </p:nvPr>
+        </p:nvSpPr>
+        <p:spPr/>
+        <p:txBody>
+          <a:bodyPr/>
+          <a:lstStyle/>
+          <a:p>
+            <a:r>
+              <a:rPr lang="en-US" dirty="0"/>
+              <a:t>Using a Channel</a:t>
+            </a:r>
+          </a:p>
+          <a:p>
+            <a:pPr lvl="1"/>
+            <a:endParaRPr lang="en-US" dirty="0"/>
+          </a:p>
+          <a:p>
+            <a:r>
+              <a:rPr lang="en-US" dirty="0"/>
+              <a:t>The </a:t>
+            </a:r>
+            <a:r>
+              <a:rPr lang="en-US" dirty="0" err="1"/>
+              <a:t>BlobChannel</a:t>
+            </a:r>
+            <a:r>
+              <a:rPr lang="en-US" dirty="0"/>
+              <a:t> implementation</a:t>
+            </a:r>
+          </a:p>
+          <a:p>
+            <a:pPr lvl="1"/>
+            <a:endParaRPr lang="en-US" dirty="0"/>
+          </a:p>
+          <a:p>
+            <a:pPr lvl="1"/>
+            <a:endParaRPr lang="en-US"/>
+          </a:p>
+          <a:p>
+            <a:pPr lvl="1"/>
+            <a:endParaRPr lang="en-US" dirty="0"/>
+          </a:p>
+          <a:p>
+            <a:pPr lvl="1"/>
+            <a:endParaRPr lang="en-US" dirty="0"/>
+          </a:p>
+        </p:txBody>
+      </p:sp>
+      <p:pic>
+        <p:nvPicPr>
+          <p:cNvPr id="5" name="Picture 4">
+            <a:extLst>
+              <a:ext uri="{FF2B5EF4-FFF2-40B4-BE49-F238E27FC236}">
+                <a16:creationId xmlns:a16="http://schemas.microsoft.com/office/drawing/2014/main" id="{A8774651-B1CD-A9F7-EE21-593DAEFC4867}"/>
+              </a:ext>
+            </a:extLst>
+          </p:cNvPr>
+          <p:cNvPicPr>
+            <a:picLocks noChangeAspect="1"/>
+          </p:cNvPicPr>
+          <p:nvPr/>
+        </p:nvPicPr>
+        <p:blipFill>
+          <a:blip r:embed="rId2"/>
+          <a:stretch>
+            <a:fillRect/>
+          </a:stretch>
+        </p:blipFill>
+        <p:spPr>
+          <a:xfrm>
+            <a:off x="8472018" y="2943570"/>
+            <a:ext cx="3276987" cy="1324262"/>
+          </a:xfrm>
+          <a:prstGeom prst="rect">
+            <a:avLst/>
+          </a:prstGeom>
+        </p:spPr>
+      </p:pic>
+    </p:spTree>
+    <p:extLst>
+      <p:ext uri="{BB962C8B-B14F-4D97-AF65-F5344CB8AC3E}">
+        <p14:creationId xmlns:p14="http://schemas.microsoft.com/office/powerpoint/2010/main" val="1987487120"/>
       </p:ext>
     </p:extLst>
   </p:cSld>

--- a/Doc/CK-AppIdentity.pptx
+++ b/Doc/CK-AppIdentity.pptx
@@ -16244,34 +16244,110 @@
           <a:p>
             <a:r>
               <a:rPr lang="en-US" dirty="0"/>
+              <a:t>The </a:t>
+            </a:r>
+            <a:r>
+              <a:rPr lang="en-US" dirty="0" err="1"/>
+              <a:t>BlobChannel</a:t>
+            </a:r>
+            <a:r>
+              <a:rPr lang="en-US" dirty="0"/>
+              <a:t> is more a sample than a useful channel.</a:t>
+            </a:r>
+            <a:br>
+              <a:rPr lang="en-US" dirty="0"/>
+            </a:br>
+            <a:endParaRPr lang="en-US" dirty="0"/>
+          </a:p>
+          <a:p>
+            <a:r>
+              <a:rPr lang="en-US" dirty="0"/>
               <a:t>Using a Channel</a:t>
             </a:r>
+          </a:p>
+          <a:p>
+            <a:pPr lvl="1"/>
+            <a:r>
+              <a:rPr lang="en-US" dirty="0" err="1">
+                <a:hlinkClick r:id="rId2"/>
+              </a:rPr>
+              <a:t>CK.AppIdentity.BlobChannel.Tests</a:t>
+            </a:r>
+            <a:r>
+              <a:rPr lang="en-US" dirty="0">
+                <a:hlinkClick r:id="rId2"/>
+              </a:rPr>
+              <a:t>/</a:t>
+            </a:r>
+            <a:r>
+              <a:rPr lang="en-US" dirty="0" err="1">
+                <a:hlinkClick r:id="rId2"/>
+              </a:rPr>
+              <a:t>BasicExchangeTests</a:t>
+            </a:r>
+            <a:r>
+              <a:rPr lang="en-US" dirty="0"/>
+              <a:t> </a:t>
+            </a:r>
+          </a:p>
+          <a:p>
+            <a:endParaRPr lang="en-US" dirty="0"/>
+          </a:p>
+          <a:p>
+            <a:r>
+              <a:rPr lang="en-US" dirty="0"/>
+              <a:t>The </a:t>
+            </a:r>
+            <a:r>
+              <a:rPr lang="en-US" dirty="0" err="1"/>
+              <a:t>CK.AppIdentity.BlobChannel</a:t>
+            </a:r>
+            <a:r>
+              <a:rPr lang="en-US" dirty="0"/>
+              <a:t> implementation</a:t>
+            </a:r>
+          </a:p>
+          <a:p>
+            <a:pPr lvl="1"/>
+            <a:r>
+              <a:rPr lang="en-US" dirty="0" err="1">
+                <a:hlinkClick r:id="rId3"/>
+              </a:rPr>
+              <a:t>BlobChannelFeatureDriver.cs</a:t>
+            </a:r>
+            <a:endParaRPr lang="en-US" dirty="0"/>
+          </a:p>
+          <a:p>
+            <a:pPr lvl="1"/>
+            <a:r>
+              <a:rPr lang="en-US" dirty="0" err="1">
+                <a:hlinkClick r:id="rId4"/>
+              </a:rPr>
+              <a:t>BlobChannelFeature.cs</a:t>
+            </a:r>
+            <a:endParaRPr lang="en-US" dirty="0"/>
+          </a:p>
+          <a:p>
+            <a:pPr lvl="1"/>
+            <a:r>
+              <a:rPr lang="en-US" dirty="0" err="1">
+                <a:hlinkClick r:id="rId5"/>
+              </a:rPr>
+              <a:t>BlobChannelFeature.Protocol.cs</a:t>
+            </a:r>
+            <a:endParaRPr lang="en-US" dirty="0"/>
           </a:p>
           <a:p>
             <a:pPr lvl="1"/>
             <a:endParaRPr lang="en-US" dirty="0"/>
           </a:p>
           <a:p>
-            <a:r>
-              <a:rPr lang="en-US" dirty="0"/>
-              <a:t>The </a:t>
-            </a:r>
-            <a:r>
-              <a:rPr lang="en-US" dirty="0" err="1"/>
-              <a:t>BlobChannel</a:t>
-            </a:r>
-            <a:r>
-              <a:rPr lang="en-US" dirty="0"/>
-              <a:t> implementation</a:t>
-            </a:r>
-          </a:p>
-          <a:p>
             <a:pPr lvl="1"/>
             <a:endParaRPr lang="en-US" dirty="0"/>
           </a:p>
           <a:p>
             <a:pPr lvl="1"/>
-            <a:endParaRPr lang="en-US"/>
+            <a:endParaRPr lang="en-US" dirty="0"/>
           </a:p>
           <a:p>
             <a:pPr lvl="1"/>
@@ -16298,14 +16374,14 @@
           <p:nvPr/>
         </p:nvPicPr>
         <p:blipFill>
-          <a:blip r:embed="rId2"/>
+          <a:blip r:embed="rId6"/>
           <a:stretch>
             <a:fillRect/>
           </a:stretch>
         </p:blipFill>
         <p:spPr>
           <a:xfrm>
-            <a:off x="8472018" y="2943570"/>
+            <a:off x="8442522" y="4391215"/>
             <a:ext cx="3276987" cy="1324262"/>
           </a:xfrm>
           <a:prstGeom prst="rect">

--- a/Doc/CK-AppIdentity.pptx
+++ b/Doc/CK-AppIdentity.pptx
@@ -5,7 +5,7 @@
     <p:sldMasterId id="2147483648" r:id="rId1"/>
   </p:sldMasterIdLst>
   <p:notesMasterIdLst>
-    <p:notesMasterId r:id="rId35"/>
+    <p:notesMasterId r:id="rId38"/>
   </p:notesMasterIdLst>
   <p:sldIdLst>
     <p:sldId id="256" r:id="rId2"/>
@@ -41,6 +41,9 @@
     <p:sldId id="288" r:id="rId32"/>
     <p:sldId id="289" r:id="rId33"/>
     <p:sldId id="290" r:id="rId34"/>
+    <p:sldId id="291" r:id="rId35"/>
+    <p:sldId id="292" r:id="rId36"/>
+    <p:sldId id="293" r:id="rId37"/>
   </p:sldIdLst>
   <p:sldSz cx="12192000" cy="6858000"/>
   <p:notesSz cx="6858000" cy="9144000"/>
@@ -258,7 +261,7 @@
           <a:p>
             <a:fld id="{7EBA75D8-A9A5-4FAF-B563-7A079B630A7E}" type="datetimeFigureOut">
               <a:rPr lang="en-US" smtClean="0"/>
-              <a:t>4/22/2023</a:t>
+              <a:t>4/24/2023</a:t>
             </a:fld>
             <a:endParaRPr lang="en-US"/>
           </a:p>
@@ -2044,7 +2047,7 @@
           <a:p>
             <a:fld id="{7D1F2140-8D48-49AC-AD8D-683E6FF4DC34}" type="datetimeFigureOut">
               <a:rPr lang="en-US" smtClean="0"/>
-              <a:t>4/22/2023</a:t>
+              <a:t>4/24/2023</a:t>
             </a:fld>
             <a:endParaRPr lang="en-US"/>
           </a:p>
@@ -2242,7 +2245,7 @@
           <a:p>
             <a:fld id="{7D1F2140-8D48-49AC-AD8D-683E6FF4DC34}" type="datetimeFigureOut">
               <a:rPr lang="en-US" smtClean="0"/>
-              <a:t>4/22/2023</a:t>
+              <a:t>4/24/2023</a:t>
             </a:fld>
             <a:endParaRPr lang="en-US"/>
           </a:p>
@@ -2450,7 +2453,7 @@
           <a:p>
             <a:fld id="{7D1F2140-8D48-49AC-AD8D-683E6FF4DC34}" type="datetimeFigureOut">
               <a:rPr lang="en-US" smtClean="0"/>
-              <a:t>4/22/2023</a:t>
+              <a:t>4/24/2023</a:t>
             </a:fld>
             <a:endParaRPr lang="en-US"/>
           </a:p>
@@ -2648,7 +2651,7 @@
           <a:p>
             <a:fld id="{7D1F2140-8D48-49AC-AD8D-683E6FF4DC34}" type="datetimeFigureOut">
               <a:rPr lang="en-US" smtClean="0"/>
-              <a:t>4/22/2023</a:t>
+              <a:t>4/24/2023</a:t>
             </a:fld>
             <a:endParaRPr lang="en-US"/>
           </a:p>
@@ -2923,7 +2926,7 @@
           <a:p>
             <a:fld id="{7D1F2140-8D48-49AC-AD8D-683E6FF4DC34}" type="datetimeFigureOut">
               <a:rPr lang="en-US" smtClean="0"/>
-              <a:t>4/22/2023</a:t>
+              <a:t>4/24/2023</a:t>
             </a:fld>
             <a:endParaRPr lang="en-US"/>
           </a:p>
@@ -3188,7 +3191,7 @@
           <a:p>
             <a:fld id="{7D1F2140-8D48-49AC-AD8D-683E6FF4DC34}" type="datetimeFigureOut">
               <a:rPr lang="en-US" smtClean="0"/>
-              <a:t>4/22/2023</a:t>
+              <a:t>4/24/2023</a:t>
             </a:fld>
             <a:endParaRPr lang="en-US"/>
           </a:p>
@@ -3600,7 +3603,7 @@
           <a:p>
             <a:fld id="{7D1F2140-8D48-49AC-AD8D-683E6FF4DC34}" type="datetimeFigureOut">
               <a:rPr lang="en-US" smtClean="0"/>
-              <a:t>4/22/2023</a:t>
+              <a:t>4/24/2023</a:t>
             </a:fld>
             <a:endParaRPr lang="en-US"/>
           </a:p>
@@ -3741,7 +3744,7 @@
           <a:p>
             <a:fld id="{7D1F2140-8D48-49AC-AD8D-683E6FF4DC34}" type="datetimeFigureOut">
               <a:rPr lang="en-US" smtClean="0"/>
-              <a:t>4/22/2023</a:t>
+              <a:t>4/24/2023</a:t>
             </a:fld>
             <a:endParaRPr lang="en-US"/>
           </a:p>
@@ -3854,7 +3857,7 @@
           <a:p>
             <a:fld id="{7D1F2140-8D48-49AC-AD8D-683E6FF4DC34}" type="datetimeFigureOut">
               <a:rPr lang="en-US" smtClean="0"/>
-              <a:t>4/22/2023</a:t>
+              <a:t>4/24/2023</a:t>
             </a:fld>
             <a:endParaRPr lang="en-US"/>
           </a:p>
@@ -4165,7 +4168,7 @@
           <a:p>
             <a:fld id="{7D1F2140-8D48-49AC-AD8D-683E6FF4DC34}" type="datetimeFigureOut">
               <a:rPr lang="en-US" smtClean="0"/>
-              <a:t>4/22/2023</a:t>
+              <a:t>4/24/2023</a:t>
             </a:fld>
             <a:endParaRPr lang="en-US"/>
           </a:p>
@@ -4453,7 +4456,7 @@
           <a:p>
             <a:fld id="{7D1F2140-8D48-49AC-AD8D-683E6FF4DC34}" type="datetimeFigureOut">
               <a:rPr lang="en-US" smtClean="0"/>
-              <a:t>4/22/2023</a:t>
+              <a:t>4/24/2023</a:t>
             </a:fld>
             <a:endParaRPr lang="en-US"/>
           </a:p>
@@ -4694,7 +4697,7 @@
           <a:p>
             <a:fld id="{7D1F2140-8D48-49AC-AD8D-683E6FF4DC34}" type="datetimeFigureOut">
               <a:rPr lang="en-US" smtClean="0"/>
-              <a:t>4/22/2023</a:t>
+              <a:t>4/24/2023</a:t>
             </a:fld>
             <a:endParaRPr lang="en-US"/>
           </a:p>
@@ -13200,7 +13203,7 @@
           <a:p>
             <a:r>
               <a:rPr lang="en-US" dirty="0"/>
-              <a:t>Opt-in feature: available by default on all Remotes that are not in the domain “Undefined”</a:t>
+              <a:t>Opt-out feature: available by default on all Remotes that are not in the domain “Undefined”</a:t>
             </a:r>
           </a:p>
           <a:p>
@@ -15773,8 +15776,8 @@
           </a:prstGeom>
         </p:spPr>
       </p:pic>
-      <mc:AlternateContent xmlns:mc="http://schemas.openxmlformats.org/markup-compatibility/2006">
-        <mc:Choice xmlns:p14="http://schemas.microsoft.com/office/powerpoint/2010/main" Requires="p14">
+      <mc:AlternateContent xmlns:mc="http://schemas.openxmlformats.org/markup-compatibility/2006" xmlns:p14="http://schemas.microsoft.com/office/powerpoint/2010/main">
+        <mc:Choice Requires="p14">
           <p:contentPart p14:bwMode="auto" r:id="rId4">
             <p14:nvContentPartPr>
               <p14:cNvPr id="16" name="Ink 15">
@@ -15793,7 +15796,7 @@
             </p14:xfrm>
           </p:contentPart>
         </mc:Choice>
-        <mc:Fallback>
+        <mc:Fallback xmlns="">
           <p:pic>
             <p:nvPicPr>
               <p:cNvPr id="16" name="Ink 15">
@@ -16393,6 +16396,981 @@
     <p:extLst>
       <p:ext uri="{BB962C8B-B14F-4D97-AF65-F5344CB8AC3E}">
         <p14:creationId xmlns:p14="http://schemas.microsoft.com/office/powerpoint/2010/main" val="1987487120"/>
+      </p:ext>
+    </p:extLst>
+  </p:cSld>
+  <p:clrMapOvr>
+    <a:masterClrMapping/>
+  </p:clrMapOvr>
+</p:sld>
+</file>
+
+<file path=ppt/slides/slide34.xml><?xml version="1.0" encoding="utf-8"?>
+<p:sld xmlns:a="http://schemas.openxmlformats.org/drawingml/2006/main" xmlns:r="http://schemas.openxmlformats.org/officeDocument/2006/relationships" xmlns:p="http://schemas.openxmlformats.org/presentationml/2006/main">
+  <p:cSld>
+    <p:spTree>
+      <p:nvGrpSpPr>
+        <p:cNvPr id="1" name=""/>
+        <p:cNvGrpSpPr/>
+        <p:nvPr/>
+      </p:nvGrpSpPr>
+      <p:grpSpPr>
+        <a:xfrm>
+          <a:off x="0" y="0"/>
+          <a:ext cx="0" cy="0"/>
+          <a:chOff x="0" y="0"/>
+          <a:chExt cx="0" cy="0"/>
+        </a:xfrm>
+      </p:grpSpPr>
+      <p:sp>
+        <p:nvSpPr>
+          <p:cNvPr id="2" name="Title 1">
+            <a:extLst>
+              <a:ext uri="{FF2B5EF4-FFF2-40B4-BE49-F238E27FC236}">
+                <a16:creationId xmlns:a16="http://schemas.microsoft.com/office/drawing/2014/main" id="{96430CD7-8283-9031-1738-32DC1DF85B7B}"/>
+              </a:ext>
+            </a:extLst>
+          </p:cNvPr>
+          <p:cNvSpPr>
+            <a:spLocks noGrp="1"/>
+          </p:cNvSpPr>
+          <p:nvPr>
+            <p:ph type="title"/>
+          </p:nvPr>
+        </p:nvSpPr>
+        <p:spPr/>
+        <p:txBody>
+          <a:bodyPr/>
+          <a:lstStyle/>
+          <a:p>
+            <a:r>
+              <a:rPr lang="en-US" dirty="0"/>
+              <a:t>Roadmap</a:t>
+            </a:r>
+          </a:p>
+        </p:txBody>
+      </p:sp>
+      <p:sp>
+        <p:nvSpPr>
+          <p:cNvPr id="3" name="Content Placeholder 2">
+            <a:extLst>
+              <a:ext uri="{FF2B5EF4-FFF2-40B4-BE49-F238E27FC236}">
+                <a16:creationId xmlns:a16="http://schemas.microsoft.com/office/drawing/2014/main" id="{CE6F859C-4726-43EF-F0A8-B73939B70279}"/>
+              </a:ext>
+            </a:extLst>
+          </p:cNvPr>
+          <p:cNvSpPr>
+            <a:spLocks noGrp="1"/>
+          </p:cNvSpPr>
+          <p:nvPr>
+            <p:ph idx="1"/>
+          </p:nvPr>
+        </p:nvSpPr>
+        <p:spPr/>
+        <p:txBody>
+          <a:bodyPr>
+            <a:normAutofit fontScale="62500" lnSpcReduction="20000"/>
+          </a:bodyPr>
+          <a:lstStyle/>
+          <a:p>
+            <a:r>
+              <a:rPr lang="en-US" dirty="0" err="1"/>
+              <a:t>Cris</a:t>
+            </a:r>
+            <a:r>
+              <a:rPr lang="en-US" dirty="0"/>
+              <a:t> feature (next slide).</a:t>
+            </a:r>
+          </a:p>
+          <a:p>
+            <a:r>
+              <a:rPr lang="en-US" dirty="0"/>
+              <a:t>Enlistment of new Parties: </a:t>
+            </a:r>
+            <a:r>
+              <a:rPr lang="en-US" dirty="0" err="1"/>
+              <a:t>AcceptUri</a:t>
+            </a:r>
+            <a:r>
+              <a:rPr lang="en-US" dirty="0"/>
+              <a:t> &amp; </a:t>
+            </a:r>
+            <a:r>
+              <a:rPr lang="en-US" dirty="0" err="1"/>
+              <a:t>UnknownRemote</a:t>
+            </a:r>
+            <a:endParaRPr lang="en-US" dirty="0"/>
+          </a:p>
+          <a:p>
+            <a:r>
+              <a:rPr lang="en-US" dirty="0"/>
+              <a:t>Poco store (</a:t>
+            </a:r>
+            <a:r>
+              <a:rPr lang="en-US" dirty="0">
+                <a:hlinkClick r:id="rId2"/>
+              </a:rPr>
+              <a:t>https://github.com/microsoft/FASTER</a:t>
+            </a:r>
+            <a:r>
+              <a:rPr lang="en-US" dirty="0"/>
+              <a:t>)</a:t>
+            </a:r>
+          </a:p>
+          <a:p>
+            <a:pPr lvl="1"/>
+            <a:r>
+              <a:rPr lang="en-US" dirty="0"/>
+              <a:t>KV or Log?</a:t>
+            </a:r>
+          </a:p>
+          <a:p>
+            <a:pPr lvl="1"/>
+            <a:r>
+              <a:rPr lang="en-US" dirty="0"/>
+              <a:t>For the moment, we can live with a in-memory only store.</a:t>
+            </a:r>
+          </a:p>
+          <a:p>
+            <a:r>
+              <a:rPr lang="en-US" dirty="0"/>
+              <a:t>“X509Store” (</a:t>
+            </a:r>
+            <a:r>
+              <a:rPr lang="en-US" dirty="0" err="1"/>
+              <a:t>.Net</a:t>
+            </a:r>
+            <a:r>
+              <a:rPr lang="en-US" dirty="0"/>
+              <a:t> core or not?)</a:t>
+            </a:r>
+          </a:p>
+          <a:p>
+            <a:pPr lvl="1"/>
+            <a:r>
+              <a:rPr lang="en-US" dirty="0"/>
+              <a:t>First step</a:t>
+            </a:r>
+          </a:p>
+          <a:p>
+            <a:pPr lvl="2"/>
+            <a:r>
+              <a:rPr lang="en-US" dirty="0"/>
+              <a:t>The primary signing certificate that identifies the party.</a:t>
+            </a:r>
+          </a:p>
+          <a:p>
+            <a:pPr lvl="2"/>
+            <a:r>
+              <a:rPr lang="en-US" dirty="0"/>
+              <a:t>Rolling it (or not?)</a:t>
+            </a:r>
+          </a:p>
+          <a:p>
+            <a:pPr lvl="1"/>
+            <a:r>
+              <a:rPr lang="en-US" dirty="0"/>
+              <a:t>Other certificates</a:t>
+            </a:r>
+          </a:p>
+          <a:p>
+            <a:pPr lvl="2"/>
+            <a:r>
+              <a:rPr lang="en-US" dirty="0"/>
+              <a:t>Name for them?</a:t>
+            </a:r>
+          </a:p>
+          <a:p>
+            <a:pPr lvl="2"/>
+            <a:r>
+              <a:rPr lang="en-US" dirty="0"/>
+              <a:t>Rolling?</a:t>
+            </a:r>
+          </a:p>
+          <a:p>
+            <a:pPr lvl="2"/>
+            <a:r>
+              <a:rPr lang="en-US" dirty="0"/>
+              <a:t>Orchard use the X509Store only for its primary certificate, others are on disk, optionally protected by a password.</a:t>
+            </a:r>
+          </a:p>
+          <a:p>
+            <a:pPr marL="914400" lvl="2" indent="0">
+              <a:buNone/>
+            </a:pPr>
+            <a:r>
+              <a:rPr lang="en-US" dirty="0">
+                <a:hlinkClick r:id="rId3"/>
+              </a:rPr>
+              <a:t>https://github.com/OrchardCMS/OrchardCore/blob/main/src/OrchardCore.Modules/OrchardCore.OpenId/Services/OpenIdServerService.cs</a:t>
+            </a:r>
+            <a:endParaRPr lang="en-US" dirty="0"/>
+          </a:p>
+          <a:p>
+            <a:pPr lvl="1"/>
+            <a:r>
+              <a:rPr lang="en-US" dirty="0"/>
+              <a:t>How to generate TSL compliant certificates?</a:t>
+            </a:r>
+          </a:p>
+          <a:p>
+            <a:r>
+              <a:rPr lang="en-US" dirty="0"/>
+              <a:t>Provide a way to monitor the </a:t>
+            </a:r>
+            <a:r>
+              <a:rPr lang="en-US" dirty="0" err="1"/>
+              <a:t>TransportMessage</a:t>
+            </a:r>
+            <a:r>
+              <a:rPr lang="en-US" dirty="0"/>
+              <a:t> Retain/Dispose errors </a:t>
+            </a:r>
+          </a:p>
+          <a:p>
+            <a:pPr lvl="1"/>
+            <a:r>
+              <a:rPr lang="en-US" dirty="0"/>
+              <a:t>Because ref counting sucks</a:t>
+            </a:r>
+          </a:p>
+          <a:p>
+            <a:endParaRPr lang="en-US" dirty="0"/>
+          </a:p>
+        </p:txBody>
+      </p:sp>
+    </p:spTree>
+    <p:extLst>
+      <p:ext uri="{BB962C8B-B14F-4D97-AF65-F5344CB8AC3E}">
+        <p14:creationId xmlns:p14="http://schemas.microsoft.com/office/powerpoint/2010/main" val="1240639712"/>
+      </p:ext>
+    </p:extLst>
+  </p:cSld>
+  <p:clrMapOvr>
+    <a:masterClrMapping/>
+  </p:clrMapOvr>
+</p:sld>
+</file>
+
+<file path=ppt/slides/slide35.xml><?xml version="1.0" encoding="utf-8"?>
+<p:sld xmlns:a="http://schemas.openxmlformats.org/drawingml/2006/main" xmlns:r="http://schemas.openxmlformats.org/officeDocument/2006/relationships" xmlns:p="http://schemas.openxmlformats.org/presentationml/2006/main">
+  <p:cSld>
+    <p:spTree>
+      <p:nvGrpSpPr>
+        <p:cNvPr id="1" name=""/>
+        <p:cNvGrpSpPr/>
+        <p:nvPr/>
+      </p:nvGrpSpPr>
+      <p:grpSpPr>
+        <a:xfrm>
+          <a:off x="0" y="0"/>
+          <a:ext cx="0" cy="0"/>
+          <a:chOff x="0" y="0"/>
+          <a:chExt cx="0" cy="0"/>
+        </a:xfrm>
+      </p:grpSpPr>
+      <p:sp>
+        <p:nvSpPr>
+          <p:cNvPr id="2" name="Title 1">
+            <a:extLst>
+              <a:ext uri="{FF2B5EF4-FFF2-40B4-BE49-F238E27FC236}">
+                <a16:creationId xmlns:a16="http://schemas.microsoft.com/office/drawing/2014/main" id="{5B1EBC4F-39D3-FAF0-AB9D-35A61EBB7F39}"/>
+              </a:ext>
+            </a:extLst>
+          </p:cNvPr>
+          <p:cNvSpPr>
+            <a:spLocks noGrp="1"/>
+          </p:cNvSpPr>
+          <p:nvPr>
+            <p:ph type="title"/>
+          </p:nvPr>
+        </p:nvSpPr>
+        <p:spPr/>
+        <p:txBody>
+          <a:bodyPr/>
+          <a:lstStyle/>
+          <a:p>
+            <a:r>
+              <a:rPr lang="en-US" dirty="0" err="1"/>
+              <a:t>Cris</a:t>
+            </a:r>
+            <a:r>
+              <a:rPr lang="en-US" dirty="0"/>
+              <a:t> feature</a:t>
+            </a:r>
+          </a:p>
+        </p:txBody>
+      </p:sp>
+      <p:sp>
+        <p:nvSpPr>
+          <p:cNvPr id="4" name="Content Placeholder 2">
+            <a:extLst>
+              <a:ext uri="{FF2B5EF4-FFF2-40B4-BE49-F238E27FC236}">
+                <a16:creationId xmlns:a16="http://schemas.microsoft.com/office/drawing/2014/main" id="{C29E0310-D200-A432-CC9E-332FDFE41015}"/>
+              </a:ext>
+            </a:extLst>
+          </p:cNvPr>
+          <p:cNvSpPr txBox="1">
+            <a:spLocks/>
+          </p:cNvSpPr>
+          <p:nvPr/>
+        </p:nvSpPr>
+        <p:spPr>
+          <a:xfrm>
+            <a:off x="838200" y="1562582"/>
+            <a:ext cx="10515600" cy="4766781"/>
+          </a:xfrm>
+          <a:prstGeom prst="rect">
+            <a:avLst/>
+          </a:prstGeom>
+        </p:spPr>
+        <p:txBody>
+          <a:bodyPr vert="horz" lIns="91440" tIns="45720" rIns="91440" bIns="45720" rtlCol="0">
+            <a:normAutofit fontScale="47500" lnSpcReduction="20000"/>
+          </a:bodyPr>
+          <a:lstStyle>
+            <a:lvl1pPr marL="228600" indent="-228600" algn="l" defTabSz="914400" rtl="0" eaLnBrk="1" latinLnBrk="0" hangingPunct="1">
+              <a:lnSpc>
+                <a:spcPct val="90000"/>
+              </a:lnSpc>
+              <a:spcBef>
+                <a:spcPts val="1000"/>
+              </a:spcBef>
+              <a:buFont typeface="Arial" panose="020B0604020202020204" pitchFamily="34" charset="0"/>
+              <a:buChar char="•"/>
+              <a:defRPr sz="2800" kern="1200">
+                <a:solidFill>
+                  <a:schemeClr val="tx1"/>
+                </a:solidFill>
+                <a:latin typeface="+mn-lt"/>
+                <a:ea typeface="+mn-ea"/>
+                <a:cs typeface="+mn-cs"/>
+              </a:defRPr>
+            </a:lvl1pPr>
+            <a:lvl2pPr marL="685800" indent="-228600" algn="l" defTabSz="914400" rtl="0" eaLnBrk="1" latinLnBrk="0" hangingPunct="1">
+              <a:lnSpc>
+                <a:spcPct val="90000"/>
+              </a:lnSpc>
+              <a:spcBef>
+                <a:spcPts val="500"/>
+              </a:spcBef>
+              <a:buFont typeface="Arial" panose="020B0604020202020204" pitchFamily="34" charset="0"/>
+              <a:buChar char="•"/>
+              <a:defRPr sz="2400" kern="1200">
+                <a:solidFill>
+                  <a:schemeClr val="tx1"/>
+                </a:solidFill>
+                <a:latin typeface="+mn-lt"/>
+                <a:ea typeface="+mn-ea"/>
+                <a:cs typeface="+mn-cs"/>
+              </a:defRPr>
+            </a:lvl2pPr>
+            <a:lvl3pPr marL="1143000" indent="-228600" algn="l" defTabSz="914400" rtl="0" eaLnBrk="1" latinLnBrk="0" hangingPunct="1">
+              <a:lnSpc>
+                <a:spcPct val="90000"/>
+              </a:lnSpc>
+              <a:spcBef>
+                <a:spcPts val="500"/>
+              </a:spcBef>
+              <a:buFont typeface="Arial" panose="020B0604020202020204" pitchFamily="34" charset="0"/>
+              <a:buChar char="•"/>
+              <a:defRPr sz="2000" kern="1200">
+                <a:solidFill>
+                  <a:schemeClr val="tx1"/>
+                </a:solidFill>
+                <a:latin typeface="+mn-lt"/>
+                <a:ea typeface="+mn-ea"/>
+                <a:cs typeface="+mn-cs"/>
+              </a:defRPr>
+            </a:lvl3pPr>
+            <a:lvl4pPr marL="1600200" indent="-228600" algn="l" defTabSz="914400" rtl="0" eaLnBrk="1" latinLnBrk="0" hangingPunct="1">
+              <a:lnSpc>
+                <a:spcPct val="90000"/>
+              </a:lnSpc>
+              <a:spcBef>
+                <a:spcPts val="500"/>
+              </a:spcBef>
+              <a:buFont typeface="Arial" panose="020B0604020202020204" pitchFamily="34" charset="0"/>
+              <a:buChar char="•"/>
+              <a:defRPr sz="1800" kern="1200">
+                <a:solidFill>
+                  <a:schemeClr val="tx1"/>
+                </a:solidFill>
+                <a:latin typeface="+mn-lt"/>
+                <a:ea typeface="+mn-ea"/>
+                <a:cs typeface="+mn-cs"/>
+              </a:defRPr>
+            </a:lvl4pPr>
+            <a:lvl5pPr marL="2057400" indent="-228600" algn="l" defTabSz="914400" rtl="0" eaLnBrk="1" latinLnBrk="0" hangingPunct="1">
+              <a:lnSpc>
+                <a:spcPct val="90000"/>
+              </a:lnSpc>
+              <a:spcBef>
+                <a:spcPts val="500"/>
+              </a:spcBef>
+              <a:buFont typeface="Arial" panose="020B0604020202020204" pitchFamily="34" charset="0"/>
+              <a:buChar char="•"/>
+              <a:defRPr sz="1800" kern="1200">
+                <a:solidFill>
+                  <a:schemeClr val="tx1"/>
+                </a:solidFill>
+                <a:latin typeface="+mn-lt"/>
+                <a:ea typeface="+mn-ea"/>
+                <a:cs typeface="+mn-cs"/>
+              </a:defRPr>
+            </a:lvl5pPr>
+            <a:lvl6pPr marL="2514600" indent="-228600" algn="l" defTabSz="914400" rtl="0" eaLnBrk="1" latinLnBrk="0" hangingPunct="1">
+              <a:lnSpc>
+                <a:spcPct val="90000"/>
+              </a:lnSpc>
+              <a:spcBef>
+                <a:spcPts val="500"/>
+              </a:spcBef>
+              <a:buFont typeface="Arial" panose="020B0604020202020204" pitchFamily="34" charset="0"/>
+              <a:buChar char="•"/>
+              <a:defRPr sz="1800" kern="1200">
+                <a:solidFill>
+                  <a:schemeClr val="tx1"/>
+                </a:solidFill>
+                <a:latin typeface="+mn-lt"/>
+                <a:ea typeface="+mn-ea"/>
+                <a:cs typeface="+mn-cs"/>
+              </a:defRPr>
+            </a:lvl6pPr>
+            <a:lvl7pPr marL="2971800" indent="-228600" algn="l" defTabSz="914400" rtl="0" eaLnBrk="1" latinLnBrk="0" hangingPunct="1">
+              <a:lnSpc>
+                <a:spcPct val="90000"/>
+              </a:lnSpc>
+              <a:spcBef>
+                <a:spcPts val="500"/>
+              </a:spcBef>
+              <a:buFont typeface="Arial" panose="020B0604020202020204" pitchFamily="34" charset="0"/>
+              <a:buChar char="•"/>
+              <a:defRPr sz="1800" kern="1200">
+                <a:solidFill>
+                  <a:schemeClr val="tx1"/>
+                </a:solidFill>
+                <a:latin typeface="+mn-lt"/>
+                <a:ea typeface="+mn-ea"/>
+                <a:cs typeface="+mn-cs"/>
+              </a:defRPr>
+            </a:lvl7pPr>
+            <a:lvl8pPr marL="3429000" indent="-228600" algn="l" defTabSz="914400" rtl="0" eaLnBrk="1" latinLnBrk="0" hangingPunct="1">
+              <a:lnSpc>
+                <a:spcPct val="90000"/>
+              </a:lnSpc>
+              <a:spcBef>
+                <a:spcPts val="500"/>
+              </a:spcBef>
+              <a:buFont typeface="Arial" panose="020B0604020202020204" pitchFamily="34" charset="0"/>
+              <a:buChar char="•"/>
+              <a:defRPr sz="1800" kern="1200">
+                <a:solidFill>
+                  <a:schemeClr val="tx1"/>
+                </a:solidFill>
+                <a:latin typeface="+mn-lt"/>
+                <a:ea typeface="+mn-ea"/>
+                <a:cs typeface="+mn-cs"/>
+              </a:defRPr>
+            </a:lvl8pPr>
+            <a:lvl9pPr marL="3886200" indent="-228600" algn="l" defTabSz="914400" rtl="0" eaLnBrk="1" latinLnBrk="0" hangingPunct="1">
+              <a:lnSpc>
+                <a:spcPct val="90000"/>
+              </a:lnSpc>
+              <a:spcBef>
+                <a:spcPts val="500"/>
+              </a:spcBef>
+              <a:buFont typeface="Arial" panose="020B0604020202020204" pitchFamily="34" charset="0"/>
+              <a:buChar char="•"/>
+              <a:defRPr sz="1800" kern="1200">
+                <a:solidFill>
+                  <a:schemeClr val="tx1"/>
+                </a:solidFill>
+                <a:latin typeface="+mn-lt"/>
+                <a:ea typeface="+mn-ea"/>
+                <a:cs typeface="+mn-cs"/>
+              </a:defRPr>
+            </a:lvl9pPr>
+          </a:lstStyle>
+          <a:p>
+            <a:r>
+              <a:rPr lang="en-US" dirty="0"/>
+              <a:t>Common DI or 2 DI (one for the WebApp, one for </a:t>
+            </a:r>
+            <a:r>
+              <a:rPr lang="en-US" dirty="0" err="1"/>
+              <a:t>AppIdentity</a:t>
+            </a:r>
+            <a:r>
+              <a:rPr lang="en-US" dirty="0"/>
+              <a:t>)?</a:t>
+            </a:r>
+          </a:p>
+          <a:p>
+            <a:r>
+              <a:rPr lang="en-US" dirty="0"/>
+              <a:t>2 DI containers introduce the “Absolute Singletons” issue</a:t>
+            </a:r>
+          </a:p>
+          <a:p>
+            <a:pPr lvl="1"/>
+            <a:r>
+              <a:rPr lang="en-US" dirty="0"/>
+              <a:t>Should the same instance of a singleton service be registered in both DI?</a:t>
+            </a:r>
+          </a:p>
+          <a:p>
+            <a:pPr lvl="1"/>
+            <a:r>
+              <a:rPr lang="en-US" dirty="0"/>
+              <a:t>For all singleton services? May be for </a:t>
+            </a:r>
+            <a:r>
+              <a:rPr lang="en-US" dirty="0" err="1"/>
+              <a:t>IRealObject</a:t>
+            </a:r>
+            <a:r>
+              <a:rPr lang="en-US" dirty="0"/>
+              <a:t> only?</a:t>
+            </a:r>
+          </a:p>
+          <a:p>
+            <a:r>
+              <a:rPr lang="en-US" dirty="0"/>
+              <a:t>My preference:</a:t>
+            </a:r>
+          </a:p>
+          <a:p>
+            <a:pPr lvl="1"/>
+            <a:r>
+              <a:rPr lang="en-US" dirty="0"/>
+              <a:t>A </a:t>
+            </a:r>
+            <a:r>
+              <a:rPr lang="en-US" dirty="0" err="1"/>
+              <a:t>CK-AppIdentity:Local:WebApplication</a:t>
+            </a:r>
+            <a:r>
+              <a:rPr lang="en-US" dirty="0"/>
+              <a:t> section that defines the WebApp as an “island” of the application.</a:t>
+            </a:r>
+          </a:p>
+          <a:p>
+            <a:pPr lvl="2"/>
+            <a:r>
+              <a:rPr lang="en-US" dirty="0"/>
+              <a:t>DI of the app has no “Web” dependent services (“Process” services only).</a:t>
+            </a:r>
+          </a:p>
+          <a:p>
+            <a:pPr lvl="2"/>
+            <a:r>
+              <a:rPr lang="en-US" dirty="0"/>
+              <a:t>The </a:t>
+            </a:r>
+            <a:r>
+              <a:rPr lang="en-US" dirty="0" err="1"/>
+              <a:t>WebApplicationBuilder.Services</a:t>
+            </a:r>
+            <a:r>
+              <a:rPr lang="en-US" dirty="0"/>
+              <a:t> is pre-configured with all the “process services” registrations.</a:t>
+            </a:r>
+          </a:p>
+          <a:p>
+            <a:pPr lvl="1"/>
+            <a:r>
+              <a:rPr lang="en-US" dirty="0"/>
+              <a:t>Can we build the App DI without all the services that depends on the “Web” layer?</a:t>
+            </a:r>
+          </a:p>
+          <a:p>
+            <a:pPr lvl="2"/>
+            <a:r>
+              <a:rPr lang="en-US" dirty="0" err="1"/>
+              <a:t>ScopedHttpContext</a:t>
+            </a:r>
+            <a:r>
+              <a:rPr lang="en-US" dirty="0"/>
+              <a:t>, </a:t>
+            </a:r>
+            <a:r>
+              <a:rPr lang="en-US" dirty="0" err="1"/>
+              <a:t>IAuthenticationService</a:t>
+            </a:r>
+            <a:r>
+              <a:rPr lang="en-US" dirty="0"/>
+              <a:t>, etc.</a:t>
+            </a:r>
+          </a:p>
+          <a:p>
+            <a:pPr lvl="1"/>
+            <a:r>
+              <a:rPr lang="en-US" dirty="0"/>
+              <a:t>Is the “Front” vs. “Process” distinction enough?</a:t>
+            </a:r>
+          </a:p>
+          <a:p>
+            <a:pPr lvl="2"/>
+            <a:r>
+              <a:rPr lang="en-US" dirty="0"/>
+              <a:t>In such case, “Front” means “Web”… </a:t>
+            </a:r>
+          </a:p>
+          <a:p>
+            <a:pPr lvl="2"/>
+            <a:r>
+              <a:rPr lang="en-US" dirty="0"/>
+              <a:t>This may be a first approach, but ideally services are tagged with more than a single “trait”.</a:t>
+            </a:r>
+          </a:p>
+          <a:p>
+            <a:pPr lvl="2"/>
+            <a:r>
+              <a:rPr lang="en-US" dirty="0"/>
+              <a:t>Or we skip any service defined in “</a:t>
+            </a:r>
+            <a:r>
+              <a:rPr lang="en-US" dirty="0" err="1"/>
+              <a:t>Microsoft.AspNetCore</a:t>
+            </a:r>
+            <a:r>
+              <a:rPr lang="en-US" dirty="0"/>
+              <a:t>” namespace ? A list of regex on AQN?</a:t>
+            </a:r>
+          </a:p>
+          <a:p>
+            <a:pPr lvl="2"/>
+            <a:r>
+              <a:rPr lang="en-US" dirty="0"/>
+              <a:t>Does a “list of regex on AQN” defines an “End Point”?</a:t>
+            </a:r>
+          </a:p>
+          <a:p>
+            <a:pPr lvl="3"/>
+            <a:r>
+              <a:rPr lang="en-US" dirty="0"/>
+              <a:t>If yes, one should be able to “</a:t>
+            </a:r>
+            <a:r>
+              <a:rPr lang="en-US" dirty="0" err="1"/>
+              <a:t>ConfigureServices</a:t>
+            </a:r>
+            <a:r>
+              <a:rPr lang="en-US" dirty="0"/>
+              <a:t>” with or without a set of “End Points”…</a:t>
+            </a:r>
+          </a:p>
+          <a:p>
+            <a:pPr lvl="1"/>
+            <a:r>
+              <a:rPr lang="en-US" dirty="0"/>
+              <a:t>Even if this is possible, we have yet to synchronize the singleton instances (or not)…</a:t>
+            </a:r>
+          </a:p>
+          <a:p>
+            <a:pPr lvl="1"/>
+            <a:r>
+              <a:rPr lang="en-US" dirty="0"/>
+              <a:t>This may be the best way in terms of architecture BUT it’s not a short-term solution.</a:t>
+            </a:r>
+          </a:p>
+          <a:p>
+            <a:r>
+              <a:rPr lang="en-US" dirty="0"/>
+              <a:t>The other way is that the Application DI is the WebApp one (if the app is a WebApp) just like today.</a:t>
+            </a:r>
+          </a:p>
+          <a:p>
+            <a:pPr lvl="1"/>
+            <a:r>
+              <a:rPr lang="en-US" dirty="0"/>
+              <a:t>But now services must be “hidden”/”overridden” in </a:t>
+            </a:r>
+            <a:r>
+              <a:rPr lang="en-US" dirty="0" err="1"/>
+              <a:t>AppIdentity</a:t>
+            </a:r>
+            <a:r>
+              <a:rPr lang="en-US" dirty="0"/>
+              <a:t> services, at least for the </a:t>
+            </a:r>
+            <a:r>
+              <a:rPr lang="en-US" dirty="0" err="1"/>
+              <a:t>CrisExecutor</a:t>
+            </a:r>
+            <a:r>
+              <a:rPr lang="en-US" dirty="0"/>
+              <a:t>.</a:t>
+            </a:r>
+          </a:p>
+          <a:p>
+            <a:pPr lvl="1"/>
+            <a:r>
+              <a:rPr lang="en-US" dirty="0"/>
+              <a:t>If a command handler relies on a “Web” singleton or scoped service, we are doomed (will fail at runtime).</a:t>
+            </a:r>
+          </a:p>
+          <a:p>
+            <a:pPr lvl="1"/>
+            <a:r>
+              <a:rPr lang="en-US" dirty="0"/>
+              <a:t>But </a:t>
+            </a:r>
+            <a:r>
+              <a:rPr lang="en-US" dirty="0" err="1"/>
+              <a:t>CK.Cris.Executor</a:t>
+            </a:r>
+            <a:r>
+              <a:rPr lang="en-US" dirty="0"/>
+              <a:t> do its job (</a:t>
+            </a:r>
+            <a:r>
+              <a:rPr lang="en-US" dirty="0" err="1"/>
+              <a:t>CommandValidator</a:t>
+            </a:r>
+            <a:r>
+              <a:rPr lang="en-US" dirty="0"/>
+              <a:t>, </a:t>
+            </a:r>
+            <a:r>
+              <a:rPr lang="en-US" dirty="0" err="1"/>
+              <a:t>RawCommandExecutor</a:t>
+            </a:r>
+            <a:r>
+              <a:rPr lang="en-US" dirty="0"/>
+              <a:t>) based on an explicit </a:t>
+            </a:r>
+            <a:r>
+              <a:rPr lang="en-US" dirty="0" err="1"/>
+              <a:t>IServiceProvider</a:t>
+            </a:r>
+            <a:r>
+              <a:rPr lang="en-US" dirty="0"/>
+              <a:t>.</a:t>
+            </a:r>
+          </a:p>
+          <a:p>
+            <a:pPr lvl="1"/>
+            <a:r>
+              <a:rPr lang="en-US" dirty="0"/>
+              <a:t>We can provide a </a:t>
+            </a:r>
+            <a:r>
+              <a:rPr lang="en-US" dirty="0" err="1"/>
+              <a:t>IServiceProvider</a:t>
+            </a:r>
+            <a:r>
+              <a:rPr lang="en-US" dirty="0"/>
+              <a:t> that hides/replaces some services for the command handling.</a:t>
+            </a:r>
+            <a:endParaRPr lang="en-US" dirty="0">
+              <a:sym typeface="Wingdings" panose="05000000000000000000" pitchFamily="2" charset="2"/>
+            </a:endParaRPr>
+          </a:p>
+          <a:p>
+            <a:pPr marL="457200" lvl="1" indent="0">
+              <a:buNone/>
+            </a:pPr>
+            <a:r>
+              <a:rPr lang="en-US" dirty="0">
+                <a:sym typeface="Wingdings" panose="05000000000000000000" pitchFamily="2" charset="2"/>
+              </a:rPr>
+              <a:t> This is not ideal, but it should work if not too many “Web” services are concerned and we can provide a replacement for the services at stake …</a:t>
+            </a:r>
+            <a:endParaRPr lang="en-US" dirty="0"/>
+          </a:p>
+        </p:txBody>
+      </p:sp>
+    </p:spTree>
+    <p:extLst>
+      <p:ext uri="{BB962C8B-B14F-4D97-AF65-F5344CB8AC3E}">
+        <p14:creationId xmlns:p14="http://schemas.microsoft.com/office/powerpoint/2010/main" val="3058767410"/>
+      </p:ext>
+    </p:extLst>
+  </p:cSld>
+  <p:clrMapOvr>
+    <a:masterClrMapping/>
+  </p:clrMapOvr>
+</p:sld>
+</file>
+
+<file path=ppt/slides/slide36.xml><?xml version="1.0" encoding="utf-8"?>
+<p:sld xmlns:a="http://schemas.openxmlformats.org/drawingml/2006/main" xmlns:r="http://schemas.openxmlformats.org/officeDocument/2006/relationships" xmlns:p="http://schemas.openxmlformats.org/presentationml/2006/main">
+  <p:cSld>
+    <p:spTree>
+      <p:nvGrpSpPr>
+        <p:cNvPr id="1" name=""/>
+        <p:cNvGrpSpPr/>
+        <p:nvPr/>
+      </p:nvGrpSpPr>
+      <p:grpSpPr>
+        <a:xfrm>
+          <a:off x="0" y="0"/>
+          <a:ext cx="0" cy="0"/>
+          <a:chOff x="0" y="0"/>
+          <a:chExt cx="0" cy="0"/>
+        </a:xfrm>
+      </p:grpSpPr>
+      <p:sp>
+        <p:nvSpPr>
+          <p:cNvPr id="2" name="Title 1">
+            <a:extLst>
+              <a:ext uri="{FF2B5EF4-FFF2-40B4-BE49-F238E27FC236}">
+                <a16:creationId xmlns:a16="http://schemas.microsoft.com/office/drawing/2014/main" id="{50EAFAF5-98A2-D125-4496-C05967A7110A}"/>
+              </a:ext>
+            </a:extLst>
+          </p:cNvPr>
+          <p:cNvSpPr>
+            <a:spLocks noGrp="1"/>
+          </p:cNvSpPr>
+          <p:nvPr>
+            <p:ph type="title"/>
+          </p:nvPr>
+        </p:nvSpPr>
+        <p:spPr/>
+        <p:txBody>
+          <a:bodyPr/>
+          <a:lstStyle/>
+          <a:p>
+            <a:r>
+              <a:rPr lang="en-US" dirty="0"/>
+              <a:t>Other questions &amp; To do</a:t>
+            </a:r>
+          </a:p>
+        </p:txBody>
+      </p:sp>
+      <p:sp>
+        <p:nvSpPr>
+          <p:cNvPr id="3" name="Content Placeholder 2">
+            <a:extLst>
+              <a:ext uri="{FF2B5EF4-FFF2-40B4-BE49-F238E27FC236}">
+                <a16:creationId xmlns:a16="http://schemas.microsoft.com/office/drawing/2014/main" id="{3C1C559C-F4C7-F864-231C-921ED15BE2E9}"/>
+              </a:ext>
+            </a:extLst>
+          </p:cNvPr>
+          <p:cNvSpPr>
+            <a:spLocks noGrp="1"/>
+          </p:cNvSpPr>
+          <p:nvPr>
+            <p:ph idx="1"/>
+          </p:nvPr>
+        </p:nvSpPr>
+        <p:spPr/>
+        <p:txBody>
+          <a:bodyPr/>
+          <a:lstStyle/>
+          <a:p>
+            <a:r>
+              <a:rPr lang="en-US" dirty="0"/>
+              <a:t>Internalize </a:t>
+            </a:r>
+            <a:r>
+              <a:rPr lang="en-US" dirty="0" err="1"/>
+              <a:t>TransportMessage</a:t>
+            </a:r>
+            <a:endParaRPr lang="en-US" dirty="0"/>
+          </a:p>
+          <a:p>
+            <a:pPr lvl="1"/>
+            <a:r>
+              <a:rPr lang="en-US" dirty="0"/>
+              <a:t>Differentiate </a:t>
+            </a:r>
+            <a:r>
+              <a:rPr lang="en-US" dirty="0" err="1"/>
+              <a:t>IOutgoingTransportMessage</a:t>
+            </a:r>
+            <a:r>
+              <a:rPr lang="en-US" dirty="0"/>
+              <a:t> and </a:t>
+            </a:r>
+            <a:r>
+              <a:rPr lang="en-US" dirty="0" err="1"/>
+              <a:t>IIncomingTransportMessage</a:t>
+            </a:r>
+            <a:endParaRPr lang="en-US" dirty="0"/>
+          </a:p>
+          <a:p>
+            <a:pPr lvl="1"/>
+            <a:r>
+              <a:rPr lang="en-US" dirty="0"/>
+              <a:t>Assume the outgoing message mutability: Freeze and </a:t>
+            </a:r>
+            <a:r>
+              <a:rPr lang="en-US" dirty="0" err="1"/>
+              <a:t>IsFrozen</a:t>
+            </a:r>
+            <a:endParaRPr lang="en-US" dirty="0"/>
+          </a:p>
+          <a:p>
+            <a:r>
+              <a:rPr lang="en-US" dirty="0"/>
+              <a:t>Add a “Layer” API on the </a:t>
+            </a:r>
+            <a:r>
+              <a:rPr lang="en-US" dirty="0" err="1"/>
+              <a:t>TransportMessage</a:t>
+            </a:r>
+            <a:endParaRPr lang="en-US" dirty="0"/>
+          </a:p>
+          <a:p>
+            <a:r>
+              <a:rPr lang="en-US" dirty="0"/>
+              <a:t>Implements the “</a:t>
+            </a:r>
+            <a:r>
+              <a:rPr lang="en-US" dirty="0" err="1"/>
+              <a:t>BigMessage</a:t>
+            </a:r>
+            <a:r>
+              <a:rPr lang="en-US" dirty="0"/>
+              <a:t>” slicing (0 Protocol).</a:t>
+            </a:r>
+          </a:p>
+          <a:p>
+            <a:r>
+              <a:rPr lang="en-US" dirty="0"/>
+              <a:t>Should “Response” channel be renamed “</a:t>
+            </a:r>
+            <a:r>
+              <a:rPr lang="en-US" dirty="0" err="1"/>
+              <a:t>HighPriority</a:t>
+            </a:r>
+            <a:r>
+              <a:rPr lang="en-US" dirty="0"/>
+              <a:t>”?</a:t>
+            </a:r>
+          </a:p>
+          <a:p>
+            <a:pPr lvl="1"/>
+            <a:r>
+              <a:rPr lang="en-US" dirty="0"/>
+              <a:t>Responses would use it but the “</a:t>
+            </a:r>
+            <a:r>
+              <a:rPr lang="en-US" dirty="0" err="1"/>
+              <a:t>CancelCurrentBigMessage</a:t>
+            </a:r>
+            <a:r>
+              <a:rPr lang="en-US" dirty="0"/>
+              <a:t>” would also use it (</a:t>
+            </a:r>
+            <a:r>
+              <a:rPr lang="en-US"/>
+              <a:t>and it is </a:t>
+            </a:r>
+            <a:r>
+              <a:rPr lang="en-US" dirty="0"/>
+              <a:t>not a response).</a:t>
+            </a:r>
+          </a:p>
+        </p:txBody>
+      </p:sp>
+    </p:spTree>
+    <p:extLst>
+      <p:ext uri="{BB962C8B-B14F-4D97-AF65-F5344CB8AC3E}">
+        <p14:creationId xmlns:p14="http://schemas.microsoft.com/office/powerpoint/2010/main" val="479290701"/>
       </p:ext>
     </p:extLst>
   </p:cSld>

--- a/Doc/CK-AppIdentity.pptx
+++ b/Doc/CK-AppIdentity.pptx
@@ -11429,16 +11429,14 @@
         </p:nvSpPr>
         <p:spPr/>
         <p:txBody>
-          <a:bodyPr/>
+          <a:bodyPr>
+            <a:normAutofit fontScale="92500" lnSpcReduction="20000"/>
+          </a:bodyPr>
           <a:lstStyle/>
           <a:p>
             <a:r>
-              <a:rPr lang="en-US" dirty="0" err="1"/>
-              <a:t>ApplicationIdentity</a:t>
-            </a:r>
-            <a:r>
-              <a:rPr lang="en-US" dirty="0"/>
-              <a:t> model exists to expose Features.</a:t>
+              <a:rPr lang="en-US" dirty="0"/>
+              <a:t>Developer uses Features.</a:t>
             </a:r>
           </a:p>
           <a:p>
@@ -11524,12 +11522,13 @@
             </a:r>
           </a:p>
           <a:p>
-            <a:r>
-              <a:rPr lang="en-US" dirty="0"/>
-              <a:t>Only </a:t>
-            </a:r>
-            <a:r>
-              <a:rPr lang="en-US" sz="2000" dirty="0">
+            <a:pPr lvl="1"/>
+            <a:r>
+              <a:rPr lang="en-US" dirty="0"/>
+              <a:t> </a:t>
+            </a:r>
+            <a:r>
+              <a:rPr lang="en-US" sz="1600" dirty="0">
                 <a:solidFill>
                   <a:srgbClr val="0000FF"/>
                 </a:solidFill>
@@ -11538,7 +11537,7 @@
               <a:t>void</a:t>
             </a:r>
             <a:r>
-              <a:rPr lang="en-US" sz="2000" dirty="0">
+              <a:rPr lang="en-US" sz="1600" dirty="0">
                 <a:solidFill>
                   <a:srgbClr val="000000"/>
                 </a:solidFill>
@@ -11547,70 +11546,259 @@
               <a:t> </a:t>
             </a:r>
             <a:r>
+              <a:rPr lang="en-US" sz="1600" dirty="0" err="1">
+                <a:solidFill>
+                  <a:srgbClr val="000000"/>
+                </a:solidFill>
+                <a:latin typeface="Consolas" panose="020B0609020204030204" pitchFamily="49" charset="0"/>
+              </a:rPr>
+              <a:t>AddFeature</a:t>
+            </a:r>
+            <a:r>
+              <a:rPr lang="en-US" sz="1600" dirty="0">
+                <a:solidFill>
+                  <a:srgbClr val="000000"/>
+                </a:solidFill>
+                <a:latin typeface="Consolas" panose="020B0609020204030204" pitchFamily="49" charset="0"/>
+              </a:rPr>
+              <a:t>( </a:t>
+            </a:r>
+            <a:r>
+              <a:rPr lang="en-US" sz="1600" dirty="0">
+                <a:solidFill>
+                  <a:srgbClr val="0000FF"/>
+                </a:solidFill>
+                <a:latin typeface="Consolas" panose="020B0609020204030204" pitchFamily="49" charset="0"/>
+              </a:rPr>
+              <a:t>object</a:t>
+            </a:r>
+            <a:r>
+              <a:rPr lang="en-US" sz="1600" dirty="0">
+                <a:solidFill>
+                  <a:srgbClr val="000000"/>
+                </a:solidFill>
+                <a:latin typeface="Consolas" panose="020B0609020204030204" pitchFamily="49" charset="0"/>
+              </a:rPr>
+              <a:t> feature )</a:t>
+            </a:r>
+            <a:r>
+              <a:rPr lang="en-US" dirty="0"/>
+              <a:t> and </a:t>
+            </a:r>
+            <a:r>
+              <a:rPr lang="en-US" sz="1600" dirty="0">
+                <a:solidFill>
+                  <a:srgbClr val="0000FF"/>
+                </a:solidFill>
+                <a:latin typeface="Consolas" panose="020B0609020204030204" pitchFamily="49" charset="0"/>
+              </a:rPr>
+              <a:t>void</a:t>
+            </a:r>
+            <a:r>
+              <a:rPr lang="en-US" sz="1600" dirty="0">
+                <a:solidFill>
+                  <a:srgbClr val="000000"/>
+                </a:solidFill>
+                <a:latin typeface="Consolas" panose="020B0609020204030204" pitchFamily="49" charset="0"/>
+              </a:rPr>
+              <a:t> </a:t>
+            </a:r>
+            <a:r>
+              <a:rPr lang="en-US" sz="1600" dirty="0" err="1">
+                <a:solidFill>
+                  <a:srgbClr val="000000"/>
+                </a:solidFill>
+                <a:latin typeface="Consolas" panose="020B0609020204030204" pitchFamily="49" charset="0"/>
+              </a:rPr>
+              <a:t>RemoveFeature</a:t>
+            </a:r>
+            <a:r>
+              <a:rPr lang="en-US" sz="1600" dirty="0">
+                <a:solidFill>
+                  <a:srgbClr val="000000"/>
+                </a:solidFill>
+                <a:latin typeface="Consolas" panose="020B0609020204030204" pitchFamily="49" charset="0"/>
+              </a:rPr>
+              <a:t>( </a:t>
+            </a:r>
+            <a:r>
+              <a:rPr lang="en-US" sz="1600" dirty="0">
+                <a:solidFill>
+                  <a:srgbClr val="0000FF"/>
+                </a:solidFill>
+                <a:latin typeface="Consolas" panose="020B0609020204030204" pitchFamily="49" charset="0"/>
+              </a:rPr>
+              <a:t>object</a:t>
+            </a:r>
+            <a:r>
+              <a:rPr lang="en-US" sz="1600" dirty="0">
+                <a:solidFill>
+                  <a:srgbClr val="000000"/>
+                </a:solidFill>
+                <a:latin typeface="Consolas" panose="020B0609020204030204" pitchFamily="49" charset="0"/>
+              </a:rPr>
+              <a:t> feature )</a:t>
+            </a:r>
+            <a:br>
+              <a:rPr lang="en-US" sz="1600" dirty="0">
+                <a:solidFill>
+                  <a:srgbClr val="000000"/>
+                </a:solidFill>
+                <a:latin typeface="Consolas" panose="020B0609020204030204" pitchFamily="49" charset="0"/>
+              </a:rPr>
+            </a:br>
+            <a:endParaRPr lang="en-US" dirty="0"/>
+          </a:p>
+          <a:p>
+            <a:r>
+              <a:rPr lang="en-US" dirty="0"/>
+              <a:t>One can add and remove a Feature “from the outside”:</a:t>
+            </a:r>
+          </a:p>
+          <a:p>
+            <a:pPr lvl="1"/>
+            <a:r>
+              <a:rPr lang="en-US" dirty="0"/>
+              <a:t> </a:t>
+            </a:r>
+            <a:r>
+              <a:rPr lang="en-US" sz="1900" dirty="0">
+                <a:solidFill>
+                  <a:srgbClr val="0000FF"/>
+                </a:solidFill>
+                <a:latin typeface="Consolas" panose="020B0609020204030204" pitchFamily="49" charset="0"/>
+              </a:rPr>
+              <a:t>void</a:t>
+            </a:r>
+            <a:r>
+              <a:rPr lang="en-US" sz="1900" dirty="0">
+                <a:solidFill>
+                  <a:srgbClr val="000000"/>
+                </a:solidFill>
+                <a:latin typeface="Consolas" panose="020B0609020204030204" pitchFamily="49" charset="0"/>
+              </a:rPr>
+              <a:t> </a:t>
+            </a:r>
+            <a:r>
+              <a:rPr lang="en-US" sz="1900" dirty="0" err="1">
+                <a:solidFill>
+                  <a:srgbClr val="000000"/>
+                </a:solidFill>
+                <a:latin typeface="Consolas" panose="020B0609020204030204" pitchFamily="49" charset="0"/>
+              </a:rPr>
+              <a:t>AddFeature</a:t>
+            </a:r>
+            <a:r>
+              <a:rPr lang="en-US" sz="1900" dirty="0">
+                <a:solidFill>
+                  <a:srgbClr val="000000"/>
+                </a:solidFill>
+                <a:latin typeface="Consolas" panose="020B0609020204030204" pitchFamily="49" charset="0"/>
+              </a:rPr>
+              <a:t>( </a:t>
+            </a:r>
+            <a:r>
+              <a:rPr lang="en-US" sz="1900" dirty="0">
+                <a:solidFill>
+                  <a:srgbClr val="0000FF"/>
+                </a:solidFill>
+                <a:latin typeface="Consolas" panose="020B0609020204030204" pitchFamily="49" charset="0"/>
+              </a:rPr>
+              <a:t>object</a:t>
+            </a:r>
+            <a:r>
+              <a:rPr lang="en-US" sz="1900" dirty="0">
+                <a:solidFill>
+                  <a:srgbClr val="000000"/>
+                </a:solidFill>
+                <a:latin typeface="Consolas" panose="020B0609020204030204" pitchFamily="49" charset="0"/>
+              </a:rPr>
+              <a:t> feature )</a:t>
+            </a:r>
+          </a:p>
+          <a:p>
+            <a:pPr lvl="1"/>
+            <a:r>
+              <a:rPr lang="en-US" dirty="0"/>
+              <a:t> </a:t>
+            </a:r>
+            <a:r>
+              <a:rPr lang="en-US" sz="1900" dirty="0">
+                <a:solidFill>
+                  <a:srgbClr val="0000FF"/>
+                </a:solidFill>
+                <a:latin typeface="Consolas" panose="020B0609020204030204" pitchFamily="49" charset="0"/>
+              </a:rPr>
+              <a:t>void</a:t>
+            </a:r>
+            <a:r>
+              <a:rPr lang="en-US" sz="1900" dirty="0">
+                <a:solidFill>
+                  <a:srgbClr val="000000"/>
+                </a:solidFill>
+                <a:latin typeface="Consolas" panose="020B0609020204030204" pitchFamily="49" charset="0"/>
+              </a:rPr>
+              <a:t> </a:t>
+            </a:r>
+            <a:r>
+              <a:rPr lang="en-US" sz="1900" dirty="0" err="1">
+                <a:solidFill>
+                  <a:srgbClr val="000000"/>
+                </a:solidFill>
+                <a:latin typeface="Consolas" panose="020B0609020204030204" pitchFamily="49" charset="0"/>
+              </a:rPr>
+              <a:t>RemoveFeature</a:t>
+            </a:r>
+            <a:r>
+              <a:rPr lang="en-US" sz="1900" dirty="0">
+                <a:solidFill>
+                  <a:srgbClr val="000000"/>
+                </a:solidFill>
+                <a:latin typeface="Consolas" panose="020B0609020204030204" pitchFamily="49" charset="0"/>
+              </a:rPr>
+              <a:t>( </a:t>
+            </a:r>
+            <a:r>
+              <a:rPr lang="en-US" sz="1900" dirty="0">
+                <a:solidFill>
+                  <a:srgbClr val="0000FF"/>
+                </a:solidFill>
+                <a:latin typeface="Consolas" panose="020B0609020204030204" pitchFamily="49" charset="0"/>
+              </a:rPr>
+              <a:t>object</a:t>
+            </a:r>
+            <a:r>
+              <a:rPr lang="en-US" sz="1900" dirty="0">
+                <a:solidFill>
+                  <a:srgbClr val="000000"/>
+                </a:solidFill>
+                <a:latin typeface="Consolas" panose="020B0609020204030204" pitchFamily="49" charset="0"/>
+              </a:rPr>
+              <a:t> feature )</a:t>
+            </a:r>
+            <a:endParaRPr lang="en-US" dirty="0"/>
+          </a:p>
+          <a:p>
+            <a:pPr lvl="1"/>
+            <a:endParaRPr lang="en-US" dirty="0"/>
+          </a:p>
+          <a:p>
+            <a:r>
+              <a:rPr lang="en-US" dirty="0"/>
+              <a:t>But Feature are primarily instantiated, configured, added to and removed from the relevant parties thanks to </a:t>
+            </a:r>
+            <a:r>
               <a:rPr lang="en-US" sz="2000" dirty="0" err="1">
                 <a:solidFill>
                   <a:srgbClr val="000000"/>
                 </a:solidFill>
                 <a:latin typeface="Consolas" panose="020B0609020204030204" pitchFamily="49" charset="0"/>
               </a:rPr>
-              <a:t>AddFeature</a:t>
-            </a:r>
-            <a:r>
-              <a:rPr lang="en-US" sz="2000" dirty="0">
-                <a:solidFill>
-                  <a:srgbClr val="000000"/>
-                </a:solidFill>
-                <a:latin typeface="Consolas" panose="020B0609020204030204" pitchFamily="49" charset="0"/>
-              </a:rPr>
-              <a:t>( </a:t>
-            </a:r>
-            <a:r>
-              <a:rPr lang="en-US" sz="2000" dirty="0">
-                <a:solidFill>
-                  <a:srgbClr val="0000FF"/>
-                </a:solidFill>
-                <a:latin typeface="Consolas" panose="020B0609020204030204" pitchFamily="49" charset="0"/>
-              </a:rPr>
-              <a:t>object</a:t>
-            </a:r>
-            <a:r>
-              <a:rPr lang="en-US" sz="2000" dirty="0">
-                <a:solidFill>
-                  <a:srgbClr val="000000"/>
-                </a:solidFill>
-                <a:latin typeface="Consolas" panose="020B0609020204030204" pitchFamily="49" charset="0"/>
-              </a:rPr>
-              <a:t> feature )</a:t>
-            </a:r>
-            <a:r>
-              <a:rPr lang="en-US" dirty="0"/>
-              <a:t> exists</a:t>
-            </a:r>
-          </a:p>
-          <a:p>
-            <a:pPr lvl="1"/>
-            <a:r>
-              <a:rPr lang="en-US" dirty="0"/>
-              <a:t>Features can only be added.</a:t>
-            </a:r>
-          </a:p>
-          <a:p>
-            <a:r>
-              <a:rPr lang="en-US" dirty="0"/>
-              <a:t>Even if one can add a Feature “from the outside”, Feature are automatically instantiated, configured and added to the relevant parties thanks to specialized </a:t>
-            </a:r>
-            <a:r>
-              <a:rPr lang="en-US" sz="2000" dirty="0" err="1">
-                <a:solidFill>
-                  <a:srgbClr val="000000"/>
-                </a:solidFill>
-                <a:latin typeface="Consolas" panose="020B0609020204030204" pitchFamily="49" charset="0"/>
-              </a:rPr>
               <a:t>ApplicationIdentityFeatureDriver</a:t>
             </a:r>
             <a:r>
               <a:rPr lang="en-US" dirty="0"/>
-              <a:t> services</a:t>
+              <a:t> specialized services</a:t>
             </a:r>
             <a:r>
               <a:rPr lang="en-US" sz="1800" dirty="0">

--- a/Doc/CK-AppIdentity.pptx
+++ b/Doc/CK-AppIdentity.pptx
@@ -151,6 +151,35 @@
 </file>
 
 <file path=ppt/ink/ink1.xml><?xml version="1.0" encoding="utf-8"?>
+<inkml:ink xmlns:inkml="http://www.w3.org/2003/InkML">
+  <inkml:definitions>
+    <inkml:context xml:id="ctx0">
+      <inkml:inkSource xml:id="inkSrc0">
+        <inkml:traceFormat>
+          <inkml:channel name="X" type="integer" min="-2.14748E9" max="2.14748E9" units="cm"/>
+          <inkml:channel name="Y" type="integer" min="-2.14748E9" max="2.14748E9" units="cm"/>
+        </inkml:traceFormat>
+        <inkml:channelProperties>
+          <inkml:channelProperty channel="X" name="resolution" value="1000" units="1/cm"/>
+          <inkml:channelProperty channel="Y" name="resolution" value="1000" units="1/cm"/>
+        </inkml:channelProperties>
+      </inkml:inkSource>
+      <inkml:timestamp xml:id="ts0" timeString="2023-04-24T17:00:42.164"/>
+    </inkml:context>
+    <inkml:brush xml:id="br0">
+      <inkml:brushProperty name="width" value="0.3" units="cm"/>
+      <inkml:brushProperty name="height" value="0.6" units="cm"/>
+      <inkml:brushProperty name="color" value="#FFFC00"/>
+      <inkml:brushProperty name="tip" value="rectangle"/>
+      <inkml:brushProperty name="rasterOp" value="maskPen"/>
+      <inkml:brushProperty name="ignorePressure" value="1"/>
+    </inkml:brush>
+  </inkml:definitions>
+  <inkml:trace contextRef="#ctx0" brushRef="#br0">14 170,'51'0,"662"-22,-623 9,108-29,-25 4,-13 14,227-6,165 30,-231 3,1036-3,-1268 4,0 4,-1 4,0 4,-2 3,143 52,-172-48,-39-15,-1-1,1 0,0-1,0-1,1-1,22 2,267-7,48 4,-313 3,-38-3,-13 0,-63 4,-1-3,-139-10,133 1,0-4,0-4,1-3,-137-47,139 36,-97-21,160 46,-1 1,1-1,0 2,0 0,-1 1,1 0,0 0,-18 6,-11 5,-44 18,40-13,41-15,-37 14,0-2,-1-1,0-3,-58 7,-369 7,105-10,-11 0,307-16,26 0,1 2,-41 6,70-5,0 2,0-1,0 1,1 1,-1 0,1 1,0 0,0 0,1 1,0 1,-13 10,7-4,0-1,-1-1,-1 0,0-1,0-1,-29 10,-119 26,137-39,13-1,0 1,0 0,0 1,1 1,-15 9,19-9,-1-1,-1 0,1-1,-1-1,0 0,0 0,-1-1,-19 2,-3-4,0-1,0-2,-36-7,-106-24,100 16,-88-7,110 19,-18 0,-142-26,182 22,0 1,-69-3,86 10,-1 0,1 2,0 0,0 1,0 0,0 2,-30 11,-33 23,-20 9,86-43,1 0,-1-1,0-1,0 0,-25 1,35-4,-1 0,0 0,0-1,1 0,-1 0,0 0,1-1,-1 1,1-1,0 0,-1 0,1-1,0 1,0-1,1 0,-1 0,0 0,1-1,0 1,-5-7,-1-3,1 0,0-1,1 0,-11-28,17 39,0 0,0 0,0 0,0 0,0 0,1 0,-1 0,1-1,0 1,0 0,0 0,0 0,2-6,-1 7,0 1,0-1,0 1,0-1,1 1,-1-1,0 1,1-1,-1 1,1 0,0 0,-1 0,1 0,0 0,0 0,0 1,-1-1,1 1,0-1,0 1,0-1,0 1,0 0,0 0,2 0,34 0,-1 2,0 1,62 13,-27-3,39 5,121 17,-167-28,102-3,-144-4,0-2,-1-1,1-1,-1 0,0-2,0 0,35-17,-39 16,0 1,1 1,0 0,-1 2,1 0,1 1,-1 0,37 4,-20-2,624 3,-598 1,-1 3,1 2,105 32,-110-26,12 3,15 5,1-4,140 15,-208-35,0 0,0-1,0-1,0-1,-1 0,22-9,-9 4,89-26,199-32,-252 61,114 6,-77 2,738-2,-822 1,-1 1,34 7,21 4,-22-13,-1-1,1-3,96-20,-52 7,-77 14,1 1,0 0,-1 1,1 1,0 1,0 1,31 6,-26-2</inkml:trace>
+</inkml:ink>
+</file>
+
+<file path=ppt/ink/ink2.xml><?xml version="1.0" encoding="utf-8"?>
 <inkml:ink xmlns:inkml="http://www.w3.org/2003/InkML">
   <inkml:definitions>
     <inkml:context xml:id="ctx0">
@@ -11430,7 +11459,7 @@
         <p:spPr/>
         <p:txBody>
           <a:bodyPr>
-            <a:normAutofit fontScale="92500" lnSpcReduction="20000"/>
+            <a:normAutofit fontScale="92500" lnSpcReduction="10000"/>
           </a:bodyPr>
           <a:lstStyle/>
           <a:p>
@@ -11519,125 +11548,6 @@
             <a:r>
               <a:rPr lang="en-US" dirty="0"/>
               <a:t>).</a:t>
-            </a:r>
-          </a:p>
-          <a:p>
-            <a:pPr lvl="1"/>
-            <a:r>
-              <a:rPr lang="en-US" dirty="0"/>
-              <a:t> </a:t>
-            </a:r>
-            <a:r>
-              <a:rPr lang="en-US" sz="1600" dirty="0">
-                <a:solidFill>
-                  <a:srgbClr val="0000FF"/>
-                </a:solidFill>
-                <a:latin typeface="Consolas" panose="020B0609020204030204" pitchFamily="49" charset="0"/>
-              </a:rPr>
-              <a:t>void</a:t>
-            </a:r>
-            <a:r>
-              <a:rPr lang="en-US" sz="1600" dirty="0">
-                <a:solidFill>
-                  <a:srgbClr val="000000"/>
-                </a:solidFill>
-                <a:latin typeface="Consolas" panose="020B0609020204030204" pitchFamily="49" charset="0"/>
-              </a:rPr>
-              <a:t> </a:t>
-            </a:r>
-            <a:r>
-              <a:rPr lang="en-US" sz="1600" dirty="0" err="1">
-                <a:solidFill>
-                  <a:srgbClr val="000000"/>
-                </a:solidFill>
-                <a:latin typeface="Consolas" panose="020B0609020204030204" pitchFamily="49" charset="0"/>
-              </a:rPr>
-              <a:t>AddFeature</a:t>
-            </a:r>
-            <a:r>
-              <a:rPr lang="en-US" sz="1600" dirty="0">
-                <a:solidFill>
-                  <a:srgbClr val="000000"/>
-                </a:solidFill>
-                <a:latin typeface="Consolas" panose="020B0609020204030204" pitchFamily="49" charset="0"/>
-              </a:rPr>
-              <a:t>( </a:t>
-            </a:r>
-            <a:r>
-              <a:rPr lang="en-US" sz="1600" dirty="0">
-                <a:solidFill>
-                  <a:srgbClr val="0000FF"/>
-                </a:solidFill>
-                <a:latin typeface="Consolas" panose="020B0609020204030204" pitchFamily="49" charset="0"/>
-              </a:rPr>
-              <a:t>object</a:t>
-            </a:r>
-            <a:r>
-              <a:rPr lang="en-US" sz="1600" dirty="0">
-                <a:solidFill>
-                  <a:srgbClr val="000000"/>
-                </a:solidFill>
-                <a:latin typeface="Consolas" panose="020B0609020204030204" pitchFamily="49" charset="0"/>
-              </a:rPr>
-              <a:t> feature )</a:t>
-            </a:r>
-            <a:r>
-              <a:rPr lang="en-US" dirty="0"/>
-              <a:t> and </a:t>
-            </a:r>
-            <a:r>
-              <a:rPr lang="en-US" sz="1600" dirty="0">
-                <a:solidFill>
-                  <a:srgbClr val="0000FF"/>
-                </a:solidFill>
-                <a:latin typeface="Consolas" panose="020B0609020204030204" pitchFamily="49" charset="0"/>
-              </a:rPr>
-              <a:t>void</a:t>
-            </a:r>
-            <a:r>
-              <a:rPr lang="en-US" sz="1600" dirty="0">
-                <a:solidFill>
-                  <a:srgbClr val="000000"/>
-                </a:solidFill>
-                <a:latin typeface="Consolas" panose="020B0609020204030204" pitchFamily="49" charset="0"/>
-              </a:rPr>
-              <a:t> </a:t>
-            </a:r>
-            <a:r>
-              <a:rPr lang="en-US" sz="1600" dirty="0" err="1">
-                <a:solidFill>
-                  <a:srgbClr val="000000"/>
-                </a:solidFill>
-                <a:latin typeface="Consolas" panose="020B0609020204030204" pitchFamily="49" charset="0"/>
-              </a:rPr>
-              <a:t>RemoveFeature</a:t>
-            </a:r>
-            <a:r>
-              <a:rPr lang="en-US" sz="1600" dirty="0">
-                <a:solidFill>
-                  <a:srgbClr val="000000"/>
-                </a:solidFill>
-                <a:latin typeface="Consolas" panose="020B0609020204030204" pitchFamily="49" charset="0"/>
-              </a:rPr>
-              <a:t>( </a:t>
-            </a:r>
-            <a:r>
-              <a:rPr lang="en-US" sz="1600" dirty="0">
-                <a:solidFill>
-                  <a:srgbClr val="0000FF"/>
-                </a:solidFill>
-                <a:latin typeface="Consolas" panose="020B0609020204030204" pitchFamily="49" charset="0"/>
-              </a:rPr>
-              <a:t>object</a:t>
-            </a:r>
-            <a:r>
-              <a:rPr lang="en-US" sz="1600" dirty="0">
-                <a:solidFill>
-                  <a:srgbClr val="000000"/>
-                </a:solidFill>
-                <a:latin typeface="Consolas" panose="020B0609020204030204" pitchFamily="49" charset="0"/>
-              </a:rPr>
-              <a:t> feature )</a:t>
             </a:r>
             <a:br>
               <a:rPr lang="en-US" sz="1600" dirty="0">
@@ -13298,6 +13208,57 @@
           </a:p>
         </p:txBody>
       </p:sp>
+      <mc:AlternateContent xmlns:mc="http://schemas.openxmlformats.org/markup-compatibility/2006">
+        <mc:Choice xmlns:p14="http://schemas.microsoft.com/office/powerpoint/2010/main" Requires="p14">
+          <p:contentPart p14:bwMode="auto" r:id="rId3">
+            <p14:nvContentPartPr>
+              <p14:cNvPr id="4" name="Ink 3">
+                <a:extLst>
+                  <a:ext uri="{FF2B5EF4-FFF2-40B4-BE49-F238E27FC236}">
+                    <a16:creationId xmlns:a16="http://schemas.microsoft.com/office/drawing/2014/main" id="{B7B4A735-853C-A50C-B584-BA5FB8D4C33A}"/>
+                  </a:ext>
+                </a:extLst>
+              </p14:cNvPr>
+              <p14:cNvContentPartPr/>
+              <p14:nvPr/>
+            </p14:nvContentPartPr>
+            <p14:xfrm>
+              <a:off x="7101000" y="3347750"/>
+              <a:ext cx="2017080" cy="191160"/>
+            </p14:xfrm>
+          </p:contentPart>
+        </mc:Choice>
+        <mc:Fallback>
+          <p:pic>
+            <p:nvPicPr>
+              <p:cNvPr id="4" name="Ink 3">
+                <a:extLst>
+                  <a:ext uri="{FF2B5EF4-FFF2-40B4-BE49-F238E27FC236}">
+                    <a16:creationId xmlns:a16="http://schemas.microsoft.com/office/drawing/2014/main" id="{B7B4A735-853C-A50C-B584-BA5FB8D4C33A}"/>
+                  </a:ext>
+                </a:extLst>
+              </p:cNvPr>
+              <p:cNvPicPr/>
+              <p:nvPr/>
+            </p:nvPicPr>
+            <p:blipFill>
+              <a:blip r:embed="rId4"/>
+              <a:stretch>
+                <a:fillRect/>
+              </a:stretch>
+            </p:blipFill>
+            <p:spPr>
+              <a:xfrm>
+                <a:off x="7047360" y="3240110"/>
+                <a:ext cx="2124720" cy="406800"/>
+              </a:xfrm>
+              <a:prstGeom prst="rect">
+                <a:avLst/>
+              </a:prstGeom>
+            </p:spPr>
+          </p:pic>
+        </mc:Fallback>
+      </mc:AlternateContent>
     </p:spTree>
     <p:extLst>
       <p:ext uri="{BB962C8B-B14F-4D97-AF65-F5344CB8AC3E}">
@@ -13506,7 +13467,7 @@
         <p:spPr>
           <a:xfrm>
             <a:off x="838200" y="4830217"/>
-            <a:ext cx="9419492" cy="996170"/>
+            <a:ext cx="9419492" cy="1900007"/>
           </a:xfrm>
           <a:prstGeom prst="rect">
             <a:avLst/>
@@ -13559,7 +13520,31 @@
             </a:r>
             <a:r>
               <a:rPr lang="en-US" sz="2800" dirty="0"/>
-              <a:t> can be awaited before using the Transport.</a:t>
+              <a:t> can be awaited before using the Transport:</a:t>
+            </a:r>
+          </a:p>
+          <a:p>
+            <a:pPr marL="685800" lvl="1" indent="-228600">
+              <a:lnSpc>
+                <a:spcPct val="90000"/>
+              </a:lnSpc>
+              <a:spcBef>
+                <a:spcPts val="1000"/>
+              </a:spcBef>
+              <a:buFont typeface="Arial" panose="020B0604020202020204" pitchFamily="34" charset="0"/>
+              <a:buChar char="•"/>
+            </a:pPr>
+            <a:r>
+              <a:rPr lang="en-US" sz="2800" dirty="0"/>
+              <a:t>At least one connection has been established </a:t>
+            </a:r>
+            <a:r>
+              <a:rPr lang="en-US" sz="2800" b="1" dirty="0"/>
+              <a:t>recently</a:t>
+            </a:r>
+            <a:r>
+              <a:rPr lang="en-US" sz="2800" dirty="0"/>
+              <a:t> with the other side</a:t>
             </a:r>
           </a:p>
         </p:txBody>

--- a/Doc/CK-AppIdentity.pptx
+++ b/Doc/CK-AppIdentity.pptx
@@ -290,7 +290,7 @@
           <a:p>
             <a:fld id="{7EBA75D8-A9A5-4FAF-B563-7A079B630A7E}" type="datetimeFigureOut">
               <a:rPr lang="en-US" smtClean="0"/>
-              <a:t>4/24/2023</a:t>
+              <a:t>4/25/2023</a:t>
             </a:fld>
             <a:endParaRPr lang="en-US"/>
           </a:p>
@@ -2076,7 +2076,7 @@
           <a:p>
             <a:fld id="{7D1F2140-8D48-49AC-AD8D-683E6FF4DC34}" type="datetimeFigureOut">
               <a:rPr lang="en-US" smtClean="0"/>
-              <a:t>4/24/2023</a:t>
+              <a:t>4/25/2023</a:t>
             </a:fld>
             <a:endParaRPr lang="en-US"/>
           </a:p>
@@ -2274,7 +2274,7 @@
           <a:p>
             <a:fld id="{7D1F2140-8D48-49AC-AD8D-683E6FF4DC34}" type="datetimeFigureOut">
               <a:rPr lang="en-US" smtClean="0"/>
-              <a:t>4/24/2023</a:t>
+              <a:t>4/25/2023</a:t>
             </a:fld>
             <a:endParaRPr lang="en-US"/>
           </a:p>
@@ -2482,7 +2482,7 @@
           <a:p>
             <a:fld id="{7D1F2140-8D48-49AC-AD8D-683E6FF4DC34}" type="datetimeFigureOut">
               <a:rPr lang="en-US" smtClean="0"/>
-              <a:t>4/24/2023</a:t>
+              <a:t>4/25/2023</a:t>
             </a:fld>
             <a:endParaRPr lang="en-US"/>
           </a:p>
@@ -2680,7 +2680,7 @@
           <a:p>
             <a:fld id="{7D1F2140-8D48-49AC-AD8D-683E6FF4DC34}" type="datetimeFigureOut">
               <a:rPr lang="en-US" smtClean="0"/>
-              <a:t>4/24/2023</a:t>
+              <a:t>4/25/2023</a:t>
             </a:fld>
             <a:endParaRPr lang="en-US"/>
           </a:p>
@@ -2955,7 +2955,7 @@
           <a:p>
             <a:fld id="{7D1F2140-8D48-49AC-AD8D-683E6FF4DC34}" type="datetimeFigureOut">
               <a:rPr lang="en-US" smtClean="0"/>
-              <a:t>4/24/2023</a:t>
+              <a:t>4/25/2023</a:t>
             </a:fld>
             <a:endParaRPr lang="en-US"/>
           </a:p>
@@ -3220,7 +3220,7 @@
           <a:p>
             <a:fld id="{7D1F2140-8D48-49AC-AD8D-683E6FF4DC34}" type="datetimeFigureOut">
               <a:rPr lang="en-US" smtClean="0"/>
-              <a:t>4/24/2023</a:t>
+              <a:t>4/25/2023</a:t>
             </a:fld>
             <a:endParaRPr lang="en-US"/>
           </a:p>
@@ -3632,7 +3632,7 @@
           <a:p>
             <a:fld id="{7D1F2140-8D48-49AC-AD8D-683E6FF4DC34}" type="datetimeFigureOut">
               <a:rPr lang="en-US" smtClean="0"/>
-              <a:t>4/24/2023</a:t>
+              <a:t>4/25/2023</a:t>
             </a:fld>
             <a:endParaRPr lang="en-US"/>
           </a:p>
@@ -3773,7 +3773,7 @@
           <a:p>
             <a:fld id="{7D1F2140-8D48-49AC-AD8D-683E6FF4DC34}" type="datetimeFigureOut">
               <a:rPr lang="en-US" smtClean="0"/>
-              <a:t>4/24/2023</a:t>
+              <a:t>4/25/2023</a:t>
             </a:fld>
             <a:endParaRPr lang="en-US"/>
           </a:p>
@@ -3886,7 +3886,7 @@
           <a:p>
             <a:fld id="{7D1F2140-8D48-49AC-AD8D-683E6FF4DC34}" type="datetimeFigureOut">
               <a:rPr lang="en-US" smtClean="0"/>
-              <a:t>4/24/2023</a:t>
+              <a:t>4/25/2023</a:t>
             </a:fld>
             <a:endParaRPr lang="en-US"/>
           </a:p>
@@ -4197,7 +4197,7 @@
           <a:p>
             <a:fld id="{7D1F2140-8D48-49AC-AD8D-683E6FF4DC34}" type="datetimeFigureOut">
               <a:rPr lang="en-US" smtClean="0"/>
-              <a:t>4/24/2023</a:t>
+              <a:t>4/25/2023</a:t>
             </a:fld>
             <a:endParaRPr lang="en-US"/>
           </a:p>
@@ -4485,7 +4485,7 @@
           <a:p>
             <a:fld id="{7D1F2140-8D48-49AC-AD8D-683E6FF4DC34}" type="datetimeFigureOut">
               <a:rPr lang="en-US" smtClean="0"/>
-              <a:t>4/24/2023</a:t>
+              <a:t>4/25/2023</a:t>
             </a:fld>
             <a:endParaRPr lang="en-US"/>
           </a:p>
@@ -4726,7 +4726,7 @@
           <a:p>
             <a:fld id="{7D1F2140-8D48-49AC-AD8D-683E6FF4DC34}" type="datetimeFigureOut">
               <a:rPr lang="en-US" smtClean="0"/>
-              <a:t>4/24/2023</a:t>
+              <a:t>4/25/2023</a:t>
             </a:fld>
             <a:endParaRPr lang="en-US"/>
           </a:p>
@@ -11562,7 +11562,7 @@
           <a:p>
             <a:r>
               <a:rPr lang="en-US" dirty="0"/>
-              <a:t>One can add and remove a Feature “from the outside”:</a:t>
+              <a:t>One can only add a Feature “from the outside”:</a:t>
             </a:r>
           </a:p>
           <a:p>
@@ -11625,68 +11625,10 @@
               </a:rPr>
               <a:t> feature )</a:t>
             </a:r>
-          </a:p>
-          <a:p>
-            <a:pPr lvl="1"/>
             <a:r>
               <a:rPr lang="en-US" dirty="0"/>
               <a:t> </a:t>
             </a:r>
-            <a:r>
-              <a:rPr lang="en-US" sz="1900" dirty="0">
-                <a:solidFill>
-                  <a:srgbClr val="0000FF"/>
-                </a:solidFill>
-                <a:latin typeface="Consolas" panose="020B0609020204030204" pitchFamily="49" charset="0"/>
-              </a:rPr>
-              <a:t>void</a:t>
-            </a:r>
-            <a:r>
-              <a:rPr lang="en-US" sz="1900" dirty="0">
-                <a:solidFill>
-                  <a:srgbClr val="000000"/>
-                </a:solidFill>
-                <a:latin typeface="Consolas" panose="020B0609020204030204" pitchFamily="49" charset="0"/>
-              </a:rPr>
-              <a:t> </a:t>
-            </a:r>
-            <a:r>
-              <a:rPr lang="en-US" sz="1900" dirty="0" err="1">
-                <a:solidFill>
-                  <a:srgbClr val="000000"/>
-                </a:solidFill>
-                <a:latin typeface="Consolas" panose="020B0609020204030204" pitchFamily="49" charset="0"/>
-              </a:rPr>
-              <a:t>RemoveFeature</a:t>
-            </a:r>
-            <a:r>
-              <a:rPr lang="en-US" sz="1900" dirty="0">
-                <a:solidFill>
-                  <a:srgbClr val="000000"/>
-                </a:solidFill>
-                <a:latin typeface="Consolas" panose="020B0609020204030204" pitchFamily="49" charset="0"/>
-              </a:rPr>
-              <a:t>( </a:t>
-            </a:r>
-            <a:r>
-              <a:rPr lang="en-US" sz="1900" dirty="0">
-                <a:solidFill>
-                  <a:srgbClr val="0000FF"/>
-                </a:solidFill>
-                <a:latin typeface="Consolas" panose="020B0609020204030204" pitchFamily="49" charset="0"/>
-              </a:rPr>
-              <a:t>object</a:t>
-            </a:r>
-            <a:r>
-              <a:rPr lang="en-US" sz="1900" dirty="0">
-                <a:solidFill>
-                  <a:srgbClr val="000000"/>
-                </a:solidFill>
-                <a:latin typeface="Consolas" panose="020B0609020204030204" pitchFamily="49" charset="0"/>
-              </a:rPr>
-              <a:t> feature )</a:t>
-            </a:r>
-            <a:endParaRPr lang="en-US" dirty="0"/>
           </a:p>
           <a:p>
             <a:pPr lvl="1"/>
@@ -11695,7 +11637,7 @@
           <a:p>
             <a:r>
               <a:rPr lang="en-US" dirty="0"/>
-              <a:t>But Feature are primarily instantiated, configured, added to and removed from the relevant parties thanks to </a:t>
+              <a:t>But Feature are primarily instantiated, configured and added to the relevant parties thanks to </a:t>
             </a:r>
             <a:r>
               <a:rPr lang="en-US" sz="2000" dirty="0" err="1">
@@ -13208,8 +13150,8 @@
           </a:p>
         </p:txBody>
       </p:sp>
-      <mc:AlternateContent xmlns:mc="http://schemas.openxmlformats.org/markup-compatibility/2006">
-        <mc:Choice xmlns:p14="http://schemas.microsoft.com/office/powerpoint/2010/main" Requires="p14">
+      <mc:AlternateContent xmlns:mc="http://schemas.openxmlformats.org/markup-compatibility/2006" xmlns:p14="http://schemas.microsoft.com/office/powerpoint/2010/main">
+        <mc:Choice Requires="p14">
           <p:contentPart p14:bwMode="auto" r:id="rId3">
             <p14:nvContentPartPr>
               <p14:cNvPr id="4" name="Ink 3">
@@ -13228,7 +13170,7 @@
             </p14:xfrm>
           </p:contentPart>
         </mc:Choice>
-        <mc:Fallback>
+        <mc:Fallback xmlns="">
           <p:pic>
             <p:nvPicPr>
               <p:cNvPr id="4" name="Ink 3">

--- a/Doc/CK-AppIdentity.pptx
+++ b/Doc/CK-AppIdentity.pptx
@@ -5,7 +5,7 @@
     <p:sldMasterId id="2147483648" r:id="rId1"/>
   </p:sldMasterIdLst>
   <p:notesMasterIdLst>
-    <p:notesMasterId r:id="rId38"/>
+    <p:notesMasterId r:id="rId39"/>
   </p:notesMasterIdLst>
   <p:sldIdLst>
     <p:sldId id="256" r:id="rId2"/>
@@ -43,7 +43,8 @@
     <p:sldId id="290" r:id="rId34"/>
     <p:sldId id="291" r:id="rId35"/>
     <p:sldId id="292" r:id="rId36"/>
-    <p:sldId id="293" r:id="rId37"/>
+    <p:sldId id="294" r:id="rId37"/>
+    <p:sldId id="293" r:id="rId38"/>
   </p:sldIdLst>
   <p:sldSz cx="12192000" cy="6858000"/>
   <p:notesSz cx="6858000" cy="9144000"/>
@@ -17311,6 +17312,208 @@
 </file>
 
 <file path=ppt/slides/slide36.xml><?xml version="1.0" encoding="utf-8"?>
+<p:sld xmlns:a="http://schemas.openxmlformats.org/drawingml/2006/main" xmlns:r="http://schemas.openxmlformats.org/officeDocument/2006/relationships" xmlns:p="http://schemas.openxmlformats.org/presentationml/2006/main">
+  <p:cSld>
+    <p:spTree>
+      <p:nvGrpSpPr>
+        <p:cNvPr id="1" name=""/>
+        <p:cNvGrpSpPr/>
+        <p:nvPr/>
+      </p:nvGrpSpPr>
+      <p:grpSpPr>
+        <a:xfrm>
+          <a:off x="0" y="0"/>
+          <a:ext cx="0" cy="0"/>
+          <a:chOff x="0" y="0"/>
+          <a:chExt cx="0" cy="0"/>
+        </a:xfrm>
+      </p:grpSpPr>
+      <p:sp>
+        <p:nvSpPr>
+          <p:cNvPr id="2" name="Title 1">
+            <a:extLst>
+              <a:ext uri="{FF2B5EF4-FFF2-40B4-BE49-F238E27FC236}">
+                <a16:creationId xmlns:a16="http://schemas.microsoft.com/office/drawing/2014/main" id="{DEC82137-8E30-732F-A684-E7B1E4656A8E}"/>
+              </a:ext>
+            </a:extLst>
+          </p:cNvPr>
+          <p:cNvSpPr>
+            <a:spLocks noGrp="1"/>
+          </p:cNvSpPr>
+          <p:nvPr>
+            <p:ph type="title"/>
+          </p:nvPr>
+        </p:nvSpPr>
+        <p:spPr/>
+        <p:txBody>
+          <a:bodyPr/>
+          <a:lstStyle/>
+          <a:p>
+            <a:r>
+              <a:rPr lang="en-US" dirty="0" err="1"/>
+              <a:t>CrisSession</a:t>
+            </a:r>
+            <a:endParaRPr lang="en-US" dirty="0"/>
+          </a:p>
+        </p:txBody>
+      </p:sp>
+      <p:sp>
+        <p:nvSpPr>
+          <p:cNvPr id="3" name="Content Placeholder 2">
+            <a:extLst>
+              <a:ext uri="{FF2B5EF4-FFF2-40B4-BE49-F238E27FC236}">
+                <a16:creationId xmlns:a16="http://schemas.microsoft.com/office/drawing/2014/main" id="{1AE3B35E-C4A6-EA97-FFAD-FE9D1FB60395}"/>
+              </a:ext>
+            </a:extLst>
+          </p:cNvPr>
+          <p:cNvSpPr>
+            <a:spLocks noGrp="1"/>
+          </p:cNvSpPr>
+          <p:nvPr>
+            <p:ph idx="1"/>
+          </p:nvPr>
+        </p:nvSpPr>
+        <p:spPr/>
+        <p:txBody>
+          <a:bodyPr>
+            <a:normAutofit lnSpcReduction="10000"/>
+          </a:bodyPr>
+          <a:lstStyle/>
+          <a:p>
+            <a:r>
+              <a:rPr lang="en-US" dirty="0"/>
+              <a:t>Non concurrent, non reentrant (just like the </a:t>
+            </a:r>
+            <a:r>
+              <a:rPr lang="en-US" dirty="0" err="1"/>
+              <a:t>ActivityMonitor</a:t>
+            </a:r>
+            <a:r>
+              <a:rPr lang="en-US" dirty="0"/>
+              <a:t>)</a:t>
+            </a:r>
+          </a:p>
+          <a:p>
+            <a:r>
+              <a:rPr lang="en-US" dirty="0"/>
+              <a:t>Exposes a </a:t>
+            </a:r>
+            <a:r>
+              <a:rPr lang="en-US" dirty="0" err="1"/>
+              <a:t>ActivityMonitor</a:t>
+            </a:r>
+            <a:endParaRPr lang="en-US" dirty="0"/>
+          </a:p>
+          <a:p>
+            <a:r>
+              <a:rPr lang="en-US" dirty="0"/>
+              <a:t>Captures an initial command followed by events and subordinate sessions.</a:t>
+            </a:r>
+          </a:p>
+          <a:p>
+            <a:r>
+              <a:rPr lang="en-US" dirty="0"/>
+              <a:t>A session must be explicitly closed.</a:t>
+            </a:r>
+          </a:p>
+          <a:p>
+            <a:pPr lvl="1"/>
+            <a:r>
+              <a:rPr lang="en-US" dirty="0"/>
+              <a:t>This handles “Super Asynchronous” pattern:</a:t>
+            </a:r>
+          </a:p>
+          <a:p>
+            <a:pPr lvl="2"/>
+            <a:r>
+              <a:rPr lang="en-US" dirty="0"/>
+              <a:t>A “</a:t>
+            </a:r>
+            <a:r>
+              <a:rPr lang="en-US" dirty="0" err="1"/>
+              <a:t>StartXXX</a:t>
+            </a:r>
+            <a:r>
+              <a:rPr lang="en-US" dirty="0"/>
+              <a:t>” command starts a remote “activity”.</a:t>
+            </a:r>
+          </a:p>
+          <a:p>
+            <a:pPr lvl="2"/>
+            <a:r>
+              <a:rPr lang="en-US" dirty="0"/>
+              <a:t>A “</a:t>
+            </a:r>
+            <a:r>
+              <a:rPr lang="en-US" dirty="0" err="1"/>
+              <a:t>StopXXX</a:t>
+            </a:r>
+            <a:r>
+              <a:rPr lang="en-US" dirty="0"/>
+              <a:t>” command stops it.</a:t>
+            </a:r>
+          </a:p>
+          <a:p>
+            <a:pPr lvl="1"/>
+            <a:r>
+              <a:rPr lang="en-US" dirty="0"/>
+              <a:t>Optionally, the availability of the </a:t>
+            </a:r>
+            <a:r>
+              <a:rPr lang="en-US" dirty="0" err="1"/>
+              <a:t>TResult</a:t>
+            </a:r>
+            <a:r>
+              <a:rPr lang="en-US" dirty="0"/>
+              <a:t> of a </a:t>
+            </a:r>
+            <a:r>
+              <a:rPr lang="en-US" dirty="0" err="1"/>
+              <a:t>ICommand</a:t>
+            </a:r>
+            <a:r>
+              <a:rPr lang="en-US" dirty="0"/>
+              <a:t>&lt;</a:t>
+            </a:r>
+            <a:r>
+              <a:rPr lang="en-US" dirty="0" err="1"/>
+              <a:t>TResult</a:t>
+            </a:r>
+            <a:r>
+              <a:rPr lang="en-US" dirty="0"/>
+              <a:t>&gt; automatically closes the session.</a:t>
+            </a:r>
+          </a:p>
+          <a:p>
+            <a:r>
+              <a:rPr lang="en-US" dirty="0"/>
+              <a:t>A session seems to capture the result(s) of a </a:t>
+            </a:r>
+            <a:r>
+              <a:rPr lang="en-US" b="1" dirty="0"/>
+              <a:t>Workflow</a:t>
+            </a:r>
+            <a:r>
+              <a:rPr lang="en-US" dirty="0"/>
+              <a:t>!</a:t>
+            </a:r>
+          </a:p>
+        </p:txBody>
+      </p:sp>
+    </p:spTree>
+    <p:extLst>
+      <p:ext uri="{BB962C8B-B14F-4D97-AF65-F5344CB8AC3E}">
+        <p14:creationId xmlns:p14="http://schemas.microsoft.com/office/powerpoint/2010/main" val="125256644"/>
+      </p:ext>
+    </p:extLst>
+  </p:cSld>
+  <p:clrMapOvr>
+    <a:masterClrMapping/>
+  </p:clrMapOvr>
+</p:sld>
+</file>
+
+<file path=ppt/slides/slide37.xml><?xml version="1.0" encoding="utf-8"?>
 <p:sld xmlns:a="http://schemas.openxmlformats.org/drawingml/2006/main" xmlns:r="http://schemas.openxmlformats.org/officeDocument/2006/relationships" xmlns:p="http://schemas.openxmlformats.org/presentationml/2006/main">
   <p:cSld>
     <p:spTree>

--- a/Doc/CK-AppIdentity.pptx
+++ b/Doc/CK-AppIdentity.pptx
@@ -5,7 +5,7 @@
     <p:sldMasterId id="2147483648" r:id="rId1"/>
   </p:sldMasterIdLst>
   <p:notesMasterIdLst>
-    <p:notesMasterId r:id="rId39"/>
+    <p:notesMasterId r:id="rId41"/>
   </p:notesMasterIdLst>
   <p:sldIdLst>
     <p:sldId id="256" r:id="rId2"/>
@@ -24,27 +24,29 @@
     <p:sldId id="271" r:id="rId15"/>
     <p:sldId id="272" r:id="rId16"/>
     <p:sldId id="273" r:id="rId17"/>
-    <p:sldId id="274" r:id="rId18"/>
-    <p:sldId id="275" r:id="rId19"/>
-    <p:sldId id="276" r:id="rId20"/>
-    <p:sldId id="277" r:id="rId21"/>
-    <p:sldId id="278" r:id="rId22"/>
-    <p:sldId id="279" r:id="rId23"/>
-    <p:sldId id="280" r:id="rId24"/>
-    <p:sldId id="282" r:id="rId25"/>
-    <p:sldId id="281" r:id="rId26"/>
-    <p:sldId id="283" r:id="rId27"/>
-    <p:sldId id="284" r:id="rId28"/>
-    <p:sldId id="285" r:id="rId29"/>
-    <p:sldId id="286" r:id="rId30"/>
-    <p:sldId id="287" r:id="rId31"/>
-    <p:sldId id="288" r:id="rId32"/>
-    <p:sldId id="289" r:id="rId33"/>
-    <p:sldId id="290" r:id="rId34"/>
-    <p:sldId id="291" r:id="rId35"/>
-    <p:sldId id="292" r:id="rId36"/>
-    <p:sldId id="294" r:id="rId37"/>
-    <p:sldId id="293" r:id="rId38"/>
+    <p:sldId id="295" r:id="rId18"/>
+    <p:sldId id="296" r:id="rId19"/>
+    <p:sldId id="274" r:id="rId20"/>
+    <p:sldId id="275" r:id="rId21"/>
+    <p:sldId id="276" r:id="rId22"/>
+    <p:sldId id="277" r:id="rId23"/>
+    <p:sldId id="278" r:id="rId24"/>
+    <p:sldId id="279" r:id="rId25"/>
+    <p:sldId id="280" r:id="rId26"/>
+    <p:sldId id="282" r:id="rId27"/>
+    <p:sldId id="281" r:id="rId28"/>
+    <p:sldId id="283" r:id="rId29"/>
+    <p:sldId id="284" r:id="rId30"/>
+    <p:sldId id="285" r:id="rId31"/>
+    <p:sldId id="286" r:id="rId32"/>
+    <p:sldId id="287" r:id="rId33"/>
+    <p:sldId id="288" r:id="rId34"/>
+    <p:sldId id="289" r:id="rId35"/>
+    <p:sldId id="290" r:id="rId36"/>
+    <p:sldId id="291" r:id="rId37"/>
+    <p:sldId id="292" r:id="rId38"/>
+    <p:sldId id="294" r:id="rId39"/>
+    <p:sldId id="293" r:id="rId40"/>
   </p:sldIdLst>
   <p:sldSz cx="12192000" cy="6858000"/>
   <p:notesSz cx="6858000" cy="9144000"/>
@@ -291,7 +293,7 @@
           <a:p>
             <a:fld id="{7EBA75D8-A9A5-4FAF-B563-7A079B630A7E}" type="datetimeFigureOut">
               <a:rPr lang="en-US" smtClean="0"/>
-              <a:t>4/25/2023</a:t>
+              <a:t>6/5/2023</a:t>
             </a:fld>
             <a:endParaRPr lang="en-US"/>
           </a:p>
@@ -763,7 +765,7 @@
           <a:p>
             <a:fld id="{E05EDB92-2FE2-4164-AA27-D03258A20DF4}" type="slidenum">
               <a:rPr lang="en-US" smtClean="0"/>
-              <a:t>20</a:t>
+              <a:t>22</a:t>
             </a:fld>
             <a:endParaRPr lang="en-US"/>
           </a:p>
@@ -847,7 +849,7 @@
           <a:p>
             <a:fld id="{E05EDB92-2FE2-4164-AA27-D03258A20DF4}" type="slidenum">
               <a:rPr lang="en-US" smtClean="0"/>
-              <a:t>21</a:t>
+              <a:t>23</a:t>
             </a:fld>
             <a:endParaRPr lang="en-US"/>
           </a:p>
@@ -945,7 +947,7 @@
           <a:p>
             <a:fld id="{E05EDB92-2FE2-4164-AA27-D03258A20DF4}" type="slidenum">
               <a:rPr lang="en-US" smtClean="0"/>
-              <a:t>24</a:t>
+              <a:t>26</a:t>
             </a:fld>
             <a:endParaRPr lang="en-US"/>
           </a:p>
@@ -1051,7 +1053,7 @@
           <a:p>
             <a:fld id="{E05EDB92-2FE2-4164-AA27-D03258A20DF4}" type="slidenum">
               <a:rPr lang="en-US" smtClean="0"/>
-              <a:t>26</a:t>
+              <a:t>28</a:t>
             </a:fld>
             <a:endParaRPr lang="en-US"/>
           </a:p>
@@ -1317,7 +1319,7 @@
                 </a:solidFill>
                 <a:latin typeface="Consolas" panose="020B0609020204030204" pitchFamily="49" charset="0"/>
               </a:rPr>
-              <a:t>    as a one bit discriminator, typically between a regular data message and one (or more) control message.</a:t>
+              <a:t>    as a one-bit discriminator, typically between a regular data message and one (or more) control message.</a:t>
             </a:r>
           </a:p>
           <a:p>
@@ -1494,29 +1496,7 @@
                 </a:solidFill>
                 <a:latin typeface="Consolas" panose="020B0609020204030204" pitchFamily="49" charset="0"/>
               </a:rPr>
-              <a:t>A protocol defines how the message is encoded and how they are exchanged: by merging these 2 concepts here,</a:t>
-            </a:r>
-          </a:p>
-          <a:p>
-            <a:r>
-              <a:rPr lang="en-US" sz="1800" dirty="0">
-                <a:solidFill>
-                  <a:srgbClr val="000000"/>
-                </a:solidFill>
-                <a:latin typeface="Consolas" panose="020B0609020204030204" pitchFamily="49" charset="0"/>
-              </a:rPr>
-              <a:t>we greatly simplify the implementation and the understandability of the Transport layer. The protocol simply</a:t>
-            </a:r>
-          </a:p>
-          <a:p>
-            <a:r>
-              <a:rPr lang="en-US" sz="1800" dirty="0">
-                <a:solidFill>
-                  <a:srgbClr val="000000"/>
-                </a:solidFill>
-                <a:latin typeface="Consolas" panose="020B0609020204030204" pitchFamily="49" charset="0"/>
-              </a:rPr>
-              <a:t>defines the encoding it uses.</a:t>
+              <a:t>A protocol defines how the message is encoded and how they are exchanged: by merging these 2 concepts here, we greatly simplify the implementation and the understandability of the Transport layer. The protocol simply defines the encoding it uses.</a:t>
             </a:r>
           </a:p>
         </p:txBody>
@@ -1538,7 +1518,7 @@
           <a:p>
             <a:fld id="{E05EDB92-2FE2-4164-AA27-D03258A20DF4}" type="slidenum">
               <a:rPr lang="en-US" smtClean="0"/>
-              <a:t>27</a:t>
+              <a:t>29</a:t>
             </a:fld>
             <a:endParaRPr lang="en-US"/>
           </a:p>
@@ -1743,7 +1723,7 @@
           <a:p>
             <a:fld id="{E05EDB92-2FE2-4164-AA27-D03258A20DF4}" type="slidenum">
               <a:rPr lang="en-US" smtClean="0"/>
-              <a:t>28</a:t>
+              <a:t>30</a:t>
             </a:fld>
             <a:endParaRPr lang="en-US"/>
           </a:p>
@@ -1827,7 +1807,7 @@
           <a:p>
             <a:fld id="{E05EDB92-2FE2-4164-AA27-D03258A20DF4}" type="slidenum">
               <a:rPr lang="en-US" smtClean="0"/>
-              <a:t>30</a:t>
+              <a:t>32</a:t>
             </a:fld>
             <a:endParaRPr lang="en-US"/>
           </a:p>
@@ -1911,7 +1891,7 @@
           <a:p>
             <a:fld id="{E05EDB92-2FE2-4164-AA27-D03258A20DF4}" type="slidenum">
               <a:rPr lang="en-US" smtClean="0"/>
-              <a:t>31</a:t>
+              <a:t>33</a:t>
             </a:fld>
             <a:endParaRPr lang="en-US"/>
           </a:p>
@@ -2077,7 +2057,7 @@
           <a:p>
             <a:fld id="{7D1F2140-8D48-49AC-AD8D-683E6FF4DC34}" type="datetimeFigureOut">
               <a:rPr lang="en-US" smtClean="0"/>
-              <a:t>4/25/2023</a:t>
+              <a:t>6/5/2023</a:t>
             </a:fld>
             <a:endParaRPr lang="en-US"/>
           </a:p>
@@ -2275,7 +2255,7 @@
           <a:p>
             <a:fld id="{7D1F2140-8D48-49AC-AD8D-683E6FF4DC34}" type="datetimeFigureOut">
               <a:rPr lang="en-US" smtClean="0"/>
-              <a:t>4/25/2023</a:t>
+              <a:t>6/5/2023</a:t>
             </a:fld>
             <a:endParaRPr lang="en-US"/>
           </a:p>
@@ -2483,7 +2463,7 @@
           <a:p>
             <a:fld id="{7D1F2140-8D48-49AC-AD8D-683E6FF4DC34}" type="datetimeFigureOut">
               <a:rPr lang="en-US" smtClean="0"/>
-              <a:t>4/25/2023</a:t>
+              <a:t>6/5/2023</a:t>
             </a:fld>
             <a:endParaRPr lang="en-US"/>
           </a:p>
@@ -2681,7 +2661,7 @@
           <a:p>
             <a:fld id="{7D1F2140-8D48-49AC-AD8D-683E6FF4DC34}" type="datetimeFigureOut">
               <a:rPr lang="en-US" smtClean="0"/>
-              <a:t>4/25/2023</a:t>
+              <a:t>6/5/2023</a:t>
             </a:fld>
             <a:endParaRPr lang="en-US"/>
           </a:p>
@@ -2956,7 +2936,7 @@
           <a:p>
             <a:fld id="{7D1F2140-8D48-49AC-AD8D-683E6FF4DC34}" type="datetimeFigureOut">
               <a:rPr lang="en-US" smtClean="0"/>
-              <a:t>4/25/2023</a:t>
+              <a:t>6/5/2023</a:t>
             </a:fld>
             <a:endParaRPr lang="en-US"/>
           </a:p>
@@ -3221,7 +3201,7 @@
           <a:p>
             <a:fld id="{7D1F2140-8D48-49AC-AD8D-683E6FF4DC34}" type="datetimeFigureOut">
               <a:rPr lang="en-US" smtClean="0"/>
-              <a:t>4/25/2023</a:t>
+              <a:t>6/5/2023</a:t>
             </a:fld>
             <a:endParaRPr lang="en-US"/>
           </a:p>
@@ -3633,7 +3613,7 @@
           <a:p>
             <a:fld id="{7D1F2140-8D48-49AC-AD8D-683E6FF4DC34}" type="datetimeFigureOut">
               <a:rPr lang="en-US" smtClean="0"/>
-              <a:t>4/25/2023</a:t>
+              <a:t>6/5/2023</a:t>
             </a:fld>
             <a:endParaRPr lang="en-US"/>
           </a:p>
@@ -3774,7 +3754,7 @@
           <a:p>
             <a:fld id="{7D1F2140-8D48-49AC-AD8D-683E6FF4DC34}" type="datetimeFigureOut">
               <a:rPr lang="en-US" smtClean="0"/>
-              <a:t>4/25/2023</a:t>
+              <a:t>6/5/2023</a:t>
             </a:fld>
             <a:endParaRPr lang="en-US"/>
           </a:p>
@@ -3887,7 +3867,7 @@
           <a:p>
             <a:fld id="{7D1F2140-8D48-49AC-AD8D-683E6FF4DC34}" type="datetimeFigureOut">
               <a:rPr lang="en-US" smtClean="0"/>
-              <a:t>4/25/2023</a:t>
+              <a:t>6/5/2023</a:t>
             </a:fld>
             <a:endParaRPr lang="en-US"/>
           </a:p>
@@ -4198,7 +4178,7 @@
           <a:p>
             <a:fld id="{7D1F2140-8D48-49AC-AD8D-683E6FF4DC34}" type="datetimeFigureOut">
               <a:rPr lang="en-US" smtClean="0"/>
-              <a:t>4/25/2023</a:t>
+              <a:t>6/5/2023</a:t>
             </a:fld>
             <a:endParaRPr lang="en-US"/>
           </a:p>
@@ -4486,7 +4466,7 @@
           <a:p>
             <a:fld id="{7D1F2140-8D48-49AC-AD8D-683E6FF4DC34}" type="datetimeFigureOut">
               <a:rPr lang="en-US" smtClean="0"/>
-              <a:t>4/25/2023</a:t>
+              <a:t>6/5/2023</a:t>
             </a:fld>
             <a:endParaRPr lang="en-US"/>
           </a:p>
@@ -4727,7 +4707,7 @@
           <a:p>
             <a:fld id="{7D1F2140-8D48-49AC-AD8D-683E6FF4DC34}" type="datetimeFigureOut">
               <a:rPr lang="en-US" smtClean="0"/>
-              <a:t>4/25/2023</a:t>
+              <a:t>6/5/2023</a:t>
             </a:fld>
             <a:endParaRPr lang="en-US"/>
           </a:p>
@@ -5403,7 +5383,7 @@
                 <a:latin typeface="Courier New" panose="02070309020205020404" pitchFamily="49" charset="0"/>
                 <a:cs typeface="Courier New" panose="02070309020205020404" pitchFamily="49" charset="0"/>
               </a:rPr>
-              <a:t>": "Production",</a:t>
+              <a:t>": "#Production",</a:t>
             </a:r>
           </a:p>
           <a:p>
@@ -7271,7 +7251,7 @@
             <p:ph idx="1"/>
             <p:extLst>
               <p:ext uri="{D42A27DB-BD31-4B8C-83A1-F6EECF244321}">
-                <p14:modId xmlns:p14="http://schemas.microsoft.com/office/powerpoint/2010/main" val="3912494569"/>
+                <p14:modId xmlns:p14="http://schemas.microsoft.com/office/powerpoint/2010/main" val="2899310465"/>
               </p:ext>
             </p:extLst>
           </p:nvPr>
@@ -7349,7 +7329,7 @@
                       </a:r>
                       <a:r>
                         <a:rPr lang="en-US" sz="1600" dirty="0"/>
-                        <a:t>/Production/OneCS1</a:t>
+                        <a:t>/OneCS1/#Production</a:t>
                       </a:r>
                     </a:p>
                   </a:txBody>
@@ -7394,13 +7374,16 @@
                       </a:r>
                       <a:r>
                         <a:rPr lang="en-US" sz="1600" dirty="0"/>
-                        <a:t>/Staging/</a:t>
+                        <a:t>/</a:t>
                       </a:r>
                       <a:r>
                         <a:rPr lang="en-US" sz="1600" dirty="0" err="1"/>
                         <a:t>LaToulousaine</a:t>
                       </a:r>
-                      <a:endParaRPr lang="en-US" sz="1600" dirty="0"/>
+                      <a:r>
+                        <a:rPr lang="en-US" sz="1600" dirty="0"/>
+                        <a:t>/#Staging</a:t>
+                      </a:r>
                     </a:p>
                   </a:txBody>
                   <a:tcPr/>
@@ -7444,13 +7427,16 @@
                       </a:r>
                       <a:r>
                         <a:rPr lang="en-US" sz="1600" dirty="0"/>
-                        <a:t>/Staging/</a:t>
+                        <a:t>/</a:t>
                       </a:r>
                       <a:r>
                         <a:rPr lang="en-US" sz="1600" dirty="0" err="1"/>
                         <a:t>LaToulousaine</a:t>
                       </a:r>
-                      <a:endParaRPr lang="en-US" sz="1600" dirty="0"/>
+                      <a:r>
+                        <a:rPr lang="en-US" sz="1600" dirty="0"/>
+                        <a:t>/#Staging</a:t>
+                      </a:r>
                     </a:p>
                   </a:txBody>
                   <a:tcPr/>
@@ -7503,7 +7489,7 @@
                       </a:r>
                       <a:r>
                         <a:rPr lang="en-US" sz="1600" dirty="0"/>
-                        <a:t>/Staging/Trolley1</a:t>
+                        <a:t>/Trolley1/#Staging</a:t>
                       </a:r>
                       <a:br>
                         <a:rPr lang="en-US" sz="1600" dirty="0"/>
@@ -7514,7 +7500,7 @@
                       </a:r>
                       <a:r>
                         <a:rPr lang="en-US" sz="1600" dirty="0"/>
-                        <a:t>/Staging/Trolley2</a:t>
+                        <a:t>/Trolley2/#Staging</a:t>
                       </a:r>
                       <a:br>
                         <a:rPr lang="en-US" sz="1600" dirty="0"/>
@@ -7636,7 +7622,7 @@
                 <a:latin typeface="Courier New" panose="02070309020205020404" pitchFamily="49" charset="0"/>
                 <a:cs typeface="Courier New" panose="02070309020205020404" pitchFamily="49" charset="0"/>
               </a:rPr>
-              <a:t>"Environment": "Production"</a:t>
+              <a:t>"Environment": "#Production"</a:t>
             </a:r>
             <a:r>
               <a:rPr lang="en-US" sz="1400" dirty="0">
@@ -7735,7 +7721,7 @@
                 <a:latin typeface="Courier New" panose="02070309020205020404" pitchFamily="49" charset="0"/>
                 <a:cs typeface="Courier New" panose="02070309020205020404" pitchFamily="49" charset="0"/>
               </a:rPr>
-              <a:t>"Environment": "Staging"</a:t>
+              <a:t>"Environment": "#Staging"</a:t>
             </a:r>
             <a:r>
               <a:rPr lang="en-US" sz="1400" dirty="0">
@@ -7900,7 +7886,7 @@
                 <a:latin typeface="Courier New" panose="02070309020205020404" pitchFamily="49" charset="0"/>
                 <a:cs typeface="Courier New" panose="02070309020205020404" pitchFamily="49" charset="0"/>
               </a:rPr>
-              <a:t>"Environment": "Staging"</a:t>
+              <a:t>"Environment": "#Staging"</a:t>
             </a:r>
             <a:r>
               <a:rPr lang="en-US" sz="1400" dirty="0">
@@ -8003,7 +7989,7 @@
                 <a:latin typeface="Courier New" panose="02070309020205020404" pitchFamily="49" charset="0"/>
                 <a:cs typeface="Courier New" panose="02070309020205020404" pitchFamily="49" charset="0"/>
               </a:rPr>
-              <a:t>    "Environment": "Staging"</a:t>
+              <a:t>    "Environment": "#Staging"</a:t>
             </a:r>
             <a:r>
               <a:rPr lang="en-US" sz="1400" dirty="0">
@@ -8544,7 +8530,15 @@
             </a:r>
             <a:r>
               <a:rPr lang="en-US" dirty="0"/>
-              <a:t> is injected after the first part of the domain name.</a:t>
+              <a:t> </a:t>
+            </a:r>
+            <a:r>
+              <a:rPr lang="en-US" i="1" dirty="0"/>
+              <a:t>can</a:t>
+            </a:r>
+            <a:r>
+              <a:rPr lang="en-US" dirty="0"/>
+              <a:t> appear anywhere in the full name (with its # prefix).</a:t>
             </a:r>
           </a:p>
         </p:txBody>
@@ -8625,8 +8619,8 @@
         </p:nvSpPr>
         <p:spPr>
           <a:xfrm>
-            <a:off x="838200" y="1825624"/>
-            <a:ext cx="10515600" cy="4857979"/>
+            <a:off x="838200" y="1480930"/>
+            <a:ext cx="10515600" cy="5202673"/>
           </a:xfrm>
         </p:spPr>
         <p:txBody>
@@ -8675,7 +8669,7 @@
             </a:r>
             <a:r>
               <a:rPr lang="en-US" dirty="0"/>
-              <a:t>.</a:t>
+              <a:t> where the Environment can be everywhere (its “normal” position is at the end).</a:t>
             </a:r>
           </a:p>
           <a:p>
@@ -8706,7 +8700,7 @@
                 <a:effectLst/>
                 <a:latin typeface="Segoe UI" panose="020B0502040204020203" pitchFamily="34" charset="0"/>
               </a:rPr>
-              <a:t>Undefined/Development/Unknown”.</a:t>
+              <a:t>Undefined/Unknown/#Development”.</a:t>
             </a:r>
             <a:endParaRPr lang="en-US" dirty="0"/>
           </a:p>
@@ -8730,13 +8724,13 @@
           <p:nvPr>
             <p:extLst>
               <p:ext uri="{D42A27DB-BD31-4B8C-83A1-F6EECF244321}">
-                <p14:modId xmlns:p14="http://schemas.microsoft.com/office/powerpoint/2010/main" val="2771560791"/>
+                <p14:modId xmlns:p14="http://schemas.microsoft.com/office/powerpoint/2010/main" val="321058134"/>
               </p:ext>
             </p:extLst>
           </p:nvPr>
         </p:nvGraphicFramePr>
         <p:xfrm>
-          <a:off x="1198125" y="3239311"/>
+          <a:off x="1247820" y="3279067"/>
           <a:ext cx="8977007" cy="2216417"/>
         </p:xfrm>
         <a:graphic>
@@ -8858,7 +8852,7 @@
                       </a:r>
                       <a:r>
                         <a:rPr lang="en-US" dirty="0"/>
-                        <a:t>/Production/France/Toulouse/Trolley45</a:t>
+                        <a:t>/France/Toulouse/Trolley45/#Production</a:t>
                       </a:r>
                     </a:p>
                     <a:p>
@@ -8940,13 +8934,8 @@
                       </a:r>
                       <a:r>
                         <a:rPr lang="en-US" dirty="0"/>
-                        <a:t>/Development/London/</a:t>
+                        <a:t>/#Development/London/RobotTrolley</a:t>
                       </a:r>
-                      <a:r>
-                        <a:rPr lang="en-US" dirty="0" err="1"/>
-                        <a:t>RobotTrolley</a:t>
-                      </a:r>
-                      <a:endParaRPr lang="en-US" dirty="0"/>
                     </a:p>
                     <a:p>
                       <a:endParaRPr lang="en-US" dirty="0"/>
@@ -8999,7 +8988,7 @@
           <p:cNvPr id="2" name="Title 1">
             <a:extLst>
               <a:ext uri="{FF2B5EF4-FFF2-40B4-BE49-F238E27FC236}">
-                <a16:creationId xmlns:a16="http://schemas.microsoft.com/office/drawing/2014/main" id="{F0ABB2F6-6A3B-0600-9CA6-236A6AB60DE2}"/>
+                <a16:creationId xmlns:a16="http://schemas.microsoft.com/office/drawing/2014/main" id="{87AB0854-8165-18FB-913C-8F6391939BB9}"/>
               </a:ext>
             </a:extLst>
           </p:cNvPr>
@@ -9010,14 +8999,19 @@
             <p:ph type="title"/>
           </p:nvPr>
         </p:nvSpPr>
-        <p:spPr/>
+        <p:spPr>
+          <a:xfrm>
+            <a:off x="838199" y="365125"/>
+            <a:ext cx="10969487" cy="1325563"/>
+          </a:xfrm>
+        </p:spPr>
         <p:txBody>
           <a:bodyPr/>
           <a:lstStyle/>
           <a:p>
             <a:r>
               <a:rPr lang="en-US" dirty="0"/>
-              <a:t>Security and privacy</a:t>
+              <a:t>Organization, Domain, Party, Domain Controller</a:t>
             </a:r>
           </a:p>
         </p:txBody>
@@ -9027,7 +9021,7 @@
           <p:cNvPr id="3" name="Content Placeholder 2">
             <a:extLst>
               <a:ext uri="{FF2B5EF4-FFF2-40B4-BE49-F238E27FC236}">
-                <a16:creationId xmlns:a16="http://schemas.microsoft.com/office/drawing/2014/main" id="{05AD752E-3F69-B30A-607A-3285A0B1B362}"/>
+                <a16:creationId xmlns:a16="http://schemas.microsoft.com/office/drawing/2014/main" id="{0C367CDE-EC1E-2983-5189-AA8561DE52F7}"/>
               </a:ext>
             </a:extLst>
           </p:cNvPr>
@@ -9038,65 +9032,642 @@
             <p:ph idx="1"/>
           </p:nvPr>
         </p:nvSpPr>
-        <p:spPr/>
+        <p:spPr>
+          <a:xfrm>
+            <a:off x="838200" y="1785868"/>
+            <a:ext cx="10515600" cy="4351338"/>
+          </a:xfrm>
+        </p:spPr>
         <p:txBody>
-          <a:bodyPr/>
+          <a:bodyPr>
+            <a:normAutofit/>
+          </a:bodyPr>
           <a:lstStyle/>
           <a:p>
             <a:r>
-              <a:rPr lang="en-US" dirty="0"/>
-              <a:t>No keys appear in the configuration.</a:t>
-            </a:r>
-          </a:p>
-          <a:p>
-            <a:r>
-              <a:rPr lang="en-US" dirty="0"/>
-              <a:t>At least one X509 certificate must be available per Party.</a:t>
-            </a:r>
-          </a:p>
-          <a:p>
-            <a:pPr lvl="1"/>
-            <a:r>
               <a:rPr lang="en-US" dirty="0" err="1"/>
-              <a:t>SaasOneCS</a:t>
-            </a:r>
-            <a:r>
-              <a:rPr lang="en-US" dirty="0"/>
-              <a:t>/Production/OneCS1 can work with a single certificate.</a:t>
-            </a:r>
-          </a:p>
-          <a:p>
-            <a:r>
-              <a:rPr lang="en-US" dirty="0"/>
-              <a:t>Keys are managed “by design” in a store by </a:t>
-            </a:r>
+              <a:t>LaToulousaine</a:t>
+            </a:r>
+            <a:endParaRPr lang="en-US" dirty="0"/>
+          </a:p>
+          <a:p>
             <a:r>
               <a:rPr lang="en-US" dirty="0" err="1"/>
-              <a:t>CK.AppIdentity</a:t>
-            </a:r>
-            <a:r>
-              <a:rPr lang="en-US" dirty="0"/>
-              <a:t>.</a:t>
-            </a:r>
-          </a:p>
-          <a:p>
-            <a:pPr lvl="1"/>
-            <a:r>
-              <a:rPr lang="en-US" dirty="0"/>
-              <a:t>The simplest store is a folder with folders and/or files that contain the certificate files.</a:t>
-            </a:r>
-          </a:p>
-          <a:p>
-            <a:pPr lvl="1"/>
-            <a:r>
-              <a:rPr lang="en-US" dirty="0"/>
-              <a:t>Stronger key store may be implemented later.</a:t>
-            </a:r>
-          </a:p>
-          <a:p>
-            <a:r>
-              <a:rPr lang="en-US" dirty="0"/>
-              <a:t>Any relationship between 2 parties can be protected with a dedicated pair of keys.</a:t>
+              <a:t>LaToulousaine</a:t>
+            </a:r>
+            <a:r>
+              <a:rPr lang="en-US" dirty="0"/>
+              <a:t>/France</a:t>
+            </a:r>
+          </a:p>
+          <a:p>
+            <a:r>
+              <a:rPr lang="en-US" dirty="0" err="1"/>
+              <a:t>LaToulousaine</a:t>
+            </a:r>
+            <a:r>
+              <a:rPr lang="en-US" dirty="0"/>
+              <a:t>/France/Albi</a:t>
+            </a:r>
+          </a:p>
+          <a:p>
+            <a:r>
+              <a:rPr lang="en-US" dirty="0" err="1"/>
+              <a:t>LaToulousaine</a:t>
+            </a:r>
+            <a:r>
+              <a:rPr lang="en-US" dirty="0"/>
+              <a:t>/ France/Albi/Trolley1</a:t>
+            </a:r>
+          </a:p>
+          <a:p>
+            <a:r>
+              <a:rPr lang="en-US" dirty="0" err="1"/>
+              <a:t>LaToulousaine</a:t>
+            </a:r>
+            <a:r>
+              <a:rPr lang="en-US" dirty="0"/>
+              <a:t>/</a:t>
+            </a:r>
+            <a:r>
+              <a:rPr lang="en-US" dirty="0" err="1"/>
+              <a:t>LaToulousaine</a:t>
+            </a:r>
+            <a:endParaRPr lang="en-US" dirty="0"/>
+          </a:p>
+          <a:p>
+            <a:r>
+              <a:rPr lang="en-US" strike="sngStrike" dirty="0" err="1"/>
+              <a:t>LaToulousaine</a:t>
+            </a:r>
+            <a:r>
+              <a:rPr lang="en-US" strike="sngStrike" dirty="0"/>
+              <a:t>/</a:t>
+            </a:r>
+            <a:r>
+              <a:rPr lang="en-US" strike="sngStrike" dirty="0" err="1"/>
+              <a:t>LaToulousaine</a:t>
+            </a:r>
+            <a:r>
+              <a:rPr lang="en-US" strike="sngStrike" dirty="0"/>
+              <a:t>/Anything</a:t>
+            </a:r>
+          </a:p>
+          <a:p>
+            <a:r>
+              <a:rPr lang="en-US" strike="sngStrike" dirty="0" err="1"/>
+              <a:t>LaToulousaine</a:t>
+            </a:r>
+            <a:r>
+              <a:rPr lang="en-US" strike="sngStrike" dirty="0"/>
+              <a:t>/France/</a:t>
+            </a:r>
+            <a:r>
+              <a:rPr lang="en-US" strike="sngStrike" dirty="0" err="1"/>
+              <a:t>LaToulousaine</a:t>
+            </a:r>
+            <a:r>
+              <a:rPr lang="en-US" strike="sngStrike" dirty="0"/>
+              <a:t>/Anything</a:t>
+            </a:r>
+          </a:p>
+          <a:p>
+            <a:r>
+              <a:rPr lang="en-US" dirty="0" err="1"/>
+              <a:t>LaToulousaine</a:t>
+            </a:r>
+            <a:r>
+              <a:rPr lang="en-US" dirty="0"/>
+              <a:t>/France/France </a:t>
+            </a:r>
+          </a:p>
+          <a:p>
+            <a:endParaRPr lang="en-US" dirty="0"/>
+          </a:p>
+        </p:txBody>
+      </p:sp>
+      <p:sp>
+        <p:nvSpPr>
+          <p:cNvPr id="6" name="Rectangle: Rounded Corners 5">
+            <a:extLst>
+              <a:ext uri="{FF2B5EF4-FFF2-40B4-BE49-F238E27FC236}">
+                <a16:creationId xmlns:a16="http://schemas.microsoft.com/office/drawing/2014/main" id="{F4777538-D6E8-177F-ABAB-D85090ACD021}"/>
+              </a:ext>
+            </a:extLst>
+          </p:cNvPr>
+          <p:cNvSpPr/>
+          <p:nvPr/>
+        </p:nvSpPr>
+        <p:spPr>
+          <a:xfrm>
+            <a:off x="3389243" y="1805746"/>
+            <a:ext cx="1669774" cy="367748"/>
+          </a:xfrm>
+          <a:prstGeom prst="roundRect">
+            <a:avLst/>
+          </a:prstGeom>
+          <a:solidFill>
+            <a:srgbClr val="FF0000">
+              <a:alpha val="50000"/>
+            </a:srgbClr>
+          </a:solidFill>
+        </p:spPr>
+        <p:style>
+          <a:lnRef idx="2">
+            <a:schemeClr val="accent1">
+              <a:shade val="50000"/>
+            </a:schemeClr>
+          </a:lnRef>
+          <a:fillRef idx="1">
+            <a:schemeClr val="accent1"/>
+          </a:fillRef>
+          <a:effectRef idx="0">
+            <a:schemeClr val="accent1"/>
+          </a:effectRef>
+          <a:fontRef idx="minor">
+            <a:schemeClr val="lt1"/>
+          </a:fontRef>
+        </p:style>
+        <p:txBody>
+          <a:bodyPr rtlCol="0" anchor="ctr"/>
+          <a:lstStyle/>
+          <a:p>
+            <a:pPr algn="ctr"/>
+            <a:r>
+              <a:rPr lang="en-US" dirty="0"/>
+              <a:t>Organization</a:t>
+            </a:r>
+          </a:p>
+        </p:txBody>
+      </p:sp>
+      <p:sp>
+        <p:nvSpPr>
+          <p:cNvPr id="8" name="Rectangle: Rounded Corners 7">
+            <a:extLst>
+              <a:ext uri="{FF2B5EF4-FFF2-40B4-BE49-F238E27FC236}">
+                <a16:creationId xmlns:a16="http://schemas.microsoft.com/office/drawing/2014/main" id="{B5E528DA-67F9-F126-CF5F-56916F5D1D4F}"/>
+              </a:ext>
+            </a:extLst>
+          </p:cNvPr>
+          <p:cNvSpPr/>
+          <p:nvPr/>
+        </p:nvSpPr>
+        <p:spPr>
+          <a:xfrm>
+            <a:off x="5131903" y="2837656"/>
+            <a:ext cx="2267779" cy="367748"/>
+          </a:xfrm>
+          <a:prstGeom prst="roundRect">
+            <a:avLst/>
+          </a:prstGeom>
+          <a:solidFill>
+            <a:srgbClr val="FF0000"/>
+          </a:solidFill>
+        </p:spPr>
+        <p:style>
+          <a:lnRef idx="2">
+            <a:schemeClr val="accent1">
+              <a:shade val="50000"/>
+            </a:schemeClr>
+          </a:lnRef>
+          <a:fillRef idx="1">
+            <a:schemeClr val="accent1"/>
+          </a:fillRef>
+          <a:effectRef idx="0">
+            <a:schemeClr val="accent1"/>
+          </a:effectRef>
+          <a:fontRef idx="minor">
+            <a:schemeClr val="lt1"/>
+          </a:fontRef>
+        </p:style>
+        <p:txBody>
+          <a:bodyPr rtlCol="0" anchor="ctr"/>
+          <a:lstStyle/>
+          <a:p>
+            <a:pPr algn="ctr"/>
+            <a:r>
+              <a:rPr lang="en-US" dirty="0"/>
+              <a:t>Workspace? Party?</a:t>
+            </a:r>
+          </a:p>
+        </p:txBody>
+      </p:sp>
+      <p:sp>
+        <p:nvSpPr>
+          <p:cNvPr id="10" name="Rectangle: Rounded Corners 9">
+            <a:extLst>
+              <a:ext uri="{FF2B5EF4-FFF2-40B4-BE49-F238E27FC236}">
+                <a16:creationId xmlns:a16="http://schemas.microsoft.com/office/drawing/2014/main" id="{EAF6DDAE-2097-F215-9485-DE4145B978E0}"/>
+              </a:ext>
+            </a:extLst>
+          </p:cNvPr>
+          <p:cNvSpPr/>
+          <p:nvPr/>
+        </p:nvSpPr>
+        <p:spPr>
+          <a:xfrm>
+            <a:off x="6432273" y="3321255"/>
+            <a:ext cx="2267779" cy="367748"/>
+          </a:xfrm>
+          <a:prstGeom prst="roundRect">
+            <a:avLst/>
+          </a:prstGeom>
+          <a:solidFill>
+            <a:srgbClr val="FF0000"/>
+          </a:solidFill>
+        </p:spPr>
+        <p:style>
+          <a:lnRef idx="2">
+            <a:schemeClr val="accent1">
+              <a:shade val="50000"/>
+            </a:schemeClr>
+          </a:lnRef>
+          <a:fillRef idx="1">
+            <a:schemeClr val="accent1"/>
+          </a:fillRef>
+          <a:effectRef idx="0">
+            <a:schemeClr val="accent1"/>
+          </a:effectRef>
+          <a:fontRef idx="minor">
+            <a:schemeClr val="lt1"/>
+          </a:fontRef>
+        </p:style>
+        <p:txBody>
+          <a:bodyPr rtlCol="0" anchor="ctr"/>
+          <a:lstStyle/>
+          <a:p>
+            <a:pPr algn="ctr"/>
+            <a:r>
+              <a:rPr lang="en-US" dirty="0"/>
+              <a:t>Workspace? Party?</a:t>
+            </a:r>
+          </a:p>
+        </p:txBody>
+      </p:sp>
+      <p:sp>
+        <p:nvSpPr>
+          <p:cNvPr id="11" name="Rectangle: Rounded Corners 10">
+            <a:extLst>
+              <a:ext uri="{FF2B5EF4-FFF2-40B4-BE49-F238E27FC236}">
+                <a16:creationId xmlns:a16="http://schemas.microsoft.com/office/drawing/2014/main" id="{246D8E15-5E67-3B24-D91B-AF410BA67DC6}"/>
+              </a:ext>
+            </a:extLst>
+          </p:cNvPr>
+          <p:cNvSpPr/>
+          <p:nvPr/>
+        </p:nvSpPr>
+        <p:spPr>
+          <a:xfrm>
+            <a:off x="5514560" y="3886993"/>
+            <a:ext cx="2009362" cy="367748"/>
+          </a:xfrm>
+          <a:prstGeom prst="roundRect">
+            <a:avLst/>
+          </a:prstGeom>
+          <a:solidFill>
+            <a:srgbClr val="FF0000">
+              <a:alpha val="50000"/>
+            </a:srgbClr>
+          </a:solidFill>
+        </p:spPr>
+        <p:style>
+          <a:lnRef idx="2">
+            <a:schemeClr val="accent1">
+              <a:shade val="50000"/>
+            </a:schemeClr>
+          </a:lnRef>
+          <a:fillRef idx="1">
+            <a:schemeClr val="accent1"/>
+          </a:fillRef>
+          <a:effectRef idx="0">
+            <a:schemeClr val="accent1"/>
+          </a:effectRef>
+          <a:fontRef idx="minor">
+            <a:schemeClr val="lt1"/>
+          </a:fontRef>
+        </p:style>
+        <p:txBody>
+          <a:bodyPr rtlCol="0" anchor="ctr"/>
+          <a:lstStyle/>
+          <a:p>
+            <a:pPr algn="ctr"/>
+            <a:r>
+              <a:rPr lang="en-US" dirty="0" err="1"/>
+              <a:t>DomainController</a:t>
+            </a:r>
+            <a:endParaRPr lang="en-US" dirty="0"/>
+          </a:p>
+        </p:txBody>
+      </p:sp>
+      <p:sp>
+        <p:nvSpPr>
+          <p:cNvPr id="13" name="Multiplication Sign 12">
+            <a:extLst>
+              <a:ext uri="{FF2B5EF4-FFF2-40B4-BE49-F238E27FC236}">
+                <a16:creationId xmlns:a16="http://schemas.microsoft.com/office/drawing/2014/main" id="{94FE6B1D-25FF-34FB-03D1-84A025F10DF7}"/>
+              </a:ext>
+            </a:extLst>
+          </p:cNvPr>
+          <p:cNvSpPr/>
+          <p:nvPr/>
+        </p:nvSpPr>
+        <p:spPr>
+          <a:xfrm>
+            <a:off x="718931" y="4304564"/>
+            <a:ext cx="473765" cy="507070"/>
+          </a:xfrm>
+          <a:prstGeom prst="mathMultiply">
+            <a:avLst/>
+          </a:prstGeom>
+          <a:solidFill>
+            <a:srgbClr val="FF0000"/>
+          </a:solidFill>
+        </p:spPr>
+        <p:style>
+          <a:lnRef idx="2">
+            <a:schemeClr val="accent1">
+              <a:shade val="50000"/>
+            </a:schemeClr>
+          </a:lnRef>
+          <a:fillRef idx="1">
+            <a:schemeClr val="accent1"/>
+          </a:fillRef>
+          <a:effectRef idx="0">
+            <a:schemeClr val="accent1"/>
+          </a:effectRef>
+          <a:fontRef idx="minor">
+            <a:schemeClr val="lt1"/>
+          </a:fontRef>
+        </p:style>
+        <p:txBody>
+          <a:bodyPr rtlCol="0" anchor="ctr"/>
+          <a:lstStyle/>
+          <a:p>
+            <a:pPr algn="ctr"/>
+            <a:endParaRPr lang="en-US"/>
+          </a:p>
+        </p:txBody>
+      </p:sp>
+      <p:sp>
+        <p:nvSpPr>
+          <p:cNvPr id="14" name="Rectangle: Rounded Corners 13">
+            <a:extLst>
+              <a:ext uri="{FF2B5EF4-FFF2-40B4-BE49-F238E27FC236}">
+                <a16:creationId xmlns:a16="http://schemas.microsoft.com/office/drawing/2014/main" id="{E00287FE-EDCA-F0DE-2699-C40809E84FD4}"/>
+              </a:ext>
+            </a:extLst>
+          </p:cNvPr>
+          <p:cNvSpPr/>
+          <p:nvPr/>
+        </p:nvSpPr>
+        <p:spPr>
+          <a:xfrm>
+            <a:off x="7643191" y="3886993"/>
+            <a:ext cx="917713" cy="367748"/>
+          </a:xfrm>
+          <a:prstGeom prst="roundRect">
+            <a:avLst/>
+          </a:prstGeom>
+          <a:solidFill>
+            <a:srgbClr val="FF0000">
+              <a:alpha val="50000"/>
+            </a:srgbClr>
+          </a:solidFill>
+        </p:spPr>
+        <p:style>
+          <a:lnRef idx="2">
+            <a:schemeClr val="accent1">
+              <a:shade val="50000"/>
+            </a:schemeClr>
+          </a:lnRef>
+          <a:fillRef idx="1">
+            <a:schemeClr val="accent1"/>
+          </a:fillRef>
+          <a:effectRef idx="0">
+            <a:schemeClr val="accent1"/>
+          </a:effectRef>
+          <a:fontRef idx="minor">
+            <a:schemeClr val="lt1"/>
+          </a:fontRef>
+        </p:style>
+        <p:txBody>
+          <a:bodyPr rtlCol="0" anchor="ctr"/>
+          <a:lstStyle/>
+          <a:p>
+            <a:pPr algn="ctr"/>
+            <a:r>
+              <a:rPr lang="en-US" dirty="0"/>
+              <a:t>Party</a:t>
+            </a:r>
+          </a:p>
+        </p:txBody>
+      </p:sp>
+      <p:sp>
+        <p:nvSpPr>
+          <p:cNvPr id="15" name="Rectangle: Rounded Corners 14">
+            <a:extLst>
+              <a:ext uri="{FF2B5EF4-FFF2-40B4-BE49-F238E27FC236}">
+                <a16:creationId xmlns:a16="http://schemas.microsoft.com/office/drawing/2014/main" id="{F0536D98-4A47-2425-E614-3280E515878A}"/>
+              </a:ext>
+            </a:extLst>
+          </p:cNvPr>
+          <p:cNvSpPr/>
+          <p:nvPr/>
+        </p:nvSpPr>
+        <p:spPr>
+          <a:xfrm>
+            <a:off x="5514559" y="5383834"/>
+            <a:ext cx="2267779" cy="367748"/>
+          </a:xfrm>
+          <a:prstGeom prst="roundRect">
+            <a:avLst/>
+          </a:prstGeom>
+          <a:solidFill>
+            <a:srgbClr val="FF0000">
+              <a:alpha val="50000"/>
+            </a:srgbClr>
+          </a:solidFill>
+        </p:spPr>
+        <p:style>
+          <a:lnRef idx="2">
+            <a:schemeClr val="accent1">
+              <a:shade val="50000"/>
+            </a:schemeClr>
+          </a:lnRef>
+          <a:fillRef idx="1">
+            <a:schemeClr val="accent1"/>
+          </a:fillRef>
+          <a:effectRef idx="0">
+            <a:schemeClr val="accent1"/>
+          </a:effectRef>
+          <a:fontRef idx="minor">
+            <a:schemeClr val="lt1"/>
+          </a:fontRef>
+        </p:style>
+        <p:txBody>
+          <a:bodyPr rtlCol="0" anchor="ctr"/>
+          <a:lstStyle/>
+          <a:p>
+            <a:pPr algn="ctr"/>
+            <a:r>
+              <a:rPr lang="en-US" dirty="0" err="1"/>
+              <a:t>WorkspaceController</a:t>
+            </a:r>
+            <a:endParaRPr lang="en-US" dirty="0"/>
+          </a:p>
+        </p:txBody>
+      </p:sp>
+      <p:sp>
+        <p:nvSpPr>
+          <p:cNvPr id="16" name="Multiplication Sign 15">
+            <a:extLst>
+              <a:ext uri="{FF2B5EF4-FFF2-40B4-BE49-F238E27FC236}">
+                <a16:creationId xmlns:a16="http://schemas.microsoft.com/office/drawing/2014/main" id="{1B803003-7CBC-07D2-0F4B-6ADB12222146}"/>
+              </a:ext>
+            </a:extLst>
+          </p:cNvPr>
+          <p:cNvSpPr/>
+          <p:nvPr/>
+        </p:nvSpPr>
+        <p:spPr>
+          <a:xfrm>
+            <a:off x="718931" y="4811634"/>
+            <a:ext cx="473765" cy="507070"/>
+          </a:xfrm>
+          <a:prstGeom prst="mathMultiply">
+            <a:avLst/>
+          </a:prstGeom>
+          <a:solidFill>
+            <a:srgbClr val="FF0000"/>
+          </a:solidFill>
+        </p:spPr>
+        <p:style>
+          <a:lnRef idx="2">
+            <a:schemeClr val="accent1">
+              <a:shade val="50000"/>
+            </a:schemeClr>
+          </a:lnRef>
+          <a:fillRef idx="1">
+            <a:schemeClr val="accent1"/>
+          </a:fillRef>
+          <a:effectRef idx="0">
+            <a:schemeClr val="accent1"/>
+          </a:effectRef>
+          <a:fontRef idx="minor">
+            <a:schemeClr val="lt1"/>
+          </a:fontRef>
+        </p:style>
+        <p:txBody>
+          <a:bodyPr rtlCol="0" anchor="ctr"/>
+          <a:lstStyle/>
+          <a:p>
+            <a:pPr algn="ctr"/>
+            <a:endParaRPr lang="en-US"/>
+          </a:p>
+        </p:txBody>
+      </p:sp>
+      <p:sp>
+        <p:nvSpPr>
+          <p:cNvPr id="17" name="Rectangle: Rounded Corners 16">
+            <a:extLst>
+              <a:ext uri="{FF2B5EF4-FFF2-40B4-BE49-F238E27FC236}">
+                <a16:creationId xmlns:a16="http://schemas.microsoft.com/office/drawing/2014/main" id="{8A22844D-E5C2-C250-9078-EE6110D310F4}"/>
+              </a:ext>
+            </a:extLst>
+          </p:cNvPr>
+          <p:cNvSpPr/>
+          <p:nvPr/>
+        </p:nvSpPr>
+        <p:spPr>
+          <a:xfrm>
+            <a:off x="7901607" y="5383834"/>
+            <a:ext cx="917713" cy="367748"/>
+          </a:xfrm>
+          <a:prstGeom prst="roundRect">
+            <a:avLst/>
+          </a:prstGeom>
+          <a:solidFill>
+            <a:srgbClr val="FF0000">
+              <a:alpha val="50000"/>
+            </a:srgbClr>
+          </a:solidFill>
+        </p:spPr>
+        <p:style>
+          <a:lnRef idx="2">
+            <a:schemeClr val="accent1">
+              <a:shade val="50000"/>
+            </a:schemeClr>
+          </a:lnRef>
+          <a:fillRef idx="1">
+            <a:schemeClr val="accent1"/>
+          </a:fillRef>
+          <a:effectRef idx="0">
+            <a:schemeClr val="accent1"/>
+          </a:effectRef>
+          <a:fontRef idx="minor">
+            <a:schemeClr val="lt1"/>
+          </a:fontRef>
+        </p:style>
+        <p:txBody>
+          <a:bodyPr rtlCol="0" anchor="ctr"/>
+          <a:lstStyle/>
+          <a:p>
+            <a:pPr algn="ctr"/>
+            <a:r>
+              <a:rPr lang="en-US" dirty="0"/>
+              <a:t>Party</a:t>
+            </a:r>
+          </a:p>
+        </p:txBody>
+      </p:sp>
+      <p:sp>
+        <p:nvSpPr>
+          <p:cNvPr id="18" name="Rectangle: Rounded Corners 17">
+            <a:extLst>
+              <a:ext uri="{FF2B5EF4-FFF2-40B4-BE49-F238E27FC236}">
+                <a16:creationId xmlns:a16="http://schemas.microsoft.com/office/drawing/2014/main" id="{E6127871-90E2-DA21-E277-10AFF5FF05C5}"/>
+              </a:ext>
+            </a:extLst>
+          </p:cNvPr>
+          <p:cNvSpPr/>
+          <p:nvPr/>
+        </p:nvSpPr>
+        <p:spPr>
+          <a:xfrm>
+            <a:off x="4465981" y="2330414"/>
+            <a:ext cx="2267779" cy="367748"/>
+          </a:xfrm>
+          <a:prstGeom prst="roundRect">
+            <a:avLst/>
+          </a:prstGeom>
+          <a:solidFill>
+            <a:srgbClr val="FF0000"/>
+          </a:solidFill>
+        </p:spPr>
+        <p:style>
+          <a:lnRef idx="2">
+            <a:schemeClr val="accent1">
+              <a:shade val="50000"/>
+            </a:schemeClr>
+          </a:lnRef>
+          <a:fillRef idx="1">
+            <a:schemeClr val="accent1"/>
+          </a:fillRef>
+          <a:effectRef idx="0">
+            <a:schemeClr val="accent1"/>
+          </a:effectRef>
+          <a:fontRef idx="minor">
+            <a:schemeClr val="lt1"/>
+          </a:fontRef>
+        </p:style>
+        <p:txBody>
+          <a:bodyPr rtlCol="0" anchor="ctr"/>
+          <a:lstStyle/>
+          <a:p>
+            <a:pPr algn="ctr"/>
+            <a:r>
+              <a:rPr lang="en-US" dirty="0"/>
+              <a:t>Workspace? Party?</a:t>
             </a:r>
           </a:p>
         </p:txBody>
@@ -9104,7 +9675,7 @@
     </p:spTree>
     <p:extLst>
       <p:ext uri="{BB962C8B-B14F-4D97-AF65-F5344CB8AC3E}">
-        <p14:creationId xmlns:p14="http://schemas.microsoft.com/office/powerpoint/2010/main" val="2945111844"/>
+        <p14:creationId xmlns:p14="http://schemas.microsoft.com/office/powerpoint/2010/main" val="1708071069"/>
       </p:ext>
     </p:extLst>
   </p:cSld>
@@ -9136,7 +9707,7 @@
           <p:cNvPr id="2" name="Title 1">
             <a:extLst>
               <a:ext uri="{FF2B5EF4-FFF2-40B4-BE49-F238E27FC236}">
-                <a16:creationId xmlns:a16="http://schemas.microsoft.com/office/drawing/2014/main" id="{1B7F35EA-9815-CA8C-A80D-1857A5FDB005}"/>
+                <a16:creationId xmlns:a16="http://schemas.microsoft.com/office/drawing/2014/main" id="{BA93927C-777D-268C-16A2-B3306014A7DF}"/>
               </a:ext>
             </a:extLst>
           </p:cNvPr>
@@ -9154,47 +9725,7 @@
           <a:p>
             <a:r>
               <a:rPr lang="en-US" dirty="0"/>
-              <a:t>Other uses…</a:t>
-            </a:r>
-          </a:p>
-        </p:txBody>
-      </p:sp>
-      <p:sp>
-        <p:nvSpPr>
-          <p:cNvPr id="3" name="Content Placeholder 2">
-            <a:extLst>
-              <a:ext uri="{FF2B5EF4-FFF2-40B4-BE49-F238E27FC236}">
-                <a16:creationId xmlns:a16="http://schemas.microsoft.com/office/drawing/2014/main" id="{4DFA97AC-5D6A-7874-9EEB-5565D4A19027}"/>
-              </a:ext>
-            </a:extLst>
-          </p:cNvPr>
-          <p:cNvSpPr>
-            <a:spLocks noGrp="1"/>
-          </p:cNvSpPr>
-          <p:nvPr>
-            <p:ph idx="1"/>
-          </p:nvPr>
-        </p:nvSpPr>
-        <p:spPr>
-          <a:xfrm>
-            <a:off x="838200" y="1825625"/>
-            <a:ext cx="10515600" cy="888392"/>
-          </a:xfrm>
-        </p:spPr>
-        <p:txBody>
-          <a:bodyPr/>
-          <a:lstStyle/>
-          <a:p>
-            <a:r>
-              <a:rPr lang="en-US" dirty="0"/>
-              <a:t>Describing and configuring external services.</a:t>
-            </a:r>
-          </a:p>
-          <a:p>
-            <a:pPr lvl="1"/>
-            <a:r>
-              <a:rPr lang="en-US" dirty="0"/>
-              <a:t>Package First…</a:t>
+              <a:t>Introducing ‘$’ for party name </a:t>
             </a:r>
           </a:p>
         </p:txBody>
@@ -9204,7 +9735,7 @@
           <p:cNvPr id="4" name="Content Placeholder 2">
             <a:extLst>
               <a:ext uri="{FF2B5EF4-FFF2-40B4-BE49-F238E27FC236}">
-                <a16:creationId xmlns:a16="http://schemas.microsoft.com/office/drawing/2014/main" id="{62D17C1F-A51E-C522-33E4-E7D2F26CB586}"/>
+                <a16:creationId xmlns:a16="http://schemas.microsoft.com/office/drawing/2014/main" id="{5EA43F27-2891-C95D-8D95-547B77B8E326}"/>
               </a:ext>
             </a:extLst>
           </p:cNvPr>
@@ -9215,8 +9746,8 @@
         </p:nvSpPr>
         <p:spPr>
           <a:xfrm>
-            <a:off x="838200" y="2714017"/>
-            <a:ext cx="6749374" cy="3778857"/>
+            <a:off x="838200" y="2713535"/>
+            <a:ext cx="10515600" cy="3213525"/>
           </a:xfrm>
           <a:prstGeom prst="rect">
             <a:avLst/>
@@ -9224,7 +9755,7 @@
         </p:spPr>
         <p:txBody>
           <a:bodyPr vert="horz" lIns="91440" tIns="45720" rIns="91440" bIns="45720" rtlCol="0">
-            <a:normAutofit fontScale="85000" lnSpcReduction="20000"/>
+            <a:normAutofit/>
           </a:bodyPr>
           <a:lstStyle>
             <a:lvl1pPr marL="228600" indent="-228600" algn="l" defTabSz="914400" rtl="0" eaLnBrk="1" latinLnBrk="0" hangingPunct="1">
@@ -9391,828 +9922,452 @@
             </a:lvl9pPr>
           </a:lstStyle>
           <a:p>
-            <a:pPr marL="0" indent="0">
-              <a:lnSpc>
-                <a:spcPct val="100000"/>
-              </a:lnSpc>
-              <a:spcBef>
-                <a:spcPts val="0"/>
-              </a:spcBef>
-              <a:buFont typeface="Arial" panose="020B0604020202020204" pitchFamily="34" charset="0"/>
-              <a:buNone/>
-            </a:pPr>
-            <a:r>
-              <a:rPr lang="en-US" sz="1400" dirty="0">
-                <a:latin typeface="Courier New" panose="02070309020205020404" pitchFamily="49" charset="0"/>
-                <a:cs typeface="Courier New" panose="02070309020205020404" pitchFamily="49" charset="0"/>
-              </a:rPr>
-              <a:t>{ </a:t>
-            </a:r>
-          </a:p>
-          <a:p>
-            <a:pPr marL="0" indent="0">
-              <a:lnSpc>
-                <a:spcPct val="100000"/>
-              </a:lnSpc>
-              <a:spcBef>
-                <a:spcPts val="0"/>
-              </a:spcBef>
-              <a:buFont typeface="Arial" panose="020B0604020202020204" pitchFamily="34" charset="0"/>
-              <a:buNone/>
-            </a:pPr>
-            <a:r>
-              <a:rPr lang="en-US" sz="1400" dirty="0">
-                <a:latin typeface="Courier New" panose="02070309020205020404" pitchFamily="49" charset="0"/>
-                <a:cs typeface="Courier New" panose="02070309020205020404" pitchFamily="49" charset="0"/>
-              </a:rPr>
-              <a:t>  "</a:t>
-            </a:r>
-            <a:r>
-              <a:rPr lang="en-US" sz="1400" dirty="0" err="1">
-                <a:latin typeface="Courier New" panose="02070309020205020404" pitchFamily="49" charset="0"/>
-                <a:cs typeface="Courier New" panose="02070309020205020404" pitchFamily="49" charset="0"/>
-              </a:rPr>
-              <a:t>DomainName</a:t>
-            </a:r>
-            <a:r>
-              <a:rPr lang="en-US" sz="1400" dirty="0">
-                <a:latin typeface="Courier New" panose="02070309020205020404" pitchFamily="49" charset="0"/>
-                <a:cs typeface="Courier New" panose="02070309020205020404" pitchFamily="49" charset="0"/>
-              </a:rPr>
-              <a:t>": "Signature",</a:t>
-            </a:r>
-          </a:p>
-          <a:p>
-            <a:pPr marL="0" indent="0">
-              <a:lnSpc>
-                <a:spcPct val="100000"/>
-              </a:lnSpc>
-              <a:spcBef>
-                <a:spcPts val="0"/>
-              </a:spcBef>
-              <a:buFont typeface="Arial" panose="020B0604020202020204" pitchFamily="34" charset="0"/>
-              <a:buNone/>
-            </a:pPr>
-            <a:r>
-              <a:rPr lang="en-US" sz="1400" dirty="0">
-                <a:latin typeface="Courier New" panose="02070309020205020404" pitchFamily="49" charset="0"/>
-                <a:cs typeface="Courier New" panose="02070309020205020404" pitchFamily="49" charset="0"/>
-              </a:rPr>
-              <a:t>  "</a:t>
-            </a:r>
-            <a:r>
-              <a:rPr lang="en-US" sz="1400" dirty="0" err="1">
-                <a:latin typeface="Courier New" panose="02070309020205020404" pitchFamily="49" charset="0"/>
-                <a:cs typeface="Courier New" panose="02070309020205020404" pitchFamily="49" charset="0"/>
-              </a:rPr>
-              <a:t>EnvironmentName</a:t>
-            </a:r>
-            <a:r>
-              <a:rPr lang="en-US" sz="1400" dirty="0">
-                <a:latin typeface="Courier New" panose="02070309020205020404" pitchFamily="49" charset="0"/>
-                <a:cs typeface="Courier New" panose="02070309020205020404" pitchFamily="49" charset="0"/>
-              </a:rPr>
-              <a:t>": "Production",</a:t>
-            </a:r>
-          </a:p>
-          <a:p>
-            <a:pPr marL="0" indent="0">
-              <a:lnSpc>
-                <a:spcPct val="100000"/>
-              </a:lnSpc>
-              <a:spcBef>
-                <a:spcPts val="0"/>
-              </a:spcBef>
-              <a:buFont typeface="Arial" panose="020B0604020202020204" pitchFamily="34" charset="0"/>
-              <a:buNone/>
-            </a:pPr>
-            <a:r>
-              <a:rPr lang="en-US" sz="1400" dirty="0">
-                <a:latin typeface="Courier New" panose="02070309020205020404" pitchFamily="49" charset="0"/>
-                <a:cs typeface="Courier New" panose="02070309020205020404" pitchFamily="49" charset="0"/>
-              </a:rPr>
-              <a:t>  "Local": {</a:t>
-            </a:r>
-          </a:p>
-          <a:p>
-            <a:pPr marL="0" indent="0">
-              <a:lnSpc>
-                <a:spcPct val="100000"/>
-              </a:lnSpc>
-              <a:spcBef>
-                <a:spcPts val="0"/>
-              </a:spcBef>
-              <a:buFont typeface="Arial" panose="020B0604020202020204" pitchFamily="34" charset="0"/>
-              <a:buNone/>
-            </a:pPr>
-            <a:r>
-              <a:rPr lang="en-US" sz="1400" dirty="0">
-                <a:latin typeface="Courier New" panose="02070309020205020404" pitchFamily="49" charset="0"/>
-                <a:cs typeface="Courier New" panose="02070309020205020404" pitchFamily="49" charset="0"/>
-              </a:rPr>
-              <a:t>    "Name": "</a:t>
-            </a:r>
-            <a:r>
-              <a:rPr lang="en-US" sz="1400" dirty="0" err="1">
-                <a:latin typeface="Courier New" panose="02070309020205020404" pitchFamily="49" charset="0"/>
-                <a:cs typeface="Courier New" panose="02070309020205020404" pitchFamily="49" charset="0"/>
-              </a:rPr>
-              <a:t>CodeCenter</a:t>
-            </a:r>
-            <a:r>
-              <a:rPr lang="en-US" sz="1400" dirty="0">
-                <a:latin typeface="Courier New" panose="02070309020205020404" pitchFamily="49" charset="0"/>
-                <a:cs typeface="Courier New" panose="02070309020205020404" pitchFamily="49" charset="0"/>
-              </a:rPr>
-              <a:t>"</a:t>
-            </a:r>
-          </a:p>
-          <a:p>
-            <a:pPr marL="0" indent="0">
-              <a:lnSpc>
-                <a:spcPct val="100000"/>
-              </a:lnSpc>
-              <a:spcBef>
-                <a:spcPts val="0"/>
-              </a:spcBef>
-              <a:buFont typeface="Arial" panose="020B0604020202020204" pitchFamily="34" charset="0"/>
-              <a:buNone/>
-            </a:pPr>
-            <a:r>
-              <a:rPr lang="en-US" sz="1400" dirty="0">
-                <a:latin typeface="Courier New" panose="02070309020205020404" pitchFamily="49" charset="0"/>
-                <a:cs typeface="Courier New" panose="02070309020205020404" pitchFamily="49" charset="0"/>
-              </a:rPr>
-              <a:t>  },</a:t>
-            </a:r>
-          </a:p>
-          <a:p>
-            <a:pPr marL="0" indent="0">
-              <a:lnSpc>
-                <a:spcPct val="100000"/>
-              </a:lnSpc>
-              <a:spcBef>
-                <a:spcPts val="0"/>
-              </a:spcBef>
-              <a:buFont typeface="Arial" panose="020B0604020202020204" pitchFamily="34" charset="0"/>
-              <a:buNone/>
-            </a:pPr>
-            <a:r>
-              <a:rPr lang="en-US" sz="1400" dirty="0">
-                <a:latin typeface="Courier New" panose="02070309020205020404" pitchFamily="49" charset="0"/>
-                <a:cs typeface="Courier New" panose="02070309020205020404" pitchFamily="49" charset="0"/>
-              </a:rPr>
-              <a:t>  "Remotes": [</a:t>
-            </a:r>
-            <a:br>
-              <a:rPr lang="en-US" sz="1400" dirty="0">
-                <a:latin typeface="Courier New" panose="02070309020205020404" pitchFamily="49" charset="0"/>
-                <a:cs typeface="Courier New" panose="02070309020205020404" pitchFamily="49" charset="0"/>
-              </a:rPr>
-            </a:br>
-            <a:r>
-              <a:rPr lang="en-US" sz="1400" dirty="0">
-                <a:latin typeface="Courier New" panose="02070309020205020404" pitchFamily="49" charset="0"/>
-                <a:cs typeface="Courier New" panose="02070309020205020404" pitchFamily="49" charset="0"/>
-              </a:rPr>
-              <a:t>  {</a:t>
-            </a:r>
-          </a:p>
-          <a:p>
-            <a:pPr marL="0" indent="0">
-              <a:lnSpc>
-                <a:spcPct val="100000"/>
-              </a:lnSpc>
-              <a:spcBef>
-                <a:spcPts val="0"/>
-              </a:spcBef>
-              <a:buFont typeface="Arial" panose="020B0604020202020204" pitchFamily="34" charset="0"/>
-              <a:buNone/>
-            </a:pPr>
-            <a:r>
-              <a:rPr lang="en-US" sz="1400" dirty="0">
-                <a:latin typeface="Courier New" panose="02070309020205020404" pitchFamily="49" charset="0"/>
-                <a:cs typeface="Courier New" panose="02070309020205020404" pitchFamily="49" charset="0"/>
-              </a:rPr>
-              <a:t>    </a:t>
-            </a:r>
-            <a:r>
-              <a:rPr lang="en-US" sz="1400" b="1" dirty="0">
-                <a:latin typeface="Courier New" panose="02070309020205020404" pitchFamily="49" charset="0"/>
-                <a:cs typeface="Courier New" panose="02070309020205020404" pitchFamily="49" charset="0"/>
-              </a:rPr>
-              <a:t>"</a:t>
-            </a:r>
-            <a:r>
-              <a:rPr lang="en-US" sz="1400" b="1" dirty="0" err="1">
-                <a:latin typeface="Courier New" panose="02070309020205020404" pitchFamily="49" charset="0"/>
-                <a:cs typeface="Courier New" panose="02070309020205020404" pitchFamily="49" charset="0"/>
-              </a:rPr>
-              <a:t>DomainName</a:t>
-            </a:r>
-            <a:r>
-              <a:rPr lang="en-US" sz="1400" b="1" dirty="0">
-                <a:latin typeface="Courier New" panose="02070309020205020404" pitchFamily="49" charset="0"/>
-                <a:cs typeface="Courier New" panose="02070309020205020404" pitchFamily="49" charset="0"/>
-              </a:rPr>
-              <a:t>": "Undefined"</a:t>
-            </a:r>
-            <a:r>
-              <a:rPr lang="en-US" sz="1400" dirty="0">
-                <a:latin typeface="Courier New" panose="02070309020205020404" pitchFamily="49" charset="0"/>
-                <a:cs typeface="Courier New" panose="02070309020205020404" pitchFamily="49" charset="0"/>
-              </a:rPr>
-              <a:t>,</a:t>
-            </a:r>
-          </a:p>
-          <a:p>
-            <a:pPr marL="0" indent="0">
-              <a:lnSpc>
-                <a:spcPct val="100000"/>
-              </a:lnSpc>
-              <a:spcBef>
-                <a:spcPts val="0"/>
-              </a:spcBef>
-              <a:buFont typeface="Arial" panose="020B0604020202020204" pitchFamily="34" charset="0"/>
-              <a:buNone/>
-            </a:pPr>
-            <a:r>
-              <a:rPr lang="en-US" sz="1400" dirty="0">
-                <a:latin typeface="Courier New" panose="02070309020205020404" pitchFamily="49" charset="0"/>
-                <a:cs typeface="Courier New" panose="02070309020205020404" pitchFamily="49" charset="0"/>
-              </a:rPr>
-              <a:t>    "Name": "</a:t>
-            </a:r>
-            <a:r>
-              <a:rPr lang="en-US" sz="1400" dirty="0" err="1">
-                <a:latin typeface="Courier New" panose="02070309020205020404" pitchFamily="49" charset="0"/>
-                <a:cs typeface="Courier New" panose="02070309020205020404" pitchFamily="49" charset="0"/>
-              </a:rPr>
-              <a:t>GitOpenSource</a:t>
-            </a:r>
-            <a:r>
-              <a:rPr lang="en-US" sz="1400" dirty="0">
-                <a:latin typeface="Courier New" panose="02070309020205020404" pitchFamily="49" charset="0"/>
-                <a:cs typeface="Courier New" panose="02070309020205020404" pitchFamily="49" charset="0"/>
-              </a:rPr>
-              <a:t>",</a:t>
-            </a:r>
-            <a:br>
-              <a:rPr lang="en-US" sz="1400" dirty="0">
-                <a:latin typeface="Courier New" panose="02070309020205020404" pitchFamily="49" charset="0"/>
-                <a:cs typeface="Courier New" panose="02070309020205020404" pitchFamily="49" charset="0"/>
-              </a:rPr>
-            </a:br>
-            <a:r>
-              <a:rPr lang="en-US" sz="1400" dirty="0">
-                <a:latin typeface="Courier New" panose="02070309020205020404" pitchFamily="49" charset="0"/>
-                <a:cs typeface="Courier New" panose="02070309020205020404" pitchFamily="49" charset="0"/>
-              </a:rPr>
-              <a:t>    "GitHub": {</a:t>
-            </a:r>
-            <a:br>
-              <a:rPr lang="en-US" sz="1400" dirty="0">
-                <a:latin typeface="Courier New" panose="02070309020205020404" pitchFamily="49" charset="0"/>
-                <a:cs typeface="Courier New" panose="02070309020205020404" pitchFamily="49" charset="0"/>
-              </a:rPr>
-            </a:br>
-            <a:r>
-              <a:rPr lang="en-US" sz="1400" dirty="0">
-                <a:latin typeface="Courier New" panose="02070309020205020404" pitchFamily="49" charset="0"/>
-                <a:cs typeface="Courier New" panose="02070309020205020404" pitchFamily="49" charset="0"/>
-              </a:rPr>
-              <a:t>      "Organization": "Signature-</a:t>
-            </a:r>
-            <a:r>
-              <a:rPr lang="en-US" sz="1400" dirty="0" err="1">
-                <a:latin typeface="Courier New" panose="02070309020205020404" pitchFamily="49" charset="0"/>
-                <a:cs typeface="Courier New" panose="02070309020205020404" pitchFamily="49" charset="0"/>
-              </a:rPr>
-              <a:t>OpenSource</a:t>
-            </a:r>
-            <a:r>
-              <a:rPr lang="en-US" sz="1400" dirty="0">
-                <a:latin typeface="Courier New" panose="02070309020205020404" pitchFamily="49" charset="0"/>
-                <a:cs typeface="Courier New" panose="02070309020205020404" pitchFamily="49" charset="0"/>
-              </a:rPr>
-              <a:t>",</a:t>
-            </a:r>
-          </a:p>
-          <a:p>
-            <a:pPr marL="0" indent="0">
-              <a:lnSpc>
-                <a:spcPct val="100000"/>
-              </a:lnSpc>
-              <a:spcBef>
-                <a:spcPts val="0"/>
-              </a:spcBef>
-              <a:buFont typeface="Arial" panose="020B0604020202020204" pitchFamily="34" charset="0"/>
-              <a:buNone/>
-            </a:pPr>
-            <a:r>
-              <a:rPr lang="en-US" sz="1400" dirty="0">
-                <a:latin typeface="Courier New" panose="02070309020205020404" pitchFamily="49" charset="0"/>
-                <a:cs typeface="Courier New" panose="02070309020205020404" pitchFamily="49" charset="0"/>
-              </a:rPr>
-              <a:t>      "</a:t>
-            </a:r>
-            <a:r>
-              <a:rPr lang="en-US" sz="1400" dirty="0" err="1">
-                <a:latin typeface="Courier New" panose="02070309020205020404" pitchFamily="49" charset="0"/>
-                <a:cs typeface="Courier New" panose="02070309020205020404" pitchFamily="49" charset="0"/>
-              </a:rPr>
-              <a:t>SecretToken</a:t>
-            </a:r>
-            <a:r>
-              <a:rPr lang="en-US" sz="1400" dirty="0">
-                <a:latin typeface="Courier New" panose="02070309020205020404" pitchFamily="49" charset="0"/>
-                <a:cs typeface="Courier New" panose="02070309020205020404" pitchFamily="49" charset="0"/>
-              </a:rPr>
-              <a:t>": "45kKJDHldf57dsj87f6fefAsdjhfsdfzr654ZEd5zf"</a:t>
-            </a:r>
-          </a:p>
-          <a:p>
-            <a:pPr marL="0" indent="0">
-              <a:lnSpc>
-                <a:spcPct val="100000"/>
-              </a:lnSpc>
-              <a:spcBef>
-                <a:spcPts val="0"/>
-              </a:spcBef>
-              <a:buFont typeface="Arial" panose="020B0604020202020204" pitchFamily="34" charset="0"/>
-              <a:buNone/>
-            </a:pPr>
-            <a:r>
-              <a:rPr lang="en-US" sz="1400" dirty="0">
-                <a:latin typeface="Courier New" panose="02070309020205020404" pitchFamily="49" charset="0"/>
-                <a:cs typeface="Courier New" panose="02070309020205020404" pitchFamily="49" charset="0"/>
-              </a:rPr>
-              <a:t>    }</a:t>
-            </a:r>
-          </a:p>
-          <a:p>
-            <a:pPr marL="0" indent="0">
-              <a:lnSpc>
-                <a:spcPct val="100000"/>
-              </a:lnSpc>
-              <a:spcBef>
-                <a:spcPts val="0"/>
-              </a:spcBef>
-              <a:buFont typeface="Arial" panose="020B0604020202020204" pitchFamily="34" charset="0"/>
-              <a:buNone/>
-            </a:pPr>
-            <a:r>
-              <a:rPr lang="en-US" sz="1400" dirty="0">
-                <a:latin typeface="Courier New" panose="02070309020205020404" pitchFamily="49" charset="0"/>
-                <a:cs typeface="Courier New" panose="02070309020205020404" pitchFamily="49" charset="0"/>
-              </a:rPr>
-              <a:t>  },</a:t>
-            </a:r>
-          </a:p>
-          <a:p>
-            <a:pPr marL="0" indent="0">
-              <a:lnSpc>
-                <a:spcPct val="100000"/>
-              </a:lnSpc>
-              <a:spcBef>
-                <a:spcPts val="0"/>
-              </a:spcBef>
-              <a:buFont typeface="Arial" panose="020B0604020202020204" pitchFamily="34" charset="0"/>
-              <a:buNone/>
-            </a:pPr>
-            <a:r>
-              <a:rPr lang="en-US" sz="1400" dirty="0">
-                <a:latin typeface="Courier New" panose="02070309020205020404" pitchFamily="49" charset="0"/>
-                <a:cs typeface="Courier New" panose="02070309020205020404" pitchFamily="49" charset="0"/>
-              </a:rPr>
-              <a:t>  {</a:t>
-            </a:r>
-          </a:p>
-          <a:p>
-            <a:pPr marL="0" indent="0">
-              <a:lnSpc>
-                <a:spcPct val="100000"/>
-              </a:lnSpc>
-              <a:spcBef>
-                <a:spcPts val="0"/>
-              </a:spcBef>
-              <a:buFont typeface="Arial" panose="020B0604020202020204" pitchFamily="34" charset="0"/>
-              <a:buNone/>
-            </a:pPr>
-            <a:r>
-              <a:rPr lang="en-US" sz="1400" dirty="0">
-                <a:latin typeface="Courier New" panose="02070309020205020404" pitchFamily="49" charset="0"/>
-                <a:cs typeface="Courier New" panose="02070309020205020404" pitchFamily="49" charset="0"/>
-              </a:rPr>
-              <a:t>    "</a:t>
-            </a:r>
-            <a:r>
-              <a:rPr lang="en-US" sz="1400" dirty="0" err="1">
-                <a:latin typeface="Courier New" panose="02070309020205020404" pitchFamily="49" charset="0"/>
-                <a:cs typeface="Courier New" panose="02070309020205020404" pitchFamily="49" charset="0"/>
-              </a:rPr>
-              <a:t>DomainName</a:t>
-            </a:r>
-            <a:r>
-              <a:rPr lang="en-US" sz="1400" dirty="0">
-                <a:latin typeface="Courier New" panose="02070309020205020404" pitchFamily="49" charset="0"/>
-                <a:cs typeface="Courier New" panose="02070309020205020404" pitchFamily="49" charset="0"/>
-              </a:rPr>
-              <a:t>": "Undefined",</a:t>
-            </a:r>
-          </a:p>
-          <a:p>
-            <a:pPr marL="0" indent="0">
-              <a:lnSpc>
-                <a:spcPct val="100000"/>
-              </a:lnSpc>
-              <a:spcBef>
-                <a:spcPts val="0"/>
-              </a:spcBef>
-              <a:buFont typeface="Arial" panose="020B0604020202020204" pitchFamily="34" charset="0"/>
-              <a:buNone/>
-            </a:pPr>
-            <a:r>
-              <a:rPr lang="en-US" sz="1400" dirty="0">
-                <a:latin typeface="Courier New" panose="02070309020205020404" pitchFamily="49" charset="0"/>
-                <a:cs typeface="Courier New" panose="02070309020205020404" pitchFamily="49" charset="0"/>
-              </a:rPr>
-              <a:t>    "Name": "</a:t>
-            </a:r>
-            <a:r>
-              <a:rPr lang="en-US" sz="1400" dirty="0" err="1">
-                <a:latin typeface="Courier New" panose="02070309020205020404" pitchFamily="49" charset="0"/>
-                <a:cs typeface="Courier New" panose="02070309020205020404" pitchFamily="49" charset="0"/>
-              </a:rPr>
-              <a:t>GitSource</a:t>
-            </a:r>
-            <a:r>
-              <a:rPr lang="en-US" sz="1400" dirty="0">
-                <a:latin typeface="Courier New" panose="02070309020205020404" pitchFamily="49" charset="0"/>
-                <a:cs typeface="Courier New" panose="02070309020205020404" pitchFamily="49" charset="0"/>
-              </a:rPr>
-              <a:t>",</a:t>
-            </a:r>
-            <a:br>
-              <a:rPr lang="en-US" sz="1400" dirty="0">
-                <a:latin typeface="Courier New" panose="02070309020205020404" pitchFamily="49" charset="0"/>
-                <a:cs typeface="Courier New" panose="02070309020205020404" pitchFamily="49" charset="0"/>
-              </a:rPr>
-            </a:br>
-            <a:r>
-              <a:rPr lang="en-US" sz="1400" dirty="0">
-                <a:latin typeface="Courier New" panose="02070309020205020404" pitchFamily="49" charset="0"/>
-                <a:cs typeface="Courier New" panose="02070309020205020404" pitchFamily="49" charset="0"/>
-              </a:rPr>
-              <a:t>    "GitHub": {</a:t>
-            </a:r>
-            <a:br>
-              <a:rPr lang="en-US" sz="1400" dirty="0">
-                <a:latin typeface="Courier New" panose="02070309020205020404" pitchFamily="49" charset="0"/>
-                <a:cs typeface="Courier New" panose="02070309020205020404" pitchFamily="49" charset="0"/>
-              </a:rPr>
-            </a:br>
-            <a:r>
-              <a:rPr lang="en-US" sz="1400" dirty="0">
-                <a:latin typeface="Courier New" panose="02070309020205020404" pitchFamily="49" charset="0"/>
-                <a:cs typeface="Courier New" panose="02070309020205020404" pitchFamily="49" charset="0"/>
-              </a:rPr>
-              <a:t>      "Organization": "Signature-Code",</a:t>
-            </a:r>
-          </a:p>
-          <a:p>
-            <a:pPr marL="0" indent="0">
-              <a:lnSpc>
-                <a:spcPct val="100000"/>
-              </a:lnSpc>
-              <a:spcBef>
-                <a:spcPts val="0"/>
-              </a:spcBef>
-              <a:buFont typeface="Arial" panose="020B0604020202020204" pitchFamily="34" charset="0"/>
-              <a:buNone/>
-            </a:pPr>
-            <a:r>
-              <a:rPr lang="en-US" sz="1400" dirty="0">
-                <a:latin typeface="Courier New" panose="02070309020205020404" pitchFamily="49" charset="0"/>
-                <a:cs typeface="Courier New" panose="02070309020205020404" pitchFamily="49" charset="0"/>
-              </a:rPr>
-              <a:t>      "</a:t>
-            </a:r>
-            <a:r>
-              <a:rPr lang="en-US" sz="1400" dirty="0" err="1">
-                <a:latin typeface="Courier New" panose="02070309020205020404" pitchFamily="49" charset="0"/>
-                <a:cs typeface="Courier New" panose="02070309020205020404" pitchFamily="49" charset="0"/>
-              </a:rPr>
-              <a:t>SecretToken</a:t>
-            </a:r>
-            <a:r>
-              <a:rPr lang="en-US" sz="1400" dirty="0">
-                <a:latin typeface="Courier New" panose="02070309020205020404" pitchFamily="49" charset="0"/>
-                <a:cs typeface="Courier New" panose="02070309020205020404" pitchFamily="49" charset="0"/>
-              </a:rPr>
-              <a:t>": “Lkjdchbej236ecec6876edc3evqwx57d2455zefdaa"</a:t>
-            </a:r>
-          </a:p>
-          <a:p>
-            <a:pPr marL="0" indent="0">
-              <a:lnSpc>
-                <a:spcPct val="100000"/>
-              </a:lnSpc>
-              <a:spcBef>
-                <a:spcPts val="0"/>
-              </a:spcBef>
-              <a:buFont typeface="Arial" panose="020B0604020202020204" pitchFamily="34" charset="0"/>
-              <a:buNone/>
-            </a:pPr>
-            <a:r>
-              <a:rPr lang="en-US" sz="1400" dirty="0">
-                <a:latin typeface="Courier New" panose="02070309020205020404" pitchFamily="49" charset="0"/>
-                <a:cs typeface="Courier New" panose="02070309020205020404" pitchFamily="49" charset="0"/>
-              </a:rPr>
-              <a:t>    }</a:t>
-            </a:r>
-            <a:br>
-              <a:rPr lang="en-US" sz="1400" dirty="0">
-                <a:latin typeface="Courier New" panose="02070309020205020404" pitchFamily="49" charset="0"/>
-                <a:cs typeface="Courier New" panose="02070309020205020404" pitchFamily="49" charset="0"/>
-              </a:rPr>
-            </a:br>
-            <a:r>
-              <a:rPr lang="en-US" sz="1400" dirty="0">
-                <a:latin typeface="Courier New" panose="02070309020205020404" pitchFamily="49" charset="0"/>
-                <a:cs typeface="Courier New" panose="02070309020205020404" pitchFamily="49" charset="0"/>
-              </a:rPr>
-              <a:t>  }]</a:t>
-            </a:r>
-          </a:p>
-          <a:p>
-            <a:pPr marL="0" indent="0">
-              <a:lnSpc>
-                <a:spcPct val="100000"/>
-              </a:lnSpc>
-              <a:spcBef>
-                <a:spcPts val="0"/>
-              </a:spcBef>
-              <a:buFont typeface="Arial" panose="020B0604020202020204" pitchFamily="34" charset="0"/>
-              <a:buNone/>
-            </a:pPr>
-            <a:r>
-              <a:rPr lang="en-US" sz="1400" dirty="0">
-                <a:latin typeface="Courier New" panose="02070309020205020404" pitchFamily="49" charset="0"/>
-                <a:cs typeface="Courier New" panose="02070309020205020404" pitchFamily="49" charset="0"/>
-              </a:rPr>
-              <a:t>}</a:t>
-            </a:r>
-          </a:p>
-          <a:p>
-            <a:pPr marL="0" indent="0">
-              <a:lnSpc>
-                <a:spcPct val="100000"/>
-              </a:lnSpc>
-              <a:spcBef>
-                <a:spcPts val="0"/>
-              </a:spcBef>
-              <a:buFont typeface="Arial" panose="020B0604020202020204" pitchFamily="34" charset="0"/>
-              <a:buNone/>
-            </a:pPr>
-            <a:endParaRPr lang="en-US" sz="1400" dirty="0">
-              <a:latin typeface="Courier New" panose="02070309020205020404" pitchFamily="49" charset="0"/>
-              <a:cs typeface="Courier New" panose="02070309020205020404" pitchFamily="49" charset="0"/>
-            </a:endParaRPr>
+            <a:r>
+              <a:rPr lang="en-US" dirty="0" err="1"/>
+              <a:t>LaToulousaine</a:t>
+            </a:r>
+            <a:endParaRPr lang="en-US" dirty="0"/>
+          </a:p>
+          <a:p>
+            <a:r>
+              <a:rPr lang="en-US" dirty="0" err="1"/>
+              <a:t>LaToulousaine</a:t>
+            </a:r>
+            <a:r>
+              <a:rPr lang="en-US" dirty="0"/>
+              <a:t>/France</a:t>
+            </a:r>
+          </a:p>
+          <a:p>
+            <a:r>
+              <a:rPr lang="en-US" dirty="0" err="1"/>
+              <a:t>LaToulousaine</a:t>
+            </a:r>
+            <a:r>
+              <a:rPr lang="en-US" dirty="0"/>
+              <a:t>/France/Albi</a:t>
+            </a:r>
+          </a:p>
+          <a:p>
+            <a:r>
+              <a:rPr lang="en-US" dirty="0" err="1"/>
+              <a:t>LaToulousaine</a:t>
+            </a:r>
+            <a:r>
+              <a:rPr lang="en-US" dirty="0"/>
+              <a:t>/France/Albi/$Trolley1</a:t>
+            </a:r>
+          </a:p>
+          <a:p>
+            <a:r>
+              <a:rPr lang="en-US" dirty="0" err="1"/>
+              <a:t>LaToulousaine</a:t>
+            </a:r>
+            <a:r>
+              <a:rPr lang="en-US" dirty="0"/>
+              <a:t>/$</a:t>
+            </a:r>
+            <a:r>
+              <a:rPr lang="en-US" dirty="0" err="1"/>
+              <a:t>LaToulousaine</a:t>
+            </a:r>
+            <a:endParaRPr lang="en-US" dirty="0"/>
+          </a:p>
+          <a:p>
+            <a:r>
+              <a:rPr lang="en-US" dirty="0" err="1"/>
+              <a:t>LaToulousaine</a:t>
+            </a:r>
+            <a:r>
+              <a:rPr lang="en-US" dirty="0"/>
+              <a:t>/France/$France </a:t>
+            </a:r>
+          </a:p>
+          <a:p>
+            <a:endParaRPr lang="en-US" dirty="0"/>
           </a:p>
         </p:txBody>
       </p:sp>
       <p:sp>
         <p:nvSpPr>
-          <p:cNvPr id="5" name="Content Placeholder 2">
+          <p:cNvPr id="5" name="Rectangle: Rounded Corners 4">
             <a:extLst>
               <a:ext uri="{FF2B5EF4-FFF2-40B4-BE49-F238E27FC236}">
-                <a16:creationId xmlns:a16="http://schemas.microsoft.com/office/drawing/2014/main" id="{83D65CE2-9D81-5111-5961-A05FE0BFA74C}"/>
+                <a16:creationId xmlns:a16="http://schemas.microsoft.com/office/drawing/2014/main" id="{6170B939-629E-BFFF-DF85-51D4519AE2AA}"/>
               </a:ext>
             </a:extLst>
           </p:cNvPr>
-          <p:cNvSpPr txBox="1">
-            <a:spLocks/>
-          </p:cNvSpPr>
+          <p:cNvSpPr/>
           <p:nvPr/>
         </p:nvSpPr>
         <p:spPr>
           <a:xfrm>
-            <a:off x="7511374" y="3122579"/>
-            <a:ext cx="4206144" cy="2529191"/>
+            <a:off x="3389243" y="2733413"/>
+            <a:ext cx="1669774" cy="367748"/>
+          </a:xfrm>
+          <a:prstGeom prst="roundRect">
+            <a:avLst/>
+          </a:prstGeom>
+          <a:solidFill>
+            <a:srgbClr val="FF0000">
+              <a:alpha val="50000"/>
+            </a:srgbClr>
+          </a:solidFill>
+        </p:spPr>
+        <p:style>
+          <a:lnRef idx="2">
+            <a:schemeClr val="accent1">
+              <a:shade val="50000"/>
+            </a:schemeClr>
+          </a:lnRef>
+          <a:fillRef idx="1">
+            <a:schemeClr val="accent1"/>
+          </a:fillRef>
+          <a:effectRef idx="0">
+            <a:schemeClr val="accent1"/>
+          </a:effectRef>
+          <a:fontRef idx="minor">
+            <a:schemeClr val="lt1"/>
+          </a:fontRef>
+        </p:style>
+        <p:txBody>
+          <a:bodyPr rtlCol="0" anchor="ctr"/>
+          <a:lstStyle/>
+          <a:p>
+            <a:pPr algn="ctr"/>
+            <a:r>
+              <a:rPr lang="en-US" dirty="0"/>
+              <a:t>Organization</a:t>
+            </a:r>
+          </a:p>
+        </p:txBody>
+      </p:sp>
+      <p:sp>
+        <p:nvSpPr>
+          <p:cNvPr id="6" name="Rectangle: Rounded Corners 5">
+            <a:extLst>
+              <a:ext uri="{FF2B5EF4-FFF2-40B4-BE49-F238E27FC236}">
+                <a16:creationId xmlns:a16="http://schemas.microsoft.com/office/drawing/2014/main" id="{177D80DD-D821-CDBB-5A0E-A5FB1BFD8EB6}"/>
+              </a:ext>
+            </a:extLst>
+          </p:cNvPr>
+          <p:cNvSpPr/>
+          <p:nvPr/>
+        </p:nvSpPr>
+        <p:spPr>
+          <a:xfrm>
+            <a:off x="4426226" y="3299944"/>
+            <a:ext cx="1669774" cy="367748"/>
+          </a:xfrm>
+          <a:prstGeom prst="roundRect">
+            <a:avLst/>
+          </a:prstGeom>
+          <a:solidFill>
+            <a:srgbClr val="FF0000">
+              <a:alpha val="50000"/>
+            </a:srgbClr>
+          </a:solidFill>
+        </p:spPr>
+        <p:style>
+          <a:lnRef idx="2">
+            <a:schemeClr val="accent1">
+              <a:shade val="50000"/>
+            </a:schemeClr>
+          </a:lnRef>
+          <a:fillRef idx="1">
+            <a:schemeClr val="accent1"/>
+          </a:fillRef>
+          <a:effectRef idx="0">
+            <a:schemeClr val="accent1"/>
+          </a:effectRef>
+          <a:fontRef idx="minor">
+            <a:schemeClr val="lt1"/>
+          </a:fontRef>
+        </p:style>
+        <p:txBody>
+          <a:bodyPr rtlCol="0" anchor="ctr"/>
+          <a:lstStyle/>
+          <a:p>
+            <a:pPr algn="ctr"/>
+            <a:r>
+              <a:rPr lang="en-US" dirty="0"/>
+              <a:t>Workspace</a:t>
+            </a:r>
+          </a:p>
+        </p:txBody>
+      </p:sp>
+      <p:sp>
+        <p:nvSpPr>
+          <p:cNvPr id="9" name="Rectangle: Rounded Corners 8">
+            <a:extLst>
+              <a:ext uri="{FF2B5EF4-FFF2-40B4-BE49-F238E27FC236}">
+                <a16:creationId xmlns:a16="http://schemas.microsoft.com/office/drawing/2014/main" id="{3EBC1F60-B3CF-6B05-A7A4-6F0CE2975DB8}"/>
+              </a:ext>
+            </a:extLst>
+          </p:cNvPr>
+          <p:cNvSpPr/>
+          <p:nvPr/>
+        </p:nvSpPr>
+        <p:spPr>
+          <a:xfrm>
+            <a:off x="5703401" y="4814660"/>
+            <a:ext cx="2009362" cy="367748"/>
+          </a:xfrm>
+          <a:prstGeom prst="roundRect">
+            <a:avLst/>
+          </a:prstGeom>
+          <a:solidFill>
+            <a:srgbClr val="FF0000">
+              <a:alpha val="50000"/>
+            </a:srgbClr>
+          </a:solidFill>
+        </p:spPr>
+        <p:style>
+          <a:lnRef idx="2">
+            <a:schemeClr val="accent1">
+              <a:shade val="50000"/>
+            </a:schemeClr>
+          </a:lnRef>
+          <a:fillRef idx="1">
+            <a:schemeClr val="accent1"/>
+          </a:fillRef>
+          <a:effectRef idx="0">
+            <a:schemeClr val="accent1"/>
+          </a:effectRef>
+          <a:fontRef idx="minor">
+            <a:schemeClr val="lt1"/>
+          </a:fontRef>
+        </p:style>
+        <p:txBody>
+          <a:bodyPr rtlCol="0" anchor="ctr"/>
+          <a:lstStyle/>
+          <a:p>
+            <a:pPr algn="ctr"/>
+            <a:r>
+              <a:rPr lang="en-US" dirty="0" err="1"/>
+              <a:t>DomainController</a:t>
+            </a:r>
+            <a:endParaRPr lang="en-US" dirty="0"/>
+          </a:p>
+        </p:txBody>
+      </p:sp>
+      <p:sp>
+        <p:nvSpPr>
+          <p:cNvPr id="12" name="Rectangle: Rounded Corners 11">
+            <a:extLst>
+              <a:ext uri="{FF2B5EF4-FFF2-40B4-BE49-F238E27FC236}">
+                <a16:creationId xmlns:a16="http://schemas.microsoft.com/office/drawing/2014/main" id="{3D35029E-2AD2-A595-0B00-90E8008C62C8}"/>
+              </a:ext>
+            </a:extLst>
+          </p:cNvPr>
+          <p:cNvSpPr/>
+          <p:nvPr/>
+        </p:nvSpPr>
+        <p:spPr>
+          <a:xfrm>
+            <a:off x="5673587" y="5324691"/>
+            <a:ext cx="2267779" cy="367748"/>
+          </a:xfrm>
+          <a:prstGeom prst="roundRect">
+            <a:avLst/>
+          </a:prstGeom>
+          <a:solidFill>
+            <a:srgbClr val="FF0000">
+              <a:alpha val="50000"/>
+            </a:srgbClr>
+          </a:solidFill>
+        </p:spPr>
+        <p:style>
+          <a:lnRef idx="2">
+            <a:schemeClr val="accent1">
+              <a:shade val="50000"/>
+            </a:schemeClr>
+          </a:lnRef>
+          <a:fillRef idx="1">
+            <a:schemeClr val="accent1"/>
+          </a:fillRef>
+          <a:effectRef idx="0">
+            <a:schemeClr val="accent1"/>
+          </a:effectRef>
+          <a:fontRef idx="minor">
+            <a:schemeClr val="lt1"/>
+          </a:fontRef>
+        </p:style>
+        <p:txBody>
+          <a:bodyPr rtlCol="0" anchor="ctr"/>
+          <a:lstStyle/>
+          <a:p>
+            <a:pPr algn="ctr"/>
+            <a:r>
+              <a:rPr lang="en-US" dirty="0" err="1"/>
+              <a:t>WorkspaceController</a:t>
+            </a:r>
+            <a:endParaRPr lang="en-US" dirty="0"/>
+          </a:p>
+        </p:txBody>
+      </p:sp>
+      <p:sp>
+        <p:nvSpPr>
+          <p:cNvPr id="17" name="Rectangle: Rounded Corners 16">
+            <a:extLst>
+              <a:ext uri="{FF2B5EF4-FFF2-40B4-BE49-F238E27FC236}">
+                <a16:creationId xmlns:a16="http://schemas.microsoft.com/office/drawing/2014/main" id="{EE02BCC7-3C5F-72DC-7E0C-BD1F18556D35}"/>
+              </a:ext>
+            </a:extLst>
+          </p:cNvPr>
+          <p:cNvSpPr/>
+          <p:nvPr/>
+        </p:nvSpPr>
+        <p:spPr>
+          <a:xfrm>
+            <a:off x="6582189" y="4272077"/>
+            <a:ext cx="917713" cy="367748"/>
+          </a:xfrm>
+          <a:prstGeom prst="roundRect">
+            <a:avLst/>
+          </a:prstGeom>
+          <a:solidFill>
+            <a:srgbClr val="FF0000">
+              <a:alpha val="50000"/>
+            </a:srgbClr>
+          </a:solidFill>
+        </p:spPr>
+        <p:style>
+          <a:lnRef idx="2">
+            <a:schemeClr val="accent1">
+              <a:shade val="50000"/>
+            </a:schemeClr>
+          </a:lnRef>
+          <a:fillRef idx="1">
+            <a:schemeClr val="accent1"/>
+          </a:fillRef>
+          <a:effectRef idx="0">
+            <a:schemeClr val="accent1"/>
+          </a:effectRef>
+          <a:fontRef idx="minor">
+            <a:schemeClr val="lt1"/>
+          </a:fontRef>
+        </p:style>
+        <p:txBody>
+          <a:bodyPr rtlCol="0" anchor="ctr"/>
+          <a:lstStyle/>
+          <a:p>
+            <a:pPr algn="ctr"/>
+            <a:r>
+              <a:rPr lang="en-US" dirty="0"/>
+              <a:t>Party</a:t>
+            </a:r>
+          </a:p>
+        </p:txBody>
+      </p:sp>
+      <p:sp>
+        <p:nvSpPr>
+          <p:cNvPr id="18" name="Rectangle: Rounded Corners 17">
+            <a:extLst>
+              <a:ext uri="{FF2B5EF4-FFF2-40B4-BE49-F238E27FC236}">
+                <a16:creationId xmlns:a16="http://schemas.microsoft.com/office/drawing/2014/main" id="{E55E74FA-E835-CAC6-1B66-C39B8A12F111}"/>
+              </a:ext>
+            </a:extLst>
+          </p:cNvPr>
+          <p:cNvSpPr/>
+          <p:nvPr/>
+        </p:nvSpPr>
+        <p:spPr>
+          <a:xfrm>
+            <a:off x="5059017" y="3786027"/>
+            <a:ext cx="1669774" cy="367748"/>
+          </a:xfrm>
+          <a:prstGeom prst="roundRect">
+            <a:avLst/>
+          </a:prstGeom>
+          <a:solidFill>
+            <a:srgbClr val="FF0000">
+              <a:alpha val="50000"/>
+            </a:srgbClr>
+          </a:solidFill>
+        </p:spPr>
+        <p:style>
+          <a:lnRef idx="2">
+            <a:schemeClr val="accent1">
+              <a:shade val="50000"/>
+            </a:schemeClr>
+          </a:lnRef>
+          <a:fillRef idx="1">
+            <a:schemeClr val="accent1"/>
+          </a:fillRef>
+          <a:effectRef idx="0">
+            <a:schemeClr val="accent1"/>
+          </a:effectRef>
+          <a:fontRef idx="minor">
+            <a:schemeClr val="lt1"/>
+          </a:fontRef>
+        </p:style>
+        <p:txBody>
+          <a:bodyPr rtlCol="0" anchor="ctr"/>
+          <a:lstStyle/>
+          <a:p>
+            <a:pPr algn="ctr"/>
+            <a:r>
+              <a:rPr lang="en-US" dirty="0"/>
+              <a:t>Workspace</a:t>
+            </a:r>
+          </a:p>
+        </p:txBody>
+      </p:sp>
+      <p:sp>
+        <p:nvSpPr>
+          <p:cNvPr id="20" name="TextBox 19">
+            <a:extLst>
+              <a:ext uri="{FF2B5EF4-FFF2-40B4-BE49-F238E27FC236}">
+                <a16:creationId xmlns:a16="http://schemas.microsoft.com/office/drawing/2014/main" id="{6868E51E-A4C1-C171-A714-69FB79738F0C}"/>
+              </a:ext>
+            </a:extLst>
+          </p:cNvPr>
+          <p:cNvSpPr txBox="1"/>
+          <p:nvPr/>
+        </p:nvSpPr>
+        <p:spPr>
+          <a:xfrm>
+            <a:off x="5493854" y="1347500"/>
+            <a:ext cx="6251106" cy="707886"/>
           </a:xfrm>
           <a:prstGeom prst="rect">
             <a:avLst/>
           </a:prstGeom>
+          <a:noFill/>
         </p:spPr>
         <p:txBody>
-          <a:bodyPr vert="horz" lIns="91440" tIns="45720" rIns="91440" bIns="45720" rtlCol="0">
-            <a:normAutofit fontScale="70000" lnSpcReduction="20000"/>
+          <a:bodyPr wrap="square">
+            <a:spAutoFit/>
           </a:bodyPr>
-          <a:lstStyle>
-            <a:lvl1pPr marL="228600" indent="-228600" algn="l" defTabSz="914400" rtl="0" eaLnBrk="1" latinLnBrk="0" hangingPunct="1">
-              <a:lnSpc>
-                <a:spcPct val="90000"/>
-              </a:lnSpc>
-              <a:spcBef>
-                <a:spcPts val="1000"/>
-              </a:spcBef>
-              <a:buFont typeface="Arial" panose="020B0604020202020204" pitchFamily="34" charset="0"/>
-              <a:buChar char="•"/>
-              <a:defRPr sz="2800" kern="1200">
-                <a:solidFill>
-                  <a:schemeClr val="tx1"/>
-                </a:solidFill>
-                <a:latin typeface="+mn-lt"/>
-                <a:ea typeface="+mn-ea"/>
-                <a:cs typeface="+mn-cs"/>
-              </a:defRPr>
-            </a:lvl1pPr>
-            <a:lvl2pPr marL="685800" indent="-228600" algn="l" defTabSz="914400" rtl="0" eaLnBrk="1" latinLnBrk="0" hangingPunct="1">
-              <a:lnSpc>
-                <a:spcPct val="90000"/>
-              </a:lnSpc>
-              <a:spcBef>
-                <a:spcPts val="500"/>
-              </a:spcBef>
-              <a:buFont typeface="Arial" panose="020B0604020202020204" pitchFamily="34" charset="0"/>
-              <a:buChar char="•"/>
-              <a:defRPr sz="2400" kern="1200">
-                <a:solidFill>
-                  <a:schemeClr val="tx1"/>
-                </a:solidFill>
-                <a:latin typeface="+mn-lt"/>
-                <a:ea typeface="+mn-ea"/>
-                <a:cs typeface="+mn-cs"/>
-              </a:defRPr>
-            </a:lvl2pPr>
-            <a:lvl3pPr marL="1143000" indent="-228600" algn="l" defTabSz="914400" rtl="0" eaLnBrk="1" latinLnBrk="0" hangingPunct="1">
-              <a:lnSpc>
-                <a:spcPct val="90000"/>
-              </a:lnSpc>
-              <a:spcBef>
-                <a:spcPts val="500"/>
-              </a:spcBef>
-              <a:buFont typeface="Arial" panose="020B0604020202020204" pitchFamily="34" charset="0"/>
-              <a:buChar char="•"/>
-              <a:defRPr sz="2000" kern="1200">
-                <a:solidFill>
-                  <a:schemeClr val="tx1"/>
-                </a:solidFill>
-                <a:latin typeface="+mn-lt"/>
-                <a:ea typeface="+mn-ea"/>
-                <a:cs typeface="+mn-cs"/>
-              </a:defRPr>
-            </a:lvl3pPr>
-            <a:lvl4pPr marL="1600200" indent="-228600" algn="l" defTabSz="914400" rtl="0" eaLnBrk="1" latinLnBrk="0" hangingPunct="1">
-              <a:lnSpc>
-                <a:spcPct val="90000"/>
-              </a:lnSpc>
-              <a:spcBef>
-                <a:spcPts val="500"/>
-              </a:spcBef>
-              <a:buFont typeface="Arial" panose="020B0604020202020204" pitchFamily="34" charset="0"/>
-              <a:buChar char="•"/>
-              <a:defRPr sz="1800" kern="1200">
-                <a:solidFill>
-                  <a:schemeClr val="tx1"/>
-                </a:solidFill>
-                <a:latin typeface="+mn-lt"/>
-                <a:ea typeface="+mn-ea"/>
-                <a:cs typeface="+mn-cs"/>
-              </a:defRPr>
-            </a:lvl4pPr>
-            <a:lvl5pPr marL="2057400" indent="-228600" algn="l" defTabSz="914400" rtl="0" eaLnBrk="1" latinLnBrk="0" hangingPunct="1">
-              <a:lnSpc>
-                <a:spcPct val="90000"/>
-              </a:lnSpc>
-              <a:spcBef>
-                <a:spcPts val="500"/>
-              </a:spcBef>
-              <a:buFont typeface="Arial" panose="020B0604020202020204" pitchFamily="34" charset="0"/>
-              <a:buChar char="•"/>
-              <a:defRPr sz="1800" kern="1200">
-                <a:solidFill>
-                  <a:schemeClr val="tx1"/>
-                </a:solidFill>
-                <a:latin typeface="+mn-lt"/>
-                <a:ea typeface="+mn-ea"/>
-                <a:cs typeface="+mn-cs"/>
-              </a:defRPr>
-            </a:lvl5pPr>
-            <a:lvl6pPr marL="2514600" indent="-228600" algn="l" defTabSz="914400" rtl="0" eaLnBrk="1" latinLnBrk="0" hangingPunct="1">
-              <a:lnSpc>
-                <a:spcPct val="90000"/>
-              </a:lnSpc>
-              <a:spcBef>
-                <a:spcPts val="500"/>
-              </a:spcBef>
-              <a:buFont typeface="Arial" panose="020B0604020202020204" pitchFamily="34" charset="0"/>
-              <a:buChar char="•"/>
-              <a:defRPr sz="1800" kern="1200">
-                <a:solidFill>
-                  <a:schemeClr val="tx1"/>
-                </a:solidFill>
-                <a:latin typeface="+mn-lt"/>
-                <a:ea typeface="+mn-ea"/>
-                <a:cs typeface="+mn-cs"/>
-              </a:defRPr>
-            </a:lvl6pPr>
-            <a:lvl7pPr marL="2971800" indent="-228600" algn="l" defTabSz="914400" rtl="0" eaLnBrk="1" latinLnBrk="0" hangingPunct="1">
-              <a:lnSpc>
-                <a:spcPct val="90000"/>
-              </a:lnSpc>
-              <a:spcBef>
-                <a:spcPts val="500"/>
-              </a:spcBef>
-              <a:buFont typeface="Arial" panose="020B0604020202020204" pitchFamily="34" charset="0"/>
-              <a:buChar char="•"/>
-              <a:defRPr sz="1800" kern="1200">
-                <a:solidFill>
-                  <a:schemeClr val="tx1"/>
-                </a:solidFill>
-                <a:latin typeface="+mn-lt"/>
-                <a:ea typeface="+mn-ea"/>
-                <a:cs typeface="+mn-cs"/>
-              </a:defRPr>
-            </a:lvl7pPr>
-            <a:lvl8pPr marL="3429000" indent="-228600" algn="l" defTabSz="914400" rtl="0" eaLnBrk="1" latinLnBrk="0" hangingPunct="1">
-              <a:lnSpc>
-                <a:spcPct val="90000"/>
-              </a:lnSpc>
-              <a:spcBef>
-                <a:spcPts val="500"/>
-              </a:spcBef>
-              <a:buFont typeface="Arial" panose="020B0604020202020204" pitchFamily="34" charset="0"/>
-              <a:buChar char="•"/>
-              <a:defRPr sz="1800" kern="1200">
-                <a:solidFill>
-                  <a:schemeClr val="tx1"/>
-                </a:solidFill>
-                <a:latin typeface="+mn-lt"/>
-                <a:ea typeface="+mn-ea"/>
-                <a:cs typeface="+mn-cs"/>
-              </a:defRPr>
-            </a:lvl8pPr>
-            <a:lvl9pPr marL="3886200" indent="-228600" algn="l" defTabSz="914400" rtl="0" eaLnBrk="1" latinLnBrk="0" hangingPunct="1">
-              <a:lnSpc>
-                <a:spcPct val="90000"/>
-              </a:lnSpc>
-              <a:spcBef>
-                <a:spcPts val="500"/>
-              </a:spcBef>
-              <a:buFont typeface="Arial" panose="020B0604020202020204" pitchFamily="34" charset="0"/>
-              <a:buChar char="•"/>
-              <a:defRPr sz="1800" kern="1200">
-                <a:solidFill>
-                  <a:schemeClr val="tx1"/>
-                </a:solidFill>
-                <a:latin typeface="+mn-lt"/>
-                <a:ea typeface="+mn-ea"/>
-                <a:cs typeface="+mn-cs"/>
-              </a:defRPr>
-            </a:lvl9pPr>
-          </a:lstStyle>
-          <a:p>
-            <a:r>
-              <a:rPr lang="en-US" dirty="0"/>
-              <a:t>“Undefined” is the reserved Domain name that means “external to the System”</a:t>
-            </a:r>
-          </a:p>
-          <a:p>
-            <a:r>
-              <a:rPr lang="en-US" dirty="0"/>
-              <a:t>We don’t need an “Address”: this remote is a </a:t>
-            </a:r>
-            <a:r>
-              <a:rPr lang="en-US" dirty="0" err="1"/>
-              <a:t>GitHubApp</a:t>
-            </a:r>
-            <a:r>
-              <a:rPr lang="en-US" dirty="0"/>
-              <a:t> because of the “GitHub” configuration key. </a:t>
-            </a:r>
-          </a:p>
-          <a:p>
-            <a:r>
-              <a:rPr lang="en-US" dirty="0"/>
-              <a:t>The package </a:t>
-            </a:r>
-            <a:r>
-              <a:rPr lang="en-US" dirty="0" err="1"/>
-              <a:t>CK.AppIdentity.GitHubApp</a:t>
-            </a:r>
-            <a:r>
-              <a:rPr lang="en-US" dirty="0"/>
-              <a:t> handles this automatically.</a:t>
-            </a:r>
+          <a:lstStyle/>
+          <a:p>
+            <a:r>
+              <a:rPr lang="en-US" sz="4000" dirty="0">
+                <a:sym typeface="Wingdings" panose="05000000000000000000" pitchFamily="2" charset="2"/>
+              </a:rPr>
+              <a:t> </a:t>
+            </a:r>
+            <a:r>
+              <a:rPr lang="en-US" sz="4000" dirty="0" err="1">
+                <a:sym typeface="Wingdings" panose="05000000000000000000" pitchFamily="2" charset="2"/>
+              </a:rPr>
+              <a:t>Autodescriptive</a:t>
+            </a:r>
+            <a:r>
+              <a:rPr lang="en-US" sz="4000" dirty="0">
+                <a:sym typeface="Wingdings" panose="05000000000000000000" pitchFamily="2" charset="2"/>
+              </a:rPr>
+              <a:t> full name</a:t>
+            </a:r>
+            <a:endParaRPr lang="en-US" sz="4000" dirty="0"/>
           </a:p>
         </p:txBody>
       </p:sp>
     </p:spTree>
     <p:extLst>
       <p:ext uri="{BB962C8B-B14F-4D97-AF65-F5344CB8AC3E}">
-        <p14:creationId xmlns:p14="http://schemas.microsoft.com/office/powerpoint/2010/main" val="2343656113"/>
+        <p14:creationId xmlns:p14="http://schemas.microsoft.com/office/powerpoint/2010/main" val="2719144844"/>
       </p:ext>
     </p:extLst>
   </p:cSld>
@@ -10244,7 +10399,7 @@
           <p:cNvPr id="2" name="Title 1">
             <a:extLst>
               <a:ext uri="{FF2B5EF4-FFF2-40B4-BE49-F238E27FC236}">
-                <a16:creationId xmlns:a16="http://schemas.microsoft.com/office/drawing/2014/main" id="{A798245F-DD26-ADCC-6CD2-D5ED5F5598A9}"/>
+                <a16:creationId xmlns:a16="http://schemas.microsoft.com/office/drawing/2014/main" id="{F0ABB2F6-6A3B-0600-9CA6-236A6AB60DE2}"/>
               </a:ext>
             </a:extLst>
           </p:cNvPr>
@@ -10262,50 +10417,94 @@
           <a:p>
             <a:r>
               <a:rPr lang="en-US" dirty="0"/>
-              <a:t>A simple Configuration Model</a:t>
+              <a:t>Security and privacy</a:t>
             </a:r>
           </a:p>
         </p:txBody>
       </p:sp>
-      <p:pic>
-        <p:nvPicPr>
-          <p:cNvPr id="9" name="Content Placeholder 8" descr="Class diagram.">
+      <p:sp>
+        <p:nvSpPr>
+          <p:cNvPr id="3" name="Content Placeholder 2">
             <a:extLst>
               <a:ext uri="{FF2B5EF4-FFF2-40B4-BE49-F238E27FC236}">
-                <a16:creationId xmlns:a16="http://schemas.microsoft.com/office/drawing/2014/main" id="{EB82A400-7337-4C1F-868E-D34B84F5DF2F}"/>
+                <a16:creationId xmlns:a16="http://schemas.microsoft.com/office/drawing/2014/main" id="{05AD752E-3F69-B30A-607A-3285A0B1B362}"/>
               </a:ext>
             </a:extLst>
           </p:cNvPr>
-          <p:cNvPicPr>
-            <a:picLocks noGrp="1" noChangeAspect="1"/>
-          </p:cNvPicPr>
+          <p:cNvSpPr>
+            <a:spLocks noGrp="1"/>
+          </p:cNvSpPr>
           <p:nvPr>
             <p:ph idx="1"/>
           </p:nvPr>
-        </p:nvPicPr>
-        <p:blipFill>
-          <a:blip r:embed="rId2">
-            <a:extLst>
-              <a:ext uri="{28A0092B-C50C-407E-A947-70E740481C1C}">
-                <a14:useLocalDpi xmlns:a14="http://schemas.microsoft.com/office/drawing/2010/main" val="0"/>
-              </a:ext>
-            </a:extLst>
-          </a:blip>
-          <a:stretch>
-            <a:fillRect/>
-          </a:stretch>
-        </p:blipFill>
-        <p:spPr>
-          <a:xfrm>
-            <a:off x="292025" y="1585180"/>
-            <a:ext cx="11794531" cy="4802187"/>
-          </a:xfrm>
-        </p:spPr>
-      </p:pic>
+        </p:nvSpPr>
+        <p:spPr/>
+        <p:txBody>
+          <a:bodyPr/>
+          <a:lstStyle/>
+          <a:p>
+            <a:r>
+              <a:rPr lang="en-US" dirty="0"/>
+              <a:t>No keys appear in the configuration.</a:t>
+            </a:r>
+          </a:p>
+          <a:p>
+            <a:r>
+              <a:rPr lang="en-US" dirty="0"/>
+              <a:t>At least one X509 certificate must be available per Party.</a:t>
+            </a:r>
+          </a:p>
+          <a:p>
+            <a:pPr lvl="1"/>
+            <a:r>
+              <a:rPr lang="en-US" dirty="0" err="1"/>
+              <a:t>SaasOneCS</a:t>
+            </a:r>
+            <a:r>
+              <a:rPr lang="en-US" dirty="0"/>
+              <a:t>/OneCS1 can work with a single certificate.</a:t>
+            </a:r>
+          </a:p>
+          <a:p>
+            <a:r>
+              <a:rPr lang="en-US" dirty="0"/>
+              <a:t>Keys are managed “by design” in a store by </a:t>
+            </a:r>
+            <a:r>
+              <a:rPr lang="en-US" dirty="0" err="1"/>
+              <a:t>CK.AppIdentity</a:t>
+            </a:r>
+            <a:r>
+              <a:rPr lang="en-US" dirty="0"/>
+              <a:t>.</a:t>
+            </a:r>
+          </a:p>
+          <a:p>
+            <a:pPr lvl="1"/>
+            <a:r>
+              <a:rPr lang="en-US" dirty="0"/>
+              <a:t>The simplest store is a folder with folders and/or files that contain the certificate files.</a:t>
+            </a:r>
+          </a:p>
+          <a:p>
+            <a:pPr lvl="1"/>
+            <a:r>
+              <a:rPr lang="en-US" dirty="0"/>
+              <a:t>Stronger key store may be implemented later.</a:t>
+            </a:r>
+          </a:p>
+          <a:p>
+            <a:r>
+              <a:rPr lang="en-US" dirty="0"/>
+              <a:t>Any relationship between 2 parties can be protected with a dedicated pair of keys.</a:t>
+            </a:r>
+          </a:p>
+        </p:txBody>
+      </p:sp>
     </p:spTree>
     <p:extLst>
       <p:ext uri="{BB962C8B-B14F-4D97-AF65-F5344CB8AC3E}">
-        <p14:creationId xmlns:p14="http://schemas.microsoft.com/office/powerpoint/2010/main" val="2483408436"/>
+        <p14:creationId xmlns:p14="http://schemas.microsoft.com/office/powerpoint/2010/main" val="2945111844"/>
       </p:ext>
     </p:extLst>
   </p:cSld>
@@ -10509,6 +10708,1207 @@
           <p:cNvPr id="2" name="Title 1">
             <a:extLst>
               <a:ext uri="{FF2B5EF4-FFF2-40B4-BE49-F238E27FC236}">
+                <a16:creationId xmlns:a16="http://schemas.microsoft.com/office/drawing/2014/main" id="{1B7F35EA-9815-CA8C-A80D-1857A5FDB005}"/>
+              </a:ext>
+            </a:extLst>
+          </p:cNvPr>
+          <p:cNvSpPr>
+            <a:spLocks noGrp="1"/>
+          </p:cNvSpPr>
+          <p:nvPr>
+            <p:ph type="title"/>
+          </p:nvPr>
+        </p:nvSpPr>
+        <p:spPr/>
+        <p:txBody>
+          <a:bodyPr/>
+          <a:lstStyle/>
+          <a:p>
+            <a:r>
+              <a:rPr lang="en-US" dirty="0"/>
+              <a:t>Other uses…</a:t>
+            </a:r>
+          </a:p>
+        </p:txBody>
+      </p:sp>
+      <p:sp>
+        <p:nvSpPr>
+          <p:cNvPr id="3" name="Content Placeholder 2">
+            <a:extLst>
+              <a:ext uri="{FF2B5EF4-FFF2-40B4-BE49-F238E27FC236}">
+                <a16:creationId xmlns:a16="http://schemas.microsoft.com/office/drawing/2014/main" id="{4DFA97AC-5D6A-7874-9EEB-5565D4A19027}"/>
+              </a:ext>
+            </a:extLst>
+          </p:cNvPr>
+          <p:cNvSpPr>
+            <a:spLocks noGrp="1"/>
+          </p:cNvSpPr>
+          <p:nvPr>
+            <p:ph idx="1"/>
+          </p:nvPr>
+        </p:nvSpPr>
+        <p:spPr>
+          <a:xfrm>
+            <a:off x="838200" y="1825625"/>
+            <a:ext cx="10515600" cy="888392"/>
+          </a:xfrm>
+        </p:spPr>
+        <p:txBody>
+          <a:bodyPr/>
+          <a:lstStyle/>
+          <a:p>
+            <a:r>
+              <a:rPr lang="en-US" dirty="0"/>
+              <a:t>Describing and configuring external services.</a:t>
+            </a:r>
+          </a:p>
+          <a:p>
+            <a:pPr lvl="1"/>
+            <a:r>
+              <a:rPr lang="en-US" dirty="0"/>
+              <a:t>Package First…</a:t>
+            </a:r>
+          </a:p>
+        </p:txBody>
+      </p:sp>
+      <p:sp>
+        <p:nvSpPr>
+          <p:cNvPr id="4" name="Content Placeholder 2">
+            <a:extLst>
+              <a:ext uri="{FF2B5EF4-FFF2-40B4-BE49-F238E27FC236}">
+                <a16:creationId xmlns:a16="http://schemas.microsoft.com/office/drawing/2014/main" id="{62D17C1F-A51E-C522-33E4-E7D2F26CB586}"/>
+              </a:ext>
+            </a:extLst>
+          </p:cNvPr>
+          <p:cNvSpPr txBox="1">
+            <a:spLocks/>
+          </p:cNvSpPr>
+          <p:nvPr/>
+        </p:nvSpPr>
+        <p:spPr>
+          <a:xfrm>
+            <a:off x="838200" y="2714017"/>
+            <a:ext cx="6749374" cy="3778857"/>
+          </a:xfrm>
+          <a:prstGeom prst="rect">
+            <a:avLst/>
+          </a:prstGeom>
+        </p:spPr>
+        <p:txBody>
+          <a:bodyPr vert="horz" lIns="91440" tIns="45720" rIns="91440" bIns="45720" rtlCol="0">
+            <a:normAutofit fontScale="85000" lnSpcReduction="20000"/>
+          </a:bodyPr>
+          <a:lstStyle>
+            <a:lvl1pPr marL="228600" indent="-228600" algn="l" defTabSz="914400" rtl="0" eaLnBrk="1" latinLnBrk="0" hangingPunct="1">
+              <a:lnSpc>
+                <a:spcPct val="90000"/>
+              </a:lnSpc>
+              <a:spcBef>
+                <a:spcPts val="1000"/>
+              </a:spcBef>
+              <a:buFont typeface="Arial" panose="020B0604020202020204" pitchFamily="34" charset="0"/>
+              <a:buChar char="•"/>
+              <a:defRPr sz="2800" kern="1200">
+                <a:solidFill>
+                  <a:schemeClr val="tx1"/>
+                </a:solidFill>
+                <a:latin typeface="+mn-lt"/>
+                <a:ea typeface="+mn-ea"/>
+                <a:cs typeface="+mn-cs"/>
+              </a:defRPr>
+            </a:lvl1pPr>
+            <a:lvl2pPr marL="685800" indent="-228600" algn="l" defTabSz="914400" rtl="0" eaLnBrk="1" latinLnBrk="0" hangingPunct="1">
+              <a:lnSpc>
+                <a:spcPct val="90000"/>
+              </a:lnSpc>
+              <a:spcBef>
+                <a:spcPts val="500"/>
+              </a:spcBef>
+              <a:buFont typeface="Arial" panose="020B0604020202020204" pitchFamily="34" charset="0"/>
+              <a:buChar char="•"/>
+              <a:defRPr sz="2400" kern="1200">
+                <a:solidFill>
+                  <a:schemeClr val="tx1"/>
+                </a:solidFill>
+                <a:latin typeface="+mn-lt"/>
+                <a:ea typeface="+mn-ea"/>
+                <a:cs typeface="+mn-cs"/>
+              </a:defRPr>
+            </a:lvl2pPr>
+            <a:lvl3pPr marL="1143000" indent="-228600" algn="l" defTabSz="914400" rtl="0" eaLnBrk="1" latinLnBrk="0" hangingPunct="1">
+              <a:lnSpc>
+                <a:spcPct val="90000"/>
+              </a:lnSpc>
+              <a:spcBef>
+                <a:spcPts val="500"/>
+              </a:spcBef>
+              <a:buFont typeface="Arial" panose="020B0604020202020204" pitchFamily="34" charset="0"/>
+              <a:buChar char="•"/>
+              <a:defRPr sz="2000" kern="1200">
+                <a:solidFill>
+                  <a:schemeClr val="tx1"/>
+                </a:solidFill>
+                <a:latin typeface="+mn-lt"/>
+                <a:ea typeface="+mn-ea"/>
+                <a:cs typeface="+mn-cs"/>
+              </a:defRPr>
+            </a:lvl3pPr>
+            <a:lvl4pPr marL="1600200" indent="-228600" algn="l" defTabSz="914400" rtl="0" eaLnBrk="1" latinLnBrk="0" hangingPunct="1">
+              <a:lnSpc>
+                <a:spcPct val="90000"/>
+              </a:lnSpc>
+              <a:spcBef>
+                <a:spcPts val="500"/>
+              </a:spcBef>
+              <a:buFont typeface="Arial" panose="020B0604020202020204" pitchFamily="34" charset="0"/>
+              <a:buChar char="•"/>
+              <a:defRPr sz="1800" kern="1200">
+                <a:solidFill>
+                  <a:schemeClr val="tx1"/>
+                </a:solidFill>
+                <a:latin typeface="+mn-lt"/>
+                <a:ea typeface="+mn-ea"/>
+                <a:cs typeface="+mn-cs"/>
+              </a:defRPr>
+            </a:lvl4pPr>
+            <a:lvl5pPr marL="2057400" indent="-228600" algn="l" defTabSz="914400" rtl="0" eaLnBrk="1" latinLnBrk="0" hangingPunct="1">
+              <a:lnSpc>
+                <a:spcPct val="90000"/>
+              </a:lnSpc>
+              <a:spcBef>
+                <a:spcPts val="500"/>
+              </a:spcBef>
+              <a:buFont typeface="Arial" panose="020B0604020202020204" pitchFamily="34" charset="0"/>
+              <a:buChar char="•"/>
+              <a:defRPr sz="1800" kern="1200">
+                <a:solidFill>
+                  <a:schemeClr val="tx1"/>
+                </a:solidFill>
+                <a:latin typeface="+mn-lt"/>
+                <a:ea typeface="+mn-ea"/>
+                <a:cs typeface="+mn-cs"/>
+              </a:defRPr>
+            </a:lvl5pPr>
+            <a:lvl6pPr marL="2514600" indent="-228600" algn="l" defTabSz="914400" rtl="0" eaLnBrk="1" latinLnBrk="0" hangingPunct="1">
+              <a:lnSpc>
+                <a:spcPct val="90000"/>
+              </a:lnSpc>
+              <a:spcBef>
+                <a:spcPts val="500"/>
+              </a:spcBef>
+              <a:buFont typeface="Arial" panose="020B0604020202020204" pitchFamily="34" charset="0"/>
+              <a:buChar char="•"/>
+              <a:defRPr sz="1800" kern="1200">
+                <a:solidFill>
+                  <a:schemeClr val="tx1"/>
+                </a:solidFill>
+                <a:latin typeface="+mn-lt"/>
+                <a:ea typeface="+mn-ea"/>
+                <a:cs typeface="+mn-cs"/>
+              </a:defRPr>
+            </a:lvl6pPr>
+            <a:lvl7pPr marL="2971800" indent="-228600" algn="l" defTabSz="914400" rtl="0" eaLnBrk="1" latinLnBrk="0" hangingPunct="1">
+              <a:lnSpc>
+                <a:spcPct val="90000"/>
+              </a:lnSpc>
+              <a:spcBef>
+                <a:spcPts val="500"/>
+              </a:spcBef>
+              <a:buFont typeface="Arial" panose="020B0604020202020204" pitchFamily="34" charset="0"/>
+              <a:buChar char="•"/>
+              <a:defRPr sz="1800" kern="1200">
+                <a:solidFill>
+                  <a:schemeClr val="tx1"/>
+                </a:solidFill>
+                <a:latin typeface="+mn-lt"/>
+                <a:ea typeface="+mn-ea"/>
+                <a:cs typeface="+mn-cs"/>
+              </a:defRPr>
+            </a:lvl7pPr>
+            <a:lvl8pPr marL="3429000" indent="-228600" algn="l" defTabSz="914400" rtl="0" eaLnBrk="1" latinLnBrk="0" hangingPunct="1">
+              <a:lnSpc>
+                <a:spcPct val="90000"/>
+              </a:lnSpc>
+              <a:spcBef>
+                <a:spcPts val="500"/>
+              </a:spcBef>
+              <a:buFont typeface="Arial" panose="020B0604020202020204" pitchFamily="34" charset="0"/>
+              <a:buChar char="•"/>
+              <a:defRPr sz="1800" kern="1200">
+                <a:solidFill>
+                  <a:schemeClr val="tx1"/>
+                </a:solidFill>
+                <a:latin typeface="+mn-lt"/>
+                <a:ea typeface="+mn-ea"/>
+                <a:cs typeface="+mn-cs"/>
+              </a:defRPr>
+            </a:lvl8pPr>
+            <a:lvl9pPr marL="3886200" indent="-228600" algn="l" defTabSz="914400" rtl="0" eaLnBrk="1" latinLnBrk="0" hangingPunct="1">
+              <a:lnSpc>
+                <a:spcPct val="90000"/>
+              </a:lnSpc>
+              <a:spcBef>
+                <a:spcPts val="500"/>
+              </a:spcBef>
+              <a:buFont typeface="Arial" panose="020B0604020202020204" pitchFamily="34" charset="0"/>
+              <a:buChar char="•"/>
+              <a:defRPr sz="1800" kern="1200">
+                <a:solidFill>
+                  <a:schemeClr val="tx1"/>
+                </a:solidFill>
+                <a:latin typeface="+mn-lt"/>
+                <a:ea typeface="+mn-ea"/>
+                <a:cs typeface="+mn-cs"/>
+              </a:defRPr>
+            </a:lvl9pPr>
+          </a:lstStyle>
+          <a:p>
+            <a:pPr marL="0" indent="0">
+              <a:lnSpc>
+                <a:spcPct val="100000"/>
+              </a:lnSpc>
+              <a:spcBef>
+                <a:spcPts val="0"/>
+              </a:spcBef>
+              <a:buFont typeface="Arial" panose="020B0604020202020204" pitchFamily="34" charset="0"/>
+              <a:buNone/>
+            </a:pPr>
+            <a:r>
+              <a:rPr lang="en-US" sz="1400" dirty="0">
+                <a:latin typeface="Courier New" panose="02070309020205020404" pitchFamily="49" charset="0"/>
+                <a:cs typeface="Courier New" panose="02070309020205020404" pitchFamily="49" charset="0"/>
+              </a:rPr>
+              <a:t>{ </a:t>
+            </a:r>
+          </a:p>
+          <a:p>
+            <a:pPr marL="0" indent="0">
+              <a:lnSpc>
+                <a:spcPct val="100000"/>
+              </a:lnSpc>
+              <a:spcBef>
+                <a:spcPts val="0"/>
+              </a:spcBef>
+              <a:buFont typeface="Arial" panose="020B0604020202020204" pitchFamily="34" charset="0"/>
+              <a:buNone/>
+            </a:pPr>
+            <a:r>
+              <a:rPr lang="en-US" sz="1400" dirty="0">
+                <a:latin typeface="Courier New" panose="02070309020205020404" pitchFamily="49" charset="0"/>
+                <a:cs typeface="Courier New" panose="02070309020205020404" pitchFamily="49" charset="0"/>
+              </a:rPr>
+              <a:t>  "</a:t>
+            </a:r>
+            <a:r>
+              <a:rPr lang="en-US" sz="1400" dirty="0" err="1">
+                <a:latin typeface="Courier New" panose="02070309020205020404" pitchFamily="49" charset="0"/>
+                <a:cs typeface="Courier New" panose="02070309020205020404" pitchFamily="49" charset="0"/>
+              </a:rPr>
+              <a:t>DomainName</a:t>
+            </a:r>
+            <a:r>
+              <a:rPr lang="en-US" sz="1400" dirty="0">
+                <a:latin typeface="Courier New" panose="02070309020205020404" pitchFamily="49" charset="0"/>
+                <a:cs typeface="Courier New" panose="02070309020205020404" pitchFamily="49" charset="0"/>
+              </a:rPr>
+              <a:t>": "Signature",</a:t>
+            </a:r>
+          </a:p>
+          <a:p>
+            <a:pPr marL="0" indent="0">
+              <a:lnSpc>
+                <a:spcPct val="100000"/>
+              </a:lnSpc>
+              <a:spcBef>
+                <a:spcPts val="0"/>
+              </a:spcBef>
+              <a:buFont typeface="Arial" panose="020B0604020202020204" pitchFamily="34" charset="0"/>
+              <a:buNone/>
+            </a:pPr>
+            <a:r>
+              <a:rPr lang="en-US" sz="1400" dirty="0">
+                <a:latin typeface="Courier New" panose="02070309020205020404" pitchFamily="49" charset="0"/>
+                <a:cs typeface="Courier New" panose="02070309020205020404" pitchFamily="49" charset="0"/>
+              </a:rPr>
+              <a:t>  "</a:t>
+            </a:r>
+            <a:r>
+              <a:rPr lang="en-US" sz="1400" dirty="0" err="1">
+                <a:latin typeface="Courier New" panose="02070309020205020404" pitchFamily="49" charset="0"/>
+                <a:cs typeface="Courier New" panose="02070309020205020404" pitchFamily="49" charset="0"/>
+              </a:rPr>
+              <a:t>EnvironmentName</a:t>
+            </a:r>
+            <a:r>
+              <a:rPr lang="en-US" sz="1400" dirty="0">
+                <a:latin typeface="Courier New" panose="02070309020205020404" pitchFamily="49" charset="0"/>
+                <a:cs typeface="Courier New" panose="02070309020205020404" pitchFamily="49" charset="0"/>
+              </a:rPr>
+              <a:t>": "#Production",</a:t>
+            </a:r>
+          </a:p>
+          <a:p>
+            <a:pPr marL="0" indent="0">
+              <a:lnSpc>
+                <a:spcPct val="100000"/>
+              </a:lnSpc>
+              <a:spcBef>
+                <a:spcPts val="0"/>
+              </a:spcBef>
+              <a:buFont typeface="Arial" panose="020B0604020202020204" pitchFamily="34" charset="0"/>
+              <a:buNone/>
+            </a:pPr>
+            <a:r>
+              <a:rPr lang="en-US" sz="1400" dirty="0">
+                <a:latin typeface="Courier New" panose="02070309020205020404" pitchFamily="49" charset="0"/>
+                <a:cs typeface="Courier New" panose="02070309020205020404" pitchFamily="49" charset="0"/>
+              </a:rPr>
+              <a:t>  "Local": {</a:t>
+            </a:r>
+          </a:p>
+          <a:p>
+            <a:pPr marL="0" indent="0">
+              <a:lnSpc>
+                <a:spcPct val="100000"/>
+              </a:lnSpc>
+              <a:spcBef>
+                <a:spcPts val="0"/>
+              </a:spcBef>
+              <a:buFont typeface="Arial" panose="020B0604020202020204" pitchFamily="34" charset="0"/>
+              <a:buNone/>
+            </a:pPr>
+            <a:r>
+              <a:rPr lang="en-US" sz="1400" dirty="0">
+                <a:latin typeface="Courier New" panose="02070309020205020404" pitchFamily="49" charset="0"/>
+                <a:cs typeface="Courier New" panose="02070309020205020404" pitchFamily="49" charset="0"/>
+              </a:rPr>
+              <a:t>    "Name": "</a:t>
+            </a:r>
+            <a:r>
+              <a:rPr lang="en-US" sz="1400" dirty="0" err="1">
+                <a:latin typeface="Courier New" panose="02070309020205020404" pitchFamily="49" charset="0"/>
+                <a:cs typeface="Courier New" panose="02070309020205020404" pitchFamily="49" charset="0"/>
+              </a:rPr>
+              <a:t>CodeCenter</a:t>
+            </a:r>
+            <a:r>
+              <a:rPr lang="en-US" sz="1400" dirty="0">
+                <a:latin typeface="Courier New" panose="02070309020205020404" pitchFamily="49" charset="0"/>
+                <a:cs typeface="Courier New" panose="02070309020205020404" pitchFamily="49" charset="0"/>
+              </a:rPr>
+              <a:t>"</a:t>
+            </a:r>
+          </a:p>
+          <a:p>
+            <a:pPr marL="0" indent="0">
+              <a:lnSpc>
+                <a:spcPct val="100000"/>
+              </a:lnSpc>
+              <a:spcBef>
+                <a:spcPts val="0"/>
+              </a:spcBef>
+              <a:buFont typeface="Arial" panose="020B0604020202020204" pitchFamily="34" charset="0"/>
+              <a:buNone/>
+            </a:pPr>
+            <a:r>
+              <a:rPr lang="en-US" sz="1400" dirty="0">
+                <a:latin typeface="Courier New" panose="02070309020205020404" pitchFamily="49" charset="0"/>
+                <a:cs typeface="Courier New" panose="02070309020205020404" pitchFamily="49" charset="0"/>
+              </a:rPr>
+              <a:t>  },</a:t>
+            </a:r>
+          </a:p>
+          <a:p>
+            <a:pPr marL="0" indent="0">
+              <a:lnSpc>
+                <a:spcPct val="100000"/>
+              </a:lnSpc>
+              <a:spcBef>
+                <a:spcPts val="0"/>
+              </a:spcBef>
+              <a:buFont typeface="Arial" panose="020B0604020202020204" pitchFamily="34" charset="0"/>
+              <a:buNone/>
+            </a:pPr>
+            <a:r>
+              <a:rPr lang="en-US" sz="1400" dirty="0">
+                <a:latin typeface="Courier New" panose="02070309020205020404" pitchFamily="49" charset="0"/>
+                <a:cs typeface="Courier New" panose="02070309020205020404" pitchFamily="49" charset="0"/>
+              </a:rPr>
+              <a:t>  "Remotes": [</a:t>
+            </a:r>
+            <a:br>
+              <a:rPr lang="en-US" sz="1400" dirty="0">
+                <a:latin typeface="Courier New" panose="02070309020205020404" pitchFamily="49" charset="0"/>
+                <a:cs typeface="Courier New" panose="02070309020205020404" pitchFamily="49" charset="0"/>
+              </a:rPr>
+            </a:br>
+            <a:r>
+              <a:rPr lang="en-US" sz="1400" dirty="0">
+                <a:latin typeface="Courier New" panose="02070309020205020404" pitchFamily="49" charset="0"/>
+                <a:cs typeface="Courier New" panose="02070309020205020404" pitchFamily="49" charset="0"/>
+              </a:rPr>
+              <a:t>  {</a:t>
+            </a:r>
+          </a:p>
+          <a:p>
+            <a:pPr marL="0" indent="0">
+              <a:lnSpc>
+                <a:spcPct val="100000"/>
+              </a:lnSpc>
+              <a:spcBef>
+                <a:spcPts val="0"/>
+              </a:spcBef>
+              <a:buFont typeface="Arial" panose="020B0604020202020204" pitchFamily="34" charset="0"/>
+              <a:buNone/>
+            </a:pPr>
+            <a:r>
+              <a:rPr lang="en-US" sz="1400" dirty="0">
+                <a:latin typeface="Courier New" panose="02070309020205020404" pitchFamily="49" charset="0"/>
+                <a:cs typeface="Courier New" panose="02070309020205020404" pitchFamily="49" charset="0"/>
+              </a:rPr>
+              <a:t>    </a:t>
+            </a:r>
+            <a:r>
+              <a:rPr lang="en-US" sz="1400" b="1" dirty="0">
+                <a:latin typeface="Courier New" panose="02070309020205020404" pitchFamily="49" charset="0"/>
+                <a:cs typeface="Courier New" panose="02070309020205020404" pitchFamily="49" charset="0"/>
+              </a:rPr>
+              <a:t>"</a:t>
+            </a:r>
+            <a:r>
+              <a:rPr lang="en-US" sz="1400" b="1" dirty="0" err="1">
+                <a:latin typeface="Courier New" panose="02070309020205020404" pitchFamily="49" charset="0"/>
+                <a:cs typeface="Courier New" panose="02070309020205020404" pitchFamily="49" charset="0"/>
+              </a:rPr>
+              <a:t>DomainName</a:t>
+            </a:r>
+            <a:r>
+              <a:rPr lang="en-US" sz="1400" b="1" dirty="0">
+                <a:latin typeface="Courier New" panose="02070309020205020404" pitchFamily="49" charset="0"/>
+                <a:cs typeface="Courier New" panose="02070309020205020404" pitchFamily="49" charset="0"/>
+              </a:rPr>
+              <a:t>": "Undefined"</a:t>
+            </a:r>
+            <a:r>
+              <a:rPr lang="en-US" sz="1400" dirty="0">
+                <a:latin typeface="Courier New" panose="02070309020205020404" pitchFamily="49" charset="0"/>
+                <a:cs typeface="Courier New" panose="02070309020205020404" pitchFamily="49" charset="0"/>
+              </a:rPr>
+              <a:t>,</a:t>
+            </a:r>
+          </a:p>
+          <a:p>
+            <a:pPr marL="0" indent="0">
+              <a:lnSpc>
+                <a:spcPct val="100000"/>
+              </a:lnSpc>
+              <a:spcBef>
+                <a:spcPts val="0"/>
+              </a:spcBef>
+              <a:buFont typeface="Arial" panose="020B0604020202020204" pitchFamily="34" charset="0"/>
+              <a:buNone/>
+            </a:pPr>
+            <a:r>
+              <a:rPr lang="en-US" sz="1400" dirty="0">
+                <a:latin typeface="Courier New" panose="02070309020205020404" pitchFamily="49" charset="0"/>
+                <a:cs typeface="Courier New" panose="02070309020205020404" pitchFamily="49" charset="0"/>
+              </a:rPr>
+              <a:t>    "Name": "</a:t>
+            </a:r>
+            <a:r>
+              <a:rPr lang="en-US" sz="1400" dirty="0" err="1">
+                <a:latin typeface="Courier New" panose="02070309020205020404" pitchFamily="49" charset="0"/>
+                <a:cs typeface="Courier New" panose="02070309020205020404" pitchFamily="49" charset="0"/>
+              </a:rPr>
+              <a:t>GitOpenSource</a:t>
+            </a:r>
+            <a:r>
+              <a:rPr lang="en-US" sz="1400" dirty="0">
+                <a:latin typeface="Courier New" panose="02070309020205020404" pitchFamily="49" charset="0"/>
+                <a:cs typeface="Courier New" panose="02070309020205020404" pitchFamily="49" charset="0"/>
+              </a:rPr>
+              <a:t>",</a:t>
+            </a:r>
+            <a:br>
+              <a:rPr lang="en-US" sz="1400" dirty="0">
+                <a:latin typeface="Courier New" panose="02070309020205020404" pitchFamily="49" charset="0"/>
+                <a:cs typeface="Courier New" panose="02070309020205020404" pitchFamily="49" charset="0"/>
+              </a:rPr>
+            </a:br>
+            <a:r>
+              <a:rPr lang="en-US" sz="1400" dirty="0">
+                <a:latin typeface="Courier New" panose="02070309020205020404" pitchFamily="49" charset="0"/>
+                <a:cs typeface="Courier New" panose="02070309020205020404" pitchFamily="49" charset="0"/>
+              </a:rPr>
+              <a:t>    "GitHub": {</a:t>
+            </a:r>
+            <a:br>
+              <a:rPr lang="en-US" sz="1400" dirty="0">
+                <a:latin typeface="Courier New" panose="02070309020205020404" pitchFamily="49" charset="0"/>
+                <a:cs typeface="Courier New" panose="02070309020205020404" pitchFamily="49" charset="0"/>
+              </a:rPr>
+            </a:br>
+            <a:r>
+              <a:rPr lang="en-US" sz="1400" dirty="0">
+                <a:latin typeface="Courier New" panose="02070309020205020404" pitchFamily="49" charset="0"/>
+                <a:cs typeface="Courier New" panose="02070309020205020404" pitchFamily="49" charset="0"/>
+              </a:rPr>
+              <a:t>      "Organization": "Signature-</a:t>
+            </a:r>
+            <a:r>
+              <a:rPr lang="en-US" sz="1400" dirty="0" err="1">
+                <a:latin typeface="Courier New" panose="02070309020205020404" pitchFamily="49" charset="0"/>
+                <a:cs typeface="Courier New" panose="02070309020205020404" pitchFamily="49" charset="0"/>
+              </a:rPr>
+              <a:t>OpenSource</a:t>
+            </a:r>
+            <a:r>
+              <a:rPr lang="en-US" sz="1400" dirty="0">
+                <a:latin typeface="Courier New" panose="02070309020205020404" pitchFamily="49" charset="0"/>
+                <a:cs typeface="Courier New" panose="02070309020205020404" pitchFamily="49" charset="0"/>
+              </a:rPr>
+              <a:t>",</a:t>
+            </a:r>
+          </a:p>
+          <a:p>
+            <a:pPr marL="0" indent="0">
+              <a:lnSpc>
+                <a:spcPct val="100000"/>
+              </a:lnSpc>
+              <a:spcBef>
+                <a:spcPts val="0"/>
+              </a:spcBef>
+              <a:buFont typeface="Arial" panose="020B0604020202020204" pitchFamily="34" charset="0"/>
+              <a:buNone/>
+            </a:pPr>
+            <a:r>
+              <a:rPr lang="en-US" sz="1400" dirty="0">
+                <a:latin typeface="Courier New" panose="02070309020205020404" pitchFamily="49" charset="0"/>
+                <a:cs typeface="Courier New" panose="02070309020205020404" pitchFamily="49" charset="0"/>
+              </a:rPr>
+              <a:t>      "</a:t>
+            </a:r>
+            <a:r>
+              <a:rPr lang="en-US" sz="1400" dirty="0" err="1">
+                <a:latin typeface="Courier New" panose="02070309020205020404" pitchFamily="49" charset="0"/>
+                <a:cs typeface="Courier New" panose="02070309020205020404" pitchFamily="49" charset="0"/>
+              </a:rPr>
+              <a:t>SecretToken</a:t>
+            </a:r>
+            <a:r>
+              <a:rPr lang="en-US" sz="1400" dirty="0">
+                <a:latin typeface="Courier New" panose="02070309020205020404" pitchFamily="49" charset="0"/>
+                <a:cs typeface="Courier New" panose="02070309020205020404" pitchFamily="49" charset="0"/>
+              </a:rPr>
+              <a:t>": "45kKJDHldf57dsj87f6fefAsdjhfsdfzr654ZEd5zf"</a:t>
+            </a:r>
+          </a:p>
+          <a:p>
+            <a:pPr marL="0" indent="0">
+              <a:lnSpc>
+                <a:spcPct val="100000"/>
+              </a:lnSpc>
+              <a:spcBef>
+                <a:spcPts val="0"/>
+              </a:spcBef>
+              <a:buFont typeface="Arial" panose="020B0604020202020204" pitchFamily="34" charset="0"/>
+              <a:buNone/>
+            </a:pPr>
+            <a:r>
+              <a:rPr lang="en-US" sz="1400" dirty="0">
+                <a:latin typeface="Courier New" panose="02070309020205020404" pitchFamily="49" charset="0"/>
+                <a:cs typeface="Courier New" panose="02070309020205020404" pitchFamily="49" charset="0"/>
+              </a:rPr>
+              <a:t>    }</a:t>
+            </a:r>
+          </a:p>
+          <a:p>
+            <a:pPr marL="0" indent="0">
+              <a:lnSpc>
+                <a:spcPct val="100000"/>
+              </a:lnSpc>
+              <a:spcBef>
+                <a:spcPts val="0"/>
+              </a:spcBef>
+              <a:buFont typeface="Arial" panose="020B0604020202020204" pitchFamily="34" charset="0"/>
+              <a:buNone/>
+            </a:pPr>
+            <a:r>
+              <a:rPr lang="en-US" sz="1400" dirty="0">
+                <a:latin typeface="Courier New" panose="02070309020205020404" pitchFamily="49" charset="0"/>
+                <a:cs typeface="Courier New" panose="02070309020205020404" pitchFamily="49" charset="0"/>
+              </a:rPr>
+              <a:t>  },</a:t>
+            </a:r>
+          </a:p>
+          <a:p>
+            <a:pPr marL="0" indent="0">
+              <a:lnSpc>
+                <a:spcPct val="100000"/>
+              </a:lnSpc>
+              <a:spcBef>
+                <a:spcPts val="0"/>
+              </a:spcBef>
+              <a:buFont typeface="Arial" panose="020B0604020202020204" pitchFamily="34" charset="0"/>
+              <a:buNone/>
+            </a:pPr>
+            <a:r>
+              <a:rPr lang="en-US" sz="1400" dirty="0">
+                <a:latin typeface="Courier New" panose="02070309020205020404" pitchFamily="49" charset="0"/>
+                <a:cs typeface="Courier New" panose="02070309020205020404" pitchFamily="49" charset="0"/>
+              </a:rPr>
+              <a:t>  {</a:t>
+            </a:r>
+          </a:p>
+          <a:p>
+            <a:pPr marL="0" indent="0">
+              <a:lnSpc>
+                <a:spcPct val="100000"/>
+              </a:lnSpc>
+              <a:spcBef>
+                <a:spcPts val="0"/>
+              </a:spcBef>
+              <a:buFont typeface="Arial" panose="020B0604020202020204" pitchFamily="34" charset="0"/>
+              <a:buNone/>
+            </a:pPr>
+            <a:r>
+              <a:rPr lang="en-US" sz="1400" dirty="0">
+                <a:latin typeface="Courier New" panose="02070309020205020404" pitchFamily="49" charset="0"/>
+                <a:cs typeface="Courier New" panose="02070309020205020404" pitchFamily="49" charset="0"/>
+              </a:rPr>
+              <a:t>    "</a:t>
+            </a:r>
+            <a:r>
+              <a:rPr lang="en-US" sz="1400" dirty="0" err="1">
+                <a:latin typeface="Courier New" panose="02070309020205020404" pitchFamily="49" charset="0"/>
+                <a:cs typeface="Courier New" panose="02070309020205020404" pitchFamily="49" charset="0"/>
+              </a:rPr>
+              <a:t>DomainName</a:t>
+            </a:r>
+            <a:r>
+              <a:rPr lang="en-US" sz="1400" dirty="0">
+                <a:latin typeface="Courier New" panose="02070309020205020404" pitchFamily="49" charset="0"/>
+                <a:cs typeface="Courier New" panose="02070309020205020404" pitchFamily="49" charset="0"/>
+              </a:rPr>
+              <a:t>": "Undefined",</a:t>
+            </a:r>
+          </a:p>
+          <a:p>
+            <a:pPr marL="0" indent="0">
+              <a:lnSpc>
+                <a:spcPct val="100000"/>
+              </a:lnSpc>
+              <a:spcBef>
+                <a:spcPts val="0"/>
+              </a:spcBef>
+              <a:buFont typeface="Arial" panose="020B0604020202020204" pitchFamily="34" charset="0"/>
+              <a:buNone/>
+            </a:pPr>
+            <a:r>
+              <a:rPr lang="en-US" sz="1400" dirty="0">
+                <a:latin typeface="Courier New" panose="02070309020205020404" pitchFamily="49" charset="0"/>
+                <a:cs typeface="Courier New" panose="02070309020205020404" pitchFamily="49" charset="0"/>
+              </a:rPr>
+              <a:t>    "Name": "</a:t>
+            </a:r>
+            <a:r>
+              <a:rPr lang="en-US" sz="1400" dirty="0" err="1">
+                <a:latin typeface="Courier New" panose="02070309020205020404" pitchFamily="49" charset="0"/>
+                <a:cs typeface="Courier New" panose="02070309020205020404" pitchFamily="49" charset="0"/>
+              </a:rPr>
+              <a:t>GitSource</a:t>
+            </a:r>
+            <a:r>
+              <a:rPr lang="en-US" sz="1400" dirty="0">
+                <a:latin typeface="Courier New" panose="02070309020205020404" pitchFamily="49" charset="0"/>
+                <a:cs typeface="Courier New" panose="02070309020205020404" pitchFamily="49" charset="0"/>
+              </a:rPr>
+              <a:t>",</a:t>
+            </a:r>
+            <a:br>
+              <a:rPr lang="en-US" sz="1400" dirty="0">
+                <a:latin typeface="Courier New" panose="02070309020205020404" pitchFamily="49" charset="0"/>
+                <a:cs typeface="Courier New" panose="02070309020205020404" pitchFamily="49" charset="0"/>
+              </a:rPr>
+            </a:br>
+            <a:r>
+              <a:rPr lang="en-US" sz="1400" dirty="0">
+                <a:latin typeface="Courier New" panose="02070309020205020404" pitchFamily="49" charset="0"/>
+                <a:cs typeface="Courier New" panose="02070309020205020404" pitchFamily="49" charset="0"/>
+              </a:rPr>
+              <a:t>    "GitHub": {</a:t>
+            </a:r>
+            <a:br>
+              <a:rPr lang="en-US" sz="1400" dirty="0">
+                <a:latin typeface="Courier New" panose="02070309020205020404" pitchFamily="49" charset="0"/>
+                <a:cs typeface="Courier New" panose="02070309020205020404" pitchFamily="49" charset="0"/>
+              </a:rPr>
+            </a:br>
+            <a:r>
+              <a:rPr lang="en-US" sz="1400" dirty="0">
+                <a:latin typeface="Courier New" panose="02070309020205020404" pitchFamily="49" charset="0"/>
+                <a:cs typeface="Courier New" panose="02070309020205020404" pitchFamily="49" charset="0"/>
+              </a:rPr>
+              <a:t>      "Organization": "Signature-Code",</a:t>
+            </a:r>
+          </a:p>
+          <a:p>
+            <a:pPr marL="0" indent="0">
+              <a:lnSpc>
+                <a:spcPct val="100000"/>
+              </a:lnSpc>
+              <a:spcBef>
+                <a:spcPts val="0"/>
+              </a:spcBef>
+              <a:buFont typeface="Arial" panose="020B0604020202020204" pitchFamily="34" charset="0"/>
+              <a:buNone/>
+            </a:pPr>
+            <a:r>
+              <a:rPr lang="en-US" sz="1400" dirty="0">
+                <a:latin typeface="Courier New" panose="02070309020205020404" pitchFamily="49" charset="0"/>
+                <a:cs typeface="Courier New" panose="02070309020205020404" pitchFamily="49" charset="0"/>
+              </a:rPr>
+              <a:t>      "</a:t>
+            </a:r>
+            <a:r>
+              <a:rPr lang="en-US" sz="1400" dirty="0" err="1">
+                <a:latin typeface="Courier New" panose="02070309020205020404" pitchFamily="49" charset="0"/>
+                <a:cs typeface="Courier New" panose="02070309020205020404" pitchFamily="49" charset="0"/>
+              </a:rPr>
+              <a:t>SecretToken</a:t>
+            </a:r>
+            <a:r>
+              <a:rPr lang="en-US" sz="1400" dirty="0">
+                <a:latin typeface="Courier New" panose="02070309020205020404" pitchFamily="49" charset="0"/>
+                <a:cs typeface="Courier New" panose="02070309020205020404" pitchFamily="49" charset="0"/>
+              </a:rPr>
+              <a:t>": “Lkjdchbej236ecec6876edc3evqwx57d2455zefdaa"</a:t>
+            </a:r>
+          </a:p>
+          <a:p>
+            <a:pPr marL="0" indent="0">
+              <a:lnSpc>
+                <a:spcPct val="100000"/>
+              </a:lnSpc>
+              <a:spcBef>
+                <a:spcPts val="0"/>
+              </a:spcBef>
+              <a:buFont typeface="Arial" panose="020B0604020202020204" pitchFamily="34" charset="0"/>
+              <a:buNone/>
+            </a:pPr>
+            <a:r>
+              <a:rPr lang="en-US" sz="1400" dirty="0">
+                <a:latin typeface="Courier New" panose="02070309020205020404" pitchFamily="49" charset="0"/>
+                <a:cs typeface="Courier New" panose="02070309020205020404" pitchFamily="49" charset="0"/>
+              </a:rPr>
+              <a:t>    }</a:t>
+            </a:r>
+            <a:br>
+              <a:rPr lang="en-US" sz="1400" dirty="0">
+                <a:latin typeface="Courier New" panose="02070309020205020404" pitchFamily="49" charset="0"/>
+                <a:cs typeface="Courier New" panose="02070309020205020404" pitchFamily="49" charset="0"/>
+              </a:rPr>
+            </a:br>
+            <a:r>
+              <a:rPr lang="en-US" sz="1400" dirty="0">
+                <a:latin typeface="Courier New" panose="02070309020205020404" pitchFamily="49" charset="0"/>
+                <a:cs typeface="Courier New" panose="02070309020205020404" pitchFamily="49" charset="0"/>
+              </a:rPr>
+              <a:t>  }]</a:t>
+            </a:r>
+          </a:p>
+          <a:p>
+            <a:pPr marL="0" indent="0">
+              <a:lnSpc>
+                <a:spcPct val="100000"/>
+              </a:lnSpc>
+              <a:spcBef>
+                <a:spcPts val="0"/>
+              </a:spcBef>
+              <a:buFont typeface="Arial" panose="020B0604020202020204" pitchFamily="34" charset="0"/>
+              <a:buNone/>
+            </a:pPr>
+            <a:r>
+              <a:rPr lang="en-US" sz="1400" dirty="0">
+                <a:latin typeface="Courier New" panose="02070309020205020404" pitchFamily="49" charset="0"/>
+                <a:cs typeface="Courier New" panose="02070309020205020404" pitchFamily="49" charset="0"/>
+              </a:rPr>
+              <a:t>}</a:t>
+            </a:r>
+          </a:p>
+          <a:p>
+            <a:pPr marL="0" indent="0">
+              <a:lnSpc>
+                <a:spcPct val="100000"/>
+              </a:lnSpc>
+              <a:spcBef>
+                <a:spcPts val="0"/>
+              </a:spcBef>
+              <a:buFont typeface="Arial" panose="020B0604020202020204" pitchFamily="34" charset="0"/>
+              <a:buNone/>
+            </a:pPr>
+            <a:endParaRPr lang="en-US" sz="1400" dirty="0">
+              <a:latin typeface="Courier New" panose="02070309020205020404" pitchFamily="49" charset="0"/>
+              <a:cs typeface="Courier New" panose="02070309020205020404" pitchFamily="49" charset="0"/>
+            </a:endParaRPr>
+          </a:p>
+        </p:txBody>
+      </p:sp>
+      <p:sp>
+        <p:nvSpPr>
+          <p:cNvPr id="5" name="Content Placeholder 2">
+            <a:extLst>
+              <a:ext uri="{FF2B5EF4-FFF2-40B4-BE49-F238E27FC236}">
+                <a16:creationId xmlns:a16="http://schemas.microsoft.com/office/drawing/2014/main" id="{83D65CE2-9D81-5111-5961-A05FE0BFA74C}"/>
+              </a:ext>
+            </a:extLst>
+          </p:cNvPr>
+          <p:cNvSpPr txBox="1">
+            <a:spLocks/>
+          </p:cNvSpPr>
+          <p:nvPr/>
+        </p:nvSpPr>
+        <p:spPr>
+          <a:xfrm>
+            <a:off x="7511374" y="3122579"/>
+            <a:ext cx="4206144" cy="2529191"/>
+          </a:xfrm>
+          <a:prstGeom prst="rect">
+            <a:avLst/>
+          </a:prstGeom>
+        </p:spPr>
+        <p:txBody>
+          <a:bodyPr vert="horz" lIns="91440" tIns="45720" rIns="91440" bIns="45720" rtlCol="0">
+            <a:normAutofit fontScale="70000" lnSpcReduction="20000"/>
+          </a:bodyPr>
+          <a:lstStyle>
+            <a:lvl1pPr marL="228600" indent="-228600" algn="l" defTabSz="914400" rtl="0" eaLnBrk="1" latinLnBrk="0" hangingPunct="1">
+              <a:lnSpc>
+                <a:spcPct val="90000"/>
+              </a:lnSpc>
+              <a:spcBef>
+                <a:spcPts val="1000"/>
+              </a:spcBef>
+              <a:buFont typeface="Arial" panose="020B0604020202020204" pitchFamily="34" charset="0"/>
+              <a:buChar char="•"/>
+              <a:defRPr sz="2800" kern="1200">
+                <a:solidFill>
+                  <a:schemeClr val="tx1"/>
+                </a:solidFill>
+                <a:latin typeface="+mn-lt"/>
+                <a:ea typeface="+mn-ea"/>
+                <a:cs typeface="+mn-cs"/>
+              </a:defRPr>
+            </a:lvl1pPr>
+            <a:lvl2pPr marL="685800" indent="-228600" algn="l" defTabSz="914400" rtl="0" eaLnBrk="1" latinLnBrk="0" hangingPunct="1">
+              <a:lnSpc>
+                <a:spcPct val="90000"/>
+              </a:lnSpc>
+              <a:spcBef>
+                <a:spcPts val="500"/>
+              </a:spcBef>
+              <a:buFont typeface="Arial" panose="020B0604020202020204" pitchFamily="34" charset="0"/>
+              <a:buChar char="•"/>
+              <a:defRPr sz="2400" kern="1200">
+                <a:solidFill>
+                  <a:schemeClr val="tx1"/>
+                </a:solidFill>
+                <a:latin typeface="+mn-lt"/>
+                <a:ea typeface="+mn-ea"/>
+                <a:cs typeface="+mn-cs"/>
+              </a:defRPr>
+            </a:lvl2pPr>
+            <a:lvl3pPr marL="1143000" indent="-228600" algn="l" defTabSz="914400" rtl="0" eaLnBrk="1" latinLnBrk="0" hangingPunct="1">
+              <a:lnSpc>
+                <a:spcPct val="90000"/>
+              </a:lnSpc>
+              <a:spcBef>
+                <a:spcPts val="500"/>
+              </a:spcBef>
+              <a:buFont typeface="Arial" panose="020B0604020202020204" pitchFamily="34" charset="0"/>
+              <a:buChar char="•"/>
+              <a:defRPr sz="2000" kern="1200">
+                <a:solidFill>
+                  <a:schemeClr val="tx1"/>
+                </a:solidFill>
+                <a:latin typeface="+mn-lt"/>
+                <a:ea typeface="+mn-ea"/>
+                <a:cs typeface="+mn-cs"/>
+              </a:defRPr>
+            </a:lvl3pPr>
+            <a:lvl4pPr marL="1600200" indent="-228600" algn="l" defTabSz="914400" rtl="0" eaLnBrk="1" latinLnBrk="0" hangingPunct="1">
+              <a:lnSpc>
+                <a:spcPct val="90000"/>
+              </a:lnSpc>
+              <a:spcBef>
+                <a:spcPts val="500"/>
+              </a:spcBef>
+              <a:buFont typeface="Arial" panose="020B0604020202020204" pitchFamily="34" charset="0"/>
+              <a:buChar char="•"/>
+              <a:defRPr sz="1800" kern="1200">
+                <a:solidFill>
+                  <a:schemeClr val="tx1"/>
+                </a:solidFill>
+                <a:latin typeface="+mn-lt"/>
+                <a:ea typeface="+mn-ea"/>
+                <a:cs typeface="+mn-cs"/>
+              </a:defRPr>
+            </a:lvl4pPr>
+            <a:lvl5pPr marL="2057400" indent="-228600" algn="l" defTabSz="914400" rtl="0" eaLnBrk="1" latinLnBrk="0" hangingPunct="1">
+              <a:lnSpc>
+                <a:spcPct val="90000"/>
+              </a:lnSpc>
+              <a:spcBef>
+                <a:spcPts val="500"/>
+              </a:spcBef>
+              <a:buFont typeface="Arial" panose="020B0604020202020204" pitchFamily="34" charset="0"/>
+              <a:buChar char="•"/>
+              <a:defRPr sz="1800" kern="1200">
+                <a:solidFill>
+                  <a:schemeClr val="tx1"/>
+                </a:solidFill>
+                <a:latin typeface="+mn-lt"/>
+                <a:ea typeface="+mn-ea"/>
+                <a:cs typeface="+mn-cs"/>
+              </a:defRPr>
+            </a:lvl5pPr>
+            <a:lvl6pPr marL="2514600" indent="-228600" algn="l" defTabSz="914400" rtl="0" eaLnBrk="1" latinLnBrk="0" hangingPunct="1">
+              <a:lnSpc>
+                <a:spcPct val="90000"/>
+              </a:lnSpc>
+              <a:spcBef>
+                <a:spcPts val="500"/>
+              </a:spcBef>
+              <a:buFont typeface="Arial" panose="020B0604020202020204" pitchFamily="34" charset="0"/>
+              <a:buChar char="•"/>
+              <a:defRPr sz="1800" kern="1200">
+                <a:solidFill>
+                  <a:schemeClr val="tx1"/>
+                </a:solidFill>
+                <a:latin typeface="+mn-lt"/>
+                <a:ea typeface="+mn-ea"/>
+                <a:cs typeface="+mn-cs"/>
+              </a:defRPr>
+            </a:lvl6pPr>
+            <a:lvl7pPr marL="2971800" indent="-228600" algn="l" defTabSz="914400" rtl="0" eaLnBrk="1" latinLnBrk="0" hangingPunct="1">
+              <a:lnSpc>
+                <a:spcPct val="90000"/>
+              </a:lnSpc>
+              <a:spcBef>
+                <a:spcPts val="500"/>
+              </a:spcBef>
+              <a:buFont typeface="Arial" panose="020B0604020202020204" pitchFamily="34" charset="0"/>
+              <a:buChar char="•"/>
+              <a:defRPr sz="1800" kern="1200">
+                <a:solidFill>
+                  <a:schemeClr val="tx1"/>
+                </a:solidFill>
+                <a:latin typeface="+mn-lt"/>
+                <a:ea typeface="+mn-ea"/>
+                <a:cs typeface="+mn-cs"/>
+              </a:defRPr>
+            </a:lvl7pPr>
+            <a:lvl8pPr marL="3429000" indent="-228600" algn="l" defTabSz="914400" rtl="0" eaLnBrk="1" latinLnBrk="0" hangingPunct="1">
+              <a:lnSpc>
+                <a:spcPct val="90000"/>
+              </a:lnSpc>
+              <a:spcBef>
+                <a:spcPts val="500"/>
+              </a:spcBef>
+              <a:buFont typeface="Arial" panose="020B0604020202020204" pitchFamily="34" charset="0"/>
+              <a:buChar char="•"/>
+              <a:defRPr sz="1800" kern="1200">
+                <a:solidFill>
+                  <a:schemeClr val="tx1"/>
+                </a:solidFill>
+                <a:latin typeface="+mn-lt"/>
+                <a:ea typeface="+mn-ea"/>
+                <a:cs typeface="+mn-cs"/>
+              </a:defRPr>
+            </a:lvl8pPr>
+            <a:lvl9pPr marL="3886200" indent="-228600" algn="l" defTabSz="914400" rtl="0" eaLnBrk="1" latinLnBrk="0" hangingPunct="1">
+              <a:lnSpc>
+                <a:spcPct val="90000"/>
+              </a:lnSpc>
+              <a:spcBef>
+                <a:spcPts val="500"/>
+              </a:spcBef>
+              <a:buFont typeface="Arial" panose="020B0604020202020204" pitchFamily="34" charset="0"/>
+              <a:buChar char="•"/>
+              <a:defRPr sz="1800" kern="1200">
+                <a:solidFill>
+                  <a:schemeClr val="tx1"/>
+                </a:solidFill>
+                <a:latin typeface="+mn-lt"/>
+                <a:ea typeface="+mn-ea"/>
+                <a:cs typeface="+mn-cs"/>
+              </a:defRPr>
+            </a:lvl9pPr>
+          </a:lstStyle>
+          <a:p>
+            <a:r>
+              <a:rPr lang="en-US" dirty="0"/>
+              <a:t>“Undefined” is the reserved Domain name that means “external to the System”</a:t>
+            </a:r>
+          </a:p>
+          <a:p>
+            <a:r>
+              <a:rPr lang="en-US" dirty="0"/>
+              <a:t>We don’t need an “Address”: this remote is a </a:t>
+            </a:r>
+            <a:r>
+              <a:rPr lang="en-US" dirty="0" err="1"/>
+              <a:t>GitHubApp</a:t>
+            </a:r>
+            <a:r>
+              <a:rPr lang="en-US" dirty="0"/>
+              <a:t> because of the “GitHub” configuration key. </a:t>
+            </a:r>
+          </a:p>
+          <a:p>
+            <a:r>
+              <a:rPr lang="en-US" dirty="0"/>
+              <a:t>The package </a:t>
+            </a:r>
+            <a:r>
+              <a:rPr lang="en-US" dirty="0" err="1"/>
+              <a:t>CK.AppIdentity.GitHubApp</a:t>
+            </a:r>
+            <a:r>
+              <a:rPr lang="en-US" dirty="0"/>
+              <a:t> handles this automatically.</a:t>
+            </a:r>
+          </a:p>
+        </p:txBody>
+      </p:sp>
+    </p:spTree>
+    <p:extLst>
+      <p:ext uri="{BB962C8B-B14F-4D97-AF65-F5344CB8AC3E}">
+        <p14:creationId xmlns:p14="http://schemas.microsoft.com/office/powerpoint/2010/main" val="2343656113"/>
+      </p:ext>
+    </p:extLst>
+  </p:cSld>
+  <p:clrMapOvr>
+    <a:masterClrMapping/>
+  </p:clrMapOvr>
+</p:sld>
+</file>
+
+<file path=ppt/slides/slide21.xml><?xml version="1.0" encoding="utf-8"?>
+<p:sld xmlns:a="http://schemas.openxmlformats.org/drawingml/2006/main" xmlns:r="http://schemas.openxmlformats.org/officeDocument/2006/relationships" xmlns:p="http://schemas.openxmlformats.org/presentationml/2006/main">
+  <p:cSld>
+    <p:spTree>
+      <p:nvGrpSpPr>
+        <p:cNvPr id="1" name=""/>
+        <p:cNvGrpSpPr/>
+        <p:nvPr/>
+      </p:nvGrpSpPr>
+      <p:grpSpPr>
+        <a:xfrm>
+          <a:off x="0" y="0"/>
+          <a:ext cx="0" cy="0"/>
+          <a:chOff x="0" y="0"/>
+          <a:chExt cx="0" cy="0"/>
+        </a:xfrm>
+      </p:grpSpPr>
+      <p:sp>
+        <p:nvSpPr>
+          <p:cNvPr id="2" name="Title 1">
+            <a:extLst>
+              <a:ext uri="{FF2B5EF4-FFF2-40B4-BE49-F238E27FC236}">
+                <a16:creationId xmlns:a16="http://schemas.microsoft.com/office/drawing/2014/main" id="{A798245F-DD26-ADCC-6CD2-D5ED5F5598A9}"/>
+              </a:ext>
+            </a:extLst>
+          </p:cNvPr>
+          <p:cNvSpPr>
+            <a:spLocks noGrp="1"/>
+          </p:cNvSpPr>
+          <p:nvPr>
+            <p:ph type="title"/>
+          </p:nvPr>
+        </p:nvSpPr>
+        <p:spPr/>
+        <p:txBody>
+          <a:bodyPr/>
+          <a:lstStyle/>
+          <a:p>
+            <a:r>
+              <a:rPr lang="en-US" dirty="0"/>
+              <a:t>A simple Configuration Model</a:t>
+            </a:r>
+          </a:p>
+        </p:txBody>
+      </p:sp>
+      <p:pic>
+        <p:nvPicPr>
+          <p:cNvPr id="9" name="Content Placeholder 8" descr="Class diagram.">
+            <a:extLst>
+              <a:ext uri="{FF2B5EF4-FFF2-40B4-BE49-F238E27FC236}">
+                <a16:creationId xmlns:a16="http://schemas.microsoft.com/office/drawing/2014/main" id="{EB82A400-7337-4C1F-868E-D34B84F5DF2F}"/>
+              </a:ext>
+            </a:extLst>
+          </p:cNvPr>
+          <p:cNvPicPr>
+            <a:picLocks noGrp="1" noChangeAspect="1"/>
+          </p:cNvPicPr>
+          <p:nvPr>
+            <p:ph idx="1"/>
+          </p:nvPr>
+        </p:nvPicPr>
+        <p:blipFill>
+          <a:blip r:embed="rId2">
+            <a:extLst>
+              <a:ext uri="{28A0092B-C50C-407E-A947-70E740481C1C}">
+                <a14:useLocalDpi xmlns:a14="http://schemas.microsoft.com/office/drawing/2010/main" val="0"/>
+              </a:ext>
+            </a:extLst>
+          </a:blip>
+          <a:stretch>
+            <a:fillRect/>
+          </a:stretch>
+        </p:blipFill>
+        <p:spPr>
+          <a:xfrm>
+            <a:off x="292025" y="1585180"/>
+            <a:ext cx="11794531" cy="4802187"/>
+          </a:xfrm>
+        </p:spPr>
+      </p:pic>
+    </p:spTree>
+    <p:extLst>
+      <p:ext uri="{BB962C8B-B14F-4D97-AF65-F5344CB8AC3E}">
+        <p14:creationId xmlns:p14="http://schemas.microsoft.com/office/powerpoint/2010/main" val="2483408436"/>
+      </p:ext>
+    </p:extLst>
+  </p:cSld>
+  <p:clrMapOvr>
+    <a:masterClrMapping/>
+  </p:clrMapOvr>
+</p:sld>
+</file>
+
+<file path=ppt/slides/slide22.xml><?xml version="1.0" encoding="utf-8"?>
+<p:sld xmlns:a="http://schemas.openxmlformats.org/drawingml/2006/main" xmlns:r="http://schemas.openxmlformats.org/officeDocument/2006/relationships" xmlns:p="http://schemas.openxmlformats.org/presentationml/2006/main">
+  <p:cSld>
+    <p:spTree>
+      <p:nvGrpSpPr>
+        <p:cNvPr id="1" name=""/>
+        <p:cNvGrpSpPr/>
+        <p:nvPr/>
+      </p:nvGrpSpPr>
+      <p:grpSpPr>
+        <a:xfrm>
+          <a:off x="0" y="0"/>
+          <a:ext cx="0" cy="0"/>
+          <a:chOff x="0" y="0"/>
+          <a:chExt cx="0" cy="0"/>
+        </a:xfrm>
+      </p:grpSpPr>
+      <p:sp>
+        <p:nvSpPr>
+          <p:cNvPr id="2" name="Title 1">
+            <a:extLst>
+              <a:ext uri="{FF2B5EF4-FFF2-40B4-BE49-F238E27FC236}">
                 <a16:creationId xmlns:a16="http://schemas.microsoft.com/office/drawing/2014/main" id="{0023BC01-7B97-621A-1FC3-D810DD84552B}"/>
               </a:ext>
             </a:extLst>
@@ -10881,7 +12281,7 @@
           <a:lstStyle/>
           <a:p>
             <a:r>
-              <a:rPr lang="en-US" sz="1600">
+              <a:rPr lang="en-US" sz="1600" dirty="0">
                 <a:solidFill>
                   <a:srgbClr val="0000FF"/>
                 </a:solidFill>
@@ -10890,29 +12290,83 @@
               <a:t>static</a:t>
             </a:r>
             <a:r>
-              <a:rPr lang="en-US" sz="1600">
+              <a:rPr lang="en-US" sz="1600" dirty="0">
                 <a:solidFill>
                   <a:srgbClr val="000000"/>
                 </a:solidFill>
                 <a:latin typeface="Consolas" panose="020B0609020204030204" pitchFamily="49" charset="0"/>
               </a:rPr>
-              <a:t> ApplicationIdentityConfiguration? Create( IActivityMonitor monitor,</a:t>
-            </a:r>
-          </a:p>
-          <a:p>
-            <a:r>
-              <a:rPr lang="en-US" sz="1600">
+              <a:t> </a:t>
+            </a:r>
+            <a:r>
+              <a:rPr lang="en-US" sz="1600" dirty="0" err="1">
                 <a:solidFill>
                   <a:srgbClr val="000000"/>
                 </a:solidFill>
                 <a:latin typeface="Consolas" panose="020B0609020204030204" pitchFamily="49" charset="0"/>
               </a:rPr>
-              <a:t>						IConfigurationSection configuration,</a:t>
-            </a:r>
-          </a:p>
-          <a:p>
-            <a:r>
-              <a:rPr lang="en-US" sz="1600">
+              <a:t>ApplicationIdentityConfiguration</a:t>
+            </a:r>
+            <a:r>
+              <a:rPr lang="en-US" sz="1600" dirty="0">
+                <a:solidFill>
+                  <a:srgbClr val="000000"/>
+                </a:solidFill>
+                <a:latin typeface="Consolas" panose="020B0609020204030204" pitchFamily="49" charset="0"/>
+              </a:rPr>
+              <a:t>? Create( </a:t>
+            </a:r>
+            <a:r>
+              <a:rPr lang="en-US" sz="1600" dirty="0" err="1">
+                <a:solidFill>
+                  <a:srgbClr val="000000"/>
+                </a:solidFill>
+                <a:latin typeface="Consolas" panose="020B0609020204030204" pitchFamily="49" charset="0"/>
+              </a:rPr>
+              <a:t>IActivityMonitor</a:t>
+            </a:r>
+            <a:r>
+              <a:rPr lang="en-US" sz="1600" dirty="0">
+                <a:solidFill>
+                  <a:srgbClr val="000000"/>
+                </a:solidFill>
+                <a:latin typeface="Consolas" panose="020B0609020204030204" pitchFamily="49" charset="0"/>
+              </a:rPr>
+              <a:t> monitor,</a:t>
+            </a:r>
+          </a:p>
+          <a:p>
+            <a:r>
+              <a:rPr lang="en-US" sz="1600" dirty="0">
+                <a:solidFill>
+                  <a:srgbClr val="000000"/>
+                </a:solidFill>
+                <a:latin typeface="Consolas" panose="020B0609020204030204" pitchFamily="49" charset="0"/>
+              </a:rPr>
+              <a:t>						</a:t>
+            </a:r>
+            <a:r>
+              <a:rPr lang="en-US" sz="1600" dirty="0" err="1">
+                <a:solidFill>
+                  <a:srgbClr val="000000"/>
+                </a:solidFill>
+                <a:latin typeface="Consolas" panose="020B0609020204030204" pitchFamily="49" charset="0"/>
+              </a:rPr>
+              <a:t>IConfigurationSection</a:t>
+            </a:r>
+            <a:r>
+              <a:rPr lang="en-US" sz="1600" dirty="0">
+                <a:solidFill>
+                  <a:srgbClr val="000000"/>
+                </a:solidFill>
+                <a:latin typeface="Consolas" panose="020B0609020204030204" pitchFamily="49" charset="0"/>
+              </a:rPr>
+              <a:t> configuration,</a:t>
+            </a:r>
+          </a:p>
+          <a:p>
+            <a:r>
+              <a:rPr lang="en-US" sz="1600" dirty="0">
                 <a:solidFill>
                   <a:srgbClr val="0000FF"/>
                 </a:solidFill>
@@ -10921,16 +12375,34 @@
               <a:t>						string</a:t>
             </a:r>
             <a:r>
-              <a:rPr lang="en-US" sz="1600">
+              <a:rPr lang="en-US" sz="1600" dirty="0">
                 <a:solidFill>
                   <a:srgbClr val="000000"/>
                 </a:solidFill>
                 <a:latin typeface="Consolas" panose="020B0609020204030204" pitchFamily="49" charset="0"/>
               </a:rPr>
-              <a:t>? defaultLocalName = </a:t>
-            </a:r>
-            <a:r>
-              <a:rPr lang="en-US" sz="1600">
+              <a:t>? </a:t>
+            </a:r>
+            <a:r>
+              <a:rPr lang="en-US" sz="1600" dirty="0" err="1">
+                <a:solidFill>
+                  <a:srgbClr val="000000"/>
+                </a:solidFill>
+                <a:latin typeface="Consolas" panose="020B0609020204030204" pitchFamily="49" charset="0"/>
+              </a:rPr>
+              <a:t>defaultLocalName</a:t>
+            </a:r>
+            <a:r>
+              <a:rPr lang="en-US" sz="1600" dirty="0">
+                <a:solidFill>
+                  <a:srgbClr val="000000"/>
+                </a:solidFill>
+                <a:latin typeface="Consolas" panose="020B0609020204030204" pitchFamily="49" charset="0"/>
+              </a:rPr>
+              <a:t> = </a:t>
+            </a:r>
+            <a:r>
+              <a:rPr lang="en-US" sz="1600" dirty="0">
                 <a:solidFill>
                   <a:srgbClr val="0000FF"/>
                 </a:solidFill>
@@ -10939,7 +12411,7 @@
               <a:t>null</a:t>
             </a:r>
             <a:r>
-              <a:rPr lang="en-US" sz="1600">
+              <a:rPr lang="en-US" sz="1600" dirty="0">
                 <a:solidFill>
                   <a:srgbClr val="000000"/>
                 </a:solidFill>
@@ -10950,7 +12422,7 @@
           </a:p>
           <a:p>
             <a:r>
-              <a:rPr lang="en-US" sz="1600">
+              <a:rPr lang="en-US" sz="1600" dirty="0">
                 <a:solidFill>
                   <a:srgbClr val="0000FF"/>
                 </a:solidFill>
@@ -10959,25 +12431,43 @@
               <a:t>						string</a:t>
             </a:r>
             <a:r>
-              <a:rPr lang="en-US" sz="1600">
+              <a:rPr lang="en-US" sz="1600" dirty="0">
                 <a:solidFill>
                   <a:srgbClr val="000000"/>
                 </a:solidFill>
                 <a:latin typeface="Consolas" panose="020B0609020204030204" pitchFamily="49" charset="0"/>
               </a:rPr>
-              <a:t>? defaultEnvironmentName = </a:t>
-            </a:r>
-            <a:r>
-              <a:rPr lang="en-US" sz="1600">
+              <a:t>? </a:t>
+            </a:r>
+            <a:r>
+              <a:rPr lang="en-US" sz="1600" dirty="0" err="1">
+                <a:solidFill>
+                  <a:srgbClr val="000000"/>
+                </a:solidFill>
+                <a:latin typeface="Consolas" panose="020B0609020204030204" pitchFamily="49" charset="0"/>
+              </a:rPr>
+              <a:t>defaultEnvironmentName</a:t>
+            </a:r>
+            <a:r>
+              <a:rPr lang="en-US" sz="1600" dirty="0">
+                <a:solidFill>
+                  <a:srgbClr val="000000"/>
+                </a:solidFill>
+                <a:latin typeface="Consolas" panose="020B0609020204030204" pitchFamily="49" charset="0"/>
+              </a:rPr>
+              <a:t> = </a:t>
+            </a:r>
+            <a:r>
+              <a:rPr lang="en-US" sz="1600" dirty="0">
                 <a:solidFill>
                   <a:srgbClr val="A31515"/>
                 </a:solidFill>
                 <a:latin typeface="Consolas" panose="020B0609020204030204" pitchFamily="49" charset="0"/>
               </a:rPr>
-              <a:t>"Development"</a:t>
-            </a:r>
-            <a:r>
-              <a:rPr lang="en-US" sz="1600">
+              <a:t>“#Development"</a:t>
+            </a:r>
+            <a:r>
+              <a:rPr lang="en-US" sz="1600" dirty="0">
                 <a:solidFill>
                   <a:srgbClr val="000000"/>
                 </a:solidFill>
@@ -11002,7 +12492,7 @@
 </p:sld>
 </file>
 
-<file path=ppt/slides/slide21.xml><?xml version="1.0" encoding="utf-8"?>
+<file path=ppt/slides/slide23.xml><?xml version="1.0" encoding="utf-8"?>
 <p:sld xmlns:a="http://schemas.openxmlformats.org/drawingml/2006/main" xmlns:r="http://schemas.openxmlformats.org/officeDocument/2006/relationships" xmlns:p="http://schemas.openxmlformats.org/presentationml/2006/main">
   <p:cSld>
     <p:spTree>
@@ -11396,7 +12886,7 @@
 </p:sld>
 </file>
 
-<file path=ppt/slides/slide22.xml><?xml version="1.0" encoding="utf-8"?>
+<file path=ppt/slides/slide24.xml><?xml version="1.0" encoding="utf-8"?>
 <p:sld xmlns:a="http://schemas.openxmlformats.org/drawingml/2006/main" xmlns:r="http://schemas.openxmlformats.org/officeDocument/2006/relationships" xmlns:p="http://schemas.openxmlformats.org/presentationml/2006/main">
   <p:cSld>
     <p:spTree>
@@ -11679,7 +13169,7 @@
 </p:sld>
 </file>
 
-<file path=ppt/slides/slide23.xml><?xml version="1.0" encoding="utf-8"?>
+<file path=ppt/slides/slide25.xml><?xml version="1.0" encoding="utf-8"?>
 <p:sld xmlns:a="http://schemas.openxmlformats.org/drawingml/2006/main" xmlns:r="http://schemas.openxmlformats.org/officeDocument/2006/relationships" xmlns:p="http://schemas.openxmlformats.org/presentationml/2006/main">
   <p:cSld>
     <p:spTree>
@@ -12013,7 +13503,7 @@
 </p:sld>
 </file>
 
-<file path=ppt/slides/slide24.xml><?xml version="1.0" encoding="utf-8"?>
+<file path=ppt/slides/slide26.xml><?xml version="1.0" encoding="utf-8"?>
 <p:sld xmlns:a="http://schemas.openxmlformats.org/drawingml/2006/main" xmlns:r="http://schemas.openxmlformats.org/officeDocument/2006/relationships" xmlns:p="http://schemas.openxmlformats.org/presentationml/2006/main">
   <p:cSld>
     <p:spTree>
@@ -13215,7 +14705,7 @@
 </p:sld>
 </file>
 
-<file path=ppt/slides/slide25.xml><?xml version="1.0" encoding="utf-8"?>
+<file path=ppt/slides/slide27.xml><?xml version="1.0" encoding="utf-8"?>
 <p:sld xmlns:a="http://schemas.openxmlformats.org/drawingml/2006/main" xmlns:r="http://schemas.openxmlformats.org/officeDocument/2006/relationships" xmlns:p="http://schemas.openxmlformats.org/presentationml/2006/main">
   <p:cSld>
     <p:spTree>
@@ -13505,7 +14995,7 @@
 </p:sld>
 </file>
 
-<file path=ppt/slides/slide26.xml><?xml version="1.0" encoding="utf-8"?>
+<file path=ppt/slides/slide28.xml><?xml version="1.0" encoding="utf-8"?>
 <p:sld xmlns:a="http://schemas.openxmlformats.org/drawingml/2006/main" xmlns:r="http://schemas.openxmlformats.org/officeDocument/2006/relationships" xmlns:p="http://schemas.openxmlformats.org/presentationml/2006/main">
   <p:cSld>
     <p:spTree>
@@ -13674,7 +15164,7 @@
 </p:sld>
 </file>
 
-<file path=ppt/slides/slide27.xml><?xml version="1.0" encoding="utf-8"?>
+<file path=ppt/slides/slide29.xml><?xml version="1.0" encoding="utf-8"?>
 <p:sld xmlns:a="http://schemas.openxmlformats.org/drawingml/2006/main" xmlns:r="http://schemas.openxmlformats.org/officeDocument/2006/relationships" xmlns:p="http://schemas.openxmlformats.org/presentationml/2006/main">
   <p:cSld>
     <p:spTree>
@@ -14044,147 +15534,51 @@
           </a:p>
         </p:txBody>
       </p:sp>
-    </p:spTree>
-    <p:extLst>
-      <p:ext uri="{BB962C8B-B14F-4D97-AF65-F5344CB8AC3E}">
-        <p14:creationId xmlns:p14="http://schemas.microsoft.com/office/powerpoint/2010/main" val="200001624"/>
-      </p:ext>
-    </p:extLst>
-  </p:cSld>
-  <p:clrMapOvr>
-    <a:masterClrMapping/>
-  </p:clrMapOvr>
-</p:sld>
-</file>
-
-<file path=ppt/slides/slide28.xml><?xml version="1.0" encoding="utf-8"?>
-<p:sld xmlns:a="http://schemas.openxmlformats.org/drawingml/2006/main" xmlns:r="http://schemas.openxmlformats.org/officeDocument/2006/relationships" xmlns:p="http://schemas.openxmlformats.org/presentationml/2006/main">
-  <p:cSld>
-    <p:spTree>
-      <p:nvGrpSpPr>
-        <p:cNvPr id="1" name=""/>
-        <p:cNvGrpSpPr/>
-        <p:nvPr/>
-      </p:nvGrpSpPr>
-      <p:grpSpPr>
-        <a:xfrm>
-          <a:off x="0" y="0"/>
-          <a:ext cx="0" cy="0"/>
-          <a:chOff x="0" y="0"/>
-          <a:chExt cx="0" cy="0"/>
-        </a:xfrm>
-      </p:grpSpPr>
       <p:sp>
         <p:nvSpPr>
-          <p:cNvPr id="2" name="Title 1">
+          <p:cNvPr id="3" name="Star: 6 Points 2">
             <a:extLst>
               <a:ext uri="{FF2B5EF4-FFF2-40B4-BE49-F238E27FC236}">
-                <a16:creationId xmlns:a16="http://schemas.microsoft.com/office/drawing/2014/main" id="{BCFC278E-8E30-3459-41D7-7185BA86296A}"/>
+                <a16:creationId xmlns:a16="http://schemas.microsoft.com/office/drawing/2014/main" id="{1FA01833-99FE-B7AE-E0AD-029E63353E39}"/>
               </a:ext>
             </a:extLst>
           </p:cNvPr>
-          <p:cNvSpPr>
-            <a:spLocks noGrp="1"/>
-          </p:cNvSpPr>
-          <p:nvPr>
-            <p:ph type="title"/>
-          </p:nvPr>
-        </p:nvSpPr>
-        <p:spPr/>
-        <p:txBody>
-          <a:bodyPr/>
-          <a:lstStyle/>
-          <a:p>
-            <a:r>
-              <a:rPr lang="en-US" dirty="0"/>
-              <a:t>The 8 protocols maximal count</a:t>
-            </a:r>
-          </a:p>
-        </p:txBody>
-      </p:sp>
-      <p:sp>
-        <p:nvSpPr>
-          <p:cNvPr id="3" name="Content Placeholder 2">
-            <a:extLst>
-              <a:ext uri="{FF2B5EF4-FFF2-40B4-BE49-F238E27FC236}">
-                <a16:creationId xmlns:a16="http://schemas.microsoft.com/office/drawing/2014/main" id="{AC71B80D-91E5-6DC7-AB87-2CFAAF04179A}"/>
-              </a:ext>
-            </a:extLst>
-          </p:cNvPr>
-          <p:cNvSpPr>
-            <a:spLocks noGrp="1"/>
-          </p:cNvSpPr>
-          <p:nvPr>
-            <p:ph idx="1"/>
-          </p:nvPr>
+          <p:cNvSpPr/>
+          <p:nvPr/>
         </p:nvSpPr>
         <p:spPr>
           <a:xfrm>
-            <a:off x="838200" y="1825625"/>
-            <a:ext cx="10515600" cy="4516560"/>
+            <a:off x="6684661" y="2153920"/>
+            <a:ext cx="1645920" cy="1473200"/>
           </a:xfrm>
+          <a:prstGeom prst="star6">
+            <a:avLst/>
+          </a:prstGeom>
         </p:spPr>
+        <p:style>
+          <a:lnRef idx="2">
+            <a:schemeClr val="accent1">
+              <a:shade val="50000"/>
+            </a:schemeClr>
+          </a:lnRef>
+          <a:fillRef idx="1">
+            <a:schemeClr val="accent1"/>
+          </a:fillRef>
+          <a:effectRef idx="0">
+            <a:schemeClr val="accent1"/>
+          </a:effectRef>
+          <a:fontRef idx="minor">
+            <a:schemeClr val="lt1"/>
+          </a:fontRef>
+        </p:style>
         <p:txBody>
-          <a:bodyPr>
-            <a:normAutofit lnSpcReduction="10000"/>
-          </a:bodyPr>
+          <a:bodyPr rtlCol="0" anchor="ctr"/>
           <a:lstStyle/>
           <a:p>
-            <a:r>
-              <a:rPr lang="en-US" dirty="0"/>
-              <a:t>Only 8 protocols can be expressed.</a:t>
-            </a:r>
-          </a:p>
-          <a:p>
-            <a:pPr lvl="1"/>
-            <a:r>
-              <a:rPr lang="en-US" dirty="0"/>
-              <a:t>The “0 Protocol” protocol is reserved: this is the protocol of </a:t>
-            </a:r>
-            <a:r>
-              <a:rPr lang="en-US" dirty="0" err="1"/>
-              <a:t>CK.AppIdentity.TransportLayer</a:t>
-            </a:r>
-            <a:r>
-              <a:rPr lang="en-US" dirty="0"/>
-              <a:t> itself that handles special messages used to negotiate, accept, reject incoming parties and outgoing connections.</a:t>
-            </a:r>
-          </a:p>
-          <a:p>
-            <a:pPr lvl="1"/>
-            <a:r>
-              <a:rPr lang="en-US" dirty="0"/>
-              <a:t>This lets 7 possible protocols. </a:t>
-            </a:r>
-          </a:p>
-          <a:p>
-            <a:pPr lvl="1"/>
-            <a:endParaRPr lang="en-US" dirty="0"/>
-          </a:p>
-          <a:p>
-            <a:r>
-              <a:rPr lang="en-US" dirty="0"/>
-              <a:t>This limit applies to a Remote party pair: </a:t>
-            </a:r>
-          </a:p>
-          <a:p>
-            <a:pPr lvl="1"/>
-            <a:r>
-              <a:rPr lang="en-US" dirty="0"/>
-              <a:t>There can be any number of possible protocols in an application</a:t>
-            </a:r>
-          </a:p>
-          <a:p>
-            <a:pPr lvl="1"/>
-            <a:r>
-              <a:rPr lang="en-US" dirty="0"/>
-              <a:t>2 parties that start to interact initially negotiate the ones they can and want to use. </a:t>
-            </a:r>
-          </a:p>
-          <a:p>
-            <a:r>
-              <a:rPr lang="en-US" dirty="0"/>
-              <a:t>Any Transport between 2 parties can simultaneously support up to 7 different protocols.</a:t>
+            <a:pPr algn="ctr"/>
+            <a:r>
+              <a:rPr lang="en-US" dirty="0"/>
+              <a:t>Update Needed</a:t>
             </a:r>
           </a:p>
         </p:txBody>
@@ -14192,677 +15586,7 @@
     </p:spTree>
     <p:extLst>
       <p:ext uri="{BB962C8B-B14F-4D97-AF65-F5344CB8AC3E}">
-        <p14:creationId xmlns:p14="http://schemas.microsoft.com/office/powerpoint/2010/main" val="1820346205"/>
-      </p:ext>
-    </p:extLst>
-  </p:cSld>
-  <p:clrMapOvr>
-    <a:masterClrMapping/>
-  </p:clrMapOvr>
-</p:sld>
-</file>
-
-<file path=ppt/slides/slide29.xml><?xml version="1.0" encoding="utf-8"?>
-<p:sld xmlns:a="http://schemas.openxmlformats.org/drawingml/2006/main" xmlns:r="http://schemas.openxmlformats.org/officeDocument/2006/relationships" xmlns:p="http://schemas.openxmlformats.org/presentationml/2006/main">
-  <p:cSld>
-    <p:spTree>
-      <p:nvGrpSpPr>
-        <p:cNvPr id="1" name=""/>
-        <p:cNvGrpSpPr/>
-        <p:nvPr/>
-      </p:nvGrpSpPr>
-      <p:grpSpPr>
-        <a:xfrm>
-          <a:off x="0" y="0"/>
-          <a:ext cx="0" cy="0"/>
-          <a:chOff x="0" y="0"/>
-          <a:chExt cx="0" cy="0"/>
-        </a:xfrm>
-      </p:grpSpPr>
-      <p:sp>
-        <p:nvSpPr>
-          <p:cNvPr id="2" name="Title 1">
-            <a:extLst>
-              <a:ext uri="{FF2B5EF4-FFF2-40B4-BE49-F238E27FC236}">
-                <a16:creationId xmlns:a16="http://schemas.microsoft.com/office/drawing/2014/main" id="{7CF456EA-A507-E17F-1FF5-0DDC0C51BBFF}"/>
-              </a:ext>
-            </a:extLst>
-          </p:cNvPr>
-          <p:cNvSpPr>
-            <a:spLocks noGrp="1"/>
-          </p:cNvSpPr>
-          <p:nvPr>
-            <p:ph type="title"/>
-          </p:nvPr>
-        </p:nvSpPr>
-        <p:spPr/>
-        <p:txBody>
-          <a:bodyPr/>
-          <a:lstStyle/>
-          <a:p>
-            <a:r>
-              <a:rPr lang="en-US" dirty="0"/>
-              <a:t>Creating new messages</a:t>
-            </a:r>
-          </a:p>
-        </p:txBody>
-      </p:sp>
-      <p:sp>
-        <p:nvSpPr>
-          <p:cNvPr id="10" name="Content Placeholder 2">
-            <a:extLst>
-              <a:ext uri="{FF2B5EF4-FFF2-40B4-BE49-F238E27FC236}">
-                <a16:creationId xmlns:a16="http://schemas.microsoft.com/office/drawing/2014/main" id="{1CC84568-F688-2F94-8756-D5862C7EDE27}"/>
-              </a:ext>
-            </a:extLst>
-          </p:cNvPr>
-          <p:cNvSpPr txBox="1">
-            <a:spLocks/>
-          </p:cNvSpPr>
-          <p:nvPr/>
-        </p:nvSpPr>
-        <p:spPr>
-          <a:xfrm>
-            <a:off x="838200" y="1825625"/>
-            <a:ext cx="10515600" cy="4516560"/>
-          </a:xfrm>
-          <a:prstGeom prst="rect">
-            <a:avLst/>
-          </a:prstGeom>
-        </p:spPr>
-        <p:txBody>
-          <a:bodyPr vert="horz" lIns="91440" tIns="45720" rIns="91440" bIns="45720" rtlCol="0">
-            <a:normAutofit lnSpcReduction="10000"/>
-          </a:bodyPr>
-          <a:lstStyle>
-            <a:lvl1pPr marL="228600" indent="-228600" algn="l" defTabSz="914400" rtl="0" eaLnBrk="1" latinLnBrk="0" hangingPunct="1">
-              <a:lnSpc>
-                <a:spcPct val="90000"/>
-              </a:lnSpc>
-              <a:spcBef>
-                <a:spcPts val="1000"/>
-              </a:spcBef>
-              <a:buFont typeface="Arial" panose="020B0604020202020204" pitchFamily="34" charset="0"/>
-              <a:buChar char="•"/>
-              <a:defRPr sz="2800" kern="1200">
-                <a:solidFill>
-                  <a:schemeClr val="tx1"/>
-                </a:solidFill>
-                <a:latin typeface="+mn-lt"/>
-                <a:ea typeface="+mn-ea"/>
-                <a:cs typeface="+mn-cs"/>
-              </a:defRPr>
-            </a:lvl1pPr>
-            <a:lvl2pPr marL="685800" indent="-228600" algn="l" defTabSz="914400" rtl="0" eaLnBrk="1" latinLnBrk="0" hangingPunct="1">
-              <a:lnSpc>
-                <a:spcPct val="90000"/>
-              </a:lnSpc>
-              <a:spcBef>
-                <a:spcPts val="500"/>
-              </a:spcBef>
-              <a:buFont typeface="Arial" panose="020B0604020202020204" pitchFamily="34" charset="0"/>
-              <a:buChar char="•"/>
-              <a:defRPr sz="2400" kern="1200">
-                <a:solidFill>
-                  <a:schemeClr val="tx1"/>
-                </a:solidFill>
-                <a:latin typeface="+mn-lt"/>
-                <a:ea typeface="+mn-ea"/>
-                <a:cs typeface="+mn-cs"/>
-              </a:defRPr>
-            </a:lvl2pPr>
-            <a:lvl3pPr marL="1143000" indent="-228600" algn="l" defTabSz="914400" rtl="0" eaLnBrk="1" latinLnBrk="0" hangingPunct="1">
-              <a:lnSpc>
-                <a:spcPct val="90000"/>
-              </a:lnSpc>
-              <a:spcBef>
-                <a:spcPts val="500"/>
-              </a:spcBef>
-              <a:buFont typeface="Arial" panose="020B0604020202020204" pitchFamily="34" charset="0"/>
-              <a:buChar char="•"/>
-              <a:defRPr sz="2000" kern="1200">
-                <a:solidFill>
-                  <a:schemeClr val="tx1"/>
-                </a:solidFill>
-                <a:latin typeface="+mn-lt"/>
-                <a:ea typeface="+mn-ea"/>
-                <a:cs typeface="+mn-cs"/>
-              </a:defRPr>
-            </a:lvl3pPr>
-            <a:lvl4pPr marL="1600200" indent="-228600" algn="l" defTabSz="914400" rtl="0" eaLnBrk="1" latinLnBrk="0" hangingPunct="1">
-              <a:lnSpc>
-                <a:spcPct val="90000"/>
-              </a:lnSpc>
-              <a:spcBef>
-                <a:spcPts val="500"/>
-              </a:spcBef>
-              <a:buFont typeface="Arial" panose="020B0604020202020204" pitchFamily="34" charset="0"/>
-              <a:buChar char="•"/>
-              <a:defRPr sz="1800" kern="1200">
-                <a:solidFill>
-                  <a:schemeClr val="tx1"/>
-                </a:solidFill>
-                <a:latin typeface="+mn-lt"/>
-                <a:ea typeface="+mn-ea"/>
-                <a:cs typeface="+mn-cs"/>
-              </a:defRPr>
-            </a:lvl4pPr>
-            <a:lvl5pPr marL="2057400" indent="-228600" algn="l" defTabSz="914400" rtl="0" eaLnBrk="1" latinLnBrk="0" hangingPunct="1">
-              <a:lnSpc>
-                <a:spcPct val="90000"/>
-              </a:lnSpc>
-              <a:spcBef>
-                <a:spcPts val="500"/>
-              </a:spcBef>
-              <a:buFont typeface="Arial" panose="020B0604020202020204" pitchFamily="34" charset="0"/>
-              <a:buChar char="•"/>
-              <a:defRPr sz="1800" kern="1200">
-                <a:solidFill>
-                  <a:schemeClr val="tx1"/>
-                </a:solidFill>
-                <a:latin typeface="+mn-lt"/>
-                <a:ea typeface="+mn-ea"/>
-                <a:cs typeface="+mn-cs"/>
-              </a:defRPr>
-            </a:lvl5pPr>
-            <a:lvl6pPr marL="2514600" indent="-228600" algn="l" defTabSz="914400" rtl="0" eaLnBrk="1" latinLnBrk="0" hangingPunct="1">
-              <a:lnSpc>
-                <a:spcPct val="90000"/>
-              </a:lnSpc>
-              <a:spcBef>
-                <a:spcPts val="500"/>
-              </a:spcBef>
-              <a:buFont typeface="Arial" panose="020B0604020202020204" pitchFamily="34" charset="0"/>
-              <a:buChar char="•"/>
-              <a:defRPr sz="1800" kern="1200">
-                <a:solidFill>
-                  <a:schemeClr val="tx1"/>
-                </a:solidFill>
-                <a:latin typeface="+mn-lt"/>
-                <a:ea typeface="+mn-ea"/>
-                <a:cs typeface="+mn-cs"/>
-              </a:defRPr>
-            </a:lvl6pPr>
-            <a:lvl7pPr marL="2971800" indent="-228600" algn="l" defTabSz="914400" rtl="0" eaLnBrk="1" latinLnBrk="0" hangingPunct="1">
-              <a:lnSpc>
-                <a:spcPct val="90000"/>
-              </a:lnSpc>
-              <a:spcBef>
-                <a:spcPts val="500"/>
-              </a:spcBef>
-              <a:buFont typeface="Arial" panose="020B0604020202020204" pitchFamily="34" charset="0"/>
-              <a:buChar char="•"/>
-              <a:defRPr sz="1800" kern="1200">
-                <a:solidFill>
-                  <a:schemeClr val="tx1"/>
-                </a:solidFill>
-                <a:latin typeface="+mn-lt"/>
-                <a:ea typeface="+mn-ea"/>
-                <a:cs typeface="+mn-cs"/>
-              </a:defRPr>
-            </a:lvl7pPr>
-            <a:lvl8pPr marL="3429000" indent="-228600" algn="l" defTabSz="914400" rtl="0" eaLnBrk="1" latinLnBrk="0" hangingPunct="1">
-              <a:lnSpc>
-                <a:spcPct val="90000"/>
-              </a:lnSpc>
-              <a:spcBef>
-                <a:spcPts val="500"/>
-              </a:spcBef>
-              <a:buFont typeface="Arial" panose="020B0604020202020204" pitchFamily="34" charset="0"/>
-              <a:buChar char="•"/>
-              <a:defRPr sz="1800" kern="1200">
-                <a:solidFill>
-                  <a:schemeClr val="tx1"/>
-                </a:solidFill>
-                <a:latin typeface="+mn-lt"/>
-                <a:ea typeface="+mn-ea"/>
-                <a:cs typeface="+mn-cs"/>
-              </a:defRPr>
-            </a:lvl8pPr>
-            <a:lvl9pPr marL="3886200" indent="-228600" algn="l" defTabSz="914400" rtl="0" eaLnBrk="1" latinLnBrk="0" hangingPunct="1">
-              <a:lnSpc>
-                <a:spcPct val="90000"/>
-              </a:lnSpc>
-              <a:spcBef>
-                <a:spcPts val="500"/>
-              </a:spcBef>
-              <a:buFont typeface="Arial" panose="020B0604020202020204" pitchFamily="34" charset="0"/>
-              <a:buChar char="•"/>
-              <a:defRPr sz="1800" kern="1200">
-                <a:solidFill>
-                  <a:schemeClr val="tx1"/>
-                </a:solidFill>
-                <a:latin typeface="+mn-lt"/>
-                <a:ea typeface="+mn-ea"/>
-                <a:cs typeface="+mn-cs"/>
-              </a:defRPr>
-            </a:lvl9pPr>
-          </a:lstStyle>
-          <a:p>
-            <a:r>
-              <a:rPr lang="en-US" dirty="0"/>
-              <a:t>Only an </a:t>
-            </a:r>
-            <a:r>
-              <a:rPr lang="en-US" sz="2000" dirty="0" err="1">
-                <a:latin typeface="Consolas" panose="020B0609020204030204" pitchFamily="49" charset="0"/>
-                <a:cs typeface="Courier New" panose="02070309020205020404" pitchFamily="49" charset="0"/>
-              </a:rPr>
-              <a:t>OutgoingMessageFactory</a:t>
-            </a:r>
-            <a:r>
-              <a:rPr lang="en-US" dirty="0"/>
-              <a:t> can </a:t>
-            </a:r>
-            <a:br>
-              <a:rPr lang="en-US" dirty="0"/>
-            </a:br>
-            <a:r>
-              <a:rPr lang="en-US" dirty="0"/>
-              <a:t>create new messages:</a:t>
-            </a:r>
-          </a:p>
-          <a:p>
-            <a:endParaRPr lang="en-US" dirty="0"/>
-          </a:p>
-          <a:p>
-            <a:endParaRPr lang="en-US" dirty="0"/>
-          </a:p>
-          <a:p>
-            <a:endParaRPr lang="en-US" dirty="0"/>
-          </a:p>
-          <a:p>
-            <a:r>
-              <a:rPr lang="en-US" dirty="0"/>
-              <a:t>Messages must be disposed once done with them</a:t>
-            </a:r>
-          </a:p>
-          <a:p>
-            <a:pPr lvl="1"/>
-            <a:r>
-              <a:rPr lang="en-US" dirty="0"/>
-              <a:t>Allocated memory is reused.</a:t>
-            </a:r>
-          </a:p>
-          <a:p>
-            <a:r>
-              <a:rPr lang="en-US" dirty="0"/>
-              <a:t>Messages can be “Retained” when needed (reference counting)</a:t>
-            </a:r>
-          </a:p>
-          <a:p>
-            <a:r>
-              <a:rPr lang="en-US" dirty="0" err="1"/>
-              <a:t>CreateStatic</a:t>
-            </a:r>
-            <a:r>
-              <a:rPr lang="en-US" dirty="0"/>
-              <a:t> returns messages don’t need to be disposed.</a:t>
-            </a:r>
-          </a:p>
-          <a:p>
-            <a:pPr lvl="1"/>
-            <a:r>
-              <a:rPr lang="en-US" dirty="0"/>
-              <a:t>Dispose()/Retain() calls are ignored.</a:t>
-            </a:r>
-          </a:p>
-        </p:txBody>
-      </p:sp>
-      <p:sp>
-        <p:nvSpPr>
-          <p:cNvPr id="12" name="TextBox 11">
-            <a:extLst>
-              <a:ext uri="{FF2B5EF4-FFF2-40B4-BE49-F238E27FC236}">
-                <a16:creationId xmlns:a16="http://schemas.microsoft.com/office/drawing/2014/main" id="{B101A3D9-3364-B380-BE27-B3376CE6CD06}"/>
-              </a:ext>
-            </a:extLst>
-          </p:cNvPr>
-          <p:cNvSpPr txBox="1"/>
-          <p:nvPr/>
-        </p:nvSpPr>
-        <p:spPr>
-          <a:xfrm>
-            <a:off x="1078524" y="2715481"/>
-            <a:ext cx="9448800" cy="1477328"/>
-          </a:xfrm>
-          <a:prstGeom prst="rect">
-            <a:avLst/>
-          </a:prstGeom>
-          <a:noFill/>
-        </p:spPr>
-        <p:txBody>
-          <a:bodyPr wrap="square">
-            <a:spAutoFit/>
-          </a:bodyPr>
-          <a:lstStyle/>
-          <a:p>
-            <a:r>
-              <a:rPr lang="en-US" sz="1800" dirty="0">
-                <a:solidFill>
-                  <a:srgbClr val="0000FF"/>
-                </a:solidFill>
-                <a:latin typeface="Consolas" panose="020B0609020204030204" pitchFamily="49" charset="0"/>
-              </a:rPr>
-              <a:t>public</a:t>
-            </a:r>
-            <a:r>
-              <a:rPr lang="en-US" sz="1800" dirty="0">
-                <a:solidFill>
-                  <a:srgbClr val="000000"/>
-                </a:solidFill>
-                <a:latin typeface="Consolas" panose="020B0609020204030204" pitchFamily="49" charset="0"/>
-              </a:rPr>
-              <a:t> </a:t>
-            </a:r>
-            <a:r>
-              <a:rPr lang="en-US" sz="1800" dirty="0" err="1">
-                <a:solidFill>
-                  <a:srgbClr val="000000"/>
-                </a:solidFill>
-                <a:latin typeface="Consolas" panose="020B0609020204030204" pitchFamily="49" charset="0"/>
-              </a:rPr>
-              <a:t>TransportMessage</a:t>
-            </a:r>
-            <a:r>
-              <a:rPr lang="en-US" sz="1800" dirty="0">
-                <a:solidFill>
-                  <a:srgbClr val="000000"/>
-                </a:solidFill>
-                <a:latin typeface="Consolas" panose="020B0609020204030204" pitchFamily="49" charset="0"/>
-              </a:rPr>
-              <a:t> Create( Action&lt;</a:t>
-            </a:r>
-            <a:r>
-              <a:rPr lang="en-US" sz="1800" dirty="0" err="1">
-                <a:solidFill>
-                  <a:srgbClr val="000000"/>
-                </a:solidFill>
-                <a:latin typeface="Consolas" panose="020B0609020204030204" pitchFamily="49" charset="0"/>
-              </a:rPr>
-              <a:t>IBufferWriter</a:t>
-            </a:r>
-            <a:r>
-              <a:rPr lang="en-US" sz="1800" dirty="0">
-                <a:solidFill>
-                  <a:srgbClr val="000000"/>
-                </a:solidFill>
-                <a:latin typeface="Consolas" panose="020B0609020204030204" pitchFamily="49" charset="0"/>
-              </a:rPr>
-              <a:t>&lt;</a:t>
-            </a:r>
-            <a:r>
-              <a:rPr lang="en-US" sz="1800" dirty="0">
-                <a:solidFill>
-                  <a:srgbClr val="0000FF"/>
-                </a:solidFill>
-                <a:latin typeface="Consolas" panose="020B0609020204030204" pitchFamily="49" charset="0"/>
-              </a:rPr>
-              <a:t>byte</a:t>
-            </a:r>
-            <a:r>
-              <a:rPr lang="en-US" sz="1800" dirty="0">
-                <a:solidFill>
-                  <a:srgbClr val="000000"/>
-                </a:solidFill>
-                <a:latin typeface="Consolas" panose="020B0609020204030204" pitchFamily="49" charset="0"/>
-              </a:rPr>
-              <a:t>&gt;&gt; writer,</a:t>
-            </a:r>
-          </a:p>
-          <a:p>
-            <a:r>
-              <a:rPr lang="en-US" sz="1800" dirty="0">
-                <a:solidFill>
-                  <a:srgbClr val="000000"/>
-                </a:solidFill>
-                <a:latin typeface="Consolas" panose="020B0609020204030204" pitchFamily="49" charset="0"/>
-              </a:rPr>
-              <a:t>                                </a:t>
-            </a:r>
-            <a:r>
-              <a:rPr lang="en-US" sz="1800" dirty="0">
-                <a:solidFill>
-                  <a:srgbClr val="0000FF"/>
-                </a:solidFill>
-                <a:latin typeface="Consolas" panose="020B0609020204030204" pitchFamily="49" charset="0"/>
-              </a:rPr>
-              <a:t>bool</a:t>
-            </a:r>
-            <a:r>
-              <a:rPr lang="en-US" sz="1800" dirty="0">
-                <a:solidFill>
-                  <a:srgbClr val="000000"/>
-                </a:solidFill>
-                <a:latin typeface="Consolas" panose="020B0609020204030204" pitchFamily="49" charset="0"/>
-              </a:rPr>
-              <a:t> </a:t>
-            </a:r>
-            <a:r>
-              <a:rPr lang="en-US" sz="1800" dirty="0" err="1">
-                <a:solidFill>
-                  <a:srgbClr val="000000"/>
-                </a:solidFill>
-                <a:latin typeface="Consolas" panose="020B0609020204030204" pitchFamily="49" charset="0"/>
-              </a:rPr>
-              <a:t>isControl</a:t>
-            </a:r>
-            <a:r>
-              <a:rPr lang="en-US" sz="1800" dirty="0">
-                <a:solidFill>
-                  <a:srgbClr val="000000"/>
-                </a:solidFill>
-                <a:latin typeface="Consolas" panose="020B0609020204030204" pitchFamily="49" charset="0"/>
-              </a:rPr>
-              <a:t> = </a:t>
-            </a:r>
-            <a:r>
-              <a:rPr lang="en-US" sz="1800" dirty="0">
-                <a:solidFill>
-                  <a:srgbClr val="0000FF"/>
-                </a:solidFill>
-                <a:latin typeface="Consolas" panose="020B0609020204030204" pitchFamily="49" charset="0"/>
-              </a:rPr>
-              <a:t>false </a:t>
-            </a:r>
-            <a:r>
-              <a:rPr lang="en-US" sz="1800" dirty="0">
-                <a:solidFill>
-                  <a:srgbClr val="000000"/>
-                </a:solidFill>
-                <a:latin typeface="Consolas" panose="020B0609020204030204" pitchFamily="49" charset="0"/>
-              </a:rPr>
-              <a:t>);</a:t>
-            </a:r>
-          </a:p>
-          <a:p>
-            <a:r>
-              <a:rPr lang="en-US" sz="1800" dirty="0">
-                <a:solidFill>
-                  <a:srgbClr val="0000FF"/>
-                </a:solidFill>
-                <a:latin typeface="Consolas" panose="020B0609020204030204" pitchFamily="49" charset="0"/>
-              </a:rPr>
-              <a:t>public</a:t>
-            </a:r>
-            <a:r>
-              <a:rPr lang="en-US" sz="1800" dirty="0">
-                <a:solidFill>
-                  <a:srgbClr val="000000"/>
-                </a:solidFill>
-                <a:latin typeface="Consolas" panose="020B0609020204030204" pitchFamily="49" charset="0"/>
-              </a:rPr>
-              <a:t> </a:t>
-            </a:r>
-            <a:r>
-              <a:rPr lang="en-US" sz="1800" dirty="0" err="1">
-                <a:solidFill>
-                  <a:srgbClr val="000000"/>
-                </a:solidFill>
-                <a:latin typeface="Consolas" panose="020B0609020204030204" pitchFamily="49" charset="0"/>
-              </a:rPr>
-              <a:t>TransportMessage</a:t>
-            </a:r>
-            <a:r>
-              <a:rPr lang="en-US" sz="1800" dirty="0">
-                <a:solidFill>
-                  <a:srgbClr val="000000"/>
-                </a:solidFill>
-                <a:latin typeface="Consolas" panose="020B0609020204030204" pitchFamily="49" charset="0"/>
-              </a:rPr>
-              <a:t> Create( Action&lt;</a:t>
-            </a:r>
-            <a:r>
-              <a:rPr lang="en-US" sz="1800" dirty="0" err="1">
-                <a:solidFill>
-                  <a:srgbClr val="000000"/>
-                </a:solidFill>
-                <a:latin typeface="Consolas" panose="020B0609020204030204" pitchFamily="49" charset="0"/>
-              </a:rPr>
-              <a:t>MutableSequence</a:t>
-            </a:r>
-            <a:r>
-              <a:rPr lang="en-US" sz="1800" dirty="0">
-                <a:solidFill>
-                  <a:srgbClr val="000000"/>
-                </a:solidFill>
-                <a:latin typeface="Consolas" panose="020B0609020204030204" pitchFamily="49" charset="0"/>
-              </a:rPr>
-              <a:t>&lt;</a:t>
-            </a:r>
-            <a:r>
-              <a:rPr lang="en-US" sz="1800" dirty="0">
-                <a:solidFill>
-                  <a:srgbClr val="0000FF"/>
-                </a:solidFill>
-                <a:latin typeface="Consolas" panose="020B0609020204030204" pitchFamily="49" charset="0"/>
-              </a:rPr>
-              <a:t>byte</a:t>
-            </a:r>
-            <a:r>
-              <a:rPr lang="en-US" sz="1800" dirty="0">
-                <a:solidFill>
-                  <a:srgbClr val="000000"/>
-                </a:solidFill>
-                <a:latin typeface="Consolas" panose="020B0609020204030204" pitchFamily="49" charset="0"/>
-              </a:rPr>
-              <a:t>&gt;&gt; writer,</a:t>
-            </a:r>
-          </a:p>
-          <a:p>
-            <a:r>
-              <a:rPr lang="en-US" sz="1800" dirty="0">
-                <a:solidFill>
-                  <a:srgbClr val="000000"/>
-                </a:solidFill>
-                <a:latin typeface="Consolas" panose="020B0609020204030204" pitchFamily="49" charset="0"/>
-              </a:rPr>
-              <a:t>                                </a:t>
-            </a:r>
-            <a:r>
-              <a:rPr lang="en-US" sz="1800" dirty="0">
-                <a:solidFill>
-                  <a:srgbClr val="0000FF"/>
-                </a:solidFill>
-                <a:latin typeface="Consolas" panose="020B0609020204030204" pitchFamily="49" charset="0"/>
-              </a:rPr>
-              <a:t>bool</a:t>
-            </a:r>
-            <a:r>
-              <a:rPr lang="en-US" sz="1800" dirty="0">
-                <a:solidFill>
-                  <a:srgbClr val="000000"/>
-                </a:solidFill>
-                <a:latin typeface="Consolas" panose="020B0609020204030204" pitchFamily="49" charset="0"/>
-              </a:rPr>
-              <a:t> </a:t>
-            </a:r>
-            <a:r>
-              <a:rPr lang="en-US" sz="1800" dirty="0" err="1">
-                <a:solidFill>
-                  <a:srgbClr val="000000"/>
-                </a:solidFill>
-                <a:latin typeface="Consolas" panose="020B0609020204030204" pitchFamily="49" charset="0"/>
-              </a:rPr>
-              <a:t>isControl</a:t>
-            </a:r>
-            <a:r>
-              <a:rPr lang="en-US" sz="1800" dirty="0">
-                <a:solidFill>
-                  <a:srgbClr val="000000"/>
-                </a:solidFill>
-                <a:latin typeface="Consolas" panose="020B0609020204030204" pitchFamily="49" charset="0"/>
-              </a:rPr>
-              <a:t> = </a:t>
-            </a:r>
-            <a:r>
-              <a:rPr lang="en-US" sz="1800" dirty="0">
-                <a:solidFill>
-                  <a:srgbClr val="0000FF"/>
-                </a:solidFill>
-                <a:latin typeface="Consolas" panose="020B0609020204030204" pitchFamily="49" charset="0"/>
-              </a:rPr>
-              <a:t>false </a:t>
-            </a:r>
-            <a:r>
-              <a:rPr lang="en-US" sz="1800" dirty="0">
-                <a:solidFill>
-                  <a:srgbClr val="000000"/>
-                </a:solidFill>
-                <a:latin typeface="Consolas" panose="020B0609020204030204" pitchFamily="49" charset="0"/>
-              </a:rPr>
-              <a:t>);</a:t>
-            </a:r>
-          </a:p>
-          <a:p>
-            <a:endParaRPr lang="en-US" sz="1800" dirty="0">
-              <a:solidFill>
-                <a:srgbClr val="000000"/>
-              </a:solidFill>
-              <a:latin typeface="Consolas" panose="020B0609020204030204" pitchFamily="49" charset="0"/>
-            </a:endParaRPr>
-          </a:p>
-        </p:txBody>
-      </p:sp>
-      <p:pic>
-        <p:nvPicPr>
-          <p:cNvPr id="16" name="Content Placeholder 15" descr="Graphical user interface, text, application, chat or text message&#10;&#10;Description automatically generated">
-            <a:extLst>
-              <a:ext uri="{FF2B5EF4-FFF2-40B4-BE49-F238E27FC236}">
-                <a16:creationId xmlns:a16="http://schemas.microsoft.com/office/drawing/2014/main" id="{B9C368B7-B971-1A32-863D-EFEC2CD1A66D}"/>
-              </a:ext>
-            </a:extLst>
-          </p:cNvPr>
-          <p:cNvPicPr>
-            <a:picLocks noGrp="1" noChangeAspect="1"/>
-          </p:cNvPicPr>
-          <p:nvPr>
-            <p:ph idx="1"/>
-          </p:nvPr>
-        </p:nvPicPr>
-        <p:blipFill>
-          <a:blip r:embed="rId2">
-            <a:extLst>
-              <a:ext uri="{28A0092B-C50C-407E-A947-70E740481C1C}">
-                <a14:useLocalDpi xmlns:a14="http://schemas.microsoft.com/office/drawing/2010/main" val="0"/>
-              </a:ext>
-            </a:extLst>
-          </a:blip>
-          <a:stretch>
-            <a:fillRect/>
-          </a:stretch>
-        </p:blipFill>
-        <p:spPr>
-          <a:xfrm>
-            <a:off x="6365630" y="515815"/>
-            <a:ext cx="5716130" cy="2047266"/>
-          </a:xfrm>
-        </p:spPr>
-      </p:pic>
-    </p:spTree>
-    <p:extLst>
-      <p:ext uri="{BB962C8B-B14F-4D97-AF65-F5344CB8AC3E}">
-        <p14:creationId xmlns:p14="http://schemas.microsoft.com/office/powerpoint/2010/main" val="3573920614"/>
+        <p14:creationId xmlns:p14="http://schemas.microsoft.com/office/powerpoint/2010/main" val="200001624"/>
       </p:ext>
     </p:extLst>
   </p:cSld>
@@ -15046,6 +15770,870 @@
       </p:grpSpPr>
       <p:sp>
         <p:nvSpPr>
+          <p:cNvPr id="2" name="Title 1">
+            <a:extLst>
+              <a:ext uri="{FF2B5EF4-FFF2-40B4-BE49-F238E27FC236}">
+                <a16:creationId xmlns:a16="http://schemas.microsoft.com/office/drawing/2014/main" id="{BCFC278E-8E30-3459-41D7-7185BA86296A}"/>
+              </a:ext>
+            </a:extLst>
+          </p:cNvPr>
+          <p:cNvSpPr>
+            <a:spLocks noGrp="1"/>
+          </p:cNvSpPr>
+          <p:nvPr>
+            <p:ph type="title"/>
+          </p:nvPr>
+        </p:nvSpPr>
+        <p:spPr/>
+        <p:txBody>
+          <a:bodyPr/>
+          <a:lstStyle/>
+          <a:p>
+            <a:r>
+              <a:rPr lang="en-US" dirty="0"/>
+              <a:t>The 8 protocols maximal count</a:t>
+            </a:r>
+          </a:p>
+        </p:txBody>
+      </p:sp>
+      <p:sp>
+        <p:nvSpPr>
+          <p:cNvPr id="3" name="Content Placeholder 2">
+            <a:extLst>
+              <a:ext uri="{FF2B5EF4-FFF2-40B4-BE49-F238E27FC236}">
+                <a16:creationId xmlns:a16="http://schemas.microsoft.com/office/drawing/2014/main" id="{AC71B80D-91E5-6DC7-AB87-2CFAAF04179A}"/>
+              </a:ext>
+            </a:extLst>
+          </p:cNvPr>
+          <p:cNvSpPr>
+            <a:spLocks noGrp="1"/>
+          </p:cNvSpPr>
+          <p:nvPr>
+            <p:ph idx="1"/>
+          </p:nvPr>
+        </p:nvSpPr>
+        <p:spPr>
+          <a:xfrm>
+            <a:off x="838200" y="1825625"/>
+            <a:ext cx="10515600" cy="4516560"/>
+          </a:xfrm>
+        </p:spPr>
+        <p:txBody>
+          <a:bodyPr>
+            <a:normAutofit lnSpcReduction="10000"/>
+          </a:bodyPr>
+          <a:lstStyle/>
+          <a:p>
+            <a:r>
+              <a:rPr lang="en-US" dirty="0"/>
+              <a:t>Only 8 protocols can be expressed.</a:t>
+            </a:r>
+          </a:p>
+          <a:p>
+            <a:pPr lvl="1"/>
+            <a:r>
+              <a:rPr lang="en-US" dirty="0"/>
+              <a:t>The “0 Protocol” protocol is reserved: this is the protocol of </a:t>
+            </a:r>
+            <a:r>
+              <a:rPr lang="en-US" dirty="0" err="1"/>
+              <a:t>CK.AppIdentity.TransportLayer</a:t>
+            </a:r>
+            <a:r>
+              <a:rPr lang="en-US" dirty="0"/>
+              <a:t> itself that handles special messages used to negotiate, accept, reject incoming parties and outgoing connections.</a:t>
+            </a:r>
+          </a:p>
+          <a:p>
+            <a:pPr lvl="1"/>
+            <a:r>
+              <a:rPr lang="en-US" dirty="0"/>
+              <a:t>This lets 7 possible protocols. </a:t>
+            </a:r>
+          </a:p>
+          <a:p>
+            <a:pPr lvl="1"/>
+            <a:endParaRPr lang="en-US" dirty="0"/>
+          </a:p>
+          <a:p>
+            <a:r>
+              <a:rPr lang="en-US" dirty="0"/>
+              <a:t>This limit applies to a Remote party pair: </a:t>
+            </a:r>
+          </a:p>
+          <a:p>
+            <a:pPr lvl="1"/>
+            <a:r>
+              <a:rPr lang="en-US" dirty="0"/>
+              <a:t>There can be any number of possible protocols in an application</a:t>
+            </a:r>
+          </a:p>
+          <a:p>
+            <a:pPr lvl="1"/>
+            <a:r>
+              <a:rPr lang="en-US" dirty="0"/>
+              <a:t>2 parties that start to interact initially negotiate the ones they can and want to use. </a:t>
+            </a:r>
+          </a:p>
+          <a:p>
+            <a:r>
+              <a:rPr lang="en-US" dirty="0"/>
+              <a:t>Any Transport between 2 parties can simultaneously support up to 7 different protocols.</a:t>
+            </a:r>
+          </a:p>
+        </p:txBody>
+      </p:sp>
+    </p:spTree>
+    <p:extLst>
+      <p:ext uri="{BB962C8B-B14F-4D97-AF65-F5344CB8AC3E}">
+        <p14:creationId xmlns:p14="http://schemas.microsoft.com/office/powerpoint/2010/main" val="1820346205"/>
+      </p:ext>
+    </p:extLst>
+  </p:cSld>
+  <p:clrMapOvr>
+    <a:masterClrMapping/>
+  </p:clrMapOvr>
+</p:sld>
+</file>
+
+<file path=ppt/slides/slide31.xml><?xml version="1.0" encoding="utf-8"?>
+<p:sld xmlns:a="http://schemas.openxmlformats.org/drawingml/2006/main" xmlns:r="http://schemas.openxmlformats.org/officeDocument/2006/relationships" xmlns:p="http://schemas.openxmlformats.org/presentationml/2006/main">
+  <p:cSld>
+    <p:spTree>
+      <p:nvGrpSpPr>
+        <p:cNvPr id="1" name=""/>
+        <p:cNvGrpSpPr/>
+        <p:nvPr/>
+      </p:nvGrpSpPr>
+      <p:grpSpPr>
+        <a:xfrm>
+          <a:off x="0" y="0"/>
+          <a:ext cx="0" cy="0"/>
+          <a:chOff x="0" y="0"/>
+          <a:chExt cx="0" cy="0"/>
+        </a:xfrm>
+      </p:grpSpPr>
+      <p:sp>
+        <p:nvSpPr>
+          <p:cNvPr id="2" name="Title 1">
+            <a:extLst>
+              <a:ext uri="{FF2B5EF4-FFF2-40B4-BE49-F238E27FC236}">
+                <a16:creationId xmlns:a16="http://schemas.microsoft.com/office/drawing/2014/main" id="{7CF456EA-A507-E17F-1FF5-0DDC0C51BBFF}"/>
+              </a:ext>
+            </a:extLst>
+          </p:cNvPr>
+          <p:cNvSpPr>
+            <a:spLocks noGrp="1"/>
+          </p:cNvSpPr>
+          <p:nvPr>
+            <p:ph type="title"/>
+          </p:nvPr>
+        </p:nvSpPr>
+        <p:spPr/>
+        <p:txBody>
+          <a:bodyPr/>
+          <a:lstStyle/>
+          <a:p>
+            <a:r>
+              <a:rPr lang="en-US" dirty="0"/>
+              <a:t>Creating new messages</a:t>
+            </a:r>
+          </a:p>
+        </p:txBody>
+      </p:sp>
+      <p:sp>
+        <p:nvSpPr>
+          <p:cNvPr id="10" name="Content Placeholder 2">
+            <a:extLst>
+              <a:ext uri="{FF2B5EF4-FFF2-40B4-BE49-F238E27FC236}">
+                <a16:creationId xmlns:a16="http://schemas.microsoft.com/office/drawing/2014/main" id="{1CC84568-F688-2F94-8756-D5862C7EDE27}"/>
+              </a:ext>
+            </a:extLst>
+          </p:cNvPr>
+          <p:cNvSpPr txBox="1">
+            <a:spLocks/>
+          </p:cNvSpPr>
+          <p:nvPr/>
+        </p:nvSpPr>
+        <p:spPr>
+          <a:xfrm>
+            <a:off x="838200" y="1825625"/>
+            <a:ext cx="10515600" cy="4516560"/>
+          </a:xfrm>
+          <a:prstGeom prst="rect">
+            <a:avLst/>
+          </a:prstGeom>
+        </p:spPr>
+        <p:txBody>
+          <a:bodyPr vert="horz" lIns="91440" tIns="45720" rIns="91440" bIns="45720" rtlCol="0">
+            <a:normAutofit lnSpcReduction="10000"/>
+          </a:bodyPr>
+          <a:lstStyle>
+            <a:lvl1pPr marL="228600" indent="-228600" algn="l" defTabSz="914400" rtl="0" eaLnBrk="1" latinLnBrk="0" hangingPunct="1">
+              <a:lnSpc>
+                <a:spcPct val="90000"/>
+              </a:lnSpc>
+              <a:spcBef>
+                <a:spcPts val="1000"/>
+              </a:spcBef>
+              <a:buFont typeface="Arial" panose="020B0604020202020204" pitchFamily="34" charset="0"/>
+              <a:buChar char="•"/>
+              <a:defRPr sz="2800" kern="1200">
+                <a:solidFill>
+                  <a:schemeClr val="tx1"/>
+                </a:solidFill>
+                <a:latin typeface="+mn-lt"/>
+                <a:ea typeface="+mn-ea"/>
+                <a:cs typeface="+mn-cs"/>
+              </a:defRPr>
+            </a:lvl1pPr>
+            <a:lvl2pPr marL="685800" indent="-228600" algn="l" defTabSz="914400" rtl="0" eaLnBrk="1" latinLnBrk="0" hangingPunct="1">
+              <a:lnSpc>
+                <a:spcPct val="90000"/>
+              </a:lnSpc>
+              <a:spcBef>
+                <a:spcPts val="500"/>
+              </a:spcBef>
+              <a:buFont typeface="Arial" panose="020B0604020202020204" pitchFamily="34" charset="0"/>
+              <a:buChar char="•"/>
+              <a:defRPr sz="2400" kern="1200">
+                <a:solidFill>
+                  <a:schemeClr val="tx1"/>
+                </a:solidFill>
+                <a:latin typeface="+mn-lt"/>
+                <a:ea typeface="+mn-ea"/>
+                <a:cs typeface="+mn-cs"/>
+              </a:defRPr>
+            </a:lvl2pPr>
+            <a:lvl3pPr marL="1143000" indent="-228600" algn="l" defTabSz="914400" rtl="0" eaLnBrk="1" latinLnBrk="0" hangingPunct="1">
+              <a:lnSpc>
+                <a:spcPct val="90000"/>
+              </a:lnSpc>
+              <a:spcBef>
+                <a:spcPts val="500"/>
+              </a:spcBef>
+              <a:buFont typeface="Arial" panose="020B0604020202020204" pitchFamily="34" charset="0"/>
+              <a:buChar char="•"/>
+              <a:defRPr sz="2000" kern="1200">
+                <a:solidFill>
+                  <a:schemeClr val="tx1"/>
+                </a:solidFill>
+                <a:latin typeface="+mn-lt"/>
+                <a:ea typeface="+mn-ea"/>
+                <a:cs typeface="+mn-cs"/>
+              </a:defRPr>
+            </a:lvl3pPr>
+            <a:lvl4pPr marL="1600200" indent="-228600" algn="l" defTabSz="914400" rtl="0" eaLnBrk="1" latinLnBrk="0" hangingPunct="1">
+              <a:lnSpc>
+                <a:spcPct val="90000"/>
+              </a:lnSpc>
+              <a:spcBef>
+                <a:spcPts val="500"/>
+              </a:spcBef>
+              <a:buFont typeface="Arial" panose="020B0604020202020204" pitchFamily="34" charset="0"/>
+              <a:buChar char="•"/>
+              <a:defRPr sz="1800" kern="1200">
+                <a:solidFill>
+                  <a:schemeClr val="tx1"/>
+                </a:solidFill>
+                <a:latin typeface="+mn-lt"/>
+                <a:ea typeface="+mn-ea"/>
+                <a:cs typeface="+mn-cs"/>
+              </a:defRPr>
+            </a:lvl4pPr>
+            <a:lvl5pPr marL="2057400" indent="-228600" algn="l" defTabSz="914400" rtl="0" eaLnBrk="1" latinLnBrk="0" hangingPunct="1">
+              <a:lnSpc>
+                <a:spcPct val="90000"/>
+              </a:lnSpc>
+              <a:spcBef>
+                <a:spcPts val="500"/>
+              </a:spcBef>
+              <a:buFont typeface="Arial" panose="020B0604020202020204" pitchFamily="34" charset="0"/>
+              <a:buChar char="•"/>
+              <a:defRPr sz="1800" kern="1200">
+                <a:solidFill>
+                  <a:schemeClr val="tx1"/>
+                </a:solidFill>
+                <a:latin typeface="+mn-lt"/>
+                <a:ea typeface="+mn-ea"/>
+                <a:cs typeface="+mn-cs"/>
+              </a:defRPr>
+            </a:lvl5pPr>
+            <a:lvl6pPr marL="2514600" indent="-228600" algn="l" defTabSz="914400" rtl="0" eaLnBrk="1" latinLnBrk="0" hangingPunct="1">
+              <a:lnSpc>
+                <a:spcPct val="90000"/>
+              </a:lnSpc>
+              <a:spcBef>
+                <a:spcPts val="500"/>
+              </a:spcBef>
+              <a:buFont typeface="Arial" panose="020B0604020202020204" pitchFamily="34" charset="0"/>
+              <a:buChar char="•"/>
+              <a:defRPr sz="1800" kern="1200">
+                <a:solidFill>
+                  <a:schemeClr val="tx1"/>
+                </a:solidFill>
+                <a:latin typeface="+mn-lt"/>
+                <a:ea typeface="+mn-ea"/>
+                <a:cs typeface="+mn-cs"/>
+              </a:defRPr>
+            </a:lvl6pPr>
+            <a:lvl7pPr marL="2971800" indent="-228600" algn="l" defTabSz="914400" rtl="0" eaLnBrk="1" latinLnBrk="0" hangingPunct="1">
+              <a:lnSpc>
+                <a:spcPct val="90000"/>
+              </a:lnSpc>
+              <a:spcBef>
+                <a:spcPts val="500"/>
+              </a:spcBef>
+              <a:buFont typeface="Arial" panose="020B0604020202020204" pitchFamily="34" charset="0"/>
+              <a:buChar char="•"/>
+              <a:defRPr sz="1800" kern="1200">
+                <a:solidFill>
+                  <a:schemeClr val="tx1"/>
+                </a:solidFill>
+                <a:latin typeface="+mn-lt"/>
+                <a:ea typeface="+mn-ea"/>
+                <a:cs typeface="+mn-cs"/>
+              </a:defRPr>
+            </a:lvl7pPr>
+            <a:lvl8pPr marL="3429000" indent="-228600" algn="l" defTabSz="914400" rtl="0" eaLnBrk="1" latinLnBrk="0" hangingPunct="1">
+              <a:lnSpc>
+                <a:spcPct val="90000"/>
+              </a:lnSpc>
+              <a:spcBef>
+                <a:spcPts val="500"/>
+              </a:spcBef>
+              <a:buFont typeface="Arial" panose="020B0604020202020204" pitchFamily="34" charset="0"/>
+              <a:buChar char="•"/>
+              <a:defRPr sz="1800" kern="1200">
+                <a:solidFill>
+                  <a:schemeClr val="tx1"/>
+                </a:solidFill>
+                <a:latin typeface="+mn-lt"/>
+                <a:ea typeface="+mn-ea"/>
+                <a:cs typeface="+mn-cs"/>
+              </a:defRPr>
+            </a:lvl8pPr>
+            <a:lvl9pPr marL="3886200" indent="-228600" algn="l" defTabSz="914400" rtl="0" eaLnBrk="1" latinLnBrk="0" hangingPunct="1">
+              <a:lnSpc>
+                <a:spcPct val="90000"/>
+              </a:lnSpc>
+              <a:spcBef>
+                <a:spcPts val="500"/>
+              </a:spcBef>
+              <a:buFont typeface="Arial" panose="020B0604020202020204" pitchFamily="34" charset="0"/>
+              <a:buChar char="•"/>
+              <a:defRPr sz="1800" kern="1200">
+                <a:solidFill>
+                  <a:schemeClr val="tx1"/>
+                </a:solidFill>
+                <a:latin typeface="+mn-lt"/>
+                <a:ea typeface="+mn-ea"/>
+                <a:cs typeface="+mn-cs"/>
+              </a:defRPr>
+            </a:lvl9pPr>
+          </a:lstStyle>
+          <a:p>
+            <a:r>
+              <a:rPr lang="en-US" dirty="0"/>
+              <a:t>Only an </a:t>
+            </a:r>
+            <a:r>
+              <a:rPr lang="en-US" sz="2000" dirty="0" err="1">
+                <a:latin typeface="Consolas" panose="020B0609020204030204" pitchFamily="49" charset="0"/>
+                <a:cs typeface="Courier New" panose="02070309020205020404" pitchFamily="49" charset="0"/>
+              </a:rPr>
+              <a:t>OutgoingMessageFactory</a:t>
+            </a:r>
+            <a:r>
+              <a:rPr lang="en-US" dirty="0"/>
+              <a:t> can </a:t>
+            </a:r>
+            <a:br>
+              <a:rPr lang="en-US" dirty="0"/>
+            </a:br>
+            <a:r>
+              <a:rPr lang="en-US" dirty="0"/>
+              <a:t>create new messages:</a:t>
+            </a:r>
+          </a:p>
+          <a:p>
+            <a:endParaRPr lang="en-US" dirty="0"/>
+          </a:p>
+          <a:p>
+            <a:endParaRPr lang="en-US" dirty="0"/>
+          </a:p>
+          <a:p>
+            <a:endParaRPr lang="en-US" dirty="0"/>
+          </a:p>
+          <a:p>
+            <a:r>
+              <a:rPr lang="en-US" dirty="0"/>
+              <a:t>Messages must be disposed once done with them</a:t>
+            </a:r>
+          </a:p>
+          <a:p>
+            <a:pPr lvl="1"/>
+            <a:r>
+              <a:rPr lang="en-US" dirty="0"/>
+              <a:t>Allocated memory is reused.</a:t>
+            </a:r>
+          </a:p>
+          <a:p>
+            <a:r>
+              <a:rPr lang="en-US" dirty="0"/>
+              <a:t>Messages can be “Retained” when needed (reference counting)</a:t>
+            </a:r>
+          </a:p>
+          <a:p>
+            <a:r>
+              <a:rPr lang="en-US" dirty="0" err="1"/>
+              <a:t>CreateStatic</a:t>
+            </a:r>
+            <a:r>
+              <a:rPr lang="en-US" dirty="0"/>
+              <a:t> returns messages don’t need to be disposed.</a:t>
+            </a:r>
+          </a:p>
+          <a:p>
+            <a:pPr lvl="1"/>
+            <a:r>
+              <a:rPr lang="en-US" dirty="0"/>
+              <a:t>Dispose()/Retain() calls are ignored.</a:t>
+            </a:r>
+          </a:p>
+        </p:txBody>
+      </p:sp>
+      <p:sp>
+        <p:nvSpPr>
+          <p:cNvPr id="12" name="TextBox 11">
+            <a:extLst>
+              <a:ext uri="{FF2B5EF4-FFF2-40B4-BE49-F238E27FC236}">
+                <a16:creationId xmlns:a16="http://schemas.microsoft.com/office/drawing/2014/main" id="{B101A3D9-3364-B380-BE27-B3376CE6CD06}"/>
+              </a:ext>
+            </a:extLst>
+          </p:cNvPr>
+          <p:cNvSpPr txBox="1"/>
+          <p:nvPr/>
+        </p:nvSpPr>
+        <p:spPr>
+          <a:xfrm>
+            <a:off x="1078524" y="2715481"/>
+            <a:ext cx="9448800" cy="1477328"/>
+          </a:xfrm>
+          <a:prstGeom prst="rect">
+            <a:avLst/>
+          </a:prstGeom>
+          <a:noFill/>
+        </p:spPr>
+        <p:txBody>
+          <a:bodyPr wrap="square">
+            <a:spAutoFit/>
+          </a:bodyPr>
+          <a:lstStyle/>
+          <a:p>
+            <a:r>
+              <a:rPr lang="en-US" sz="1800" dirty="0">
+                <a:solidFill>
+                  <a:srgbClr val="0000FF"/>
+                </a:solidFill>
+                <a:latin typeface="Consolas" panose="020B0609020204030204" pitchFamily="49" charset="0"/>
+              </a:rPr>
+              <a:t>public</a:t>
+            </a:r>
+            <a:r>
+              <a:rPr lang="en-US" sz="1800" dirty="0">
+                <a:solidFill>
+                  <a:srgbClr val="000000"/>
+                </a:solidFill>
+                <a:latin typeface="Consolas" panose="020B0609020204030204" pitchFamily="49" charset="0"/>
+              </a:rPr>
+              <a:t> </a:t>
+            </a:r>
+            <a:r>
+              <a:rPr lang="en-US" sz="1800" dirty="0" err="1">
+                <a:solidFill>
+                  <a:srgbClr val="000000"/>
+                </a:solidFill>
+                <a:latin typeface="Consolas" panose="020B0609020204030204" pitchFamily="49" charset="0"/>
+              </a:rPr>
+              <a:t>TransportMessage</a:t>
+            </a:r>
+            <a:r>
+              <a:rPr lang="en-US" sz="1800" dirty="0">
+                <a:solidFill>
+                  <a:srgbClr val="000000"/>
+                </a:solidFill>
+                <a:latin typeface="Consolas" panose="020B0609020204030204" pitchFamily="49" charset="0"/>
+              </a:rPr>
+              <a:t> Create( Action&lt;</a:t>
+            </a:r>
+            <a:r>
+              <a:rPr lang="en-US" sz="1800" dirty="0" err="1">
+                <a:solidFill>
+                  <a:srgbClr val="000000"/>
+                </a:solidFill>
+                <a:latin typeface="Consolas" panose="020B0609020204030204" pitchFamily="49" charset="0"/>
+              </a:rPr>
+              <a:t>IBufferWriter</a:t>
+            </a:r>
+            <a:r>
+              <a:rPr lang="en-US" sz="1800" dirty="0">
+                <a:solidFill>
+                  <a:srgbClr val="000000"/>
+                </a:solidFill>
+                <a:latin typeface="Consolas" panose="020B0609020204030204" pitchFamily="49" charset="0"/>
+              </a:rPr>
+              <a:t>&lt;</a:t>
+            </a:r>
+            <a:r>
+              <a:rPr lang="en-US" sz="1800" dirty="0">
+                <a:solidFill>
+                  <a:srgbClr val="0000FF"/>
+                </a:solidFill>
+                <a:latin typeface="Consolas" panose="020B0609020204030204" pitchFamily="49" charset="0"/>
+              </a:rPr>
+              <a:t>byte</a:t>
+            </a:r>
+            <a:r>
+              <a:rPr lang="en-US" sz="1800" dirty="0">
+                <a:solidFill>
+                  <a:srgbClr val="000000"/>
+                </a:solidFill>
+                <a:latin typeface="Consolas" panose="020B0609020204030204" pitchFamily="49" charset="0"/>
+              </a:rPr>
+              <a:t>&gt;&gt; writer,</a:t>
+            </a:r>
+          </a:p>
+          <a:p>
+            <a:r>
+              <a:rPr lang="en-US" sz="1800" dirty="0">
+                <a:solidFill>
+                  <a:srgbClr val="000000"/>
+                </a:solidFill>
+                <a:latin typeface="Consolas" panose="020B0609020204030204" pitchFamily="49" charset="0"/>
+              </a:rPr>
+              <a:t>                                </a:t>
+            </a:r>
+            <a:r>
+              <a:rPr lang="en-US" sz="1800" dirty="0">
+                <a:solidFill>
+                  <a:srgbClr val="0000FF"/>
+                </a:solidFill>
+                <a:latin typeface="Consolas" panose="020B0609020204030204" pitchFamily="49" charset="0"/>
+              </a:rPr>
+              <a:t>bool</a:t>
+            </a:r>
+            <a:r>
+              <a:rPr lang="en-US" sz="1800" dirty="0">
+                <a:solidFill>
+                  <a:srgbClr val="000000"/>
+                </a:solidFill>
+                <a:latin typeface="Consolas" panose="020B0609020204030204" pitchFamily="49" charset="0"/>
+              </a:rPr>
+              <a:t> </a:t>
+            </a:r>
+            <a:r>
+              <a:rPr lang="en-US" sz="1800" dirty="0" err="1">
+                <a:solidFill>
+                  <a:srgbClr val="000000"/>
+                </a:solidFill>
+                <a:latin typeface="Consolas" panose="020B0609020204030204" pitchFamily="49" charset="0"/>
+              </a:rPr>
+              <a:t>isControl</a:t>
+            </a:r>
+            <a:r>
+              <a:rPr lang="en-US" sz="1800" dirty="0">
+                <a:solidFill>
+                  <a:srgbClr val="000000"/>
+                </a:solidFill>
+                <a:latin typeface="Consolas" panose="020B0609020204030204" pitchFamily="49" charset="0"/>
+              </a:rPr>
+              <a:t> = </a:t>
+            </a:r>
+            <a:r>
+              <a:rPr lang="en-US" sz="1800" dirty="0">
+                <a:solidFill>
+                  <a:srgbClr val="0000FF"/>
+                </a:solidFill>
+                <a:latin typeface="Consolas" panose="020B0609020204030204" pitchFamily="49" charset="0"/>
+              </a:rPr>
+              <a:t>false </a:t>
+            </a:r>
+            <a:r>
+              <a:rPr lang="en-US" sz="1800" dirty="0">
+                <a:solidFill>
+                  <a:srgbClr val="000000"/>
+                </a:solidFill>
+                <a:latin typeface="Consolas" panose="020B0609020204030204" pitchFamily="49" charset="0"/>
+              </a:rPr>
+              <a:t>);</a:t>
+            </a:r>
+          </a:p>
+          <a:p>
+            <a:r>
+              <a:rPr lang="en-US" sz="1800" dirty="0">
+                <a:solidFill>
+                  <a:srgbClr val="0000FF"/>
+                </a:solidFill>
+                <a:latin typeface="Consolas" panose="020B0609020204030204" pitchFamily="49" charset="0"/>
+              </a:rPr>
+              <a:t>public</a:t>
+            </a:r>
+            <a:r>
+              <a:rPr lang="en-US" sz="1800" dirty="0">
+                <a:solidFill>
+                  <a:srgbClr val="000000"/>
+                </a:solidFill>
+                <a:latin typeface="Consolas" panose="020B0609020204030204" pitchFamily="49" charset="0"/>
+              </a:rPr>
+              <a:t> </a:t>
+            </a:r>
+            <a:r>
+              <a:rPr lang="en-US" sz="1800" dirty="0" err="1">
+                <a:solidFill>
+                  <a:srgbClr val="000000"/>
+                </a:solidFill>
+                <a:latin typeface="Consolas" panose="020B0609020204030204" pitchFamily="49" charset="0"/>
+              </a:rPr>
+              <a:t>TransportMessage</a:t>
+            </a:r>
+            <a:r>
+              <a:rPr lang="en-US" sz="1800" dirty="0">
+                <a:solidFill>
+                  <a:srgbClr val="000000"/>
+                </a:solidFill>
+                <a:latin typeface="Consolas" panose="020B0609020204030204" pitchFamily="49" charset="0"/>
+              </a:rPr>
+              <a:t> Create( Action&lt;</a:t>
+            </a:r>
+            <a:r>
+              <a:rPr lang="en-US" sz="1800" dirty="0" err="1">
+                <a:solidFill>
+                  <a:srgbClr val="000000"/>
+                </a:solidFill>
+                <a:latin typeface="Consolas" panose="020B0609020204030204" pitchFamily="49" charset="0"/>
+              </a:rPr>
+              <a:t>MutableSequence</a:t>
+            </a:r>
+            <a:r>
+              <a:rPr lang="en-US" sz="1800" dirty="0">
+                <a:solidFill>
+                  <a:srgbClr val="000000"/>
+                </a:solidFill>
+                <a:latin typeface="Consolas" panose="020B0609020204030204" pitchFamily="49" charset="0"/>
+              </a:rPr>
+              <a:t>&lt;</a:t>
+            </a:r>
+            <a:r>
+              <a:rPr lang="en-US" sz="1800" dirty="0">
+                <a:solidFill>
+                  <a:srgbClr val="0000FF"/>
+                </a:solidFill>
+                <a:latin typeface="Consolas" panose="020B0609020204030204" pitchFamily="49" charset="0"/>
+              </a:rPr>
+              <a:t>byte</a:t>
+            </a:r>
+            <a:r>
+              <a:rPr lang="en-US" sz="1800" dirty="0">
+                <a:solidFill>
+                  <a:srgbClr val="000000"/>
+                </a:solidFill>
+                <a:latin typeface="Consolas" panose="020B0609020204030204" pitchFamily="49" charset="0"/>
+              </a:rPr>
+              <a:t>&gt;&gt; writer,</a:t>
+            </a:r>
+          </a:p>
+          <a:p>
+            <a:r>
+              <a:rPr lang="en-US" sz="1800" dirty="0">
+                <a:solidFill>
+                  <a:srgbClr val="000000"/>
+                </a:solidFill>
+                <a:latin typeface="Consolas" panose="020B0609020204030204" pitchFamily="49" charset="0"/>
+              </a:rPr>
+              <a:t>                                </a:t>
+            </a:r>
+            <a:r>
+              <a:rPr lang="en-US" sz="1800" dirty="0">
+                <a:solidFill>
+                  <a:srgbClr val="0000FF"/>
+                </a:solidFill>
+                <a:latin typeface="Consolas" panose="020B0609020204030204" pitchFamily="49" charset="0"/>
+              </a:rPr>
+              <a:t>bool</a:t>
+            </a:r>
+            <a:r>
+              <a:rPr lang="en-US" sz="1800" dirty="0">
+                <a:solidFill>
+                  <a:srgbClr val="000000"/>
+                </a:solidFill>
+                <a:latin typeface="Consolas" panose="020B0609020204030204" pitchFamily="49" charset="0"/>
+              </a:rPr>
+              <a:t> </a:t>
+            </a:r>
+            <a:r>
+              <a:rPr lang="en-US" sz="1800" dirty="0" err="1">
+                <a:solidFill>
+                  <a:srgbClr val="000000"/>
+                </a:solidFill>
+                <a:latin typeface="Consolas" panose="020B0609020204030204" pitchFamily="49" charset="0"/>
+              </a:rPr>
+              <a:t>isControl</a:t>
+            </a:r>
+            <a:r>
+              <a:rPr lang="en-US" sz="1800" dirty="0">
+                <a:solidFill>
+                  <a:srgbClr val="000000"/>
+                </a:solidFill>
+                <a:latin typeface="Consolas" panose="020B0609020204030204" pitchFamily="49" charset="0"/>
+              </a:rPr>
+              <a:t> = </a:t>
+            </a:r>
+            <a:r>
+              <a:rPr lang="en-US" sz="1800" dirty="0">
+                <a:solidFill>
+                  <a:srgbClr val="0000FF"/>
+                </a:solidFill>
+                <a:latin typeface="Consolas" panose="020B0609020204030204" pitchFamily="49" charset="0"/>
+              </a:rPr>
+              <a:t>false </a:t>
+            </a:r>
+            <a:r>
+              <a:rPr lang="en-US" sz="1800" dirty="0">
+                <a:solidFill>
+                  <a:srgbClr val="000000"/>
+                </a:solidFill>
+                <a:latin typeface="Consolas" panose="020B0609020204030204" pitchFamily="49" charset="0"/>
+              </a:rPr>
+              <a:t>);</a:t>
+            </a:r>
+          </a:p>
+          <a:p>
+            <a:endParaRPr lang="en-US" sz="1800" dirty="0">
+              <a:solidFill>
+                <a:srgbClr val="000000"/>
+              </a:solidFill>
+              <a:latin typeface="Consolas" panose="020B0609020204030204" pitchFamily="49" charset="0"/>
+            </a:endParaRPr>
+          </a:p>
+        </p:txBody>
+      </p:sp>
+      <p:pic>
+        <p:nvPicPr>
+          <p:cNvPr id="16" name="Content Placeholder 15" descr="Graphical user interface, text, application, chat or text message&#10;&#10;Description automatically generated">
+            <a:extLst>
+              <a:ext uri="{FF2B5EF4-FFF2-40B4-BE49-F238E27FC236}">
+                <a16:creationId xmlns:a16="http://schemas.microsoft.com/office/drawing/2014/main" id="{B9C368B7-B971-1A32-863D-EFEC2CD1A66D}"/>
+              </a:ext>
+            </a:extLst>
+          </p:cNvPr>
+          <p:cNvPicPr>
+            <a:picLocks noGrp="1" noChangeAspect="1"/>
+          </p:cNvPicPr>
+          <p:nvPr>
+            <p:ph idx="1"/>
+          </p:nvPr>
+        </p:nvPicPr>
+        <p:blipFill>
+          <a:blip r:embed="rId2">
+            <a:extLst>
+              <a:ext uri="{28A0092B-C50C-407E-A947-70E740481C1C}">
+                <a14:useLocalDpi xmlns:a14="http://schemas.microsoft.com/office/drawing/2010/main" val="0"/>
+              </a:ext>
+            </a:extLst>
+          </a:blip>
+          <a:stretch>
+            <a:fillRect/>
+          </a:stretch>
+        </p:blipFill>
+        <p:spPr>
+          <a:xfrm>
+            <a:off x="6365630" y="515815"/>
+            <a:ext cx="5716130" cy="2047266"/>
+          </a:xfrm>
+        </p:spPr>
+      </p:pic>
+      <p:sp>
+        <p:nvSpPr>
+          <p:cNvPr id="3" name="Star: 6 Points 2">
+            <a:extLst>
+              <a:ext uri="{FF2B5EF4-FFF2-40B4-BE49-F238E27FC236}">
+                <a16:creationId xmlns:a16="http://schemas.microsoft.com/office/drawing/2014/main" id="{D5A5D772-160E-343F-FF5F-6DE7C09F6603}"/>
+              </a:ext>
+            </a:extLst>
+          </p:cNvPr>
+          <p:cNvSpPr/>
+          <p:nvPr/>
+        </p:nvSpPr>
+        <p:spPr>
+          <a:xfrm>
+            <a:off x="2051701" y="60753"/>
+            <a:ext cx="1645920" cy="1473200"/>
+          </a:xfrm>
+          <a:prstGeom prst="star6">
+            <a:avLst/>
+          </a:prstGeom>
+        </p:spPr>
+        <p:style>
+          <a:lnRef idx="2">
+            <a:schemeClr val="accent1">
+              <a:shade val="50000"/>
+            </a:schemeClr>
+          </a:lnRef>
+          <a:fillRef idx="1">
+            <a:schemeClr val="accent1"/>
+          </a:fillRef>
+          <a:effectRef idx="0">
+            <a:schemeClr val="accent1"/>
+          </a:effectRef>
+          <a:fontRef idx="minor">
+            <a:schemeClr val="lt1"/>
+          </a:fontRef>
+        </p:style>
+        <p:txBody>
+          <a:bodyPr rtlCol="0" anchor="ctr"/>
+          <a:lstStyle/>
+          <a:p>
+            <a:pPr algn="ctr"/>
+            <a:r>
+              <a:rPr lang="en-US" dirty="0"/>
+              <a:t>Update Needed</a:t>
+            </a:r>
+          </a:p>
+        </p:txBody>
+      </p:sp>
+    </p:spTree>
+    <p:extLst>
+      <p:ext uri="{BB962C8B-B14F-4D97-AF65-F5344CB8AC3E}">
+        <p14:creationId xmlns:p14="http://schemas.microsoft.com/office/powerpoint/2010/main" val="3573920614"/>
+      </p:ext>
+    </p:extLst>
+  </p:cSld>
+  <p:clrMapOvr>
+    <a:masterClrMapping/>
+  </p:clrMapOvr>
+</p:sld>
+</file>
+
+<file path=ppt/slides/slide32.xml><?xml version="1.0" encoding="utf-8"?>
+<p:sld xmlns:a="http://schemas.openxmlformats.org/drawingml/2006/main" xmlns:r="http://schemas.openxmlformats.org/officeDocument/2006/relationships" xmlns:p="http://schemas.openxmlformats.org/presentationml/2006/main">
+  <p:cSld>
+    <p:spTree>
+      <p:nvGrpSpPr>
+        <p:cNvPr id="1" name=""/>
+        <p:cNvGrpSpPr/>
+        <p:nvPr/>
+      </p:nvGrpSpPr>
+      <p:grpSpPr>
+        <a:xfrm>
+          <a:off x="0" y="0"/>
+          <a:ext cx="0" cy="0"/>
+          <a:chOff x="0" y="0"/>
+          <a:chExt cx="0" cy="0"/>
+        </a:xfrm>
+      </p:grpSpPr>
+      <p:sp>
+        <p:nvSpPr>
           <p:cNvPr id="8" name="Content Placeholder 2">
             <a:extLst>
               <a:ext uri="{FF2B5EF4-FFF2-40B4-BE49-F238E27FC236}">
@@ -15686,6 +17274,55 @@
           </a:p>
         </p:txBody>
       </p:sp>
+      <p:sp>
+        <p:nvSpPr>
+          <p:cNvPr id="3" name="Star: 6 Points 2">
+            <a:extLst>
+              <a:ext uri="{FF2B5EF4-FFF2-40B4-BE49-F238E27FC236}">
+                <a16:creationId xmlns:a16="http://schemas.microsoft.com/office/drawing/2014/main" id="{1967DF75-EF55-D3BE-2790-7398E3AE6458}"/>
+              </a:ext>
+            </a:extLst>
+          </p:cNvPr>
+          <p:cNvSpPr/>
+          <p:nvPr/>
+        </p:nvSpPr>
+        <p:spPr>
+          <a:xfrm>
+            <a:off x="7353300" y="146641"/>
+            <a:ext cx="1645920" cy="1473200"/>
+          </a:xfrm>
+          <a:prstGeom prst="star6">
+            <a:avLst/>
+          </a:prstGeom>
+        </p:spPr>
+        <p:style>
+          <a:lnRef idx="2">
+            <a:schemeClr val="accent1">
+              <a:shade val="50000"/>
+            </a:schemeClr>
+          </a:lnRef>
+          <a:fillRef idx="1">
+            <a:schemeClr val="accent1"/>
+          </a:fillRef>
+          <a:effectRef idx="0">
+            <a:schemeClr val="accent1"/>
+          </a:effectRef>
+          <a:fontRef idx="minor">
+            <a:schemeClr val="lt1"/>
+          </a:fontRef>
+        </p:style>
+        <p:txBody>
+          <a:bodyPr rtlCol="0" anchor="ctr"/>
+          <a:lstStyle/>
+          <a:p>
+            <a:pPr algn="ctr"/>
+            <a:r>
+              <a:rPr lang="en-US" dirty="0"/>
+              <a:t>Update Needed</a:t>
+            </a:r>
+          </a:p>
+        </p:txBody>
+      </p:sp>
     </p:spTree>
     <p:extLst>
       <p:ext uri="{BB962C8B-B14F-4D97-AF65-F5344CB8AC3E}">
@@ -15699,7 +17336,7 @@
 </p:sld>
 </file>
 
-<file path=ppt/slides/slide31.xml><?xml version="1.0" encoding="utf-8"?>
+<file path=ppt/slides/slide33.xml><?xml version="1.0" encoding="utf-8"?>
 <p:sld xmlns:a="http://schemas.openxmlformats.org/drawingml/2006/main" xmlns:r="http://schemas.openxmlformats.org/officeDocument/2006/relationships" xmlns:p="http://schemas.openxmlformats.org/presentationml/2006/main">
   <p:cSld>
     <p:bg>
@@ -15956,7 +17593,7 @@
 </p:sld>
 </file>
 
-<file path=ppt/slides/slide32.xml><?xml version="1.0" encoding="utf-8"?>
+<file path=ppt/slides/slide34.xml><?xml version="1.0" encoding="utf-8"?>
 <p:sld xmlns:a="http://schemas.openxmlformats.org/drawingml/2006/main" xmlns:r="http://schemas.openxmlformats.org/officeDocument/2006/relationships" xmlns:p="http://schemas.openxmlformats.org/presentationml/2006/main">
   <p:cSld>
     <p:spTree>
@@ -16290,7 +17927,7 @@
 </p:sld>
 </file>
 
-<file path=ppt/slides/slide33.xml><?xml version="1.0" encoding="utf-8"?>
+<file path=ppt/slides/slide35.xml><?xml version="1.0" encoding="utf-8"?>
 <p:sld xmlns:a="http://schemas.openxmlformats.org/drawingml/2006/main" xmlns:r="http://schemas.openxmlformats.org/officeDocument/2006/relationships" xmlns:p="http://schemas.openxmlformats.org/presentationml/2006/main">
   <p:cSld>
     <p:spTree>
@@ -16521,7 +18158,7 @@
 </p:sld>
 </file>
 
-<file path=ppt/slides/slide34.xml><?xml version="1.0" encoding="utf-8"?>
+<file path=ppt/slides/slide36.xml><?xml version="1.0" encoding="utf-8"?>
 <p:sld xmlns:a="http://schemas.openxmlformats.org/drawingml/2006/main" xmlns:r="http://schemas.openxmlformats.org/officeDocument/2006/relationships" xmlns:p="http://schemas.openxmlformats.org/presentationml/2006/main">
   <p:cSld>
     <p:spTree>
@@ -16768,7 +18405,7 @@
 </p:sld>
 </file>
 
-<file path=ppt/slides/slide35.xml><?xml version="1.0" encoding="utf-8"?>
+<file path=ppt/slides/slide37.xml><?xml version="1.0" encoding="utf-8"?>
 <p:sld xmlns:a="http://schemas.openxmlformats.org/drawingml/2006/main" xmlns:r="http://schemas.openxmlformats.org/officeDocument/2006/relationships" xmlns:p="http://schemas.openxmlformats.org/presentationml/2006/main">
   <p:cSld>
     <p:spTree>
@@ -17311,7 +18948,7 @@
 </p:sld>
 </file>
 
-<file path=ppt/slides/slide36.xml><?xml version="1.0" encoding="utf-8"?>
+<file path=ppt/slides/slide38.xml><?xml version="1.0" encoding="utf-8"?>
 <p:sld xmlns:a="http://schemas.openxmlformats.org/drawingml/2006/main" xmlns:r="http://schemas.openxmlformats.org/officeDocument/2006/relationships" xmlns:p="http://schemas.openxmlformats.org/presentationml/2006/main">
   <p:cSld>
     <p:spTree>
@@ -17513,7 +19150,7 @@
 </p:sld>
 </file>
 
-<file path=ppt/slides/slide37.xml><?xml version="1.0" encoding="utf-8"?>
+<file path=ppt/slides/slide39.xml><?xml version="1.0" encoding="utf-8"?>
 <p:sld xmlns:a="http://schemas.openxmlformats.org/drawingml/2006/main" xmlns:r="http://schemas.openxmlformats.org/officeDocument/2006/relationships" xmlns:p="http://schemas.openxmlformats.org/presentationml/2006/main">
   <p:cSld>
     <p:spTree>
@@ -17891,7 +19528,7 @@
         <p:spPr>
           <a:xfrm>
             <a:off x="838200" y="4713402"/>
-            <a:ext cx="10515600" cy="1200329"/>
+            <a:ext cx="10515600" cy="1607885"/>
           </a:xfrm>
           <a:prstGeom prst="rect">
             <a:avLst/>
@@ -17899,7 +19536,7 @@
         </p:spPr>
         <p:txBody>
           <a:bodyPr vert="horz" lIns="91440" tIns="45720" rIns="91440" bIns="45720" rtlCol="0">
-            <a:normAutofit fontScale="62500" lnSpcReduction="20000"/>
+            <a:normAutofit fontScale="92500" lnSpcReduction="20000"/>
           </a:bodyPr>
           <a:lstStyle>
             <a:lvl1pPr marL="228600" indent="-228600">
@@ -18489,7 +20126,7 @@
                 <a:latin typeface="Courier New" panose="02070309020205020404" pitchFamily="49" charset="0"/>
                 <a:cs typeface="Courier New" panose="02070309020205020404" pitchFamily="49" charset="0"/>
               </a:rPr>
-              <a:t>": "Production",</a:t>
+              <a:t>": "#Production",</a:t>
             </a:r>
           </a:p>
           <a:p>
@@ -18658,7 +20295,7 @@
         <p:spPr>
           <a:xfrm>
             <a:off x="5184742" y="2924742"/>
-            <a:ext cx="5857974" cy="2033758"/>
+            <a:ext cx="5857974" cy="2730624"/>
           </a:xfrm>
           <a:prstGeom prst="rect">
             <a:avLst/>
@@ -18666,7 +20303,7 @@
         </p:spPr>
         <p:txBody>
           <a:bodyPr vert="horz" lIns="91440" tIns="45720" rIns="91440" bIns="45720" rtlCol="0">
-            <a:normAutofit fontScale="85000" lnSpcReduction="10000"/>
+            <a:normAutofit fontScale="92500" lnSpcReduction="20000"/>
           </a:bodyPr>
           <a:lstStyle>
             <a:lvl1pPr marL="228600" indent="-228600">
@@ -18821,7 +20458,10 @@
             </a:r>
           </a:p>
           <a:p>
-            <a:endParaRPr lang="en-US" sz="2400" dirty="0"/>
+            <a:r>
+              <a:rPr lang="en-US" sz="2400" dirty="0"/>
+              <a:t>Environment names start with a #.</a:t>
+            </a:r>
           </a:p>
         </p:txBody>
       </p:sp>
@@ -18969,7 +20609,7 @@
             </a:r>
             <a:r>
               <a:rPr lang="en-US" dirty="0"/>
-              <a:t>/Production/</a:t>
+              <a:t>/</a:t>
             </a:r>
             <a:r>
               <a:rPr lang="en-US" dirty="0" err="1"/>
@@ -19085,7 +20725,7 @@
                 <a:latin typeface="Courier New" panose="02070309020205020404" pitchFamily="49" charset="0"/>
                 <a:cs typeface="Courier New" panose="02070309020205020404" pitchFamily="49" charset="0"/>
               </a:rPr>
-              <a:t>": "Production",</a:t>
+              <a:t>": "#Production",</a:t>
             </a:r>
           </a:p>
           <a:p>
@@ -19427,7 +21067,7 @@
             </a:r>
             <a:r>
               <a:rPr lang="en-US" dirty="0"/>
-              <a:t> (that defaults to “Development”)</a:t>
+              <a:t> (that defaults to “#Development”)</a:t>
             </a:r>
           </a:p>
           <a:p>

--- a/Doc/CK-AppIdentity.pptx
+++ b/Doc/CK-AppIdentity.pptx
@@ -5,7 +5,7 @@
     <p:sldMasterId id="2147483648" r:id="rId1"/>
   </p:sldMasterIdLst>
   <p:notesMasterIdLst>
-    <p:notesMasterId r:id="rId46"/>
+    <p:notesMasterId r:id="rId47"/>
   </p:notesMasterIdLst>
   <p:sldIdLst>
     <p:sldId id="256" r:id="rId2"/>
@@ -27,31 +27,32 @@
     <p:sldId id="303" r:id="rId18"/>
     <p:sldId id="274" r:id="rId19"/>
     <p:sldId id="275" r:id="rId20"/>
-    <p:sldId id="276" r:id="rId21"/>
-    <p:sldId id="277" r:id="rId22"/>
-    <p:sldId id="278" r:id="rId23"/>
-    <p:sldId id="279" r:id="rId24"/>
-    <p:sldId id="280" r:id="rId25"/>
-    <p:sldId id="282" r:id="rId26"/>
-    <p:sldId id="281" r:id="rId27"/>
-    <p:sldId id="283" r:id="rId28"/>
-    <p:sldId id="284" r:id="rId29"/>
-    <p:sldId id="285" r:id="rId30"/>
-    <p:sldId id="286" r:id="rId31"/>
-    <p:sldId id="287" r:id="rId32"/>
-    <p:sldId id="288" r:id="rId33"/>
-    <p:sldId id="289" r:id="rId34"/>
-    <p:sldId id="290" r:id="rId35"/>
-    <p:sldId id="297" r:id="rId36"/>
-    <p:sldId id="298" r:id="rId37"/>
-    <p:sldId id="299" r:id="rId38"/>
-    <p:sldId id="300" r:id="rId39"/>
-    <p:sldId id="301" r:id="rId40"/>
-    <p:sldId id="302" r:id="rId41"/>
-    <p:sldId id="291" r:id="rId42"/>
-    <p:sldId id="292" r:id="rId43"/>
-    <p:sldId id="294" r:id="rId44"/>
-    <p:sldId id="293" r:id="rId45"/>
+    <p:sldId id="304" r:id="rId21"/>
+    <p:sldId id="276" r:id="rId22"/>
+    <p:sldId id="277" r:id="rId23"/>
+    <p:sldId id="278" r:id="rId24"/>
+    <p:sldId id="279" r:id="rId25"/>
+    <p:sldId id="280" r:id="rId26"/>
+    <p:sldId id="282" r:id="rId27"/>
+    <p:sldId id="281" r:id="rId28"/>
+    <p:sldId id="283" r:id="rId29"/>
+    <p:sldId id="284" r:id="rId30"/>
+    <p:sldId id="285" r:id="rId31"/>
+    <p:sldId id="286" r:id="rId32"/>
+    <p:sldId id="287" r:id="rId33"/>
+    <p:sldId id="288" r:id="rId34"/>
+    <p:sldId id="289" r:id="rId35"/>
+    <p:sldId id="290" r:id="rId36"/>
+    <p:sldId id="297" r:id="rId37"/>
+    <p:sldId id="298" r:id="rId38"/>
+    <p:sldId id="299" r:id="rId39"/>
+    <p:sldId id="300" r:id="rId40"/>
+    <p:sldId id="301" r:id="rId41"/>
+    <p:sldId id="302" r:id="rId42"/>
+    <p:sldId id="291" r:id="rId43"/>
+    <p:sldId id="292" r:id="rId44"/>
+    <p:sldId id="294" r:id="rId45"/>
+    <p:sldId id="293" r:id="rId46"/>
   </p:sldIdLst>
   <p:sldSz cx="12192000" cy="6858000"/>
   <p:notesSz cx="6858000" cy="9144000"/>
@@ -770,7 +771,7 @@
           <a:p>
             <a:fld id="{E05EDB92-2FE2-4164-AA27-D03258A20DF4}" type="slidenum">
               <a:rPr lang="en-US" smtClean="0"/>
-              <a:t>21</a:t>
+              <a:t>22</a:t>
             </a:fld>
             <a:endParaRPr lang="en-US"/>
           </a:p>
@@ -854,7 +855,7 @@
           <a:p>
             <a:fld id="{E05EDB92-2FE2-4164-AA27-D03258A20DF4}" type="slidenum">
               <a:rPr lang="en-US" smtClean="0"/>
-              <a:t>22</a:t>
+              <a:t>23</a:t>
             </a:fld>
             <a:endParaRPr lang="en-US"/>
           </a:p>
@@ -952,7 +953,7 @@
           <a:p>
             <a:fld id="{E05EDB92-2FE2-4164-AA27-D03258A20DF4}" type="slidenum">
               <a:rPr lang="en-US" smtClean="0"/>
-              <a:t>25</a:t>
+              <a:t>26</a:t>
             </a:fld>
             <a:endParaRPr lang="en-US"/>
           </a:p>
@@ -1058,7 +1059,7 @@
           <a:p>
             <a:fld id="{E05EDB92-2FE2-4164-AA27-D03258A20DF4}" type="slidenum">
               <a:rPr lang="en-US" smtClean="0"/>
-              <a:t>27</a:t>
+              <a:t>28</a:t>
             </a:fld>
             <a:endParaRPr lang="en-US"/>
           </a:p>
@@ -1523,7 +1524,7 @@
           <a:p>
             <a:fld id="{E05EDB92-2FE2-4164-AA27-D03258A20DF4}" type="slidenum">
               <a:rPr lang="en-US" smtClean="0"/>
-              <a:t>28</a:t>
+              <a:t>29</a:t>
             </a:fld>
             <a:endParaRPr lang="en-US"/>
           </a:p>
@@ -1728,7 +1729,7 @@
           <a:p>
             <a:fld id="{E05EDB92-2FE2-4164-AA27-D03258A20DF4}" type="slidenum">
               <a:rPr lang="en-US" smtClean="0"/>
-              <a:t>29</a:t>
+              <a:t>30</a:t>
             </a:fld>
             <a:endParaRPr lang="en-US"/>
           </a:p>
@@ -1812,7 +1813,7 @@
           <a:p>
             <a:fld id="{E05EDB92-2FE2-4164-AA27-D03258A20DF4}" type="slidenum">
               <a:rPr lang="en-US" smtClean="0"/>
-              <a:t>31</a:t>
+              <a:t>32</a:t>
             </a:fld>
             <a:endParaRPr lang="en-US"/>
           </a:p>
@@ -1896,7 +1897,7 @@
           <a:p>
             <a:fld id="{E05EDB92-2FE2-4164-AA27-D03258A20DF4}" type="slidenum">
               <a:rPr lang="en-US" smtClean="0"/>
-              <a:t>32</a:t>
+              <a:t>33</a:t>
             </a:fld>
             <a:endParaRPr lang="en-US"/>
           </a:p>
@@ -7256,7 +7257,7 @@
             </a:r>
             <a:r>
               <a:rPr lang="en-US" dirty="0"/>
-              <a:t>"</a:t>
+              <a:t>",</a:t>
             </a:r>
           </a:p>
           <a:p>
@@ -7873,8 +7874,8 @@
         </p:nvSpPr>
         <p:spPr>
           <a:xfrm>
-            <a:off x="654838" y="1690688"/>
-            <a:ext cx="4100042" cy="3108543"/>
+            <a:off x="654837" y="1690688"/>
+            <a:ext cx="5347929" cy="2462213"/>
           </a:xfrm>
           <a:prstGeom prst="rect">
             <a:avLst/>
@@ -7985,7 +7986,7 @@
                 <a:latin typeface="Courier New" panose="02070309020205020404" pitchFamily="49" charset="0"/>
                 <a:cs typeface="Courier New" panose="02070309020205020404" pitchFamily="49" charset="0"/>
               </a:rPr>
-              <a:t>DomainName</a:t>
+              <a:t>FullName</a:t>
             </a:r>
             <a:r>
               <a:rPr lang="en-US" sz="1400" dirty="0">
@@ -7995,7 +7996,7 @@
               <a:t>": "</a:t>
             </a:r>
             <a:r>
-              <a:rPr lang="en-US" sz="1400" b="1" dirty="0" err="1">
+              <a:rPr lang="en-US" sz="1400" dirty="0" err="1">
                 <a:latin typeface="Courier New" panose="02070309020205020404" pitchFamily="49" charset="0"/>
                 <a:cs typeface="Courier New" panose="02070309020205020404" pitchFamily="49" charset="0"/>
               </a:rPr>
@@ -8006,6 +8007,20 @@
                 <a:latin typeface="Courier New" panose="02070309020205020404" pitchFamily="49" charset="0"/>
                 <a:cs typeface="Courier New" panose="02070309020205020404" pitchFamily="49" charset="0"/>
               </a:rPr>
+              <a:t>/$</a:t>
+            </a:r>
+            <a:r>
+              <a:rPr lang="en-US" sz="1400" dirty="0" err="1">
+                <a:latin typeface="Courier New" panose="02070309020205020404" pitchFamily="49" charset="0"/>
+                <a:cs typeface="Courier New" panose="02070309020205020404" pitchFamily="49" charset="0"/>
+              </a:rPr>
+              <a:t>LaToulousaine</a:t>
+            </a:r>
+            <a:r>
+              <a:rPr lang="en-US" sz="1400" dirty="0">
+                <a:latin typeface="Courier New" panose="02070309020205020404" pitchFamily="49" charset="0"/>
+                <a:cs typeface="Courier New" panose="02070309020205020404" pitchFamily="49" charset="0"/>
+              </a:rPr>
               <a:t>",</a:t>
             </a:r>
           </a:p>
@@ -8033,98 +8048,36 @@
                 <a:latin typeface="Courier New" panose="02070309020205020404" pitchFamily="49" charset="0"/>
                 <a:cs typeface="Courier New" panose="02070309020205020404" pitchFamily="49" charset="0"/>
               </a:rPr>
-              <a:t>      </a:t>
-            </a:r>
-            <a:r>
-              <a:rPr lang="en-US" sz="1400" b="1" dirty="0">
+              <a:t>      "</a:t>
+            </a:r>
+            <a:r>
+              <a:rPr lang="en-US" sz="1400" dirty="0" err="1">
+                <a:latin typeface="Courier New" panose="02070309020205020404" pitchFamily="49" charset="0"/>
+                <a:cs typeface="Courier New" panose="02070309020205020404" pitchFamily="49" charset="0"/>
+              </a:rPr>
+              <a:t>PartyName</a:t>
+            </a:r>
+            <a:r>
+              <a:rPr lang="en-US" sz="1400" dirty="0">
+                <a:latin typeface="Courier New" panose="02070309020205020404" pitchFamily="49" charset="0"/>
+                <a:cs typeface="Courier New" panose="02070309020205020404" pitchFamily="49" charset="0"/>
+              </a:rPr>
+              <a:t>": "$</a:t>
+            </a:r>
+            <a:r>
+              <a:rPr lang="en-US" sz="1400" dirty="0" err="1">
+                <a:latin typeface="Courier New" panose="02070309020205020404" pitchFamily="49" charset="0"/>
+                <a:cs typeface="Courier New" panose="02070309020205020404" pitchFamily="49" charset="0"/>
+              </a:rPr>
+              <a:t>SignatureBox</a:t>
+            </a:r>
+            <a:r>
+              <a:rPr lang="en-US" sz="1400" dirty="0">
                 <a:latin typeface="Courier New" panose="02070309020205020404" pitchFamily="49" charset="0"/>
                 <a:cs typeface="Courier New" panose="02070309020205020404" pitchFamily="49" charset="0"/>
               </a:rPr>
               <a:t>"</a:t>
             </a:r>
-            <a:r>
-              <a:rPr lang="en-US" sz="1400" b="1" dirty="0" err="1">
-                <a:latin typeface="Courier New" panose="02070309020205020404" pitchFamily="49" charset="0"/>
-                <a:cs typeface="Courier New" panose="02070309020205020404" pitchFamily="49" charset="0"/>
-              </a:rPr>
-              <a:t>PartyName</a:t>
-            </a:r>
-            <a:r>
-              <a:rPr lang="en-US" sz="1400" b="1" dirty="0">
-                <a:latin typeface="Courier New" panose="02070309020205020404" pitchFamily="49" charset="0"/>
-                <a:cs typeface="Courier New" panose="02070309020205020404" pitchFamily="49" charset="0"/>
-              </a:rPr>
-              <a:t>": "$</a:t>
-            </a:r>
-            <a:r>
-              <a:rPr lang="en-US" sz="1400" b="1" dirty="0" err="1">
-                <a:latin typeface="Courier New" panose="02070309020205020404" pitchFamily="49" charset="0"/>
-                <a:cs typeface="Courier New" panose="02070309020205020404" pitchFamily="49" charset="0"/>
-              </a:rPr>
-              <a:t>LaToulousaine</a:t>
-            </a:r>
-            <a:r>
-              <a:rPr lang="en-US" sz="1400" b="1" dirty="0">
-                <a:latin typeface="Courier New" panose="02070309020205020404" pitchFamily="49" charset="0"/>
-                <a:cs typeface="Courier New" panose="02070309020205020404" pitchFamily="49" charset="0"/>
-              </a:rPr>
-              <a:t>"</a:t>
-            </a:r>
-          </a:p>
-          <a:p>
-            <a:r>
-              <a:rPr lang="en-US" sz="1400" dirty="0">
-                <a:latin typeface="Courier New" panose="02070309020205020404" pitchFamily="49" charset="0"/>
-                <a:cs typeface="Courier New" panose="02070309020205020404" pitchFamily="49" charset="0"/>
-              </a:rPr>
-              <a:t>    },</a:t>
-            </a:r>
-          </a:p>
-          <a:p>
-            <a:r>
-              <a:rPr lang="en-US" sz="1400" dirty="0">
-                <a:latin typeface="Courier New" panose="02070309020205020404" pitchFamily="49" charset="0"/>
-                <a:cs typeface="Courier New" panose="02070309020205020404" pitchFamily="49" charset="0"/>
-              </a:rPr>
-              <a:t>    {</a:t>
-            </a:r>
-          </a:p>
-          <a:p>
-            <a:r>
-              <a:rPr lang="en-US" sz="1400" dirty="0">
-                <a:latin typeface="Courier New" panose="02070309020205020404" pitchFamily="49" charset="0"/>
-                <a:cs typeface="Courier New" panose="02070309020205020404" pitchFamily="49" charset="0"/>
-              </a:rPr>
-              <a:t>      "</a:t>
-            </a:r>
-            <a:r>
-              <a:rPr lang="en-US" sz="1400" dirty="0" err="1">
-                <a:latin typeface="Courier New" panose="02070309020205020404" pitchFamily="49" charset="0"/>
-                <a:cs typeface="Courier New" panose="02070309020205020404" pitchFamily="49" charset="0"/>
-              </a:rPr>
-              <a:t>PartyName</a:t>
-            </a:r>
-            <a:r>
-              <a:rPr lang="en-US" sz="1400" dirty="0">
-                <a:latin typeface="Courier New" panose="02070309020205020404" pitchFamily="49" charset="0"/>
-                <a:cs typeface="Courier New" panose="02070309020205020404" pitchFamily="49" charset="0"/>
-              </a:rPr>
-              <a:t>": "$</a:t>
-            </a:r>
-            <a:r>
-              <a:rPr lang="en-US" sz="1400" dirty="0" err="1">
-                <a:latin typeface="Courier New" panose="02070309020205020404" pitchFamily="49" charset="0"/>
-                <a:cs typeface="Courier New" panose="02070309020205020404" pitchFamily="49" charset="0"/>
-              </a:rPr>
-              <a:t>SignatureBox</a:t>
-            </a:r>
-            <a:r>
-              <a:rPr lang="en-US" sz="1400" dirty="0">
-                <a:latin typeface="Courier New" panose="02070309020205020404" pitchFamily="49" charset="0"/>
-                <a:cs typeface="Courier New" panose="02070309020205020404" pitchFamily="49" charset="0"/>
-              </a:rPr>
-              <a:t>"</a:t>
-            </a:r>
           </a:p>
           <a:p>
             <a:r>
@@ -8151,58 +8104,6 @@
                 <a:cs typeface="Courier New" panose="02070309020205020404" pitchFamily="49" charset="0"/>
               </a:rPr>
               <a:t>}</a:t>
-            </a:r>
-          </a:p>
-        </p:txBody>
-      </p:sp>
-      <p:sp>
-        <p:nvSpPr>
-          <p:cNvPr id="15" name="Callout: Line 14">
-            <a:extLst>
-              <a:ext uri="{FF2B5EF4-FFF2-40B4-BE49-F238E27FC236}">
-                <a16:creationId xmlns:a16="http://schemas.microsoft.com/office/drawing/2014/main" id="{FF13DBD5-8C06-09FE-57BC-171777836FD4}"/>
-              </a:ext>
-            </a:extLst>
-          </p:cNvPr>
-          <p:cNvSpPr/>
-          <p:nvPr/>
-        </p:nvSpPr>
-        <p:spPr>
-          <a:xfrm>
-            <a:off x="8499622" y="5750778"/>
-            <a:ext cx="1466552" cy="579120"/>
-          </a:xfrm>
-          <a:prstGeom prst="borderCallout1">
-            <a:avLst>
-              <a:gd name="adj1" fmla="val -4057"/>
-              <a:gd name="adj2" fmla="val 47711"/>
-              <a:gd name="adj3" fmla="val -64693"/>
-              <a:gd name="adj4" fmla="val 47859"/>
-            </a:avLst>
-          </a:prstGeom>
-        </p:spPr>
-        <p:style>
-          <a:lnRef idx="2">
-            <a:schemeClr val="dk1"/>
-          </a:lnRef>
-          <a:fillRef idx="1">
-            <a:schemeClr val="lt1"/>
-          </a:fillRef>
-          <a:effectRef idx="0">
-            <a:schemeClr val="dk1"/>
-          </a:effectRef>
-          <a:fontRef idx="minor">
-            <a:schemeClr val="dk1"/>
-          </a:fontRef>
-        </p:style>
-        <p:txBody>
-          <a:bodyPr rtlCol="0" anchor="ctr"/>
-          <a:lstStyle/>
-          <a:p>
-            <a:pPr algn="ctr"/>
-            <a:r>
-              <a:rPr lang="en-US" dirty="0"/>
-              <a:t>No Change!</a:t>
             </a:r>
           </a:p>
         </p:txBody>
@@ -8306,6 +8207,707 @@
             <a:r>
               <a:rPr lang="en-US" dirty="0"/>
               <a:t>” is now hosted.</a:t>
+            </a:r>
+          </a:p>
+        </p:txBody>
+      </p:sp>
+      <p:sp>
+        <p:nvSpPr>
+          <p:cNvPr id="7" name="Rectangle 6">
+            <a:extLst>
+              <a:ext uri="{FF2B5EF4-FFF2-40B4-BE49-F238E27FC236}">
+                <a16:creationId xmlns:a16="http://schemas.microsoft.com/office/drawing/2014/main" id="{876621B1-1DCC-0779-5BE9-1D9091CDB19A}"/>
+              </a:ext>
+            </a:extLst>
+          </p:cNvPr>
+          <p:cNvSpPr/>
+          <p:nvPr/>
+        </p:nvSpPr>
+        <p:spPr>
+          <a:xfrm>
+            <a:off x="6793041" y="1690688"/>
+            <a:ext cx="4733364" cy="3754874"/>
+          </a:xfrm>
+          <a:custGeom>
+            <a:avLst/>
+            <a:gdLst>
+              <a:gd name="connsiteX0" fmla="*/ 0 w 4733364"/>
+              <a:gd name="connsiteY0" fmla="*/ 0 h 3754874"/>
+              <a:gd name="connsiteX1" fmla="*/ 544337 w 4733364"/>
+              <a:gd name="connsiteY1" fmla="*/ 0 h 3754874"/>
+              <a:gd name="connsiteX2" fmla="*/ 994006 w 4733364"/>
+              <a:gd name="connsiteY2" fmla="*/ 0 h 3754874"/>
+              <a:gd name="connsiteX3" fmla="*/ 1680344 w 4733364"/>
+              <a:gd name="connsiteY3" fmla="*/ 0 h 3754874"/>
+              <a:gd name="connsiteX4" fmla="*/ 2224681 w 4733364"/>
+              <a:gd name="connsiteY4" fmla="*/ 0 h 3754874"/>
+              <a:gd name="connsiteX5" fmla="*/ 2769018 w 4733364"/>
+              <a:gd name="connsiteY5" fmla="*/ 0 h 3754874"/>
+              <a:gd name="connsiteX6" fmla="*/ 3455356 w 4733364"/>
+              <a:gd name="connsiteY6" fmla="*/ 0 h 3754874"/>
+              <a:gd name="connsiteX7" fmla="*/ 3952359 w 4733364"/>
+              <a:gd name="connsiteY7" fmla="*/ 0 h 3754874"/>
+              <a:gd name="connsiteX8" fmla="*/ 4733364 w 4733364"/>
+              <a:gd name="connsiteY8" fmla="*/ 0 h 3754874"/>
+              <a:gd name="connsiteX9" fmla="*/ 4733364 w 4733364"/>
+              <a:gd name="connsiteY9" fmla="*/ 611508 h 3754874"/>
+              <a:gd name="connsiteX10" fmla="*/ 4733364 w 4733364"/>
+              <a:gd name="connsiteY10" fmla="*/ 1072821 h 3754874"/>
+              <a:gd name="connsiteX11" fmla="*/ 4733364 w 4733364"/>
+              <a:gd name="connsiteY11" fmla="*/ 1609232 h 3754874"/>
+              <a:gd name="connsiteX12" fmla="*/ 4733364 w 4733364"/>
+              <a:gd name="connsiteY12" fmla="*/ 2183191 h 3754874"/>
+              <a:gd name="connsiteX13" fmla="*/ 4733364 w 4733364"/>
+              <a:gd name="connsiteY13" fmla="*/ 2606955 h 3754874"/>
+              <a:gd name="connsiteX14" fmla="*/ 4733364 w 4733364"/>
+              <a:gd name="connsiteY14" fmla="*/ 3143366 h 3754874"/>
+              <a:gd name="connsiteX15" fmla="*/ 4733364 w 4733364"/>
+              <a:gd name="connsiteY15" fmla="*/ 3754874 h 3754874"/>
+              <a:gd name="connsiteX16" fmla="*/ 4141694 w 4733364"/>
+              <a:gd name="connsiteY16" fmla="*/ 3754874 h 3754874"/>
+              <a:gd name="connsiteX17" fmla="*/ 3455356 w 4733364"/>
+              <a:gd name="connsiteY17" fmla="*/ 3754874 h 3754874"/>
+              <a:gd name="connsiteX18" fmla="*/ 2863685 w 4733364"/>
+              <a:gd name="connsiteY18" fmla="*/ 3754874 h 3754874"/>
+              <a:gd name="connsiteX19" fmla="*/ 2414016 w 4733364"/>
+              <a:gd name="connsiteY19" fmla="*/ 3754874 h 3754874"/>
+              <a:gd name="connsiteX20" fmla="*/ 1917012 w 4733364"/>
+              <a:gd name="connsiteY20" fmla="*/ 3754874 h 3754874"/>
+              <a:gd name="connsiteX21" fmla="*/ 1230675 w 4733364"/>
+              <a:gd name="connsiteY21" fmla="*/ 3754874 h 3754874"/>
+              <a:gd name="connsiteX22" fmla="*/ 639004 w 4733364"/>
+              <a:gd name="connsiteY22" fmla="*/ 3754874 h 3754874"/>
+              <a:gd name="connsiteX23" fmla="*/ 0 w 4733364"/>
+              <a:gd name="connsiteY23" fmla="*/ 3754874 h 3754874"/>
+              <a:gd name="connsiteX24" fmla="*/ 0 w 4733364"/>
+              <a:gd name="connsiteY24" fmla="*/ 3218463 h 3754874"/>
+              <a:gd name="connsiteX25" fmla="*/ 0 w 4733364"/>
+              <a:gd name="connsiteY25" fmla="*/ 2794699 h 3754874"/>
+              <a:gd name="connsiteX26" fmla="*/ 0 w 4733364"/>
+              <a:gd name="connsiteY26" fmla="*/ 2370935 h 3754874"/>
+              <a:gd name="connsiteX27" fmla="*/ 0 w 4733364"/>
+              <a:gd name="connsiteY27" fmla="*/ 1796975 h 3754874"/>
+              <a:gd name="connsiteX28" fmla="*/ 0 w 4733364"/>
+              <a:gd name="connsiteY28" fmla="*/ 1335662 h 3754874"/>
+              <a:gd name="connsiteX29" fmla="*/ 0 w 4733364"/>
+              <a:gd name="connsiteY29" fmla="*/ 724154 h 3754874"/>
+              <a:gd name="connsiteX30" fmla="*/ 0 w 4733364"/>
+              <a:gd name="connsiteY30" fmla="*/ 0 h 3754874"/>
+            </a:gdLst>
+            <a:ahLst/>
+            <a:cxnLst>
+              <a:cxn ang="0">
+                <a:pos x="connsiteX0" y="connsiteY0"/>
+              </a:cxn>
+              <a:cxn ang="0">
+                <a:pos x="connsiteX1" y="connsiteY1"/>
+              </a:cxn>
+              <a:cxn ang="0">
+                <a:pos x="connsiteX2" y="connsiteY2"/>
+              </a:cxn>
+              <a:cxn ang="0">
+                <a:pos x="connsiteX3" y="connsiteY3"/>
+              </a:cxn>
+              <a:cxn ang="0">
+                <a:pos x="connsiteX4" y="connsiteY4"/>
+              </a:cxn>
+              <a:cxn ang="0">
+                <a:pos x="connsiteX5" y="connsiteY5"/>
+              </a:cxn>
+              <a:cxn ang="0">
+                <a:pos x="connsiteX6" y="connsiteY6"/>
+              </a:cxn>
+              <a:cxn ang="0">
+                <a:pos x="connsiteX7" y="connsiteY7"/>
+              </a:cxn>
+              <a:cxn ang="0">
+                <a:pos x="connsiteX8" y="connsiteY8"/>
+              </a:cxn>
+              <a:cxn ang="0">
+                <a:pos x="connsiteX9" y="connsiteY9"/>
+              </a:cxn>
+              <a:cxn ang="0">
+                <a:pos x="connsiteX10" y="connsiteY10"/>
+              </a:cxn>
+              <a:cxn ang="0">
+                <a:pos x="connsiteX11" y="connsiteY11"/>
+              </a:cxn>
+              <a:cxn ang="0">
+                <a:pos x="connsiteX12" y="connsiteY12"/>
+              </a:cxn>
+              <a:cxn ang="0">
+                <a:pos x="connsiteX13" y="connsiteY13"/>
+              </a:cxn>
+              <a:cxn ang="0">
+                <a:pos x="connsiteX14" y="connsiteY14"/>
+              </a:cxn>
+              <a:cxn ang="0">
+                <a:pos x="connsiteX15" y="connsiteY15"/>
+              </a:cxn>
+              <a:cxn ang="0">
+                <a:pos x="connsiteX16" y="connsiteY16"/>
+              </a:cxn>
+              <a:cxn ang="0">
+                <a:pos x="connsiteX17" y="connsiteY17"/>
+              </a:cxn>
+              <a:cxn ang="0">
+                <a:pos x="connsiteX18" y="connsiteY18"/>
+              </a:cxn>
+              <a:cxn ang="0">
+                <a:pos x="connsiteX19" y="connsiteY19"/>
+              </a:cxn>
+              <a:cxn ang="0">
+                <a:pos x="connsiteX20" y="connsiteY20"/>
+              </a:cxn>
+              <a:cxn ang="0">
+                <a:pos x="connsiteX21" y="connsiteY21"/>
+              </a:cxn>
+              <a:cxn ang="0">
+                <a:pos x="connsiteX22" y="connsiteY22"/>
+              </a:cxn>
+              <a:cxn ang="0">
+                <a:pos x="connsiteX23" y="connsiteY23"/>
+              </a:cxn>
+              <a:cxn ang="0">
+                <a:pos x="connsiteX24" y="connsiteY24"/>
+              </a:cxn>
+              <a:cxn ang="0">
+                <a:pos x="connsiteX25" y="connsiteY25"/>
+              </a:cxn>
+              <a:cxn ang="0">
+                <a:pos x="connsiteX26" y="connsiteY26"/>
+              </a:cxn>
+              <a:cxn ang="0">
+                <a:pos x="connsiteX27" y="connsiteY27"/>
+              </a:cxn>
+              <a:cxn ang="0">
+                <a:pos x="connsiteX28" y="connsiteY28"/>
+              </a:cxn>
+              <a:cxn ang="0">
+                <a:pos x="connsiteX29" y="connsiteY29"/>
+              </a:cxn>
+              <a:cxn ang="0">
+                <a:pos x="connsiteX30" y="connsiteY30"/>
+              </a:cxn>
+            </a:cxnLst>
+            <a:rect l="l" t="t" r="r" b="b"/>
+            <a:pathLst>
+              <a:path w="4733364" h="3754874" extrusionOk="0">
+                <a:moveTo>
+                  <a:pt x="0" y="0"/>
+                </a:moveTo>
+                <a:cubicBezTo>
+                  <a:pt x="229468" y="-50895"/>
+                  <a:pt x="294370" y="35903"/>
+                  <a:pt x="544337" y="0"/>
+                </a:cubicBezTo>
+                <a:cubicBezTo>
+                  <a:pt x="794304" y="-35903"/>
+                  <a:pt x="820079" y="34170"/>
+                  <a:pt x="994006" y="0"/>
+                </a:cubicBezTo>
+                <a:cubicBezTo>
+                  <a:pt x="1167933" y="-34170"/>
+                  <a:pt x="1374133" y="58138"/>
+                  <a:pt x="1680344" y="0"/>
+                </a:cubicBezTo>
+                <a:cubicBezTo>
+                  <a:pt x="1986555" y="-58138"/>
+                  <a:pt x="2046752" y="42581"/>
+                  <a:pt x="2224681" y="0"/>
+                </a:cubicBezTo>
+                <a:cubicBezTo>
+                  <a:pt x="2402610" y="-42581"/>
+                  <a:pt x="2583036" y="36101"/>
+                  <a:pt x="2769018" y="0"/>
+                </a:cubicBezTo>
+                <a:cubicBezTo>
+                  <a:pt x="2955000" y="-36101"/>
+                  <a:pt x="3247585" y="49086"/>
+                  <a:pt x="3455356" y="0"/>
+                </a:cubicBezTo>
+                <a:cubicBezTo>
+                  <a:pt x="3663127" y="-49086"/>
+                  <a:pt x="3818168" y="55487"/>
+                  <a:pt x="3952359" y="0"/>
+                </a:cubicBezTo>
+                <a:cubicBezTo>
+                  <a:pt x="4086550" y="-55487"/>
+                  <a:pt x="4361088" y="71153"/>
+                  <a:pt x="4733364" y="0"/>
+                </a:cubicBezTo>
+                <a:cubicBezTo>
+                  <a:pt x="4749522" y="123515"/>
+                  <a:pt x="4685277" y="353000"/>
+                  <a:pt x="4733364" y="611508"/>
+                </a:cubicBezTo>
+                <a:cubicBezTo>
+                  <a:pt x="4781451" y="870016"/>
+                  <a:pt x="4679557" y="972846"/>
+                  <a:pt x="4733364" y="1072821"/>
+                </a:cubicBezTo>
+                <a:cubicBezTo>
+                  <a:pt x="4787171" y="1172796"/>
+                  <a:pt x="4697483" y="1382836"/>
+                  <a:pt x="4733364" y="1609232"/>
+                </a:cubicBezTo>
+                <a:cubicBezTo>
+                  <a:pt x="4769245" y="1835628"/>
+                  <a:pt x="4697524" y="2027386"/>
+                  <a:pt x="4733364" y="2183191"/>
+                </a:cubicBezTo>
+                <a:cubicBezTo>
+                  <a:pt x="4769204" y="2338996"/>
+                  <a:pt x="4727974" y="2427041"/>
+                  <a:pt x="4733364" y="2606955"/>
+                </a:cubicBezTo>
+                <a:cubicBezTo>
+                  <a:pt x="4738754" y="2786869"/>
+                  <a:pt x="4733228" y="2965049"/>
+                  <a:pt x="4733364" y="3143366"/>
+                </a:cubicBezTo>
+                <a:cubicBezTo>
+                  <a:pt x="4733500" y="3321683"/>
+                  <a:pt x="4668483" y="3520497"/>
+                  <a:pt x="4733364" y="3754874"/>
+                </a:cubicBezTo>
+                <a:cubicBezTo>
+                  <a:pt x="4525963" y="3774907"/>
+                  <a:pt x="4436615" y="3711015"/>
+                  <a:pt x="4141694" y="3754874"/>
+                </a:cubicBezTo>
+                <a:cubicBezTo>
+                  <a:pt x="3846773" y="3798733"/>
+                  <a:pt x="3793273" y="3675467"/>
+                  <a:pt x="3455356" y="3754874"/>
+                </a:cubicBezTo>
+                <a:cubicBezTo>
+                  <a:pt x="3117439" y="3834281"/>
+                  <a:pt x="3117900" y="3743300"/>
+                  <a:pt x="2863685" y="3754874"/>
+                </a:cubicBezTo>
+                <a:cubicBezTo>
+                  <a:pt x="2609470" y="3766448"/>
+                  <a:pt x="2551397" y="3712888"/>
+                  <a:pt x="2414016" y="3754874"/>
+                </a:cubicBezTo>
+                <a:cubicBezTo>
+                  <a:pt x="2276635" y="3796860"/>
+                  <a:pt x="2026307" y="3697298"/>
+                  <a:pt x="1917012" y="3754874"/>
+                </a:cubicBezTo>
+                <a:cubicBezTo>
+                  <a:pt x="1807717" y="3812450"/>
+                  <a:pt x="1498914" y="3753701"/>
+                  <a:pt x="1230675" y="3754874"/>
+                </a:cubicBezTo>
+                <a:cubicBezTo>
+                  <a:pt x="962436" y="3756047"/>
+                  <a:pt x="901520" y="3748643"/>
+                  <a:pt x="639004" y="3754874"/>
+                </a:cubicBezTo>
+                <a:cubicBezTo>
+                  <a:pt x="376488" y="3761105"/>
+                  <a:pt x="174782" y="3752861"/>
+                  <a:pt x="0" y="3754874"/>
+                </a:cubicBezTo>
+                <a:cubicBezTo>
+                  <a:pt x="-53902" y="3605730"/>
+                  <a:pt x="60600" y="3338802"/>
+                  <a:pt x="0" y="3218463"/>
+                </a:cubicBezTo>
+                <a:cubicBezTo>
+                  <a:pt x="-60600" y="3098124"/>
+                  <a:pt x="43054" y="2892626"/>
+                  <a:pt x="0" y="2794699"/>
+                </a:cubicBezTo>
+                <a:cubicBezTo>
+                  <a:pt x="-43054" y="2696772"/>
+                  <a:pt x="46355" y="2470556"/>
+                  <a:pt x="0" y="2370935"/>
+                </a:cubicBezTo>
+                <a:cubicBezTo>
+                  <a:pt x="-46355" y="2271314"/>
+                  <a:pt x="20903" y="1997827"/>
+                  <a:pt x="0" y="1796975"/>
+                </a:cubicBezTo>
+                <a:cubicBezTo>
+                  <a:pt x="-20903" y="1596123"/>
+                  <a:pt x="31988" y="1460266"/>
+                  <a:pt x="0" y="1335662"/>
+                </a:cubicBezTo>
+                <a:cubicBezTo>
+                  <a:pt x="-31988" y="1211058"/>
+                  <a:pt x="37542" y="864533"/>
+                  <a:pt x="0" y="724154"/>
+                </a:cubicBezTo>
+                <a:cubicBezTo>
+                  <a:pt x="-37542" y="583775"/>
+                  <a:pt x="7023" y="181575"/>
+                  <a:pt x="0" y="0"/>
+                </a:cubicBezTo>
+                <a:close/>
+              </a:path>
+            </a:pathLst>
+          </a:custGeom>
+          <a:noFill/>
+          <a:ln>
+            <a:prstDash val="sysDash"/>
+            <a:extLst>
+              <a:ext uri="{C807C97D-BFC1-408E-A445-0C87EB9F89A2}">
+                <ask:lineSketchStyleProps xmlns:ask="http://schemas.microsoft.com/office/drawing/2018/sketchyshapes" sd="1219033472">
+                  <a:prstGeom prst="rect">
+                    <a:avLst/>
+                  </a:prstGeom>
+                  <ask:type>
+                    <ask:lineSketchScribble/>
+                  </ask:type>
+                </ask:lineSketchStyleProps>
+              </a:ext>
+            </a:extLst>
+          </a:ln>
+        </p:spPr>
+        <p:style>
+          <a:lnRef idx="2">
+            <a:schemeClr val="accent1">
+              <a:shade val="15000"/>
+            </a:schemeClr>
+          </a:lnRef>
+          <a:fillRef idx="1">
+            <a:schemeClr val="accent1"/>
+          </a:fillRef>
+          <a:effectRef idx="0">
+            <a:schemeClr val="accent1"/>
+          </a:effectRef>
+          <a:fontRef idx="minor">
+            <a:schemeClr val="lt1"/>
+          </a:fontRef>
+        </p:style>
+        <p:txBody>
+          <a:bodyPr rtlCol="0" anchor="ctr"/>
+          <a:lstStyle/>
+          <a:p>
+            <a:pPr algn="ctr"/>
+            <a:endParaRPr lang="en-US"/>
+          </a:p>
+        </p:txBody>
+      </p:sp>
+      <p:sp>
+        <p:nvSpPr>
+          <p:cNvPr id="6" name="Rectangle 5">
+            <a:extLst>
+              <a:ext uri="{FF2B5EF4-FFF2-40B4-BE49-F238E27FC236}">
+                <a16:creationId xmlns:a16="http://schemas.microsoft.com/office/drawing/2014/main" id="{BF72FE9D-A494-0880-7478-23B8F8658432}"/>
+              </a:ext>
+            </a:extLst>
+          </p:cNvPr>
+          <p:cNvSpPr/>
+          <p:nvPr/>
+        </p:nvSpPr>
+        <p:spPr>
+          <a:xfrm>
+            <a:off x="1075765" y="2549562"/>
+            <a:ext cx="4733364" cy="1161826"/>
+          </a:xfrm>
+          <a:custGeom>
+            <a:avLst/>
+            <a:gdLst>
+              <a:gd name="connsiteX0" fmla="*/ 0 w 4733364"/>
+              <a:gd name="connsiteY0" fmla="*/ 0 h 1161826"/>
+              <a:gd name="connsiteX1" fmla="*/ 544337 w 4733364"/>
+              <a:gd name="connsiteY1" fmla="*/ 0 h 1161826"/>
+              <a:gd name="connsiteX2" fmla="*/ 994006 w 4733364"/>
+              <a:gd name="connsiteY2" fmla="*/ 0 h 1161826"/>
+              <a:gd name="connsiteX3" fmla="*/ 1680344 w 4733364"/>
+              <a:gd name="connsiteY3" fmla="*/ 0 h 1161826"/>
+              <a:gd name="connsiteX4" fmla="*/ 2224681 w 4733364"/>
+              <a:gd name="connsiteY4" fmla="*/ 0 h 1161826"/>
+              <a:gd name="connsiteX5" fmla="*/ 2769018 w 4733364"/>
+              <a:gd name="connsiteY5" fmla="*/ 0 h 1161826"/>
+              <a:gd name="connsiteX6" fmla="*/ 3455356 w 4733364"/>
+              <a:gd name="connsiteY6" fmla="*/ 0 h 1161826"/>
+              <a:gd name="connsiteX7" fmla="*/ 3952359 w 4733364"/>
+              <a:gd name="connsiteY7" fmla="*/ 0 h 1161826"/>
+              <a:gd name="connsiteX8" fmla="*/ 4733364 w 4733364"/>
+              <a:gd name="connsiteY8" fmla="*/ 0 h 1161826"/>
+              <a:gd name="connsiteX9" fmla="*/ 4733364 w 4733364"/>
+              <a:gd name="connsiteY9" fmla="*/ 604150 h 1161826"/>
+              <a:gd name="connsiteX10" fmla="*/ 4733364 w 4733364"/>
+              <a:gd name="connsiteY10" fmla="*/ 1161826 h 1161826"/>
+              <a:gd name="connsiteX11" fmla="*/ 4141694 w 4733364"/>
+              <a:gd name="connsiteY11" fmla="*/ 1161826 h 1161826"/>
+              <a:gd name="connsiteX12" fmla="*/ 3597357 w 4733364"/>
+              <a:gd name="connsiteY12" fmla="*/ 1161826 h 1161826"/>
+              <a:gd name="connsiteX13" fmla="*/ 2911019 w 4733364"/>
+              <a:gd name="connsiteY13" fmla="*/ 1161826 h 1161826"/>
+              <a:gd name="connsiteX14" fmla="*/ 2224681 w 4733364"/>
+              <a:gd name="connsiteY14" fmla="*/ 1161826 h 1161826"/>
+              <a:gd name="connsiteX15" fmla="*/ 1727678 w 4733364"/>
+              <a:gd name="connsiteY15" fmla="*/ 1161826 h 1161826"/>
+              <a:gd name="connsiteX16" fmla="*/ 1136007 w 4733364"/>
+              <a:gd name="connsiteY16" fmla="*/ 1161826 h 1161826"/>
+              <a:gd name="connsiteX17" fmla="*/ 0 w 4733364"/>
+              <a:gd name="connsiteY17" fmla="*/ 1161826 h 1161826"/>
+              <a:gd name="connsiteX18" fmla="*/ 0 w 4733364"/>
+              <a:gd name="connsiteY18" fmla="*/ 580913 h 1161826"/>
+              <a:gd name="connsiteX19" fmla="*/ 0 w 4733364"/>
+              <a:gd name="connsiteY19" fmla="*/ 0 h 1161826"/>
+            </a:gdLst>
+            <a:ahLst/>
+            <a:cxnLst>
+              <a:cxn ang="0">
+                <a:pos x="connsiteX0" y="connsiteY0"/>
+              </a:cxn>
+              <a:cxn ang="0">
+                <a:pos x="connsiteX1" y="connsiteY1"/>
+              </a:cxn>
+              <a:cxn ang="0">
+                <a:pos x="connsiteX2" y="connsiteY2"/>
+              </a:cxn>
+              <a:cxn ang="0">
+                <a:pos x="connsiteX3" y="connsiteY3"/>
+              </a:cxn>
+              <a:cxn ang="0">
+                <a:pos x="connsiteX4" y="connsiteY4"/>
+              </a:cxn>
+              <a:cxn ang="0">
+                <a:pos x="connsiteX5" y="connsiteY5"/>
+              </a:cxn>
+              <a:cxn ang="0">
+                <a:pos x="connsiteX6" y="connsiteY6"/>
+              </a:cxn>
+              <a:cxn ang="0">
+                <a:pos x="connsiteX7" y="connsiteY7"/>
+              </a:cxn>
+              <a:cxn ang="0">
+                <a:pos x="connsiteX8" y="connsiteY8"/>
+              </a:cxn>
+              <a:cxn ang="0">
+                <a:pos x="connsiteX9" y="connsiteY9"/>
+              </a:cxn>
+              <a:cxn ang="0">
+                <a:pos x="connsiteX10" y="connsiteY10"/>
+              </a:cxn>
+              <a:cxn ang="0">
+                <a:pos x="connsiteX11" y="connsiteY11"/>
+              </a:cxn>
+              <a:cxn ang="0">
+                <a:pos x="connsiteX12" y="connsiteY12"/>
+              </a:cxn>
+              <a:cxn ang="0">
+                <a:pos x="connsiteX13" y="connsiteY13"/>
+              </a:cxn>
+              <a:cxn ang="0">
+                <a:pos x="connsiteX14" y="connsiteY14"/>
+              </a:cxn>
+              <a:cxn ang="0">
+                <a:pos x="connsiteX15" y="connsiteY15"/>
+              </a:cxn>
+              <a:cxn ang="0">
+                <a:pos x="connsiteX16" y="connsiteY16"/>
+              </a:cxn>
+              <a:cxn ang="0">
+                <a:pos x="connsiteX17" y="connsiteY17"/>
+              </a:cxn>
+              <a:cxn ang="0">
+                <a:pos x="connsiteX18" y="connsiteY18"/>
+              </a:cxn>
+              <a:cxn ang="0">
+                <a:pos x="connsiteX19" y="connsiteY19"/>
+              </a:cxn>
+            </a:cxnLst>
+            <a:rect l="l" t="t" r="r" b="b"/>
+            <a:pathLst>
+              <a:path w="4733364" h="1161826" extrusionOk="0">
+                <a:moveTo>
+                  <a:pt x="0" y="0"/>
+                </a:moveTo>
+                <a:cubicBezTo>
+                  <a:pt x="229468" y="-50895"/>
+                  <a:pt x="294370" y="35903"/>
+                  <a:pt x="544337" y="0"/>
+                </a:cubicBezTo>
+                <a:cubicBezTo>
+                  <a:pt x="794304" y="-35903"/>
+                  <a:pt x="820079" y="34170"/>
+                  <a:pt x="994006" y="0"/>
+                </a:cubicBezTo>
+                <a:cubicBezTo>
+                  <a:pt x="1167933" y="-34170"/>
+                  <a:pt x="1374133" y="58138"/>
+                  <a:pt x="1680344" y="0"/>
+                </a:cubicBezTo>
+                <a:cubicBezTo>
+                  <a:pt x="1986555" y="-58138"/>
+                  <a:pt x="2046752" y="42581"/>
+                  <a:pt x="2224681" y="0"/>
+                </a:cubicBezTo>
+                <a:cubicBezTo>
+                  <a:pt x="2402610" y="-42581"/>
+                  <a:pt x="2583036" y="36101"/>
+                  <a:pt x="2769018" y="0"/>
+                </a:cubicBezTo>
+                <a:cubicBezTo>
+                  <a:pt x="2955000" y="-36101"/>
+                  <a:pt x="3247585" y="49086"/>
+                  <a:pt x="3455356" y="0"/>
+                </a:cubicBezTo>
+                <a:cubicBezTo>
+                  <a:pt x="3663127" y="-49086"/>
+                  <a:pt x="3818168" y="55487"/>
+                  <a:pt x="3952359" y="0"/>
+                </a:cubicBezTo>
+                <a:cubicBezTo>
+                  <a:pt x="4086550" y="-55487"/>
+                  <a:pt x="4361088" y="71153"/>
+                  <a:pt x="4733364" y="0"/>
+                </a:cubicBezTo>
+                <a:cubicBezTo>
+                  <a:pt x="4774937" y="182907"/>
+                  <a:pt x="4683414" y="437336"/>
+                  <a:pt x="4733364" y="604150"/>
+                </a:cubicBezTo>
+                <a:cubicBezTo>
+                  <a:pt x="4783314" y="770964"/>
+                  <a:pt x="4731225" y="909997"/>
+                  <a:pt x="4733364" y="1161826"/>
+                </a:cubicBezTo>
+                <a:cubicBezTo>
+                  <a:pt x="4455532" y="1228628"/>
+                  <a:pt x="4325425" y="1122304"/>
+                  <a:pt x="4141694" y="1161826"/>
+                </a:cubicBezTo>
+                <a:cubicBezTo>
+                  <a:pt x="3957963" y="1201348"/>
+                  <a:pt x="3720866" y="1126498"/>
+                  <a:pt x="3597357" y="1161826"/>
+                </a:cubicBezTo>
+                <a:cubicBezTo>
+                  <a:pt x="3473848" y="1197154"/>
+                  <a:pt x="3108827" y="1156187"/>
+                  <a:pt x="2911019" y="1161826"/>
+                </a:cubicBezTo>
+                <a:cubicBezTo>
+                  <a:pt x="2713211" y="1167465"/>
+                  <a:pt x="2425949" y="1113687"/>
+                  <a:pt x="2224681" y="1161826"/>
+                </a:cubicBezTo>
+                <a:cubicBezTo>
+                  <a:pt x="2023413" y="1209965"/>
+                  <a:pt x="1839854" y="1107588"/>
+                  <a:pt x="1727678" y="1161826"/>
+                </a:cubicBezTo>
+                <a:cubicBezTo>
+                  <a:pt x="1615502" y="1216064"/>
+                  <a:pt x="1259688" y="1124550"/>
+                  <a:pt x="1136007" y="1161826"/>
+                </a:cubicBezTo>
+                <a:cubicBezTo>
+                  <a:pt x="1012326" y="1199102"/>
+                  <a:pt x="275734" y="1027589"/>
+                  <a:pt x="0" y="1161826"/>
+                </a:cubicBezTo>
+                <a:cubicBezTo>
+                  <a:pt x="-5849" y="889776"/>
+                  <a:pt x="16710" y="837427"/>
+                  <a:pt x="0" y="580913"/>
+                </a:cubicBezTo>
+                <a:cubicBezTo>
+                  <a:pt x="-16710" y="324399"/>
+                  <a:pt x="27932" y="254347"/>
+                  <a:pt x="0" y="0"/>
+                </a:cubicBezTo>
+                <a:close/>
+              </a:path>
+            </a:pathLst>
+          </a:custGeom>
+          <a:noFill/>
+          <a:ln>
+            <a:prstDash val="sysDash"/>
+            <a:extLst>
+              <a:ext uri="{C807C97D-BFC1-408E-A445-0C87EB9F89A2}">
+                <ask:lineSketchStyleProps xmlns:ask="http://schemas.microsoft.com/office/drawing/2018/sketchyshapes" sd="1219033472">
+                  <a:prstGeom prst="rect">
+                    <a:avLst/>
+                  </a:prstGeom>
+                  <ask:type>
+                    <ask:lineSketchScribble/>
+                  </ask:type>
+                </ask:lineSketchStyleProps>
+              </a:ext>
+            </a:extLst>
+          </a:ln>
+        </p:spPr>
+        <p:style>
+          <a:lnRef idx="2">
+            <a:schemeClr val="accent1">
+              <a:shade val="15000"/>
+            </a:schemeClr>
+          </a:lnRef>
+          <a:fillRef idx="1">
+            <a:schemeClr val="accent1"/>
+          </a:fillRef>
+          <a:effectRef idx="0">
+            <a:schemeClr val="accent1"/>
+          </a:effectRef>
+          <a:fontRef idx="minor">
+            <a:schemeClr val="lt1"/>
+          </a:fontRef>
+        </p:style>
+        <p:txBody>
+          <a:bodyPr rtlCol="0" anchor="ctr"/>
+          <a:lstStyle/>
+          <a:p>
+            <a:pPr algn="ctr"/>
+            <a:endParaRPr lang="en-US"/>
+          </a:p>
+        </p:txBody>
+      </p:sp>
+      <p:sp>
+        <p:nvSpPr>
+          <p:cNvPr id="9" name="Oval 8">
+            <a:extLst>
+              <a:ext uri="{FF2B5EF4-FFF2-40B4-BE49-F238E27FC236}">
+                <a16:creationId xmlns:a16="http://schemas.microsoft.com/office/drawing/2014/main" id="{1C599FD8-2975-8A4A-4073-614F1B8AB184}"/>
+              </a:ext>
+            </a:extLst>
+          </p:cNvPr>
+          <p:cNvSpPr/>
+          <p:nvPr/>
+        </p:nvSpPr>
+        <p:spPr>
+          <a:xfrm>
+            <a:off x="5589977" y="2806656"/>
+            <a:ext cx="1280160" cy="861061"/>
+          </a:xfrm>
+          <a:prstGeom prst="ellipse">
+            <a:avLst/>
+          </a:prstGeom>
+        </p:spPr>
+        <p:style>
+          <a:lnRef idx="2">
+            <a:schemeClr val="accent1">
+              <a:shade val="15000"/>
+            </a:schemeClr>
+          </a:lnRef>
+          <a:fillRef idx="1">
+            <a:schemeClr val="accent1"/>
+          </a:fillRef>
+          <a:effectRef idx="0">
+            <a:schemeClr val="accent1"/>
+          </a:effectRef>
+          <a:fontRef idx="minor">
+            <a:schemeClr val="lt1"/>
+          </a:fontRef>
+        </p:style>
+        <p:txBody>
+          <a:bodyPr rtlCol="0" anchor="ctr"/>
+          <a:lstStyle/>
+          <a:p>
+            <a:pPr algn="ctr"/>
+            <a:r>
+              <a:rPr lang="en-US" dirty="0"/>
+              <a:t>No Change!!!</a:t>
             </a:r>
           </a:p>
         </p:txBody>
@@ -8387,332 +8989,6 @@
       </p:sp>
       <p:sp>
         <p:nvSpPr>
-          <p:cNvPr id="6" name="TextBox 5">
-            <a:extLst>
-              <a:ext uri="{FF2B5EF4-FFF2-40B4-BE49-F238E27FC236}">
-                <a16:creationId xmlns:a16="http://schemas.microsoft.com/office/drawing/2014/main" id="{7488097A-53BB-23A6-8A12-22F976264474}"/>
-              </a:ext>
-            </a:extLst>
-          </p:cNvPr>
-          <p:cNvSpPr txBox="1"/>
-          <p:nvPr/>
-        </p:nvSpPr>
-        <p:spPr>
-          <a:xfrm>
-            <a:off x="654838" y="1690688"/>
-            <a:ext cx="4994122" cy="3323987"/>
-          </a:xfrm>
-          <a:prstGeom prst="rect">
-            <a:avLst/>
-          </a:prstGeom>
-          <a:noFill/>
-        </p:spPr>
-        <p:txBody>
-          <a:bodyPr wrap="square" rtlCol="0">
-            <a:spAutoFit/>
-          </a:bodyPr>
-          <a:lstStyle/>
-          <a:p>
-            <a:r>
-              <a:rPr lang="en-US" sz="1400" dirty="0">
-                <a:latin typeface="Courier New" panose="02070309020205020404" pitchFamily="49" charset="0"/>
-                <a:cs typeface="Courier New" panose="02070309020205020404" pitchFamily="49" charset="0"/>
-              </a:rPr>
-              <a:t>{</a:t>
-            </a:r>
-          </a:p>
-          <a:p>
-            <a:r>
-              <a:rPr lang="en-US" sz="1400" dirty="0">
-                <a:latin typeface="Courier New" panose="02070309020205020404" pitchFamily="49" charset="0"/>
-                <a:cs typeface="Courier New" panose="02070309020205020404" pitchFamily="49" charset="0"/>
-              </a:rPr>
-              <a:t>  "</a:t>
-            </a:r>
-            <a:r>
-              <a:rPr lang="en-US" sz="1400" dirty="0" err="1">
-                <a:latin typeface="Courier New" panose="02070309020205020404" pitchFamily="49" charset="0"/>
-                <a:cs typeface="Courier New" panose="02070309020205020404" pitchFamily="49" charset="0"/>
-              </a:rPr>
-              <a:t>FullName</a:t>
-            </a:r>
-            <a:r>
-              <a:rPr lang="en-US" sz="1400" dirty="0">
-                <a:latin typeface="Courier New" panose="02070309020205020404" pitchFamily="49" charset="0"/>
-                <a:cs typeface="Courier New" panose="02070309020205020404" pitchFamily="49" charset="0"/>
-              </a:rPr>
-              <a:t>": "</a:t>
-            </a:r>
-            <a:r>
-              <a:rPr lang="en-US" sz="1400" dirty="0" err="1">
-                <a:latin typeface="Courier New" panose="02070309020205020404" pitchFamily="49" charset="0"/>
-                <a:cs typeface="Courier New" panose="02070309020205020404" pitchFamily="49" charset="0"/>
-              </a:rPr>
-              <a:t>SaasOneCS</a:t>
-            </a:r>
-            <a:r>
-              <a:rPr lang="en-US" sz="1400" dirty="0">
-                <a:latin typeface="Courier New" panose="02070309020205020404" pitchFamily="49" charset="0"/>
-                <a:cs typeface="Courier New" panose="02070309020205020404" pitchFamily="49" charset="0"/>
-              </a:rPr>
-              <a:t>/$OneCS1/</a:t>
-            </a:r>
-            <a:r>
-              <a:rPr lang="en-US" sz="1400" b="1" dirty="0">
-                <a:latin typeface="Courier New" panose="02070309020205020404" pitchFamily="49" charset="0"/>
-                <a:cs typeface="Courier New" panose="02070309020205020404" pitchFamily="49" charset="0"/>
-              </a:rPr>
-              <a:t>#Prod</a:t>
-            </a:r>
-            <a:r>
-              <a:rPr lang="en-US" sz="1400" dirty="0">
-                <a:latin typeface="Courier New" panose="02070309020205020404" pitchFamily="49" charset="0"/>
-                <a:cs typeface="Courier New" panose="02070309020205020404" pitchFamily="49" charset="0"/>
-              </a:rPr>
-              <a:t>",</a:t>
-            </a:r>
-            <a:br>
-              <a:rPr lang="en-US" sz="1400" dirty="0">
-                <a:latin typeface="Courier New" panose="02070309020205020404" pitchFamily="49" charset="0"/>
-                <a:cs typeface="Courier New" panose="02070309020205020404" pitchFamily="49" charset="0"/>
-              </a:rPr>
-            </a:br>
-            <a:r>
-              <a:rPr lang="en-US" sz="1400" dirty="0">
-                <a:latin typeface="Courier New" panose="02070309020205020404" pitchFamily="49" charset="0"/>
-                <a:cs typeface="Courier New" panose="02070309020205020404" pitchFamily="49" charset="0"/>
-              </a:rPr>
-              <a:t>  "Parties": [</a:t>
-            </a:r>
-            <a:br>
-              <a:rPr lang="en-US" sz="1400" dirty="0">
-                <a:latin typeface="Courier New" panose="02070309020205020404" pitchFamily="49" charset="0"/>
-                <a:cs typeface="Courier New" panose="02070309020205020404" pitchFamily="49" charset="0"/>
-              </a:rPr>
-            </a:br>
-            <a:r>
-              <a:rPr lang="en-US" sz="1400" dirty="0">
-                <a:latin typeface="Courier New" panose="02070309020205020404" pitchFamily="49" charset="0"/>
-                <a:cs typeface="Courier New" panose="02070309020205020404" pitchFamily="49" charset="0"/>
-              </a:rPr>
-              <a:t>  {</a:t>
-            </a:r>
-          </a:p>
-          <a:p>
-            <a:r>
-              <a:rPr lang="en-US" sz="1400" dirty="0">
-                <a:latin typeface="Courier New" panose="02070309020205020404" pitchFamily="49" charset="0"/>
-                <a:cs typeface="Courier New" panose="02070309020205020404" pitchFamily="49" charset="0"/>
-              </a:rPr>
-              <a:t>    "</a:t>
-            </a:r>
-            <a:r>
-              <a:rPr lang="en-US" sz="1400" dirty="0" err="1">
-                <a:latin typeface="Courier New" panose="02070309020205020404" pitchFamily="49" charset="0"/>
-                <a:cs typeface="Courier New" panose="02070309020205020404" pitchFamily="49" charset="0"/>
-              </a:rPr>
-              <a:t>DomainName</a:t>
-            </a:r>
-            <a:r>
-              <a:rPr lang="en-US" sz="1400" dirty="0">
-                <a:latin typeface="Courier New" panose="02070309020205020404" pitchFamily="49" charset="0"/>
-                <a:cs typeface="Courier New" panose="02070309020205020404" pitchFamily="49" charset="0"/>
-              </a:rPr>
-              <a:t>": "</a:t>
-            </a:r>
-            <a:r>
-              <a:rPr lang="en-US" sz="1400" dirty="0" err="1">
-                <a:latin typeface="Courier New" panose="02070309020205020404" pitchFamily="49" charset="0"/>
-                <a:cs typeface="Courier New" panose="02070309020205020404" pitchFamily="49" charset="0"/>
-              </a:rPr>
-              <a:t>LaToulousaine</a:t>
-            </a:r>
-            <a:r>
-              <a:rPr lang="en-US" sz="1400" dirty="0">
-                <a:latin typeface="Courier New" panose="02070309020205020404" pitchFamily="49" charset="0"/>
-                <a:cs typeface="Courier New" panose="02070309020205020404" pitchFamily="49" charset="0"/>
-              </a:rPr>
-              <a:t>",</a:t>
-            </a:r>
-          </a:p>
-          <a:p>
-            <a:r>
-              <a:rPr lang="en-US" sz="1400" dirty="0">
-                <a:latin typeface="Courier New" panose="02070309020205020404" pitchFamily="49" charset="0"/>
-                <a:cs typeface="Courier New" panose="02070309020205020404" pitchFamily="49" charset="0"/>
-              </a:rPr>
-              <a:t>    “</a:t>
-            </a:r>
-            <a:r>
-              <a:rPr lang="en-US" sz="1400" dirty="0" err="1">
-                <a:latin typeface="Courier New" panose="02070309020205020404" pitchFamily="49" charset="0"/>
-                <a:cs typeface="Courier New" panose="02070309020205020404" pitchFamily="49" charset="0"/>
-              </a:rPr>
-              <a:t>EnvironmentName</a:t>
-            </a:r>
-            <a:r>
-              <a:rPr lang="en-US" sz="1400" dirty="0">
-                <a:latin typeface="Courier New" panose="02070309020205020404" pitchFamily="49" charset="0"/>
-                <a:cs typeface="Courier New" panose="02070309020205020404" pitchFamily="49" charset="0"/>
-              </a:rPr>
-              <a:t>": </a:t>
-            </a:r>
-            <a:r>
-              <a:rPr lang="en-US" sz="1400" b="1" dirty="0">
-                <a:latin typeface="Courier New" panose="02070309020205020404" pitchFamily="49" charset="0"/>
-                <a:cs typeface="Courier New" panose="02070309020205020404" pitchFamily="49" charset="0"/>
-              </a:rPr>
-              <a:t>"#Staging"</a:t>
-            </a:r>
-            <a:r>
-              <a:rPr lang="en-US" sz="1400" dirty="0">
-                <a:latin typeface="Courier New" panose="02070309020205020404" pitchFamily="49" charset="0"/>
-                <a:cs typeface="Courier New" panose="02070309020205020404" pitchFamily="49" charset="0"/>
-              </a:rPr>
-              <a:t>, </a:t>
-            </a:r>
-          </a:p>
-          <a:p>
-            <a:r>
-              <a:rPr lang="en-US" sz="1400" dirty="0">
-                <a:latin typeface="Courier New" panose="02070309020205020404" pitchFamily="49" charset="0"/>
-                <a:cs typeface="Courier New" panose="02070309020205020404" pitchFamily="49" charset="0"/>
-              </a:rPr>
-              <a:t>    "Parties": [</a:t>
-            </a:r>
-          </a:p>
-          <a:p>
-            <a:r>
-              <a:rPr lang="en-US" sz="1400" dirty="0">
-                <a:latin typeface="Courier New" panose="02070309020205020404" pitchFamily="49" charset="0"/>
-                <a:cs typeface="Courier New" panose="02070309020205020404" pitchFamily="49" charset="0"/>
-              </a:rPr>
-              <a:t>    {</a:t>
-            </a:r>
-          </a:p>
-          <a:p>
-            <a:r>
-              <a:rPr lang="en-US" sz="1400" dirty="0">
-                <a:latin typeface="Courier New" panose="02070309020205020404" pitchFamily="49" charset="0"/>
-                <a:cs typeface="Courier New" panose="02070309020205020404" pitchFamily="49" charset="0"/>
-              </a:rPr>
-              <a:t>      "</a:t>
-            </a:r>
-            <a:r>
-              <a:rPr lang="en-US" sz="1400" dirty="0" err="1">
-                <a:latin typeface="Courier New" panose="02070309020205020404" pitchFamily="49" charset="0"/>
-                <a:cs typeface="Courier New" panose="02070309020205020404" pitchFamily="49" charset="0"/>
-              </a:rPr>
-              <a:t>PartyName</a:t>
-            </a:r>
-            <a:r>
-              <a:rPr lang="en-US" sz="1400" dirty="0">
-                <a:latin typeface="Courier New" panose="02070309020205020404" pitchFamily="49" charset="0"/>
-                <a:cs typeface="Courier New" panose="02070309020205020404" pitchFamily="49" charset="0"/>
-              </a:rPr>
-              <a:t>": "$</a:t>
-            </a:r>
-            <a:r>
-              <a:rPr lang="en-US" sz="1400" dirty="0" err="1">
-                <a:latin typeface="Courier New" panose="02070309020205020404" pitchFamily="49" charset="0"/>
-                <a:cs typeface="Courier New" panose="02070309020205020404" pitchFamily="49" charset="0"/>
-              </a:rPr>
-              <a:t>LaToulousaine</a:t>
-            </a:r>
-            <a:r>
-              <a:rPr lang="en-US" sz="1400" dirty="0">
-                <a:latin typeface="Courier New" panose="02070309020205020404" pitchFamily="49" charset="0"/>
-                <a:cs typeface="Courier New" panose="02070309020205020404" pitchFamily="49" charset="0"/>
-              </a:rPr>
-              <a:t>"</a:t>
-            </a:r>
-          </a:p>
-          <a:p>
-            <a:r>
-              <a:rPr lang="en-US" sz="1400" dirty="0">
-                <a:latin typeface="Courier New" panose="02070309020205020404" pitchFamily="49" charset="0"/>
-                <a:cs typeface="Courier New" panose="02070309020205020404" pitchFamily="49" charset="0"/>
-              </a:rPr>
-              <a:t>    },</a:t>
-            </a:r>
-          </a:p>
-          <a:p>
-            <a:r>
-              <a:rPr lang="en-US" sz="1400" dirty="0">
-                <a:latin typeface="Courier New" panose="02070309020205020404" pitchFamily="49" charset="0"/>
-                <a:cs typeface="Courier New" panose="02070309020205020404" pitchFamily="49" charset="0"/>
-              </a:rPr>
-              <a:t>    {</a:t>
-            </a:r>
-          </a:p>
-          <a:p>
-            <a:r>
-              <a:rPr lang="en-US" sz="1400" dirty="0">
-                <a:latin typeface="Courier New" panose="02070309020205020404" pitchFamily="49" charset="0"/>
-                <a:cs typeface="Courier New" panose="02070309020205020404" pitchFamily="49" charset="0"/>
-              </a:rPr>
-              <a:t>      "</a:t>
-            </a:r>
-            <a:r>
-              <a:rPr lang="en-US" sz="1400" dirty="0" err="1">
-                <a:latin typeface="Courier New" panose="02070309020205020404" pitchFamily="49" charset="0"/>
-                <a:cs typeface="Courier New" panose="02070309020205020404" pitchFamily="49" charset="0"/>
-              </a:rPr>
-              <a:t>PartyName</a:t>
-            </a:r>
-            <a:r>
-              <a:rPr lang="en-US" sz="1400" dirty="0">
-                <a:latin typeface="Courier New" panose="02070309020205020404" pitchFamily="49" charset="0"/>
-                <a:cs typeface="Courier New" panose="02070309020205020404" pitchFamily="49" charset="0"/>
-              </a:rPr>
-              <a:t>": "$</a:t>
-            </a:r>
-            <a:r>
-              <a:rPr lang="en-US" sz="1400" dirty="0" err="1">
-                <a:latin typeface="Courier New" panose="02070309020205020404" pitchFamily="49" charset="0"/>
-                <a:cs typeface="Courier New" panose="02070309020205020404" pitchFamily="49" charset="0"/>
-              </a:rPr>
-              <a:t>SignatureBox</a:t>
-            </a:r>
-            <a:r>
-              <a:rPr lang="en-US" sz="1400" dirty="0">
-                <a:latin typeface="Courier New" panose="02070309020205020404" pitchFamily="49" charset="0"/>
-                <a:cs typeface="Courier New" panose="02070309020205020404" pitchFamily="49" charset="0"/>
-              </a:rPr>
-              <a:t>"</a:t>
-            </a:r>
-          </a:p>
-          <a:p>
-            <a:r>
-              <a:rPr lang="en-US" sz="1400" dirty="0">
-                <a:latin typeface="Courier New" panose="02070309020205020404" pitchFamily="49" charset="0"/>
-                <a:cs typeface="Courier New" panose="02070309020205020404" pitchFamily="49" charset="0"/>
-              </a:rPr>
-              <a:t>    }]</a:t>
-            </a:r>
-          </a:p>
-          <a:p>
-            <a:r>
-              <a:rPr lang="en-US" sz="1400" dirty="0">
-                <a:latin typeface="Courier New" panose="02070309020205020404" pitchFamily="49" charset="0"/>
-                <a:cs typeface="Courier New" panose="02070309020205020404" pitchFamily="49" charset="0"/>
-              </a:rPr>
-              <a:t>  }]</a:t>
-            </a:r>
-          </a:p>
-          <a:p>
-            <a:r>
-              <a:rPr lang="en-US" sz="1400" dirty="0">
-                <a:latin typeface="Courier New" panose="02070309020205020404" pitchFamily="49" charset="0"/>
-                <a:cs typeface="Courier New" panose="02070309020205020404" pitchFamily="49" charset="0"/>
-              </a:rPr>
-              <a:t>}</a:t>
-            </a:r>
-          </a:p>
-        </p:txBody>
-      </p:sp>
-      <p:sp>
-        <p:nvSpPr>
           <p:cNvPr id="8" name="TextBox 7">
             <a:extLst>
               <a:ext uri="{FF2B5EF4-FFF2-40B4-BE49-F238E27FC236}">
@@ -9012,6 +9288,291 @@
                 <a:cs typeface="Courier New" panose="02070309020205020404" pitchFamily="49" charset="0"/>
               </a:rPr>
               <a:t>"Address": "27.28.29.30:3712"</a:t>
+            </a:r>
+          </a:p>
+          <a:p>
+            <a:r>
+              <a:rPr lang="en-US" sz="1400" dirty="0">
+                <a:latin typeface="Courier New" panose="02070309020205020404" pitchFamily="49" charset="0"/>
+                <a:cs typeface="Courier New" panose="02070309020205020404" pitchFamily="49" charset="0"/>
+              </a:rPr>
+              <a:t>  }]</a:t>
+            </a:r>
+          </a:p>
+          <a:p>
+            <a:r>
+              <a:rPr lang="en-US" sz="1400" dirty="0">
+                <a:latin typeface="Courier New" panose="02070309020205020404" pitchFamily="49" charset="0"/>
+                <a:cs typeface="Courier New" panose="02070309020205020404" pitchFamily="49" charset="0"/>
+              </a:rPr>
+              <a:t>}</a:t>
+            </a:r>
+          </a:p>
+        </p:txBody>
+      </p:sp>
+      <p:sp>
+        <p:nvSpPr>
+          <p:cNvPr id="3" name="TextBox 2">
+            <a:extLst>
+              <a:ext uri="{FF2B5EF4-FFF2-40B4-BE49-F238E27FC236}">
+                <a16:creationId xmlns:a16="http://schemas.microsoft.com/office/drawing/2014/main" id="{7ED1A3BB-C45C-40DE-67C0-50F9948E66FE}"/>
+              </a:ext>
+            </a:extLst>
+          </p:cNvPr>
+          <p:cNvSpPr txBox="1"/>
+          <p:nvPr/>
+        </p:nvSpPr>
+        <p:spPr>
+          <a:xfrm>
+            <a:off x="605123" y="1692425"/>
+            <a:ext cx="5347929" cy="2677656"/>
+          </a:xfrm>
+          <a:prstGeom prst="rect">
+            <a:avLst/>
+          </a:prstGeom>
+          <a:noFill/>
+        </p:spPr>
+        <p:txBody>
+          <a:bodyPr wrap="square" rtlCol="0">
+            <a:spAutoFit/>
+          </a:bodyPr>
+          <a:lstStyle/>
+          <a:p>
+            <a:r>
+              <a:rPr lang="en-US" sz="1400" dirty="0">
+                <a:latin typeface="Courier New" panose="02070309020205020404" pitchFamily="49" charset="0"/>
+                <a:cs typeface="Courier New" panose="02070309020205020404" pitchFamily="49" charset="0"/>
+              </a:rPr>
+              <a:t>{</a:t>
+            </a:r>
+          </a:p>
+          <a:p>
+            <a:r>
+              <a:rPr lang="en-US" sz="1400" dirty="0">
+                <a:latin typeface="Courier New" panose="02070309020205020404" pitchFamily="49" charset="0"/>
+                <a:cs typeface="Courier New" panose="02070309020205020404" pitchFamily="49" charset="0"/>
+              </a:rPr>
+              <a:t>  "</a:t>
+            </a:r>
+            <a:r>
+              <a:rPr lang="en-US" sz="1400" dirty="0" err="1">
+                <a:latin typeface="Courier New" panose="02070309020205020404" pitchFamily="49" charset="0"/>
+                <a:cs typeface="Courier New" panose="02070309020205020404" pitchFamily="49" charset="0"/>
+              </a:rPr>
+              <a:t>FullName</a:t>
+            </a:r>
+            <a:r>
+              <a:rPr lang="en-US" sz="1400" dirty="0">
+                <a:latin typeface="Courier New" panose="02070309020205020404" pitchFamily="49" charset="0"/>
+                <a:cs typeface="Courier New" panose="02070309020205020404" pitchFamily="49" charset="0"/>
+              </a:rPr>
+              <a:t>": "</a:t>
+            </a:r>
+            <a:r>
+              <a:rPr lang="en-US" sz="1400" dirty="0" err="1">
+                <a:latin typeface="Courier New" panose="02070309020205020404" pitchFamily="49" charset="0"/>
+                <a:cs typeface="Courier New" panose="02070309020205020404" pitchFamily="49" charset="0"/>
+              </a:rPr>
+              <a:t>SaasOneCS</a:t>
+            </a:r>
+            <a:r>
+              <a:rPr lang="en-US" sz="1400" dirty="0">
+                <a:latin typeface="Courier New" panose="02070309020205020404" pitchFamily="49" charset="0"/>
+                <a:cs typeface="Courier New" panose="02070309020205020404" pitchFamily="49" charset="0"/>
+              </a:rPr>
+              <a:t>/$OneCS1/</a:t>
+            </a:r>
+            <a:r>
+              <a:rPr lang="en-US" sz="1400" b="1" dirty="0">
+                <a:latin typeface="Courier New" panose="02070309020205020404" pitchFamily="49" charset="0"/>
+                <a:cs typeface="Courier New" panose="02070309020205020404" pitchFamily="49" charset="0"/>
+              </a:rPr>
+              <a:t>#Production</a:t>
+            </a:r>
+            <a:r>
+              <a:rPr lang="en-US" sz="1400" dirty="0">
+                <a:latin typeface="Courier New" panose="02070309020205020404" pitchFamily="49" charset="0"/>
+                <a:cs typeface="Courier New" panose="02070309020205020404" pitchFamily="49" charset="0"/>
+              </a:rPr>
+              <a:t>",</a:t>
+            </a:r>
+            <a:br>
+              <a:rPr lang="en-US" sz="1400" dirty="0">
+                <a:latin typeface="Courier New" panose="02070309020205020404" pitchFamily="49" charset="0"/>
+                <a:cs typeface="Courier New" panose="02070309020205020404" pitchFamily="49" charset="0"/>
+              </a:rPr>
+            </a:br>
+            <a:r>
+              <a:rPr lang="en-US" sz="1400" dirty="0">
+                <a:latin typeface="Courier New" panose="02070309020205020404" pitchFamily="49" charset="0"/>
+                <a:cs typeface="Courier New" panose="02070309020205020404" pitchFamily="49" charset="0"/>
+              </a:rPr>
+              <a:t>  "Parties": [</a:t>
+            </a:r>
+            <a:br>
+              <a:rPr lang="en-US" sz="1400" dirty="0">
+                <a:latin typeface="Courier New" panose="02070309020205020404" pitchFamily="49" charset="0"/>
+                <a:cs typeface="Courier New" panose="02070309020205020404" pitchFamily="49" charset="0"/>
+              </a:rPr>
+            </a:br>
+            <a:r>
+              <a:rPr lang="en-US" sz="1400" dirty="0">
+                <a:latin typeface="Courier New" panose="02070309020205020404" pitchFamily="49" charset="0"/>
+                <a:cs typeface="Courier New" panose="02070309020205020404" pitchFamily="49" charset="0"/>
+              </a:rPr>
+              <a:t>  {</a:t>
+            </a:r>
+          </a:p>
+          <a:p>
+            <a:r>
+              <a:rPr lang="en-US" sz="1400" dirty="0">
+                <a:latin typeface="Courier New" panose="02070309020205020404" pitchFamily="49" charset="0"/>
+                <a:cs typeface="Courier New" panose="02070309020205020404" pitchFamily="49" charset="0"/>
+              </a:rPr>
+              <a:t>    "</a:t>
+            </a:r>
+            <a:r>
+              <a:rPr lang="en-US" sz="1400" dirty="0" err="1">
+                <a:latin typeface="Courier New" panose="02070309020205020404" pitchFamily="49" charset="0"/>
+                <a:cs typeface="Courier New" panose="02070309020205020404" pitchFamily="49" charset="0"/>
+              </a:rPr>
+              <a:t>FullName</a:t>
+            </a:r>
+            <a:r>
+              <a:rPr lang="en-US" sz="1400" dirty="0">
+                <a:latin typeface="Courier New" panose="02070309020205020404" pitchFamily="49" charset="0"/>
+                <a:cs typeface="Courier New" panose="02070309020205020404" pitchFamily="49" charset="0"/>
+              </a:rPr>
+              <a:t>": "</a:t>
+            </a:r>
+            <a:r>
+              <a:rPr lang="en-US" sz="1400" dirty="0" err="1">
+                <a:latin typeface="Courier New" panose="02070309020205020404" pitchFamily="49" charset="0"/>
+                <a:cs typeface="Courier New" panose="02070309020205020404" pitchFamily="49" charset="0"/>
+              </a:rPr>
+              <a:t>LaToulousaine</a:t>
+            </a:r>
+            <a:r>
+              <a:rPr lang="en-US" sz="1400" dirty="0">
+                <a:latin typeface="Courier New" panose="02070309020205020404" pitchFamily="49" charset="0"/>
+                <a:cs typeface="Courier New" panose="02070309020205020404" pitchFamily="49" charset="0"/>
+              </a:rPr>
+              <a:t>/$</a:t>
+            </a:r>
+            <a:r>
+              <a:rPr lang="en-US" sz="1400" dirty="0" err="1">
+                <a:latin typeface="Courier New" panose="02070309020205020404" pitchFamily="49" charset="0"/>
+                <a:cs typeface="Courier New" panose="02070309020205020404" pitchFamily="49" charset="0"/>
+              </a:rPr>
+              <a:t>LaToulousaine</a:t>
+            </a:r>
+            <a:r>
+              <a:rPr lang="en-US" sz="1400" dirty="0">
+                <a:latin typeface="Courier New" panose="02070309020205020404" pitchFamily="49" charset="0"/>
+                <a:cs typeface="Courier New" panose="02070309020205020404" pitchFamily="49" charset="0"/>
+              </a:rPr>
+              <a:t>",</a:t>
+            </a:r>
+          </a:p>
+          <a:p>
+            <a:r>
+              <a:rPr lang="en-US" sz="1400" dirty="0">
+                <a:latin typeface="Courier New" panose="02070309020205020404" pitchFamily="49" charset="0"/>
+                <a:cs typeface="Courier New" panose="02070309020205020404" pitchFamily="49" charset="0"/>
+              </a:rPr>
+              <a:t>    "</a:t>
+            </a:r>
+            <a:r>
+              <a:rPr lang="en-US" sz="1400" dirty="0" err="1">
+                <a:latin typeface="Courier New" panose="02070309020205020404" pitchFamily="49" charset="0"/>
+                <a:cs typeface="Courier New" panose="02070309020205020404" pitchFamily="49" charset="0"/>
+              </a:rPr>
+              <a:t>EnvironmentName</a:t>
+            </a:r>
+            <a:r>
+              <a:rPr lang="en-US" sz="1400" dirty="0">
+                <a:latin typeface="Courier New" panose="02070309020205020404" pitchFamily="49" charset="0"/>
+                <a:cs typeface="Courier New" panose="02070309020205020404" pitchFamily="49" charset="0"/>
+              </a:rPr>
+              <a:t>": "</a:t>
+            </a:r>
+            <a:r>
+              <a:rPr lang="en-US" sz="1400" b="1" dirty="0">
+                <a:latin typeface="Courier New" panose="02070309020205020404" pitchFamily="49" charset="0"/>
+                <a:cs typeface="Courier New" panose="02070309020205020404" pitchFamily="49" charset="0"/>
+              </a:rPr>
+              <a:t>#Staging</a:t>
+            </a:r>
+            <a:r>
+              <a:rPr lang="en-US" sz="1400" dirty="0">
+                <a:latin typeface="Courier New" panose="02070309020205020404" pitchFamily="49" charset="0"/>
+                <a:cs typeface="Courier New" panose="02070309020205020404" pitchFamily="49" charset="0"/>
+              </a:rPr>
+              <a:t>",</a:t>
+            </a:r>
+          </a:p>
+          <a:p>
+            <a:r>
+              <a:rPr lang="en-US" sz="1400" dirty="0">
+                <a:latin typeface="Courier New" panose="02070309020205020404" pitchFamily="49" charset="0"/>
+                <a:cs typeface="Courier New" panose="02070309020205020404" pitchFamily="49" charset="0"/>
+              </a:rPr>
+              <a:t>    "Parties": [</a:t>
+            </a:r>
+          </a:p>
+          <a:p>
+            <a:r>
+              <a:rPr lang="en-US" sz="1400" dirty="0">
+                <a:latin typeface="Courier New" panose="02070309020205020404" pitchFamily="49" charset="0"/>
+                <a:cs typeface="Courier New" panose="02070309020205020404" pitchFamily="49" charset="0"/>
+              </a:rPr>
+              <a:t>    {</a:t>
+            </a:r>
+          </a:p>
+          <a:p>
+            <a:r>
+              <a:rPr lang="en-US" sz="1400" dirty="0">
+                <a:latin typeface="Courier New" panose="02070309020205020404" pitchFamily="49" charset="0"/>
+                <a:cs typeface="Courier New" panose="02070309020205020404" pitchFamily="49" charset="0"/>
+              </a:rPr>
+              <a:t>      "</a:t>
+            </a:r>
+            <a:r>
+              <a:rPr lang="en-US" sz="1400" dirty="0" err="1">
+                <a:latin typeface="Courier New" panose="02070309020205020404" pitchFamily="49" charset="0"/>
+                <a:cs typeface="Courier New" panose="02070309020205020404" pitchFamily="49" charset="0"/>
+              </a:rPr>
+              <a:t>PartyName</a:t>
+            </a:r>
+            <a:r>
+              <a:rPr lang="en-US" sz="1400" dirty="0">
+                <a:latin typeface="Courier New" panose="02070309020205020404" pitchFamily="49" charset="0"/>
+                <a:cs typeface="Courier New" panose="02070309020205020404" pitchFamily="49" charset="0"/>
+              </a:rPr>
+              <a:t>": "$</a:t>
+            </a:r>
+            <a:r>
+              <a:rPr lang="en-US" sz="1400" dirty="0" err="1">
+                <a:latin typeface="Courier New" panose="02070309020205020404" pitchFamily="49" charset="0"/>
+                <a:cs typeface="Courier New" panose="02070309020205020404" pitchFamily="49" charset="0"/>
+              </a:rPr>
+              <a:t>SignatureBox</a:t>
+            </a:r>
+            <a:r>
+              <a:rPr lang="en-US" sz="1400" dirty="0">
+                <a:latin typeface="Courier New" panose="02070309020205020404" pitchFamily="49" charset="0"/>
+                <a:cs typeface="Courier New" panose="02070309020205020404" pitchFamily="49" charset="0"/>
+              </a:rPr>
+              <a:t>"</a:t>
+            </a:r>
+          </a:p>
+          <a:p>
+            <a:r>
+              <a:rPr lang="en-US" sz="1400" dirty="0">
+                <a:latin typeface="Courier New" panose="02070309020205020404" pitchFamily="49" charset="0"/>
+                <a:cs typeface="Courier New" panose="02070309020205020404" pitchFamily="49" charset="0"/>
+              </a:rPr>
+              <a:t>    }]</a:t>
             </a:r>
           </a:p>
           <a:p>
@@ -9253,10 +9814,10 @@
       </p:sp>
       <p:sp>
         <p:nvSpPr>
-          <p:cNvPr id="4" name="TextBox 3">
+          <p:cNvPr id="3" name="TextBox 2">
             <a:extLst>
               <a:ext uri="{FF2B5EF4-FFF2-40B4-BE49-F238E27FC236}">
-                <a16:creationId xmlns:a16="http://schemas.microsoft.com/office/drawing/2014/main" id="{1BEF56BE-36E9-9C16-0573-8234C8D9F689}"/>
+                <a16:creationId xmlns:a16="http://schemas.microsoft.com/office/drawing/2014/main" id="{27F5718A-75F5-2836-EB73-22530B20A975}"/>
               </a:ext>
             </a:extLst>
           </p:cNvPr>
@@ -9265,8 +9826,8 @@
         </p:nvSpPr>
         <p:spPr>
           <a:xfrm>
-            <a:off x="838201" y="1544768"/>
-            <a:ext cx="4759960" cy="4401205"/>
+            <a:off x="654837" y="1690688"/>
+            <a:ext cx="6789455" cy="3970318"/>
           </a:xfrm>
           <a:prstGeom prst="rect">
             <a:avLst/>
@@ -9300,7 +9861,7 @@
                 <a:latin typeface="Courier New" panose="02070309020205020404" pitchFamily="49" charset="0"/>
                 <a:cs typeface="Courier New" panose="02070309020205020404" pitchFamily="49" charset="0"/>
               </a:rPr>
-              <a:t>DomainName</a:t>
+              <a:t>FullName</a:t>
             </a:r>
             <a:r>
               <a:rPr lang="en-US" sz="1400" dirty="0">
@@ -9321,6 +9882,366 @@
                 <a:latin typeface="Courier New" panose="02070309020205020404" pitchFamily="49" charset="0"/>
                 <a:cs typeface="Courier New" panose="02070309020205020404" pitchFamily="49" charset="0"/>
               </a:rPr>
+              <a:t>/$OneCS1",</a:t>
+            </a:r>
+            <a:br>
+              <a:rPr lang="en-US" sz="1400" dirty="0">
+                <a:latin typeface="Courier New" panose="02070309020205020404" pitchFamily="49" charset="0"/>
+                <a:cs typeface="Courier New" panose="02070309020205020404" pitchFamily="49" charset="0"/>
+              </a:rPr>
+            </a:br>
+            <a:r>
+              <a:rPr lang="en-US" sz="1400" dirty="0">
+                <a:latin typeface="Courier New" panose="02070309020205020404" pitchFamily="49" charset="0"/>
+                <a:cs typeface="Courier New" panose="02070309020205020404" pitchFamily="49" charset="0"/>
+              </a:rPr>
+              <a:t>  "Parties": [</a:t>
+            </a:r>
+            <a:br>
+              <a:rPr lang="en-US" sz="1400" dirty="0">
+                <a:latin typeface="Courier New" panose="02070309020205020404" pitchFamily="49" charset="0"/>
+                <a:cs typeface="Courier New" panose="02070309020205020404" pitchFamily="49" charset="0"/>
+              </a:rPr>
+            </a:br>
+            <a:r>
+              <a:rPr lang="en-US" sz="1400" dirty="0">
+                <a:latin typeface="Courier New" panose="02070309020205020404" pitchFamily="49" charset="0"/>
+                <a:cs typeface="Courier New" panose="02070309020205020404" pitchFamily="49" charset="0"/>
+              </a:rPr>
+              <a:t>  {</a:t>
+            </a:r>
+          </a:p>
+          <a:p>
+            <a:r>
+              <a:rPr lang="en-US" sz="1400" dirty="0">
+                <a:latin typeface="Courier New" panose="02070309020205020404" pitchFamily="49" charset="0"/>
+                <a:cs typeface="Courier New" panose="02070309020205020404" pitchFamily="49" charset="0"/>
+              </a:rPr>
+              <a:t>    "</a:t>
+            </a:r>
+            <a:r>
+              <a:rPr lang="en-US" sz="1400" dirty="0" err="1">
+                <a:latin typeface="Courier New" panose="02070309020205020404" pitchFamily="49" charset="0"/>
+                <a:cs typeface="Courier New" panose="02070309020205020404" pitchFamily="49" charset="0"/>
+              </a:rPr>
+              <a:t>FullName</a:t>
+            </a:r>
+            <a:r>
+              <a:rPr lang="en-US" sz="1400" dirty="0">
+                <a:latin typeface="Courier New" panose="02070309020205020404" pitchFamily="49" charset="0"/>
+                <a:cs typeface="Courier New" panose="02070309020205020404" pitchFamily="49" charset="0"/>
+              </a:rPr>
+              <a:t>": "</a:t>
+            </a:r>
+            <a:r>
+              <a:rPr lang="en-US" sz="1400" dirty="0" err="1">
+                <a:latin typeface="Courier New" panose="02070309020205020404" pitchFamily="49" charset="0"/>
+                <a:cs typeface="Courier New" panose="02070309020205020404" pitchFamily="49" charset="0"/>
+              </a:rPr>
+              <a:t>LaToulousaine</a:t>
+            </a:r>
+            <a:r>
+              <a:rPr lang="en-US" sz="1400" dirty="0">
+                <a:latin typeface="Courier New" panose="02070309020205020404" pitchFamily="49" charset="0"/>
+                <a:cs typeface="Courier New" panose="02070309020205020404" pitchFamily="49" charset="0"/>
+              </a:rPr>
+              <a:t>/France/$France",</a:t>
+            </a:r>
+          </a:p>
+          <a:p>
+            <a:r>
+              <a:rPr lang="en-US" sz="1400" dirty="0">
+                <a:latin typeface="Courier New" panose="02070309020205020404" pitchFamily="49" charset="0"/>
+                <a:cs typeface="Courier New" panose="02070309020205020404" pitchFamily="49" charset="0"/>
+              </a:rPr>
+              <a:t>    "Parties": [</a:t>
+            </a:r>
+          </a:p>
+          <a:p>
+            <a:r>
+              <a:rPr lang="en-US" sz="1400" dirty="0">
+                <a:latin typeface="Courier New" panose="02070309020205020404" pitchFamily="49" charset="0"/>
+                <a:cs typeface="Courier New" panose="02070309020205020404" pitchFamily="49" charset="0"/>
+              </a:rPr>
+              <a:t>    {</a:t>
+            </a:r>
+          </a:p>
+          <a:p>
+            <a:r>
+              <a:rPr lang="en-US" sz="1400" dirty="0">
+                <a:latin typeface="Courier New" panose="02070309020205020404" pitchFamily="49" charset="0"/>
+                <a:cs typeface="Courier New" panose="02070309020205020404" pitchFamily="49" charset="0"/>
+              </a:rPr>
+              <a:t>      "</a:t>
+            </a:r>
+            <a:r>
+              <a:rPr lang="en-US" sz="1400" dirty="0" err="1">
+                <a:latin typeface="Courier New" panose="02070309020205020404" pitchFamily="49" charset="0"/>
+                <a:cs typeface="Courier New" panose="02070309020205020404" pitchFamily="49" charset="0"/>
+              </a:rPr>
+              <a:t>PartyName</a:t>
+            </a:r>
+            <a:r>
+              <a:rPr lang="en-US" sz="1400" dirty="0">
+                <a:latin typeface="Courier New" panose="02070309020205020404" pitchFamily="49" charset="0"/>
+                <a:cs typeface="Courier New" panose="02070309020205020404" pitchFamily="49" charset="0"/>
+              </a:rPr>
+              <a:t>": "$</a:t>
+            </a:r>
+            <a:r>
+              <a:rPr lang="en-US" sz="1400" dirty="0" err="1">
+                <a:latin typeface="Courier New" panose="02070309020205020404" pitchFamily="49" charset="0"/>
+                <a:cs typeface="Courier New" panose="02070309020205020404" pitchFamily="49" charset="0"/>
+              </a:rPr>
+              <a:t>SignatureBox</a:t>
+            </a:r>
+            <a:r>
+              <a:rPr lang="en-US" sz="1400" dirty="0">
+                <a:latin typeface="Courier New" panose="02070309020205020404" pitchFamily="49" charset="0"/>
+                <a:cs typeface="Courier New" panose="02070309020205020404" pitchFamily="49" charset="0"/>
+              </a:rPr>
+              <a:t>"</a:t>
+            </a:r>
+          </a:p>
+          <a:p>
+            <a:r>
+              <a:rPr lang="en-US" sz="1400" dirty="0">
+                <a:latin typeface="Courier New" panose="02070309020205020404" pitchFamily="49" charset="0"/>
+                <a:cs typeface="Courier New" panose="02070309020205020404" pitchFamily="49" charset="0"/>
+              </a:rPr>
+              <a:t>    }]</a:t>
+            </a:r>
+          </a:p>
+          <a:p>
+            <a:r>
+              <a:rPr lang="en-US" sz="1400" dirty="0">
+                <a:latin typeface="Courier New" panose="02070309020205020404" pitchFamily="49" charset="0"/>
+                <a:cs typeface="Courier New" panose="02070309020205020404" pitchFamily="49" charset="0"/>
+              </a:rPr>
+              <a:t>  },</a:t>
+            </a:r>
+          </a:p>
+          <a:p>
+            <a:r>
+              <a:rPr lang="en-US" sz="1400" dirty="0">
+                <a:latin typeface="Courier New" panose="02070309020205020404" pitchFamily="49" charset="0"/>
+                <a:cs typeface="Courier New" panose="02070309020205020404" pitchFamily="49" charset="0"/>
+              </a:rPr>
+              <a:t>  {</a:t>
+            </a:r>
+          </a:p>
+          <a:p>
+            <a:r>
+              <a:rPr lang="en-US" sz="1400" dirty="0">
+                <a:latin typeface="Courier New" panose="02070309020205020404" pitchFamily="49" charset="0"/>
+                <a:cs typeface="Courier New" panose="02070309020205020404" pitchFamily="49" charset="0"/>
+              </a:rPr>
+              <a:t>    "</a:t>
+            </a:r>
+            <a:r>
+              <a:rPr lang="en-US" sz="1400" dirty="0" err="1">
+                <a:latin typeface="Courier New" panose="02070309020205020404" pitchFamily="49" charset="0"/>
+                <a:cs typeface="Courier New" panose="02070309020205020404" pitchFamily="49" charset="0"/>
+              </a:rPr>
+              <a:t>FullName</a:t>
+            </a:r>
+            <a:r>
+              <a:rPr lang="en-US" sz="1400" dirty="0">
+                <a:latin typeface="Courier New" panose="02070309020205020404" pitchFamily="49" charset="0"/>
+                <a:cs typeface="Courier New" panose="02070309020205020404" pitchFamily="49" charset="0"/>
+              </a:rPr>
+              <a:t>": "</a:t>
+            </a:r>
+            <a:r>
+              <a:rPr lang="en-US" sz="1400" dirty="0" err="1">
+                <a:latin typeface="Courier New" panose="02070309020205020404" pitchFamily="49" charset="0"/>
+                <a:cs typeface="Courier New" panose="02070309020205020404" pitchFamily="49" charset="0"/>
+              </a:rPr>
+              <a:t>LaToulousaine</a:t>
+            </a:r>
+            <a:r>
+              <a:rPr lang="en-US" sz="1400" dirty="0">
+                <a:latin typeface="Courier New" panose="02070309020205020404" pitchFamily="49" charset="0"/>
+                <a:cs typeface="Courier New" panose="02070309020205020404" pitchFamily="49" charset="0"/>
+              </a:rPr>
+              <a:t>/London/$London",</a:t>
+            </a:r>
+          </a:p>
+          <a:p>
+            <a:r>
+              <a:rPr lang="en-US" sz="1400" dirty="0">
+                <a:latin typeface="Courier New" panose="02070309020205020404" pitchFamily="49" charset="0"/>
+                <a:cs typeface="Courier New" panose="02070309020205020404" pitchFamily="49" charset="0"/>
+              </a:rPr>
+              <a:t>    "Parties": [</a:t>
+            </a:r>
+          </a:p>
+          <a:p>
+            <a:r>
+              <a:rPr lang="en-US" sz="1400" dirty="0">
+                <a:latin typeface="Courier New" panose="02070309020205020404" pitchFamily="49" charset="0"/>
+                <a:cs typeface="Courier New" panose="02070309020205020404" pitchFamily="49" charset="0"/>
+              </a:rPr>
+              <a:t>    {</a:t>
+            </a:r>
+          </a:p>
+          <a:p>
+            <a:r>
+              <a:rPr lang="en-US" sz="1400" dirty="0">
+                <a:latin typeface="Courier New" panose="02070309020205020404" pitchFamily="49" charset="0"/>
+                <a:cs typeface="Courier New" panose="02070309020205020404" pitchFamily="49" charset="0"/>
+              </a:rPr>
+              <a:t>      "</a:t>
+            </a:r>
+            <a:r>
+              <a:rPr lang="en-US" sz="1400" dirty="0" err="1">
+                <a:latin typeface="Courier New" panose="02070309020205020404" pitchFamily="49" charset="0"/>
+                <a:cs typeface="Courier New" panose="02070309020205020404" pitchFamily="49" charset="0"/>
+              </a:rPr>
+              <a:t>PartyName</a:t>
+            </a:r>
+            <a:r>
+              <a:rPr lang="en-US" sz="1400" dirty="0">
+                <a:latin typeface="Courier New" panose="02070309020205020404" pitchFamily="49" charset="0"/>
+                <a:cs typeface="Courier New" panose="02070309020205020404" pitchFamily="49" charset="0"/>
+              </a:rPr>
+              <a:t>": "$</a:t>
+            </a:r>
+            <a:r>
+              <a:rPr lang="en-US" sz="1400" dirty="0" err="1">
+                <a:latin typeface="Courier New" panose="02070309020205020404" pitchFamily="49" charset="0"/>
+                <a:cs typeface="Courier New" panose="02070309020205020404" pitchFamily="49" charset="0"/>
+              </a:rPr>
+              <a:t>SignatureBox</a:t>
+            </a:r>
+            <a:r>
+              <a:rPr lang="en-US" sz="1400" dirty="0">
+                <a:latin typeface="Courier New" panose="02070309020205020404" pitchFamily="49" charset="0"/>
+                <a:cs typeface="Courier New" panose="02070309020205020404" pitchFamily="49" charset="0"/>
+              </a:rPr>
+              <a:t>"</a:t>
+            </a:r>
+          </a:p>
+          <a:p>
+            <a:r>
+              <a:rPr lang="en-US" sz="1400" dirty="0">
+                <a:latin typeface="Courier New" panose="02070309020205020404" pitchFamily="49" charset="0"/>
+                <a:cs typeface="Courier New" panose="02070309020205020404" pitchFamily="49" charset="0"/>
+              </a:rPr>
+              <a:t>    }]</a:t>
+            </a:r>
+          </a:p>
+          <a:p>
+            <a:r>
+              <a:rPr lang="en-US" sz="1400" dirty="0">
+                <a:latin typeface="Courier New" panose="02070309020205020404" pitchFamily="49" charset="0"/>
+                <a:cs typeface="Courier New" panose="02070309020205020404" pitchFamily="49" charset="0"/>
+              </a:rPr>
+              <a:t>  }]</a:t>
+            </a:r>
+          </a:p>
+          <a:p>
+            <a:r>
+              <a:rPr lang="en-US" sz="1400" dirty="0">
+                <a:latin typeface="Courier New" panose="02070309020205020404" pitchFamily="49" charset="0"/>
+                <a:cs typeface="Courier New" panose="02070309020205020404" pitchFamily="49" charset="0"/>
+              </a:rPr>
+              <a:t>}</a:t>
+            </a:r>
+          </a:p>
+        </p:txBody>
+      </p:sp>
+      <p:sp>
+        <p:nvSpPr>
+          <p:cNvPr id="5" name="TextBox 4">
+            <a:extLst>
+              <a:ext uri="{FF2B5EF4-FFF2-40B4-BE49-F238E27FC236}">
+                <a16:creationId xmlns:a16="http://schemas.microsoft.com/office/drawing/2014/main" id="{D8052A3A-EBF7-3C28-4E2D-D46F44ACBE03}"/>
+              </a:ext>
+            </a:extLst>
+          </p:cNvPr>
+          <p:cNvSpPr txBox="1"/>
+          <p:nvPr/>
+        </p:nvSpPr>
+        <p:spPr>
+          <a:xfrm>
+            <a:off x="6280824" y="1690688"/>
+            <a:ext cx="5613588" cy="1815882"/>
+          </a:xfrm>
+          <a:prstGeom prst="rect">
+            <a:avLst/>
+          </a:prstGeom>
+          <a:noFill/>
+        </p:spPr>
+        <p:txBody>
+          <a:bodyPr wrap="square" rtlCol="0">
+            <a:spAutoFit/>
+          </a:bodyPr>
+          <a:lstStyle/>
+          <a:p>
+            <a:r>
+              <a:rPr lang="en-US" sz="1400" dirty="0">
+                <a:latin typeface="Courier New" panose="02070309020205020404" pitchFamily="49" charset="0"/>
+                <a:cs typeface="Courier New" panose="02070309020205020404" pitchFamily="49" charset="0"/>
+              </a:rPr>
+              <a:t>{</a:t>
+            </a:r>
+          </a:p>
+          <a:p>
+            <a:r>
+              <a:rPr lang="en-US" sz="1400" dirty="0">
+                <a:latin typeface="Courier New" panose="02070309020205020404" pitchFamily="49" charset="0"/>
+                <a:cs typeface="Courier New" panose="02070309020205020404" pitchFamily="49" charset="0"/>
+              </a:rPr>
+              <a:t>  "</a:t>
+            </a:r>
+            <a:r>
+              <a:rPr lang="en-US" sz="1400" dirty="0" err="1">
+                <a:latin typeface="Courier New" panose="02070309020205020404" pitchFamily="49" charset="0"/>
+                <a:cs typeface="Courier New" panose="02070309020205020404" pitchFamily="49" charset="0"/>
+              </a:rPr>
+              <a:t>FullName</a:t>
+            </a:r>
+            <a:r>
+              <a:rPr lang="en-US" sz="1400" dirty="0">
+                <a:latin typeface="Courier New" panose="02070309020205020404" pitchFamily="49" charset="0"/>
+                <a:cs typeface="Courier New" panose="02070309020205020404" pitchFamily="49" charset="0"/>
+              </a:rPr>
+              <a:t>": "</a:t>
+            </a:r>
+            <a:r>
+              <a:rPr lang="en-US" sz="1400" dirty="0" err="1">
+                <a:latin typeface="Courier New" panose="02070309020205020404" pitchFamily="49" charset="0"/>
+                <a:cs typeface="Courier New" panose="02070309020205020404" pitchFamily="49" charset="0"/>
+              </a:rPr>
+              <a:t>LaToulousaine</a:t>
+            </a:r>
+            <a:r>
+              <a:rPr lang="en-US" sz="1400" dirty="0">
+                <a:latin typeface="Courier New" panose="02070309020205020404" pitchFamily="49" charset="0"/>
+                <a:cs typeface="Courier New" panose="02070309020205020404" pitchFamily="49" charset="0"/>
+              </a:rPr>
+              <a:t>/France/</a:t>
+            </a:r>
+            <a:r>
+              <a:rPr lang="en-US" sz="1400" b="1" dirty="0">
+                <a:latin typeface="Courier New" panose="02070309020205020404" pitchFamily="49" charset="0"/>
+                <a:cs typeface="Courier New" panose="02070309020205020404" pitchFamily="49" charset="0"/>
+              </a:rPr>
+              <a:t>$</a:t>
+            </a:r>
+            <a:r>
+              <a:rPr lang="en-US" sz="1400" b="1" dirty="0" err="1">
+                <a:latin typeface="Courier New" panose="02070309020205020404" pitchFamily="49" charset="0"/>
+                <a:cs typeface="Courier New" panose="02070309020205020404" pitchFamily="49" charset="0"/>
+              </a:rPr>
+              <a:t>SignatureBox</a:t>
+            </a:r>
+            <a:r>
+              <a:rPr lang="en-US" sz="1400" dirty="0">
+                <a:latin typeface="Courier New" panose="02070309020205020404" pitchFamily="49" charset="0"/>
+                <a:cs typeface="Courier New" panose="02070309020205020404" pitchFamily="49" charset="0"/>
+              </a:rPr>
               <a:t>",</a:t>
             </a:r>
           </a:p>
@@ -9330,68 +10251,182 @@
                 <a:latin typeface="Courier New" panose="02070309020205020404" pitchFamily="49" charset="0"/>
                 <a:cs typeface="Courier New" panose="02070309020205020404" pitchFamily="49" charset="0"/>
               </a:rPr>
-              <a:t>  </a:t>
+              <a:t>  "Parties": [</a:t>
+            </a:r>
+          </a:p>
+          <a:p>
+            <a:r>
+              <a:rPr lang="en-US" sz="1400" dirty="0">
+                <a:latin typeface="Courier New" panose="02070309020205020404" pitchFamily="49" charset="0"/>
+                <a:cs typeface="Courier New" panose="02070309020205020404" pitchFamily="49" charset="0"/>
+              </a:rPr>
+              <a:t>  {</a:t>
+            </a:r>
+          </a:p>
+          <a:p>
+            <a:r>
+              <a:rPr lang="en-US" sz="1400" dirty="0">
+                <a:latin typeface="Courier New" panose="02070309020205020404" pitchFamily="49" charset="0"/>
+                <a:cs typeface="Courier New" panose="02070309020205020404" pitchFamily="49" charset="0"/>
+              </a:rPr>
+              <a:t>    </a:t>
             </a:r>
             <a:r>
               <a:rPr lang="en-US" sz="1400" b="1" dirty="0">
                 <a:latin typeface="Courier New" panose="02070309020205020404" pitchFamily="49" charset="0"/>
                 <a:cs typeface="Courier New" panose="02070309020205020404" pitchFamily="49" charset="0"/>
               </a:rPr>
-              <a:t>"Environment": "#Production"</a:t>
-            </a:r>
-            <a:r>
-              <a:rPr lang="en-US" sz="1400" dirty="0">
-                <a:latin typeface="Courier New" panose="02070309020205020404" pitchFamily="49" charset="0"/>
-                <a:cs typeface="Courier New" panose="02070309020205020404" pitchFamily="49" charset="0"/>
-              </a:rPr>
-              <a:t>,</a:t>
-            </a:r>
-          </a:p>
-          <a:p>
-            <a:r>
-              <a:rPr lang="en-US" sz="1400" dirty="0">
-                <a:latin typeface="Courier New" panose="02070309020205020404" pitchFamily="49" charset="0"/>
-                <a:cs typeface="Courier New" panose="02070309020205020404" pitchFamily="49" charset="0"/>
-              </a:rPr>
-              <a:t>  "Local": {</a:t>
-            </a:r>
-          </a:p>
-          <a:p>
-            <a:r>
-              <a:rPr lang="en-US" sz="1400" dirty="0">
-                <a:latin typeface="Courier New" panose="02070309020205020404" pitchFamily="49" charset="0"/>
-                <a:cs typeface="Courier New" panose="02070309020205020404" pitchFamily="49" charset="0"/>
-              </a:rPr>
-              <a:t>    "Name": "OneCS1"</a:t>
-            </a:r>
-          </a:p>
-          <a:p>
-            <a:r>
-              <a:rPr lang="en-US" sz="1400" dirty="0">
-                <a:latin typeface="Courier New" panose="02070309020205020404" pitchFamily="49" charset="0"/>
-                <a:cs typeface="Courier New" panose="02070309020205020404" pitchFamily="49" charset="0"/>
-              </a:rPr>
-              <a:t>  },</a:t>
-            </a:r>
-            <a:br>
-              <a:rPr lang="en-US" sz="1400" dirty="0">
-                <a:latin typeface="Courier New" panose="02070309020205020404" pitchFamily="49" charset="0"/>
-                <a:cs typeface="Courier New" panose="02070309020205020404" pitchFamily="49" charset="0"/>
-              </a:rPr>
-            </a:br>
-            <a:r>
-              <a:rPr lang="en-US" sz="1400" dirty="0">
-                <a:latin typeface="Courier New" panose="02070309020205020404" pitchFamily="49" charset="0"/>
-                <a:cs typeface="Courier New" panose="02070309020205020404" pitchFamily="49" charset="0"/>
-              </a:rPr>
-              <a:t>  "Remotes": [</a:t>
-            </a:r>
-            <a:br>
-              <a:rPr lang="en-US" sz="1400" dirty="0">
-                <a:latin typeface="Courier New" panose="02070309020205020404" pitchFamily="49" charset="0"/>
-                <a:cs typeface="Courier New" panose="02070309020205020404" pitchFamily="49" charset="0"/>
-              </a:rPr>
-            </a:br>
+              <a:t>"</a:t>
+            </a:r>
+            <a:r>
+              <a:rPr lang="en-US" sz="1400" b="1" dirty="0" err="1">
+                <a:latin typeface="Courier New" panose="02070309020205020404" pitchFamily="49" charset="0"/>
+                <a:cs typeface="Courier New" panose="02070309020205020404" pitchFamily="49" charset="0"/>
+              </a:rPr>
+              <a:t>PartyName</a:t>
+            </a:r>
+            <a:r>
+              <a:rPr lang="en-US" sz="1400" b="1" dirty="0">
+                <a:latin typeface="Courier New" panose="02070309020205020404" pitchFamily="49" charset="0"/>
+                <a:cs typeface="Courier New" panose="02070309020205020404" pitchFamily="49" charset="0"/>
+              </a:rPr>
+              <a:t>": "$France",</a:t>
+            </a:r>
+          </a:p>
+          <a:p>
+            <a:pPr lvl="1"/>
+            <a:r>
+              <a:rPr lang="en-US" sz="1400" b="1" dirty="0">
+                <a:latin typeface="Courier New" panose="02070309020205020404" pitchFamily="49" charset="0"/>
+                <a:cs typeface="Courier New" panose="02070309020205020404" pitchFamily="49" charset="0"/>
+              </a:rPr>
+              <a:t>"Address": "27.28.29.30:3712"</a:t>
+            </a:r>
+          </a:p>
+          <a:p>
+            <a:r>
+              <a:rPr lang="en-US" sz="1400" dirty="0">
+                <a:latin typeface="Courier New" panose="02070309020205020404" pitchFamily="49" charset="0"/>
+                <a:cs typeface="Courier New" panose="02070309020205020404" pitchFamily="49" charset="0"/>
+              </a:rPr>
+              <a:t>  }]</a:t>
+            </a:r>
+          </a:p>
+          <a:p>
+            <a:r>
+              <a:rPr lang="en-US" sz="1400" dirty="0">
+                <a:latin typeface="Courier New" panose="02070309020205020404" pitchFamily="49" charset="0"/>
+                <a:cs typeface="Courier New" panose="02070309020205020404" pitchFamily="49" charset="0"/>
+              </a:rPr>
+              <a:t>}</a:t>
+            </a:r>
+          </a:p>
+        </p:txBody>
+      </p:sp>
+      <p:sp>
+        <p:nvSpPr>
+          <p:cNvPr id="6" name="TextBox 5">
+            <a:extLst>
+              <a:ext uri="{FF2B5EF4-FFF2-40B4-BE49-F238E27FC236}">
+                <a16:creationId xmlns:a16="http://schemas.microsoft.com/office/drawing/2014/main" id="{548426AA-A61E-323E-1908-225D6883F628}"/>
+              </a:ext>
+            </a:extLst>
+          </p:cNvPr>
+          <p:cNvSpPr txBox="1"/>
+          <p:nvPr/>
+        </p:nvSpPr>
+        <p:spPr>
+          <a:xfrm>
+            <a:off x="6280824" y="3759063"/>
+            <a:ext cx="5613588" cy="1815882"/>
+          </a:xfrm>
+          <a:prstGeom prst="rect">
+            <a:avLst/>
+          </a:prstGeom>
+          <a:noFill/>
+        </p:spPr>
+        <p:txBody>
+          <a:bodyPr wrap="square" rtlCol="0">
+            <a:spAutoFit/>
+          </a:bodyPr>
+          <a:lstStyle/>
+          <a:p>
+            <a:r>
+              <a:rPr lang="en-US" sz="1400" dirty="0">
+                <a:latin typeface="Courier New" panose="02070309020205020404" pitchFamily="49" charset="0"/>
+                <a:cs typeface="Courier New" panose="02070309020205020404" pitchFamily="49" charset="0"/>
+              </a:rPr>
+              <a:t>{</a:t>
+            </a:r>
+          </a:p>
+          <a:p>
+            <a:r>
+              <a:rPr lang="en-US" sz="1400" dirty="0">
+                <a:latin typeface="Courier New" panose="02070309020205020404" pitchFamily="49" charset="0"/>
+                <a:cs typeface="Courier New" panose="02070309020205020404" pitchFamily="49" charset="0"/>
+              </a:rPr>
+              <a:t>  "</a:t>
+            </a:r>
+            <a:r>
+              <a:rPr lang="en-US" sz="1400" dirty="0" err="1">
+                <a:latin typeface="Courier New" panose="02070309020205020404" pitchFamily="49" charset="0"/>
+                <a:cs typeface="Courier New" panose="02070309020205020404" pitchFamily="49" charset="0"/>
+              </a:rPr>
+              <a:t>FullName</a:t>
+            </a:r>
+            <a:r>
+              <a:rPr lang="en-US" sz="1400" dirty="0">
+                <a:latin typeface="Courier New" panose="02070309020205020404" pitchFamily="49" charset="0"/>
+                <a:cs typeface="Courier New" panose="02070309020205020404" pitchFamily="49" charset="0"/>
+              </a:rPr>
+              <a:t>": "</a:t>
+            </a:r>
+            <a:r>
+              <a:rPr lang="en-US" sz="1400" dirty="0" err="1">
+                <a:latin typeface="Courier New" panose="02070309020205020404" pitchFamily="49" charset="0"/>
+                <a:cs typeface="Courier New" panose="02070309020205020404" pitchFamily="49" charset="0"/>
+              </a:rPr>
+              <a:t>LaToulousaine</a:t>
+            </a:r>
+            <a:r>
+              <a:rPr lang="en-US" sz="1400" dirty="0">
+                <a:latin typeface="Courier New" panose="02070309020205020404" pitchFamily="49" charset="0"/>
+                <a:cs typeface="Courier New" panose="02070309020205020404" pitchFamily="49" charset="0"/>
+              </a:rPr>
+              <a:t>/London/</a:t>
+            </a:r>
+            <a:r>
+              <a:rPr lang="en-US" sz="1400" b="1" dirty="0">
+                <a:latin typeface="Courier New" panose="02070309020205020404" pitchFamily="49" charset="0"/>
+                <a:cs typeface="Courier New" panose="02070309020205020404" pitchFamily="49" charset="0"/>
+              </a:rPr>
+              <a:t>$</a:t>
+            </a:r>
+            <a:r>
+              <a:rPr lang="en-US" sz="1400" b="1" dirty="0" err="1">
+                <a:latin typeface="Courier New" panose="02070309020205020404" pitchFamily="49" charset="0"/>
+                <a:cs typeface="Courier New" panose="02070309020205020404" pitchFamily="49" charset="0"/>
+              </a:rPr>
+              <a:t>SignatureBox</a:t>
+            </a:r>
+            <a:r>
+              <a:rPr lang="en-US" sz="1400" dirty="0">
+                <a:latin typeface="Courier New" panose="02070309020205020404" pitchFamily="49" charset="0"/>
+                <a:cs typeface="Courier New" panose="02070309020205020404" pitchFamily="49" charset="0"/>
+              </a:rPr>
+              <a:t>",</a:t>
+            </a:r>
+          </a:p>
+          <a:p>
+            <a:r>
+              <a:rPr lang="en-US" sz="1400" dirty="0">
+                <a:latin typeface="Courier New" panose="02070309020205020404" pitchFamily="49" charset="0"/>
+                <a:cs typeface="Courier New" panose="02070309020205020404" pitchFamily="49" charset="0"/>
+              </a:rPr>
+              <a:t>  "Parties": [</a:t>
+            </a:r>
+          </a:p>
+          <a:p>
             <a:r>
               <a:rPr lang="en-US" sz="1400" dirty="0">
                 <a:latin typeface="Courier New" panose="02070309020205020404" pitchFamily="49" charset="0"/>
@@ -9406,144 +10441,38 @@
                 <a:latin typeface="Courier New" panose="02070309020205020404" pitchFamily="49" charset="0"/>
                 <a:cs typeface="Courier New" panose="02070309020205020404" pitchFamily="49" charset="0"/>
               </a:rPr>
-              <a:t>    "</a:t>
-            </a:r>
-            <a:r>
-              <a:rPr lang="en-US" sz="1400" dirty="0" err="1">
-                <a:latin typeface="Courier New" panose="02070309020205020404" pitchFamily="49" charset="0"/>
-                <a:cs typeface="Courier New" panose="02070309020205020404" pitchFamily="49" charset="0"/>
-              </a:rPr>
-              <a:t>DomainName</a:t>
-            </a:r>
-            <a:r>
-              <a:rPr lang="en-US" sz="1400" dirty="0">
-                <a:latin typeface="Courier New" panose="02070309020205020404" pitchFamily="49" charset="0"/>
-                <a:cs typeface="Courier New" panose="02070309020205020404" pitchFamily="49" charset="0"/>
-              </a:rPr>
-              <a:t>": "</a:t>
-            </a:r>
-            <a:r>
-              <a:rPr lang="en-US" sz="1400" dirty="0" err="1">
-                <a:latin typeface="Courier New" panose="02070309020205020404" pitchFamily="49" charset="0"/>
-                <a:cs typeface="Courier New" panose="02070309020205020404" pitchFamily="49" charset="0"/>
-              </a:rPr>
-              <a:t>LaToulousaine</a:t>
-            </a:r>
-            <a:r>
-              <a:rPr lang="en-US" sz="1400" dirty="0">
-                <a:latin typeface="Courier New" panose="02070309020205020404" pitchFamily="49" charset="0"/>
-                <a:cs typeface="Courier New" panose="02070309020205020404" pitchFamily="49" charset="0"/>
-              </a:rPr>
-              <a:t>/France",</a:t>
-            </a:r>
-          </a:p>
-          <a:p>
-            <a:r>
-              <a:rPr lang="en-US" sz="1400" dirty="0">
-                <a:latin typeface="Courier New" panose="02070309020205020404" pitchFamily="49" charset="0"/>
-                <a:cs typeface="Courier New" panose="02070309020205020404" pitchFamily="49" charset="0"/>
-              </a:rPr>
-              <a:t>    "Domain": {</a:t>
-            </a:r>
-          </a:p>
-          <a:p>
-            <a:r>
-              <a:rPr lang="en-US" sz="1400" dirty="0">
-                <a:latin typeface="Courier New" panose="02070309020205020404" pitchFamily="49" charset="0"/>
-                <a:cs typeface="Courier New" panose="02070309020205020404" pitchFamily="49" charset="0"/>
-              </a:rPr>
-              <a:t>      "Remotes": [ … ]</a:t>
-            </a:r>
-          </a:p>
-          <a:p>
-            <a:r>
-              <a:rPr lang="en-US" sz="1400" dirty="0">
-                <a:latin typeface="Courier New" panose="02070309020205020404" pitchFamily="49" charset="0"/>
-                <a:cs typeface="Courier New" panose="02070309020205020404" pitchFamily="49" charset="0"/>
-              </a:rPr>
-              <a:t>    }</a:t>
-            </a:r>
-          </a:p>
-          <a:p>
-            <a:r>
-              <a:rPr lang="en-US" sz="1400" dirty="0">
-                <a:latin typeface="Courier New" panose="02070309020205020404" pitchFamily="49" charset="0"/>
-                <a:cs typeface="Courier New" panose="02070309020205020404" pitchFamily="49" charset="0"/>
-              </a:rPr>
-              <a:t>  },</a:t>
-            </a:r>
-          </a:p>
-          <a:p>
-            <a:r>
-              <a:rPr lang="en-US" sz="1400" dirty="0">
-                <a:latin typeface="Courier New" panose="02070309020205020404" pitchFamily="49" charset="0"/>
-                <a:cs typeface="Courier New" panose="02070309020205020404" pitchFamily="49" charset="0"/>
-              </a:rPr>
-              <a:t>  {</a:t>
-            </a:r>
-          </a:p>
-          <a:p>
-            <a:r>
-              <a:rPr lang="en-US" sz="1400" dirty="0">
-                <a:latin typeface="Courier New" panose="02070309020205020404" pitchFamily="49" charset="0"/>
-                <a:cs typeface="Courier New" panose="02070309020205020404" pitchFamily="49" charset="0"/>
-              </a:rPr>
-              <a:t>    "</a:t>
-            </a:r>
-            <a:r>
-              <a:rPr lang="en-US" sz="1400" dirty="0" err="1">
-                <a:latin typeface="Courier New" panose="02070309020205020404" pitchFamily="49" charset="0"/>
-                <a:cs typeface="Courier New" panose="02070309020205020404" pitchFamily="49" charset="0"/>
-              </a:rPr>
-              <a:t>DomainName</a:t>
-            </a:r>
-            <a:r>
-              <a:rPr lang="en-US" sz="1400" dirty="0">
-                <a:latin typeface="Courier New" panose="02070309020205020404" pitchFamily="49" charset="0"/>
-                <a:cs typeface="Courier New" panose="02070309020205020404" pitchFamily="49" charset="0"/>
-              </a:rPr>
-              <a:t>": "</a:t>
-            </a:r>
-            <a:r>
-              <a:rPr lang="en-US" sz="1400" dirty="0" err="1">
-                <a:latin typeface="Courier New" panose="02070309020205020404" pitchFamily="49" charset="0"/>
-                <a:cs typeface="Courier New" panose="02070309020205020404" pitchFamily="49" charset="0"/>
-              </a:rPr>
-              <a:t>LaToulousaine</a:t>
-            </a:r>
-            <a:r>
-              <a:rPr lang="en-US" sz="1400" dirty="0">
-                <a:latin typeface="Courier New" panose="02070309020205020404" pitchFamily="49" charset="0"/>
-                <a:cs typeface="Courier New" panose="02070309020205020404" pitchFamily="49" charset="0"/>
-              </a:rPr>
-              <a:t>/London",</a:t>
-            </a:r>
-          </a:p>
-          <a:p>
-            <a:r>
-              <a:rPr lang="en-US" sz="1400" dirty="0">
-                <a:latin typeface="Courier New" panose="02070309020205020404" pitchFamily="49" charset="0"/>
-                <a:cs typeface="Courier New" panose="02070309020205020404" pitchFamily="49" charset="0"/>
-              </a:rPr>
-              <a:t>    "Domain": {</a:t>
-            </a:r>
-          </a:p>
-          <a:p>
-            <a:r>
-              <a:rPr lang="en-US" sz="1400" dirty="0">
-                <a:latin typeface="Courier New" panose="02070309020205020404" pitchFamily="49" charset="0"/>
-                <a:cs typeface="Courier New" panose="02070309020205020404" pitchFamily="49" charset="0"/>
-              </a:rPr>
-              <a:t>      "Remotes": [ … ]</a:t>
-            </a:r>
-          </a:p>
-          <a:p>
-            <a:r>
-              <a:rPr lang="en-US" sz="1400" dirty="0">
-                <a:latin typeface="Courier New" panose="02070309020205020404" pitchFamily="49" charset="0"/>
-                <a:cs typeface="Courier New" panose="02070309020205020404" pitchFamily="49" charset="0"/>
-              </a:rPr>
-              <a:t>    }</a:t>
+              <a:t>    </a:t>
+            </a:r>
+            <a:r>
+              <a:rPr lang="en-US" sz="1400" b="1" dirty="0">
+                <a:latin typeface="Courier New" panose="02070309020205020404" pitchFamily="49" charset="0"/>
+                <a:cs typeface="Courier New" panose="02070309020205020404" pitchFamily="49" charset="0"/>
+              </a:rPr>
+              <a:t>"</a:t>
+            </a:r>
+            <a:r>
+              <a:rPr lang="en-US" sz="1400" b="1" dirty="0" err="1">
+                <a:latin typeface="Courier New" panose="02070309020205020404" pitchFamily="49" charset="0"/>
+                <a:cs typeface="Courier New" panose="02070309020205020404" pitchFamily="49" charset="0"/>
+              </a:rPr>
+              <a:t>PartyName</a:t>
+            </a:r>
+            <a:r>
+              <a:rPr lang="en-US" sz="1400" b="1" dirty="0">
+                <a:latin typeface="Courier New" panose="02070309020205020404" pitchFamily="49" charset="0"/>
+                <a:cs typeface="Courier New" panose="02070309020205020404" pitchFamily="49" charset="0"/>
+              </a:rPr>
+              <a:t>": "$London",</a:t>
+            </a:r>
+          </a:p>
+          <a:p>
+            <a:pPr lvl="1"/>
+            <a:r>
+              <a:rPr lang="en-US" sz="1400" b="1" dirty="0">
+                <a:latin typeface="Courier New" panose="02070309020205020404" pitchFamily="49" charset="0"/>
+                <a:cs typeface="Courier New" panose="02070309020205020404" pitchFamily="49" charset="0"/>
+              </a:rPr>
+              <a:t>"Address": "27.28.29.30:3712"</a:t>
             </a:r>
           </a:p>
           <a:p>
@@ -9779,7 +10708,7 @@
         </p:nvSpPr>
         <p:spPr>
           <a:xfrm>
-            <a:off x="838200" y="1825625"/>
+            <a:off x="838200" y="1690688"/>
             <a:ext cx="10515600" cy="888392"/>
           </a:xfrm>
         </p:spPr>
@@ -10127,7 +11056,7 @@
                 <a:latin typeface="Courier New" panose="02070309020205020404" pitchFamily="49" charset="0"/>
                 <a:cs typeface="Courier New" panose="02070309020205020404" pitchFamily="49" charset="0"/>
               </a:rPr>
-              <a:t>": "Undefined"</a:t>
+              <a:t>": "External"</a:t>
             </a:r>
             <a:r>
               <a:rPr lang="en-US" sz="1400" dirty="0">
@@ -10344,7 +11273,21 @@
                 <a:latin typeface="Courier New" panose="02070309020205020404" pitchFamily="49" charset="0"/>
                 <a:cs typeface="Courier New" panose="02070309020205020404" pitchFamily="49" charset="0"/>
               </a:rPr>
-              <a:t>": "Undefined",</a:t>
+              <a:t>": "</a:t>
+            </a:r>
+            <a:r>
+              <a:rPr lang="en-US" sz="1400" b="1" dirty="0">
+                <a:latin typeface="Courier New" panose="02070309020205020404" pitchFamily="49" charset="0"/>
+                <a:cs typeface="Courier New" panose="02070309020205020404" pitchFamily="49" charset="0"/>
+              </a:rPr>
+              <a:t>External</a:t>
+            </a:r>
+            <a:r>
+              <a:rPr lang="en-US" sz="1400" dirty="0">
+                <a:latin typeface="Courier New" panose="02070309020205020404" pitchFamily="49" charset="0"/>
+                <a:cs typeface="Courier New" panose="02070309020205020404" pitchFamily="49" charset="0"/>
+              </a:rPr>
+              <a:t>",</a:t>
             </a:r>
           </a:p>
           <a:p>
@@ -10716,7 +11659,7 @@
           <a:p>
             <a:r>
               <a:rPr lang="en-US" dirty="0"/>
-              <a:t>“Undefined” is the reserved Domain name that means “external to the System”</a:t>
+              <a:t>“External” and “Undefined” are the reserved Domain names that means “external to the System”</a:t>
             </a:r>
           </a:p>
           <a:p>
@@ -10956,6 +11899,86 @@
           <p:cNvPr id="2" name="Title 1">
             <a:extLst>
               <a:ext uri="{FF2B5EF4-FFF2-40B4-BE49-F238E27FC236}">
+                <a16:creationId xmlns:a16="http://schemas.microsoft.com/office/drawing/2014/main" id="{2ADDEB0D-75FE-A9E7-AE5D-1A00BE2CB4EF}"/>
+              </a:ext>
+            </a:extLst>
+          </p:cNvPr>
+          <p:cNvSpPr>
+            <a:spLocks noGrp="1"/>
+          </p:cNvSpPr>
+          <p:nvPr>
+            <p:ph type="title"/>
+          </p:nvPr>
+        </p:nvSpPr>
+        <p:spPr/>
+        <p:txBody>
+          <a:bodyPr/>
+          <a:lstStyle/>
+          <a:p>
+            <a:endParaRPr lang="en-US"/>
+          </a:p>
+        </p:txBody>
+      </p:sp>
+      <p:sp>
+        <p:nvSpPr>
+          <p:cNvPr id="3" name="Content Placeholder 2">
+            <a:extLst>
+              <a:ext uri="{FF2B5EF4-FFF2-40B4-BE49-F238E27FC236}">
+                <a16:creationId xmlns:a16="http://schemas.microsoft.com/office/drawing/2014/main" id="{69BD3F96-4E3A-A64D-A143-5E0F643AB7C5}"/>
+              </a:ext>
+            </a:extLst>
+          </p:cNvPr>
+          <p:cNvSpPr>
+            <a:spLocks noGrp="1"/>
+          </p:cNvSpPr>
+          <p:nvPr>
+            <p:ph idx="1"/>
+          </p:nvPr>
+        </p:nvSpPr>
+        <p:spPr/>
+        <p:txBody>
+          <a:bodyPr/>
+          <a:lstStyle/>
+          <a:p>
+            <a:endParaRPr lang="en-US"/>
+          </a:p>
+        </p:txBody>
+      </p:sp>
+    </p:spTree>
+    <p:extLst>
+      <p:ext uri="{BB962C8B-B14F-4D97-AF65-F5344CB8AC3E}">
+        <p14:creationId xmlns:p14="http://schemas.microsoft.com/office/powerpoint/2010/main" val="4293717367"/>
+      </p:ext>
+    </p:extLst>
+  </p:cSld>
+  <p:clrMapOvr>
+    <a:masterClrMapping/>
+  </p:clrMapOvr>
+</p:sld>
+</file>
+
+<file path=ppt/slides/slide21.xml><?xml version="1.0" encoding="utf-8"?>
+<p:sld xmlns:a="http://schemas.openxmlformats.org/drawingml/2006/main" xmlns:r="http://schemas.openxmlformats.org/officeDocument/2006/relationships" xmlns:p="http://schemas.openxmlformats.org/presentationml/2006/main">
+  <p:cSld>
+    <p:spTree>
+      <p:nvGrpSpPr>
+        <p:cNvPr id="1" name=""/>
+        <p:cNvGrpSpPr/>
+        <p:nvPr/>
+      </p:nvGrpSpPr>
+      <p:grpSpPr>
+        <a:xfrm>
+          <a:off x="0" y="0"/>
+          <a:ext cx="0" cy="0"/>
+          <a:chOff x="0" y="0"/>
+          <a:chExt cx="0" cy="0"/>
+        </a:xfrm>
+      </p:grpSpPr>
+      <p:sp>
+        <p:nvSpPr>
+          <p:cNvPr id="2" name="Title 1">
+            <a:extLst>
+              <a:ext uri="{FF2B5EF4-FFF2-40B4-BE49-F238E27FC236}">
                 <a16:creationId xmlns:a16="http://schemas.microsoft.com/office/drawing/2014/main" id="{A798245F-DD26-ADCC-6CD2-D5ED5F5598A9}"/>
               </a:ext>
             </a:extLst>
@@ -11027,7 +12050,7 @@
 </p:sld>
 </file>
 
-<file path=ppt/slides/slide21.xml><?xml version="1.0" encoding="utf-8"?>
+<file path=ppt/slides/slide22.xml><?xml version="1.0" encoding="utf-8"?>
 <p:sld xmlns:a="http://schemas.openxmlformats.org/drawingml/2006/main" xmlns:r="http://schemas.openxmlformats.org/officeDocument/2006/relationships" xmlns:p="http://schemas.openxmlformats.org/presentationml/2006/main">
   <p:cSld>
     <p:spTree>
@@ -11178,8 +12201,8 @@
         </p:nvSpPr>
         <p:spPr>
           <a:xfrm>
-            <a:off x="1066803" y="4760763"/>
-            <a:ext cx="10609382" cy="1815882"/>
+            <a:off x="981811" y="4895700"/>
+            <a:ext cx="10609382" cy="1569660"/>
           </a:xfrm>
           <a:prstGeom prst="rect">
             <a:avLst/>
@@ -11193,7 +12216,7 @@
           <a:lstStyle/>
           <a:p>
             <a:r>
-              <a:rPr lang="en-US" sz="1600">
+              <a:rPr lang="en-US" sz="1600" dirty="0">
                 <a:solidFill>
                   <a:srgbClr val="0000FF"/>
                 </a:solidFill>
@@ -11202,29 +12225,47 @@
               <a:t>var</a:t>
             </a:r>
             <a:r>
-              <a:rPr lang="en-US" sz="1600">
+              <a:rPr lang="en-US" sz="1600" dirty="0">
                 <a:solidFill>
                   <a:srgbClr val="000000"/>
                 </a:solidFill>
                 <a:latin typeface="Consolas" panose="020B0609020204030204" pitchFamily="49" charset="0"/>
               </a:rPr>
-              <a:t> configuration = ApplicationIdentityConfiguration.Create( monitor, c =&gt;</a:t>
-            </a:r>
-          </a:p>
-          <a:p>
-            <a:r>
-              <a:rPr lang="en-US" sz="1600">
+              <a:t> configuration = </a:t>
+            </a:r>
+            <a:r>
+              <a:rPr lang="en-US" sz="1600" dirty="0" err="1">
                 <a:solidFill>
                   <a:srgbClr val="000000"/>
                 </a:solidFill>
                 <a:latin typeface="Consolas" panose="020B0609020204030204" pitchFamily="49" charset="0"/>
               </a:rPr>
+              <a:t>ApplicationIdentityConfiguration.Create</a:t>
+            </a:r>
+            <a:r>
+              <a:rPr lang="en-US" sz="1600" dirty="0">
+                <a:solidFill>
+                  <a:srgbClr val="000000"/>
+                </a:solidFill>
+                <a:latin typeface="Consolas" panose="020B0609020204030204" pitchFamily="49" charset="0"/>
+              </a:rPr>
+              <a:t>( monitor, c =&gt;</a:t>
+            </a:r>
+          </a:p>
+          <a:p>
+            <a:r>
+              <a:rPr lang="en-US" sz="1600" dirty="0">
+                <a:solidFill>
+                  <a:srgbClr val="000000"/>
+                </a:solidFill>
+                <a:latin typeface="Consolas" panose="020B0609020204030204" pitchFamily="49" charset="0"/>
+              </a:rPr>
               <a:t>{</a:t>
             </a:r>
           </a:p>
           <a:p>
             <a:r>
-              <a:rPr lang="en-US" sz="1600">
+              <a:rPr lang="en-US" sz="1600" dirty="0">
                 <a:solidFill>
                   <a:srgbClr val="000000"/>
                 </a:solidFill>
@@ -11233,16 +12274,34 @@
               <a:t>  c[</a:t>
             </a:r>
             <a:r>
-              <a:rPr lang="en-US" sz="1600">
+              <a:rPr lang="en-US" sz="1600" dirty="0">
                 <a:solidFill>
                   <a:srgbClr val="A31515"/>
                 </a:solidFill>
                 <a:latin typeface="Consolas" panose="020B0609020204030204" pitchFamily="49" charset="0"/>
               </a:rPr>
-              <a:t>"DomainName"</a:t>
-            </a:r>
-            <a:r>
-              <a:rPr lang="en-US" sz="1600">
+              <a:t>"</a:t>
+            </a:r>
+            <a:r>
+              <a:rPr lang="en-US" sz="1600" dirty="0" err="1">
+                <a:solidFill>
+                  <a:srgbClr val="A31515"/>
+                </a:solidFill>
+                <a:latin typeface="Consolas" panose="020B0609020204030204" pitchFamily="49" charset="0"/>
+              </a:rPr>
+              <a:t>FullName</a:t>
+            </a:r>
+            <a:r>
+              <a:rPr lang="en-US" sz="1600" dirty="0">
+                <a:solidFill>
+                  <a:srgbClr val="A31515"/>
+                </a:solidFill>
+                <a:latin typeface="Consolas" panose="020B0609020204030204" pitchFamily="49" charset="0"/>
+              </a:rPr>
+              <a:t>"</a:t>
+            </a:r>
+            <a:r>
+              <a:rPr lang="en-US" sz="1600" dirty="0">
                 <a:solidFill>
                   <a:srgbClr val="000000"/>
                 </a:solidFill>
@@ -11251,16 +12310,16 @@
               <a:t>] = </a:t>
             </a:r>
             <a:r>
-              <a:rPr lang="en-US" sz="1600">
+              <a:rPr lang="en-US" sz="1600" dirty="0">
                 <a:solidFill>
                   <a:srgbClr val="A31515"/>
                 </a:solidFill>
                 <a:latin typeface="Consolas" panose="020B0609020204030204" pitchFamily="49" charset="0"/>
               </a:rPr>
-              <a:t>"Test"</a:t>
-            </a:r>
-            <a:r>
-              <a:rPr lang="en-US" sz="1600">
+              <a:t>"Test/$Listener"</a:t>
+            </a:r>
+            <a:r>
+              <a:rPr lang="en-US" sz="1600" dirty="0">
                 <a:solidFill>
                   <a:srgbClr val="000000"/>
                 </a:solidFill>
@@ -11271,7 +12330,7 @@
           </a:p>
           <a:p>
             <a:r>
-              <a:rPr lang="en-US" sz="1600">
+              <a:rPr lang="en-US" sz="1600" dirty="0">
                 <a:solidFill>
                   <a:srgbClr val="000000"/>
                 </a:solidFill>
@@ -11280,16 +12339,16 @@
               <a:t>  c[</a:t>
             </a:r>
             <a:r>
-              <a:rPr lang="en-US" sz="1600">
+              <a:rPr lang="en-US" sz="1600" dirty="0">
                 <a:solidFill>
                   <a:srgbClr val="A31515"/>
                 </a:solidFill>
                 <a:latin typeface="Consolas" panose="020B0609020204030204" pitchFamily="49" charset="0"/>
               </a:rPr>
-              <a:t>"Local:Name"</a:t>
-            </a:r>
-            <a:r>
-              <a:rPr lang="en-US" sz="1600">
+              <a:t>"Remotes:0:PartyName"</a:t>
+            </a:r>
+            <a:r>
+              <a:rPr lang="en-US" sz="1600" dirty="0">
                 <a:solidFill>
                   <a:srgbClr val="000000"/>
                 </a:solidFill>
@@ -11298,16 +12357,16 @@
               <a:t>] = </a:t>
             </a:r>
             <a:r>
-              <a:rPr lang="en-US" sz="1600">
+              <a:rPr lang="en-US" sz="1600" dirty="0">
                 <a:solidFill>
                   <a:srgbClr val="A31515"/>
                 </a:solidFill>
                 <a:latin typeface="Consolas" panose="020B0609020204030204" pitchFamily="49" charset="0"/>
               </a:rPr>
-              <a:t>"Listener"</a:t>
-            </a:r>
-            <a:r>
-              <a:rPr lang="en-US" sz="1600">
+              <a:t>"Sender"</a:t>
+            </a:r>
+            <a:r>
+              <a:rPr lang="en-US" sz="1600" dirty="0">
                 <a:solidFill>
                   <a:srgbClr val="000000"/>
                 </a:solidFill>
@@ -11318,7 +12377,7 @@
           </a:p>
           <a:p>
             <a:r>
-              <a:rPr lang="en-US" sz="1600">
+              <a:rPr lang="en-US" sz="1600" dirty="0">
                 <a:solidFill>
                   <a:srgbClr val="000000"/>
                 </a:solidFill>
@@ -11327,16 +12386,34 @@
               <a:t>  c[</a:t>
             </a:r>
             <a:r>
-              <a:rPr lang="en-US" sz="1600">
+              <a:rPr lang="en-US" sz="1600" dirty="0">
                 <a:solidFill>
                   <a:srgbClr val="A31515"/>
                 </a:solidFill>
                 <a:latin typeface="Consolas" panose="020B0609020204030204" pitchFamily="49" charset="0"/>
               </a:rPr>
-              <a:t>"Remotes:0:Name"</a:t>
-            </a:r>
-            <a:r>
-              <a:rPr lang="en-US" sz="1600">
+              <a:t>"</a:t>
+            </a:r>
+            <a:r>
+              <a:rPr lang="en-US" sz="1600" dirty="0" err="1">
+                <a:solidFill>
+                  <a:srgbClr val="A31515"/>
+                </a:solidFill>
+                <a:latin typeface="Consolas" panose="020B0609020204030204" pitchFamily="49" charset="0"/>
+              </a:rPr>
+              <a:t>AllowFeatures</a:t>
+            </a:r>
+            <a:r>
+              <a:rPr lang="en-US" sz="1600" dirty="0">
+                <a:solidFill>
+                  <a:srgbClr val="A31515"/>
+                </a:solidFill>
+                <a:latin typeface="Consolas" panose="020B0609020204030204" pitchFamily="49" charset="0"/>
+              </a:rPr>
+              <a:t>"</a:t>
+            </a:r>
+            <a:r>
+              <a:rPr lang="en-US" sz="1600" dirty="0">
                 <a:solidFill>
                   <a:srgbClr val="000000"/>
                 </a:solidFill>
@@ -11345,16 +12422,34 @@
               <a:t>] = </a:t>
             </a:r>
             <a:r>
-              <a:rPr lang="en-US" sz="1600">
+              <a:rPr lang="en-US" sz="1600" dirty="0">
                 <a:solidFill>
                   <a:srgbClr val="A31515"/>
                 </a:solidFill>
                 <a:latin typeface="Consolas" panose="020B0609020204030204" pitchFamily="49" charset="0"/>
               </a:rPr>
-              <a:t>"Sender"</a:t>
-            </a:r>
-            <a:r>
-              <a:rPr lang="en-US" sz="1600">
+              <a:t>"</a:t>
+            </a:r>
+            <a:r>
+              <a:rPr lang="en-US" sz="1600" dirty="0" err="1">
+                <a:solidFill>
+                  <a:srgbClr val="A31515"/>
+                </a:solidFill>
+                <a:latin typeface="Consolas" panose="020B0609020204030204" pitchFamily="49" charset="0"/>
+              </a:rPr>
+              <a:t>BlobChannel</a:t>
+            </a:r>
+            <a:r>
+              <a:rPr lang="en-US" sz="1600" dirty="0">
+                <a:solidFill>
+                  <a:srgbClr val="A31515"/>
+                </a:solidFill>
+                <a:latin typeface="Consolas" panose="020B0609020204030204" pitchFamily="49" charset="0"/>
+              </a:rPr>
+              <a:t>"</a:t>
+            </a:r>
+            <a:r>
+              <a:rPr lang="en-US" sz="1600" dirty="0">
                 <a:solidFill>
                   <a:srgbClr val="000000"/>
                 </a:solidFill>
@@ -11365,54 +12460,7 @@
           </a:p>
           <a:p>
             <a:r>
-              <a:rPr lang="en-US" sz="1600">
-                <a:solidFill>
-                  <a:srgbClr val="000000"/>
-                </a:solidFill>
-                <a:latin typeface="Consolas" panose="020B0609020204030204" pitchFamily="49" charset="0"/>
-              </a:rPr>
-              <a:t>  c[</a:t>
-            </a:r>
-            <a:r>
-              <a:rPr lang="en-US" sz="1600">
-                <a:solidFill>
-                  <a:srgbClr val="A31515"/>
-                </a:solidFill>
-                <a:latin typeface="Consolas" panose="020B0609020204030204" pitchFamily="49" charset="0"/>
-              </a:rPr>
-              <a:t>"AllowFeatures"</a:t>
-            </a:r>
-            <a:r>
-              <a:rPr lang="en-US" sz="1600">
-                <a:solidFill>
-                  <a:srgbClr val="000000"/>
-                </a:solidFill>
-                <a:latin typeface="Consolas" panose="020B0609020204030204" pitchFamily="49" charset="0"/>
-              </a:rPr>
-              <a:t>] = </a:t>
-            </a:r>
-            <a:r>
-              <a:rPr lang="en-US" sz="1600">
-                <a:solidFill>
-                  <a:srgbClr val="A31515"/>
-                </a:solidFill>
-                <a:latin typeface="Consolas" panose="020B0609020204030204" pitchFamily="49" charset="0"/>
-              </a:rPr>
-              <a:t>"BlobChannel"</a:t>
-            </a:r>
-            <a:r>
-              <a:rPr lang="en-US" sz="1600">
-                <a:solidFill>
-                  <a:srgbClr val="000000"/>
-                </a:solidFill>
-                <a:latin typeface="Consolas" panose="020B0609020204030204" pitchFamily="49" charset="0"/>
-              </a:rPr>
-              <a:t>;</a:t>
-            </a:r>
-          </a:p>
-          <a:p>
-            <a:r>
-              <a:rPr lang="en-US" sz="1600">
+              <a:rPr lang="en-US" sz="1600" dirty="0">
                 <a:solidFill>
                   <a:srgbClr val="000000"/>
                 </a:solidFill>
@@ -11636,7 +12684,7 @@
                 </a:solidFill>
                 <a:latin typeface="Consolas" panose="020B0609020204030204" pitchFamily="49" charset="0"/>
               </a:rPr>
-              <a:t>“#Development"</a:t>
+              <a:t>"#Development"</a:t>
             </a:r>
             <a:r>
               <a:rPr lang="en-US" sz="1600" dirty="0">
@@ -11664,7 +12712,7 @@
 </p:sld>
 </file>
 
-<file path=ppt/slides/slide22.xml><?xml version="1.0" encoding="utf-8"?>
+<file path=ppt/slides/slide23.xml><?xml version="1.0" encoding="utf-8"?>
 <p:sld xmlns:a="http://schemas.openxmlformats.org/drawingml/2006/main" xmlns:r="http://schemas.openxmlformats.org/officeDocument/2006/relationships" xmlns:p="http://schemas.openxmlformats.org/presentationml/2006/main">
   <p:cSld>
     <p:spTree>
@@ -12058,7 +13106,7 @@
 </p:sld>
 </file>
 
-<file path=ppt/slides/slide23.xml><?xml version="1.0" encoding="utf-8"?>
+<file path=ppt/slides/slide24.xml><?xml version="1.0" encoding="utf-8"?>
 <p:sld xmlns:a="http://schemas.openxmlformats.org/drawingml/2006/main" xmlns:r="http://schemas.openxmlformats.org/officeDocument/2006/relationships" xmlns:p="http://schemas.openxmlformats.org/presentationml/2006/main">
   <p:cSld>
     <p:spTree>
@@ -12341,7 +13389,7 @@
 </p:sld>
 </file>
 
-<file path=ppt/slides/slide24.xml><?xml version="1.0" encoding="utf-8"?>
+<file path=ppt/slides/slide25.xml><?xml version="1.0" encoding="utf-8"?>
 <p:sld xmlns:a="http://schemas.openxmlformats.org/drawingml/2006/main" xmlns:r="http://schemas.openxmlformats.org/officeDocument/2006/relationships" xmlns:p="http://schemas.openxmlformats.org/presentationml/2006/main">
   <p:cSld>
     <p:spTree>
@@ -12675,7 +13723,7 @@
 </p:sld>
 </file>
 
-<file path=ppt/slides/slide25.xml><?xml version="1.0" encoding="utf-8"?>
+<file path=ppt/slides/slide26.xml><?xml version="1.0" encoding="utf-8"?>
 <p:sld xmlns:a="http://schemas.openxmlformats.org/drawingml/2006/main" xmlns:r="http://schemas.openxmlformats.org/officeDocument/2006/relationships" xmlns:p="http://schemas.openxmlformats.org/presentationml/2006/main">
   <p:cSld>
     <p:spTree>
@@ -13877,7 +14925,7 @@
 </p:sld>
 </file>
 
-<file path=ppt/slides/slide26.xml><?xml version="1.0" encoding="utf-8"?>
+<file path=ppt/slides/slide27.xml><?xml version="1.0" encoding="utf-8"?>
 <p:sld xmlns:a="http://schemas.openxmlformats.org/drawingml/2006/main" xmlns:r="http://schemas.openxmlformats.org/officeDocument/2006/relationships" xmlns:p="http://schemas.openxmlformats.org/presentationml/2006/main">
   <p:cSld>
     <p:spTree>
@@ -14171,7 +15219,7 @@
 </p:sld>
 </file>
 
-<file path=ppt/slides/slide27.xml><?xml version="1.0" encoding="utf-8"?>
+<file path=ppt/slides/slide28.xml><?xml version="1.0" encoding="utf-8"?>
 <p:sld xmlns:a="http://schemas.openxmlformats.org/drawingml/2006/main" xmlns:r="http://schemas.openxmlformats.org/officeDocument/2006/relationships" xmlns:p="http://schemas.openxmlformats.org/presentationml/2006/main">
   <p:cSld>
     <p:spTree>
@@ -14340,7 +15388,7 @@
 </p:sld>
 </file>
 
-<file path=ppt/slides/slide28.xml><?xml version="1.0" encoding="utf-8"?>
+<file path=ppt/slides/slide29.xml><?xml version="1.0" encoding="utf-8"?>
 <p:sld xmlns:a="http://schemas.openxmlformats.org/drawingml/2006/main" xmlns:r="http://schemas.openxmlformats.org/officeDocument/2006/relationships" xmlns:p="http://schemas.openxmlformats.org/presentationml/2006/main">
   <p:cSld>
     <p:spTree>
@@ -14772,151 +15820,6 @@
 </p:sld>
 </file>
 
-<file path=ppt/slides/slide29.xml><?xml version="1.0" encoding="utf-8"?>
-<p:sld xmlns:a="http://schemas.openxmlformats.org/drawingml/2006/main" xmlns:r="http://schemas.openxmlformats.org/officeDocument/2006/relationships" xmlns:p="http://schemas.openxmlformats.org/presentationml/2006/main">
-  <p:cSld>
-    <p:spTree>
-      <p:nvGrpSpPr>
-        <p:cNvPr id="1" name=""/>
-        <p:cNvGrpSpPr/>
-        <p:nvPr/>
-      </p:nvGrpSpPr>
-      <p:grpSpPr>
-        <a:xfrm>
-          <a:off x="0" y="0"/>
-          <a:ext cx="0" cy="0"/>
-          <a:chOff x="0" y="0"/>
-          <a:chExt cx="0" cy="0"/>
-        </a:xfrm>
-      </p:grpSpPr>
-      <p:sp>
-        <p:nvSpPr>
-          <p:cNvPr id="2" name="Title 1">
-            <a:extLst>
-              <a:ext uri="{FF2B5EF4-FFF2-40B4-BE49-F238E27FC236}">
-                <a16:creationId xmlns:a16="http://schemas.microsoft.com/office/drawing/2014/main" id="{BCFC278E-8E30-3459-41D7-7185BA86296A}"/>
-              </a:ext>
-            </a:extLst>
-          </p:cNvPr>
-          <p:cNvSpPr>
-            <a:spLocks noGrp="1"/>
-          </p:cNvSpPr>
-          <p:nvPr>
-            <p:ph type="title"/>
-          </p:nvPr>
-        </p:nvSpPr>
-        <p:spPr/>
-        <p:txBody>
-          <a:bodyPr/>
-          <a:lstStyle/>
-          <a:p>
-            <a:r>
-              <a:rPr lang="en-US" dirty="0"/>
-              <a:t>The 8 protocols maximal count</a:t>
-            </a:r>
-          </a:p>
-        </p:txBody>
-      </p:sp>
-      <p:sp>
-        <p:nvSpPr>
-          <p:cNvPr id="3" name="Content Placeholder 2">
-            <a:extLst>
-              <a:ext uri="{FF2B5EF4-FFF2-40B4-BE49-F238E27FC236}">
-                <a16:creationId xmlns:a16="http://schemas.microsoft.com/office/drawing/2014/main" id="{AC71B80D-91E5-6DC7-AB87-2CFAAF04179A}"/>
-              </a:ext>
-            </a:extLst>
-          </p:cNvPr>
-          <p:cNvSpPr>
-            <a:spLocks noGrp="1"/>
-          </p:cNvSpPr>
-          <p:nvPr>
-            <p:ph idx="1"/>
-          </p:nvPr>
-        </p:nvSpPr>
-        <p:spPr>
-          <a:xfrm>
-            <a:off x="838200" y="1825625"/>
-            <a:ext cx="10515600" cy="4516560"/>
-          </a:xfrm>
-        </p:spPr>
-        <p:txBody>
-          <a:bodyPr>
-            <a:normAutofit lnSpcReduction="10000"/>
-          </a:bodyPr>
-          <a:lstStyle/>
-          <a:p>
-            <a:r>
-              <a:rPr lang="en-US" dirty="0"/>
-              <a:t>Only 8 protocols can be expressed.</a:t>
-            </a:r>
-          </a:p>
-          <a:p>
-            <a:pPr lvl="1"/>
-            <a:r>
-              <a:rPr lang="en-US" dirty="0"/>
-              <a:t>The “0 Protocol” protocol is reserved: this is the protocol of </a:t>
-            </a:r>
-            <a:r>
-              <a:rPr lang="en-US" dirty="0" err="1"/>
-              <a:t>CK.AppIdentity.TransportLayer</a:t>
-            </a:r>
-            <a:r>
-              <a:rPr lang="en-US" dirty="0"/>
-              <a:t> itself that handles special messages used to negotiate, accept, reject incoming parties and outgoing connections.</a:t>
-            </a:r>
-          </a:p>
-          <a:p>
-            <a:pPr lvl="1"/>
-            <a:r>
-              <a:rPr lang="en-US" dirty="0"/>
-              <a:t>This lets 7 possible protocols. </a:t>
-            </a:r>
-          </a:p>
-          <a:p>
-            <a:pPr lvl="1"/>
-            <a:endParaRPr lang="en-US" dirty="0"/>
-          </a:p>
-          <a:p>
-            <a:r>
-              <a:rPr lang="en-US" dirty="0"/>
-              <a:t>This limit applies to a Remote party pair: </a:t>
-            </a:r>
-          </a:p>
-          <a:p>
-            <a:pPr lvl="1"/>
-            <a:r>
-              <a:rPr lang="en-US" dirty="0"/>
-              <a:t>There can be any number of possible protocols in an application</a:t>
-            </a:r>
-          </a:p>
-          <a:p>
-            <a:pPr lvl="1"/>
-            <a:r>
-              <a:rPr lang="en-US" dirty="0"/>
-              <a:t>2 parties that start to interact initially negotiate the ones they can and want to use. </a:t>
-            </a:r>
-          </a:p>
-          <a:p>
-            <a:r>
-              <a:rPr lang="en-US" dirty="0"/>
-              <a:t>Any Transport between 2 parties can simultaneously support up to 7 different protocols.</a:t>
-            </a:r>
-          </a:p>
-        </p:txBody>
-      </p:sp>
-    </p:spTree>
-    <p:extLst>
-      <p:ext uri="{BB962C8B-B14F-4D97-AF65-F5344CB8AC3E}">
-        <p14:creationId xmlns:p14="http://schemas.microsoft.com/office/powerpoint/2010/main" val="1820346205"/>
-      </p:ext>
-    </p:extLst>
-  </p:cSld>
-  <p:clrMapOvr>
-    <a:masterClrMapping/>
-  </p:clrMapOvr>
-</p:sld>
-</file>
-
 <file path=ppt/slides/slide3.xml><?xml version="1.0" encoding="utf-8"?>
 <p:sld xmlns:a="http://schemas.openxmlformats.org/drawingml/2006/main" xmlns:r="http://schemas.openxmlformats.org/officeDocument/2006/relationships" xmlns:p="http://schemas.openxmlformats.org/presentationml/2006/main">
   <p:cSld>
@@ -15073,6 +15976,151 @@
 </file>
 
 <file path=ppt/slides/slide30.xml><?xml version="1.0" encoding="utf-8"?>
+<p:sld xmlns:a="http://schemas.openxmlformats.org/drawingml/2006/main" xmlns:r="http://schemas.openxmlformats.org/officeDocument/2006/relationships" xmlns:p="http://schemas.openxmlformats.org/presentationml/2006/main">
+  <p:cSld>
+    <p:spTree>
+      <p:nvGrpSpPr>
+        <p:cNvPr id="1" name=""/>
+        <p:cNvGrpSpPr/>
+        <p:nvPr/>
+      </p:nvGrpSpPr>
+      <p:grpSpPr>
+        <a:xfrm>
+          <a:off x="0" y="0"/>
+          <a:ext cx="0" cy="0"/>
+          <a:chOff x="0" y="0"/>
+          <a:chExt cx="0" cy="0"/>
+        </a:xfrm>
+      </p:grpSpPr>
+      <p:sp>
+        <p:nvSpPr>
+          <p:cNvPr id="2" name="Title 1">
+            <a:extLst>
+              <a:ext uri="{FF2B5EF4-FFF2-40B4-BE49-F238E27FC236}">
+                <a16:creationId xmlns:a16="http://schemas.microsoft.com/office/drawing/2014/main" id="{BCFC278E-8E30-3459-41D7-7185BA86296A}"/>
+              </a:ext>
+            </a:extLst>
+          </p:cNvPr>
+          <p:cNvSpPr>
+            <a:spLocks noGrp="1"/>
+          </p:cNvSpPr>
+          <p:nvPr>
+            <p:ph type="title"/>
+          </p:nvPr>
+        </p:nvSpPr>
+        <p:spPr/>
+        <p:txBody>
+          <a:bodyPr/>
+          <a:lstStyle/>
+          <a:p>
+            <a:r>
+              <a:rPr lang="en-US" dirty="0"/>
+              <a:t>The 8 protocols maximal count</a:t>
+            </a:r>
+          </a:p>
+        </p:txBody>
+      </p:sp>
+      <p:sp>
+        <p:nvSpPr>
+          <p:cNvPr id="3" name="Content Placeholder 2">
+            <a:extLst>
+              <a:ext uri="{FF2B5EF4-FFF2-40B4-BE49-F238E27FC236}">
+                <a16:creationId xmlns:a16="http://schemas.microsoft.com/office/drawing/2014/main" id="{AC71B80D-91E5-6DC7-AB87-2CFAAF04179A}"/>
+              </a:ext>
+            </a:extLst>
+          </p:cNvPr>
+          <p:cNvSpPr>
+            <a:spLocks noGrp="1"/>
+          </p:cNvSpPr>
+          <p:nvPr>
+            <p:ph idx="1"/>
+          </p:nvPr>
+        </p:nvSpPr>
+        <p:spPr>
+          <a:xfrm>
+            <a:off x="838200" y="1825625"/>
+            <a:ext cx="10515600" cy="4516560"/>
+          </a:xfrm>
+        </p:spPr>
+        <p:txBody>
+          <a:bodyPr>
+            <a:normAutofit lnSpcReduction="10000"/>
+          </a:bodyPr>
+          <a:lstStyle/>
+          <a:p>
+            <a:r>
+              <a:rPr lang="en-US" dirty="0"/>
+              <a:t>Only 8 protocols can be expressed.</a:t>
+            </a:r>
+          </a:p>
+          <a:p>
+            <a:pPr lvl="1"/>
+            <a:r>
+              <a:rPr lang="en-US" dirty="0"/>
+              <a:t>The “0 Protocol” protocol is reserved: this is the protocol of </a:t>
+            </a:r>
+            <a:r>
+              <a:rPr lang="en-US" dirty="0" err="1"/>
+              <a:t>CK.AppIdentity.TransportLayer</a:t>
+            </a:r>
+            <a:r>
+              <a:rPr lang="en-US" dirty="0"/>
+              <a:t> itself that handles special messages used to negotiate, accept, reject incoming parties and outgoing connections.</a:t>
+            </a:r>
+          </a:p>
+          <a:p>
+            <a:pPr lvl="1"/>
+            <a:r>
+              <a:rPr lang="en-US" dirty="0"/>
+              <a:t>This lets 7 possible protocols. </a:t>
+            </a:r>
+          </a:p>
+          <a:p>
+            <a:pPr lvl="1"/>
+            <a:endParaRPr lang="en-US" dirty="0"/>
+          </a:p>
+          <a:p>
+            <a:r>
+              <a:rPr lang="en-US" dirty="0"/>
+              <a:t>This limit applies to a Remote party pair: </a:t>
+            </a:r>
+          </a:p>
+          <a:p>
+            <a:pPr lvl="1"/>
+            <a:r>
+              <a:rPr lang="en-US" dirty="0"/>
+              <a:t>There can be any number of possible protocols in an application</a:t>
+            </a:r>
+          </a:p>
+          <a:p>
+            <a:pPr lvl="1"/>
+            <a:r>
+              <a:rPr lang="en-US" dirty="0"/>
+              <a:t>2 parties that start to interact initially negotiate the ones they can and want to use. </a:t>
+            </a:r>
+          </a:p>
+          <a:p>
+            <a:r>
+              <a:rPr lang="en-US" dirty="0"/>
+              <a:t>Any Transport between 2 parties can simultaneously support up to 7 different protocols.</a:t>
+            </a:r>
+          </a:p>
+        </p:txBody>
+      </p:sp>
+    </p:spTree>
+    <p:extLst>
+      <p:ext uri="{BB962C8B-B14F-4D97-AF65-F5344CB8AC3E}">
+        <p14:creationId xmlns:p14="http://schemas.microsoft.com/office/powerpoint/2010/main" val="1820346205"/>
+      </p:ext>
+    </p:extLst>
+  </p:cSld>
+  <p:clrMapOvr>
+    <a:masterClrMapping/>
+  </p:clrMapOvr>
+</p:sld>
+</file>
+
+<file path=ppt/slides/slide31.xml><?xml version="1.0" encoding="utf-8"?>
 <p:sld xmlns:a="http://schemas.openxmlformats.org/drawingml/2006/main" xmlns:r="http://schemas.openxmlformats.org/officeDocument/2006/relationships" xmlns:p="http://schemas.openxmlformats.org/presentationml/2006/main">
   <p:cSld>
     <p:spTree>
@@ -15791,7 +16839,7 @@
 </p:sld>
 </file>
 
-<file path=ppt/slides/slide31.xml><?xml version="1.0" encoding="utf-8"?>
+<file path=ppt/slides/slide32.xml><?xml version="1.0" encoding="utf-8"?>
 <p:sld xmlns:a="http://schemas.openxmlformats.org/drawingml/2006/main" xmlns:r="http://schemas.openxmlformats.org/officeDocument/2006/relationships" xmlns:p="http://schemas.openxmlformats.org/presentationml/2006/main">
   <p:cSld>
     <p:spTree>
@@ -16512,7 +17560,7 @@
 </p:sld>
 </file>
 
-<file path=ppt/slides/slide32.xml><?xml version="1.0" encoding="utf-8"?>
+<file path=ppt/slides/slide33.xml><?xml version="1.0" encoding="utf-8"?>
 <p:sld xmlns:a="http://schemas.openxmlformats.org/drawingml/2006/main" xmlns:r="http://schemas.openxmlformats.org/officeDocument/2006/relationships" xmlns:p="http://schemas.openxmlformats.org/presentationml/2006/main">
   <p:cSld>
     <p:bg>
@@ -16769,7 +17817,7 @@
 </p:sld>
 </file>
 
-<file path=ppt/slides/slide33.xml><?xml version="1.0" encoding="utf-8"?>
+<file path=ppt/slides/slide34.xml><?xml version="1.0" encoding="utf-8"?>
 <p:sld xmlns:a="http://schemas.openxmlformats.org/drawingml/2006/main" xmlns:r="http://schemas.openxmlformats.org/officeDocument/2006/relationships" xmlns:p="http://schemas.openxmlformats.org/presentationml/2006/main">
   <p:cSld>
     <p:spTree>
@@ -17103,7 +18151,7 @@
 </p:sld>
 </file>
 
-<file path=ppt/slides/slide34.xml><?xml version="1.0" encoding="utf-8"?>
+<file path=ppt/slides/slide35.xml><?xml version="1.0" encoding="utf-8"?>
 <p:sld xmlns:a="http://schemas.openxmlformats.org/drawingml/2006/main" xmlns:r="http://schemas.openxmlformats.org/officeDocument/2006/relationships" xmlns:p="http://schemas.openxmlformats.org/presentationml/2006/main">
   <p:cSld>
     <p:spTree>
@@ -17334,7 +18382,7 @@
 </p:sld>
 </file>
 
-<file path=ppt/slides/slide35.xml><?xml version="1.0" encoding="utf-8"?>
+<file path=ppt/slides/slide36.xml><?xml version="1.0" encoding="utf-8"?>
 <p:sld xmlns:a="http://schemas.openxmlformats.org/drawingml/2006/main" xmlns:r="http://schemas.openxmlformats.org/officeDocument/2006/relationships" xmlns:p="http://schemas.openxmlformats.org/presentationml/2006/main">
   <p:cSld>
     <p:spTree>
@@ -17582,7 +18630,7 @@
 </p:sld>
 </file>
 
-<file path=ppt/slides/slide36.xml><?xml version="1.0" encoding="utf-8"?>
+<file path=ppt/slides/slide37.xml><?xml version="1.0" encoding="utf-8"?>
 <p:sld xmlns:a="http://schemas.openxmlformats.org/drawingml/2006/main" xmlns:r="http://schemas.openxmlformats.org/officeDocument/2006/relationships" xmlns:p="http://schemas.openxmlformats.org/presentationml/2006/main">
   <p:cSld>
     <p:spTree>
@@ -17719,7 +18767,7 @@
 </p:sld>
 </file>
 
-<file path=ppt/slides/slide37.xml><?xml version="1.0" encoding="utf-8"?>
+<file path=ppt/slides/slide38.xml><?xml version="1.0" encoding="utf-8"?>
 <p:sld xmlns:a="http://schemas.openxmlformats.org/drawingml/2006/main" xmlns:r="http://schemas.openxmlformats.org/officeDocument/2006/relationships" xmlns:p="http://schemas.openxmlformats.org/presentationml/2006/main">
   <p:cSld>
     <p:spTree>
@@ -17943,7 +18991,7 @@
 </p:sld>
 </file>
 
-<file path=ppt/slides/slide38.xml><?xml version="1.0" encoding="utf-8"?>
+<file path=ppt/slides/slide39.xml><?xml version="1.0" encoding="utf-8"?>
 <p:sld xmlns:a="http://schemas.openxmlformats.org/drawingml/2006/main" xmlns:r="http://schemas.openxmlformats.org/officeDocument/2006/relationships" xmlns:p="http://schemas.openxmlformats.org/presentationml/2006/main">
   <p:cSld>
     <p:spTree>
@@ -18218,7 +19266,203 @@
 </p:sld>
 </file>
 
-<file path=ppt/slides/slide39.xml><?xml version="1.0" encoding="utf-8"?>
+<file path=ppt/slides/slide4.xml><?xml version="1.0" encoding="utf-8"?>
+<p:sld xmlns:a="http://schemas.openxmlformats.org/drawingml/2006/main" xmlns:r="http://schemas.openxmlformats.org/officeDocument/2006/relationships" xmlns:p="http://schemas.openxmlformats.org/presentationml/2006/main">
+  <p:cSld>
+    <p:spTree>
+      <p:nvGrpSpPr>
+        <p:cNvPr id="1" name=""/>
+        <p:cNvGrpSpPr/>
+        <p:nvPr/>
+      </p:nvGrpSpPr>
+      <p:grpSpPr>
+        <a:xfrm>
+          <a:off x="0" y="0"/>
+          <a:ext cx="0" cy="0"/>
+          <a:chOff x="0" y="0"/>
+          <a:chExt cx="0" cy="0"/>
+        </a:xfrm>
+      </p:grpSpPr>
+      <p:sp>
+        <p:nvSpPr>
+          <p:cNvPr id="2" name="Title 1">
+            <a:extLst>
+              <a:ext uri="{FF2B5EF4-FFF2-40B4-BE49-F238E27FC236}">
+                <a16:creationId xmlns:a16="http://schemas.microsoft.com/office/drawing/2014/main" id="{2A6B8B24-8DD6-5A25-2C4D-FFCB005460FB}"/>
+              </a:ext>
+            </a:extLst>
+          </p:cNvPr>
+          <p:cNvSpPr>
+            <a:spLocks noGrp="1"/>
+          </p:cNvSpPr>
+          <p:nvPr>
+            <p:ph type="title"/>
+          </p:nvPr>
+        </p:nvSpPr>
+        <p:spPr/>
+        <p:txBody>
+          <a:bodyPr/>
+          <a:lstStyle/>
+          <a:p>
+            <a:r>
+              <a:rPr lang="en-US" dirty="0" err="1"/>
+              <a:t>DomainName</a:t>
+            </a:r>
+            <a:r>
+              <a:rPr lang="en-US" dirty="0"/>
+              <a:t>/</a:t>
+            </a:r>
+            <a:r>
+              <a:rPr lang="en-US" dirty="0" err="1"/>
+              <a:t>PartyName</a:t>
+            </a:r>
+            <a:r>
+              <a:rPr lang="en-US" dirty="0"/>
+              <a:t>/</a:t>
+            </a:r>
+            <a:r>
+              <a:rPr lang="en-US" dirty="0" err="1"/>
+              <a:t>EnvironmentName</a:t>
+            </a:r>
+            <a:endParaRPr lang="en-US" dirty="0"/>
+          </a:p>
+        </p:txBody>
+      </p:sp>
+      <p:sp>
+        <p:nvSpPr>
+          <p:cNvPr id="3" name="Content Placeholder 2">
+            <a:extLst>
+              <a:ext uri="{FF2B5EF4-FFF2-40B4-BE49-F238E27FC236}">
+                <a16:creationId xmlns:a16="http://schemas.microsoft.com/office/drawing/2014/main" id="{DD3871EE-3844-1222-56FF-A3C3C4D91B8A}"/>
+              </a:ext>
+            </a:extLst>
+          </p:cNvPr>
+          <p:cNvSpPr>
+            <a:spLocks noGrp="1"/>
+          </p:cNvSpPr>
+          <p:nvPr>
+            <p:ph idx="1"/>
+          </p:nvPr>
+        </p:nvSpPr>
+        <p:spPr>
+          <a:xfrm>
+            <a:off x="838200" y="1825624"/>
+            <a:ext cx="10515600" cy="4361815"/>
+          </a:xfrm>
+        </p:spPr>
+        <p:txBody>
+          <a:bodyPr>
+            <a:normAutofit/>
+          </a:bodyPr>
+          <a:lstStyle/>
+          <a:p>
+            <a:r>
+              <a:rPr lang="en-US" dirty="0"/>
+              <a:t>This triple identifies any Party in the Universe.</a:t>
+            </a:r>
+          </a:p>
+          <a:p>
+            <a:r>
+              <a:rPr lang="en-US" dirty="0"/>
+              <a:t>This drives the Observability layer</a:t>
+            </a:r>
+          </a:p>
+          <a:p>
+            <a:pPr lvl="1"/>
+            <a:r>
+              <a:rPr lang="en-US" dirty="0"/>
+              <a:t>Logs are collected with this 3-levels hierarchy.</a:t>
+            </a:r>
+          </a:p>
+          <a:p>
+            <a:pPr lvl="1"/>
+            <a:r>
+              <a:rPr lang="en-US" dirty="0"/>
+              <a:t>Any “Event Source” (whatever the </a:t>
+            </a:r>
+            <a:r>
+              <a:rPr lang="en-US" i="1" dirty="0"/>
+              <a:t>event</a:t>
+            </a:r>
+            <a:r>
+              <a:rPr lang="en-US" dirty="0"/>
+              <a:t> is) is identified by this triple.</a:t>
+            </a:r>
+          </a:p>
+          <a:p>
+            <a:r>
+              <a:rPr lang="en-US" dirty="0" err="1"/>
+              <a:t>DomainName</a:t>
+            </a:r>
+            <a:r>
+              <a:rPr lang="en-US" dirty="0"/>
+              <a:t> can be a path.</a:t>
+            </a:r>
+          </a:p>
+          <a:p>
+            <a:r>
+              <a:rPr lang="en-US" dirty="0" err="1"/>
+              <a:t>PartyName</a:t>
+            </a:r>
+            <a:r>
+              <a:rPr lang="en-US" dirty="0"/>
+              <a:t> is usually prefixed by ‘$’.</a:t>
+            </a:r>
+          </a:p>
+          <a:p>
+            <a:r>
+              <a:rPr lang="en-US" dirty="0" err="1"/>
+              <a:t>EnvironmentName</a:t>
+            </a:r>
+            <a:r>
+              <a:rPr lang="en-US" dirty="0"/>
+              <a:t> is always prefixed by ‘#’.</a:t>
+            </a:r>
+          </a:p>
+          <a:p>
+            <a:r>
+              <a:rPr lang="en-US" dirty="0"/>
+              <a:t>The triple can be expressed as a simple </a:t>
+            </a:r>
+            <a:r>
+              <a:rPr lang="en-US" dirty="0" err="1"/>
+              <a:t>FullName</a:t>
+            </a:r>
+            <a:r>
+              <a:rPr lang="en-US" dirty="0"/>
+              <a:t> string. </a:t>
+            </a:r>
+          </a:p>
+          <a:p>
+            <a:pPr lvl="1"/>
+            <a:endParaRPr lang="en-US" dirty="0"/>
+          </a:p>
+          <a:p>
+            <a:pPr lvl="1"/>
+            <a:endParaRPr lang="en-US" dirty="0"/>
+          </a:p>
+          <a:p>
+            <a:endParaRPr lang="en-US" dirty="0"/>
+          </a:p>
+          <a:p>
+            <a:endParaRPr lang="en-US" dirty="0"/>
+          </a:p>
+        </p:txBody>
+      </p:sp>
+    </p:spTree>
+    <p:extLst>
+      <p:ext uri="{BB962C8B-B14F-4D97-AF65-F5344CB8AC3E}">
+        <p14:creationId xmlns:p14="http://schemas.microsoft.com/office/powerpoint/2010/main" val="1775483990"/>
+      </p:ext>
+    </p:extLst>
+  </p:cSld>
+  <p:clrMapOvr>
+    <a:masterClrMapping/>
+  </p:clrMapOvr>
+</p:sld>
+</file>
+
+<file path=ppt/slides/slide40.xml><?xml version="1.0" encoding="utf-8"?>
 <p:sld xmlns:a="http://schemas.openxmlformats.org/drawingml/2006/main" xmlns:r="http://schemas.openxmlformats.org/officeDocument/2006/relationships" xmlns:p="http://schemas.openxmlformats.org/presentationml/2006/main">
   <p:cSld>
     <p:spTree>
@@ -18589,203 +19833,7 @@
 </p:sld>
 </file>
 
-<file path=ppt/slides/slide4.xml><?xml version="1.0" encoding="utf-8"?>
-<p:sld xmlns:a="http://schemas.openxmlformats.org/drawingml/2006/main" xmlns:r="http://schemas.openxmlformats.org/officeDocument/2006/relationships" xmlns:p="http://schemas.openxmlformats.org/presentationml/2006/main">
-  <p:cSld>
-    <p:spTree>
-      <p:nvGrpSpPr>
-        <p:cNvPr id="1" name=""/>
-        <p:cNvGrpSpPr/>
-        <p:nvPr/>
-      </p:nvGrpSpPr>
-      <p:grpSpPr>
-        <a:xfrm>
-          <a:off x="0" y="0"/>
-          <a:ext cx="0" cy="0"/>
-          <a:chOff x="0" y="0"/>
-          <a:chExt cx="0" cy="0"/>
-        </a:xfrm>
-      </p:grpSpPr>
-      <p:sp>
-        <p:nvSpPr>
-          <p:cNvPr id="2" name="Title 1">
-            <a:extLst>
-              <a:ext uri="{FF2B5EF4-FFF2-40B4-BE49-F238E27FC236}">
-                <a16:creationId xmlns:a16="http://schemas.microsoft.com/office/drawing/2014/main" id="{2A6B8B24-8DD6-5A25-2C4D-FFCB005460FB}"/>
-              </a:ext>
-            </a:extLst>
-          </p:cNvPr>
-          <p:cNvSpPr>
-            <a:spLocks noGrp="1"/>
-          </p:cNvSpPr>
-          <p:nvPr>
-            <p:ph type="title"/>
-          </p:nvPr>
-        </p:nvSpPr>
-        <p:spPr/>
-        <p:txBody>
-          <a:bodyPr/>
-          <a:lstStyle/>
-          <a:p>
-            <a:r>
-              <a:rPr lang="en-US" dirty="0" err="1"/>
-              <a:t>DomainName</a:t>
-            </a:r>
-            <a:r>
-              <a:rPr lang="en-US" dirty="0"/>
-              <a:t>/</a:t>
-            </a:r>
-            <a:r>
-              <a:rPr lang="en-US" dirty="0" err="1"/>
-              <a:t>PartyName</a:t>
-            </a:r>
-            <a:r>
-              <a:rPr lang="en-US" dirty="0"/>
-              <a:t>/</a:t>
-            </a:r>
-            <a:r>
-              <a:rPr lang="en-US" dirty="0" err="1"/>
-              <a:t>EnvironmentName</a:t>
-            </a:r>
-            <a:endParaRPr lang="en-US" dirty="0"/>
-          </a:p>
-        </p:txBody>
-      </p:sp>
-      <p:sp>
-        <p:nvSpPr>
-          <p:cNvPr id="3" name="Content Placeholder 2">
-            <a:extLst>
-              <a:ext uri="{FF2B5EF4-FFF2-40B4-BE49-F238E27FC236}">
-                <a16:creationId xmlns:a16="http://schemas.microsoft.com/office/drawing/2014/main" id="{DD3871EE-3844-1222-56FF-A3C3C4D91B8A}"/>
-              </a:ext>
-            </a:extLst>
-          </p:cNvPr>
-          <p:cNvSpPr>
-            <a:spLocks noGrp="1"/>
-          </p:cNvSpPr>
-          <p:nvPr>
-            <p:ph idx="1"/>
-          </p:nvPr>
-        </p:nvSpPr>
-        <p:spPr>
-          <a:xfrm>
-            <a:off x="838200" y="1825624"/>
-            <a:ext cx="10515600" cy="4361815"/>
-          </a:xfrm>
-        </p:spPr>
-        <p:txBody>
-          <a:bodyPr>
-            <a:normAutofit/>
-          </a:bodyPr>
-          <a:lstStyle/>
-          <a:p>
-            <a:r>
-              <a:rPr lang="en-US" dirty="0"/>
-              <a:t>This triple identifies any Party in the Universe.</a:t>
-            </a:r>
-          </a:p>
-          <a:p>
-            <a:r>
-              <a:rPr lang="en-US" dirty="0"/>
-              <a:t>This drives the Observability layer</a:t>
-            </a:r>
-          </a:p>
-          <a:p>
-            <a:pPr lvl="1"/>
-            <a:r>
-              <a:rPr lang="en-US" dirty="0"/>
-              <a:t>Logs are collected with this 3-levels hierarchy.</a:t>
-            </a:r>
-          </a:p>
-          <a:p>
-            <a:pPr lvl="1"/>
-            <a:r>
-              <a:rPr lang="en-US" dirty="0"/>
-              <a:t>Any “Event Source” (whatever the </a:t>
-            </a:r>
-            <a:r>
-              <a:rPr lang="en-US" i="1" dirty="0"/>
-              <a:t>event</a:t>
-            </a:r>
-            <a:r>
-              <a:rPr lang="en-US" dirty="0"/>
-              <a:t> is) is identified by this triple.</a:t>
-            </a:r>
-          </a:p>
-          <a:p>
-            <a:r>
-              <a:rPr lang="en-US" dirty="0" err="1"/>
-              <a:t>DomainName</a:t>
-            </a:r>
-            <a:r>
-              <a:rPr lang="en-US" dirty="0"/>
-              <a:t> can be a path.</a:t>
-            </a:r>
-          </a:p>
-          <a:p>
-            <a:r>
-              <a:rPr lang="en-US" dirty="0" err="1"/>
-              <a:t>PartyName</a:t>
-            </a:r>
-            <a:r>
-              <a:rPr lang="en-US" dirty="0"/>
-              <a:t> is usually prefixed by ‘$’.</a:t>
-            </a:r>
-          </a:p>
-          <a:p>
-            <a:r>
-              <a:rPr lang="en-US" dirty="0" err="1"/>
-              <a:t>EnvironmentName</a:t>
-            </a:r>
-            <a:r>
-              <a:rPr lang="en-US" dirty="0"/>
-              <a:t> is always prefixed by ‘#’.</a:t>
-            </a:r>
-          </a:p>
-          <a:p>
-            <a:r>
-              <a:rPr lang="en-US" dirty="0"/>
-              <a:t>The triple can be expressed as a simple </a:t>
-            </a:r>
-            <a:r>
-              <a:rPr lang="en-US" dirty="0" err="1"/>
-              <a:t>FullName</a:t>
-            </a:r>
-            <a:r>
-              <a:rPr lang="en-US" dirty="0"/>
-              <a:t> string. </a:t>
-            </a:r>
-          </a:p>
-          <a:p>
-            <a:pPr lvl="1"/>
-            <a:endParaRPr lang="en-US" dirty="0"/>
-          </a:p>
-          <a:p>
-            <a:pPr lvl="1"/>
-            <a:endParaRPr lang="en-US" dirty="0"/>
-          </a:p>
-          <a:p>
-            <a:endParaRPr lang="en-US" dirty="0"/>
-          </a:p>
-          <a:p>
-            <a:endParaRPr lang="en-US" dirty="0"/>
-          </a:p>
-        </p:txBody>
-      </p:sp>
-    </p:spTree>
-    <p:extLst>
-      <p:ext uri="{BB962C8B-B14F-4D97-AF65-F5344CB8AC3E}">
-        <p14:creationId xmlns:p14="http://schemas.microsoft.com/office/powerpoint/2010/main" val="1775483990"/>
-      </p:ext>
-    </p:extLst>
-  </p:cSld>
-  <p:clrMapOvr>
-    <a:masterClrMapping/>
-  </p:clrMapOvr>
-</p:sld>
-</file>
-
-<file path=ppt/slides/slide40.xml><?xml version="1.0" encoding="utf-8"?>
+<file path=ppt/slides/slide41.xml><?xml version="1.0" encoding="utf-8"?>
 <p:sld xmlns:a="http://schemas.openxmlformats.org/drawingml/2006/main" xmlns:r="http://schemas.openxmlformats.org/officeDocument/2006/relationships" xmlns:p="http://schemas.openxmlformats.org/presentationml/2006/main">
   <p:cSld>
     <p:spTree>
@@ -18888,7 +19936,7 @@
 </p:sld>
 </file>
 
-<file path=ppt/slides/slide41.xml><?xml version="1.0" encoding="utf-8"?>
+<file path=ppt/slides/slide42.xml><?xml version="1.0" encoding="utf-8"?>
 <p:sld xmlns:a="http://schemas.openxmlformats.org/drawingml/2006/main" xmlns:r="http://schemas.openxmlformats.org/officeDocument/2006/relationships" xmlns:p="http://schemas.openxmlformats.org/presentationml/2006/main">
   <p:cSld>
     <p:spTree>
@@ -19135,7 +20183,7 @@
 </p:sld>
 </file>
 
-<file path=ppt/slides/slide42.xml><?xml version="1.0" encoding="utf-8"?>
+<file path=ppt/slides/slide43.xml><?xml version="1.0" encoding="utf-8"?>
 <p:sld xmlns:a="http://schemas.openxmlformats.org/drawingml/2006/main" xmlns:r="http://schemas.openxmlformats.org/officeDocument/2006/relationships" xmlns:p="http://schemas.openxmlformats.org/presentationml/2006/main">
   <p:cSld>
     <p:spTree>
@@ -19678,7 +20726,7 @@
 </p:sld>
 </file>
 
-<file path=ppt/slides/slide43.xml><?xml version="1.0" encoding="utf-8"?>
+<file path=ppt/slides/slide44.xml><?xml version="1.0" encoding="utf-8"?>
 <p:sld xmlns:a="http://schemas.openxmlformats.org/drawingml/2006/main" xmlns:r="http://schemas.openxmlformats.org/officeDocument/2006/relationships" xmlns:p="http://schemas.openxmlformats.org/presentationml/2006/main">
   <p:cSld>
     <p:spTree>
@@ -19880,7 +20928,7 @@
 </p:sld>
 </file>
 
-<file path=ppt/slides/slide44.xml><?xml version="1.0" encoding="utf-8"?>
+<file path=ppt/slides/slide45.xml><?xml version="1.0" encoding="utf-8"?>
 <p:sld xmlns:a="http://schemas.openxmlformats.org/drawingml/2006/main" xmlns:r="http://schemas.openxmlformats.org/officeDocument/2006/relationships" xmlns:p="http://schemas.openxmlformats.org/presentationml/2006/main">
   <p:cSld>
     <p:spTree>
@@ -21348,13 +22396,27 @@
                 <a:latin typeface="Courier New" panose="02070309020205020404" pitchFamily="49" charset="0"/>
                 <a:cs typeface="Courier New" panose="02070309020205020404" pitchFamily="49" charset="0"/>
               </a:rPr>
-              <a:t>     "Name": "$</a:t>
+              <a:t>     "</a:t>
             </a:r>
             <a:r>
               <a:rPr lang="en-US" sz="1400" dirty="0" err="1">
                 <a:latin typeface="Courier New" panose="02070309020205020404" pitchFamily="49" charset="0"/>
                 <a:cs typeface="Courier New" panose="02070309020205020404" pitchFamily="49" charset="0"/>
               </a:rPr>
+              <a:t>PartyName</a:t>
+            </a:r>
+            <a:r>
+              <a:rPr lang="en-US" sz="1400" dirty="0">
+                <a:latin typeface="Courier New" panose="02070309020205020404" pitchFamily="49" charset="0"/>
+                <a:cs typeface="Courier New" panose="02070309020205020404" pitchFamily="49" charset="0"/>
+              </a:rPr>
+              <a:t>": "$</a:t>
+            </a:r>
+            <a:r>
+              <a:rPr lang="en-US" sz="1400" dirty="0" err="1">
+                <a:latin typeface="Courier New" panose="02070309020205020404" pitchFamily="49" charset="0"/>
+                <a:cs typeface="Courier New" panose="02070309020205020404" pitchFamily="49" charset="0"/>
+              </a:rPr>
               <a:t>LogTower</a:t>
             </a:r>
             <a:r>
@@ -21398,7 +22460,21 @@
                 <a:latin typeface="Courier New" panose="02070309020205020404" pitchFamily="49" charset="0"/>
                 <a:cs typeface="Courier New" panose="02070309020205020404" pitchFamily="49" charset="0"/>
               </a:rPr>
-              <a:t>     "Name": "$</a:t>
+              <a:t>     "</a:t>
+            </a:r>
+            <a:r>
+              <a:rPr lang="en-US" sz="1400" dirty="0" err="1">
+                <a:latin typeface="Courier New" panose="02070309020205020404" pitchFamily="49" charset="0"/>
+                <a:cs typeface="Courier New" panose="02070309020205020404" pitchFamily="49" charset="0"/>
+              </a:rPr>
+              <a:t>PartyName</a:t>
+            </a:r>
+            <a:r>
+              <a:rPr lang="en-US" sz="1400" dirty="0">
+                <a:latin typeface="Courier New" panose="02070309020205020404" pitchFamily="49" charset="0"/>
+                <a:cs typeface="Courier New" panose="02070309020205020404" pitchFamily="49" charset="0"/>
+              </a:rPr>
+              <a:t>": "$</a:t>
             </a:r>
             <a:r>
               <a:rPr lang="en-US" sz="1400" dirty="0" err="1">

--- a/Doc/CK-AppIdentity.pptx
+++ b/Doc/CK-AppIdentity.pptx
@@ -27,20 +27,20 @@
     <p:sldId id="303" r:id="rId18"/>
     <p:sldId id="274" r:id="rId19"/>
     <p:sldId id="275" r:id="rId20"/>
-    <p:sldId id="304" r:id="rId21"/>
-    <p:sldId id="276" r:id="rId22"/>
-    <p:sldId id="277" r:id="rId23"/>
-    <p:sldId id="278" r:id="rId24"/>
-    <p:sldId id="279" r:id="rId25"/>
-    <p:sldId id="280" r:id="rId26"/>
-    <p:sldId id="282" r:id="rId27"/>
-    <p:sldId id="281" r:id="rId28"/>
+    <p:sldId id="276" r:id="rId21"/>
+    <p:sldId id="277" r:id="rId22"/>
+    <p:sldId id="278" r:id="rId23"/>
+    <p:sldId id="279" r:id="rId24"/>
+    <p:sldId id="280" r:id="rId25"/>
+    <p:sldId id="282" r:id="rId26"/>
+    <p:sldId id="281" r:id="rId27"/>
+    <p:sldId id="288" r:id="rId28"/>
     <p:sldId id="283" r:id="rId29"/>
-    <p:sldId id="284" r:id="rId30"/>
-    <p:sldId id="285" r:id="rId31"/>
-    <p:sldId id="286" r:id="rId32"/>
-    <p:sldId id="287" r:id="rId33"/>
-    <p:sldId id="288" r:id="rId34"/>
+    <p:sldId id="304" r:id="rId30"/>
+    <p:sldId id="284" r:id="rId31"/>
+    <p:sldId id="285" r:id="rId32"/>
+    <p:sldId id="286" r:id="rId33"/>
+    <p:sldId id="287" r:id="rId34"/>
     <p:sldId id="289" r:id="rId35"/>
     <p:sldId id="290" r:id="rId36"/>
     <p:sldId id="297" r:id="rId37"/>
@@ -299,7 +299,7 @@
           <a:p>
             <a:fld id="{7EBA75D8-A9A5-4FAF-B563-7A079B630A7E}" type="datetimeFigureOut">
               <a:rPr lang="en-US" smtClean="0"/>
-              <a:t>6/26/2023</a:t>
+              <a:t>6/28/2023</a:t>
             </a:fld>
             <a:endParaRPr lang="en-US"/>
           </a:p>
@@ -771,7 +771,7 @@
           <a:p>
             <a:fld id="{E05EDB92-2FE2-4164-AA27-D03258A20DF4}" type="slidenum">
               <a:rPr lang="en-US" smtClean="0"/>
-              <a:t>22</a:t>
+              <a:t>21</a:t>
             </a:fld>
             <a:endParaRPr lang="en-US"/>
           </a:p>
@@ -855,7 +855,7 @@
           <a:p>
             <a:fld id="{E05EDB92-2FE2-4164-AA27-D03258A20DF4}" type="slidenum">
               <a:rPr lang="en-US" smtClean="0"/>
-              <a:t>23</a:t>
+              <a:t>22</a:t>
             </a:fld>
             <a:endParaRPr lang="en-US"/>
           </a:p>
@@ -953,7 +953,7 @@
           <a:p>
             <a:fld id="{E05EDB92-2FE2-4164-AA27-D03258A20DF4}" type="slidenum">
               <a:rPr lang="en-US" smtClean="0"/>
-              <a:t>26</a:t>
+              <a:t>25</a:t>
             </a:fld>
             <a:endParaRPr lang="en-US"/>
           </a:p>
@@ -1016,28 +1016,6 @@
           <a:bodyPr/>
           <a:lstStyle/>
           <a:p>
-            <a:r>
-              <a:rPr lang="en-US" dirty="0"/>
-              <a:t>Before detailing the Channels, we need to cover the </a:t>
-            </a:r>
-            <a:r>
-              <a:rPr lang="en-US" dirty="0" err="1"/>
-              <a:t>TransportMessage</a:t>
-            </a:r>
-            <a:r>
-              <a:rPr lang="en-US" dirty="0"/>
-              <a:t> and its Factories and the Transport and </a:t>
-            </a:r>
-            <a:r>
-              <a:rPr lang="en-US" dirty="0" err="1"/>
-              <a:t>TransportType</a:t>
-            </a:r>
-            <a:r>
-              <a:rPr lang="en-US" dirty="0"/>
-              <a:t> model.</a:t>
-            </a:r>
-          </a:p>
-          <a:p>
             <a:endParaRPr lang="en-US" dirty="0"/>
           </a:p>
         </p:txBody>
@@ -1059,7 +1037,7 @@
           <a:p>
             <a:fld id="{E05EDB92-2FE2-4164-AA27-D03258A20DF4}" type="slidenum">
               <a:rPr lang="en-US" smtClean="0"/>
-              <a:t>28</a:t>
+              <a:t>27</a:t>
             </a:fld>
             <a:endParaRPr lang="en-US"/>
           </a:p>
@@ -1068,7 +1046,7 @@
     </p:spTree>
     <p:extLst>
       <p:ext uri="{BB962C8B-B14F-4D97-AF65-F5344CB8AC3E}">
-        <p14:creationId xmlns:p14="http://schemas.microsoft.com/office/powerpoint/2010/main" val="1107907762"/>
+        <p14:creationId xmlns:p14="http://schemas.microsoft.com/office/powerpoint/2010/main" val="1570586495"/>
       </p:ext>
     </p:extLst>
   </p:cSld>
@@ -1123,387 +1101,28 @@
           <a:lstStyle/>
           <a:p>
             <a:r>
-              <a:rPr lang="en-US" sz="1800" dirty="0">
-                <a:solidFill>
-                  <a:srgbClr val="000000"/>
-                </a:solidFill>
-                <a:latin typeface="Consolas" panose="020B0609020204030204" pitchFamily="49" charset="0"/>
-              </a:rPr>
-              <a:t>All messages exchanged by the Transport layer are prefixed by the message's protocol and length.</a:t>
-            </a:r>
-          </a:p>
-          <a:p>
-            <a:r>
-              <a:rPr lang="en-US" sz="1800" dirty="0">
-                <a:solidFill>
-                  <a:srgbClr val="000000"/>
-                </a:solidFill>
-                <a:latin typeface="Consolas" panose="020B0609020204030204" pitchFamily="49" charset="0"/>
-              </a:rPr>
-              <a:t>- The prefix starts with a first byte: </a:t>
-            </a:r>
-            <a:r>
-              <a:rPr lang="en-US" sz="1800" dirty="0">
-                <a:solidFill>
-                  <a:srgbClr val="0000FF"/>
-                </a:solidFill>
-                <a:latin typeface="Consolas" panose="020B0609020204030204" pitchFamily="49" charset="0"/>
-              </a:rPr>
-              <a:t>`|L0|L1|CD|R0|R1|P0|P1|P2|`</a:t>
-            </a:r>
-            <a:r>
-              <a:rPr lang="en-US" sz="1800" dirty="0">
-                <a:solidFill>
-                  <a:srgbClr val="000000"/>
-                </a:solidFill>
-                <a:latin typeface="Consolas" panose="020B0609020204030204" pitchFamily="49" charset="0"/>
-              </a:rPr>
-              <a:t>.</a:t>
-            </a:r>
-          </a:p>
-          <a:p>
-            <a:r>
-              <a:rPr lang="en-US" sz="1800" dirty="0">
-                <a:solidFill>
-                  <a:srgbClr val="000000"/>
-                </a:solidFill>
-                <a:latin typeface="Consolas" panose="020B0609020204030204" pitchFamily="49" charset="0"/>
-              </a:rPr>
-              <a:t>  - The 2 MSB (L0-L1) gives us the number of bytes of the message length:</a:t>
-            </a:r>
-          </a:p>
-          <a:p>
-            <a:r>
-              <a:rPr lang="en-US" sz="1800" dirty="0">
-                <a:solidFill>
-                  <a:srgbClr val="000000"/>
-                </a:solidFill>
-                <a:latin typeface="Consolas" panose="020B0609020204030204" pitchFamily="49" charset="0"/>
-              </a:rPr>
-              <a:t>    - </a:t>
-            </a:r>
-            <a:r>
-              <a:rPr lang="en-US" sz="1800" dirty="0">
-                <a:solidFill>
-                  <a:srgbClr val="0000FF"/>
-                </a:solidFill>
-                <a:latin typeface="Consolas" panose="020B0609020204030204" pitchFamily="49" charset="0"/>
-              </a:rPr>
-              <a:t>`00`</a:t>
-            </a:r>
-            <a:r>
-              <a:rPr lang="en-US" sz="1800" dirty="0">
-                <a:solidFill>
-                  <a:srgbClr val="000000"/>
-                </a:solidFill>
-                <a:latin typeface="Consolas" panose="020B0609020204030204" pitchFamily="49" charset="0"/>
-              </a:rPr>
-              <a:t> 1 byte, the message length is between 0 and 255 bytes.</a:t>
-            </a:r>
-          </a:p>
-          <a:p>
-            <a:r>
-              <a:rPr lang="en-US" sz="1800" dirty="0">
-                <a:solidFill>
-                  <a:srgbClr val="000000"/>
-                </a:solidFill>
-                <a:latin typeface="Consolas" panose="020B0609020204030204" pitchFamily="49" charset="0"/>
-              </a:rPr>
-              <a:t>    - </a:t>
-            </a:r>
-            <a:r>
-              <a:rPr lang="en-US" sz="1800" dirty="0">
-                <a:solidFill>
-                  <a:srgbClr val="0000FF"/>
-                </a:solidFill>
-                <a:latin typeface="Consolas" panose="020B0609020204030204" pitchFamily="49" charset="0"/>
-              </a:rPr>
-              <a:t>`01`</a:t>
-            </a:r>
-            <a:r>
-              <a:rPr lang="en-US" sz="1800" dirty="0">
-                <a:solidFill>
-                  <a:srgbClr val="000000"/>
-                </a:solidFill>
-                <a:latin typeface="Consolas" panose="020B0609020204030204" pitchFamily="49" charset="0"/>
-              </a:rPr>
-              <a:t> 2 bytes, the message length is between 256 and 65535 bytes.</a:t>
-            </a:r>
-          </a:p>
-          <a:p>
-            <a:r>
-              <a:rPr lang="en-US" sz="1800" dirty="0">
-                <a:solidFill>
-                  <a:srgbClr val="000000"/>
-                </a:solidFill>
-                <a:latin typeface="Consolas" panose="020B0609020204030204" pitchFamily="49" charset="0"/>
-              </a:rPr>
-              <a:t>    - </a:t>
-            </a:r>
-            <a:r>
-              <a:rPr lang="en-US" sz="1800" dirty="0">
-                <a:solidFill>
-                  <a:srgbClr val="0000FF"/>
-                </a:solidFill>
-                <a:latin typeface="Consolas" panose="020B0609020204030204" pitchFamily="49" charset="0"/>
-              </a:rPr>
-              <a:t>`10`</a:t>
-            </a:r>
-            <a:r>
-              <a:rPr lang="en-US" sz="1800" dirty="0">
-                <a:solidFill>
-                  <a:srgbClr val="000000"/>
-                </a:solidFill>
-                <a:latin typeface="Consolas" panose="020B0609020204030204" pitchFamily="49" charset="0"/>
-              </a:rPr>
-              <a:t> 3 bytes, the message length is between 65536 and 16 777 215 bytes.</a:t>
-            </a:r>
-          </a:p>
-          <a:p>
-            <a:r>
-              <a:rPr lang="en-US" sz="1800" dirty="0">
-                <a:solidFill>
-                  <a:srgbClr val="000000"/>
-                </a:solidFill>
-                <a:latin typeface="Consolas" panose="020B0609020204030204" pitchFamily="49" charset="0"/>
-              </a:rPr>
-              <a:t>    - </a:t>
-            </a:r>
-            <a:r>
-              <a:rPr lang="en-US" sz="1800" dirty="0">
-                <a:solidFill>
-                  <a:srgbClr val="0000FF"/>
-                </a:solidFill>
-                <a:latin typeface="Consolas" panose="020B0609020204030204" pitchFamily="49" charset="0"/>
-              </a:rPr>
-              <a:t>`11`</a:t>
-            </a:r>
-            <a:r>
-              <a:rPr lang="en-US" sz="1800" dirty="0">
-                <a:solidFill>
-                  <a:srgbClr val="000000"/>
-                </a:solidFill>
-                <a:latin typeface="Consolas" panose="020B0609020204030204" pitchFamily="49" charset="0"/>
-              </a:rPr>
-              <a:t> 4 bytes, the message length is between 16 777 216 and 2 147 483 648 bytes (2 Gib).</a:t>
-            </a:r>
-          </a:p>
-          <a:p>
-            <a:r>
-              <a:rPr lang="en-US" sz="1800" dirty="0">
-                <a:solidFill>
-                  <a:srgbClr val="000000"/>
-                </a:solidFill>
-                <a:latin typeface="Consolas" panose="020B0609020204030204" pitchFamily="49" charset="0"/>
-              </a:rPr>
-              <a:t>  - The </a:t>
-            </a:r>
-            <a:r>
-              <a:rPr lang="en-US" sz="1800" dirty="0">
-                <a:solidFill>
-                  <a:srgbClr val="0000FF"/>
-                </a:solidFill>
-                <a:latin typeface="Consolas" panose="020B0609020204030204" pitchFamily="49" charset="0"/>
-              </a:rPr>
-              <a:t>`CD`</a:t>
-            </a:r>
-            <a:r>
-              <a:rPr lang="en-US" sz="1800" dirty="0">
-                <a:solidFill>
-                  <a:srgbClr val="000000"/>
-                </a:solidFill>
-                <a:latin typeface="Consolas" panose="020B0609020204030204" pitchFamily="49" charset="0"/>
-              </a:rPr>
-              <a:t> bit is the "Control vs. Data" bit. This is a convenient bit that can be used by protocols</a:t>
-            </a:r>
-          </a:p>
-          <a:p>
-            <a:r>
-              <a:rPr lang="en-US" sz="1800" dirty="0">
-                <a:solidFill>
-                  <a:srgbClr val="000000"/>
-                </a:solidFill>
-                <a:latin typeface="Consolas" panose="020B0609020204030204" pitchFamily="49" charset="0"/>
-              </a:rPr>
-              <a:t>    as a one-bit discriminator, typically between a regular data message and one (or more) control message.</a:t>
-            </a:r>
-          </a:p>
-          <a:p>
-            <a:r>
-              <a:rPr lang="en-US" sz="1800" dirty="0">
-                <a:solidFill>
-                  <a:srgbClr val="000000"/>
-                </a:solidFill>
-                <a:latin typeface="Consolas" panose="020B0609020204030204" pitchFamily="49" charset="0"/>
-              </a:rPr>
-              <a:t>  - </a:t>
-            </a:r>
-            <a:r>
-              <a:rPr lang="en-US" sz="1800" dirty="0">
-                <a:solidFill>
-                  <a:srgbClr val="0000FF"/>
-                </a:solidFill>
-                <a:latin typeface="Consolas" panose="020B0609020204030204" pitchFamily="49" charset="0"/>
-              </a:rPr>
-              <a:t>`R0`</a:t>
-            </a:r>
-            <a:r>
-              <a:rPr lang="en-US" sz="1800" dirty="0">
-                <a:solidFill>
-                  <a:srgbClr val="000000"/>
-                </a:solidFill>
-                <a:latin typeface="Consolas" panose="020B0609020204030204" pitchFamily="49" charset="0"/>
-              </a:rPr>
-              <a:t> and </a:t>
-            </a:r>
-            <a:r>
-              <a:rPr lang="en-US" sz="1800" dirty="0">
-                <a:solidFill>
-                  <a:srgbClr val="0000FF"/>
-                </a:solidFill>
-                <a:latin typeface="Consolas" panose="020B0609020204030204" pitchFamily="49" charset="0"/>
-              </a:rPr>
-              <a:t>`R1`</a:t>
-            </a:r>
-            <a:r>
-              <a:rPr lang="en-US" sz="1800" dirty="0">
-                <a:solidFill>
-                  <a:srgbClr val="000000"/>
-                </a:solidFill>
-                <a:latin typeface="Consolas" panose="020B0609020204030204" pitchFamily="49" charset="0"/>
-              </a:rPr>
-              <a:t> bit are reserved for future use.</a:t>
-            </a:r>
-          </a:p>
-          <a:p>
-            <a:r>
-              <a:rPr lang="en-US" sz="1800" dirty="0">
-                <a:solidFill>
-                  <a:srgbClr val="000000"/>
-                </a:solidFill>
-                <a:latin typeface="Consolas" panose="020B0609020204030204" pitchFamily="49" charset="0"/>
-              </a:rPr>
-              <a:t>  - P0-P2 bits is the Protocol, a number between 0 and 7. This number defines the "type" of the</a:t>
-            </a:r>
-          </a:p>
-          <a:p>
-            <a:r>
-              <a:rPr lang="en-US" sz="1800" dirty="0">
-                <a:solidFill>
-                  <a:srgbClr val="000000"/>
-                </a:solidFill>
-                <a:latin typeface="Consolas" panose="020B0609020204030204" pitchFamily="49" charset="0"/>
-              </a:rPr>
-              <a:t>  message: the writer or serializer that has been used to write the payload and the reader or "</a:t>
-            </a:r>
-            <a:r>
-              <a:rPr lang="en-US" sz="1800" dirty="0" err="1">
-                <a:solidFill>
-                  <a:srgbClr val="000000"/>
-                </a:solidFill>
-                <a:latin typeface="Consolas" panose="020B0609020204030204" pitchFamily="49" charset="0"/>
-              </a:rPr>
-              <a:t>deserializer</a:t>
-            </a:r>
-            <a:r>
-              <a:rPr lang="en-US" sz="1800" dirty="0">
-                <a:solidFill>
-                  <a:srgbClr val="000000"/>
-                </a:solidFill>
-                <a:latin typeface="Consolas" panose="020B0609020204030204" pitchFamily="49" charset="0"/>
-              </a:rPr>
-              <a:t>"</a:t>
-            </a:r>
-          </a:p>
-          <a:p>
-            <a:r>
-              <a:rPr lang="en-US" sz="1800" dirty="0">
-                <a:solidFill>
-                  <a:srgbClr val="000000"/>
-                </a:solidFill>
-                <a:latin typeface="Consolas" panose="020B0609020204030204" pitchFamily="49" charset="0"/>
-              </a:rPr>
-              <a:t>  that must be used to read it back.</a:t>
-            </a:r>
-          </a:p>
-          <a:p>
-            <a:r>
-              <a:rPr lang="en-US" sz="1800" dirty="0">
-                <a:solidFill>
-                  <a:srgbClr val="000000"/>
-                </a:solidFill>
-                <a:latin typeface="Consolas" panose="020B0609020204030204" pitchFamily="49" charset="0"/>
-              </a:rPr>
-              <a:t>- Then comes the message length itself (1 to 4 bytes)</a:t>
-            </a:r>
-          </a:p>
-          <a:p>
-            <a:r>
-              <a:rPr lang="en-US" sz="1800" dirty="0">
-                <a:solidFill>
-                  <a:srgbClr val="000000"/>
-                </a:solidFill>
-                <a:latin typeface="Consolas" panose="020B0609020204030204" pitchFamily="49" charset="0"/>
-              </a:rPr>
-              <a:t>- Then the message payload itself.</a:t>
-            </a:r>
-          </a:p>
-          <a:p>
-            <a:endParaRPr lang="en-US" sz="1800" dirty="0">
-              <a:solidFill>
-                <a:srgbClr val="000000"/>
-              </a:solidFill>
-              <a:latin typeface="Consolas" panose="020B0609020204030204" pitchFamily="49" charset="0"/>
-            </a:endParaRPr>
-          </a:p>
-          <a:p>
-            <a:r>
-              <a:rPr lang="en-US" sz="1800" dirty="0">
-                <a:solidFill>
-                  <a:srgbClr val="000000"/>
-                </a:solidFill>
-                <a:latin typeface="Consolas" panose="020B0609020204030204" pitchFamily="49" charset="0"/>
-              </a:rPr>
-              <a:t>At a higher level </a:t>
-            </a:r>
-            <a:r>
-              <a:rPr lang="en-US" sz="1800" dirty="0">
-                <a:solidFill>
-                  <a:srgbClr val="A31515"/>
-                </a:solidFill>
-                <a:latin typeface="Consolas" panose="020B0609020204030204" pitchFamily="49" charset="0"/>
-              </a:rPr>
-              <a:t>"</a:t>
-            </a:r>
-            <a:r>
-              <a:rPr lang="en-US" sz="1800" dirty="0" err="1">
-                <a:solidFill>
-                  <a:srgbClr val="000000"/>
-                </a:solidFill>
-                <a:latin typeface="Consolas" panose="020B0609020204030204" pitchFamily="49" charset="0"/>
-              </a:rPr>
-              <a:t>MessageProtocol</a:t>
-            </a:r>
-            <a:r>
-              <a:rPr lang="en-US" sz="1800" dirty="0">
-                <a:solidFill>
-                  <a:srgbClr val="000000"/>
-                </a:solidFill>
-                <a:latin typeface="Consolas" panose="020B0609020204030204" pitchFamily="49" charset="0"/>
-              </a:rPr>
-              <a:t>” are identified by a string (its unique name).</a:t>
-            </a:r>
-          </a:p>
-          <a:p>
-            <a:r>
-              <a:rPr lang="en-US" sz="1800" dirty="0">
-                <a:solidFill>
-                  <a:srgbClr val="000000"/>
-                </a:solidFill>
-                <a:latin typeface="Consolas" panose="020B0609020204030204" pitchFamily="49" charset="0"/>
-              </a:rPr>
-              <a:t>A protocol defines how the message is encoded and how they are exchanged: by merging these 2 concepts here, we greatly simplify the implementation and the understandability of the Transport layer. The protocol simply defines the encoding it uses.</a:t>
-            </a:r>
+              <a:rPr lang="en-US" dirty="0"/>
+              <a:t>Before detailing the Channels, we need to cover the </a:t>
+            </a:r>
+            <a:r>
+              <a:rPr lang="en-US" dirty="0" err="1"/>
+              <a:t>TransportMessage</a:t>
+            </a:r>
+            <a:r>
+              <a:rPr lang="en-US" dirty="0"/>
+              <a:t> and its Factories and the Transport and </a:t>
+            </a:r>
+            <a:r>
+              <a:rPr lang="en-US" dirty="0" err="1"/>
+              <a:t>TransportType</a:t>
+            </a:r>
+            <a:r>
+              <a:rPr lang="en-US" dirty="0"/>
+              <a:t> model.</a:t>
+            </a:r>
+          </a:p>
+          <a:p>
+            <a:endParaRPr lang="en-US" dirty="0"/>
           </a:p>
         </p:txBody>
       </p:sp>
@@ -1524,7 +1143,7 @@
           <a:p>
             <a:fld id="{E05EDB92-2FE2-4164-AA27-D03258A20DF4}" type="slidenum">
               <a:rPr lang="en-US" smtClean="0"/>
-              <a:t>29</a:t>
+              <a:t>28</a:t>
             </a:fld>
             <a:endParaRPr lang="en-US"/>
           </a:p>
@@ -1533,7 +1152,7 @@
     </p:spTree>
     <p:extLst>
       <p:ext uri="{BB962C8B-B14F-4D97-AF65-F5344CB8AC3E}">
-        <p14:creationId xmlns:p14="http://schemas.microsoft.com/office/powerpoint/2010/main" val="4115452317"/>
+        <p14:creationId xmlns:p14="http://schemas.microsoft.com/office/powerpoint/2010/main" val="1107907762"/>
       </p:ext>
     </p:extLst>
   </p:cSld>
@@ -1594,16 +1213,27 @@
                 </a:solidFill>
                 <a:latin typeface="Consolas" panose="020B0609020204030204" pitchFamily="49" charset="0"/>
               </a:rPr>
-              <a:t>The </a:t>
-            </a:r>
+              <a:t>All messages exchanged by the Transport layer are prefixed by the message's protocol and length.</a:t>
+            </a:r>
+          </a:p>
+          <a:p>
             <a:r>
               <a:rPr lang="en-US" sz="1800" dirty="0">
                 <a:solidFill>
+                  <a:srgbClr val="000000"/>
+                </a:solidFill>
+                <a:latin typeface="Consolas" panose="020B0609020204030204" pitchFamily="49" charset="0"/>
+              </a:rPr>
+              <a:t>- The prefix starts with a first byte: </a:t>
+            </a:r>
+            <a:r>
+              <a:rPr lang="en-US" sz="1800" dirty="0">
+                <a:solidFill>
                   <a:srgbClr val="0000FF"/>
                 </a:solidFill>
                 <a:latin typeface="Consolas" panose="020B0609020204030204" pitchFamily="49" charset="0"/>
               </a:rPr>
-              <a:t>`"0 Protocol"`</a:t>
+              <a:t>`|L0|L1|CD|R0|R1|P0|P1|P2|`</a:t>
             </a:r>
             <a:r>
               <a:rPr lang="en-US" sz="1800" dirty="0">
@@ -1612,7 +1242,243 @@
                 </a:solidFill>
                 <a:latin typeface="Consolas" panose="020B0609020204030204" pitchFamily="49" charset="0"/>
               </a:rPr>
-              <a:t> protocol name is reserved: this is the protocol of </a:t>
+              <a:t>.</a:t>
+            </a:r>
+          </a:p>
+          <a:p>
+            <a:r>
+              <a:rPr lang="en-US" sz="1800" dirty="0">
+                <a:solidFill>
+                  <a:srgbClr val="000000"/>
+                </a:solidFill>
+                <a:latin typeface="Consolas" panose="020B0609020204030204" pitchFamily="49" charset="0"/>
+              </a:rPr>
+              <a:t>  - The 2 MSB (L0-L1) gives us the number of bytes of the message length:</a:t>
+            </a:r>
+          </a:p>
+          <a:p>
+            <a:r>
+              <a:rPr lang="en-US" sz="1800" dirty="0">
+                <a:solidFill>
+                  <a:srgbClr val="000000"/>
+                </a:solidFill>
+                <a:latin typeface="Consolas" panose="020B0609020204030204" pitchFamily="49" charset="0"/>
+              </a:rPr>
+              <a:t>    - </a:t>
+            </a:r>
+            <a:r>
+              <a:rPr lang="en-US" sz="1800" dirty="0">
+                <a:solidFill>
+                  <a:srgbClr val="0000FF"/>
+                </a:solidFill>
+                <a:latin typeface="Consolas" panose="020B0609020204030204" pitchFamily="49" charset="0"/>
+              </a:rPr>
+              <a:t>`00`</a:t>
+            </a:r>
+            <a:r>
+              <a:rPr lang="en-US" sz="1800" dirty="0">
+                <a:solidFill>
+                  <a:srgbClr val="000000"/>
+                </a:solidFill>
+                <a:latin typeface="Consolas" panose="020B0609020204030204" pitchFamily="49" charset="0"/>
+              </a:rPr>
+              <a:t> 1 byte, the message length is between 0 and 255 bytes.</a:t>
+            </a:r>
+          </a:p>
+          <a:p>
+            <a:r>
+              <a:rPr lang="en-US" sz="1800" dirty="0">
+                <a:solidFill>
+                  <a:srgbClr val="000000"/>
+                </a:solidFill>
+                <a:latin typeface="Consolas" panose="020B0609020204030204" pitchFamily="49" charset="0"/>
+              </a:rPr>
+              <a:t>    - </a:t>
+            </a:r>
+            <a:r>
+              <a:rPr lang="en-US" sz="1800" dirty="0">
+                <a:solidFill>
+                  <a:srgbClr val="0000FF"/>
+                </a:solidFill>
+                <a:latin typeface="Consolas" panose="020B0609020204030204" pitchFamily="49" charset="0"/>
+              </a:rPr>
+              <a:t>`01`</a:t>
+            </a:r>
+            <a:r>
+              <a:rPr lang="en-US" sz="1800" dirty="0">
+                <a:solidFill>
+                  <a:srgbClr val="000000"/>
+                </a:solidFill>
+                <a:latin typeface="Consolas" panose="020B0609020204030204" pitchFamily="49" charset="0"/>
+              </a:rPr>
+              <a:t> 2 bytes, the message length is between 256 and 65535 bytes.</a:t>
+            </a:r>
+          </a:p>
+          <a:p>
+            <a:r>
+              <a:rPr lang="en-US" sz="1800" dirty="0">
+                <a:solidFill>
+                  <a:srgbClr val="000000"/>
+                </a:solidFill>
+                <a:latin typeface="Consolas" panose="020B0609020204030204" pitchFamily="49" charset="0"/>
+              </a:rPr>
+              <a:t>    - </a:t>
+            </a:r>
+            <a:r>
+              <a:rPr lang="en-US" sz="1800" dirty="0">
+                <a:solidFill>
+                  <a:srgbClr val="0000FF"/>
+                </a:solidFill>
+                <a:latin typeface="Consolas" panose="020B0609020204030204" pitchFamily="49" charset="0"/>
+              </a:rPr>
+              <a:t>`10`</a:t>
+            </a:r>
+            <a:r>
+              <a:rPr lang="en-US" sz="1800" dirty="0">
+                <a:solidFill>
+                  <a:srgbClr val="000000"/>
+                </a:solidFill>
+                <a:latin typeface="Consolas" panose="020B0609020204030204" pitchFamily="49" charset="0"/>
+              </a:rPr>
+              <a:t> 3 bytes, the message length is between 65536 and 16 777 215 bytes.</a:t>
+            </a:r>
+          </a:p>
+          <a:p>
+            <a:r>
+              <a:rPr lang="en-US" sz="1800" dirty="0">
+                <a:solidFill>
+                  <a:srgbClr val="000000"/>
+                </a:solidFill>
+                <a:latin typeface="Consolas" panose="020B0609020204030204" pitchFamily="49" charset="0"/>
+              </a:rPr>
+              <a:t>    - </a:t>
+            </a:r>
+            <a:r>
+              <a:rPr lang="en-US" sz="1800" dirty="0">
+                <a:solidFill>
+                  <a:srgbClr val="0000FF"/>
+                </a:solidFill>
+                <a:latin typeface="Consolas" panose="020B0609020204030204" pitchFamily="49" charset="0"/>
+              </a:rPr>
+              <a:t>`11`</a:t>
+            </a:r>
+            <a:r>
+              <a:rPr lang="en-US" sz="1800" dirty="0">
+                <a:solidFill>
+                  <a:srgbClr val="000000"/>
+                </a:solidFill>
+                <a:latin typeface="Consolas" panose="020B0609020204030204" pitchFamily="49" charset="0"/>
+              </a:rPr>
+              <a:t> 4 bytes, the message length is between 16 777 216 and 2 147 483 648 bytes (2 Gib).</a:t>
+            </a:r>
+          </a:p>
+          <a:p>
+            <a:r>
+              <a:rPr lang="en-US" sz="1800" dirty="0">
+                <a:solidFill>
+                  <a:srgbClr val="000000"/>
+                </a:solidFill>
+                <a:latin typeface="Consolas" panose="020B0609020204030204" pitchFamily="49" charset="0"/>
+              </a:rPr>
+              <a:t>  - The </a:t>
+            </a:r>
+            <a:r>
+              <a:rPr lang="en-US" sz="1800" dirty="0">
+                <a:solidFill>
+                  <a:srgbClr val="0000FF"/>
+                </a:solidFill>
+                <a:latin typeface="Consolas" panose="020B0609020204030204" pitchFamily="49" charset="0"/>
+              </a:rPr>
+              <a:t>`CD`</a:t>
+            </a:r>
+            <a:r>
+              <a:rPr lang="en-US" sz="1800" dirty="0">
+                <a:solidFill>
+                  <a:srgbClr val="000000"/>
+                </a:solidFill>
+                <a:latin typeface="Consolas" panose="020B0609020204030204" pitchFamily="49" charset="0"/>
+              </a:rPr>
+              <a:t> bit is the "Control vs. Data" bit. This is a convenient bit that can be used by protocols</a:t>
+            </a:r>
+          </a:p>
+          <a:p>
+            <a:r>
+              <a:rPr lang="en-US" sz="1800" dirty="0">
+                <a:solidFill>
+                  <a:srgbClr val="000000"/>
+                </a:solidFill>
+                <a:latin typeface="Consolas" panose="020B0609020204030204" pitchFamily="49" charset="0"/>
+              </a:rPr>
+              <a:t>    as a one-bit discriminator, typically between a regular data message and one (or more) control message.</a:t>
+            </a:r>
+          </a:p>
+          <a:p>
+            <a:r>
+              <a:rPr lang="en-US" sz="1800" dirty="0">
+                <a:solidFill>
+                  <a:srgbClr val="000000"/>
+                </a:solidFill>
+                <a:latin typeface="Consolas" panose="020B0609020204030204" pitchFamily="49" charset="0"/>
+              </a:rPr>
+              <a:t>  - </a:t>
+            </a:r>
+            <a:r>
+              <a:rPr lang="en-US" sz="1800" dirty="0">
+                <a:solidFill>
+                  <a:srgbClr val="0000FF"/>
+                </a:solidFill>
+                <a:latin typeface="Consolas" panose="020B0609020204030204" pitchFamily="49" charset="0"/>
+              </a:rPr>
+              <a:t>`R0`</a:t>
+            </a:r>
+            <a:r>
+              <a:rPr lang="en-US" sz="1800" dirty="0">
+                <a:solidFill>
+                  <a:srgbClr val="000000"/>
+                </a:solidFill>
+                <a:latin typeface="Consolas" panose="020B0609020204030204" pitchFamily="49" charset="0"/>
+              </a:rPr>
+              <a:t> and </a:t>
+            </a:r>
+            <a:r>
+              <a:rPr lang="en-US" sz="1800" dirty="0">
+                <a:solidFill>
+                  <a:srgbClr val="0000FF"/>
+                </a:solidFill>
+                <a:latin typeface="Consolas" panose="020B0609020204030204" pitchFamily="49" charset="0"/>
+              </a:rPr>
+              <a:t>`R1`</a:t>
+            </a:r>
+            <a:r>
+              <a:rPr lang="en-US" sz="1800" dirty="0">
+                <a:solidFill>
+                  <a:srgbClr val="000000"/>
+                </a:solidFill>
+                <a:latin typeface="Consolas" panose="020B0609020204030204" pitchFamily="49" charset="0"/>
+              </a:rPr>
+              <a:t> bit are reserved for future use.</a:t>
+            </a:r>
+          </a:p>
+          <a:p>
+            <a:r>
+              <a:rPr lang="en-US" sz="1800" dirty="0">
+                <a:solidFill>
+                  <a:srgbClr val="000000"/>
+                </a:solidFill>
+                <a:latin typeface="Consolas" panose="020B0609020204030204" pitchFamily="49" charset="0"/>
+              </a:rPr>
+              <a:t>  - P0-P2 bits is the Protocol, a number between 0 and 7. This number defines the "type" of the</a:t>
+            </a:r>
+          </a:p>
+          <a:p>
+            <a:r>
+              <a:rPr lang="en-US" sz="1800" dirty="0">
+                <a:solidFill>
+                  <a:srgbClr val="000000"/>
+                </a:solidFill>
+                <a:latin typeface="Consolas" panose="020B0609020204030204" pitchFamily="49" charset="0"/>
+              </a:rPr>
+              <a:t>  message: the writer or serializer that has been used to write the payload and the reader or "</a:t>
             </a:r>
             <a:r>
               <a:rPr lang="en-US" sz="1800" dirty="0" err="1">
@@ -1621,7 +1487,7 @@
                 </a:solidFill>
                 <a:latin typeface="Consolas" panose="020B0609020204030204" pitchFamily="49" charset="0"/>
               </a:rPr>
-              <a:t>CK.AppIdentity.TransportLayer</a:t>
+              <a:t>deserializer</a:t>
             </a:r>
             <a:r>
               <a:rPr lang="en-US" sz="1800" dirty="0">
@@ -1630,7 +1496,7 @@
                 </a:solidFill>
                 <a:latin typeface="Consolas" panose="020B0609020204030204" pitchFamily="49" charset="0"/>
               </a:rPr>
-              <a:t> itself that handles</a:t>
+              <a:t>"</a:t>
             </a:r>
           </a:p>
           <a:p>
@@ -1641,7 +1507,7 @@
                 </a:solidFill>
                 <a:latin typeface="Consolas" panose="020B0609020204030204" pitchFamily="49" charset="0"/>
               </a:rPr>
-              <a:t>special messages used to negotiate, accept, reject incoming parties and outgoing connections.</a:t>
+              <a:t>  that must be used to read it back.</a:t>
             </a:r>
           </a:p>
           <a:p>
@@ -1652,7 +1518,7 @@
                 </a:solidFill>
                 <a:latin typeface="Consolas" panose="020B0609020204030204" pitchFamily="49" charset="0"/>
               </a:rPr>
-              <a:t>This lets 7 possible protocols. This may seem a limitation however this limit applies to a Remote party pair: there</a:t>
+              <a:t>- Then comes the message length itself (1 to 4 bytes)</a:t>
             </a:r>
           </a:p>
           <a:p>
@@ -1663,18 +1529,7 @@
                 </a:solidFill>
                 <a:latin typeface="Consolas" panose="020B0609020204030204" pitchFamily="49" charset="0"/>
               </a:rPr>
-              <a:t>can be any number of possible protocols in an application, among them 2 parties that start to interact initially</a:t>
-            </a:r>
-          </a:p>
-          <a:p>
-            <a:r>
-              <a:rPr lang="en-US" sz="1800" dirty="0">
-                <a:solidFill>
-                  <a:srgbClr val="000000"/>
-                </a:solidFill>
-                <a:latin typeface="Consolas" panose="020B0609020204030204" pitchFamily="49" charset="0"/>
-              </a:rPr>
-              <a:t>negotiate the ones they can and want to use. Any Transport between 2 parties can support up to 7 different protocols.</a:t>
+              <a:t>- Then the message payload itself.</a:t>
             </a:r>
           </a:p>
           <a:p>
@@ -1693,22 +1548,46 @@
                 </a:solidFill>
                 <a:latin typeface="Consolas" panose="020B0609020204030204" pitchFamily="49" charset="0"/>
               </a:rPr>
-              <a:t>The final length of a message on the wire is between 2 bytes (the special Empty message, see below) and 2 Gib.</a:t>
-            </a:r>
-          </a:p>
-          <a:p>
+              <a:t>At a higher level </a:t>
+            </a:r>
             <a:r>
               <a:rPr lang="en-US" sz="1800" dirty="0">
                 <a:solidFill>
+                  <a:srgbClr val="A31515"/>
+                </a:solidFill>
+                <a:latin typeface="Consolas" panose="020B0609020204030204" pitchFamily="49" charset="0"/>
+              </a:rPr>
+              <a:t>"</a:t>
+            </a:r>
+            <a:r>
+              <a:rPr lang="en-US" sz="1800" dirty="0" err="1">
+                <a:solidFill>
                   <a:srgbClr val="000000"/>
                 </a:solidFill>
                 <a:latin typeface="Consolas" panose="020B0609020204030204" pitchFamily="49" charset="0"/>
               </a:rPr>
-              <a:t>A minimal 1 byte message requires 3 bytes (in any of the 7 available protocols). </a:t>
-            </a:r>
-          </a:p>
-          <a:p>
-            <a:endParaRPr lang="en-US" dirty="0"/>
+              <a:t>MessageProtocol</a:t>
+            </a:r>
+            <a:r>
+              <a:rPr lang="en-US" sz="1800" dirty="0">
+                <a:solidFill>
+                  <a:srgbClr val="000000"/>
+                </a:solidFill>
+                <a:latin typeface="Consolas" panose="020B0609020204030204" pitchFamily="49" charset="0"/>
+              </a:rPr>
+              <a:t>” are identified by a string (its unique name).</a:t>
+            </a:r>
+          </a:p>
+          <a:p>
+            <a:r>
+              <a:rPr lang="en-US" sz="1800" dirty="0">
+                <a:solidFill>
+                  <a:srgbClr val="000000"/>
+                </a:solidFill>
+                <a:latin typeface="Consolas" panose="020B0609020204030204" pitchFamily="49" charset="0"/>
+              </a:rPr>
+              <a:t>A protocol defines how the message is encoded and how they are exchanged: by merging these 2 concepts here, we greatly simplify the implementation and the understandability of the Transport layer. The protocol simply defines the encoding it uses.</a:t>
+            </a:r>
           </a:p>
         </p:txBody>
       </p:sp>
@@ -1738,7 +1617,7 @@
     </p:spTree>
     <p:extLst>
       <p:ext uri="{BB962C8B-B14F-4D97-AF65-F5344CB8AC3E}">
-        <p14:creationId xmlns:p14="http://schemas.microsoft.com/office/powerpoint/2010/main" val="1132549190"/>
+        <p14:creationId xmlns:p14="http://schemas.microsoft.com/office/powerpoint/2010/main" val="4115452317"/>
       </p:ext>
     </p:extLst>
   </p:cSld>
@@ -1792,6 +1671,127 @@
           <a:bodyPr/>
           <a:lstStyle/>
           <a:p>
+            <a:r>
+              <a:rPr lang="en-US" sz="1800" dirty="0">
+                <a:solidFill>
+                  <a:srgbClr val="000000"/>
+                </a:solidFill>
+                <a:latin typeface="Consolas" panose="020B0609020204030204" pitchFamily="49" charset="0"/>
+              </a:rPr>
+              <a:t>The </a:t>
+            </a:r>
+            <a:r>
+              <a:rPr lang="en-US" sz="1800" dirty="0">
+                <a:solidFill>
+                  <a:srgbClr val="0000FF"/>
+                </a:solidFill>
+                <a:latin typeface="Consolas" panose="020B0609020204030204" pitchFamily="49" charset="0"/>
+              </a:rPr>
+              <a:t>`"0 Protocol"`</a:t>
+            </a:r>
+            <a:r>
+              <a:rPr lang="en-US" sz="1800" dirty="0">
+                <a:solidFill>
+                  <a:srgbClr val="000000"/>
+                </a:solidFill>
+                <a:latin typeface="Consolas" panose="020B0609020204030204" pitchFamily="49" charset="0"/>
+              </a:rPr>
+              <a:t> protocol name is reserved: this is the protocol of </a:t>
+            </a:r>
+            <a:r>
+              <a:rPr lang="en-US" sz="1800" dirty="0" err="1">
+                <a:solidFill>
+                  <a:srgbClr val="000000"/>
+                </a:solidFill>
+                <a:latin typeface="Consolas" panose="020B0609020204030204" pitchFamily="49" charset="0"/>
+              </a:rPr>
+              <a:t>CK.AppIdentity.TransportLayer</a:t>
+            </a:r>
+            <a:r>
+              <a:rPr lang="en-US" sz="1800" dirty="0">
+                <a:solidFill>
+                  <a:srgbClr val="000000"/>
+                </a:solidFill>
+                <a:latin typeface="Consolas" panose="020B0609020204030204" pitchFamily="49" charset="0"/>
+              </a:rPr>
+              <a:t> itself that handles</a:t>
+            </a:r>
+          </a:p>
+          <a:p>
+            <a:r>
+              <a:rPr lang="en-US" sz="1800" dirty="0">
+                <a:solidFill>
+                  <a:srgbClr val="000000"/>
+                </a:solidFill>
+                <a:latin typeface="Consolas" panose="020B0609020204030204" pitchFamily="49" charset="0"/>
+              </a:rPr>
+              <a:t>special messages used to negotiate, accept, reject incoming parties and outgoing connections.</a:t>
+            </a:r>
+          </a:p>
+          <a:p>
+            <a:r>
+              <a:rPr lang="en-US" sz="1800" dirty="0">
+                <a:solidFill>
+                  <a:srgbClr val="000000"/>
+                </a:solidFill>
+                <a:latin typeface="Consolas" panose="020B0609020204030204" pitchFamily="49" charset="0"/>
+              </a:rPr>
+              <a:t>This lets 7 possible protocols. This may seem a limitation however this limit applies to a Remote party pair: there</a:t>
+            </a:r>
+          </a:p>
+          <a:p>
+            <a:r>
+              <a:rPr lang="en-US" sz="1800" dirty="0">
+                <a:solidFill>
+                  <a:srgbClr val="000000"/>
+                </a:solidFill>
+                <a:latin typeface="Consolas" panose="020B0609020204030204" pitchFamily="49" charset="0"/>
+              </a:rPr>
+              <a:t>can be any number of possible protocols in an application, among them 2 parties that start to interact initially</a:t>
+            </a:r>
+          </a:p>
+          <a:p>
+            <a:r>
+              <a:rPr lang="en-US" sz="1800" dirty="0">
+                <a:solidFill>
+                  <a:srgbClr val="000000"/>
+                </a:solidFill>
+                <a:latin typeface="Consolas" panose="020B0609020204030204" pitchFamily="49" charset="0"/>
+              </a:rPr>
+              <a:t>negotiate the ones they can and want to use. Any Transport between 2 parties can support up to 7 different protocols.</a:t>
+            </a:r>
+          </a:p>
+          <a:p>
+            <a:endParaRPr lang="en-US" sz="1800" dirty="0">
+              <a:solidFill>
+                <a:srgbClr val="000000"/>
+              </a:solidFill>
+              <a:latin typeface="Consolas" panose="020B0609020204030204" pitchFamily="49" charset="0"/>
+            </a:endParaRPr>
+          </a:p>
+          <a:p>
+            <a:r>
+              <a:rPr lang="en-US" sz="1800" dirty="0">
+                <a:solidFill>
+                  <a:srgbClr val="000000"/>
+                </a:solidFill>
+                <a:latin typeface="Consolas" panose="020B0609020204030204" pitchFamily="49" charset="0"/>
+              </a:rPr>
+              <a:t>The final length of a message on the wire is between 2 bytes (the special Empty message, see below) and 2 Gib.</a:t>
+            </a:r>
+          </a:p>
+          <a:p>
+            <a:r>
+              <a:rPr lang="en-US" sz="1800" dirty="0">
+                <a:solidFill>
+                  <a:srgbClr val="000000"/>
+                </a:solidFill>
+                <a:latin typeface="Consolas" panose="020B0609020204030204" pitchFamily="49" charset="0"/>
+              </a:rPr>
+              <a:t>A minimal 1 byte message requires 3 bytes (in any of the 7 available protocols). </a:t>
+            </a:r>
+          </a:p>
+          <a:p>
             <a:endParaRPr lang="en-US" dirty="0"/>
           </a:p>
         </p:txBody>
@@ -1813,7 +1813,7 @@
           <a:p>
             <a:fld id="{E05EDB92-2FE2-4164-AA27-D03258A20DF4}" type="slidenum">
               <a:rPr lang="en-US" smtClean="0"/>
-              <a:t>32</a:t>
+              <a:t>31</a:t>
             </a:fld>
             <a:endParaRPr lang="en-US"/>
           </a:p>
@@ -1822,7 +1822,7 @@
     </p:spTree>
     <p:extLst>
       <p:ext uri="{BB962C8B-B14F-4D97-AF65-F5344CB8AC3E}">
-        <p14:creationId xmlns:p14="http://schemas.microsoft.com/office/powerpoint/2010/main" val="213048778"/>
+        <p14:creationId xmlns:p14="http://schemas.microsoft.com/office/powerpoint/2010/main" val="1132549190"/>
       </p:ext>
     </p:extLst>
   </p:cSld>
@@ -1906,7 +1906,7 @@
     </p:spTree>
     <p:extLst>
       <p:ext uri="{BB962C8B-B14F-4D97-AF65-F5344CB8AC3E}">
-        <p14:creationId xmlns:p14="http://schemas.microsoft.com/office/powerpoint/2010/main" val="1570586495"/>
+        <p14:creationId xmlns:p14="http://schemas.microsoft.com/office/powerpoint/2010/main" val="213048778"/>
       </p:ext>
     </p:extLst>
   </p:cSld>
@@ -2063,7 +2063,7 @@
           <a:p>
             <a:fld id="{7D1F2140-8D48-49AC-AD8D-683E6FF4DC34}" type="datetimeFigureOut">
               <a:rPr lang="en-US" smtClean="0"/>
-              <a:t>6/26/2023</a:t>
+              <a:t>6/28/2023</a:t>
             </a:fld>
             <a:endParaRPr lang="en-US"/>
           </a:p>
@@ -2261,7 +2261,7 @@
           <a:p>
             <a:fld id="{7D1F2140-8D48-49AC-AD8D-683E6FF4DC34}" type="datetimeFigureOut">
               <a:rPr lang="en-US" smtClean="0"/>
-              <a:t>6/26/2023</a:t>
+              <a:t>6/28/2023</a:t>
             </a:fld>
             <a:endParaRPr lang="en-US"/>
           </a:p>
@@ -2469,7 +2469,7 @@
           <a:p>
             <a:fld id="{7D1F2140-8D48-49AC-AD8D-683E6FF4DC34}" type="datetimeFigureOut">
               <a:rPr lang="en-US" smtClean="0"/>
-              <a:t>6/26/2023</a:t>
+              <a:t>6/28/2023</a:t>
             </a:fld>
             <a:endParaRPr lang="en-US"/>
           </a:p>
@@ -2667,7 +2667,7 @@
           <a:p>
             <a:fld id="{7D1F2140-8D48-49AC-AD8D-683E6FF4DC34}" type="datetimeFigureOut">
               <a:rPr lang="en-US" smtClean="0"/>
-              <a:t>6/26/2023</a:t>
+              <a:t>6/28/2023</a:t>
             </a:fld>
             <a:endParaRPr lang="en-US"/>
           </a:p>
@@ -2942,7 +2942,7 @@
           <a:p>
             <a:fld id="{7D1F2140-8D48-49AC-AD8D-683E6FF4DC34}" type="datetimeFigureOut">
               <a:rPr lang="en-US" smtClean="0"/>
-              <a:t>6/26/2023</a:t>
+              <a:t>6/28/2023</a:t>
             </a:fld>
             <a:endParaRPr lang="en-US"/>
           </a:p>
@@ -3207,7 +3207,7 @@
           <a:p>
             <a:fld id="{7D1F2140-8D48-49AC-AD8D-683E6FF4DC34}" type="datetimeFigureOut">
               <a:rPr lang="en-US" smtClean="0"/>
-              <a:t>6/26/2023</a:t>
+              <a:t>6/28/2023</a:t>
             </a:fld>
             <a:endParaRPr lang="en-US"/>
           </a:p>
@@ -3619,7 +3619,7 @@
           <a:p>
             <a:fld id="{7D1F2140-8D48-49AC-AD8D-683E6FF4DC34}" type="datetimeFigureOut">
               <a:rPr lang="en-US" smtClean="0"/>
-              <a:t>6/26/2023</a:t>
+              <a:t>6/28/2023</a:t>
             </a:fld>
             <a:endParaRPr lang="en-US"/>
           </a:p>
@@ -3760,7 +3760,7 @@
           <a:p>
             <a:fld id="{7D1F2140-8D48-49AC-AD8D-683E6FF4DC34}" type="datetimeFigureOut">
               <a:rPr lang="en-US" smtClean="0"/>
-              <a:t>6/26/2023</a:t>
+              <a:t>6/28/2023</a:t>
             </a:fld>
             <a:endParaRPr lang="en-US"/>
           </a:p>
@@ -3873,7 +3873,7 @@
           <a:p>
             <a:fld id="{7D1F2140-8D48-49AC-AD8D-683E6FF4DC34}" type="datetimeFigureOut">
               <a:rPr lang="en-US" smtClean="0"/>
-              <a:t>6/26/2023</a:t>
+              <a:t>6/28/2023</a:t>
             </a:fld>
             <a:endParaRPr lang="en-US"/>
           </a:p>
@@ -4184,7 +4184,7 @@
           <a:p>
             <a:fld id="{7D1F2140-8D48-49AC-AD8D-683E6FF4DC34}" type="datetimeFigureOut">
               <a:rPr lang="en-US" smtClean="0"/>
-              <a:t>6/26/2023</a:t>
+              <a:t>6/28/2023</a:t>
             </a:fld>
             <a:endParaRPr lang="en-US"/>
           </a:p>
@@ -4472,7 +4472,7 @@
           <a:p>
             <a:fld id="{7D1F2140-8D48-49AC-AD8D-683E6FF4DC34}" type="datetimeFigureOut">
               <a:rPr lang="en-US" smtClean="0"/>
-              <a:t>6/26/2023</a:t>
+              <a:t>6/28/2023</a:t>
             </a:fld>
             <a:endParaRPr lang="en-US"/>
           </a:p>
@@ -4713,7 +4713,7 @@
           <a:p>
             <a:fld id="{7D1F2140-8D48-49AC-AD8D-683E6FF4DC34}" type="datetimeFigureOut">
               <a:rPr lang="en-US" smtClean="0"/>
-              <a:t>6/26/2023</a:t>
+              <a:t>6/28/2023</a:t>
             </a:fld>
             <a:endParaRPr lang="en-US"/>
           </a:p>
@@ -11255,89 +11255,42 @@
               <a:buNone/>
             </a:pPr>
             <a:r>
-              <a:rPr lang="en-US" sz="1400" dirty="0">
+              <a:rPr lang="en-US" sz="1400" b="1" dirty="0">
                 <a:latin typeface="Courier New" panose="02070309020205020404" pitchFamily="49" charset="0"/>
                 <a:cs typeface="Courier New" panose="02070309020205020404" pitchFamily="49" charset="0"/>
               </a:rPr>
               <a:t>    "</a:t>
             </a:r>
             <a:r>
-              <a:rPr lang="en-US" sz="1400" dirty="0" err="1">
-                <a:latin typeface="Courier New" panose="02070309020205020404" pitchFamily="49" charset="0"/>
-                <a:cs typeface="Courier New" panose="02070309020205020404" pitchFamily="49" charset="0"/>
-              </a:rPr>
-              <a:t>DomainName</a:t>
-            </a:r>
-            <a:r>
-              <a:rPr lang="en-US" sz="1400" dirty="0">
-                <a:latin typeface="Courier New" panose="02070309020205020404" pitchFamily="49" charset="0"/>
-                <a:cs typeface="Courier New" panose="02070309020205020404" pitchFamily="49" charset="0"/>
-              </a:rPr>
-              <a:t>": "</a:t>
+              <a:rPr lang="en-US" sz="1400" b="1" dirty="0" err="1">
+                <a:latin typeface="Courier New" panose="02070309020205020404" pitchFamily="49" charset="0"/>
+                <a:cs typeface="Courier New" panose="02070309020205020404" pitchFamily="49" charset="0"/>
+              </a:rPr>
+              <a:t>FullName</a:t>
             </a:r>
             <a:r>
               <a:rPr lang="en-US" sz="1400" b="1" dirty="0">
                 <a:latin typeface="Courier New" panose="02070309020205020404" pitchFamily="49" charset="0"/>
                 <a:cs typeface="Courier New" panose="02070309020205020404" pitchFamily="49" charset="0"/>
               </a:rPr>
-              <a:t>External</a:t>
-            </a:r>
-            <a:r>
-              <a:rPr lang="en-US" sz="1400" dirty="0">
+              <a:t>": "External/$</a:t>
+            </a:r>
+            <a:r>
+              <a:rPr lang="en-US" sz="1400" b="1" dirty="0" err="1">
+                <a:latin typeface="Courier New" panose="02070309020205020404" pitchFamily="49" charset="0"/>
+                <a:cs typeface="Courier New" panose="02070309020205020404" pitchFamily="49" charset="0"/>
+              </a:rPr>
+              <a:t>GitSource</a:t>
+            </a:r>
+            <a:r>
+              <a:rPr lang="en-US" sz="1400" b="1" dirty="0">
                 <a:latin typeface="Courier New" panose="02070309020205020404" pitchFamily="49" charset="0"/>
                 <a:cs typeface="Courier New" panose="02070309020205020404" pitchFamily="49" charset="0"/>
               </a:rPr>
               <a:t>",</a:t>
             </a:r>
-          </a:p>
-          <a:p>
-            <a:pPr marL="0" indent="0">
-              <a:lnSpc>
-                <a:spcPct val="100000"/>
-              </a:lnSpc>
-              <a:spcBef>
-                <a:spcPts val="0"/>
-              </a:spcBef>
-              <a:buFont typeface="Arial" panose="020B0604020202020204" pitchFamily="34" charset="0"/>
-              <a:buNone/>
-            </a:pPr>
-            <a:r>
-              <a:rPr lang="en-US" sz="1400" dirty="0">
-                <a:latin typeface="Courier New" panose="02070309020205020404" pitchFamily="49" charset="0"/>
-                <a:cs typeface="Courier New" panose="02070309020205020404" pitchFamily="49" charset="0"/>
-              </a:rPr>
-              <a:t>    "</a:t>
-            </a:r>
-            <a:r>
-              <a:rPr lang="en-US" sz="1400" dirty="0" err="1">
-                <a:latin typeface="Courier New" panose="02070309020205020404" pitchFamily="49" charset="0"/>
-                <a:cs typeface="Courier New" panose="02070309020205020404" pitchFamily="49" charset="0"/>
-              </a:rPr>
-              <a:t>PartyName</a:t>
-            </a:r>
-            <a:r>
-              <a:rPr lang="en-US" sz="1400" dirty="0">
-                <a:latin typeface="Courier New" panose="02070309020205020404" pitchFamily="49" charset="0"/>
-                <a:cs typeface="Courier New" panose="02070309020205020404" pitchFamily="49" charset="0"/>
-              </a:rPr>
-              <a:t>": "</a:t>
-            </a:r>
-            <a:r>
-              <a:rPr lang="en-US" sz="1400" dirty="0" err="1">
-                <a:latin typeface="Courier New" panose="02070309020205020404" pitchFamily="49" charset="0"/>
-                <a:cs typeface="Courier New" panose="02070309020205020404" pitchFamily="49" charset="0"/>
-              </a:rPr>
-              <a:t>GitSource</a:t>
-            </a:r>
-            <a:r>
-              <a:rPr lang="en-US" sz="1400" dirty="0">
-                <a:latin typeface="Courier New" panose="02070309020205020404" pitchFamily="49" charset="0"/>
-                <a:cs typeface="Courier New" panose="02070309020205020404" pitchFamily="49" charset="0"/>
-              </a:rPr>
-              <a:t>",</a:t>
-            </a:r>
             <a:br>
-              <a:rPr lang="en-US" sz="1400" dirty="0">
+              <a:rPr lang="en-US" sz="1400" b="1" dirty="0">
                 <a:latin typeface="Courier New" panose="02070309020205020404" pitchFamily="49" charset="0"/>
                 <a:cs typeface="Courier New" panose="02070309020205020404" pitchFamily="49" charset="0"/>
               </a:rPr>
@@ -11899,86 +11852,6 @@
           <p:cNvPr id="2" name="Title 1">
             <a:extLst>
               <a:ext uri="{FF2B5EF4-FFF2-40B4-BE49-F238E27FC236}">
-                <a16:creationId xmlns:a16="http://schemas.microsoft.com/office/drawing/2014/main" id="{2ADDEB0D-75FE-A9E7-AE5D-1A00BE2CB4EF}"/>
-              </a:ext>
-            </a:extLst>
-          </p:cNvPr>
-          <p:cNvSpPr>
-            <a:spLocks noGrp="1"/>
-          </p:cNvSpPr>
-          <p:nvPr>
-            <p:ph type="title"/>
-          </p:nvPr>
-        </p:nvSpPr>
-        <p:spPr/>
-        <p:txBody>
-          <a:bodyPr/>
-          <a:lstStyle/>
-          <a:p>
-            <a:endParaRPr lang="en-US"/>
-          </a:p>
-        </p:txBody>
-      </p:sp>
-      <p:sp>
-        <p:nvSpPr>
-          <p:cNvPr id="3" name="Content Placeholder 2">
-            <a:extLst>
-              <a:ext uri="{FF2B5EF4-FFF2-40B4-BE49-F238E27FC236}">
-                <a16:creationId xmlns:a16="http://schemas.microsoft.com/office/drawing/2014/main" id="{69BD3F96-4E3A-A64D-A143-5E0F643AB7C5}"/>
-              </a:ext>
-            </a:extLst>
-          </p:cNvPr>
-          <p:cNvSpPr>
-            <a:spLocks noGrp="1"/>
-          </p:cNvSpPr>
-          <p:nvPr>
-            <p:ph idx="1"/>
-          </p:nvPr>
-        </p:nvSpPr>
-        <p:spPr/>
-        <p:txBody>
-          <a:bodyPr/>
-          <a:lstStyle/>
-          <a:p>
-            <a:endParaRPr lang="en-US"/>
-          </a:p>
-        </p:txBody>
-      </p:sp>
-    </p:spTree>
-    <p:extLst>
-      <p:ext uri="{BB962C8B-B14F-4D97-AF65-F5344CB8AC3E}">
-        <p14:creationId xmlns:p14="http://schemas.microsoft.com/office/powerpoint/2010/main" val="4293717367"/>
-      </p:ext>
-    </p:extLst>
-  </p:cSld>
-  <p:clrMapOvr>
-    <a:masterClrMapping/>
-  </p:clrMapOvr>
-</p:sld>
-</file>
-
-<file path=ppt/slides/slide21.xml><?xml version="1.0" encoding="utf-8"?>
-<p:sld xmlns:a="http://schemas.openxmlformats.org/drawingml/2006/main" xmlns:r="http://schemas.openxmlformats.org/officeDocument/2006/relationships" xmlns:p="http://schemas.openxmlformats.org/presentationml/2006/main">
-  <p:cSld>
-    <p:spTree>
-      <p:nvGrpSpPr>
-        <p:cNvPr id="1" name=""/>
-        <p:cNvGrpSpPr/>
-        <p:nvPr/>
-      </p:nvGrpSpPr>
-      <p:grpSpPr>
-        <a:xfrm>
-          <a:off x="0" y="0"/>
-          <a:ext cx="0" cy="0"/>
-          <a:chOff x="0" y="0"/>
-          <a:chExt cx="0" cy="0"/>
-        </a:xfrm>
-      </p:grpSpPr>
-      <p:sp>
-        <p:nvSpPr>
-          <p:cNvPr id="2" name="Title 1">
-            <a:extLst>
-              <a:ext uri="{FF2B5EF4-FFF2-40B4-BE49-F238E27FC236}">
                 <a16:creationId xmlns:a16="http://schemas.microsoft.com/office/drawing/2014/main" id="{A798245F-DD26-ADCC-6CD2-D5ED5F5598A9}"/>
               </a:ext>
             </a:extLst>
@@ -11990,33 +11863,39 @@
             <p:ph type="title"/>
           </p:nvPr>
         </p:nvSpPr>
-        <p:spPr/>
+        <p:spPr>
+          <a:xfrm>
+            <a:off x="317385" y="117700"/>
+            <a:ext cx="3022899" cy="1689586"/>
+          </a:xfrm>
+        </p:spPr>
         <p:txBody>
-          <a:bodyPr/>
+          <a:bodyPr>
+            <a:normAutofit/>
+          </a:bodyPr>
           <a:lstStyle/>
           <a:p>
-            <a:r>
-              <a:rPr lang="en-US" dirty="0"/>
-              <a:t>A simple Configuration Model</a:t>
+            <a:pPr algn="r"/>
+            <a:r>
+              <a:rPr lang="en-US" sz="4000" dirty="0"/>
+              <a:t>Configuration Model</a:t>
             </a:r>
           </a:p>
         </p:txBody>
       </p:sp>
       <p:pic>
         <p:nvPicPr>
-          <p:cNvPr id="9" name="Content Placeholder 8" descr="Class diagram.">
+          <p:cNvPr id="6" name="Picture 5" descr="A screenshot of a computer&#10;&#10;Description automatically generated with medium confidence">
             <a:extLst>
               <a:ext uri="{FF2B5EF4-FFF2-40B4-BE49-F238E27FC236}">
-                <a16:creationId xmlns:a16="http://schemas.microsoft.com/office/drawing/2014/main" id="{EB82A400-7337-4C1F-868E-D34B84F5DF2F}"/>
+                <a16:creationId xmlns:a16="http://schemas.microsoft.com/office/drawing/2014/main" id="{64CAB341-0F45-EBF0-5542-74F695DF9CEF}"/>
               </a:ext>
             </a:extLst>
           </p:cNvPr>
           <p:cNvPicPr>
-            <a:picLocks noGrp="1" noChangeAspect="1"/>
+            <a:picLocks noChangeAspect="1"/>
           </p:cNvPicPr>
-          <p:nvPr>
-            <p:ph idx="1"/>
-          </p:nvPr>
+          <p:nvPr/>
         </p:nvPicPr>
         <p:blipFill>
           <a:blip r:embed="rId2">
@@ -12032,9 +11911,12 @@
         </p:blipFill>
         <p:spPr>
           <a:xfrm>
-            <a:off x="292025" y="1585180"/>
-            <a:ext cx="11794531" cy="4802187"/>
+            <a:off x="3340284" y="193508"/>
+            <a:ext cx="8655296" cy="6664492"/>
           </a:xfrm>
+          <a:prstGeom prst="rect">
+            <a:avLst/>
+          </a:prstGeom>
         </p:spPr>
       </p:pic>
     </p:spTree>
@@ -12050,7 +11932,7 @@
 </p:sld>
 </file>
 
-<file path=ppt/slides/slide22.xml><?xml version="1.0" encoding="utf-8"?>
+<file path=ppt/slides/slide21.xml><?xml version="1.0" encoding="utf-8"?>
 <p:sld xmlns:a="http://schemas.openxmlformats.org/drawingml/2006/main" xmlns:r="http://schemas.openxmlformats.org/officeDocument/2006/relationships" xmlns:p="http://schemas.openxmlformats.org/presentationml/2006/main">
   <p:cSld>
     <p:spTree>
@@ -12089,10 +11971,17 @@
           <a:lstStyle/>
           <a:p>
             <a:r>
-              <a:rPr lang="en-US"/>
-              <a:t>Exploit the .Net Configuration model</a:t>
-            </a:r>
-            <a:endParaRPr lang="en-US" dirty="0"/>
+              <a:rPr lang="en-US" dirty="0"/>
+              <a:t>Exploit the </a:t>
+            </a:r>
+            <a:r>
+              <a:rPr lang="en-US" dirty="0" err="1"/>
+              <a:t>.Net</a:t>
+            </a:r>
+            <a:r>
+              <a:rPr lang="en-US" dirty="0"/>
+              <a:t> Configuration API</a:t>
+            </a:r>
           </a:p>
         </p:txBody>
       </p:sp>
@@ -12712,7 +12601,7 @@
 </p:sld>
 </file>
 
-<file path=ppt/slides/slide23.xml><?xml version="1.0" encoding="utf-8"?>
+<file path=ppt/slides/slide22.xml><?xml version="1.0" encoding="utf-8"?>
 <p:sld xmlns:a="http://schemas.openxmlformats.org/drawingml/2006/main" xmlns:r="http://schemas.openxmlformats.org/officeDocument/2006/relationships" xmlns:p="http://schemas.openxmlformats.org/presentationml/2006/main">
   <p:cSld>
     <p:spTree>
@@ -12758,41 +12647,6 @@
           </a:p>
         </p:txBody>
       </p:sp>
-      <p:pic>
-        <p:nvPicPr>
-          <p:cNvPr id="10" name="Content Placeholder 9" descr="Diagram&#10;&#10;Description automatically generated">
-            <a:extLst>
-              <a:ext uri="{FF2B5EF4-FFF2-40B4-BE49-F238E27FC236}">
-                <a16:creationId xmlns:a16="http://schemas.microsoft.com/office/drawing/2014/main" id="{C7A97C5F-BEC2-106C-7C1F-260735E04677}"/>
-              </a:ext>
-            </a:extLst>
-          </p:cNvPr>
-          <p:cNvPicPr>
-            <a:picLocks noGrp="1" noChangeAspect="1"/>
-          </p:cNvPicPr>
-          <p:nvPr>
-            <p:ph idx="1"/>
-          </p:nvPr>
-        </p:nvPicPr>
-        <p:blipFill>
-          <a:blip r:embed="rId3">
-            <a:extLst>
-              <a:ext uri="{28A0092B-C50C-407E-A947-70E740481C1C}">
-                <a14:useLocalDpi xmlns:a14="http://schemas.microsoft.com/office/drawing/2010/main" val="0"/>
-              </a:ext>
-            </a:extLst>
-          </a:blip>
-          <a:stretch>
-            <a:fillRect/>
-          </a:stretch>
-        </p:blipFill>
-        <p:spPr>
-          <a:xfrm>
-            <a:off x="6845938" y="269631"/>
-            <a:ext cx="4963777" cy="6223244"/>
-          </a:xfrm>
-        </p:spPr>
-      </p:pic>
       <p:sp>
         <p:nvSpPr>
           <p:cNvPr id="11" name="Content Placeholder 2">
@@ -12818,7 +12672,7 @@
         </p:spPr>
         <p:txBody>
           <a:bodyPr vert="horz" lIns="91440" tIns="45720" rIns="91440" bIns="45720" rtlCol="0">
-            <a:normAutofit lnSpcReduction="10000"/>
+            <a:normAutofit/>
           </a:bodyPr>
           <a:lstStyle>
             <a:lvl1pPr marL="228600" indent="-228600" algn="l" defTabSz="914400" rtl="0" eaLnBrk="1" latinLnBrk="0" hangingPunct="1">
@@ -12994,7 +12848,7 @@
                 <a:latin typeface="Consolas" panose="020B0609020204030204" pitchFamily="49" charset="0"/>
                 <a:cs typeface="Courier New" panose="02070309020205020404" pitchFamily="49" charset="0"/>
               </a:rPr>
-              <a:t>ApplicationIdentityService</a:t>
+              <a:t>IApplicationIdentityService</a:t>
             </a:r>
             <a:r>
               <a:rPr lang="en-US" dirty="0"/>
@@ -13004,71 +12858,20 @@
           <a:p>
             <a:r>
               <a:rPr lang="en-US" dirty="0"/>
-              <a:t>A Remote can define a Domain.</a:t>
-            </a:r>
-          </a:p>
-          <a:p>
-            <a:r>
-              <a:rPr lang="en-US" dirty="0"/>
-              <a:t>New Remotes can be added dynamically (</a:t>
+              <a:t>Thread safety</a:t>
+            </a:r>
+          </a:p>
+          <a:p>
+            <a:pPr lvl="1"/>
+            <a:r>
+              <a:rPr lang="en-US" dirty="0"/>
+              <a:t>Once </a:t>
             </a:r>
             <a:r>
               <a:rPr lang="en-US" sz="2000" dirty="0" err="1">
                 <a:latin typeface="Consolas" panose="020B0609020204030204" pitchFamily="49" charset="0"/>
                 <a:cs typeface="Courier New" panose="02070309020205020404" pitchFamily="49" charset="0"/>
               </a:rPr>
-              <a:t>AddDynamicRemoteAsync</a:t>
-            </a:r>
-            <a:r>
-              <a:rPr lang="en-US" dirty="0"/>
-              <a:t>).</a:t>
-            </a:r>
-          </a:p>
-          <a:p>
-            <a:r>
-              <a:rPr lang="en-US" dirty="0"/>
-              <a:t>Only dynamic Remotes can be destroyed (</a:t>
-            </a:r>
-            <a:r>
-              <a:rPr lang="en-US" sz="2000" dirty="0" err="1">
-                <a:latin typeface="Consolas" panose="020B0609020204030204" pitchFamily="49" charset="0"/>
-                <a:cs typeface="Courier New" panose="02070309020205020404" pitchFamily="49" charset="0"/>
-              </a:rPr>
-              <a:t>SetDestroyed</a:t>
-            </a:r>
-            <a:r>
-              <a:rPr lang="en-US" dirty="0"/>
-              <a:t> or </a:t>
-            </a:r>
-            <a:r>
-              <a:rPr lang="en-US" sz="2000" dirty="0" err="1">
-                <a:latin typeface="Consolas" panose="020B0609020204030204" pitchFamily="49" charset="0"/>
-                <a:cs typeface="Courier New" panose="02070309020205020404" pitchFamily="49" charset="0"/>
-              </a:rPr>
-              <a:t>DestroyAsync</a:t>
-            </a:r>
-            <a:r>
-              <a:rPr lang="en-US" dirty="0"/>
-              <a:t>).</a:t>
-            </a:r>
-          </a:p>
-          <a:p>
-            <a:r>
-              <a:rPr lang="en-US" dirty="0"/>
-              <a:t>Thread safety</a:t>
-            </a:r>
-          </a:p>
-          <a:p>
-            <a:pPr lvl="1"/>
-            <a:r>
-              <a:rPr lang="en-US" dirty="0"/>
-              <a:t>Once </a:t>
-            </a:r>
-            <a:r>
-              <a:rPr lang="en-US" sz="2000" dirty="0" err="1">
-                <a:latin typeface="Consolas" panose="020B0609020204030204" pitchFamily="49" charset="0"/>
-                <a:cs typeface="Courier New" panose="02070309020205020404" pitchFamily="49" charset="0"/>
-              </a:rPr>
               <a:t>InitializationTask</a:t>
             </a:r>
             <a:r>
@@ -13093,6 +12896,42 @@
           </a:p>
         </p:txBody>
       </p:sp>
+      <p:pic>
+        <p:nvPicPr>
+          <p:cNvPr id="6" name="Picture 5" descr="A screenshot of a computer&#10;&#10;Description automatically generated with medium confidence">
+            <a:extLst>
+              <a:ext uri="{FF2B5EF4-FFF2-40B4-BE49-F238E27FC236}">
+                <a16:creationId xmlns:a16="http://schemas.microsoft.com/office/drawing/2014/main" id="{7C3DD65C-4947-6B81-85B3-712677F2FF91}"/>
+              </a:ext>
+            </a:extLst>
+          </p:cNvPr>
+          <p:cNvPicPr>
+            <a:picLocks noChangeAspect="1"/>
+          </p:cNvPicPr>
+          <p:nvPr/>
+        </p:nvPicPr>
+        <p:blipFill>
+          <a:blip r:embed="rId3">
+            <a:extLst>
+              <a:ext uri="{28A0092B-C50C-407E-A947-70E740481C1C}">
+                <a14:useLocalDpi xmlns:a14="http://schemas.microsoft.com/office/drawing/2010/main" val="0"/>
+              </a:ext>
+            </a:extLst>
+          </a:blip>
+          <a:stretch>
+            <a:fillRect/>
+          </a:stretch>
+        </p:blipFill>
+        <p:spPr>
+          <a:xfrm>
+            <a:off x="7287803" y="0"/>
+            <a:ext cx="4372195" cy="6858000"/>
+          </a:xfrm>
+          <a:prstGeom prst="rect">
+            <a:avLst/>
+          </a:prstGeom>
+        </p:spPr>
+      </p:pic>
     </p:spTree>
     <p:extLst>
       <p:ext uri="{BB962C8B-B14F-4D97-AF65-F5344CB8AC3E}">
@@ -13106,7 +12945,7 @@
 </p:sld>
 </file>
 
-<file path=ppt/slides/slide24.xml><?xml version="1.0" encoding="utf-8"?>
+<file path=ppt/slides/slide23.xml><?xml version="1.0" encoding="utf-8"?>
 <p:sld xmlns:a="http://schemas.openxmlformats.org/drawingml/2006/main" xmlns:r="http://schemas.openxmlformats.org/officeDocument/2006/relationships" xmlns:p="http://schemas.openxmlformats.org/presentationml/2006/main">
   <p:cSld>
     <p:spTree>
@@ -13170,7 +13009,7 @@
         <p:spPr/>
         <p:txBody>
           <a:bodyPr>
-            <a:normAutofit fontScale="92500" lnSpcReduction="10000"/>
+            <a:normAutofit/>
           </a:bodyPr>
           <a:lstStyle/>
           <a:p>
@@ -13222,58 +13061,13 @@
             </a:r>
             <a:r>
               <a:rPr lang="en-US" dirty="0"/>
-              <a:t> available on:</a:t>
-            </a:r>
-          </a:p>
-          <a:p>
-            <a:pPr lvl="1"/>
-            <a:r>
-              <a:rPr lang="en-US" dirty="0"/>
-              <a:t>The root </a:t>
-            </a:r>
-            <a:r>
-              <a:rPr lang="en-US" sz="2000" dirty="0" err="1">
-                <a:latin typeface="Consolas" panose="020B0609020204030204" pitchFamily="49" charset="0"/>
-                <a:cs typeface="Courier New" panose="02070309020205020404" pitchFamily="49" charset="0"/>
-              </a:rPr>
-              <a:t>ApplicationIdentityService</a:t>
-            </a:r>
-            <a:endParaRPr lang="en-US" sz="2000" dirty="0">
-              <a:latin typeface="Consolas" panose="020B0609020204030204" pitchFamily="49" charset="0"/>
-              <a:cs typeface="Courier New" panose="02070309020205020404" pitchFamily="49" charset="0"/>
-            </a:endParaRPr>
-          </a:p>
-          <a:p>
-            <a:pPr lvl="1"/>
-            <a:r>
-              <a:rPr lang="en-US" dirty="0"/>
-              <a:t>Local and Remote parties (but not on the </a:t>
-            </a:r>
-            <a:r>
-              <a:rPr lang="en-US" sz="2000" dirty="0" err="1">
-                <a:latin typeface="Consolas" panose="020B0609020204030204" pitchFamily="49" charset="0"/>
-                <a:cs typeface="Courier New" panose="02070309020205020404" pitchFamily="49" charset="0"/>
-              </a:rPr>
-              <a:t>DomainApplicationIdentity</a:t>
-            </a:r>
-            <a:r>
-              <a:rPr lang="en-US" dirty="0"/>
-              <a:t>).</a:t>
-            </a:r>
-            <a:br>
-              <a:rPr lang="en-US" sz="1600" dirty="0">
-                <a:solidFill>
-                  <a:srgbClr val="000000"/>
-                </a:solidFill>
-                <a:latin typeface="Consolas" panose="020B0609020204030204" pitchFamily="49" charset="0"/>
-              </a:rPr>
-            </a:br>
-            <a:endParaRPr lang="en-US" dirty="0"/>
-          </a:p>
-          <a:p>
-            <a:r>
-              <a:rPr lang="en-US" dirty="0"/>
-              <a:t>One can only add a Feature “from the outside”:</a:t>
+              <a:t> available on all parties.</a:t>
+            </a:r>
+          </a:p>
+          <a:p>
+            <a:r>
+              <a:rPr lang="en-US" dirty="0"/>
+              <a:t>Features can only be added:</a:t>
             </a:r>
           </a:p>
           <a:p>
@@ -13389,7 +13183,7 @@
 </p:sld>
 </file>
 
-<file path=ppt/slides/slide25.xml><?xml version="1.0" encoding="utf-8"?>
+<file path=ppt/slides/slide24.xml><?xml version="1.0" encoding="utf-8"?>
 <p:sld xmlns:a="http://schemas.openxmlformats.org/drawingml/2006/main" xmlns:r="http://schemas.openxmlformats.org/officeDocument/2006/relationships" xmlns:p="http://schemas.openxmlformats.org/presentationml/2006/main">
   <p:cSld>
     <p:spTree>
@@ -13434,41 +13228,6 @@
           </a:p>
         </p:txBody>
       </p:sp>
-      <p:pic>
-        <p:nvPicPr>
-          <p:cNvPr id="9" name="Content Placeholder 8" descr="Graphical user interface, text">
-            <a:extLst>
-              <a:ext uri="{FF2B5EF4-FFF2-40B4-BE49-F238E27FC236}">
-                <a16:creationId xmlns:a16="http://schemas.microsoft.com/office/drawing/2014/main" id="{3CFA42ED-F5B9-C118-B2B2-15CE4E6B30CF}"/>
-              </a:ext>
-            </a:extLst>
-          </p:cNvPr>
-          <p:cNvPicPr>
-            <a:picLocks noGrp="1" noChangeAspect="1"/>
-          </p:cNvPicPr>
-          <p:nvPr>
-            <p:ph idx="1"/>
-          </p:nvPr>
-        </p:nvPicPr>
-        <p:blipFill>
-          <a:blip r:embed="rId2">
-            <a:extLst>
-              <a:ext uri="{28A0092B-C50C-407E-A947-70E740481C1C}">
-                <a14:useLocalDpi xmlns:a14="http://schemas.microsoft.com/office/drawing/2010/main" val="0"/>
-              </a:ext>
-            </a:extLst>
-          </a:blip>
-          <a:stretch>
-            <a:fillRect/>
-          </a:stretch>
-        </p:blipFill>
-        <p:spPr>
-          <a:xfrm>
-            <a:off x="4620973" y="156674"/>
-            <a:ext cx="7399243" cy="6544652"/>
-          </a:xfrm>
-        </p:spPr>
-      </p:pic>
       <p:sp>
         <p:nvSpPr>
           <p:cNvPr id="10" name="Content Placeholder 2">
@@ -13710,6 +13469,42 @@
           </a:p>
         </p:txBody>
       </p:sp>
+      <p:pic>
+        <p:nvPicPr>
+          <p:cNvPr id="6" name="Picture 5" descr="A screenshot of a computer&#10;&#10;Description automatically generated">
+            <a:extLst>
+              <a:ext uri="{FF2B5EF4-FFF2-40B4-BE49-F238E27FC236}">
+                <a16:creationId xmlns:a16="http://schemas.microsoft.com/office/drawing/2014/main" id="{8B97A891-FB41-8020-AA4F-F29FF2B4EC67}"/>
+              </a:ext>
+            </a:extLst>
+          </p:cNvPr>
+          <p:cNvPicPr>
+            <a:picLocks noChangeAspect="1"/>
+          </p:cNvPicPr>
+          <p:nvPr/>
+        </p:nvPicPr>
+        <p:blipFill>
+          <a:blip r:embed="rId2">
+            <a:extLst>
+              <a:ext uri="{28A0092B-C50C-407E-A947-70E740481C1C}">
+                <a14:useLocalDpi xmlns:a14="http://schemas.microsoft.com/office/drawing/2010/main" val="0"/>
+              </a:ext>
+            </a:extLst>
+          </a:blip>
+          <a:stretch>
+            <a:fillRect/>
+          </a:stretch>
+        </p:blipFill>
+        <p:spPr>
+          <a:xfrm>
+            <a:off x="4608528" y="249293"/>
+            <a:ext cx="7337819" cy="6243582"/>
+          </a:xfrm>
+          <a:prstGeom prst="rect">
+            <a:avLst/>
+          </a:prstGeom>
+        </p:spPr>
+      </p:pic>
     </p:spTree>
     <p:extLst>
       <p:ext uri="{BB962C8B-B14F-4D97-AF65-F5344CB8AC3E}">
@@ -13723,7 +13518,7 @@
 </p:sld>
 </file>
 
-<file path=ppt/slides/slide26.xml><?xml version="1.0" encoding="utf-8"?>
+<file path=ppt/slides/slide25.xml><?xml version="1.0" encoding="utf-8"?>
 <p:sld xmlns:a="http://schemas.openxmlformats.org/drawingml/2006/main" xmlns:r="http://schemas.openxmlformats.org/officeDocument/2006/relationships" xmlns:p="http://schemas.openxmlformats.org/presentationml/2006/main">
   <p:cSld>
     <p:spTree>
@@ -14057,7 +13852,7 @@
         </p:spPr>
         <p:txBody>
           <a:bodyPr vert="horz" lIns="91440" tIns="45720" rIns="91440" bIns="45720" rtlCol="0">
-            <a:normAutofit lnSpcReduction="10000"/>
+            <a:normAutofit/>
           </a:bodyPr>
           <a:lstStyle>
             <a:lvl1pPr marL="228600" indent="-228600" algn="l" defTabSz="914400" rtl="0" eaLnBrk="1" latinLnBrk="0" hangingPunct="1">
@@ -14265,14 +14060,62 @@
                 <a:latin typeface="Courier New" panose="02070309020205020404" pitchFamily="49" charset="0"/>
                 <a:cs typeface="Courier New" panose="02070309020205020404" pitchFamily="49" charset="0"/>
               </a:rPr>
-              <a:t>DomainName</a:t>
-            </a:r>
-            <a:r>
-              <a:rPr lang="en-US" sz="1400" dirty="0">
-                <a:latin typeface="Courier New" panose="02070309020205020404" pitchFamily="49" charset="0"/>
-                <a:cs typeface="Courier New" panose="02070309020205020404" pitchFamily="49" charset="0"/>
-              </a:rPr>
-              <a:t>": "Test",</a:t>
+              <a:t>FullName</a:t>
+            </a:r>
+            <a:r>
+              <a:rPr lang="en-US" sz="1400" dirty="0">
+                <a:latin typeface="Courier New" panose="02070309020205020404" pitchFamily="49" charset="0"/>
+                <a:cs typeface="Courier New" panose="02070309020205020404" pitchFamily="49" charset="0"/>
+              </a:rPr>
+              <a:t>": "Test/$Sender",</a:t>
+            </a:r>
+            <a:br>
+              <a:rPr lang="en-US" sz="1400" dirty="0">
+                <a:latin typeface="Courier New" panose="02070309020205020404" pitchFamily="49" charset="0"/>
+                <a:cs typeface="Courier New" panose="02070309020205020404" pitchFamily="49" charset="0"/>
+              </a:rPr>
+            </a:br>
+            <a:r>
+              <a:rPr lang="en-US" sz="1400" dirty="0">
+                <a:latin typeface="Courier New" panose="02070309020205020404" pitchFamily="49" charset="0"/>
+                <a:cs typeface="Courier New" panose="02070309020205020404" pitchFamily="49" charset="0"/>
+              </a:rPr>
+              <a:t>  </a:t>
+            </a:r>
+            <a:r>
+              <a:rPr lang="en-US" sz="1400" b="1" dirty="0">
+                <a:latin typeface="Courier New" panose="02070309020205020404" pitchFamily="49" charset="0"/>
+                <a:cs typeface="Courier New" panose="02070309020205020404" pitchFamily="49" charset="0"/>
+              </a:rPr>
+              <a:t>"</a:t>
+            </a:r>
+            <a:r>
+              <a:rPr lang="en-US" sz="1400" b="1" dirty="0" err="1">
+                <a:latin typeface="Courier New" panose="02070309020205020404" pitchFamily="49" charset="0"/>
+                <a:cs typeface="Courier New" panose="02070309020205020404" pitchFamily="49" charset="0"/>
+              </a:rPr>
+              <a:t>AllowFeatures</a:t>
+            </a:r>
+            <a:r>
+              <a:rPr lang="en-US" sz="1400" b="1" dirty="0">
+                <a:latin typeface="Courier New" panose="02070309020205020404" pitchFamily="49" charset="0"/>
+                <a:cs typeface="Courier New" panose="02070309020205020404" pitchFamily="49" charset="0"/>
+              </a:rPr>
+              <a:t>": "</a:t>
+            </a:r>
+            <a:r>
+              <a:rPr lang="en-US" sz="1400" b="1" dirty="0" err="1">
+                <a:latin typeface="Courier New" panose="02070309020205020404" pitchFamily="49" charset="0"/>
+                <a:cs typeface="Courier New" panose="02070309020205020404" pitchFamily="49" charset="0"/>
+              </a:rPr>
+              <a:t>BlobChannel</a:t>
+            </a:r>
+            <a:r>
+              <a:rPr lang="en-US" sz="1400" b="1" dirty="0">
+                <a:latin typeface="Courier New" panose="02070309020205020404" pitchFamily="49" charset="0"/>
+                <a:cs typeface="Courier New" panose="02070309020205020404" pitchFamily="49" charset="0"/>
+              </a:rPr>
+              <a:t>"</a:t>
             </a:r>
           </a:p>
           <a:p>
@@ -14291,7 +14134,7 @@
                 <a:latin typeface="Courier New" panose="02070309020205020404" pitchFamily="49" charset="0"/>
                 <a:cs typeface="Courier New" panose="02070309020205020404" pitchFamily="49" charset="0"/>
               </a:rPr>
-              <a:t>  "Local": { "Name": "Sender" },</a:t>
+              <a:t>  "Parties": [</a:t>
             </a:r>
             <a:br>
               <a:rPr lang="en-US" sz="1400" dirty="0">
@@ -14304,42 +14147,7 @@
                 <a:latin typeface="Courier New" panose="02070309020205020404" pitchFamily="49" charset="0"/>
                 <a:cs typeface="Courier New" panose="02070309020205020404" pitchFamily="49" charset="0"/>
               </a:rPr>
-              <a:t>  </a:t>
-            </a:r>
-            <a:r>
-              <a:rPr lang="en-US" sz="1400" b="1" dirty="0">
-                <a:latin typeface="Courier New" panose="02070309020205020404" pitchFamily="49" charset="0"/>
-                <a:cs typeface="Courier New" panose="02070309020205020404" pitchFamily="49" charset="0"/>
-              </a:rPr>
-              <a:t>"</a:t>
-            </a:r>
-            <a:r>
-              <a:rPr lang="en-US" sz="1400" b="1" dirty="0" err="1">
-                <a:latin typeface="Courier New" panose="02070309020205020404" pitchFamily="49" charset="0"/>
-                <a:cs typeface="Courier New" panose="02070309020205020404" pitchFamily="49" charset="0"/>
-              </a:rPr>
-              <a:t>AllowFeatures</a:t>
-            </a:r>
-            <a:r>
-              <a:rPr lang="en-US" sz="1400" b="1" dirty="0">
-                <a:latin typeface="Courier New" panose="02070309020205020404" pitchFamily="49" charset="0"/>
-                <a:cs typeface="Courier New" panose="02070309020205020404" pitchFamily="49" charset="0"/>
-              </a:rPr>
-              <a:t>": "</a:t>
-            </a:r>
-            <a:r>
-              <a:rPr lang="en-US" sz="1400" b="1" dirty="0" err="1">
-                <a:latin typeface="Courier New" panose="02070309020205020404" pitchFamily="49" charset="0"/>
-                <a:cs typeface="Courier New" panose="02070309020205020404" pitchFamily="49" charset="0"/>
-              </a:rPr>
-              <a:t>BlobChannel</a:t>
-            </a:r>
-            <a:r>
-              <a:rPr lang="en-US" sz="1400" b="1" dirty="0">
-                <a:latin typeface="Courier New" panose="02070309020205020404" pitchFamily="49" charset="0"/>
-                <a:cs typeface="Courier New" panose="02070309020205020404" pitchFamily="49" charset="0"/>
-              </a:rPr>
-              <a:t>"</a:t>
+              <a:t>  {</a:t>
             </a:r>
           </a:p>
           <a:p>
@@ -14358,39 +14166,21 @@
                 <a:latin typeface="Courier New" panose="02070309020205020404" pitchFamily="49" charset="0"/>
                 <a:cs typeface="Courier New" panose="02070309020205020404" pitchFamily="49" charset="0"/>
               </a:rPr>
-              <a:t>  "Remotes": [</a:t>
-            </a:r>
-            <a:br>
-              <a:rPr lang="en-US" sz="1400" dirty="0">
-                <a:latin typeface="Courier New" panose="02070309020205020404" pitchFamily="49" charset="0"/>
-                <a:cs typeface="Courier New" panose="02070309020205020404" pitchFamily="49" charset="0"/>
-              </a:rPr>
-            </a:br>
-            <a:r>
-              <a:rPr lang="en-US" sz="1400" dirty="0">
-                <a:latin typeface="Courier New" panose="02070309020205020404" pitchFamily="49" charset="0"/>
-                <a:cs typeface="Courier New" panose="02070309020205020404" pitchFamily="49" charset="0"/>
-              </a:rPr>
-              <a:t>  {</a:t>
-            </a:r>
-          </a:p>
-          <a:p>
-            <a:pPr marL="0" indent="0">
-              <a:lnSpc>
-                <a:spcPct val="100000"/>
-              </a:lnSpc>
-              <a:spcBef>
-                <a:spcPts val="0"/>
-              </a:spcBef>
-              <a:buFont typeface="Arial" panose="020B0604020202020204" pitchFamily="34" charset="0"/>
-              <a:buNone/>
-            </a:pPr>
-            <a:r>
-              <a:rPr lang="en-US" sz="1400" dirty="0">
-                <a:latin typeface="Courier New" panose="02070309020205020404" pitchFamily="49" charset="0"/>
-                <a:cs typeface="Courier New" panose="02070309020205020404" pitchFamily="49" charset="0"/>
-              </a:rPr>
-              <a:t>    "Name": "Target",</a:t>
+              <a:t>    "</a:t>
+            </a:r>
+            <a:r>
+              <a:rPr lang="en-US" sz="1400" dirty="0" err="1">
+                <a:latin typeface="Courier New" panose="02070309020205020404" pitchFamily="49" charset="0"/>
+                <a:cs typeface="Courier New" panose="02070309020205020404" pitchFamily="49" charset="0"/>
+              </a:rPr>
+              <a:t>PartyName</a:t>
+            </a:r>
+            <a:r>
+              <a:rPr lang="en-US" sz="1400" dirty="0">
+                <a:latin typeface="Courier New" panose="02070309020205020404" pitchFamily="49" charset="0"/>
+                <a:cs typeface="Courier New" panose="02070309020205020404" pitchFamily="49" charset="0"/>
+              </a:rPr>
+              <a:t>": "Target",</a:t>
             </a:r>
             <a:br>
               <a:rPr lang="en-US" sz="1400" dirty="0">
@@ -14689,14 +14479,40 @@
                 <a:latin typeface="Courier New" panose="02070309020205020404" pitchFamily="49" charset="0"/>
                 <a:cs typeface="Courier New" panose="02070309020205020404" pitchFamily="49" charset="0"/>
               </a:rPr>
-              <a:t>DomainName</a:t>
-            </a:r>
-            <a:r>
-              <a:rPr lang="en-US" sz="1400" dirty="0">
-                <a:latin typeface="Courier New" panose="02070309020205020404" pitchFamily="49" charset="0"/>
-                <a:cs typeface="Courier New" panose="02070309020205020404" pitchFamily="49" charset="0"/>
-              </a:rPr>
-              <a:t>": "Test",</a:t>
+              <a:t>FullName</a:t>
+            </a:r>
+            <a:r>
+              <a:rPr lang="en-US" sz="1400" dirty="0">
+                <a:latin typeface="Courier New" panose="02070309020205020404" pitchFamily="49" charset="0"/>
+                <a:cs typeface="Courier New" panose="02070309020205020404" pitchFamily="49" charset="0"/>
+              </a:rPr>
+              <a:t>": "Test/$Target" },</a:t>
+            </a:r>
+            <a:br>
+              <a:rPr lang="en-US" sz="1400" dirty="0">
+                <a:latin typeface="Courier New" panose="02070309020205020404" pitchFamily="49" charset="0"/>
+                <a:cs typeface="Courier New" panose="02070309020205020404" pitchFamily="49" charset="0"/>
+              </a:rPr>
+            </a:br>
+            <a:r>
+              <a:rPr lang="en-US" sz="1400" dirty="0">
+                <a:latin typeface="Courier New" panose="02070309020205020404" pitchFamily="49" charset="0"/>
+                <a:cs typeface="Courier New" panose="02070309020205020404" pitchFamily="49" charset="0"/>
+              </a:rPr>
+              <a:t>  "Parties": [</a:t>
+            </a:r>
+            <a:br>
+              <a:rPr lang="en-US" sz="1400" dirty="0">
+                <a:latin typeface="Courier New" panose="02070309020205020404" pitchFamily="49" charset="0"/>
+                <a:cs typeface="Courier New" panose="02070309020205020404" pitchFamily="49" charset="0"/>
+              </a:rPr>
+            </a:br>
+            <a:r>
+              <a:rPr lang="en-US" sz="1400" dirty="0">
+                <a:latin typeface="Courier New" panose="02070309020205020404" pitchFamily="49" charset="0"/>
+                <a:cs typeface="Courier New" panose="02070309020205020404" pitchFamily="49" charset="0"/>
+              </a:rPr>
+              <a:t>  {</a:t>
             </a:r>
           </a:p>
           <a:p>
@@ -14715,52 +14531,21 @@
                 <a:latin typeface="Courier New" panose="02070309020205020404" pitchFamily="49" charset="0"/>
                 <a:cs typeface="Courier New" panose="02070309020205020404" pitchFamily="49" charset="0"/>
               </a:rPr>
-              <a:t>  "Local": { "Name": “Target" },</a:t>
-            </a:r>
-            <a:br>
-              <a:rPr lang="en-US" sz="1400" dirty="0">
-                <a:latin typeface="Courier New" panose="02070309020205020404" pitchFamily="49" charset="0"/>
-                <a:cs typeface="Courier New" panose="02070309020205020404" pitchFamily="49" charset="0"/>
-              </a:rPr>
-            </a:br>
-            <a:r>
-              <a:rPr lang="en-US" sz="1400" dirty="0">
-                <a:latin typeface="Courier New" panose="02070309020205020404" pitchFamily="49" charset="0"/>
-                <a:cs typeface="Courier New" panose="02070309020205020404" pitchFamily="49" charset="0"/>
-              </a:rPr>
-              <a:t>  "Remotes": [</a:t>
-            </a:r>
-            <a:br>
-              <a:rPr lang="en-US" sz="1400" dirty="0">
-                <a:latin typeface="Courier New" panose="02070309020205020404" pitchFamily="49" charset="0"/>
-                <a:cs typeface="Courier New" panose="02070309020205020404" pitchFamily="49" charset="0"/>
-              </a:rPr>
-            </a:br>
-            <a:r>
-              <a:rPr lang="en-US" sz="1400" dirty="0">
-                <a:latin typeface="Courier New" panose="02070309020205020404" pitchFamily="49" charset="0"/>
-                <a:cs typeface="Courier New" panose="02070309020205020404" pitchFamily="49" charset="0"/>
-              </a:rPr>
-              <a:t>  {</a:t>
-            </a:r>
-          </a:p>
-          <a:p>
-            <a:pPr marL="0" indent="0">
-              <a:lnSpc>
-                <a:spcPct val="100000"/>
-              </a:lnSpc>
-              <a:spcBef>
-                <a:spcPts val="0"/>
-              </a:spcBef>
-              <a:buFont typeface="Arial" panose="020B0604020202020204" pitchFamily="34" charset="0"/>
-              <a:buNone/>
-            </a:pPr>
-            <a:r>
-              <a:rPr lang="en-US" sz="1400" dirty="0">
-                <a:latin typeface="Courier New" panose="02070309020205020404" pitchFamily="49" charset="0"/>
-                <a:cs typeface="Courier New" panose="02070309020205020404" pitchFamily="49" charset="0"/>
-              </a:rPr>
-              <a:t>    "Name": "Sender",</a:t>
+              <a:t>    "</a:t>
+            </a:r>
+            <a:r>
+              <a:rPr lang="en-US" sz="1400" dirty="0" err="1">
+                <a:latin typeface="Courier New" panose="02070309020205020404" pitchFamily="49" charset="0"/>
+                <a:cs typeface="Courier New" panose="02070309020205020404" pitchFamily="49" charset="0"/>
+              </a:rPr>
+              <a:t>PartyName</a:t>
+            </a:r>
+            <a:r>
+              <a:rPr lang="en-US" sz="1400" dirty="0">
+                <a:latin typeface="Courier New" panose="02070309020205020404" pitchFamily="49" charset="0"/>
+                <a:cs typeface="Courier New" panose="02070309020205020404" pitchFamily="49" charset="0"/>
+              </a:rPr>
+              <a:t>": "Sender",</a:t>
             </a:r>
             <a:br>
               <a:rPr lang="en-US" sz="1400" dirty="0">
@@ -14925,7 +14710,7 @@
 </p:sld>
 </file>
 
-<file path=ppt/slides/slide27.xml><?xml version="1.0" encoding="utf-8"?>
+<file path=ppt/slides/slide26.xml><?xml version="1.0" encoding="utf-8"?>
 <p:sld xmlns:a="http://schemas.openxmlformats.org/drawingml/2006/main" xmlns:r="http://schemas.openxmlformats.org/officeDocument/2006/relationships" xmlns:p="http://schemas.openxmlformats.org/presentationml/2006/main">
   <p:cSld>
     <p:spTree>
@@ -15005,7 +14790,7 @@
           <a:p>
             <a:r>
               <a:rPr lang="en-US" dirty="0"/>
-              <a:t>Opt-out feature: available by default on all Remotes that are not in the domain “Undefined”</a:t>
+              <a:t>Opt-out feature: available by default on all Remotes (not External)</a:t>
             </a:r>
           </a:p>
           <a:p>
@@ -15219,6 +15004,338 @@
 </p:sld>
 </file>
 
+<file path=ppt/slides/slide27.xml><?xml version="1.0" encoding="utf-8"?>
+<p:sld xmlns:a="http://schemas.openxmlformats.org/drawingml/2006/main" xmlns:r="http://schemas.openxmlformats.org/officeDocument/2006/relationships" xmlns:p="http://schemas.openxmlformats.org/presentationml/2006/main">
+  <p:cSld>
+    <p:bg>
+      <p:bgPr>
+        <a:solidFill>
+          <a:schemeClr val="bg1"/>
+        </a:solidFill>
+        <a:effectLst/>
+      </p:bgPr>
+    </p:bg>
+    <p:spTree>
+      <p:nvGrpSpPr>
+        <p:cNvPr id="1" name=""/>
+        <p:cNvGrpSpPr/>
+        <p:nvPr/>
+      </p:nvGrpSpPr>
+      <p:grpSpPr>
+        <a:xfrm>
+          <a:off x="0" y="0"/>
+          <a:ext cx="0" cy="0"/>
+          <a:chOff x="0" y="0"/>
+          <a:chExt cx="0" cy="0"/>
+        </a:xfrm>
+      </p:grpSpPr>
+      <p:sp>
+        <p:nvSpPr>
+          <p:cNvPr id="5" name="Rectangle 4">
+            <a:extLst>
+              <a:ext uri="{FF2B5EF4-FFF2-40B4-BE49-F238E27FC236}">
+                <a16:creationId xmlns:a16="http://schemas.microsoft.com/office/drawing/2014/main" id="{0076ECA5-B2D7-A3E2-AE20-A7CA20368183}"/>
+              </a:ext>
+            </a:extLst>
+          </p:cNvPr>
+          <p:cNvSpPr/>
+          <p:nvPr/>
+        </p:nvSpPr>
+        <p:spPr>
+          <a:xfrm>
+            <a:off x="4765638" y="4346089"/>
+            <a:ext cx="7067774" cy="2491261"/>
+          </a:xfrm>
+          <a:prstGeom prst="rect">
+            <a:avLst/>
+          </a:prstGeom>
+        </p:spPr>
+        <p:style>
+          <a:lnRef idx="2">
+            <a:schemeClr val="accent1">
+              <a:shade val="15000"/>
+            </a:schemeClr>
+          </a:lnRef>
+          <a:fillRef idx="1">
+            <a:schemeClr val="accent1"/>
+          </a:fillRef>
+          <a:effectRef idx="0">
+            <a:schemeClr val="accent1"/>
+          </a:effectRef>
+          <a:fontRef idx="minor">
+            <a:schemeClr val="lt1"/>
+          </a:fontRef>
+        </p:style>
+        <p:txBody>
+          <a:bodyPr rtlCol="0" anchor="ctr"/>
+          <a:lstStyle/>
+          <a:p>
+            <a:pPr algn="ctr"/>
+            <a:endParaRPr lang="en-US"/>
+          </a:p>
+        </p:txBody>
+      </p:sp>
+      <p:pic>
+        <p:nvPicPr>
+          <p:cNvPr id="4" name="Picture 3" descr="A screenshot of a computer&#10;&#10;Description automatically generated with medium confidence">
+            <a:extLst>
+              <a:ext uri="{FF2B5EF4-FFF2-40B4-BE49-F238E27FC236}">
+                <a16:creationId xmlns:a16="http://schemas.microsoft.com/office/drawing/2014/main" id="{63B52CF8-3FE6-8853-772F-8B675D4EA729}"/>
+              </a:ext>
+            </a:extLst>
+          </p:cNvPr>
+          <p:cNvPicPr>
+            <a:picLocks noChangeAspect="1"/>
+          </p:cNvPicPr>
+          <p:nvPr/>
+        </p:nvPicPr>
+        <p:blipFill>
+          <a:blip r:embed="rId3">
+            <a:extLst>
+              <a:ext uri="{28A0092B-C50C-407E-A947-70E740481C1C}">
+                <a14:useLocalDpi xmlns:a14="http://schemas.microsoft.com/office/drawing/2010/main" val="0"/>
+              </a:ext>
+            </a:extLst>
+          </a:blip>
+          <a:stretch>
+            <a:fillRect/>
+          </a:stretch>
+        </p:blipFill>
+        <p:spPr>
+          <a:xfrm>
+            <a:off x="4842636" y="-31709"/>
+            <a:ext cx="6915472" cy="6869059"/>
+          </a:xfrm>
+          <a:prstGeom prst="rect">
+            <a:avLst/>
+          </a:prstGeom>
+        </p:spPr>
+      </p:pic>
+      <p:sp>
+        <p:nvSpPr>
+          <p:cNvPr id="2" name="Title 1">
+            <a:extLst>
+              <a:ext uri="{FF2B5EF4-FFF2-40B4-BE49-F238E27FC236}">
+                <a16:creationId xmlns:a16="http://schemas.microsoft.com/office/drawing/2014/main" id="{6D8CEF7E-C184-9ED5-678F-E522EE7861ED}"/>
+              </a:ext>
+            </a:extLst>
+          </p:cNvPr>
+          <p:cNvSpPr>
+            <a:spLocks noGrp="1"/>
+          </p:cNvSpPr>
+          <p:nvPr>
+            <p:ph type="title"/>
+          </p:nvPr>
+        </p:nvSpPr>
+        <p:spPr/>
+        <p:txBody>
+          <a:bodyPr/>
+          <a:lstStyle/>
+          <a:p>
+            <a:r>
+              <a:rPr lang="en-US" dirty="0"/>
+              <a:t>Implementing</a:t>
+            </a:r>
+            <a:br>
+              <a:rPr lang="en-US" dirty="0"/>
+            </a:br>
+            <a:r>
+              <a:rPr lang="en-US" dirty="0"/>
+              <a:t>Transports</a:t>
+            </a:r>
+          </a:p>
+        </p:txBody>
+      </p:sp>
+      <p:sp>
+        <p:nvSpPr>
+          <p:cNvPr id="9" name="Content Placeholder 8">
+            <a:extLst>
+              <a:ext uri="{FF2B5EF4-FFF2-40B4-BE49-F238E27FC236}">
+                <a16:creationId xmlns:a16="http://schemas.microsoft.com/office/drawing/2014/main" id="{9F56818D-148F-7DD5-0B72-C665916F8DDC}"/>
+              </a:ext>
+            </a:extLst>
+          </p:cNvPr>
+          <p:cNvSpPr>
+            <a:spLocks noGrp="1"/>
+          </p:cNvSpPr>
+          <p:nvPr>
+            <p:ph idx="1"/>
+          </p:nvPr>
+        </p:nvSpPr>
+        <p:spPr>
+          <a:xfrm>
+            <a:off x="358588" y="2299414"/>
+            <a:ext cx="4484048" cy="4558586"/>
+          </a:xfrm>
+        </p:spPr>
+        <p:txBody>
+          <a:bodyPr>
+            <a:normAutofit fontScale="92500" lnSpcReduction="20000"/>
+          </a:bodyPr>
+          <a:lstStyle/>
+          <a:p>
+            <a:r>
+              <a:rPr lang="en-US" sz="2400" dirty="0"/>
+              <a:t>3 classes to specialize.</a:t>
+            </a:r>
+          </a:p>
+          <a:p>
+            <a:r>
+              <a:rPr lang="en-US" sz="2400" dirty="0"/>
+              <a:t>Straight wrappers, no error management required.</a:t>
+            </a:r>
+          </a:p>
+          <a:p>
+            <a:r>
+              <a:rPr lang="en-US" sz="2400" dirty="0"/>
+              <a:t>Package First</a:t>
+            </a:r>
+          </a:p>
+          <a:p>
+            <a:endParaRPr lang="en-US" sz="2400" dirty="0"/>
+          </a:p>
+          <a:p>
+            <a:endParaRPr lang="en-US" sz="2400" dirty="0"/>
+          </a:p>
+          <a:p>
+            <a:r>
+              <a:rPr lang="en-US" sz="2400" dirty="0"/>
+              <a:t>Example of </a:t>
+            </a:r>
+            <a:r>
+              <a:rPr lang="en-US" sz="2400" dirty="0" err="1"/>
+              <a:t>TCPSocket</a:t>
+            </a:r>
+            <a:endParaRPr lang="en-US" sz="2400" dirty="0"/>
+          </a:p>
+          <a:p>
+            <a:pPr lvl="1"/>
+            <a:r>
+              <a:rPr lang="en-US" sz="2000" dirty="0" err="1"/>
+              <a:t>AddressProtocolName</a:t>
+            </a:r>
+            <a:r>
+              <a:rPr lang="en-US" sz="2000" dirty="0"/>
+              <a:t>: </a:t>
+            </a:r>
+          </a:p>
+          <a:p>
+            <a:pPr lvl="2"/>
+            <a:r>
+              <a:rPr lang="en-US" sz="1600" dirty="0"/>
+              <a:t>“</a:t>
+            </a:r>
+            <a:r>
+              <a:rPr lang="en-US" sz="1600" dirty="0" err="1"/>
+              <a:t>tcp</a:t>
+            </a:r>
+            <a:r>
+              <a:rPr lang="en-US" sz="1600" dirty="0"/>
+              <a:t>”</a:t>
+            </a:r>
+          </a:p>
+          <a:p>
+            <a:pPr lvl="1"/>
+            <a:r>
+              <a:rPr lang="en-US" sz="2000" dirty="0" err="1"/>
+              <a:t>DefaultListeningAddress</a:t>
+            </a:r>
+            <a:r>
+              <a:rPr lang="en-US" sz="2000" dirty="0"/>
+              <a:t>:</a:t>
+            </a:r>
+          </a:p>
+          <a:p>
+            <a:pPr lvl="2"/>
+            <a:r>
+              <a:rPr lang="en-US" sz="1600" dirty="0"/>
+              <a:t>new </a:t>
+            </a:r>
+            <a:r>
+              <a:rPr lang="en-US" sz="1600" dirty="0" err="1"/>
+              <a:t>IPEndpoint</a:t>
+            </a:r>
+            <a:r>
+              <a:rPr lang="en-US" sz="1600" dirty="0"/>
+              <a:t>(IPAddress.Any,37120)</a:t>
+            </a:r>
+          </a:p>
+          <a:p>
+            <a:endParaRPr lang="en-US" sz="2400" dirty="0"/>
+          </a:p>
+          <a:p>
+            <a:r>
+              <a:rPr lang="en-US" sz="2400" dirty="0"/>
+              <a:t>Developers don’t interact with Transports layer.</a:t>
+            </a:r>
+            <a:endParaRPr lang="en-US" sz="2000" dirty="0"/>
+          </a:p>
+        </p:txBody>
+      </p:sp>
+      <mc:AlternateContent xmlns:mc="http://schemas.openxmlformats.org/markup-compatibility/2006">
+        <mc:Choice xmlns:p14="http://schemas.microsoft.com/office/powerpoint/2010/main" Requires="p14">
+          <p:contentPart p14:bwMode="auto" r:id="rId4">
+            <p14:nvContentPartPr>
+              <p14:cNvPr id="16" name="Ink 15">
+                <a:extLst>
+                  <a:ext uri="{FF2B5EF4-FFF2-40B4-BE49-F238E27FC236}">
+                    <a16:creationId xmlns:a16="http://schemas.microsoft.com/office/drawing/2014/main" id="{50624A14-49A3-0F8D-AD90-36507C62CCDD}"/>
+                  </a:ext>
+                </a:extLst>
+              </p14:cNvPr>
+              <p14:cNvContentPartPr/>
+              <p14:nvPr/>
+            </p14:nvContentPartPr>
+            <p14:xfrm>
+              <a:off x="7894068" y="2881837"/>
+              <a:ext cx="1032840" cy="57600"/>
+            </p14:xfrm>
+          </p:contentPart>
+        </mc:Choice>
+        <mc:Fallback>
+          <p:pic>
+            <p:nvPicPr>
+              <p:cNvPr id="16" name="Ink 15">
+                <a:extLst>
+                  <a:ext uri="{FF2B5EF4-FFF2-40B4-BE49-F238E27FC236}">
+                    <a16:creationId xmlns:a16="http://schemas.microsoft.com/office/drawing/2014/main" id="{50624A14-49A3-0F8D-AD90-36507C62CCDD}"/>
+                  </a:ext>
+                </a:extLst>
+              </p:cNvPr>
+              <p:cNvPicPr/>
+              <p:nvPr/>
+            </p:nvPicPr>
+            <p:blipFill>
+              <a:blip r:embed="rId5"/>
+              <a:stretch>
+                <a:fillRect/>
+              </a:stretch>
+            </p:blipFill>
+            <p:spPr>
+              <a:xfrm>
+                <a:off x="7840068" y="2773837"/>
+                <a:ext cx="1140480" cy="273240"/>
+              </a:xfrm>
+              <a:prstGeom prst="rect">
+                <a:avLst/>
+              </a:prstGeom>
+            </p:spPr>
+          </p:pic>
+        </mc:Fallback>
+      </mc:AlternateContent>
+    </p:spTree>
+    <p:extLst>
+      <p:ext uri="{BB962C8B-B14F-4D97-AF65-F5344CB8AC3E}">
+        <p14:creationId xmlns:p14="http://schemas.microsoft.com/office/powerpoint/2010/main" val="2227821959"/>
+      </p:ext>
+    </p:extLst>
+  </p:cSld>
+  <p:clrMapOvr>
+    <a:masterClrMapping/>
+  </p:clrMapOvr>
+</p:sld>
+</file>
+
 <file path=ppt/slides/slide28.xml><?xml version="1.0" encoding="utf-8"?>
 <p:sld xmlns:a="http://schemas.openxmlformats.org/drawingml/2006/main" xmlns:r="http://schemas.openxmlformats.org/officeDocument/2006/relationships" xmlns:p="http://schemas.openxmlformats.org/presentationml/2006/main">
   <p:cSld>
@@ -15259,7 +15376,7 @@
           <a:p>
             <a:r>
               <a:rPr lang="en-US" dirty="0"/>
-              <a:t>The exchange Channels</a:t>
+              <a:t>The Channels</a:t>
             </a:r>
           </a:p>
         </p:txBody>
@@ -15389,6 +15506,244 @@
 </file>
 
 <file path=ppt/slides/slide29.xml><?xml version="1.0" encoding="utf-8"?>
+<p:sld xmlns:a="http://schemas.openxmlformats.org/drawingml/2006/main" xmlns:r="http://schemas.openxmlformats.org/officeDocument/2006/relationships" xmlns:p="http://schemas.openxmlformats.org/presentationml/2006/main">
+  <p:cSld>
+    <p:spTree>
+      <p:nvGrpSpPr>
+        <p:cNvPr id="1" name=""/>
+        <p:cNvGrpSpPr/>
+        <p:nvPr/>
+      </p:nvGrpSpPr>
+      <p:grpSpPr>
+        <a:xfrm>
+          <a:off x="0" y="0"/>
+          <a:ext cx="0" cy="0"/>
+          <a:chOff x="0" y="0"/>
+          <a:chExt cx="0" cy="0"/>
+        </a:xfrm>
+      </p:grpSpPr>
+      <p:sp>
+        <p:nvSpPr>
+          <p:cNvPr id="2" name="Title 1">
+            <a:extLst>
+              <a:ext uri="{FF2B5EF4-FFF2-40B4-BE49-F238E27FC236}">
+                <a16:creationId xmlns:a16="http://schemas.microsoft.com/office/drawing/2014/main" id="{2ADDEB0D-75FE-A9E7-AE5D-1A00BE2CB4EF}"/>
+              </a:ext>
+            </a:extLst>
+          </p:cNvPr>
+          <p:cNvSpPr>
+            <a:spLocks noGrp="1"/>
+          </p:cNvSpPr>
+          <p:nvPr>
+            <p:ph type="title"/>
+          </p:nvPr>
+        </p:nvSpPr>
+        <p:spPr/>
+        <p:txBody>
+          <a:bodyPr/>
+          <a:lstStyle/>
+          <a:p>
+            <a:r>
+              <a:rPr lang="en-US" dirty="0"/>
+              <a:t>UNSTABLE REMAINDER</a:t>
+            </a:r>
+          </a:p>
+        </p:txBody>
+      </p:sp>
+      <p:sp>
+        <p:nvSpPr>
+          <p:cNvPr id="3" name="Content Placeholder 2">
+            <a:extLst>
+              <a:ext uri="{FF2B5EF4-FFF2-40B4-BE49-F238E27FC236}">
+                <a16:creationId xmlns:a16="http://schemas.microsoft.com/office/drawing/2014/main" id="{69BD3F96-4E3A-A64D-A143-5E0F643AB7C5}"/>
+              </a:ext>
+            </a:extLst>
+          </p:cNvPr>
+          <p:cNvSpPr>
+            <a:spLocks noGrp="1"/>
+          </p:cNvSpPr>
+          <p:nvPr>
+            <p:ph idx="1"/>
+          </p:nvPr>
+        </p:nvSpPr>
+        <p:spPr/>
+        <p:txBody>
+          <a:bodyPr/>
+          <a:lstStyle/>
+          <a:p>
+            <a:endParaRPr lang="en-US"/>
+          </a:p>
+        </p:txBody>
+      </p:sp>
+    </p:spTree>
+    <p:extLst>
+      <p:ext uri="{BB962C8B-B14F-4D97-AF65-F5344CB8AC3E}">
+        <p14:creationId xmlns:p14="http://schemas.microsoft.com/office/powerpoint/2010/main" val="4293717367"/>
+      </p:ext>
+    </p:extLst>
+  </p:cSld>
+  <p:clrMapOvr>
+    <a:masterClrMapping/>
+  </p:clrMapOvr>
+</p:sld>
+</file>
+
+<file path=ppt/slides/slide3.xml><?xml version="1.0" encoding="utf-8"?>
+<p:sld xmlns:a="http://schemas.openxmlformats.org/drawingml/2006/main" xmlns:r="http://schemas.openxmlformats.org/officeDocument/2006/relationships" xmlns:p="http://schemas.openxmlformats.org/presentationml/2006/main">
+  <p:cSld>
+    <p:spTree>
+      <p:nvGrpSpPr>
+        <p:cNvPr id="1" name=""/>
+        <p:cNvGrpSpPr/>
+        <p:nvPr/>
+      </p:nvGrpSpPr>
+      <p:grpSpPr>
+        <a:xfrm>
+          <a:off x="0" y="0"/>
+          <a:ext cx="0" cy="0"/>
+          <a:chOff x="0" y="0"/>
+          <a:chExt cx="0" cy="0"/>
+        </a:xfrm>
+      </p:grpSpPr>
+      <p:sp>
+        <p:nvSpPr>
+          <p:cNvPr id="2" name="Title 1">
+            <a:extLst>
+              <a:ext uri="{FF2B5EF4-FFF2-40B4-BE49-F238E27FC236}">
+                <a16:creationId xmlns:a16="http://schemas.microsoft.com/office/drawing/2014/main" id="{8C94FF63-04EA-BCC5-D34D-9C25D186AFCA}"/>
+              </a:ext>
+            </a:extLst>
+          </p:cNvPr>
+          <p:cNvSpPr>
+            <a:spLocks noGrp="1"/>
+          </p:cNvSpPr>
+          <p:nvPr>
+            <p:ph type="title"/>
+          </p:nvPr>
+        </p:nvSpPr>
+        <p:spPr/>
+        <p:txBody>
+          <a:bodyPr/>
+          <a:lstStyle/>
+          <a:p>
+            <a:r>
+              <a:rPr lang="en-US" dirty="0"/>
+              <a:t>Secondary Objectives</a:t>
+            </a:r>
+          </a:p>
+        </p:txBody>
+      </p:sp>
+      <p:sp>
+        <p:nvSpPr>
+          <p:cNvPr id="3" name="Content Placeholder 2">
+            <a:extLst>
+              <a:ext uri="{FF2B5EF4-FFF2-40B4-BE49-F238E27FC236}">
+                <a16:creationId xmlns:a16="http://schemas.microsoft.com/office/drawing/2014/main" id="{936DC6D3-3B63-2CF7-C0E5-91BFC5BA1268}"/>
+              </a:ext>
+            </a:extLst>
+          </p:cNvPr>
+          <p:cNvSpPr>
+            <a:spLocks noGrp="1"/>
+          </p:cNvSpPr>
+          <p:nvPr>
+            <p:ph idx="1"/>
+          </p:nvPr>
+        </p:nvSpPr>
+        <p:spPr/>
+        <p:txBody>
+          <a:bodyPr/>
+          <a:lstStyle/>
+          <a:p>
+            <a:r>
+              <a:rPr lang="en-US" dirty="0"/>
+              <a:t>Follows the “Package First” approach.</a:t>
+            </a:r>
+          </a:p>
+          <a:p>
+            <a:r>
+              <a:rPr lang="en-US" dirty="0"/>
+              <a:t>Encapsulates complexities</a:t>
+            </a:r>
+          </a:p>
+          <a:p>
+            <a:pPr lvl="1"/>
+            <a:r>
+              <a:rPr lang="en-US" dirty="0"/>
+              <a:t>Capabilities discovery</a:t>
+            </a:r>
+          </a:p>
+          <a:p>
+            <a:pPr lvl="1"/>
+            <a:r>
+              <a:rPr lang="en-US" dirty="0"/>
+              <a:t>Secret keys management</a:t>
+            </a:r>
+          </a:p>
+          <a:p>
+            <a:r>
+              <a:rPr lang="en-US" dirty="0"/>
+              <a:t>Supports “Observability”</a:t>
+            </a:r>
+          </a:p>
+          <a:p>
+            <a:pPr lvl="1"/>
+            <a:r>
+              <a:rPr lang="en-US" dirty="0"/>
+              <a:t>Logs from a Party are identified and can be easily managed.</a:t>
+            </a:r>
+          </a:p>
+          <a:p>
+            <a:r>
+              <a:rPr lang="en-US" dirty="0"/>
+              <a:t>Be agnostic of deployment details</a:t>
+            </a:r>
+          </a:p>
+          <a:p>
+            <a:pPr lvl="1"/>
+            <a:r>
+              <a:rPr lang="en-US" dirty="0"/>
+              <a:t>Transport layers (TCP/IP, </a:t>
+            </a:r>
+            <a:r>
+              <a:rPr lang="en-US" dirty="0" err="1"/>
+              <a:t>quic</a:t>
+            </a:r>
+            <a:r>
+              <a:rPr lang="en-US" dirty="0"/>
+              <a:t>, </a:t>
+            </a:r>
+            <a:r>
+              <a:rPr lang="en-US" dirty="0" err="1"/>
+              <a:t>mqtt</a:t>
+            </a:r>
+            <a:r>
+              <a:rPr lang="en-US" dirty="0"/>
+              <a:t>, etc.)</a:t>
+            </a:r>
+          </a:p>
+          <a:p>
+            <a:pPr lvl="1"/>
+            <a:r>
+              <a:rPr lang="en-US" dirty="0"/>
+              <a:t>VLAN and/or WAN</a:t>
+            </a:r>
+          </a:p>
+        </p:txBody>
+      </p:sp>
+    </p:spTree>
+    <p:extLst>
+      <p:ext uri="{BB962C8B-B14F-4D97-AF65-F5344CB8AC3E}">
+        <p14:creationId xmlns:p14="http://schemas.microsoft.com/office/powerpoint/2010/main" val="1297341357"/>
+      </p:ext>
+    </p:extLst>
+  </p:cSld>
+  <p:clrMapOvr>
+    <a:masterClrMapping/>
+  </p:clrMapOvr>
+</p:sld>
+</file>
+
+<file path=ppt/slides/slide30.xml><?xml version="1.0" encoding="utf-8"?>
 <p:sld xmlns:a="http://schemas.openxmlformats.org/drawingml/2006/main" xmlns:r="http://schemas.openxmlformats.org/officeDocument/2006/relationships" xmlns:p="http://schemas.openxmlformats.org/presentationml/2006/main">
   <p:cSld>
     <p:spTree>
@@ -15820,162 +16175,7 @@
 </p:sld>
 </file>
 
-<file path=ppt/slides/slide3.xml><?xml version="1.0" encoding="utf-8"?>
-<p:sld xmlns:a="http://schemas.openxmlformats.org/drawingml/2006/main" xmlns:r="http://schemas.openxmlformats.org/officeDocument/2006/relationships" xmlns:p="http://schemas.openxmlformats.org/presentationml/2006/main">
-  <p:cSld>
-    <p:spTree>
-      <p:nvGrpSpPr>
-        <p:cNvPr id="1" name=""/>
-        <p:cNvGrpSpPr/>
-        <p:nvPr/>
-      </p:nvGrpSpPr>
-      <p:grpSpPr>
-        <a:xfrm>
-          <a:off x="0" y="0"/>
-          <a:ext cx="0" cy="0"/>
-          <a:chOff x="0" y="0"/>
-          <a:chExt cx="0" cy="0"/>
-        </a:xfrm>
-      </p:grpSpPr>
-      <p:sp>
-        <p:nvSpPr>
-          <p:cNvPr id="2" name="Title 1">
-            <a:extLst>
-              <a:ext uri="{FF2B5EF4-FFF2-40B4-BE49-F238E27FC236}">
-                <a16:creationId xmlns:a16="http://schemas.microsoft.com/office/drawing/2014/main" id="{8C94FF63-04EA-BCC5-D34D-9C25D186AFCA}"/>
-              </a:ext>
-            </a:extLst>
-          </p:cNvPr>
-          <p:cNvSpPr>
-            <a:spLocks noGrp="1"/>
-          </p:cNvSpPr>
-          <p:nvPr>
-            <p:ph type="title"/>
-          </p:nvPr>
-        </p:nvSpPr>
-        <p:spPr/>
-        <p:txBody>
-          <a:bodyPr/>
-          <a:lstStyle/>
-          <a:p>
-            <a:r>
-              <a:rPr lang="en-US" dirty="0"/>
-              <a:t>Secondary Objectives</a:t>
-            </a:r>
-          </a:p>
-        </p:txBody>
-      </p:sp>
-      <p:sp>
-        <p:nvSpPr>
-          <p:cNvPr id="3" name="Content Placeholder 2">
-            <a:extLst>
-              <a:ext uri="{FF2B5EF4-FFF2-40B4-BE49-F238E27FC236}">
-                <a16:creationId xmlns:a16="http://schemas.microsoft.com/office/drawing/2014/main" id="{936DC6D3-3B63-2CF7-C0E5-91BFC5BA1268}"/>
-              </a:ext>
-            </a:extLst>
-          </p:cNvPr>
-          <p:cNvSpPr>
-            <a:spLocks noGrp="1"/>
-          </p:cNvSpPr>
-          <p:nvPr>
-            <p:ph idx="1"/>
-          </p:nvPr>
-        </p:nvSpPr>
-        <p:spPr/>
-        <p:txBody>
-          <a:bodyPr/>
-          <a:lstStyle/>
-          <a:p>
-            <a:r>
-              <a:rPr lang="en-US" dirty="0"/>
-              <a:t>Follows the “Package First” approach.</a:t>
-            </a:r>
-          </a:p>
-          <a:p>
-            <a:r>
-              <a:rPr lang="en-US" dirty="0"/>
-              <a:t>Encapsulates complexities</a:t>
-            </a:r>
-          </a:p>
-          <a:p>
-            <a:pPr lvl="1"/>
-            <a:r>
-              <a:rPr lang="en-US" dirty="0"/>
-              <a:t>Capabilities discovery</a:t>
-            </a:r>
-          </a:p>
-          <a:p>
-            <a:pPr lvl="1"/>
-            <a:r>
-              <a:rPr lang="en-US" dirty="0"/>
-              <a:t>Secret keys management</a:t>
-            </a:r>
-          </a:p>
-          <a:p>
-            <a:r>
-              <a:rPr lang="en-US" dirty="0"/>
-              <a:t>Supports “Observability”</a:t>
-            </a:r>
-          </a:p>
-          <a:p>
-            <a:pPr lvl="1"/>
-            <a:r>
-              <a:rPr lang="en-US" dirty="0"/>
-              <a:t>Logs from a Party are identified and can be easily managed.</a:t>
-            </a:r>
-          </a:p>
-          <a:p>
-            <a:r>
-              <a:rPr lang="en-US" dirty="0"/>
-              <a:t>Be agnostic of deployment details</a:t>
-            </a:r>
-          </a:p>
-          <a:p>
-            <a:pPr lvl="1"/>
-            <a:r>
-              <a:rPr lang="en-US" dirty="0"/>
-              <a:t>Transport layers (TCP/IP, </a:t>
-            </a:r>
-            <a:r>
-              <a:rPr lang="en-US" dirty="0" err="1"/>
-              <a:t>quic</a:t>
-            </a:r>
-            <a:r>
-              <a:rPr lang="en-US" dirty="0"/>
-              <a:t>, </a:t>
-            </a:r>
-            <a:r>
-              <a:rPr lang="en-US" dirty="0" err="1"/>
-              <a:t>mqtt</a:t>
-            </a:r>
-            <a:r>
-              <a:rPr lang="en-US" dirty="0"/>
-              <a:t>, etc.)</a:t>
-            </a:r>
-          </a:p>
-          <a:p>
-            <a:pPr lvl="1"/>
-            <a:r>
-              <a:rPr lang="en-US" dirty="0"/>
-              <a:t>VLAN and/or WAN</a:t>
-            </a:r>
-          </a:p>
-        </p:txBody>
-      </p:sp>
-    </p:spTree>
-    <p:extLst>
-      <p:ext uri="{BB962C8B-B14F-4D97-AF65-F5344CB8AC3E}">
-        <p14:creationId xmlns:p14="http://schemas.microsoft.com/office/powerpoint/2010/main" val="1297341357"/>
-      </p:ext>
-    </p:extLst>
-  </p:cSld>
-  <p:clrMapOvr>
-    <a:masterClrMapping/>
-  </p:clrMapOvr>
-</p:sld>
-</file>
-
-<file path=ppt/slides/slide30.xml><?xml version="1.0" encoding="utf-8"?>
+<file path=ppt/slides/slide31.xml><?xml version="1.0" encoding="utf-8"?>
 <p:sld xmlns:a="http://schemas.openxmlformats.org/drawingml/2006/main" xmlns:r="http://schemas.openxmlformats.org/officeDocument/2006/relationships" xmlns:p="http://schemas.openxmlformats.org/presentationml/2006/main">
   <p:cSld>
     <p:spTree>
@@ -16120,7 +16320,7 @@
 </p:sld>
 </file>
 
-<file path=ppt/slides/slide31.xml><?xml version="1.0" encoding="utf-8"?>
+<file path=ppt/slides/slide32.xml><?xml version="1.0" encoding="utf-8"?>
 <p:sld xmlns:a="http://schemas.openxmlformats.org/drawingml/2006/main" xmlns:r="http://schemas.openxmlformats.org/officeDocument/2006/relationships" xmlns:p="http://schemas.openxmlformats.org/presentationml/2006/main">
   <p:cSld>
     <p:spTree>
@@ -16839,7 +17039,7 @@
 </p:sld>
 </file>
 
-<file path=ppt/slides/slide32.xml><?xml version="1.0" encoding="utf-8"?>
+<file path=ppt/slides/slide33.xml><?xml version="1.0" encoding="utf-8"?>
 <p:sld xmlns:a="http://schemas.openxmlformats.org/drawingml/2006/main" xmlns:r="http://schemas.openxmlformats.org/officeDocument/2006/relationships" xmlns:p="http://schemas.openxmlformats.org/presentationml/2006/main">
   <p:cSld>
     <p:spTree>
@@ -17551,263 +17751,6 @@
     <p:extLst>
       <p:ext uri="{BB962C8B-B14F-4D97-AF65-F5344CB8AC3E}">
         <p14:creationId xmlns:p14="http://schemas.microsoft.com/office/powerpoint/2010/main" val="1074243622"/>
-      </p:ext>
-    </p:extLst>
-  </p:cSld>
-  <p:clrMapOvr>
-    <a:masterClrMapping/>
-  </p:clrMapOvr>
-</p:sld>
-</file>
-
-<file path=ppt/slides/slide33.xml><?xml version="1.0" encoding="utf-8"?>
-<p:sld xmlns:a="http://schemas.openxmlformats.org/drawingml/2006/main" xmlns:r="http://schemas.openxmlformats.org/officeDocument/2006/relationships" xmlns:p="http://schemas.openxmlformats.org/presentationml/2006/main">
-  <p:cSld>
-    <p:bg>
-      <p:bgPr>
-        <a:solidFill>
-          <a:schemeClr val="bg1"/>
-        </a:solidFill>
-        <a:effectLst/>
-      </p:bgPr>
-    </p:bg>
-    <p:spTree>
-      <p:nvGrpSpPr>
-        <p:cNvPr id="1" name=""/>
-        <p:cNvGrpSpPr/>
-        <p:nvPr/>
-      </p:nvGrpSpPr>
-      <p:grpSpPr>
-        <a:xfrm>
-          <a:off x="0" y="0"/>
-          <a:ext cx="0" cy="0"/>
-          <a:chOff x="0" y="0"/>
-          <a:chExt cx="0" cy="0"/>
-        </a:xfrm>
-      </p:grpSpPr>
-      <p:sp>
-        <p:nvSpPr>
-          <p:cNvPr id="2" name="Title 1">
-            <a:extLst>
-              <a:ext uri="{FF2B5EF4-FFF2-40B4-BE49-F238E27FC236}">
-                <a16:creationId xmlns:a16="http://schemas.microsoft.com/office/drawing/2014/main" id="{6D8CEF7E-C184-9ED5-678F-E522EE7861ED}"/>
-              </a:ext>
-            </a:extLst>
-          </p:cNvPr>
-          <p:cNvSpPr>
-            <a:spLocks noGrp="1"/>
-          </p:cNvSpPr>
-          <p:nvPr>
-            <p:ph type="title"/>
-          </p:nvPr>
-        </p:nvSpPr>
-        <p:spPr/>
-        <p:txBody>
-          <a:bodyPr/>
-          <a:lstStyle/>
-          <a:p>
-            <a:r>
-              <a:rPr lang="en-US" dirty="0"/>
-              <a:t>Implementing</a:t>
-            </a:r>
-            <a:br>
-              <a:rPr lang="en-US" dirty="0"/>
-            </a:br>
-            <a:r>
-              <a:rPr lang="en-US" dirty="0"/>
-              <a:t>Transports</a:t>
-            </a:r>
-          </a:p>
-        </p:txBody>
-      </p:sp>
-      <p:sp>
-        <p:nvSpPr>
-          <p:cNvPr id="9" name="Content Placeholder 8">
-            <a:extLst>
-              <a:ext uri="{FF2B5EF4-FFF2-40B4-BE49-F238E27FC236}">
-                <a16:creationId xmlns:a16="http://schemas.microsoft.com/office/drawing/2014/main" id="{9F56818D-148F-7DD5-0B72-C665916F8DDC}"/>
-              </a:ext>
-            </a:extLst>
-          </p:cNvPr>
-          <p:cNvSpPr>
-            <a:spLocks noGrp="1"/>
-          </p:cNvSpPr>
-          <p:nvPr>
-            <p:ph idx="1"/>
-          </p:nvPr>
-        </p:nvSpPr>
-        <p:spPr>
-          <a:xfrm>
-            <a:off x="685800" y="2395330"/>
-            <a:ext cx="4446248" cy="4273825"/>
-          </a:xfrm>
-        </p:spPr>
-        <p:txBody>
-          <a:bodyPr>
-            <a:normAutofit/>
-          </a:bodyPr>
-          <a:lstStyle/>
-          <a:p>
-            <a:r>
-              <a:rPr lang="en-US" sz="2400" dirty="0"/>
-              <a:t>3 classes to specialize.</a:t>
-            </a:r>
-          </a:p>
-          <a:p>
-            <a:r>
-              <a:rPr lang="en-US" sz="2400" dirty="0"/>
-              <a:t>Straight wrappers, no error management required.</a:t>
-            </a:r>
-          </a:p>
-          <a:p>
-            <a:r>
-              <a:rPr lang="en-US" sz="2400" dirty="0"/>
-              <a:t>Package First</a:t>
-            </a:r>
-          </a:p>
-          <a:p>
-            <a:endParaRPr lang="en-US" sz="2400" dirty="0"/>
-          </a:p>
-          <a:p>
-            <a:r>
-              <a:rPr lang="en-US" sz="2400" dirty="0"/>
-              <a:t>Example of </a:t>
-            </a:r>
-            <a:r>
-              <a:rPr lang="en-US" sz="2400" dirty="0" err="1"/>
-              <a:t>TCPSocket</a:t>
-            </a:r>
-            <a:endParaRPr lang="en-US" sz="2400" dirty="0"/>
-          </a:p>
-          <a:p>
-            <a:pPr lvl="1"/>
-            <a:r>
-              <a:rPr lang="en-US" sz="2000" dirty="0" err="1"/>
-              <a:t>AddressProtocolName</a:t>
-            </a:r>
-            <a:r>
-              <a:rPr lang="en-US" sz="2000" dirty="0"/>
-              <a:t>: “</a:t>
-            </a:r>
-            <a:r>
-              <a:rPr lang="en-US" sz="2000" dirty="0" err="1"/>
-              <a:t>tcp</a:t>
-            </a:r>
-            <a:r>
-              <a:rPr lang="en-US" sz="2000" dirty="0"/>
-              <a:t>”</a:t>
-            </a:r>
-          </a:p>
-          <a:p>
-            <a:endParaRPr lang="en-US" sz="2400" dirty="0"/>
-          </a:p>
-          <a:p>
-            <a:r>
-              <a:rPr lang="en-US" sz="2400" dirty="0"/>
-              <a:t>Developers don’t interact with Transports layer.</a:t>
-            </a:r>
-          </a:p>
-          <a:p>
-            <a:pPr lvl="1"/>
-            <a:endParaRPr lang="en-US" sz="2000" dirty="0"/>
-          </a:p>
-          <a:p>
-            <a:pPr lvl="1"/>
-            <a:endParaRPr lang="en-US" sz="2000" dirty="0"/>
-          </a:p>
-        </p:txBody>
-      </p:sp>
-      <p:pic>
-        <p:nvPicPr>
-          <p:cNvPr id="13" name="Picture 12" descr="Diagram&#10;&#10;Description automatically generated">
-            <a:extLst>
-              <a:ext uri="{FF2B5EF4-FFF2-40B4-BE49-F238E27FC236}">
-                <a16:creationId xmlns:a16="http://schemas.microsoft.com/office/drawing/2014/main" id="{5B7E97A0-34C4-CC0C-12FC-6AFA8966FE23}"/>
-              </a:ext>
-            </a:extLst>
-          </p:cNvPr>
-          <p:cNvPicPr>
-            <a:picLocks noChangeAspect="1"/>
-          </p:cNvPicPr>
-          <p:nvPr/>
-        </p:nvPicPr>
-        <p:blipFill>
-          <a:blip r:embed="rId3">
-            <a:extLst>
-              <a:ext uri="{28A0092B-C50C-407E-A947-70E740481C1C}">
-                <a14:useLocalDpi xmlns:a14="http://schemas.microsoft.com/office/drawing/2010/main" val="0"/>
-              </a:ext>
-            </a:extLst>
-          </a:blip>
-          <a:stretch>
-            <a:fillRect/>
-          </a:stretch>
-        </p:blipFill>
-        <p:spPr>
-          <a:xfrm>
-            <a:off x="5204165" y="90854"/>
-            <a:ext cx="6812870" cy="6767146"/>
-          </a:xfrm>
-          <a:prstGeom prst="rect">
-            <a:avLst/>
-          </a:prstGeom>
-        </p:spPr>
-      </p:pic>
-      <mc:AlternateContent xmlns:mc="http://schemas.openxmlformats.org/markup-compatibility/2006" xmlns:p14="http://schemas.microsoft.com/office/powerpoint/2010/main">
-        <mc:Choice Requires="p14">
-          <p:contentPart p14:bwMode="auto" r:id="rId4">
-            <p14:nvContentPartPr>
-              <p14:cNvPr id="16" name="Ink 15">
-                <a:extLst>
-                  <a:ext uri="{FF2B5EF4-FFF2-40B4-BE49-F238E27FC236}">
-                    <a16:creationId xmlns:a16="http://schemas.microsoft.com/office/drawing/2014/main" id="{50624A14-49A3-0F8D-AD90-36507C62CCDD}"/>
-                  </a:ext>
-                </a:extLst>
-              </p14:cNvPr>
-              <p14:cNvContentPartPr/>
-              <p14:nvPr/>
-            </p14:nvContentPartPr>
-            <p14:xfrm>
-              <a:off x="8249071" y="2795776"/>
-              <a:ext cx="1032840" cy="57600"/>
-            </p14:xfrm>
-          </p:contentPart>
-        </mc:Choice>
-        <mc:Fallback xmlns="">
-          <p:pic>
-            <p:nvPicPr>
-              <p:cNvPr id="16" name="Ink 15">
-                <a:extLst>
-                  <a:ext uri="{FF2B5EF4-FFF2-40B4-BE49-F238E27FC236}">
-                    <a16:creationId xmlns:a16="http://schemas.microsoft.com/office/drawing/2014/main" id="{50624A14-49A3-0F8D-AD90-36507C62CCDD}"/>
-                  </a:ext>
-                </a:extLst>
-              </p:cNvPr>
-              <p:cNvPicPr/>
-              <p:nvPr/>
-            </p:nvPicPr>
-            <p:blipFill>
-              <a:blip r:embed="rId5"/>
-              <a:stretch>
-                <a:fillRect/>
-              </a:stretch>
-            </p:blipFill>
-            <p:spPr>
-              <a:xfrm>
-                <a:off x="8195071" y="2687776"/>
-                <a:ext cx="1140480" cy="273240"/>
-              </a:xfrm>
-              <a:prstGeom prst="rect">
-                <a:avLst/>
-              </a:prstGeom>
-            </p:spPr>
-          </p:pic>
-        </mc:Fallback>
-      </mc:AlternateContent>
-    </p:spTree>
-    <p:extLst>
-      <p:ext uri="{BB962C8B-B14F-4D97-AF65-F5344CB8AC3E}">
-        <p14:creationId xmlns:p14="http://schemas.microsoft.com/office/powerpoint/2010/main" val="2227821959"/>
       </p:ext>
     </p:extLst>
   </p:cSld>

--- a/Doc/CK-AppIdentity.pptx
+++ b/Doc/CK-AppIdentity.pptx
@@ -299,7 +299,7 @@
           <a:p>
             <a:fld id="{7EBA75D8-A9A5-4FAF-B563-7A079B630A7E}" type="datetimeFigureOut">
               <a:rPr lang="en-US" smtClean="0"/>
-              <a:t>6/28/2023</a:t>
+              <a:t>7/1/2023</a:t>
             </a:fld>
             <a:endParaRPr lang="en-US"/>
           </a:p>
@@ -2063,7 +2063,7 @@
           <a:p>
             <a:fld id="{7D1F2140-8D48-49AC-AD8D-683E6FF4DC34}" type="datetimeFigureOut">
               <a:rPr lang="en-US" smtClean="0"/>
-              <a:t>6/28/2023</a:t>
+              <a:t>7/1/2023</a:t>
             </a:fld>
             <a:endParaRPr lang="en-US"/>
           </a:p>
@@ -2261,7 +2261,7 @@
           <a:p>
             <a:fld id="{7D1F2140-8D48-49AC-AD8D-683E6FF4DC34}" type="datetimeFigureOut">
               <a:rPr lang="en-US" smtClean="0"/>
-              <a:t>6/28/2023</a:t>
+              <a:t>7/1/2023</a:t>
             </a:fld>
             <a:endParaRPr lang="en-US"/>
           </a:p>
@@ -2469,7 +2469,7 @@
           <a:p>
             <a:fld id="{7D1F2140-8D48-49AC-AD8D-683E6FF4DC34}" type="datetimeFigureOut">
               <a:rPr lang="en-US" smtClean="0"/>
-              <a:t>6/28/2023</a:t>
+              <a:t>7/1/2023</a:t>
             </a:fld>
             <a:endParaRPr lang="en-US"/>
           </a:p>
@@ -2667,7 +2667,7 @@
           <a:p>
             <a:fld id="{7D1F2140-8D48-49AC-AD8D-683E6FF4DC34}" type="datetimeFigureOut">
               <a:rPr lang="en-US" smtClean="0"/>
-              <a:t>6/28/2023</a:t>
+              <a:t>7/1/2023</a:t>
             </a:fld>
             <a:endParaRPr lang="en-US"/>
           </a:p>
@@ -2942,7 +2942,7 @@
           <a:p>
             <a:fld id="{7D1F2140-8D48-49AC-AD8D-683E6FF4DC34}" type="datetimeFigureOut">
               <a:rPr lang="en-US" smtClean="0"/>
-              <a:t>6/28/2023</a:t>
+              <a:t>7/1/2023</a:t>
             </a:fld>
             <a:endParaRPr lang="en-US"/>
           </a:p>
@@ -3207,7 +3207,7 @@
           <a:p>
             <a:fld id="{7D1F2140-8D48-49AC-AD8D-683E6FF4DC34}" type="datetimeFigureOut">
               <a:rPr lang="en-US" smtClean="0"/>
-              <a:t>6/28/2023</a:t>
+              <a:t>7/1/2023</a:t>
             </a:fld>
             <a:endParaRPr lang="en-US"/>
           </a:p>
@@ -3619,7 +3619,7 @@
           <a:p>
             <a:fld id="{7D1F2140-8D48-49AC-AD8D-683E6FF4DC34}" type="datetimeFigureOut">
               <a:rPr lang="en-US" smtClean="0"/>
-              <a:t>6/28/2023</a:t>
+              <a:t>7/1/2023</a:t>
             </a:fld>
             <a:endParaRPr lang="en-US"/>
           </a:p>
@@ -3760,7 +3760,7 @@
           <a:p>
             <a:fld id="{7D1F2140-8D48-49AC-AD8D-683E6FF4DC34}" type="datetimeFigureOut">
               <a:rPr lang="en-US" smtClean="0"/>
-              <a:t>6/28/2023</a:t>
+              <a:t>7/1/2023</a:t>
             </a:fld>
             <a:endParaRPr lang="en-US"/>
           </a:p>
@@ -3873,7 +3873,7 @@
           <a:p>
             <a:fld id="{7D1F2140-8D48-49AC-AD8D-683E6FF4DC34}" type="datetimeFigureOut">
               <a:rPr lang="en-US" smtClean="0"/>
-              <a:t>6/28/2023</a:t>
+              <a:t>7/1/2023</a:t>
             </a:fld>
             <a:endParaRPr lang="en-US"/>
           </a:p>
@@ -4184,7 +4184,7 @@
           <a:p>
             <a:fld id="{7D1F2140-8D48-49AC-AD8D-683E6FF4DC34}" type="datetimeFigureOut">
               <a:rPr lang="en-US" smtClean="0"/>
-              <a:t>6/28/2023</a:t>
+              <a:t>7/1/2023</a:t>
             </a:fld>
             <a:endParaRPr lang="en-US"/>
           </a:p>
@@ -4472,7 +4472,7 @@
           <a:p>
             <a:fld id="{7D1F2140-8D48-49AC-AD8D-683E6FF4DC34}" type="datetimeFigureOut">
               <a:rPr lang="en-US" smtClean="0"/>
-              <a:t>6/28/2023</a:t>
+              <a:t>7/1/2023</a:t>
             </a:fld>
             <a:endParaRPr lang="en-US"/>
           </a:p>
@@ -4713,7 +4713,7 @@
           <a:p>
             <a:fld id="{7D1F2140-8D48-49AC-AD8D-683E6FF4DC34}" type="datetimeFigureOut">
               <a:rPr lang="en-US" smtClean="0"/>
-              <a:t>6/28/2023</a:t>
+              <a:t>7/1/2023</a:t>
             </a:fld>
             <a:endParaRPr lang="en-US"/>
           </a:p>
@@ -12942,6 +12942,14 @@
   <p:clrMapOvr>
     <a:masterClrMapping/>
   </p:clrMapOvr>
+  <mc:AlternateContent xmlns:mc="http://schemas.openxmlformats.org/markup-compatibility/2006">
+    <mc:Choice xmlns:p14="http://schemas.microsoft.com/office/powerpoint/2010/main" Requires="p14">
+      <p:transition spd="slow" p14:dur="2000" advTm="320"/>
+    </mc:Choice>
+    <mc:Fallback>
+      <p:transition spd="slow" advTm="320"/>
+    </mc:Fallback>
+  </mc:AlternateContent>
 </p:sld>
 </file>
 
@@ -13515,6 +13523,14 @@
   <p:clrMapOvr>
     <a:masterClrMapping/>
   </p:clrMapOvr>
+  <mc:AlternateContent xmlns:mc="http://schemas.openxmlformats.org/markup-compatibility/2006">
+    <mc:Choice xmlns:p14="http://schemas.microsoft.com/office/powerpoint/2010/main" Requires="p14">
+      <p:transition spd="slow" p14:dur="2000" advTm="15232"/>
+    </mc:Choice>
+    <mc:Fallback>
+      <p:transition spd="slow" advTm="15232"/>
+    </mc:Fallback>
+  </mc:AlternateContent>
 </p:sld>
 </file>
 
@@ -15272,8 +15288,8 @@
           </a:p>
         </p:txBody>
       </p:sp>
-      <mc:AlternateContent xmlns:mc="http://schemas.openxmlformats.org/markup-compatibility/2006">
-        <mc:Choice xmlns:p14="http://schemas.microsoft.com/office/powerpoint/2010/main" Requires="p14">
+      <mc:AlternateContent xmlns:mc="http://schemas.openxmlformats.org/markup-compatibility/2006" xmlns:p14="http://schemas.microsoft.com/office/powerpoint/2010/main">
+        <mc:Choice Requires="p14">
           <p:contentPart p14:bwMode="auto" r:id="rId4">
             <p14:nvContentPartPr>
               <p14:cNvPr id="16" name="Ink 15">
@@ -15292,7 +15308,7 @@
             </p14:xfrm>
           </p:contentPart>
         </mc:Choice>
-        <mc:Fallback>
+        <mc:Fallback xmlns="">
           <p:pic>
             <p:nvPicPr>
               <p:cNvPr id="16" name="Ink 15">

--- a/Doc/CK-AppIdentity.pptx
+++ b/Doc/CK-AppIdentity.pptx
@@ -299,7 +299,7 @@
           <a:p>
             <a:fld id="{7EBA75D8-A9A5-4FAF-B563-7A079B630A7E}" type="datetimeFigureOut">
               <a:rPr lang="en-US" smtClean="0"/>
-              <a:t>7/1/2023</a:t>
+              <a:t>7/17/2023</a:t>
             </a:fld>
             <a:endParaRPr lang="en-US"/>
           </a:p>
@@ -2063,7 +2063,7 @@
           <a:p>
             <a:fld id="{7D1F2140-8D48-49AC-AD8D-683E6FF4DC34}" type="datetimeFigureOut">
               <a:rPr lang="en-US" smtClean="0"/>
-              <a:t>7/1/2023</a:t>
+              <a:t>7/17/2023</a:t>
             </a:fld>
             <a:endParaRPr lang="en-US"/>
           </a:p>
@@ -2261,7 +2261,7 @@
           <a:p>
             <a:fld id="{7D1F2140-8D48-49AC-AD8D-683E6FF4DC34}" type="datetimeFigureOut">
               <a:rPr lang="en-US" smtClean="0"/>
-              <a:t>7/1/2023</a:t>
+              <a:t>7/17/2023</a:t>
             </a:fld>
             <a:endParaRPr lang="en-US"/>
           </a:p>
@@ -2469,7 +2469,7 @@
           <a:p>
             <a:fld id="{7D1F2140-8D48-49AC-AD8D-683E6FF4DC34}" type="datetimeFigureOut">
               <a:rPr lang="en-US" smtClean="0"/>
-              <a:t>7/1/2023</a:t>
+              <a:t>7/17/2023</a:t>
             </a:fld>
             <a:endParaRPr lang="en-US"/>
           </a:p>
@@ -2667,7 +2667,7 @@
           <a:p>
             <a:fld id="{7D1F2140-8D48-49AC-AD8D-683E6FF4DC34}" type="datetimeFigureOut">
               <a:rPr lang="en-US" smtClean="0"/>
-              <a:t>7/1/2023</a:t>
+              <a:t>7/17/2023</a:t>
             </a:fld>
             <a:endParaRPr lang="en-US"/>
           </a:p>
@@ -2942,7 +2942,7 @@
           <a:p>
             <a:fld id="{7D1F2140-8D48-49AC-AD8D-683E6FF4DC34}" type="datetimeFigureOut">
               <a:rPr lang="en-US" smtClean="0"/>
-              <a:t>7/1/2023</a:t>
+              <a:t>7/17/2023</a:t>
             </a:fld>
             <a:endParaRPr lang="en-US"/>
           </a:p>
@@ -3207,7 +3207,7 @@
           <a:p>
             <a:fld id="{7D1F2140-8D48-49AC-AD8D-683E6FF4DC34}" type="datetimeFigureOut">
               <a:rPr lang="en-US" smtClean="0"/>
-              <a:t>7/1/2023</a:t>
+              <a:t>7/17/2023</a:t>
             </a:fld>
             <a:endParaRPr lang="en-US"/>
           </a:p>
@@ -3619,7 +3619,7 @@
           <a:p>
             <a:fld id="{7D1F2140-8D48-49AC-AD8D-683E6FF4DC34}" type="datetimeFigureOut">
               <a:rPr lang="en-US" smtClean="0"/>
-              <a:t>7/1/2023</a:t>
+              <a:t>7/17/2023</a:t>
             </a:fld>
             <a:endParaRPr lang="en-US"/>
           </a:p>
@@ -3760,7 +3760,7 @@
           <a:p>
             <a:fld id="{7D1F2140-8D48-49AC-AD8D-683E6FF4DC34}" type="datetimeFigureOut">
               <a:rPr lang="en-US" smtClean="0"/>
-              <a:t>7/1/2023</a:t>
+              <a:t>7/17/2023</a:t>
             </a:fld>
             <a:endParaRPr lang="en-US"/>
           </a:p>
@@ -3873,7 +3873,7 @@
           <a:p>
             <a:fld id="{7D1F2140-8D48-49AC-AD8D-683E6FF4DC34}" type="datetimeFigureOut">
               <a:rPr lang="en-US" smtClean="0"/>
-              <a:t>7/1/2023</a:t>
+              <a:t>7/17/2023</a:t>
             </a:fld>
             <a:endParaRPr lang="en-US"/>
           </a:p>
@@ -4184,7 +4184,7 @@
           <a:p>
             <a:fld id="{7D1F2140-8D48-49AC-AD8D-683E6FF4DC34}" type="datetimeFigureOut">
               <a:rPr lang="en-US" smtClean="0"/>
-              <a:t>7/1/2023</a:t>
+              <a:t>7/17/2023</a:t>
             </a:fld>
             <a:endParaRPr lang="en-US"/>
           </a:p>
@@ -4472,7 +4472,7 @@
           <a:p>
             <a:fld id="{7D1F2140-8D48-49AC-AD8D-683E6FF4DC34}" type="datetimeFigureOut">
               <a:rPr lang="en-US" smtClean="0"/>
-              <a:t>7/1/2023</a:t>
+              <a:t>7/17/2023</a:t>
             </a:fld>
             <a:endParaRPr lang="en-US"/>
           </a:p>
@@ -4713,7 +4713,7 @@
           <a:p>
             <a:fld id="{7D1F2140-8D48-49AC-AD8D-683E6FF4DC34}" type="datetimeFigureOut">
               <a:rPr lang="en-US" smtClean="0"/>
-              <a:t>7/1/2023</a:t>
+              <a:t>7/17/2023</a:t>
             </a:fld>
             <a:endParaRPr lang="en-US"/>
           </a:p>
@@ -11346,7 +11346,7 @@
                 <a:latin typeface="Courier New" panose="02070309020205020404" pitchFamily="49" charset="0"/>
                 <a:cs typeface="Courier New" panose="02070309020205020404" pitchFamily="49" charset="0"/>
               </a:rPr>
-              <a:t>": “Lkjdchbej236ecec6876edc3evqwx57d2455zefdaa"</a:t>
+              <a:t>": "Lkjdchbej236ecec6876edc3evqwx57d2455zefdaa"</a:t>
             </a:r>
           </a:p>
           <a:p>
@@ -12942,11 +12942,11 @@
   <p:clrMapOvr>
     <a:masterClrMapping/>
   </p:clrMapOvr>
-  <mc:AlternateContent xmlns:mc="http://schemas.openxmlformats.org/markup-compatibility/2006">
-    <mc:Choice xmlns:p14="http://schemas.microsoft.com/office/powerpoint/2010/main" Requires="p14">
+  <mc:AlternateContent xmlns:mc="http://schemas.openxmlformats.org/markup-compatibility/2006" xmlns:p14="http://schemas.microsoft.com/office/powerpoint/2010/main">
+    <mc:Choice Requires="p14">
       <p:transition spd="slow" p14:dur="2000" advTm="320"/>
     </mc:Choice>
-    <mc:Fallback>
+    <mc:Fallback xmlns="">
       <p:transition spd="slow" advTm="320"/>
     </mc:Fallback>
   </mc:AlternateContent>
@@ -13523,11 +13523,11 @@
   <p:clrMapOvr>
     <a:masterClrMapping/>
   </p:clrMapOvr>
-  <mc:AlternateContent xmlns:mc="http://schemas.openxmlformats.org/markup-compatibility/2006">
-    <mc:Choice xmlns:p14="http://schemas.microsoft.com/office/powerpoint/2010/main" Requires="p14">
+  <mc:AlternateContent xmlns:mc="http://schemas.openxmlformats.org/markup-compatibility/2006" xmlns:p14="http://schemas.microsoft.com/office/powerpoint/2010/main">
+    <mc:Choice Requires="p14">
       <p:transition spd="slow" p14:dur="2000" advTm="15232"/>
     </mc:Choice>
-    <mc:Fallback>
+    <mc:Fallback xmlns="">
       <p:transition spd="slow" advTm="15232"/>
     </mc:Fallback>
   </mc:AlternateContent>

--- a/Doc/CK-AppIdentity.pptx
+++ b/Doc/CK-AppIdentity.pptx
@@ -5,7 +5,7 @@
     <p:sldMasterId id="2147483648" r:id="rId1"/>
   </p:sldMasterIdLst>
   <p:notesMasterIdLst>
-    <p:notesMasterId r:id="rId47"/>
+    <p:notesMasterId r:id="rId49"/>
   </p:notesMasterIdLst>
   <p:sldIdLst>
     <p:sldId id="256" r:id="rId2"/>
@@ -33,26 +33,28 @@
     <p:sldId id="279" r:id="rId24"/>
     <p:sldId id="280" r:id="rId25"/>
     <p:sldId id="282" r:id="rId26"/>
-    <p:sldId id="281" r:id="rId27"/>
-    <p:sldId id="288" r:id="rId28"/>
-    <p:sldId id="283" r:id="rId29"/>
-    <p:sldId id="304" r:id="rId30"/>
-    <p:sldId id="284" r:id="rId31"/>
-    <p:sldId id="285" r:id="rId32"/>
-    <p:sldId id="286" r:id="rId33"/>
-    <p:sldId id="287" r:id="rId34"/>
-    <p:sldId id="289" r:id="rId35"/>
-    <p:sldId id="290" r:id="rId36"/>
-    <p:sldId id="297" r:id="rId37"/>
-    <p:sldId id="298" r:id="rId38"/>
-    <p:sldId id="299" r:id="rId39"/>
-    <p:sldId id="300" r:id="rId40"/>
-    <p:sldId id="301" r:id="rId41"/>
-    <p:sldId id="302" r:id="rId42"/>
-    <p:sldId id="291" r:id="rId43"/>
-    <p:sldId id="292" r:id="rId44"/>
-    <p:sldId id="294" r:id="rId45"/>
-    <p:sldId id="293" r:id="rId46"/>
+    <p:sldId id="305" r:id="rId27"/>
+    <p:sldId id="281" r:id="rId28"/>
+    <p:sldId id="288" r:id="rId29"/>
+    <p:sldId id="306" r:id="rId30"/>
+    <p:sldId id="283" r:id="rId31"/>
+    <p:sldId id="304" r:id="rId32"/>
+    <p:sldId id="284" r:id="rId33"/>
+    <p:sldId id="285" r:id="rId34"/>
+    <p:sldId id="286" r:id="rId35"/>
+    <p:sldId id="287" r:id="rId36"/>
+    <p:sldId id="289" r:id="rId37"/>
+    <p:sldId id="290" r:id="rId38"/>
+    <p:sldId id="297" r:id="rId39"/>
+    <p:sldId id="298" r:id="rId40"/>
+    <p:sldId id="299" r:id="rId41"/>
+    <p:sldId id="300" r:id="rId42"/>
+    <p:sldId id="301" r:id="rId43"/>
+    <p:sldId id="302" r:id="rId44"/>
+    <p:sldId id="291" r:id="rId45"/>
+    <p:sldId id="292" r:id="rId46"/>
+    <p:sldId id="294" r:id="rId47"/>
+    <p:sldId id="293" r:id="rId48"/>
   </p:sldIdLst>
   <p:sldSz cx="12192000" cy="6858000"/>
   <p:notesSz cx="6858000" cy="9144000"/>
@@ -1037,7 +1039,7 @@
           <a:p>
             <a:fld id="{E05EDB92-2FE2-4164-AA27-D03258A20DF4}" type="slidenum">
               <a:rPr lang="en-US" smtClean="0"/>
-              <a:t>27</a:t>
+              <a:t>28</a:t>
             </a:fld>
             <a:endParaRPr lang="en-US"/>
           </a:p>
@@ -1143,7 +1145,7 @@
           <a:p>
             <a:fld id="{E05EDB92-2FE2-4164-AA27-D03258A20DF4}" type="slidenum">
               <a:rPr lang="en-US" smtClean="0"/>
-              <a:t>28</a:t>
+              <a:t>30</a:t>
             </a:fld>
             <a:endParaRPr lang="en-US"/>
           </a:p>
@@ -1608,7 +1610,7 @@
           <a:p>
             <a:fld id="{E05EDB92-2FE2-4164-AA27-D03258A20DF4}" type="slidenum">
               <a:rPr lang="en-US" smtClean="0"/>
-              <a:t>30</a:t>
+              <a:t>32</a:t>
             </a:fld>
             <a:endParaRPr lang="en-US"/>
           </a:p>
@@ -1813,7 +1815,7 @@
           <a:p>
             <a:fld id="{E05EDB92-2FE2-4164-AA27-D03258A20DF4}" type="slidenum">
               <a:rPr lang="en-US" smtClean="0"/>
-              <a:t>31</a:t>
+              <a:t>33</a:t>
             </a:fld>
             <a:endParaRPr lang="en-US"/>
           </a:p>
@@ -1897,7 +1899,7 @@
           <a:p>
             <a:fld id="{E05EDB92-2FE2-4164-AA27-D03258A20DF4}" type="slidenum">
               <a:rPr lang="en-US" smtClean="0"/>
-              <a:t>33</a:t>
+              <a:t>35</a:t>
             </a:fld>
             <a:endParaRPr lang="en-US"/>
           </a:p>
@@ -14748,6 +14750,115 @@
           <p:cNvPr id="2" name="Title 1">
             <a:extLst>
               <a:ext uri="{FF2B5EF4-FFF2-40B4-BE49-F238E27FC236}">
+                <a16:creationId xmlns:a16="http://schemas.microsoft.com/office/drawing/2014/main" id="{5EBCFA60-C87B-4FE3-EF05-A4AD08BA5E70}"/>
+              </a:ext>
+            </a:extLst>
+          </p:cNvPr>
+          <p:cNvSpPr>
+            <a:spLocks noGrp="1"/>
+          </p:cNvSpPr>
+          <p:nvPr>
+            <p:ph type="title"/>
+          </p:nvPr>
+        </p:nvSpPr>
+        <p:spPr/>
+        <p:txBody>
+          <a:bodyPr/>
+          <a:lstStyle/>
+          <a:p>
+            <a:r>
+              <a:rPr lang="en-US" dirty="0" err="1"/>
+              <a:t>TransportManagerFeature</a:t>
+            </a:r>
+            <a:endParaRPr lang="en-US" dirty="0"/>
+          </a:p>
+        </p:txBody>
+      </p:sp>
+      <p:sp>
+        <p:nvSpPr>
+          <p:cNvPr id="3" name="Content Placeholder 2">
+            <a:extLst>
+              <a:ext uri="{FF2B5EF4-FFF2-40B4-BE49-F238E27FC236}">
+                <a16:creationId xmlns:a16="http://schemas.microsoft.com/office/drawing/2014/main" id="{A66F53C4-7018-24F4-0D95-F239C1AB727A}"/>
+              </a:ext>
+            </a:extLst>
+          </p:cNvPr>
+          <p:cNvSpPr>
+            <a:spLocks noGrp="1"/>
+          </p:cNvSpPr>
+          <p:nvPr>
+            <p:ph idx="1"/>
+          </p:nvPr>
+        </p:nvSpPr>
+        <p:spPr/>
+        <p:txBody>
+          <a:bodyPr/>
+          <a:lstStyle/>
+          <a:p>
+            <a:r>
+              <a:rPr lang="en-US" dirty="0"/>
+              <a:t>Available on the root </a:t>
+            </a:r>
+            <a:r>
+              <a:rPr lang="en-US" dirty="0" err="1"/>
+              <a:t>ApplicationIdentityService</a:t>
+            </a:r>
+            <a:r>
+              <a:rPr lang="en-US" dirty="0"/>
+              <a:t>.</a:t>
+            </a:r>
+          </a:p>
+          <a:p>
+            <a:r>
+              <a:rPr lang="en-US" dirty="0"/>
+              <a:t>Centralizes transport events for all remote’s </a:t>
+            </a:r>
+            <a:r>
+              <a:rPr lang="en-US" dirty="0" err="1"/>
+              <a:t>TransportFeatures</a:t>
+            </a:r>
+            <a:r>
+              <a:rPr lang="en-US" dirty="0"/>
+              <a:t>.</a:t>
+            </a:r>
+          </a:p>
+        </p:txBody>
+      </p:sp>
+    </p:spTree>
+    <p:extLst>
+      <p:ext uri="{BB962C8B-B14F-4D97-AF65-F5344CB8AC3E}">
+        <p14:creationId xmlns:p14="http://schemas.microsoft.com/office/powerpoint/2010/main" val="1878279292"/>
+      </p:ext>
+    </p:extLst>
+  </p:cSld>
+  <p:clrMapOvr>
+    <a:masterClrMapping/>
+  </p:clrMapOvr>
+</p:sld>
+</file>
+
+<file path=ppt/slides/slide27.xml><?xml version="1.0" encoding="utf-8"?>
+<p:sld xmlns:a="http://schemas.openxmlformats.org/drawingml/2006/main" xmlns:r="http://schemas.openxmlformats.org/officeDocument/2006/relationships" xmlns:p="http://schemas.openxmlformats.org/presentationml/2006/main">
+  <p:cSld>
+    <p:spTree>
+      <p:nvGrpSpPr>
+        <p:cNvPr id="1" name=""/>
+        <p:cNvGrpSpPr/>
+        <p:nvPr/>
+      </p:nvGrpSpPr>
+      <p:grpSpPr>
+        <a:xfrm>
+          <a:off x="0" y="0"/>
+          <a:ext cx="0" cy="0"/>
+          <a:chOff x="0" y="0"/>
+          <a:chExt cx="0" cy="0"/>
+        </a:xfrm>
+      </p:grpSpPr>
+      <p:sp>
+        <p:nvSpPr>
+          <p:cNvPr id="2" name="Title 1">
+            <a:extLst>
+              <a:ext uri="{FF2B5EF4-FFF2-40B4-BE49-F238E27FC236}">
                 <a16:creationId xmlns:a16="http://schemas.microsoft.com/office/drawing/2014/main" id="{AB1D9BD9-E7B8-0308-F846-C5AE6E739C5F}"/>
               </a:ext>
             </a:extLst>
@@ -15020,7 +15131,7 @@
 </p:sld>
 </file>
 
-<file path=ppt/slides/slide27.xml><?xml version="1.0" encoding="utf-8"?>
+<file path=ppt/slides/slide28.xml><?xml version="1.0" encoding="utf-8"?>
 <p:sld xmlns:a="http://schemas.openxmlformats.org/drawingml/2006/main" xmlns:r="http://schemas.openxmlformats.org/officeDocument/2006/relationships" xmlns:p="http://schemas.openxmlformats.org/presentationml/2006/main">
   <p:cSld>
     <p:bg>
@@ -15352,175 +15463,6 @@
 </p:sld>
 </file>
 
-<file path=ppt/slides/slide28.xml><?xml version="1.0" encoding="utf-8"?>
-<p:sld xmlns:a="http://schemas.openxmlformats.org/drawingml/2006/main" xmlns:r="http://schemas.openxmlformats.org/officeDocument/2006/relationships" xmlns:p="http://schemas.openxmlformats.org/presentationml/2006/main">
-  <p:cSld>
-    <p:spTree>
-      <p:nvGrpSpPr>
-        <p:cNvPr id="1" name=""/>
-        <p:cNvGrpSpPr/>
-        <p:nvPr/>
-      </p:nvGrpSpPr>
-      <p:grpSpPr>
-        <a:xfrm>
-          <a:off x="0" y="0"/>
-          <a:ext cx="0" cy="0"/>
-          <a:chOff x="0" y="0"/>
-          <a:chExt cx="0" cy="0"/>
-        </a:xfrm>
-      </p:grpSpPr>
-      <p:sp>
-        <p:nvSpPr>
-          <p:cNvPr id="2" name="Title 1">
-            <a:extLst>
-              <a:ext uri="{FF2B5EF4-FFF2-40B4-BE49-F238E27FC236}">
-                <a16:creationId xmlns:a16="http://schemas.microsoft.com/office/drawing/2014/main" id="{E28F16C2-5FE3-B18B-1F5B-429CD7308A94}"/>
-              </a:ext>
-            </a:extLst>
-          </p:cNvPr>
-          <p:cNvSpPr>
-            <a:spLocks noGrp="1"/>
-          </p:cNvSpPr>
-          <p:nvPr>
-            <p:ph type="title"/>
-          </p:nvPr>
-        </p:nvSpPr>
-        <p:spPr/>
-        <p:txBody>
-          <a:bodyPr/>
-          <a:lstStyle/>
-          <a:p>
-            <a:r>
-              <a:rPr lang="en-US" dirty="0"/>
-              <a:t>The Channels</a:t>
-            </a:r>
-          </a:p>
-        </p:txBody>
-      </p:sp>
-      <p:sp>
-        <p:nvSpPr>
-          <p:cNvPr id="3" name="Content Placeholder 2">
-            <a:extLst>
-              <a:ext uri="{FF2B5EF4-FFF2-40B4-BE49-F238E27FC236}">
-                <a16:creationId xmlns:a16="http://schemas.microsoft.com/office/drawing/2014/main" id="{1819622E-A74C-BCB9-B3FA-CB06EC5A3192}"/>
-              </a:ext>
-            </a:extLst>
-          </p:cNvPr>
-          <p:cNvSpPr>
-            <a:spLocks noGrp="1"/>
-          </p:cNvSpPr>
-          <p:nvPr>
-            <p:ph idx="1"/>
-          </p:nvPr>
-        </p:nvSpPr>
-        <p:spPr>
-          <a:xfrm>
-            <a:off x="838199" y="1825625"/>
-            <a:ext cx="10732477" cy="4351338"/>
-          </a:xfrm>
-        </p:spPr>
-        <p:txBody>
-          <a:bodyPr/>
-          <a:lstStyle/>
-          <a:p>
-            <a:r>
-              <a:rPr lang="en-US" dirty="0"/>
-              <a:t>A Remote’s </a:t>
-            </a:r>
-            <a:r>
-              <a:rPr lang="en-US" dirty="0" err="1"/>
-              <a:t>TransportFeature</a:t>
-            </a:r>
-            <a:r>
-              <a:rPr lang="en-US" dirty="0"/>
-              <a:t> handles the transport to the other side.</a:t>
-            </a:r>
-          </a:p>
-          <a:p>
-            <a:pPr lvl="1"/>
-            <a:r>
-              <a:rPr lang="en-US" dirty="0"/>
-              <a:t>Listener vs. Sender is automatically handled based on the configuration.</a:t>
-            </a:r>
-          </a:p>
-          <a:p>
-            <a:pPr lvl="1"/>
-            <a:r>
-              <a:rPr lang="en-US" dirty="0"/>
-              <a:t>The transport technology can be specified. The default is “</a:t>
-            </a:r>
-            <a:r>
-              <a:rPr lang="en-US" dirty="0" err="1"/>
-              <a:t>tcp</a:t>
-            </a:r>
-            <a:r>
-              <a:rPr lang="en-US" dirty="0"/>
-              <a:t>”.</a:t>
-            </a:r>
-          </a:p>
-          <a:p>
-            <a:r>
-              <a:rPr lang="en-US" dirty="0"/>
-              <a:t>The </a:t>
-            </a:r>
-            <a:r>
-              <a:rPr lang="en-US" dirty="0" err="1"/>
-              <a:t>TransportFeatures</a:t>
-            </a:r>
-            <a:r>
-              <a:rPr lang="en-US" dirty="0"/>
-              <a:t> exposes the properties relevant to the communication but is not itself in charge of exchanging data.</a:t>
-            </a:r>
-          </a:p>
-          <a:p>
-            <a:r>
-              <a:rPr lang="en-US" dirty="0"/>
-              <a:t>Channels are Features that implements a protocol and exposes it to the developer.</a:t>
-            </a:r>
-          </a:p>
-          <a:p>
-            <a:r>
-              <a:rPr lang="en-US" dirty="0"/>
-              <a:t>Channels implementation provides:</a:t>
-            </a:r>
-          </a:p>
-          <a:p>
-            <a:pPr lvl="1"/>
-            <a:r>
-              <a:rPr lang="en-US" dirty="0"/>
-              <a:t>A Protocol that can be in multiple versions.</a:t>
-            </a:r>
-          </a:p>
-          <a:p>
-            <a:pPr lvl="1"/>
-            <a:r>
-              <a:rPr lang="en-US" dirty="0"/>
-              <a:t>A way to build and send, receive and parse </a:t>
-            </a:r>
-            <a:r>
-              <a:rPr lang="en-US" dirty="0" err="1"/>
-              <a:t>TransportMessage</a:t>
-            </a:r>
-            <a:r>
-              <a:rPr lang="en-US" dirty="0"/>
-              <a:t> objects.</a:t>
-            </a:r>
-          </a:p>
-        </p:txBody>
-      </p:sp>
-    </p:spTree>
-    <p:extLst>
-      <p:ext uri="{BB962C8B-B14F-4D97-AF65-F5344CB8AC3E}">
-        <p14:creationId xmlns:p14="http://schemas.microsoft.com/office/powerpoint/2010/main" val="857479250"/>
-      </p:ext>
-    </p:extLst>
-  </p:cSld>
-  <p:clrMapOvr>
-    <a:masterClrMapping/>
-  </p:clrMapOvr>
-</p:sld>
-</file>
-
 <file path=ppt/slides/slide29.xml><?xml version="1.0" encoding="utf-8"?>
 <p:sld xmlns:a="http://schemas.openxmlformats.org/drawingml/2006/main" xmlns:r="http://schemas.openxmlformats.org/officeDocument/2006/relationships" xmlns:p="http://schemas.openxmlformats.org/presentationml/2006/main">
   <p:cSld>
@@ -15540,61 +15482,162 @@
       </p:grpSpPr>
       <p:sp>
         <p:nvSpPr>
-          <p:cNvPr id="2" name="Title 1">
+          <p:cNvPr id="4" name="TextBox 3">
             <a:extLst>
               <a:ext uri="{FF2B5EF4-FFF2-40B4-BE49-F238E27FC236}">
-                <a16:creationId xmlns:a16="http://schemas.microsoft.com/office/drawing/2014/main" id="{2ADDEB0D-75FE-A9E7-AE5D-1A00BE2CB4EF}"/>
+                <a16:creationId xmlns:a16="http://schemas.microsoft.com/office/drawing/2014/main" id="{25EFDEFC-B78E-174F-345D-9ADFB3BE02CE}"/>
               </a:ext>
             </a:extLst>
           </p:cNvPr>
-          <p:cNvSpPr>
-            <a:spLocks noGrp="1"/>
-          </p:cNvSpPr>
-          <p:nvPr>
-            <p:ph type="title"/>
-          </p:nvPr>
+          <p:cNvSpPr txBox="1"/>
+          <p:nvPr/>
         </p:nvSpPr>
-        <p:spPr/>
+        <p:spPr>
+          <a:xfrm>
+            <a:off x="409904" y="441435"/>
+            <a:ext cx="932115" cy="369332"/>
+          </a:xfrm>
+          <a:prstGeom prst="rect">
+            <a:avLst/>
+          </a:prstGeom>
+          <a:noFill/>
+        </p:spPr>
         <p:txBody>
-          <a:bodyPr/>
+          <a:bodyPr wrap="none" rtlCol="0">
+            <a:spAutoFit/>
+          </a:bodyPr>
           <a:lstStyle/>
           <a:p>
             <a:r>
               <a:rPr lang="en-US" dirty="0"/>
-              <a:t>UNSTABLE REMAINDER</a:t>
+              <a:t>Initiator</a:t>
             </a:r>
           </a:p>
         </p:txBody>
       </p:sp>
       <p:sp>
         <p:nvSpPr>
-          <p:cNvPr id="3" name="Content Placeholder 2">
+          <p:cNvPr id="5" name="TextBox 4">
             <a:extLst>
               <a:ext uri="{FF2B5EF4-FFF2-40B4-BE49-F238E27FC236}">
-                <a16:creationId xmlns:a16="http://schemas.microsoft.com/office/drawing/2014/main" id="{69BD3F96-4E3A-A64D-A143-5E0F643AB7C5}"/>
+                <a16:creationId xmlns:a16="http://schemas.microsoft.com/office/drawing/2014/main" id="{055BE63A-E765-9A3B-B420-E1D43349F6BD}"/>
               </a:ext>
             </a:extLst>
           </p:cNvPr>
-          <p:cNvSpPr>
-            <a:spLocks noGrp="1"/>
-          </p:cNvSpPr>
-          <p:nvPr>
-            <p:ph idx="1"/>
-          </p:nvPr>
+          <p:cNvSpPr txBox="1"/>
+          <p:nvPr/>
         </p:nvSpPr>
-        <p:spPr/>
+        <p:spPr>
+          <a:xfrm>
+            <a:off x="4939862" y="302935"/>
+            <a:ext cx="3419206" cy="646331"/>
+          </a:xfrm>
+          <a:prstGeom prst="rect">
+            <a:avLst/>
+          </a:prstGeom>
+          <a:noFill/>
+        </p:spPr>
         <p:txBody>
-          <a:bodyPr/>
+          <a:bodyPr wrap="none" rtlCol="0">
+            <a:spAutoFit/>
+          </a:bodyPr>
           <a:lstStyle/>
           <a:p>
-            <a:endParaRPr lang="en-US"/>
+            <a:r>
+              <a:rPr lang="en-US" dirty="0" err="1"/>
+              <a:t>InitialMessage</a:t>
+            </a:r>
+            <a:br>
+              <a:rPr lang="en-US" dirty="0"/>
+            </a:br>
+            <a:r>
+              <a:rPr lang="en-US" dirty="0"/>
+              <a:t>nonce, now, identities/signatures</a:t>
+            </a:r>
+          </a:p>
+        </p:txBody>
+      </p:sp>
+      <p:sp>
+        <p:nvSpPr>
+          <p:cNvPr id="6" name="TextBox 5">
+            <a:extLst>
+              <a:ext uri="{FF2B5EF4-FFF2-40B4-BE49-F238E27FC236}">
+                <a16:creationId xmlns:a16="http://schemas.microsoft.com/office/drawing/2014/main" id="{6355DB36-5851-93F8-DEB3-4574616C41FA}"/>
+              </a:ext>
+            </a:extLst>
+          </p:cNvPr>
+          <p:cNvSpPr txBox="1"/>
+          <p:nvPr/>
+        </p:nvSpPr>
+        <p:spPr>
+          <a:xfrm>
+            <a:off x="409904" y="1555532"/>
+            <a:ext cx="929806" cy="369332"/>
+          </a:xfrm>
+          <a:prstGeom prst="rect">
+            <a:avLst/>
+          </a:prstGeom>
+          <a:noFill/>
+        </p:spPr>
+        <p:txBody>
+          <a:bodyPr wrap="none" rtlCol="0">
+            <a:spAutoFit/>
+          </a:bodyPr>
+          <a:lstStyle/>
+          <a:p>
+            <a:r>
+              <a:rPr lang="en-US" dirty="0"/>
+              <a:t>Listener</a:t>
+            </a:r>
+          </a:p>
+        </p:txBody>
+      </p:sp>
+      <p:sp>
+        <p:nvSpPr>
+          <p:cNvPr id="7" name="TextBox 6">
+            <a:extLst>
+              <a:ext uri="{FF2B5EF4-FFF2-40B4-BE49-F238E27FC236}">
+                <a16:creationId xmlns:a16="http://schemas.microsoft.com/office/drawing/2014/main" id="{DD72CD61-B5C4-4FAA-59FA-A385567C5281}"/>
+              </a:ext>
+            </a:extLst>
+          </p:cNvPr>
+          <p:cNvSpPr txBox="1"/>
+          <p:nvPr/>
+        </p:nvSpPr>
+        <p:spPr>
+          <a:xfrm>
+            <a:off x="4939862" y="1134043"/>
+            <a:ext cx="3419206" cy="646331"/>
+          </a:xfrm>
+          <a:prstGeom prst="rect">
+            <a:avLst/>
+          </a:prstGeom>
+          <a:noFill/>
+        </p:spPr>
+        <p:txBody>
+          <a:bodyPr wrap="none" rtlCol="0">
+            <a:spAutoFit/>
+          </a:bodyPr>
+          <a:lstStyle/>
+          <a:p>
+            <a:r>
+              <a:rPr lang="en-US" dirty="0" err="1"/>
+              <a:t>InitialMessage</a:t>
+            </a:r>
+            <a:br>
+              <a:rPr lang="en-US" dirty="0"/>
+            </a:br>
+            <a:r>
+              <a:rPr lang="en-US" dirty="0"/>
+              <a:t>nonce, now, identities/signatures</a:t>
+            </a:r>
           </a:p>
         </p:txBody>
       </p:sp>
     </p:spTree>
     <p:extLst>
       <p:ext uri="{BB962C8B-B14F-4D97-AF65-F5344CB8AC3E}">
-        <p14:creationId xmlns:p14="http://schemas.microsoft.com/office/powerpoint/2010/main" val="4293717367"/>
+        <p14:creationId xmlns:p14="http://schemas.microsoft.com/office/powerpoint/2010/main" val="390213551"/>
       </p:ext>
     </p:extLst>
   </p:cSld>
@@ -15781,6 +15824,258 @@
           <p:cNvPr id="2" name="Title 1">
             <a:extLst>
               <a:ext uri="{FF2B5EF4-FFF2-40B4-BE49-F238E27FC236}">
+                <a16:creationId xmlns:a16="http://schemas.microsoft.com/office/drawing/2014/main" id="{E28F16C2-5FE3-B18B-1F5B-429CD7308A94}"/>
+              </a:ext>
+            </a:extLst>
+          </p:cNvPr>
+          <p:cNvSpPr>
+            <a:spLocks noGrp="1"/>
+          </p:cNvSpPr>
+          <p:nvPr>
+            <p:ph type="title"/>
+          </p:nvPr>
+        </p:nvSpPr>
+        <p:spPr/>
+        <p:txBody>
+          <a:bodyPr/>
+          <a:lstStyle/>
+          <a:p>
+            <a:r>
+              <a:rPr lang="en-US" dirty="0"/>
+              <a:t>The Channels</a:t>
+            </a:r>
+          </a:p>
+        </p:txBody>
+      </p:sp>
+      <p:sp>
+        <p:nvSpPr>
+          <p:cNvPr id="3" name="Content Placeholder 2">
+            <a:extLst>
+              <a:ext uri="{FF2B5EF4-FFF2-40B4-BE49-F238E27FC236}">
+                <a16:creationId xmlns:a16="http://schemas.microsoft.com/office/drawing/2014/main" id="{1819622E-A74C-BCB9-B3FA-CB06EC5A3192}"/>
+              </a:ext>
+            </a:extLst>
+          </p:cNvPr>
+          <p:cNvSpPr>
+            <a:spLocks noGrp="1"/>
+          </p:cNvSpPr>
+          <p:nvPr>
+            <p:ph idx="1"/>
+          </p:nvPr>
+        </p:nvSpPr>
+        <p:spPr>
+          <a:xfrm>
+            <a:off x="838199" y="1825625"/>
+            <a:ext cx="10732477" cy="4351338"/>
+          </a:xfrm>
+        </p:spPr>
+        <p:txBody>
+          <a:bodyPr/>
+          <a:lstStyle/>
+          <a:p>
+            <a:r>
+              <a:rPr lang="en-US" dirty="0"/>
+              <a:t>A Remote’s </a:t>
+            </a:r>
+            <a:r>
+              <a:rPr lang="en-US" dirty="0" err="1"/>
+              <a:t>TransportFeature</a:t>
+            </a:r>
+            <a:r>
+              <a:rPr lang="en-US" dirty="0"/>
+              <a:t> handles the transport to the other side.</a:t>
+            </a:r>
+          </a:p>
+          <a:p>
+            <a:pPr lvl="1"/>
+            <a:r>
+              <a:rPr lang="en-US" dirty="0"/>
+              <a:t>Listener vs. Sender is automatically handled based on the configuration.</a:t>
+            </a:r>
+          </a:p>
+          <a:p>
+            <a:pPr lvl="1"/>
+            <a:r>
+              <a:rPr lang="en-US" dirty="0"/>
+              <a:t>The transport technology can be specified. The default is “</a:t>
+            </a:r>
+            <a:r>
+              <a:rPr lang="en-US" dirty="0" err="1"/>
+              <a:t>tcp</a:t>
+            </a:r>
+            <a:r>
+              <a:rPr lang="en-US" dirty="0"/>
+              <a:t>”.</a:t>
+            </a:r>
+          </a:p>
+          <a:p>
+            <a:r>
+              <a:rPr lang="en-US" dirty="0"/>
+              <a:t>The </a:t>
+            </a:r>
+            <a:r>
+              <a:rPr lang="en-US" dirty="0" err="1"/>
+              <a:t>TransportFeatures</a:t>
+            </a:r>
+            <a:r>
+              <a:rPr lang="en-US" dirty="0"/>
+              <a:t> exposes the properties relevant to the communication but is not itself in charge of exchanging data.</a:t>
+            </a:r>
+          </a:p>
+          <a:p>
+            <a:r>
+              <a:rPr lang="en-US" dirty="0"/>
+              <a:t>Channels are Features that implements a protocol and exposes it to the developer.</a:t>
+            </a:r>
+          </a:p>
+          <a:p>
+            <a:r>
+              <a:rPr lang="en-US" dirty="0"/>
+              <a:t>Channels implementation provides:</a:t>
+            </a:r>
+          </a:p>
+          <a:p>
+            <a:pPr lvl="1"/>
+            <a:r>
+              <a:rPr lang="en-US" dirty="0"/>
+              <a:t>A Protocol that can be in multiple versions.</a:t>
+            </a:r>
+          </a:p>
+          <a:p>
+            <a:pPr lvl="1"/>
+            <a:r>
+              <a:rPr lang="en-US" dirty="0"/>
+              <a:t>A way to build and send, receive and parse </a:t>
+            </a:r>
+            <a:r>
+              <a:rPr lang="en-US" dirty="0" err="1"/>
+              <a:t>TransportMessage</a:t>
+            </a:r>
+            <a:r>
+              <a:rPr lang="en-US" dirty="0"/>
+              <a:t> objects.</a:t>
+            </a:r>
+          </a:p>
+        </p:txBody>
+      </p:sp>
+    </p:spTree>
+    <p:extLst>
+      <p:ext uri="{BB962C8B-B14F-4D97-AF65-F5344CB8AC3E}">
+        <p14:creationId xmlns:p14="http://schemas.microsoft.com/office/powerpoint/2010/main" val="857479250"/>
+      </p:ext>
+    </p:extLst>
+  </p:cSld>
+  <p:clrMapOvr>
+    <a:masterClrMapping/>
+  </p:clrMapOvr>
+</p:sld>
+</file>
+
+<file path=ppt/slides/slide31.xml><?xml version="1.0" encoding="utf-8"?>
+<p:sld xmlns:a="http://schemas.openxmlformats.org/drawingml/2006/main" xmlns:r="http://schemas.openxmlformats.org/officeDocument/2006/relationships" xmlns:p="http://schemas.openxmlformats.org/presentationml/2006/main">
+  <p:cSld>
+    <p:spTree>
+      <p:nvGrpSpPr>
+        <p:cNvPr id="1" name=""/>
+        <p:cNvGrpSpPr/>
+        <p:nvPr/>
+      </p:nvGrpSpPr>
+      <p:grpSpPr>
+        <a:xfrm>
+          <a:off x="0" y="0"/>
+          <a:ext cx="0" cy="0"/>
+          <a:chOff x="0" y="0"/>
+          <a:chExt cx="0" cy="0"/>
+        </a:xfrm>
+      </p:grpSpPr>
+      <p:sp>
+        <p:nvSpPr>
+          <p:cNvPr id="2" name="Title 1">
+            <a:extLst>
+              <a:ext uri="{FF2B5EF4-FFF2-40B4-BE49-F238E27FC236}">
+                <a16:creationId xmlns:a16="http://schemas.microsoft.com/office/drawing/2014/main" id="{2ADDEB0D-75FE-A9E7-AE5D-1A00BE2CB4EF}"/>
+              </a:ext>
+            </a:extLst>
+          </p:cNvPr>
+          <p:cNvSpPr>
+            <a:spLocks noGrp="1"/>
+          </p:cNvSpPr>
+          <p:nvPr>
+            <p:ph type="title"/>
+          </p:nvPr>
+        </p:nvSpPr>
+        <p:spPr/>
+        <p:txBody>
+          <a:bodyPr/>
+          <a:lstStyle/>
+          <a:p>
+            <a:r>
+              <a:rPr lang="en-US" dirty="0"/>
+              <a:t>UNSTABLE REMAINDER</a:t>
+            </a:r>
+          </a:p>
+        </p:txBody>
+      </p:sp>
+      <p:sp>
+        <p:nvSpPr>
+          <p:cNvPr id="3" name="Content Placeholder 2">
+            <a:extLst>
+              <a:ext uri="{FF2B5EF4-FFF2-40B4-BE49-F238E27FC236}">
+                <a16:creationId xmlns:a16="http://schemas.microsoft.com/office/drawing/2014/main" id="{69BD3F96-4E3A-A64D-A143-5E0F643AB7C5}"/>
+              </a:ext>
+            </a:extLst>
+          </p:cNvPr>
+          <p:cNvSpPr>
+            <a:spLocks noGrp="1"/>
+          </p:cNvSpPr>
+          <p:nvPr>
+            <p:ph idx="1"/>
+          </p:nvPr>
+        </p:nvSpPr>
+        <p:spPr/>
+        <p:txBody>
+          <a:bodyPr/>
+          <a:lstStyle/>
+          <a:p>
+            <a:endParaRPr lang="en-US"/>
+          </a:p>
+        </p:txBody>
+      </p:sp>
+    </p:spTree>
+    <p:extLst>
+      <p:ext uri="{BB962C8B-B14F-4D97-AF65-F5344CB8AC3E}">
+        <p14:creationId xmlns:p14="http://schemas.microsoft.com/office/powerpoint/2010/main" val="4293717367"/>
+      </p:ext>
+    </p:extLst>
+  </p:cSld>
+  <p:clrMapOvr>
+    <a:masterClrMapping/>
+  </p:clrMapOvr>
+</p:sld>
+</file>
+
+<file path=ppt/slides/slide32.xml><?xml version="1.0" encoding="utf-8"?>
+<p:sld xmlns:a="http://schemas.openxmlformats.org/drawingml/2006/main" xmlns:r="http://schemas.openxmlformats.org/officeDocument/2006/relationships" xmlns:p="http://schemas.openxmlformats.org/presentationml/2006/main">
+  <p:cSld>
+    <p:spTree>
+      <p:nvGrpSpPr>
+        <p:cNvPr id="1" name=""/>
+        <p:cNvGrpSpPr/>
+        <p:nvPr/>
+      </p:nvGrpSpPr>
+      <p:grpSpPr>
+        <a:xfrm>
+          <a:off x="0" y="0"/>
+          <a:ext cx="0" cy="0"/>
+          <a:chOff x="0" y="0"/>
+          <a:chExt cx="0" cy="0"/>
+        </a:xfrm>
+      </p:grpSpPr>
+      <p:sp>
+        <p:nvSpPr>
+          <p:cNvPr id="2" name="Title 1">
+            <a:extLst>
+              <a:ext uri="{FF2B5EF4-FFF2-40B4-BE49-F238E27FC236}">
                 <a16:creationId xmlns:a16="http://schemas.microsoft.com/office/drawing/2014/main" id="{D234F961-5C07-CC54-4D89-C39917A7A683}"/>
               </a:ext>
             </a:extLst>
@@ -16191,7 +16486,7 @@
 </p:sld>
 </file>
 
-<file path=ppt/slides/slide31.xml><?xml version="1.0" encoding="utf-8"?>
+<file path=ppt/slides/slide33.xml><?xml version="1.0" encoding="utf-8"?>
 <p:sld xmlns:a="http://schemas.openxmlformats.org/drawingml/2006/main" xmlns:r="http://schemas.openxmlformats.org/officeDocument/2006/relationships" xmlns:p="http://schemas.openxmlformats.org/presentationml/2006/main">
   <p:cSld>
     <p:spTree>
@@ -16336,7 +16631,7 @@
 </p:sld>
 </file>
 
-<file path=ppt/slides/slide32.xml><?xml version="1.0" encoding="utf-8"?>
+<file path=ppt/slides/slide34.xml><?xml version="1.0" encoding="utf-8"?>
 <p:sld xmlns:a="http://schemas.openxmlformats.org/drawingml/2006/main" xmlns:r="http://schemas.openxmlformats.org/officeDocument/2006/relationships" xmlns:p="http://schemas.openxmlformats.org/presentationml/2006/main">
   <p:cSld>
     <p:spTree>
@@ -17055,7 +17350,7 @@
 </p:sld>
 </file>
 
-<file path=ppt/slides/slide33.xml><?xml version="1.0" encoding="utf-8"?>
+<file path=ppt/slides/slide35.xml><?xml version="1.0" encoding="utf-8"?>
 <p:sld xmlns:a="http://schemas.openxmlformats.org/drawingml/2006/main" xmlns:r="http://schemas.openxmlformats.org/officeDocument/2006/relationships" xmlns:p="http://schemas.openxmlformats.org/presentationml/2006/main">
   <p:cSld>
     <p:spTree>
@@ -17776,7 +18071,7 @@
 </p:sld>
 </file>
 
-<file path=ppt/slides/slide34.xml><?xml version="1.0" encoding="utf-8"?>
+<file path=ppt/slides/slide36.xml><?xml version="1.0" encoding="utf-8"?>
 <p:sld xmlns:a="http://schemas.openxmlformats.org/drawingml/2006/main" xmlns:r="http://schemas.openxmlformats.org/officeDocument/2006/relationships" xmlns:p="http://schemas.openxmlformats.org/presentationml/2006/main">
   <p:cSld>
     <p:spTree>
@@ -18110,7 +18405,7 @@
 </p:sld>
 </file>
 
-<file path=ppt/slides/slide35.xml><?xml version="1.0" encoding="utf-8"?>
+<file path=ppt/slides/slide37.xml><?xml version="1.0" encoding="utf-8"?>
 <p:sld xmlns:a="http://schemas.openxmlformats.org/drawingml/2006/main" xmlns:r="http://schemas.openxmlformats.org/officeDocument/2006/relationships" xmlns:p="http://schemas.openxmlformats.org/presentationml/2006/main">
   <p:cSld>
     <p:spTree>
@@ -18341,7 +18636,7 @@
 </p:sld>
 </file>
 
-<file path=ppt/slides/slide36.xml><?xml version="1.0" encoding="utf-8"?>
+<file path=ppt/slides/slide38.xml><?xml version="1.0" encoding="utf-8"?>
 <p:sld xmlns:a="http://schemas.openxmlformats.org/drawingml/2006/main" xmlns:r="http://schemas.openxmlformats.org/officeDocument/2006/relationships" xmlns:p="http://schemas.openxmlformats.org/presentationml/2006/main">
   <p:cSld>
     <p:spTree>
@@ -18580,367 +18875,6 @@
     <p:extLst>
       <p:ext uri="{BB962C8B-B14F-4D97-AF65-F5344CB8AC3E}">
         <p14:creationId xmlns:p14="http://schemas.microsoft.com/office/powerpoint/2010/main" val="3523950704"/>
-      </p:ext>
-    </p:extLst>
-  </p:cSld>
-  <p:clrMapOvr>
-    <a:masterClrMapping/>
-  </p:clrMapOvr>
-</p:sld>
-</file>
-
-<file path=ppt/slides/slide37.xml><?xml version="1.0" encoding="utf-8"?>
-<p:sld xmlns:a="http://schemas.openxmlformats.org/drawingml/2006/main" xmlns:r="http://schemas.openxmlformats.org/officeDocument/2006/relationships" xmlns:p="http://schemas.openxmlformats.org/presentationml/2006/main">
-  <p:cSld>
-    <p:spTree>
-      <p:nvGrpSpPr>
-        <p:cNvPr id="1" name=""/>
-        <p:cNvGrpSpPr/>
-        <p:nvPr/>
-      </p:nvGrpSpPr>
-      <p:grpSpPr>
-        <a:xfrm>
-          <a:off x="0" y="0"/>
-          <a:ext cx="0" cy="0"/>
-          <a:chOff x="0" y="0"/>
-          <a:chExt cx="0" cy="0"/>
-        </a:xfrm>
-      </p:grpSpPr>
-      <p:sp>
-        <p:nvSpPr>
-          <p:cNvPr id="2" name="Title 1">
-            <a:extLst>
-              <a:ext uri="{FF2B5EF4-FFF2-40B4-BE49-F238E27FC236}">
-                <a16:creationId xmlns:a16="http://schemas.microsoft.com/office/drawing/2014/main" id="{3C7698CC-396A-8454-36E2-A15EC4E6F4C6}"/>
-              </a:ext>
-            </a:extLst>
-          </p:cNvPr>
-          <p:cNvSpPr>
-            <a:spLocks noGrp="1"/>
-          </p:cNvSpPr>
-          <p:nvPr>
-            <p:ph type="title"/>
-          </p:nvPr>
-        </p:nvSpPr>
-        <p:spPr/>
-        <p:txBody>
-          <a:bodyPr/>
-          <a:lstStyle/>
-          <a:p>
-            <a:r>
-              <a:rPr lang="en-US" dirty="0"/>
-              <a:t>User and Commands through Parties (1/2)</a:t>
-            </a:r>
-          </a:p>
-        </p:txBody>
-      </p:sp>
-      <p:sp>
-        <p:nvSpPr>
-          <p:cNvPr id="3" name="Content Placeholder 2">
-            <a:extLst>
-              <a:ext uri="{FF2B5EF4-FFF2-40B4-BE49-F238E27FC236}">
-                <a16:creationId xmlns:a16="http://schemas.microsoft.com/office/drawing/2014/main" id="{4C31C601-D62B-370A-E39E-2DF1FE415FBB}"/>
-              </a:ext>
-            </a:extLst>
-          </p:cNvPr>
-          <p:cNvSpPr>
-            <a:spLocks noGrp="1"/>
-          </p:cNvSpPr>
-          <p:nvPr>
-            <p:ph idx="1"/>
-          </p:nvPr>
-        </p:nvSpPr>
-        <p:spPr/>
-        <p:txBody>
-          <a:bodyPr>
-            <a:normAutofit/>
-          </a:bodyPr>
-          <a:lstStyle/>
-          <a:p>
-            <a:r>
-              <a:rPr lang="en-US" dirty="0"/>
-              <a:t>“$Trolley1” can send an Authenticated Command to “$Box” in the name of (Alice,3712).</a:t>
-            </a:r>
-          </a:p>
-          <a:p>
-            <a:r>
-              <a:rPr lang="en-US" dirty="0"/>
-              <a:t>“$Trolley1” must provide a proof to “$Box” that Alice is the “real” Alice (otherwise the Authenticated Command will be rejected).</a:t>
-            </a:r>
-          </a:p>
-          <a:p>
-            <a:r>
-              <a:rPr lang="en-US" dirty="0"/>
-              <a:t>“$Trolley1” must first obtain this proof by:</a:t>
-            </a:r>
-          </a:p>
-          <a:p>
-            <a:pPr lvl="1"/>
-            <a:r>
-              <a:rPr lang="en-US" dirty="0"/>
-              <a:t>Let Alice logins herself into a “Central User Directory” shared with “$Box”</a:t>
-            </a:r>
-          </a:p>
-          <a:p>
-            <a:pPr lvl="1"/>
-            <a:r>
-              <a:rPr lang="en-US" dirty="0"/>
-              <a:t>The proof must be Alice’s </a:t>
-            </a:r>
-            <a:r>
-              <a:rPr lang="en-US" dirty="0" err="1"/>
-              <a:t>IAuthenticationInfo</a:t>
-            </a:r>
-            <a:r>
-              <a:rPr lang="en-US" dirty="0"/>
-              <a:t> and a digital signature.</a:t>
-            </a:r>
-          </a:p>
-          <a:p>
-            <a:pPr lvl="1"/>
-            <a:r>
-              <a:rPr lang="en-US" dirty="0"/>
-              <a:t>“$Box” can verify that the signature has been generated by the “Central User Directory” for “$Trolley1” and that the </a:t>
-            </a:r>
-            <a:r>
-              <a:rPr lang="en-US" dirty="0" err="1"/>
-              <a:t>IAuthenticationInfo</a:t>
-            </a:r>
-            <a:r>
-              <a:rPr lang="en-US" dirty="0"/>
-              <a:t> has not been tampered.</a:t>
-            </a:r>
-          </a:p>
-        </p:txBody>
-      </p:sp>
-    </p:spTree>
-    <p:extLst>
-      <p:ext uri="{BB962C8B-B14F-4D97-AF65-F5344CB8AC3E}">
-        <p14:creationId xmlns:p14="http://schemas.microsoft.com/office/powerpoint/2010/main" val="973874681"/>
-      </p:ext>
-    </p:extLst>
-  </p:cSld>
-  <p:clrMapOvr>
-    <a:masterClrMapping/>
-  </p:clrMapOvr>
-</p:sld>
-</file>
-
-<file path=ppt/slides/slide38.xml><?xml version="1.0" encoding="utf-8"?>
-<p:sld xmlns:a="http://schemas.openxmlformats.org/drawingml/2006/main" xmlns:r="http://schemas.openxmlformats.org/officeDocument/2006/relationships" xmlns:p="http://schemas.openxmlformats.org/presentationml/2006/main">
-  <p:cSld>
-    <p:spTree>
-      <p:nvGrpSpPr>
-        <p:cNvPr id="1" name=""/>
-        <p:cNvGrpSpPr/>
-        <p:nvPr/>
-      </p:nvGrpSpPr>
-      <p:grpSpPr>
-        <a:xfrm>
-          <a:off x="0" y="0"/>
-          <a:ext cx="0" cy="0"/>
-          <a:chOff x="0" y="0"/>
-          <a:chExt cx="0" cy="0"/>
-        </a:xfrm>
-      </p:grpSpPr>
-      <p:sp>
-        <p:nvSpPr>
-          <p:cNvPr id="2" name="Title 1">
-            <a:extLst>
-              <a:ext uri="{FF2B5EF4-FFF2-40B4-BE49-F238E27FC236}">
-                <a16:creationId xmlns:a16="http://schemas.microsoft.com/office/drawing/2014/main" id="{C22CBFFE-4E3A-2E51-3538-8811F1401233}"/>
-              </a:ext>
-            </a:extLst>
-          </p:cNvPr>
-          <p:cNvSpPr>
-            <a:spLocks noGrp="1"/>
-          </p:cNvSpPr>
-          <p:nvPr>
-            <p:ph type="title"/>
-          </p:nvPr>
-        </p:nvSpPr>
-        <p:spPr/>
-        <p:txBody>
-          <a:bodyPr/>
-          <a:lstStyle/>
-          <a:p>
-            <a:r>
-              <a:rPr lang="en-US" dirty="0"/>
-              <a:t>User and Commands through Parties (2/2)	</a:t>
-            </a:r>
-          </a:p>
-        </p:txBody>
-      </p:sp>
-      <p:sp>
-        <p:nvSpPr>
-          <p:cNvPr id="3" name="Content Placeholder 2">
-            <a:extLst>
-              <a:ext uri="{FF2B5EF4-FFF2-40B4-BE49-F238E27FC236}">
-                <a16:creationId xmlns:a16="http://schemas.microsoft.com/office/drawing/2014/main" id="{D2F4F95B-3516-EFB7-2D85-F2244EED81A5}"/>
-              </a:ext>
-            </a:extLst>
-          </p:cNvPr>
-          <p:cNvSpPr>
-            <a:spLocks noGrp="1"/>
-          </p:cNvSpPr>
-          <p:nvPr>
-            <p:ph idx="1"/>
-          </p:nvPr>
-        </p:nvSpPr>
-        <p:spPr>
-          <a:xfrm>
-            <a:off x="838200" y="1825624"/>
-            <a:ext cx="10515600" cy="4667251"/>
-          </a:xfrm>
-        </p:spPr>
-        <p:txBody>
-          <a:bodyPr>
-            <a:normAutofit fontScale="92500" lnSpcReduction="20000"/>
-          </a:bodyPr>
-          <a:lstStyle/>
-          <a:p>
-            <a:r>
-              <a:rPr lang="en-US" dirty="0"/>
-              <a:t>When “$Trolley1” sends a Command in the name of Alice to “$Box”…</a:t>
-            </a:r>
-          </a:p>
-          <a:p>
-            <a:pPr lvl="1"/>
-            <a:r>
-              <a:rPr lang="en-US" dirty="0"/>
-              <a:t>it also sends the proof.</a:t>
-            </a:r>
-          </a:p>
-          <a:p>
-            <a:r>
-              <a:rPr lang="en-US" dirty="0"/>
-              <a:t>“$Box” </a:t>
-            </a:r>
-            <a:r>
-              <a:rPr lang="en-US" dirty="0" err="1"/>
-              <a:t>AppIdentity’s</a:t>
-            </a:r>
-            <a:r>
-              <a:rPr lang="en-US" dirty="0"/>
-              <a:t> endpoint receives the command and the proof.</a:t>
-            </a:r>
-          </a:p>
-          <a:p>
-            <a:pPr lvl="1"/>
-            <a:r>
-              <a:rPr lang="en-US" dirty="0"/>
-              <a:t>It builds a “</a:t>
-            </a:r>
-            <a:r>
-              <a:rPr lang="en-US" dirty="0" err="1"/>
-              <a:t>ScopedData</a:t>
-            </a:r>
-            <a:r>
-              <a:rPr lang="en-US" dirty="0"/>
-              <a:t>” with the proof and the fact that it is “$Trolley1” that sent the command.</a:t>
-            </a:r>
-          </a:p>
-          <a:p>
-            <a:pPr lvl="1"/>
-            <a:r>
-              <a:rPr lang="en-US" dirty="0"/>
-              <a:t>Its Endpoint is configured to resolve the </a:t>
-            </a:r>
-            <a:r>
-              <a:rPr lang="en-US" dirty="0" err="1"/>
-              <a:t>IAuthenticationInfo</a:t>
-            </a:r>
-            <a:r>
-              <a:rPr lang="en-US" dirty="0"/>
-              <a:t> service by:</a:t>
-            </a:r>
-          </a:p>
-          <a:p>
-            <a:pPr lvl="2"/>
-            <a:r>
-              <a:rPr lang="en-US" dirty="0"/>
-              <a:t>Accessing the </a:t>
-            </a:r>
-            <a:r>
-              <a:rPr lang="en-US" dirty="0" err="1"/>
-              <a:t>ScopedData’s</a:t>
-            </a:r>
-            <a:r>
-              <a:rPr lang="en-US" dirty="0"/>
-              <a:t> proof and sender.</a:t>
-            </a:r>
-          </a:p>
-          <a:p>
-            <a:pPr lvl="2"/>
-            <a:r>
-              <a:rPr lang="en-US" dirty="0"/>
-              <a:t>Verifying the signature and on success, returns the </a:t>
-            </a:r>
-            <a:r>
-              <a:rPr lang="en-US" dirty="0" err="1"/>
-              <a:t>IAuthenticationInfo</a:t>
-            </a:r>
-            <a:r>
-              <a:rPr lang="en-US" dirty="0"/>
-              <a:t>.</a:t>
-            </a:r>
-          </a:p>
-          <a:p>
-            <a:r>
-              <a:rPr lang="en-US" dirty="0"/>
-              <a:t>“$Box” validates and executes the command</a:t>
-            </a:r>
-          </a:p>
-          <a:p>
-            <a:pPr lvl="1"/>
-            <a:r>
-              <a:rPr lang="en-US" dirty="0"/>
-              <a:t>Commands are executed in the background by runners in a scoped service container parametrized with the </a:t>
-            </a:r>
-            <a:r>
-              <a:rPr lang="en-US" dirty="0" err="1"/>
-              <a:t>ScopedData</a:t>
-            </a:r>
-            <a:r>
-              <a:rPr lang="en-US" dirty="0"/>
-              <a:t>.</a:t>
-            </a:r>
-          </a:p>
-          <a:p>
-            <a:pPr lvl="1"/>
-            <a:r>
-              <a:rPr lang="en-US" dirty="0"/>
-              <a:t>If any service involved in the validation or execution of the command requires the </a:t>
-            </a:r>
-            <a:r>
-              <a:rPr lang="en-US" dirty="0" err="1"/>
-              <a:t>IAuthenticationInfo</a:t>
-            </a:r>
-            <a:r>
-              <a:rPr lang="en-US" dirty="0"/>
-              <a:t>, it is resolved.</a:t>
-            </a:r>
-          </a:p>
-          <a:p>
-            <a:pPr lvl="1"/>
-            <a:r>
-              <a:rPr lang="en-US" dirty="0"/>
-              <a:t>Command execution outcomes (Validation result, events and result) are sent back to “$Trolley1”</a:t>
-            </a:r>
-          </a:p>
-          <a:p>
-            <a:pPr lvl="1"/>
-            <a:endParaRPr lang="en-US" dirty="0"/>
-          </a:p>
-          <a:p>
-            <a:endParaRPr lang="en-US" dirty="0"/>
-          </a:p>
-        </p:txBody>
-      </p:sp>
-    </p:spTree>
-    <p:extLst>
-      <p:ext uri="{BB962C8B-B14F-4D97-AF65-F5344CB8AC3E}">
-        <p14:creationId xmlns:p14="http://schemas.microsoft.com/office/powerpoint/2010/main" val="2929531232"/>
       </p:ext>
     </p:extLst>
   </p:cSld>
@@ -18972,7 +18906,7 @@
           <p:cNvPr id="2" name="Title 1">
             <a:extLst>
               <a:ext uri="{FF2B5EF4-FFF2-40B4-BE49-F238E27FC236}">
-                <a16:creationId xmlns:a16="http://schemas.microsoft.com/office/drawing/2014/main" id="{F028D4AF-53E9-FC4C-72A8-AAC9BDAA1F0D}"/>
+                <a16:creationId xmlns:a16="http://schemas.microsoft.com/office/drawing/2014/main" id="{3C7698CC-396A-8454-36E2-A15EC4E6F4C6}"/>
               </a:ext>
             </a:extLst>
           </p:cNvPr>
@@ -18990,15 +18924,7 @@
           <a:p>
             <a:r>
               <a:rPr lang="en-US" dirty="0"/>
-              <a:t>The “</a:t>
-            </a:r>
-            <a:r>
-              <a:rPr lang="en-US" dirty="0" err="1"/>
-              <a:t>PartyAuthenticationToken</a:t>
-            </a:r>
-            <a:r>
-              <a:rPr lang="en-US" dirty="0"/>
-              <a:t>”</a:t>
+              <a:t>User and Commands through Parties (1/2)</a:t>
             </a:r>
           </a:p>
         </p:txBody>
@@ -19008,7 +18934,7 @@
           <p:cNvPr id="3" name="Content Placeholder 2">
             <a:extLst>
               <a:ext uri="{FF2B5EF4-FFF2-40B4-BE49-F238E27FC236}">
-                <a16:creationId xmlns:a16="http://schemas.microsoft.com/office/drawing/2014/main" id="{5898F5DD-D01F-FADF-46B5-1C37122F4589}"/>
+                <a16:creationId xmlns:a16="http://schemas.microsoft.com/office/drawing/2014/main" id="{4C31C601-D62B-370A-E39E-2DF1FE415FBB}"/>
               </a:ext>
             </a:extLst>
           </p:cNvPr>
@@ -19022,36 +18948,39 @@
         <p:spPr/>
         <p:txBody>
           <a:bodyPr>
-            <a:normAutofit fontScale="92500" lnSpcReduction="20000"/>
+            <a:normAutofit/>
           </a:bodyPr>
           <a:lstStyle/>
           <a:p>
             <a:r>
               <a:rPr lang="en-US" dirty="0"/>
-              <a:t>Contains at least (</a:t>
-            </a:r>
-            <a:r>
-              <a:rPr lang="en-US" dirty="0" err="1"/>
-              <a:t>OpenId</a:t>
-            </a:r>
-            <a:r>
-              <a:rPr lang="en-US" dirty="0"/>
-              <a:t> compliant)</a:t>
+              <a:t>“$Trolley1” can send an Authenticated Command to “$Box” in the name of (Alice,3712).</a:t>
+            </a:r>
+          </a:p>
+          <a:p>
+            <a:r>
+              <a:rPr lang="en-US" dirty="0"/>
+              <a:t>“$Trolley1” must provide a proof to “$Box” that Alice is the “real” Alice (otherwise the Authenticated Command will be rejected).</a:t>
+            </a:r>
+          </a:p>
+          <a:p>
+            <a:r>
+              <a:rPr lang="en-US" dirty="0"/>
+              <a:t>“$Trolley1” must first obtain this proof by:</a:t>
             </a:r>
           </a:p>
           <a:p>
             <a:pPr lvl="1"/>
             <a:r>
               <a:rPr lang="en-US" dirty="0"/>
-              <a:t>The </a:t>
-            </a:r>
-            <a:r>
-              <a:rPr lang="en-US" b="1" dirty="0"/>
-              <a:t>sub</a:t>
-            </a:r>
-            <a:r>
-              <a:rPr lang="en-US" dirty="0"/>
-              <a:t>ject: the </a:t>
+              <a:t>Let Alice logins herself into a “Central User Directory” shared with “$Box”</a:t>
+            </a:r>
+          </a:p>
+          <a:p>
+            <a:pPr lvl="1"/>
+            <a:r>
+              <a:rPr lang="en-US" dirty="0"/>
+              <a:t>The proof must be Alice’s </a:t>
             </a:r>
             <a:r>
               <a:rPr lang="en-US" dirty="0" err="1"/>
@@ -19059,163 +18988,30 @@
             </a:r>
             <a:r>
               <a:rPr lang="en-US" dirty="0"/>
-              <a:t> </a:t>
-            </a:r>
-          </a:p>
-          <a:p>
-            <a:pPr lvl="2"/>
-            <a:r>
-              <a:rPr lang="en-US" dirty="0"/>
-              <a:t>with its </a:t>
+              <a:t> and a digital signature.</a:t>
+            </a:r>
+          </a:p>
+          <a:p>
+            <a:pPr lvl="1"/>
+            <a:r>
+              <a:rPr lang="en-US" dirty="0"/>
+              <a:t>“$Box” can verify that the signature has been generated by the “Central User Directory” for “$Trolley1” and that the </a:t>
             </a:r>
             <a:r>
               <a:rPr lang="en-US" dirty="0" err="1"/>
-              <a:t>CriticalExpires</a:t>
-            </a:r>
-            <a:r>
-              <a:rPr lang="en-US" dirty="0"/>
-              <a:t> and </a:t>
-            </a:r>
-            <a:r>
-              <a:rPr lang="en-US" b="1" dirty="0"/>
-              <a:t>Exp</a:t>
-            </a:r>
-            <a:r>
-              <a:rPr lang="en-US" dirty="0"/>
-              <a:t>ires dates).</a:t>
-            </a:r>
-          </a:p>
-          <a:p>
-            <a:pPr lvl="1"/>
-            <a:r>
-              <a:rPr lang="en-US" dirty="0"/>
-              <a:t>The </a:t>
-            </a:r>
-            <a:r>
-              <a:rPr lang="en-US" b="1" dirty="0"/>
-              <a:t>iss</a:t>
-            </a:r>
-            <a:r>
-              <a:rPr lang="en-US" dirty="0"/>
-              <a:t>uer: the “Central User Directory” identity full name.</a:t>
-            </a:r>
-          </a:p>
-          <a:p>
-            <a:pPr lvl="1"/>
-            <a:r>
-              <a:rPr lang="en-US" b="1" dirty="0"/>
-              <a:t>alg</a:t>
-            </a:r>
-            <a:r>
-              <a:rPr lang="en-US" dirty="0"/>
-              <a:t>orithm and key size should be decided and fixed (best practice – may be overridden later).</a:t>
-            </a:r>
-          </a:p>
-          <a:p>
-            <a:r>
-              <a:rPr lang="en-US" dirty="0"/>
-              <a:t>Options (more </a:t>
-            </a:r>
-            <a:r>
-              <a:rPr lang="en-US" dirty="0" err="1"/>
-              <a:t>Oauth</a:t>
-            </a:r>
-            <a:r>
-              <a:rPr lang="en-US" dirty="0"/>
-              <a:t> than </a:t>
-            </a:r>
-            <a:r>
-              <a:rPr lang="en-US" dirty="0" err="1"/>
-              <a:t>OpenId</a:t>
-            </a:r>
-            <a:r>
-              <a:rPr lang="en-US" dirty="0"/>
-              <a:t>)</a:t>
-            </a:r>
-          </a:p>
-          <a:p>
-            <a:pPr lvl="1"/>
-            <a:r>
-              <a:rPr lang="en-US" dirty="0"/>
-              <a:t>The </a:t>
-            </a:r>
-            <a:r>
-              <a:rPr lang="en-US" b="1" dirty="0"/>
-              <a:t>aud</a:t>
-            </a:r>
-            <a:r>
-              <a:rPr lang="en-US" dirty="0"/>
-              <a:t>ience: the “$Box” identity full name.</a:t>
-            </a:r>
-          </a:p>
-          <a:p>
-            <a:pPr lvl="1"/>
-            <a:r>
-              <a:rPr lang="en-US" dirty="0"/>
-              <a:t>“client” or “origin”: the “$Trolley1” identity full name to which the token has been delivered.</a:t>
-            </a:r>
-          </a:p>
-          <a:p>
-            <a:r>
-              <a:rPr lang="en-US" dirty="0"/>
-              <a:t>Open questions</a:t>
-            </a:r>
-          </a:p>
-          <a:p>
-            <a:pPr lvl="1"/>
-            <a:r>
-              <a:rPr lang="en-US" dirty="0"/>
-              <a:t>“issued at” (</a:t>
-            </a:r>
-            <a:r>
-              <a:rPr lang="en-US" b="1" dirty="0" err="1"/>
-              <a:t>iat</a:t>
-            </a:r>
-            <a:r>
-              <a:rPr lang="en-US" dirty="0"/>
-              <a:t>).</a:t>
-            </a:r>
-          </a:p>
-          <a:p>
-            <a:pPr lvl="1"/>
-            <a:r>
-              <a:rPr lang="en-US" dirty="0"/>
-              <a:t>“not before” (</a:t>
-            </a:r>
-            <a:r>
-              <a:rPr lang="en-US" b="1" dirty="0" err="1"/>
-              <a:t>nbf</a:t>
-            </a:r>
-            <a:r>
-              <a:rPr lang="en-US" dirty="0"/>
-              <a:t>).</a:t>
-            </a:r>
-          </a:p>
-          <a:p>
-            <a:pPr lvl="1"/>
-            <a:r>
-              <a:rPr lang="en-US" dirty="0"/>
-              <a:t>Key identifier (</a:t>
-            </a:r>
-            <a:r>
-              <a:rPr lang="en-US" b="1" dirty="0"/>
-              <a:t>kid</a:t>
-            </a:r>
-            <a:r>
-              <a:rPr lang="en-US" dirty="0"/>
-              <a:t>) or not.</a:t>
-            </a:r>
-          </a:p>
-          <a:p>
-            <a:pPr lvl="1"/>
-            <a:endParaRPr lang="en-US" dirty="0"/>
+              <a:t>IAuthenticationInfo</a:t>
+            </a:r>
+            <a:r>
+              <a:rPr lang="en-US" dirty="0"/>
+              <a:t> has not been tampered.</a:t>
+            </a:r>
           </a:p>
         </p:txBody>
       </p:sp>
     </p:spTree>
     <p:extLst>
       <p:ext uri="{BB962C8B-B14F-4D97-AF65-F5344CB8AC3E}">
-        <p14:creationId xmlns:p14="http://schemas.microsoft.com/office/powerpoint/2010/main" val="2057756364"/>
+        <p14:creationId xmlns:p14="http://schemas.microsoft.com/office/powerpoint/2010/main" val="973874681"/>
       </p:ext>
     </p:extLst>
   </p:cSld>
@@ -19443,6 +19239,505 @@
           <p:cNvPr id="2" name="Title 1">
             <a:extLst>
               <a:ext uri="{FF2B5EF4-FFF2-40B4-BE49-F238E27FC236}">
+                <a16:creationId xmlns:a16="http://schemas.microsoft.com/office/drawing/2014/main" id="{C22CBFFE-4E3A-2E51-3538-8811F1401233}"/>
+              </a:ext>
+            </a:extLst>
+          </p:cNvPr>
+          <p:cNvSpPr>
+            <a:spLocks noGrp="1"/>
+          </p:cNvSpPr>
+          <p:nvPr>
+            <p:ph type="title"/>
+          </p:nvPr>
+        </p:nvSpPr>
+        <p:spPr/>
+        <p:txBody>
+          <a:bodyPr/>
+          <a:lstStyle/>
+          <a:p>
+            <a:r>
+              <a:rPr lang="en-US" dirty="0"/>
+              <a:t>User and Commands through Parties (2/2)	</a:t>
+            </a:r>
+          </a:p>
+        </p:txBody>
+      </p:sp>
+      <p:sp>
+        <p:nvSpPr>
+          <p:cNvPr id="3" name="Content Placeholder 2">
+            <a:extLst>
+              <a:ext uri="{FF2B5EF4-FFF2-40B4-BE49-F238E27FC236}">
+                <a16:creationId xmlns:a16="http://schemas.microsoft.com/office/drawing/2014/main" id="{D2F4F95B-3516-EFB7-2D85-F2244EED81A5}"/>
+              </a:ext>
+            </a:extLst>
+          </p:cNvPr>
+          <p:cNvSpPr>
+            <a:spLocks noGrp="1"/>
+          </p:cNvSpPr>
+          <p:nvPr>
+            <p:ph idx="1"/>
+          </p:nvPr>
+        </p:nvSpPr>
+        <p:spPr>
+          <a:xfrm>
+            <a:off x="838200" y="1825624"/>
+            <a:ext cx="10515600" cy="4667251"/>
+          </a:xfrm>
+        </p:spPr>
+        <p:txBody>
+          <a:bodyPr>
+            <a:normAutofit fontScale="92500" lnSpcReduction="20000"/>
+          </a:bodyPr>
+          <a:lstStyle/>
+          <a:p>
+            <a:r>
+              <a:rPr lang="en-US" dirty="0"/>
+              <a:t>When “$Trolley1” sends a Command in the name of Alice to “$Box”…</a:t>
+            </a:r>
+          </a:p>
+          <a:p>
+            <a:pPr lvl="1"/>
+            <a:r>
+              <a:rPr lang="en-US" dirty="0"/>
+              <a:t>it also sends the proof.</a:t>
+            </a:r>
+          </a:p>
+          <a:p>
+            <a:r>
+              <a:rPr lang="en-US" dirty="0"/>
+              <a:t>“$Box” </a:t>
+            </a:r>
+            <a:r>
+              <a:rPr lang="en-US" dirty="0" err="1"/>
+              <a:t>AppIdentity’s</a:t>
+            </a:r>
+            <a:r>
+              <a:rPr lang="en-US" dirty="0"/>
+              <a:t> endpoint receives the command and the proof.</a:t>
+            </a:r>
+          </a:p>
+          <a:p>
+            <a:pPr lvl="1"/>
+            <a:r>
+              <a:rPr lang="en-US" dirty="0"/>
+              <a:t>It builds a “</a:t>
+            </a:r>
+            <a:r>
+              <a:rPr lang="en-US" dirty="0" err="1"/>
+              <a:t>ScopedData</a:t>
+            </a:r>
+            <a:r>
+              <a:rPr lang="en-US" dirty="0"/>
+              <a:t>” with the proof and the fact that it is “$Trolley1” that sent the command.</a:t>
+            </a:r>
+          </a:p>
+          <a:p>
+            <a:pPr lvl="1"/>
+            <a:r>
+              <a:rPr lang="en-US" dirty="0"/>
+              <a:t>Its Endpoint is configured to resolve the </a:t>
+            </a:r>
+            <a:r>
+              <a:rPr lang="en-US" dirty="0" err="1"/>
+              <a:t>IAuthenticationInfo</a:t>
+            </a:r>
+            <a:r>
+              <a:rPr lang="en-US" dirty="0"/>
+              <a:t> service by:</a:t>
+            </a:r>
+          </a:p>
+          <a:p>
+            <a:pPr lvl="2"/>
+            <a:r>
+              <a:rPr lang="en-US" dirty="0"/>
+              <a:t>Accessing the </a:t>
+            </a:r>
+            <a:r>
+              <a:rPr lang="en-US" dirty="0" err="1"/>
+              <a:t>ScopedData’s</a:t>
+            </a:r>
+            <a:r>
+              <a:rPr lang="en-US" dirty="0"/>
+              <a:t> proof and sender.</a:t>
+            </a:r>
+          </a:p>
+          <a:p>
+            <a:pPr lvl="2"/>
+            <a:r>
+              <a:rPr lang="en-US" dirty="0"/>
+              <a:t>Verifying the signature and on success, returns the </a:t>
+            </a:r>
+            <a:r>
+              <a:rPr lang="en-US" dirty="0" err="1"/>
+              <a:t>IAuthenticationInfo</a:t>
+            </a:r>
+            <a:r>
+              <a:rPr lang="en-US" dirty="0"/>
+              <a:t>.</a:t>
+            </a:r>
+          </a:p>
+          <a:p>
+            <a:r>
+              <a:rPr lang="en-US" dirty="0"/>
+              <a:t>“$Box” validates and executes the command</a:t>
+            </a:r>
+          </a:p>
+          <a:p>
+            <a:pPr lvl="1"/>
+            <a:r>
+              <a:rPr lang="en-US" dirty="0"/>
+              <a:t>Commands are executed in the background by runners in a scoped service container parametrized with the </a:t>
+            </a:r>
+            <a:r>
+              <a:rPr lang="en-US" dirty="0" err="1"/>
+              <a:t>ScopedData</a:t>
+            </a:r>
+            <a:r>
+              <a:rPr lang="en-US" dirty="0"/>
+              <a:t>.</a:t>
+            </a:r>
+          </a:p>
+          <a:p>
+            <a:pPr lvl="1"/>
+            <a:r>
+              <a:rPr lang="en-US" dirty="0"/>
+              <a:t>If any service involved in the validation or execution of the command requires the </a:t>
+            </a:r>
+            <a:r>
+              <a:rPr lang="en-US" dirty="0" err="1"/>
+              <a:t>IAuthenticationInfo</a:t>
+            </a:r>
+            <a:r>
+              <a:rPr lang="en-US" dirty="0"/>
+              <a:t>, it is resolved.</a:t>
+            </a:r>
+          </a:p>
+          <a:p>
+            <a:pPr lvl="1"/>
+            <a:r>
+              <a:rPr lang="en-US" dirty="0"/>
+              <a:t>Command execution outcomes (Validation result, events and result) are sent back to “$Trolley1”</a:t>
+            </a:r>
+          </a:p>
+          <a:p>
+            <a:pPr lvl="1"/>
+            <a:endParaRPr lang="en-US" dirty="0"/>
+          </a:p>
+          <a:p>
+            <a:endParaRPr lang="en-US" dirty="0"/>
+          </a:p>
+        </p:txBody>
+      </p:sp>
+    </p:spTree>
+    <p:extLst>
+      <p:ext uri="{BB962C8B-B14F-4D97-AF65-F5344CB8AC3E}">
+        <p14:creationId xmlns:p14="http://schemas.microsoft.com/office/powerpoint/2010/main" val="2929531232"/>
+      </p:ext>
+    </p:extLst>
+  </p:cSld>
+  <p:clrMapOvr>
+    <a:masterClrMapping/>
+  </p:clrMapOvr>
+</p:sld>
+</file>
+
+<file path=ppt/slides/slide41.xml><?xml version="1.0" encoding="utf-8"?>
+<p:sld xmlns:a="http://schemas.openxmlformats.org/drawingml/2006/main" xmlns:r="http://schemas.openxmlformats.org/officeDocument/2006/relationships" xmlns:p="http://schemas.openxmlformats.org/presentationml/2006/main">
+  <p:cSld>
+    <p:spTree>
+      <p:nvGrpSpPr>
+        <p:cNvPr id="1" name=""/>
+        <p:cNvGrpSpPr/>
+        <p:nvPr/>
+      </p:nvGrpSpPr>
+      <p:grpSpPr>
+        <a:xfrm>
+          <a:off x="0" y="0"/>
+          <a:ext cx="0" cy="0"/>
+          <a:chOff x="0" y="0"/>
+          <a:chExt cx="0" cy="0"/>
+        </a:xfrm>
+      </p:grpSpPr>
+      <p:sp>
+        <p:nvSpPr>
+          <p:cNvPr id="2" name="Title 1">
+            <a:extLst>
+              <a:ext uri="{FF2B5EF4-FFF2-40B4-BE49-F238E27FC236}">
+                <a16:creationId xmlns:a16="http://schemas.microsoft.com/office/drawing/2014/main" id="{F028D4AF-53E9-FC4C-72A8-AAC9BDAA1F0D}"/>
+              </a:ext>
+            </a:extLst>
+          </p:cNvPr>
+          <p:cNvSpPr>
+            <a:spLocks noGrp="1"/>
+          </p:cNvSpPr>
+          <p:nvPr>
+            <p:ph type="title"/>
+          </p:nvPr>
+        </p:nvSpPr>
+        <p:spPr/>
+        <p:txBody>
+          <a:bodyPr/>
+          <a:lstStyle/>
+          <a:p>
+            <a:r>
+              <a:rPr lang="en-US" dirty="0"/>
+              <a:t>The “</a:t>
+            </a:r>
+            <a:r>
+              <a:rPr lang="en-US" dirty="0" err="1"/>
+              <a:t>PartyAuthenticationToken</a:t>
+            </a:r>
+            <a:r>
+              <a:rPr lang="en-US" dirty="0"/>
+              <a:t>”</a:t>
+            </a:r>
+          </a:p>
+        </p:txBody>
+      </p:sp>
+      <p:sp>
+        <p:nvSpPr>
+          <p:cNvPr id="3" name="Content Placeholder 2">
+            <a:extLst>
+              <a:ext uri="{FF2B5EF4-FFF2-40B4-BE49-F238E27FC236}">
+                <a16:creationId xmlns:a16="http://schemas.microsoft.com/office/drawing/2014/main" id="{5898F5DD-D01F-FADF-46B5-1C37122F4589}"/>
+              </a:ext>
+            </a:extLst>
+          </p:cNvPr>
+          <p:cNvSpPr>
+            <a:spLocks noGrp="1"/>
+          </p:cNvSpPr>
+          <p:nvPr>
+            <p:ph idx="1"/>
+          </p:nvPr>
+        </p:nvSpPr>
+        <p:spPr/>
+        <p:txBody>
+          <a:bodyPr>
+            <a:normAutofit fontScale="92500" lnSpcReduction="20000"/>
+          </a:bodyPr>
+          <a:lstStyle/>
+          <a:p>
+            <a:r>
+              <a:rPr lang="en-US" dirty="0"/>
+              <a:t>Contains at least (</a:t>
+            </a:r>
+            <a:r>
+              <a:rPr lang="en-US" dirty="0" err="1"/>
+              <a:t>OpenId</a:t>
+            </a:r>
+            <a:r>
+              <a:rPr lang="en-US" dirty="0"/>
+              <a:t> compliant)</a:t>
+            </a:r>
+          </a:p>
+          <a:p>
+            <a:pPr lvl="1"/>
+            <a:r>
+              <a:rPr lang="en-US" dirty="0"/>
+              <a:t>The </a:t>
+            </a:r>
+            <a:r>
+              <a:rPr lang="en-US" b="1" dirty="0"/>
+              <a:t>sub</a:t>
+            </a:r>
+            <a:r>
+              <a:rPr lang="en-US" dirty="0"/>
+              <a:t>ject: the </a:t>
+            </a:r>
+            <a:r>
+              <a:rPr lang="en-US" dirty="0" err="1"/>
+              <a:t>IAuthenticationInfo</a:t>
+            </a:r>
+            <a:r>
+              <a:rPr lang="en-US" dirty="0"/>
+              <a:t> </a:t>
+            </a:r>
+          </a:p>
+          <a:p>
+            <a:pPr lvl="2"/>
+            <a:r>
+              <a:rPr lang="en-US" dirty="0"/>
+              <a:t>with its </a:t>
+            </a:r>
+            <a:r>
+              <a:rPr lang="en-US" dirty="0" err="1"/>
+              <a:t>CriticalExpires</a:t>
+            </a:r>
+            <a:r>
+              <a:rPr lang="en-US" dirty="0"/>
+              <a:t> and </a:t>
+            </a:r>
+            <a:r>
+              <a:rPr lang="en-US" b="1" dirty="0"/>
+              <a:t>Exp</a:t>
+            </a:r>
+            <a:r>
+              <a:rPr lang="en-US" dirty="0"/>
+              <a:t>ires dates).</a:t>
+            </a:r>
+          </a:p>
+          <a:p>
+            <a:pPr lvl="1"/>
+            <a:r>
+              <a:rPr lang="en-US" dirty="0"/>
+              <a:t>The </a:t>
+            </a:r>
+            <a:r>
+              <a:rPr lang="en-US" b="1" dirty="0"/>
+              <a:t>iss</a:t>
+            </a:r>
+            <a:r>
+              <a:rPr lang="en-US" dirty="0"/>
+              <a:t>uer: the “Central User Directory” identity full name.</a:t>
+            </a:r>
+          </a:p>
+          <a:p>
+            <a:pPr lvl="1"/>
+            <a:r>
+              <a:rPr lang="en-US" b="1" dirty="0"/>
+              <a:t>alg</a:t>
+            </a:r>
+            <a:r>
+              <a:rPr lang="en-US" dirty="0"/>
+              <a:t>orithm and key size should be decided and fixed (best practice – may be overridden later).</a:t>
+            </a:r>
+          </a:p>
+          <a:p>
+            <a:r>
+              <a:rPr lang="en-US" dirty="0"/>
+              <a:t>Options (more </a:t>
+            </a:r>
+            <a:r>
+              <a:rPr lang="en-US" dirty="0" err="1"/>
+              <a:t>Oauth</a:t>
+            </a:r>
+            <a:r>
+              <a:rPr lang="en-US" dirty="0"/>
+              <a:t> than </a:t>
+            </a:r>
+            <a:r>
+              <a:rPr lang="en-US" dirty="0" err="1"/>
+              <a:t>OpenId</a:t>
+            </a:r>
+            <a:r>
+              <a:rPr lang="en-US" dirty="0"/>
+              <a:t>)</a:t>
+            </a:r>
+          </a:p>
+          <a:p>
+            <a:pPr lvl="1"/>
+            <a:r>
+              <a:rPr lang="en-US" dirty="0"/>
+              <a:t>The </a:t>
+            </a:r>
+            <a:r>
+              <a:rPr lang="en-US" b="1" dirty="0"/>
+              <a:t>aud</a:t>
+            </a:r>
+            <a:r>
+              <a:rPr lang="en-US" dirty="0"/>
+              <a:t>ience: the “$Box” identity full name.</a:t>
+            </a:r>
+          </a:p>
+          <a:p>
+            <a:pPr lvl="1"/>
+            <a:r>
+              <a:rPr lang="en-US" dirty="0"/>
+              <a:t>“client” or “origin”: the “$Trolley1” identity full name to which the token has been delivered.</a:t>
+            </a:r>
+          </a:p>
+          <a:p>
+            <a:r>
+              <a:rPr lang="en-US" dirty="0"/>
+              <a:t>Open questions</a:t>
+            </a:r>
+          </a:p>
+          <a:p>
+            <a:pPr lvl="1"/>
+            <a:r>
+              <a:rPr lang="en-US" dirty="0"/>
+              <a:t>“issued at” (</a:t>
+            </a:r>
+            <a:r>
+              <a:rPr lang="en-US" b="1" dirty="0" err="1"/>
+              <a:t>iat</a:t>
+            </a:r>
+            <a:r>
+              <a:rPr lang="en-US" dirty="0"/>
+              <a:t>).</a:t>
+            </a:r>
+          </a:p>
+          <a:p>
+            <a:pPr lvl="1"/>
+            <a:r>
+              <a:rPr lang="en-US" dirty="0"/>
+              <a:t>“not before” (</a:t>
+            </a:r>
+            <a:r>
+              <a:rPr lang="en-US" b="1" dirty="0" err="1"/>
+              <a:t>nbf</a:t>
+            </a:r>
+            <a:r>
+              <a:rPr lang="en-US" dirty="0"/>
+              <a:t>).</a:t>
+            </a:r>
+          </a:p>
+          <a:p>
+            <a:pPr lvl="1"/>
+            <a:r>
+              <a:rPr lang="en-US" dirty="0"/>
+              <a:t>Key identifier (</a:t>
+            </a:r>
+            <a:r>
+              <a:rPr lang="en-US" b="1" dirty="0"/>
+              <a:t>kid</a:t>
+            </a:r>
+            <a:r>
+              <a:rPr lang="en-US" dirty="0"/>
+              <a:t>) or not.</a:t>
+            </a:r>
+          </a:p>
+          <a:p>
+            <a:pPr lvl="1"/>
+            <a:endParaRPr lang="en-US" dirty="0"/>
+          </a:p>
+        </p:txBody>
+      </p:sp>
+    </p:spTree>
+    <p:extLst>
+      <p:ext uri="{BB962C8B-B14F-4D97-AF65-F5344CB8AC3E}">
+        <p14:creationId xmlns:p14="http://schemas.microsoft.com/office/powerpoint/2010/main" val="2057756364"/>
+      </p:ext>
+    </p:extLst>
+  </p:cSld>
+  <p:clrMapOvr>
+    <a:masterClrMapping/>
+  </p:clrMapOvr>
+</p:sld>
+</file>
+
+<file path=ppt/slides/slide42.xml><?xml version="1.0" encoding="utf-8"?>
+<p:sld xmlns:a="http://schemas.openxmlformats.org/drawingml/2006/main" xmlns:r="http://schemas.openxmlformats.org/officeDocument/2006/relationships" xmlns:p="http://schemas.openxmlformats.org/presentationml/2006/main">
+  <p:cSld>
+    <p:spTree>
+      <p:nvGrpSpPr>
+        <p:cNvPr id="1" name=""/>
+        <p:cNvGrpSpPr/>
+        <p:nvPr/>
+      </p:nvGrpSpPr>
+      <p:grpSpPr>
+        <a:xfrm>
+          <a:off x="0" y="0"/>
+          <a:ext cx="0" cy="0"/>
+          <a:chOff x="0" y="0"/>
+          <a:chExt cx="0" cy="0"/>
+        </a:xfrm>
+      </p:grpSpPr>
+      <p:sp>
+        <p:nvSpPr>
+          <p:cNvPr id="2" name="Title 1">
+            <a:extLst>
+              <a:ext uri="{FF2B5EF4-FFF2-40B4-BE49-F238E27FC236}">
                 <a16:creationId xmlns:a16="http://schemas.microsoft.com/office/drawing/2014/main" id="{7DBA6962-B8F6-250D-79FF-D57BEC59F1C8}"/>
               </a:ext>
             </a:extLst>
@@ -19792,7 +20087,7 @@
 </p:sld>
 </file>
 
-<file path=ppt/slides/slide41.xml><?xml version="1.0" encoding="utf-8"?>
+<file path=ppt/slides/slide43.xml><?xml version="1.0" encoding="utf-8"?>
 <p:sld xmlns:a="http://schemas.openxmlformats.org/drawingml/2006/main" xmlns:r="http://schemas.openxmlformats.org/officeDocument/2006/relationships" xmlns:p="http://schemas.openxmlformats.org/presentationml/2006/main">
   <p:cSld>
     <p:spTree>
@@ -19895,7 +20190,7 @@
 </p:sld>
 </file>
 
-<file path=ppt/slides/slide42.xml><?xml version="1.0" encoding="utf-8"?>
+<file path=ppt/slides/slide44.xml><?xml version="1.0" encoding="utf-8"?>
 <p:sld xmlns:a="http://schemas.openxmlformats.org/drawingml/2006/main" xmlns:r="http://schemas.openxmlformats.org/officeDocument/2006/relationships" xmlns:p="http://schemas.openxmlformats.org/presentationml/2006/main">
   <p:cSld>
     <p:spTree>
@@ -20142,7 +20437,7 @@
 </p:sld>
 </file>
 
-<file path=ppt/slides/slide43.xml><?xml version="1.0" encoding="utf-8"?>
+<file path=ppt/slides/slide45.xml><?xml version="1.0" encoding="utf-8"?>
 <p:sld xmlns:a="http://schemas.openxmlformats.org/drawingml/2006/main" xmlns:r="http://schemas.openxmlformats.org/officeDocument/2006/relationships" xmlns:p="http://schemas.openxmlformats.org/presentationml/2006/main">
   <p:cSld>
     <p:spTree>
@@ -20685,7 +20980,7 @@
 </p:sld>
 </file>
 
-<file path=ppt/slides/slide44.xml><?xml version="1.0" encoding="utf-8"?>
+<file path=ppt/slides/slide46.xml><?xml version="1.0" encoding="utf-8"?>
 <p:sld xmlns:a="http://schemas.openxmlformats.org/drawingml/2006/main" xmlns:r="http://schemas.openxmlformats.org/officeDocument/2006/relationships" xmlns:p="http://schemas.openxmlformats.org/presentationml/2006/main">
   <p:cSld>
     <p:spTree>
@@ -20887,7 +21182,7 @@
 </p:sld>
 </file>
 
-<file path=ppt/slides/slide45.xml><?xml version="1.0" encoding="utf-8"?>
+<file path=ppt/slides/slide47.xml><?xml version="1.0" encoding="utf-8"?>
 <p:sld xmlns:a="http://schemas.openxmlformats.org/drawingml/2006/main" xmlns:r="http://schemas.openxmlformats.org/officeDocument/2006/relationships" xmlns:p="http://schemas.openxmlformats.org/presentationml/2006/main">
   <p:cSld>
     <p:spTree>

--- a/Doc/CK-AppIdentity.pptx
+++ b/Doc/CK-AppIdentity.pptx
@@ -5,7 +5,7 @@
     <p:sldMasterId id="2147483648" r:id="rId1"/>
   </p:sldMasterIdLst>
   <p:notesMasterIdLst>
-    <p:notesMasterId r:id="rId49"/>
+    <p:notesMasterId r:id="rId42"/>
   </p:notesMasterIdLst>
   <p:sldIdLst>
     <p:sldId id="256" r:id="rId2"/>
@@ -36,25 +36,18 @@
     <p:sldId id="305" r:id="rId27"/>
     <p:sldId id="281" r:id="rId28"/>
     <p:sldId id="288" r:id="rId29"/>
-    <p:sldId id="306" r:id="rId30"/>
-    <p:sldId id="283" r:id="rId31"/>
-    <p:sldId id="304" r:id="rId32"/>
-    <p:sldId id="284" r:id="rId33"/>
-    <p:sldId id="285" r:id="rId34"/>
-    <p:sldId id="286" r:id="rId35"/>
-    <p:sldId id="287" r:id="rId36"/>
-    <p:sldId id="289" r:id="rId37"/>
-    <p:sldId id="290" r:id="rId38"/>
-    <p:sldId id="297" r:id="rId39"/>
-    <p:sldId id="298" r:id="rId40"/>
-    <p:sldId id="299" r:id="rId41"/>
-    <p:sldId id="300" r:id="rId42"/>
-    <p:sldId id="301" r:id="rId43"/>
-    <p:sldId id="302" r:id="rId44"/>
-    <p:sldId id="291" r:id="rId45"/>
-    <p:sldId id="292" r:id="rId46"/>
-    <p:sldId id="294" r:id="rId47"/>
-    <p:sldId id="293" r:id="rId48"/>
+    <p:sldId id="283" r:id="rId30"/>
+    <p:sldId id="284" r:id="rId31"/>
+    <p:sldId id="285" r:id="rId32"/>
+    <p:sldId id="286" r:id="rId33"/>
+    <p:sldId id="287" r:id="rId34"/>
+    <p:sldId id="289" r:id="rId35"/>
+    <p:sldId id="290" r:id="rId36"/>
+    <p:sldId id="304" r:id="rId37"/>
+    <p:sldId id="297" r:id="rId38"/>
+    <p:sldId id="298" r:id="rId39"/>
+    <p:sldId id="299" r:id="rId40"/>
+    <p:sldId id="291" r:id="rId41"/>
   </p:sldIdLst>
   <p:sldSz cx="12192000" cy="6858000"/>
   <p:notesSz cx="6858000" cy="9144000"/>
@@ -301,7 +294,7 @@
           <a:p>
             <a:fld id="{7EBA75D8-A9A5-4FAF-B563-7A079B630A7E}" type="datetimeFigureOut">
               <a:rPr lang="en-US" smtClean="0"/>
-              <a:t>7/17/2023</a:t>
+              <a:t>7/21/2023</a:t>
             </a:fld>
             <a:endParaRPr lang="en-US"/>
           </a:p>
@@ -708,6 +701,90 @@
 </p:notes>
 </file>
 
+<file path=ppt/notesSlides/notesSlide10.xml><?xml version="1.0" encoding="utf-8"?>
+<p:notes xmlns:a="http://schemas.openxmlformats.org/drawingml/2006/main" xmlns:r="http://schemas.openxmlformats.org/officeDocument/2006/relationships" xmlns:p="http://schemas.openxmlformats.org/presentationml/2006/main">
+  <p:cSld>
+    <p:spTree>
+      <p:nvGrpSpPr>
+        <p:cNvPr id="1" name=""/>
+        <p:cNvGrpSpPr/>
+        <p:nvPr/>
+      </p:nvGrpSpPr>
+      <p:grpSpPr>
+        <a:xfrm>
+          <a:off x="0" y="0"/>
+          <a:ext cx="0" cy="0"/>
+          <a:chOff x="0" y="0"/>
+          <a:chExt cx="0" cy="0"/>
+        </a:xfrm>
+      </p:grpSpPr>
+      <p:sp>
+        <p:nvSpPr>
+          <p:cNvPr id="2" name="Slide Image Placeholder 1"/>
+          <p:cNvSpPr>
+            <a:spLocks noGrp="1" noRot="1" noChangeAspect="1"/>
+          </p:cNvSpPr>
+          <p:nvPr>
+            <p:ph type="sldImg"/>
+          </p:nvPr>
+        </p:nvSpPr>
+        <p:spPr/>
+      </p:sp>
+      <p:sp>
+        <p:nvSpPr>
+          <p:cNvPr id="3" name="Notes Placeholder 2"/>
+          <p:cNvSpPr>
+            <a:spLocks noGrp="1"/>
+          </p:cNvSpPr>
+          <p:nvPr>
+            <p:ph type="body" idx="1"/>
+          </p:nvPr>
+        </p:nvSpPr>
+        <p:spPr/>
+        <p:txBody>
+          <a:bodyPr/>
+          <a:lstStyle/>
+          <a:p>
+            <a:endParaRPr lang="en-US" dirty="0"/>
+          </a:p>
+        </p:txBody>
+      </p:sp>
+      <p:sp>
+        <p:nvSpPr>
+          <p:cNvPr id="4" name="Slide Number Placeholder 3"/>
+          <p:cNvSpPr>
+            <a:spLocks noGrp="1"/>
+          </p:cNvSpPr>
+          <p:nvPr>
+            <p:ph type="sldNum" sz="quarter" idx="5"/>
+          </p:nvPr>
+        </p:nvSpPr>
+        <p:spPr/>
+        <p:txBody>
+          <a:bodyPr/>
+          <a:lstStyle/>
+          <a:p>
+            <a:fld id="{E05EDB92-2FE2-4164-AA27-D03258A20DF4}" type="slidenum">
+              <a:rPr lang="en-US" smtClean="0"/>
+              <a:t>34</a:t>
+            </a:fld>
+            <a:endParaRPr lang="en-US"/>
+          </a:p>
+        </p:txBody>
+      </p:sp>
+    </p:spTree>
+    <p:extLst>
+      <p:ext uri="{BB962C8B-B14F-4D97-AF65-F5344CB8AC3E}">
+        <p14:creationId xmlns:p14="http://schemas.microsoft.com/office/powerpoint/2010/main" val="1009023198"/>
+      </p:ext>
+    </p:extLst>
+  </p:cSld>
+  <p:clrMapOvr>
+    <a:masterClrMapping/>
+  </p:clrMapOvr>
+</p:notes>
+</file>
+
 <file path=ppt/notesSlides/notesSlide2.xml><?xml version="1.0" encoding="utf-8"?>
 <p:notes xmlns:a="http://schemas.openxmlformats.org/drawingml/2006/main" xmlns:r="http://schemas.openxmlformats.org/officeDocument/2006/relationships" xmlns:p="http://schemas.openxmlformats.org/presentationml/2006/main">
   <p:cSld>
@@ -1145,7 +1222,7 @@
           <a:p>
             <a:fld id="{E05EDB92-2FE2-4164-AA27-D03258A20DF4}" type="slidenum">
               <a:rPr lang="en-US" smtClean="0"/>
-              <a:t>30</a:t>
+              <a:t>29</a:t>
             </a:fld>
             <a:endParaRPr lang="en-US"/>
           </a:p>
@@ -1610,7 +1687,7 @@
           <a:p>
             <a:fld id="{E05EDB92-2FE2-4164-AA27-D03258A20DF4}" type="slidenum">
               <a:rPr lang="en-US" smtClean="0"/>
-              <a:t>32</a:t>
+              <a:t>30</a:t>
             </a:fld>
             <a:endParaRPr lang="en-US"/>
           </a:p>
@@ -1815,7 +1892,7 @@
           <a:p>
             <a:fld id="{E05EDB92-2FE2-4164-AA27-D03258A20DF4}" type="slidenum">
               <a:rPr lang="en-US" smtClean="0"/>
-              <a:t>33</a:t>
+              <a:t>31</a:t>
             </a:fld>
             <a:endParaRPr lang="en-US"/>
           </a:p>
@@ -1899,7 +1976,7 @@
           <a:p>
             <a:fld id="{E05EDB92-2FE2-4164-AA27-D03258A20DF4}" type="slidenum">
               <a:rPr lang="en-US" smtClean="0"/>
-              <a:t>35</a:t>
+              <a:t>33</a:t>
             </a:fld>
             <a:endParaRPr lang="en-US"/>
           </a:p>
@@ -2065,7 +2142,7 @@
           <a:p>
             <a:fld id="{7D1F2140-8D48-49AC-AD8D-683E6FF4DC34}" type="datetimeFigureOut">
               <a:rPr lang="en-US" smtClean="0"/>
-              <a:t>7/17/2023</a:t>
+              <a:t>7/21/2023</a:t>
             </a:fld>
             <a:endParaRPr lang="en-US"/>
           </a:p>
@@ -2263,7 +2340,7 @@
           <a:p>
             <a:fld id="{7D1F2140-8D48-49AC-AD8D-683E6FF4DC34}" type="datetimeFigureOut">
               <a:rPr lang="en-US" smtClean="0"/>
-              <a:t>7/17/2023</a:t>
+              <a:t>7/21/2023</a:t>
             </a:fld>
             <a:endParaRPr lang="en-US"/>
           </a:p>
@@ -2471,7 +2548,7 @@
           <a:p>
             <a:fld id="{7D1F2140-8D48-49AC-AD8D-683E6FF4DC34}" type="datetimeFigureOut">
               <a:rPr lang="en-US" smtClean="0"/>
-              <a:t>7/17/2023</a:t>
+              <a:t>7/21/2023</a:t>
             </a:fld>
             <a:endParaRPr lang="en-US"/>
           </a:p>
@@ -2669,7 +2746,7 @@
           <a:p>
             <a:fld id="{7D1F2140-8D48-49AC-AD8D-683E6FF4DC34}" type="datetimeFigureOut">
               <a:rPr lang="en-US" smtClean="0"/>
-              <a:t>7/17/2023</a:t>
+              <a:t>7/21/2023</a:t>
             </a:fld>
             <a:endParaRPr lang="en-US"/>
           </a:p>
@@ -2944,7 +3021,7 @@
           <a:p>
             <a:fld id="{7D1F2140-8D48-49AC-AD8D-683E6FF4DC34}" type="datetimeFigureOut">
               <a:rPr lang="en-US" smtClean="0"/>
-              <a:t>7/17/2023</a:t>
+              <a:t>7/21/2023</a:t>
             </a:fld>
             <a:endParaRPr lang="en-US"/>
           </a:p>
@@ -3209,7 +3286,7 @@
           <a:p>
             <a:fld id="{7D1F2140-8D48-49AC-AD8D-683E6FF4DC34}" type="datetimeFigureOut">
               <a:rPr lang="en-US" smtClean="0"/>
-              <a:t>7/17/2023</a:t>
+              <a:t>7/21/2023</a:t>
             </a:fld>
             <a:endParaRPr lang="en-US"/>
           </a:p>
@@ -3621,7 +3698,7 @@
           <a:p>
             <a:fld id="{7D1F2140-8D48-49AC-AD8D-683E6FF4DC34}" type="datetimeFigureOut">
               <a:rPr lang="en-US" smtClean="0"/>
-              <a:t>7/17/2023</a:t>
+              <a:t>7/21/2023</a:t>
             </a:fld>
             <a:endParaRPr lang="en-US"/>
           </a:p>
@@ -3762,7 +3839,7 @@
           <a:p>
             <a:fld id="{7D1F2140-8D48-49AC-AD8D-683E6FF4DC34}" type="datetimeFigureOut">
               <a:rPr lang="en-US" smtClean="0"/>
-              <a:t>7/17/2023</a:t>
+              <a:t>7/21/2023</a:t>
             </a:fld>
             <a:endParaRPr lang="en-US"/>
           </a:p>
@@ -3875,7 +3952,7 @@
           <a:p>
             <a:fld id="{7D1F2140-8D48-49AC-AD8D-683E6FF4DC34}" type="datetimeFigureOut">
               <a:rPr lang="en-US" smtClean="0"/>
-              <a:t>7/17/2023</a:t>
+              <a:t>7/21/2023</a:t>
             </a:fld>
             <a:endParaRPr lang="en-US"/>
           </a:p>
@@ -4186,7 +4263,7 @@
           <a:p>
             <a:fld id="{7D1F2140-8D48-49AC-AD8D-683E6FF4DC34}" type="datetimeFigureOut">
               <a:rPr lang="en-US" smtClean="0"/>
-              <a:t>7/17/2023</a:t>
+              <a:t>7/21/2023</a:t>
             </a:fld>
             <a:endParaRPr lang="en-US"/>
           </a:p>
@@ -4474,7 +4551,7 @@
           <a:p>
             <a:fld id="{7D1F2140-8D48-49AC-AD8D-683E6FF4DC34}" type="datetimeFigureOut">
               <a:rPr lang="en-US" smtClean="0"/>
-              <a:t>7/17/2023</a:t>
+              <a:t>7/21/2023</a:t>
             </a:fld>
             <a:endParaRPr lang="en-US"/>
           </a:p>
@@ -4715,7 +4792,7 @@
           <a:p>
             <a:fld id="{7D1F2140-8D48-49AC-AD8D-683E6FF4DC34}" type="datetimeFigureOut">
               <a:rPr lang="en-US" smtClean="0"/>
-              <a:t>7/17/2023</a:t>
+              <a:t>7/21/2023</a:t>
             </a:fld>
             <a:endParaRPr lang="en-US"/>
           </a:p>
@@ -10573,7 +10650,9 @@
         </p:nvSpPr>
         <p:spPr/>
         <p:txBody>
-          <a:bodyPr/>
+          <a:bodyPr>
+            <a:normAutofit fontScale="92500" lnSpcReduction="10000"/>
+          </a:bodyPr>
           <a:lstStyle/>
           <a:p>
             <a:r>
@@ -10584,7 +10663,7 @@
           <a:p>
             <a:r>
               <a:rPr lang="en-US" dirty="0"/>
-              <a:t>At least one X509 certificate (signing key) must be available per Party.</a:t>
+              <a:t>At least one X509 certificate (signing and certificate signing key) is automatically available per Party.</a:t>
             </a:r>
           </a:p>
           <a:p>
@@ -10616,20 +10695,71 @@
             <a:pPr lvl="1"/>
             <a:r>
               <a:rPr lang="en-US" dirty="0"/>
-              <a:t>The simplest store is a folder with folders and/or files that contain the certificate files.</a:t>
+              <a:t>The store is in “%</a:t>
+            </a:r>
+            <a:r>
+              <a:rPr lang="en-US" dirty="0" err="1"/>
+              <a:t>LocalAppData</a:t>
+            </a:r>
+            <a:r>
+              <a:rPr lang="en-US" dirty="0"/>
+              <a:t>%/CK-</a:t>
+            </a:r>
+            <a:r>
+              <a:rPr lang="en-US" dirty="0" err="1"/>
+              <a:t>AppIdentity</a:t>
+            </a:r>
+            <a:r>
+              <a:rPr lang="en-US" dirty="0"/>
+              <a:t>” and is shared by all the applications that may run on the computer.</a:t>
             </a:r>
           </a:p>
           <a:p>
             <a:pPr lvl="1"/>
             <a:r>
               <a:rPr lang="en-US" dirty="0"/>
-              <a:t>Stronger key store may be implemented later.</a:t>
-            </a:r>
-          </a:p>
-          <a:p>
-            <a:r>
-              <a:rPr lang="en-US" dirty="0"/>
-              <a:t>Any relationship between 2 parties can be protected with a dedicated pair of keys.</a:t>
+              <a:t>Private certificate are password-protected, the password is protected by the standard </a:t>
+            </a:r>
+            <a:r>
+              <a:rPr lang="en-US" dirty="0" err="1"/>
+              <a:t>IDataProtector</a:t>
+            </a:r>
+            <a:r>
+              <a:rPr lang="en-US" dirty="0"/>
+              <a:t> (</a:t>
+            </a:r>
+            <a:r>
+              <a:rPr lang="en-US" dirty="0" err="1"/>
+              <a:t>Microsoft.AspNetCore.DataProtection.Abstractions</a:t>
+            </a:r>
+            <a:r>
+              <a:rPr lang="en-US" dirty="0"/>
+              <a:t>).</a:t>
+            </a:r>
+          </a:p>
+          <a:p>
+            <a:pPr lvl="1"/>
+            <a:r>
+              <a:rPr lang="en-US" dirty="0"/>
+              <a:t>Key rolling is automatic.</a:t>
+            </a:r>
+          </a:p>
+          <a:p>
+            <a:r>
+              <a:rPr lang="en-US" dirty="0" err="1"/>
+              <a:t>KeyManagementFeature</a:t>
+            </a:r>
+            <a:r>
+              <a:rPr lang="en-US" dirty="0"/>
+              <a:t> is provided by </a:t>
+            </a:r>
+            <a:r>
+              <a:rPr lang="en-US" dirty="0" err="1"/>
+              <a:t>CK.AppIdentity.KeyManagement</a:t>
+            </a:r>
+            <a:r>
+              <a:rPr lang="en-US" dirty="0"/>
+              <a:t> package.</a:t>
             </a:r>
           </a:p>
         </p:txBody>
@@ -11849,48 +11979,12 @@
           <a:chExt cx="0" cy="0"/>
         </a:xfrm>
       </p:grpSpPr>
-      <p:sp>
-        <p:nvSpPr>
-          <p:cNvPr id="2" name="Title 1">
+      <p:pic>
+        <p:nvPicPr>
+          <p:cNvPr id="4" name="Picture 3" descr="A screenshot of a computer&#10;&#10;Description automatically generated">
             <a:extLst>
               <a:ext uri="{FF2B5EF4-FFF2-40B4-BE49-F238E27FC236}">
-                <a16:creationId xmlns:a16="http://schemas.microsoft.com/office/drawing/2014/main" id="{A798245F-DD26-ADCC-6CD2-D5ED5F5598A9}"/>
-              </a:ext>
-            </a:extLst>
-          </p:cNvPr>
-          <p:cNvSpPr>
-            <a:spLocks noGrp="1"/>
-          </p:cNvSpPr>
-          <p:nvPr>
-            <p:ph type="title"/>
-          </p:nvPr>
-        </p:nvSpPr>
-        <p:spPr>
-          <a:xfrm>
-            <a:off x="317385" y="117700"/>
-            <a:ext cx="3022899" cy="1689586"/>
-          </a:xfrm>
-        </p:spPr>
-        <p:txBody>
-          <a:bodyPr>
-            <a:normAutofit/>
-          </a:bodyPr>
-          <a:lstStyle/>
-          <a:p>
-            <a:pPr algn="r"/>
-            <a:r>
-              <a:rPr lang="en-US" sz="4000" dirty="0"/>
-              <a:t>Configuration Model</a:t>
-            </a:r>
-          </a:p>
-        </p:txBody>
-      </p:sp>
-      <p:pic>
-        <p:nvPicPr>
-          <p:cNvPr id="6" name="Picture 5" descr="A screenshot of a computer&#10;&#10;Description automatically generated with medium confidence">
-            <a:extLst>
-              <a:ext uri="{FF2B5EF4-FFF2-40B4-BE49-F238E27FC236}">
-                <a16:creationId xmlns:a16="http://schemas.microsoft.com/office/drawing/2014/main" id="{64CAB341-0F45-EBF0-5542-74F695DF9CEF}"/>
+                <a16:creationId xmlns:a16="http://schemas.microsoft.com/office/drawing/2014/main" id="{FA301257-1951-1826-275A-A1911242E7B5}"/>
               </a:ext>
             </a:extLst>
           </p:cNvPr>
@@ -11913,14 +12007,50 @@
         </p:blipFill>
         <p:spPr>
           <a:xfrm>
-            <a:off x="3340284" y="193508"/>
-            <a:ext cx="8655296" cy="6664492"/>
+            <a:off x="3150535" y="117700"/>
+            <a:ext cx="8600890" cy="6622600"/>
           </a:xfrm>
           <a:prstGeom prst="rect">
             <a:avLst/>
           </a:prstGeom>
         </p:spPr>
       </p:pic>
+      <p:sp>
+        <p:nvSpPr>
+          <p:cNvPr id="2" name="Title 1">
+            <a:extLst>
+              <a:ext uri="{FF2B5EF4-FFF2-40B4-BE49-F238E27FC236}">
+                <a16:creationId xmlns:a16="http://schemas.microsoft.com/office/drawing/2014/main" id="{A798245F-DD26-ADCC-6CD2-D5ED5F5598A9}"/>
+              </a:ext>
+            </a:extLst>
+          </p:cNvPr>
+          <p:cNvSpPr>
+            <a:spLocks noGrp="1"/>
+          </p:cNvSpPr>
+          <p:nvPr>
+            <p:ph type="title"/>
+          </p:nvPr>
+        </p:nvSpPr>
+        <p:spPr>
+          <a:xfrm>
+            <a:off x="317385" y="117700"/>
+            <a:ext cx="3022899" cy="1689586"/>
+          </a:xfrm>
+        </p:spPr>
+        <p:txBody>
+          <a:bodyPr>
+            <a:normAutofit/>
+          </a:bodyPr>
+          <a:lstStyle/>
+          <a:p>
+            <a:pPr algn="r"/>
+            <a:r>
+              <a:rPr lang="en-US" sz="4000" dirty="0"/>
+              <a:t>Configuration Model</a:t>
+            </a:r>
+          </a:p>
+        </p:txBody>
+      </p:sp>
     </p:spTree>
     <p:extLst>
       <p:ext uri="{BB962C8B-B14F-4D97-AF65-F5344CB8AC3E}">
@@ -12900,10 +13030,10 @@
       </p:sp>
       <p:pic>
         <p:nvPicPr>
-          <p:cNvPr id="6" name="Picture 5" descr="A screenshot of a computer&#10;&#10;Description automatically generated with medium confidence">
+          <p:cNvPr id="4" name="Picture 3" descr="A screenshot of a computer&#10;&#10;Description automatically generated">
             <a:extLst>
               <a:ext uri="{FF2B5EF4-FFF2-40B4-BE49-F238E27FC236}">
-                <a16:creationId xmlns:a16="http://schemas.microsoft.com/office/drawing/2014/main" id="{7C3DD65C-4947-6B81-85B3-712677F2FF91}"/>
+                <a16:creationId xmlns:a16="http://schemas.microsoft.com/office/drawing/2014/main" id="{3AD36ADA-EB10-96CB-DB0B-136F15875DE1}"/>
               </a:ext>
             </a:extLst>
           </p:cNvPr>
@@ -12926,8 +13056,8 @@
         </p:blipFill>
         <p:spPr>
           <a:xfrm>
-            <a:off x="7287803" y="0"/>
-            <a:ext cx="4372195" cy="6858000"/>
+            <a:off x="7467905" y="0"/>
+            <a:ext cx="4171996" cy="6858000"/>
           </a:xfrm>
           <a:prstGeom prst="rect">
             <a:avLst/>
@@ -13481,10 +13611,10 @@
       </p:sp>
       <p:pic>
         <p:nvPicPr>
-          <p:cNvPr id="6" name="Picture 5" descr="A screenshot of a computer&#10;&#10;Description automatically generated">
+          <p:cNvPr id="7" name="Picture 6" descr="A screenshot of a computer&#10;&#10;Description automatically generated">
             <a:extLst>
               <a:ext uri="{FF2B5EF4-FFF2-40B4-BE49-F238E27FC236}">
-                <a16:creationId xmlns:a16="http://schemas.microsoft.com/office/drawing/2014/main" id="{8B97A891-FB41-8020-AA4F-F29FF2B4EC67}"/>
+                <a16:creationId xmlns:a16="http://schemas.microsoft.com/office/drawing/2014/main" id="{1C3974F7-8730-A9F4-10F5-9017A835E86C}"/>
               </a:ext>
             </a:extLst>
           </p:cNvPr>
@@ -13507,8 +13637,8 @@
         </p:blipFill>
         <p:spPr>
           <a:xfrm>
-            <a:off x="4608528" y="249293"/>
-            <a:ext cx="7337819" cy="6243582"/>
+            <a:off x="4640316" y="392407"/>
+            <a:ext cx="7282018" cy="6196102"/>
           </a:xfrm>
           <a:prstGeom prst="rect">
             <a:avLst/>
@@ -14854,139 +14984,12 @@
           <a:chExt cx="0" cy="0"/>
         </a:xfrm>
       </p:grpSpPr>
-      <p:sp>
-        <p:nvSpPr>
-          <p:cNvPr id="2" name="Title 1">
+      <p:pic>
+        <p:nvPicPr>
+          <p:cNvPr id="5" name="Picture 4" descr="A screenshot of a computer&#10;&#10;Description automatically generated">
             <a:extLst>
               <a:ext uri="{FF2B5EF4-FFF2-40B4-BE49-F238E27FC236}">
-                <a16:creationId xmlns:a16="http://schemas.microsoft.com/office/drawing/2014/main" id="{AB1D9BD9-E7B8-0308-F846-C5AE6E739C5F}"/>
-              </a:ext>
-            </a:extLst>
-          </p:cNvPr>
-          <p:cNvSpPr>
-            <a:spLocks noGrp="1"/>
-          </p:cNvSpPr>
-          <p:nvPr>
-            <p:ph type="title"/>
-          </p:nvPr>
-        </p:nvSpPr>
-        <p:spPr/>
-        <p:txBody>
-          <a:bodyPr/>
-          <a:lstStyle/>
-          <a:p>
-            <a:r>
-              <a:rPr lang="en-US" dirty="0"/>
-              <a:t>The </a:t>
-            </a:r>
-            <a:r>
-              <a:rPr lang="en-US" dirty="0" err="1"/>
-              <a:t>TransportFeature</a:t>
-            </a:r>
-            <a:endParaRPr lang="en-US" dirty="0"/>
-          </a:p>
-        </p:txBody>
-      </p:sp>
-      <p:sp>
-        <p:nvSpPr>
-          <p:cNvPr id="3" name="Content Placeholder 2">
-            <a:extLst>
-              <a:ext uri="{FF2B5EF4-FFF2-40B4-BE49-F238E27FC236}">
-                <a16:creationId xmlns:a16="http://schemas.microsoft.com/office/drawing/2014/main" id="{8C60C7C5-6DBE-8D49-F647-8952029E2ADB}"/>
-              </a:ext>
-            </a:extLst>
-          </p:cNvPr>
-          <p:cNvSpPr>
-            <a:spLocks noGrp="1"/>
-          </p:cNvSpPr>
-          <p:nvPr>
-            <p:ph idx="1"/>
-          </p:nvPr>
-        </p:nvSpPr>
-        <p:spPr>
-          <a:xfrm>
-            <a:off x="838200" y="1825625"/>
-            <a:ext cx="5081954" cy="2833921"/>
-          </a:xfrm>
-        </p:spPr>
-        <p:txBody>
-          <a:bodyPr>
-            <a:normAutofit/>
-          </a:bodyPr>
-          <a:lstStyle/>
-          <a:p>
-            <a:r>
-              <a:rPr lang="en-US" dirty="0"/>
-              <a:t>Opt-out feature: available by default on all Remotes (not External)</a:t>
-            </a:r>
-          </a:p>
-          <a:p>
-            <a:pPr lvl="1"/>
-            <a:r>
-              <a:rPr lang="en-US" dirty="0"/>
-              <a:t>To remove it: </a:t>
-            </a:r>
-            <a:br>
-              <a:rPr lang="en-US" dirty="0"/>
-            </a:br>
-            <a:r>
-              <a:rPr lang="en-US" sz="1600" b="1" dirty="0">
-                <a:latin typeface="Courier New" panose="02070309020205020404" pitchFamily="49" charset="0"/>
-                <a:cs typeface="Courier New" panose="02070309020205020404" pitchFamily="49" charset="0"/>
-              </a:rPr>
-              <a:t>"</a:t>
-            </a:r>
-            <a:r>
-              <a:rPr lang="en-US" sz="1600" b="1" dirty="0" err="1">
-                <a:latin typeface="Courier New" panose="02070309020205020404" pitchFamily="49" charset="0"/>
-                <a:cs typeface="Courier New" panose="02070309020205020404" pitchFamily="49" charset="0"/>
-              </a:rPr>
-              <a:t>DisallowFeatures</a:t>
-            </a:r>
-            <a:r>
-              <a:rPr lang="en-US" sz="1600" b="1" dirty="0">
-                <a:latin typeface="Courier New" panose="02070309020205020404" pitchFamily="49" charset="0"/>
-                <a:cs typeface="Courier New" panose="02070309020205020404" pitchFamily="49" charset="0"/>
-              </a:rPr>
-              <a:t>": "Transport“</a:t>
-            </a:r>
-          </a:p>
-          <a:p>
-            <a:r>
-              <a:rPr lang="en-US" dirty="0"/>
-              <a:t>Transport is “on” by default but can be </a:t>
-            </a:r>
-            <a:r>
-              <a:rPr lang="en-US" sz="2000" dirty="0" err="1">
-                <a:latin typeface="Consolas" panose="020B0609020204030204" pitchFamily="49" charset="0"/>
-                <a:cs typeface="Courier New" panose="02070309020205020404" pitchFamily="49" charset="0"/>
-              </a:rPr>
-              <a:t>SwithOff</a:t>
-            </a:r>
-            <a:r>
-              <a:rPr lang="en-US" dirty="0"/>
-              <a:t>/</a:t>
-            </a:r>
-            <a:r>
-              <a:rPr lang="en-US" sz="2000" dirty="0" err="1">
-                <a:latin typeface="Consolas" panose="020B0609020204030204" pitchFamily="49" charset="0"/>
-                <a:cs typeface="Courier New" panose="02070309020205020404" pitchFamily="49" charset="0"/>
-              </a:rPr>
-              <a:t>SwitchOn</a:t>
-            </a:r>
-            <a:endParaRPr lang="en-US" sz="2000" dirty="0">
-              <a:latin typeface="Consolas" panose="020B0609020204030204" pitchFamily="49" charset="0"/>
-              <a:cs typeface="Courier New" panose="02070309020205020404" pitchFamily="49" charset="0"/>
-            </a:endParaRPr>
-          </a:p>
-        </p:txBody>
-      </p:sp>
-      <p:pic>
-        <p:nvPicPr>
-          <p:cNvPr id="7" name="Picture 6" descr="Graphical user interface, diagram&#10;&#10;Description automatically generated">
-            <a:extLst>
-              <a:ext uri="{FF2B5EF4-FFF2-40B4-BE49-F238E27FC236}">
-                <a16:creationId xmlns:a16="http://schemas.microsoft.com/office/drawing/2014/main" id="{145D6F04-76EB-0D08-22E0-99122639C349}"/>
+                <a16:creationId xmlns:a16="http://schemas.microsoft.com/office/drawing/2014/main" id="{493BF6E9-2A10-4271-361D-D3E4325D7871}"/>
               </a:ext>
             </a:extLst>
           </p:cNvPr>
@@ -15009,14 +15012,141 @@
         </p:blipFill>
         <p:spPr>
           <a:xfrm>
-            <a:off x="5920154" y="194454"/>
-            <a:ext cx="6164199" cy="4465092"/>
+            <a:off x="6096000" y="285045"/>
+            <a:ext cx="5675586" cy="4920660"/>
           </a:xfrm>
           <a:prstGeom prst="rect">
             <a:avLst/>
           </a:prstGeom>
         </p:spPr>
       </p:pic>
+      <p:sp>
+        <p:nvSpPr>
+          <p:cNvPr id="2" name="Title 1">
+            <a:extLst>
+              <a:ext uri="{FF2B5EF4-FFF2-40B4-BE49-F238E27FC236}">
+                <a16:creationId xmlns:a16="http://schemas.microsoft.com/office/drawing/2014/main" id="{AB1D9BD9-E7B8-0308-F846-C5AE6E739C5F}"/>
+              </a:ext>
+            </a:extLst>
+          </p:cNvPr>
+          <p:cNvSpPr>
+            <a:spLocks noGrp="1"/>
+          </p:cNvSpPr>
+          <p:nvPr>
+            <p:ph type="title"/>
+          </p:nvPr>
+        </p:nvSpPr>
+        <p:spPr/>
+        <p:txBody>
+          <a:bodyPr/>
+          <a:lstStyle/>
+          <a:p>
+            <a:r>
+              <a:rPr lang="en-US" dirty="0"/>
+              <a:t>The </a:t>
+            </a:r>
+            <a:r>
+              <a:rPr lang="en-US" dirty="0" err="1"/>
+              <a:t>TransportFeature</a:t>
+            </a:r>
+            <a:endParaRPr lang="en-US" dirty="0"/>
+          </a:p>
+        </p:txBody>
+      </p:sp>
+      <p:sp>
+        <p:nvSpPr>
+          <p:cNvPr id="3" name="Content Placeholder 2">
+            <a:extLst>
+              <a:ext uri="{FF2B5EF4-FFF2-40B4-BE49-F238E27FC236}">
+                <a16:creationId xmlns:a16="http://schemas.microsoft.com/office/drawing/2014/main" id="{8C60C7C5-6DBE-8D49-F647-8952029E2ADB}"/>
+              </a:ext>
+            </a:extLst>
+          </p:cNvPr>
+          <p:cNvSpPr>
+            <a:spLocks noGrp="1"/>
+          </p:cNvSpPr>
+          <p:nvPr>
+            <p:ph idx="1"/>
+          </p:nvPr>
+        </p:nvSpPr>
+        <p:spPr>
+          <a:xfrm>
+            <a:off x="838200" y="1825625"/>
+            <a:ext cx="5081954" cy="2833921"/>
+          </a:xfrm>
+        </p:spPr>
+        <p:txBody>
+          <a:bodyPr>
+            <a:normAutofit/>
+          </a:bodyPr>
+          <a:lstStyle/>
+          <a:p>
+            <a:r>
+              <a:rPr lang="en-US" dirty="0"/>
+              <a:t>Opt-out feature: available by default on all Remotes (not External)</a:t>
+            </a:r>
+          </a:p>
+          <a:p>
+            <a:pPr lvl="1"/>
+            <a:r>
+              <a:rPr lang="en-US" dirty="0"/>
+              <a:t>To remove it: </a:t>
+            </a:r>
+            <a:br>
+              <a:rPr lang="en-US" dirty="0"/>
+            </a:br>
+            <a:r>
+              <a:rPr lang="en-US" sz="1600" b="1" dirty="0">
+                <a:latin typeface="Courier New" panose="02070309020205020404" pitchFamily="49" charset="0"/>
+                <a:cs typeface="Courier New" panose="02070309020205020404" pitchFamily="49" charset="0"/>
+              </a:rPr>
+              <a:t>"</a:t>
+            </a:r>
+            <a:r>
+              <a:rPr lang="en-US" sz="1600" b="1" dirty="0" err="1">
+                <a:latin typeface="Courier New" panose="02070309020205020404" pitchFamily="49" charset="0"/>
+                <a:cs typeface="Courier New" panose="02070309020205020404" pitchFamily="49" charset="0"/>
+              </a:rPr>
+              <a:t>DisallowFeatures</a:t>
+            </a:r>
+            <a:r>
+              <a:rPr lang="en-US" sz="1600" b="1" dirty="0">
+                <a:latin typeface="Courier New" panose="02070309020205020404" pitchFamily="49" charset="0"/>
+                <a:cs typeface="Courier New" panose="02070309020205020404" pitchFamily="49" charset="0"/>
+              </a:rPr>
+              <a:t>": "Transport“</a:t>
+            </a:r>
+          </a:p>
+          <a:p>
+            <a:r>
+              <a:rPr lang="en-US" dirty="0"/>
+              <a:t>Transport is “on” by default but can be </a:t>
+            </a:r>
+            <a:r>
+              <a:rPr lang="en-US" sz="2000" dirty="0" err="1">
+                <a:latin typeface="Consolas" panose="020B0609020204030204" pitchFamily="49" charset="0"/>
+                <a:cs typeface="Courier New" panose="02070309020205020404" pitchFamily="49" charset="0"/>
+              </a:rPr>
+              <a:t>SwithOff</a:t>
+            </a:r>
+            <a:r>
+              <a:rPr lang="en-US" dirty="0"/>
+              <a:t>/</a:t>
+            </a:r>
+            <a:r>
+              <a:rPr lang="en-US" sz="2000" dirty="0" err="1">
+                <a:latin typeface="Consolas" panose="020B0609020204030204" pitchFamily="49" charset="0"/>
+                <a:cs typeface="Courier New" panose="02070309020205020404" pitchFamily="49" charset="0"/>
+              </a:rPr>
+              <a:t>SwitchOn</a:t>
+            </a:r>
+            <a:endParaRPr lang="en-US" sz="2000" dirty="0">
+              <a:latin typeface="Consolas" panose="020B0609020204030204" pitchFamily="49" charset="0"/>
+              <a:cs typeface="Courier New" panose="02070309020205020404" pitchFamily="49" charset="0"/>
+            </a:endParaRPr>
+          </a:p>
+        </p:txBody>
+      </p:sp>
       <p:sp>
         <p:nvSpPr>
           <p:cNvPr id="9" name="TextBox 8">
@@ -15482,154 +15612,131 @@
       </p:grpSpPr>
       <p:sp>
         <p:nvSpPr>
-          <p:cNvPr id="4" name="TextBox 3">
+          <p:cNvPr id="2" name="Title 1">
             <a:extLst>
               <a:ext uri="{FF2B5EF4-FFF2-40B4-BE49-F238E27FC236}">
-                <a16:creationId xmlns:a16="http://schemas.microsoft.com/office/drawing/2014/main" id="{25EFDEFC-B78E-174F-345D-9ADFB3BE02CE}"/>
+                <a16:creationId xmlns:a16="http://schemas.microsoft.com/office/drawing/2014/main" id="{E28F16C2-5FE3-B18B-1F5B-429CD7308A94}"/>
               </a:ext>
             </a:extLst>
           </p:cNvPr>
-          <p:cNvSpPr txBox="1"/>
-          <p:nvPr/>
+          <p:cNvSpPr>
+            <a:spLocks noGrp="1"/>
+          </p:cNvSpPr>
+          <p:nvPr>
+            <p:ph type="title"/>
+          </p:nvPr>
+        </p:nvSpPr>
+        <p:spPr/>
+        <p:txBody>
+          <a:bodyPr/>
+          <a:lstStyle/>
+          <a:p>
+            <a:r>
+              <a:rPr lang="en-US" dirty="0"/>
+              <a:t>The Channels</a:t>
+            </a:r>
+          </a:p>
+        </p:txBody>
+      </p:sp>
+      <p:sp>
+        <p:nvSpPr>
+          <p:cNvPr id="3" name="Content Placeholder 2">
+            <a:extLst>
+              <a:ext uri="{FF2B5EF4-FFF2-40B4-BE49-F238E27FC236}">
+                <a16:creationId xmlns:a16="http://schemas.microsoft.com/office/drawing/2014/main" id="{1819622E-A74C-BCB9-B3FA-CB06EC5A3192}"/>
+              </a:ext>
+            </a:extLst>
+          </p:cNvPr>
+          <p:cNvSpPr>
+            <a:spLocks noGrp="1"/>
+          </p:cNvSpPr>
+          <p:nvPr>
+            <p:ph idx="1"/>
+          </p:nvPr>
         </p:nvSpPr>
         <p:spPr>
           <a:xfrm>
-            <a:off x="409904" y="441435"/>
-            <a:ext cx="932115" cy="369332"/>
+            <a:off x="838199" y="1825625"/>
+            <a:ext cx="10732477" cy="4351338"/>
           </a:xfrm>
-          <a:prstGeom prst="rect">
-            <a:avLst/>
-          </a:prstGeom>
-          <a:noFill/>
         </p:spPr>
         <p:txBody>
-          <a:bodyPr wrap="none" rtlCol="0">
-            <a:spAutoFit/>
-          </a:bodyPr>
+          <a:bodyPr/>
           <a:lstStyle/>
           <a:p>
             <a:r>
               <a:rPr lang="en-US" dirty="0"/>
-              <a:t>Initiator</a:t>
-            </a:r>
-          </a:p>
-        </p:txBody>
-      </p:sp>
-      <p:sp>
-        <p:nvSpPr>
-          <p:cNvPr id="5" name="TextBox 4">
-            <a:extLst>
-              <a:ext uri="{FF2B5EF4-FFF2-40B4-BE49-F238E27FC236}">
-                <a16:creationId xmlns:a16="http://schemas.microsoft.com/office/drawing/2014/main" id="{055BE63A-E765-9A3B-B420-E1D43349F6BD}"/>
-              </a:ext>
-            </a:extLst>
-          </p:cNvPr>
-          <p:cNvSpPr txBox="1"/>
-          <p:nvPr/>
-        </p:nvSpPr>
-        <p:spPr>
-          <a:xfrm>
-            <a:off x="4939862" y="302935"/>
-            <a:ext cx="3419206" cy="646331"/>
-          </a:xfrm>
-          <a:prstGeom prst="rect">
-            <a:avLst/>
-          </a:prstGeom>
-          <a:noFill/>
-        </p:spPr>
-        <p:txBody>
-          <a:bodyPr wrap="none" rtlCol="0">
-            <a:spAutoFit/>
-          </a:bodyPr>
-          <a:lstStyle/>
-          <a:p>
+              <a:t>A Remote’s </a:t>
+            </a:r>
             <a:r>
               <a:rPr lang="en-US" dirty="0" err="1"/>
-              <a:t>InitialMessage</a:t>
-            </a:r>
-            <a:br>
-              <a:rPr lang="en-US" dirty="0"/>
-            </a:br>
-            <a:r>
-              <a:rPr lang="en-US" dirty="0"/>
-              <a:t>nonce, now, identities/signatures</a:t>
-            </a:r>
-          </a:p>
-        </p:txBody>
-      </p:sp>
-      <p:sp>
-        <p:nvSpPr>
-          <p:cNvPr id="6" name="TextBox 5">
-            <a:extLst>
-              <a:ext uri="{FF2B5EF4-FFF2-40B4-BE49-F238E27FC236}">
-                <a16:creationId xmlns:a16="http://schemas.microsoft.com/office/drawing/2014/main" id="{6355DB36-5851-93F8-DEB3-4574616C41FA}"/>
-              </a:ext>
-            </a:extLst>
-          </p:cNvPr>
-          <p:cNvSpPr txBox="1"/>
-          <p:nvPr/>
-        </p:nvSpPr>
-        <p:spPr>
-          <a:xfrm>
-            <a:off x="409904" y="1555532"/>
-            <a:ext cx="929806" cy="369332"/>
-          </a:xfrm>
-          <a:prstGeom prst="rect">
-            <a:avLst/>
-          </a:prstGeom>
-          <a:noFill/>
-        </p:spPr>
-        <p:txBody>
-          <a:bodyPr wrap="none" rtlCol="0">
-            <a:spAutoFit/>
-          </a:bodyPr>
-          <a:lstStyle/>
-          <a:p>
-            <a:r>
-              <a:rPr lang="en-US" dirty="0"/>
-              <a:t>Listener</a:t>
-            </a:r>
-          </a:p>
-        </p:txBody>
-      </p:sp>
-      <p:sp>
-        <p:nvSpPr>
-          <p:cNvPr id="7" name="TextBox 6">
-            <a:extLst>
-              <a:ext uri="{FF2B5EF4-FFF2-40B4-BE49-F238E27FC236}">
-                <a16:creationId xmlns:a16="http://schemas.microsoft.com/office/drawing/2014/main" id="{DD72CD61-B5C4-4FAA-59FA-A385567C5281}"/>
-              </a:ext>
-            </a:extLst>
-          </p:cNvPr>
-          <p:cNvSpPr txBox="1"/>
-          <p:nvPr/>
-        </p:nvSpPr>
-        <p:spPr>
-          <a:xfrm>
-            <a:off x="4939862" y="1134043"/>
-            <a:ext cx="3419206" cy="646331"/>
-          </a:xfrm>
-          <a:prstGeom prst="rect">
-            <a:avLst/>
-          </a:prstGeom>
-          <a:noFill/>
-        </p:spPr>
-        <p:txBody>
-          <a:bodyPr wrap="none" rtlCol="0">
-            <a:spAutoFit/>
-          </a:bodyPr>
-          <a:lstStyle/>
-          <a:p>
+              <a:t>TransportFeature</a:t>
+            </a:r>
+            <a:r>
+              <a:rPr lang="en-US" dirty="0"/>
+              <a:t> handles the transport to the other side.</a:t>
+            </a:r>
+          </a:p>
+          <a:p>
+            <a:pPr lvl="1"/>
+            <a:r>
+              <a:rPr lang="en-US" dirty="0"/>
+              <a:t>Listener vs. Sender is automatically handled based on the configuration.</a:t>
+            </a:r>
+          </a:p>
+          <a:p>
+            <a:pPr lvl="1"/>
+            <a:r>
+              <a:rPr lang="en-US" dirty="0"/>
+              <a:t>The transport technology can be specified. The default is “</a:t>
+            </a:r>
             <a:r>
               <a:rPr lang="en-US" dirty="0" err="1"/>
-              <a:t>InitialMessage</a:t>
-            </a:r>
-            <a:br>
-              <a:rPr lang="en-US" dirty="0"/>
-            </a:br>
-            <a:r>
-              <a:rPr lang="en-US" dirty="0"/>
-              <a:t>nonce, now, identities/signatures</a:t>
+              <a:t>tcp</a:t>
+            </a:r>
+            <a:r>
+              <a:rPr lang="en-US" dirty="0"/>
+              <a:t>”.</a:t>
+            </a:r>
+          </a:p>
+          <a:p>
+            <a:r>
+              <a:rPr lang="en-US" dirty="0"/>
+              <a:t>The </a:t>
+            </a:r>
+            <a:r>
+              <a:rPr lang="en-US" dirty="0" err="1"/>
+              <a:t>TransportFeatures</a:t>
+            </a:r>
+            <a:r>
+              <a:rPr lang="en-US" dirty="0"/>
+              <a:t> exposes the properties relevant to the communication but is not itself in charge of exchanging data.</a:t>
+            </a:r>
+          </a:p>
+          <a:p>
+            <a:r>
+              <a:rPr lang="en-US" dirty="0"/>
+              <a:t>Channels are Features that implements a protocol and exposes it to the developer.</a:t>
+            </a:r>
+          </a:p>
+          <a:p>
+            <a:r>
+              <a:rPr lang="en-US" dirty="0"/>
+              <a:t>Channels implementation provides:</a:t>
+            </a:r>
+          </a:p>
+          <a:p>
+            <a:pPr lvl="1"/>
+            <a:r>
+              <a:rPr lang="en-US" dirty="0"/>
+              <a:t>A Protocol that can be in multiple versions.</a:t>
+            </a:r>
+          </a:p>
+          <a:p>
+            <a:pPr lvl="1"/>
+            <a:r>
+              <a:rPr lang="en-US" dirty="0"/>
+              <a:t>A way to build and send, receive and parse messages.</a:t>
             </a:r>
           </a:p>
         </p:txBody>
@@ -15637,7 +15744,7 @@
     </p:spTree>
     <p:extLst>
       <p:ext uri="{BB962C8B-B14F-4D97-AF65-F5344CB8AC3E}">
-        <p14:creationId xmlns:p14="http://schemas.microsoft.com/office/powerpoint/2010/main" val="390213551"/>
+        <p14:creationId xmlns:p14="http://schemas.microsoft.com/office/powerpoint/2010/main" val="857479250"/>
       </p:ext>
     </p:extLst>
   </p:cSld>
@@ -15824,7 +15931,7 @@
           <p:cNvPr id="2" name="Title 1">
             <a:extLst>
               <a:ext uri="{FF2B5EF4-FFF2-40B4-BE49-F238E27FC236}">
-                <a16:creationId xmlns:a16="http://schemas.microsoft.com/office/drawing/2014/main" id="{E28F16C2-5FE3-B18B-1F5B-429CD7308A94}"/>
+                <a16:creationId xmlns:a16="http://schemas.microsoft.com/office/drawing/2014/main" id="{D234F961-5C07-CC54-4D89-C39917A7A683}"/>
               </a:ext>
             </a:extLst>
           </p:cNvPr>
@@ -15841,119 +15948,298 @@
           <a:lstStyle/>
           <a:p>
             <a:r>
-              <a:rPr lang="en-US" dirty="0"/>
-              <a:t>The Channels</a:t>
-            </a:r>
+              <a:rPr lang="en-US" dirty="0" err="1"/>
+              <a:t>TransportMessage</a:t>
+            </a:r>
+            <a:endParaRPr lang="en-US" dirty="0"/>
           </a:p>
         </p:txBody>
       </p:sp>
       <p:sp>
         <p:nvSpPr>
-          <p:cNvPr id="3" name="Content Placeholder 2">
+          <p:cNvPr id="10" name="Content Placeholder 2">
             <a:extLst>
               <a:ext uri="{FF2B5EF4-FFF2-40B4-BE49-F238E27FC236}">
-                <a16:creationId xmlns:a16="http://schemas.microsoft.com/office/drawing/2014/main" id="{1819622E-A74C-BCB9-B3FA-CB06EC5A3192}"/>
+                <a16:creationId xmlns:a16="http://schemas.microsoft.com/office/drawing/2014/main" id="{D166F694-1BE5-D7EE-ACC5-2723D274C19E}"/>
               </a:ext>
             </a:extLst>
           </p:cNvPr>
-          <p:cNvSpPr>
-            <a:spLocks noGrp="1"/>
+          <p:cNvSpPr txBox="1">
+            <a:spLocks/>
           </p:cNvSpPr>
-          <p:nvPr>
-            <p:ph idx="1"/>
-          </p:nvPr>
+          <p:nvPr/>
         </p:nvSpPr>
         <p:spPr>
           <a:xfrm>
             <a:off x="838199" y="1825625"/>
-            <a:ext cx="10732477" cy="4351338"/>
+            <a:ext cx="10732477" cy="4667250"/>
           </a:xfrm>
+          <a:prstGeom prst="rect">
+            <a:avLst/>
+          </a:prstGeom>
         </p:spPr>
         <p:txBody>
-          <a:bodyPr/>
-          <a:lstStyle/>
-          <a:p>
-            <a:r>
-              <a:rPr lang="en-US" dirty="0"/>
-              <a:t>A Remote’s </a:t>
-            </a:r>
+          <a:bodyPr vert="horz" lIns="91440" tIns="45720" rIns="91440" bIns="45720" rtlCol="0">
+            <a:normAutofit fontScale="92500" lnSpcReduction="20000"/>
+          </a:bodyPr>
+          <a:lstStyle>
+            <a:lvl1pPr marL="228600" indent="-228600" algn="l" defTabSz="914400" rtl="0" eaLnBrk="1" latinLnBrk="0" hangingPunct="1">
+              <a:lnSpc>
+                <a:spcPct val="90000"/>
+              </a:lnSpc>
+              <a:spcBef>
+                <a:spcPts val="1000"/>
+              </a:spcBef>
+              <a:buFont typeface="Arial" panose="020B0604020202020204" pitchFamily="34" charset="0"/>
+              <a:buChar char="•"/>
+              <a:defRPr sz="2800" kern="1200">
+                <a:solidFill>
+                  <a:schemeClr val="tx1"/>
+                </a:solidFill>
+                <a:latin typeface="+mn-lt"/>
+                <a:ea typeface="+mn-ea"/>
+                <a:cs typeface="+mn-cs"/>
+              </a:defRPr>
+            </a:lvl1pPr>
+            <a:lvl2pPr marL="685800" indent="-228600" algn="l" defTabSz="914400" rtl="0" eaLnBrk="1" latinLnBrk="0" hangingPunct="1">
+              <a:lnSpc>
+                <a:spcPct val="90000"/>
+              </a:lnSpc>
+              <a:spcBef>
+                <a:spcPts val="500"/>
+              </a:spcBef>
+              <a:buFont typeface="Arial" panose="020B0604020202020204" pitchFamily="34" charset="0"/>
+              <a:buChar char="•"/>
+              <a:defRPr sz="2400" kern="1200">
+                <a:solidFill>
+                  <a:schemeClr val="tx1"/>
+                </a:solidFill>
+                <a:latin typeface="+mn-lt"/>
+                <a:ea typeface="+mn-ea"/>
+                <a:cs typeface="+mn-cs"/>
+              </a:defRPr>
+            </a:lvl2pPr>
+            <a:lvl3pPr marL="1143000" indent="-228600" algn="l" defTabSz="914400" rtl="0" eaLnBrk="1" latinLnBrk="0" hangingPunct="1">
+              <a:lnSpc>
+                <a:spcPct val="90000"/>
+              </a:lnSpc>
+              <a:spcBef>
+                <a:spcPts val="500"/>
+              </a:spcBef>
+              <a:buFont typeface="Arial" panose="020B0604020202020204" pitchFamily="34" charset="0"/>
+              <a:buChar char="•"/>
+              <a:defRPr sz="2000" kern="1200">
+                <a:solidFill>
+                  <a:schemeClr val="tx1"/>
+                </a:solidFill>
+                <a:latin typeface="+mn-lt"/>
+                <a:ea typeface="+mn-ea"/>
+                <a:cs typeface="+mn-cs"/>
+              </a:defRPr>
+            </a:lvl3pPr>
+            <a:lvl4pPr marL="1600200" indent="-228600" algn="l" defTabSz="914400" rtl="0" eaLnBrk="1" latinLnBrk="0" hangingPunct="1">
+              <a:lnSpc>
+                <a:spcPct val="90000"/>
+              </a:lnSpc>
+              <a:spcBef>
+                <a:spcPts val="500"/>
+              </a:spcBef>
+              <a:buFont typeface="Arial" panose="020B0604020202020204" pitchFamily="34" charset="0"/>
+              <a:buChar char="•"/>
+              <a:defRPr sz="1800" kern="1200">
+                <a:solidFill>
+                  <a:schemeClr val="tx1"/>
+                </a:solidFill>
+                <a:latin typeface="+mn-lt"/>
+                <a:ea typeface="+mn-ea"/>
+                <a:cs typeface="+mn-cs"/>
+              </a:defRPr>
+            </a:lvl4pPr>
+            <a:lvl5pPr marL="2057400" indent="-228600" algn="l" defTabSz="914400" rtl="0" eaLnBrk="1" latinLnBrk="0" hangingPunct="1">
+              <a:lnSpc>
+                <a:spcPct val="90000"/>
+              </a:lnSpc>
+              <a:spcBef>
+                <a:spcPts val="500"/>
+              </a:spcBef>
+              <a:buFont typeface="Arial" panose="020B0604020202020204" pitchFamily="34" charset="0"/>
+              <a:buChar char="•"/>
+              <a:defRPr sz="1800" kern="1200">
+                <a:solidFill>
+                  <a:schemeClr val="tx1"/>
+                </a:solidFill>
+                <a:latin typeface="+mn-lt"/>
+                <a:ea typeface="+mn-ea"/>
+                <a:cs typeface="+mn-cs"/>
+              </a:defRPr>
+            </a:lvl5pPr>
+            <a:lvl6pPr marL="2514600" indent="-228600" algn="l" defTabSz="914400" rtl="0" eaLnBrk="1" latinLnBrk="0" hangingPunct="1">
+              <a:lnSpc>
+                <a:spcPct val="90000"/>
+              </a:lnSpc>
+              <a:spcBef>
+                <a:spcPts val="500"/>
+              </a:spcBef>
+              <a:buFont typeface="Arial" panose="020B0604020202020204" pitchFamily="34" charset="0"/>
+              <a:buChar char="•"/>
+              <a:defRPr sz="1800" kern="1200">
+                <a:solidFill>
+                  <a:schemeClr val="tx1"/>
+                </a:solidFill>
+                <a:latin typeface="+mn-lt"/>
+                <a:ea typeface="+mn-ea"/>
+                <a:cs typeface="+mn-cs"/>
+              </a:defRPr>
+            </a:lvl6pPr>
+            <a:lvl7pPr marL="2971800" indent="-228600" algn="l" defTabSz="914400" rtl="0" eaLnBrk="1" latinLnBrk="0" hangingPunct="1">
+              <a:lnSpc>
+                <a:spcPct val="90000"/>
+              </a:lnSpc>
+              <a:spcBef>
+                <a:spcPts val="500"/>
+              </a:spcBef>
+              <a:buFont typeface="Arial" panose="020B0604020202020204" pitchFamily="34" charset="0"/>
+              <a:buChar char="•"/>
+              <a:defRPr sz="1800" kern="1200">
+                <a:solidFill>
+                  <a:schemeClr val="tx1"/>
+                </a:solidFill>
+                <a:latin typeface="+mn-lt"/>
+                <a:ea typeface="+mn-ea"/>
+                <a:cs typeface="+mn-cs"/>
+              </a:defRPr>
+            </a:lvl7pPr>
+            <a:lvl8pPr marL="3429000" indent="-228600" algn="l" defTabSz="914400" rtl="0" eaLnBrk="1" latinLnBrk="0" hangingPunct="1">
+              <a:lnSpc>
+                <a:spcPct val="90000"/>
+              </a:lnSpc>
+              <a:spcBef>
+                <a:spcPts val="500"/>
+              </a:spcBef>
+              <a:buFont typeface="Arial" panose="020B0604020202020204" pitchFamily="34" charset="0"/>
+              <a:buChar char="•"/>
+              <a:defRPr sz="1800" kern="1200">
+                <a:solidFill>
+                  <a:schemeClr val="tx1"/>
+                </a:solidFill>
+                <a:latin typeface="+mn-lt"/>
+                <a:ea typeface="+mn-ea"/>
+                <a:cs typeface="+mn-cs"/>
+              </a:defRPr>
+            </a:lvl8pPr>
+            <a:lvl9pPr marL="3886200" indent="-228600" algn="l" defTabSz="914400" rtl="0" eaLnBrk="1" latinLnBrk="0" hangingPunct="1">
+              <a:lnSpc>
+                <a:spcPct val="90000"/>
+              </a:lnSpc>
+              <a:spcBef>
+                <a:spcPts val="500"/>
+              </a:spcBef>
+              <a:buFont typeface="Arial" panose="020B0604020202020204" pitchFamily="34" charset="0"/>
+              <a:buChar char="•"/>
+              <a:defRPr sz="1800" kern="1200">
+                <a:solidFill>
+                  <a:schemeClr val="tx1"/>
+                </a:solidFill>
+                <a:latin typeface="+mn-lt"/>
+                <a:ea typeface="+mn-ea"/>
+                <a:cs typeface="+mn-cs"/>
+              </a:defRPr>
+            </a:lvl9pPr>
+          </a:lstStyle>
+          <a:p>
+            <a:r>
+              <a:rPr lang="en-US" dirty="0"/>
+              <a:t>Prefix-Length encoding</a:t>
+            </a:r>
+          </a:p>
+          <a:p>
+            <a:pPr lvl="1"/>
+            <a:r>
+              <a:rPr lang="en-US" dirty="0"/>
+              <a:t>Single header byte</a:t>
+            </a:r>
+          </a:p>
+          <a:p>
+            <a:pPr lvl="1"/>
             <a:r>
               <a:rPr lang="en-US" dirty="0" err="1"/>
-              <a:t>TransportFeature</a:t>
-            </a:r>
-            <a:r>
-              <a:rPr lang="en-US" dirty="0"/>
-              <a:t> handles the transport to the other side.</a:t>
+              <a:t>MessageLength</a:t>
+            </a:r>
+            <a:r>
+              <a:rPr lang="en-US" dirty="0"/>
+              <a:t> (0 to 4 bytes)</a:t>
             </a:r>
           </a:p>
           <a:p>
             <a:pPr lvl="1"/>
             <a:r>
               <a:rPr lang="en-US" dirty="0"/>
-              <a:t>Listener vs. Sender is automatically handled based on the configuration.</a:t>
-            </a:r>
+              <a:t>Payload (up to 2 GiB)</a:t>
+            </a:r>
+          </a:p>
+          <a:p>
+            <a:endParaRPr lang="en-US" dirty="0"/>
+          </a:p>
+          <a:p>
+            <a:r>
+              <a:rPr lang="en-US" dirty="0"/>
+              <a:t>Header byte: </a:t>
+            </a:r>
+            <a:r>
+              <a:rPr lang="en-US" sz="2400" dirty="0">
+                <a:latin typeface="Courier New" panose="02070309020205020404" pitchFamily="49" charset="0"/>
+                <a:cs typeface="Courier New" panose="02070309020205020404" pitchFamily="49" charset="0"/>
+              </a:rPr>
+              <a:t>L0|L1|CD|R0|R1|P0|P1|P2</a:t>
+            </a:r>
+            <a:endParaRPr lang="en-US" dirty="0">
+              <a:latin typeface="Courier New" panose="02070309020205020404" pitchFamily="49" charset="0"/>
+              <a:cs typeface="Courier New" panose="02070309020205020404" pitchFamily="49" charset="0"/>
+            </a:endParaRPr>
           </a:p>
           <a:p>
             <a:pPr lvl="1"/>
             <a:r>
               <a:rPr lang="en-US" dirty="0"/>
-              <a:t>The transport technology can be specified. The default is “</a:t>
+              <a:t>L0-L1: number of bytes of the message length.</a:t>
+            </a:r>
+          </a:p>
+          <a:p>
+            <a:pPr lvl="1"/>
+            <a:r>
+              <a:rPr lang="en-US" dirty="0"/>
+              <a:t>CD: “Control/ Data” bit.</a:t>
+            </a:r>
+          </a:p>
+          <a:p>
+            <a:pPr lvl="1"/>
+            <a:r>
+              <a:rPr lang="en-US" dirty="0"/>
+              <a:t>R0-R1: Reserved for future use.</a:t>
+            </a:r>
+          </a:p>
+          <a:p>
+            <a:pPr lvl="1"/>
+            <a:r>
+              <a:rPr lang="en-US" dirty="0"/>
+              <a:t>P0-P2: Protocol number (0 to 7).</a:t>
+            </a:r>
+          </a:p>
+          <a:p>
+            <a:endParaRPr lang="en-US" dirty="0"/>
+          </a:p>
+          <a:p>
+            <a:r>
+              <a:rPr lang="en-US" dirty="0"/>
+              <a:t>The Protocol Number defines the "type" of the message: the writer/serializer that has been used to write the payload and the reader/</a:t>
             </a:r>
             <a:r>
               <a:rPr lang="en-US" dirty="0" err="1"/>
-              <a:t>tcp</a:t>
-            </a:r>
-            <a:r>
-              <a:rPr lang="en-US" dirty="0"/>
-              <a:t>”.</a:t>
-            </a:r>
-          </a:p>
-          <a:p>
-            <a:r>
-              <a:rPr lang="en-US" dirty="0"/>
-              <a:t>The </a:t>
-            </a:r>
-            <a:r>
-              <a:rPr lang="en-US" dirty="0" err="1"/>
-              <a:t>TransportFeatures</a:t>
-            </a:r>
-            <a:r>
-              <a:rPr lang="en-US" dirty="0"/>
-              <a:t> exposes the properties relevant to the communication but is not itself in charge of exchanging data.</a:t>
-            </a:r>
-          </a:p>
-          <a:p>
-            <a:r>
-              <a:rPr lang="en-US" dirty="0"/>
-              <a:t>Channels are Features that implements a protocol and exposes it to the developer.</a:t>
-            </a:r>
-          </a:p>
-          <a:p>
-            <a:r>
-              <a:rPr lang="en-US" dirty="0"/>
-              <a:t>Channels implementation provides:</a:t>
-            </a:r>
-          </a:p>
-          <a:p>
-            <a:pPr lvl="1"/>
-            <a:r>
-              <a:rPr lang="en-US" dirty="0"/>
-              <a:t>A Protocol that can be in multiple versions.</a:t>
-            </a:r>
-          </a:p>
-          <a:p>
-            <a:pPr lvl="1"/>
-            <a:r>
-              <a:rPr lang="en-US" dirty="0"/>
-              <a:t>A way to build and send, receive and parse </a:t>
-            </a:r>
-            <a:r>
-              <a:rPr lang="en-US" dirty="0" err="1"/>
-              <a:t>TransportMessage</a:t>
-            </a:r>
-            <a:r>
-              <a:rPr lang="en-US" dirty="0"/>
-              <a:t> objects.</a:t>
+              <a:t>deserializer</a:t>
+            </a:r>
+            <a:r>
+              <a:rPr lang="en-US" dirty="0"/>
+              <a:t> that must be used to read it back.</a:t>
             </a:r>
           </a:p>
         </p:txBody>
@@ -15961,7 +16247,7 @@
     </p:spTree>
     <p:extLst>
       <p:ext uri="{BB962C8B-B14F-4D97-AF65-F5344CB8AC3E}">
-        <p14:creationId xmlns:p14="http://schemas.microsoft.com/office/powerpoint/2010/main" val="857479250"/>
+        <p14:creationId xmlns:p14="http://schemas.microsoft.com/office/powerpoint/2010/main" val="200001624"/>
       </p:ext>
     </p:extLst>
   </p:cSld>
@@ -15993,7 +16279,7 @@
           <p:cNvPr id="2" name="Title 1">
             <a:extLst>
               <a:ext uri="{FF2B5EF4-FFF2-40B4-BE49-F238E27FC236}">
-                <a16:creationId xmlns:a16="http://schemas.microsoft.com/office/drawing/2014/main" id="{2ADDEB0D-75FE-A9E7-AE5D-1A00BE2CB4EF}"/>
+                <a16:creationId xmlns:a16="http://schemas.microsoft.com/office/drawing/2014/main" id="{BCFC278E-8E30-3459-41D7-7185BA86296A}"/>
               </a:ext>
             </a:extLst>
           </p:cNvPr>
@@ -16011,7 +16297,7 @@
           <a:p>
             <a:r>
               <a:rPr lang="en-US" dirty="0"/>
-              <a:t>UNSTABLE REMAINDER</a:t>
+              <a:t>The 8 protocols maximal count</a:t>
             </a:r>
           </a:p>
         </p:txBody>
@@ -16021,7 +16307,7 @@
           <p:cNvPr id="3" name="Content Placeholder 2">
             <a:extLst>
               <a:ext uri="{FF2B5EF4-FFF2-40B4-BE49-F238E27FC236}">
-                <a16:creationId xmlns:a16="http://schemas.microsoft.com/office/drawing/2014/main" id="{69BD3F96-4E3A-A64D-A143-5E0F643AB7C5}"/>
+                <a16:creationId xmlns:a16="http://schemas.microsoft.com/office/drawing/2014/main" id="{AC71B80D-91E5-6DC7-AB87-2CFAAF04179A}"/>
               </a:ext>
             </a:extLst>
           </p:cNvPr>
@@ -16032,19 +16318,81 @@
             <p:ph idx="1"/>
           </p:nvPr>
         </p:nvSpPr>
-        <p:spPr/>
+        <p:spPr>
+          <a:xfrm>
+            <a:off x="838200" y="1825625"/>
+            <a:ext cx="10515600" cy="4516560"/>
+          </a:xfrm>
+        </p:spPr>
         <p:txBody>
-          <a:bodyPr/>
+          <a:bodyPr>
+            <a:normAutofit lnSpcReduction="10000"/>
+          </a:bodyPr>
           <a:lstStyle/>
           <a:p>
-            <a:endParaRPr lang="en-US"/>
+            <a:r>
+              <a:rPr lang="en-US" dirty="0"/>
+              <a:t>Only 8 protocols can be expressed.</a:t>
+            </a:r>
+          </a:p>
+          <a:p>
+            <a:pPr lvl="1"/>
+            <a:r>
+              <a:rPr lang="en-US" dirty="0"/>
+              <a:t>The “0 Protocol” protocol is reserved: this is the protocol of </a:t>
+            </a:r>
+            <a:r>
+              <a:rPr lang="en-US" dirty="0" err="1"/>
+              <a:t>CK.AppIdentity.TransportLayer</a:t>
+            </a:r>
+            <a:r>
+              <a:rPr lang="en-US" dirty="0"/>
+              <a:t> itself that handles special messages used to negotiate, accept, reject incoming parties and outgoing connections.</a:t>
+            </a:r>
+          </a:p>
+          <a:p>
+            <a:pPr lvl="1"/>
+            <a:r>
+              <a:rPr lang="en-US" dirty="0"/>
+              <a:t>This lets 7 possible protocols. </a:t>
+            </a:r>
+          </a:p>
+          <a:p>
+            <a:pPr lvl="1"/>
+            <a:endParaRPr lang="en-US" dirty="0"/>
+          </a:p>
+          <a:p>
+            <a:r>
+              <a:rPr lang="en-US" dirty="0"/>
+              <a:t>This limit applies to a Remote party pair: </a:t>
+            </a:r>
+          </a:p>
+          <a:p>
+            <a:pPr lvl="1"/>
+            <a:r>
+              <a:rPr lang="en-US" dirty="0"/>
+              <a:t>There can be any number of possible protocols in an application</a:t>
+            </a:r>
+          </a:p>
+          <a:p>
+            <a:pPr lvl="1"/>
+            <a:r>
+              <a:rPr lang="en-US" dirty="0"/>
+              <a:t>2 parties that start to interact initially negotiate the ones they can and want to use. </a:t>
+            </a:r>
+          </a:p>
+          <a:p>
+            <a:r>
+              <a:rPr lang="en-US" dirty="0"/>
+              <a:t>Any Transport between 2 parties can simultaneously support up to 7 different protocols.</a:t>
+            </a:r>
           </a:p>
         </p:txBody>
       </p:sp>
     </p:spTree>
     <p:extLst>
       <p:ext uri="{BB962C8B-B14F-4D97-AF65-F5344CB8AC3E}">
-        <p14:creationId xmlns:p14="http://schemas.microsoft.com/office/powerpoint/2010/main" val="4293717367"/>
+        <p14:creationId xmlns:p14="http://schemas.microsoft.com/office/powerpoint/2010/main" val="1820346205"/>
       </p:ext>
     </p:extLst>
   </p:cSld>
@@ -16076,7 +16424,7 @@
           <p:cNvPr id="2" name="Title 1">
             <a:extLst>
               <a:ext uri="{FF2B5EF4-FFF2-40B4-BE49-F238E27FC236}">
-                <a16:creationId xmlns:a16="http://schemas.microsoft.com/office/drawing/2014/main" id="{D234F961-5C07-CC54-4D89-C39917A7A683}"/>
+                <a16:creationId xmlns:a16="http://schemas.microsoft.com/office/drawing/2014/main" id="{7CF456EA-A507-E17F-1FF5-0DDC0C51BBFF}"/>
               </a:ext>
             </a:extLst>
           </p:cNvPr>
@@ -16093,54 +16441,18 @@
           <a:lstStyle/>
           <a:p>
             <a:r>
-              <a:rPr lang="en-US" dirty="0" err="1"/>
-              <a:t>TransportMessage</a:t>
-            </a:r>
-            <a:endParaRPr lang="en-US" dirty="0"/>
+              <a:rPr lang="en-US" dirty="0"/>
+              <a:t>Outgoing messages</a:t>
+            </a:r>
           </a:p>
         </p:txBody>
       </p:sp>
-      <p:pic>
-        <p:nvPicPr>
-          <p:cNvPr id="9" name="Content Placeholder 8" descr="Graphical user interface">
-            <a:extLst>
-              <a:ext uri="{FF2B5EF4-FFF2-40B4-BE49-F238E27FC236}">
-                <a16:creationId xmlns:a16="http://schemas.microsoft.com/office/drawing/2014/main" id="{8F2564D2-6F15-2301-1548-C78BCB93926C}"/>
-              </a:ext>
-            </a:extLst>
-          </p:cNvPr>
-          <p:cNvPicPr>
-            <a:picLocks noGrp="1" noChangeAspect="1"/>
-          </p:cNvPicPr>
-          <p:nvPr>
-            <p:ph idx="1"/>
-          </p:nvPr>
-        </p:nvPicPr>
-        <p:blipFill>
-          <a:blip r:embed="rId3">
-            <a:extLst>
-              <a:ext uri="{28A0092B-C50C-407E-A947-70E740481C1C}">
-                <a14:useLocalDpi xmlns:a14="http://schemas.microsoft.com/office/drawing/2010/main" val="0"/>
-              </a:ext>
-            </a:extLst>
-          </a:blip>
-          <a:stretch>
-            <a:fillRect/>
-          </a:stretch>
-        </p:blipFill>
-        <p:spPr>
-          <a:xfrm>
-            <a:off x="5323851" y="127222"/>
-            <a:ext cx="6684324" cy="5335732"/>
-          </a:xfrm>
-        </p:spPr>
-      </p:pic>
       <p:sp>
         <p:nvSpPr>
           <p:cNvPr id="10" name="Content Placeholder 2">
             <a:extLst>
               <a:ext uri="{FF2B5EF4-FFF2-40B4-BE49-F238E27FC236}">
-                <a16:creationId xmlns:a16="http://schemas.microsoft.com/office/drawing/2014/main" id="{D166F694-1BE5-D7EE-ACC5-2723D274C19E}"/>
+                <a16:creationId xmlns:a16="http://schemas.microsoft.com/office/drawing/2014/main" id="{1CC84568-F688-2F94-8756-D5862C7EDE27}"/>
               </a:ext>
             </a:extLst>
           </p:cNvPr>
@@ -16151,8 +16463,8 @@
         </p:nvSpPr>
         <p:spPr>
           <a:xfrm>
-            <a:off x="838199" y="1825625"/>
-            <a:ext cx="10732477" cy="4667250"/>
+            <a:off x="838200" y="1825625"/>
+            <a:ext cx="4770632" cy="4667250"/>
           </a:xfrm>
           <a:prstGeom prst="rect">
             <a:avLst/>
@@ -16160,7 +16472,7 @@
         </p:spPr>
         <p:txBody>
           <a:bodyPr vert="horz" lIns="91440" tIns="45720" rIns="91440" bIns="45720" rtlCol="0">
-            <a:normAutofit fontScale="92500" lnSpcReduction="20000"/>
+            <a:normAutofit lnSpcReduction="10000"/>
           </a:bodyPr>
           <a:lstStyle>
             <a:lvl1pPr marL="228600" indent="-228600" algn="l" defTabSz="914400" rtl="0" eaLnBrk="1" latinLnBrk="0" hangingPunct="1">
@@ -16329,154 +16641,103 @@
           <a:p>
             <a:r>
               <a:rPr lang="en-US" dirty="0"/>
-              <a:t>Prefix-Length encoding</a:t>
+              <a:t>Use </a:t>
+            </a:r>
+            <a:r>
+              <a:rPr lang="en-US" dirty="0" err="1"/>
+              <a:t>MutableSequence</a:t>
+            </a:r>
+            <a:r>
+              <a:rPr lang="en-US" dirty="0"/>
+              <a:t> and </a:t>
+            </a:r>
+            <a:r>
+              <a:rPr lang="en-US" dirty="0" err="1"/>
+              <a:t>FastByteWriter</a:t>
+            </a:r>
+            <a:r>
+              <a:rPr lang="en-US" dirty="0"/>
+              <a:t> helper</a:t>
+            </a:r>
+          </a:p>
+          <a:p>
+            <a:r>
+              <a:rPr lang="en-US" dirty="0"/>
+              <a:t>Messages must be disposed once done with them</a:t>
             </a:r>
           </a:p>
           <a:p>
             <a:pPr lvl="1"/>
             <a:r>
               <a:rPr lang="en-US" dirty="0"/>
-              <a:t>Single header byte</a:t>
+              <a:t>Allocated memory is reused.</a:t>
+            </a:r>
+          </a:p>
+          <a:p>
+            <a:r>
+              <a:rPr lang="en-US" dirty="0"/>
+              <a:t>Messages can be “Retained” when needed (reference counting)</a:t>
+            </a:r>
+          </a:p>
+          <a:p>
+            <a:r>
+              <a:rPr lang="en-US" dirty="0" err="1"/>
+              <a:t>CreateStatic</a:t>
+            </a:r>
+            <a:r>
+              <a:rPr lang="en-US" dirty="0"/>
+              <a:t> returns messages don’t need to be disposed.</a:t>
             </a:r>
           </a:p>
           <a:p>
             <a:pPr lvl="1"/>
             <a:r>
-              <a:rPr lang="en-US" dirty="0" err="1"/>
-              <a:t>MessageLength</a:t>
-            </a:r>
-            <a:r>
-              <a:rPr lang="en-US" dirty="0"/>
-              <a:t> (0 to 4 bytes)</a:t>
-            </a:r>
-          </a:p>
-          <a:p>
-            <a:pPr lvl="1"/>
-            <a:r>
-              <a:rPr lang="en-US" dirty="0"/>
-              <a:t>Payload (up to 2 GiB)</a:t>
-            </a:r>
-          </a:p>
-          <a:p>
-            <a:endParaRPr lang="en-US" dirty="0"/>
-          </a:p>
-          <a:p>
-            <a:r>
-              <a:rPr lang="en-US" dirty="0"/>
-              <a:t>Header byte: </a:t>
-            </a:r>
-            <a:r>
-              <a:rPr lang="en-US" sz="2400" dirty="0">
-                <a:latin typeface="Courier New" panose="02070309020205020404" pitchFamily="49" charset="0"/>
-                <a:cs typeface="Courier New" panose="02070309020205020404" pitchFamily="49" charset="0"/>
-              </a:rPr>
-              <a:t>L0|L1|CD|R0|R1|P0|P1|P2</a:t>
-            </a:r>
-            <a:endParaRPr lang="en-US" dirty="0">
-              <a:latin typeface="Courier New" panose="02070309020205020404" pitchFamily="49" charset="0"/>
-              <a:cs typeface="Courier New" panose="02070309020205020404" pitchFamily="49" charset="0"/>
-            </a:endParaRPr>
-          </a:p>
-          <a:p>
-            <a:pPr lvl="1"/>
-            <a:r>
-              <a:rPr lang="en-US" dirty="0"/>
-              <a:t>L0-L1: number of bytes of the message length.</a:t>
-            </a:r>
-          </a:p>
-          <a:p>
-            <a:pPr lvl="1"/>
-            <a:r>
-              <a:rPr lang="en-US" dirty="0"/>
-              <a:t>CD: “Control/ Data” bit.</a:t>
-            </a:r>
-          </a:p>
-          <a:p>
-            <a:pPr lvl="1"/>
-            <a:r>
-              <a:rPr lang="en-US" dirty="0"/>
-              <a:t>R0-R1: Reserved for future use.</a:t>
-            </a:r>
-          </a:p>
-          <a:p>
-            <a:pPr lvl="1"/>
-            <a:r>
-              <a:rPr lang="en-US" dirty="0"/>
-              <a:t>P0-P2: Protocol number (0 to 7).</a:t>
-            </a:r>
-          </a:p>
-          <a:p>
-            <a:endParaRPr lang="en-US" dirty="0"/>
-          </a:p>
-          <a:p>
-            <a:r>
-              <a:rPr lang="en-US" dirty="0"/>
-              <a:t>The Protocol Number defines the "type" of the message: the writer/serializer that has been used to write the payload and the reader/</a:t>
-            </a:r>
-            <a:r>
-              <a:rPr lang="en-US" dirty="0" err="1"/>
-              <a:t>deserializer</a:t>
-            </a:r>
-            <a:r>
-              <a:rPr lang="en-US" dirty="0"/>
-              <a:t> that must be used to read it back.</a:t>
+              <a:rPr lang="en-US" dirty="0"/>
+              <a:t>Dispose()/Retain() calls are ignored.</a:t>
             </a:r>
           </a:p>
         </p:txBody>
       </p:sp>
-      <p:sp>
-        <p:nvSpPr>
-          <p:cNvPr id="3" name="Star: 6 Points 2">
+      <p:pic>
+        <p:nvPicPr>
+          <p:cNvPr id="7" name="Picture 6">
             <a:extLst>
               <a:ext uri="{FF2B5EF4-FFF2-40B4-BE49-F238E27FC236}">
-                <a16:creationId xmlns:a16="http://schemas.microsoft.com/office/drawing/2014/main" id="{1FA01833-99FE-B7AE-E0AD-029E63353E39}"/>
+                <a16:creationId xmlns:a16="http://schemas.microsoft.com/office/drawing/2014/main" id="{4F3C883C-2C0D-B59D-784F-66E2F7E4AB40}"/>
               </a:ext>
             </a:extLst>
           </p:cNvPr>
-          <p:cNvSpPr/>
+          <p:cNvPicPr>
+            <a:picLocks noChangeAspect="1"/>
+          </p:cNvPicPr>
           <p:nvPr/>
-        </p:nvSpPr>
+        </p:nvPicPr>
+        <p:blipFill>
+          <a:blip r:embed="rId2">
+            <a:extLst>
+              <a:ext uri="{28A0092B-C50C-407E-A947-70E740481C1C}">
+                <a14:useLocalDpi xmlns:a14="http://schemas.microsoft.com/office/drawing/2010/main" val="0"/>
+              </a:ext>
+            </a:extLst>
+          </a:blip>
+          <a:stretch>
+            <a:fillRect/>
+          </a:stretch>
+        </p:blipFill>
         <p:spPr>
           <a:xfrm>
-            <a:off x="6684661" y="2153920"/>
-            <a:ext cx="1645920" cy="1473200"/>
+            <a:off x="5608832" y="0"/>
+            <a:ext cx="6355631" cy="6820491"/>
           </a:xfrm>
-          <a:prstGeom prst="star6">
+          <a:prstGeom prst="rect">
             <a:avLst/>
           </a:prstGeom>
         </p:spPr>
-        <p:style>
-          <a:lnRef idx="2">
-            <a:schemeClr val="accent1">
-              <a:shade val="50000"/>
-            </a:schemeClr>
-          </a:lnRef>
-          <a:fillRef idx="1">
-            <a:schemeClr val="accent1"/>
-          </a:fillRef>
-          <a:effectRef idx="0">
-            <a:schemeClr val="accent1"/>
-          </a:effectRef>
-          <a:fontRef idx="minor">
-            <a:schemeClr val="lt1"/>
-          </a:fontRef>
-        </p:style>
-        <p:txBody>
-          <a:bodyPr rtlCol="0" anchor="ctr"/>
-          <a:lstStyle/>
-          <a:p>
-            <a:pPr algn="ctr"/>
-            <a:r>
-              <a:rPr lang="en-US" dirty="0"/>
-              <a:t>Update Needed</a:t>
-            </a:r>
-          </a:p>
-        </p:txBody>
-      </p:sp>
+      </p:pic>
     </p:spTree>
     <p:extLst>
       <p:ext uri="{BB962C8B-B14F-4D97-AF65-F5344CB8AC3E}">
-        <p14:creationId xmlns:p14="http://schemas.microsoft.com/office/powerpoint/2010/main" val="200001624"/>
+        <p14:creationId xmlns:p14="http://schemas.microsoft.com/office/powerpoint/2010/main" val="3573920614"/>
       </p:ext>
     </p:extLst>
   </p:cSld>
@@ -16505,10 +16766,250 @@
       </p:grpSpPr>
       <p:sp>
         <p:nvSpPr>
+          <p:cNvPr id="8" name="Content Placeholder 2">
+            <a:extLst>
+              <a:ext uri="{FF2B5EF4-FFF2-40B4-BE49-F238E27FC236}">
+                <a16:creationId xmlns:a16="http://schemas.microsoft.com/office/drawing/2014/main" id="{028A174E-C40C-EE9F-57EC-1C6C06A73727}"/>
+              </a:ext>
+            </a:extLst>
+          </p:cNvPr>
+          <p:cNvSpPr txBox="1">
+            <a:spLocks/>
+          </p:cNvSpPr>
+          <p:nvPr/>
+        </p:nvSpPr>
+        <p:spPr>
+          <a:xfrm>
+            <a:off x="838201" y="1976315"/>
+            <a:ext cx="4290848" cy="4516560"/>
+          </a:xfrm>
+          <a:prstGeom prst="rect">
+            <a:avLst/>
+          </a:prstGeom>
+        </p:spPr>
+        <p:txBody>
+          <a:bodyPr vert="horz" lIns="91440" tIns="45720" rIns="91440" bIns="45720" rtlCol="0">
+            <a:normAutofit fontScale="92500"/>
+          </a:bodyPr>
+          <a:lstStyle>
+            <a:lvl1pPr marL="228600" indent="-228600" algn="l" defTabSz="914400" rtl="0" eaLnBrk="1" latinLnBrk="0" hangingPunct="1">
+              <a:lnSpc>
+                <a:spcPct val="90000"/>
+              </a:lnSpc>
+              <a:spcBef>
+                <a:spcPts val="1000"/>
+              </a:spcBef>
+              <a:buFont typeface="Arial" panose="020B0604020202020204" pitchFamily="34" charset="0"/>
+              <a:buChar char="•"/>
+              <a:defRPr sz="2800" kern="1200">
+                <a:solidFill>
+                  <a:schemeClr val="tx1"/>
+                </a:solidFill>
+                <a:latin typeface="+mn-lt"/>
+                <a:ea typeface="+mn-ea"/>
+                <a:cs typeface="+mn-cs"/>
+              </a:defRPr>
+            </a:lvl1pPr>
+            <a:lvl2pPr marL="685800" indent="-228600" algn="l" defTabSz="914400" rtl="0" eaLnBrk="1" latinLnBrk="0" hangingPunct="1">
+              <a:lnSpc>
+                <a:spcPct val="90000"/>
+              </a:lnSpc>
+              <a:spcBef>
+                <a:spcPts val="500"/>
+              </a:spcBef>
+              <a:buFont typeface="Arial" panose="020B0604020202020204" pitchFamily="34" charset="0"/>
+              <a:buChar char="•"/>
+              <a:defRPr sz="2400" kern="1200">
+                <a:solidFill>
+                  <a:schemeClr val="tx1"/>
+                </a:solidFill>
+                <a:latin typeface="+mn-lt"/>
+                <a:ea typeface="+mn-ea"/>
+                <a:cs typeface="+mn-cs"/>
+              </a:defRPr>
+            </a:lvl2pPr>
+            <a:lvl3pPr marL="1143000" indent="-228600" algn="l" defTabSz="914400" rtl="0" eaLnBrk="1" latinLnBrk="0" hangingPunct="1">
+              <a:lnSpc>
+                <a:spcPct val="90000"/>
+              </a:lnSpc>
+              <a:spcBef>
+                <a:spcPts val="500"/>
+              </a:spcBef>
+              <a:buFont typeface="Arial" panose="020B0604020202020204" pitchFamily="34" charset="0"/>
+              <a:buChar char="•"/>
+              <a:defRPr sz="2000" kern="1200">
+                <a:solidFill>
+                  <a:schemeClr val="tx1"/>
+                </a:solidFill>
+                <a:latin typeface="+mn-lt"/>
+                <a:ea typeface="+mn-ea"/>
+                <a:cs typeface="+mn-cs"/>
+              </a:defRPr>
+            </a:lvl3pPr>
+            <a:lvl4pPr marL="1600200" indent="-228600" algn="l" defTabSz="914400" rtl="0" eaLnBrk="1" latinLnBrk="0" hangingPunct="1">
+              <a:lnSpc>
+                <a:spcPct val="90000"/>
+              </a:lnSpc>
+              <a:spcBef>
+                <a:spcPts val="500"/>
+              </a:spcBef>
+              <a:buFont typeface="Arial" panose="020B0604020202020204" pitchFamily="34" charset="0"/>
+              <a:buChar char="•"/>
+              <a:defRPr sz="1800" kern="1200">
+                <a:solidFill>
+                  <a:schemeClr val="tx1"/>
+                </a:solidFill>
+                <a:latin typeface="+mn-lt"/>
+                <a:ea typeface="+mn-ea"/>
+                <a:cs typeface="+mn-cs"/>
+              </a:defRPr>
+            </a:lvl4pPr>
+            <a:lvl5pPr marL="2057400" indent="-228600" algn="l" defTabSz="914400" rtl="0" eaLnBrk="1" latinLnBrk="0" hangingPunct="1">
+              <a:lnSpc>
+                <a:spcPct val="90000"/>
+              </a:lnSpc>
+              <a:spcBef>
+                <a:spcPts val="500"/>
+              </a:spcBef>
+              <a:buFont typeface="Arial" panose="020B0604020202020204" pitchFamily="34" charset="0"/>
+              <a:buChar char="•"/>
+              <a:defRPr sz="1800" kern="1200">
+                <a:solidFill>
+                  <a:schemeClr val="tx1"/>
+                </a:solidFill>
+                <a:latin typeface="+mn-lt"/>
+                <a:ea typeface="+mn-ea"/>
+                <a:cs typeface="+mn-cs"/>
+              </a:defRPr>
+            </a:lvl5pPr>
+            <a:lvl6pPr marL="2514600" indent="-228600" algn="l" defTabSz="914400" rtl="0" eaLnBrk="1" latinLnBrk="0" hangingPunct="1">
+              <a:lnSpc>
+                <a:spcPct val="90000"/>
+              </a:lnSpc>
+              <a:spcBef>
+                <a:spcPts val="500"/>
+              </a:spcBef>
+              <a:buFont typeface="Arial" panose="020B0604020202020204" pitchFamily="34" charset="0"/>
+              <a:buChar char="•"/>
+              <a:defRPr sz="1800" kern="1200">
+                <a:solidFill>
+                  <a:schemeClr val="tx1"/>
+                </a:solidFill>
+                <a:latin typeface="+mn-lt"/>
+                <a:ea typeface="+mn-ea"/>
+                <a:cs typeface="+mn-cs"/>
+              </a:defRPr>
+            </a:lvl6pPr>
+            <a:lvl7pPr marL="2971800" indent="-228600" algn="l" defTabSz="914400" rtl="0" eaLnBrk="1" latinLnBrk="0" hangingPunct="1">
+              <a:lnSpc>
+                <a:spcPct val="90000"/>
+              </a:lnSpc>
+              <a:spcBef>
+                <a:spcPts val="500"/>
+              </a:spcBef>
+              <a:buFont typeface="Arial" panose="020B0604020202020204" pitchFamily="34" charset="0"/>
+              <a:buChar char="•"/>
+              <a:defRPr sz="1800" kern="1200">
+                <a:solidFill>
+                  <a:schemeClr val="tx1"/>
+                </a:solidFill>
+                <a:latin typeface="+mn-lt"/>
+                <a:ea typeface="+mn-ea"/>
+                <a:cs typeface="+mn-cs"/>
+              </a:defRPr>
+            </a:lvl7pPr>
+            <a:lvl8pPr marL="3429000" indent="-228600" algn="l" defTabSz="914400" rtl="0" eaLnBrk="1" latinLnBrk="0" hangingPunct="1">
+              <a:lnSpc>
+                <a:spcPct val="90000"/>
+              </a:lnSpc>
+              <a:spcBef>
+                <a:spcPts val="500"/>
+              </a:spcBef>
+              <a:buFont typeface="Arial" panose="020B0604020202020204" pitchFamily="34" charset="0"/>
+              <a:buChar char="•"/>
+              <a:defRPr sz="1800" kern="1200">
+                <a:solidFill>
+                  <a:schemeClr val="tx1"/>
+                </a:solidFill>
+                <a:latin typeface="+mn-lt"/>
+                <a:ea typeface="+mn-ea"/>
+                <a:cs typeface="+mn-cs"/>
+              </a:defRPr>
+            </a:lvl8pPr>
+            <a:lvl9pPr marL="3886200" indent="-228600" algn="l" defTabSz="914400" rtl="0" eaLnBrk="1" latinLnBrk="0" hangingPunct="1">
+              <a:lnSpc>
+                <a:spcPct val="90000"/>
+              </a:lnSpc>
+              <a:spcBef>
+                <a:spcPts val="500"/>
+              </a:spcBef>
+              <a:buFont typeface="Arial" panose="020B0604020202020204" pitchFamily="34" charset="0"/>
+              <a:buChar char="•"/>
+              <a:defRPr sz="1800" kern="1200">
+                <a:solidFill>
+                  <a:schemeClr val="tx1"/>
+                </a:solidFill>
+                <a:latin typeface="+mn-lt"/>
+                <a:ea typeface="+mn-ea"/>
+                <a:cs typeface="+mn-cs"/>
+              </a:defRPr>
+            </a:lvl9pPr>
+          </a:lstStyle>
+          <a:p>
+            <a:r>
+              <a:rPr lang="en-US" dirty="0"/>
+              <a:t>The developer never interacts with an </a:t>
+            </a:r>
+            <a:r>
+              <a:rPr lang="en-US" dirty="0" err="1"/>
+              <a:t>IncomingMessageFactory</a:t>
+            </a:r>
+            <a:r>
+              <a:rPr lang="en-US" dirty="0"/>
+              <a:t>.</a:t>
+            </a:r>
+          </a:p>
+          <a:p>
+            <a:r>
+              <a:rPr lang="en-US" dirty="0"/>
+              <a:t>Messages must be disposed once done with them</a:t>
+            </a:r>
+          </a:p>
+          <a:p>
+            <a:pPr lvl="1"/>
+            <a:r>
+              <a:rPr lang="en-US" dirty="0"/>
+              <a:t>Allocated memory is reused.</a:t>
+            </a:r>
+          </a:p>
+          <a:p>
+            <a:r>
+              <a:rPr lang="en-US" dirty="0"/>
+              <a:t>Messages can be “Retained” when needed (reference counting).</a:t>
+            </a:r>
+          </a:p>
+          <a:p>
+            <a:r>
+              <a:rPr lang="en-US" dirty="0"/>
+              <a:t>Helper: </a:t>
+            </a:r>
+            <a:r>
+              <a:rPr lang="en-US" dirty="0" err="1"/>
+              <a:t>FastByteReader</a:t>
+            </a:r>
+            <a:r>
+              <a:rPr lang="en-US" dirty="0"/>
+              <a:t>.</a:t>
+            </a:r>
+          </a:p>
+        </p:txBody>
+      </p:sp>
+      <p:sp>
+        <p:nvSpPr>
           <p:cNvPr id="2" name="Title 1">
             <a:extLst>
               <a:ext uri="{FF2B5EF4-FFF2-40B4-BE49-F238E27FC236}">
-                <a16:creationId xmlns:a16="http://schemas.microsoft.com/office/drawing/2014/main" id="{BCFC278E-8E30-3459-41D7-7185BA86296A}"/>
+                <a16:creationId xmlns:a16="http://schemas.microsoft.com/office/drawing/2014/main" id="{70FD56D0-2F2C-42C4-3EEA-E4CCE70C904F}"/>
               </a:ext>
             </a:extLst>
           </p:cNvPr>
@@ -16526,102 +17027,51 @@
           <a:p>
             <a:r>
               <a:rPr lang="en-US" dirty="0"/>
-              <a:t>The 8 protocols maximal count</a:t>
+              <a:t>Incoming messages</a:t>
             </a:r>
           </a:p>
         </p:txBody>
       </p:sp>
-      <p:sp>
-        <p:nvSpPr>
-          <p:cNvPr id="3" name="Content Placeholder 2">
+      <p:pic>
+        <p:nvPicPr>
+          <p:cNvPr id="12" name="Picture 11" descr="A screenshot of a computer&#10;&#10;Description automatically generated">
             <a:extLst>
               <a:ext uri="{FF2B5EF4-FFF2-40B4-BE49-F238E27FC236}">
-                <a16:creationId xmlns:a16="http://schemas.microsoft.com/office/drawing/2014/main" id="{AC71B80D-91E5-6DC7-AB87-2CFAAF04179A}"/>
+                <a16:creationId xmlns:a16="http://schemas.microsoft.com/office/drawing/2014/main" id="{587BD1E9-1C0F-D0BE-244B-66AB9B3638D3}"/>
               </a:ext>
             </a:extLst>
           </p:cNvPr>
-          <p:cNvSpPr>
-            <a:spLocks noGrp="1"/>
-          </p:cNvSpPr>
-          <p:nvPr>
-            <p:ph idx="1"/>
-          </p:nvPr>
-        </p:nvSpPr>
+          <p:cNvPicPr>
+            <a:picLocks noChangeAspect="1"/>
+          </p:cNvPicPr>
+          <p:nvPr/>
+        </p:nvPicPr>
+        <p:blipFill>
+          <a:blip r:embed="rId3">
+            <a:extLst>
+              <a:ext uri="{28A0092B-C50C-407E-A947-70E740481C1C}">
+                <a14:useLocalDpi xmlns:a14="http://schemas.microsoft.com/office/drawing/2010/main" val="0"/>
+              </a:ext>
+            </a:extLst>
+          </a:blip>
+          <a:stretch>
+            <a:fillRect/>
+          </a:stretch>
+        </p:blipFill>
         <p:spPr>
           <a:xfrm>
-            <a:off x="838200" y="1825625"/>
-            <a:ext cx="10515600" cy="4516560"/>
+            <a:off x="5389419" y="82636"/>
+            <a:ext cx="6713066" cy="6223571"/>
           </a:xfrm>
+          <a:prstGeom prst="rect">
+            <a:avLst/>
+          </a:prstGeom>
         </p:spPr>
-        <p:txBody>
-          <a:bodyPr>
-            <a:normAutofit lnSpcReduction="10000"/>
-          </a:bodyPr>
-          <a:lstStyle/>
-          <a:p>
-            <a:r>
-              <a:rPr lang="en-US" dirty="0"/>
-              <a:t>Only 8 protocols can be expressed.</a:t>
-            </a:r>
-          </a:p>
-          <a:p>
-            <a:pPr lvl="1"/>
-            <a:r>
-              <a:rPr lang="en-US" dirty="0"/>
-              <a:t>The “0 Protocol” protocol is reserved: this is the protocol of </a:t>
-            </a:r>
-            <a:r>
-              <a:rPr lang="en-US" dirty="0" err="1"/>
-              <a:t>CK.AppIdentity.TransportLayer</a:t>
-            </a:r>
-            <a:r>
-              <a:rPr lang="en-US" dirty="0"/>
-              <a:t> itself that handles special messages used to negotiate, accept, reject incoming parties and outgoing connections.</a:t>
-            </a:r>
-          </a:p>
-          <a:p>
-            <a:pPr lvl="1"/>
-            <a:r>
-              <a:rPr lang="en-US" dirty="0"/>
-              <a:t>This lets 7 possible protocols. </a:t>
-            </a:r>
-          </a:p>
-          <a:p>
-            <a:pPr lvl="1"/>
-            <a:endParaRPr lang="en-US" dirty="0"/>
-          </a:p>
-          <a:p>
-            <a:r>
-              <a:rPr lang="en-US" dirty="0"/>
-              <a:t>This limit applies to a Remote party pair: </a:t>
-            </a:r>
-          </a:p>
-          <a:p>
-            <a:pPr lvl="1"/>
-            <a:r>
-              <a:rPr lang="en-US" dirty="0"/>
-              <a:t>There can be any number of possible protocols in an application</a:t>
-            </a:r>
-          </a:p>
-          <a:p>
-            <a:pPr lvl="1"/>
-            <a:r>
-              <a:rPr lang="en-US" dirty="0"/>
-              <a:t>2 parties that start to interact initially negotiate the ones they can and want to use. </a:t>
-            </a:r>
-          </a:p>
-          <a:p>
-            <a:r>
-              <a:rPr lang="en-US" dirty="0"/>
-              <a:t>Any Transport between 2 parties can simultaneously support up to 7 different protocols.</a:t>
-            </a:r>
-          </a:p>
-        </p:txBody>
-      </p:sp>
+      </p:pic>
     </p:spTree>
     <p:extLst>
       <p:ext uri="{BB962C8B-B14F-4D97-AF65-F5344CB8AC3E}">
-        <p14:creationId xmlns:p14="http://schemas.microsoft.com/office/powerpoint/2010/main" val="1820346205"/>
+        <p14:creationId xmlns:p14="http://schemas.microsoft.com/office/powerpoint/2010/main" val="1074243622"/>
       </p:ext>
     </p:extLst>
   </p:cSld>
@@ -16653,7 +17103,7 @@
           <p:cNvPr id="2" name="Title 1">
             <a:extLst>
               <a:ext uri="{FF2B5EF4-FFF2-40B4-BE49-F238E27FC236}">
-                <a16:creationId xmlns:a16="http://schemas.microsoft.com/office/drawing/2014/main" id="{7CF456EA-A507-E17F-1FF5-0DDC0C51BBFF}"/>
+                <a16:creationId xmlns:a16="http://schemas.microsoft.com/office/drawing/2014/main" id="{CE512CBA-34FC-5769-694A-E657A80519BB}"/>
               </a:ext>
             </a:extLst>
           </p:cNvPr>
@@ -16671,17 +17121,17 @@
           <a:p>
             <a:r>
               <a:rPr lang="en-US" dirty="0"/>
-              <a:t>Creating new messages</a:t>
+              <a:t>Channel Feature</a:t>
             </a:r>
           </a:p>
         </p:txBody>
       </p:sp>
       <p:sp>
         <p:nvSpPr>
-          <p:cNvPr id="10" name="Content Placeholder 2">
+          <p:cNvPr id="6" name="Content Placeholder 8">
             <a:extLst>
               <a:ext uri="{FF2B5EF4-FFF2-40B4-BE49-F238E27FC236}">
-                <a16:creationId xmlns:a16="http://schemas.microsoft.com/office/drawing/2014/main" id="{1CC84568-F688-2F94-8756-D5862C7EDE27}"/>
+                <a16:creationId xmlns:a16="http://schemas.microsoft.com/office/drawing/2014/main" id="{AACCB99C-C551-6BC4-005D-BC5314B48110}"/>
               </a:ext>
             </a:extLst>
           </p:cNvPr>
@@ -16692,1448 +17142,8 @@
         </p:nvSpPr>
         <p:spPr>
           <a:xfrm>
-            <a:off x="838200" y="1825625"/>
-            <a:ext cx="10515600" cy="4516560"/>
-          </a:xfrm>
-          <a:prstGeom prst="rect">
-            <a:avLst/>
-          </a:prstGeom>
-        </p:spPr>
-        <p:txBody>
-          <a:bodyPr vert="horz" lIns="91440" tIns="45720" rIns="91440" bIns="45720" rtlCol="0">
-            <a:normAutofit lnSpcReduction="10000"/>
-          </a:bodyPr>
-          <a:lstStyle>
-            <a:lvl1pPr marL="228600" indent="-228600" algn="l" defTabSz="914400" rtl="0" eaLnBrk="1" latinLnBrk="0" hangingPunct="1">
-              <a:lnSpc>
-                <a:spcPct val="90000"/>
-              </a:lnSpc>
-              <a:spcBef>
-                <a:spcPts val="1000"/>
-              </a:spcBef>
-              <a:buFont typeface="Arial" panose="020B0604020202020204" pitchFamily="34" charset="0"/>
-              <a:buChar char="•"/>
-              <a:defRPr sz="2800" kern="1200">
-                <a:solidFill>
-                  <a:schemeClr val="tx1"/>
-                </a:solidFill>
-                <a:latin typeface="+mn-lt"/>
-                <a:ea typeface="+mn-ea"/>
-                <a:cs typeface="+mn-cs"/>
-              </a:defRPr>
-            </a:lvl1pPr>
-            <a:lvl2pPr marL="685800" indent="-228600" algn="l" defTabSz="914400" rtl="0" eaLnBrk="1" latinLnBrk="0" hangingPunct="1">
-              <a:lnSpc>
-                <a:spcPct val="90000"/>
-              </a:lnSpc>
-              <a:spcBef>
-                <a:spcPts val="500"/>
-              </a:spcBef>
-              <a:buFont typeface="Arial" panose="020B0604020202020204" pitchFamily="34" charset="0"/>
-              <a:buChar char="•"/>
-              <a:defRPr sz="2400" kern="1200">
-                <a:solidFill>
-                  <a:schemeClr val="tx1"/>
-                </a:solidFill>
-                <a:latin typeface="+mn-lt"/>
-                <a:ea typeface="+mn-ea"/>
-                <a:cs typeface="+mn-cs"/>
-              </a:defRPr>
-            </a:lvl2pPr>
-            <a:lvl3pPr marL="1143000" indent="-228600" algn="l" defTabSz="914400" rtl="0" eaLnBrk="1" latinLnBrk="0" hangingPunct="1">
-              <a:lnSpc>
-                <a:spcPct val="90000"/>
-              </a:lnSpc>
-              <a:spcBef>
-                <a:spcPts val="500"/>
-              </a:spcBef>
-              <a:buFont typeface="Arial" panose="020B0604020202020204" pitchFamily="34" charset="0"/>
-              <a:buChar char="•"/>
-              <a:defRPr sz="2000" kern="1200">
-                <a:solidFill>
-                  <a:schemeClr val="tx1"/>
-                </a:solidFill>
-                <a:latin typeface="+mn-lt"/>
-                <a:ea typeface="+mn-ea"/>
-                <a:cs typeface="+mn-cs"/>
-              </a:defRPr>
-            </a:lvl3pPr>
-            <a:lvl4pPr marL="1600200" indent="-228600" algn="l" defTabSz="914400" rtl="0" eaLnBrk="1" latinLnBrk="0" hangingPunct="1">
-              <a:lnSpc>
-                <a:spcPct val="90000"/>
-              </a:lnSpc>
-              <a:spcBef>
-                <a:spcPts val="500"/>
-              </a:spcBef>
-              <a:buFont typeface="Arial" panose="020B0604020202020204" pitchFamily="34" charset="0"/>
-              <a:buChar char="•"/>
-              <a:defRPr sz="1800" kern="1200">
-                <a:solidFill>
-                  <a:schemeClr val="tx1"/>
-                </a:solidFill>
-                <a:latin typeface="+mn-lt"/>
-                <a:ea typeface="+mn-ea"/>
-                <a:cs typeface="+mn-cs"/>
-              </a:defRPr>
-            </a:lvl4pPr>
-            <a:lvl5pPr marL="2057400" indent="-228600" algn="l" defTabSz="914400" rtl="0" eaLnBrk="1" latinLnBrk="0" hangingPunct="1">
-              <a:lnSpc>
-                <a:spcPct val="90000"/>
-              </a:lnSpc>
-              <a:spcBef>
-                <a:spcPts val="500"/>
-              </a:spcBef>
-              <a:buFont typeface="Arial" panose="020B0604020202020204" pitchFamily="34" charset="0"/>
-              <a:buChar char="•"/>
-              <a:defRPr sz="1800" kern="1200">
-                <a:solidFill>
-                  <a:schemeClr val="tx1"/>
-                </a:solidFill>
-                <a:latin typeface="+mn-lt"/>
-                <a:ea typeface="+mn-ea"/>
-                <a:cs typeface="+mn-cs"/>
-              </a:defRPr>
-            </a:lvl5pPr>
-            <a:lvl6pPr marL="2514600" indent="-228600" algn="l" defTabSz="914400" rtl="0" eaLnBrk="1" latinLnBrk="0" hangingPunct="1">
-              <a:lnSpc>
-                <a:spcPct val="90000"/>
-              </a:lnSpc>
-              <a:spcBef>
-                <a:spcPts val="500"/>
-              </a:spcBef>
-              <a:buFont typeface="Arial" panose="020B0604020202020204" pitchFamily="34" charset="0"/>
-              <a:buChar char="•"/>
-              <a:defRPr sz="1800" kern="1200">
-                <a:solidFill>
-                  <a:schemeClr val="tx1"/>
-                </a:solidFill>
-                <a:latin typeface="+mn-lt"/>
-                <a:ea typeface="+mn-ea"/>
-                <a:cs typeface="+mn-cs"/>
-              </a:defRPr>
-            </a:lvl6pPr>
-            <a:lvl7pPr marL="2971800" indent="-228600" algn="l" defTabSz="914400" rtl="0" eaLnBrk="1" latinLnBrk="0" hangingPunct="1">
-              <a:lnSpc>
-                <a:spcPct val="90000"/>
-              </a:lnSpc>
-              <a:spcBef>
-                <a:spcPts val="500"/>
-              </a:spcBef>
-              <a:buFont typeface="Arial" panose="020B0604020202020204" pitchFamily="34" charset="0"/>
-              <a:buChar char="•"/>
-              <a:defRPr sz="1800" kern="1200">
-                <a:solidFill>
-                  <a:schemeClr val="tx1"/>
-                </a:solidFill>
-                <a:latin typeface="+mn-lt"/>
-                <a:ea typeface="+mn-ea"/>
-                <a:cs typeface="+mn-cs"/>
-              </a:defRPr>
-            </a:lvl7pPr>
-            <a:lvl8pPr marL="3429000" indent="-228600" algn="l" defTabSz="914400" rtl="0" eaLnBrk="1" latinLnBrk="0" hangingPunct="1">
-              <a:lnSpc>
-                <a:spcPct val="90000"/>
-              </a:lnSpc>
-              <a:spcBef>
-                <a:spcPts val="500"/>
-              </a:spcBef>
-              <a:buFont typeface="Arial" panose="020B0604020202020204" pitchFamily="34" charset="0"/>
-              <a:buChar char="•"/>
-              <a:defRPr sz="1800" kern="1200">
-                <a:solidFill>
-                  <a:schemeClr val="tx1"/>
-                </a:solidFill>
-                <a:latin typeface="+mn-lt"/>
-                <a:ea typeface="+mn-ea"/>
-                <a:cs typeface="+mn-cs"/>
-              </a:defRPr>
-            </a:lvl8pPr>
-            <a:lvl9pPr marL="3886200" indent="-228600" algn="l" defTabSz="914400" rtl="0" eaLnBrk="1" latinLnBrk="0" hangingPunct="1">
-              <a:lnSpc>
-                <a:spcPct val="90000"/>
-              </a:lnSpc>
-              <a:spcBef>
-                <a:spcPts val="500"/>
-              </a:spcBef>
-              <a:buFont typeface="Arial" panose="020B0604020202020204" pitchFamily="34" charset="0"/>
-              <a:buChar char="•"/>
-              <a:defRPr sz="1800" kern="1200">
-                <a:solidFill>
-                  <a:schemeClr val="tx1"/>
-                </a:solidFill>
-                <a:latin typeface="+mn-lt"/>
-                <a:ea typeface="+mn-ea"/>
-                <a:cs typeface="+mn-cs"/>
-              </a:defRPr>
-            </a:lvl9pPr>
-          </a:lstStyle>
-          <a:p>
-            <a:r>
-              <a:rPr lang="en-US" dirty="0"/>
-              <a:t>Only an </a:t>
-            </a:r>
-            <a:r>
-              <a:rPr lang="en-US" sz="2000" dirty="0" err="1">
-                <a:latin typeface="Consolas" panose="020B0609020204030204" pitchFamily="49" charset="0"/>
-                <a:cs typeface="Courier New" panose="02070309020205020404" pitchFamily="49" charset="0"/>
-              </a:rPr>
-              <a:t>OutgoingMessageFactory</a:t>
-            </a:r>
-            <a:r>
-              <a:rPr lang="en-US" dirty="0"/>
-              <a:t> can </a:t>
-            </a:r>
-            <a:br>
-              <a:rPr lang="en-US" dirty="0"/>
-            </a:br>
-            <a:r>
-              <a:rPr lang="en-US" dirty="0"/>
-              <a:t>create new messages:</a:t>
-            </a:r>
-          </a:p>
-          <a:p>
-            <a:endParaRPr lang="en-US" dirty="0"/>
-          </a:p>
-          <a:p>
-            <a:endParaRPr lang="en-US" dirty="0"/>
-          </a:p>
-          <a:p>
-            <a:endParaRPr lang="en-US" dirty="0"/>
-          </a:p>
-          <a:p>
-            <a:r>
-              <a:rPr lang="en-US" dirty="0"/>
-              <a:t>Messages must be disposed once done with them</a:t>
-            </a:r>
-          </a:p>
-          <a:p>
-            <a:pPr lvl="1"/>
-            <a:r>
-              <a:rPr lang="en-US" dirty="0"/>
-              <a:t>Allocated memory is reused.</a:t>
-            </a:r>
-          </a:p>
-          <a:p>
-            <a:r>
-              <a:rPr lang="en-US" dirty="0"/>
-              <a:t>Messages can be “Retained” when needed (reference counting)</a:t>
-            </a:r>
-          </a:p>
-          <a:p>
-            <a:r>
-              <a:rPr lang="en-US" dirty="0" err="1"/>
-              <a:t>CreateStatic</a:t>
-            </a:r>
-            <a:r>
-              <a:rPr lang="en-US" dirty="0"/>
-              <a:t> returns messages don’t need to be disposed.</a:t>
-            </a:r>
-          </a:p>
-          <a:p>
-            <a:pPr lvl="1"/>
-            <a:r>
-              <a:rPr lang="en-US" dirty="0"/>
-              <a:t>Dispose()/Retain() calls are ignored.</a:t>
-            </a:r>
-          </a:p>
-        </p:txBody>
-      </p:sp>
-      <p:sp>
-        <p:nvSpPr>
-          <p:cNvPr id="12" name="TextBox 11">
-            <a:extLst>
-              <a:ext uri="{FF2B5EF4-FFF2-40B4-BE49-F238E27FC236}">
-                <a16:creationId xmlns:a16="http://schemas.microsoft.com/office/drawing/2014/main" id="{B101A3D9-3364-B380-BE27-B3376CE6CD06}"/>
-              </a:ext>
-            </a:extLst>
-          </p:cNvPr>
-          <p:cNvSpPr txBox="1"/>
-          <p:nvPr/>
-        </p:nvSpPr>
-        <p:spPr>
-          <a:xfrm>
-            <a:off x="1078524" y="2715481"/>
-            <a:ext cx="9448800" cy="1477328"/>
-          </a:xfrm>
-          <a:prstGeom prst="rect">
-            <a:avLst/>
-          </a:prstGeom>
-          <a:noFill/>
-        </p:spPr>
-        <p:txBody>
-          <a:bodyPr wrap="square">
-            <a:spAutoFit/>
-          </a:bodyPr>
-          <a:lstStyle/>
-          <a:p>
-            <a:r>
-              <a:rPr lang="en-US" sz="1800" dirty="0">
-                <a:solidFill>
-                  <a:srgbClr val="0000FF"/>
-                </a:solidFill>
-                <a:latin typeface="Consolas" panose="020B0609020204030204" pitchFamily="49" charset="0"/>
-              </a:rPr>
-              <a:t>public</a:t>
-            </a:r>
-            <a:r>
-              <a:rPr lang="en-US" sz="1800" dirty="0">
-                <a:solidFill>
-                  <a:srgbClr val="000000"/>
-                </a:solidFill>
-                <a:latin typeface="Consolas" panose="020B0609020204030204" pitchFamily="49" charset="0"/>
-              </a:rPr>
-              <a:t> </a:t>
-            </a:r>
-            <a:r>
-              <a:rPr lang="en-US" sz="1800" dirty="0" err="1">
-                <a:solidFill>
-                  <a:srgbClr val="000000"/>
-                </a:solidFill>
-                <a:latin typeface="Consolas" panose="020B0609020204030204" pitchFamily="49" charset="0"/>
-              </a:rPr>
-              <a:t>TransportMessage</a:t>
-            </a:r>
-            <a:r>
-              <a:rPr lang="en-US" sz="1800" dirty="0">
-                <a:solidFill>
-                  <a:srgbClr val="000000"/>
-                </a:solidFill>
-                <a:latin typeface="Consolas" panose="020B0609020204030204" pitchFamily="49" charset="0"/>
-              </a:rPr>
-              <a:t> Create( Action&lt;</a:t>
-            </a:r>
-            <a:r>
-              <a:rPr lang="en-US" sz="1800" dirty="0" err="1">
-                <a:solidFill>
-                  <a:srgbClr val="000000"/>
-                </a:solidFill>
-                <a:latin typeface="Consolas" panose="020B0609020204030204" pitchFamily="49" charset="0"/>
-              </a:rPr>
-              <a:t>IBufferWriter</a:t>
-            </a:r>
-            <a:r>
-              <a:rPr lang="en-US" sz="1800" dirty="0">
-                <a:solidFill>
-                  <a:srgbClr val="000000"/>
-                </a:solidFill>
-                <a:latin typeface="Consolas" panose="020B0609020204030204" pitchFamily="49" charset="0"/>
-              </a:rPr>
-              <a:t>&lt;</a:t>
-            </a:r>
-            <a:r>
-              <a:rPr lang="en-US" sz="1800" dirty="0">
-                <a:solidFill>
-                  <a:srgbClr val="0000FF"/>
-                </a:solidFill>
-                <a:latin typeface="Consolas" panose="020B0609020204030204" pitchFamily="49" charset="0"/>
-              </a:rPr>
-              <a:t>byte</a:t>
-            </a:r>
-            <a:r>
-              <a:rPr lang="en-US" sz="1800" dirty="0">
-                <a:solidFill>
-                  <a:srgbClr val="000000"/>
-                </a:solidFill>
-                <a:latin typeface="Consolas" panose="020B0609020204030204" pitchFamily="49" charset="0"/>
-              </a:rPr>
-              <a:t>&gt;&gt; writer,</a:t>
-            </a:r>
-          </a:p>
-          <a:p>
-            <a:r>
-              <a:rPr lang="en-US" sz="1800" dirty="0">
-                <a:solidFill>
-                  <a:srgbClr val="000000"/>
-                </a:solidFill>
-                <a:latin typeface="Consolas" panose="020B0609020204030204" pitchFamily="49" charset="0"/>
-              </a:rPr>
-              <a:t>                                </a:t>
-            </a:r>
-            <a:r>
-              <a:rPr lang="en-US" sz="1800" dirty="0">
-                <a:solidFill>
-                  <a:srgbClr val="0000FF"/>
-                </a:solidFill>
-                <a:latin typeface="Consolas" panose="020B0609020204030204" pitchFamily="49" charset="0"/>
-              </a:rPr>
-              <a:t>bool</a:t>
-            </a:r>
-            <a:r>
-              <a:rPr lang="en-US" sz="1800" dirty="0">
-                <a:solidFill>
-                  <a:srgbClr val="000000"/>
-                </a:solidFill>
-                <a:latin typeface="Consolas" panose="020B0609020204030204" pitchFamily="49" charset="0"/>
-              </a:rPr>
-              <a:t> </a:t>
-            </a:r>
-            <a:r>
-              <a:rPr lang="en-US" sz="1800" dirty="0" err="1">
-                <a:solidFill>
-                  <a:srgbClr val="000000"/>
-                </a:solidFill>
-                <a:latin typeface="Consolas" panose="020B0609020204030204" pitchFamily="49" charset="0"/>
-              </a:rPr>
-              <a:t>isControl</a:t>
-            </a:r>
-            <a:r>
-              <a:rPr lang="en-US" sz="1800" dirty="0">
-                <a:solidFill>
-                  <a:srgbClr val="000000"/>
-                </a:solidFill>
-                <a:latin typeface="Consolas" panose="020B0609020204030204" pitchFamily="49" charset="0"/>
-              </a:rPr>
-              <a:t> = </a:t>
-            </a:r>
-            <a:r>
-              <a:rPr lang="en-US" sz="1800" dirty="0">
-                <a:solidFill>
-                  <a:srgbClr val="0000FF"/>
-                </a:solidFill>
-                <a:latin typeface="Consolas" panose="020B0609020204030204" pitchFamily="49" charset="0"/>
-              </a:rPr>
-              <a:t>false </a:t>
-            </a:r>
-            <a:r>
-              <a:rPr lang="en-US" sz="1800" dirty="0">
-                <a:solidFill>
-                  <a:srgbClr val="000000"/>
-                </a:solidFill>
-                <a:latin typeface="Consolas" panose="020B0609020204030204" pitchFamily="49" charset="0"/>
-              </a:rPr>
-              <a:t>);</a:t>
-            </a:r>
-          </a:p>
-          <a:p>
-            <a:r>
-              <a:rPr lang="en-US" sz="1800" dirty="0">
-                <a:solidFill>
-                  <a:srgbClr val="0000FF"/>
-                </a:solidFill>
-                <a:latin typeface="Consolas" panose="020B0609020204030204" pitchFamily="49" charset="0"/>
-              </a:rPr>
-              <a:t>public</a:t>
-            </a:r>
-            <a:r>
-              <a:rPr lang="en-US" sz="1800" dirty="0">
-                <a:solidFill>
-                  <a:srgbClr val="000000"/>
-                </a:solidFill>
-                <a:latin typeface="Consolas" panose="020B0609020204030204" pitchFamily="49" charset="0"/>
-              </a:rPr>
-              <a:t> </a:t>
-            </a:r>
-            <a:r>
-              <a:rPr lang="en-US" sz="1800" dirty="0" err="1">
-                <a:solidFill>
-                  <a:srgbClr val="000000"/>
-                </a:solidFill>
-                <a:latin typeface="Consolas" panose="020B0609020204030204" pitchFamily="49" charset="0"/>
-              </a:rPr>
-              <a:t>TransportMessage</a:t>
-            </a:r>
-            <a:r>
-              <a:rPr lang="en-US" sz="1800" dirty="0">
-                <a:solidFill>
-                  <a:srgbClr val="000000"/>
-                </a:solidFill>
-                <a:latin typeface="Consolas" panose="020B0609020204030204" pitchFamily="49" charset="0"/>
-              </a:rPr>
-              <a:t> Create( Action&lt;</a:t>
-            </a:r>
-            <a:r>
-              <a:rPr lang="en-US" sz="1800" dirty="0" err="1">
-                <a:solidFill>
-                  <a:srgbClr val="000000"/>
-                </a:solidFill>
-                <a:latin typeface="Consolas" panose="020B0609020204030204" pitchFamily="49" charset="0"/>
-              </a:rPr>
-              <a:t>MutableSequence</a:t>
-            </a:r>
-            <a:r>
-              <a:rPr lang="en-US" sz="1800" dirty="0">
-                <a:solidFill>
-                  <a:srgbClr val="000000"/>
-                </a:solidFill>
-                <a:latin typeface="Consolas" panose="020B0609020204030204" pitchFamily="49" charset="0"/>
-              </a:rPr>
-              <a:t>&lt;</a:t>
-            </a:r>
-            <a:r>
-              <a:rPr lang="en-US" sz="1800" dirty="0">
-                <a:solidFill>
-                  <a:srgbClr val="0000FF"/>
-                </a:solidFill>
-                <a:latin typeface="Consolas" panose="020B0609020204030204" pitchFamily="49" charset="0"/>
-              </a:rPr>
-              <a:t>byte</a:t>
-            </a:r>
-            <a:r>
-              <a:rPr lang="en-US" sz="1800" dirty="0">
-                <a:solidFill>
-                  <a:srgbClr val="000000"/>
-                </a:solidFill>
-                <a:latin typeface="Consolas" panose="020B0609020204030204" pitchFamily="49" charset="0"/>
-              </a:rPr>
-              <a:t>&gt;&gt; writer,</a:t>
-            </a:r>
-          </a:p>
-          <a:p>
-            <a:r>
-              <a:rPr lang="en-US" sz="1800" dirty="0">
-                <a:solidFill>
-                  <a:srgbClr val="000000"/>
-                </a:solidFill>
-                <a:latin typeface="Consolas" panose="020B0609020204030204" pitchFamily="49" charset="0"/>
-              </a:rPr>
-              <a:t>                                </a:t>
-            </a:r>
-            <a:r>
-              <a:rPr lang="en-US" sz="1800" dirty="0">
-                <a:solidFill>
-                  <a:srgbClr val="0000FF"/>
-                </a:solidFill>
-                <a:latin typeface="Consolas" panose="020B0609020204030204" pitchFamily="49" charset="0"/>
-              </a:rPr>
-              <a:t>bool</a:t>
-            </a:r>
-            <a:r>
-              <a:rPr lang="en-US" sz="1800" dirty="0">
-                <a:solidFill>
-                  <a:srgbClr val="000000"/>
-                </a:solidFill>
-                <a:latin typeface="Consolas" panose="020B0609020204030204" pitchFamily="49" charset="0"/>
-              </a:rPr>
-              <a:t> </a:t>
-            </a:r>
-            <a:r>
-              <a:rPr lang="en-US" sz="1800" dirty="0" err="1">
-                <a:solidFill>
-                  <a:srgbClr val="000000"/>
-                </a:solidFill>
-                <a:latin typeface="Consolas" panose="020B0609020204030204" pitchFamily="49" charset="0"/>
-              </a:rPr>
-              <a:t>isControl</a:t>
-            </a:r>
-            <a:r>
-              <a:rPr lang="en-US" sz="1800" dirty="0">
-                <a:solidFill>
-                  <a:srgbClr val="000000"/>
-                </a:solidFill>
-                <a:latin typeface="Consolas" panose="020B0609020204030204" pitchFamily="49" charset="0"/>
-              </a:rPr>
-              <a:t> = </a:t>
-            </a:r>
-            <a:r>
-              <a:rPr lang="en-US" sz="1800" dirty="0">
-                <a:solidFill>
-                  <a:srgbClr val="0000FF"/>
-                </a:solidFill>
-                <a:latin typeface="Consolas" panose="020B0609020204030204" pitchFamily="49" charset="0"/>
-              </a:rPr>
-              <a:t>false </a:t>
-            </a:r>
-            <a:r>
-              <a:rPr lang="en-US" sz="1800" dirty="0">
-                <a:solidFill>
-                  <a:srgbClr val="000000"/>
-                </a:solidFill>
-                <a:latin typeface="Consolas" panose="020B0609020204030204" pitchFamily="49" charset="0"/>
-              </a:rPr>
-              <a:t>);</a:t>
-            </a:r>
-          </a:p>
-          <a:p>
-            <a:endParaRPr lang="en-US" sz="1800" dirty="0">
-              <a:solidFill>
-                <a:srgbClr val="000000"/>
-              </a:solidFill>
-              <a:latin typeface="Consolas" panose="020B0609020204030204" pitchFamily="49" charset="0"/>
-            </a:endParaRPr>
-          </a:p>
-        </p:txBody>
-      </p:sp>
-      <p:pic>
-        <p:nvPicPr>
-          <p:cNvPr id="16" name="Content Placeholder 15" descr="Graphical user interface, text, application, chat or text message&#10;&#10;Description automatically generated">
-            <a:extLst>
-              <a:ext uri="{FF2B5EF4-FFF2-40B4-BE49-F238E27FC236}">
-                <a16:creationId xmlns:a16="http://schemas.microsoft.com/office/drawing/2014/main" id="{B9C368B7-B971-1A32-863D-EFEC2CD1A66D}"/>
-              </a:ext>
-            </a:extLst>
-          </p:cNvPr>
-          <p:cNvPicPr>
-            <a:picLocks noGrp="1" noChangeAspect="1"/>
-          </p:cNvPicPr>
-          <p:nvPr>
-            <p:ph idx="1"/>
-          </p:nvPr>
-        </p:nvPicPr>
-        <p:blipFill>
-          <a:blip r:embed="rId2">
-            <a:extLst>
-              <a:ext uri="{28A0092B-C50C-407E-A947-70E740481C1C}">
-                <a14:useLocalDpi xmlns:a14="http://schemas.microsoft.com/office/drawing/2010/main" val="0"/>
-              </a:ext>
-            </a:extLst>
-          </a:blip>
-          <a:stretch>
-            <a:fillRect/>
-          </a:stretch>
-        </p:blipFill>
-        <p:spPr>
-          <a:xfrm>
-            <a:off x="6365630" y="515815"/>
-            <a:ext cx="5716130" cy="2047266"/>
-          </a:xfrm>
-        </p:spPr>
-      </p:pic>
-      <p:sp>
-        <p:nvSpPr>
-          <p:cNvPr id="3" name="Star: 6 Points 2">
-            <a:extLst>
-              <a:ext uri="{FF2B5EF4-FFF2-40B4-BE49-F238E27FC236}">
-                <a16:creationId xmlns:a16="http://schemas.microsoft.com/office/drawing/2014/main" id="{D5A5D772-160E-343F-FF5F-6DE7C09F6603}"/>
-              </a:ext>
-            </a:extLst>
-          </p:cNvPr>
-          <p:cNvSpPr/>
-          <p:nvPr/>
-        </p:nvSpPr>
-        <p:spPr>
-          <a:xfrm>
-            <a:off x="2051701" y="60753"/>
-            <a:ext cx="1645920" cy="1473200"/>
-          </a:xfrm>
-          <a:prstGeom prst="star6">
-            <a:avLst/>
-          </a:prstGeom>
-        </p:spPr>
-        <p:style>
-          <a:lnRef idx="2">
-            <a:schemeClr val="accent1">
-              <a:shade val="50000"/>
-            </a:schemeClr>
-          </a:lnRef>
-          <a:fillRef idx="1">
-            <a:schemeClr val="accent1"/>
-          </a:fillRef>
-          <a:effectRef idx="0">
-            <a:schemeClr val="accent1"/>
-          </a:effectRef>
-          <a:fontRef idx="minor">
-            <a:schemeClr val="lt1"/>
-          </a:fontRef>
-        </p:style>
-        <p:txBody>
-          <a:bodyPr rtlCol="0" anchor="ctr"/>
-          <a:lstStyle/>
-          <a:p>
-            <a:pPr algn="ctr"/>
-            <a:r>
-              <a:rPr lang="en-US" dirty="0"/>
-              <a:t>Update Needed</a:t>
-            </a:r>
-          </a:p>
-        </p:txBody>
-      </p:sp>
-    </p:spTree>
-    <p:extLst>
-      <p:ext uri="{BB962C8B-B14F-4D97-AF65-F5344CB8AC3E}">
-        <p14:creationId xmlns:p14="http://schemas.microsoft.com/office/powerpoint/2010/main" val="3573920614"/>
-      </p:ext>
-    </p:extLst>
-  </p:cSld>
-  <p:clrMapOvr>
-    <a:masterClrMapping/>
-  </p:clrMapOvr>
-</p:sld>
-</file>
-
-<file path=ppt/slides/slide35.xml><?xml version="1.0" encoding="utf-8"?>
-<p:sld xmlns:a="http://schemas.openxmlformats.org/drawingml/2006/main" xmlns:r="http://schemas.openxmlformats.org/officeDocument/2006/relationships" xmlns:p="http://schemas.openxmlformats.org/presentationml/2006/main">
-  <p:cSld>
-    <p:spTree>
-      <p:nvGrpSpPr>
-        <p:cNvPr id="1" name=""/>
-        <p:cNvGrpSpPr/>
-        <p:nvPr/>
-      </p:nvGrpSpPr>
-      <p:grpSpPr>
-        <a:xfrm>
-          <a:off x="0" y="0"/>
-          <a:ext cx="0" cy="0"/>
-          <a:chOff x="0" y="0"/>
-          <a:chExt cx="0" cy="0"/>
-        </a:xfrm>
-      </p:grpSpPr>
-      <p:sp>
-        <p:nvSpPr>
-          <p:cNvPr id="8" name="Content Placeholder 2">
-            <a:extLst>
-              <a:ext uri="{FF2B5EF4-FFF2-40B4-BE49-F238E27FC236}">
-                <a16:creationId xmlns:a16="http://schemas.microsoft.com/office/drawing/2014/main" id="{028A174E-C40C-EE9F-57EC-1C6C06A73727}"/>
-              </a:ext>
-            </a:extLst>
-          </p:cNvPr>
-          <p:cNvSpPr txBox="1">
-            <a:spLocks/>
-          </p:cNvSpPr>
-          <p:nvPr/>
-        </p:nvSpPr>
-        <p:spPr>
-          <a:xfrm>
-            <a:off x="838200" y="1825625"/>
-            <a:ext cx="8607669" cy="4516560"/>
-          </a:xfrm>
-          <a:prstGeom prst="rect">
-            <a:avLst/>
-          </a:prstGeom>
-        </p:spPr>
-        <p:txBody>
-          <a:bodyPr vert="horz" lIns="91440" tIns="45720" rIns="91440" bIns="45720" rtlCol="0">
-            <a:normAutofit fontScale="92500" lnSpcReduction="10000"/>
-          </a:bodyPr>
-          <a:lstStyle>
-            <a:lvl1pPr marL="228600" indent="-228600" algn="l" defTabSz="914400" rtl="0" eaLnBrk="1" latinLnBrk="0" hangingPunct="1">
-              <a:lnSpc>
-                <a:spcPct val="90000"/>
-              </a:lnSpc>
-              <a:spcBef>
-                <a:spcPts val="1000"/>
-              </a:spcBef>
-              <a:buFont typeface="Arial" panose="020B0604020202020204" pitchFamily="34" charset="0"/>
-              <a:buChar char="•"/>
-              <a:defRPr sz="2800" kern="1200">
-                <a:solidFill>
-                  <a:schemeClr val="tx1"/>
-                </a:solidFill>
-                <a:latin typeface="+mn-lt"/>
-                <a:ea typeface="+mn-ea"/>
-                <a:cs typeface="+mn-cs"/>
-              </a:defRPr>
-            </a:lvl1pPr>
-            <a:lvl2pPr marL="685800" indent="-228600" algn="l" defTabSz="914400" rtl="0" eaLnBrk="1" latinLnBrk="0" hangingPunct="1">
-              <a:lnSpc>
-                <a:spcPct val="90000"/>
-              </a:lnSpc>
-              <a:spcBef>
-                <a:spcPts val="500"/>
-              </a:spcBef>
-              <a:buFont typeface="Arial" panose="020B0604020202020204" pitchFamily="34" charset="0"/>
-              <a:buChar char="•"/>
-              <a:defRPr sz="2400" kern="1200">
-                <a:solidFill>
-                  <a:schemeClr val="tx1"/>
-                </a:solidFill>
-                <a:latin typeface="+mn-lt"/>
-                <a:ea typeface="+mn-ea"/>
-                <a:cs typeface="+mn-cs"/>
-              </a:defRPr>
-            </a:lvl2pPr>
-            <a:lvl3pPr marL="1143000" indent="-228600" algn="l" defTabSz="914400" rtl="0" eaLnBrk="1" latinLnBrk="0" hangingPunct="1">
-              <a:lnSpc>
-                <a:spcPct val="90000"/>
-              </a:lnSpc>
-              <a:spcBef>
-                <a:spcPts val="500"/>
-              </a:spcBef>
-              <a:buFont typeface="Arial" panose="020B0604020202020204" pitchFamily="34" charset="0"/>
-              <a:buChar char="•"/>
-              <a:defRPr sz="2000" kern="1200">
-                <a:solidFill>
-                  <a:schemeClr val="tx1"/>
-                </a:solidFill>
-                <a:latin typeface="+mn-lt"/>
-                <a:ea typeface="+mn-ea"/>
-                <a:cs typeface="+mn-cs"/>
-              </a:defRPr>
-            </a:lvl3pPr>
-            <a:lvl4pPr marL="1600200" indent="-228600" algn="l" defTabSz="914400" rtl="0" eaLnBrk="1" latinLnBrk="0" hangingPunct="1">
-              <a:lnSpc>
-                <a:spcPct val="90000"/>
-              </a:lnSpc>
-              <a:spcBef>
-                <a:spcPts val="500"/>
-              </a:spcBef>
-              <a:buFont typeface="Arial" panose="020B0604020202020204" pitchFamily="34" charset="0"/>
-              <a:buChar char="•"/>
-              <a:defRPr sz="1800" kern="1200">
-                <a:solidFill>
-                  <a:schemeClr val="tx1"/>
-                </a:solidFill>
-                <a:latin typeface="+mn-lt"/>
-                <a:ea typeface="+mn-ea"/>
-                <a:cs typeface="+mn-cs"/>
-              </a:defRPr>
-            </a:lvl4pPr>
-            <a:lvl5pPr marL="2057400" indent="-228600" algn="l" defTabSz="914400" rtl="0" eaLnBrk="1" latinLnBrk="0" hangingPunct="1">
-              <a:lnSpc>
-                <a:spcPct val="90000"/>
-              </a:lnSpc>
-              <a:spcBef>
-                <a:spcPts val="500"/>
-              </a:spcBef>
-              <a:buFont typeface="Arial" panose="020B0604020202020204" pitchFamily="34" charset="0"/>
-              <a:buChar char="•"/>
-              <a:defRPr sz="1800" kern="1200">
-                <a:solidFill>
-                  <a:schemeClr val="tx1"/>
-                </a:solidFill>
-                <a:latin typeface="+mn-lt"/>
-                <a:ea typeface="+mn-ea"/>
-                <a:cs typeface="+mn-cs"/>
-              </a:defRPr>
-            </a:lvl5pPr>
-            <a:lvl6pPr marL="2514600" indent="-228600" algn="l" defTabSz="914400" rtl="0" eaLnBrk="1" latinLnBrk="0" hangingPunct="1">
-              <a:lnSpc>
-                <a:spcPct val="90000"/>
-              </a:lnSpc>
-              <a:spcBef>
-                <a:spcPts val="500"/>
-              </a:spcBef>
-              <a:buFont typeface="Arial" panose="020B0604020202020204" pitchFamily="34" charset="0"/>
-              <a:buChar char="•"/>
-              <a:defRPr sz="1800" kern="1200">
-                <a:solidFill>
-                  <a:schemeClr val="tx1"/>
-                </a:solidFill>
-                <a:latin typeface="+mn-lt"/>
-                <a:ea typeface="+mn-ea"/>
-                <a:cs typeface="+mn-cs"/>
-              </a:defRPr>
-            </a:lvl6pPr>
-            <a:lvl7pPr marL="2971800" indent="-228600" algn="l" defTabSz="914400" rtl="0" eaLnBrk="1" latinLnBrk="0" hangingPunct="1">
-              <a:lnSpc>
-                <a:spcPct val="90000"/>
-              </a:lnSpc>
-              <a:spcBef>
-                <a:spcPts val="500"/>
-              </a:spcBef>
-              <a:buFont typeface="Arial" panose="020B0604020202020204" pitchFamily="34" charset="0"/>
-              <a:buChar char="•"/>
-              <a:defRPr sz="1800" kern="1200">
-                <a:solidFill>
-                  <a:schemeClr val="tx1"/>
-                </a:solidFill>
-                <a:latin typeface="+mn-lt"/>
-                <a:ea typeface="+mn-ea"/>
-                <a:cs typeface="+mn-cs"/>
-              </a:defRPr>
-            </a:lvl7pPr>
-            <a:lvl8pPr marL="3429000" indent="-228600" algn="l" defTabSz="914400" rtl="0" eaLnBrk="1" latinLnBrk="0" hangingPunct="1">
-              <a:lnSpc>
-                <a:spcPct val="90000"/>
-              </a:lnSpc>
-              <a:spcBef>
-                <a:spcPts val="500"/>
-              </a:spcBef>
-              <a:buFont typeface="Arial" panose="020B0604020202020204" pitchFamily="34" charset="0"/>
-              <a:buChar char="•"/>
-              <a:defRPr sz="1800" kern="1200">
-                <a:solidFill>
-                  <a:schemeClr val="tx1"/>
-                </a:solidFill>
-                <a:latin typeface="+mn-lt"/>
-                <a:ea typeface="+mn-ea"/>
-                <a:cs typeface="+mn-cs"/>
-              </a:defRPr>
-            </a:lvl8pPr>
-            <a:lvl9pPr marL="3886200" indent="-228600" algn="l" defTabSz="914400" rtl="0" eaLnBrk="1" latinLnBrk="0" hangingPunct="1">
-              <a:lnSpc>
-                <a:spcPct val="90000"/>
-              </a:lnSpc>
-              <a:spcBef>
-                <a:spcPts val="500"/>
-              </a:spcBef>
-              <a:buFont typeface="Arial" panose="020B0604020202020204" pitchFamily="34" charset="0"/>
-              <a:buChar char="•"/>
-              <a:defRPr sz="1800" kern="1200">
-                <a:solidFill>
-                  <a:schemeClr val="tx1"/>
-                </a:solidFill>
-                <a:latin typeface="+mn-lt"/>
-                <a:ea typeface="+mn-ea"/>
-                <a:cs typeface="+mn-cs"/>
-              </a:defRPr>
-            </a:lvl9pPr>
-          </a:lstStyle>
-          <a:p>
-            <a:r>
-              <a:rPr lang="en-US" dirty="0"/>
-              <a:t>Only an </a:t>
-            </a:r>
-            <a:r>
-              <a:rPr lang="en-US" sz="2000" dirty="0" err="1">
-                <a:latin typeface="Consolas" panose="020B0609020204030204" pitchFamily="49" charset="0"/>
-                <a:cs typeface="Courier New" panose="02070309020205020404" pitchFamily="49" charset="0"/>
-              </a:rPr>
-              <a:t>IncomingMessageFactory</a:t>
-            </a:r>
-            <a:r>
-              <a:rPr lang="en-US" dirty="0"/>
-              <a:t> can read messages:</a:t>
-            </a:r>
-          </a:p>
-          <a:p>
-            <a:endParaRPr lang="en-US" dirty="0"/>
-          </a:p>
-          <a:p>
-            <a:endParaRPr lang="en-US" dirty="0"/>
-          </a:p>
-          <a:p>
-            <a:endParaRPr lang="en-US" dirty="0"/>
-          </a:p>
-          <a:p>
-            <a:endParaRPr lang="en-US" dirty="0"/>
-          </a:p>
-          <a:p>
-            <a:r>
-              <a:rPr lang="en-US" dirty="0"/>
-              <a:t>From any asynchronous function that can fill a buffer with an exact count of bytes.</a:t>
-            </a:r>
-          </a:p>
-          <a:p>
-            <a:r>
-              <a:rPr lang="en-US" dirty="0"/>
-              <a:t>The developer never interacts directly with an </a:t>
-            </a:r>
-            <a:r>
-              <a:rPr lang="en-US" dirty="0" err="1"/>
-              <a:t>IncomingMessageFactory</a:t>
-            </a:r>
-            <a:r>
-              <a:rPr lang="en-US" dirty="0"/>
-              <a:t>.</a:t>
-            </a:r>
-          </a:p>
-          <a:p>
-            <a:r>
-              <a:rPr lang="en-US" dirty="0"/>
-              <a:t>Concrete Transport implementations provide the </a:t>
-            </a:r>
-            <a:r>
-              <a:rPr lang="en-US" sz="2200" dirty="0" err="1">
-                <a:solidFill>
-                  <a:srgbClr val="000000"/>
-                </a:solidFill>
-                <a:latin typeface="Consolas" panose="020B0609020204030204" pitchFamily="49" charset="0"/>
-              </a:rPr>
-              <a:t>exactReader</a:t>
-            </a:r>
-            <a:r>
-              <a:rPr lang="en-US" dirty="0"/>
-              <a:t> function.</a:t>
-            </a:r>
-          </a:p>
-        </p:txBody>
-      </p:sp>
-      <p:sp>
-        <p:nvSpPr>
-          <p:cNvPr id="2" name="Title 1">
-            <a:extLst>
-              <a:ext uri="{FF2B5EF4-FFF2-40B4-BE49-F238E27FC236}">
-                <a16:creationId xmlns:a16="http://schemas.microsoft.com/office/drawing/2014/main" id="{70FD56D0-2F2C-42C4-3EEA-E4CCE70C904F}"/>
-              </a:ext>
-            </a:extLst>
-          </p:cNvPr>
-          <p:cNvSpPr>
-            <a:spLocks noGrp="1"/>
-          </p:cNvSpPr>
-          <p:nvPr>
-            <p:ph type="title"/>
-          </p:nvPr>
-        </p:nvSpPr>
-        <p:spPr/>
-        <p:txBody>
-          <a:bodyPr/>
-          <a:lstStyle/>
-          <a:p>
-            <a:r>
-              <a:rPr lang="en-US" dirty="0"/>
-              <a:t>Reading incoming messages</a:t>
-            </a:r>
-          </a:p>
-        </p:txBody>
-      </p:sp>
-      <p:pic>
-        <p:nvPicPr>
-          <p:cNvPr id="5" name="Content Placeholder 4" descr="Graphical user interface, application&#10;&#10;Description automatically generated">
-            <a:extLst>
-              <a:ext uri="{FF2B5EF4-FFF2-40B4-BE49-F238E27FC236}">
-                <a16:creationId xmlns:a16="http://schemas.microsoft.com/office/drawing/2014/main" id="{CD2D2A67-F26C-B52C-0846-6487A7DF0B10}"/>
-              </a:ext>
-            </a:extLst>
-          </p:cNvPr>
-          <p:cNvPicPr>
-            <a:picLocks noGrp="1" noChangeAspect="1"/>
-          </p:cNvPicPr>
-          <p:nvPr>
-            <p:ph idx="1"/>
-          </p:nvPr>
-        </p:nvPicPr>
-        <p:blipFill>
-          <a:blip r:embed="rId3">
-            <a:extLst>
-              <a:ext uri="{28A0092B-C50C-407E-A947-70E740481C1C}">
-                <a14:useLocalDpi xmlns:a14="http://schemas.microsoft.com/office/drawing/2010/main" val="0"/>
-              </a:ext>
-            </a:extLst>
-          </a:blip>
-          <a:stretch>
-            <a:fillRect/>
-          </a:stretch>
-        </p:blipFill>
-        <p:spPr>
-          <a:xfrm>
-            <a:off x="9601200" y="146641"/>
-            <a:ext cx="2454795" cy="6564718"/>
-          </a:xfrm>
-        </p:spPr>
-      </p:pic>
-      <p:sp>
-        <p:nvSpPr>
-          <p:cNvPr id="7" name="TextBox 6">
-            <a:extLst>
-              <a:ext uri="{FF2B5EF4-FFF2-40B4-BE49-F238E27FC236}">
-                <a16:creationId xmlns:a16="http://schemas.microsoft.com/office/drawing/2014/main" id="{ADFAAF37-5FFB-5FCF-739F-A7F6192E67D4}"/>
-              </a:ext>
-            </a:extLst>
-          </p:cNvPr>
-          <p:cNvSpPr txBox="1"/>
-          <p:nvPr/>
-        </p:nvSpPr>
-        <p:spPr>
-          <a:xfrm>
-            <a:off x="993531" y="2329579"/>
-            <a:ext cx="8452338" cy="1754326"/>
-          </a:xfrm>
-          <a:prstGeom prst="rect">
-            <a:avLst/>
-          </a:prstGeom>
-          <a:noFill/>
-        </p:spPr>
-        <p:txBody>
-          <a:bodyPr wrap="square">
-            <a:spAutoFit/>
-          </a:bodyPr>
-          <a:lstStyle/>
-          <a:p>
-            <a:r>
-              <a:rPr lang="en-US" sz="1800" dirty="0">
-                <a:solidFill>
-                  <a:srgbClr val="0000FF"/>
-                </a:solidFill>
-                <a:latin typeface="Consolas" panose="020B0609020204030204" pitchFamily="49" charset="0"/>
-              </a:rPr>
-              <a:t>public</a:t>
-            </a:r>
-            <a:r>
-              <a:rPr lang="en-US" sz="1800" dirty="0">
-                <a:solidFill>
-                  <a:srgbClr val="000000"/>
-                </a:solidFill>
-                <a:latin typeface="Consolas" panose="020B0609020204030204" pitchFamily="49" charset="0"/>
-              </a:rPr>
-              <a:t> Task&lt;</a:t>
-            </a:r>
-            <a:r>
-              <a:rPr lang="en-US" sz="1800" dirty="0" err="1">
-                <a:solidFill>
-                  <a:srgbClr val="000000"/>
-                </a:solidFill>
-                <a:latin typeface="Consolas" panose="020B0609020204030204" pitchFamily="49" charset="0"/>
-              </a:rPr>
-              <a:t>TransportMessage</a:t>
-            </a:r>
-            <a:r>
-              <a:rPr lang="en-US" sz="1800" dirty="0">
-                <a:solidFill>
-                  <a:srgbClr val="000000"/>
-                </a:solidFill>
-                <a:latin typeface="Consolas" panose="020B0609020204030204" pitchFamily="49" charset="0"/>
-              </a:rPr>
-              <a:t>&gt; </a:t>
-            </a:r>
-            <a:r>
-              <a:rPr lang="en-US" sz="1800" dirty="0" err="1">
-                <a:solidFill>
-                  <a:srgbClr val="000000"/>
-                </a:solidFill>
-                <a:latin typeface="Consolas" panose="020B0609020204030204" pitchFamily="49" charset="0"/>
-              </a:rPr>
-              <a:t>ReadAsync</a:t>
-            </a:r>
-            <a:endParaRPr lang="en-US" sz="1800" dirty="0">
-              <a:solidFill>
-                <a:srgbClr val="000000"/>
-              </a:solidFill>
-              <a:latin typeface="Consolas" panose="020B0609020204030204" pitchFamily="49" charset="0"/>
-            </a:endParaRPr>
-          </a:p>
-          <a:p>
-            <a:r>
-              <a:rPr lang="en-US" sz="1800" dirty="0">
-                <a:solidFill>
-                  <a:srgbClr val="000000"/>
-                </a:solidFill>
-                <a:latin typeface="Consolas" panose="020B0609020204030204" pitchFamily="49" charset="0"/>
-              </a:rPr>
-              <a:t>( </a:t>
-            </a:r>
-          </a:p>
-          <a:p>
-            <a:r>
-              <a:rPr lang="en-US" dirty="0">
-                <a:solidFill>
-                  <a:srgbClr val="000000"/>
-                </a:solidFill>
-                <a:latin typeface="Consolas" panose="020B0609020204030204" pitchFamily="49" charset="0"/>
-              </a:rPr>
-              <a:t>    </a:t>
-            </a:r>
-            <a:r>
-              <a:rPr lang="en-US" sz="1800" dirty="0" err="1">
-                <a:solidFill>
-                  <a:srgbClr val="000000"/>
-                </a:solidFill>
-                <a:latin typeface="Consolas" panose="020B0609020204030204" pitchFamily="49" charset="0"/>
-              </a:rPr>
-              <a:t>Func</a:t>
-            </a:r>
-            <a:r>
-              <a:rPr lang="en-US" sz="1800" dirty="0">
-                <a:solidFill>
-                  <a:srgbClr val="000000"/>
-                </a:solidFill>
-                <a:latin typeface="Consolas" panose="020B0609020204030204" pitchFamily="49" charset="0"/>
-              </a:rPr>
-              <a:t>&lt;Memory&lt;</a:t>
-            </a:r>
-            <a:r>
-              <a:rPr lang="en-US" sz="1800" dirty="0">
-                <a:solidFill>
-                  <a:srgbClr val="0000FF"/>
-                </a:solidFill>
-                <a:latin typeface="Consolas" panose="020B0609020204030204" pitchFamily="49" charset="0"/>
-              </a:rPr>
-              <a:t>byte</a:t>
-            </a:r>
-            <a:r>
-              <a:rPr lang="en-US" sz="1800" dirty="0">
-                <a:solidFill>
-                  <a:srgbClr val="000000"/>
-                </a:solidFill>
-                <a:latin typeface="Consolas" panose="020B0609020204030204" pitchFamily="49" charset="0"/>
-              </a:rPr>
-              <a:t>&gt;, </a:t>
-            </a:r>
-            <a:r>
-              <a:rPr lang="en-US" sz="1800" dirty="0" err="1">
-                <a:solidFill>
-                  <a:srgbClr val="000000"/>
-                </a:solidFill>
-                <a:latin typeface="Consolas" panose="020B0609020204030204" pitchFamily="49" charset="0"/>
-              </a:rPr>
-              <a:t>CancellationToken</a:t>
-            </a:r>
-            <a:r>
-              <a:rPr lang="en-US" sz="1800" dirty="0">
-                <a:solidFill>
-                  <a:srgbClr val="000000"/>
-                </a:solidFill>
-                <a:latin typeface="Consolas" panose="020B0609020204030204" pitchFamily="49" charset="0"/>
-              </a:rPr>
-              <a:t>, </a:t>
-            </a:r>
-            <a:r>
-              <a:rPr lang="en-US" sz="1800" dirty="0" err="1">
-                <a:solidFill>
-                  <a:srgbClr val="000000"/>
-                </a:solidFill>
-                <a:latin typeface="Consolas" panose="020B0609020204030204" pitchFamily="49" charset="0"/>
-              </a:rPr>
-              <a:t>ValueTask</a:t>
-            </a:r>
-            <a:r>
-              <a:rPr lang="en-US" sz="1800" dirty="0">
-                <a:solidFill>
-                  <a:srgbClr val="000000"/>
-                </a:solidFill>
-                <a:latin typeface="Consolas" panose="020B0609020204030204" pitchFamily="49" charset="0"/>
-              </a:rPr>
-              <a:t>&gt; </a:t>
-            </a:r>
-            <a:r>
-              <a:rPr lang="en-US" sz="1800" dirty="0" err="1">
-                <a:solidFill>
-                  <a:srgbClr val="000000"/>
-                </a:solidFill>
-                <a:latin typeface="Consolas" panose="020B0609020204030204" pitchFamily="49" charset="0"/>
-              </a:rPr>
-              <a:t>exactReader</a:t>
-            </a:r>
-            <a:r>
-              <a:rPr lang="en-US" sz="1800" dirty="0">
-                <a:solidFill>
-                  <a:srgbClr val="000000"/>
-                </a:solidFill>
-                <a:latin typeface="Consolas" panose="020B0609020204030204" pitchFamily="49" charset="0"/>
-              </a:rPr>
-              <a:t>,</a:t>
-            </a:r>
-          </a:p>
-          <a:p>
-            <a:r>
-              <a:rPr lang="en-US" sz="1800" dirty="0">
-                <a:solidFill>
-                  <a:srgbClr val="0000FF"/>
-                </a:solidFill>
-                <a:latin typeface="Consolas" panose="020B0609020204030204" pitchFamily="49" charset="0"/>
-              </a:rPr>
-              <a:t>    int</a:t>
-            </a:r>
-            <a:r>
-              <a:rPr lang="en-US" sz="1800" dirty="0">
-                <a:solidFill>
-                  <a:srgbClr val="000000"/>
-                </a:solidFill>
-                <a:latin typeface="Consolas" panose="020B0609020204030204" pitchFamily="49" charset="0"/>
-              </a:rPr>
-              <a:t> </a:t>
-            </a:r>
-            <a:r>
-              <a:rPr lang="en-US" sz="1800" dirty="0" err="1">
-                <a:solidFill>
-                  <a:srgbClr val="000000"/>
-                </a:solidFill>
-                <a:latin typeface="Consolas" panose="020B0609020204030204" pitchFamily="49" charset="0"/>
-              </a:rPr>
-              <a:t>maxMessageLength</a:t>
-            </a:r>
-            <a:r>
-              <a:rPr lang="en-US" sz="1800" dirty="0">
-                <a:solidFill>
-                  <a:srgbClr val="000000"/>
-                </a:solidFill>
-                <a:latin typeface="Consolas" panose="020B0609020204030204" pitchFamily="49" charset="0"/>
-              </a:rPr>
-              <a:t> = </a:t>
-            </a:r>
-            <a:r>
-              <a:rPr lang="en-US" sz="1800" dirty="0" err="1">
-                <a:solidFill>
-                  <a:srgbClr val="0000FF"/>
-                </a:solidFill>
-                <a:latin typeface="Consolas" panose="020B0609020204030204" pitchFamily="49" charset="0"/>
-              </a:rPr>
-              <a:t>int</a:t>
-            </a:r>
-            <a:r>
-              <a:rPr lang="en-US" sz="1800" dirty="0" err="1">
-                <a:solidFill>
-                  <a:srgbClr val="000000"/>
-                </a:solidFill>
-                <a:latin typeface="Consolas" panose="020B0609020204030204" pitchFamily="49" charset="0"/>
-              </a:rPr>
-              <a:t>.MaxValue</a:t>
-            </a:r>
-            <a:r>
-              <a:rPr lang="en-US" sz="1800" dirty="0">
-                <a:solidFill>
-                  <a:srgbClr val="000000"/>
-                </a:solidFill>
-                <a:latin typeface="Consolas" panose="020B0609020204030204" pitchFamily="49" charset="0"/>
-              </a:rPr>
-              <a:t>,</a:t>
-            </a:r>
-          </a:p>
-          <a:p>
-            <a:r>
-              <a:rPr lang="en-US" sz="1800" dirty="0">
-                <a:solidFill>
-                  <a:srgbClr val="000000"/>
-                </a:solidFill>
-                <a:latin typeface="Consolas" panose="020B0609020204030204" pitchFamily="49" charset="0"/>
-              </a:rPr>
-              <a:t>    </a:t>
-            </a:r>
-            <a:r>
-              <a:rPr lang="en-US" sz="1800" dirty="0" err="1">
-                <a:solidFill>
-                  <a:srgbClr val="000000"/>
-                </a:solidFill>
-                <a:latin typeface="Consolas" panose="020B0609020204030204" pitchFamily="49" charset="0"/>
-              </a:rPr>
-              <a:t>CancellationToken</a:t>
-            </a:r>
-            <a:r>
-              <a:rPr lang="en-US" sz="1800" dirty="0">
-                <a:solidFill>
-                  <a:srgbClr val="000000"/>
-                </a:solidFill>
-                <a:latin typeface="Consolas" panose="020B0609020204030204" pitchFamily="49" charset="0"/>
-              </a:rPr>
-              <a:t> cancellation = </a:t>
-            </a:r>
-            <a:r>
-              <a:rPr lang="en-US" sz="1800" dirty="0">
-                <a:solidFill>
-                  <a:srgbClr val="0000FF"/>
-                </a:solidFill>
-                <a:latin typeface="Consolas" panose="020B0609020204030204" pitchFamily="49" charset="0"/>
-              </a:rPr>
-              <a:t>default</a:t>
-            </a:r>
-            <a:r>
-              <a:rPr lang="en-US" sz="1800" dirty="0">
-                <a:solidFill>
-                  <a:srgbClr val="000000"/>
-                </a:solidFill>
-                <a:latin typeface="Consolas" panose="020B0609020204030204" pitchFamily="49" charset="0"/>
-              </a:rPr>
-              <a:t> </a:t>
-            </a:r>
-          </a:p>
-          <a:p>
-            <a:r>
-              <a:rPr lang="en-US" sz="1800" dirty="0">
-                <a:solidFill>
-                  <a:srgbClr val="000000"/>
-                </a:solidFill>
-                <a:latin typeface="Consolas" panose="020B0609020204030204" pitchFamily="49" charset="0"/>
-              </a:rPr>
-              <a:t>)</a:t>
-            </a:r>
-            <a:endParaRPr lang="en-US" dirty="0"/>
-          </a:p>
-        </p:txBody>
-      </p:sp>
-      <p:sp>
-        <p:nvSpPr>
-          <p:cNvPr id="3" name="Star: 6 Points 2">
-            <a:extLst>
-              <a:ext uri="{FF2B5EF4-FFF2-40B4-BE49-F238E27FC236}">
-                <a16:creationId xmlns:a16="http://schemas.microsoft.com/office/drawing/2014/main" id="{1967DF75-EF55-D3BE-2790-7398E3AE6458}"/>
-              </a:ext>
-            </a:extLst>
-          </p:cNvPr>
-          <p:cNvSpPr/>
-          <p:nvPr/>
-        </p:nvSpPr>
-        <p:spPr>
-          <a:xfrm>
-            <a:off x="7353300" y="146641"/>
-            <a:ext cx="1645920" cy="1473200"/>
-          </a:xfrm>
-          <a:prstGeom prst="star6">
-            <a:avLst/>
-          </a:prstGeom>
-        </p:spPr>
-        <p:style>
-          <a:lnRef idx="2">
-            <a:schemeClr val="accent1">
-              <a:shade val="50000"/>
-            </a:schemeClr>
-          </a:lnRef>
-          <a:fillRef idx="1">
-            <a:schemeClr val="accent1"/>
-          </a:fillRef>
-          <a:effectRef idx="0">
-            <a:schemeClr val="accent1"/>
-          </a:effectRef>
-          <a:fontRef idx="minor">
-            <a:schemeClr val="lt1"/>
-          </a:fontRef>
-        </p:style>
-        <p:txBody>
-          <a:bodyPr rtlCol="0" anchor="ctr"/>
-          <a:lstStyle/>
-          <a:p>
-            <a:pPr algn="ctr"/>
-            <a:r>
-              <a:rPr lang="en-US" dirty="0"/>
-              <a:t>Update Needed</a:t>
-            </a:r>
-          </a:p>
-        </p:txBody>
-      </p:sp>
-    </p:spTree>
-    <p:extLst>
-      <p:ext uri="{BB962C8B-B14F-4D97-AF65-F5344CB8AC3E}">
-        <p14:creationId xmlns:p14="http://schemas.microsoft.com/office/powerpoint/2010/main" val="1074243622"/>
-      </p:ext>
-    </p:extLst>
-  </p:cSld>
-  <p:clrMapOvr>
-    <a:masterClrMapping/>
-  </p:clrMapOvr>
-</p:sld>
-</file>
-
-<file path=ppt/slides/slide36.xml><?xml version="1.0" encoding="utf-8"?>
-<p:sld xmlns:a="http://schemas.openxmlformats.org/drawingml/2006/main" xmlns:r="http://schemas.openxmlformats.org/officeDocument/2006/relationships" xmlns:p="http://schemas.openxmlformats.org/presentationml/2006/main">
-  <p:cSld>
-    <p:spTree>
-      <p:nvGrpSpPr>
-        <p:cNvPr id="1" name=""/>
-        <p:cNvGrpSpPr/>
-        <p:nvPr/>
-      </p:nvGrpSpPr>
-      <p:grpSpPr>
-        <a:xfrm>
-          <a:off x="0" y="0"/>
-          <a:ext cx="0" cy="0"/>
-          <a:chOff x="0" y="0"/>
-          <a:chExt cx="0" cy="0"/>
-        </a:xfrm>
-      </p:grpSpPr>
-      <p:sp>
-        <p:nvSpPr>
-          <p:cNvPr id="2" name="Title 1">
-            <a:extLst>
-              <a:ext uri="{FF2B5EF4-FFF2-40B4-BE49-F238E27FC236}">
-                <a16:creationId xmlns:a16="http://schemas.microsoft.com/office/drawing/2014/main" id="{CE512CBA-34FC-5769-694A-E657A80519BB}"/>
-              </a:ext>
-            </a:extLst>
-          </p:cNvPr>
-          <p:cNvSpPr>
-            <a:spLocks noGrp="1"/>
-          </p:cNvSpPr>
-          <p:nvPr>
-            <p:ph type="title"/>
-          </p:nvPr>
-        </p:nvSpPr>
-        <p:spPr/>
-        <p:txBody>
-          <a:bodyPr/>
-          <a:lstStyle/>
-          <a:p>
-            <a:r>
-              <a:rPr lang="en-US" dirty="0"/>
-              <a:t>Channel Feature</a:t>
-            </a:r>
-          </a:p>
-        </p:txBody>
-      </p:sp>
-      <p:sp>
-        <p:nvSpPr>
-          <p:cNvPr id="6" name="Content Placeholder 8">
-            <a:extLst>
-              <a:ext uri="{FF2B5EF4-FFF2-40B4-BE49-F238E27FC236}">
-                <a16:creationId xmlns:a16="http://schemas.microsoft.com/office/drawing/2014/main" id="{AACCB99C-C551-6BC4-005D-BC5314B48110}"/>
-              </a:ext>
-            </a:extLst>
-          </p:cNvPr>
-          <p:cNvSpPr txBox="1">
-            <a:spLocks/>
-          </p:cNvSpPr>
-          <p:nvPr/>
-        </p:nvSpPr>
-        <p:spPr>
-          <a:xfrm>
             <a:off x="556592" y="1890023"/>
-            <a:ext cx="5165782" cy="4421323"/>
+            <a:ext cx="4025918" cy="4421323"/>
           </a:xfrm>
           <a:prstGeom prst="rect">
             <a:avLst/>
@@ -18359,22 +17369,20 @@
       </p:sp>
       <p:pic>
         <p:nvPicPr>
-          <p:cNvPr id="10" name="Content Placeholder 9" descr="Diagram">
+          <p:cNvPr id="9" name="Picture 8" descr="A screenshot of a computer&#10;&#10;Description automatically generated">
             <a:extLst>
               <a:ext uri="{FF2B5EF4-FFF2-40B4-BE49-F238E27FC236}">
-                <a16:creationId xmlns:a16="http://schemas.microsoft.com/office/drawing/2014/main" id="{B9505869-E6FE-3131-7CB2-E37EF0D5904B}"/>
+                <a16:creationId xmlns:a16="http://schemas.microsoft.com/office/drawing/2014/main" id="{B5585CFD-73BF-2DF0-96EA-99545F4AAE69}"/>
               </a:ext>
             </a:extLst>
           </p:cNvPr>
           <p:cNvPicPr>
-            <a:picLocks noGrp="1" noChangeAspect="1"/>
+            <a:picLocks noChangeAspect="1"/>
           </p:cNvPicPr>
-          <p:nvPr>
-            <p:ph idx="1"/>
-          </p:nvPr>
+          <p:nvPr/>
         </p:nvPicPr>
         <p:blipFill>
-          <a:blip r:embed="rId2">
+          <a:blip r:embed="rId3">
             <a:extLst>
               <a:ext uri="{28A0092B-C50C-407E-A947-70E740481C1C}">
                 <a14:useLocalDpi xmlns:a14="http://schemas.microsoft.com/office/drawing/2010/main" val="0"/>
@@ -18387,9 +17395,12 @@
         </p:blipFill>
         <p:spPr>
           <a:xfrm>
-            <a:off x="5808322" y="75482"/>
-            <a:ext cx="6302438" cy="5410917"/>
+            <a:off x="4929351" y="512475"/>
+            <a:ext cx="7126014" cy="6117992"/>
           </a:xfrm>
+          <a:prstGeom prst="rect">
+            <a:avLst/>
+          </a:prstGeom>
         </p:spPr>
       </p:pic>
     </p:spTree>
@@ -18405,7 +17416,7 @@
 </p:sld>
 </file>
 
-<file path=ppt/slides/slide37.xml><?xml version="1.0" encoding="utf-8"?>
+<file path=ppt/slides/slide35.xml><?xml version="1.0" encoding="utf-8"?>
 <p:sld xmlns:a="http://schemas.openxmlformats.org/drawingml/2006/main" xmlns:r="http://schemas.openxmlformats.org/officeDocument/2006/relationships" xmlns:p="http://schemas.openxmlformats.org/presentationml/2006/main">
   <p:cSld>
     <p:spTree>
@@ -18636,7 +17647,90 @@
 </p:sld>
 </file>
 
-<file path=ppt/slides/slide38.xml><?xml version="1.0" encoding="utf-8"?>
+<file path=ppt/slides/slide36.xml><?xml version="1.0" encoding="utf-8"?>
+<p:sld xmlns:a="http://schemas.openxmlformats.org/drawingml/2006/main" xmlns:r="http://schemas.openxmlformats.org/officeDocument/2006/relationships" xmlns:p="http://schemas.openxmlformats.org/presentationml/2006/main">
+  <p:cSld>
+    <p:spTree>
+      <p:nvGrpSpPr>
+        <p:cNvPr id="1" name=""/>
+        <p:cNvGrpSpPr/>
+        <p:nvPr/>
+      </p:nvGrpSpPr>
+      <p:grpSpPr>
+        <a:xfrm>
+          <a:off x="0" y="0"/>
+          <a:ext cx="0" cy="0"/>
+          <a:chOff x="0" y="0"/>
+          <a:chExt cx="0" cy="0"/>
+        </a:xfrm>
+      </p:grpSpPr>
+      <p:sp>
+        <p:nvSpPr>
+          <p:cNvPr id="2" name="Title 1">
+            <a:extLst>
+              <a:ext uri="{FF2B5EF4-FFF2-40B4-BE49-F238E27FC236}">
+                <a16:creationId xmlns:a16="http://schemas.microsoft.com/office/drawing/2014/main" id="{2ADDEB0D-75FE-A9E7-AE5D-1A00BE2CB4EF}"/>
+              </a:ext>
+            </a:extLst>
+          </p:cNvPr>
+          <p:cNvSpPr>
+            <a:spLocks noGrp="1"/>
+          </p:cNvSpPr>
+          <p:nvPr>
+            <p:ph type="title"/>
+          </p:nvPr>
+        </p:nvSpPr>
+        <p:spPr/>
+        <p:txBody>
+          <a:bodyPr/>
+          <a:lstStyle/>
+          <a:p>
+            <a:r>
+              <a:rPr lang="en-US" dirty="0"/>
+              <a:t>ANNEX</a:t>
+            </a:r>
+          </a:p>
+        </p:txBody>
+      </p:sp>
+      <p:sp>
+        <p:nvSpPr>
+          <p:cNvPr id="3" name="Content Placeholder 2">
+            <a:extLst>
+              <a:ext uri="{FF2B5EF4-FFF2-40B4-BE49-F238E27FC236}">
+                <a16:creationId xmlns:a16="http://schemas.microsoft.com/office/drawing/2014/main" id="{69BD3F96-4E3A-A64D-A143-5E0F643AB7C5}"/>
+              </a:ext>
+            </a:extLst>
+          </p:cNvPr>
+          <p:cNvSpPr>
+            <a:spLocks noGrp="1"/>
+          </p:cNvSpPr>
+          <p:nvPr>
+            <p:ph idx="1"/>
+          </p:nvPr>
+        </p:nvSpPr>
+        <p:spPr/>
+        <p:txBody>
+          <a:bodyPr/>
+          <a:lstStyle/>
+          <a:p>
+            <a:endParaRPr lang="en-US"/>
+          </a:p>
+        </p:txBody>
+      </p:sp>
+    </p:spTree>
+    <p:extLst>
+      <p:ext uri="{BB962C8B-B14F-4D97-AF65-F5344CB8AC3E}">
+        <p14:creationId xmlns:p14="http://schemas.microsoft.com/office/powerpoint/2010/main" val="4293717367"/>
+      </p:ext>
+    </p:extLst>
+  </p:cSld>
+  <p:clrMapOvr>
+    <a:masterClrMapping/>
+  </p:clrMapOvr>
+</p:sld>
+</file>
+
+<file path=ppt/slides/slide37.xml><?xml version="1.0" encoding="utf-8"?>
 <p:sld xmlns:a="http://schemas.openxmlformats.org/drawingml/2006/main" xmlns:r="http://schemas.openxmlformats.org/officeDocument/2006/relationships" xmlns:p="http://schemas.openxmlformats.org/presentationml/2006/main">
   <p:cSld>
     <p:spTree>
@@ -18736,12 +17830,12 @@
         <p:spPr>
           <a:xfrm>
             <a:off x="690880" y="1825624"/>
-            <a:ext cx="9032240" cy="4463415"/>
+            <a:ext cx="6655851" cy="4463415"/>
           </a:xfrm>
         </p:spPr>
         <p:txBody>
           <a:bodyPr>
-            <a:normAutofit fontScale="92500" lnSpcReduction="10000"/>
+            <a:normAutofit fontScale="92500"/>
           </a:bodyPr>
           <a:lstStyle/>
           <a:p>
@@ -18788,32 +17882,16 @@
             </a:r>
           </a:p>
           <a:p>
+            <a:r>
+              <a:rPr lang="en-US" dirty="0"/>
+              <a:t>This service must be resolved and secured by the Endpoint</a:t>
+            </a:r>
+          </a:p>
+          <a:p>
             <a:pPr lvl="1"/>
-            <a:endParaRPr lang="en-US" dirty="0"/>
-          </a:p>
-          <a:p>
-            <a:pPr lvl="1"/>
-            <a:endParaRPr lang="en-US" dirty="0"/>
-          </a:p>
-          <a:p>
-            <a:pPr lvl="1"/>
-            <a:endParaRPr lang="en-US" dirty="0"/>
-          </a:p>
-          <a:p>
-            <a:pPr lvl="1"/>
-            <a:endParaRPr lang="en-US" dirty="0"/>
-          </a:p>
-          <a:p>
-            <a:r>
-              <a:rPr lang="en-US" dirty="0"/>
-              <a:t>This service is resolved and secured by the Endpoint</a:t>
-            </a:r>
-          </a:p>
-          <a:p>
-            <a:pPr lvl="1"/>
-            <a:r>
-              <a:rPr lang="en-US" dirty="0"/>
-              <a:t>The global “Web” endpoint uses an encrypted token.</a:t>
+            <a:r>
+              <a:rPr lang="en-US" dirty="0"/>
+              <a:t>The global “Web” endpoint uses an encrypted token and cookie.</a:t>
             </a:r>
           </a:p>
           <a:p>
@@ -18875,6 +17953,143 @@
     <p:extLst>
       <p:ext uri="{BB962C8B-B14F-4D97-AF65-F5344CB8AC3E}">
         <p14:creationId xmlns:p14="http://schemas.microsoft.com/office/powerpoint/2010/main" val="3523950704"/>
+      </p:ext>
+    </p:extLst>
+  </p:cSld>
+  <p:clrMapOvr>
+    <a:masterClrMapping/>
+  </p:clrMapOvr>
+</p:sld>
+</file>
+
+<file path=ppt/slides/slide38.xml><?xml version="1.0" encoding="utf-8"?>
+<p:sld xmlns:a="http://schemas.openxmlformats.org/drawingml/2006/main" xmlns:r="http://schemas.openxmlformats.org/officeDocument/2006/relationships" xmlns:p="http://schemas.openxmlformats.org/presentationml/2006/main">
+  <p:cSld>
+    <p:spTree>
+      <p:nvGrpSpPr>
+        <p:cNvPr id="1" name=""/>
+        <p:cNvGrpSpPr/>
+        <p:nvPr/>
+      </p:nvGrpSpPr>
+      <p:grpSpPr>
+        <a:xfrm>
+          <a:off x="0" y="0"/>
+          <a:ext cx="0" cy="0"/>
+          <a:chOff x="0" y="0"/>
+          <a:chExt cx="0" cy="0"/>
+        </a:xfrm>
+      </p:grpSpPr>
+      <p:sp>
+        <p:nvSpPr>
+          <p:cNvPr id="2" name="Title 1">
+            <a:extLst>
+              <a:ext uri="{FF2B5EF4-FFF2-40B4-BE49-F238E27FC236}">
+                <a16:creationId xmlns:a16="http://schemas.microsoft.com/office/drawing/2014/main" id="{3C7698CC-396A-8454-36E2-A15EC4E6F4C6}"/>
+              </a:ext>
+            </a:extLst>
+          </p:cNvPr>
+          <p:cNvSpPr>
+            <a:spLocks noGrp="1"/>
+          </p:cNvSpPr>
+          <p:nvPr>
+            <p:ph type="title"/>
+          </p:nvPr>
+        </p:nvSpPr>
+        <p:spPr/>
+        <p:txBody>
+          <a:bodyPr/>
+          <a:lstStyle/>
+          <a:p>
+            <a:r>
+              <a:rPr lang="en-US" dirty="0"/>
+              <a:t>User and Commands through Parties (1/2)</a:t>
+            </a:r>
+          </a:p>
+        </p:txBody>
+      </p:sp>
+      <p:sp>
+        <p:nvSpPr>
+          <p:cNvPr id="3" name="Content Placeholder 2">
+            <a:extLst>
+              <a:ext uri="{FF2B5EF4-FFF2-40B4-BE49-F238E27FC236}">
+                <a16:creationId xmlns:a16="http://schemas.microsoft.com/office/drawing/2014/main" id="{4C31C601-D62B-370A-E39E-2DF1FE415FBB}"/>
+              </a:ext>
+            </a:extLst>
+          </p:cNvPr>
+          <p:cNvSpPr>
+            <a:spLocks noGrp="1"/>
+          </p:cNvSpPr>
+          <p:nvPr>
+            <p:ph idx="1"/>
+          </p:nvPr>
+        </p:nvSpPr>
+        <p:spPr/>
+        <p:txBody>
+          <a:bodyPr>
+            <a:normAutofit/>
+          </a:bodyPr>
+          <a:lstStyle/>
+          <a:p>
+            <a:r>
+              <a:rPr lang="en-US" dirty="0"/>
+              <a:t>“$Trolley1” can send an Authenticated Command to “$Box” in the name of (Alice,3712).</a:t>
+            </a:r>
+          </a:p>
+          <a:p>
+            <a:r>
+              <a:rPr lang="en-US" dirty="0"/>
+              <a:t>“$Trolley1” must provide a proof to “$Box” that Alice is the “real” Alice (otherwise the Authenticated Command will be rejected).</a:t>
+            </a:r>
+          </a:p>
+          <a:p>
+            <a:r>
+              <a:rPr lang="en-US" dirty="0"/>
+              <a:t>“$Trolley1” must first obtain this proof by:</a:t>
+            </a:r>
+          </a:p>
+          <a:p>
+            <a:pPr lvl="1"/>
+            <a:r>
+              <a:rPr lang="en-US" dirty="0"/>
+              <a:t>Let Alice logins herself into a “Central User Directory” shared with “$Box”</a:t>
+            </a:r>
+          </a:p>
+          <a:p>
+            <a:pPr lvl="1"/>
+            <a:r>
+              <a:rPr lang="en-US" dirty="0"/>
+              <a:t>The proof must be Alice’s </a:t>
+            </a:r>
+            <a:r>
+              <a:rPr lang="en-US" dirty="0" err="1"/>
+              <a:t>IAuthenticationInfo</a:t>
+            </a:r>
+            <a:r>
+              <a:rPr lang="en-US" dirty="0"/>
+              <a:t> and a digital signature.</a:t>
+            </a:r>
+          </a:p>
+          <a:p>
+            <a:pPr lvl="1"/>
+            <a:r>
+              <a:rPr lang="en-US" dirty="0"/>
+              <a:t>“$Box” can verify that the signature has been generated by the “Central User Directory” for “$Trolley1” and that the </a:t>
+            </a:r>
+            <a:r>
+              <a:rPr lang="en-US" dirty="0" err="1"/>
+              <a:t>IAuthenticationInfo</a:t>
+            </a:r>
+            <a:r>
+              <a:rPr lang="en-US" dirty="0"/>
+              <a:t> has not been tampered.</a:t>
+            </a:r>
+          </a:p>
+        </p:txBody>
+      </p:sp>
+    </p:spTree>
+    <p:extLst>
+      <p:ext uri="{BB962C8B-B14F-4D97-AF65-F5344CB8AC3E}">
+        <p14:creationId xmlns:p14="http://schemas.microsoft.com/office/powerpoint/2010/main" val="973874681"/>
       </p:ext>
     </p:extLst>
   </p:cSld>
@@ -18906,7 +18121,7 @@
           <p:cNvPr id="2" name="Title 1">
             <a:extLst>
               <a:ext uri="{FF2B5EF4-FFF2-40B4-BE49-F238E27FC236}">
-                <a16:creationId xmlns:a16="http://schemas.microsoft.com/office/drawing/2014/main" id="{3C7698CC-396A-8454-36E2-A15EC4E6F4C6}"/>
+                <a16:creationId xmlns:a16="http://schemas.microsoft.com/office/drawing/2014/main" id="{C22CBFFE-4E3A-2E51-3538-8811F1401233}"/>
               </a:ext>
             </a:extLst>
           </p:cNvPr>
@@ -18924,7 +18139,7 @@
           <a:p>
             <a:r>
               <a:rPr lang="en-US" dirty="0"/>
-              <a:t>User and Commands through Parties (1/2)</a:t>
+              <a:t>User and Commands through Parties (2/2)	</a:t>
             </a:r>
           </a:p>
         </p:txBody>
@@ -18934,7 +18149,7 @@
           <p:cNvPr id="3" name="Content Placeholder 2">
             <a:extLst>
               <a:ext uri="{FF2B5EF4-FFF2-40B4-BE49-F238E27FC236}">
-                <a16:creationId xmlns:a16="http://schemas.microsoft.com/office/drawing/2014/main" id="{4C31C601-D62B-370A-E39E-2DF1FE415FBB}"/>
+                <a16:creationId xmlns:a16="http://schemas.microsoft.com/office/drawing/2014/main" id="{D2F4F95B-3516-EFB7-2D85-F2244EED81A5}"/>
               </a:ext>
             </a:extLst>
           </p:cNvPr>
@@ -18945,42 +18160,64 @@
             <p:ph idx="1"/>
           </p:nvPr>
         </p:nvSpPr>
-        <p:spPr/>
+        <p:spPr>
+          <a:xfrm>
+            <a:off x="838200" y="1825624"/>
+            <a:ext cx="10515600" cy="4667251"/>
+          </a:xfrm>
+        </p:spPr>
         <p:txBody>
           <a:bodyPr>
-            <a:normAutofit/>
+            <a:normAutofit fontScale="92500" lnSpcReduction="20000"/>
           </a:bodyPr>
           <a:lstStyle/>
           <a:p>
             <a:r>
               <a:rPr lang="en-US" dirty="0"/>
-              <a:t>“$Trolley1” can send an Authenticated Command to “$Box” in the name of (Alice,3712).</a:t>
-            </a:r>
-          </a:p>
-          <a:p>
-            <a:r>
-              <a:rPr lang="en-US" dirty="0"/>
-              <a:t>“$Trolley1” must provide a proof to “$Box” that Alice is the “real” Alice (otherwise the Authenticated Command will be rejected).</a:t>
-            </a:r>
-          </a:p>
-          <a:p>
-            <a:r>
-              <a:rPr lang="en-US" dirty="0"/>
-              <a:t>“$Trolley1” must first obtain this proof by:</a:t>
+              <a:t>When “$Trolley1” sends a Command in the name of Alice to “$Box”…</a:t>
             </a:r>
           </a:p>
           <a:p>
             <a:pPr lvl="1"/>
             <a:r>
               <a:rPr lang="en-US" dirty="0"/>
-              <a:t>Let Alice logins herself into a “Central User Directory” shared with “$Box”</a:t>
+              <a:t>it also sends the proof.</a:t>
+            </a:r>
+          </a:p>
+          <a:p>
+            <a:r>
+              <a:rPr lang="en-US" dirty="0"/>
+              <a:t>“$Box” </a:t>
+            </a:r>
+            <a:r>
+              <a:rPr lang="en-US" dirty="0" err="1"/>
+              <a:t>AppIdentity’s</a:t>
+            </a:r>
+            <a:r>
+              <a:rPr lang="en-US" dirty="0"/>
+              <a:t> endpoint receives the command and the proof.</a:t>
             </a:r>
           </a:p>
           <a:p>
             <a:pPr lvl="1"/>
             <a:r>
               <a:rPr lang="en-US" dirty="0"/>
-              <a:t>The proof must be Alice’s </a:t>
+              <a:t>It builds a “</a:t>
+            </a:r>
+            <a:r>
+              <a:rPr lang="en-US" dirty="0" err="1"/>
+              <a:t>ScopedData</a:t>
+            </a:r>
+            <a:r>
+              <a:rPr lang="en-US" dirty="0"/>
+              <a:t>” with the proof and the fact that it is “$Trolley1” that sent the command.</a:t>
+            </a:r>
+          </a:p>
+          <a:p>
+            <a:pPr lvl="1"/>
+            <a:r>
+              <a:rPr lang="en-US" dirty="0"/>
+              <a:t>Its Endpoint is configured to resolve the </a:t>
             </a:r>
             <a:r>
               <a:rPr lang="en-US" dirty="0" err="1"/>
@@ -18988,14 +18225,29 @@
             </a:r>
             <a:r>
               <a:rPr lang="en-US" dirty="0"/>
-              <a:t> and a digital signature.</a:t>
-            </a:r>
-          </a:p>
-          <a:p>
-            <a:pPr lvl="1"/>
-            <a:r>
-              <a:rPr lang="en-US" dirty="0"/>
-              <a:t>“$Box” can verify that the signature has been generated by the “Central User Directory” for “$Trolley1” and that the </a:t>
+              <a:t> service by:</a:t>
+            </a:r>
+          </a:p>
+          <a:p>
+            <a:pPr lvl="2"/>
+            <a:r>
+              <a:rPr lang="en-US" dirty="0"/>
+              <a:t>Accessing the </a:t>
+            </a:r>
+            <a:r>
+              <a:rPr lang="en-US" dirty="0" err="1"/>
+              <a:t>ScopedData’s</a:t>
+            </a:r>
+            <a:r>
+              <a:rPr lang="en-US" dirty="0"/>
+              <a:t> proof and sender.</a:t>
+            </a:r>
+          </a:p>
+          <a:p>
+            <a:pPr lvl="2"/>
+            <a:r>
+              <a:rPr lang="en-US" dirty="0"/>
+              <a:t>Verifying the signature and on success, returns the </a:t>
             </a:r>
             <a:r>
               <a:rPr lang="en-US" dirty="0" err="1"/>
@@ -19003,15 +18255,65 @@
             </a:r>
             <a:r>
               <a:rPr lang="en-US" dirty="0"/>
-              <a:t> has not been tampered.</a:t>
-            </a:r>
+              <a:t>.</a:t>
+            </a:r>
+          </a:p>
+          <a:p>
+            <a:r>
+              <a:rPr lang="en-US" dirty="0"/>
+              <a:t>“$Box” validates and executes the command</a:t>
+            </a:r>
+          </a:p>
+          <a:p>
+            <a:pPr lvl="1"/>
+            <a:r>
+              <a:rPr lang="en-US" dirty="0"/>
+              <a:t>Commands are executed in the background by runners in a scoped service container parametrized with the </a:t>
+            </a:r>
+            <a:r>
+              <a:rPr lang="en-US" dirty="0" err="1"/>
+              <a:t>ScopedData</a:t>
+            </a:r>
+            <a:r>
+              <a:rPr lang="en-US" dirty="0"/>
+              <a:t>.</a:t>
+            </a:r>
+          </a:p>
+          <a:p>
+            <a:pPr lvl="1"/>
+            <a:r>
+              <a:rPr lang="en-US" dirty="0"/>
+              <a:t>If any service involved in the validation or execution of the command requires the </a:t>
+            </a:r>
+            <a:r>
+              <a:rPr lang="en-US" dirty="0" err="1"/>
+              <a:t>IAuthenticationInfo</a:t>
+            </a:r>
+            <a:r>
+              <a:rPr lang="en-US" dirty="0"/>
+              <a:t>, it is resolved.</a:t>
+            </a:r>
+          </a:p>
+          <a:p>
+            <a:pPr lvl="1"/>
+            <a:r>
+              <a:rPr lang="en-US" dirty="0"/>
+              <a:t>Command execution outcomes (Validation result, events and result) are sent back to “$Trolley1”</a:t>
+            </a:r>
+          </a:p>
+          <a:p>
+            <a:pPr lvl="1"/>
+            <a:endParaRPr lang="en-US" dirty="0"/>
+          </a:p>
+          <a:p>
+            <a:endParaRPr lang="en-US" dirty="0"/>
           </a:p>
         </p:txBody>
       </p:sp>
     </p:spTree>
     <p:extLst>
       <p:ext uri="{BB962C8B-B14F-4D97-AF65-F5344CB8AC3E}">
-        <p14:creationId xmlns:p14="http://schemas.microsoft.com/office/powerpoint/2010/main" val="973874681"/>
+        <p14:creationId xmlns:p14="http://schemas.microsoft.com/office/powerpoint/2010/main" val="2929531232"/>
       </p:ext>
     </p:extLst>
   </p:cSld>
@@ -19239,7 +18541,7 @@
           <p:cNvPr id="2" name="Title 1">
             <a:extLst>
               <a:ext uri="{FF2B5EF4-FFF2-40B4-BE49-F238E27FC236}">
-                <a16:creationId xmlns:a16="http://schemas.microsoft.com/office/drawing/2014/main" id="{C22CBFFE-4E3A-2E51-3538-8811F1401233}"/>
+                <a16:creationId xmlns:a16="http://schemas.microsoft.com/office/drawing/2014/main" id="{96430CD7-8283-9031-1738-32DC1DF85B7B}"/>
               </a:ext>
             </a:extLst>
           </p:cNvPr>
@@ -19257,7 +18559,7 @@
           <a:p>
             <a:r>
               <a:rPr lang="en-US" dirty="0"/>
-              <a:t>User and Commands through Parties (2/2)	</a:t>
+              <a:t>Roadmap</a:t>
             </a:r>
           </a:p>
         </p:txBody>
@@ -19267,7 +18569,7 @@
           <p:cNvPr id="3" name="Content Placeholder 2">
             <a:extLst>
               <a:ext uri="{FF2B5EF4-FFF2-40B4-BE49-F238E27FC236}">
-                <a16:creationId xmlns:a16="http://schemas.microsoft.com/office/drawing/2014/main" id="{D2F4F95B-3516-EFB7-2D85-F2244EED81A5}"/>
+                <a16:creationId xmlns:a16="http://schemas.microsoft.com/office/drawing/2014/main" id="{CE6F859C-4726-43EF-F0A8-B73939B70279}"/>
               </a:ext>
             </a:extLst>
           </p:cNvPr>
@@ -19278,1018 +18580,26 @@
             <p:ph idx="1"/>
           </p:nvPr>
         </p:nvSpPr>
-        <p:spPr>
-          <a:xfrm>
-            <a:off x="838200" y="1825624"/>
-            <a:ext cx="10515600" cy="4667251"/>
-          </a:xfrm>
-        </p:spPr>
-        <p:txBody>
-          <a:bodyPr>
-            <a:normAutofit fontScale="92500" lnSpcReduction="20000"/>
-          </a:bodyPr>
-          <a:lstStyle/>
-          <a:p>
-            <a:r>
-              <a:rPr lang="en-US" dirty="0"/>
-              <a:t>When “$Trolley1” sends a Command in the name of Alice to “$Box”…</a:t>
-            </a:r>
-          </a:p>
-          <a:p>
-            <a:pPr lvl="1"/>
-            <a:r>
-              <a:rPr lang="en-US" dirty="0"/>
-              <a:t>it also sends the proof.</a:t>
-            </a:r>
-          </a:p>
-          <a:p>
-            <a:r>
-              <a:rPr lang="en-US" dirty="0"/>
-              <a:t>“$Box” </a:t>
-            </a:r>
-            <a:r>
-              <a:rPr lang="en-US" dirty="0" err="1"/>
-              <a:t>AppIdentity’s</a:t>
-            </a:r>
-            <a:r>
-              <a:rPr lang="en-US" dirty="0"/>
-              <a:t> endpoint receives the command and the proof.</a:t>
-            </a:r>
-          </a:p>
-          <a:p>
-            <a:pPr lvl="1"/>
-            <a:r>
-              <a:rPr lang="en-US" dirty="0"/>
-              <a:t>It builds a “</a:t>
-            </a:r>
-            <a:r>
-              <a:rPr lang="en-US" dirty="0" err="1"/>
-              <a:t>ScopedData</a:t>
-            </a:r>
-            <a:r>
-              <a:rPr lang="en-US" dirty="0"/>
-              <a:t>” with the proof and the fact that it is “$Trolley1” that sent the command.</a:t>
-            </a:r>
-          </a:p>
-          <a:p>
-            <a:pPr lvl="1"/>
-            <a:r>
-              <a:rPr lang="en-US" dirty="0"/>
-              <a:t>Its Endpoint is configured to resolve the </a:t>
-            </a:r>
-            <a:r>
-              <a:rPr lang="en-US" dirty="0" err="1"/>
-              <a:t>IAuthenticationInfo</a:t>
-            </a:r>
-            <a:r>
-              <a:rPr lang="en-US" dirty="0"/>
-              <a:t> service by:</a:t>
-            </a:r>
-          </a:p>
-          <a:p>
-            <a:pPr lvl="2"/>
-            <a:r>
-              <a:rPr lang="en-US" dirty="0"/>
-              <a:t>Accessing the </a:t>
-            </a:r>
-            <a:r>
-              <a:rPr lang="en-US" dirty="0" err="1"/>
-              <a:t>ScopedData’s</a:t>
-            </a:r>
-            <a:r>
-              <a:rPr lang="en-US" dirty="0"/>
-              <a:t> proof and sender.</a:t>
-            </a:r>
-          </a:p>
-          <a:p>
-            <a:pPr lvl="2"/>
-            <a:r>
-              <a:rPr lang="en-US" dirty="0"/>
-              <a:t>Verifying the signature and on success, returns the </a:t>
-            </a:r>
-            <a:r>
-              <a:rPr lang="en-US" dirty="0" err="1"/>
-              <a:t>IAuthenticationInfo</a:t>
-            </a:r>
-            <a:r>
-              <a:rPr lang="en-US" dirty="0"/>
-              <a:t>.</a:t>
-            </a:r>
-          </a:p>
-          <a:p>
-            <a:r>
-              <a:rPr lang="en-US" dirty="0"/>
-              <a:t>“$Box” validates and executes the command</a:t>
-            </a:r>
-          </a:p>
-          <a:p>
-            <a:pPr lvl="1"/>
-            <a:r>
-              <a:rPr lang="en-US" dirty="0"/>
-              <a:t>Commands are executed in the background by runners in a scoped service container parametrized with the </a:t>
-            </a:r>
-            <a:r>
-              <a:rPr lang="en-US" dirty="0" err="1"/>
-              <a:t>ScopedData</a:t>
-            </a:r>
-            <a:r>
-              <a:rPr lang="en-US" dirty="0"/>
-              <a:t>.</a:t>
-            </a:r>
-          </a:p>
-          <a:p>
-            <a:pPr lvl="1"/>
-            <a:r>
-              <a:rPr lang="en-US" dirty="0"/>
-              <a:t>If any service involved in the validation or execution of the command requires the </a:t>
-            </a:r>
-            <a:r>
-              <a:rPr lang="en-US" dirty="0" err="1"/>
-              <a:t>IAuthenticationInfo</a:t>
-            </a:r>
-            <a:r>
-              <a:rPr lang="en-US" dirty="0"/>
-              <a:t>, it is resolved.</a:t>
-            </a:r>
-          </a:p>
-          <a:p>
-            <a:pPr lvl="1"/>
-            <a:r>
-              <a:rPr lang="en-US" dirty="0"/>
-              <a:t>Command execution outcomes (Validation result, events and result) are sent back to “$Trolley1”</a:t>
-            </a:r>
-          </a:p>
-          <a:p>
-            <a:pPr lvl="1"/>
-            <a:endParaRPr lang="en-US" dirty="0"/>
-          </a:p>
-          <a:p>
-            <a:endParaRPr lang="en-US" dirty="0"/>
-          </a:p>
-        </p:txBody>
-      </p:sp>
-    </p:spTree>
-    <p:extLst>
-      <p:ext uri="{BB962C8B-B14F-4D97-AF65-F5344CB8AC3E}">
-        <p14:creationId xmlns:p14="http://schemas.microsoft.com/office/powerpoint/2010/main" val="2929531232"/>
-      </p:ext>
-    </p:extLst>
-  </p:cSld>
-  <p:clrMapOvr>
-    <a:masterClrMapping/>
-  </p:clrMapOvr>
-</p:sld>
-</file>
-
-<file path=ppt/slides/slide41.xml><?xml version="1.0" encoding="utf-8"?>
-<p:sld xmlns:a="http://schemas.openxmlformats.org/drawingml/2006/main" xmlns:r="http://schemas.openxmlformats.org/officeDocument/2006/relationships" xmlns:p="http://schemas.openxmlformats.org/presentationml/2006/main">
-  <p:cSld>
-    <p:spTree>
-      <p:nvGrpSpPr>
-        <p:cNvPr id="1" name=""/>
-        <p:cNvGrpSpPr/>
-        <p:nvPr/>
-      </p:nvGrpSpPr>
-      <p:grpSpPr>
-        <a:xfrm>
-          <a:off x="0" y="0"/>
-          <a:ext cx="0" cy="0"/>
-          <a:chOff x="0" y="0"/>
-          <a:chExt cx="0" cy="0"/>
-        </a:xfrm>
-      </p:grpSpPr>
-      <p:sp>
-        <p:nvSpPr>
-          <p:cNvPr id="2" name="Title 1">
-            <a:extLst>
-              <a:ext uri="{FF2B5EF4-FFF2-40B4-BE49-F238E27FC236}">
-                <a16:creationId xmlns:a16="http://schemas.microsoft.com/office/drawing/2014/main" id="{F028D4AF-53E9-FC4C-72A8-AAC9BDAA1F0D}"/>
-              </a:ext>
-            </a:extLst>
-          </p:cNvPr>
-          <p:cNvSpPr>
-            <a:spLocks noGrp="1"/>
-          </p:cNvSpPr>
-          <p:nvPr>
-            <p:ph type="title"/>
-          </p:nvPr>
-        </p:nvSpPr>
-        <p:spPr/>
-        <p:txBody>
-          <a:bodyPr/>
-          <a:lstStyle/>
-          <a:p>
-            <a:r>
-              <a:rPr lang="en-US" dirty="0"/>
-              <a:t>The “</a:t>
-            </a:r>
-            <a:r>
-              <a:rPr lang="en-US" dirty="0" err="1"/>
-              <a:t>PartyAuthenticationToken</a:t>
-            </a:r>
-            <a:r>
-              <a:rPr lang="en-US" dirty="0"/>
-              <a:t>”</a:t>
-            </a:r>
-          </a:p>
-        </p:txBody>
-      </p:sp>
-      <p:sp>
-        <p:nvSpPr>
-          <p:cNvPr id="3" name="Content Placeholder 2">
-            <a:extLst>
-              <a:ext uri="{FF2B5EF4-FFF2-40B4-BE49-F238E27FC236}">
-                <a16:creationId xmlns:a16="http://schemas.microsoft.com/office/drawing/2014/main" id="{5898F5DD-D01F-FADF-46B5-1C37122F4589}"/>
-              </a:ext>
-            </a:extLst>
-          </p:cNvPr>
-          <p:cNvSpPr>
-            <a:spLocks noGrp="1"/>
-          </p:cNvSpPr>
-          <p:nvPr>
-            <p:ph idx="1"/>
-          </p:nvPr>
-        </p:nvSpPr>
         <p:spPr/>
         <p:txBody>
           <a:bodyPr>
-            <a:normAutofit fontScale="92500" lnSpcReduction="20000"/>
+            <a:normAutofit fontScale="92500"/>
           </a:bodyPr>
           <a:lstStyle/>
           <a:p>
             <a:r>
-              <a:rPr lang="en-US" dirty="0"/>
-              <a:t>Contains at least (</a:t>
-            </a:r>
-            <a:r>
-              <a:rPr lang="en-US" dirty="0" err="1"/>
-              <a:t>OpenId</a:t>
-            </a:r>
-            <a:r>
-              <a:rPr lang="en-US" dirty="0"/>
-              <a:t> compliant)</a:t>
-            </a:r>
-          </a:p>
-          <a:p>
-            <a:pPr lvl="1"/>
-            <a:r>
-              <a:rPr lang="en-US" dirty="0"/>
-              <a:t>The </a:t>
-            </a:r>
-            <a:r>
-              <a:rPr lang="en-US" b="1" dirty="0"/>
-              <a:t>sub</a:t>
-            </a:r>
-            <a:r>
-              <a:rPr lang="en-US" dirty="0"/>
-              <a:t>ject: the </a:t>
-            </a:r>
-            <a:r>
-              <a:rPr lang="en-US" dirty="0" err="1"/>
-              <a:t>IAuthenticationInfo</a:t>
-            </a:r>
-            <a:r>
-              <a:rPr lang="en-US" dirty="0"/>
-              <a:t> </a:t>
-            </a:r>
-          </a:p>
-          <a:p>
-            <a:pPr lvl="2"/>
-            <a:r>
-              <a:rPr lang="en-US" dirty="0"/>
-              <a:t>with its </a:t>
-            </a:r>
-            <a:r>
-              <a:rPr lang="en-US" dirty="0" err="1"/>
-              <a:t>CriticalExpires</a:t>
-            </a:r>
-            <a:r>
-              <a:rPr lang="en-US" dirty="0"/>
-              <a:t> and </a:t>
-            </a:r>
-            <a:r>
-              <a:rPr lang="en-US" b="1" dirty="0"/>
-              <a:t>Exp</a:t>
-            </a:r>
-            <a:r>
-              <a:rPr lang="en-US" dirty="0"/>
-              <a:t>ires dates).</a:t>
-            </a:r>
-          </a:p>
-          <a:p>
-            <a:pPr lvl="1"/>
-            <a:r>
-              <a:rPr lang="en-US" dirty="0"/>
-              <a:t>The </a:t>
-            </a:r>
-            <a:r>
-              <a:rPr lang="en-US" b="1" dirty="0"/>
-              <a:t>iss</a:t>
-            </a:r>
-            <a:r>
-              <a:rPr lang="en-US" dirty="0"/>
-              <a:t>uer: the “Central User Directory” identity full name.</a:t>
-            </a:r>
-          </a:p>
-          <a:p>
-            <a:pPr lvl="1"/>
-            <a:r>
-              <a:rPr lang="en-US" b="1" dirty="0"/>
-              <a:t>alg</a:t>
-            </a:r>
-            <a:r>
-              <a:rPr lang="en-US" dirty="0"/>
-              <a:t>orithm and key size should be decided and fixed (best practice – may be overridden later).</a:t>
-            </a:r>
-          </a:p>
-          <a:p>
-            <a:r>
-              <a:rPr lang="en-US" dirty="0"/>
-              <a:t>Options (more </a:t>
-            </a:r>
-            <a:r>
-              <a:rPr lang="en-US" dirty="0" err="1"/>
-              <a:t>Oauth</a:t>
-            </a:r>
-            <a:r>
-              <a:rPr lang="en-US" dirty="0"/>
-              <a:t> than </a:t>
-            </a:r>
-            <a:r>
-              <a:rPr lang="en-US" dirty="0" err="1"/>
-              <a:t>OpenId</a:t>
-            </a:r>
-            <a:r>
-              <a:rPr lang="en-US" dirty="0"/>
-              <a:t>)</a:t>
-            </a:r>
-          </a:p>
-          <a:p>
-            <a:pPr lvl="1"/>
-            <a:r>
-              <a:rPr lang="en-US" dirty="0"/>
-              <a:t>The </a:t>
-            </a:r>
-            <a:r>
-              <a:rPr lang="en-US" b="1" dirty="0"/>
-              <a:t>aud</a:t>
-            </a:r>
-            <a:r>
-              <a:rPr lang="en-US" dirty="0"/>
-              <a:t>ience: the “$Box” identity full name.</a:t>
-            </a:r>
-          </a:p>
-          <a:p>
-            <a:pPr lvl="1"/>
-            <a:r>
-              <a:rPr lang="en-US" dirty="0"/>
-              <a:t>“client” or “origin”: the “$Trolley1” identity full name to which the token has been delivered.</a:t>
-            </a:r>
-          </a:p>
-          <a:p>
-            <a:r>
-              <a:rPr lang="en-US" dirty="0"/>
-              <a:t>Open questions</a:t>
-            </a:r>
-          </a:p>
-          <a:p>
-            <a:pPr lvl="1"/>
-            <a:r>
-              <a:rPr lang="en-US" dirty="0"/>
-              <a:t>“issued at” (</a:t>
-            </a:r>
-            <a:r>
-              <a:rPr lang="en-US" b="1" dirty="0" err="1"/>
-              <a:t>iat</a:t>
-            </a:r>
-            <a:r>
-              <a:rPr lang="en-US" dirty="0"/>
-              <a:t>).</a:t>
-            </a:r>
-          </a:p>
-          <a:p>
-            <a:pPr lvl="1"/>
-            <a:r>
-              <a:rPr lang="en-US" dirty="0"/>
-              <a:t>“not before” (</a:t>
-            </a:r>
-            <a:r>
-              <a:rPr lang="en-US" b="1" dirty="0" err="1"/>
-              <a:t>nbf</a:t>
-            </a:r>
-            <a:r>
-              <a:rPr lang="en-US" dirty="0"/>
-              <a:t>).</a:t>
-            </a:r>
-          </a:p>
-          <a:p>
-            <a:pPr lvl="1"/>
-            <a:r>
-              <a:rPr lang="en-US" dirty="0"/>
-              <a:t>Key identifier (</a:t>
-            </a:r>
-            <a:r>
-              <a:rPr lang="en-US" b="1" dirty="0"/>
-              <a:t>kid</a:t>
-            </a:r>
-            <a:r>
-              <a:rPr lang="en-US" dirty="0"/>
-              <a:t>) or not.</a:t>
-            </a:r>
-          </a:p>
-          <a:p>
-            <a:pPr lvl="1"/>
-            <a:endParaRPr lang="en-US" dirty="0"/>
-          </a:p>
-        </p:txBody>
-      </p:sp>
-    </p:spTree>
-    <p:extLst>
-      <p:ext uri="{BB962C8B-B14F-4D97-AF65-F5344CB8AC3E}">
-        <p14:creationId xmlns:p14="http://schemas.microsoft.com/office/powerpoint/2010/main" val="2057756364"/>
-      </p:ext>
-    </p:extLst>
-  </p:cSld>
-  <p:clrMapOvr>
-    <a:masterClrMapping/>
-  </p:clrMapOvr>
-</p:sld>
-</file>
-
-<file path=ppt/slides/slide42.xml><?xml version="1.0" encoding="utf-8"?>
-<p:sld xmlns:a="http://schemas.openxmlformats.org/drawingml/2006/main" xmlns:r="http://schemas.openxmlformats.org/officeDocument/2006/relationships" xmlns:p="http://schemas.openxmlformats.org/presentationml/2006/main">
-  <p:cSld>
-    <p:spTree>
-      <p:nvGrpSpPr>
-        <p:cNvPr id="1" name=""/>
-        <p:cNvGrpSpPr/>
-        <p:nvPr/>
-      </p:nvGrpSpPr>
-      <p:grpSpPr>
-        <a:xfrm>
-          <a:off x="0" y="0"/>
-          <a:ext cx="0" cy="0"/>
-          <a:chOff x="0" y="0"/>
-          <a:chExt cx="0" cy="0"/>
-        </a:xfrm>
-      </p:grpSpPr>
-      <p:sp>
-        <p:nvSpPr>
-          <p:cNvPr id="2" name="Title 1">
-            <a:extLst>
-              <a:ext uri="{FF2B5EF4-FFF2-40B4-BE49-F238E27FC236}">
-                <a16:creationId xmlns:a16="http://schemas.microsoft.com/office/drawing/2014/main" id="{7DBA6962-B8F6-250D-79FF-D57BEC59F1C8}"/>
-              </a:ext>
-            </a:extLst>
-          </p:cNvPr>
-          <p:cNvSpPr>
-            <a:spLocks noGrp="1"/>
-          </p:cNvSpPr>
-          <p:nvPr>
-            <p:ph type="title"/>
-          </p:nvPr>
-        </p:nvSpPr>
-        <p:spPr/>
-        <p:txBody>
-          <a:bodyPr/>
-          <a:lstStyle/>
-          <a:p>
-            <a:r>
-              <a:rPr lang="en-US" dirty="0"/>
-              <a:t>How Alice gets her Token? (1/2)</a:t>
-            </a:r>
-          </a:p>
-        </p:txBody>
-      </p:sp>
-      <p:sp>
-        <p:nvSpPr>
-          <p:cNvPr id="3" name="Content Placeholder 2">
-            <a:extLst>
-              <a:ext uri="{FF2B5EF4-FFF2-40B4-BE49-F238E27FC236}">
-                <a16:creationId xmlns:a16="http://schemas.microsoft.com/office/drawing/2014/main" id="{BBA3217C-4B1B-5541-FF3F-6319629D1ADF}"/>
-              </a:ext>
-            </a:extLst>
-          </p:cNvPr>
-          <p:cNvSpPr>
-            <a:spLocks noGrp="1"/>
-          </p:cNvSpPr>
-          <p:nvPr>
-            <p:ph idx="1"/>
-          </p:nvPr>
-        </p:nvSpPr>
-        <p:spPr>
-          <a:xfrm>
-            <a:off x="838200" y="1825625"/>
-            <a:ext cx="10774680" cy="4351338"/>
-          </a:xfrm>
-        </p:spPr>
-        <p:txBody>
-          <a:bodyPr>
-            <a:normAutofit fontScale="77500" lnSpcReduction="20000"/>
-          </a:bodyPr>
-          <a:lstStyle/>
-          <a:p>
-            <a:r>
-              <a:rPr lang="en-US" dirty="0"/>
-              <a:t>Context: Alice’s application ($Trolley1) is NOT a full backend with a User store.</a:t>
-            </a:r>
-          </a:p>
-          <a:p>
-            <a:pPr lvl="1"/>
-            <a:r>
-              <a:rPr lang="en-US" dirty="0"/>
-              <a:t>It cannot “log” anybody, it is a basic “agent”, a “satellite software”</a:t>
-            </a:r>
-          </a:p>
-          <a:p>
-            <a:pPr lvl="1"/>
-            <a:r>
-              <a:rPr lang="en-US" dirty="0" err="1"/>
-              <a:t>CK.AspNet.Auth</a:t>
-            </a:r>
-            <a:r>
-              <a:rPr lang="en-US" dirty="0"/>
-              <a:t> cannot be used: it is dedicated to the “</a:t>
-            </a:r>
-            <a:r>
-              <a:rPr lang="en-US" dirty="0" err="1"/>
-              <a:t>CentralUserRepository</a:t>
-            </a:r>
-            <a:r>
-              <a:rPr lang="en-US" dirty="0"/>
-              <a:t>”.</a:t>
-            </a:r>
-          </a:p>
-          <a:p>
-            <a:r>
-              <a:rPr lang="en-US" dirty="0"/>
-              <a:t>Best: the front app uses </a:t>
-            </a:r>
-            <a:r>
-              <a:rPr lang="en-US" dirty="0" err="1"/>
-              <a:t>wfa</a:t>
-            </a:r>
-            <a:r>
-              <a:rPr lang="en-US" dirty="0"/>
-              <a:t> (</a:t>
-            </a:r>
-            <a:r>
-              <a:rPr lang="en-US" dirty="0" err="1"/>
-              <a:t>js</a:t>
-            </a:r>
-            <a:r>
-              <a:rPr lang="en-US" dirty="0"/>
-              <a:t>) and everything works…</a:t>
-            </a:r>
-          </a:p>
-          <a:p>
-            <a:pPr lvl="1"/>
-            <a:r>
-              <a:rPr lang="en-US" dirty="0"/>
-              <a:t>Its backend acts as if </a:t>
-            </a:r>
-            <a:r>
-              <a:rPr lang="en-US" dirty="0" err="1"/>
-              <a:t>CK.AspNet.Auth</a:t>
-            </a:r>
-            <a:r>
-              <a:rPr lang="en-US" dirty="0"/>
-              <a:t> was used.</a:t>
-            </a:r>
-          </a:p>
-          <a:p>
-            <a:pPr lvl="1"/>
-            <a:r>
-              <a:rPr lang="en-US" dirty="0"/>
-              <a:t>We “just” need a middleware that handles these routes</a:t>
-            </a:r>
-          </a:p>
-          <a:p>
-            <a:pPr lvl="2"/>
-            <a:r>
-              <a:rPr lang="en-US" dirty="0"/>
-              <a:t>/.</a:t>
-            </a:r>
-            <a:r>
-              <a:rPr lang="en-US" dirty="0" err="1"/>
-              <a:t>webFront</a:t>
-            </a:r>
-            <a:endParaRPr lang="en-US" dirty="0"/>
-          </a:p>
-          <a:p>
-            <a:pPr lvl="3"/>
-            <a:r>
-              <a:rPr lang="en-US" dirty="0"/>
-              <a:t>/token</a:t>
-            </a:r>
-          </a:p>
-          <a:p>
-            <a:pPr lvl="3"/>
-            <a:r>
-              <a:rPr lang="en-US" dirty="0"/>
-              <a:t>/c</a:t>
-            </a:r>
-          </a:p>
-          <a:p>
-            <a:pPr lvl="4"/>
-            <a:r>
-              <a:rPr lang="en-US" dirty="0"/>
-              <a:t>/refresh</a:t>
-            </a:r>
-          </a:p>
-          <a:p>
-            <a:pPr lvl="4"/>
-            <a:r>
-              <a:rPr lang="en-US" dirty="0"/>
-              <a:t>/</a:t>
-            </a:r>
-            <a:r>
-              <a:rPr lang="en-US" dirty="0" err="1"/>
-              <a:t>basicLogin</a:t>
-            </a:r>
-            <a:endParaRPr lang="en-US" dirty="0"/>
-          </a:p>
-          <a:p>
-            <a:pPr lvl="4"/>
-            <a:r>
-              <a:rPr lang="en-US" dirty="0"/>
-              <a:t>/</a:t>
-            </a:r>
-            <a:r>
-              <a:rPr lang="en-US" dirty="0" err="1"/>
-              <a:t>startLogin</a:t>
-            </a:r>
-            <a:endParaRPr lang="en-US" dirty="0"/>
-          </a:p>
-          <a:p>
-            <a:pPr lvl="4"/>
-            <a:r>
-              <a:rPr lang="en-US" dirty="0"/>
-              <a:t>/logout</a:t>
-            </a:r>
-          </a:p>
-          <a:p>
-            <a:pPr lvl="4"/>
-            <a:r>
-              <a:rPr lang="en-US" dirty="0"/>
-              <a:t>/impersonate</a:t>
-            </a:r>
-          </a:p>
-          <a:p>
-            <a:pPr lvl="4"/>
-            <a:r>
-              <a:rPr lang="en-US" dirty="0"/>
-              <a:t>/</a:t>
-            </a:r>
-            <a:r>
-              <a:rPr lang="en-US" dirty="0" err="1"/>
-              <a:t>unsafeDirectLogin</a:t>
-            </a:r>
-            <a:r>
-              <a:rPr lang="en-US" dirty="0"/>
-              <a:t> =&gt; 403 Forbidden</a:t>
-            </a:r>
-          </a:p>
-          <a:p>
-            <a:pPr lvl="4"/>
-            <a:endParaRPr lang="en-US" dirty="0"/>
-          </a:p>
-          <a:p>
-            <a:r>
-              <a:rPr lang="en-US" dirty="0"/>
-              <a:t>It seems far easier to say than to implement this </a:t>
-            </a:r>
-            <a:r>
-              <a:rPr lang="en-US" dirty="0">
-                <a:sym typeface="Wingdings" panose="05000000000000000000" pitchFamily="2" charset="2"/>
-              </a:rPr>
-              <a:t>.</a:t>
-            </a:r>
-            <a:endParaRPr lang="en-US" dirty="0"/>
-          </a:p>
-          <a:p>
-            <a:pPr lvl="2"/>
-            <a:endParaRPr lang="en-US" dirty="0"/>
-          </a:p>
-          <a:p>
-            <a:pPr lvl="1"/>
-            <a:endParaRPr lang="en-US" dirty="0"/>
-          </a:p>
-          <a:p>
-            <a:endParaRPr lang="en-US" dirty="0"/>
-          </a:p>
-        </p:txBody>
-      </p:sp>
-      <p:sp>
-        <p:nvSpPr>
-          <p:cNvPr id="4" name="Right Brace 3">
-            <a:extLst>
-              <a:ext uri="{FF2B5EF4-FFF2-40B4-BE49-F238E27FC236}">
-                <a16:creationId xmlns:a16="http://schemas.microsoft.com/office/drawing/2014/main" id="{71E99E08-01ED-CE53-82EC-87974EE22779}"/>
-              </a:ext>
-            </a:extLst>
-          </p:cNvPr>
-          <p:cNvSpPr/>
-          <p:nvPr/>
-        </p:nvSpPr>
-        <p:spPr>
-          <a:xfrm>
-            <a:off x="5618480" y="3738880"/>
-            <a:ext cx="406400" cy="1452880"/>
-          </a:xfrm>
-          <a:prstGeom prst="rightBrace">
-            <a:avLst/>
-          </a:prstGeom>
-        </p:spPr>
-        <p:style>
-          <a:lnRef idx="1">
-            <a:schemeClr val="accent1"/>
-          </a:lnRef>
-          <a:fillRef idx="0">
-            <a:schemeClr val="accent1"/>
-          </a:fillRef>
-          <a:effectRef idx="0">
-            <a:schemeClr val="accent1"/>
-          </a:effectRef>
-          <a:fontRef idx="minor">
-            <a:schemeClr val="tx1"/>
-          </a:fontRef>
-        </p:style>
-        <p:txBody>
-          <a:bodyPr rtlCol="0" anchor="ctr"/>
-          <a:lstStyle/>
-          <a:p>
-            <a:pPr algn="ctr"/>
-            <a:endParaRPr lang="en-US"/>
-          </a:p>
-        </p:txBody>
-      </p:sp>
-      <p:sp>
-        <p:nvSpPr>
-          <p:cNvPr id="9" name="Arrow: Bent-Up 8">
-            <a:extLst>
-              <a:ext uri="{FF2B5EF4-FFF2-40B4-BE49-F238E27FC236}">
-                <a16:creationId xmlns:a16="http://schemas.microsoft.com/office/drawing/2014/main" id="{83523983-9D55-A483-47C8-7C4E0AEA468A}"/>
-              </a:ext>
-            </a:extLst>
-          </p:cNvPr>
-          <p:cNvSpPr/>
-          <p:nvPr/>
-        </p:nvSpPr>
-        <p:spPr>
-          <a:xfrm>
-            <a:off x="6024880" y="2697163"/>
-            <a:ext cx="2682240" cy="1813560"/>
-          </a:xfrm>
-          <a:prstGeom prst="bentUpArrow">
-            <a:avLst>
-              <a:gd name="adj1" fmla="val 5392"/>
-              <a:gd name="adj2" fmla="val 25000"/>
-              <a:gd name="adj3" fmla="val 22759"/>
-            </a:avLst>
-          </a:prstGeom>
-        </p:spPr>
-        <p:style>
-          <a:lnRef idx="2">
-            <a:schemeClr val="accent1">
-              <a:shade val="15000"/>
-            </a:schemeClr>
-          </a:lnRef>
-          <a:fillRef idx="1">
-            <a:schemeClr val="accent1"/>
-          </a:fillRef>
-          <a:effectRef idx="0">
-            <a:schemeClr val="accent1"/>
-          </a:effectRef>
-          <a:fontRef idx="minor">
-            <a:schemeClr val="lt1"/>
-          </a:fontRef>
-        </p:style>
-        <p:txBody>
-          <a:bodyPr rtlCol="0" anchor="ctr"/>
-          <a:lstStyle/>
-          <a:p>
-            <a:pPr algn="ctr"/>
-            <a:endParaRPr lang="en-US"/>
-          </a:p>
-        </p:txBody>
-      </p:sp>
-    </p:spTree>
-    <p:extLst>
-      <p:ext uri="{BB962C8B-B14F-4D97-AF65-F5344CB8AC3E}">
-        <p14:creationId xmlns:p14="http://schemas.microsoft.com/office/powerpoint/2010/main" val="262633839"/>
-      </p:ext>
-    </p:extLst>
-  </p:cSld>
-  <p:clrMapOvr>
-    <a:masterClrMapping/>
-  </p:clrMapOvr>
-</p:sld>
-</file>
-
-<file path=ppt/slides/slide43.xml><?xml version="1.0" encoding="utf-8"?>
-<p:sld xmlns:a="http://schemas.openxmlformats.org/drawingml/2006/main" xmlns:r="http://schemas.openxmlformats.org/officeDocument/2006/relationships" xmlns:p="http://schemas.openxmlformats.org/presentationml/2006/main">
-  <p:cSld>
-    <p:spTree>
-      <p:nvGrpSpPr>
-        <p:cNvPr id="1" name=""/>
-        <p:cNvGrpSpPr/>
-        <p:nvPr/>
-      </p:nvGrpSpPr>
-      <p:grpSpPr>
-        <a:xfrm>
-          <a:off x="0" y="0"/>
-          <a:ext cx="0" cy="0"/>
-          <a:chOff x="0" y="0"/>
-          <a:chExt cx="0" cy="0"/>
-        </a:xfrm>
-      </p:grpSpPr>
-      <p:sp>
-        <p:nvSpPr>
-          <p:cNvPr id="2" name="Title 1">
-            <a:extLst>
-              <a:ext uri="{FF2B5EF4-FFF2-40B4-BE49-F238E27FC236}">
-                <a16:creationId xmlns:a16="http://schemas.microsoft.com/office/drawing/2014/main" id="{52C3CFE8-B3DD-1DE3-9BE3-65A7A511C146}"/>
-              </a:ext>
-            </a:extLst>
-          </p:cNvPr>
-          <p:cNvSpPr>
-            <a:spLocks noGrp="1"/>
-          </p:cNvSpPr>
-          <p:nvPr>
-            <p:ph type="title"/>
-          </p:nvPr>
-        </p:nvSpPr>
-        <p:spPr/>
-        <p:txBody>
-          <a:bodyPr/>
-          <a:lstStyle/>
-          <a:p>
-            <a:r>
-              <a:rPr lang="en-US" dirty="0"/>
-              <a:t>How Alice gets her Token? (2/2)</a:t>
-            </a:r>
-          </a:p>
-        </p:txBody>
-      </p:sp>
-      <p:sp>
-        <p:nvSpPr>
-          <p:cNvPr id="3" name="Content Placeholder 2">
-            <a:extLst>
-              <a:ext uri="{FF2B5EF4-FFF2-40B4-BE49-F238E27FC236}">
-                <a16:creationId xmlns:a16="http://schemas.microsoft.com/office/drawing/2014/main" id="{90351F6E-6D6D-6002-23CE-8ADA16FF0EA3}"/>
-              </a:ext>
-            </a:extLst>
-          </p:cNvPr>
-          <p:cNvSpPr>
-            <a:spLocks noGrp="1"/>
-          </p:cNvSpPr>
-          <p:nvPr>
-            <p:ph idx="1"/>
-          </p:nvPr>
-        </p:nvSpPr>
-        <p:spPr/>
-        <p:txBody>
-          <a:bodyPr/>
-          <a:lstStyle/>
-          <a:p>
-            <a:r>
-              <a:rPr lang="en-US" dirty="0"/>
-              <a:t>“Use the standard Luke!”</a:t>
-            </a:r>
-          </a:p>
-          <a:p>
-            <a:pPr lvl="1"/>
-            <a:r>
-              <a:rPr lang="en-US" dirty="0"/>
-              <a:t>The backend has only OIDC authentication bound to the “Central User Repository” and then use </a:t>
-            </a:r>
-          </a:p>
-          <a:p>
-            <a:pPr lvl="1"/>
-            <a:endParaRPr lang="en-US" dirty="0"/>
-          </a:p>
-          <a:p>
-            <a:pPr marL="0" indent="0">
-              <a:buNone/>
-            </a:pPr>
-            <a:endParaRPr lang="en-US" dirty="0"/>
-          </a:p>
-        </p:txBody>
-      </p:sp>
-    </p:spTree>
-    <p:extLst>
-      <p:ext uri="{BB962C8B-B14F-4D97-AF65-F5344CB8AC3E}">
-        <p14:creationId xmlns:p14="http://schemas.microsoft.com/office/powerpoint/2010/main" val="804121939"/>
-      </p:ext>
-    </p:extLst>
-  </p:cSld>
-  <p:clrMapOvr>
-    <a:masterClrMapping/>
-  </p:clrMapOvr>
-</p:sld>
-</file>
-
-<file path=ppt/slides/slide44.xml><?xml version="1.0" encoding="utf-8"?>
-<p:sld xmlns:a="http://schemas.openxmlformats.org/drawingml/2006/main" xmlns:r="http://schemas.openxmlformats.org/officeDocument/2006/relationships" xmlns:p="http://schemas.openxmlformats.org/presentationml/2006/main">
-  <p:cSld>
-    <p:spTree>
-      <p:nvGrpSpPr>
-        <p:cNvPr id="1" name=""/>
-        <p:cNvGrpSpPr/>
-        <p:nvPr/>
-      </p:nvGrpSpPr>
-      <p:grpSpPr>
-        <a:xfrm>
-          <a:off x="0" y="0"/>
-          <a:ext cx="0" cy="0"/>
-          <a:chOff x="0" y="0"/>
-          <a:chExt cx="0" cy="0"/>
-        </a:xfrm>
-      </p:grpSpPr>
-      <p:sp>
-        <p:nvSpPr>
-          <p:cNvPr id="2" name="Title 1">
-            <a:extLst>
-              <a:ext uri="{FF2B5EF4-FFF2-40B4-BE49-F238E27FC236}">
-                <a16:creationId xmlns:a16="http://schemas.microsoft.com/office/drawing/2014/main" id="{96430CD7-8283-9031-1738-32DC1DF85B7B}"/>
-              </a:ext>
-            </a:extLst>
-          </p:cNvPr>
-          <p:cNvSpPr>
-            <a:spLocks noGrp="1"/>
-          </p:cNvSpPr>
-          <p:nvPr>
-            <p:ph type="title"/>
-          </p:nvPr>
-        </p:nvSpPr>
-        <p:spPr/>
-        <p:txBody>
-          <a:bodyPr/>
-          <a:lstStyle/>
-          <a:p>
-            <a:r>
-              <a:rPr lang="en-US" dirty="0"/>
-              <a:t>Roadmap</a:t>
-            </a:r>
-          </a:p>
-        </p:txBody>
-      </p:sp>
-      <p:sp>
-        <p:nvSpPr>
-          <p:cNvPr id="3" name="Content Placeholder 2">
-            <a:extLst>
-              <a:ext uri="{FF2B5EF4-FFF2-40B4-BE49-F238E27FC236}">
-                <a16:creationId xmlns:a16="http://schemas.microsoft.com/office/drawing/2014/main" id="{CE6F859C-4726-43EF-F0A8-B73939B70279}"/>
-              </a:ext>
-            </a:extLst>
-          </p:cNvPr>
-          <p:cNvSpPr>
-            <a:spLocks noGrp="1"/>
-          </p:cNvSpPr>
-          <p:nvPr>
-            <p:ph idx="1"/>
-          </p:nvPr>
-        </p:nvSpPr>
-        <p:spPr/>
-        <p:txBody>
-          <a:bodyPr>
-            <a:normAutofit fontScale="62500" lnSpcReduction="20000"/>
-          </a:bodyPr>
-          <a:lstStyle/>
-          <a:p>
-            <a:r>
               <a:rPr lang="en-US" dirty="0" err="1"/>
               <a:t>Cris</a:t>
             </a:r>
             <a:r>
               <a:rPr lang="en-US" dirty="0"/>
-              <a:t> feature (next slide).</a:t>
-            </a:r>
-          </a:p>
-          <a:p>
-            <a:r>
-              <a:rPr lang="en-US" dirty="0"/>
-              <a:t>Enlistment of new Parties: </a:t>
-            </a:r>
-            <a:r>
-              <a:rPr lang="en-US" dirty="0" err="1"/>
-              <a:t>AcceptUri</a:t>
-            </a:r>
-            <a:r>
-              <a:rPr lang="en-US" dirty="0"/>
-              <a:t> &amp; </a:t>
-            </a:r>
-            <a:r>
-              <a:rPr lang="en-US" dirty="0" err="1"/>
-              <a:t>UnknownRemote</a:t>
-            </a:r>
-            <a:endParaRPr lang="en-US" dirty="0"/>
-          </a:p>
-          <a:p>
-            <a:r>
-              <a:rPr lang="en-US" dirty="0"/>
-              <a:t>Poco store (</a:t>
+              <a:t> feature.</a:t>
+            </a:r>
+          </a:p>
+          <a:p>
+            <a:r>
+              <a:rPr lang="en-US" dirty="0"/>
+              <a:t>Poco or Message store (</a:t>
             </a:r>
             <a:r>
               <a:rPr lang="en-US" dirty="0">
@@ -20317,81 +18627,6 @@
             </a:r>
           </a:p>
           <a:p>
-            <a:r>
-              <a:rPr lang="en-US" dirty="0"/>
-              <a:t>“X509Store” (</a:t>
-            </a:r>
-            <a:r>
-              <a:rPr lang="en-US" dirty="0" err="1"/>
-              <a:t>.Net</a:t>
-            </a:r>
-            <a:r>
-              <a:rPr lang="en-US" dirty="0"/>
-              <a:t> core or not?)</a:t>
-            </a:r>
-          </a:p>
-          <a:p>
-            <a:pPr lvl="1"/>
-            <a:r>
-              <a:rPr lang="en-US" dirty="0"/>
-              <a:t>First step</a:t>
-            </a:r>
-          </a:p>
-          <a:p>
-            <a:pPr lvl="2"/>
-            <a:r>
-              <a:rPr lang="en-US" dirty="0"/>
-              <a:t>The primary signing certificate that identifies the party.</a:t>
-            </a:r>
-          </a:p>
-          <a:p>
-            <a:pPr lvl="2"/>
-            <a:r>
-              <a:rPr lang="en-US" dirty="0"/>
-              <a:t>Rolling it (or not?)</a:t>
-            </a:r>
-          </a:p>
-          <a:p>
-            <a:pPr lvl="1"/>
-            <a:r>
-              <a:rPr lang="en-US" dirty="0"/>
-              <a:t>Other certificates</a:t>
-            </a:r>
-          </a:p>
-          <a:p>
-            <a:pPr lvl="2"/>
-            <a:r>
-              <a:rPr lang="en-US" dirty="0"/>
-              <a:t>Name for them?</a:t>
-            </a:r>
-          </a:p>
-          <a:p>
-            <a:pPr lvl="2"/>
-            <a:r>
-              <a:rPr lang="en-US" dirty="0"/>
-              <a:t>Rolling?</a:t>
-            </a:r>
-          </a:p>
-          <a:p>
-            <a:pPr lvl="2"/>
-            <a:r>
-              <a:rPr lang="en-US" dirty="0"/>
-              <a:t>Orchard use the X509Store only for its primary certificate, others are on disk, optionally protected by a password.</a:t>
-            </a:r>
-          </a:p>
-          <a:p>
-            <a:pPr marL="914400" lvl="2" indent="0">
-              <a:buNone/>
-            </a:pPr>
-            <a:r>
-              <a:rPr lang="en-US" dirty="0">
-                <a:hlinkClick r:id="rId3"/>
-              </a:rPr>
-              <a:t>https://github.com/OrchardCMS/OrchardCore/blob/main/src/OrchardCore.Modules/OrchardCore.OpenId/Services/OpenIdServerService.cs</a:t>
-            </a:r>
-            <a:endParaRPr lang="en-US" dirty="0"/>
-          </a:p>
-          <a:p>
             <a:pPr lvl="1"/>
             <a:r>
               <a:rPr lang="en-US" dirty="0"/>
@@ -20417,6 +18652,41 @@
             <a:r>
               <a:rPr lang="en-US" dirty="0"/>
               <a:t>Because ref counting sucks</a:t>
+            </a:r>
+          </a:p>
+          <a:p>
+            <a:r>
+              <a:rPr lang="en-US" dirty="0" err="1"/>
+              <a:t>OutgoingMessage</a:t>
+            </a:r>
+            <a:r>
+              <a:rPr lang="en-US" dirty="0"/>
+              <a:t> mutability: implement Freeze() and </a:t>
+            </a:r>
+            <a:r>
+              <a:rPr lang="en-US" dirty="0" err="1"/>
+              <a:t>IsFrozen</a:t>
+            </a:r>
+            <a:endParaRPr lang="en-US" dirty="0"/>
+          </a:p>
+          <a:p>
+            <a:r>
+              <a:rPr lang="en-US" dirty="0"/>
+              <a:t>Implement the “</a:t>
+            </a:r>
+            <a:r>
+              <a:rPr lang="en-US" dirty="0" err="1"/>
+              <a:t>BigMessage</a:t>
+            </a:r>
+            <a:r>
+              <a:rPr lang="en-US" dirty="0"/>
+              <a:t>” slicing (0 Protocol).</a:t>
+            </a:r>
+          </a:p>
+          <a:p>
+            <a:r>
+              <a:rPr lang="en-US" dirty="0"/>
+              <a:t>Tunneling</a:t>
             </a:r>
           </a:p>
           <a:p>
@@ -20428,936 +18698,6 @@
     <p:extLst>
       <p:ext uri="{BB962C8B-B14F-4D97-AF65-F5344CB8AC3E}">
         <p14:creationId xmlns:p14="http://schemas.microsoft.com/office/powerpoint/2010/main" val="1240639712"/>
-      </p:ext>
-    </p:extLst>
-  </p:cSld>
-  <p:clrMapOvr>
-    <a:masterClrMapping/>
-  </p:clrMapOvr>
-</p:sld>
-</file>
-
-<file path=ppt/slides/slide45.xml><?xml version="1.0" encoding="utf-8"?>
-<p:sld xmlns:a="http://schemas.openxmlformats.org/drawingml/2006/main" xmlns:r="http://schemas.openxmlformats.org/officeDocument/2006/relationships" xmlns:p="http://schemas.openxmlformats.org/presentationml/2006/main">
-  <p:cSld>
-    <p:spTree>
-      <p:nvGrpSpPr>
-        <p:cNvPr id="1" name=""/>
-        <p:cNvGrpSpPr/>
-        <p:nvPr/>
-      </p:nvGrpSpPr>
-      <p:grpSpPr>
-        <a:xfrm>
-          <a:off x="0" y="0"/>
-          <a:ext cx="0" cy="0"/>
-          <a:chOff x="0" y="0"/>
-          <a:chExt cx="0" cy="0"/>
-        </a:xfrm>
-      </p:grpSpPr>
-      <p:sp>
-        <p:nvSpPr>
-          <p:cNvPr id="2" name="Title 1">
-            <a:extLst>
-              <a:ext uri="{FF2B5EF4-FFF2-40B4-BE49-F238E27FC236}">
-                <a16:creationId xmlns:a16="http://schemas.microsoft.com/office/drawing/2014/main" id="{5B1EBC4F-39D3-FAF0-AB9D-35A61EBB7F39}"/>
-              </a:ext>
-            </a:extLst>
-          </p:cNvPr>
-          <p:cNvSpPr>
-            <a:spLocks noGrp="1"/>
-          </p:cNvSpPr>
-          <p:nvPr>
-            <p:ph type="title"/>
-          </p:nvPr>
-        </p:nvSpPr>
-        <p:spPr/>
-        <p:txBody>
-          <a:bodyPr/>
-          <a:lstStyle/>
-          <a:p>
-            <a:r>
-              <a:rPr lang="en-US" dirty="0" err="1"/>
-              <a:t>Cris</a:t>
-            </a:r>
-            <a:r>
-              <a:rPr lang="en-US" dirty="0"/>
-              <a:t> feature</a:t>
-            </a:r>
-          </a:p>
-        </p:txBody>
-      </p:sp>
-      <p:sp>
-        <p:nvSpPr>
-          <p:cNvPr id="4" name="Content Placeholder 2">
-            <a:extLst>
-              <a:ext uri="{FF2B5EF4-FFF2-40B4-BE49-F238E27FC236}">
-                <a16:creationId xmlns:a16="http://schemas.microsoft.com/office/drawing/2014/main" id="{C29E0310-D200-A432-CC9E-332FDFE41015}"/>
-              </a:ext>
-            </a:extLst>
-          </p:cNvPr>
-          <p:cNvSpPr txBox="1">
-            <a:spLocks/>
-          </p:cNvSpPr>
-          <p:nvPr/>
-        </p:nvSpPr>
-        <p:spPr>
-          <a:xfrm>
-            <a:off x="838200" y="1562582"/>
-            <a:ext cx="10515600" cy="4766781"/>
-          </a:xfrm>
-          <a:prstGeom prst="rect">
-            <a:avLst/>
-          </a:prstGeom>
-        </p:spPr>
-        <p:txBody>
-          <a:bodyPr vert="horz" lIns="91440" tIns="45720" rIns="91440" bIns="45720" rtlCol="0">
-            <a:normAutofit fontScale="47500" lnSpcReduction="20000"/>
-          </a:bodyPr>
-          <a:lstStyle>
-            <a:lvl1pPr marL="228600" indent="-228600" algn="l" defTabSz="914400" rtl="0" eaLnBrk="1" latinLnBrk="0" hangingPunct="1">
-              <a:lnSpc>
-                <a:spcPct val="90000"/>
-              </a:lnSpc>
-              <a:spcBef>
-                <a:spcPts val="1000"/>
-              </a:spcBef>
-              <a:buFont typeface="Arial" panose="020B0604020202020204" pitchFamily="34" charset="0"/>
-              <a:buChar char="•"/>
-              <a:defRPr sz="2800" kern="1200">
-                <a:solidFill>
-                  <a:schemeClr val="tx1"/>
-                </a:solidFill>
-                <a:latin typeface="+mn-lt"/>
-                <a:ea typeface="+mn-ea"/>
-                <a:cs typeface="+mn-cs"/>
-              </a:defRPr>
-            </a:lvl1pPr>
-            <a:lvl2pPr marL="685800" indent="-228600" algn="l" defTabSz="914400" rtl="0" eaLnBrk="1" latinLnBrk="0" hangingPunct="1">
-              <a:lnSpc>
-                <a:spcPct val="90000"/>
-              </a:lnSpc>
-              <a:spcBef>
-                <a:spcPts val="500"/>
-              </a:spcBef>
-              <a:buFont typeface="Arial" panose="020B0604020202020204" pitchFamily="34" charset="0"/>
-              <a:buChar char="•"/>
-              <a:defRPr sz="2400" kern="1200">
-                <a:solidFill>
-                  <a:schemeClr val="tx1"/>
-                </a:solidFill>
-                <a:latin typeface="+mn-lt"/>
-                <a:ea typeface="+mn-ea"/>
-                <a:cs typeface="+mn-cs"/>
-              </a:defRPr>
-            </a:lvl2pPr>
-            <a:lvl3pPr marL="1143000" indent="-228600" algn="l" defTabSz="914400" rtl="0" eaLnBrk="1" latinLnBrk="0" hangingPunct="1">
-              <a:lnSpc>
-                <a:spcPct val="90000"/>
-              </a:lnSpc>
-              <a:spcBef>
-                <a:spcPts val="500"/>
-              </a:spcBef>
-              <a:buFont typeface="Arial" panose="020B0604020202020204" pitchFamily="34" charset="0"/>
-              <a:buChar char="•"/>
-              <a:defRPr sz="2000" kern="1200">
-                <a:solidFill>
-                  <a:schemeClr val="tx1"/>
-                </a:solidFill>
-                <a:latin typeface="+mn-lt"/>
-                <a:ea typeface="+mn-ea"/>
-                <a:cs typeface="+mn-cs"/>
-              </a:defRPr>
-            </a:lvl3pPr>
-            <a:lvl4pPr marL="1600200" indent="-228600" algn="l" defTabSz="914400" rtl="0" eaLnBrk="1" latinLnBrk="0" hangingPunct="1">
-              <a:lnSpc>
-                <a:spcPct val="90000"/>
-              </a:lnSpc>
-              <a:spcBef>
-                <a:spcPts val="500"/>
-              </a:spcBef>
-              <a:buFont typeface="Arial" panose="020B0604020202020204" pitchFamily="34" charset="0"/>
-              <a:buChar char="•"/>
-              <a:defRPr sz="1800" kern="1200">
-                <a:solidFill>
-                  <a:schemeClr val="tx1"/>
-                </a:solidFill>
-                <a:latin typeface="+mn-lt"/>
-                <a:ea typeface="+mn-ea"/>
-                <a:cs typeface="+mn-cs"/>
-              </a:defRPr>
-            </a:lvl4pPr>
-            <a:lvl5pPr marL="2057400" indent="-228600" algn="l" defTabSz="914400" rtl="0" eaLnBrk="1" latinLnBrk="0" hangingPunct="1">
-              <a:lnSpc>
-                <a:spcPct val="90000"/>
-              </a:lnSpc>
-              <a:spcBef>
-                <a:spcPts val="500"/>
-              </a:spcBef>
-              <a:buFont typeface="Arial" panose="020B0604020202020204" pitchFamily="34" charset="0"/>
-              <a:buChar char="•"/>
-              <a:defRPr sz="1800" kern="1200">
-                <a:solidFill>
-                  <a:schemeClr val="tx1"/>
-                </a:solidFill>
-                <a:latin typeface="+mn-lt"/>
-                <a:ea typeface="+mn-ea"/>
-                <a:cs typeface="+mn-cs"/>
-              </a:defRPr>
-            </a:lvl5pPr>
-            <a:lvl6pPr marL="2514600" indent="-228600" algn="l" defTabSz="914400" rtl="0" eaLnBrk="1" latinLnBrk="0" hangingPunct="1">
-              <a:lnSpc>
-                <a:spcPct val="90000"/>
-              </a:lnSpc>
-              <a:spcBef>
-                <a:spcPts val="500"/>
-              </a:spcBef>
-              <a:buFont typeface="Arial" panose="020B0604020202020204" pitchFamily="34" charset="0"/>
-              <a:buChar char="•"/>
-              <a:defRPr sz="1800" kern="1200">
-                <a:solidFill>
-                  <a:schemeClr val="tx1"/>
-                </a:solidFill>
-                <a:latin typeface="+mn-lt"/>
-                <a:ea typeface="+mn-ea"/>
-                <a:cs typeface="+mn-cs"/>
-              </a:defRPr>
-            </a:lvl6pPr>
-            <a:lvl7pPr marL="2971800" indent="-228600" algn="l" defTabSz="914400" rtl="0" eaLnBrk="1" latinLnBrk="0" hangingPunct="1">
-              <a:lnSpc>
-                <a:spcPct val="90000"/>
-              </a:lnSpc>
-              <a:spcBef>
-                <a:spcPts val="500"/>
-              </a:spcBef>
-              <a:buFont typeface="Arial" panose="020B0604020202020204" pitchFamily="34" charset="0"/>
-              <a:buChar char="•"/>
-              <a:defRPr sz="1800" kern="1200">
-                <a:solidFill>
-                  <a:schemeClr val="tx1"/>
-                </a:solidFill>
-                <a:latin typeface="+mn-lt"/>
-                <a:ea typeface="+mn-ea"/>
-                <a:cs typeface="+mn-cs"/>
-              </a:defRPr>
-            </a:lvl7pPr>
-            <a:lvl8pPr marL="3429000" indent="-228600" algn="l" defTabSz="914400" rtl="0" eaLnBrk="1" latinLnBrk="0" hangingPunct="1">
-              <a:lnSpc>
-                <a:spcPct val="90000"/>
-              </a:lnSpc>
-              <a:spcBef>
-                <a:spcPts val="500"/>
-              </a:spcBef>
-              <a:buFont typeface="Arial" panose="020B0604020202020204" pitchFamily="34" charset="0"/>
-              <a:buChar char="•"/>
-              <a:defRPr sz="1800" kern="1200">
-                <a:solidFill>
-                  <a:schemeClr val="tx1"/>
-                </a:solidFill>
-                <a:latin typeface="+mn-lt"/>
-                <a:ea typeface="+mn-ea"/>
-                <a:cs typeface="+mn-cs"/>
-              </a:defRPr>
-            </a:lvl8pPr>
-            <a:lvl9pPr marL="3886200" indent="-228600" algn="l" defTabSz="914400" rtl="0" eaLnBrk="1" latinLnBrk="0" hangingPunct="1">
-              <a:lnSpc>
-                <a:spcPct val="90000"/>
-              </a:lnSpc>
-              <a:spcBef>
-                <a:spcPts val="500"/>
-              </a:spcBef>
-              <a:buFont typeface="Arial" panose="020B0604020202020204" pitchFamily="34" charset="0"/>
-              <a:buChar char="•"/>
-              <a:defRPr sz="1800" kern="1200">
-                <a:solidFill>
-                  <a:schemeClr val="tx1"/>
-                </a:solidFill>
-                <a:latin typeface="+mn-lt"/>
-                <a:ea typeface="+mn-ea"/>
-                <a:cs typeface="+mn-cs"/>
-              </a:defRPr>
-            </a:lvl9pPr>
-          </a:lstStyle>
-          <a:p>
-            <a:r>
-              <a:rPr lang="en-US" dirty="0"/>
-              <a:t>Common DI or 2 DI (one for the WebApp, one for </a:t>
-            </a:r>
-            <a:r>
-              <a:rPr lang="en-US" dirty="0" err="1"/>
-              <a:t>AppIdentity</a:t>
-            </a:r>
-            <a:r>
-              <a:rPr lang="en-US" dirty="0"/>
-              <a:t>)?</a:t>
-            </a:r>
-          </a:p>
-          <a:p>
-            <a:r>
-              <a:rPr lang="en-US" dirty="0"/>
-              <a:t>2 DI containers introduce the “Absolute Singletons” issue</a:t>
-            </a:r>
-          </a:p>
-          <a:p>
-            <a:pPr lvl="1"/>
-            <a:r>
-              <a:rPr lang="en-US" dirty="0"/>
-              <a:t>Should the same instance of a singleton service be registered in both DI?</a:t>
-            </a:r>
-          </a:p>
-          <a:p>
-            <a:pPr lvl="1"/>
-            <a:r>
-              <a:rPr lang="en-US" dirty="0"/>
-              <a:t>For all singleton services? May be for </a:t>
-            </a:r>
-            <a:r>
-              <a:rPr lang="en-US" dirty="0" err="1"/>
-              <a:t>IRealObject</a:t>
-            </a:r>
-            <a:r>
-              <a:rPr lang="en-US" dirty="0"/>
-              <a:t> only?</a:t>
-            </a:r>
-          </a:p>
-          <a:p>
-            <a:r>
-              <a:rPr lang="en-US" dirty="0"/>
-              <a:t>My preference:</a:t>
-            </a:r>
-          </a:p>
-          <a:p>
-            <a:pPr lvl="1"/>
-            <a:r>
-              <a:rPr lang="en-US" dirty="0"/>
-              <a:t>A </a:t>
-            </a:r>
-            <a:r>
-              <a:rPr lang="en-US" dirty="0" err="1"/>
-              <a:t>CK-AppIdentity:Local:WebApplication</a:t>
-            </a:r>
-            <a:r>
-              <a:rPr lang="en-US" dirty="0"/>
-              <a:t> section that defines the WebApp as an “island” of the application.</a:t>
-            </a:r>
-          </a:p>
-          <a:p>
-            <a:pPr lvl="2"/>
-            <a:r>
-              <a:rPr lang="en-US" dirty="0"/>
-              <a:t>DI of the app has no “Web” dependent services (“Process” services only).</a:t>
-            </a:r>
-          </a:p>
-          <a:p>
-            <a:pPr lvl="2"/>
-            <a:r>
-              <a:rPr lang="en-US" dirty="0"/>
-              <a:t>The </a:t>
-            </a:r>
-            <a:r>
-              <a:rPr lang="en-US" dirty="0" err="1"/>
-              <a:t>WebApplicationBuilder.Services</a:t>
-            </a:r>
-            <a:r>
-              <a:rPr lang="en-US" dirty="0"/>
-              <a:t> is pre-configured with all the “process services” registrations.</a:t>
-            </a:r>
-          </a:p>
-          <a:p>
-            <a:pPr lvl="1"/>
-            <a:r>
-              <a:rPr lang="en-US" dirty="0"/>
-              <a:t>Can we build the App DI without all the services that depends on the “Web” layer?</a:t>
-            </a:r>
-          </a:p>
-          <a:p>
-            <a:pPr lvl="2"/>
-            <a:r>
-              <a:rPr lang="en-US" dirty="0" err="1"/>
-              <a:t>ScopedHttpContext</a:t>
-            </a:r>
-            <a:r>
-              <a:rPr lang="en-US" dirty="0"/>
-              <a:t>, </a:t>
-            </a:r>
-            <a:r>
-              <a:rPr lang="en-US" dirty="0" err="1"/>
-              <a:t>IAuthenticationService</a:t>
-            </a:r>
-            <a:r>
-              <a:rPr lang="en-US" dirty="0"/>
-              <a:t>, etc.</a:t>
-            </a:r>
-          </a:p>
-          <a:p>
-            <a:pPr lvl="1"/>
-            <a:r>
-              <a:rPr lang="en-US" dirty="0"/>
-              <a:t>Is the “Front” vs. “Process” distinction enough?</a:t>
-            </a:r>
-          </a:p>
-          <a:p>
-            <a:pPr lvl="2"/>
-            <a:r>
-              <a:rPr lang="en-US" dirty="0"/>
-              <a:t>In such case, “Front” means “Web”… </a:t>
-            </a:r>
-          </a:p>
-          <a:p>
-            <a:pPr lvl="2"/>
-            <a:r>
-              <a:rPr lang="en-US" dirty="0"/>
-              <a:t>This may be a first approach, but ideally services are tagged with more than a single “trait”.</a:t>
-            </a:r>
-          </a:p>
-          <a:p>
-            <a:pPr lvl="2"/>
-            <a:r>
-              <a:rPr lang="en-US" dirty="0"/>
-              <a:t>Or we skip any service defined in “</a:t>
-            </a:r>
-            <a:r>
-              <a:rPr lang="en-US" dirty="0" err="1"/>
-              <a:t>Microsoft.AspNetCore</a:t>
-            </a:r>
-            <a:r>
-              <a:rPr lang="en-US" dirty="0"/>
-              <a:t>” namespace ? A list of regex on AQN?</a:t>
-            </a:r>
-          </a:p>
-          <a:p>
-            <a:pPr lvl="2"/>
-            <a:r>
-              <a:rPr lang="en-US" dirty="0"/>
-              <a:t>Does a “list of regex on AQN” defines an “End Point”?</a:t>
-            </a:r>
-          </a:p>
-          <a:p>
-            <a:pPr lvl="3"/>
-            <a:r>
-              <a:rPr lang="en-US" dirty="0"/>
-              <a:t>If yes, one should be able to “</a:t>
-            </a:r>
-            <a:r>
-              <a:rPr lang="en-US" dirty="0" err="1"/>
-              <a:t>ConfigureServices</a:t>
-            </a:r>
-            <a:r>
-              <a:rPr lang="en-US" dirty="0"/>
-              <a:t>” with or without a set of “End Points”…</a:t>
-            </a:r>
-          </a:p>
-          <a:p>
-            <a:pPr lvl="1"/>
-            <a:r>
-              <a:rPr lang="en-US" dirty="0"/>
-              <a:t>Even if this is possible, we have yet to synchronize the singleton instances (or not)…</a:t>
-            </a:r>
-          </a:p>
-          <a:p>
-            <a:pPr lvl="1"/>
-            <a:r>
-              <a:rPr lang="en-US" dirty="0"/>
-              <a:t>This may be the best way in terms of architecture BUT it’s not a short-term solution.</a:t>
-            </a:r>
-          </a:p>
-          <a:p>
-            <a:r>
-              <a:rPr lang="en-US" dirty="0"/>
-              <a:t>The other way is that the Application DI is the WebApp one (if the app is a WebApp) just like today.</a:t>
-            </a:r>
-          </a:p>
-          <a:p>
-            <a:pPr lvl="1"/>
-            <a:r>
-              <a:rPr lang="en-US" dirty="0"/>
-              <a:t>But now services must be “hidden”/”overridden” in </a:t>
-            </a:r>
-            <a:r>
-              <a:rPr lang="en-US" dirty="0" err="1"/>
-              <a:t>AppIdentity</a:t>
-            </a:r>
-            <a:r>
-              <a:rPr lang="en-US" dirty="0"/>
-              <a:t> services, at least for the </a:t>
-            </a:r>
-            <a:r>
-              <a:rPr lang="en-US" dirty="0" err="1"/>
-              <a:t>CrisExecutor</a:t>
-            </a:r>
-            <a:r>
-              <a:rPr lang="en-US" dirty="0"/>
-              <a:t>.</a:t>
-            </a:r>
-          </a:p>
-          <a:p>
-            <a:pPr lvl="1"/>
-            <a:r>
-              <a:rPr lang="en-US" dirty="0"/>
-              <a:t>If a command handler relies on a “Web” singleton or scoped service, we are doomed (will fail at runtime).</a:t>
-            </a:r>
-          </a:p>
-          <a:p>
-            <a:pPr lvl="1"/>
-            <a:r>
-              <a:rPr lang="en-US" dirty="0"/>
-              <a:t>But </a:t>
-            </a:r>
-            <a:r>
-              <a:rPr lang="en-US" dirty="0" err="1"/>
-              <a:t>CK.Cris.Executor</a:t>
-            </a:r>
-            <a:r>
-              <a:rPr lang="en-US" dirty="0"/>
-              <a:t> do its job (</a:t>
-            </a:r>
-            <a:r>
-              <a:rPr lang="en-US" dirty="0" err="1"/>
-              <a:t>CommandValidator</a:t>
-            </a:r>
-            <a:r>
-              <a:rPr lang="en-US" dirty="0"/>
-              <a:t>, </a:t>
-            </a:r>
-            <a:r>
-              <a:rPr lang="en-US" dirty="0" err="1"/>
-              <a:t>RawCommandExecutor</a:t>
-            </a:r>
-            <a:r>
-              <a:rPr lang="en-US" dirty="0"/>
-              <a:t>) based on an explicit </a:t>
-            </a:r>
-            <a:r>
-              <a:rPr lang="en-US" dirty="0" err="1"/>
-              <a:t>IServiceProvider</a:t>
-            </a:r>
-            <a:r>
-              <a:rPr lang="en-US" dirty="0"/>
-              <a:t>.</a:t>
-            </a:r>
-          </a:p>
-          <a:p>
-            <a:pPr lvl="1"/>
-            <a:r>
-              <a:rPr lang="en-US" dirty="0"/>
-              <a:t>We can provide a </a:t>
-            </a:r>
-            <a:r>
-              <a:rPr lang="en-US" dirty="0" err="1"/>
-              <a:t>IServiceProvider</a:t>
-            </a:r>
-            <a:r>
-              <a:rPr lang="en-US" dirty="0"/>
-              <a:t> that hides/replaces some services for the command handling.</a:t>
-            </a:r>
-            <a:endParaRPr lang="en-US" dirty="0">
-              <a:sym typeface="Wingdings" panose="05000000000000000000" pitchFamily="2" charset="2"/>
-            </a:endParaRPr>
-          </a:p>
-          <a:p>
-            <a:pPr marL="457200" lvl="1" indent="0">
-              <a:buNone/>
-            </a:pPr>
-            <a:r>
-              <a:rPr lang="en-US" dirty="0">
-                <a:sym typeface="Wingdings" panose="05000000000000000000" pitchFamily="2" charset="2"/>
-              </a:rPr>
-              <a:t> This is not ideal, but it should work if not too many “Web” services are concerned and we can provide a replacement for the services at stake …</a:t>
-            </a:r>
-            <a:endParaRPr lang="en-US" dirty="0"/>
-          </a:p>
-        </p:txBody>
-      </p:sp>
-    </p:spTree>
-    <p:extLst>
-      <p:ext uri="{BB962C8B-B14F-4D97-AF65-F5344CB8AC3E}">
-        <p14:creationId xmlns:p14="http://schemas.microsoft.com/office/powerpoint/2010/main" val="3058767410"/>
-      </p:ext>
-    </p:extLst>
-  </p:cSld>
-  <p:clrMapOvr>
-    <a:masterClrMapping/>
-  </p:clrMapOvr>
-</p:sld>
-</file>
-
-<file path=ppt/slides/slide46.xml><?xml version="1.0" encoding="utf-8"?>
-<p:sld xmlns:a="http://schemas.openxmlformats.org/drawingml/2006/main" xmlns:r="http://schemas.openxmlformats.org/officeDocument/2006/relationships" xmlns:p="http://schemas.openxmlformats.org/presentationml/2006/main">
-  <p:cSld>
-    <p:spTree>
-      <p:nvGrpSpPr>
-        <p:cNvPr id="1" name=""/>
-        <p:cNvGrpSpPr/>
-        <p:nvPr/>
-      </p:nvGrpSpPr>
-      <p:grpSpPr>
-        <a:xfrm>
-          <a:off x="0" y="0"/>
-          <a:ext cx="0" cy="0"/>
-          <a:chOff x="0" y="0"/>
-          <a:chExt cx="0" cy="0"/>
-        </a:xfrm>
-      </p:grpSpPr>
-      <p:sp>
-        <p:nvSpPr>
-          <p:cNvPr id="2" name="Title 1">
-            <a:extLst>
-              <a:ext uri="{FF2B5EF4-FFF2-40B4-BE49-F238E27FC236}">
-                <a16:creationId xmlns:a16="http://schemas.microsoft.com/office/drawing/2014/main" id="{DEC82137-8E30-732F-A684-E7B1E4656A8E}"/>
-              </a:ext>
-            </a:extLst>
-          </p:cNvPr>
-          <p:cNvSpPr>
-            <a:spLocks noGrp="1"/>
-          </p:cNvSpPr>
-          <p:nvPr>
-            <p:ph type="title"/>
-          </p:nvPr>
-        </p:nvSpPr>
-        <p:spPr/>
-        <p:txBody>
-          <a:bodyPr/>
-          <a:lstStyle/>
-          <a:p>
-            <a:r>
-              <a:rPr lang="en-US" dirty="0" err="1"/>
-              <a:t>CrisSession</a:t>
-            </a:r>
-            <a:endParaRPr lang="en-US" dirty="0"/>
-          </a:p>
-        </p:txBody>
-      </p:sp>
-      <p:sp>
-        <p:nvSpPr>
-          <p:cNvPr id="3" name="Content Placeholder 2">
-            <a:extLst>
-              <a:ext uri="{FF2B5EF4-FFF2-40B4-BE49-F238E27FC236}">
-                <a16:creationId xmlns:a16="http://schemas.microsoft.com/office/drawing/2014/main" id="{1AE3B35E-C4A6-EA97-FFAD-FE9D1FB60395}"/>
-              </a:ext>
-            </a:extLst>
-          </p:cNvPr>
-          <p:cNvSpPr>
-            <a:spLocks noGrp="1"/>
-          </p:cNvSpPr>
-          <p:nvPr>
-            <p:ph idx="1"/>
-          </p:nvPr>
-        </p:nvSpPr>
-        <p:spPr/>
-        <p:txBody>
-          <a:bodyPr>
-            <a:normAutofit lnSpcReduction="10000"/>
-          </a:bodyPr>
-          <a:lstStyle/>
-          <a:p>
-            <a:r>
-              <a:rPr lang="en-US" dirty="0"/>
-              <a:t>Non concurrent, non reentrant (just like the </a:t>
-            </a:r>
-            <a:r>
-              <a:rPr lang="en-US" dirty="0" err="1"/>
-              <a:t>ActivityMonitor</a:t>
-            </a:r>
-            <a:r>
-              <a:rPr lang="en-US" dirty="0"/>
-              <a:t>)</a:t>
-            </a:r>
-          </a:p>
-          <a:p>
-            <a:r>
-              <a:rPr lang="en-US" dirty="0"/>
-              <a:t>Exposes a </a:t>
-            </a:r>
-            <a:r>
-              <a:rPr lang="en-US" dirty="0" err="1"/>
-              <a:t>ActivityMonitor</a:t>
-            </a:r>
-            <a:endParaRPr lang="en-US" dirty="0"/>
-          </a:p>
-          <a:p>
-            <a:r>
-              <a:rPr lang="en-US" dirty="0"/>
-              <a:t>Captures an initial command followed by events and subordinate sessions.</a:t>
-            </a:r>
-          </a:p>
-          <a:p>
-            <a:r>
-              <a:rPr lang="en-US" dirty="0"/>
-              <a:t>A session must be explicitly closed.</a:t>
-            </a:r>
-          </a:p>
-          <a:p>
-            <a:pPr lvl="1"/>
-            <a:r>
-              <a:rPr lang="en-US" dirty="0"/>
-              <a:t>This handles “Super Asynchronous” pattern:</a:t>
-            </a:r>
-          </a:p>
-          <a:p>
-            <a:pPr lvl="2"/>
-            <a:r>
-              <a:rPr lang="en-US" dirty="0"/>
-              <a:t>A “</a:t>
-            </a:r>
-            <a:r>
-              <a:rPr lang="en-US" dirty="0" err="1"/>
-              <a:t>StartXXX</a:t>
-            </a:r>
-            <a:r>
-              <a:rPr lang="en-US" dirty="0"/>
-              <a:t>” command starts a remote “activity”.</a:t>
-            </a:r>
-          </a:p>
-          <a:p>
-            <a:pPr lvl="2"/>
-            <a:r>
-              <a:rPr lang="en-US" dirty="0"/>
-              <a:t>A “</a:t>
-            </a:r>
-            <a:r>
-              <a:rPr lang="en-US" dirty="0" err="1"/>
-              <a:t>StopXXX</a:t>
-            </a:r>
-            <a:r>
-              <a:rPr lang="en-US" dirty="0"/>
-              <a:t>” command stops it.</a:t>
-            </a:r>
-          </a:p>
-          <a:p>
-            <a:pPr lvl="1"/>
-            <a:r>
-              <a:rPr lang="en-US" dirty="0"/>
-              <a:t>Optionally, the availability of the </a:t>
-            </a:r>
-            <a:r>
-              <a:rPr lang="en-US" dirty="0" err="1"/>
-              <a:t>TResult</a:t>
-            </a:r>
-            <a:r>
-              <a:rPr lang="en-US" dirty="0"/>
-              <a:t> of a </a:t>
-            </a:r>
-            <a:r>
-              <a:rPr lang="en-US" dirty="0" err="1"/>
-              <a:t>ICommand</a:t>
-            </a:r>
-            <a:r>
-              <a:rPr lang="en-US" dirty="0"/>
-              <a:t>&lt;</a:t>
-            </a:r>
-            <a:r>
-              <a:rPr lang="en-US" dirty="0" err="1"/>
-              <a:t>TResult</a:t>
-            </a:r>
-            <a:r>
-              <a:rPr lang="en-US" dirty="0"/>
-              <a:t>&gt; automatically closes the session.</a:t>
-            </a:r>
-          </a:p>
-          <a:p>
-            <a:r>
-              <a:rPr lang="en-US" dirty="0"/>
-              <a:t>A session seems to capture the result(s) of a </a:t>
-            </a:r>
-            <a:r>
-              <a:rPr lang="en-US" b="1" dirty="0"/>
-              <a:t>Workflow</a:t>
-            </a:r>
-            <a:r>
-              <a:rPr lang="en-US" dirty="0"/>
-              <a:t>!</a:t>
-            </a:r>
-          </a:p>
-        </p:txBody>
-      </p:sp>
-    </p:spTree>
-    <p:extLst>
-      <p:ext uri="{BB962C8B-B14F-4D97-AF65-F5344CB8AC3E}">
-        <p14:creationId xmlns:p14="http://schemas.microsoft.com/office/powerpoint/2010/main" val="125256644"/>
-      </p:ext>
-    </p:extLst>
-  </p:cSld>
-  <p:clrMapOvr>
-    <a:masterClrMapping/>
-  </p:clrMapOvr>
-</p:sld>
-</file>
-
-<file path=ppt/slides/slide47.xml><?xml version="1.0" encoding="utf-8"?>
-<p:sld xmlns:a="http://schemas.openxmlformats.org/drawingml/2006/main" xmlns:r="http://schemas.openxmlformats.org/officeDocument/2006/relationships" xmlns:p="http://schemas.openxmlformats.org/presentationml/2006/main">
-  <p:cSld>
-    <p:spTree>
-      <p:nvGrpSpPr>
-        <p:cNvPr id="1" name=""/>
-        <p:cNvGrpSpPr/>
-        <p:nvPr/>
-      </p:nvGrpSpPr>
-      <p:grpSpPr>
-        <a:xfrm>
-          <a:off x="0" y="0"/>
-          <a:ext cx="0" cy="0"/>
-          <a:chOff x="0" y="0"/>
-          <a:chExt cx="0" cy="0"/>
-        </a:xfrm>
-      </p:grpSpPr>
-      <p:sp>
-        <p:nvSpPr>
-          <p:cNvPr id="2" name="Title 1">
-            <a:extLst>
-              <a:ext uri="{FF2B5EF4-FFF2-40B4-BE49-F238E27FC236}">
-                <a16:creationId xmlns:a16="http://schemas.microsoft.com/office/drawing/2014/main" id="{50EAFAF5-98A2-D125-4496-C05967A7110A}"/>
-              </a:ext>
-            </a:extLst>
-          </p:cNvPr>
-          <p:cNvSpPr>
-            <a:spLocks noGrp="1"/>
-          </p:cNvSpPr>
-          <p:nvPr>
-            <p:ph type="title"/>
-          </p:nvPr>
-        </p:nvSpPr>
-        <p:spPr/>
-        <p:txBody>
-          <a:bodyPr/>
-          <a:lstStyle/>
-          <a:p>
-            <a:r>
-              <a:rPr lang="en-US" dirty="0"/>
-              <a:t>Other questions &amp; To do</a:t>
-            </a:r>
-          </a:p>
-        </p:txBody>
-      </p:sp>
-      <p:sp>
-        <p:nvSpPr>
-          <p:cNvPr id="3" name="Content Placeholder 2">
-            <a:extLst>
-              <a:ext uri="{FF2B5EF4-FFF2-40B4-BE49-F238E27FC236}">
-                <a16:creationId xmlns:a16="http://schemas.microsoft.com/office/drawing/2014/main" id="{3C1C559C-F4C7-F864-231C-921ED15BE2E9}"/>
-              </a:ext>
-            </a:extLst>
-          </p:cNvPr>
-          <p:cNvSpPr>
-            <a:spLocks noGrp="1"/>
-          </p:cNvSpPr>
-          <p:nvPr>
-            <p:ph idx="1"/>
-          </p:nvPr>
-        </p:nvSpPr>
-        <p:spPr/>
-        <p:txBody>
-          <a:bodyPr/>
-          <a:lstStyle/>
-          <a:p>
-            <a:r>
-              <a:rPr lang="en-US" dirty="0"/>
-              <a:t>Internalize </a:t>
-            </a:r>
-            <a:r>
-              <a:rPr lang="en-US" dirty="0" err="1"/>
-              <a:t>TransportMessage</a:t>
-            </a:r>
-            <a:endParaRPr lang="en-US" dirty="0"/>
-          </a:p>
-          <a:p>
-            <a:pPr lvl="1"/>
-            <a:r>
-              <a:rPr lang="en-US" dirty="0"/>
-              <a:t>Differentiate </a:t>
-            </a:r>
-            <a:r>
-              <a:rPr lang="en-US" dirty="0" err="1"/>
-              <a:t>IOutgoingTransportMessage</a:t>
-            </a:r>
-            <a:r>
-              <a:rPr lang="en-US" dirty="0"/>
-              <a:t> and </a:t>
-            </a:r>
-            <a:r>
-              <a:rPr lang="en-US" dirty="0" err="1"/>
-              <a:t>IIncomingTransportMessage</a:t>
-            </a:r>
-            <a:endParaRPr lang="en-US" dirty="0"/>
-          </a:p>
-          <a:p>
-            <a:pPr lvl="1"/>
-            <a:r>
-              <a:rPr lang="en-US" dirty="0"/>
-              <a:t>Assume the outgoing message mutability: Freeze and </a:t>
-            </a:r>
-            <a:r>
-              <a:rPr lang="en-US" dirty="0" err="1"/>
-              <a:t>IsFrozen</a:t>
-            </a:r>
-            <a:endParaRPr lang="en-US" dirty="0"/>
-          </a:p>
-          <a:p>
-            <a:r>
-              <a:rPr lang="en-US" dirty="0"/>
-              <a:t>Add a “Layer” API on the </a:t>
-            </a:r>
-            <a:r>
-              <a:rPr lang="en-US" dirty="0" err="1"/>
-              <a:t>TransportMessage</a:t>
-            </a:r>
-            <a:endParaRPr lang="en-US" dirty="0"/>
-          </a:p>
-          <a:p>
-            <a:r>
-              <a:rPr lang="en-US" dirty="0"/>
-              <a:t>Implements the “</a:t>
-            </a:r>
-            <a:r>
-              <a:rPr lang="en-US" dirty="0" err="1"/>
-              <a:t>BigMessage</a:t>
-            </a:r>
-            <a:r>
-              <a:rPr lang="en-US" dirty="0"/>
-              <a:t>” slicing (0 Protocol).</a:t>
-            </a:r>
-          </a:p>
-          <a:p>
-            <a:r>
-              <a:rPr lang="en-US" dirty="0"/>
-              <a:t>Should “Response” channel be renamed “</a:t>
-            </a:r>
-            <a:r>
-              <a:rPr lang="en-US" dirty="0" err="1"/>
-              <a:t>HighPriority</a:t>
-            </a:r>
-            <a:r>
-              <a:rPr lang="en-US" dirty="0"/>
-              <a:t>”?</a:t>
-            </a:r>
-          </a:p>
-          <a:p>
-            <a:pPr lvl="1"/>
-            <a:r>
-              <a:rPr lang="en-US" dirty="0"/>
-              <a:t>Responses would use it but the “</a:t>
-            </a:r>
-            <a:r>
-              <a:rPr lang="en-US" dirty="0" err="1"/>
-              <a:t>CancelCurrentBigMessage</a:t>
-            </a:r>
-            <a:r>
-              <a:rPr lang="en-US" dirty="0"/>
-              <a:t>” would also use it (</a:t>
-            </a:r>
-            <a:r>
-              <a:rPr lang="en-US"/>
-              <a:t>and it is </a:t>
-            </a:r>
-            <a:r>
-              <a:rPr lang="en-US" dirty="0"/>
-              <a:t>not a response).</a:t>
-            </a:r>
-          </a:p>
-        </p:txBody>
-      </p:sp>
-    </p:spTree>
-    <p:extLst>
-      <p:ext uri="{BB962C8B-B14F-4D97-AF65-F5344CB8AC3E}">
-        <p14:creationId xmlns:p14="http://schemas.microsoft.com/office/powerpoint/2010/main" val="479290701"/>
       </p:ext>
     </p:extLst>
   </p:cSld>

--- a/Doc/CK-AppIdentity.pptx
+++ b/Doc/CK-AppIdentity.pptx
@@ -294,7 +294,7 @@
           <a:p>
             <a:fld id="{7EBA75D8-A9A5-4FAF-B563-7A079B630A7E}" type="datetimeFigureOut">
               <a:rPr lang="en-US" smtClean="0"/>
-              <a:t>7/21/2023</a:t>
+              <a:t>2/26/2024</a:t>
             </a:fld>
             <a:endParaRPr lang="en-US"/>
           </a:p>
@@ -2142,7 +2142,7 @@
           <a:p>
             <a:fld id="{7D1F2140-8D48-49AC-AD8D-683E6FF4DC34}" type="datetimeFigureOut">
               <a:rPr lang="en-US" smtClean="0"/>
-              <a:t>7/21/2023</a:t>
+              <a:t>2/26/2024</a:t>
             </a:fld>
             <a:endParaRPr lang="en-US"/>
           </a:p>
@@ -2340,7 +2340,7 @@
           <a:p>
             <a:fld id="{7D1F2140-8D48-49AC-AD8D-683E6FF4DC34}" type="datetimeFigureOut">
               <a:rPr lang="en-US" smtClean="0"/>
-              <a:t>7/21/2023</a:t>
+              <a:t>2/26/2024</a:t>
             </a:fld>
             <a:endParaRPr lang="en-US"/>
           </a:p>
@@ -2548,7 +2548,7 @@
           <a:p>
             <a:fld id="{7D1F2140-8D48-49AC-AD8D-683E6FF4DC34}" type="datetimeFigureOut">
               <a:rPr lang="en-US" smtClean="0"/>
-              <a:t>7/21/2023</a:t>
+              <a:t>2/26/2024</a:t>
             </a:fld>
             <a:endParaRPr lang="en-US"/>
           </a:p>
@@ -2746,7 +2746,7 @@
           <a:p>
             <a:fld id="{7D1F2140-8D48-49AC-AD8D-683E6FF4DC34}" type="datetimeFigureOut">
               <a:rPr lang="en-US" smtClean="0"/>
-              <a:t>7/21/2023</a:t>
+              <a:t>2/26/2024</a:t>
             </a:fld>
             <a:endParaRPr lang="en-US"/>
           </a:p>
@@ -3021,7 +3021,7 @@
           <a:p>
             <a:fld id="{7D1F2140-8D48-49AC-AD8D-683E6FF4DC34}" type="datetimeFigureOut">
               <a:rPr lang="en-US" smtClean="0"/>
-              <a:t>7/21/2023</a:t>
+              <a:t>2/26/2024</a:t>
             </a:fld>
             <a:endParaRPr lang="en-US"/>
           </a:p>
@@ -3286,7 +3286,7 @@
           <a:p>
             <a:fld id="{7D1F2140-8D48-49AC-AD8D-683E6FF4DC34}" type="datetimeFigureOut">
               <a:rPr lang="en-US" smtClean="0"/>
-              <a:t>7/21/2023</a:t>
+              <a:t>2/26/2024</a:t>
             </a:fld>
             <a:endParaRPr lang="en-US"/>
           </a:p>
@@ -3698,7 +3698,7 @@
           <a:p>
             <a:fld id="{7D1F2140-8D48-49AC-AD8D-683E6FF4DC34}" type="datetimeFigureOut">
               <a:rPr lang="en-US" smtClean="0"/>
-              <a:t>7/21/2023</a:t>
+              <a:t>2/26/2024</a:t>
             </a:fld>
             <a:endParaRPr lang="en-US"/>
           </a:p>
@@ -3839,7 +3839,7 @@
           <a:p>
             <a:fld id="{7D1F2140-8D48-49AC-AD8D-683E6FF4DC34}" type="datetimeFigureOut">
               <a:rPr lang="en-US" smtClean="0"/>
-              <a:t>7/21/2023</a:t>
+              <a:t>2/26/2024</a:t>
             </a:fld>
             <a:endParaRPr lang="en-US"/>
           </a:p>
@@ -3952,7 +3952,7 @@
           <a:p>
             <a:fld id="{7D1F2140-8D48-49AC-AD8D-683E6FF4DC34}" type="datetimeFigureOut">
               <a:rPr lang="en-US" smtClean="0"/>
-              <a:t>7/21/2023</a:t>
+              <a:t>2/26/2024</a:t>
             </a:fld>
             <a:endParaRPr lang="en-US"/>
           </a:p>
@@ -4263,7 +4263,7 @@
           <a:p>
             <a:fld id="{7D1F2140-8D48-49AC-AD8D-683E6FF4DC34}" type="datetimeFigureOut">
               <a:rPr lang="en-US" smtClean="0"/>
-              <a:t>7/21/2023</a:t>
+              <a:t>2/26/2024</a:t>
             </a:fld>
             <a:endParaRPr lang="en-US"/>
           </a:p>
@@ -4551,7 +4551,7 @@
           <a:p>
             <a:fld id="{7D1F2140-8D48-49AC-AD8D-683E6FF4DC34}" type="datetimeFigureOut">
               <a:rPr lang="en-US" smtClean="0"/>
-              <a:t>7/21/2023</a:t>
+              <a:t>2/26/2024</a:t>
             </a:fld>
             <a:endParaRPr lang="en-US"/>
           </a:p>
@@ -4792,7 +4792,7 @@
           <a:p>
             <a:fld id="{7D1F2140-8D48-49AC-AD8D-683E6FF4DC34}" type="datetimeFigureOut">
               <a:rPr lang="en-US" smtClean="0"/>
-              <a:t>7/21/2023</a:t>
+              <a:t>2/26/2024</a:t>
             </a:fld>
             <a:endParaRPr lang="en-US"/>
           </a:p>
@@ -15300,8 +15300,8 @@
         </p:nvSpPr>
         <p:spPr>
           <a:xfrm>
-            <a:off x="4765638" y="4346089"/>
-            <a:ext cx="7067774" cy="2491261"/>
+            <a:off x="5173884" y="4445876"/>
+            <a:ext cx="6849950" cy="2391475"/>
           </a:xfrm>
           <a:prstGeom prst="rect">
             <a:avLst/>
@@ -15332,12 +15332,173 @@
           </a:p>
         </p:txBody>
       </p:sp>
+      <p:sp>
+        <p:nvSpPr>
+          <p:cNvPr id="2" name="Title 1">
+            <a:extLst>
+              <a:ext uri="{FF2B5EF4-FFF2-40B4-BE49-F238E27FC236}">
+                <a16:creationId xmlns:a16="http://schemas.microsoft.com/office/drawing/2014/main" id="{6D8CEF7E-C184-9ED5-678F-E522EE7861ED}"/>
+              </a:ext>
+            </a:extLst>
+          </p:cNvPr>
+          <p:cNvSpPr>
+            <a:spLocks noGrp="1"/>
+          </p:cNvSpPr>
+          <p:nvPr>
+            <p:ph type="title"/>
+          </p:nvPr>
+        </p:nvSpPr>
+        <p:spPr/>
+        <p:txBody>
+          <a:bodyPr/>
+          <a:lstStyle/>
+          <a:p>
+            <a:r>
+              <a:rPr lang="en-US" dirty="0"/>
+              <a:t>Implementing</a:t>
+            </a:r>
+            <a:br>
+              <a:rPr lang="en-US" dirty="0"/>
+            </a:br>
+            <a:r>
+              <a:rPr lang="en-US" dirty="0"/>
+              <a:t>Transports</a:t>
+            </a:r>
+          </a:p>
+        </p:txBody>
+      </p:sp>
+      <p:sp>
+        <p:nvSpPr>
+          <p:cNvPr id="9" name="Content Placeholder 8">
+            <a:extLst>
+              <a:ext uri="{FF2B5EF4-FFF2-40B4-BE49-F238E27FC236}">
+                <a16:creationId xmlns:a16="http://schemas.microsoft.com/office/drawing/2014/main" id="{9F56818D-148F-7DD5-0B72-C665916F8DDC}"/>
+              </a:ext>
+            </a:extLst>
+          </p:cNvPr>
+          <p:cNvSpPr>
+            <a:spLocks noGrp="1"/>
+          </p:cNvSpPr>
+          <p:nvPr>
+            <p:ph idx="1"/>
+          </p:nvPr>
+        </p:nvSpPr>
+        <p:spPr>
+          <a:xfrm>
+            <a:off x="358588" y="2299414"/>
+            <a:ext cx="4484048" cy="4558586"/>
+          </a:xfrm>
+        </p:spPr>
+        <p:txBody>
+          <a:bodyPr>
+            <a:normAutofit fontScale="92500" lnSpcReduction="20000"/>
+          </a:bodyPr>
+          <a:lstStyle/>
+          <a:p>
+            <a:r>
+              <a:rPr lang="en-US" sz="2400" dirty="0"/>
+              <a:t>3 classes to specialize.</a:t>
+            </a:r>
+          </a:p>
+          <a:p>
+            <a:r>
+              <a:rPr lang="en-US" sz="2400" dirty="0"/>
+              <a:t>Straight wrappers, no error management required.</a:t>
+            </a:r>
+          </a:p>
+          <a:p>
+            <a:r>
+              <a:rPr lang="en-US" sz="2400" dirty="0"/>
+              <a:t>Package First</a:t>
+            </a:r>
+          </a:p>
+          <a:p>
+            <a:endParaRPr lang="en-US" sz="2400" dirty="0"/>
+          </a:p>
+          <a:p>
+            <a:endParaRPr lang="en-US" sz="2400" dirty="0"/>
+          </a:p>
+          <a:p>
+            <a:r>
+              <a:rPr lang="en-US" sz="2400" dirty="0"/>
+              <a:t>Example of </a:t>
+            </a:r>
+            <a:r>
+              <a:rPr lang="en-US" sz="2400" dirty="0" err="1"/>
+              <a:t>TCPSocket</a:t>
+            </a:r>
+            <a:endParaRPr lang="en-US" sz="2400" dirty="0"/>
+          </a:p>
+          <a:p>
+            <a:pPr lvl="1"/>
+            <a:r>
+              <a:rPr lang="en-US" sz="2000" dirty="0" err="1"/>
+              <a:t>AddressProtocolName</a:t>
+            </a:r>
+            <a:r>
+              <a:rPr lang="en-US" sz="2000" dirty="0"/>
+              <a:t>: </a:t>
+            </a:r>
+          </a:p>
+          <a:p>
+            <a:pPr lvl="2"/>
+            <a:r>
+              <a:rPr lang="en-US" sz="1600" dirty="0"/>
+              <a:t>“</a:t>
+            </a:r>
+            <a:r>
+              <a:rPr lang="en-US" sz="1600" dirty="0" err="1"/>
+              <a:t>tcp</a:t>
+            </a:r>
+            <a:r>
+              <a:rPr lang="en-US" sz="1600" dirty="0"/>
+              <a:t>”</a:t>
+            </a:r>
+          </a:p>
+          <a:p>
+            <a:pPr lvl="1"/>
+            <a:r>
+              <a:rPr lang="en-US" sz="2000" dirty="0" err="1"/>
+              <a:t>DefaultListeningAddress</a:t>
+            </a:r>
+            <a:r>
+              <a:rPr lang="en-US" sz="2000" dirty="0"/>
+              <a:t>:</a:t>
+            </a:r>
+          </a:p>
+          <a:p>
+            <a:pPr lvl="2"/>
+            <a:r>
+              <a:rPr lang="en-US" sz="1600" dirty="0"/>
+              <a:t>new </a:t>
+            </a:r>
+            <a:r>
+              <a:rPr lang="en-US" sz="1600" dirty="0" err="1"/>
+              <a:t>IPEndpoint</a:t>
+            </a:r>
+            <a:r>
+              <a:rPr lang="en-US" sz="1600" dirty="0"/>
+              <a:t>(IPAddress.Any,37120)</a:t>
+            </a:r>
+          </a:p>
+          <a:p>
+            <a:endParaRPr lang="en-US" sz="2400" dirty="0"/>
+          </a:p>
+          <a:p>
+            <a:r>
+              <a:rPr lang="en-US" sz="2400" dirty="0"/>
+              <a:t>Developers don’t interact with Transports layer.</a:t>
+            </a:r>
+            <a:endParaRPr lang="en-US" sz="2000" dirty="0"/>
+          </a:p>
+        </p:txBody>
+      </p:sp>
       <p:pic>
         <p:nvPicPr>
-          <p:cNvPr id="4" name="Picture 3" descr="A screenshot of a computer&#10;&#10;Description automatically generated with medium confidence">
+          <p:cNvPr id="4" name="Picture 3" descr="A screenshot of a computer&#10;&#10;Description automatically generated">
             <a:extLst>
               <a:ext uri="{FF2B5EF4-FFF2-40B4-BE49-F238E27FC236}">
-                <a16:creationId xmlns:a16="http://schemas.microsoft.com/office/drawing/2014/main" id="{63B52CF8-3FE6-8853-772F-8B675D4EA729}"/>
+                <a16:creationId xmlns:a16="http://schemas.microsoft.com/office/drawing/2014/main" id="{C4C5FB8A-7E7E-A771-1428-22ADDB733635}"/>
               </a:ext>
             </a:extLst>
           </p:cNvPr>
@@ -15360,177 +15521,16 @@
         </p:blipFill>
         <p:spPr>
           <a:xfrm>
-            <a:off x="4842636" y="-31709"/>
-            <a:ext cx="6915472" cy="6869059"/>
+            <a:off x="5263050" y="0"/>
+            <a:ext cx="6678706" cy="6858000"/>
           </a:xfrm>
           <a:prstGeom prst="rect">
             <a:avLst/>
           </a:prstGeom>
         </p:spPr>
       </p:pic>
-      <p:sp>
-        <p:nvSpPr>
-          <p:cNvPr id="2" name="Title 1">
-            <a:extLst>
-              <a:ext uri="{FF2B5EF4-FFF2-40B4-BE49-F238E27FC236}">
-                <a16:creationId xmlns:a16="http://schemas.microsoft.com/office/drawing/2014/main" id="{6D8CEF7E-C184-9ED5-678F-E522EE7861ED}"/>
-              </a:ext>
-            </a:extLst>
-          </p:cNvPr>
-          <p:cNvSpPr>
-            <a:spLocks noGrp="1"/>
-          </p:cNvSpPr>
-          <p:nvPr>
-            <p:ph type="title"/>
-          </p:nvPr>
-        </p:nvSpPr>
-        <p:spPr/>
-        <p:txBody>
-          <a:bodyPr/>
-          <a:lstStyle/>
-          <a:p>
-            <a:r>
-              <a:rPr lang="en-US" dirty="0"/>
-              <a:t>Implementing</a:t>
-            </a:r>
-            <a:br>
-              <a:rPr lang="en-US" dirty="0"/>
-            </a:br>
-            <a:r>
-              <a:rPr lang="en-US" dirty="0"/>
-              <a:t>Transports</a:t>
-            </a:r>
-          </a:p>
-        </p:txBody>
-      </p:sp>
-      <p:sp>
-        <p:nvSpPr>
-          <p:cNvPr id="9" name="Content Placeholder 8">
-            <a:extLst>
-              <a:ext uri="{FF2B5EF4-FFF2-40B4-BE49-F238E27FC236}">
-                <a16:creationId xmlns:a16="http://schemas.microsoft.com/office/drawing/2014/main" id="{9F56818D-148F-7DD5-0B72-C665916F8DDC}"/>
-              </a:ext>
-            </a:extLst>
-          </p:cNvPr>
-          <p:cNvSpPr>
-            <a:spLocks noGrp="1"/>
-          </p:cNvSpPr>
-          <p:nvPr>
-            <p:ph idx="1"/>
-          </p:nvPr>
-        </p:nvSpPr>
-        <p:spPr>
-          <a:xfrm>
-            <a:off x="358588" y="2299414"/>
-            <a:ext cx="4484048" cy="4558586"/>
-          </a:xfrm>
-        </p:spPr>
-        <p:txBody>
-          <a:bodyPr>
-            <a:normAutofit fontScale="92500" lnSpcReduction="20000"/>
-          </a:bodyPr>
-          <a:lstStyle/>
-          <a:p>
-            <a:r>
-              <a:rPr lang="en-US" sz="2400" dirty="0"/>
-              <a:t>3 classes to specialize.</a:t>
-            </a:r>
-          </a:p>
-          <a:p>
-            <a:r>
-              <a:rPr lang="en-US" sz="2400" dirty="0"/>
-              <a:t>Straight wrappers, no error management required.</a:t>
-            </a:r>
-          </a:p>
-          <a:p>
-            <a:r>
-              <a:rPr lang="en-US" sz="2400" dirty="0"/>
-              <a:t>Package First</a:t>
-            </a:r>
-          </a:p>
-          <a:p>
-            <a:endParaRPr lang="en-US" sz="2400" dirty="0"/>
-          </a:p>
-          <a:p>
-            <a:endParaRPr lang="en-US" sz="2400" dirty="0"/>
-          </a:p>
-          <a:p>
-            <a:r>
-              <a:rPr lang="en-US" sz="2400" dirty="0"/>
-              <a:t>Example of </a:t>
-            </a:r>
-            <a:r>
-              <a:rPr lang="en-US" sz="2400" dirty="0" err="1"/>
-              <a:t>TCPSocket</a:t>
-            </a:r>
-            <a:endParaRPr lang="en-US" sz="2400" dirty="0"/>
-          </a:p>
-          <a:p>
-            <a:pPr lvl="1"/>
-            <a:r>
-              <a:rPr lang="en-US" sz="2000" dirty="0" err="1"/>
-              <a:t>AddressProtocolName</a:t>
-            </a:r>
-            <a:r>
-              <a:rPr lang="en-US" sz="2000" dirty="0"/>
-              <a:t>: </a:t>
-            </a:r>
-          </a:p>
-          <a:p>
-            <a:pPr lvl="2"/>
-            <a:r>
-              <a:rPr lang="en-US" sz="1600" dirty="0"/>
-              <a:t>“</a:t>
-            </a:r>
-            <a:r>
-              <a:rPr lang="en-US" sz="1600" dirty="0" err="1"/>
-              <a:t>tcp</a:t>
-            </a:r>
-            <a:r>
-              <a:rPr lang="en-US" sz="1600" dirty="0"/>
-              <a:t>”</a:t>
-            </a:r>
-          </a:p>
-          <a:p>
-            <a:pPr lvl="1"/>
-            <a:r>
-              <a:rPr lang="en-US" sz="2000" dirty="0" err="1"/>
-              <a:t>DefaultListeningAddress</a:t>
-            </a:r>
-            <a:r>
-              <a:rPr lang="en-US" sz="2000" dirty="0"/>
-              <a:t>:</a:t>
-            </a:r>
-          </a:p>
-          <a:p>
-            <a:pPr lvl="2"/>
-            <a:r>
-              <a:rPr lang="en-US" sz="1600" dirty="0"/>
-              <a:t>new </a:t>
-            </a:r>
-            <a:r>
-              <a:rPr lang="en-US" sz="1600" dirty="0" err="1"/>
-              <a:t>IPEndpoint</a:t>
-            </a:r>
-            <a:r>
-              <a:rPr lang="en-US" sz="1600" dirty="0"/>
-              <a:t>(IPAddress.Any,37120)</a:t>
-            </a:r>
-          </a:p>
-          <a:p>
-            <a:endParaRPr lang="en-US" sz="2400" dirty="0"/>
-          </a:p>
-          <a:p>
-            <a:r>
-              <a:rPr lang="en-US" sz="2400" dirty="0"/>
-              <a:t>Developers don’t interact with Transports layer.</a:t>
-            </a:r>
-            <a:endParaRPr lang="en-US" sz="2000" dirty="0"/>
-          </a:p>
-        </p:txBody>
-      </p:sp>
-      <mc:AlternateContent xmlns:mc="http://schemas.openxmlformats.org/markup-compatibility/2006" xmlns:p14="http://schemas.microsoft.com/office/powerpoint/2010/main">
-        <mc:Choice Requires="p14">
+      <mc:AlternateContent xmlns:mc="http://schemas.openxmlformats.org/markup-compatibility/2006">
+        <mc:Choice xmlns:p14="http://schemas.microsoft.com/office/powerpoint/2010/main" Requires="p14">
           <p:contentPart p14:bwMode="auto" r:id="rId4">
             <p14:nvContentPartPr>
               <p14:cNvPr id="16" name="Ink 15">
@@ -15544,12 +15544,12 @@
               <p14:nvPr/>
             </p14:nvContentPartPr>
             <p14:xfrm>
-              <a:off x="7894068" y="2881837"/>
+              <a:off x="8082439" y="2671630"/>
               <a:ext cx="1032840" cy="57600"/>
             </p14:xfrm>
           </p:contentPart>
         </mc:Choice>
-        <mc:Fallback xmlns="">
+        <mc:Fallback>
           <p:pic>
             <p:nvPicPr>
               <p:cNvPr id="16" name="Ink 15">
@@ -15570,7 +15570,7 @@
             </p:blipFill>
             <p:spPr>
               <a:xfrm>
-                <a:off x="7840068" y="2773837"/>
+                <a:off x="8028439" y="2563630"/>
                 <a:ext cx="1140480" cy="273240"/>
               </a:xfrm>
               <a:prstGeom prst="rect">
